--- a/course/lectures/act-2-delegation-and-control/04-failure-aware-engineering/2-4-Failure-Aware-Engineering.pptx
+++ b/course/lectures/act-2-delegation-and-control/04-failure-aware-engineering/2-4-Failure-Aware-Engineering.pptx
@@ -18,6 +18,14 @@
     <p:sldId id="263" r:id="rId14"/>
     <p:sldId id="264" r:id="rId15"/>
     <p:sldId id="265" r:id="rId16"/>
+    <p:sldId id="266" r:id="rId17"/>
+    <p:sldId id="267" r:id="rId18"/>
+    <p:sldId id="268" r:id="rId19"/>
+    <p:sldId id="269" r:id="rId20"/>
+    <p:sldId id="270" r:id="rId21"/>
+    <p:sldId id="271" r:id="rId22"/>
+    <p:sldId id="272" r:id="rId23"/>
+    <p:sldId id="273" r:id="rId24"/>
   </p:sldIdLst>
   <p:sldSz cx="9144000" cy="6858000" type="screen4x3"/>
   <p:notesSz cx="6858000" cy="9144000"/>
@@ -620,6 +628,641 @@
           <a:p>
             <a:r>
               <a:t>- ASK the footer question instead. It is genuinely difficult.</a:t>
+            </a:r>
+          </a:p>
+        </p:txBody>
+      </p:sp>
+      <p:sp>
+        <p:nvSpPr>
+          <p:cNvPr id="4" name="Slide Number Placeholder 3"/>
+          <p:cNvSpPr>
+            <a:spLocks noGrp="1"/>
+          </p:cNvSpPr>
+          <p:nvPr>
+            <p:ph type="sldNum" idx="5" sz="quarter"/>
+          </p:nvPr>
+        </p:nvSpPr>
+        <p:spPr/>
+      </p:sp>
+    </p:spTree>
+  </p:cSld>
+  <p:clrMapOvr>
+    <a:masterClrMapping/>
+  </p:clrMapOvr>
+</p:notes>
+</file>
+
+<file path=ppt/notesSlides/notesSlide11.xml><?xml version="1.0" encoding="utf-8"?>
+<p:notes xmlns:a="http://schemas.openxmlformats.org/drawingml/2006/main" xmlns:p="http://schemas.openxmlformats.org/presentationml/2006/main" xmlns:r="http://schemas.openxmlformats.org/officeDocument/2006/relationships">
+  <p:cSld>
+    <p:spTree>
+      <p:nvGrpSpPr>
+        <p:cNvPr id="1" name=""/>
+        <p:cNvGrpSpPr/>
+        <p:nvPr/>
+      </p:nvGrpSpPr>
+      <p:grpSpPr>
+        <a:xfrm>
+          <a:off x="0" y="0"/>
+          <a:ext cx="0" cy="0"/>
+          <a:chOff x="0" y="0"/>
+          <a:chExt cx="0" cy="0"/>
+        </a:xfrm>
+      </p:grpSpPr>
+      <p:sp>
+        <p:nvSpPr>
+          <p:cNvPr id="2" name="Slide Image Placeholder 1"/>
+          <p:cNvSpPr>
+            <a:spLocks noGrp="1"/>
+          </p:cNvSpPr>
+          <p:nvPr>
+            <p:ph type="sldImg" idx="2"/>
+          </p:nvPr>
+        </p:nvSpPr>
+        <p:spPr/>
+      </p:sp>
+      <p:sp>
+        <p:nvSpPr>
+          <p:cNvPr id="3" name="Notes Placeholder 2"/>
+          <p:cNvSpPr>
+            <a:spLocks noGrp="1"/>
+          </p:cNvSpPr>
+          <p:nvPr>
+            <p:ph type="body" idx="3" sz="quarter"/>
+          </p:nvPr>
+        </p:nvSpPr>
+        <p:spPr/>
+        <p:txBody>
+          <a:bodyPr/>
+          <a:lstStyle/>
+          <a:p>
+            <a:r>
+              <a:t>TIMING: &lt;1 minute</a:t>
+            </a:r>
+          </a:p>
+          <a:p>
+            <a:r>
+              <a:t>- Transition: the lecture now asks what theory explains what we just saw.</a:t>
+            </a:r>
+          </a:p>
+          <a:p>
+            <a:r>
+              <a:t>- Four causal models follow; each will be tested against the story.</a:t>
+            </a:r>
+          </a:p>
+        </p:txBody>
+      </p:sp>
+      <p:sp>
+        <p:nvSpPr>
+          <p:cNvPr id="4" name="Slide Number Placeholder 3"/>
+          <p:cNvSpPr>
+            <a:spLocks noGrp="1"/>
+          </p:cNvSpPr>
+          <p:nvPr>
+            <p:ph type="sldNum" idx="5" sz="quarter"/>
+          </p:nvPr>
+        </p:nvSpPr>
+        <p:spPr/>
+      </p:sp>
+    </p:spTree>
+  </p:cSld>
+  <p:clrMapOvr>
+    <a:masterClrMapping/>
+  </p:clrMapOvr>
+</p:notes>
+</file>
+
+<file path=ppt/notesSlides/notesSlide12.xml><?xml version="1.0" encoding="utf-8"?>
+<p:notes xmlns:a="http://schemas.openxmlformats.org/drawingml/2006/main" xmlns:p="http://schemas.openxmlformats.org/presentationml/2006/main" xmlns:r="http://schemas.openxmlformats.org/officeDocument/2006/relationships">
+  <p:cSld>
+    <p:spTree>
+      <p:nvGrpSpPr>
+        <p:cNvPr id="1" name=""/>
+        <p:cNvGrpSpPr/>
+        <p:nvPr/>
+      </p:nvGrpSpPr>
+      <p:grpSpPr>
+        <a:xfrm>
+          <a:off x="0" y="0"/>
+          <a:ext cx="0" cy="0"/>
+          <a:chOff x="0" y="0"/>
+          <a:chExt cx="0" cy="0"/>
+        </a:xfrm>
+      </p:grpSpPr>
+      <p:sp>
+        <p:nvSpPr>
+          <p:cNvPr id="2" name="Slide Image Placeholder 1"/>
+          <p:cNvSpPr>
+            <a:spLocks noGrp="1"/>
+          </p:cNvSpPr>
+          <p:nvPr>
+            <p:ph type="sldImg" idx="2"/>
+          </p:nvPr>
+        </p:nvSpPr>
+        <p:spPr/>
+      </p:sp>
+      <p:sp>
+        <p:nvSpPr>
+          <p:cNvPr id="3" name="Notes Placeholder 2"/>
+          <p:cNvSpPr>
+            <a:spLocks noGrp="1"/>
+          </p:cNvSpPr>
+          <p:nvPr>
+            <p:ph type="body" idx="3" sz="quarter"/>
+          </p:nvPr>
+        </p:nvSpPr>
+        <p:spPr/>
+        <p:txBody>
+          <a:bodyPr/>
+          <a:lstStyle/>
+          <a:p>
+            <a:r>
+              <a:t>TIMING: 2 minutes</a:t>
+            </a:r>
+          </a:p>
+          <a:p>
+            <a:r>
+              <a:t>- Put student answers on screen, verbatim, as they come.</a:t>
+            </a:r>
+          </a:p>
+          <a:p>
+            <a:r>
+              <a:t>- Keep the list visible; the next slides test candidate causal models against it.</a:t>
+            </a:r>
+          </a:p>
+        </p:txBody>
+      </p:sp>
+      <p:sp>
+        <p:nvSpPr>
+          <p:cNvPr id="4" name="Slide Number Placeholder 3"/>
+          <p:cNvSpPr>
+            <a:spLocks noGrp="1"/>
+          </p:cNvSpPr>
+          <p:nvPr>
+            <p:ph type="sldNum" idx="5" sz="quarter"/>
+          </p:nvPr>
+        </p:nvSpPr>
+        <p:spPr/>
+      </p:sp>
+    </p:spTree>
+  </p:cSld>
+  <p:clrMapOvr>
+    <a:masterClrMapping/>
+  </p:clrMapOvr>
+</p:notes>
+</file>
+
+<file path=ppt/notesSlides/notesSlide13.xml><?xml version="1.0" encoding="utf-8"?>
+<p:notes xmlns:a="http://schemas.openxmlformats.org/drawingml/2006/main" xmlns:p="http://schemas.openxmlformats.org/presentationml/2006/main" xmlns:r="http://schemas.openxmlformats.org/officeDocument/2006/relationships">
+  <p:cSld>
+    <p:spTree>
+      <p:nvGrpSpPr>
+        <p:cNvPr id="1" name=""/>
+        <p:cNvGrpSpPr/>
+        <p:nvPr/>
+      </p:nvGrpSpPr>
+      <p:grpSpPr>
+        <a:xfrm>
+          <a:off x="0" y="0"/>
+          <a:ext cx="0" cy="0"/>
+          <a:chOff x="0" y="0"/>
+          <a:chExt cx="0" cy="0"/>
+        </a:xfrm>
+      </p:grpSpPr>
+      <p:sp>
+        <p:nvSpPr>
+          <p:cNvPr id="2" name="Slide Image Placeholder 1"/>
+          <p:cNvSpPr>
+            <a:spLocks noGrp="1"/>
+          </p:cNvSpPr>
+          <p:nvPr>
+            <p:ph type="sldImg" idx="2"/>
+          </p:nvPr>
+        </p:nvSpPr>
+        <p:spPr/>
+      </p:sp>
+      <p:sp>
+        <p:nvSpPr>
+          <p:cNvPr id="3" name="Notes Placeholder 2"/>
+          <p:cNvSpPr>
+            <a:spLocks noGrp="1"/>
+          </p:cNvSpPr>
+          <p:nvPr>
+            <p:ph type="body" idx="3" sz="quarter"/>
+          </p:nvPr>
+        </p:nvSpPr>
+        <p:spPr/>
+        <p:txBody>
+          <a:bodyPr/>
+          <a:lstStyle/>
+          <a:p>
+            <a:r>
+              <a:t>TIMING: 1-2 minutes</a:t>
+            </a:r>
+          </a:p>
+          <a:p>
+            <a:r>
+              <a:t>- Test it against the story: objections, escalation, authorization, delegation to IAV, year-after-year certification. One individual does not account for that.</a:t>
+            </a:r>
+          </a:p>
+        </p:txBody>
+      </p:sp>
+      <p:sp>
+        <p:nvSpPr>
+          <p:cNvPr id="4" name="Slide Number Placeholder 3"/>
+          <p:cNvSpPr>
+            <a:spLocks noGrp="1"/>
+          </p:cNvSpPr>
+          <p:nvPr>
+            <p:ph type="sldNum" idx="5" sz="quarter"/>
+          </p:nvPr>
+        </p:nvSpPr>
+        <p:spPr/>
+      </p:sp>
+    </p:spTree>
+  </p:cSld>
+  <p:clrMapOvr>
+    <a:masterClrMapping/>
+  </p:clrMapOvr>
+</p:notes>
+</file>
+
+<file path=ppt/notesSlides/notesSlide14.xml><?xml version="1.0" encoding="utf-8"?>
+<p:notes xmlns:a="http://schemas.openxmlformats.org/drawingml/2006/main" xmlns:p="http://schemas.openxmlformats.org/presentationml/2006/main" xmlns:r="http://schemas.openxmlformats.org/officeDocument/2006/relationships">
+  <p:cSld>
+    <p:spTree>
+      <p:nvGrpSpPr>
+        <p:cNvPr id="1" name=""/>
+        <p:cNvGrpSpPr/>
+        <p:nvPr/>
+      </p:nvGrpSpPr>
+      <p:grpSpPr>
+        <a:xfrm>
+          <a:off x="0" y="0"/>
+          <a:ext cx="0" cy="0"/>
+          <a:chOff x="0" y="0"/>
+          <a:chExt cx="0" cy="0"/>
+        </a:xfrm>
+      </p:grpSpPr>
+      <p:sp>
+        <p:nvSpPr>
+          <p:cNvPr id="2" name="Slide Image Placeholder 1"/>
+          <p:cNvSpPr>
+            <a:spLocks noGrp="1"/>
+          </p:cNvSpPr>
+          <p:nvPr>
+            <p:ph type="sldImg" idx="2"/>
+          </p:nvPr>
+        </p:nvSpPr>
+        <p:spPr/>
+      </p:sp>
+      <p:sp>
+        <p:nvSpPr>
+          <p:cNvPr id="3" name="Notes Placeholder 2"/>
+          <p:cNvSpPr>
+            <a:spLocks noGrp="1"/>
+          </p:cNvSpPr>
+          <p:nvPr>
+            <p:ph type="body" idx="3" sz="quarter"/>
+          </p:nvPr>
+        </p:nvSpPr>
+        <p:spPr/>
+        <p:txBody>
+          <a:bodyPr/>
+          <a:lstStyle/>
+          <a:p>
+            <a:r>
+              <a:t>TIMING: 1-2 minutes</a:t>
+            </a:r>
+          </a:p>
+          <a:p>
+            <a:r>
+              <a:t>- Layered defenses, each imperfect; the accident traverses aligned holes.</a:t>
+            </a:r>
+          </a:p>
+          <a:p>
+            <a:r>
+              <a:t>- Test it against the story: which defenses existed, and where were the holes? The intervention unit becomes the defenses, not the individual.</a:t>
+            </a:r>
+          </a:p>
+        </p:txBody>
+      </p:sp>
+      <p:sp>
+        <p:nvSpPr>
+          <p:cNvPr id="4" name="Slide Number Placeholder 3"/>
+          <p:cNvSpPr>
+            <a:spLocks noGrp="1"/>
+          </p:cNvSpPr>
+          <p:nvPr>
+            <p:ph type="sldNum" idx="5" sz="quarter"/>
+          </p:nvPr>
+        </p:nvSpPr>
+        <p:spPr/>
+      </p:sp>
+    </p:spTree>
+  </p:cSld>
+  <p:clrMapOvr>
+    <a:masterClrMapping/>
+  </p:clrMapOvr>
+</p:notes>
+</file>
+
+<file path=ppt/notesSlides/notesSlide15.xml><?xml version="1.0" encoding="utf-8"?>
+<p:notes xmlns:a="http://schemas.openxmlformats.org/drawingml/2006/main" xmlns:p="http://schemas.openxmlformats.org/presentationml/2006/main" xmlns:r="http://schemas.openxmlformats.org/officeDocument/2006/relationships">
+  <p:cSld>
+    <p:spTree>
+      <p:nvGrpSpPr>
+        <p:cNvPr id="1" name=""/>
+        <p:cNvGrpSpPr/>
+        <p:nvPr/>
+      </p:nvGrpSpPr>
+      <p:grpSpPr>
+        <a:xfrm>
+          <a:off x="0" y="0"/>
+          <a:ext cx="0" cy="0"/>
+          <a:chOff x="0" y="0"/>
+          <a:chExt cx="0" cy="0"/>
+        </a:xfrm>
+      </p:grpSpPr>
+      <p:sp>
+        <p:nvSpPr>
+          <p:cNvPr id="2" name="Slide Image Placeholder 1"/>
+          <p:cNvSpPr>
+            <a:spLocks noGrp="1"/>
+          </p:cNvSpPr>
+          <p:nvPr>
+            <p:ph type="sldImg" idx="2"/>
+          </p:nvPr>
+        </p:nvSpPr>
+        <p:spPr/>
+      </p:sp>
+      <p:sp>
+        <p:nvSpPr>
+          <p:cNvPr id="3" name="Notes Placeholder 2"/>
+          <p:cNvSpPr>
+            <a:spLocks noGrp="1"/>
+          </p:cNvSpPr>
+          <p:nvPr>
+            <p:ph type="body" idx="3" sz="quarter"/>
+          </p:nvPr>
+        </p:nvSpPr>
+        <p:spPr/>
+        <p:txBody>
+          <a:bodyPr/>
+          <a:lstStyle/>
+          <a:p>
+            <a:r>
+              <a:t>TIMING: 1-2 minutes</a:t>
+            </a:r>
+          </a:p>
+          <a:p>
+            <a:r>
+              <a:t>- The causal story moves up a level: the conditions that shaped behavior, not the behavior alone.</a:t>
+            </a:r>
+          </a:p>
+          <a:p>
+            <a:r>
+              <a:t>- Test it against the story: what conditions sustained the same result model year after model year?</a:t>
+            </a:r>
+          </a:p>
+        </p:txBody>
+      </p:sp>
+      <p:sp>
+        <p:nvSpPr>
+          <p:cNvPr id="4" name="Slide Number Placeholder 3"/>
+          <p:cNvSpPr>
+            <a:spLocks noGrp="1"/>
+          </p:cNvSpPr>
+          <p:nvPr>
+            <p:ph type="sldNum" idx="5" sz="quarter"/>
+          </p:nvPr>
+        </p:nvSpPr>
+        <p:spPr/>
+      </p:sp>
+    </p:spTree>
+  </p:cSld>
+  <p:clrMapOvr>
+    <a:masterClrMapping/>
+  </p:clrMapOvr>
+</p:notes>
+</file>
+
+<file path=ppt/notesSlides/notesSlide16.xml><?xml version="1.0" encoding="utf-8"?>
+<p:notes xmlns:a="http://schemas.openxmlformats.org/drawingml/2006/main" xmlns:p="http://schemas.openxmlformats.org/presentationml/2006/main" xmlns:r="http://schemas.openxmlformats.org/officeDocument/2006/relationships">
+  <p:cSld>
+    <p:spTree>
+      <p:nvGrpSpPr>
+        <p:cNvPr id="1" name=""/>
+        <p:cNvGrpSpPr/>
+        <p:nvPr/>
+      </p:nvGrpSpPr>
+      <p:grpSpPr>
+        <a:xfrm>
+          <a:off x="0" y="0"/>
+          <a:ext cx="0" cy="0"/>
+          <a:chOff x="0" y="0"/>
+          <a:chExt cx="0" cy="0"/>
+        </a:xfrm>
+      </p:grpSpPr>
+      <p:sp>
+        <p:nvSpPr>
+          <p:cNvPr id="2" name="Slide Image Placeholder 1"/>
+          <p:cNvSpPr>
+            <a:spLocks noGrp="1"/>
+          </p:cNvSpPr>
+          <p:nvPr>
+            <p:ph type="sldImg" idx="2"/>
+          </p:nvPr>
+        </p:nvSpPr>
+        <p:spPr/>
+      </p:sp>
+      <p:sp>
+        <p:nvSpPr>
+          <p:cNvPr id="3" name="Notes Placeholder 2"/>
+          <p:cNvSpPr>
+            <a:spLocks noGrp="1"/>
+          </p:cNvSpPr>
+          <p:nvPr>
+            <p:ph type="body" idx="3" sz="quarter"/>
+          </p:nvPr>
+        </p:nvSpPr>
+        <p:spPr/>
+        <p:txBody>
+          <a:bodyPr/>
+          <a:lstStyle/>
+          <a:p>
+            <a:r>
+              <a:t>TIMING: 2 minutes</a:t>
+            </a:r>
+          </a:p>
+          <a:p>
+            <a:r>
+              <a:t>- [Author: the old slide-12 STAMP narration lands here.]</a:t>
+            </a:r>
+          </a:p>
+          <a:p>
+            <a:r>
+              <a:t>- A systems-theoretic account: include every level of control and feedback, from regulators down to the operating process.</a:t>
+            </a:r>
+          </a:p>
+        </p:txBody>
+      </p:sp>
+      <p:sp>
+        <p:nvSpPr>
+          <p:cNvPr id="4" name="Slide Number Placeholder 3"/>
+          <p:cNvSpPr>
+            <a:spLocks noGrp="1"/>
+          </p:cNvSpPr>
+          <p:nvPr>
+            <p:ph type="sldNum" idx="5" sz="quarter"/>
+          </p:nvPr>
+        </p:nvSpPr>
+        <p:spPr/>
+      </p:sp>
+    </p:spTree>
+  </p:cSld>
+  <p:clrMapOvr>
+    <a:masterClrMapping/>
+  </p:clrMapOvr>
+</p:notes>
+</file>
+
+<file path=ppt/notesSlides/notesSlide17.xml><?xml version="1.0" encoding="utf-8"?>
+<p:notes xmlns:a="http://schemas.openxmlformats.org/drawingml/2006/main" xmlns:p="http://schemas.openxmlformats.org/presentationml/2006/main" xmlns:r="http://schemas.openxmlformats.org/officeDocument/2006/relationships">
+  <p:cSld>
+    <p:spTree>
+      <p:nvGrpSpPr>
+        <p:cNvPr id="1" name=""/>
+        <p:cNvGrpSpPr/>
+        <p:nvPr/>
+      </p:nvGrpSpPr>
+      <p:grpSpPr>
+        <a:xfrm>
+          <a:off x="0" y="0"/>
+          <a:ext cx="0" cy="0"/>
+          <a:chOff x="0" y="0"/>
+          <a:chExt cx="0" cy="0"/>
+        </a:xfrm>
+      </p:grpSpPr>
+      <p:sp>
+        <p:nvSpPr>
+          <p:cNvPr id="2" name="Slide Image Placeholder 1"/>
+          <p:cNvSpPr>
+            <a:spLocks noGrp="1"/>
+          </p:cNvSpPr>
+          <p:nvPr>
+            <p:ph type="sldImg" idx="2"/>
+          </p:nvPr>
+        </p:nvSpPr>
+        <p:spPr/>
+      </p:sp>
+      <p:sp>
+        <p:nvSpPr>
+          <p:cNvPr id="3" name="Notes Placeholder 2"/>
+          <p:cNvSpPr>
+            <a:spLocks noGrp="1"/>
+          </p:cNvSpPr>
+          <p:nvPr>
+            <p:ph type="body" idx="3" sz="quarter"/>
+          </p:nvPr>
+        </p:nvSpPr>
+        <p:spPr/>
+        <p:txBody>
+          <a:bodyPr/>
+          <a:lstStyle/>
+          <a:p>
+            <a:r>
+              <a:t>TIMING: 1-2 minutes</a:t>
+            </a:r>
+          </a:p>
+          <a:p>
+            <a:r>
+              <a:t>- Each model includes more of the causal story than the last.</a:t>
+            </a:r>
+          </a:p>
+          <a:p>
+            <a:r>
+              <a:t>- But a more complete account is not automatically a more usable one: as the account widens, more of it lies outside what any one engineer or team can change.</a:t>
+            </a:r>
+          </a:p>
+        </p:txBody>
+      </p:sp>
+      <p:sp>
+        <p:nvSpPr>
+          <p:cNvPr id="4" name="Slide Number Placeholder 3"/>
+          <p:cNvSpPr>
+            <a:spLocks noGrp="1"/>
+          </p:cNvSpPr>
+          <p:nvPr>
+            <p:ph type="sldNum" idx="5" sz="quarter"/>
+          </p:nvPr>
+        </p:nvSpPr>
+        <p:spPr/>
+      </p:sp>
+    </p:spTree>
+  </p:cSld>
+  <p:clrMapOvr>
+    <a:masterClrMapping/>
+  </p:clrMapOvr>
+</p:notes>
+</file>
+
+<file path=ppt/notesSlides/notesSlide18.xml><?xml version="1.0" encoding="utf-8"?>
+<p:notes xmlns:a="http://schemas.openxmlformats.org/drawingml/2006/main" xmlns:p="http://schemas.openxmlformats.org/presentationml/2006/main" xmlns:r="http://schemas.openxmlformats.org/officeDocument/2006/relationships">
+  <p:cSld>
+    <p:spTree>
+      <p:nvGrpSpPr>
+        <p:cNvPr id="1" name=""/>
+        <p:cNvGrpSpPr/>
+        <p:nvPr/>
+      </p:nvGrpSpPr>
+      <p:grpSpPr>
+        <a:xfrm>
+          <a:off x="0" y="0"/>
+          <a:ext cx="0" cy="0"/>
+          <a:chOff x="0" y="0"/>
+          <a:chExt cx="0" cy="0"/>
+        </a:xfrm>
+      </p:grpSpPr>
+      <p:sp>
+        <p:nvSpPr>
+          <p:cNvPr id="2" name="Slide Image Placeholder 1"/>
+          <p:cNvSpPr>
+            <a:spLocks noGrp="1"/>
+          </p:cNvSpPr>
+          <p:nvPr>
+            <p:ph type="sldImg" idx="2"/>
+          </p:nvPr>
+        </p:nvSpPr>
+        <p:spPr/>
+      </p:sp>
+      <p:sp>
+        <p:nvSpPr>
+          <p:cNvPr id="3" name="Notes Placeholder 2"/>
+          <p:cNvSpPr>
+            <a:spLocks noGrp="1"/>
+          </p:cNvSpPr>
+          <p:nvPr>
+            <p:ph type="body" idx="3" sz="quarter"/>
+          </p:nvPr>
+        </p:nvSpPr>
+        <p:spPr/>
+        <p:txBody>
+          <a:bodyPr/>
+          <a:lstStyle/>
+          <a:p>
+            <a:r>
+              <a:t>TIMING: 2 minutes</a:t>
+            </a:r>
+          </a:p>
+          <a:p>
+            <a:r>
+              <a:t>- Now the line has concrete meaning rather than being abstract modeling doctrine.</a:t>
+            </a:r>
+          </a:p>
+          <a:p>
+            <a:r>
+              <a:t>- Connect back to the student answers from the opening slide of this section: each answer was implicitly one of these models.</a:t>
             </a:r>
           </a:p>
         </p:txBody>
@@ -4803,7 +5446,7 @@
           <a:bodyPr/>
           <a:lstStyle/>
           <a:p>
-            <a:fld id="{816E3789-B5D4-4D26-A238-A73BD05DD330}" type="slidenum">
+            <a:fld id="{F93E8548-BE24-4B73-8C45-416AEFC32254}" type="slidenum">
               <a:rPr lang="en-US" smtClean="0"/>
               <a:t>1</a:t>
             </a:fld>
@@ -4998,7 +5641,7 @@
           <a:bodyPr/>
           <a:lstStyle/>
           <a:p>
-            <a:fld id="{D272814A-38F1-4019-9F03-5F3DC73EAF22}" type="slidenum">
+            <a:fld id="{30A64256-7292-44E1-BB62-C6E0605EA3D2}" type="slidenum">
               <a:rPr lang="en-US" smtClean="0"/>
               <a:t>10</a:t>
             </a:fld>
@@ -5472,6 +6115,3277 @@
                 </a:solidFill>
               </a:rPr>
               <a:t>Where does responsibility lie in a failure produced and sustained by many people and mechanisms?</a:t>
+            </a:r>
+          </a:p>
+        </p:txBody>
+      </p:sp>
+    </p:spTree>
+  </p:cSld>
+  <p:clrMapOvr>
+    <a:masterClrMapping/>
+  </p:clrMapOvr>
+</p:sld>
+</file>
+
+<file path=ppt/slides/slide11.xml><?xml version="1.0" encoding="utf-8"?>
+<p:sld xmlns:a="http://schemas.openxmlformats.org/drawingml/2006/main" xmlns:p="http://schemas.openxmlformats.org/presentationml/2006/main" xmlns:r="http://schemas.openxmlformats.org/officeDocument/2006/relationships">
+  <p:cSld>
+    <p:spTree>
+      <p:nvGrpSpPr>
+        <p:cNvPr id="1" name=""/>
+        <p:cNvGrpSpPr/>
+        <p:nvPr/>
+      </p:nvGrpSpPr>
+      <p:grpSpPr/>
+      <p:sp>
+        <p:nvSpPr>
+          <p:cNvPr id="2" name="Title 1"/>
+          <p:cNvSpPr>
+            <a:spLocks noGrp="1"/>
+          </p:cNvSpPr>
+          <p:nvPr>
+            <p:ph type="title"/>
+          </p:nvPr>
+        </p:nvSpPr>
+        <p:spPr>
+          <a:xfrm>
+            <a:off x="685800" y="1700784"/>
+            <a:ext cx="7772400" cy="1005840"/>
+          </a:xfrm>
+        </p:spPr>
+        <p:txBody>
+          <a:bodyPr/>
+          <a:lstStyle/>
+          <a:p>
+            <a:pPr algn="ctr"/>
+            <a:r>
+              <a:rPr sz="4000" b="0" i="0">
+                <a:solidFill>
+                  <a:srgbClr val="000000"/>
+                </a:solidFill>
+              </a:rPr>
+              <a:t>What theory explains it?</a:t>
+            </a:r>
+          </a:p>
+        </p:txBody>
+      </p:sp>
+      <p:sp>
+        <p:nvSpPr>
+          <p:cNvPr id="900" name="Slide Number Placeholder 900"/>
+          <p:cNvSpPr>
+            <a:spLocks noGrp="1"/>
+          </p:cNvSpPr>
+          <p:nvPr>
+            <p:ph type="sldNum" sz="quarter" idx="4"/>
+          </p:nvPr>
+        </p:nvSpPr>
+        <p:spPr/>
+        <p:txBody>
+          <a:bodyPr/>
+          <a:lstStyle/>
+          <a:p>
+            <a:fld id="{2154B390-ECC6-49D6-9ED6-BE29D357C40A}" type="slidenum">
+              <a:rPr lang="en-US" smtClean="0"/>
+              <a:t>11</a:t>
+            </a:fld>
+            <a:endParaRPr lang="en-US"/>
+          </a:p>
+        </p:txBody>
+      </p:sp>
+      <p:sp>
+        <p:nvSpPr>
+          <p:cNvPr id="901" name="SectionLabel"/>
+          <p:cNvSpPr txBox="1"/>
+          <p:nvPr/>
+        </p:nvSpPr>
+        <p:spPr>
+          <a:xfrm>
+            <a:off x="685800" y="1243584"/>
+            <a:ext cx="7772400" cy="365760"/>
+          </a:xfrm>
+          <a:prstGeom prst="rect">
+            <a:avLst/>
+          </a:prstGeom>
+          <a:noFill/>
+        </p:spPr>
+        <p:txBody>
+          <a:bodyPr wrap="square" anchor="ctr" lIns="27432" rIns="27432" tIns="22860" bIns="22860">
+            <a:spAutoFit/>
+          </a:bodyPr>
+          <a:lstStyle/>
+          <a:p>
+            <a:pPr algn="ctr"/>
+            <a:r>
+              <a:rPr sz="2000" b="1" i="0">
+                <a:solidFill>
+                  <a:srgbClr val="8E6F3E"/>
+                </a:solidFill>
+              </a:rPr>
+              <a:t>SECTION 1</a:t>
+            </a:r>
+          </a:p>
+        </p:txBody>
+      </p:sp>
+      <p:sp>
+        <p:nvSpPr>
+          <p:cNvPr id="902" name="Question"/>
+          <p:cNvSpPr txBox="1"/>
+          <p:nvPr/>
+        </p:nvSpPr>
+        <p:spPr>
+          <a:xfrm>
+            <a:off x="685800" y="2816352"/>
+            <a:ext cx="7772400" cy="475488"/>
+          </a:xfrm>
+          <a:prstGeom prst="rect">
+            <a:avLst/>
+          </a:prstGeom>
+          <a:noFill/>
+        </p:spPr>
+        <p:txBody>
+          <a:bodyPr wrap="square" anchor="ctr" lIns="27432" rIns="27432" tIns="22860" bIns="22860">
+            <a:spAutoFit/>
+          </a:bodyPr>
+          <a:lstStyle/>
+          <a:p>
+            <a:pPr algn="ctr"/>
+            <a:r>
+              <a:rPr sz="2400" b="0" i="0">
+                <a:solidFill>
+                  <a:srgbClr val="5C4826"/>
+                </a:solidFill>
+              </a:rPr>
+              <a:t>And what does each theory let you change?</a:t>
+            </a:r>
+          </a:p>
+        </p:txBody>
+      </p:sp>
+      <p:sp>
+        <p:nvSpPr>
+          <p:cNvPr id="903" name="Rule"/>
+          <p:cNvSpPr/>
+          <p:nvPr/>
+        </p:nvSpPr>
+        <p:spPr>
+          <a:xfrm>
+            <a:off x="3429000" y="3602736"/>
+            <a:ext cx="2286000" cy="51206"/>
+          </a:xfrm>
+          <a:prstGeom prst="rect">
+            <a:avLst/>
+          </a:prstGeom>
+          <a:solidFill>
+            <a:srgbClr val="8E6F3E"/>
+          </a:solidFill>
+          <a:ln>
+            <a:noFill/>
+          </a:ln>
+          <a:effectLst/>
+        </p:spPr>
+        <p:style>
+          <a:lnRef idx="1">
+            <a:schemeClr val="accent1"/>
+          </a:lnRef>
+          <a:fillRef idx="3">
+            <a:schemeClr val="accent1"/>
+          </a:fillRef>
+          <a:effectRef idx="2">
+            <a:schemeClr val="accent1"/>
+          </a:effectRef>
+          <a:fontRef idx="minor">
+            <a:schemeClr val="lt1"/>
+          </a:fontRef>
+        </p:style>
+        <p:txBody>
+          <a:bodyPr rtlCol="0" anchor="ctr" wrap="square" lIns="27432" rIns="27432" tIns="22860" bIns="22860"/>
+          <a:lstStyle/>
+          <a:p>
+            <a:pPr algn="ctr"/>
+            <a:r>
+              <a:rPr sz="2000" b="0" i="0">
+                <a:solidFill>
+                  <a:srgbClr val="5C4826"/>
+                </a:solidFill>
+              </a:rPr>
+              <a:t/>
+            </a:r>
+          </a:p>
+        </p:txBody>
+      </p:sp>
+    </p:spTree>
+  </p:cSld>
+  <p:clrMapOvr>
+    <a:masterClrMapping/>
+  </p:clrMapOvr>
+</p:sld>
+</file>
+
+<file path=ppt/slides/slide12.xml><?xml version="1.0" encoding="utf-8"?>
+<p:sld xmlns:a="http://schemas.openxmlformats.org/drawingml/2006/main" xmlns:p="http://schemas.openxmlformats.org/presentationml/2006/main" xmlns:r="http://schemas.openxmlformats.org/officeDocument/2006/relationships">
+  <p:cSld>
+    <p:spTree>
+      <p:nvGrpSpPr>
+        <p:cNvPr id="1" name=""/>
+        <p:cNvGrpSpPr/>
+        <p:nvPr/>
+      </p:nvGrpSpPr>
+      <p:grpSpPr/>
+      <p:sp>
+        <p:nvSpPr>
+          <p:cNvPr id="3" name="Title 2"/>
+          <p:cNvSpPr>
+            <a:spLocks noGrp="1"/>
+          </p:cNvSpPr>
+          <p:nvPr>
+            <p:ph type="title"/>
+          </p:nvPr>
+        </p:nvSpPr>
+        <p:spPr/>
+        <p:txBody>
+          <a:bodyPr/>
+          <a:lstStyle/>
+          <a:p>
+            <a:r>
+              <a:rPr sz="2400" b="0" i="0">
+                <a:solidFill>
+                  <a:srgbClr val="000000"/>
+                </a:solidFill>
+              </a:rPr>
+              <a:t>What caused the Volkswagen failure?</a:t>
+            </a:r>
+          </a:p>
+        </p:txBody>
+      </p:sp>
+      <p:sp>
+        <p:nvSpPr>
+          <p:cNvPr id="900" name="Slide Number Placeholder 900"/>
+          <p:cNvSpPr>
+            <a:spLocks noGrp="1"/>
+          </p:cNvSpPr>
+          <p:nvPr>
+            <p:ph type="sldNum" sz="quarter" idx="4"/>
+          </p:nvPr>
+        </p:nvSpPr>
+        <p:spPr/>
+        <p:txBody>
+          <a:bodyPr/>
+          <a:lstStyle/>
+          <a:p>
+            <a:fld id="{EDA5A793-673B-41D4-9210-552A38A95064}" type="slidenum">
+              <a:rPr lang="en-US" smtClean="0"/>
+              <a:t>12</a:t>
+            </a:fld>
+            <a:endParaRPr lang="en-US"/>
+          </a:p>
+        </p:txBody>
+      </p:sp>
+      <p:sp>
+        <p:nvSpPr>
+          <p:cNvPr id="901" name="Card"/>
+          <p:cNvSpPr/>
+          <p:nvPr/>
+        </p:nvSpPr>
+        <p:spPr>
+          <a:xfrm>
+            <a:off x="914400" y="1188720"/>
+            <a:ext cx="7315200" cy="4297680"/>
+          </a:xfrm>
+          <a:prstGeom prst="rect">
+            <a:avLst/>
+          </a:prstGeom>
+          <a:solidFill>
+            <a:srgbClr val="F5F1E8"/>
+          </a:solidFill>
+          <a:ln w="12700">
+            <a:solidFill>
+              <a:srgbClr val="C9B991"/>
+            </a:solidFill>
+          </a:ln>
+          <a:effectLst/>
+        </p:spPr>
+        <p:style>
+          <a:lnRef idx="1">
+            <a:schemeClr val="accent1"/>
+          </a:lnRef>
+          <a:fillRef idx="3">
+            <a:schemeClr val="accent1"/>
+          </a:fillRef>
+          <a:effectRef idx="2">
+            <a:schemeClr val="accent1"/>
+          </a:effectRef>
+          <a:fontRef idx="minor">
+            <a:schemeClr val="lt1"/>
+          </a:fontRef>
+        </p:style>
+        <p:txBody>
+          <a:bodyPr rtlCol="0" anchor="t" wrap="square" lIns="27432" rIns="27432" tIns="22860" bIns="22860"/>
+          <a:lstStyle/>
+          <a:p>
+            <a:pPr algn="ctr"/>
+            <a:r>
+              <a:rPr sz="2000" b="1" i="0">
+                <a:solidFill>
+                  <a:srgbClr val="5C4826"/>
+                </a:solidFill>
+              </a:rPr>
+              <a:t>Your answers</a:t>
+            </a:r>
+          </a:p>
+          <a:p>
+            <a:pPr algn="ctr">
+              <a:spcBef>
+                <a:spcPts val="1000"/>
+              </a:spcBef>
+            </a:pPr>
+            <a:r>
+              <a:rPr sz="2000" b="0" i="1">
+                <a:solidFill>
+                  <a:srgbClr val="555960"/>
+                </a:solidFill>
+              </a:rPr>
+              <a:t>(collected live)</a:t>
+            </a:r>
+          </a:p>
+        </p:txBody>
+      </p:sp>
+    </p:spTree>
+  </p:cSld>
+  <p:clrMapOvr>
+    <a:masterClrMapping/>
+  </p:clrMapOvr>
+</p:sld>
+</file>
+
+<file path=ppt/slides/slide13.xml><?xml version="1.0" encoding="utf-8"?>
+<p:sld xmlns:a="http://schemas.openxmlformats.org/drawingml/2006/main" xmlns:p="http://schemas.openxmlformats.org/presentationml/2006/main" xmlns:r="http://schemas.openxmlformats.org/officeDocument/2006/relationships">
+  <p:cSld>
+    <p:spTree>
+      <p:nvGrpSpPr>
+        <p:cNvPr id="1" name=""/>
+        <p:cNvGrpSpPr/>
+        <p:nvPr/>
+      </p:nvGrpSpPr>
+      <p:grpSpPr/>
+      <p:sp>
+        <p:nvSpPr>
+          <p:cNvPr id="3" name="Title 2"/>
+          <p:cNvSpPr>
+            <a:spLocks noGrp="1"/>
+          </p:cNvSpPr>
+          <p:nvPr>
+            <p:ph type="title"/>
+          </p:nvPr>
+        </p:nvSpPr>
+        <p:spPr/>
+        <p:txBody>
+          <a:bodyPr/>
+          <a:lstStyle/>
+          <a:p>
+            <a:r>
+              <a:rPr sz="2400" b="0" i="0">
+                <a:solidFill>
+                  <a:srgbClr val="000000"/>
+                </a:solidFill>
+              </a:rPr>
+              <a:t>Human error</a:t>
+            </a:r>
+          </a:p>
+        </p:txBody>
+      </p:sp>
+      <p:sp>
+        <p:nvSpPr>
+          <p:cNvPr id="900" name="Slide Number Placeholder 900"/>
+          <p:cNvSpPr>
+            <a:spLocks noGrp="1"/>
+          </p:cNvSpPr>
+          <p:nvPr>
+            <p:ph type="sldNum" sz="quarter" idx="4"/>
+          </p:nvPr>
+        </p:nvSpPr>
+        <p:spPr/>
+        <p:txBody>
+          <a:bodyPr/>
+          <a:lstStyle/>
+          <a:p>
+            <a:fld id="{B66BA63C-C0C7-4744-A213-840C7C36C170}" type="slidenum">
+              <a:rPr lang="en-US" smtClean="0"/>
+              <a:t>13</a:t>
+            </a:fld>
+            <a:endParaRPr lang="en-US"/>
+          </a:p>
+        </p:txBody>
+      </p:sp>
+      <p:sp>
+        <p:nvSpPr>
+          <p:cNvPr id="901" name="Card"/>
+          <p:cNvSpPr/>
+          <p:nvPr/>
+        </p:nvSpPr>
+        <p:spPr>
+          <a:xfrm>
+            <a:off x="548640" y="1463040"/>
+            <a:ext cx="3749039" cy="2377440"/>
+          </a:xfrm>
+          <a:prstGeom prst="rect">
+            <a:avLst/>
+          </a:prstGeom>
+          <a:solidFill>
+            <a:srgbClr val="F5F1E8"/>
+          </a:solidFill>
+          <a:ln w="12700">
+            <a:solidFill>
+              <a:srgbClr val="C9B991"/>
+            </a:solidFill>
+          </a:ln>
+          <a:effectLst/>
+        </p:spPr>
+        <p:style>
+          <a:lnRef idx="1">
+            <a:schemeClr val="accent1"/>
+          </a:lnRef>
+          <a:fillRef idx="3">
+            <a:schemeClr val="accent1"/>
+          </a:fillRef>
+          <a:effectRef idx="2">
+            <a:schemeClr val="accent1"/>
+          </a:effectRef>
+          <a:fontRef idx="minor">
+            <a:schemeClr val="lt1"/>
+          </a:fontRef>
+        </p:style>
+        <p:txBody>
+          <a:bodyPr rtlCol="0" anchor="ctr" wrap="square" lIns="27432" rIns="27432" tIns="22860" bIns="22860"/>
+          <a:lstStyle/>
+          <a:p>
+            <a:pPr algn="ctr"/>
+            <a:r>
+              <a:rPr sz="2000" b="1" i="0">
+                <a:solidFill>
+                  <a:srgbClr val="5C4826"/>
+                </a:solidFill>
+              </a:rPr>
+              <a:t>CAUSAL MODEL</a:t>
+            </a:r>
+          </a:p>
+          <a:p>
+            <a:pPr algn="ctr">
+              <a:spcBef>
+                <a:spcPts val="1200"/>
+              </a:spcBef>
+            </a:pPr>
+            <a:r>
+              <a:rPr sz="2000" b="0" i="0">
+                <a:solidFill>
+                  <a:srgbClr val="555960"/>
+                </a:solidFill>
+              </a:rPr>
+              <a:t>An individual erred.</a:t>
+            </a:r>
+          </a:p>
+        </p:txBody>
+      </p:sp>
+      <p:cxnSp>
+        <p:nvCxnSpPr>
+          <p:cNvPr id="902" name="Connector 901"/>
+          <p:cNvCxnSpPr/>
+          <p:nvPr/>
+        </p:nvCxnSpPr>
+        <p:spPr>
+          <a:xfrm>
+            <a:off x="4389120" y="2651760"/>
+            <a:ext cx="548640" cy="0"/>
+          </a:xfrm>
+          <a:prstGeom prst="line">
+            <a:avLst/>
+          </a:prstGeom>
+          <a:ln w="28575">
+            <a:solidFill>
+              <a:srgbClr val="8E6F3E"/>
+            </a:solidFill>
+            <a:tailEnd type="triangle"/>
+          </a:ln>
+        </p:spPr>
+        <p:style>
+          <a:lnRef idx="2">
+            <a:schemeClr val="accent1"/>
+          </a:lnRef>
+          <a:fillRef idx="0">
+            <a:schemeClr val="accent1"/>
+          </a:fillRef>
+          <a:effectRef idx="1">
+            <a:schemeClr val="accent1"/>
+          </a:effectRef>
+          <a:fontRef idx="minor">
+            <a:schemeClr val="tx1"/>
+          </a:fontRef>
+        </p:style>
+      </p:cxnSp>
+      <p:sp>
+        <p:nvSpPr>
+          <p:cNvPr id="903" name="Block"/>
+          <p:cNvSpPr/>
+          <p:nvPr/>
+        </p:nvSpPr>
+        <p:spPr>
+          <a:xfrm>
+            <a:off x="5029200" y="1463040"/>
+            <a:ext cx="3566160" cy="2377440"/>
+          </a:xfrm>
+          <a:prstGeom prst="rect">
+            <a:avLst/>
+          </a:prstGeom>
+          <a:solidFill>
+            <a:srgbClr val="8E6F3E"/>
+          </a:solidFill>
+          <a:ln>
+            <a:noFill/>
+          </a:ln>
+          <a:effectLst/>
+        </p:spPr>
+        <p:style>
+          <a:lnRef idx="1">
+            <a:schemeClr val="accent1"/>
+          </a:lnRef>
+          <a:fillRef idx="3">
+            <a:schemeClr val="accent1"/>
+          </a:fillRef>
+          <a:effectRef idx="2">
+            <a:schemeClr val="accent1"/>
+          </a:effectRef>
+          <a:fontRef idx="minor">
+            <a:schemeClr val="lt1"/>
+          </a:fontRef>
+        </p:style>
+        <p:txBody>
+          <a:bodyPr rtlCol="0" anchor="ctr" wrap="square" lIns="27432" rIns="27432" tIns="22860" bIns="22860"/>
+          <a:lstStyle/>
+          <a:p>
+            <a:pPr algn="ctr"/>
+            <a:r>
+              <a:rPr sz="2000" b="1" i="0">
+                <a:solidFill>
+                  <a:srgbClr val="FFFFFF"/>
+                </a:solidFill>
+              </a:rPr>
+              <a:t>ONE INTERVENTION</a:t>
+            </a:r>
+          </a:p>
+          <a:p>
+            <a:pPr algn="ctr"/>
+            <a:r>
+              <a:rPr sz="2000" b="0" i="0">
+                <a:solidFill>
+                  <a:srgbClr val="FFFFFF"/>
+                </a:solidFill>
+              </a:rPr>
+              <a:t>change the individual</a:t>
+            </a:r>
+          </a:p>
+        </p:txBody>
+      </p:sp>
+      <p:sp>
+        <p:nvSpPr>
+          <p:cNvPr id="904" name="FooterBand"/>
+          <p:cNvSpPr/>
+          <p:nvPr/>
+        </p:nvSpPr>
+        <p:spPr>
+          <a:xfrm>
+            <a:off x="274320" y="5852159"/>
+            <a:ext cx="8595360" cy="566928"/>
+          </a:xfrm>
+          <a:prstGeom prst="rect">
+            <a:avLst/>
+          </a:prstGeom>
+          <a:solidFill>
+            <a:srgbClr val="8E6F3E"/>
+          </a:solidFill>
+          <a:ln>
+            <a:noFill/>
+          </a:ln>
+          <a:effectLst/>
+        </p:spPr>
+        <p:style>
+          <a:lnRef idx="1">
+            <a:schemeClr val="accent1"/>
+          </a:lnRef>
+          <a:fillRef idx="3">
+            <a:schemeClr val="accent1"/>
+          </a:fillRef>
+          <a:effectRef idx="2">
+            <a:schemeClr val="accent1"/>
+          </a:effectRef>
+          <a:fontRef idx="minor">
+            <a:schemeClr val="lt1"/>
+          </a:fontRef>
+        </p:style>
+        <p:txBody>
+          <a:bodyPr rtlCol="0" anchor="ctr" wrap="square" lIns="27432" rIns="27432" tIns="22860" bIns="22860"/>
+          <a:lstStyle/>
+          <a:p>
+            <a:pPr algn="ctr"/>
+            <a:r>
+              <a:rPr sz="2000" b="1" i="0">
+                <a:solidFill>
+                  <a:srgbClr val="FFFFFF"/>
+                </a:solidFill>
+              </a:rPr>
+              <a:t>Useful, but gives one intervention.</a:t>
+            </a:r>
+          </a:p>
+        </p:txBody>
+      </p:sp>
+    </p:spTree>
+  </p:cSld>
+  <p:clrMapOvr>
+    <a:masterClrMapping/>
+  </p:clrMapOvr>
+</p:sld>
+</file>
+
+<file path=ppt/slides/slide14.xml><?xml version="1.0" encoding="utf-8"?>
+<p:sld xmlns:a="http://schemas.openxmlformats.org/drawingml/2006/main" xmlns:p="http://schemas.openxmlformats.org/presentationml/2006/main" xmlns:r="http://schemas.openxmlformats.org/officeDocument/2006/relationships">
+  <p:cSld>
+    <p:spTree>
+      <p:nvGrpSpPr>
+        <p:cNvPr id="1" name=""/>
+        <p:cNvGrpSpPr/>
+        <p:nvPr/>
+      </p:nvGrpSpPr>
+      <p:grpSpPr/>
+      <p:sp>
+        <p:nvSpPr>
+          <p:cNvPr id="3" name="Title 2"/>
+          <p:cNvSpPr>
+            <a:spLocks noGrp="1"/>
+          </p:cNvSpPr>
+          <p:nvPr>
+            <p:ph type="title"/>
+          </p:nvPr>
+        </p:nvSpPr>
+        <p:spPr/>
+        <p:txBody>
+          <a:bodyPr/>
+          <a:lstStyle/>
+          <a:p>
+            <a:r>
+              <a:rPr sz="2400" b="0" i="0">
+                <a:solidFill>
+                  <a:srgbClr val="000000"/>
+                </a:solidFill>
+              </a:rPr>
+              <a:t>Swiss cheese</a:t>
+            </a:r>
+          </a:p>
+        </p:txBody>
+      </p:sp>
+      <p:sp>
+        <p:nvSpPr>
+          <p:cNvPr id="900" name="Slide Number Placeholder 900"/>
+          <p:cNvSpPr>
+            <a:spLocks noGrp="1"/>
+          </p:cNvSpPr>
+          <p:nvPr>
+            <p:ph type="sldNum" sz="quarter" idx="4"/>
+          </p:nvPr>
+        </p:nvSpPr>
+        <p:spPr/>
+        <p:txBody>
+          <a:bodyPr/>
+          <a:lstStyle/>
+          <a:p>
+            <a:fld id="{6501156A-E1E9-4402-8057-F65D8D28B12B}" type="slidenum">
+              <a:rPr lang="en-US" smtClean="0"/>
+              <a:t>14</a:t>
+            </a:fld>
+            <a:endParaRPr lang="en-US"/>
+          </a:p>
+        </p:txBody>
+      </p:sp>
+      <p:sp>
+        <p:nvSpPr>
+          <p:cNvPr id="901" name="Slab"/>
+          <p:cNvSpPr/>
+          <p:nvPr/>
+        </p:nvSpPr>
+        <p:spPr>
+          <a:xfrm>
+            <a:off x="1463040" y="1280160"/>
+            <a:ext cx="1005840" cy="3657600"/>
+          </a:xfrm>
+          <a:prstGeom prst="rect">
+            <a:avLst/>
+          </a:prstGeom>
+          <a:solidFill>
+            <a:srgbClr val="F5F1E8"/>
+          </a:solidFill>
+          <a:ln w="12700">
+            <a:solidFill>
+              <a:srgbClr val="C9B991"/>
+            </a:solidFill>
+          </a:ln>
+          <a:effectLst/>
+        </p:spPr>
+        <p:style>
+          <a:lnRef idx="1">
+            <a:schemeClr val="accent1"/>
+          </a:lnRef>
+          <a:fillRef idx="3">
+            <a:schemeClr val="accent1"/>
+          </a:fillRef>
+          <a:effectRef idx="2">
+            <a:schemeClr val="accent1"/>
+          </a:effectRef>
+          <a:fontRef idx="minor">
+            <a:schemeClr val="lt1"/>
+          </a:fontRef>
+        </p:style>
+        <p:txBody>
+          <a:bodyPr rtlCol="0" anchor="t" wrap="square" lIns="27432" rIns="27432" tIns="22860" bIns="22860"/>
+          <a:lstStyle/>
+          <a:p>
+            <a:pPr algn="ctr"/>
+            <a:r>
+              <a:rPr sz="2000" b="0" i="0">
+                <a:solidFill>
+                  <a:srgbClr val="5C4826"/>
+                </a:solidFill>
+              </a:rPr>
+              <a:t/>
+            </a:r>
+          </a:p>
+        </p:txBody>
+      </p:sp>
+      <p:sp>
+        <p:nvSpPr>
+          <p:cNvPr id="902" name="Hole"/>
+          <p:cNvSpPr/>
+          <p:nvPr/>
+        </p:nvSpPr>
+        <p:spPr>
+          <a:xfrm>
+            <a:off x="1764792" y="1920240"/>
+            <a:ext cx="402336" cy="402336"/>
+          </a:xfrm>
+          <a:prstGeom prst="ellipse">
+            <a:avLst/>
+          </a:prstGeom>
+          <a:solidFill>
+            <a:srgbClr val="FFFFFF"/>
+          </a:solidFill>
+          <a:ln w="12700">
+            <a:solidFill>
+              <a:srgbClr val="C9B991"/>
+            </a:solidFill>
+          </a:ln>
+          <a:effectLst/>
+        </p:spPr>
+        <p:style>
+          <a:lnRef idx="1">
+            <a:schemeClr val="accent1"/>
+          </a:lnRef>
+          <a:fillRef idx="3">
+            <a:schemeClr val="accent1"/>
+          </a:fillRef>
+          <a:effectRef idx="2">
+            <a:schemeClr val="accent1"/>
+          </a:effectRef>
+          <a:fontRef idx="minor">
+            <a:schemeClr val="lt1"/>
+          </a:fontRef>
+        </p:style>
+        <p:txBody>
+          <a:bodyPr rtlCol="0" anchor="ctr" wrap="square" lIns="27432" rIns="27432" tIns="22860" bIns="22860"/>
+          <a:lstStyle/>
+          <a:p>
+            <a:pPr algn="ctr"/>
+            <a:r>
+              <a:rPr sz="2000" b="0" i="0">
+                <a:solidFill>
+                  <a:srgbClr val="5C4826"/>
+                </a:solidFill>
+              </a:rPr>
+              <a:t/>
+            </a:r>
+          </a:p>
+        </p:txBody>
+      </p:sp>
+      <p:sp>
+        <p:nvSpPr>
+          <p:cNvPr id="903" name="Hole"/>
+          <p:cNvSpPr/>
+          <p:nvPr/>
+        </p:nvSpPr>
+        <p:spPr>
+          <a:xfrm>
+            <a:off x="1764792" y="2788920"/>
+            <a:ext cx="402336" cy="402336"/>
+          </a:xfrm>
+          <a:prstGeom prst="ellipse">
+            <a:avLst/>
+          </a:prstGeom>
+          <a:solidFill>
+            <a:srgbClr val="FFFFFF"/>
+          </a:solidFill>
+          <a:ln w="12700">
+            <a:solidFill>
+              <a:srgbClr val="C9B991"/>
+            </a:solidFill>
+          </a:ln>
+          <a:effectLst/>
+        </p:spPr>
+        <p:style>
+          <a:lnRef idx="1">
+            <a:schemeClr val="accent1"/>
+          </a:lnRef>
+          <a:fillRef idx="3">
+            <a:schemeClr val="accent1"/>
+          </a:fillRef>
+          <a:effectRef idx="2">
+            <a:schemeClr val="accent1"/>
+          </a:effectRef>
+          <a:fontRef idx="minor">
+            <a:schemeClr val="lt1"/>
+          </a:fontRef>
+        </p:style>
+        <p:txBody>
+          <a:bodyPr rtlCol="0" anchor="ctr" wrap="square" lIns="27432" rIns="27432" tIns="22860" bIns="22860"/>
+          <a:lstStyle/>
+          <a:p>
+            <a:pPr algn="ctr"/>
+            <a:r>
+              <a:rPr sz="2000" b="0" i="0">
+                <a:solidFill>
+                  <a:srgbClr val="5C4826"/>
+                </a:solidFill>
+              </a:rPr>
+              <a:t/>
+            </a:r>
+          </a:p>
+        </p:txBody>
+      </p:sp>
+      <p:sp>
+        <p:nvSpPr>
+          <p:cNvPr id="904" name="Hole"/>
+          <p:cNvSpPr/>
+          <p:nvPr/>
+        </p:nvSpPr>
+        <p:spPr>
+          <a:xfrm>
+            <a:off x="1764792" y="3931920"/>
+            <a:ext cx="402336" cy="402336"/>
+          </a:xfrm>
+          <a:prstGeom prst="ellipse">
+            <a:avLst/>
+          </a:prstGeom>
+          <a:solidFill>
+            <a:srgbClr val="FFFFFF"/>
+          </a:solidFill>
+          <a:ln w="12700">
+            <a:solidFill>
+              <a:srgbClr val="C9B991"/>
+            </a:solidFill>
+          </a:ln>
+          <a:effectLst/>
+        </p:spPr>
+        <p:style>
+          <a:lnRef idx="1">
+            <a:schemeClr val="accent1"/>
+          </a:lnRef>
+          <a:fillRef idx="3">
+            <a:schemeClr val="accent1"/>
+          </a:fillRef>
+          <a:effectRef idx="2">
+            <a:schemeClr val="accent1"/>
+          </a:effectRef>
+          <a:fontRef idx="minor">
+            <a:schemeClr val="lt1"/>
+          </a:fontRef>
+        </p:style>
+        <p:txBody>
+          <a:bodyPr rtlCol="0" anchor="ctr" wrap="square" lIns="27432" rIns="27432" tIns="22860" bIns="22860"/>
+          <a:lstStyle/>
+          <a:p>
+            <a:pPr algn="ctr"/>
+            <a:r>
+              <a:rPr sz="2000" b="0" i="0">
+                <a:solidFill>
+                  <a:srgbClr val="5C4826"/>
+                </a:solidFill>
+              </a:rPr>
+              <a:t/>
+            </a:r>
+          </a:p>
+        </p:txBody>
+      </p:sp>
+      <p:sp>
+        <p:nvSpPr>
+          <p:cNvPr id="905" name="Slab"/>
+          <p:cNvSpPr/>
+          <p:nvPr/>
+        </p:nvSpPr>
+        <p:spPr>
+          <a:xfrm>
+            <a:off x="3108960" y="1280160"/>
+            <a:ext cx="1005840" cy="3657600"/>
+          </a:xfrm>
+          <a:prstGeom prst="rect">
+            <a:avLst/>
+          </a:prstGeom>
+          <a:solidFill>
+            <a:srgbClr val="F5F1E8"/>
+          </a:solidFill>
+          <a:ln w="12700">
+            <a:solidFill>
+              <a:srgbClr val="C9B991"/>
+            </a:solidFill>
+          </a:ln>
+          <a:effectLst/>
+        </p:spPr>
+        <p:style>
+          <a:lnRef idx="1">
+            <a:schemeClr val="accent1"/>
+          </a:lnRef>
+          <a:fillRef idx="3">
+            <a:schemeClr val="accent1"/>
+          </a:fillRef>
+          <a:effectRef idx="2">
+            <a:schemeClr val="accent1"/>
+          </a:effectRef>
+          <a:fontRef idx="minor">
+            <a:schemeClr val="lt1"/>
+          </a:fontRef>
+        </p:style>
+        <p:txBody>
+          <a:bodyPr rtlCol="0" anchor="t" wrap="square" lIns="27432" rIns="27432" tIns="22860" bIns="22860"/>
+          <a:lstStyle/>
+          <a:p>
+            <a:pPr algn="ctr"/>
+            <a:r>
+              <a:rPr sz="2000" b="0" i="0">
+                <a:solidFill>
+                  <a:srgbClr val="5C4826"/>
+                </a:solidFill>
+              </a:rPr>
+              <a:t/>
+            </a:r>
+          </a:p>
+        </p:txBody>
+      </p:sp>
+      <p:sp>
+        <p:nvSpPr>
+          <p:cNvPr id="906" name="Hole"/>
+          <p:cNvSpPr/>
+          <p:nvPr/>
+        </p:nvSpPr>
+        <p:spPr>
+          <a:xfrm>
+            <a:off x="3410712" y="1737360"/>
+            <a:ext cx="402336" cy="402336"/>
+          </a:xfrm>
+          <a:prstGeom prst="ellipse">
+            <a:avLst/>
+          </a:prstGeom>
+          <a:solidFill>
+            <a:srgbClr val="FFFFFF"/>
+          </a:solidFill>
+          <a:ln w="12700">
+            <a:solidFill>
+              <a:srgbClr val="C9B991"/>
+            </a:solidFill>
+          </a:ln>
+          <a:effectLst/>
+        </p:spPr>
+        <p:style>
+          <a:lnRef idx="1">
+            <a:schemeClr val="accent1"/>
+          </a:lnRef>
+          <a:fillRef idx="3">
+            <a:schemeClr val="accent1"/>
+          </a:fillRef>
+          <a:effectRef idx="2">
+            <a:schemeClr val="accent1"/>
+          </a:effectRef>
+          <a:fontRef idx="minor">
+            <a:schemeClr val="lt1"/>
+          </a:fontRef>
+        </p:style>
+        <p:txBody>
+          <a:bodyPr rtlCol="0" anchor="ctr" wrap="square" lIns="27432" rIns="27432" tIns="22860" bIns="22860"/>
+          <a:lstStyle/>
+          <a:p>
+            <a:pPr algn="ctr"/>
+            <a:r>
+              <a:rPr sz="2000" b="0" i="0">
+                <a:solidFill>
+                  <a:srgbClr val="5C4826"/>
+                </a:solidFill>
+              </a:rPr>
+              <a:t/>
+            </a:r>
+          </a:p>
+        </p:txBody>
+      </p:sp>
+      <p:sp>
+        <p:nvSpPr>
+          <p:cNvPr id="907" name="Hole"/>
+          <p:cNvSpPr/>
+          <p:nvPr/>
+        </p:nvSpPr>
+        <p:spPr>
+          <a:xfrm>
+            <a:off x="3410712" y="2788920"/>
+            <a:ext cx="402336" cy="402336"/>
+          </a:xfrm>
+          <a:prstGeom prst="ellipse">
+            <a:avLst/>
+          </a:prstGeom>
+          <a:solidFill>
+            <a:srgbClr val="FFFFFF"/>
+          </a:solidFill>
+          <a:ln w="12700">
+            <a:solidFill>
+              <a:srgbClr val="C9B991"/>
+            </a:solidFill>
+          </a:ln>
+          <a:effectLst/>
+        </p:spPr>
+        <p:style>
+          <a:lnRef idx="1">
+            <a:schemeClr val="accent1"/>
+          </a:lnRef>
+          <a:fillRef idx="3">
+            <a:schemeClr val="accent1"/>
+          </a:fillRef>
+          <a:effectRef idx="2">
+            <a:schemeClr val="accent1"/>
+          </a:effectRef>
+          <a:fontRef idx="minor">
+            <a:schemeClr val="lt1"/>
+          </a:fontRef>
+        </p:style>
+        <p:txBody>
+          <a:bodyPr rtlCol="0" anchor="ctr" wrap="square" lIns="27432" rIns="27432" tIns="22860" bIns="22860"/>
+          <a:lstStyle/>
+          <a:p>
+            <a:pPr algn="ctr"/>
+            <a:r>
+              <a:rPr sz="2000" b="0" i="0">
+                <a:solidFill>
+                  <a:srgbClr val="5C4826"/>
+                </a:solidFill>
+              </a:rPr>
+              <a:t/>
+            </a:r>
+          </a:p>
+        </p:txBody>
+      </p:sp>
+      <p:sp>
+        <p:nvSpPr>
+          <p:cNvPr id="908" name="Hole"/>
+          <p:cNvSpPr/>
+          <p:nvPr/>
+        </p:nvSpPr>
+        <p:spPr>
+          <a:xfrm>
+            <a:off x="3410712" y="4297680"/>
+            <a:ext cx="402336" cy="402336"/>
+          </a:xfrm>
+          <a:prstGeom prst="ellipse">
+            <a:avLst/>
+          </a:prstGeom>
+          <a:solidFill>
+            <a:srgbClr val="FFFFFF"/>
+          </a:solidFill>
+          <a:ln w="12700">
+            <a:solidFill>
+              <a:srgbClr val="C9B991"/>
+            </a:solidFill>
+          </a:ln>
+          <a:effectLst/>
+        </p:spPr>
+        <p:style>
+          <a:lnRef idx="1">
+            <a:schemeClr val="accent1"/>
+          </a:lnRef>
+          <a:fillRef idx="3">
+            <a:schemeClr val="accent1"/>
+          </a:fillRef>
+          <a:effectRef idx="2">
+            <a:schemeClr val="accent1"/>
+          </a:effectRef>
+          <a:fontRef idx="minor">
+            <a:schemeClr val="lt1"/>
+          </a:fontRef>
+        </p:style>
+        <p:txBody>
+          <a:bodyPr rtlCol="0" anchor="ctr" wrap="square" lIns="27432" rIns="27432" tIns="22860" bIns="22860"/>
+          <a:lstStyle/>
+          <a:p>
+            <a:pPr algn="ctr"/>
+            <a:r>
+              <a:rPr sz="2000" b="0" i="0">
+                <a:solidFill>
+                  <a:srgbClr val="5C4826"/>
+                </a:solidFill>
+              </a:rPr>
+              <a:t/>
+            </a:r>
+          </a:p>
+        </p:txBody>
+      </p:sp>
+      <p:sp>
+        <p:nvSpPr>
+          <p:cNvPr id="909" name="Slab"/>
+          <p:cNvSpPr/>
+          <p:nvPr/>
+        </p:nvSpPr>
+        <p:spPr>
+          <a:xfrm>
+            <a:off x="4754880" y="1280160"/>
+            <a:ext cx="1005840" cy="3657600"/>
+          </a:xfrm>
+          <a:prstGeom prst="rect">
+            <a:avLst/>
+          </a:prstGeom>
+          <a:solidFill>
+            <a:srgbClr val="F5F1E8"/>
+          </a:solidFill>
+          <a:ln w="12700">
+            <a:solidFill>
+              <a:srgbClr val="C9B991"/>
+            </a:solidFill>
+          </a:ln>
+          <a:effectLst/>
+        </p:spPr>
+        <p:style>
+          <a:lnRef idx="1">
+            <a:schemeClr val="accent1"/>
+          </a:lnRef>
+          <a:fillRef idx="3">
+            <a:schemeClr val="accent1"/>
+          </a:fillRef>
+          <a:effectRef idx="2">
+            <a:schemeClr val="accent1"/>
+          </a:effectRef>
+          <a:fontRef idx="minor">
+            <a:schemeClr val="lt1"/>
+          </a:fontRef>
+        </p:style>
+        <p:txBody>
+          <a:bodyPr rtlCol="0" anchor="t" wrap="square" lIns="27432" rIns="27432" tIns="22860" bIns="22860"/>
+          <a:lstStyle/>
+          <a:p>
+            <a:pPr algn="ctr"/>
+            <a:r>
+              <a:rPr sz="2000" b="0" i="0">
+                <a:solidFill>
+                  <a:srgbClr val="5C4826"/>
+                </a:solidFill>
+              </a:rPr>
+              <a:t/>
+            </a:r>
+          </a:p>
+        </p:txBody>
+      </p:sp>
+      <p:sp>
+        <p:nvSpPr>
+          <p:cNvPr id="910" name="Hole"/>
+          <p:cNvSpPr/>
+          <p:nvPr/>
+        </p:nvSpPr>
+        <p:spPr>
+          <a:xfrm>
+            <a:off x="5056632" y="1783080"/>
+            <a:ext cx="402336" cy="402336"/>
+          </a:xfrm>
+          <a:prstGeom prst="ellipse">
+            <a:avLst/>
+          </a:prstGeom>
+          <a:solidFill>
+            <a:srgbClr val="FFFFFF"/>
+          </a:solidFill>
+          <a:ln w="12700">
+            <a:solidFill>
+              <a:srgbClr val="C9B991"/>
+            </a:solidFill>
+          </a:ln>
+          <a:effectLst/>
+        </p:spPr>
+        <p:style>
+          <a:lnRef idx="1">
+            <a:schemeClr val="accent1"/>
+          </a:lnRef>
+          <a:fillRef idx="3">
+            <a:schemeClr val="accent1"/>
+          </a:fillRef>
+          <a:effectRef idx="2">
+            <a:schemeClr val="accent1"/>
+          </a:effectRef>
+          <a:fontRef idx="minor">
+            <a:schemeClr val="lt1"/>
+          </a:fontRef>
+        </p:style>
+        <p:txBody>
+          <a:bodyPr rtlCol="0" anchor="ctr" wrap="square" lIns="27432" rIns="27432" tIns="22860" bIns="22860"/>
+          <a:lstStyle/>
+          <a:p>
+            <a:pPr algn="ctr"/>
+            <a:r>
+              <a:rPr sz="2000" b="0" i="0">
+                <a:solidFill>
+                  <a:srgbClr val="5C4826"/>
+                </a:solidFill>
+              </a:rPr>
+              <a:t/>
+            </a:r>
+          </a:p>
+        </p:txBody>
+      </p:sp>
+      <p:sp>
+        <p:nvSpPr>
+          <p:cNvPr id="911" name="Hole"/>
+          <p:cNvSpPr/>
+          <p:nvPr/>
+        </p:nvSpPr>
+        <p:spPr>
+          <a:xfrm>
+            <a:off x="5056632" y="2788920"/>
+            <a:ext cx="402336" cy="402336"/>
+          </a:xfrm>
+          <a:prstGeom prst="ellipse">
+            <a:avLst/>
+          </a:prstGeom>
+          <a:solidFill>
+            <a:srgbClr val="FFFFFF"/>
+          </a:solidFill>
+          <a:ln w="12700">
+            <a:solidFill>
+              <a:srgbClr val="C9B991"/>
+            </a:solidFill>
+          </a:ln>
+          <a:effectLst/>
+        </p:spPr>
+        <p:style>
+          <a:lnRef idx="1">
+            <a:schemeClr val="accent1"/>
+          </a:lnRef>
+          <a:fillRef idx="3">
+            <a:schemeClr val="accent1"/>
+          </a:fillRef>
+          <a:effectRef idx="2">
+            <a:schemeClr val="accent1"/>
+          </a:effectRef>
+          <a:fontRef idx="minor">
+            <a:schemeClr val="lt1"/>
+          </a:fontRef>
+        </p:style>
+        <p:txBody>
+          <a:bodyPr rtlCol="0" anchor="ctr" wrap="square" lIns="27432" rIns="27432" tIns="22860" bIns="22860"/>
+          <a:lstStyle/>
+          <a:p>
+            <a:pPr algn="ctr"/>
+            <a:r>
+              <a:rPr sz="2000" b="0" i="0">
+                <a:solidFill>
+                  <a:srgbClr val="5C4826"/>
+                </a:solidFill>
+              </a:rPr>
+              <a:t/>
+            </a:r>
+          </a:p>
+        </p:txBody>
+      </p:sp>
+      <p:sp>
+        <p:nvSpPr>
+          <p:cNvPr id="912" name="Hole"/>
+          <p:cNvSpPr/>
+          <p:nvPr/>
+        </p:nvSpPr>
+        <p:spPr>
+          <a:xfrm>
+            <a:off x="5056632" y="3794760"/>
+            <a:ext cx="402336" cy="402336"/>
+          </a:xfrm>
+          <a:prstGeom prst="ellipse">
+            <a:avLst/>
+          </a:prstGeom>
+          <a:solidFill>
+            <a:srgbClr val="FFFFFF"/>
+          </a:solidFill>
+          <a:ln w="12700">
+            <a:solidFill>
+              <a:srgbClr val="C9B991"/>
+            </a:solidFill>
+          </a:ln>
+          <a:effectLst/>
+        </p:spPr>
+        <p:style>
+          <a:lnRef idx="1">
+            <a:schemeClr val="accent1"/>
+          </a:lnRef>
+          <a:fillRef idx="3">
+            <a:schemeClr val="accent1"/>
+          </a:fillRef>
+          <a:effectRef idx="2">
+            <a:schemeClr val="accent1"/>
+          </a:effectRef>
+          <a:fontRef idx="minor">
+            <a:schemeClr val="lt1"/>
+          </a:fontRef>
+        </p:style>
+        <p:txBody>
+          <a:bodyPr rtlCol="0" anchor="ctr" wrap="square" lIns="27432" rIns="27432" tIns="22860" bIns="22860"/>
+          <a:lstStyle/>
+          <a:p>
+            <a:pPr algn="ctr"/>
+            <a:r>
+              <a:rPr sz="2000" b="0" i="0">
+                <a:solidFill>
+                  <a:srgbClr val="5C4826"/>
+                </a:solidFill>
+              </a:rPr>
+              <a:t/>
+            </a:r>
+          </a:p>
+        </p:txBody>
+      </p:sp>
+      <p:sp>
+        <p:nvSpPr>
+          <p:cNvPr id="913" name="Slab"/>
+          <p:cNvSpPr/>
+          <p:nvPr/>
+        </p:nvSpPr>
+        <p:spPr>
+          <a:xfrm>
+            <a:off x="6400800" y="1280160"/>
+            <a:ext cx="1005840" cy="3657600"/>
+          </a:xfrm>
+          <a:prstGeom prst="rect">
+            <a:avLst/>
+          </a:prstGeom>
+          <a:solidFill>
+            <a:srgbClr val="F5F1E8"/>
+          </a:solidFill>
+          <a:ln w="12700">
+            <a:solidFill>
+              <a:srgbClr val="C9B991"/>
+            </a:solidFill>
+          </a:ln>
+          <a:effectLst/>
+        </p:spPr>
+        <p:style>
+          <a:lnRef idx="1">
+            <a:schemeClr val="accent1"/>
+          </a:lnRef>
+          <a:fillRef idx="3">
+            <a:schemeClr val="accent1"/>
+          </a:fillRef>
+          <a:effectRef idx="2">
+            <a:schemeClr val="accent1"/>
+          </a:effectRef>
+          <a:fontRef idx="minor">
+            <a:schemeClr val="lt1"/>
+          </a:fontRef>
+        </p:style>
+        <p:txBody>
+          <a:bodyPr rtlCol="0" anchor="t" wrap="square" lIns="27432" rIns="27432" tIns="22860" bIns="22860"/>
+          <a:lstStyle/>
+          <a:p>
+            <a:pPr algn="ctr"/>
+            <a:r>
+              <a:rPr sz="2000" b="0" i="0">
+                <a:solidFill>
+                  <a:srgbClr val="5C4826"/>
+                </a:solidFill>
+              </a:rPr>
+              <a:t/>
+            </a:r>
+          </a:p>
+        </p:txBody>
+      </p:sp>
+      <p:sp>
+        <p:nvSpPr>
+          <p:cNvPr id="914" name="Hole"/>
+          <p:cNvSpPr/>
+          <p:nvPr/>
+        </p:nvSpPr>
+        <p:spPr>
+          <a:xfrm>
+            <a:off x="6702552" y="2240280"/>
+            <a:ext cx="402336" cy="402336"/>
+          </a:xfrm>
+          <a:prstGeom prst="ellipse">
+            <a:avLst/>
+          </a:prstGeom>
+          <a:solidFill>
+            <a:srgbClr val="FFFFFF"/>
+          </a:solidFill>
+          <a:ln w="12700">
+            <a:solidFill>
+              <a:srgbClr val="C9B991"/>
+            </a:solidFill>
+          </a:ln>
+          <a:effectLst/>
+        </p:spPr>
+        <p:style>
+          <a:lnRef idx="1">
+            <a:schemeClr val="accent1"/>
+          </a:lnRef>
+          <a:fillRef idx="3">
+            <a:schemeClr val="accent1"/>
+          </a:fillRef>
+          <a:effectRef idx="2">
+            <a:schemeClr val="accent1"/>
+          </a:effectRef>
+          <a:fontRef idx="minor">
+            <a:schemeClr val="lt1"/>
+          </a:fontRef>
+        </p:style>
+        <p:txBody>
+          <a:bodyPr rtlCol="0" anchor="ctr" wrap="square" lIns="27432" rIns="27432" tIns="22860" bIns="22860"/>
+          <a:lstStyle/>
+          <a:p>
+            <a:pPr algn="ctr"/>
+            <a:r>
+              <a:rPr sz="2000" b="0" i="0">
+                <a:solidFill>
+                  <a:srgbClr val="5C4826"/>
+                </a:solidFill>
+              </a:rPr>
+              <a:t/>
+            </a:r>
+          </a:p>
+        </p:txBody>
+      </p:sp>
+      <p:sp>
+        <p:nvSpPr>
+          <p:cNvPr id="915" name="Hole"/>
+          <p:cNvSpPr/>
+          <p:nvPr/>
+        </p:nvSpPr>
+        <p:spPr>
+          <a:xfrm>
+            <a:off x="6702552" y="2788920"/>
+            <a:ext cx="402336" cy="402336"/>
+          </a:xfrm>
+          <a:prstGeom prst="ellipse">
+            <a:avLst/>
+          </a:prstGeom>
+          <a:solidFill>
+            <a:srgbClr val="FFFFFF"/>
+          </a:solidFill>
+          <a:ln w="12700">
+            <a:solidFill>
+              <a:srgbClr val="C9B991"/>
+            </a:solidFill>
+          </a:ln>
+          <a:effectLst/>
+        </p:spPr>
+        <p:style>
+          <a:lnRef idx="1">
+            <a:schemeClr val="accent1"/>
+          </a:lnRef>
+          <a:fillRef idx="3">
+            <a:schemeClr val="accent1"/>
+          </a:fillRef>
+          <a:effectRef idx="2">
+            <a:schemeClr val="accent1"/>
+          </a:effectRef>
+          <a:fontRef idx="minor">
+            <a:schemeClr val="lt1"/>
+          </a:fontRef>
+        </p:style>
+        <p:txBody>
+          <a:bodyPr rtlCol="0" anchor="ctr" wrap="square" lIns="27432" rIns="27432" tIns="22860" bIns="22860"/>
+          <a:lstStyle/>
+          <a:p>
+            <a:pPr algn="ctr"/>
+            <a:r>
+              <a:rPr sz="2000" b="0" i="0">
+                <a:solidFill>
+                  <a:srgbClr val="5C4826"/>
+                </a:solidFill>
+              </a:rPr>
+              <a:t/>
+            </a:r>
+          </a:p>
+        </p:txBody>
+      </p:sp>
+      <p:sp>
+        <p:nvSpPr>
+          <p:cNvPr id="916" name="Hole"/>
+          <p:cNvSpPr/>
+          <p:nvPr/>
+        </p:nvSpPr>
+        <p:spPr>
+          <a:xfrm>
+            <a:off x="6702552" y="4160520"/>
+            <a:ext cx="402336" cy="402336"/>
+          </a:xfrm>
+          <a:prstGeom prst="ellipse">
+            <a:avLst/>
+          </a:prstGeom>
+          <a:solidFill>
+            <a:srgbClr val="FFFFFF"/>
+          </a:solidFill>
+          <a:ln w="12700">
+            <a:solidFill>
+              <a:srgbClr val="C9B991"/>
+            </a:solidFill>
+          </a:ln>
+          <a:effectLst/>
+        </p:spPr>
+        <p:style>
+          <a:lnRef idx="1">
+            <a:schemeClr val="accent1"/>
+          </a:lnRef>
+          <a:fillRef idx="3">
+            <a:schemeClr val="accent1"/>
+          </a:fillRef>
+          <a:effectRef idx="2">
+            <a:schemeClr val="accent1"/>
+          </a:effectRef>
+          <a:fontRef idx="minor">
+            <a:schemeClr val="lt1"/>
+          </a:fontRef>
+        </p:style>
+        <p:txBody>
+          <a:bodyPr rtlCol="0" anchor="ctr" wrap="square" lIns="27432" rIns="27432" tIns="22860" bIns="22860"/>
+          <a:lstStyle/>
+          <a:p>
+            <a:pPr algn="ctr"/>
+            <a:r>
+              <a:rPr sz="2000" b="0" i="0">
+                <a:solidFill>
+                  <a:srgbClr val="5C4826"/>
+                </a:solidFill>
+              </a:rPr>
+              <a:t/>
+            </a:r>
+          </a:p>
+        </p:txBody>
+      </p:sp>
+      <p:cxnSp>
+        <p:nvCxnSpPr>
+          <p:cNvPr id="917" name="Connector 916"/>
+          <p:cNvCxnSpPr/>
+          <p:nvPr/>
+        </p:nvCxnSpPr>
+        <p:spPr>
+          <a:xfrm>
+            <a:off x="548640" y="2990088"/>
+            <a:ext cx="7589520" cy="0"/>
+          </a:xfrm>
+          <a:prstGeom prst="line">
+            <a:avLst/>
+          </a:prstGeom>
+          <a:ln w="31750">
+            <a:solidFill>
+              <a:srgbClr val="9A3F12"/>
+            </a:solidFill>
+            <a:tailEnd type="triangle"/>
+          </a:ln>
+        </p:spPr>
+        <p:style>
+          <a:lnRef idx="2">
+            <a:schemeClr val="accent1"/>
+          </a:lnRef>
+          <a:fillRef idx="0">
+            <a:schemeClr val="accent1"/>
+          </a:fillRef>
+          <a:effectRef idx="1">
+            <a:schemeClr val="accent1"/>
+          </a:effectRef>
+          <a:fontRef idx="minor">
+            <a:schemeClr val="tx1"/>
+          </a:fontRef>
+        </p:style>
+      </p:cxnSp>
+      <p:sp>
+        <p:nvSpPr>
+          <p:cNvPr id="918" name="Label"/>
+          <p:cNvSpPr txBox="1"/>
+          <p:nvPr/>
+        </p:nvSpPr>
+        <p:spPr>
+          <a:xfrm>
+            <a:off x="548640" y="5212080"/>
+            <a:ext cx="8046720" cy="457200"/>
+          </a:xfrm>
+          <a:prstGeom prst="rect">
+            <a:avLst/>
+          </a:prstGeom>
+          <a:noFill/>
+        </p:spPr>
+        <p:txBody>
+          <a:bodyPr wrap="square" anchor="t" lIns="27432" rIns="27432" tIns="22860" bIns="22860">
+            <a:spAutoFit/>
+          </a:bodyPr>
+          <a:lstStyle/>
+          <a:p>
+            <a:pPr algn="ctr"/>
+            <a:r>
+              <a:rPr sz="2200" b="0" i="0">
+                <a:solidFill>
+                  <a:srgbClr val="5C4826"/>
+                </a:solidFill>
+              </a:rPr>
+              <a:t>Now defenses and their holes matter.</a:t>
+            </a:r>
+          </a:p>
+        </p:txBody>
+      </p:sp>
+    </p:spTree>
+  </p:cSld>
+  <p:clrMapOvr>
+    <a:masterClrMapping/>
+  </p:clrMapOvr>
+</p:sld>
+</file>
+
+<file path=ppt/slides/slide15.xml><?xml version="1.0" encoding="utf-8"?>
+<p:sld xmlns:a="http://schemas.openxmlformats.org/drawingml/2006/main" xmlns:p="http://schemas.openxmlformats.org/presentationml/2006/main" xmlns:r="http://schemas.openxmlformats.org/officeDocument/2006/relationships">
+  <p:cSld>
+    <p:spTree>
+      <p:nvGrpSpPr>
+        <p:cNvPr id="1" name=""/>
+        <p:cNvGrpSpPr/>
+        <p:nvPr/>
+      </p:nvGrpSpPr>
+      <p:grpSpPr/>
+      <p:sp>
+        <p:nvSpPr>
+          <p:cNvPr id="3" name="Title 2"/>
+          <p:cNvSpPr>
+            <a:spLocks noGrp="1"/>
+          </p:cNvSpPr>
+          <p:nvPr>
+            <p:ph type="title"/>
+          </p:nvPr>
+        </p:nvSpPr>
+        <p:spPr/>
+        <p:txBody>
+          <a:bodyPr/>
+          <a:lstStyle/>
+          <a:p>
+            <a:r>
+              <a:rPr sz="2400" b="0" i="0">
+                <a:solidFill>
+                  <a:srgbClr val="000000"/>
+                </a:solidFill>
+              </a:rPr>
+              <a:t>Organizational causation</a:t>
+            </a:r>
+          </a:p>
+        </p:txBody>
+      </p:sp>
+      <p:sp>
+        <p:nvSpPr>
+          <p:cNvPr id="900" name="Slide Number Placeholder 900"/>
+          <p:cNvSpPr>
+            <a:spLocks noGrp="1"/>
+          </p:cNvSpPr>
+          <p:nvPr>
+            <p:ph type="sldNum" sz="quarter" idx="4"/>
+          </p:nvPr>
+        </p:nvSpPr>
+        <p:spPr/>
+        <p:txBody>
+          <a:bodyPr/>
+          <a:lstStyle/>
+          <a:p>
+            <a:fld id="{05417E77-5F02-4D92-BA7F-030D59DFDABE}" type="slidenum">
+              <a:rPr lang="en-US" smtClean="0"/>
+              <a:t>15</a:t>
+            </a:fld>
+            <a:endParaRPr lang="en-US"/>
+          </a:p>
+        </p:txBody>
+      </p:sp>
+      <p:sp>
+        <p:nvSpPr>
+          <p:cNvPr id="901" name="Block"/>
+          <p:cNvSpPr/>
+          <p:nvPr/>
+        </p:nvSpPr>
+        <p:spPr>
+          <a:xfrm>
+            <a:off x="548640" y="2377440"/>
+            <a:ext cx="2468880" cy="731520"/>
+          </a:xfrm>
+          <a:prstGeom prst="rect">
+            <a:avLst/>
+          </a:prstGeom>
+          <a:solidFill>
+            <a:srgbClr val="8E6F3E"/>
+          </a:solidFill>
+          <a:ln>
+            <a:noFill/>
+          </a:ln>
+          <a:effectLst/>
+        </p:spPr>
+        <p:style>
+          <a:lnRef idx="1">
+            <a:schemeClr val="accent1"/>
+          </a:lnRef>
+          <a:fillRef idx="3">
+            <a:schemeClr val="accent1"/>
+          </a:fillRef>
+          <a:effectRef idx="2">
+            <a:schemeClr val="accent1"/>
+          </a:effectRef>
+          <a:fontRef idx="minor">
+            <a:schemeClr val="lt1"/>
+          </a:fontRef>
+        </p:style>
+        <p:txBody>
+          <a:bodyPr rtlCol="0" anchor="ctr" wrap="square" lIns="27432" rIns="27432" tIns="22860" bIns="22860"/>
+          <a:lstStyle/>
+          <a:p>
+            <a:pPr algn="ctr"/>
+            <a:r>
+              <a:rPr sz="2000" b="1" i="0">
+                <a:solidFill>
+                  <a:srgbClr val="FFFFFF"/>
+                </a:solidFill>
+              </a:rPr>
+              <a:t>CONDITIONS</a:t>
+            </a:r>
+          </a:p>
+        </p:txBody>
+      </p:sp>
+      <p:cxnSp>
+        <p:nvCxnSpPr>
+          <p:cNvPr id="902" name="Connector 901"/>
+          <p:cNvCxnSpPr/>
+          <p:nvPr/>
+        </p:nvCxnSpPr>
+        <p:spPr>
+          <a:xfrm>
+            <a:off x="3017520" y="2743200"/>
+            <a:ext cx="548640" cy="0"/>
+          </a:xfrm>
+          <a:prstGeom prst="line">
+            <a:avLst/>
+          </a:prstGeom>
+          <a:ln w="28575">
+            <a:solidFill>
+              <a:srgbClr val="8E6F3E"/>
+            </a:solidFill>
+            <a:tailEnd type="triangle"/>
+          </a:ln>
+        </p:spPr>
+        <p:style>
+          <a:lnRef idx="2">
+            <a:schemeClr val="accent1"/>
+          </a:lnRef>
+          <a:fillRef idx="0">
+            <a:schemeClr val="accent1"/>
+          </a:fillRef>
+          <a:effectRef idx="1">
+            <a:schemeClr val="accent1"/>
+          </a:effectRef>
+          <a:fontRef idx="minor">
+            <a:schemeClr val="tx1"/>
+          </a:fontRef>
+        </p:style>
+      </p:cxnSp>
+      <p:sp>
+        <p:nvSpPr>
+          <p:cNvPr id="903" name="Card"/>
+          <p:cNvSpPr/>
+          <p:nvPr/>
+        </p:nvSpPr>
+        <p:spPr>
+          <a:xfrm>
+            <a:off x="3566160" y="2377440"/>
+            <a:ext cx="2468880" cy="731520"/>
+          </a:xfrm>
+          <a:prstGeom prst="rect">
+            <a:avLst/>
+          </a:prstGeom>
+          <a:solidFill>
+            <a:srgbClr val="F5F1E8"/>
+          </a:solidFill>
+          <a:ln w="12700">
+            <a:solidFill>
+              <a:srgbClr val="C9B991"/>
+            </a:solidFill>
+          </a:ln>
+          <a:effectLst/>
+        </p:spPr>
+        <p:style>
+          <a:lnRef idx="1">
+            <a:schemeClr val="accent1"/>
+          </a:lnRef>
+          <a:fillRef idx="3">
+            <a:schemeClr val="accent1"/>
+          </a:fillRef>
+          <a:effectRef idx="2">
+            <a:schemeClr val="accent1"/>
+          </a:effectRef>
+          <a:fontRef idx="minor">
+            <a:schemeClr val="lt1"/>
+          </a:fontRef>
+        </p:style>
+        <p:txBody>
+          <a:bodyPr rtlCol="0" anchor="ctr" wrap="square" lIns="27432" rIns="27432" tIns="22860" bIns="22860"/>
+          <a:lstStyle/>
+          <a:p>
+            <a:pPr algn="ctr"/>
+            <a:r>
+              <a:rPr sz="2000" b="1" i="0">
+                <a:solidFill>
+                  <a:srgbClr val="5C4826"/>
+                </a:solidFill>
+              </a:rPr>
+              <a:t>behavior</a:t>
+            </a:r>
+          </a:p>
+        </p:txBody>
+      </p:sp>
+      <p:cxnSp>
+        <p:nvCxnSpPr>
+          <p:cNvPr id="904" name="Connector 903"/>
+          <p:cNvCxnSpPr/>
+          <p:nvPr/>
+        </p:nvCxnSpPr>
+        <p:spPr>
+          <a:xfrm>
+            <a:off x="6035040" y="2743200"/>
+            <a:ext cx="548640" cy="0"/>
+          </a:xfrm>
+          <a:prstGeom prst="line">
+            <a:avLst/>
+          </a:prstGeom>
+          <a:ln w="28575">
+            <a:solidFill>
+              <a:srgbClr val="8E6F3E"/>
+            </a:solidFill>
+            <a:tailEnd type="triangle"/>
+          </a:ln>
+        </p:spPr>
+        <p:style>
+          <a:lnRef idx="2">
+            <a:schemeClr val="accent1"/>
+          </a:lnRef>
+          <a:fillRef idx="0">
+            <a:schemeClr val="accent1"/>
+          </a:fillRef>
+          <a:effectRef idx="1">
+            <a:schemeClr val="accent1"/>
+          </a:effectRef>
+          <a:fontRef idx="minor">
+            <a:schemeClr val="tx1"/>
+          </a:fontRef>
+        </p:style>
+      </p:cxnSp>
+      <p:sp>
+        <p:nvSpPr>
+          <p:cNvPr id="905" name="Card"/>
+          <p:cNvSpPr/>
+          <p:nvPr/>
+        </p:nvSpPr>
+        <p:spPr>
+          <a:xfrm>
+            <a:off x="6583680" y="2377440"/>
+            <a:ext cx="2011680" cy="731520"/>
+          </a:xfrm>
+          <a:prstGeom prst="rect">
+            <a:avLst/>
+          </a:prstGeom>
+          <a:solidFill>
+            <a:srgbClr val="F5F1E8"/>
+          </a:solidFill>
+          <a:ln w="12700">
+            <a:solidFill>
+              <a:srgbClr val="C9B991"/>
+            </a:solidFill>
+          </a:ln>
+          <a:effectLst/>
+        </p:spPr>
+        <p:style>
+          <a:lnRef idx="1">
+            <a:schemeClr val="accent1"/>
+          </a:lnRef>
+          <a:fillRef idx="3">
+            <a:schemeClr val="accent1"/>
+          </a:fillRef>
+          <a:effectRef idx="2">
+            <a:schemeClr val="accent1"/>
+          </a:effectRef>
+          <a:fontRef idx="minor">
+            <a:schemeClr val="lt1"/>
+          </a:fontRef>
+        </p:style>
+        <p:txBody>
+          <a:bodyPr rtlCol="0" anchor="ctr" wrap="square" lIns="27432" rIns="27432" tIns="22860" bIns="22860"/>
+          <a:lstStyle/>
+          <a:p>
+            <a:pPr algn="ctr"/>
+            <a:r>
+              <a:rPr sz="2000" b="1" i="0">
+                <a:solidFill>
+                  <a:srgbClr val="5C4826"/>
+                </a:solidFill>
+              </a:rPr>
+              <a:t>outcome</a:t>
+            </a:r>
+          </a:p>
+        </p:txBody>
+      </p:sp>
+      <p:sp>
+        <p:nvSpPr>
+          <p:cNvPr id="906" name="Label"/>
+          <p:cNvSpPr txBox="1"/>
+          <p:nvPr/>
+        </p:nvSpPr>
+        <p:spPr>
+          <a:xfrm>
+            <a:off x="548640" y="3840480"/>
+            <a:ext cx="8046720" cy="457200"/>
+          </a:xfrm>
+          <a:prstGeom prst="rect">
+            <a:avLst/>
+          </a:prstGeom>
+          <a:noFill/>
+        </p:spPr>
+        <p:txBody>
+          <a:bodyPr wrap="square" anchor="t" lIns="27432" rIns="27432" tIns="22860" bIns="22860">
+            <a:spAutoFit/>
+          </a:bodyPr>
+          <a:lstStyle/>
+          <a:p>
+            <a:pPr algn="ctr"/>
+            <a:r>
+              <a:rPr sz="2200" b="0" i="0">
+                <a:solidFill>
+                  <a:srgbClr val="5C4826"/>
+                </a:solidFill>
+              </a:rPr>
+              <a:t>Now conditions shaping behavior matter.</a:t>
+            </a:r>
+          </a:p>
+        </p:txBody>
+      </p:sp>
+    </p:spTree>
+  </p:cSld>
+  <p:clrMapOvr>
+    <a:masterClrMapping/>
+  </p:clrMapOvr>
+</p:sld>
+</file>
+
+<file path=ppt/slides/slide16.xml><?xml version="1.0" encoding="utf-8"?>
+<p:sld xmlns:a="http://schemas.openxmlformats.org/drawingml/2006/main" xmlns:p="http://schemas.openxmlformats.org/presentationml/2006/main" xmlns:r="http://schemas.openxmlformats.org/officeDocument/2006/relationships">
+  <p:cSld>
+    <p:spTree>
+      <p:nvGrpSpPr>
+        <p:cNvPr id="1" name=""/>
+        <p:cNvGrpSpPr/>
+        <p:nvPr/>
+      </p:nvGrpSpPr>
+      <p:grpSpPr/>
+      <p:sp>
+        <p:nvSpPr>
+          <p:cNvPr id="3" name="Title 2"/>
+          <p:cNvSpPr>
+            <a:spLocks noGrp="1"/>
+          </p:cNvSpPr>
+          <p:nvPr>
+            <p:ph type="title"/>
+          </p:nvPr>
+        </p:nvSpPr>
+        <p:spPr/>
+        <p:txBody>
+          <a:bodyPr/>
+          <a:lstStyle/>
+          <a:p>
+            <a:r>
+              <a:rPr sz="2400" b="0" i="0">
+                <a:solidFill>
+                  <a:srgbClr val="000000"/>
+                </a:solidFill>
+              </a:rPr>
+              <a:t>STAMP: Fine, include everything</a:t>
+            </a:r>
+          </a:p>
+        </p:txBody>
+      </p:sp>
+      <p:sp>
+        <p:nvSpPr>
+          <p:cNvPr id="900" name="Slide Number Placeholder 900"/>
+          <p:cNvSpPr>
+            <a:spLocks noGrp="1"/>
+          </p:cNvSpPr>
+          <p:nvPr>
+            <p:ph type="sldNum" sz="quarter" idx="4"/>
+          </p:nvPr>
+        </p:nvSpPr>
+        <p:spPr/>
+        <p:txBody>
+          <a:bodyPr/>
+          <a:lstStyle/>
+          <a:p>
+            <a:fld id="{3EE8B33F-6F55-4310-8556-A7B692D2A075}" type="slidenum">
+              <a:rPr lang="en-US" smtClean="0"/>
+              <a:t>16</a:t>
+            </a:fld>
+            <a:endParaRPr lang="en-US"/>
+          </a:p>
+        </p:txBody>
+      </p:sp>
+      <p:sp>
+        <p:nvSpPr>
+          <p:cNvPr id="901" name="Block"/>
+          <p:cNvSpPr/>
+          <p:nvPr/>
+        </p:nvSpPr>
+        <p:spPr>
+          <a:xfrm>
+            <a:off x="2926080" y="1188720"/>
+            <a:ext cx="3291840" cy="640080"/>
+          </a:xfrm>
+          <a:prstGeom prst="rect">
+            <a:avLst/>
+          </a:prstGeom>
+          <a:solidFill>
+            <a:srgbClr val="8E6F3E"/>
+          </a:solidFill>
+          <a:ln>
+            <a:noFill/>
+          </a:ln>
+          <a:effectLst/>
+        </p:spPr>
+        <p:style>
+          <a:lnRef idx="1">
+            <a:schemeClr val="accent1"/>
+          </a:lnRef>
+          <a:fillRef idx="3">
+            <a:schemeClr val="accent1"/>
+          </a:fillRef>
+          <a:effectRef idx="2">
+            <a:schemeClr val="accent1"/>
+          </a:effectRef>
+          <a:fontRef idx="minor">
+            <a:schemeClr val="lt1"/>
+          </a:fontRef>
+        </p:style>
+        <p:txBody>
+          <a:bodyPr rtlCol="0" anchor="ctr" wrap="square" lIns="27432" rIns="27432" tIns="22860" bIns="22860"/>
+          <a:lstStyle/>
+          <a:p>
+            <a:pPr algn="ctr"/>
+            <a:r>
+              <a:rPr sz="2000" b="1" i="0">
+                <a:solidFill>
+                  <a:srgbClr val="FFFFFF"/>
+                </a:solidFill>
+              </a:rPr>
+              <a:t>REGULATORS</a:t>
+            </a:r>
+          </a:p>
+        </p:txBody>
+      </p:sp>
+      <p:cxnSp>
+        <p:nvCxnSpPr>
+          <p:cNvPr id="902" name="Connector 901"/>
+          <p:cNvCxnSpPr/>
+          <p:nvPr/>
+        </p:nvCxnSpPr>
+        <p:spPr>
+          <a:xfrm>
+            <a:off x="4023360" y="1828800"/>
+            <a:ext cx="0" cy="365760"/>
+          </a:xfrm>
+          <a:prstGeom prst="line">
+            <a:avLst/>
+          </a:prstGeom>
+          <a:ln w="19050">
+            <a:solidFill>
+              <a:srgbClr val="8E6F3E"/>
+            </a:solidFill>
+            <a:tailEnd type="triangle"/>
+          </a:ln>
+        </p:spPr>
+        <p:style>
+          <a:lnRef idx="2">
+            <a:schemeClr val="accent1"/>
+          </a:lnRef>
+          <a:fillRef idx="0">
+            <a:schemeClr val="accent1"/>
+          </a:fillRef>
+          <a:effectRef idx="1">
+            <a:schemeClr val="accent1"/>
+          </a:effectRef>
+          <a:fontRef idx="minor">
+            <a:schemeClr val="tx1"/>
+          </a:fontRef>
+        </p:style>
+      </p:cxnSp>
+      <p:cxnSp>
+        <p:nvCxnSpPr>
+          <p:cNvPr id="903" name="Connector 902"/>
+          <p:cNvCxnSpPr/>
+          <p:nvPr/>
+        </p:nvCxnSpPr>
+        <p:spPr>
+          <a:xfrm flipV="1">
+            <a:off x="5120640" y="1828800"/>
+            <a:ext cx="0" cy="365760"/>
+          </a:xfrm>
+          <a:prstGeom prst="line">
+            <a:avLst/>
+          </a:prstGeom>
+          <a:ln w="19050">
+            <a:solidFill>
+              <a:srgbClr val="8E6F3E"/>
+            </a:solidFill>
+            <a:tailEnd type="triangle"/>
+          </a:ln>
+        </p:spPr>
+        <p:style>
+          <a:lnRef idx="2">
+            <a:schemeClr val="accent1"/>
+          </a:lnRef>
+          <a:fillRef idx="0">
+            <a:schemeClr val="accent1"/>
+          </a:fillRef>
+          <a:effectRef idx="1">
+            <a:schemeClr val="accent1"/>
+          </a:effectRef>
+          <a:fontRef idx="minor">
+            <a:schemeClr val="tx1"/>
+          </a:fontRef>
+        </p:style>
+      </p:cxnSp>
+      <p:sp>
+        <p:nvSpPr>
+          <p:cNvPr id="904" name="Block"/>
+          <p:cNvSpPr/>
+          <p:nvPr/>
+        </p:nvSpPr>
+        <p:spPr>
+          <a:xfrm>
+            <a:off x="2926080" y="2194560"/>
+            <a:ext cx="3291840" cy="640080"/>
+          </a:xfrm>
+          <a:prstGeom prst="rect">
+            <a:avLst/>
+          </a:prstGeom>
+          <a:solidFill>
+            <a:srgbClr val="8E6F3E"/>
+          </a:solidFill>
+          <a:ln>
+            <a:noFill/>
+          </a:ln>
+          <a:effectLst/>
+        </p:spPr>
+        <p:style>
+          <a:lnRef idx="1">
+            <a:schemeClr val="accent1"/>
+          </a:lnRef>
+          <a:fillRef idx="3">
+            <a:schemeClr val="accent1"/>
+          </a:fillRef>
+          <a:effectRef idx="2">
+            <a:schemeClr val="accent1"/>
+          </a:effectRef>
+          <a:fontRef idx="minor">
+            <a:schemeClr val="lt1"/>
+          </a:fontRef>
+        </p:style>
+        <p:txBody>
+          <a:bodyPr rtlCol="0" anchor="ctr" wrap="square" lIns="27432" rIns="27432" tIns="22860" bIns="22860"/>
+          <a:lstStyle/>
+          <a:p>
+            <a:pPr algn="ctr"/>
+            <a:r>
+              <a:rPr sz="2000" b="1" i="0">
+                <a:solidFill>
+                  <a:srgbClr val="FFFFFF"/>
+                </a:solidFill>
+              </a:rPr>
+              <a:t>ORGANIZATION</a:t>
+            </a:r>
+          </a:p>
+        </p:txBody>
+      </p:sp>
+      <p:cxnSp>
+        <p:nvCxnSpPr>
+          <p:cNvPr id="905" name="Connector 904"/>
+          <p:cNvCxnSpPr/>
+          <p:nvPr/>
+        </p:nvCxnSpPr>
+        <p:spPr>
+          <a:xfrm>
+            <a:off x="4023360" y="2834640"/>
+            <a:ext cx="0" cy="365760"/>
+          </a:xfrm>
+          <a:prstGeom prst="line">
+            <a:avLst/>
+          </a:prstGeom>
+          <a:ln w="19050">
+            <a:solidFill>
+              <a:srgbClr val="8E6F3E"/>
+            </a:solidFill>
+            <a:tailEnd type="triangle"/>
+          </a:ln>
+        </p:spPr>
+        <p:style>
+          <a:lnRef idx="2">
+            <a:schemeClr val="accent1"/>
+          </a:lnRef>
+          <a:fillRef idx="0">
+            <a:schemeClr val="accent1"/>
+          </a:fillRef>
+          <a:effectRef idx="1">
+            <a:schemeClr val="accent1"/>
+          </a:effectRef>
+          <a:fontRef idx="minor">
+            <a:schemeClr val="tx1"/>
+          </a:fontRef>
+        </p:style>
+      </p:cxnSp>
+      <p:cxnSp>
+        <p:nvCxnSpPr>
+          <p:cNvPr id="906" name="Connector 905"/>
+          <p:cNvCxnSpPr/>
+          <p:nvPr/>
+        </p:nvCxnSpPr>
+        <p:spPr>
+          <a:xfrm flipV="1">
+            <a:off x="5120640" y="2834640"/>
+            <a:ext cx="0" cy="365760"/>
+          </a:xfrm>
+          <a:prstGeom prst="line">
+            <a:avLst/>
+          </a:prstGeom>
+          <a:ln w="19050">
+            <a:solidFill>
+              <a:srgbClr val="8E6F3E"/>
+            </a:solidFill>
+            <a:tailEnd type="triangle"/>
+          </a:ln>
+        </p:spPr>
+        <p:style>
+          <a:lnRef idx="2">
+            <a:schemeClr val="accent1"/>
+          </a:lnRef>
+          <a:fillRef idx="0">
+            <a:schemeClr val="accent1"/>
+          </a:fillRef>
+          <a:effectRef idx="1">
+            <a:schemeClr val="accent1"/>
+          </a:effectRef>
+          <a:fontRef idx="minor">
+            <a:schemeClr val="tx1"/>
+          </a:fontRef>
+        </p:style>
+      </p:cxnSp>
+      <p:sp>
+        <p:nvSpPr>
+          <p:cNvPr id="907" name="Block"/>
+          <p:cNvSpPr/>
+          <p:nvPr/>
+        </p:nvSpPr>
+        <p:spPr>
+          <a:xfrm>
+            <a:off x="2926080" y="3200400"/>
+            <a:ext cx="3291840" cy="640080"/>
+          </a:xfrm>
+          <a:prstGeom prst="rect">
+            <a:avLst/>
+          </a:prstGeom>
+          <a:solidFill>
+            <a:srgbClr val="8E6F3E"/>
+          </a:solidFill>
+          <a:ln>
+            <a:noFill/>
+          </a:ln>
+          <a:effectLst/>
+        </p:spPr>
+        <p:style>
+          <a:lnRef idx="1">
+            <a:schemeClr val="accent1"/>
+          </a:lnRef>
+          <a:fillRef idx="3">
+            <a:schemeClr val="accent1"/>
+          </a:fillRef>
+          <a:effectRef idx="2">
+            <a:schemeClr val="accent1"/>
+          </a:effectRef>
+          <a:fontRef idx="minor">
+            <a:schemeClr val="lt1"/>
+          </a:fontRef>
+        </p:style>
+        <p:txBody>
+          <a:bodyPr rtlCol="0" anchor="ctr" wrap="square" lIns="27432" rIns="27432" tIns="22860" bIns="22860"/>
+          <a:lstStyle/>
+          <a:p>
+            <a:pPr algn="ctr"/>
+            <a:r>
+              <a:rPr sz="2000" b="1" i="0">
+                <a:solidFill>
+                  <a:srgbClr val="FFFFFF"/>
+                </a:solidFill>
+              </a:rPr>
+              <a:t>ENGINEERING</a:t>
+            </a:r>
+          </a:p>
+        </p:txBody>
+      </p:sp>
+      <p:cxnSp>
+        <p:nvCxnSpPr>
+          <p:cNvPr id="908" name="Connector 907"/>
+          <p:cNvCxnSpPr/>
+          <p:nvPr/>
+        </p:nvCxnSpPr>
+        <p:spPr>
+          <a:xfrm>
+            <a:off x="4023360" y="3840480"/>
+            <a:ext cx="0" cy="365760"/>
+          </a:xfrm>
+          <a:prstGeom prst="line">
+            <a:avLst/>
+          </a:prstGeom>
+          <a:ln w="19050">
+            <a:solidFill>
+              <a:srgbClr val="8E6F3E"/>
+            </a:solidFill>
+            <a:tailEnd type="triangle"/>
+          </a:ln>
+        </p:spPr>
+        <p:style>
+          <a:lnRef idx="2">
+            <a:schemeClr val="accent1"/>
+          </a:lnRef>
+          <a:fillRef idx="0">
+            <a:schemeClr val="accent1"/>
+          </a:fillRef>
+          <a:effectRef idx="1">
+            <a:schemeClr val="accent1"/>
+          </a:effectRef>
+          <a:fontRef idx="minor">
+            <a:schemeClr val="tx1"/>
+          </a:fontRef>
+        </p:style>
+      </p:cxnSp>
+      <p:cxnSp>
+        <p:nvCxnSpPr>
+          <p:cNvPr id="909" name="Connector 908"/>
+          <p:cNvCxnSpPr/>
+          <p:nvPr/>
+        </p:nvCxnSpPr>
+        <p:spPr>
+          <a:xfrm flipV="1">
+            <a:off x="5120640" y="3840480"/>
+            <a:ext cx="0" cy="365760"/>
+          </a:xfrm>
+          <a:prstGeom prst="line">
+            <a:avLst/>
+          </a:prstGeom>
+          <a:ln w="19050">
+            <a:solidFill>
+              <a:srgbClr val="8E6F3E"/>
+            </a:solidFill>
+            <a:tailEnd type="triangle"/>
+          </a:ln>
+        </p:spPr>
+        <p:style>
+          <a:lnRef idx="2">
+            <a:schemeClr val="accent1"/>
+          </a:lnRef>
+          <a:fillRef idx="0">
+            <a:schemeClr val="accent1"/>
+          </a:fillRef>
+          <a:effectRef idx="1">
+            <a:schemeClr val="accent1"/>
+          </a:effectRef>
+          <a:fontRef idx="minor">
+            <a:schemeClr val="tx1"/>
+          </a:fontRef>
+        </p:style>
+      </p:cxnSp>
+      <p:sp>
+        <p:nvSpPr>
+          <p:cNvPr id="910" name="Block"/>
+          <p:cNvSpPr/>
+          <p:nvPr/>
+        </p:nvSpPr>
+        <p:spPr>
+          <a:xfrm>
+            <a:off x="2926080" y="4206240"/>
+            <a:ext cx="3291840" cy="640080"/>
+          </a:xfrm>
+          <a:prstGeom prst="rect">
+            <a:avLst/>
+          </a:prstGeom>
+          <a:solidFill>
+            <a:srgbClr val="8E6F3E"/>
+          </a:solidFill>
+          <a:ln>
+            <a:noFill/>
+          </a:ln>
+          <a:effectLst/>
+        </p:spPr>
+        <p:style>
+          <a:lnRef idx="1">
+            <a:schemeClr val="accent1"/>
+          </a:lnRef>
+          <a:fillRef idx="3">
+            <a:schemeClr val="accent1"/>
+          </a:fillRef>
+          <a:effectRef idx="2">
+            <a:schemeClr val="accent1"/>
+          </a:effectRef>
+          <a:fontRef idx="minor">
+            <a:schemeClr val="lt1"/>
+          </a:fontRef>
+        </p:style>
+        <p:txBody>
+          <a:bodyPr rtlCol="0" anchor="ctr" wrap="square" lIns="27432" rIns="27432" tIns="22860" bIns="22860"/>
+          <a:lstStyle/>
+          <a:p>
+            <a:pPr algn="ctr"/>
+            <a:r>
+              <a:rPr sz="2000" b="1" i="0">
+                <a:solidFill>
+                  <a:srgbClr val="FFFFFF"/>
+                </a:solidFill>
+              </a:rPr>
+              <a:t>OPERATING PROCESS</a:t>
+            </a:r>
+          </a:p>
+        </p:txBody>
+      </p:sp>
+      <p:sp>
+        <p:nvSpPr>
+          <p:cNvPr id="911" name="Label"/>
+          <p:cNvSpPr txBox="1"/>
+          <p:nvPr/>
+        </p:nvSpPr>
+        <p:spPr>
+          <a:xfrm>
+            <a:off x="411480" y="2377440"/>
+            <a:ext cx="2331720" cy="731520"/>
+          </a:xfrm>
+          <a:prstGeom prst="rect">
+            <a:avLst/>
+          </a:prstGeom>
+          <a:noFill/>
+        </p:spPr>
+        <p:txBody>
+          <a:bodyPr wrap="square" anchor="t" lIns="27432" rIns="27432" tIns="22860" bIns="22860">
+            <a:spAutoFit/>
+          </a:bodyPr>
+          <a:lstStyle/>
+          <a:p>
+            <a:pPr algn="r"/>
+            <a:r>
+              <a:rPr sz="2000" b="0" i="0">
+                <a:solidFill>
+                  <a:srgbClr val="555960"/>
+                </a:solidFill>
+              </a:rPr>
+              <a:t>control ↓</a:t>
+            </a:r>
+          </a:p>
+        </p:txBody>
+      </p:sp>
+      <p:sp>
+        <p:nvSpPr>
+          <p:cNvPr id="912" name="Label"/>
+          <p:cNvSpPr txBox="1"/>
+          <p:nvPr/>
+        </p:nvSpPr>
+        <p:spPr>
+          <a:xfrm>
+            <a:off x="6400800" y="2377440"/>
+            <a:ext cx="2103120" cy="731520"/>
+          </a:xfrm>
+          <a:prstGeom prst="rect">
+            <a:avLst/>
+          </a:prstGeom>
+          <a:noFill/>
+        </p:spPr>
+        <p:txBody>
+          <a:bodyPr wrap="square" anchor="t" lIns="27432" rIns="27432" tIns="22860" bIns="22860">
+            <a:spAutoFit/>
+          </a:bodyPr>
+          <a:lstStyle/>
+          <a:p>
+            <a:pPr algn="l"/>
+            <a:r>
+              <a:rPr sz="2000" b="0" i="0">
+                <a:solidFill>
+                  <a:srgbClr val="555960"/>
+                </a:solidFill>
+              </a:rPr>
+              <a:t>↑ feedback</a:t>
+            </a:r>
+          </a:p>
+        </p:txBody>
+      </p:sp>
+      <p:sp>
+        <p:nvSpPr>
+          <p:cNvPr id="913" name="Label"/>
+          <p:cNvSpPr txBox="1"/>
+          <p:nvPr/>
+        </p:nvSpPr>
+        <p:spPr>
+          <a:xfrm>
+            <a:off x="548640" y="5303520"/>
+            <a:ext cx="8046720" cy="457200"/>
+          </a:xfrm>
+          <a:prstGeom prst="rect">
+            <a:avLst/>
+          </a:prstGeom>
+          <a:noFill/>
+        </p:spPr>
+        <p:txBody>
+          <a:bodyPr wrap="square" anchor="t" lIns="27432" rIns="27432" tIns="22860" bIns="22860">
+            <a:spAutoFit/>
+          </a:bodyPr>
+          <a:lstStyle/>
+          <a:p>
+            <a:pPr algn="ctr"/>
+            <a:r>
+              <a:rPr sz="2200" b="0" i="0">
+                <a:solidFill>
+                  <a:srgbClr val="5C4826"/>
+                </a:solidFill>
+              </a:rPr>
+              <a:t>Model the entire control structure — every level, every loop.</a:t>
+            </a:r>
+          </a:p>
+        </p:txBody>
+      </p:sp>
+    </p:spTree>
+  </p:cSld>
+  <p:clrMapOvr>
+    <a:masterClrMapping/>
+  </p:clrMapOvr>
+</p:sld>
+</file>
+
+<file path=ppt/slides/slide17.xml><?xml version="1.0" encoding="utf-8"?>
+<p:sld xmlns:a="http://schemas.openxmlformats.org/drawingml/2006/main" xmlns:p="http://schemas.openxmlformats.org/presentationml/2006/main" xmlns:r="http://schemas.openxmlformats.org/officeDocument/2006/relationships">
+  <p:cSld>
+    <p:spTree>
+      <p:nvGrpSpPr>
+        <p:cNvPr id="1" name=""/>
+        <p:cNvGrpSpPr/>
+        <p:nvPr/>
+      </p:nvGrpSpPr>
+      <p:grpSpPr/>
+      <p:sp>
+        <p:nvSpPr>
+          <p:cNvPr id="3" name="Title 2"/>
+          <p:cNvSpPr>
+            <a:spLocks noGrp="1"/>
+          </p:cNvSpPr>
+          <p:nvPr>
+            <p:ph type="title"/>
+          </p:nvPr>
+        </p:nvSpPr>
+        <p:spPr/>
+        <p:txBody>
+          <a:bodyPr/>
+          <a:lstStyle/>
+          <a:p>
+            <a:r>
+              <a:rPr sz="2400" b="0" i="0">
+                <a:solidFill>
+                  <a:srgbClr val="000000"/>
+                </a:solidFill>
+              </a:rPr>
+              <a:t>More complete can become less actionable</a:t>
+            </a:r>
+          </a:p>
+        </p:txBody>
+      </p:sp>
+      <p:sp>
+        <p:nvSpPr>
+          <p:cNvPr id="900" name="Slide Number Placeholder 900"/>
+          <p:cNvSpPr>
+            <a:spLocks noGrp="1"/>
+          </p:cNvSpPr>
+          <p:nvPr>
+            <p:ph type="sldNum" sz="quarter" idx="4"/>
+          </p:nvPr>
+        </p:nvSpPr>
+        <p:spPr/>
+        <p:txBody>
+          <a:bodyPr/>
+          <a:lstStyle/>
+          <a:p>
+            <a:fld id="{C081D2A1-8AAE-4C69-B798-CC856F26A35C}" type="slidenum">
+              <a:rPr lang="en-US" smtClean="0"/>
+              <a:t>17</a:t>
+            </a:fld>
+            <a:endParaRPr lang="en-US"/>
+          </a:p>
+        </p:txBody>
+      </p:sp>
+      <p:sp>
+        <p:nvSpPr>
+          <p:cNvPr id="901" name="Card"/>
+          <p:cNvSpPr/>
+          <p:nvPr/>
+        </p:nvSpPr>
+        <p:spPr>
+          <a:xfrm>
+            <a:off x="548640" y="2103120"/>
+            <a:ext cx="1828800" cy="822960"/>
+          </a:xfrm>
+          <a:prstGeom prst="rect">
+            <a:avLst/>
+          </a:prstGeom>
+          <a:solidFill>
+            <a:srgbClr val="F5F1E8"/>
+          </a:solidFill>
+          <a:ln w="12700">
+            <a:solidFill>
+              <a:srgbClr val="C9B991"/>
+            </a:solidFill>
+          </a:ln>
+          <a:effectLst/>
+        </p:spPr>
+        <p:style>
+          <a:lnRef idx="1">
+            <a:schemeClr val="accent1"/>
+          </a:lnRef>
+          <a:fillRef idx="3">
+            <a:schemeClr val="accent1"/>
+          </a:fillRef>
+          <a:effectRef idx="2">
+            <a:schemeClr val="accent1"/>
+          </a:effectRef>
+          <a:fontRef idx="minor">
+            <a:schemeClr val="lt1"/>
+          </a:fontRef>
+        </p:style>
+        <p:txBody>
+          <a:bodyPr rtlCol="0" anchor="ctr" wrap="square" lIns="27432" rIns="27432" tIns="22860" bIns="22860"/>
+          <a:lstStyle/>
+          <a:p>
+            <a:pPr algn="ctr"/>
+            <a:r>
+              <a:rPr sz="2000" b="1" i="0">
+                <a:solidFill>
+                  <a:srgbClr val="5C4826"/>
+                </a:solidFill>
+              </a:rPr>
+              <a:t>Human error</a:t>
+            </a:r>
+          </a:p>
+        </p:txBody>
+      </p:sp>
+      <p:sp>
+        <p:nvSpPr>
+          <p:cNvPr id="902" name="Card"/>
+          <p:cNvSpPr/>
+          <p:nvPr/>
+        </p:nvSpPr>
+        <p:spPr>
+          <a:xfrm>
+            <a:off x="2624328" y="2103120"/>
+            <a:ext cx="1828800" cy="822960"/>
+          </a:xfrm>
+          <a:prstGeom prst="rect">
+            <a:avLst/>
+          </a:prstGeom>
+          <a:solidFill>
+            <a:srgbClr val="F5F1E8"/>
+          </a:solidFill>
+          <a:ln w="12700">
+            <a:solidFill>
+              <a:srgbClr val="C9B991"/>
+            </a:solidFill>
+          </a:ln>
+          <a:effectLst/>
+        </p:spPr>
+        <p:style>
+          <a:lnRef idx="1">
+            <a:schemeClr val="accent1"/>
+          </a:lnRef>
+          <a:fillRef idx="3">
+            <a:schemeClr val="accent1"/>
+          </a:fillRef>
+          <a:effectRef idx="2">
+            <a:schemeClr val="accent1"/>
+          </a:effectRef>
+          <a:fontRef idx="minor">
+            <a:schemeClr val="lt1"/>
+          </a:fontRef>
+        </p:style>
+        <p:txBody>
+          <a:bodyPr rtlCol="0" anchor="ctr" wrap="square" lIns="27432" rIns="27432" tIns="22860" bIns="22860"/>
+          <a:lstStyle/>
+          <a:p>
+            <a:pPr algn="ctr"/>
+            <a:r>
+              <a:rPr sz="2000" b="1" i="0">
+                <a:solidFill>
+                  <a:srgbClr val="5C4826"/>
+                </a:solidFill>
+              </a:rPr>
+              <a:t>Swiss cheese</a:t>
+            </a:r>
+          </a:p>
+        </p:txBody>
+      </p:sp>
+      <p:sp>
+        <p:nvSpPr>
+          <p:cNvPr id="903" name="Card"/>
+          <p:cNvSpPr/>
+          <p:nvPr/>
+        </p:nvSpPr>
+        <p:spPr>
+          <a:xfrm>
+            <a:off x="4700016" y="2103120"/>
+            <a:ext cx="1828800" cy="822960"/>
+          </a:xfrm>
+          <a:prstGeom prst="rect">
+            <a:avLst/>
+          </a:prstGeom>
+          <a:solidFill>
+            <a:srgbClr val="F5F1E8"/>
+          </a:solidFill>
+          <a:ln w="12700">
+            <a:solidFill>
+              <a:srgbClr val="C9B991"/>
+            </a:solidFill>
+          </a:ln>
+          <a:effectLst/>
+        </p:spPr>
+        <p:style>
+          <a:lnRef idx="1">
+            <a:schemeClr val="accent1"/>
+          </a:lnRef>
+          <a:fillRef idx="3">
+            <a:schemeClr val="accent1"/>
+          </a:fillRef>
+          <a:effectRef idx="2">
+            <a:schemeClr val="accent1"/>
+          </a:effectRef>
+          <a:fontRef idx="minor">
+            <a:schemeClr val="lt1"/>
+          </a:fontRef>
+        </p:style>
+        <p:txBody>
+          <a:bodyPr rtlCol="0" anchor="ctr" wrap="square" lIns="27432" rIns="27432" tIns="22860" bIns="22860"/>
+          <a:lstStyle/>
+          <a:p>
+            <a:pPr algn="ctr"/>
+            <a:r>
+              <a:rPr sz="2000" b="1" i="0">
+                <a:solidFill>
+                  <a:srgbClr val="5C4826"/>
+                </a:solidFill>
+              </a:rPr>
+              <a:t>Organizational</a:t>
+            </a:r>
+          </a:p>
+        </p:txBody>
+      </p:sp>
+      <p:sp>
+        <p:nvSpPr>
+          <p:cNvPr id="904" name="Card"/>
+          <p:cNvSpPr/>
+          <p:nvPr/>
+        </p:nvSpPr>
+        <p:spPr>
+          <a:xfrm>
+            <a:off x="6775704" y="2103120"/>
+            <a:ext cx="1828800" cy="822960"/>
+          </a:xfrm>
+          <a:prstGeom prst="rect">
+            <a:avLst/>
+          </a:prstGeom>
+          <a:solidFill>
+            <a:srgbClr val="F5F1E8"/>
+          </a:solidFill>
+          <a:ln w="12700">
+            <a:solidFill>
+              <a:srgbClr val="C9B991"/>
+            </a:solidFill>
+          </a:ln>
+          <a:effectLst/>
+        </p:spPr>
+        <p:style>
+          <a:lnRef idx="1">
+            <a:schemeClr val="accent1"/>
+          </a:lnRef>
+          <a:fillRef idx="3">
+            <a:schemeClr val="accent1"/>
+          </a:fillRef>
+          <a:effectRef idx="2">
+            <a:schemeClr val="accent1"/>
+          </a:effectRef>
+          <a:fontRef idx="minor">
+            <a:schemeClr val="lt1"/>
+          </a:fontRef>
+        </p:style>
+        <p:txBody>
+          <a:bodyPr rtlCol="0" anchor="ctr" wrap="square" lIns="27432" rIns="27432" tIns="22860" bIns="22860"/>
+          <a:lstStyle/>
+          <a:p>
+            <a:pPr algn="ctr"/>
+            <a:r>
+              <a:rPr sz="2000" b="1" i="0">
+                <a:solidFill>
+                  <a:srgbClr val="5C4826"/>
+                </a:solidFill>
+              </a:rPr>
+              <a:t>STAMP</a:t>
+            </a:r>
+          </a:p>
+        </p:txBody>
+      </p:sp>
+      <p:cxnSp>
+        <p:nvCxnSpPr>
+          <p:cNvPr id="905" name="Connector 904"/>
+          <p:cNvCxnSpPr/>
+          <p:nvPr/>
+        </p:nvCxnSpPr>
+        <p:spPr>
+          <a:xfrm>
+            <a:off x="548640" y="3383280"/>
+            <a:ext cx="8001000" cy="0"/>
+          </a:xfrm>
+          <a:prstGeom prst="line">
+            <a:avLst/>
+          </a:prstGeom>
+          <a:ln w="28575">
+            <a:solidFill>
+              <a:srgbClr val="8E6F3E"/>
+            </a:solidFill>
+            <a:tailEnd type="triangle"/>
+          </a:ln>
+        </p:spPr>
+        <p:style>
+          <a:lnRef idx="2">
+            <a:schemeClr val="accent1"/>
+          </a:lnRef>
+          <a:fillRef idx="0">
+            <a:schemeClr val="accent1"/>
+          </a:fillRef>
+          <a:effectRef idx="1">
+            <a:schemeClr val="accent1"/>
+          </a:effectRef>
+          <a:fontRef idx="minor">
+            <a:schemeClr val="tx1"/>
+          </a:fontRef>
+        </p:style>
+      </p:cxnSp>
+      <p:sp>
+        <p:nvSpPr>
+          <p:cNvPr id="906" name="Label"/>
+          <p:cNvSpPr txBox="1"/>
+          <p:nvPr/>
+        </p:nvSpPr>
+        <p:spPr>
+          <a:xfrm>
+            <a:off x="548640" y="3520440"/>
+            <a:ext cx="8046720" cy="411480"/>
+          </a:xfrm>
+          <a:prstGeom prst="rect">
+            <a:avLst/>
+          </a:prstGeom>
+          <a:noFill/>
+        </p:spPr>
+        <p:txBody>
+          <a:bodyPr wrap="square" anchor="t" lIns="27432" rIns="27432" tIns="22860" bIns="22860">
+            <a:spAutoFit/>
+          </a:bodyPr>
+          <a:lstStyle/>
+          <a:p>
+            <a:pPr algn="ctr"/>
+            <a:r>
+              <a:rPr sz="2000" b="1" i="0">
+                <a:solidFill>
+                  <a:srgbClr val="8E6F3E"/>
+                </a:solidFill>
+              </a:rPr>
+              <a:t>more complete →</a:t>
+            </a:r>
+          </a:p>
+        </p:txBody>
+      </p:sp>
+    </p:spTree>
+  </p:cSld>
+  <p:clrMapOvr>
+    <a:masterClrMapping/>
+  </p:clrMapOvr>
+</p:sld>
+</file>
+
+<file path=ppt/slides/slide18.xml><?xml version="1.0" encoding="utf-8"?>
+<p:sld xmlns:a="http://schemas.openxmlformats.org/drawingml/2006/main" xmlns:p="http://schemas.openxmlformats.org/presentationml/2006/main" xmlns:r="http://schemas.openxmlformats.org/officeDocument/2006/relationships">
+  <p:cSld>
+    <p:spTree>
+      <p:nvGrpSpPr>
+        <p:cNvPr id="1" name=""/>
+        <p:cNvGrpSpPr/>
+        <p:nvPr/>
+      </p:nvGrpSpPr>
+      <p:grpSpPr/>
+      <p:sp>
+        <p:nvSpPr>
+          <p:cNvPr id="3" name="Title 2"/>
+          <p:cNvSpPr>
+            <a:spLocks noGrp="1"/>
+          </p:cNvSpPr>
+          <p:nvPr>
+            <p:ph type="title"/>
+          </p:nvPr>
+        </p:nvSpPr>
+        <p:spPr/>
+        <p:txBody>
+          <a:bodyPr/>
+          <a:lstStyle/>
+          <a:p>
+            <a:r>
+              <a:rPr sz="2400" b="0" i="0">
+                <a:solidFill>
+                  <a:srgbClr val="000000"/>
+                </a:solidFill>
+              </a:rPr>
+              <a:t>Match the causal model to the locus of control</a:t>
+            </a:r>
+          </a:p>
+        </p:txBody>
+      </p:sp>
+      <p:sp>
+        <p:nvSpPr>
+          <p:cNvPr id="900" name="Slide Number Placeholder 900"/>
+          <p:cNvSpPr>
+            <a:spLocks noGrp="1"/>
+          </p:cNvSpPr>
+          <p:nvPr>
+            <p:ph type="sldNum" sz="quarter" idx="4"/>
+          </p:nvPr>
+        </p:nvSpPr>
+        <p:spPr/>
+        <p:txBody>
+          <a:bodyPr/>
+          <a:lstStyle/>
+          <a:p>
+            <a:fld id="{2B19A40B-0D44-4B8E-9931-7BD3CA1819BF}" type="slidenum">
+              <a:rPr lang="en-US" smtClean="0"/>
+              <a:t>18</a:t>
+            </a:fld>
+            <a:endParaRPr lang="en-US"/>
+          </a:p>
+        </p:txBody>
+      </p:sp>
+      <p:graphicFrame>
+        <p:nvGraphicFramePr>
+          <p:cNvPr id="901" name="Table 900"/>
+          <p:cNvGraphicFramePr>
+            <a:graphicFrameLocks noGrp="1"/>
+          </p:cNvGraphicFramePr>
+          <p:nvPr/>
+        </p:nvGraphicFramePr>
+        <p:xfrm>
+          <a:off x="731520" y="1280160"/>
+          <a:ext cx="7680960" cy="3291840"/>
+        </p:xfrm>
+        <a:graphic>
+          <a:graphicData uri="http://schemas.openxmlformats.org/drawingml/2006/table">
+            <a:tbl>
+              <a:tblPr firstRow="1" bandRow="1">
+                <a:tableStyleId>{5C22544A-7EE6-4342-B048-85BDC9FD1C3A}</a:tableStyleId>
+              </a:tblPr>
+              <a:tblGrid>
+                <a:gridCol w="2651760"/>
+                <a:gridCol w="5029200"/>
+              </a:tblGrid>
+              <a:tr h="658368">
+                <a:tc>
+                  <a:txBody>
+                    <a:bodyPr/>
+                    <a:lstStyle/>
+                    <a:p>
+                      <a:pPr algn="l"/>
+                      <a:r>
+                        <a:rPr sz="2000" b="1" i="0">
+                          <a:solidFill>
+                            <a:srgbClr val="FFFFFF"/>
+                          </a:solidFill>
+                        </a:rPr>
+                        <a:t>CAUSAL MODEL</a:t>
+                      </a:r>
+                    </a:p>
+                  </a:txBody>
+                  <a:tcPr anchor="ctr" marL="54864">
+                    <a:solidFill>
+                      <a:srgbClr val="8E6F3E"/>
+                    </a:solidFill>
+                  </a:tcPr>
+                </a:tc>
+                <a:tc>
+                  <a:txBody>
+                    <a:bodyPr/>
+                    <a:lstStyle/>
+                    <a:p>
+                      <a:pPr algn="l"/>
+                      <a:r>
+                        <a:rPr sz="2000" b="1" i="0">
+                          <a:solidFill>
+                            <a:srgbClr val="FFFFFF"/>
+                          </a:solidFill>
+                        </a:rPr>
+                        <a:t>THE LEVER IT HANDS YOU</a:t>
+                      </a:r>
+                    </a:p>
+                  </a:txBody>
+                  <a:tcPr anchor="ctr" marL="54864">
+                    <a:solidFill>
+                      <a:srgbClr val="8E6F3E"/>
+                    </a:solidFill>
+                  </a:tcPr>
+                </a:tc>
+              </a:tr>
+              <a:tr h="658368">
+                <a:tc>
+                  <a:txBody>
+                    <a:bodyPr/>
+                    <a:lstStyle/>
+                    <a:p>
+                      <a:pPr algn="l"/>
+                      <a:r>
+                        <a:rPr sz="2000" b="1" i="0">
+                          <a:solidFill>
+                            <a:srgbClr val="5C4826"/>
+                          </a:solidFill>
+                        </a:rPr>
+                        <a:t>Human error</a:t>
+                      </a:r>
+                    </a:p>
+                  </a:txBody>
+                  <a:tcPr anchor="ctr" marL="54864">
+                    <a:solidFill>
+                      <a:srgbClr val="F5F1E8"/>
+                    </a:solidFill>
+                  </a:tcPr>
+                </a:tc>
+                <a:tc>
+                  <a:txBody>
+                    <a:bodyPr/>
+                    <a:lstStyle/>
+                    <a:p>
+                      <a:pPr algn="l"/>
+                      <a:r>
+                        <a:rPr sz="2000" b="0" i="0">
+                          <a:solidFill>
+                            <a:srgbClr val="5C4826"/>
+                          </a:solidFill>
+                        </a:rPr>
+                        <a:t>an individual's behavior</a:t>
+                      </a:r>
+                    </a:p>
+                  </a:txBody>
+                  <a:tcPr anchor="ctr" marL="54864">
+                    <a:solidFill>
+                      <a:srgbClr val="F5F1E8"/>
+                    </a:solidFill>
+                  </a:tcPr>
+                </a:tc>
+              </a:tr>
+              <a:tr h="658368">
+                <a:tc>
+                  <a:txBody>
+                    <a:bodyPr/>
+                    <a:lstStyle/>
+                    <a:p>
+                      <a:pPr algn="l"/>
+                      <a:r>
+                        <a:rPr sz="2000" b="1" i="0">
+                          <a:solidFill>
+                            <a:srgbClr val="5C4826"/>
+                          </a:solidFill>
+                        </a:rPr>
+                        <a:t>Swiss cheese</a:t>
+                      </a:r>
+                    </a:p>
+                  </a:txBody>
+                  <a:tcPr anchor="ctr" marL="54864">
+                    <a:solidFill>
+                      <a:srgbClr val="FBF8F2"/>
+                    </a:solidFill>
+                  </a:tcPr>
+                </a:tc>
+                <a:tc>
+                  <a:txBody>
+                    <a:bodyPr/>
+                    <a:lstStyle/>
+                    <a:p>
+                      <a:pPr algn="l"/>
+                      <a:r>
+                        <a:rPr sz="2000" b="0" i="0">
+                          <a:solidFill>
+                            <a:srgbClr val="5C4826"/>
+                          </a:solidFill>
+                        </a:rPr>
+                        <a:t>the set of defenses</a:t>
+                      </a:r>
+                    </a:p>
+                  </a:txBody>
+                  <a:tcPr anchor="ctr" marL="54864">
+                    <a:solidFill>
+                      <a:srgbClr val="FBF8F2"/>
+                    </a:solidFill>
+                  </a:tcPr>
+                </a:tc>
+              </a:tr>
+              <a:tr h="658368">
+                <a:tc>
+                  <a:txBody>
+                    <a:bodyPr/>
+                    <a:lstStyle/>
+                    <a:p>
+                      <a:pPr algn="l"/>
+                      <a:r>
+                        <a:rPr sz="2000" b="1" i="0">
+                          <a:solidFill>
+                            <a:srgbClr val="5C4826"/>
+                          </a:solidFill>
+                        </a:rPr>
+                        <a:t>Organizational</a:t>
+                      </a:r>
+                    </a:p>
+                  </a:txBody>
+                  <a:tcPr anchor="ctr" marL="54864">
+                    <a:solidFill>
+                      <a:srgbClr val="F5F1E8"/>
+                    </a:solidFill>
+                  </a:tcPr>
+                </a:tc>
+                <a:tc>
+                  <a:txBody>
+                    <a:bodyPr/>
+                    <a:lstStyle/>
+                    <a:p>
+                      <a:pPr algn="l"/>
+                      <a:r>
+                        <a:rPr sz="2000" b="0" i="0">
+                          <a:solidFill>
+                            <a:srgbClr val="5C4826"/>
+                          </a:solidFill>
+                        </a:rPr>
+                        <a:t>the conditions that shape behavior</a:t>
+                      </a:r>
+                    </a:p>
+                  </a:txBody>
+                  <a:tcPr anchor="ctr" marL="54864">
+                    <a:solidFill>
+                      <a:srgbClr val="F5F1E8"/>
+                    </a:solidFill>
+                  </a:tcPr>
+                </a:tc>
+              </a:tr>
+              <a:tr h="658368">
+                <a:tc>
+                  <a:txBody>
+                    <a:bodyPr/>
+                    <a:lstStyle/>
+                    <a:p>
+                      <a:pPr algn="l"/>
+                      <a:r>
+                        <a:rPr sz="2000" b="1" i="0">
+                          <a:solidFill>
+                            <a:srgbClr val="5C4826"/>
+                          </a:solidFill>
+                        </a:rPr>
+                        <a:t>STAMP</a:t>
+                      </a:r>
+                    </a:p>
+                  </a:txBody>
+                  <a:tcPr anchor="ctr" marL="54864">
+                    <a:solidFill>
+                      <a:srgbClr val="FBF8F2"/>
+                    </a:solidFill>
+                  </a:tcPr>
+                </a:tc>
+                <a:tc>
+                  <a:txBody>
+                    <a:bodyPr/>
+                    <a:lstStyle/>
+                    <a:p>
+                      <a:pPr algn="l"/>
+                      <a:r>
+                        <a:rPr sz="2000" b="0" i="0">
+                          <a:solidFill>
+                            <a:srgbClr val="5C4826"/>
+                          </a:solidFill>
+                        </a:rPr>
+                        <a:t>the whole control structure</a:t>
+                      </a:r>
+                    </a:p>
+                  </a:txBody>
+                  <a:tcPr anchor="ctr" marL="54864">
+                    <a:solidFill>
+                      <a:srgbClr val="FBF8F2"/>
+                    </a:solidFill>
+                  </a:tcPr>
+                </a:tc>
+              </a:tr>
+            </a:tbl>
+          </a:graphicData>
+        </a:graphic>
+      </p:graphicFrame>
+      <p:sp>
+        <p:nvSpPr>
+          <p:cNvPr id="902" name="FooterBand"/>
+          <p:cNvSpPr/>
+          <p:nvPr/>
+        </p:nvSpPr>
+        <p:spPr>
+          <a:xfrm>
+            <a:off x="274320" y="5852159"/>
+            <a:ext cx="8595360" cy="566928"/>
+          </a:xfrm>
+          <a:prstGeom prst="rect">
+            <a:avLst/>
+          </a:prstGeom>
+          <a:solidFill>
+            <a:srgbClr val="8E6F3E"/>
+          </a:solidFill>
+          <a:ln>
+            <a:noFill/>
+          </a:ln>
+          <a:effectLst/>
+        </p:spPr>
+        <p:style>
+          <a:lnRef idx="1">
+            <a:schemeClr val="accent1"/>
+          </a:lnRef>
+          <a:fillRef idx="3">
+            <a:schemeClr val="accent1"/>
+          </a:fillRef>
+          <a:effectRef idx="2">
+            <a:schemeClr val="accent1"/>
+          </a:effectRef>
+          <a:fontRef idx="minor">
+            <a:schemeClr val="lt1"/>
+          </a:fontRef>
+        </p:style>
+        <p:txBody>
+          <a:bodyPr rtlCol="0" anchor="ctr" wrap="square" lIns="27432" rIns="27432" tIns="22860" bIns="22860"/>
+          <a:lstStyle/>
+          <a:p>
+            <a:pPr algn="ctr"/>
+            <a:r>
+              <a:rPr sz="2000" b="1" i="0">
+                <a:solidFill>
+                  <a:srgbClr val="FFFFFF"/>
+                </a:solidFill>
+              </a:rPr>
+              <a:t>Choose the model whose levers you actually hold.</a:t>
             </a:r>
           </a:p>
         </p:txBody>
@@ -5535,7 +9449,7 @@
           <a:bodyPr/>
           <a:lstStyle/>
           <a:p>
-            <a:fld id="{155AE75C-AB6C-4125-BFE9-406CA83A7CFB}" type="slidenum">
+            <a:fld id="{6B89A994-9FE4-4018-8D0C-C44F8B0CB085}" type="slidenum">
               <a:rPr lang="en-US" smtClean="0"/>
               <a:t>2</a:t>
             </a:fld>
@@ -5898,7 +9812,7 @@
           <a:bodyPr/>
           <a:lstStyle/>
           <a:p>
-            <a:fld id="{01BDC517-05B0-4E8B-A3B4-B370FFB86ED8}" type="slidenum">
+            <a:fld id="{0E283878-7FEA-4811-B90C-385DB6556BF2}" type="slidenum">
               <a:rPr lang="en-US" smtClean="0"/>
               <a:t>3</a:t>
             </a:fld>
@@ -6381,7 +10295,7 @@
           <a:bodyPr/>
           <a:lstStyle/>
           <a:p>
-            <a:fld id="{FA37DE62-963E-48C9-8611-6D485901781C}" type="slidenum">
+            <a:fld id="{0C1F7B64-CBB4-464E-AB41-FA37D38811D8}" type="slidenum">
               <a:rPr lang="en-US" smtClean="0"/>
               <a:t>4</a:t>
             </a:fld>
@@ -7124,7 +11038,7 @@
           <a:bodyPr/>
           <a:lstStyle/>
           <a:p>
-            <a:fld id="{0804328E-D302-45E8-A742-60DF59624496}" type="slidenum">
+            <a:fld id="{B2F585DF-8792-4B44-A55D-46AF45B931D7}" type="slidenum">
               <a:rPr lang="en-US" smtClean="0"/>
               <a:t>5</a:t>
             </a:fld>
@@ -7471,7 +11385,7 @@
           <a:bodyPr/>
           <a:lstStyle/>
           <a:p>
-            <a:fld id="{343BFF32-1C9F-4A02-9534-4892B77E7903}" type="slidenum">
+            <a:fld id="{2A4C8AD4-B258-43AE-BB11-07B720D492DE}" type="slidenum">
               <a:rPr lang="en-US" smtClean="0"/>
               <a:t>6</a:t>
             </a:fld>
@@ -7714,7 +11628,7 @@
           <a:bodyPr/>
           <a:lstStyle/>
           <a:p>
-            <a:fld id="{0C380F64-5589-4881-9E79-1E838A302942}" type="slidenum">
+            <a:fld id="{B63FC52C-085A-44CD-88FF-F0B89574F0D7}" type="slidenum">
               <a:rPr lang="en-US" smtClean="0"/>
               <a:t>7</a:t>
             </a:fld>
@@ -7966,7 +11880,7 @@
           <a:bodyPr/>
           <a:lstStyle/>
           <a:p>
-            <a:fld id="{32CCAD70-5FE6-481C-AFBB-4BE502F26105}" type="slidenum">
+            <a:fld id="{EB2254B0-2847-446D-A99B-3B146C8B0742}" type="slidenum">
               <a:rPr lang="en-US" smtClean="0"/>
               <a:t>8</a:t>
             </a:fld>
@@ -8760,7 +12674,7 @@
           <a:bodyPr/>
           <a:lstStyle/>
           <a:p>
-            <a:fld id="{90B43C42-9F52-4E8B-B110-4C9922864C05}" type="slidenum">
+            <a:fld id="{1AD63376-E242-4330-85AB-CDFE7346944A}" type="slidenum">
               <a:rPr lang="en-US" smtClean="0"/>
               <a:t>9</a:t>
             </a:fld>

--- a/course/lectures/act-2-delegation-and-control/04-failure-aware-engineering/2-4-Failure-Aware-Engineering.pptx
+++ b/course/lectures/act-2-delegation-and-control/04-failure-aware-engineering/2-4-Failure-Aware-Engineering.pptx
@@ -26,6 +26,18 @@
     <p:sldId id="271" r:id="rId22"/>
     <p:sldId id="272" r:id="rId23"/>
     <p:sldId id="273" r:id="rId24"/>
+    <p:sldId id="274" r:id="rId25"/>
+    <p:sldId id="275" r:id="rId26"/>
+    <p:sldId id="276" r:id="rId27"/>
+    <p:sldId id="277" r:id="rId28"/>
+    <p:sldId id="278" r:id="rId29"/>
+    <p:sldId id="279" r:id="rId30"/>
+    <p:sldId id="280" r:id="rId31"/>
+    <p:sldId id="281" r:id="rId32"/>
+    <p:sldId id="282" r:id="rId6"/>
+    <p:sldId id="283" r:id="rId5"/>
+    <p:sldId id="284" r:id="rId4"/>
+    <p:sldId id="285" r:id="rId3"/>
   </p:sldIdLst>
   <p:sldSz cx="9144000" cy="6858000" type="screen4x3"/>
   <p:notesSz cx="6858000" cy="9144000"/>
@@ -1287,6 +1299,81 @@
 </p:notes>
 </file>
 
+<file path=ppt/notesSlides/notesSlide19.xml><?xml version="1.0" encoding="utf-8"?>
+<p:notes xmlns:a="http://schemas.openxmlformats.org/drawingml/2006/main" xmlns:p="http://schemas.openxmlformats.org/presentationml/2006/main" xmlns:r="http://schemas.openxmlformats.org/officeDocument/2006/relationships">
+  <p:cSld>
+    <p:spTree>
+      <p:nvGrpSpPr>
+        <p:cNvPr id="1" name=""/>
+        <p:cNvGrpSpPr/>
+        <p:nvPr/>
+      </p:nvGrpSpPr>
+      <p:grpSpPr>
+        <a:xfrm>
+          <a:off x="0" y="0"/>
+          <a:ext cx="0" cy="0"/>
+          <a:chOff x="0" y="0"/>
+          <a:chExt cx="0" cy="0"/>
+        </a:xfrm>
+      </p:grpSpPr>
+      <p:sp>
+        <p:nvSpPr>
+          <p:cNvPr id="2" name="Slide Image Placeholder 1"/>
+          <p:cNvSpPr>
+            <a:spLocks noGrp="1"/>
+          </p:cNvSpPr>
+          <p:nvPr>
+            <p:ph type="sldImg" idx="2"/>
+          </p:nvPr>
+        </p:nvSpPr>
+        <p:spPr/>
+      </p:sp>
+      <p:sp>
+        <p:nvSpPr>
+          <p:cNvPr id="3" name="Notes Placeholder 2"/>
+          <p:cNvSpPr>
+            <a:spLocks noGrp="1"/>
+          </p:cNvSpPr>
+          <p:nvPr>
+            <p:ph type="body" idx="3" sz="quarter"/>
+          </p:nvPr>
+        </p:nvSpPr>
+        <p:spPr/>
+        <p:txBody>
+          <a:bodyPr/>
+          <a:lstStyle/>
+          <a:p>
+            <a:r>
+              <a:t>TIMING: &lt;1 minute</a:t>
+            </a:r>
+          </a:p>
+          <a:p>
+            <a:r>
+              <a:t>- The second half converges on governance conversion; diagnosis comes first.</a:t>
+            </a:r>
+          </a:p>
+        </p:txBody>
+      </p:sp>
+      <p:sp>
+        <p:nvSpPr>
+          <p:cNvPr id="4" name="Slide Number Placeholder 3"/>
+          <p:cNvSpPr>
+            <a:spLocks noGrp="1"/>
+          </p:cNvSpPr>
+          <p:nvPr>
+            <p:ph type="sldNum" idx="5" sz="quarter"/>
+          </p:nvPr>
+        </p:nvSpPr>
+        <p:spPr/>
+      </p:sp>
+    </p:spTree>
+  </p:cSld>
+  <p:clrMapOvr>
+    <a:masterClrMapping/>
+  </p:clrMapOvr>
+</p:notes>
+</file>
+
 <file path=ppt/notesSlides/notesSlide2.xml><?xml version="1.0" encoding="utf-8"?>
 <p:notes xmlns:a="http://schemas.openxmlformats.org/drawingml/2006/main" xmlns:p="http://schemas.openxmlformats.org/presentationml/2006/main" xmlns:r="http://schemas.openxmlformats.org/officeDocument/2006/relationships">
   <p:cSld>
@@ -1348,6 +1435,796 @@
           <a:p>
             <a:r>
               <a:t>- ASK the footer question. Expected recall from Act I: requirements, specification, architecture, design, validation. Good Act I recall.</a:t>
+            </a:r>
+          </a:p>
+        </p:txBody>
+      </p:sp>
+      <p:sp>
+        <p:nvSpPr>
+          <p:cNvPr id="4" name="Slide Number Placeholder 3"/>
+          <p:cNvSpPr>
+            <a:spLocks noGrp="1"/>
+          </p:cNvSpPr>
+          <p:nvPr>
+            <p:ph type="sldNum" idx="5" sz="quarter"/>
+          </p:nvPr>
+        </p:nvSpPr>
+        <p:spPr/>
+      </p:sp>
+    </p:spTree>
+  </p:cSld>
+  <p:clrMapOvr>
+    <a:masterClrMapping/>
+  </p:clrMapOvr>
+</p:notes>
+</file>
+
+<file path=ppt/notesSlides/notesSlide20.xml><?xml version="1.0" encoding="utf-8"?>
+<p:notes xmlns:a="http://schemas.openxmlformats.org/drawingml/2006/main" xmlns:p="http://schemas.openxmlformats.org/presentationml/2006/main" xmlns:r="http://schemas.openxmlformats.org/officeDocument/2006/relationships">
+  <p:cSld>
+    <p:spTree>
+      <p:nvGrpSpPr>
+        <p:cNvPr id="1" name=""/>
+        <p:cNvGrpSpPr/>
+        <p:nvPr/>
+      </p:nvGrpSpPr>
+      <p:grpSpPr>
+        <a:xfrm>
+          <a:off x="0" y="0"/>
+          <a:ext cx="0" cy="0"/>
+          <a:chOff x="0" y="0"/>
+          <a:chExt cx="0" cy="0"/>
+        </a:xfrm>
+      </p:grpSpPr>
+      <p:sp>
+        <p:nvSpPr>
+          <p:cNvPr id="2" name="Slide Image Placeholder 1"/>
+          <p:cNvSpPr>
+            <a:spLocks noGrp="1"/>
+          </p:cNvSpPr>
+          <p:nvPr>
+            <p:ph type="sldImg" idx="2"/>
+          </p:nvPr>
+        </p:nvSpPr>
+        <p:spPr/>
+      </p:sp>
+      <p:sp>
+        <p:nvSpPr>
+          <p:cNvPr id="3" name="Notes Placeholder 2"/>
+          <p:cNvSpPr>
+            <a:spLocks noGrp="1"/>
+          </p:cNvSpPr>
+          <p:nvPr>
+            <p:ph type="body" idx="3" sz="quarter"/>
+          </p:nvPr>
+        </p:nvSpPr>
+        <p:spPr/>
+        <p:txBody>
+          <a:bodyPr/>
+          <a:lstStyle/>
+          <a:p>
+            <a:r>
+              <a:t>TIMING: 2 minutes</a:t>
+            </a:r>
+          </a:p>
+          <a:p>
+            <a:r>
+              <a:t>- Walk the chain: requirements -&gt; specification -&gt; architecture -&gt; design -&gt; implementation.</a:t>
+            </a:r>
+          </a:p>
+          <a:p>
+            <a:r>
+              <a:t>- ASK where the Volkswagen failure lived on this chain. The discussion should surface that it was not an implementation defect.</a:t>
+            </a:r>
+          </a:p>
+        </p:txBody>
+      </p:sp>
+      <p:sp>
+        <p:nvSpPr>
+          <p:cNvPr id="4" name="Slide Number Placeholder 3"/>
+          <p:cNvSpPr>
+            <a:spLocks noGrp="1"/>
+          </p:cNvSpPr>
+          <p:nvPr>
+            <p:ph type="sldNum" idx="5" sz="quarter"/>
+          </p:nvPr>
+        </p:nvSpPr>
+        <p:spPr/>
+      </p:sp>
+    </p:spTree>
+  </p:cSld>
+  <p:clrMapOvr>
+    <a:masterClrMapping/>
+  </p:clrMapOvr>
+</p:notes>
+</file>
+
+<file path=ppt/notesSlides/notesSlide21.xml><?xml version="1.0" encoding="utf-8"?>
+<p:notes xmlns:a="http://schemas.openxmlformats.org/drawingml/2006/main" xmlns:p="http://schemas.openxmlformats.org/presentationml/2006/main" xmlns:r="http://schemas.openxmlformats.org/officeDocument/2006/relationships">
+  <p:cSld>
+    <p:spTree>
+      <p:nvGrpSpPr>
+        <p:cNvPr id="1" name=""/>
+        <p:cNvGrpSpPr/>
+        <p:nvPr/>
+      </p:nvGrpSpPr>
+      <p:grpSpPr>
+        <a:xfrm>
+          <a:off x="0" y="0"/>
+          <a:ext cx="0" cy="0"/>
+          <a:chOff x="0" y="0"/>
+          <a:chExt cx="0" cy="0"/>
+        </a:xfrm>
+      </p:grpSpPr>
+      <p:sp>
+        <p:nvSpPr>
+          <p:cNvPr id="2" name="Slide Image Placeholder 1"/>
+          <p:cNvSpPr>
+            <a:spLocks noGrp="1"/>
+          </p:cNvSpPr>
+          <p:nvPr>
+            <p:ph type="sldImg" idx="2"/>
+          </p:nvPr>
+        </p:nvSpPr>
+        <p:spPr/>
+      </p:sp>
+      <p:sp>
+        <p:nvSpPr>
+          <p:cNvPr id="3" name="Notes Placeholder 2"/>
+          <p:cNvSpPr>
+            <a:spLocks noGrp="1"/>
+          </p:cNvSpPr>
+          <p:nvPr>
+            <p:ph type="body" idx="3" sz="quarter"/>
+          </p:nvPr>
+        </p:nvSpPr>
+        <p:spPr/>
+        <p:txBody>
+          <a:bodyPr/>
+          <a:lstStyle/>
+          <a:p>
+            <a:r>
+              <a:t>TIMING: 1-2 minutes</a:t>
+            </a:r>
+          </a:p>
+          <a:p>
+            <a:r>
+              <a:t>- A single incident rarely maps to a single decision; the diagnosis may implicate several at once.</a:t>
+            </a:r>
+          </a:p>
+          <a:p>
+            <a:r>
+              <a:t>- Volkswagen: the requirement conflict, the design response, and the authority structure were all implicated.</a:t>
+            </a:r>
+          </a:p>
+        </p:txBody>
+      </p:sp>
+      <p:sp>
+        <p:nvSpPr>
+          <p:cNvPr id="4" name="Slide Number Placeholder 3"/>
+          <p:cNvSpPr>
+            <a:spLocks noGrp="1"/>
+          </p:cNvSpPr>
+          <p:nvPr>
+            <p:ph type="sldNum" idx="5" sz="quarter"/>
+          </p:nvPr>
+        </p:nvSpPr>
+        <p:spPr/>
+      </p:sp>
+    </p:spTree>
+  </p:cSld>
+  <p:clrMapOvr>
+    <a:masterClrMapping/>
+  </p:clrMapOvr>
+</p:notes>
+</file>
+
+<file path=ppt/notesSlides/notesSlide22.xml><?xml version="1.0" encoding="utf-8"?>
+<p:notes xmlns:a="http://schemas.openxmlformats.org/drawingml/2006/main" xmlns:p="http://schemas.openxmlformats.org/presentationml/2006/main" xmlns:r="http://schemas.openxmlformats.org/officeDocument/2006/relationships">
+  <p:cSld>
+    <p:spTree>
+      <p:nvGrpSpPr>
+        <p:cNvPr id="1" name=""/>
+        <p:cNvGrpSpPr/>
+        <p:nvPr/>
+      </p:nvGrpSpPr>
+      <p:grpSpPr>
+        <a:xfrm>
+          <a:off x="0" y="0"/>
+          <a:ext cx="0" cy="0"/>
+          <a:chOff x="0" y="0"/>
+          <a:chExt cx="0" cy="0"/>
+        </a:xfrm>
+      </p:grpSpPr>
+      <p:sp>
+        <p:nvSpPr>
+          <p:cNvPr id="2" name="Slide Image Placeholder 1"/>
+          <p:cNvSpPr>
+            <a:spLocks noGrp="1"/>
+          </p:cNvSpPr>
+          <p:nvPr>
+            <p:ph type="sldImg" idx="2"/>
+          </p:nvPr>
+        </p:nvSpPr>
+        <p:spPr/>
+      </p:sp>
+      <p:sp>
+        <p:nvSpPr>
+          <p:cNvPr id="3" name="Notes Placeholder 2"/>
+          <p:cNvSpPr>
+            <a:spLocks noGrp="1"/>
+          </p:cNvSpPr>
+          <p:nvPr>
+            <p:ph type="body" idx="3" sz="quarter"/>
+          </p:nvPr>
+        </p:nvSpPr>
+        <p:spPr/>
+        <p:txBody>
+          <a:bodyPr/>
+          <a:lstStyle/>
+          <a:p>
+            <a:r>
+              <a:t>TIMING: 2 minutes</a:t>
+            </a:r>
+          </a:p>
+          <a:p>
+            <a:r>
+              <a:t>- Collect answers before offering structure.</a:t>
+            </a:r>
+          </a:p>
+          <a:p>
+            <a:r>
+              <a:t>- Steer toward validation: the next slide runs Validation backward to locate where knowledge should have been produced.</a:t>
+            </a:r>
+          </a:p>
+        </p:txBody>
+      </p:sp>
+      <p:sp>
+        <p:nvSpPr>
+          <p:cNvPr id="4" name="Slide Number Placeholder 3"/>
+          <p:cNvSpPr>
+            <a:spLocks noGrp="1"/>
+          </p:cNvSpPr>
+          <p:nvPr>
+            <p:ph type="sldNum" idx="5" sz="quarter"/>
+          </p:nvPr>
+        </p:nvSpPr>
+        <p:spPr/>
+      </p:sp>
+    </p:spTree>
+  </p:cSld>
+  <p:clrMapOvr>
+    <a:masterClrMapping/>
+  </p:clrMapOvr>
+</p:notes>
+</file>
+
+<file path=ppt/notesSlides/notesSlide23.xml><?xml version="1.0" encoding="utf-8"?>
+<p:notes xmlns:a="http://schemas.openxmlformats.org/drawingml/2006/main" xmlns:p="http://schemas.openxmlformats.org/presentationml/2006/main" xmlns:r="http://schemas.openxmlformats.org/officeDocument/2006/relationships">
+  <p:cSld>
+    <p:spTree>
+      <p:nvGrpSpPr>
+        <p:cNvPr id="1" name=""/>
+        <p:cNvGrpSpPr/>
+        <p:nvPr/>
+      </p:nvGrpSpPr>
+      <p:grpSpPr>
+        <a:xfrm>
+          <a:off x="0" y="0"/>
+          <a:ext cx="0" cy="0"/>
+          <a:chOff x="0" y="0"/>
+          <a:chExt cx="0" cy="0"/>
+        </a:xfrm>
+      </p:grpSpPr>
+      <p:sp>
+        <p:nvSpPr>
+          <p:cNvPr id="2" name="Slide Image Placeholder 1"/>
+          <p:cNvSpPr>
+            <a:spLocks noGrp="1"/>
+          </p:cNvSpPr>
+          <p:nvPr>
+            <p:ph type="sldImg" idx="2"/>
+          </p:nvPr>
+        </p:nvSpPr>
+        <p:spPr/>
+      </p:sp>
+      <p:sp>
+        <p:nvSpPr>
+          <p:cNvPr id="3" name="Notes Placeholder 2"/>
+          <p:cNvSpPr>
+            <a:spLocks noGrp="1"/>
+          </p:cNvSpPr>
+          <p:nvPr>
+            <p:ph type="body" idx="3" sz="quarter"/>
+          </p:nvPr>
+        </p:nvSpPr>
+        <p:spPr/>
+        <p:txBody>
+          <a:bodyPr/>
+          <a:lstStyle/>
+          <a:p>
+            <a:r>
+              <a:t>TIMING: 2 minutes</a:t>
+            </a:r>
+          </a:p>
+          <a:p>
+            <a:r>
+              <a:t>- Claim -&gt; scope -&gt; mechanism -&gt; strategy -&gt; evidence -&gt; judgment, run in reverse: which judgment admitted this realization, on which evidence, under which claim?</a:t>
+            </a:r>
+          </a:p>
+        </p:txBody>
+      </p:sp>
+      <p:sp>
+        <p:nvSpPr>
+          <p:cNvPr id="4" name="Slide Number Placeholder 3"/>
+          <p:cNvSpPr>
+            <a:spLocks noGrp="1"/>
+          </p:cNvSpPr>
+          <p:nvPr>
+            <p:ph type="sldNum" idx="5" sz="quarter"/>
+          </p:nvPr>
+        </p:nvSpPr>
+        <p:spPr/>
+      </p:sp>
+    </p:spTree>
+  </p:cSld>
+  <p:clrMapOvr>
+    <a:masterClrMapping/>
+  </p:clrMapOvr>
+</p:notes>
+</file>
+
+<file path=ppt/notesSlides/notesSlide24.xml><?xml version="1.0" encoding="utf-8"?>
+<p:notes xmlns:a="http://schemas.openxmlformats.org/drawingml/2006/main" xmlns:p="http://schemas.openxmlformats.org/presentationml/2006/main" xmlns:r="http://schemas.openxmlformats.org/officeDocument/2006/relationships">
+  <p:cSld>
+    <p:spTree>
+      <p:nvGrpSpPr>
+        <p:cNvPr id="1" name=""/>
+        <p:cNvGrpSpPr/>
+        <p:nvPr/>
+      </p:nvGrpSpPr>
+      <p:grpSpPr>
+        <a:xfrm>
+          <a:off x="0" y="0"/>
+          <a:ext cx="0" cy="0"/>
+          <a:chOff x="0" y="0"/>
+          <a:chExt cx="0" cy="0"/>
+        </a:xfrm>
+      </p:grpSpPr>
+      <p:sp>
+        <p:nvSpPr>
+          <p:cNvPr id="2" name="Slide Image Placeholder 1"/>
+          <p:cNvSpPr>
+            <a:spLocks noGrp="1"/>
+          </p:cNvSpPr>
+          <p:nvPr>
+            <p:ph type="sldImg" idx="2"/>
+          </p:nvPr>
+        </p:nvSpPr>
+        <p:spPr/>
+      </p:sp>
+      <p:sp>
+        <p:nvSpPr>
+          <p:cNvPr id="3" name="Notes Placeholder 2"/>
+          <p:cNvSpPr>
+            <a:spLocks noGrp="1"/>
+          </p:cNvSpPr>
+          <p:nvPr>
+            <p:ph type="body" idx="3" sz="quarter"/>
+          </p:nvPr>
+        </p:nvSpPr>
+        <p:spPr/>
+        <p:txBody>
+          <a:bodyPr/>
+          <a:lstStyle/>
+          <a:p>
+            <a:r>
+              <a:t>TIMING: 1-2 minutes</a:t>
+            </a:r>
+          </a:p>
+          <a:p>
+            <a:r>
+              <a:t>- Guard against the reflex "we failed, therefore our validation was bad."</a:t>
+            </a:r>
+          </a:p>
+          <a:p>
+            <a:r>
+              <a:t>- The diagnostic question is whether the failure fell inside the claimed scope or in the residual uncertainty that was knowingly accepted.</a:t>
+            </a:r>
+          </a:p>
+        </p:txBody>
+      </p:sp>
+      <p:sp>
+        <p:nvSpPr>
+          <p:cNvPr id="4" name="Slide Number Placeholder 3"/>
+          <p:cNvSpPr>
+            <a:spLocks noGrp="1"/>
+          </p:cNvSpPr>
+          <p:nvPr>
+            <p:ph type="sldNum" idx="5" sz="quarter"/>
+          </p:nvPr>
+        </p:nvSpPr>
+        <p:spPr/>
+      </p:sp>
+    </p:spTree>
+  </p:cSld>
+  <p:clrMapOvr>
+    <a:masterClrMapping/>
+  </p:clrMapOvr>
+</p:notes>
+</file>
+
+<file path=ppt/notesSlides/notesSlide25.xml><?xml version="1.0" encoding="utf-8"?>
+<p:notes xmlns:a="http://schemas.openxmlformats.org/drawingml/2006/main" xmlns:p="http://schemas.openxmlformats.org/presentationml/2006/main" xmlns:r="http://schemas.openxmlformats.org/officeDocument/2006/relationships">
+  <p:cSld>
+    <p:spTree>
+      <p:nvGrpSpPr>
+        <p:cNvPr id="1" name=""/>
+        <p:cNvGrpSpPr/>
+        <p:nvPr/>
+      </p:nvGrpSpPr>
+      <p:grpSpPr>
+        <a:xfrm>
+          <a:off x="0" y="0"/>
+          <a:ext cx="0" cy="0"/>
+          <a:chOff x="0" y="0"/>
+          <a:chExt cx="0" cy="0"/>
+        </a:xfrm>
+      </p:grpSpPr>
+      <p:sp>
+        <p:nvSpPr>
+          <p:cNvPr id="2" name="Slide Image Placeholder 1"/>
+          <p:cNvSpPr>
+            <a:spLocks noGrp="1"/>
+          </p:cNvSpPr>
+          <p:nvPr>
+            <p:ph type="sldImg" idx="2"/>
+          </p:nvPr>
+        </p:nvSpPr>
+        <p:spPr/>
+      </p:sp>
+      <p:sp>
+        <p:nvSpPr>
+          <p:cNvPr id="3" name="Notes Placeholder 2"/>
+          <p:cNvSpPr>
+            <a:spLocks noGrp="1"/>
+          </p:cNvSpPr>
+          <p:nvPr>
+            <p:ph type="body" idx="3" sz="quarter"/>
+          </p:nvPr>
+        </p:nvSpPr>
+        <p:spPr/>
+        <p:txBody>
+          <a:bodyPr/>
+          <a:lstStyle/>
+          <a:p>
+            <a:r>
+              <a:t>TIMING: &lt;1 minute</a:t>
+            </a:r>
+          </a:p>
+          <a:p>
+            <a:r>
+              <a:t>- From diagnosis to knowledge: the failure is evidence; it must be analyzed into a lesson before it can be reused.</a:t>
+            </a:r>
+          </a:p>
+        </p:txBody>
+      </p:sp>
+      <p:sp>
+        <p:nvSpPr>
+          <p:cNvPr id="4" name="Slide Number Placeholder 3"/>
+          <p:cNvSpPr>
+            <a:spLocks noGrp="1"/>
+          </p:cNvSpPr>
+          <p:nvPr>
+            <p:ph type="sldNum" idx="5" sz="quarter"/>
+          </p:nvPr>
+        </p:nvSpPr>
+        <p:spPr/>
+      </p:sp>
+    </p:spTree>
+  </p:cSld>
+  <p:clrMapOvr>
+    <a:masterClrMapping/>
+  </p:clrMapOvr>
+</p:notes>
+</file>
+
+<file path=ppt/notesSlides/notesSlide26.xml><?xml version="1.0" encoding="utf-8"?>
+<p:notes xmlns:a="http://schemas.openxmlformats.org/drawingml/2006/main" xmlns:p="http://schemas.openxmlformats.org/presentationml/2006/main" xmlns:r="http://schemas.openxmlformats.org/officeDocument/2006/relationships">
+  <p:cSld>
+    <p:spTree>
+      <p:nvGrpSpPr>
+        <p:cNvPr id="1" name=""/>
+        <p:cNvGrpSpPr/>
+        <p:nvPr/>
+      </p:nvGrpSpPr>
+      <p:grpSpPr>
+        <a:xfrm>
+          <a:off x="0" y="0"/>
+          <a:ext cx="0" cy="0"/>
+          <a:chOff x="0" y="0"/>
+          <a:chExt cx="0" cy="0"/>
+        </a:xfrm>
+      </p:grpSpPr>
+      <p:sp>
+        <p:nvSpPr>
+          <p:cNvPr id="2" name="Slide Image Placeholder 1"/>
+          <p:cNvSpPr>
+            <a:spLocks noGrp="1"/>
+          </p:cNvSpPr>
+          <p:nvPr>
+            <p:ph type="sldImg" idx="2"/>
+          </p:nvPr>
+        </p:nvSpPr>
+        <p:spPr/>
+      </p:sp>
+      <p:sp>
+        <p:nvSpPr>
+          <p:cNvPr id="3" name="Notes Placeholder 2"/>
+          <p:cNvSpPr>
+            <a:spLocks noGrp="1"/>
+          </p:cNvSpPr>
+          <p:nvPr>
+            <p:ph type="body" idx="3" sz="quarter"/>
+          </p:nvPr>
+        </p:nvSpPr>
+        <p:spPr/>
+        <p:txBody>
+          <a:bodyPr/>
+          <a:lstStyle/>
+          <a:p>
+            <a:r>
+              <a:t>TIMING: 1-2 minutes</a:t>
+            </a:r>
+          </a:p>
+          <a:p>
+            <a:r>
+              <a:t>- Straight out of Engineering Knowledge (Act I): an observation becomes knowledge only through analysis.</a:t>
+            </a:r>
+          </a:p>
+          <a:p>
+            <a:r>
+              <a:t>- The 2012 hardware-failure slide is the counter-example to hold up: evidence was produced, analysis happened, and the lesson served the wrong obligation.</a:t>
+            </a:r>
+          </a:p>
+        </p:txBody>
+      </p:sp>
+      <p:sp>
+        <p:nvSpPr>
+          <p:cNvPr id="4" name="Slide Number Placeholder 3"/>
+          <p:cNvSpPr>
+            <a:spLocks noGrp="1"/>
+          </p:cNvSpPr>
+          <p:nvPr>
+            <p:ph type="sldNum" idx="5" sz="quarter"/>
+          </p:nvPr>
+        </p:nvSpPr>
+        <p:spPr/>
+      </p:sp>
+    </p:spTree>
+  </p:cSld>
+  <p:clrMapOvr>
+    <a:masterClrMapping/>
+  </p:clrMapOvr>
+</p:notes>
+</file>
+
+<file path=ppt/notesSlides/notesSlide27.xml><?xml version="1.0" encoding="utf-8"?>
+<p:notes xmlns:a="http://schemas.openxmlformats.org/drawingml/2006/main" xmlns:p="http://schemas.openxmlformats.org/presentationml/2006/main" xmlns:r="http://schemas.openxmlformats.org/officeDocument/2006/relationships">
+  <p:cSld>
+    <p:spTree>
+      <p:nvGrpSpPr>
+        <p:cNvPr id="1" name=""/>
+        <p:cNvGrpSpPr/>
+        <p:nvPr/>
+      </p:nvGrpSpPr>
+      <p:grpSpPr>
+        <a:xfrm>
+          <a:off x="0" y="0"/>
+          <a:ext cx="0" cy="0"/>
+          <a:chOff x="0" y="0"/>
+          <a:chExt cx="0" cy="0"/>
+        </a:xfrm>
+      </p:grpSpPr>
+      <p:sp>
+        <p:nvSpPr>
+          <p:cNvPr id="2" name="Slide Image Placeholder 1"/>
+          <p:cNvSpPr>
+            <a:spLocks noGrp="1"/>
+          </p:cNvSpPr>
+          <p:nvPr>
+            <p:ph type="sldImg" idx="2"/>
+          </p:nvPr>
+        </p:nvSpPr>
+        <p:spPr/>
+      </p:sp>
+      <p:sp>
+        <p:nvSpPr>
+          <p:cNvPr id="3" name="Notes Placeholder 2"/>
+          <p:cNvSpPr>
+            <a:spLocks noGrp="1"/>
+          </p:cNvSpPr>
+          <p:nvPr>
+            <p:ph type="body" idx="3" sz="quarter"/>
+          </p:nvPr>
+        </p:nvSpPr>
+        <p:spPr/>
+        <p:txBody>
+          <a:bodyPr/>
+          <a:lstStyle/>
+          <a:p>
+            <a:r>
+              <a:t>TIMING: 2 minutes</a:t>
+            </a:r>
+          </a:p>
+          <a:p>
+            <a:r>
+              <a:t>- One failure licenses several candidate lessons of increasing breadth; the evidence supports only some of them.</a:t>
+            </a:r>
+          </a:p>
+          <a:p>
+            <a:r>
+              <a:t>- ASK: for a failure from your own project, what is the narrowest lesson? The widest the evidence still supports?</a:t>
+            </a:r>
+          </a:p>
+        </p:txBody>
+      </p:sp>
+      <p:sp>
+        <p:nvSpPr>
+          <p:cNvPr id="4" name="Slide Number Placeholder 3"/>
+          <p:cNvSpPr>
+            <a:spLocks noGrp="1"/>
+          </p:cNvSpPr>
+          <p:nvPr>
+            <p:ph type="sldNum" idx="5" sz="quarter"/>
+          </p:nvPr>
+        </p:nvSpPr>
+        <p:spPr/>
+      </p:sp>
+    </p:spTree>
+  </p:cSld>
+  <p:clrMapOvr>
+    <a:masterClrMapping/>
+  </p:clrMapOvr>
+</p:notes>
+</file>
+
+<file path=ppt/notesSlides/notesSlide28.xml><?xml version="1.0" encoding="utf-8"?>
+<p:notes xmlns:a="http://schemas.openxmlformats.org/drawingml/2006/main" xmlns:p="http://schemas.openxmlformats.org/presentationml/2006/main" xmlns:r="http://schemas.openxmlformats.org/officeDocument/2006/relationships">
+  <p:cSld>
+    <p:spTree>
+      <p:nvGrpSpPr>
+        <p:cNvPr id="1" name=""/>
+        <p:cNvGrpSpPr/>
+        <p:nvPr/>
+      </p:nvGrpSpPr>
+      <p:grpSpPr>
+        <a:xfrm>
+          <a:off x="0" y="0"/>
+          <a:ext cx="0" cy="0"/>
+          <a:chOff x="0" y="0"/>
+          <a:chExt cx="0" cy="0"/>
+        </a:xfrm>
+      </p:grpSpPr>
+      <p:sp>
+        <p:nvSpPr>
+          <p:cNvPr id="2" name="Slide Image Placeholder 1"/>
+          <p:cNvSpPr>
+            <a:spLocks noGrp="1"/>
+          </p:cNvSpPr>
+          <p:nvPr>
+            <p:ph type="sldImg" idx="2"/>
+          </p:nvPr>
+        </p:nvSpPr>
+        <p:spPr/>
+      </p:sp>
+      <p:sp>
+        <p:nvSpPr>
+          <p:cNvPr id="3" name="Notes Placeholder 2"/>
+          <p:cNvSpPr>
+            <a:spLocks noGrp="1"/>
+          </p:cNvSpPr>
+          <p:nvPr>
+            <p:ph type="body" idx="3" sz="quarter"/>
+          </p:nvPr>
+        </p:nvSpPr>
+        <p:spPr/>
+        <p:txBody>
+          <a:bodyPr/>
+          <a:lstStyle/>
+          <a:p>
+            <a:r>
+              <a:t>TIMING: 2 minutes</a:t>
+            </a:r>
+          </a:p>
+          <a:p>
+            <a:r>
+              <a:t>- Regression test vs generalized lesson: both are legitimate; they preserve different things.</a:t>
+            </a:r>
+          </a:p>
+          <a:p>
+            <a:r>
+              <a:t>- ASK what each one catches next time, and what each one misses.</a:t>
+            </a:r>
+          </a:p>
+        </p:txBody>
+      </p:sp>
+      <p:sp>
+        <p:nvSpPr>
+          <p:cNvPr id="4" name="Slide Number Placeholder 3"/>
+          <p:cNvSpPr>
+            <a:spLocks noGrp="1"/>
+          </p:cNvSpPr>
+          <p:nvPr>
+            <p:ph type="sldNum" idx="5" sz="quarter"/>
+          </p:nvPr>
+        </p:nvSpPr>
+        <p:spPr/>
+      </p:sp>
+    </p:spTree>
+  </p:cSld>
+  <p:clrMapOvr>
+    <a:masterClrMapping/>
+  </p:clrMapOvr>
+</p:notes>
+</file>
+
+<file path=ppt/notesSlides/notesSlide29.xml><?xml version="1.0" encoding="utf-8"?>
+<p:notes xmlns:a="http://schemas.openxmlformats.org/drawingml/2006/main" xmlns:p="http://schemas.openxmlformats.org/presentationml/2006/main" xmlns:r="http://schemas.openxmlformats.org/officeDocument/2006/relationships">
+  <p:cSld>
+    <p:spTree>
+      <p:nvGrpSpPr>
+        <p:cNvPr id="1" name=""/>
+        <p:cNvGrpSpPr/>
+        <p:nvPr/>
+      </p:nvGrpSpPr>
+      <p:grpSpPr>
+        <a:xfrm>
+          <a:off x="0" y="0"/>
+          <a:ext cx="0" cy="0"/>
+          <a:chOff x="0" y="0"/>
+          <a:chExt cx="0" cy="0"/>
+        </a:xfrm>
+      </p:grpSpPr>
+      <p:sp>
+        <p:nvSpPr>
+          <p:cNvPr id="2" name="Slide Image Placeholder 1"/>
+          <p:cNvSpPr>
+            <a:spLocks noGrp="1"/>
+          </p:cNvSpPr>
+          <p:nvPr>
+            <p:ph type="sldImg" idx="2"/>
+          </p:nvPr>
+        </p:nvSpPr>
+        <p:spPr/>
+      </p:sp>
+      <p:sp>
+        <p:nvSpPr>
+          <p:cNvPr id="3" name="Notes Placeholder 2"/>
+          <p:cNvSpPr>
+            <a:spLocks noGrp="1"/>
+          </p:cNvSpPr>
+          <p:nvPr>
+            <p:ph type="body" idx="3" sz="quarter"/>
+          </p:nvPr>
+        </p:nvSpPr>
+        <p:spPr/>
+        <p:txBody>
+          <a:bodyPr/>
+          <a:lstStyle/>
+          <a:p>
+            <a:r>
+              <a:t>TIMING: 1-2 minutes</a:t>
+            </a:r>
+          </a:p>
+          <a:p>
+            <a:r>
+              <a:t>- The causal account changes the system; the reflective account changes the engineer.</a:t>
+            </a:r>
+          </a:p>
+          <a:p>
+            <a:r>
+              <a:t>- Postmortems that stop at the causal account leave the second kind of learning on the table.</a:t>
             </a:r>
           </a:p>
         </p:txBody>
@@ -1428,6 +2305,86 @@
           <a:p>
             <a:r>
               <a:t>- The footer question is already a requirements / design / authority question. Let several students answer before moving on.</a:t>
+            </a:r>
+          </a:p>
+        </p:txBody>
+      </p:sp>
+      <p:sp>
+        <p:nvSpPr>
+          <p:cNvPr id="4" name="Slide Number Placeholder 3"/>
+          <p:cNvSpPr>
+            <a:spLocks noGrp="1"/>
+          </p:cNvSpPr>
+          <p:nvPr>
+            <p:ph type="sldNum" idx="5" sz="quarter"/>
+          </p:nvPr>
+        </p:nvSpPr>
+        <p:spPr/>
+      </p:sp>
+    </p:spTree>
+  </p:cSld>
+  <p:clrMapOvr>
+    <a:masterClrMapping/>
+  </p:clrMapOvr>
+</p:notes>
+</file>
+
+<file path=ppt/notesSlides/notesSlide30.xml><?xml version="1.0" encoding="utf-8"?>
+<p:notes xmlns:a="http://schemas.openxmlformats.org/drawingml/2006/main" xmlns:p="http://schemas.openxmlformats.org/presentationml/2006/main" xmlns:r="http://schemas.openxmlformats.org/officeDocument/2006/relationships">
+  <p:cSld>
+    <p:spTree>
+      <p:nvGrpSpPr>
+        <p:cNvPr id="1" name=""/>
+        <p:cNvGrpSpPr/>
+        <p:nvPr/>
+      </p:nvGrpSpPr>
+      <p:grpSpPr>
+        <a:xfrm>
+          <a:off x="0" y="0"/>
+          <a:ext cx="0" cy="0"/>
+          <a:chOff x="0" y="0"/>
+          <a:chExt cx="0" cy="0"/>
+        </a:xfrm>
+      </p:grpSpPr>
+      <p:sp>
+        <p:nvSpPr>
+          <p:cNvPr id="2" name="Slide Image Placeholder 1"/>
+          <p:cNvSpPr>
+            <a:spLocks noGrp="1"/>
+          </p:cNvSpPr>
+          <p:nvPr>
+            <p:ph type="sldImg" idx="2"/>
+          </p:nvPr>
+        </p:nvSpPr>
+        <p:spPr/>
+      </p:sp>
+      <p:sp>
+        <p:nvSpPr>
+          <p:cNvPr id="3" name="Notes Placeholder 2"/>
+          <p:cNvSpPr>
+            <a:spLocks noGrp="1"/>
+          </p:cNvSpPr>
+          <p:nvPr>
+            <p:ph type="body" idx="3" sz="quarter"/>
+          </p:nvPr>
+        </p:nvSpPr>
+        <p:spPr/>
+        <p:txBody>
+          <a:bodyPr/>
+          <a:lstStyle/>
+          <a:p>
+            <a:r>
+              <a:t>TIMING: 2 minutes</a:t>
+            </a:r>
+          </a:p>
+          <a:p>
+            <a:r>
+              <a:t>- From Engineering Knowledge: consequential knowledge can migrate into requirements, specifications, architecture, mechanisms/models, validation, or continuing checks/controls when future work should inherit the lesson.</a:t>
+            </a:r>
+          </a:p>
+          <a:p>
+            <a:r>
+              <a:t>- ASK for one lesson from the course project and where it should live.</a:t>
             </a:r>
           </a:p>
         </p:txBody>
@@ -5446,7 +6403,7 @@
           <a:bodyPr/>
           <a:lstStyle/>
           <a:p>
-            <a:fld id="{F93E8548-BE24-4B73-8C45-416AEFC32254}" type="slidenum">
+            <a:fld id="{2A43D30D-85A8-477F-BEC0-414C23720949}" type="slidenum">
               <a:rPr lang="en-US" smtClean="0"/>
               <a:t>1</a:t>
             </a:fld>
@@ -5641,7 +6598,7 @@
           <a:bodyPr/>
           <a:lstStyle/>
           <a:p>
-            <a:fld id="{30A64256-7292-44E1-BB62-C6E0605EA3D2}" type="slidenum">
+            <a:fld id="{B3701E80-C716-4E6A-B258-BF05840C90DE}" type="slidenum">
               <a:rPr lang="en-US" smtClean="0"/>
               <a:t>10</a:t>
             </a:fld>
@@ -6184,7 +7141,7 @@
           <a:bodyPr/>
           <a:lstStyle/>
           <a:p>
-            <a:fld id="{2154B390-ECC6-49D6-9ED6-BE29D357C40A}" type="slidenum">
+            <a:fld id="{2B7F3B56-C71B-46E2-B5B3-15D6EDEA9357}" type="slidenum">
               <a:rPr lang="en-US" smtClean="0"/>
               <a:t>11</a:t>
             </a:fld>
@@ -6371,7 +7328,7 @@
           <a:bodyPr/>
           <a:lstStyle/>
           <a:p>
-            <a:fld id="{EDA5A793-673B-41D4-9210-552A38A95064}" type="slidenum">
+            <a:fld id="{D3203EA6-7D0E-4BCF-BC57-8FA32EAE9A9C}" type="slidenum">
               <a:rPr lang="en-US" smtClean="0"/>
               <a:t>12</a:t>
             </a:fld>
@@ -6507,7 +7464,7 @@
           <a:bodyPr/>
           <a:lstStyle/>
           <a:p>
-            <a:fld id="{B66BA63C-C0C7-4744-A213-840C7C36C170}" type="slidenum">
+            <a:fld id="{792C3804-325D-4FC4-B86F-0E3B96B75588}" type="slidenum">
               <a:rPr lang="en-US" smtClean="0"/>
               <a:t>13</a:t>
             </a:fld>
@@ -6794,7 +7751,7 @@
           <a:bodyPr/>
           <a:lstStyle/>
           <a:p>
-            <a:fld id="{6501156A-E1E9-4402-8057-F65D8D28B12B}" type="slidenum">
+            <a:fld id="{B2AA4D64-91B6-4F3C-BBDB-9E223E826547}" type="slidenum">
               <a:rPr lang="en-US" smtClean="0"/>
               <a:t>14</a:t>
             </a:fld>
@@ -7795,7 +8752,7 @@
           <a:bodyPr/>
           <a:lstStyle/>
           <a:p>
-            <a:fld id="{05417E77-5F02-4D92-BA7F-030D59DFDABE}" type="slidenum">
+            <a:fld id="{D0A80A09-AB4A-448E-9C89-F91826118FD4}" type="slidenum">
               <a:rPr lang="en-US" smtClean="0"/>
               <a:t>15</a:t>
             </a:fld>
@@ -8128,7 +9085,7 @@
           <a:bodyPr/>
           <a:lstStyle/>
           <a:p>
-            <a:fld id="{3EE8B33F-6F55-4310-8556-A7B692D2A075}" type="slidenum">
+            <a:fld id="{5C04F9F5-8793-4E0A-B7E6-07F83852951D}" type="slidenum">
               <a:rPr lang="en-US" smtClean="0"/>
               <a:t>16</a:t>
             </a:fld>
@@ -8721,7 +9678,7 @@
           <a:bodyPr/>
           <a:lstStyle/>
           <a:p>
-            <a:fld id="{C081D2A1-8AAE-4C69-B798-CC856F26A35C}" type="slidenum">
+            <a:fld id="{FD52A085-833B-45CB-9024-201F6F8BB276}" type="slidenum">
               <a:rPr lang="en-US" smtClean="0"/>
               <a:t>17</a:t>
             </a:fld>
@@ -9074,7 +10031,7 @@
           <a:bodyPr/>
           <a:lstStyle/>
           <a:p>
-            <a:fld id="{2B19A40B-0D44-4B8E-9931-7BD3CA1819BF}" type="slidenum">
+            <a:fld id="{A217FCDD-83C2-4540-9ED9-EA5D35DF23D2}" type="slidenum">
               <a:rPr lang="en-US" smtClean="0"/>
               <a:t>18</a:t>
             </a:fld>
@@ -9398,6 +10355,199 @@
 </p:sld>
 </file>
 
+<file path=ppt/slides/slide19.xml><?xml version="1.0" encoding="utf-8"?>
+<p:sld xmlns:a="http://schemas.openxmlformats.org/drawingml/2006/main" xmlns:p="http://schemas.openxmlformats.org/presentationml/2006/main" xmlns:r="http://schemas.openxmlformats.org/officeDocument/2006/relationships">
+  <p:cSld>
+    <p:spTree>
+      <p:nvGrpSpPr>
+        <p:cNvPr id="1" name=""/>
+        <p:cNvGrpSpPr/>
+        <p:nvPr/>
+      </p:nvGrpSpPr>
+      <p:grpSpPr/>
+      <p:sp>
+        <p:nvSpPr>
+          <p:cNvPr id="2" name="Title 1"/>
+          <p:cNvSpPr>
+            <a:spLocks noGrp="1"/>
+          </p:cNvSpPr>
+          <p:nvPr>
+            <p:ph type="title"/>
+          </p:nvPr>
+        </p:nvSpPr>
+        <p:spPr>
+          <a:xfrm>
+            <a:off x="685800" y="1700784"/>
+            <a:ext cx="7772400" cy="1005840"/>
+          </a:xfrm>
+        </p:spPr>
+        <p:txBody>
+          <a:bodyPr/>
+          <a:lstStyle/>
+          <a:p>
+            <a:pPr algn="ctr"/>
+            <a:r>
+              <a:rPr sz="4000" b="0" i="0">
+                <a:solidFill>
+                  <a:srgbClr val="000000"/>
+                </a:solidFill>
+              </a:rPr>
+              <a:t>Diagnose the failure</a:t>
+            </a:r>
+          </a:p>
+        </p:txBody>
+      </p:sp>
+      <p:sp>
+        <p:nvSpPr>
+          <p:cNvPr id="900" name="Slide Number Placeholder 900"/>
+          <p:cNvSpPr>
+            <a:spLocks noGrp="1"/>
+          </p:cNvSpPr>
+          <p:nvPr>
+            <p:ph type="sldNum" sz="quarter" idx="4"/>
+          </p:nvPr>
+        </p:nvSpPr>
+        <p:spPr/>
+        <p:txBody>
+          <a:bodyPr/>
+          <a:lstStyle/>
+          <a:p>
+            <a:fld id="{E3BDA2FA-C59C-4943-8C2E-0970BEA0337D}" type="slidenum">
+              <a:rPr lang="en-US" smtClean="0"/>
+              <a:t>19</a:t>
+            </a:fld>
+            <a:endParaRPr lang="en-US"/>
+          </a:p>
+        </p:txBody>
+      </p:sp>
+      <p:sp>
+        <p:nvSpPr>
+          <p:cNvPr id="901" name="SectionLabel"/>
+          <p:cNvSpPr txBox="1"/>
+          <p:nvPr/>
+        </p:nvSpPr>
+        <p:spPr>
+          <a:xfrm>
+            <a:off x="685800" y="1243584"/>
+            <a:ext cx="7772400" cy="365760"/>
+          </a:xfrm>
+          <a:prstGeom prst="rect">
+            <a:avLst/>
+          </a:prstGeom>
+          <a:noFill/>
+        </p:spPr>
+        <p:txBody>
+          <a:bodyPr wrap="square" anchor="ctr" lIns="27432" rIns="27432" tIns="22860" bIns="22860">
+            <a:spAutoFit/>
+          </a:bodyPr>
+          <a:lstStyle/>
+          <a:p>
+            <a:pPr algn="ctr"/>
+            <a:r>
+              <a:rPr sz="2000" b="1" i="0">
+                <a:solidFill>
+                  <a:srgbClr val="8E6F3E"/>
+                </a:solidFill>
+              </a:rPr>
+              <a:t>SECTION 2</a:t>
+            </a:r>
+          </a:p>
+        </p:txBody>
+      </p:sp>
+      <p:sp>
+        <p:nvSpPr>
+          <p:cNvPr id="902" name="Question"/>
+          <p:cNvSpPr txBox="1"/>
+          <p:nvPr/>
+        </p:nvSpPr>
+        <p:spPr>
+          <a:xfrm>
+            <a:off x="685800" y="2816352"/>
+            <a:ext cx="7772400" cy="475488"/>
+          </a:xfrm>
+          <a:prstGeom prst="rect">
+            <a:avLst/>
+          </a:prstGeom>
+          <a:noFill/>
+        </p:spPr>
+        <p:txBody>
+          <a:bodyPr wrap="square" anchor="ctr" lIns="27432" rIns="27432" tIns="22860" bIns="22860">
+            <a:spAutoFit/>
+          </a:bodyPr>
+          <a:lstStyle/>
+          <a:p>
+            <a:pPr algn="ctr"/>
+            <a:r>
+              <a:rPr sz="2400" b="0" i="0">
+                <a:solidFill>
+                  <a:srgbClr val="5C4826"/>
+                </a:solidFill>
+              </a:rPr>
+              <a:t>What failed, and why didn't we know?</a:t>
+            </a:r>
+          </a:p>
+        </p:txBody>
+      </p:sp>
+      <p:sp>
+        <p:nvSpPr>
+          <p:cNvPr id="903" name="Rule"/>
+          <p:cNvSpPr/>
+          <p:nvPr/>
+        </p:nvSpPr>
+        <p:spPr>
+          <a:xfrm>
+            <a:off x="3429000" y="3602736"/>
+            <a:ext cx="2286000" cy="51206"/>
+          </a:xfrm>
+          <a:prstGeom prst="rect">
+            <a:avLst/>
+          </a:prstGeom>
+          <a:solidFill>
+            <a:srgbClr val="8E6F3E"/>
+          </a:solidFill>
+          <a:ln>
+            <a:noFill/>
+          </a:ln>
+          <a:effectLst/>
+        </p:spPr>
+        <p:style>
+          <a:lnRef idx="1">
+            <a:schemeClr val="accent1"/>
+          </a:lnRef>
+          <a:fillRef idx="3">
+            <a:schemeClr val="accent1"/>
+          </a:fillRef>
+          <a:effectRef idx="2">
+            <a:schemeClr val="accent1"/>
+          </a:effectRef>
+          <a:fontRef idx="minor">
+            <a:schemeClr val="lt1"/>
+          </a:fontRef>
+        </p:style>
+        <p:txBody>
+          <a:bodyPr rtlCol="0" anchor="ctr" wrap="square" lIns="27432" rIns="27432" tIns="22860" bIns="22860"/>
+          <a:lstStyle/>
+          <a:p>
+            <a:pPr algn="ctr"/>
+            <a:r>
+              <a:rPr sz="2000" b="0" i="0">
+                <a:solidFill>
+                  <a:srgbClr val="5C4826"/>
+                </a:solidFill>
+              </a:rPr>
+              <a:t/>
+            </a:r>
+          </a:p>
+        </p:txBody>
+      </p:sp>
+    </p:spTree>
+  </p:cSld>
+  <p:clrMapOvr>
+    <a:masterClrMapping/>
+  </p:clrMapOvr>
+</p:sld>
+</file>
+
 <file path=ppt/slides/slide2.xml><?xml version="1.0" encoding="utf-8"?>
 <p:sld xmlns:a="http://schemas.openxmlformats.org/drawingml/2006/main" xmlns:p="http://schemas.openxmlformats.org/presentationml/2006/main" xmlns:r="http://schemas.openxmlformats.org/officeDocument/2006/relationships">
   <p:cSld>
@@ -9449,7 +10599,7 @@
           <a:bodyPr/>
           <a:lstStyle/>
           <a:p>
-            <a:fld id="{6B89A994-9FE4-4018-8D0C-C44F8B0CB085}" type="slidenum">
+            <a:fld id="{5C4E765D-783E-4B95-A88D-1F5178204E0C}" type="slidenum">
               <a:rPr lang="en-US" smtClean="0"/>
               <a:t>2</a:t>
             </a:fld>
@@ -9749,6 +10899,3391 @@
                 </a:solidFill>
               </a:rPr>
               <a:t>What engineering activities should this regulatory change affect?</a:t>
+            </a:r>
+          </a:p>
+        </p:txBody>
+      </p:sp>
+    </p:spTree>
+  </p:cSld>
+  <p:clrMapOvr>
+    <a:masterClrMapping/>
+  </p:clrMapOvr>
+</p:sld>
+</file>
+
+<file path=ppt/slides/slide20.xml><?xml version="1.0" encoding="utf-8"?>
+<p:sld xmlns:a="http://schemas.openxmlformats.org/drawingml/2006/main" xmlns:p="http://schemas.openxmlformats.org/presentationml/2006/main" xmlns:r="http://schemas.openxmlformats.org/officeDocument/2006/relationships">
+  <p:cSld>
+    <p:spTree>
+      <p:nvGrpSpPr>
+        <p:cNvPr id="1" name=""/>
+        <p:cNvGrpSpPr/>
+        <p:nvPr/>
+      </p:nvGrpSpPr>
+      <p:grpSpPr/>
+      <p:sp>
+        <p:nvSpPr>
+          <p:cNvPr id="3" name="Title 2"/>
+          <p:cNvSpPr>
+            <a:spLocks noGrp="1"/>
+          </p:cNvSpPr>
+          <p:nvPr>
+            <p:ph type="title"/>
+          </p:nvPr>
+        </p:nvSpPr>
+        <p:spPr/>
+        <p:txBody>
+          <a:bodyPr/>
+          <a:lstStyle/>
+          <a:p>
+            <a:r>
+              <a:rPr sz="2400" b="0" i="0">
+                <a:solidFill>
+                  <a:srgbClr val="000000"/>
+                </a:solidFill>
+              </a:rPr>
+              <a:t>What failed?</a:t>
+            </a:r>
+          </a:p>
+        </p:txBody>
+      </p:sp>
+      <p:sp>
+        <p:nvSpPr>
+          <p:cNvPr id="900" name="Slide Number Placeholder 900"/>
+          <p:cNvSpPr>
+            <a:spLocks noGrp="1"/>
+          </p:cNvSpPr>
+          <p:nvPr>
+            <p:ph type="sldNum" sz="quarter" idx="4"/>
+          </p:nvPr>
+        </p:nvSpPr>
+        <p:spPr/>
+        <p:txBody>
+          <a:bodyPr/>
+          <a:lstStyle/>
+          <a:p>
+            <a:fld id="{5400AB79-7F3F-43DC-B715-760288CCAD7B}" type="slidenum">
+              <a:rPr lang="en-US" smtClean="0"/>
+              <a:t>20</a:t>
+            </a:fld>
+            <a:endParaRPr lang="en-US"/>
+          </a:p>
+        </p:txBody>
+      </p:sp>
+      <p:sp>
+        <p:nvSpPr>
+          <p:cNvPr id="901" name="Block"/>
+          <p:cNvSpPr/>
+          <p:nvPr/>
+        </p:nvSpPr>
+        <p:spPr>
+          <a:xfrm>
+            <a:off x="731520" y="1188720"/>
+            <a:ext cx="2926080" cy="566928"/>
+          </a:xfrm>
+          <a:prstGeom prst="rect">
+            <a:avLst/>
+          </a:prstGeom>
+          <a:solidFill>
+            <a:srgbClr val="8E6F3E"/>
+          </a:solidFill>
+          <a:ln>
+            <a:noFill/>
+          </a:ln>
+          <a:effectLst/>
+        </p:spPr>
+        <p:style>
+          <a:lnRef idx="1">
+            <a:schemeClr val="accent1"/>
+          </a:lnRef>
+          <a:fillRef idx="3">
+            <a:schemeClr val="accent1"/>
+          </a:fillRef>
+          <a:effectRef idx="2">
+            <a:schemeClr val="accent1"/>
+          </a:effectRef>
+          <a:fontRef idx="minor">
+            <a:schemeClr val="lt1"/>
+          </a:fontRef>
+        </p:style>
+        <p:txBody>
+          <a:bodyPr rtlCol="0" anchor="ctr" wrap="square" lIns="27432" rIns="27432" tIns="22860" bIns="22860"/>
+          <a:lstStyle/>
+          <a:p>
+            <a:pPr algn="ctr"/>
+            <a:r>
+              <a:rPr sz="2000" b="1" i="0">
+                <a:solidFill>
+                  <a:srgbClr val="FFFFFF"/>
+                </a:solidFill>
+              </a:rPr>
+              <a:t>REQUIREMENTS</a:t>
+            </a:r>
+          </a:p>
+        </p:txBody>
+      </p:sp>
+      <p:cxnSp>
+        <p:nvCxnSpPr>
+          <p:cNvPr id="902" name="Connector 901"/>
+          <p:cNvCxnSpPr/>
+          <p:nvPr/>
+        </p:nvCxnSpPr>
+        <p:spPr>
+          <a:xfrm>
+            <a:off x="2194560" y="1755648"/>
+            <a:ext cx="0" cy="274320"/>
+          </a:xfrm>
+          <a:prstGeom prst="line">
+            <a:avLst/>
+          </a:prstGeom>
+          <a:ln w="19050">
+            <a:solidFill>
+              <a:srgbClr val="8E6F3E"/>
+            </a:solidFill>
+            <a:tailEnd type="triangle"/>
+          </a:ln>
+        </p:spPr>
+        <p:style>
+          <a:lnRef idx="2">
+            <a:schemeClr val="accent1"/>
+          </a:lnRef>
+          <a:fillRef idx="0">
+            <a:schemeClr val="accent1"/>
+          </a:fillRef>
+          <a:effectRef idx="1">
+            <a:schemeClr val="accent1"/>
+          </a:effectRef>
+          <a:fontRef idx="minor">
+            <a:schemeClr val="tx1"/>
+          </a:fontRef>
+        </p:style>
+      </p:cxnSp>
+      <p:sp>
+        <p:nvSpPr>
+          <p:cNvPr id="903" name="Block"/>
+          <p:cNvSpPr/>
+          <p:nvPr/>
+        </p:nvSpPr>
+        <p:spPr>
+          <a:xfrm>
+            <a:off x="731520" y="2029968"/>
+            <a:ext cx="2926080" cy="566928"/>
+          </a:xfrm>
+          <a:prstGeom prst="rect">
+            <a:avLst/>
+          </a:prstGeom>
+          <a:solidFill>
+            <a:srgbClr val="8E6F3E"/>
+          </a:solidFill>
+          <a:ln>
+            <a:noFill/>
+          </a:ln>
+          <a:effectLst/>
+        </p:spPr>
+        <p:style>
+          <a:lnRef idx="1">
+            <a:schemeClr val="accent1"/>
+          </a:lnRef>
+          <a:fillRef idx="3">
+            <a:schemeClr val="accent1"/>
+          </a:fillRef>
+          <a:effectRef idx="2">
+            <a:schemeClr val="accent1"/>
+          </a:effectRef>
+          <a:fontRef idx="minor">
+            <a:schemeClr val="lt1"/>
+          </a:fontRef>
+        </p:style>
+        <p:txBody>
+          <a:bodyPr rtlCol="0" anchor="ctr" wrap="square" lIns="27432" rIns="27432" tIns="22860" bIns="22860"/>
+          <a:lstStyle/>
+          <a:p>
+            <a:pPr algn="ctr"/>
+            <a:r>
+              <a:rPr sz="2000" b="1" i="0">
+                <a:solidFill>
+                  <a:srgbClr val="FFFFFF"/>
+                </a:solidFill>
+              </a:rPr>
+              <a:t>SPECIFICATION</a:t>
+            </a:r>
+          </a:p>
+        </p:txBody>
+      </p:sp>
+      <p:cxnSp>
+        <p:nvCxnSpPr>
+          <p:cNvPr id="904" name="Connector 903"/>
+          <p:cNvCxnSpPr/>
+          <p:nvPr/>
+        </p:nvCxnSpPr>
+        <p:spPr>
+          <a:xfrm>
+            <a:off x="2194560" y="2596896"/>
+            <a:ext cx="0" cy="274320"/>
+          </a:xfrm>
+          <a:prstGeom prst="line">
+            <a:avLst/>
+          </a:prstGeom>
+          <a:ln w="19050">
+            <a:solidFill>
+              <a:srgbClr val="8E6F3E"/>
+            </a:solidFill>
+            <a:tailEnd type="triangle"/>
+          </a:ln>
+        </p:spPr>
+        <p:style>
+          <a:lnRef idx="2">
+            <a:schemeClr val="accent1"/>
+          </a:lnRef>
+          <a:fillRef idx="0">
+            <a:schemeClr val="accent1"/>
+          </a:fillRef>
+          <a:effectRef idx="1">
+            <a:schemeClr val="accent1"/>
+          </a:effectRef>
+          <a:fontRef idx="minor">
+            <a:schemeClr val="tx1"/>
+          </a:fontRef>
+        </p:style>
+      </p:cxnSp>
+      <p:sp>
+        <p:nvSpPr>
+          <p:cNvPr id="905" name="Block"/>
+          <p:cNvSpPr/>
+          <p:nvPr/>
+        </p:nvSpPr>
+        <p:spPr>
+          <a:xfrm>
+            <a:off x="731520" y="2871216"/>
+            <a:ext cx="2926080" cy="566928"/>
+          </a:xfrm>
+          <a:prstGeom prst="rect">
+            <a:avLst/>
+          </a:prstGeom>
+          <a:solidFill>
+            <a:srgbClr val="8E6F3E"/>
+          </a:solidFill>
+          <a:ln>
+            <a:noFill/>
+          </a:ln>
+          <a:effectLst/>
+        </p:spPr>
+        <p:style>
+          <a:lnRef idx="1">
+            <a:schemeClr val="accent1"/>
+          </a:lnRef>
+          <a:fillRef idx="3">
+            <a:schemeClr val="accent1"/>
+          </a:fillRef>
+          <a:effectRef idx="2">
+            <a:schemeClr val="accent1"/>
+          </a:effectRef>
+          <a:fontRef idx="minor">
+            <a:schemeClr val="lt1"/>
+          </a:fontRef>
+        </p:style>
+        <p:txBody>
+          <a:bodyPr rtlCol="0" anchor="ctr" wrap="square" lIns="27432" rIns="27432" tIns="22860" bIns="22860"/>
+          <a:lstStyle/>
+          <a:p>
+            <a:pPr algn="ctr"/>
+            <a:r>
+              <a:rPr sz="2000" b="1" i="0">
+                <a:solidFill>
+                  <a:srgbClr val="FFFFFF"/>
+                </a:solidFill>
+              </a:rPr>
+              <a:t>ARCHITECTURE</a:t>
+            </a:r>
+          </a:p>
+        </p:txBody>
+      </p:sp>
+      <p:cxnSp>
+        <p:nvCxnSpPr>
+          <p:cNvPr id="906" name="Connector 905"/>
+          <p:cNvCxnSpPr/>
+          <p:nvPr/>
+        </p:nvCxnSpPr>
+        <p:spPr>
+          <a:xfrm>
+            <a:off x="2194560" y="3438144"/>
+            <a:ext cx="0" cy="274320"/>
+          </a:xfrm>
+          <a:prstGeom prst="line">
+            <a:avLst/>
+          </a:prstGeom>
+          <a:ln w="19050">
+            <a:solidFill>
+              <a:srgbClr val="8E6F3E"/>
+            </a:solidFill>
+            <a:tailEnd type="triangle"/>
+          </a:ln>
+        </p:spPr>
+        <p:style>
+          <a:lnRef idx="2">
+            <a:schemeClr val="accent1"/>
+          </a:lnRef>
+          <a:fillRef idx="0">
+            <a:schemeClr val="accent1"/>
+          </a:fillRef>
+          <a:effectRef idx="1">
+            <a:schemeClr val="accent1"/>
+          </a:effectRef>
+          <a:fontRef idx="minor">
+            <a:schemeClr val="tx1"/>
+          </a:fontRef>
+        </p:style>
+      </p:cxnSp>
+      <p:sp>
+        <p:nvSpPr>
+          <p:cNvPr id="907" name="Block"/>
+          <p:cNvSpPr/>
+          <p:nvPr/>
+        </p:nvSpPr>
+        <p:spPr>
+          <a:xfrm>
+            <a:off x="731520" y="3712464"/>
+            <a:ext cx="2926080" cy="566928"/>
+          </a:xfrm>
+          <a:prstGeom prst="rect">
+            <a:avLst/>
+          </a:prstGeom>
+          <a:solidFill>
+            <a:srgbClr val="8E6F3E"/>
+          </a:solidFill>
+          <a:ln>
+            <a:noFill/>
+          </a:ln>
+          <a:effectLst/>
+        </p:spPr>
+        <p:style>
+          <a:lnRef idx="1">
+            <a:schemeClr val="accent1"/>
+          </a:lnRef>
+          <a:fillRef idx="3">
+            <a:schemeClr val="accent1"/>
+          </a:fillRef>
+          <a:effectRef idx="2">
+            <a:schemeClr val="accent1"/>
+          </a:effectRef>
+          <a:fontRef idx="minor">
+            <a:schemeClr val="lt1"/>
+          </a:fontRef>
+        </p:style>
+        <p:txBody>
+          <a:bodyPr rtlCol="0" anchor="ctr" wrap="square" lIns="27432" rIns="27432" tIns="22860" bIns="22860"/>
+          <a:lstStyle/>
+          <a:p>
+            <a:pPr algn="ctr"/>
+            <a:r>
+              <a:rPr sz="2000" b="1" i="0">
+                <a:solidFill>
+                  <a:srgbClr val="FFFFFF"/>
+                </a:solidFill>
+              </a:rPr>
+              <a:t>DESIGN</a:t>
+            </a:r>
+          </a:p>
+        </p:txBody>
+      </p:sp>
+      <p:cxnSp>
+        <p:nvCxnSpPr>
+          <p:cNvPr id="908" name="Connector 907"/>
+          <p:cNvCxnSpPr/>
+          <p:nvPr/>
+        </p:nvCxnSpPr>
+        <p:spPr>
+          <a:xfrm>
+            <a:off x="2194560" y="4279392"/>
+            <a:ext cx="0" cy="274320"/>
+          </a:xfrm>
+          <a:prstGeom prst="line">
+            <a:avLst/>
+          </a:prstGeom>
+          <a:ln w="19050">
+            <a:solidFill>
+              <a:srgbClr val="8E6F3E"/>
+            </a:solidFill>
+            <a:tailEnd type="triangle"/>
+          </a:ln>
+        </p:spPr>
+        <p:style>
+          <a:lnRef idx="2">
+            <a:schemeClr val="accent1"/>
+          </a:lnRef>
+          <a:fillRef idx="0">
+            <a:schemeClr val="accent1"/>
+          </a:fillRef>
+          <a:effectRef idx="1">
+            <a:schemeClr val="accent1"/>
+          </a:effectRef>
+          <a:fontRef idx="minor">
+            <a:schemeClr val="tx1"/>
+          </a:fontRef>
+        </p:style>
+      </p:cxnSp>
+      <p:sp>
+        <p:nvSpPr>
+          <p:cNvPr id="909" name="Block"/>
+          <p:cNvSpPr/>
+          <p:nvPr/>
+        </p:nvSpPr>
+        <p:spPr>
+          <a:xfrm>
+            <a:off x="731520" y="4553712"/>
+            <a:ext cx="2926080" cy="566928"/>
+          </a:xfrm>
+          <a:prstGeom prst="rect">
+            <a:avLst/>
+          </a:prstGeom>
+          <a:solidFill>
+            <a:srgbClr val="8E6F3E"/>
+          </a:solidFill>
+          <a:ln>
+            <a:noFill/>
+          </a:ln>
+          <a:effectLst/>
+        </p:spPr>
+        <p:style>
+          <a:lnRef idx="1">
+            <a:schemeClr val="accent1"/>
+          </a:lnRef>
+          <a:fillRef idx="3">
+            <a:schemeClr val="accent1"/>
+          </a:fillRef>
+          <a:effectRef idx="2">
+            <a:schemeClr val="accent1"/>
+          </a:effectRef>
+          <a:fontRef idx="minor">
+            <a:schemeClr val="lt1"/>
+          </a:fontRef>
+        </p:style>
+        <p:txBody>
+          <a:bodyPr rtlCol="0" anchor="ctr" wrap="square" lIns="27432" rIns="27432" tIns="22860" bIns="22860"/>
+          <a:lstStyle/>
+          <a:p>
+            <a:pPr algn="ctr"/>
+            <a:r>
+              <a:rPr sz="2000" b="1" i="0">
+                <a:solidFill>
+                  <a:srgbClr val="FFFFFF"/>
+                </a:solidFill>
+              </a:rPr>
+              <a:t>IMPLEMENTATION</a:t>
+            </a:r>
+          </a:p>
+        </p:txBody>
+      </p:sp>
+      <p:sp>
+        <p:nvSpPr>
+          <p:cNvPr id="910" name="Side"/>
+          <p:cNvSpPr txBox="1"/>
+          <p:nvPr/>
+        </p:nvSpPr>
+        <p:spPr>
+          <a:xfrm>
+            <a:off x="4206240" y="1645920"/>
+            <a:ext cx="4480560" cy="2926080"/>
+          </a:xfrm>
+          <a:prstGeom prst="rect">
+            <a:avLst/>
+          </a:prstGeom>
+          <a:noFill/>
+        </p:spPr>
+        <p:txBody>
+          <a:bodyPr wrap="square" anchor="t" lIns="27432" rIns="27432" tIns="22860" bIns="22860">
+            <a:spAutoFit/>
+          </a:bodyPr>
+          <a:lstStyle/>
+          <a:p>
+            <a:pPr algn="l"/>
+            <a:r>
+              <a:rPr sz="2000" b="1" i="0">
+                <a:solidFill>
+                  <a:srgbClr val="5C4826"/>
+                </a:solidFill>
+              </a:rPr>
+              <a:t>A failure is observed in the realization.</a:t>
+            </a:r>
+          </a:p>
+          <a:p>
+            <a:pPr algn="l">
+              <a:spcBef>
+                <a:spcPts val="1200"/>
+              </a:spcBef>
+            </a:pPr>
+            <a:r>
+              <a:rPr sz="2000" b="0" i="0">
+                <a:solidFill>
+                  <a:srgbClr val="555960"/>
+                </a:solidFill>
+              </a:rPr>
+              <a:t>Diagnosis traces it back to the decision — or decisions — that produced it.</a:t>
+            </a:r>
+          </a:p>
+        </p:txBody>
+      </p:sp>
+    </p:spTree>
+  </p:cSld>
+  <p:clrMapOvr>
+    <a:masterClrMapping/>
+  </p:clrMapOvr>
+</p:sld>
+</file>
+
+<file path=ppt/slides/slide21.xml><?xml version="1.0" encoding="utf-8"?>
+<p:sld xmlns:a="http://schemas.openxmlformats.org/drawingml/2006/main" xmlns:p="http://schemas.openxmlformats.org/presentationml/2006/main" xmlns:r="http://schemas.openxmlformats.org/officeDocument/2006/relationships">
+  <p:cSld>
+    <p:spTree>
+      <p:nvGrpSpPr>
+        <p:cNvPr id="1" name=""/>
+        <p:cNvGrpSpPr/>
+        <p:nvPr/>
+      </p:nvGrpSpPr>
+      <p:grpSpPr/>
+      <p:sp>
+        <p:nvSpPr>
+          <p:cNvPr id="3" name="Title 2"/>
+          <p:cNvSpPr>
+            <a:spLocks noGrp="1"/>
+          </p:cNvSpPr>
+          <p:nvPr>
+            <p:ph type="title"/>
+          </p:nvPr>
+        </p:nvSpPr>
+        <p:spPr/>
+        <p:txBody>
+          <a:bodyPr/>
+          <a:lstStyle/>
+          <a:p>
+            <a:r>
+              <a:rPr sz="2400" b="0" i="0">
+                <a:solidFill>
+                  <a:srgbClr val="000000"/>
+                </a:solidFill>
+              </a:rPr>
+              <a:t>One incident can implicate several decisions</a:t>
+            </a:r>
+          </a:p>
+        </p:txBody>
+      </p:sp>
+      <p:sp>
+        <p:nvSpPr>
+          <p:cNvPr id="900" name="Slide Number Placeholder 900"/>
+          <p:cNvSpPr>
+            <a:spLocks noGrp="1"/>
+          </p:cNvSpPr>
+          <p:nvPr>
+            <p:ph type="sldNum" sz="quarter" idx="4"/>
+          </p:nvPr>
+        </p:nvSpPr>
+        <p:spPr/>
+        <p:txBody>
+          <a:bodyPr/>
+          <a:lstStyle/>
+          <a:p>
+            <a:fld id="{6694F731-54AE-4367-BAA0-6C61552ED44A}" type="slidenum">
+              <a:rPr lang="en-US" smtClean="0"/>
+              <a:t>21</a:t>
+            </a:fld>
+            <a:endParaRPr lang="en-US"/>
+          </a:p>
+        </p:txBody>
+      </p:sp>
+      <p:sp>
+        <p:nvSpPr>
+          <p:cNvPr id="901" name="Block"/>
+          <p:cNvSpPr/>
+          <p:nvPr/>
+        </p:nvSpPr>
+        <p:spPr>
+          <a:xfrm>
+            <a:off x="640080" y="2743200"/>
+            <a:ext cx="2377440" cy="822960"/>
+          </a:xfrm>
+          <a:prstGeom prst="rect">
+            <a:avLst/>
+          </a:prstGeom>
+          <a:solidFill>
+            <a:srgbClr val="9A3F12"/>
+          </a:solidFill>
+          <a:ln>
+            <a:noFill/>
+          </a:ln>
+          <a:effectLst/>
+        </p:spPr>
+        <p:style>
+          <a:lnRef idx="1">
+            <a:schemeClr val="accent1"/>
+          </a:lnRef>
+          <a:fillRef idx="3">
+            <a:schemeClr val="accent1"/>
+          </a:fillRef>
+          <a:effectRef idx="2">
+            <a:schemeClr val="accent1"/>
+          </a:effectRef>
+          <a:fontRef idx="minor">
+            <a:schemeClr val="lt1"/>
+          </a:fontRef>
+        </p:style>
+        <p:txBody>
+          <a:bodyPr rtlCol="0" anchor="ctr" wrap="square" lIns="27432" rIns="27432" tIns="22860" bIns="22860"/>
+          <a:lstStyle/>
+          <a:p>
+            <a:pPr algn="ctr"/>
+            <a:r>
+              <a:rPr sz="2200" b="1" i="0">
+                <a:solidFill>
+                  <a:srgbClr val="FFFFFF"/>
+                </a:solidFill>
+              </a:rPr>
+              <a:t>ONE INCIDENT</a:t>
+            </a:r>
+          </a:p>
+        </p:txBody>
+      </p:sp>
+      <p:sp>
+        <p:nvSpPr>
+          <p:cNvPr id="902" name="Card"/>
+          <p:cNvSpPr/>
+          <p:nvPr/>
+        </p:nvSpPr>
+        <p:spPr>
+          <a:xfrm>
+            <a:off x="5760720" y="1188720"/>
+            <a:ext cx="2743200" cy="566928"/>
+          </a:xfrm>
+          <a:prstGeom prst="rect">
+            <a:avLst/>
+          </a:prstGeom>
+          <a:solidFill>
+            <a:srgbClr val="F5F1E8"/>
+          </a:solidFill>
+          <a:ln w="12700">
+            <a:solidFill>
+              <a:srgbClr val="C9B991"/>
+            </a:solidFill>
+          </a:ln>
+          <a:effectLst/>
+        </p:spPr>
+        <p:style>
+          <a:lnRef idx="1">
+            <a:schemeClr val="accent1"/>
+          </a:lnRef>
+          <a:fillRef idx="3">
+            <a:schemeClr val="accent1"/>
+          </a:fillRef>
+          <a:effectRef idx="2">
+            <a:schemeClr val="accent1"/>
+          </a:effectRef>
+          <a:fontRef idx="minor">
+            <a:schemeClr val="lt1"/>
+          </a:fontRef>
+        </p:style>
+        <p:txBody>
+          <a:bodyPr rtlCol="0" anchor="ctr" wrap="square" lIns="27432" rIns="27432" tIns="22860" bIns="22860"/>
+          <a:lstStyle/>
+          <a:p>
+            <a:pPr algn="ctr"/>
+            <a:r>
+              <a:rPr sz="2000" b="0" i="0">
+                <a:solidFill>
+                  <a:srgbClr val="5C4826"/>
+                </a:solidFill>
+              </a:rPr>
+              <a:t>requirements</a:t>
+            </a:r>
+          </a:p>
+        </p:txBody>
+      </p:sp>
+      <p:cxnSp>
+        <p:nvCxnSpPr>
+          <p:cNvPr id="903" name="Connector 902"/>
+          <p:cNvCxnSpPr/>
+          <p:nvPr/>
+        </p:nvCxnSpPr>
+        <p:spPr>
+          <a:xfrm flipV="1">
+            <a:off x="3017520" y="1472184"/>
+            <a:ext cx="2743200" cy="1682496"/>
+          </a:xfrm>
+          <a:prstGeom prst="line">
+            <a:avLst/>
+          </a:prstGeom>
+          <a:ln w="19050">
+            <a:solidFill>
+              <a:srgbClr val="8E6F3E"/>
+            </a:solidFill>
+            <a:tailEnd type="triangle"/>
+          </a:ln>
+        </p:spPr>
+        <p:style>
+          <a:lnRef idx="2">
+            <a:schemeClr val="accent1"/>
+          </a:lnRef>
+          <a:fillRef idx="0">
+            <a:schemeClr val="accent1"/>
+          </a:fillRef>
+          <a:effectRef idx="1">
+            <a:schemeClr val="accent1"/>
+          </a:effectRef>
+          <a:fontRef idx="minor">
+            <a:schemeClr val="tx1"/>
+          </a:fontRef>
+        </p:style>
+      </p:cxnSp>
+      <p:sp>
+        <p:nvSpPr>
+          <p:cNvPr id="904" name="Card"/>
+          <p:cNvSpPr/>
+          <p:nvPr/>
+        </p:nvSpPr>
+        <p:spPr>
+          <a:xfrm>
+            <a:off x="5760720" y="2066543"/>
+            <a:ext cx="2743200" cy="566928"/>
+          </a:xfrm>
+          <a:prstGeom prst="rect">
+            <a:avLst/>
+          </a:prstGeom>
+          <a:solidFill>
+            <a:srgbClr val="F5F1E8"/>
+          </a:solidFill>
+          <a:ln w="12700">
+            <a:solidFill>
+              <a:srgbClr val="C9B991"/>
+            </a:solidFill>
+          </a:ln>
+          <a:effectLst/>
+        </p:spPr>
+        <p:style>
+          <a:lnRef idx="1">
+            <a:schemeClr val="accent1"/>
+          </a:lnRef>
+          <a:fillRef idx="3">
+            <a:schemeClr val="accent1"/>
+          </a:fillRef>
+          <a:effectRef idx="2">
+            <a:schemeClr val="accent1"/>
+          </a:effectRef>
+          <a:fontRef idx="minor">
+            <a:schemeClr val="lt1"/>
+          </a:fontRef>
+        </p:style>
+        <p:txBody>
+          <a:bodyPr rtlCol="0" anchor="ctr" wrap="square" lIns="27432" rIns="27432" tIns="22860" bIns="22860"/>
+          <a:lstStyle/>
+          <a:p>
+            <a:pPr algn="ctr"/>
+            <a:r>
+              <a:rPr sz="2000" b="0" i="0">
+                <a:solidFill>
+                  <a:srgbClr val="5C4826"/>
+                </a:solidFill>
+              </a:rPr>
+              <a:t>specification</a:t>
+            </a:r>
+          </a:p>
+        </p:txBody>
+      </p:sp>
+      <p:cxnSp>
+        <p:nvCxnSpPr>
+          <p:cNvPr id="905" name="Connector 904"/>
+          <p:cNvCxnSpPr/>
+          <p:nvPr/>
+        </p:nvCxnSpPr>
+        <p:spPr>
+          <a:xfrm flipV="1">
+            <a:off x="3017520" y="2350008"/>
+            <a:ext cx="2743200" cy="804672"/>
+          </a:xfrm>
+          <a:prstGeom prst="line">
+            <a:avLst/>
+          </a:prstGeom>
+          <a:ln w="19050">
+            <a:solidFill>
+              <a:srgbClr val="8E6F3E"/>
+            </a:solidFill>
+            <a:tailEnd type="triangle"/>
+          </a:ln>
+        </p:spPr>
+        <p:style>
+          <a:lnRef idx="2">
+            <a:schemeClr val="accent1"/>
+          </a:lnRef>
+          <a:fillRef idx="0">
+            <a:schemeClr val="accent1"/>
+          </a:fillRef>
+          <a:effectRef idx="1">
+            <a:schemeClr val="accent1"/>
+          </a:effectRef>
+          <a:fontRef idx="minor">
+            <a:schemeClr val="tx1"/>
+          </a:fontRef>
+        </p:style>
+      </p:cxnSp>
+      <p:sp>
+        <p:nvSpPr>
+          <p:cNvPr id="906" name="Card"/>
+          <p:cNvSpPr/>
+          <p:nvPr/>
+        </p:nvSpPr>
+        <p:spPr>
+          <a:xfrm>
+            <a:off x="5760720" y="2944368"/>
+            <a:ext cx="2743200" cy="566928"/>
+          </a:xfrm>
+          <a:prstGeom prst="rect">
+            <a:avLst/>
+          </a:prstGeom>
+          <a:solidFill>
+            <a:srgbClr val="F5F1E8"/>
+          </a:solidFill>
+          <a:ln w="12700">
+            <a:solidFill>
+              <a:srgbClr val="C9B991"/>
+            </a:solidFill>
+          </a:ln>
+          <a:effectLst/>
+        </p:spPr>
+        <p:style>
+          <a:lnRef idx="1">
+            <a:schemeClr val="accent1"/>
+          </a:lnRef>
+          <a:fillRef idx="3">
+            <a:schemeClr val="accent1"/>
+          </a:fillRef>
+          <a:effectRef idx="2">
+            <a:schemeClr val="accent1"/>
+          </a:effectRef>
+          <a:fontRef idx="minor">
+            <a:schemeClr val="lt1"/>
+          </a:fontRef>
+        </p:style>
+        <p:txBody>
+          <a:bodyPr rtlCol="0" anchor="ctr" wrap="square" lIns="27432" rIns="27432" tIns="22860" bIns="22860"/>
+          <a:lstStyle/>
+          <a:p>
+            <a:pPr algn="ctr"/>
+            <a:r>
+              <a:rPr sz="2000" b="0" i="0">
+                <a:solidFill>
+                  <a:srgbClr val="5C4826"/>
+                </a:solidFill>
+              </a:rPr>
+              <a:t>architecture</a:t>
+            </a:r>
+          </a:p>
+        </p:txBody>
+      </p:sp>
+      <p:cxnSp>
+        <p:nvCxnSpPr>
+          <p:cNvPr id="907" name="Connector 906"/>
+          <p:cNvCxnSpPr/>
+          <p:nvPr/>
+        </p:nvCxnSpPr>
+        <p:spPr>
+          <a:xfrm>
+            <a:off x="3017520" y="3154680"/>
+            <a:ext cx="2743200" cy="73152"/>
+          </a:xfrm>
+          <a:prstGeom prst="line">
+            <a:avLst/>
+          </a:prstGeom>
+          <a:ln w="19050">
+            <a:solidFill>
+              <a:srgbClr val="8E6F3E"/>
+            </a:solidFill>
+            <a:tailEnd type="triangle"/>
+          </a:ln>
+        </p:spPr>
+        <p:style>
+          <a:lnRef idx="2">
+            <a:schemeClr val="accent1"/>
+          </a:lnRef>
+          <a:fillRef idx="0">
+            <a:schemeClr val="accent1"/>
+          </a:fillRef>
+          <a:effectRef idx="1">
+            <a:schemeClr val="accent1"/>
+          </a:effectRef>
+          <a:fontRef idx="minor">
+            <a:schemeClr val="tx1"/>
+          </a:fontRef>
+        </p:style>
+      </p:cxnSp>
+      <p:sp>
+        <p:nvSpPr>
+          <p:cNvPr id="908" name="Card"/>
+          <p:cNvSpPr/>
+          <p:nvPr/>
+        </p:nvSpPr>
+        <p:spPr>
+          <a:xfrm>
+            <a:off x="5760720" y="3822191"/>
+            <a:ext cx="2743200" cy="566928"/>
+          </a:xfrm>
+          <a:prstGeom prst="rect">
+            <a:avLst/>
+          </a:prstGeom>
+          <a:solidFill>
+            <a:srgbClr val="F5F1E8"/>
+          </a:solidFill>
+          <a:ln w="12700">
+            <a:solidFill>
+              <a:srgbClr val="C9B991"/>
+            </a:solidFill>
+          </a:ln>
+          <a:effectLst/>
+        </p:spPr>
+        <p:style>
+          <a:lnRef idx="1">
+            <a:schemeClr val="accent1"/>
+          </a:lnRef>
+          <a:fillRef idx="3">
+            <a:schemeClr val="accent1"/>
+          </a:fillRef>
+          <a:effectRef idx="2">
+            <a:schemeClr val="accent1"/>
+          </a:effectRef>
+          <a:fontRef idx="minor">
+            <a:schemeClr val="lt1"/>
+          </a:fontRef>
+        </p:style>
+        <p:txBody>
+          <a:bodyPr rtlCol="0" anchor="ctr" wrap="square" lIns="27432" rIns="27432" tIns="22860" bIns="22860"/>
+          <a:lstStyle/>
+          <a:p>
+            <a:pPr algn="ctr"/>
+            <a:r>
+              <a:rPr sz="2000" b="0" i="0">
+                <a:solidFill>
+                  <a:srgbClr val="5C4826"/>
+                </a:solidFill>
+              </a:rPr>
+              <a:t>design</a:t>
+            </a:r>
+          </a:p>
+        </p:txBody>
+      </p:sp>
+      <p:cxnSp>
+        <p:nvCxnSpPr>
+          <p:cNvPr id="909" name="Connector 908"/>
+          <p:cNvCxnSpPr/>
+          <p:nvPr/>
+        </p:nvCxnSpPr>
+        <p:spPr>
+          <a:xfrm>
+            <a:off x="3017520" y="3154680"/>
+            <a:ext cx="2743200" cy="950975"/>
+          </a:xfrm>
+          <a:prstGeom prst="line">
+            <a:avLst/>
+          </a:prstGeom>
+          <a:ln w="19050">
+            <a:solidFill>
+              <a:srgbClr val="8E6F3E"/>
+            </a:solidFill>
+            <a:tailEnd type="triangle"/>
+          </a:ln>
+        </p:spPr>
+        <p:style>
+          <a:lnRef idx="2">
+            <a:schemeClr val="accent1"/>
+          </a:lnRef>
+          <a:fillRef idx="0">
+            <a:schemeClr val="accent1"/>
+          </a:fillRef>
+          <a:effectRef idx="1">
+            <a:schemeClr val="accent1"/>
+          </a:effectRef>
+          <a:fontRef idx="minor">
+            <a:schemeClr val="tx1"/>
+          </a:fontRef>
+        </p:style>
+      </p:cxnSp>
+      <p:sp>
+        <p:nvSpPr>
+          <p:cNvPr id="910" name="Card"/>
+          <p:cNvSpPr/>
+          <p:nvPr/>
+        </p:nvSpPr>
+        <p:spPr>
+          <a:xfrm>
+            <a:off x="5760720" y="4700016"/>
+            <a:ext cx="2743200" cy="566928"/>
+          </a:xfrm>
+          <a:prstGeom prst="rect">
+            <a:avLst/>
+          </a:prstGeom>
+          <a:solidFill>
+            <a:srgbClr val="F5F1E8"/>
+          </a:solidFill>
+          <a:ln w="12700">
+            <a:solidFill>
+              <a:srgbClr val="C9B991"/>
+            </a:solidFill>
+          </a:ln>
+          <a:effectLst/>
+        </p:spPr>
+        <p:style>
+          <a:lnRef idx="1">
+            <a:schemeClr val="accent1"/>
+          </a:lnRef>
+          <a:fillRef idx="3">
+            <a:schemeClr val="accent1"/>
+          </a:fillRef>
+          <a:effectRef idx="2">
+            <a:schemeClr val="accent1"/>
+          </a:effectRef>
+          <a:fontRef idx="minor">
+            <a:schemeClr val="lt1"/>
+          </a:fontRef>
+        </p:style>
+        <p:txBody>
+          <a:bodyPr rtlCol="0" anchor="ctr" wrap="square" lIns="27432" rIns="27432" tIns="22860" bIns="22860"/>
+          <a:lstStyle/>
+          <a:p>
+            <a:pPr algn="ctr"/>
+            <a:r>
+              <a:rPr sz="2000" b="0" i="0">
+                <a:solidFill>
+                  <a:srgbClr val="5C4826"/>
+                </a:solidFill>
+              </a:rPr>
+              <a:t>implementation</a:t>
+            </a:r>
+          </a:p>
+        </p:txBody>
+      </p:sp>
+      <p:cxnSp>
+        <p:nvCxnSpPr>
+          <p:cNvPr id="911" name="Connector 910"/>
+          <p:cNvCxnSpPr/>
+          <p:nvPr/>
+        </p:nvCxnSpPr>
+        <p:spPr>
+          <a:xfrm>
+            <a:off x="3017520" y="3154680"/>
+            <a:ext cx="2743200" cy="1828799"/>
+          </a:xfrm>
+          <a:prstGeom prst="line">
+            <a:avLst/>
+          </a:prstGeom>
+          <a:ln w="19050">
+            <a:solidFill>
+              <a:srgbClr val="8E6F3E"/>
+            </a:solidFill>
+            <a:tailEnd type="triangle"/>
+          </a:ln>
+        </p:spPr>
+        <p:style>
+          <a:lnRef idx="2">
+            <a:schemeClr val="accent1"/>
+          </a:lnRef>
+          <a:fillRef idx="0">
+            <a:schemeClr val="accent1"/>
+          </a:fillRef>
+          <a:effectRef idx="1">
+            <a:schemeClr val="accent1"/>
+          </a:effectRef>
+          <a:fontRef idx="minor">
+            <a:schemeClr val="tx1"/>
+          </a:fontRef>
+        </p:style>
+      </p:cxnSp>
+    </p:spTree>
+  </p:cSld>
+  <p:clrMapOvr>
+    <a:masterClrMapping/>
+  </p:clrMapOvr>
+</p:sld>
+</file>
+
+<file path=ppt/slides/slide22.xml><?xml version="1.0" encoding="utf-8"?>
+<p:sld xmlns:a="http://schemas.openxmlformats.org/drawingml/2006/main" xmlns:p="http://schemas.openxmlformats.org/presentationml/2006/main" xmlns:r="http://schemas.openxmlformats.org/officeDocument/2006/relationships">
+  <p:cSld>
+    <p:spTree>
+      <p:nvGrpSpPr>
+        <p:cNvPr id="1" name=""/>
+        <p:cNvGrpSpPr/>
+        <p:nvPr/>
+      </p:nvGrpSpPr>
+      <p:grpSpPr/>
+      <p:sp>
+        <p:nvSpPr>
+          <p:cNvPr id="3" name="Title 2"/>
+          <p:cNvSpPr>
+            <a:spLocks noGrp="1"/>
+          </p:cNvSpPr>
+          <p:nvPr>
+            <p:ph type="title"/>
+          </p:nvPr>
+        </p:nvSpPr>
+        <p:spPr/>
+        <p:txBody>
+          <a:bodyPr/>
+          <a:lstStyle/>
+          <a:p>
+            <a:r>
+              <a:rPr sz="2400" b="0" i="0">
+                <a:solidFill>
+                  <a:srgbClr val="000000"/>
+                </a:solidFill>
+              </a:rPr>
+              <a:t>Why didn't we know?</a:t>
+            </a:r>
+          </a:p>
+        </p:txBody>
+      </p:sp>
+      <p:sp>
+        <p:nvSpPr>
+          <p:cNvPr id="900" name="Slide Number Placeholder 900"/>
+          <p:cNvSpPr>
+            <a:spLocks noGrp="1"/>
+          </p:cNvSpPr>
+          <p:nvPr>
+            <p:ph type="sldNum" sz="quarter" idx="4"/>
+          </p:nvPr>
+        </p:nvSpPr>
+        <p:spPr/>
+        <p:txBody>
+          <a:bodyPr/>
+          <a:lstStyle/>
+          <a:p>
+            <a:fld id="{E069A349-9642-4DC6-8ABF-F4AD12353ACB}" type="slidenum">
+              <a:rPr lang="en-US" smtClean="0"/>
+              <a:t>22</a:t>
+            </a:fld>
+            <a:endParaRPr lang="en-US"/>
+          </a:p>
+        </p:txBody>
+      </p:sp>
+      <p:sp>
+        <p:nvSpPr>
+          <p:cNvPr id="901" name="Card"/>
+          <p:cNvSpPr/>
+          <p:nvPr/>
+        </p:nvSpPr>
+        <p:spPr>
+          <a:xfrm>
+            <a:off x="914400" y="1280160"/>
+            <a:ext cx="7315200" cy="3931920"/>
+          </a:xfrm>
+          <a:prstGeom prst="rect">
+            <a:avLst/>
+          </a:prstGeom>
+          <a:solidFill>
+            <a:srgbClr val="F5F1E8"/>
+          </a:solidFill>
+          <a:ln w="12700">
+            <a:solidFill>
+              <a:srgbClr val="C9B991"/>
+            </a:solidFill>
+          </a:ln>
+          <a:effectLst/>
+        </p:spPr>
+        <p:style>
+          <a:lnRef idx="1">
+            <a:schemeClr val="accent1"/>
+          </a:lnRef>
+          <a:fillRef idx="3">
+            <a:schemeClr val="accent1"/>
+          </a:fillRef>
+          <a:effectRef idx="2">
+            <a:schemeClr val="accent1"/>
+          </a:effectRef>
+          <a:fontRef idx="minor">
+            <a:schemeClr val="lt1"/>
+          </a:fontRef>
+        </p:style>
+        <p:txBody>
+          <a:bodyPr rtlCol="0" anchor="t" wrap="square" lIns="27432" rIns="27432" tIns="22860" bIns="22860"/>
+          <a:lstStyle/>
+          <a:p>
+            <a:pPr algn="ctr"/>
+            <a:r>
+              <a:rPr sz="2000" b="1" i="0">
+                <a:solidFill>
+                  <a:srgbClr val="5C4826"/>
+                </a:solidFill>
+              </a:rPr>
+              <a:t>Candidate answers</a:t>
+            </a:r>
+          </a:p>
+          <a:p>
+            <a:pPr algn="ctr">
+              <a:spcBef>
+                <a:spcPts val="1000"/>
+              </a:spcBef>
+            </a:pPr>
+            <a:r>
+              <a:rPr sz="2000" b="0" i="1">
+                <a:solidFill>
+                  <a:srgbClr val="555960"/>
+                </a:solidFill>
+              </a:rPr>
+              <a:t>(collected live)</a:t>
+            </a:r>
+          </a:p>
+        </p:txBody>
+      </p:sp>
+    </p:spTree>
+  </p:cSld>
+  <p:clrMapOvr>
+    <a:masterClrMapping/>
+  </p:clrMapOvr>
+</p:sld>
+</file>
+
+<file path=ppt/slides/slide23.xml><?xml version="1.0" encoding="utf-8"?>
+<p:sld xmlns:a="http://schemas.openxmlformats.org/drawingml/2006/main" xmlns:p="http://schemas.openxmlformats.org/presentationml/2006/main" xmlns:r="http://schemas.openxmlformats.org/officeDocument/2006/relationships">
+  <p:cSld>
+    <p:spTree>
+      <p:nvGrpSpPr>
+        <p:cNvPr id="1" name=""/>
+        <p:cNvGrpSpPr/>
+        <p:nvPr/>
+      </p:nvGrpSpPr>
+      <p:grpSpPr/>
+      <p:sp>
+        <p:nvSpPr>
+          <p:cNvPr id="3" name="Title 2"/>
+          <p:cNvSpPr>
+            <a:spLocks noGrp="1"/>
+          </p:cNvSpPr>
+          <p:nvPr>
+            <p:ph type="title"/>
+          </p:nvPr>
+        </p:nvSpPr>
+        <p:spPr/>
+        <p:txBody>
+          <a:bodyPr/>
+          <a:lstStyle/>
+          <a:p>
+            <a:r>
+              <a:rPr sz="2400" b="0" i="0">
+                <a:solidFill>
+                  <a:srgbClr val="000000"/>
+                </a:solidFill>
+              </a:rPr>
+              <a:t>Run Validation backward</a:t>
+            </a:r>
+          </a:p>
+        </p:txBody>
+      </p:sp>
+      <p:sp>
+        <p:nvSpPr>
+          <p:cNvPr id="900" name="Slide Number Placeholder 900"/>
+          <p:cNvSpPr>
+            <a:spLocks noGrp="1"/>
+          </p:cNvSpPr>
+          <p:nvPr>
+            <p:ph type="sldNum" sz="quarter" idx="4"/>
+          </p:nvPr>
+        </p:nvSpPr>
+        <p:spPr/>
+        <p:txBody>
+          <a:bodyPr/>
+          <a:lstStyle/>
+          <a:p>
+            <a:fld id="{2D6C24E8-0A3B-4ED0-BD65-7F4922DD3E32}" type="slidenum">
+              <a:rPr lang="en-US" smtClean="0"/>
+              <a:t>23</a:t>
+            </a:fld>
+            <a:endParaRPr lang="en-US"/>
+          </a:p>
+        </p:txBody>
+      </p:sp>
+      <p:sp>
+        <p:nvSpPr>
+          <p:cNvPr id="901" name="Block"/>
+          <p:cNvSpPr/>
+          <p:nvPr/>
+        </p:nvSpPr>
+        <p:spPr>
+          <a:xfrm>
+            <a:off x="731520" y="1143000"/>
+            <a:ext cx="2743200" cy="502920"/>
+          </a:xfrm>
+          <a:prstGeom prst="rect">
+            <a:avLst/>
+          </a:prstGeom>
+          <a:solidFill>
+            <a:srgbClr val="8E6F3E"/>
+          </a:solidFill>
+          <a:ln>
+            <a:noFill/>
+          </a:ln>
+          <a:effectLst/>
+        </p:spPr>
+        <p:style>
+          <a:lnRef idx="1">
+            <a:schemeClr val="accent1"/>
+          </a:lnRef>
+          <a:fillRef idx="3">
+            <a:schemeClr val="accent1"/>
+          </a:fillRef>
+          <a:effectRef idx="2">
+            <a:schemeClr val="accent1"/>
+          </a:effectRef>
+          <a:fontRef idx="minor">
+            <a:schemeClr val="lt1"/>
+          </a:fontRef>
+        </p:style>
+        <p:txBody>
+          <a:bodyPr rtlCol="0" anchor="ctr" wrap="square" lIns="27432" rIns="27432" tIns="22860" bIns="22860"/>
+          <a:lstStyle/>
+          <a:p>
+            <a:pPr algn="ctr"/>
+            <a:r>
+              <a:rPr sz="2000" b="1" i="0">
+                <a:solidFill>
+                  <a:srgbClr val="FFFFFF"/>
+                </a:solidFill>
+              </a:rPr>
+              <a:t>CLAIM</a:t>
+            </a:r>
+          </a:p>
+        </p:txBody>
+      </p:sp>
+      <p:cxnSp>
+        <p:nvCxnSpPr>
+          <p:cNvPr id="902" name="Connector 901"/>
+          <p:cNvCxnSpPr/>
+          <p:nvPr/>
+        </p:nvCxnSpPr>
+        <p:spPr>
+          <a:xfrm>
+            <a:off x="2103120" y="1645920"/>
+            <a:ext cx="0" cy="256032"/>
+          </a:xfrm>
+          <a:prstGeom prst="line">
+            <a:avLst/>
+          </a:prstGeom>
+          <a:ln w="19050">
+            <a:solidFill>
+              <a:srgbClr val="8E6F3E"/>
+            </a:solidFill>
+            <a:tailEnd type="triangle"/>
+          </a:ln>
+        </p:spPr>
+        <p:style>
+          <a:lnRef idx="2">
+            <a:schemeClr val="accent1"/>
+          </a:lnRef>
+          <a:fillRef idx="0">
+            <a:schemeClr val="accent1"/>
+          </a:fillRef>
+          <a:effectRef idx="1">
+            <a:schemeClr val="accent1"/>
+          </a:effectRef>
+          <a:fontRef idx="minor">
+            <a:schemeClr val="tx1"/>
+          </a:fontRef>
+        </p:style>
+      </p:cxnSp>
+      <p:sp>
+        <p:nvSpPr>
+          <p:cNvPr id="903" name="Block"/>
+          <p:cNvSpPr/>
+          <p:nvPr/>
+        </p:nvSpPr>
+        <p:spPr>
+          <a:xfrm>
+            <a:off x="731520" y="1901952"/>
+            <a:ext cx="2743200" cy="502920"/>
+          </a:xfrm>
+          <a:prstGeom prst="rect">
+            <a:avLst/>
+          </a:prstGeom>
+          <a:solidFill>
+            <a:srgbClr val="8E6F3E"/>
+          </a:solidFill>
+          <a:ln>
+            <a:noFill/>
+          </a:ln>
+          <a:effectLst/>
+        </p:spPr>
+        <p:style>
+          <a:lnRef idx="1">
+            <a:schemeClr val="accent1"/>
+          </a:lnRef>
+          <a:fillRef idx="3">
+            <a:schemeClr val="accent1"/>
+          </a:fillRef>
+          <a:effectRef idx="2">
+            <a:schemeClr val="accent1"/>
+          </a:effectRef>
+          <a:fontRef idx="minor">
+            <a:schemeClr val="lt1"/>
+          </a:fontRef>
+        </p:style>
+        <p:txBody>
+          <a:bodyPr rtlCol="0" anchor="ctr" wrap="square" lIns="27432" rIns="27432" tIns="22860" bIns="22860"/>
+          <a:lstStyle/>
+          <a:p>
+            <a:pPr algn="ctr"/>
+            <a:r>
+              <a:rPr sz="2000" b="1" i="0">
+                <a:solidFill>
+                  <a:srgbClr val="FFFFFF"/>
+                </a:solidFill>
+              </a:rPr>
+              <a:t>SCOPE</a:t>
+            </a:r>
+          </a:p>
+        </p:txBody>
+      </p:sp>
+      <p:cxnSp>
+        <p:nvCxnSpPr>
+          <p:cNvPr id="904" name="Connector 903"/>
+          <p:cNvCxnSpPr/>
+          <p:nvPr/>
+        </p:nvCxnSpPr>
+        <p:spPr>
+          <a:xfrm>
+            <a:off x="2103120" y="2404872"/>
+            <a:ext cx="0" cy="256032"/>
+          </a:xfrm>
+          <a:prstGeom prst="line">
+            <a:avLst/>
+          </a:prstGeom>
+          <a:ln w="19050">
+            <a:solidFill>
+              <a:srgbClr val="8E6F3E"/>
+            </a:solidFill>
+            <a:tailEnd type="triangle"/>
+          </a:ln>
+        </p:spPr>
+        <p:style>
+          <a:lnRef idx="2">
+            <a:schemeClr val="accent1"/>
+          </a:lnRef>
+          <a:fillRef idx="0">
+            <a:schemeClr val="accent1"/>
+          </a:fillRef>
+          <a:effectRef idx="1">
+            <a:schemeClr val="accent1"/>
+          </a:effectRef>
+          <a:fontRef idx="minor">
+            <a:schemeClr val="tx1"/>
+          </a:fontRef>
+        </p:style>
+      </p:cxnSp>
+      <p:sp>
+        <p:nvSpPr>
+          <p:cNvPr id="905" name="Block"/>
+          <p:cNvSpPr/>
+          <p:nvPr/>
+        </p:nvSpPr>
+        <p:spPr>
+          <a:xfrm>
+            <a:off x="731520" y="2660904"/>
+            <a:ext cx="2743200" cy="502920"/>
+          </a:xfrm>
+          <a:prstGeom prst="rect">
+            <a:avLst/>
+          </a:prstGeom>
+          <a:solidFill>
+            <a:srgbClr val="8E6F3E"/>
+          </a:solidFill>
+          <a:ln>
+            <a:noFill/>
+          </a:ln>
+          <a:effectLst/>
+        </p:spPr>
+        <p:style>
+          <a:lnRef idx="1">
+            <a:schemeClr val="accent1"/>
+          </a:lnRef>
+          <a:fillRef idx="3">
+            <a:schemeClr val="accent1"/>
+          </a:fillRef>
+          <a:effectRef idx="2">
+            <a:schemeClr val="accent1"/>
+          </a:effectRef>
+          <a:fontRef idx="minor">
+            <a:schemeClr val="lt1"/>
+          </a:fontRef>
+        </p:style>
+        <p:txBody>
+          <a:bodyPr rtlCol="0" anchor="ctr" wrap="square" lIns="27432" rIns="27432" tIns="22860" bIns="22860"/>
+          <a:lstStyle/>
+          <a:p>
+            <a:pPr algn="ctr"/>
+            <a:r>
+              <a:rPr sz="2000" b="1" i="0">
+                <a:solidFill>
+                  <a:srgbClr val="FFFFFF"/>
+                </a:solidFill>
+              </a:rPr>
+              <a:t>MECHANISM</a:t>
+            </a:r>
+          </a:p>
+        </p:txBody>
+      </p:sp>
+      <p:cxnSp>
+        <p:nvCxnSpPr>
+          <p:cNvPr id="906" name="Connector 905"/>
+          <p:cNvCxnSpPr/>
+          <p:nvPr/>
+        </p:nvCxnSpPr>
+        <p:spPr>
+          <a:xfrm>
+            <a:off x="2103120" y="3163824"/>
+            <a:ext cx="0" cy="256032"/>
+          </a:xfrm>
+          <a:prstGeom prst="line">
+            <a:avLst/>
+          </a:prstGeom>
+          <a:ln w="19050">
+            <a:solidFill>
+              <a:srgbClr val="8E6F3E"/>
+            </a:solidFill>
+            <a:tailEnd type="triangle"/>
+          </a:ln>
+        </p:spPr>
+        <p:style>
+          <a:lnRef idx="2">
+            <a:schemeClr val="accent1"/>
+          </a:lnRef>
+          <a:fillRef idx="0">
+            <a:schemeClr val="accent1"/>
+          </a:fillRef>
+          <a:effectRef idx="1">
+            <a:schemeClr val="accent1"/>
+          </a:effectRef>
+          <a:fontRef idx="minor">
+            <a:schemeClr val="tx1"/>
+          </a:fontRef>
+        </p:style>
+      </p:cxnSp>
+      <p:sp>
+        <p:nvSpPr>
+          <p:cNvPr id="907" name="Block"/>
+          <p:cNvSpPr/>
+          <p:nvPr/>
+        </p:nvSpPr>
+        <p:spPr>
+          <a:xfrm>
+            <a:off x="731520" y="3419856"/>
+            <a:ext cx="2743200" cy="502920"/>
+          </a:xfrm>
+          <a:prstGeom prst="rect">
+            <a:avLst/>
+          </a:prstGeom>
+          <a:solidFill>
+            <a:srgbClr val="8E6F3E"/>
+          </a:solidFill>
+          <a:ln>
+            <a:noFill/>
+          </a:ln>
+          <a:effectLst/>
+        </p:spPr>
+        <p:style>
+          <a:lnRef idx="1">
+            <a:schemeClr val="accent1"/>
+          </a:lnRef>
+          <a:fillRef idx="3">
+            <a:schemeClr val="accent1"/>
+          </a:fillRef>
+          <a:effectRef idx="2">
+            <a:schemeClr val="accent1"/>
+          </a:effectRef>
+          <a:fontRef idx="minor">
+            <a:schemeClr val="lt1"/>
+          </a:fontRef>
+        </p:style>
+        <p:txBody>
+          <a:bodyPr rtlCol="0" anchor="ctr" wrap="square" lIns="27432" rIns="27432" tIns="22860" bIns="22860"/>
+          <a:lstStyle/>
+          <a:p>
+            <a:pPr algn="ctr"/>
+            <a:r>
+              <a:rPr sz="2000" b="1" i="0">
+                <a:solidFill>
+                  <a:srgbClr val="FFFFFF"/>
+                </a:solidFill>
+              </a:rPr>
+              <a:t>STRATEGY</a:t>
+            </a:r>
+          </a:p>
+        </p:txBody>
+      </p:sp>
+      <p:cxnSp>
+        <p:nvCxnSpPr>
+          <p:cNvPr id="908" name="Connector 907"/>
+          <p:cNvCxnSpPr/>
+          <p:nvPr/>
+        </p:nvCxnSpPr>
+        <p:spPr>
+          <a:xfrm>
+            <a:off x="2103120" y="3922776"/>
+            <a:ext cx="0" cy="256032"/>
+          </a:xfrm>
+          <a:prstGeom prst="line">
+            <a:avLst/>
+          </a:prstGeom>
+          <a:ln w="19050">
+            <a:solidFill>
+              <a:srgbClr val="8E6F3E"/>
+            </a:solidFill>
+            <a:tailEnd type="triangle"/>
+          </a:ln>
+        </p:spPr>
+        <p:style>
+          <a:lnRef idx="2">
+            <a:schemeClr val="accent1"/>
+          </a:lnRef>
+          <a:fillRef idx="0">
+            <a:schemeClr val="accent1"/>
+          </a:fillRef>
+          <a:effectRef idx="1">
+            <a:schemeClr val="accent1"/>
+          </a:effectRef>
+          <a:fontRef idx="minor">
+            <a:schemeClr val="tx1"/>
+          </a:fontRef>
+        </p:style>
+      </p:cxnSp>
+      <p:sp>
+        <p:nvSpPr>
+          <p:cNvPr id="909" name="Block"/>
+          <p:cNvSpPr/>
+          <p:nvPr/>
+        </p:nvSpPr>
+        <p:spPr>
+          <a:xfrm>
+            <a:off x="731520" y="4178808"/>
+            <a:ext cx="2743200" cy="502920"/>
+          </a:xfrm>
+          <a:prstGeom prst="rect">
+            <a:avLst/>
+          </a:prstGeom>
+          <a:solidFill>
+            <a:srgbClr val="8E6F3E"/>
+          </a:solidFill>
+          <a:ln>
+            <a:noFill/>
+          </a:ln>
+          <a:effectLst/>
+        </p:spPr>
+        <p:style>
+          <a:lnRef idx="1">
+            <a:schemeClr val="accent1"/>
+          </a:lnRef>
+          <a:fillRef idx="3">
+            <a:schemeClr val="accent1"/>
+          </a:fillRef>
+          <a:effectRef idx="2">
+            <a:schemeClr val="accent1"/>
+          </a:effectRef>
+          <a:fontRef idx="minor">
+            <a:schemeClr val="lt1"/>
+          </a:fontRef>
+        </p:style>
+        <p:txBody>
+          <a:bodyPr rtlCol="0" anchor="ctr" wrap="square" lIns="27432" rIns="27432" tIns="22860" bIns="22860"/>
+          <a:lstStyle/>
+          <a:p>
+            <a:pPr algn="ctr"/>
+            <a:r>
+              <a:rPr sz="2000" b="1" i="0">
+                <a:solidFill>
+                  <a:srgbClr val="FFFFFF"/>
+                </a:solidFill>
+              </a:rPr>
+              <a:t>EVIDENCE</a:t>
+            </a:r>
+          </a:p>
+        </p:txBody>
+      </p:sp>
+      <p:cxnSp>
+        <p:nvCxnSpPr>
+          <p:cNvPr id="910" name="Connector 909"/>
+          <p:cNvCxnSpPr/>
+          <p:nvPr/>
+        </p:nvCxnSpPr>
+        <p:spPr>
+          <a:xfrm>
+            <a:off x="2103120" y="4681728"/>
+            <a:ext cx="0" cy="256032"/>
+          </a:xfrm>
+          <a:prstGeom prst="line">
+            <a:avLst/>
+          </a:prstGeom>
+          <a:ln w="19050">
+            <a:solidFill>
+              <a:srgbClr val="8E6F3E"/>
+            </a:solidFill>
+            <a:tailEnd type="triangle"/>
+          </a:ln>
+        </p:spPr>
+        <p:style>
+          <a:lnRef idx="2">
+            <a:schemeClr val="accent1"/>
+          </a:lnRef>
+          <a:fillRef idx="0">
+            <a:schemeClr val="accent1"/>
+          </a:fillRef>
+          <a:effectRef idx="1">
+            <a:schemeClr val="accent1"/>
+          </a:effectRef>
+          <a:fontRef idx="minor">
+            <a:schemeClr val="tx1"/>
+          </a:fontRef>
+        </p:style>
+      </p:cxnSp>
+      <p:sp>
+        <p:nvSpPr>
+          <p:cNvPr id="911" name="Block"/>
+          <p:cNvSpPr/>
+          <p:nvPr/>
+        </p:nvSpPr>
+        <p:spPr>
+          <a:xfrm>
+            <a:off x="731520" y="4937760"/>
+            <a:ext cx="2743200" cy="502920"/>
+          </a:xfrm>
+          <a:prstGeom prst="rect">
+            <a:avLst/>
+          </a:prstGeom>
+          <a:solidFill>
+            <a:srgbClr val="8E6F3E"/>
+          </a:solidFill>
+          <a:ln>
+            <a:noFill/>
+          </a:ln>
+          <a:effectLst/>
+        </p:spPr>
+        <p:style>
+          <a:lnRef idx="1">
+            <a:schemeClr val="accent1"/>
+          </a:lnRef>
+          <a:fillRef idx="3">
+            <a:schemeClr val="accent1"/>
+          </a:fillRef>
+          <a:effectRef idx="2">
+            <a:schemeClr val="accent1"/>
+          </a:effectRef>
+          <a:fontRef idx="minor">
+            <a:schemeClr val="lt1"/>
+          </a:fontRef>
+        </p:style>
+        <p:txBody>
+          <a:bodyPr rtlCol="0" anchor="ctr" wrap="square" lIns="27432" rIns="27432" tIns="22860" bIns="22860"/>
+          <a:lstStyle/>
+          <a:p>
+            <a:pPr algn="ctr"/>
+            <a:r>
+              <a:rPr sz="2000" b="1" i="0">
+                <a:solidFill>
+                  <a:srgbClr val="FFFFFF"/>
+                </a:solidFill>
+              </a:rPr>
+              <a:t>JUDGMENT</a:t>
+            </a:r>
+          </a:p>
+        </p:txBody>
+      </p:sp>
+      <p:cxnSp>
+        <p:nvCxnSpPr>
+          <p:cNvPr id="912" name="Connector 911"/>
+          <p:cNvCxnSpPr/>
+          <p:nvPr/>
+        </p:nvCxnSpPr>
+        <p:spPr>
+          <a:xfrm flipV="1">
+            <a:off x="3931920" y="1371600"/>
+            <a:ext cx="0" cy="3337560"/>
+          </a:xfrm>
+          <a:prstGeom prst="line">
+            <a:avLst/>
+          </a:prstGeom>
+          <a:ln w="28575">
+            <a:solidFill>
+              <a:srgbClr val="9A3F12"/>
+            </a:solidFill>
+            <a:tailEnd type="triangle"/>
+          </a:ln>
+        </p:spPr>
+        <p:style>
+          <a:lnRef idx="2">
+            <a:schemeClr val="accent1"/>
+          </a:lnRef>
+          <a:fillRef idx="0">
+            <a:schemeClr val="accent1"/>
+          </a:fillRef>
+          <a:effectRef idx="1">
+            <a:schemeClr val="accent1"/>
+          </a:effectRef>
+          <a:fontRef idx="minor">
+            <a:schemeClr val="tx1"/>
+          </a:fontRef>
+        </p:style>
+      </p:cxnSp>
+      <p:sp>
+        <p:nvSpPr>
+          <p:cNvPr id="913" name="Label"/>
+          <p:cNvSpPr txBox="1"/>
+          <p:nvPr/>
+        </p:nvSpPr>
+        <p:spPr>
+          <a:xfrm>
+            <a:off x="3017520" y="4892040"/>
+            <a:ext cx="2194560" cy="365760"/>
+          </a:xfrm>
+          <a:prstGeom prst="rect">
+            <a:avLst/>
+          </a:prstGeom>
+          <a:noFill/>
+        </p:spPr>
+        <p:txBody>
+          <a:bodyPr wrap="square" anchor="t" lIns="27432" rIns="27432" tIns="22860" bIns="22860">
+            <a:spAutoFit/>
+          </a:bodyPr>
+          <a:lstStyle/>
+          <a:p>
+            <a:pPr algn="ctr"/>
+            <a:r>
+              <a:rPr sz="2000" b="1" i="0">
+                <a:solidFill>
+                  <a:srgbClr val="9A3F12"/>
+                </a:solidFill>
+              </a:rPr>
+              <a:t>run it backward</a:t>
+            </a:r>
+          </a:p>
+        </p:txBody>
+      </p:sp>
+      <p:sp>
+        <p:nvSpPr>
+          <p:cNvPr id="914" name="Side"/>
+          <p:cNvSpPr txBox="1"/>
+          <p:nvPr/>
+        </p:nvSpPr>
+        <p:spPr>
+          <a:xfrm>
+            <a:off x="5486400" y="1645920"/>
+            <a:ext cx="3108960" cy="2926080"/>
+          </a:xfrm>
+          <a:prstGeom prst="rect">
+            <a:avLst/>
+          </a:prstGeom>
+          <a:noFill/>
+        </p:spPr>
+        <p:txBody>
+          <a:bodyPr wrap="square" anchor="t" lIns="27432" rIns="27432" tIns="22860" bIns="22860">
+            <a:spAutoFit/>
+          </a:bodyPr>
+          <a:lstStyle/>
+          <a:p>
+            <a:pPr algn="l"/>
+            <a:r>
+              <a:rPr sz="2000" b="1" i="0">
+                <a:solidFill>
+                  <a:srgbClr val="5C4826"/>
+                </a:solidFill>
+              </a:rPr>
+              <a:t>Start from the judgment that admitted the failure.</a:t>
+            </a:r>
+          </a:p>
+          <a:p>
+            <a:pPr algn="l">
+              <a:spcBef>
+                <a:spcPts val="1200"/>
+              </a:spcBef>
+            </a:pPr>
+            <a:r>
+              <a:rPr sz="2000" b="0" i="0">
+                <a:solidFill>
+                  <a:srgbClr val="555960"/>
+                </a:solidFill>
+              </a:rPr>
+              <a:t>Walk back to the claim it rested on.</a:t>
+            </a:r>
+          </a:p>
+        </p:txBody>
+      </p:sp>
+    </p:spTree>
+  </p:cSld>
+  <p:clrMapOvr>
+    <a:masterClrMapping/>
+  </p:clrMapOvr>
+</p:sld>
+</file>
+
+<file path=ppt/slides/slide24.xml><?xml version="1.0" encoding="utf-8"?>
+<p:sld xmlns:a="http://schemas.openxmlformats.org/drawingml/2006/main" xmlns:p="http://schemas.openxmlformats.org/presentationml/2006/main" xmlns:r="http://schemas.openxmlformats.org/officeDocument/2006/relationships">
+  <p:cSld>
+    <p:spTree>
+      <p:nvGrpSpPr>
+        <p:cNvPr id="1" name=""/>
+        <p:cNvGrpSpPr/>
+        <p:nvPr/>
+      </p:nvGrpSpPr>
+      <p:grpSpPr/>
+      <p:sp>
+        <p:nvSpPr>
+          <p:cNvPr id="3" name="Title 2"/>
+          <p:cNvSpPr>
+            <a:spLocks noGrp="1"/>
+          </p:cNvSpPr>
+          <p:nvPr>
+            <p:ph type="title"/>
+          </p:nvPr>
+        </p:nvSpPr>
+        <p:spPr/>
+        <p:txBody>
+          <a:bodyPr/>
+          <a:lstStyle/>
+          <a:p>
+            <a:r>
+              <a:rPr sz="2400" b="0" i="0">
+                <a:solidFill>
+                  <a:srgbClr val="000000"/>
+                </a:solidFill>
+              </a:rPr>
+              <a:t>Failure does not prove bad validation</a:t>
+            </a:r>
+          </a:p>
+        </p:txBody>
+      </p:sp>
+      <p:sp>
+        <p:nvSpPr>
+          <p:cNvPr id="900" name="Slide Number Placeholder 900"/>
+          <p:cNvSpPr>
+            <a:spLocks noGrp="1"/>
+          </p:cNvSpPr>
+          <p:nvPr>
+            <p:ph type="sldNum" sz="quarter" idx="4"/>
+          </p:nvPr>
+        </p:nvSpPr>
+        <p:spPr/>
+        <p:txBody>
+          <a:bodyPr/>
+          <a:lstStyle/>
+          <a:p>
+            <a:fld id="{77A5FE4F-FC69-42DD-8420-00AF6742DA68}" type="slidenum">
+              <a:rPr lang="en-US" smtClean="0"/>
+              <a:t>24</a:t>
+            </a:fld>
+            <a:endParaRPr lang="en-US"/>
+          </a:p>
+        </p:txBody>
+      </p:sp>
+      <p:sp>
+        <p:nvSpPr>
+          <p:cNvPr id="901" name="Label"/>
+          <p:cNvSpPr txBox="1"/>
+          <p:nvPr/>
+        </p:nvSpPr>
+        <p:spPr>
+          <a:xfrm>
+            <a:off x="548640" y="1920240"/>
+            <a:ext cx="8046720" cy="731520"/>
+          </a:xfrm>
+          <a:prstGeom prst="rect">
+            <a:avLst/>
+          </a:prstGeom>
+          <a:noFill/>
+        </p:spPr>
+        <p:txBody>
+          <a:bodyPr wrap="square" anchor="t" lIns="27432" rIns="27432" tIns="22860" bIns="22860">
+            <a:spAutoFit/>
+          </a:bodyPr>
+          <a:lstStyle/>
+          <a:p>
+            <a:pPr algn="ctr"/>
+            <a:r>
+              <a:rPr sz="3200" b="1" i="0">
+                <a:solidFill>
+                  <a:srgbClr val="5C4826"/>
+                </a:solidFill>
+              </a:rPr>
+              <a:t>Residual uncertainty</a:t>
+            </a:r>
+          </a:p>
+        </p:txBody>
+      </p:sp>
+      <p:sp>
+        <p:nvSpPr>
+          <p:cNvPr id="902" name="Body"/>
+          <p:cNvSpPr txBox="1"/>
+          <p:nvPr/>
+        </p:nvSpPr>
+        <p:spPr>
+          <a:xfrm>
+            <a:off x="1188720" y="2834640"/>
+            <a:ext cx="6766560" cy="1463040"/>
+          </a:xfrm>
+          <a:prstGeom prst="rect">
+            <a:avLst/>
+          </a:prstGeom>
+          <a:noFill/>
+        </p:spPr>
+        <p:txBody>
+          <a:bodyPr wrap="square" anchor="ctr" lIns="27432" rIns="27432" tIns="22860" bIns="22860">
+            <a:spAutoFit/>
+          </a:bodyPr>
+          <a:lstStyle/>
+          <a:p>
+            <a:pPr algn="ctr"/>
+            <a:r>
+              <a:rPr sz="2000" b="0" i="0">
+                <a:solidFill>
+                  <a:srgbClr val="555960"/>
+                </a:solidFill>
+              </a:rPr>
+              <a:t>Every validation accepts residual uncertainty. A failure may land exactly there — without the validation having been wrong.</a:t>
+            </a:r>
+          </a:p>
+        </p:txBody>
+      </p:sp>
+    </p:spTree>
+  </p:cSld>
+  <p:clrMapOvr>
+    <a:masterClrMapping/>
+  </p:clrMapOvr>
+</p:sld>
+</file>
+
+<file path=ppt/slides/slide25.xml><?xml version="1.0" encoding="utf-8"?>
+<p:sld xmlns:a="http://schemas.openxmlformats.org/drawingml/2006/main" xmlns:p="http://schemas.openxmlformats.org/presentationml/2006/main" xmlns:r="http://schemas.openxmlformats.org/officeDocument/2006/relationships">
+  <p:cSld>
+    <p:spTree>
+      <p:nvGrpSpPr>
+        <p:cNvPr id="1" name=""/>
+        <p:cNvGrpSpPr/>
+        <p:nvPr/>
+      </p:nvGrpSpPr>
+      <p:grpSpPr/>
+      <p:sp>
+        <p:nvSpPr>
+          <p:cNvPr id="2" name="Title 1"/>
+          <p:cNvSpPr>
+            <a:spLocks noGrp="1"/>
+          </p:cNvSpPr>
+          <p:nvPr>
+            <p:ph type="title"/>
+          </p:nvPr>
+        </p:nvSpPr>
+        <p:spPr>
+          <a:xfrm>
+            <a:off x="685800" y="1700784"/>
+            <a:ext cx="7772400" cy="1508760"/>
+          </a:xfrm>
+        </p:spPr>
+        <p:txBody>
+          <a:bodyPr/>
+          <a:lstStyle/>
+          <a:p>
+            <a:pPr algn="ctr"/>
+            <a:r>
+              <a:rPr sz="4000" b="0" i="0">
+                <a:solidFill>
+                  <a:srgbClr val="000000"/>
+                </a:solidFill>
+              </a:rPr>
+              <a:t>Convert failure into engineering knowledge</a:t>
+            </a:r>
+          </a:p>
+        </p:txBody>
+      </p:sp>
+      <p:sp>
+        <p:nvSpPr>
+          <p:cNvPr id="900" name="Slide Number Placeholder 900"/>
+          <p:cNvSpPr>
+            <a:spLocks noGrp="1"/>
+          </p:cNvSpPr>
+          <p:nvPr>
+            <p:ph type="sldNum" sz="quarter" idx="4"/>
+          </p:nvPr>
+        </p:nvSpPr>
+        <p:spPr/>
+        <p:txBody>
+          <a:bodyPr/>
+          <a:lstStyle/>
+          <a:p>
+            <a:fld id="{84EFAC54-8A7A-4607-BC7D-B56896E6742A}" type="slidenum">
+              <a:rPr lang="en-US" smtClean="0"/>
+              <a:t>25</a:t>
+            </a:fld>
+            <a:endParaRPr lang="en-US"/>
+          </a:p>
+        </p:txBody>
+      </p:sp>
+      <p:sp>
+        <p:nvSpPr>
+          <p:cNvPr id="901" name="SectionLabel"/>
+          <p:cNvSpPr txBox="1"/>
+          <p:nvPr/>
+        </p:nvSpPr>
+        <p:spPr>
+          <a:xfrm>
+            <a:off x="685800" y="1243584"/>
+            <a:ext cx="7772400" cy="365760"/>
+          </a:xfrm>
+          <a:prstGeom prst="rect">
+            <a:avLst/>
+          </a:prstGeom>
+          <a:noFill/>
+        </p:spPr>
+        <p:txBody>
+          <a:bodyPr wrap="square" anchor="ctr" lIns="27432" rIns="27432" tIns="22860" bIns="22860">
+            <a:spAutoFit/>
+          </a:bodyPr>
+          <a:lstStyle/>
+          <a:p>
+            <a:pPr algn="ctr"/>
+            <a:r>
+              <a:rPr sz="2000" b="1" i="0">
+                <a:solidFill>
+                  <a:srgbClr val="8E6F3E"/>
+                </a:solidFill>
+              </a:rPr>
+              <a:t>SECTION 3</a:t>
+            </a:r>
+          </a:p>
+        </p:txBody>
+      </p:sp>
+      <p:sp>
+        <p:nvSpPr>
+          <p:cNvPr id="902" name="Question"/>
+          <p:cNvSpPr txBox="1"/>
+          <p:nvPr/>
+        </p:nvSpPr>
+        <p:spPr>
+          <a:xfrm>
+            <a:off x="685800" y="3319272"/>
+            <a:ext cx="7772400" cy="475488"/>
+          </a:xfrm>
+          <a:prstGeom prst="rect">
+            <a:avLst/>
+          </a:prstGeom>
+          <a:noFill/>
+        </p:spPr>
+        <p:txBody>
+          <a:bodyPr wrap="square" anchor="ctr" lIns="27432" rIns="27432" tIns="22860" bIns="22860">
+            <a:spAutoFit/>
+          </a:bodyPr>
+          <a:lstStyle/>
+          <a:p>
+            <a:pPr algn="ctr"/>
+            <a:r>
+              <a:rPr sz="2400" b="0" i="0">
+                <a:solidFill>
+                  <a:srgbClr val="5C4826"/>
+                </a:solidFill>
+              </a:rPr>
+              <a:t>What does the evidence support, and where should the lesson live?</a:t>
+            </a:r>
+          </a:p>
+        </p:txBody>
+      </p:sp>
+      <p:sp>
+        <p:nvSpPr>
+          <p:cNvPr id="903" name="Rule"/>
+          <p:cNvSpPr/>
+          <p:nvPr/>
+        </p:nvSpPr>
+        <p:spPr>
+          <a:xfrm>
+            <a:off x="3429000" y="4105656"/>
+            <a:ext cx="2286000" cy="51206"/>
+          </a:xfrm>
+          <a:prstGeom prst="rect">
+            <a:avLst/>
+          </a:prstGeom>
+          <a:solidFill>
+            <a:srgbClr val="8E6F3E"/>
+          </a:solidFill>
+          <a:ln>
+            <a:noFill/>
+          </a:ln>
+          <a:effectLst/>
+        </p:spPr>
+        <p:style>
+          <a:lnRef idx="1">
+            <a:schemeClr val="accent1"/>
+          </a:lnRef>
+          <a:fillRef idx="3">
+            <a:schemeClr val="accent1"/>
+          </a:fillRef>
+          <a:effectRef idx="2">
+            <a:schemeClr val="accent1"/>
+          </a:effectRef>
+          <a:fontRef idx="minor">
+            <a:schemeClr val="lt1"/>
+          </a:fontRef>
+        </p:style>
+        <p:txBody>
+          <a:bodyPr rtlCol="0" anchor="ctr" wrap="square" lIns="27432" rIns="27432" tIns="22860" bIns="22860"/>
+          <a:lstStyle/>
+          <a:p>
+            <a:pPr algn="ctr"/>
+            <a:r>
+              <a:rPr sz="2000" b="0" i="0">
+                <a:solidFill>
+                  <a:srgbClr val="5C4826"/>
+                </a:solidFill>
+              </a:rPr>
+              <a:t/>
+            </a:r>
+          </a:p>
+        </p:txBody>
+      </p:sp>
+    </p:spTree>
+  </p:cSld>
+  <p:clrMapOvr>
+    <a:masterClrMapping/>
+  </p:clrMapOvr>
+</p:sld>
+</file>
+
+<file path=ppt/slides/slide26.xml><?xml version="1.0" encoding="utf-8"?>
+<p:sld xmlns:a="http://schemas.openxmlformats.org/drawingml/2006/main" xmlns:p="http://schemas.openxmlformats.org/presentationml/2006/main" xmlns:r="http://schemas.openxmlformats.org/officeDocument/2006/relationships">
+  <p:cSld>
+    <p:spTree>
+      <p:nvGrpSpPr>
+        <p:cNvPr id="1" name=""/>
+        <p:cNvGrpSpPr/>
+        <p:nvPr/>
+      </p:nvGrpSpPr>
+      <p:grpSpPr/>
+      <p:sp>
+        <p:nvSpPr>
+          <p:cNvPr id="3" name="Title 2"/>
+          <p:cNvSpPr>
+            <a:spLocks noGrp="1"/>
+          </p:cNvSpPr>
+          <p:nvPr>
+            <p:ph type="title"/>
+          </p:nvPr>
+        </p:nvSpPr>
+        <p:spPr/>
+        <p:txBody>
+          <a:bodyPr/>
+          <a:lstStyle/>
+          <a:p>
+            <a:r>
+              <a:rPr sz="2400" b="0" i="0">
+                <a:solidFill>
+                  <a:srgbClr val="000000"/>
+                </a:solidFill>
+              </a:rPr>
+              <a:t>Observation is not yet engineering knowledge</a:t>
+            </a:r>
+          </a:p>
+        </p:txBody>
+      </p:sp>
+      <p:sp>
+        <p:nvSpPr>
+          <p:cNvPr id="900" name="Slide Number Placeholder 900"/>
+          <p:cNvSpPr>
+            <a:spLocks noGrp="1"/>
+          </p:cNvSpPr>
+          <p:nvPr>
+            <p:ph type="sldNum" sz="quarter" idx="4"/>
+          </p:nvPr>
+        </p:nvSpPr>
+        <p:spPr/>
+        <p:txBody>
+          <a:bodyPr/>
+          <a:lstStyle/>
+          <a:p>
+            <a:fld id="{AB10F66C-D6D8-4831-9A3B-2E7EBE8B62BA}" type="slidenum">
+              <a:rPr lang="en-US" smtClean="0"/>
+              <a:t>26</a:t>
+            </a:fld>
+            <a:endParaRPr lang="en-US"/>
+          </a:p>
+        </p:txBody>
+      </p:sp>
+      <p:sp>
+        <p:nvSpPr>
+          <p:cNvPr id="901" name="Block"/>
+          <p:cNvSpPr/>
+          <p:nvPr/>
+        </p:nvSpPr>
+        <p:spPr>
+          <a:xfrm>
+            <a:off x="548640" y="2468880"/>
+            <a:ext cx="1783080" cy="640080"/>
+          </a:xfrm>
+          <a:prstGeom prst="rect">
+            <a:avLst/>
+          </a:prstGeom>
+          <a:solidFill>
+            <a:srgbClr val="8E6F3E"/>
+          </a:solidFill>
+          <a:ln>
+            <a:noFill/>
+          </a:ln>
+          <a:effectLst/>
+        </p:spPr>
+        <p:style>
+          <a:lnRef idx="1">
+            <a:schemeClr val="accent1"/>
+          </a:lnRef>
+          <a:fillRef idx="3">
+            <a:schemeClr val="accent1"/>
+          </a:fillRef>
+          <a:effectRef idx="2">
+            <a:schemeClr val="accent1"/>
+          </a:effectRef>
+          <a:fontRef idx="minor">
+            <a:schemeClr val="lt1"/>
+          </a:fontRef>
+        </p:style>
+        <p:txBody>
+          <a:bodyPr rtlCol="0" anchor="ctr" wrap="square" lIns="27432" rIns="27432" tIns="22860" bIns="22860"/>
+          <a:lstStyle/>
+          <a:p>
+            <a:pPr algn="ctr"/>
+            <a:r>
+              <a:rPr sz="2000" b="1" i="0">
+                <a:solidFill>
+                  <a:srgbClr val="FFFFFF"/>
+                </a:solidFill>
+              </a:rPr>
+              <a:t>FAILURE</a:t>
+            </a:r>
+          </a:p>
+        </p:txBody>
+      </p:sp>
+      <p:cxnSp>
+        <p:nvCxnSpPr>
+          <p:cNvPr id="902" name="Connector 901"/>
+          <p:cNvCxnSpPr/>
+          <p:nvPr/>
+        </p:nvCxnSpPr>
+        <p:spPr>
+          <a:xfrm>
+            <a:off x="2331720" y="2788920"/>
+            <a:ext cx="320040" cy="0"/>
+          </a:xfrm>
+          <a:prstGeom prst="line">
+            <a:avLst/>
+          </a:prstGeom>
+          <a:ln w="19050">
+            <a:solidFill>
+              <a:srgbClr val="8E6F3E"/>
+            </a:solidFill>
+            <a:tailEnd type="triangle"/>
+          </a:ln>
+        </p:spPr>
+        <p:style>
+          <a:lnRef idx="2">
+            <a:schemeClr val="accent1"/>
+          </a:lnRef>
+          <a:fillRef idx="0">
+            <a:schemeClr val="accent1"/>
+          </a:fillRef>
+          <a:effectRef idx="1">
+            <a:schemeClr val="accent1"/>
+          </a:effectRef>
+          <a:fontRef idx="minor">
+            <a:schemeClr val="tx1"/>
+          </a:fontRef>
+        </p:style>
+      </p:cxnSp>
+      <p:sp>
+        <p:nvSpPr>
+          <p:cNvPr id="903" name="Block"/>
+          <p:cNvSpPr/>
+          <p:nvPr/>
+        </p:nvSpPr>
+        <p:spPr>
+          <a:xfrm>
+            <a:off x="2651760" y="2468880"/>
+            <a:ext cx="1783080" cy="640080"/>
+          </a:xfrm>
+          <a:prstGeom prst="rect">
+            <a:avLst/>
+          </a:prstGeom>
+          <a:solidFill>
+            <a:srgbClr val="8E6F3E"/>
+          </a:solidFill>
+          <a:ln>
+            <a:noFill/>
+          </a:ln>
+          <a:effectLst/>
+        </p:spPr>
+        <p:style>
+          <a:lnRef idx="1">
+            <a:schemeClr val="accent1"/>
+          </a:lnRef>
+          <a:fillRef idx="3">
+            <a:schemeClr val="accent1"/>
+          </a:fillRef>
+          <a:effectRef idx="2">
+            <a:schemeClr val="accent1"/>
+          </a:effectRef>
+          <a:fontRef idx="minor">
+            <a:schemeClr val="lt1"/>
+          </a:fontRef>
+        </p:style>
+        <p:txBody>
+          <a:bodyPr rtlCol="0" anchor="ctr" wrap="square" lIns="27432" rIns="27432" tIns="22860" bIns="22860"/>
+          <a:lstStyle/>
+          <a:p>
+            <a:pPr algn="ctr"/>
+            <a:r>
+              <a:rPr sz="2000" b="1" i="0">
+                <a:solidFill>
+                  <a:srgbClr val="FFFFFF"/>
+                </a:solidFill>
+              </a:rPr>
+              <a:t>EVIDENCE</a:t>
+            </a:r>
+          </a:p>
+        </p:txBody>
+      </p:sp>
+      <p:cxnSp>
+        <p:nvCxnSpPr>
+          <p:cNvPr id="904" name="Connector 903"/>
+          <p:cNvCxnSpPr/>
+          <p:nvPr/>
+        </p:nvCxnSpPr>
+        <p:spPr>
+          <a:xfrm>
+            <a:off x="4434840" y="2788920"/>
+            <a:ext cx="320039" cy="0"/>
+          </a:xfrm>
+          <a:prstGeom prst="line">
+            <a:avLst/>
+          </a:prstGeom>
+          <a:ln w="19050">
+            <a:solidFill>
+              <a:srgbClr val="8E6F3E"/>
+            </a:solidFill>
+            <a:tailEnd type="triangle"/>
+          </a:ln>
+        </p:spPr>
+        <p:style>
+          <a:lnRef idx="2">
+            <a:schemeClr val="accent1"/>
+          </a:lnRef>
+          <a:fillRef idx="0">
+            <a:schemeClr val="accent1"/>
+          </a:fillRef>
+          <a:effectRef idx="1">
+            <a:schemeClr val="accent1"/>
+          </a:effectRef>
+          <a:fontRef idx="minor">
+            <a:schemeClr val="tx1"/>
+          </a:fontRef>
+        </p:style>
+      </p:cxnSp>
+      <p:sp>
+        <p:nvSpPr>
+          <p:cNvPr id="905" name="Block"/>
+          <p:cNvSpPr/>
+          <p:nvPr/>
+        </p:nvSpPr>
+        <p:spPr>
+          <a:xfrm>
+            <a:off x="4754879" y="2468880"/>
+            <a:ext cx="1783080" cy="640080"/>
+          </a:xfrm>
+          <a:prstGeom prst="rect">
+            <a:avLst/>
+          </a:prstGeom>
+          <a:solidFill>
+            <a:srgbClr val="8E6F3E"/>
+          </a:solidFill>
+          <a:ln>
+            <a:noFill/>
+          </a:ln>
+          <a:effectLst/>
+        </p:spPr>
+        <p:style>
+          <a:lnRef idx="1">
+            <a:schemeClr val="accent1"/>
+          </a:lnRef>
+          <a:fillRef idx="3">
+            <a:schemeClr val="accent1"/>
+          </a:fillRef>
+          <a:effectRef idx="2">
+            <a:schemeClr val="accent1"/>
+          </a:effectRef>
+          <a:fontRef idx="minor">
+            <a:schemeClr val="lt1"/>
+          </a:fontRef>
+        </p:style>
+        <p:txBody>
+          <a:bodyPr rtlCol="0" anchor="ctr" wrap="square" lIns="27432" rIns="27432" tIns="22860" bIns="22860"/>
+          <a:lstStyle/>
+          <a:p>
+            <a:pPr algn="ctr"/>
+            <a:r>
+              <a:rPr sz="2000" b="1" i="0">
+                <a:solidFill>
+                  <a:srgbClr val="FFFFFF"/>
+                </a:solidFill>
+              </a:rPr>
+              <a:t>ANALYSIS</a:t>
+            </a:r>
+          </a:p>
+        </p:txBody>
+      </p:sp>
+      <p:cxnSp>
+        <p:nvCxnSpPr>
+          <p:cNvPr id="906" name="Connector 905"/>
+          <p:cNvCxnSpPr/>
+          <p:nvPr/>
+        </p:nvCxnSpPr>
+        <p:spPr>
+          <a:xfrm>
+            <a:off x="6537959" y="2788920"/>
+            <a:ext cx="320040" cy="0"/>
+          </a:xfrm>
+          <a:prstGeom prst="line">
+            <a:avLst/>
+          </a:prstGeom>
+          <a:ln w="19050">
+            <a:solidFill>
+              <a:srgbClr val="8E6F3E"/>
+            </a:solidFill>
+            <a:tailEnd type="triangle"/>
+          </a:ln>
+        </p:spPr>
+        <p:style>
+          <a:lnRef idx="2">
+            <a:schemeClr val="accent1"/>
+          </a:lnRef>
+          <a:fillRef idx="0">
+            <a:schemeClr val="accent1"/>
+          </a:fillRef>
+          <a:effectRef idx="1">
+            <a:schemeClr val="accent1"/>
+          </a:effectRef>
+          <a:fontRef idx="minor">
+            <a:schemeClr val="tx1"/>
+          </a:fontRef>
+        </p:style>
+      </p:cxnSp>
+      <p:sp>
+        <p:nvSpPr>
+          <p:cNvPr id="907" name="Block"/>
+          <p:cNvSpPr/>
+          <p:nvPr/>
+        </p:nvSpPr>
+        <p:spPr>
+          <a:xfrm>
+            <a:off x="6857999" y="2468880"/>
+            <a:ext cx="1783080" cy="640080"/>
+          </a:xfrm>
+          <a:prstGeom prst="rect">
+            <a:avLst/>
+          </a:prstGeom>
+          <a:solidFill>
+            <a:srgbClr val="8E6F3E"/>
+          </a:solidFill>
+          <a:ln>
+            <a:noFill/>
+          </a:ln>
+          <a:effectLst/>
+        </p:spPr>
+        <p:style>
+          <a:lnRef idx="1">
+            <a:schemeClr val="accent1"/>
+          </a:lnRef>
+          <a:fillRef idx="3">
+            <a:schemeClr val="accent1"/>
+          </a:fillRef>
+          <a:effectRef idx="2">
+            <a:schemeClr val="accent1"/>
+          </a:effectRef>
+          <a:fontRef idx="minor">
+            <a:schemeClr val="lt1"/>
+          </a:fontRef>
+        </p:style>
+        <p:txBody>
+          <a:bodyPr rtlCol="0" anchor="ctr" wrap="square" lIns="27432" rIns="27432" tIns="22860" bIns="22860"/>
+          <a:lstStyle/>
+          <a:p>
+            <a:pPr algn="ctr"/>
+            <a:r>
+              <a:rPr sz="2000" b="1" i="0">
+                <a:solidFill>
+                  <a:srgbClr val="FFFFFF"/>
+                </a:solidFill>
+              </a:rPr>
+              <a:t>LESSON</a:t>
+            </a:r>
+          </a:p>
+        </p:txBody>
+      </p:sp>
+      <p:sp>
+        <p:nvSpPr>
+          <p:cNvPr id="908" name="Label"/>
+          <p:cNvSpPr txBox="1"/>
+          <p:nvPr/>
+        </p:nvSpPr>
+        <p:spPr>
+          <a:xfrm>
+            <a:off x="548640" y="3657600"/>
+            <a:ext cx="8046720" cy="548640"/>
+          </a:xfrm>
+          <a:prstGeom prst="rect">
+            <a:avLst/>
+          </a:prstGeom>
+          <a:noFill/>
+        </p:spPr>
+        <p:txBody>
+          <a:bodyPr wrap="square" anchor="t" lIns="27432" rIns="27432" tIns="22860" bIns="22860">
+            <a:spAutoFit/>
+          </a:bodyPr>
+          <a:lstStyle/>
+          <a:p>
+            <a:pPr algn="ctr"/>
+            <a:r>
+              <a:rPr sz="2200" b="0" i="0">
+                <a:solidFill>
+                  <a:srgbClr val="5C4826"/>
+                </a:solidFill>
+              </a:rPr>
+              <a:t>Failure produces evidence. Analyze it into a lesson.</a:t>
+            </a:r>
+          </a:p>
+        </p:txBody>
+      </p:sp>
+    </p:spTree>
+  </p:cSld>
+  <p:clrMapOvr>
+    <a:masterClrMapping/>
+  </p:clrMapOvr>
+</p:sld>
+</file>
+
+<file path=ppt/slides/slide27.xml><?xml version="1.0" encoding="utf-8"?>
+<p:sld xmlns:a="http://schemas.openxmlformats.org/drawingml/2006/main" xmlns:p="http://schemas.openxmlformats.org/presentationml/2006/main" xmlns:r="http://schemas.openxmlformats.org/officeDocument/2006/relationships">
+  <p:cSld>
+    <p:spTree>
+      <p:nvGrpSpPr>
+        <p:cNvPr id="1" name=""/>
+        <p:cNvGrpSpPr/>
+        <p:nvPr/>
+      </p:nvGrpSpPr>
+      <p:grpSpPr/>
+      <p:sp>
+        <p:nvSpPr>
+          <p:cNvPr id="3" name="Title 2"/>
+          <p:cNvSpPr>
+            <a:spLocks noGrp="1"/>
+          </p:cNvSpPr>
+          <p:nvPr>
+            <p:ph type="title"/>
+          </p:nvPr>
+        </p:nvSpPr>
+        <p:spPr/>
+        <p:txBody>
+          <a:bodyPr/>
+          <a:lstStyle/>
+          <a:p>
+            <a:r>
+              <a:rPr sz="2400" b="0" i="0">
+                <a:solidFill>
+                  <a:srgbClr val="000000"/>
+                </a:solidFill>
+              </a:rPr>
+              <a:t>What does the evidence actually support?</a:t>
+            </a:r>
+          </a:p>
+        </p:txBody>
+      </p:sp>
+      <p:sp>
+        <p:nvSpPr>
+          <p:cNvPr id="900" name="Slide Number Placeholder 900"/>
+          <p:cNvSpPr>
+            <a:spLocks noGrp="1"/>
+          </p:cNvSpPr>
+          <p:nvPr>
+            <p:ph type="sldNum" sz="quarter" idx="4"/>
+          </p:nvPr>
+        </p:nvSpPr>
+        <p:spPr/>
+        <p:txBody>
+          <a:bodyPr/>
+          <a:lstStyle/>
+          <a:p>
+            <a:fld id="{2CCF5E84-7CC0-4983-84B8-14B4F82436A7}" type="slidenum">
+              <a:rPr lang="en-US" smtClean="0"/>
+              <a:t>27</a:t>
+            </a:fld>
+            <a:endParaRPr lang="en-US"/>
+          </a:p>
+        </p:txBody>
+      </p:sp>
+      <p:sp>
+        <p:nvSpPr>
+          <p:cNvPr id="901" name="Card"/>
+          <p:cNvSpPr/>
+          <p:nvPr/>
+        </p:nvSpPr>
+        <p:spPr>
+          <a:xfrm>
+            <a:off x="731520" y="1463040"/>
+            <a:ext cx="3108960" cy="731520"/>
+          </a:xfrm>
+          <a:prstGeom prst="rect">
+            <a:avLst/>
+          </a:prstGeom>
+          <a:solidFill>
+            <a:srgbClr val="F5F1E8"/>
+          </a:solidFill>
+          <a:ln w="12700">
+            <a:solidFill>
+              <a:srgbClr val="C9B991"/>
+            </a:solidFill>
+          </a:ln>
+          <a:effectLst/>
+        </p:spPr>
+        <p:style>
+          <a:lnRef idx="1">
+            <a:schemeClr val="accent1"/>
+          </a:lnRef>
+          <a:fillRef idx="3">
+            <a:schemeClr val="accent1"/>
+          </a:fillRef>
+          <a:effectRef idx="2">
+            <a:schemeClr val="accent1"/>
+          </a:effectRef>
+          <a:fontRef idx="minor">
+            <a:schemeClr val="lt1"/>
+          </a:fontRef>
+        </p:style>
+        <p:txBody>
+          <a:bodyPr rtlCol="0" anchor="ctr" wrap="square" lIns="27432" rIns="27432" tIns="22860" bIns="22860"/>
+          <a:lstStyle/>
+          <a:p>
+            <a:pPr algn="ctr"/>
+            <a:r>
+              <a:rPr sz="2000" b="1" i="0">
+                <a:solidFill>
+                  <a:srgbClr val="5C4826"/>
+                </a:solidFill>
+              </a:rPr>
+              <a:t>NARROW CLAIM</a:t>
+            </a:r>
+          </a:p>
+        </p:txBody>
+      </p:sp>
+      <p:sp>
+        <p:nvSpPr>
+          <p:cNvPr id="902" name="Card"/>
+          <p:cNvSpPr/>
+          <p:nvPr/>
+        </p:nvSpPr>
+        <p:spPr>
+          <a:xfrm>
+            <a:off x="731520" y="2560320"/>
+            <a:ext cx="4937760" cy="731520"/>
+          </a:xfrm>
+          <a:prstGeom prst="rect">
+            <a:avLst/>
+          </a:prstGeom>
+          <a:solidFill>
+            <a:srgbClr val="F5F1E8"/>
+          </a:solidFill>
+          <a:ln w="12700">
+            <a:solidFill>
+              <a:srgbClr val="C9B991"/>
+            </a:solidFill>
+          </a:ln>
+          <a:effectLst/>
+        </p:spPr>
+        <p:style>
+          <a:lnRef idx="1">
+            <a:schemeClr val="accent1"/>
+          </a:lnRef>
+          <a:fillRef idx="3">
+            <a:schemeClr val="accent1"/>
+          </a:fillRef>
+          <a:effectRef idx="2">
+            <a:schemeClr val="accent1"/>
+          </a:effectRef>
+          <a:fontRef idx="minor">
+            <a:schemeClr val="lt1"/>
+          </a:fontRef>
+        </p:style>
+        <p:txBody>
+          <a:bodyPr rtlCol="0" anchor="ctr" wrap="square" lIns="27432" rIns="27432" tIns="22860" bIns="22860"/>
+          <a:lstStyle/>
+          <a:p>
+            <a:pPr algn="ctr"/>
+            <a:r>
+              <a:rPr sz="2000" b="1" i="0">
+                <a:solidFill>
+                  <a:srgbClr val="5C4826"/>
+                </a:solidFill>
+              </a:rPr>
+              <a:t>BROADER CLAIM</a:t>
+            </a:r>
+          </a:p>
+        </p:txBody>
+      </p:sp>
+      <p:sp>
+        <p:nvSpPr>
+          <p:cNvPr id="903" name="Card"/>
+          <p:cNvSpPr/>
+          <p:nvPr/>
+        </p:nvSpPr>
+        <p:spPr>
+          <a:xfrm>
+            <a:off x="731520" y="3657600"/>
+            <a:ext cx="6766560" cy="731520"/>
+          </a:xfrm>
+          <a:prstGeom prst="rect">
+            <a:avLst/>
+          </a:prstGeom>
+          <a:solidFill>
+            <a:srgbClr val="F5F1E8"/>
+          </a:solidFill>
+          <a:ln w="12700">
+            <a:solidFill>
+              <a:srgbClr val="C9B991"/>
+            </a:solidFill>
+          </a:ln>
+          <a:effectLst/>
+        </p:spPr>
+        <p:style>
+          <a:lnRef idx="1">
+            <a:schemeClr val="accent1"/>
+          </a:lnRef>
+          <a:fillRef idx="3">
+            <a:schemeClr val="accent1"/>
+          </a:fillRef>
+          <a:effectRef idx="2">
+            <a:schemeClr val="accent1"/>
+          </a:effectRef>
+          <a:fontRef idx="minor">
+            <a:schemeClr val="lt1"/>
+          </a:fontRef>
+        </p:style>
+        <p:txBody>
+          <a:bodyPr rtlCol="0" anchor="ctr" wrap="square" lIns="27432" rIns="27432" tIns="22860" bIns="22860"/>
+          <a:lstStyle/>
+          <a:p>
+            <a:pPr algn="ctr"/>
+            <a:r>
+              <a:rPr sz="2000" b="1" i="0">
+                <a:solidFill>
+                  <a:srgbClr val="5C4826"/>
+                </a:solidFill>
+              </a:rPr>
+              <a:t>SWEEPING CLAIM</a:t>
+            </a:r>
+          </a:p>
+        </p:txBody>
+      </p:sp>
+      <p:sp>
+        <p:nvSpPr>
+          <p:cNvPr id="904" name="Label"/>
+          <p:cNvSpPr txBox="1"/>
+          <p:nvPr/>
+        </p:nvSpPr>
+        <p:spPr>
+          <a:xfrm>
+            <a:off x="731520" y="4754880"/>
+            <a:ext cx="7498079" cy="502920"/>
+          </a:xfrm>
+          <a:prstGeom prst="rect">
+            <a:avLst/>
+          </a:prstGeom>
+          <a:noFill/>
+        </p:spPr>
+        <p:txBody>
+          <a:bodyPr wrap="square" anchor="t" lIns="27432" rIns="27432" tIns="22860" bIns="22860">
+            <a:spAutoFit/>
+          </a:bodyPr>
+          <a:lstStyle/>
+          <a:p>
+            <a:pPr algn="ctr"/>
+            <a:r>
+              <a:rPr sz="2200" b="0" i="0">
+                <a:solidFill>
+                  <a:srgbClr val="5C4826"/>
+                </a:solidFill>
+              </a:rPr>
+              <a:t>The same observation; support thins as the claim widens.</a:t>
+            </a:r>
+          </a:p>
+        </p:txBody>
+      </p:sp>
+    </p:spTree>
+  </p:cSld>
+  <p:clrMapOvr>
+    <a:masterClrMapping/>
+  </p:clrMapOvr>
+</p:sld>
+</file>
+
+<file path=ppt/slides/slide28.xml><?xml version="1.0" encoding="utf-8"?>
+<p:sld xmlns:a="http://schemas.openxmlformats.org/drawingml/2006/main" xmlns:p="http://schemas.openxmlformats.org/presentationml/2006/main" xmlns:r="http://schemas.openxmlformats.org/officeDocument/2006/relationships">
+  <p:cSld>
+    <p:spTree>
+      <p:nvGrpSpPr>
+        <p:cNvPr id="1" name=""/>
+        <p:cNvGrpSpPr/>
+        <p:nvPr/>
+      </p:nvGrpSpPr>
+      <p:grpSpPr/>
+      <p:sp>
+        <p:nvSpPr>
+          <p:cNvPr id="3" name="Title 2"/>
+          <p:cNvSpPr>
+            <a:spLocks noGrp="1"/>
+          </p:cNvSpPr>
+          <p:nvPr>
+            <p:ph type="title"/>
+          </p:nvPr>
+        </p:nvSpPr>
+        <p:spPr/>
+        <p:txBody>
+          <a:bodyPr/>
+          <a:lstStyle/>
+          <a:p>
+            <a:r>
+              <a:rPr sz="2400" b="0" i="0">
+                <a:solidFill>
+                  <a:srgbClr val="000000"/>
+                </a:solidFill>
+              </a:rPr>
+              <a:t>Preserve the example or preserve the lesson?</a:t>
+            </a:r>
+          </a:p>
+        </p:txBody>
+      </p:sp>
+      <p:sp>
+        <p:nvSpPr>
+          <p:cNvPr id="900" name="Slide Number Placeholder 900"/>
+          <p:cNvSpPr>
+            <a:spLocks noGrp="1"/>
+          </p:cNvSpPr>
+          <p:nvPr>
+            <p:ph type="sldNum" sz="quarter" idx="4"/>
+          </p:nvPr>
+        </p:nvSpPr>
+        <p:spPr/>
+        <p:txBody>
+          <a:bodyPr/>
+          <a:lstStyle/>
+          <a:p>
+            <a:fld id="{F718CFC3-0E9F-4F3F-A626-9796646D4B80}" type="slidenum">
+              <a:rPr lang="en-US" smtClean="0"/>
+              <a:t>28</a:t>
+            </a:fld>
+            <a:endParaRPr lang="en-US"/>
+          </a:p>
+        </p:txBody>
+      </p:sp>
+      <p:sp>
+        <p:nvSpPr>
+          <p:cNvPr id="901" name="Card"/>
+          <p:cNvSpPr/>
+          <p:nvPr/>
+        </p:nvSpPr>
+        <p:spPr>
+          <a:xfrm>
+            <a:off x="548640" y="1371600"/>
+            <a:ext cx="3931920" cy="3108960"/>
+          </a:xfrm>
+          <a:prstGeom prst="rect">
+            <a:avLst/>
+          </a:prstGeom>
+          <a:solidFill>
+            <a:srgbClr val="F5F1E8"/>
+          </a:solidFill>
+          <a:ln w="12700">
+            <a:solidFill>
+              <a:srgbClr val="C9B991"/>
+            </a:solidFill>
+          </a:ln>
+          <a:effectLst/>
+        </p:spPr>
+        <p:style>
+          <a:lnRef idx="1">
+            <a:schemeClr val="accent1"/>
+          </a:lnRef>
+          <a:fillRef idx="3">
+            <a:schemeClr val="accent1"/>
+          </a:fillRef>
+          <a:effectRef idx="2">
+            <a:schemeClr val="accent1"/>
+          </a:effectRef>
+          <a:fontRef idx="minor">
+            <a:schemeClr val="lt1"/>
+          </a:fontRef>
+        </p:style>
+        <p:txBody>
+          <a:bodyPr rtlCol="0" anchor="t" wrap="square" lIns="27432" rIns="27432" tIns="22860" bIns="22860"/>
+          <a:lstStyle/>
+          <a:p>
+            <a:pPr algn="ctr"/>
+            <a:r>
+              <a:rPr sz="2000" b="1" i="0">
+                <a:solidFill>
+                  <a:srgbClr val="5C4826"/>
+                </a:solidFill>
+              </a:rPr>
+              <a:t>PRESERVE THE EXAMPLE</a:t>
+            </a:r>
+          </a:p>
+          <a:p>
+            <a:pPr algn="ctr">
+              <a:spcBef>
+                <a:spcPts val="1400"/>
+              </a:spcBef>
+            </a:pPr>
+            <a:r>
+              <a:rPr sz="2000" b="1" i="0">
+                <a:solidFill>
+                  <a:srgbClr val="8E6F3E"/>
+                </a:solidFill>
+              </a:rPr>
+              <a:t>Regression test</a:t>
+            </a:r>
+          </a:p>
+          <a:p>
+            <a:pPr algn="ctr">
+              <a:spcBef>
+                <a:spcPts val="800"/>
+              </a:spcBef>
+            </a:pPr>
+            <a:r>
+              <a:rPr sz="2000" b="0" i="0">
+                <a:solidFill>
+                  <a:srgbClr val="555960"/>
+                </a:solidFill>
+              </a:rPr>
+              <a:t>pins this exact case so it can never silently recur</a:t>
+            </a:r>
+          </a:p>
+        </p:txBody>
+      </p:sp>
+      <p:sp>
+        <p:nvSpPr>
+          <p:cNvPr id="902" name="Card"/>
+          <p:cNvSpPr/>
+          <p:nvPr/>
+        </p:nvSpPr>
+        <p:spPr>
+          <a:xfrm>
+            <a:off x="4663440" y="1371600"/>
+            <a:ext cx="3931920" cy="3108960"/>
+          </a:xfrm>
+          <a:prstGeom prst="rect">
+            <a:avLst/>
+          </a:prstGeom>
+          <a:solidFill>
+            <a:srgbClr val="F5F1E8"/>
+          </a:solidFill>
+          <a:ln w="12700">
+            <a:solidFill>
+              <a:srgbClr val="C9B991"/>
+            </a:solidFill>
+          </a:ln>
+          <a:effectLst/>
+        </p:spPr>
+        <p:style>
+          <a:lnRef idx="1">
+            <a:schemeClr val="accent1"/>
+          </a:lnRef>
+          <a:fillRef idx="3">
+            <a:schemeClr val="accent1"/>
+          </a:fillRef>
+          <a:effectRef idx="2">
+            <a:schemeClr val="accent1"/>
+          </a:effectRef>
+          <a:fontRef idx="minor">
+            <a:schemeClr val="lt1"/>
+          </a:fontRef>
+        </p:style>
+        <p:txBody>
+          <a:bodyPr rtlCol="0" anchor="t" wrap="square" lIns="27432" rIns="27432" tIns="22860" bIns="22860"/>
+          <a:lstStyle/>
+          <a:p>
+            <a:pPr algn="ctr"/>
+            <a:r>
+              <a:rPr sz="2000" b="1" i="0">
+                <a:solidFill>
+                  <a:srgbClr val="5C4826"/>
+                </a:solidFill>
+              </a:rPr>
+              <a:t>PRESERVE THE LESSON</a:t>
+            </a:r>
+          </a:p>
+          <a:p>
+            <a:pPr algn="ctr">
+              <a:spcBef>
+                <a:spcPts val="1400"/>
+              </a:spcBef>
+            </a:pPr>
+            <a:r>
+              <a:rPr sz="2000" b="1" i="0">
+                <a:solidFill>
+                  <a:srgbClr val="8E6F3E"/>
+                </a:solidFill>
+              </a:rPr>
+              <a:t>Generalized lesson</a:t>
+            </a:r>
+          </a:p>
+          <a:p>
+            <a:pPr algn="ctr">
+              <a:spcBef>
+                <a:spcPts val="800"/>
+              </a:spcBef>
+            </a:pPr>
+            <a:r>
+              <a:rPr sz="2000" b="0" i="0">
+                <a:solidFill>
+                  <a:srgbClr val="555960"/>
+                </a:solidFill>
+              </a:rPr>
+              <a:t>covers the class of cases the example revealed</a:t>
+            </a:r>
+          </a:p>
+        </p:txBody>
+      </p:sp>
+    </p:spTree>
+  </p:cSld>
+  <p:clrMapOvr>
+    <a:masterClrMapping/>
+  </p:clrMapOvr>
+</p:sld>
+</file>
+
+<file path=ppt/slides/slide29.xml><?xml version="1.0" encoding="utf-8"?>
+<p:sld xmlns:a="http://schemas.openxmlformats.org/drawingml/2006/main" xmlns:p="http://schemas.openxmlformats.org/presentationml/2006/main" xmlns:r="http://schemas.openxmlformats.org/officeDocument/2006/relationships">
+  <p:cSld>
+    <p:spTree>
+      <p:nvGrpSpPr>
+        <p:cNvPr id="1" name=""/>
+        <p:cNvGrpSpPr/>
+        <p:nvPr/>
+      </p:nvGrpSpPr>
+      <p:grpSpPr/>
+      <p:sp>
+        <p:nvSpPr>
+          <p:cNvPr id="3" name="Title 2"/>
+          <p:cNvSpPr>
+            <a:spLocks noGrp="1"/>
+          </p:cNvSpPr>
+          <p:nvPr>
+            <p:ph type="title"/>
+          </p:nvPr>
+        </p:nvSpPr>
+        <p:spPr/>
+        <p:txBody>
+          <a:bodyPr/>
+          <a:lstStyle/>
+          <a:p>
+            <a:r>
+              <a:rPr sz="2400" b="0" i="0">
+                <a:solidFill>
+                  <a:srgbClr val="000000"/>
+                </a:solidFill>
+              </a:rPr>
+              <a:t>Causal account vs reflective account</a:t>
+            </a:r>
+          </a:p>
+        </p:txBody>
+      </p:sp>
+      <p:sp>
+        <p:nvSpPr>
+          <p:cNvPr id="900" name="Slide Number Placeholder 900"/>
+          <p:cNvSpPr>
+            <a:spLocks noGrp="1"/>
+          </p:cNvSpPr>
+          <p:nvPr>
+            <p:ph type="sldNum" sz="quarter" idx="4"/>
+          </p:nvPr>
+        </p:nvSpPr>
+        <p:spPr/>
+        <p:txBody>
+          <a:bodyPr/>
+          <a:lstStyle/>
+          <a:p>
+            <a:fld id="{9508796C-4921-4273-A860-D14FA7F59B54}" type="slidenum">
+              <a:rPr lang="en-US" smtClean="0"/>
+              <a:t>29</a:t>
+            </a:fld>
+            <a:endParaRPr lang="en-US"/>
+          </a:p>
+        </p:txBody>
+      </p:sp>
+      <p:sp>
+        <p:nvSpPr>
+          <p:cNvPr id="901" name="Card"/>
+          <p:cNvSpPr/>
+          <p:nvPr/>
+        </p:nvSpPr>
+        <p:spPr>
+          <a:xfrm>
+            <a:off x="548640" y="1371600"/>
+            <a:ext cx="3931920" cy="2926080"/>
+          </a:xfrm>
+          <a:prstGeom prst="rect">
+            <a:avLst/>
+          </a:prstGeom>
+          <a:solidFill>
+            <a:srgbClr val="F5F1E8"/>
+          </a:solidFill>
+          <a:ln w="12700">
+            <a:solidFill>
+              <a:srgbClr val="C9B991"/>
+            </a:solidFill>
+          </a:ln>
+          <a:effectLst/>
+        </p:spPr>
+        <p:style>
+          <a:lnRef idx="1">
+            <a:schemeClr val="accent1"/>
+          </a:lnRef>
+          <a:fillRef idx="3">
+            <a:schemeClr val="accent1"/>
+          </a:fillRef>
+          <a:effectRef idx="2">
+            <a:schemeClr val="accent1"/>
+          </a:effectRef>
+          <a:fontRef idx="minor">
+            <a:schemeClr val="lt1"/>
+          </a:fontRef>
+        </p:style>
+        <p:txBody>
+          <a:bodyPr rtlCol="0" anchor="t" wrap="square" lIns="27432" rIns="27432" tIns="22860" bIns="22860"/>
+          <a:lstStyle/>
+          <a:p>
+            <a:pPr algn="ctr"/>
+            <a:r>
+              <a:rPr sz="2000" b="1" i="0">
+                <a:solidFill>
+                  <a:srgbClr val="5C4826"/>
+                </a:solidFill>
+              </a:rPr>
+              <a:t>CAUSAL ACCOUNT</a:t>
+            </a:r>
+          </a:p>
+          <a:p>
+            <a:pPr algn="ctr">
+              <a:spcBef>
+                <a:spcPts val="1400"/>
+              </a:spcBef>
+            </a:pPr>
+            <a:r>
+              <a:rPr sz="2000" b="0" i="0">
+                <a:solidFill>
+                  <a:srgbClr val="555960"/>
+                </a:solidFill>
+              </a:rPr>
+              <a:t>what sequence of events and conditions produced the failure</a:t>
+            </a:r>
+          </a:p>
+        </p:txBody>
+      </p:sp>
+      <p:sp>
+        <p:nvSpPr>
+          <p:cNvPr id="902" name="Card"/>
+          <p:cNvSpPr/>
+          <p:nvPr/>
+        </p:nvSpPr>
+        <p:spPr>
+          <a:xfrm>
+            <a:off x="4663440" y="1371600"/>
+            <a:ext cx="3931920" cy="2926080"/>
+          </a:xfrm>
+          <a:prstGeom prst="rect">
+            <a:avLst/>
+          </a:prstGeom>
+          <a:solidFill>
+            <a:srgbClr val="F5F1E8"/>
+          </a:solidFill>
+          <a:ln w="12700">
+            <a:solidFill>
+              <a:srgbClr val="C9B991"/>
+            </a:solidFill>
+          </a:ln>
+          <a:effectLst/>
+        </p:spPr>
+        <p:style>
+          <a:lnRef idx="1">
+            <a:schemeClr val="accent1"/>
+          </a:lnRef>
+          <a:fillRef idx="3">
+            <a:schemeClr val="accent1"/>
+          </a:fillRef>
+          <a:effectRef idx="2">
+            <a:schemeClr val="accent1"/>
+          </a:effectRef>
+          <a:fontRef idx="minor">
+            <a:schemeClr val="lt1"/>
+          </a:fontRef>
+        </p:style>
+        <p:txBody>
+          <a:bodyPr rtlCol="0" anchor="t" wrap="square" lIns="27432" rIns="27432" tIns="22860" bIns="22860"/>
+          <a:lstStyle/>
+          <a:p>
+            <a:pPr algn="ctr"/>
+            <a:r>
+              <a:rPr sz="2000" b="1" i="0">
+                <a:solidFill>
+                  <a:srgbClr val="5C4826"/>
+                </a:solidFill>
+              </a:rPr>
+              <a:t>REFLECTIVE ACCOUNT</a:t>
+            </a:r>
+          </a:p>
+          <a:p>
+            <a:pPr algn="ctr">
+              <a:spcBef>
+                <a:spcPts val="1400"/>
+              </a:spcBef>
+            </a:pPr>
+            <a:r>
+              <a:rPr sz="2000" b="0" i="0">
+                <a:solidFill>
+                  <a:srgbClr val="555960"/>
+                </a:solidFill>
+              </a:rPr>
+              <a:t>what we believed, and how we came to believe it</a:t>
+            </a:r>
+          </a:p>
+        </p:txBody>
+      </p:sp>
+      <p:sp>
+        <p:nvSpPr>
+          <p:cNvPr id="903" name="Label"/>
+          <p:cNvSpPr txBox="1"/>
+          <p:nvPr/>
+        </p:nvSpPr>
+        <p:spPr>
+          <a:xfrm>
+            <a:off x="548640" y="4663440"/>
+            <a:ext cx="8046720" cy="502920"/>
+          </a:xfrm>
+          <a:prstGeom prst="rect">
+            <a:avLst/>
+          </a:prstGeom>
+          <a:noFill/>
+        </p:spPr>
+        <p:txBody>
+          <a:bodyPr wrap="square" anchor="t" lIns="27432" rIns="27432" tIns="22860" bIns="22860">
+            <a:spAutoFit/>
+          </a:bodyPr>
+          <a:lstStyle/>
+          <a:p>
+            <a:pPr algn="ctr"/>
+            <a:r>
+              <a:rPr sz="2200" b="0" i="0">
+                <a:solidFill>
+                  <a:srgbClr val="5C4826"/>
+                </a:solidFill>
+              </a:rPr>
+              <a:t>A postmortem carries both.</a:t>
             </a:r>
           </a:p>
         </p:txBody>
@@ -9812,7 +14347,7 @@
           <a:bodyPr/>
           <a:lstStyle/>
           <a:p>
-            <a:fld id="{0E283878-7FEA-4811-B90C-385DB6556BF2}" type="slidenum">
+            <a:fld id="{86525ABA-B18D-4AD9-A332-72D96EBDB552}" type="slidenum">
               <a:rPr lang="en-US" smtClean="0"/>
               <a:t>3</a:t>
             </a:fld>
@@ -10232,6 +14767,449 @@
                 </a:solidFill>
               </a:rPr>
               <a:t>What should happen when the engineering cannot satisfy the obligations?</a:t>
+            </a:r>
+          </a:p>
+        </p:txBody>
+      </p:sp>
+    </p:spTree>
+  </p:cSld>
+  <p:clrMapOvr>
+    <a:masterClrMapping/>
+  </p:clrMapOvr>
+</p:sld>
+</file>
+
+<file path=ppt/slides/slide30.xml><?xml version="1.0" encoding="utf-8"?>
+<p:sld xmlns:a="http://schemas.openxmlformats.org/drawingml/2006/main" xmlns:p="http://schemas.openxmlformats.org/presentationml/2006/main" xmlns:r="http://schemas.openxmlformats.org/officeDocument/2006/relationships">
+  <p:cSld>
+    <p:spTree>
+      <p:nvGrpSpPr>
+        <p:cNvPr id="1" name=""/>
+        <p:cNvGrpSpPr/>
+        <p:nvPr/>
+      </p:nvGrpSpPr>
+      <p:grpSpPr/>
+      <p:sp>
+        <p:nvSpPr>
+          <p:cNvPr id="3" name="Title 2"/>
+          <p:cNvSpPr>
+            <a:spLocks noGrp="1"/>
+          </p:cNvSpPr>
+          <p:nvPr>
+            <p:ph type="title"/>
+          </p:nvPr>
+        </p:nvSpPr>
+        <p:spPr/>
+        <p:txBody>
+          <a:bodyPr/>
+          <a:lstStyle/>
+          <a:p>
+            <a:r>
+              <a:rPr sz="2400" b="0" i="0">
+                <a:solidFill>
+                  <a:srgbClr val="000000"/>
+                </a:solidFill>
+              </a:rPr>
+              <a:t>Where should the lesson live?</a:t>
+            </a:r>
+          </a:p>
+        </p:txBody>
+      </p:sp>
+      <p:sp>
+        <p:nvSpPr>
+          <p:cNvPr id="900" name="Slide Number Placeholder 900"/>
+          <p:cNvSpPr>
+            <a:spLocks noGrp="1"/>
+          </p:cNvSpPr>
+          <p:nvPr>
+            <p:ph type="sldNum" sz="quarter" idx="4"/>
+          </p:nvPr>
+        </p:nvSpPr>
+        <p:spPr/>
+        <p:txBody>
+          <a:bodyPr/>
+          <a:lstStyle/>
+          <a:p>
+            <a:fld id="{ADE09B36-C754-4D72-82AE-D181A4FF82B9}" type="slidenum">
+              <a:rPr lang="en-US" smtClean="0"/>
+              <a:t>30</a:t>
+            </a:fld>
+            <a:endParaRPr lang="en-US"/>
+          </a:p>
+        </p:txBody>
+      </p:sp>
+      <p:sp>
+        <p:nvSpPr>
+          <p:cNvPr id="901" name="Card"/>
+          <p:cNvSpPr/>
+          <p:nvPr/>
+        </p:nvSpPr>
+        <p:spPr>
+          <a:xfrm>
+            <a:off x="548640" y="1645920"/>
+            <a:ext cx="2651760" cy="1005840"/>
+          </a:xfrm>
+          <a:prstGeom prst="rect">
+            <a:avLst/>
+          </a:prstGeom>
+          <a:solidFill>
+            <a:srgbClr val="F5F1E8"/>
+          </a:solidFill>
+          <a:ln w="12700">
+            <a:solidFill>
+              <a:srgbClr val="C9B991"/>
+            </a:solidFill>
+          </a:ln>
+          <a:effectLst/>
+        </p:spPr>
+        <p:style>
+          <a:lnRef idx="1">
+            <a:schemeClr val="accent1"/>
+          </a:lnRef>
+          <a:fillRef idx="3">
+            <a:schemeClr val="accent1"/>
+          </a:fillRef>
+          <a:effectRef idx="2">
+            <a:schemeClr val="accent1"/>
+          </a:effectRef>
+          <a:fontRef idx="minor">
+            <a:schemeClr val="lt1"/>
+          </a:fontRef>
+        </p:style>
+        <p:txBody>
+          <a:bodyPr rtlCol="0" anchor="ctr" wrap="square" lIns="27432" rIns="27432" tIns="22860" bIns="22860"/>
+          <a:lstStyle/>
+          <a:p>
+            <a:pPr algn="ctr"/>
+            <a:r>
+              <a:rPr sz="2200" b="1" i="0">
+                <a:solidFill>
+                  <a:srgbClr val="5C4826"/>
+                </a:solidFill>
+              </a:rPr>
+              <a:t>requirements</a:t>
+            </a:r>
+          </a:p>
+        </p:txBody>
+      </p:sp>
+      <p:sp>
+        <p:nvSpPr>
+          <p:cNvPr id="902" name="Card"/>
+          <p:cNvSpPr/>
+          <p:nvPr/>
+        </p:nvSpPr>
+        <p:spPr>
+          <a:xfrm>
+            <a:off x="3383280" y="1645920"/>
+            <a:ext cx="2651760" cy="1005840"/>
+          </a:xfrm>
+          <a:prstGeom prst="rect">
+            <a:avLst/>
+          </a:prstGeom>
+          <a:solidFill>
+            <a:srgbClr val="F5F1E8"/>
+          </a:solidFill>
+          <a:ln w="12700">
+            <a:solidFill>
+              <a:srgbClr val="C9B991"/>
+            </a:solidFill>
+          </a:ln>
+          <a:effectLst/>
+        </p:spPr>
+        <p:style>
+          <a:lnRef idx="1">
+            <a:schemeClr val="accent1"/>
+          </a:lnRef>
+          <a:fillRef idx="3">
+            <a:schemeClr val="accent1"/>
+          </a:fillRef>
+          <a:effectRef idx="2">
+            <a:schemeClr val="accent1"/>
+          </a:effectRef>
+          <a:fontRef idx="minor">
+            <a:schemeClr val="lt1"/>
+          </a:fontRef>
+        </p:style>
+        <p:txBody>
+          <a:bodyPr rtlCol="0" anchor="ctr" wrap="square" lIns="27432" rIns="27432" tIns="22860" bIns="22860"/>
+          <a:lstStyle/>
+          <a:p>
+            <a:pPr algn="ctr"/>
+            <a:r>
+              <a:rPr sz="2200" b="1" i="0">
+                <a:solidFill>
+                  <a:srgbClr val="5C4826"/>
+                </a:solidFill>
+              </a:rPr>
+              <a:t>specification</a:t>
+            </a:r>
+          </a:p>
+        </p:txBody>
+      </p:sp>
+      <p:sp>
+        <p:nvSpPr>
+          <p:cNvPr id="903" name="Card"/>
+          <p:cNvSpPr/>
+          <p:nvPr/>
+        </p:nvSpPr>
+        <p:spPr>
+          <a:xfrm>
+            <a:off x="6217920" y="1645920"/>
+            <a:ext cx="2651760" cy="1005840"/>
+          </a:xfrm>
+          <a:prstGeom prst="rect">
+            <a:avLst/>
+          </a:prstGeom>
+          <a:solidFill>
+            <a:srgbClr val="F5F1E8"/>
+          </a:solidFill>
+          <a:ln w="12700">
+            <a:solidFill>
+              <a:srgbClr val="C9B991"/>
+            </a:solidFill>
+          </a:ln>
+          <a:effectLst/>
+        </p:spPr>
+        <p:style>
+          <a:lnRef idx="1">
+            <a:schemeClr val="accent1"/>
+          </a:lnRef>
+          <a:fillRef idx="3">
+            <a:schemeClr val="accent1"/>
+          </a:fillRef>
+          <a:effectRef idx="2">
+            <a:schemeClr val="accent1"/>
+          </a:effectRef>
+          <a:fontRef idx="minor">
+            <a:schemeClr val="lt1"/>
+          </a:fontRef>
+        </p:style>
+        <p:txBody>
+          <a:bodyPr rtlCol="0" anchor="ctr" wrap="square" lIns="27432" rIns="27432" tIns="22860" bIns="22860"/>
+          <a:lstStyle/>
+          <a:p>
+            <a:pPr algn="ctr"/>
+            <a:r>
+              <a:rPr sz="2200" b="1" i="0">
+                <a:solidFill>
+                  <a:srgbClr val="5C4826"/>
+                </a:solidFill>
+              </a:rPr>
+              <a:t>architecture</a:t>
+            </a:r>
+          </a:p>
+        </p:txBody>
+      </p:sp>
+      <p:sp>
+        <p:nvSpPr>
+          <p:cNvPr id="904" name="Card"/>
+          <p:cNvSpPr/>
+          <p:nvPr/>
+        </p:nvSpPr>
+        <p:spPr>
+          <a:xfrm>
+            <a:off x="548640" y="3108960"/>
+            <a:ext cx="2651760" cy="1005840"/>
+          </a:xfrm>
+          <a:prstGeom prst="rect">
+            <a:avLst/>
+          </a:prstGeom>
+          <a:solidFill>
+            <a:srgbClr val="F5F1E8"/>
+          </a:solidFill>
+          <a:ln w="12700">
+            <a:solidFill>
+              <a:srgbClr val="C9B991"/>
+            </a:solidFill>
+          </a:ln>
+          <a:effectLst/>
+        </p:spPr>
+        <p:style>
+          <a:lnRef idx="1">
+            <a:schemeClr val="accent1"/>
+          </a:lnRef>
+          <a:fillRef idx="3">
+            <a:schemeClr val="accent1"/>
+          </a:fillRef>
+          <a:effectRef idx="2">
+            <a:schemeClr val="accent1"/>
+          </a:effectRef>
+          <a:fontRef idx="minor">
+            <a:schemeClr val="lt1"/>
+          </a:fontRef>
+        </p:style>
+        <p:txBody>
+          <a:bodyPr rtlCol="0" anchor="ctr" wrap="square" lIns="27432" rIns="27432" tIns="22860" bIns="22860"/>
+          <a:lstStyle/>
+          <a:p>
+            <a:pPr algn="ctr"/>
+            <a:r>
+              <a:rPr sz="2200" b="1" i="0">
+                <a:solidFill>
+                  <a:srgbClr val="5C4826"/>
+                </a:solidFill>
+              </a:rPr>
+              <a:t>models</a:t>
+            </a:r>
+          </a:p>
+        </p:txBody>
+      </p:sp>
+      <p:sp>
+        <p:nvSpPr>
+          <p:cNvPr id="905" name="Card"/>
+          <p:cNvSpPr/>
+          <p:nvPr/>
+        </p:nvSpPr>
+        <p:spPr>
+          <a:xfrm>
+            <a:off x="3383280" y="3108960"/>
+            <a:ext cx="2651760" cy="1005840"/>
+          </a:xfrm>
+          <a:prstGeom prst="rect">
+            <a:avLst/>
+          </a:prstGeom>
+          <a:solidFill>
+            <a:srgbClr val="F5F1E8"/>
+          </a:solidFill>
+          <a:ln w="12700">
+            <a:solidFill>
+              <a:srgbClr val="C9B991"/>
+            </a:solidFill>
+          </a:ln>
+          <a:effectLst/>
+        </p:spPr>
+        <p:style>
+          <a:lnRef idx="1">
+            <a:schemeClr val="accent1"/>
+          </a:lnRef>
+          <a:fillRef idx="3">
+            <a:schemeClr val="accent1"/>
+          </a:fillRef>
+          <a:effectRef idx="2">
+            <a:schemeClr val="accent1"/>
+          </a:effectRef>
+          <a:fontRef idx="minor">
+            <a:schemeClr val="lt1"/>
+          </a:fontRef>
+        </p:style>
+        <p:txBody>
+          <a:bodyPr rtlCol="0" anchor="ctr" wrap="square" lIns="27432" rIns="27432" tIns="22860" bIns="22860"/>
+          <a:lstStyle/>
+          <a:p>
+            <a:pPr algn="ctr"/>
+            <a:r>
+              <a:rPr sz="2200" b="1" i="0">
+                <a:solidFill>
+                  <a:srgbClr val="5C4826"/>
+                </a:solidFill>
+              </a:rPr>
+              <a:t>validation</a:t>
+            </a:r>
+          </a:p>
+        </p:txBody>
+      </p:sp>
+      <p:sp>
+        <p:nvSpPr>
+          <p:cNvPr id="906" name="Card"/>
+          <p:cNvSpPr/>
+          <p:nvPr/>
+        </p:nvSpPr>
+        <p:spPr>
+          <a:xfrm>
+            <a:off x="6217920" y="3108960"/>
+            <a:ext cx="2651760" cy="1005840"/>
+          </a:xfrm>
+          <a:prstGeom prst="rect">
+            <a:avLst/>
+          </a:prstGeom>
+          <a:solidFill>
+            <a:srgbClr val="F5F1E8"/>
+          </a:solidFill>
+          <a:ln w="12700">
+            <a:solidFill>
+              <a:srgbClr val="C9B991"/>
+            </a:solidFill>
+          </a:ln>
+          <a:effectLst/>
+        </p:spPr>
+        <p:style>
+          <a:lnRef idx="1">
+            <a:schemeClr val="accent1"/>
+          </a:lnRef>
+          <a:fillRef idx="3">
+            <a:schemeClr val="accent1"/>
+          </a:fillRef>
+          <a:effectRef idx="2">
+            <a:schemeClr val="accent1"/>
+          </a:effectRef>
+          <a:fontRef idx="minor">
+            <a:schemeClr val="lt1"/>
+          </a:fontRef>
+        </p:style>
+        <p:txBody>
+          <a:bodyPr rtlCol="0" anchor="ctr" wrap="square" lIns="27432" rIns="27432" tIns="22860" bIns="22860"/>
+          <a:lstStyle/>
+          <a:p>
+            <a:pPr algn="ctr"/>
+            <a:r>
+              <a:rPr sz="2200" b="1" i="0">
+                <a:solidFill>
+                  <a:srgbClr val="5C4826"/>
+                </a:solidFill>
+              </a:rPr>
+              <a:t>controls</a:t>
+            </a:r>
+          </a:p>
+        </p:txBody>
+      </p:sp>
+      <p:sp>
+        <p:nvSpPr>
+          <p:cNvPr id="907" name="FooterBand"/>
+          <p:cNvSpPr/>
+          <p:nvPr/>
+        </p:nvSpPr>
+        <p:spPr>
+          <a:xfrm>
+            <a:off x="274320" y="5852159"/>
+            <a:ext cx="8595360" cy="566928"/>
+          </a:xfrm>
+          <a:prstGeom prst="rect">
+            <a:avLst/>
+          </a:prstGeom>
+          <a:solidFill>
+            <a:srgbClr val="8E6F3E"/>
+          </a:solidFill>
+          <a:ln>
+            <a:noFill/>
+          </a:ln>
+          <a:effectLst/>
+        </p:spPr>
+        <p:style>
+          <a:lnRef idx="1">
+            <a:schemeClr val="accent1"/>
+          </a:lnRef>
+          <a:fillRef idx="3">
+            <a:schemeClr val="accent1"/>
+          </a:fillRef>
+          <a:effectRef idx="2">
+            <a:schemeClr val="accent1"/>
+          </a:effectRef>
+          <a:fontRef idx="minor">
+            <a:schemeClr val="lt1"/>
+          </a:fontRef>
+        </p:style>
+        <p:txBody>
+          <a:bodyPr rtlCol="0" anchor="ctr" wrap="square" lIns="27432" rIns="27432" tIns="22860" bIns="22860"/>
+          <a:lstStyle/>
+          <a:p>
+            <a:pPr algn="ctr"/>
+            <a:r>
+              <a:rPr sz="2000" b="1" i="0">
+                <a:solidFill>
+                  <a:srgbClr val="FFFFFF"/>
+                </a:solidFill>
+              </a:rPr>
+              <a:t>Consequential knowledge migrates to where future work inherits it.</a:t>
             </a:r>
           </a:p>
         </p:txBody>
@@ -10295,7 +15273,7 @@
           <a:bodyPr/>
           <a:lstStyle/>
           <a:p>
-            <a:fld id="{0C1F7B64-CBB4-464E-AB41-FA37D38811D8}" type="slidenum">
+            <a:fld id="{D44BFD92-1E0B-4552-BB0B-00445F63C69F}" type="slidenum">
               <a:rPr lang="en-US" smtClean="0"/>
               <a:t>4</a:t>
             </a:fld>
@@ -11038,7 +16016,7 @@
           <a:bodyPr/>
           <a:lstStyle/>
           <a:p>
-            <a:fld id="{B2F585DF-8792-4B44-A55D-46AF45B931D7}" type="slidenum">
+            <a:fld id="{5BD00870-ADF9-47D6-916D-934E0EF8B0BA}" type="slidenum">
               <a:rPr lang="en-US" smtClean="0"/>
               <a:t>5</a:t>
             </a:fld>
@@ -11385,7 +16363,7 @@
           <a:bodyPr/>
           <a:lstStyle/>
           <a:p>
-            <a:fld id="{2A4C8AD4-B258-43AE-BB11-07B720D492DE}" type="slidenum">
+            <a:fld id="{5C856D03-0CC0-4BEC-9A8A-1592C147E6CF}" type="slidenum">
               <a:rPr lang="en-US" smtClean="0"/>
               <a:t>6</a:t>
             </a:fld>
@@ -11628,7 +16606,7 @@
           <a:bodyPr/>
           <a:lstStyle/>
           <a:p>
-            <a:fld id="{B63FC52C-085A-44CD-88FF-F0B89574F0D7}" type="slidenum">
+            <a:fld id="{C3C0D9BD-F16C-4A6B-B8A6-E34B73CA1E6B}" type="slidenum">
               <a:rPr lang="en-US" smtClean="0"/>
               <a:t>7</a:t>
             </a:fld>
@@ -11880,7 +16858,7 @@
           <a:bodyPr/>
           <a:lstStyle/>
           <a:p>
-            <a:fld id="{EB2254B0-2847-446D-A99B-3B146C8B0742}" type="slidenum">
+            <a:fld id="{0CF085B0-2B05-4F12-8120-0507C03E97A6}" type="slidenum">
               <a:rPr lang="en-US" smtClean="0"/>
               <a:t>8</a:t>
             </a:fld>
@@ -12674,7 +17652,7 @@
           <a:bodyPr/>
           <a:lstStyle/>
           <a:p>
-            <a:fld id="{1AD63376-E242-4330-85AB-CDFE7346944A}" type="slidenum">
+            <a:fld id="{B2D3FE27-ED08-4892-B7C9-416508D1890C}" type="slidenum">
               <a:rPr lang="en-US" smtClean="0"/>
               <a:t>9</a:t>
             </a:fld>

--- a/course/lectures/act-2-delegation-and-control/04-failure-aware-engineering/2-4-Failure-Aware-Engineering.pptx
+++ b/course/lectures/act-2-delegation-and-control/04-failure-aware-engineering/2-4-Failure-Aware-Engineering.pptx
@@ -38,6 +38,14 @@
     <p:sldId id="283" r:id="rId5"/>
     <p:sldId id="284" r:id="rId4"/>
     <p:sldId id="285" r:id="rId3"/>
+    <p:sldId id="286" r:id="rId2"/>
+    <p:sldId id="287" r:id="rId38"/>
+    <p:sldId id="288" r:id="rId39"/>
+    <p:sldId id="289" r:id="rId40"/>
+    <p:sldId id="290" r:id="rId41"/>
+    <p:sldId id="291" r:id="rId42"/>
+    <p:sldId id="292" r:id="rId43"/>
+    <p:sldId id="293" r:id="rId44"/>
   </p:sldIdLst>
   <p:sldSz cx="9144000" cy="6858000" type="screen4x3"/>
   <p:notesSz cx="6858000" cy="9144000"/>
@@ -2385,6 +2393,666 @@
           <a:p>
             <a:r>
               <a:t>- ASK for one lesson from the course project and where it should live.</a:t>
+            </a:r>
+          </a:p>
+        </p:txBody>
+      </p:sp>
+      <p:sp>
+        <p:nvSpPr>
+          <p:cNvPr id="4" name="Slide Number Placeholder 3"/>
+          <p:cNvSpPr>
+            <a:spLocks noGrp="1"/>
+          </p:cNvSpPr>
+          <p:nvPr>
+            <p:ph type="sldNum" idx="5" sz="quarter"/>
+          </p:nvPr>
+        </p:nvSpPr>
+        <p:spPr/>
+      </p:sp>
+    </p:spTree>
+  </p:cSld>
+  <p:clrMapOvr>
+    <a:masterClrMapping/>
+  </p:clrMapOvr>
+</p:notes>
+</file>
+
+<file path=ppt/notesSlides/notesSlide31.xml><?xml version="1.0" encoding="utf-8"?>
+<p:notes xmlns:a="http://schemas.openxmlformats.org/drawingml/2006/main" xmlns:p="http://schemas.openxmlformats.org/presentationml/2006/main" xmlns:r="http://schemas.openxmlformats.org/officeDocument/2006/relationships">
+  <p:cSld>
+    <p:spTree>
+      <p:nvGrpSpPr>
+        <p:cNvPr id="1" name=""/>
+        <p:cNvGrpSpPr/>
+        <p:nvPr/>
+      </p:nvGrpSpPr>
+      <p:grpSpPr>
+        <a:xfrm>
+          <a:off x="0" y="0"/>
+          <a:ext cx="0" cy="0"/>
+          <a:chOff x="0" y="0"/>
+          <a:chExt cx="0" cy="0"/>
+        </a:xfrm>
+      </p:grpSpPr>
+      <p:sp>
+        <p:nvSpPr>
+          <p:cNvPr id="2" name="Slide Image Placeholder 1"/>
+          <p:cNvSpPr>
+            <a:spLocks noGrp="1"/>
+          </p:cNvSpPr>
+          <p:nvPr>
+            <p:ph type="sldImg" idx="2"/>
+          </p:nvPr>
+        </p:nvSpPr>
+        <p:spPr/>
+      </p:sp>
+      <p:sp>
+        <p:nvSpPr>
+          <p:cNvPr id="3" name="Notes Placeholder 2"/>
+          <p:cNvSpPr>
+            <a:spLocks noGrp="1"/>
+          </p:cNvSpPr>
+          <p:nvPr>
+            <p:ph type="body" idx="3" sz="quarter"/>
+          </p:nvPr>
+        </p:nvSpPr>
+        <p:spPr/>
+        <p:txBody>
+          <a:bodyPr/>
+          <a:lstStyle/>
+          <a:p>
+            <a:r>
+              <a:t>TIMING: &lt;1 minute</a:t>
+            </a:r>
+          </a:p>
+          <a:p>
+            <a:r>
+              <a:t>- The climax of the unit: from lessons engineers remember to structure the environment enforces.</a:t>
+            </a:r>
+          </a:p>
+        </p:txBody>
+      </p:sp>
+      <p:sp>
+        <p:nvSpPr>
+          <p:cNvPr id="4" name="Slide Number Placeholder 3"/>
+          <p:cNvSpPr>
+            <a:spLocks noGrp="1"/>
+          </p:cNvSpPr>
+          <p:nvPr>
+            <p:ph type="sldNum" idx="5" sz="quarter"/>
+          </p:nvPr>
+        </p:nvSpPr>
+        <p:spPr/>
+      </p:sp>
+    </p:spTree>
+  </p:cSld>
+  <p:clrMapOvr>
+    <a:masterClrMapping/>
+  </p:clrMapOvr>
+</p:notes>
+</file>
+
+<file path=ppt/notesSlides/notesSlide32.xml><?xml version="1.0" encoding="utf-8"?>
+<p:notes xmlns:a="http://schemas.openxmlformats.org/drawingml/2006/main" xmlns:p="http://schemas.openxmlformats.org/presentationml/2006/main" xmlns:r="http://schemas.openxmlformats.org/officeDocument/2006/relationships">
+  <p:cSld>
+    <p:spTree>
+      <p:nvGrpSpPr>
+        <p:cNvPr id="1" name=""/>
+        <p:cNvGrpSpPr/>
+        <p:nvPr/>
+      </p:nvGrpSpPr>
+      <p:grpSpPr>
+        <a:xfrm>
+          <a:off x="0" y="0"/>
+          <a:ext cx="0" cy="0"/>
+          <a:chOff x="0" y="0"/>
+          <a:chExt cx="0" cy="0"/>
+        </a:xfrm>
+      </p:grpSpPr>
+      <p:sp>
+        <p:nvSpPr>
+          <p:cNvPr id="2" name="Slide Image Placeholder 1"/>
+          <p:cNvSpPr>
+            <a:spLocks noGrp="1"/>
+          </p:cNvSpPr>
+          <p:nvPr>
+            <p:ph type="sldImg" idx="2"/>
+          </p:nvPr>
+        </p:nvSpPr>
+        <p:spPr/>
+      </p:sp>
+      <p:sp>
+        <p:nvSpPr>
+          <p:cNvPr id="3" name="Notes Placeholder 2"/>
+          <p:cNvSpPr>
+            <a:spLocks noGrp="1"/>
+          </p:cNvSpPr>
+          <p:nvPr>
+            <p:ph type="body" idx="3" sz="quarter"/>
+          </p:nvPr>
+        </p:nvSpPr>
+        <p:spPr/>
+        <p:txBody>
+          <a:bodyPr/>
+          <a:lstStyle/>
+          <a:p>
+            <a:r>
+              <a:t>TIMING: 2 minutes</a:t>
+            </a:r>
+          </a:p>
+          <a:p>
+            <a:r>
+              <a:t>- Not a universal maturity ladder - increasing ability to affect future action.</a:t>
+            </a:r>
+          </a:p>
+          <a:p>
+            <a:r>
+              <a:t>- "Be careful next time" depends on memory and goodwill; a constraint or gate acts whether or not anyone remembers.</a:t>
+            </a:r>
+          </a:p>
+        </p:txBody>
+      </p:sp>
+      <p:sp>
+        <p:nvSpPr>
+          <p:cNvPr id="4" name="Slide Number Placeholder 3"/>
+          <p:cNvSpPr>
+            <a:spLocks noGrp="1"/>
+          </p:cNvSpPr>
+          <p:nvPr>
+            <p:ph type="sldNum" idx="5" sz="quarter"/>
+          </p:nvPr>
+        </p:nvSpPr>
+        <p:spPr/>
+      </p:sp>
+    </p:spTree>
+  </p:cSld>
+  <p:clrMapOvr>
+    <a:masterClrMapping/>
+  </p:clrMapOvr>
+</p:notes>
+</file>
+
+<file path=ppt/notesSlides/notesSlide33.xml><?xml version="1.0" encoding="utf-8"?>
+<p:notes xmlns:a="http://schemas.openxmlformats.org/drawingml/2006/main" xmlns:p="http://schemas.openxmlformats.org/presentationml/2006/main" xmlns:r="http://schemas.openxmlformats.org/officeDocument/2006/relationships">
+  <p:cSld>
+    <p:spTree>
+      <p:nvGrpSpPr>
+        <p:cNvPr id="1" name=""/>
+        <p:cNvGrpSpPr/>
+        <p:nvPr/>
+      </p:nvGrpSpPr>
+      <p:grpSpPr>
+        <a:xfrm>
+          <a:off x="0" y="0"/>
+          <a:ext cx="0" cy="0"/>
+          <a:chOff x="0" y="0"/>
+          <a:chExt cx="0" cy="0"/>
+        </a:xfrm>
+      </p:grpSpPr>
+      <p:sp>
+        <p:nvSpPr>
+          <p:cNvPr id="2" name="Slide Image Placeholder 1"/>
+          <p:cNvSpPr>
+            <a:spLocks noGrp="1"/>
+          </p:cNvSpPr>
+          <p:nvPr>
+            <p:ph type="sldImg" idx="2"/>
+          </p:nvPr>
+        </p:nvSpPr>
+        <p:spPr/>
+      </p:sp>
+      <p:sp>
+        <p:nvSpPr>
+          <p:cNvPr id="3" name="Notes Placeholder 2"/>
+          <p:cNvSpPr>
+            <a:spLocks noGrp="1"/>
+          </p:cNvSpPr>
+          <p:nvPr>
+            <p:ph type="body" idx="3" sz="quarter"/>
+          </p:nvPr>
+        </p:nvSpPr>
+        <p:spPr/>
+        <p:txBody>
+          <a:bodyPr/>
+          <a:lstStyle/>
+          <a:p>
+            <a:r>
+              <a:t>TIMING: 2-3 minutes - a major slide.</a:t>
+            </a:r>
+          </a:p>
+          <a:p>
+            <a:r>
+              <a:t>- Failure -&gt; what did we learn? -&gt; recurring judgment -&gt; can it be represented reliably? -&gt; model / validator / constraint / gate.</a:t>
+            </a:r>
+          </a:p>
+          <a:p>
+            <a:r>
+              <a:t>- This is where Alignment pays off: the targets at the bottom are the control-system roles from unit 2-3.</a:t>
+            </a:r>
+          </a:p>
+        </p:txBody>
+      </p:sp>
+      <p:sp>
+        <p:nvSpPr>
+          <p:cNvPr id="4" name="Slide Number Placeholder 3"/>
+          <p:cNvSpPr>
+            <a:spLocks noGrp="1"/>
+          </p:cNvSpPr>
+          <p:nvPr>
+            <p:ph type="sldNum" idx="5" sz="quarter"/>
+          </p:nvPr>
+        </p:nvSpPr>
+        <p:spPr/>
+      </p:sp>
+    </p:spTree>
+  </p:cSld>
+  <p:clrMapOvr>
+    <a:masterClrMapping/>
+  </p:clrMapOvr>
+</p:notes>
+</file>
+
+<file path=ppt/notesSlides/notesSlide34.xml><?xml version="1.0" encoding="utf-8"?>
+<p:notes xmlns:a="http://schemas.openxmlformats.org/drawingml/2006/main" xmlns:p="http://schemas.openxmlformats.org/presentationml/2006/main" xmlns:r="http://schemas.openxmlformats.org/officeDocument/2006/relationships">
+  <p:cSld>
+    <p:spTree>
+      <p:nvGrpSpPr>
+        <p:cNvPr id="1" name=""/>
+        <p:cNvGrpSpPr/>
+        <p:nvPr/>
+      </p:nvGrpSpPr>
+      <p:grpSpPr>
+        <a:xfrm>
+          <a:off x="0" y="0"/>
+          <a:ext cx="0" cy="0"/>
+          <a:chOff x="0" y="0"/>
+          <a:chExt cx="0" cy="0"/>
+        </a:xfrm>
+      </p:grpSpPr>
+      <p:sp>
+        <p:nvSpPr>
+          <p:cNvPr id="2" name="Slide Image Placeholder 1"/>
+          <p:cNvSpPr>
+            <a:spLocks noGrp="1"/>
+          </p:cNvSpPr>
+          <p:nvPr>
+            <p:ph type="sldImg" idx="2"/>
+          </p:nvPr>
+        </p:nvSpPr>
+        <p:spPr/>
+      </p:sp>
+      <p:sp>
+        <p:nvSpPr>
+          <p:cNvPr id="3" name="Notes Placeholder 2"/>
+          <p:cNvSpPr>
+            <a:spLocks noGrp="1"/>
+          </p:cNvSpPr>
+          <p:nvPr>
+            <p:ph type="body" idx="3" sz="quarter"/>
+          </p:nvPr>
+        </p:nvSpPr>
+        <p:spPr/>
+        <p:txBody>
+          <a:bodyPr/>
+          <a:lstStyle/>
+          <a:p>
+            <a:r>
+              <a:t>TIMING: 2-3 minutes</a:t>
+            </a:r>
+          </a:p>
+          <a:p>
+            <a:r>
+              <a:t>- A much better final Volkswagen discussion than "who was unethical?"</a:t>
+            </a:r>
+          </a:p>
+          <a:p>
+            <a:r>
+              <a:t>- The footer question is the discussion; give it time.</a:t>
+            </a:r>
+          </a:p>
+        </p:txBody>
+      </p:sp>
+      <p:sp>
+        <p:nvSpPr>
+          <p:cNvPr id="4" name="Slide Number Placeholder 3"/>
+          <p:cNvSpPr>
+            <a:spLocks noGrp="1"/>
+          </p:cNvSpPr>
+          <p:nvPr>
+            <p:ph type="sldNum" idx="5" sz="quarter"/>
+          </p:nvPr>
+        </p:nvSpPr>
+        <p:spPr/>
+      </p:sp>
+    </p:spTree>
+  </p:cSld>
+  <p:clrMapOvr>
+    <a:masterClrMapping/>
+  </p:clrMapOvr>
+</p:notes>
+</file>
+
+<file path=ppt/notesSlides/notesSlide35.xml><?xml version="1.0" encoding="utf-8"?>
+<p:notes xmlns:a="http://schemas.openxmlformats.org/drawingml/2006/main" xmlns:p="http://schemas.openxmlformats.org/presentationml/2006/main" xmlns:r="http://schemas.openxmlformats.org/officeDocument/2006/relationships">
+  <p:cSld>
+    <p:spTree>
+      <p:nvGrpSpPr>
+        <p:cNvPr id="1" name=""/>
+        <p:cNvGrpSpPr/>
+        <p:nvPr/>
+      </p:nvGrpSpPr>
+      <p:grpSpPr>
+        <a:xfrm>
+          <a:off x="0" y="0"/>
+          <a:ext cx="0" cy="0"/>
+          <a:chOff x="0" y="0"/>
+          <a:chExt cx="0" cy="0"/>
+        </a:xfrm>
+      </p:grpSpPr>
+      <p:sp>
+        <p:nvSpPr>
+          <p:cNvPr id="2" name="Slide Image Placeholder 1"/>
+          <p:cNvSpPr>
+            <a:spLocks noGrp="1"/>
+          </p:cNvSpPr>
+          <p:nvPr>
+            <p:ph type="sldImg" idx="2"/>
+          </p:nvPr>
+        </p:nvSpPr>
+        <p:spPr/>
+      </p:sp>
+      <p:sp>
+        <p:nvSpPr>
+          <p:cNvPr id="3" name="Notes Placeholder 2"/>
+          <p:cNvSpPr>
+            <a:spLocks noGrp="1"/>
+          </p:cNvSpPr>
+          <p:nvPr>
+            <p:ph type="body" idx="3" sz="quarter"/>
+          </p:nvPr>
+        </p:nvSpPr>
+        <p:spPr/>
+        <p:txBody>
+          <a:bodyPr/>
+          <a:lstStyle/>
+          <a:p>
+            <a:r>
+              <a:t>TIMING: 1-2 minutes</a:t>
+            </a:r>
+          </a:p>
+          <a:p>
+            <a:r>
+              <a:t>- This exploits the Alignment unit directly: represent the lesson, actively align what already exists, passively align everything that comes after.</a:t>
+            </a:r>
+          </a:p>
+        </p:txBody>
+      </p:sp>
+      <p:sp>
+        <p:nvSpPr>
+          <p:cNvPr id="4" name="Slide Number Placeholder 3"/>
+          <p:cNvSpPr>
+            <a:spLocks noGrp="1"/>
+          </p:cNvSpPr>
+          <p:nvPr>
+            <p:ph type="sldNum" idx="5" sz="quarter"/>
+          </p:nvPr>
+        </p:nvSpPr>
+        <p:spPr/>
+      </p:sp>
+    </p:spTree>
+  </p:cSld>
+  <p:clrMapOvr>
+    <a:masterClrMapping/>
+  </p:clrMapOvr>
+</p:notes>
+</file>
+
+<file path=ppt/notesSlides/notesSlide36.xml><?xml version="1.0" encoding="utf-8"?>
+<p:notes xmlns:a="http://schemas.openxmlformats.org/drawingml/2006/main" xmlns:p="http://schemas.openxmlformats.org/presentationml/2006/main" xmlns:r="http://schemas.openxmlformats.org/officeDocument/2006/relationships">
+  <p:cSld>
+    <p:spTree>
+      <p:nvGrpSpPr>
+        <p:cNvPr id="1" name=""/>
+        <p:cNvGrpSpPr/>
+        <p:nvPr/>
+      </p:nvGrpSpPr>
+      <p:grpSpPr>
+        <a:xfrm>
+          <a:off x="0" y="0"/>
+          <a:ext cx="0" cy="0"/>
+          <a:chOff x="0" y="0"/>
+          <a:chExt cx="0" cy="0"/>
+        </a:xfrm>
+      </p:grpSpPr>
+      <p:sp>
+        <p:nvSpPr>
+          <p:cNvPr id="2" name="Slide Image Placeholder 1"/>
+          <p:cNvSpPr>
+            <a:spLocks noGrp="1"/>
+          </p:cNvSpPr>
+          <p:nvPr>
+            <p:ph type="sldImg" idx="2"/>
+          </p:nvPr>
+        </p:nvSpPr>
+        <p:spPr/>
+      </p:sp>
+      <p:sp>
+        <p:nvSpPr>
+          <p:cNvPr id="3" name="Notes Placeholder 2"/>
+          <p:cNvSpPr>
+            <a:spLocks noGrp="1"/>
+          </p:cNvSpPr>
+          <p:nvPr>
+            <p:ph type="body" idx="3" sz="quarter"/>
+          </p:nvPr>
+        </p:nvSpPr>
+        <p:spPr/>
+        <p:txBody>
+          <a:bodyPr/>
+          <a:lstStyle/>
+          <a:p>
+            <a:r>
+              <a:t>TIMING: 1-2 minutes</a:t>
+            </a:r>
+          </a:p>
+          <a:p>
+            <a:r>
+              <a:t>- A lesson can land in the system (structure, models, controls), in the team (practices, shared understanding), or in the engineer (judgment, repertoire).</a:t>
+            </a:r>
+          </a:p>
+          <a:p>
+            <a:r>
+              <a:t>- The three are complements, not competitors.</a:t>
+            </a:r>
+          </a:p>
+        </p:txBody>
+      </p:sp>
+      <p:sp>
+        <p:nvSpPr>
+          <p:cNvPr id="4" name="Slide Number Placeholder 3"/>
+          <p:cNvSpPr>
+            <a:spLocks noGrp="1"/>
+          </p:cNvSpPr>
+          <p:nvPr>
+            <p:ph type="sldNum" idx="5" sz="quarter"/>
+          </p:nvPr>
+        </p:nvSpPr>
+        <p:spPr/>
+      </p:sp>
+    </p:spTree>
+  </p:cSld>
+  <p:clrMapOvr>
+    <a:masterClrMapping/>
+  </p:clrMapOvr>
+</p:notes>
+</file>
+
+<file path=ppt/notesSlides/notesSlide37.xml><?xml version="1.0" encoding="utf-8"?>
+<p:notes xmlns:a="http://schemas.openxmlformats.org/drawingml/2006/main" xmlns:p="http://schemas.openxmlformats.org/presentationml/2006/main" xmlns:r="http://schemas.openxmlformats.org/officeDocument/2006/relationships">
+  <p:cSld>
+    <p:spTree>
+      <p:nvGrpSpPr>
+        <p:cNvPr id="1" name=""/>
+        <p:cNvGrpSpPr/>
+        <p:nvPr/>
+      </p:nvGrpSpPr>
+      <p:grpSpPr>
+        <a:xfrm>
+          <a:off x="0" y="0"/>
+          <a:ext cx="0" cy="0"/>
+          <a:chOff x="0" y="0"/>
+          <a:chExt cx="0" cy="0"/>
+        </a:xfrm>
+      </p:grpSpPr>
+      <p:sp>
+        <p:nvSpPr>
+          <p:cNvPr id="2" name="Slide Image Placeholder 1"/>
+          <p:cNvSpPr>
+            <a:spLocks noGrp="1"/>
+          </p:cNvSpPr>
+          <p:nvPr>
+            <p:ph type="sldImg" idx="2"/>
+          </p:nvPr>
+        </p:nvSpPr>
+        <p:spPr/>
+      </p:sp>
+      <p:sp>
+        <p:nvSpPr>
+          <p:cNvPr id="3" name="Notes Placeholder 2"/>
+          <p:cNvSpPr>
+            <a:spLocks noGrp="1"/>
+          </p:cNvSpPr>
+          <p:nvPr>
+            <p:ph type="body" idx="3" sz="quarter"/>
+          </p:nvPr>
+        </p:nvSpPr>
+        <p:spPr/>
+        <p:txBody>
+          <a:bodyPr/>
+          <a:lstStyle/>
+          <a:p>
+            <a:r>
+              <a:t>TIMING: 1-2 minutes</a:t>
+            </a:r>
+          </a:p>
+          <a:p>
+            <a:r>
+              <a:t>- Schon arrives only now, deliberately: reflection is real and valuable, but it is not the destination of this unit.</a:t>
+            </a:r>
+          </a:p>
+          <a:p>
+            <a:r>
+              <a:t>- Decision -&gt; consequence -&gt; reflection -&gt; repertoire -&gt; future recognition.</a:t>
+            </a:r>
+          </a:p>
+        </p:txBody>
+      </p:sp>
+      <p:sp>
+        <p:nvSpPr>
+          <p:cNvPr id="4" name="Slide Number Placeholder 3"/>
+          <p:cNvSpPr>
+            <a:spLocks noGrp="1"/>
+          </p:cNvSpPr>
+          <p:nvPr>
+            <p:ph type="sldNum" idx="5" sz="quarter"/>
+          </p:nvPr>
+        </p:nvSpPr>
+        <p:spPr/>
+      </p:sp>
+    </p:spTree>
+  </p:cSld>
+  <p:clrMapOvr>
+    <a:masterClrMapping/>
+  </p:clrMapOvr>
+</p:notes>
+</file>
+
+<file path=ppt/notesSlides/notesSlide38.xml><?xml version="1.0" encoding="utf-8"?>
+<p:notes xmlns:a="http://schemas.openxmlformats.org/drawingml/2006/main" xmlns:p="http://schemas.openxmlformats.org/presentationml/2006/main" xmlns:r="http://schemas.openxmlformats.org/officeDocument/2006/relationships">
+  <p:cSld>
+    <p:spTree>
+      <p:nvGrpSpPr>
+        <p:cNvPr id="1" name=""/>
+        <p:cNvGrpSpPr/>
+        <p:nvPr/>
+      </p:nvGrpSpPr>
+      <p:grpSpPr>
+        <a:xfrm>
+          <a:off x="0" y="0"/>
+          <a:ext cx="0" cy="0"/>
+          <a:chOff x="0" y="0"/>
+          <a:chExt cx="0" cy="0"/>
+        </a:xfrm>
+      </p:grpSpPr>
+      <p:sp>
+        <p:nvSpPr>
+          <p:cNvPr id="2" name="Slide Image Placeholder 1"/>
+          <p:cNvSpPr>
+            <a:spLocks noGrp="1"/>
+          </p:cNvSpPr>
+          <p:nvPr>
+            <p:ph type="sldImg" idx="2"/>
+          </p:nvPr>
+        </p:nvSpPr>
+        <p:spPr/>
+      </p:sp>
+      <p:sp>
+        <p:nvSpPr>
+          <p:cNvPr id="3" name="Notes Placeholder 2"/>
+          <p:cNvSpPr>
+            <a:spLocks noGrp="1"/>
+          </p:cNvSpPr>
+          <p:nvPr>
+            <p:ph type="body" idx="3" sz="quarter"/>
+          </p:nvPr>
+        </p:nvSpPr>
+        <p:spPr/>
+        <p:txBody>
+          <a:bodyPr/>
+          <a:lstStyle/>
+          <a:p>
+            <a:r>
+              <a:t>TIMING: 3 minutes - the closing figure, and arguably the summary slide of Act II.</a:t>
+            </a:r>
+          </a:p>
+          <a:p>
+            <a:r>
+              <a:t>ANIMATION (apply by hand in PowerPoint; the build tool cannot author animations). Five-step build, with the narration line for each:</a:t>
+            </a:r>
+          </a:p>
+          <a:p>
+            <a:r>
+              <a:t>1. MODEL -&gt; REALIZATION -&gt; REALITY: "We deliberately modeled only what we thought mattered."</a:t>
+            </a:r>
+          </a:p>
+          <a:p>
+            <a:r>
+              <a:t>2. REALITY -&gt; FAILURE / EVIDENCE: "Reality has just told us something our engineering did not predict."</a:t>
+            </a:r>
+          </a:p>
+          <a:p>
+            <a:r>
+              <a:t>3. EVIDENCE -&gt; JUDGMENT: "The observation doesn't explain itself."</a:t>
+            </a:r>
+          </a:p>
+          <a:p>
+            <a:r>
+              <a:t>4. JUDGMENT -&gt; MODEL′ / CONTROL: "If the newly discovered distinction matters enough, preserve it."</a:t>
+            </a:r>
+          </a:p>
+          <a:p>
+            <a:r>
+              <a:t>5. Close the loop back to REALIZATION.</a:t>
+            </a:r>
+          </a:p>
+          <a:p>
+            <a:r>
+              <a:t>The judgment gate is the point - this must NOT read as "more controls good." Some failures should change the model. Some should change the engineer. Some are residual uncertainty we accept. Some lessons are too local to encode. The engineering question is whether this distinction has earned its place.</a:t>
+            </a:r>
+          </a:p>
+          <a:p>
+            <a:r>
+              <a:t>Closing beat: Failure is inevitable. Recurring failure is not. The organization should accumulate structure from consequential experience: ask which part of the judgment can be made unnecessary next time because the environment itself now knows it.</a:t>
             </a:r>
           </a:p>
         </p:txBody>
@@ -6403,7 +7071,7 @@
           <a:bodyPr/>
           <a:lstStyle/>
           <a:p>
-            <a:fld id="{2A43D30D-85A8-477F-BEC0-414C23720949}" type="slidenum">
+            <a:fld id="{B3291E67-7172-4DCF-B35F-54404EBE6160}" type="slidenum">
               <a:rPr lang="en-US" smtClean="0"/>
               <a:t>1</a:t>
             </a:fld>
@@ -6598,7 +7266,7 @@
           <a:bodyPr/>
           <a:lstStyle/>
           <a:p>
-            <a:fld id="{B3701E80-C716-4E6A-B258-BF05840C90DE}" type="slidenum">
+            <a:fld id="{1CC19601-3229-4026-8A65-27C733DA7C77}" type="slidenum">
               <a:rPr lang="en-US" smtClean="0"/>
               <a:t>10</a:t>
             </a:fld>
@@ -7141,7 +7809,7 @@
           <a:bodyPr/>
           <a:lstStyle/>
           <a:p>
-            <a:fld id="{2B7F3B56-C71B-46E2-B5B3-15D6EDEA9357}" type="slidenum">
+            <a:fld id="{3B223778-6764-4D81-904E-8786918EE0A1}" type="slidenum">
               <a:rPr lang="en-US" smtClean="0"/>
               <a:t>11</a:t>
             </a:fld>
@@ -7328,7 +7996,7 @@
           <a:bodyPr/>
           <a:lstStyle/>
           <a:p>
-            <a:fld id="{D3203EA6-7D0E-4BCF-BC57-8FA32EAE9A9C}" type="slidenum">
+            <a:fld id="{00F42B8D-282B-4541-BC87-223291F13518}" type="slidenum">
               <a:rPr lang="en-US" smtClean="0"/>
               <a:t>12</a:t>
             </a:fld>
@@ -7464,7 +8132,7 @@
           <a:bodyPr/>
           <a:lstStyle/>
           <a:p>
-            <a:fld id="{792C3804-325D-4FC4-B86F-0E3B96B75588}" type="slidenum">
+            <a:fld id="{8D34505B-00B1-4572-8080-1F84ADF8E747}" type="slidenum">
               <a:rPr lang="en-US" smtClean="0"/>
               <a:t>13</a:t>
             </a:fld>
@@ -7751,7 +8419,7 @@
           <a:bodyPr/>
           <a:lstStyle/>
           <a:p>
-            <a:fld id="{B2AA4D64-91B6-4F3C-BBDB-9E223E826547}" type="slidenum">
+            <a:fld id="{E3DB674E-A080-44A8-A874-38AE3C84A5E2}" type="slidenum">
               <a:rPr lang="en-US" smtClean="0"/>
               <a:t>14</a:t>
             </a:fld>
@@ -8752,7 +9420,7 @@
           <a:bodyPr/>
           <a:lstStyle/>
           <a:p>
-            <a:fld id="{D0A80A09-AB4A-448E-9C89-F91826118FD4}" type="slidenum">
+            <a:fld id="{914DCAD9-F068-4234-801B-B81BE39514E5}" type="slidenum">
               <a:rPr lang="en-US" smtClean="0"/>
               <a:t>15</a:t>
             </a:fld>
@@ -9085,7 +9753,7 @@
           <a:bodyPr/>
           <a:lstStyle/>
           <a:p>
-            <a:fld id="{5C04F9F5-8793-4E0A-B7E6-07F83852951D}" type="slidenum">
+            <a:fld id="{21CAE056-AEB1-4FA5-BA70-2608DF341BC7}" type="slidenum">
               <a:rPr lang="en-US" smtClean="0"/>
               <a:t>16</a:t>
             </a:fld>
@@ -9678,7 +10346,7 @@
           <a:bodyPr/>
           <a:lstStyle/>
           <a:p>
-            <a:fld id="{FD52A085-833B-45CB-9024-201F6F8BB276}" type="slidenum">
+            <a:fld id="{A5E8DDF8-F0A4-457E-8C49-34448B87F78F}" type="slidenum">
               <a:rPr lang="en-US" smtClean="0"/>
               <a:t>17</a:t>
             </a:fld>
@@ -10031,7 +10699,7 @@
           <a:bodyPr/>
           <a:lstStyle/>
           <a:p>
-            <a:fld id="{A217FCDD-83C2-4540-9ED9-EA5D35DF23D2}" type="slidenum">
+            <a:fld id="{A2504DDB-3E3B-4B22-928E-39EF9EC13EA2}" type="slidenum">
               <a:rPr lang="en-US" smtClean="0"/>
               <a:t>18</a:t>
             </a:fld>
@@ -10412,7 +11080,7 @@
           <a:bodyPr/>
           <a:lstStyle/>
           <a:p>
-            <a:fld id="{E3BDA2FA-C59C-4943-8C2E-0970BEA0337D}" type="slidenum">
+            <a:fld id="{D6607EED-2C17-4005-9FF9-5E7D14817CFB}" type="slidenum">
               <a:rPr lang="en-US" smtClean="0"/>
               <a:t>19</a:t>
             </a:fld>
@@ -10599,7 +11267,7 @@
           <a:bodyPr/>
           <a:lstStyle/>
           <a:p>
-            <a:fld id="{5C4E765D-783E-4B95-A88D-1F5178204E0C}" type="slidenum">
+            <a:fld id="{5A78CA05-E47A-4617-B951-D407706858B7}" type="slidenum">
               <a:rPr lang="en-US" smtClean="0"/>
               <a:t>2</a:t>
             </a:fld>
@@ -10962,7 +11630,7 @@
           <a:bodyPr/>
           <a:lstStyle/>
           <a:p>
-            <a:fld id="{5400AB79-7F3F-43DC-B715-760288CCAD7B}" type="slidenum">
+            <a:fld id="{CB54B3D1-5BA3-40A8-8017-74A0DF3C7182}" type="slidenum">
               <a:rPr lang="en-US" smtClean="0"/>
               <a:t>20</a:t>
             </a:fld>
@@ -11482,7 +12150,7 @@
           <a:bodyPr/>
           <a:lstStyle/>
           <a:p>
-            <a:fld id="{6694F731-54AE-4367-BAA0-6C61552ED44A}" type="slidenum">
+            <a:fld id="{3DC31DEB-C161-48EB-8EC4-D4D18487B0EB}" type="slidenum">
               <a:rPr lang="en-US" smtClean="0"/>
               <a:t>21</a:t>
             </a:fld>
@@ -12051,7 +12719,7 @@
           <a:bodyPr/>
           <a:lstStyle/>
           <a:p>
-            <a:fld id="{E069A349-9642-4DC6-8ABF-F4AD12353ACB}" type="slidenum">
+            <a:fld id="{BBD7B01D-2451-459F-B1A1-0BB2DA8CD569}" type="slidenum">
               <a:rPr lang="en-US" smtClean="0"/>
               <a:t>22</a:t>
             </a:fld>
@@ -12187,7 +12855,7 @@
           <a:bodyPr/>
           <a:lstStyle/>
           <a:p>
-            <a:fld id="{2D6C24E8-0A3B-4ED0-BD65-7F4922DD3E32}" type="slidenum">
+            <a:fld id="{B27BF211-A452-4B62-B65D-7ABF1FF8B2F5}" type="slidenum">
               <a:rPr lang="en-US" smtClean="0"/>
               <a:t>23</a:t>
             </a:fld>
@@ -12865,7 +13533,7 @@
           <a:bodyPr/>
           <a:lstStyle/>
           <a:p>
-            <a:fld id="{77A5FE4F-FC69-42DD-8420-00AF6742DA68}" type="slidenum">
+            <a:fld id="{6DD32251-42D1-4E05-B955-B2D4D97C7069}" type="slidenum">
               <a:rPr lang="en-US" smtClean="0"/>
               <a:t>24</a:t>
             </a:fld>
@@ -13006,7 +13674,7 @@
           <a:bodyPr/>
           <a:lstStyle/>
           <a:p>
-            <a:fld id="{84EFAC54-8A7A-4607-BC7D-B56896E6742A}" type="slidenum">
+            <a:fld id="{5CEC7D30-3F3A-40A5-AB25-FC380CDCDC59}" type="slidenum">
               <a:rPr lang="en-US" smtClean="0"/>
               <a:t>25</a:t>
             </a:fld>
@@ -13193,7 +13861,7 @@
           <a:bodyPr/>
           <a:lstStyle/>
           <a:p>
-            <a:fld id="{AB10F66C-D6D8-4831-9A3B-2E7EBE8B62BA}" type="slidenum">
+            <a:fld id="{9D5CC310-9C8D-49B0-9A1E-6DB1095504DF}" type="slidenum">
               <a:rPr lang="en-US" smtClean="0"/>
               <a:t>26</a:t>
             </a:fld>
@@ -13610,7 +14278,7 @@
           <a:bodyPr/>
           <a:lstStyle/>
           <a:p>
-            <a:fld id="{2CCF5E84-7CC0-4983-84B8-14B4F82436A7}" type="slidenum">
+            <a:fld id="{5853B7DD-E055-4162-94C7-77FA73E23512}" type="slidenum">
               <a:rPr lang="en-US" smtClean="0"/>
               <a:t>27</a:t>
             </a:fld>
@@ -13873,7 +14541,7 @@
           <a:bodyPr/>
           <a:lstStyle/>
           <a:p>
-            <a:fld id="{F718CFC3-0E9F-4F3F-A626-9796646D4B80}" type="slidenum">
+            <a:fld id="{6A1DACA4-9A95-4C77-B245-2C307F8CACFD}" type="slidenum">
               <a:rPr lang="en-US" smtClean="0"/>
               <a:t>28</a:t>
             </a:fld>
@@ -14108,7 +14776,7 @@
           <a:bodyPr/>
           <a:lstStyle/>
           <a:p>
-            <a:fld id="{9508796C-4921-4273-A860-D14FA7F59B54}" type="slidenum">
+            <a:fld id="{F164AA00-212F-409D-8EDE-8F6B572B597D}" type="slidenum">
               <a:rPr lang="en-US" smtClean="0"/>
               <a:t>29</a:t>
             </a:fld>
@@ -14347,7 +15015,7 @@
           <a:bodyPr/>
           <a:lstStyle/>
           <a:p>
-            <a:fld id="{86525ABA-B18D-4AD9-A332-72D96EBDB552}" type="slidenum">
+            <a:fld id="{6A358935-6B48-4518-B358-4C99ECF38DBC}" type="slidenum">
               <a:rPr lang="en-US" smtClean="0"/>
               <a:t>3</a:t>
             </a:fld>
@@ -14830,7 +15498,7 @@
           <a:bodyPr/>
           <a:lstStyle/>
           <a:p>
-            <a:fld id="{ADE09B36-C754-4D72-82AE-D181A4FF82B9}" type="slidenum">
+            <a:fld id="{AFA6771E-93A8-4AA7-A54D-D336B382D315}" type="slidenum">
               <a:rPr lang="en-US" smtClean="0"/>
               <a:t>30</a:t>
             </a:fld>
@@ -15210,6 +15878,4098 @@
                 </a:solidFill>
               </a:rPr>
               <a:t>Consequential knowledge migrates to where future work inherits it.</a:t>
+            </a:r>
+          </a:p>
+        </p:txBody>
+      </p:sp>
+    </p:spTree>
+  </p:cSld>
+  <p:clrMapOvr>
+    <a:masterClrMapping/>
+  </p:clrMapOvr>
+</p:sld>
+</file>
+
+<file path=ppt/slides/slide31.xml><?xml version="1.0" encoding="utf-8"?>
+<p:sld xmlns:a="http://schemas.openxmlformats.org/drawingml/2006/main" xmlns:p="http://schemas.openxmlformats.org/presentationml/2006/main" xmlns:r="http://schemas.openxmlformats.org/officeDocument/2006/relationships">
+  <p:cSld>
+    <p:spTree>
+      <p:nvGrpSpPr>
+        <p:cNvPr id="1" name=""/>
+        <p:cNvGrpSpPr/>
+        <p:nvPr/>
+      </p:nvGrpSpPr>
+      <p:grpSpPr/>
+      <p:sp>
+        <p:nvSpPr>
+          <p:cNvPr id="2" name="Title 1"/>
+          <p:cNvSpPr>
+            <a:spLocks noGrp="1"/>
+          </p:cNvSpPr>
+          <p:nvPr>
+            <p:ph type="title"/>
+          </p:nvPr>
+        </p:nvSpPr>
+        <p:spPr>
+          <a:xfrm>
+            <a:off x="685800" y="1700784"/>
+            <a:ext cx="7772400" cy="1508760"/>
+          </a:xfrm>
+        </p:spPr>
+        <p:txBody>
+          <a:bodyPr/>
+          <a:lstStyle/>
+          <a:p>
+            <a:pPr algn="ctr"/>
+            <a:r>
+              <a:rPr sz="4000" b="0" i="0">
+                <a:solidFill>
+                  <a:srgbClr val="000000"/>
+                </a:solidFill>
+              </a:rPr>
+              <a:t>Make the organization harder to surprise the same way twice</a:t>
+            </a:r>
+          </a:p>
+        </p:txBody>
+      </p:sp>
+      <p:sp>
+        <p:nvSpPr>
+          <p:cNvPr id="900" name="Slide Number Placeholder 900"/>
+          <p:cNvSpPr>
+            <a:spLocks noGrp="1"/>
+          </p:cNvSpPr>
+          <p:nvPr>
+            <p:ph type="sldNum" sz="quarter" idx="4"/>
+          </p:nvPr>
+        </p:nvSpPr>
+        <p:spPr/>
+        <p:txBody>
+          <a:bodyPr/>
+          <a:lstStyle/>
+          <a:p>
+            <a:fld id="{7288240E-6A77-4EF8-962D-68D6FAD0FBF7}" type="slidenum">
+              <a:rPr lang="en-US" smtClean="0"/>
+              <a:t>31</a:t>
+            </a:fld>
+            <a:endParaRPr lang="en-US"/>
+          </a:p>
+        </p:txBody>
+      </p:sp>
+      <p:sp>
+        <p:nvSpPr>
+          <p:cNvPr id="901" name="SectionLabel"/>
+          <p:cNvSpPr txBox="1"/>
+          <p:nvPr/>
+        </p:nvSpPr>
+        <p:spPr>
+          <a:xfrm>
+            <a:off x="685800" y="1243584"/>
+            <a:ext cx="7772400" cy="365760"/>
+          </a:xfrm>
+          <a:prstGeom prst="rect">
+            <a:avLst/>
+          </a:prstGeom>
+          <a:noFill/>
+        </p:spPr>
+        <p:txBody>
+          <a:bodyPr wrap="square" anchor="ctr" lIns="27432" rIns="27432" tIns="22860" bIns="22860">
+            <a:spAutoFit/>
+          </a:bodyPr>
+          <a:lstStyle/>
+          <a:p>
+            <a:pPr algn="ctr"/>
+            <a:r>
+              <a:rPr sz="2000" b="1" i="0">
+                <a:solidFill>
+                  <a:srgbClr val="8E6F3E"/>
+                </a:solidFill>
+              </a:rPr>
+              <a:t>SECTION 4</a:t>
+            </a:r>
+          </a:p>
+        </p:txBody>
+      </p:sp>
+      <p:sp>
+        <p:nvSpPr>
+          <p:cNvPr id="902" name="Question"/>
+          <p:cNvSpPr txBox="1"/>
+          <p:nvPr/>
+        </p:nvSpPr>
+        <p:spPr>
+          <a:xfrm>
+            <a:off x="685800" y="3319272"/>
+            <a:ext cx="7772400" cy="475488"/>
+          </a:xfrm>
+          <a:prstGeom prst="rect">
+            <a:avLst/>
+          </a:prstGeom>
+          <a:noFill/>
+        </p:spPr>
+        <p:txBody>
+          <a:bodyPr wrap="square" anchor="ctr" lIns="27432" rIns="27432" tIns="22860" bIns="22860">
+            <a:spAutoFit/>
+          </a:bodyPr>
+          <a:lstStyle/>
+          <a:p>
+            <a:pPr algn="ctr"/>
+            <a:r>
+              <a:rPr sz="2400" b="0" i="0">
+                <a:solidFill>
+                  <a:srgbClr val="5C4826"/>
+                </a:solidFill>
+              </a:rPr>
+              <a:t>How does a lesson become structure?</a:t>
+            </a:r>
+          </a:p>
+        </p:txBody>
+      </p:sp>
+      <p:sp>
+        <p:nvSpPr>
+          <p:cNvPr id="903" name="Rule"/>
+          <p:cNvSpPr/>
+          <p:nvPr/>
+        </p:nvSpPr>
+        <p:spPr>
+          <a:xfrm>
+            <a:off x="3429000" y="4105656"/>
+            <a:ext cx="2286000" cy="51206"/>
+          </a:xfrm>
+          <a:prstGeom prst="rect">
+            <a:avLst/>
+          </a:prstGeom>
+          <a:solidFill>
+            <a:srgbClr val="8E6F3E"/>
+          </a:solidFill>
+          <a:ln>
+            <a:noFill/>
+          </a:ln>
+          <a:effectLst/>
+        </p:spPr>
+        <p:style>
+          <a:lnRef idx="1">
+            <a:schemeClr val="accent1"/>
+          </a:lnRef>
+          <a:fillRef idx="3">
+            <a:schemeClr val="accent1"/>
+          </a:fillRef>
+          <a:effectRef idx="2">
+            <a:schemeClr val="accent1"/>
+          </a:effectRef>
+          <a:fontRef idx="minor">
+            <a:schemeClr val="lt1"/>
+          </a:fontRef>
+        </p:style>
+        <p:txBody>
+          <a:bodyPr rtlCol="0" anchor="ctr" wrap="square" lIns="27432" rIns="27432" tIns="22860" bIns="22860"/>
+          <a:lstStyle/>
+          <a:p>
+            <a:pPr algn="ctr"/>
+            <a:r>
+              <a:rPr sz="2000" b="0" i="0">
+                <a:solidFill>
+                  <a:srgbClr val="5C4826"/>
+                </a:solidFill>
+              </a:rPr>
+              <a:t/>
+            </a:r>
+          </a:p>
+        </p:txBody>
+      </p:sp>
+    </p:spTree>
+  </p:cSld>
+  <p:clrMapOvr>
+    <a:masterClrMapping/>
+  </p:clrMapOvr>
+</p:sld>
+</file>
+
+<file path=ppt/slides/slide32.xml><?xml version="1.0" encoding="utf-8"?>
+<p:sld xmlns:a="http://schemas.openxmlformats.org/drawingml/2006/main" xmlns:p="http://schemas.openxmlformats.org/presentationml/2006/main" xmlns:r="http://schemas.openxmlformats.org/officeDocument/2006/relationships">
+  <p:cSld>
+    <p:spTree>
+      <p:nvGrpSpPr>
+        <p:cNvPr id="1" name=""/>
+        <p:cNvGrpSpPr/>
+        <p:nvPr/>
+      </p:nvGrpSpPr>
+      <p:grpSpPr/>
+      <p:sp>
+        <p:nvSpPr>
+          <p:cNvPr id="3" name="Title 2"/>
+          <p:cNvSpPr>
+            <a:spLocks noGrp="1"/>
+          </p:cNvSpPr>
+          <p:nvPr>
+            <p:ph type="title"/>
+          </p:nvPr>
+        </p:nvSpPr>
+        <p:spPr/>
+        <p:txBody>
+          <a:bodyPr/>
+          <a:lstStyle/>
+          <a:p>
+            <a:r>
+              <a:rPr sz="2400" b="0" i="0">
+                <a:solidFill>
+                  <a:srgbClr val="000000"/>
+                </a:solidFill>
+              </a:rPr>
+              <a:t>Remembering is the weakest response</a:t>
+            </a:r>
+          </a:p>
+        </p:txBody>
+      </p:sp>
+      <p:sp>
+        <p:nvSpPr>
+          <p:cNvPr id="900" name="Slide Number Placeholder 900"/>
+          <p:cNvSpPr>
+            <a:spLocks noGrp="1"/>
+          </p:cNvSpPr>
+          <p:nvPr>
+            <p:ph type="sldNum" sz="quarter" idx="4"/>
+          </p:nvPr>
+        </p:nvSpPr>
+        <p:spPr/>
+        <p:txBody>
+          <a:bodyPr/>
+          <a:lstStyle/>
+          <a:p>
+            <a:fld id="{B1FABF6A-C69A-47A3-8221-3F34D9E54C93}" type="slidenum">
+              <a:rPr lang="en-US" smtClean="0"/>
+              <a:t>32</a:t>
+            </a:fld>
+            <a:endParaRPr lang="en-US"/>
+          </a:p>
+        </p:txBody>
+      </p:sp>
+      <p:sp>
+        <p:nvSpPr>
+          <p:cNvPr id="901" name="Card"/>
+          <p:cNvSpPr/>
+          <p:nvPr/>
+        </p:nvSpPr>
+        <p:spPr>
+          <a:xfrm>
+            <a:off x="2377440" y="1143000"/>
+            <a:ext cx="3657600" cy="548640"/>
+          </a:xfrm>
+          <a:prstGeom prst="rect">
+            <a:avLst/>
+          </a:prstGeom>
+          <a:solidFill>
+            <a:srgbClr val="F5F1E8"/>
+          </a:solidFill>
+          <a:ln w="12700">
+            <a:solidFill>
+              <a:srgbClr val="C9B991"/>
+            </a:solidFill>
+          </a:ln>
+          <a:effectLst/>
+        </p:spPr>
+        <p:style>
+          <a:lnRef idx="1">
+            <a:schemeClr val="accent1"/>
+          </a:lnRef>
+          <a:fillRef idx="3">
+            <a:schemeClr val="accent1"/>
+          </a:fillRef>
+          <a:effectRef idx="2">
+            <a:schemeClr val="accent1"/>
+          </a:effectRef>
+          <a:fontRef idx="minor">
+            <a:schemeClr val="lt1"/>
+          </a:fontRef>
+        </p:style>
+        <p:txBody>
+          <a:bodyPr rtlCol="0" anchor="ctr" wrap="square" lIns="27432" rIns="27432" tIns="22860" bIns="22860"/>
+          <a:lstStyle/>
+          <a:p>
+            <a:pPr algn="ctr"/>
+            <a:r>
+              <a:rPr sz="2000" b="1" i="0">
+                <a:solidFill>
+                  <a:srgbClr val="5C4826"/>
+                </a:solidFill>
+              </a:rPr>
+              <a:t>“Be careful next time”</a:t>
+            </a:r>
+          </a:p>
+        </p:txBody>
+      </p:sp>
+      <p:cxnSp>
+        <p:nvCxnSpPr>
+          <p:cNvPr id="902" name="Connector 901"/>
+          <p:cNvCxnSpPr/>
+          <p:nvPr/>
+        </p:nvCxnSpPr>
+        <p:spPr>
+          <a:xfrm>
+            <a:off x="4206240" y="1691640"/>
+            <a:ext cx="0" cy="292608"/>
+          </a:xfrm>
+          <a:prstGeom prst="line">
+            <a:avLst/>
+          </a:prstGeom>
+          <a:ln w="19050">
+            <a:solidFill>
+              <a:srgbClr val="8E6F3E"/>
+            </a:solidFill>
+            <a:tailEnd type="triangle"/>
+          </a:ln>
+        </p:spPr>
+        <p:style>
+          <a:lnRef idx="2">
+            <a:schemeClr val="accent1"/>
+          </a:lnRef>
+          <a:fillRef idx="0">
+            <a:schemeClr val="accent1"/>
+          </a:fillRef>
+          <a:effectRef idx="1">
+            <a:schemeClr val="accent1"/>
+          </a:effectRef>
+          <a:fontRef idx="minor">
+            <a:schemeClr val="tx1"/>
+          </a:fontRef>
+        </p:style>
+      </p:cxnSp>
+      <p:sp>
+        <p:nvSpPr>
+          <p:cNvPr id="903" name="Block"/>
+          <p:cNvSpPr/>
+          <p:nvPr/>
+        </p:nvSpPr>
+        <p:spPr>
+          <a:xfrm>
+            <a:off x="2377440" y="1984248"/>
+            <a:ext cx="3657600" cy="548640"/>
+          </a:xfrm>
+          <a:prstGeom prst="rect">
+            <a:avLst/>
+          </a:prstGeom>
+          <a:solidFill>
+            <a:srgbClr val="8E6F3E"/>
+          </a:solidFill>
+          <a:ln>
+            <a:noFill/>
+          </a:ln>
+          <a:effectLst/>
+        </p:spPr>
+        <p:style>
+          <a:lnRef idx="1">
+            <a:schemeClr val="accent1"/>
+          </a:lnRef>
+          <a:fillRef idx="3">
+            <a:schemeClr val="accent1"/>
+          </a:fillRef>
+          <a:effectRef idx="2">
+            <a:schemeClr val="accent1"/>
+          </a:effectRef>
+          <a:fontRef idx="minor">
+            <a:schemeClr val="lt1"/>
+          </a:fontRef>
+        </p:style>
+        <p:txBody>
+          <a:bodyPr rtlCol="0" anchor="ctr" wrap="square" lIns="27432" rIns="27432" tIns="22860" bIns="22860"/>
+          <a:lstStyle/>
+          <a:p>
+            <a:pPr algn="ctr"/>
+            <a:r>
+              <a:rPr sz="2000" b="1" i="0">
+                <a:solidFill>
+                  <a:srgbClr val="FFFFFF"/>
+                </a:solidFill>
+              </a:rPr>
+              <a:t>documentation</a:t>
+            </a:r>
+          </a:p>
+        </p:txBody>
+      </p:sp>
+      <p:cxnSp>
+        <p:nvCxnSpPr>
+          <p:cNvPr id="904" name="Connector 903"/>
+          <p:cNvCxnSpPr/>
+          <p:nvPr/>
+        </p:nvCxnSpPr>
+        <p:spPr>
+          <a:xfrm>
+            <a:off x="4206240" y="2532888"/>
+            <a:ext cx="0" cy="292608"/>
+          </a:xfrm>
+          <a:prstGeom prst="line">
+            <a:avLst/>
+          </a:prstGeom>
+          <a:ln w="19050">
+            <a:solidFill>
+              <a:srgbClr val="8E6F3E"/>
+            </a:solidFill>
+            <a:tailEnd type="triangle"/>
+          </a:ln>
+        </p:spPr>
+        <p:style>
+          <a:lnRef idx="2">
+            <a:schemeClr val="accent1"/>
+          </a:lnRef>
+          <a:fillRef idx="0">
+            <a:schemeClr val="accent1"/>
+          </a:fillRef>
+          <a:effectRef idx="1">
+            <a:schemeClr val="accent1"/>
+          </a:effectRef>
+          <a:fontRef idx="minor">
+            <a:schemeClr val="tx1"/>
+          </a:fontRef>
+        </p:style>
+      </p:cxnSp>
+      <p:sp>
+        <p:nvSpPr>
+          <p:cNvPr id="905" name="Block"/>
+          <p:cNvSpPr/>
+          <p:nvPr/>
+        </p:nvSpPr>
+        <p:spPr>
+          <a:xfrm>
+            <a:off x="2377440" y="2825496"/>
+            <a:ext cx="3657600" cy="548640"/>
+          </a:xfrm>
+          <a:prstGeom prst="rect">
+            <a:avLst/>
+          </a:prstGeom>
+          <a:solidFill>
+            <a:srgbClr val="8E6F3E"/>
+          </a:solidFill>
+          <a:ln>
+            <a:noFill/>
+          </a:ln>
+          <a:effectLst/>
+        </p:spPr>
+        <p:style>
+          <a:lnRef idx="1">
+            <a:schemeClr val="accent1"/>
+          </a:lnRef>
+          <a:fillRef idx="3">
+            <a:schemeClr val="accent1"/>
+          </a:fillRef>
+          <a:effectRef idx="2">
+            <a:schemeClr val="accent1"/>
+          </a:effectRef>
+          <a:fontRef idx="minor">
+            <a:schemeClr val="lt1"/>
+          </a:fontRef>
+        </p:style>
+        <p:txBody>
+          <a:bodyPr rtlCol="0" anchor="ctr" wrap="square" lIns="27432" rIns="27432" tIns="22860" bIns="22860"/>
+          <a:lstStyle/>
+          <a:p>
+            <a:pPr algn="ctr"/>
+            <a:r>
+              <a:rPr sz="2000" b="1" i="0">
+                <a:solidFill>
+                  <a:srgbClr val="FFFFFF"/>
+                </a:solidFill>
+              </a:rPr>
+              <a:t>model</a:t>
+            </a:r>
+          </a:p>
+        </p:txBody>
+      </p:sp>
+      <p:cxnSp>
+        <p:nvCxnSpPr>
+          <p:cNvPr id="906" name="Connector 905"/>
+          <p:cNvCxnSpPr/>
+          <p:nvPr/>
+        </p:nvCxnSpPr>
+        <p:spPr>
+          <a:xfrm>
+            <a:off x="4206240" y="3374136"/>
+            <a:ext cx="0" cy="292608"/>
+          </a:xfrm>
+          <a:prstGeom prst="line">
+            <a:avLst/>
+          </a:prstGeom>
+          <a:ln w="19050">
+            <a:solidFill>
+              <a:srgbClr val="8E6F3E"/>
+            </a:solidFill>
+            <a:tailEnd type="triangle"/>
+          </a:ln>
+        </p:spPr>
+        <p:style>
+          <a:lnRef idx="2">
+            <a:schemeClr val="accent1"/>
+          </a:lnRef>
+          <a:fillRef idx="0">
+            <a:schemeClr val="accent1"/>
+          </a:fillRef>
+          <a:effectRef idx="1">
+            <a:schemeClr val="accent1"/>
+          </a:effectRef>
+          <a:fontRef idx="minor">
+            <a:schemeClr val="tx1"/>
+          </a:fontRef>
+        </p:style>
+      </p:cxnSp>
+      <p:sp>
+        <p:nvSpPr>
+          <p:cNvPr id="907" name="Block"/>
+          <p:cNvSpPr/>
+          <p:nvPr/>
+        </p:nvSpPr>
+        <p:spPr>
+          <a:xfrm>
+            <a:off x="2377440" y="3666744"/>
+            <a:ext cx="3657600" cy="548640"/>
+          </a:xfrm>
+          <a:prstGeom prst="rect">
+            <a:avLst/>
+          </a:prstGeom>
+          <a:solidFill>
+            <a:srgbClr val="8E6F3E"/>
+          </a:solidFill>
+          <a:ln>
+            <a:noFill/>
+          </a:ln>
+          <a:effectLst/>
+        </p:spPr>
+        <p:style>
+          <a:lnRef idx="1">
+            <a:schemeClr val="accent1"/>
+          </a:lnRef>
+          <a:fillRef idx="3">
+            <a:schemeClr val="accent1"/>
+          </a:fillRef>
+          <a:effectRef idx="2">
+            <a:schemeClr val="accent1"/>
+          </a:effectRef>
+          <a:fontRef idx="minor">
+            <a:schemeClr val="lt1"/>
+          </a:fontRef>
+        </p:style>
+        <p:txBody>
+          <a:bodyPr rtlCol="0" anchor="ctr" wrap="square" lIns="27432" rIns="27432" tIns="22860" bIns="22860"/>
+          <a:lstStyle/>
+          <a:p>
+            <a:pPr algn="ctr"/>
+            <a:r>
+              <a:rPr sz="2000" b="1" i="0">
+                <a:solidFill>
+                  <a:srgbClr val="FFFFFF"/>
+                </a:solidFill>
+              </a:rPr>
+              <a:t>validator</a:t>
+            </a:r>
+          </a:p>
+        </p:txBody>
+      </p:sp>
+      <p:cxnSp>
+        <p:nvCxnSpPr>
+          <p:cNvPr id="908" name="Connector 907"/>
+          <p:cNvCxnSpPr/>
+          <p:nvPr/>
+        </p:nvCxnSpPr>
+        <p:spPr>
+          <a:xfrm>
+            <a:off x="4206240" y="4215383"/>
+            <a:ext cx="0" cy="292609"/>
+          </a:xfrm>
+          <a:prstGeom prst="line">
+            <a:avLst/>
+          </a:prstGeom>
+          <a:ln w="19050">
+            <a:solidFill>
+              <a:srgbClr val="8E6F3E"/>
+            </a:solidFill>
+            <a:tailEnd type="triangle"/>
+          </a:ln>
+        </p:spPr>
+        <p:style>
+          <a:lnRef idx="2">
+            <a:schemeClr val="accent1"/>
+          </a:lnRef>
+          <a:fillRef idx="0">
+            <a:schemeClr val="accent1"/>
+          </a:fillRef>
+          <a:effectRef idx="1">
+            <a:schemeClr val="accent1"/>
+          </a:effectRef>
+          <a:fontRef idx="minor">
+            <a:schemeClr val="tx1"/>
+          </a:fontRef>
+        </p:style>
+      </p:cxnSp>
+      <p:sp>
+        <p:nvSpPr>
+          <p:cNvPr id="909" name="Block"/>
+          <p:cNvSpPr/>
+          <p:nvPr/>
+        </p:nvSpPr>
+        <p:spPr>
+          <a:xfrm>
+            <a:off x="2377440" y="4507992"/>
+            <a:ext cx="3657600" cy="548640"/>
+          </a:xfrm>
+          <a:prstGeom prst="rect">
+            <a:avLst/>
+          </a:prstGeom>
+          <a:solidFill>
+            <a:srgbClr val="8E6F3E"/>
+          </a:solidFill>
+          <a:ln>
+            <a:noFill/>
+          </a:ln>
+          <a:effectLst/>
+        </p:spPr>
+        <p:style>
+          <a:lnRef idx="1">
+            <a:schemeClr val="accent1"/>
+          </a:lnRef>
+          <a:fillRef idx="3">
+            <a:schemeClr val="accent1"/>
+          </a:fillRef>
+          <a:effectRef idx="2">
+            <a:schemeClr val="accent1"/>
+          </a:effectRef>
+          <a:fontRef idx="minor">
+            <a:schemeClr val="lt1"/>
+          </a:fontRef>
+        </p:style>
+        <p:txBody>
+          <a:bodyPr rtlCol="0" anchor="ctr" wrap="square" lIns="27432" rIns="27432" tIns="22860" bIns="22860"/>
+          <a:lstStyle/>
+          <a:p>
+            <a:pPr algn="ctr"/>
+            <a:r>
+              <a:rPr sz="2000" b="1" i="0">
+                <a:solidFill>
+                  <a:srgbClr val="FFFFFF"/>
+                </a:solidFill>
+              </a:rPr>
+              <a:t>constraint / gate</a:t>
+            </a:r>
+          </a:p>
+        </p:txBody>
+      </p:sp>
+      <p:cxnSp>
+        <p:nvCxnSpPr>
+          <p:cNvPr id="910" name="Connector 909"/>
+          <p:cNvCxnSpPr/>
+          <p:nvPr/>
+        </p:nvCxnSpPr>
+        <p:spPr>
+          <a:xfrm>
+            <a:off x="6766560" y="1417320"/>
+            <a:ext cx="0" cy="3383280"/>
+          </a:xfrm>
+          <a:prstGeom prst="line">
+            <a:avLst/>
+          </a:prstGeom>
+          <a:ln w="28575">
+            <a:solidFill>
+              <a:srgbClr val="8E6F3E"/>
+            </a:solidFill>
+            <a:tailEnd type="triangle"/>
+          </a:ln>
+        </p:spPr>
+        <p:style>
+          <a:lnRef idx="2">
+            <a:schemeClr val="accent1"/>
+          </a:lnRef>
+          <a:fillRef idx="0">
+            <a:schemeClr val="accent1"/>
+          </a:fillRef>
+          <a:effectRef idx="1">
+            <a:schemeClr val="accent1"/>
+          </a:effectRef>
+          <a:fontRef idx="minor">
+            <a:schemeClr val="tx1"/>
+          </a:fontRef>
+        </p:style>
+      </p:cxnSp>
+      <p:sp>
+        <p:nvSpPr>
+          <p:cNvPr id="911" name="Label"/>
+          <p:cNvSpPr txBox="1"/>
+          <p:nvPr/>
+        </p:nvSpPr>
+        <p:spPr>
+          <a:xfrm>
+            <a:off x="6949440" y="2286000"/>
+            <a:ext cx="1828800" cy="1645920"/>
+          </a:xfrm>
+          <a:prstGeom prst="rect">
+            <a:avLst/>
+          </a:prstGeom>
+          <a:noFill/>
+        </p:spPr>
+        <p:txBody>
+          <a:bodyPr wrap="square" anchor="t" lIns="27432" rIns="27432" tIns="22860" bIns="22860">
+            <a:spAutoFit/>
+          </a:bodyPr>
+          <a:lstStyle/>
+          <a:p>
+            <a:pPr algn="l"/>
+            <a:r>
+              <a:rPr sz="2000" b="0" i="0">
+                <a:solidFill>
+                  <a:srgbClr val="555960"/>
+                </a:solidFill>
+              </a:rPr>
+              <a:t>increasing ability to affect future action</a:t>
+            </a:r>
+          </a:p>
+        </p:txBody>
+      </p:sp>
+    </p:spTree>
+  </p:cSld>
+  <p:clrMapOvr>
+    <a:masterClrMapping/>
+  </p:clrMapOvr>
+</p:sld>
+</file>
+
+<file path=ppt/slides/slide33.xml><?xml version="1.0" encoding="utf-8"?>
+<p:sld xmlns:a="http://schemas.openxmlformats.org/drawingml/2006/main" xmlns:p="http://schemas.openxmlformats.org/presentationml/2006/main" xmlns:r="http://schemas.openxmlformats.org/officeDocument/2006/relationships">
+  <p:cSld>
+    <p:spTree>
+      <p:nvGrpSpPr>
+        <p:cNvPr id="1" name=""/>
+        <p:cNvGrpSpPr/>
+        <p:nvPr/>
+      </p:nvGrpSpPr>
+      <p:grpSpPr/>
+      <p:sp>
+        <p:nvSpPr>
+          <p:cNvPr id="3" name="Title 2"/>
+          <p:cNvSpPr>
+            <a:spLocks noGrp="1"/>
+          </p:cNvSpPr>
+          <p:nvPr>
+            <p:ph type="title"/>
+          </p:nvPr>
+        </p:nvSpPr>
+        <p:spPr/>
+        <p:txBody>
+          <a:bodyPr/>
+          <a:lstStyle/>
+          <a:p>
+            <a:r>
+              <a:rPr sz="2400" b="0" i="0">
+                <a:solidFill>
+                  <a:srgbClr val="000000"/>
+                </a:solidFill>
+              </a:rPr>
+              <a:t>Move recurring judgment into the environment</a:t>
+            </a:r>
+          </a:p>
+        </p:txBody>
+      </p:sp>
+      <p:sp>
+        <p:nvSpPr>
+          <p:cNvPr id="900" name="Slide Number Placeholder 900"/>
+          <p:cNvSpPr>
+            <a:spLocks noGrp="1"/>
+          </p:cNvSpPr>
+          <p:nvPr>
+            <p:ph type="sldNum" sz="quarter" idx="4"/>
+          </p:nvPr>
+        </p:nvSpPr>
+        <p:spPr/>
+        <p:txBody>
+          <a:bodyPr/>
+          <a:lstStyle/>
+          <a:p>
+            <a:fld id="{54DE72B0-FFEB-4C83-B4BD-F25961BEDFCA}" type="slidenum">
+              <a:rPr lang="en-US" smtClean="0"/>
+              <a:t>33</a:t>
+            </a:fld>
+            <a:endParaRPr lang="en-US"/>
+          </a:p>
+        </p:txBody>
+      </p:sp>
+      <p:sp>
+        <p:nvSpPr>
+          <p:cNvPr id="901" name="Block"/>
+          <p:cNvSpPr/>
+          <p:nvPr/>
+        </p:nvSpPr>
+        <p:spPr>
+          <a:xfrm>
+            <a:off x="2606040" y="1097280"/>
+            <a:ext cx="3931920" cy="548640"/>
+          </a:xfrm>
+          <a:prstGeom prst="rect">
+            <a:avLst/>
+          </a:prstGeom>
+          <a:solidFill>
+            <a:srgbClr val="8E6F3E"/>
+          </a:solidFill>
+          <a:ln>
+            <a:noFill/>
+          </a:ln>
+          <a:effectLst/>
+        </p:spPr>
+        <p:style>
+          <a:lnRef idx="1">
+            <a:schemeClr val="accent1"/>
+          </a:lnRef>
+          <a:fillRef idx="3">
+            <a:schemeClr val="accent1"/>
+          </a:fillRef>
+          <a:effectRef idx="2">
+            <a:schemeClr val="accent1"/>
+          </a:effectRef>
+          <a:fontRef idx="minor">
+            <a:schemeClr val="lt1"/>
+          </a:fontRef>
+        </p:style>
+        <p:txBody>
+          <a:bodyPr rtlCol="0" anchor="ctr" wrap="square" lIns="27432" rIns="27432" tIns="22860" bIns="22860"/>
+          <a:lstStyle/>
+          <a:p>
+            <a:pPr algn="ctr"/>
+            <a:r>
+              <a:rPr sz="2000" b="1" i="0">
+                <a:solidFill>
+                  <a:srgbClr val="FFFFFF"/>
+                </a:solidFill>
+              </a:rPr>
+              <a:t>FAILURE</a:t>
+            </a:r>
+          </a:p>
+        </p:txBody>
+      </p:sp>
+      <p:cxnSp>
+        <p:nvCxnSpPr>
+          <p:cNvPr id="902" name="Connector 901"/>
+          <p:cNvCxnSpPr/>
+          <p:nvPr/>
+        </p:nvCxnSpPr>
+        <p:spPr>
+          <a:xfrm>
+            <a:off x="4572000" y="1645919"/>
+            <a:ext cx="0" cy="274321"/>
+          </a:xfrm>
+          <a:prstGeom prst="line">
+            <a:avLst/>
+          </a:prstGeom>
+          <a:ln w="19050">
+            <a:solidFill>
+              <a:srgbClr val="8E6F3E"/>
+            </a:solidFill>
+            <a:tailEnd type="triangle"/>
+          </a:ln>
+        </p:spPr>
+        <p:style>
+          <a:lnRef idx="2">
+            <a:schemeClr val="accent1"/>
+          </a:lnRef>
+          <a:fillRef idx="0">
+            <a:schemeClr val="accent1"/>
+          </a:fillRef>
+          <a:effectRef idx="1">
+            <a:schemeClr val="accent1"/>
+          </a:effectRef>
+          <a:fontRef idx="minor">
+            <a:schemeClr val="tx1"/>
+          </a:fontRef>
+        </p:style>
+      </p:cxnSp>
+      <p:sp>
+        <p:nvSpPr>
+          <p:cNvPr id="903" name="Card"/>
+          <p:cNvSpPr/>
+          <p:nvPr/>
+        </p:nvSpPr>
+        <p:spPr>
+          <a:xfrm>
+            <a:off x="2606040" y="1920240"/>
+            <a:ext cx="3931920" cy="548640"/>
+          </a:xfrm>
+          <a:prstGeom prst="rect">
+            <a:avLst/>
+          </a:prstGeom>
+          <a:solidFill>
+            <a:srgbClr val="F5F1E8"/>
+          </a:solidFill>
+          <a:ln w="12700">
+            <a:solidFill>
+              <a:srgbClr val="C9B991"/>
+            </a:solidFill>
+          </a:ln>
+          <a:effectLst/>
+        </p:spPr>
+        <p:style>
+          <a:lnRef idx="1">
+            <a:schemeClr val="accent1"/>
+          </a:lnRef>
+          <a:fillRef idx="3">
+            <a:schemeClr val="accent1"/>
+          </a:fillRef>
+          <a:effectRef idx="2">
+            <a:schemeClr val="accent1"/>
+          </a:effectRef>
+          <a:fontRef idx="minor">
+            <a:schemeClr val="lt1"/>
+          </a:fontRef>
+        </p:style>
+        <p:txBody>
+          <a:bodyPr rtlCol="0" anchor="ctr" wrap="square" lIns="27432" rIns="27432" tIns="22860" bIns="22860"/>
+          <a:lstStyle/>
+          <a:p>
+            <a:pPr algn="ctr"/>
+            <a:r>
+              <a:rPr sz="2000" b="0" i="1">
+                <a:solidFill>
+                  <a:srgbClr val="5C4826"/>
+                </a:solidFill>
+              </a:rPr>
+              <a:t>“What did we learn?”</a:t>
+            </a:r>
+          </a:p>
+        </p:txBody>
+      </p:sp>
+      <p:cxnSp>
+        <p:nvCxnSpPr>
+          <p:cNvPr id="904" name="Connector 903"/>
+          <p:cNvCxnSpPr/>
+          <p:nvPr/>
+        </p:nvCxnSpPr>
+        <p:spPr>
+          <a:xfrm>
+            <a:off x="4572000" y="2468880"/>
+            <a:ext cx="0" cy="274320"/>
+          </a:xfrm>
+          <a:prstGeom prst="line">
+            <a:avLst/>
+          </a:prstGeom>
+          <a:ln w="19050">
+            <a:solidFill>
+              <a:srgbClr val="8E6F3E"/>
+            </a:solidFill>
+            <a:tailEnd type="triangle"/>
+          </a:ln>
+        </p:spPr>
+        <p:style>
+          <a:lnRef idx="2">
+            <a:schemeClr val="accent1"/>
+          </a:lnRef>
+          <a:fillRef idx="0">
+            <a:schemeClr val="accent1"/>
+          </a:fillRef>
+          <a:effectRef idx="1">
+            <a:schemeClr val="accent1"/>
+          </a:effectRef>
+          <a:fontRef idx="minor">
+            <a:schemeClr val="tx1"/>
+          </a:fontRef>
+        </p:style>
+      </p:cxnSp>
+      <p:sp>
+        <p:nvSpPr>
+          <p:cNvPr id="905" name="Block"/>
+          <p:cNvSpPr/>
+          <p:nvPr/>
+        </p:nvSpPr>
+        <p:spPr>
+          <a:xfrm>
+            <a:off x="2606040" y="2743200"/>
+            <a:ext cx="3931920" cy="548640"/>
+          </a:xfrm>
+          <a:prstGeom prst="rect">
+            <a:avLst/>
+          </a:prstGeom>
+          <a:solidFill>
+            <a:srgbClr val="8E6F3E"/>
+          </a:solidFill>
+          <a:ln>
+            <a:noFill/>
+          </a:ln>
+          <a:effectLst/>
+        </p:spPr>
+        <p:style>
+          <a:lnRef idx="1">
+            <a:schemeClr val="accent1"/>
+          </a:lnRef>
+          <a:fillRef idx="3">
+            <a:schemeClr val="accent1"/>
+          </a:fillRef>
+          <a:effectRef idx="2">
+            <a:schemeClr val="accent1"/>
+          </a:effectRef>
+          <a:fontRef idx="minor">
+            <a:schemeClr val="lt1"/>
+          </a:fontRef>
+        </p:style>
+        <p:txBody>
+          <a:bodyPr rtlCol="0" anchor="ctr" wrap="square" lIns="27432" rIns="27432" tIns="22860" bIns="22860"/>
+          <a:lstStyle/>
+          <a:p>
+            <a:pPr algn="ctr"/>
+            <a:r>
+              <a:rPr sz="2000" b="1" i="0">
+                <a:solidFill>
+                  <a:srgbClr val="FFFFFF"/>
+                </a:solidFill>
+              </a:rPr>
+              <a:t>RECURRING JUDGMENT</a:t>
+            </a:r>
+          </a:p>
+        </p:txBody>
+      </p:sp>
+      <p:cxnSp>
+        <p:nvCxnSpPr>
+          <p:cNvPr id="906" name="Connector 905"/>
+          <p:cNvCxnSpPr/>
+          <p:nvPr/>
+        </p:nvCxnSpPr>
+        <p:spPr>
+          <a:xfrm>
+            <a:off x="4572000" y="3291840"/>
+            <a:ext cx="0" cy="274320"/>
+          </a:xfrm>
+          <a:prstGeom prst="line">
+            <a:avLst/>
+          </a:prstGeom>
+          <a:ln w="19050">
+            <a:solidFill>
+              <a:srgbClr val="8E6F3E"/>
+            </a:solidFill>
+            <a:tailEnd type="triangle"/>
+          </a:ln>
+        </p:spPr>
+        <p:style>
+          <a:lnRef idx="2">
+            <a:schemeClr val="accent1"/>
+          </a:lnRef>
+          <a:fillRef idx="0">
+            <a:schemeClr val="accent1"/>
+          </a:fillRef>
+          <a:effectRef idx="1">
+            <a:schemeClr val="accent1"/>
+          </a:effectRef>
+          <a:fontRef idx="minor">
+            <a:schemeClr val="tx1"/>
+          </a:fontRef>
+        </p:style>
+      </p:cxnSp>
+      <p:sp>
+        <p:nvSpPr>
+          <p:cNvPr id="907" name="Card"/>
+          <p:cNvSpPr/>
+          <p:nvPr/>
+        </p:nvSpPr>
+        <p:spPr>
+          <a:xfrm>
+            <a:off x="2606040" y="3566160"/>
+            <a:ext cx="3931920" cy="548640"/>
+          </a:xfrm>
+          <a:prstGeom prst="rect">
+            <a:avLst/>
+          </a:prstGeom>
+          <a:solidFill>
+            <a:srgbClr val="F5F1E8"/>
+          </a:solidFill>
+          <a:ln w="12700">
+            <a:solidFill>
+              <a:srgbClr val="C9B991"/>
+            </a:solidFill>
+          </a:ln>
+          <a:effectLst/>
+        </p:spPr>
+        <p:style>
+          <a:lnRef idx="1">
+            <a:schemeClr val="accent1"/>
+          </a:lnRef>
+          <a:fillRef idx="3">
+            <a:schemeClr val="accent1"/>
+          </a:fillRef>
+          <a:effectRef idx="2">
+            <a:schemeClr val="accent1"/>
+          </a:effectRef>
+          <a:fontRef idx="minor">
+            <a:schemeClr val="lt1"/>
+          </a:fontRef>
+        </p:style>
+        <p:txBody>
+          <a:bodyPr rtlCol="0" anchor="ctr" wrap="square" lIns="27432" rIns="27432" tIns="22860" bIns="22860"/>
+          <a:lstStyle/>
+          <a:p>
+            <a:pPr algn="ctr"/>
+            <a:r>
+              <a:rPr sz="2000" b="0" i="1">
+                <a:solidFill>
+                  <a:srgbClr val="5C4826"/>
+                </a:solidFill>
+              </a:rPr>
+              <a:t>Can it be represented reliably?</a:t>
+            </a:r>
+          </a:p>
+        </p:txBody>
+      </p:sp>
+      <p:cxnSp>
+        <p:nvCxnSpPr>
+          <p:cNvPr id="908" name="Connector 907"/>
+          <p:cNvCxnSpPr/>
+          <p:nvPr/>
+        </p:nvCxnSpPr>
+        <p:spPr>
+          <a:xfrm>
+            <a:off x="4572000" y="4114800"/>
+            <a:ext cx="0" cy="274320"/>
+          </a:xfrm>
+          <a:prstGeom prst="line">
+            <a:avLst/>
+          </a:prstGeom>
+          <a:ln w="19050">
+            <a:solidFill>
+              <a:srgbClr val="8E6F3E"/>
+            </a:solidFill>
+            <a:tailEnd type="triangle"/>
+          </a:ln>
+        </p:spPr>
+        <p:style>
+          <a:lnRef idx="2">
+            <a:schemeClr val="accent1"/>
+          </a:lnRef>
+          <a:fillRef idx="0">
+            <a:schemeClr val="accent1"/>
+          </a:fillRef>
+          <a:effectRef idx="1">
+            <a:schemeClr val="accent1"/>
+          </a:effectRef>
+          <a:fontRef idx="minor">
+            <a:schemeClr val="tx1"/>
+          </a:fontRef>
+        </p:style>
+      </p:cxnSp>
+      <p:sp>
+        <p:nvSpPr>
+          <p:cNvPr id="909" name="Block"/>
+          <p:cNvSpPr/>
+          <p:nvPr/>
+        </p:nvSpPr>
+        <p:spPr>
+          <a:xfrm>
+            <a:off x="731520" y="4389120"/>
+            <a:ext cx="1737360" cy="594360"/>
+          </a:xfrm>
+          <a:prstGeom prst="rect">
+            <a:avLst/>
+          </a:prstGeom>
+          <a:solidFill>
+            <a:srgbClr val="8E6F3E"/>
+          </a:solidFill>
+          <a:ln>
+            <a:noFill/>
+          </a:ln>
+          <a:effectLst/>
+        </p:spPr>
+        <p:style>
+          <a:lnRef idx="1">
+            <a:schemeClr val="accent1"/>
+          </a:lnRef>
+          <a:fillRef idx="3">
+            <a:schemeClr val="accent1"/>
+          </a:fillRef>
+          <a:effectRef idx="2">
+            <a:schemeClr val="accent1"/>
+          </a:effectRef>
+          <a:fontRef idx="minor">
+            <a:schemeClr val="lt1"/>
+          </a:fontRef>
+        </p:style>
+        <p:txBody>
+          <a:bodyPr rtlCol="0" anchor="ctr" wrap="square" lIns="27432" rIns="27432" tIns="22860" bIns="22860"/>
+          <a:lstStyle/>
+          <a:p>
+            <a:pPr algn="ctr"/>
+            <a:r>
+              <a:rPr sz="2000" b="1" i="0">
+                <a:solidFill>
+                  <a:srgbClr val="FFFFFF"/>
+                </a:solidFill>
+              </a:rPr>
+              <a:t>MODEL</a:t>
+            </a:r>
+          </a:p>
+        </p:txBody>
+      </p:sp>
+      <p:sp>
+        <p:nvSpPr>
+          <p:cNvPr id="910" name="Block"/>
+          <p:cNvSpPr/>
+          <p:nvPr/>
+        </p:nvSpPr>
+        <p:spPr>
+          <a:xfrm>
+            <a:off x="2743200" y="4389120"/>
+            <a:ext cx="1737360" cy="594360"/>
+          </a:xfrm>
+          <a:prstGeom prst="rect">
+            <a:avLst/>
+          </a:prstGeom>
+          <a:solidFill>
+            <a:srgbClr val="8E6F3E"/>
+          </a:solidFill>
+          <a:ln>
+            <a:noFill/>
+          </a:ln>
+          <a:effectLst/>
+        </p:spPr>
+        <p:style>
+          <a:lnRef idx="1">
+            <a:schemeClr val="accent1"/>
+          </a:lnRef>
+          <a:fillRef idx="3">
+            <a:schemeClr val="accent1"/>
+          </a:fillRef>
+          <a:effectRef idx="2">
+            <a:schemeClr val="accent1"/>
+          </a:effectRef>
+          <a:fontRef idx="minor">
+            <a:schemeClr val="lt1"/>
+          </a:fontRef>
+        </p:style>
+        <p:txBody>
+          <a:bodyPr rtlCol="0" anchor="ctr" wrap="square" lIns="27432" rIns="27432" tIns="22860" bIns="22860"/>
+          <a:lstStyle/>
+          <a:p>
+            <a:pPr algn="ctr"/>
+            <a:r>
+              <a:rPr sz="2000" b="1" i="0">
+                <a:solidFill>
+                  <a:srgbClr val="FFFFFF"/>
+                </a:solidFill>
+              </a:rPr>
+              <a:t>VALIDATOR</a:t>
+            </a:r>
+          </a:p>
+        </p:txBody>
+      </p:sp>
+      <p:sp>
+        <p:nvSpPr>
+          <p:cNvPr id="911" name="Block"/>
+          <p:cNvSpPr/>
+          <p:nvPr/>
+        </p:nvSpPr>
+        <p:spPr>
+          <a:xfrm>
+            <a:off x="4754880" y="4389120"/>
+            <a:ext cx="1737360" cy="594360"/>
+          </a:xfrm>
+          <a:prstGeom prst="rect">
+            <a:avLst/>
+          </a:prstGeom>
+          <a:solidFill>
+            <a:srgbClr val="8E6F3E"/>
+          </a:solidFill>
+          <a:ln>
+            <a:noFill/>
+          </a:ln>
+          <a:effectLst/>
+        </p:spPr>
+        <p:style>
+          <a:lnRef idx="1">
+            <a:schemeClr val="accent1"/>
+          </a:lnRef>
+          <a:fillRef idx="3">
+            <a:schemeClr val="accent1"/>
+          </a:fillRef>
+          <a:effectRef idx="2">
+            <a:schemeClr val="accent1"/>
+          </a:effectRef>
+          <a:fontRef idx="minor">
+            <a:schemeClr val="lt1"/>
+          </a:fontRef>
+        </p:style>
+        <p:txBody>
+          <a:bodyPr rtlCol="0" anchor="ctr" wrap="square" lIns="27432" rIns="27432" tIns="22860" bIns="22860"/>
+          <a:lstStyle/>
+          <a:p>
+            <a:pPr algn="ctr"/>
+            <a:r>
+              <a:rPr sz="2000" b="1" i="0">
+                <a:solidFill>
+                  <a:srgbClr val="FFFFFF"/>
+                </a:solidFill>
+              </a:rPr>
+              <a:t>CONSTRAINT</a:t>
+            </a:r>
+          </a:p>
+        </p:txBody>
+      </p:sp>
+      <p:sp>
+        <p:nvSpPr>
+          <p:cNvPr id="912" name="Block"/>
+          <p:cNvSpPr/>
+          <p:nvPr/>
+        </p:nvSpPr>
+        <p:spPr>
+          <a:xfrm>
+            <a:off x="6766560" y="4389120"/>
+            <a:ext cx="1737360" cy="594360"/>
+          </a:xfrm>
+          <a:prstGeom prst="rect">
+            <a:avLst/>
+          </a:prstGeom>
+          <a:solidFill>
+            <a:srgbClr val="8E6F3E"/>
+          </a:solidFill>
+          <a:ln>
+            <a:noFill/>
+          </a:ln>
+          <a:effectLst/>
+        </p:spPr>
+        <p:style>
+          <a:lnRef idx="1">
+            <a:schemeClr val="accent1"/>
+          </a:lnRef>
+          <a:fillRef idx="3">
+            <a:schemeClr val="accent1"/>
+          </a:fillRef>
+          <a:effectRef idx="2">
+            <a:schemeClr val="accent1"/>
+          </a:effectRef>
+          <a:fontRef idx="minor">
+            <a:schemeClr val="lt1"/>
+          </a:fontRef>
+        </p:style>
+        <p:txBody>
+          <a:bodyPr rtlCol="0" anchor="ctr" wrap="square" lIns="27432" rIns="27432" tIns="22860" bIns="22860"/>
+          <a:lstStyle/>
+          <a:p>
+            <a:pPr algn="ctr"/>
+            <a:r>
+              <a:rPr sz="2000" b="1" i="0">
+                <a:solidFill>
+                  <a:srgbClr val="FFFFFF"/>
+                </a:solidFill>
+              </a:rPr>
+              <a:t>GATE</a:t>
+            </a:r>
+          </a:p>
+        </p:txBody>
+      </p:sp>
+      <p:sp>
+        <p:nvSpPr>
+          <p:cNvPr id="913" name="FooterBand"/>
+          <p:cNvSpPr/>
+          <p:nvPr/>
+        </p:nvSpPr>
+        <p:spPr>
+          <a:xfrm>
+            <a:off x="274320" y="5852159"/>
+            <a:ext cx="8595360" cy="566928"/>
+          </a:xfrm>
+          <a:prstGeom prst="rect">
+            <a:avLst/>
+          </a:prstGeom>
+          <a:solidFill>
+            <a:srgbClr val="8E6F3E"/>
+          </a:solidFill>
+          <a:ln>
+            <a:noFill/>
+          </a:ln>
+          <a:effectLst/>
+        </p:spPr>
+        <p:style>
+          <a:lnRef idx="1">
+            <a:schemeClr val="accent1"/>
+          </a:lnRef>
+          <a:fillRef idx="3">
+            <a:schemeClr val="accent1"/>
+          </a:fillRef>
+          <a:effectRef idx="2">
+            <a:schemeClr val="accent1"/>
+          </a:effectRef>
+          <a:fontRef idx="minor">
+            <a:schemeClr val="lt1"/>
+          </a:fontRef>
+        </p:style>
+        <p:txBody>
+          <a:bodyPr rtlCol="0" anchor="ctr" wrap="square" lIns="27432" rIns="27432" tIns="22860" bIns="22860"/>
+          <a:lstStyle/>
+          <a:p>
+            <a:pPr algn="ctr"/>
+            <a:r>
+              <a:rPr sz="2000" b="1" i="0">
+                <a:solidFill>
+                  <a:srgbClr val="FFFFFF"/>
+                </a:solidFill>
+              </a:rPr>
+              <a:t>MAGE calls this governance conversion.</a:t>
+            </a:r>
+          </a:p>
+        </p:txBody>
+      </p:sp>
+    </p:spTree>
+  </p:cSld>
+  <p:clrMapOvr>
+    <a:masterClrMapping/>
+  </p:clrMapOvr>
+</p:sld>
+</file>
+
+<file path=ppt/slides/slide34.xml><?xml version="1.0" encoding="utf-8"?>
+<p:sld xmlns:a="http://schemas.openxmlformats.org/drawingml/2006/main" xmlns:p="http://schemas.openxmlformats.org/presentationml/2006/main" xmlns:r="http://schemas.openxmlformats.org/officeDocument/2006/relationships">
+  <p:cSld>
+    <p:spTree>
+      <p:nvGrpSpPr>
+        <p:cNvPr id="1" name=""/>
+        <p:cNvGrpSpPr/>
+        <p:nvPr/>
+      </p:nvGrpSpPr>
+      <p:grpSpPr/>
+      <p:sp>
+        <p:nvSpPr>
+          <p:cNvPr id="3" name="Title 2"/>
+          <p:cNvSpPr>
+            <a:spLocks noGrp="1"/>
+          </p:cNvSpPr>
+          <p:nvPr>
+            <p:ph type="title"/>
+          </p:nvPr>
+        </p:nvSpPr>
+        <p:spPr/>
+        <p:txBody>
+          <a:bodyPr/>
+          <a:lstStyle/>
+          <a:p>
+            <a:r>
+              <a:rPr sz="2400" b="0" i="0">
+                <a:solidFill>
+                  <a:srgbClr val="000000"/>
+                </a:solidFill>
+              </a:rPr>
+              <a:t>Volkswagen, one last time</a:t>
+            </a:r>
+          </a:p>
+        </p:txBody>
+      </p:sp>
+      <p:sp>
+        <p:nvSpPr>
+          <p:cNvPr id="900" name="Slide Number Placeholder 900"/>
+          <p:cNvSpPr>
+            <a:spLocks noGrp="1"/>
+          </p:cNvSpPr>
+          <p:nvPr>
+            <p:ph type="sldNum" sz="quarter" idx="4"/>
+          </p:nvPr>
+        </p:nvSpPr>
+        <p:spPr/>
+        <p:txBody>
+          <a:bodyPr/>
+          <a:lstStyle/>
+          <a:p>
+            <a:fld id="{9ABD6463-1069-4796-B206-4858CF08A11C}" type="slidenum">
+              <a:rPr lang="en-US" smtClean="0"/>
+              <a:t>34</a:t>
+            </a:fld>
+            <a:endParaRPr lang="en-US"/>
+          </a:p>
+        </p:txBody>
+      </p:sp>
+      <p:sp>
+        <p:nvSpPr>
+          <p:cNvPr id="901" name="Lead"/>
+          <p:cNvSpPr txBox="1"/>
+          <p:nvPr/>
+        </p:nvSpPr>
+        <p:spPr>
+          <a:xfrm>
+            <a:off x="411480" y="868680"/>
+            <a:ext cx="8321040" cy="914400"/>
+          </a:xfrm>
+          <a:prstGeom prst="rect">
+            <a:avLst/>
+          </a:prstGeom>
+          <a:noFill/>
+        </p:spPr>
+        <p:txBody>
+          <a:bodyPr wrap="square" anchor="t" lIns="27432" rIns="27432" tIns="22860" bIns="22860">
+            <a:spAutoFit/>
+          </a:bodyPr>
+          <a:lstStyle/>
+          <a:p>
+            <a:pPr algn="l"/>
+            <a:r>
+              <a:rPr sz="2000" b="1" i="0">
+                <a:solidFill>
+                  <a:srgbClr val="5C4826"/>
+                </a:solidFill>
+              </a:rPr>
+              <a:t>Return to 2006. </a:t>
+            </a:r>
+            <a:r>
+              <a:rPr sz="2000" b="0" i="0">
+                <a:solidFill>
+                  <a:srgbClr val="555960"/>
+                </a:solidFill>
+              </a:rPr>
+              <a:t>Suppose the compliance obligation had existed not merely as something engineers were expected to remember, or supervisors could override, but in the engineering environment:</a:t>
+            </a:r>
+          </a:p>
+        </p:txBody>
+      </p:sp>
+      <p:sp>
+        <p:nvSpPr>
+          <p:cNvPr id="902" name="Block"/>
+          <p:cNvSpPr/>
+          <p:nvPr/>
+        </p:nvSpPr>
+        <p:spPr>
+          <a:xfrm>
+            <a:off x="2743200" y="1965960"/>
+            <a:ext cx="3657600" cy="548640"/>
+          </a:xfrm>
+          <a:prstGeom prst="rect">
+            <a:avLst/>
+          </a:prstGeom>
+          <a:solidFill>
+            <a:srgbClr val="8E6F3E"/>
+          </a:solidFill>
+          <a:ln>
+            <a:noFill/>
+          </a:ln>
+          <a:effectLst/>
+        </p:spPr>
+        <p:style>
+          <a:lnRef idx="1">
+            <a:schemeClr val="accent1"/>
+          </a:lnRef>
+          <a:fillRef idx="3">
+            <a:schemeClr val="accent1"/>
+          </a:fillRef>
+          <a:effectRef idx="2">
+            <a:schemeClr val="accent1"/>
+          </a:effectRef>
+          <a:fontRef idx="minor">
+            <a:schemeClr val="lt1"/>
+          </a:fontRef>
+        </p:style>
+        <p:txBody>
+          <a:bodyPr rtlCol="0" anchor="ctr" wrap="square" lIns="27432" rIns="27432" tIns="22860" bIns="22860"/>
+          <a:lstStyle/>
+          <a:p>
+            <a:pPr algn="ctr"/>
+            <a:r>
+              <a:rPr sz="2000" b="1" i="0">
+                <a:solidFill>
+                  <a:srgbClr val="FFFFFF"/>
+                </a:solidFill>
+              </a:rPr>
+              <a:t>REGULATORY OBLIGATION</a:t>
+            </a:r>
+          </a:p>
+        </p:txBody>
+      </p:sp>
+      <p:cxnSp>
+        <p:nvCxnSpPr>
+          <p:cNvPr id="903" name="Connector 902"/>
+          <p:cNvCxnSpPr/>
+          <p:nvPr/>
+        </p:nvCxnSpPr>
+        <p:spPr>
+          <a:xfrm>
+            <a:off x="4572000" y="2514600"/>
+            <a:ext cx="0" cy="320039"/>
+          </a:xfrm>
+          <a:prstGeom prst="line">
+            <a:avLst/>
+          </a:prstGeom>
+          <a:ln w="19050">
+            <a:solidFill>
+              <a:srgbClr val="8E6F3E"/>
+            </a:solidFill>
+            <a:tailEnd type="triangle"/>
+          </a:ln>
+        </p:spPr>
+        <p:style>
+          <a:lnRef idx="2">
+            <a:schemeClr val="accent1"/>
+          </a:lnRef>
+          <a:fillRef idx="0">
+            <a:schemeClr val="accent1"/>
+          </a:fillRef>
+          <a:effectRef idx="1">
+            <a:schemeClr val="accent1"/>
+          </a:effectRef>
+          <a:fontRef idx="minor">
+            <a:schemeClr val="tx1"/>
+          </a:fontRef>
+        </p:style>
+      </p:cxnSp>
+      <p:sp>
+        <p:nvSpPr>
+          <p:cNvPr id="904" name="Block"/>
+          <p:cNvSpPr/>
+          <p:nvPr/>
+        </p:nvSpPr>
+        <p:spPr>
+          <a:xfrm>
+            <a:off x="2743200" y="2834639"/>
+            <a:ext cx="3657600" cy="548640"/>
+          </a:xfrm>
+          <a:prstGeom prst="rect">
+            <a:avLst/>
+          </a:prstGeom>
+          <a:solidFill>
+            <a:srgbClr val="8E6F3E"/>
+          </a:solidFill>
+          <a:ln>
+            <a:noFill/>
+          </a:ln>
+          <a:effectLst/>
+        </p:spPr>
+        <p:style>
+          <a:lnRef idx="1">
+            <a:schemeClr val="accent1"/>
+          </a:lnRef>
+          <a:fillRef idx="3">
+            <a:schemeClr val="accent1"/>
+          </a:fillRef>
+          <a:effectRef idx="2">
+            <a:schemeClr val="accent1"/>
+          </a:effectRef>
+          <a:fontRef idx="minor">
+            <a:schemeClr val="lt1"/>
+          </a:fontRef>
+        </p:style>
+        <p:txBody>
+          <a:bodyPr rtlCol="0" anchor="ctr" wrap="square" lIns="27432" rIns="27432" tIns="22860" bIns="22860"/>
+          <a:lstStyle/>
+          <a:p>
+            <a:pPr algn="ctr"/>
+            <a:r>
+              <a:rPr sz="2000" b="1" i="0">
+                <a:solidFill>
+                  <a:srgbClr val="FFFFFF"/>
+                </a:solidFill>
+              </a:rPr>
+              <a:t>ENGINEERING MODEL</a:t>
+            </a:r>
+          </a:p>
+        </p:txBody>
+      </p:sp>
+      <p:cxnSp>
+        <p:nvCxnSpPr>
+          <p:cNvPr id="905" name="Connector 904"/>
+          <p:cNvCxnSpPr/>
+          <p:nvPr/>
+        </p:nvCxnSpPr>
+        <p:spPr>
+          <a:xfrm>
+            <a:off x="4572000" y="3383279"/>
+            <a:ext cx="0" cy="320041"/>
+          </a:xfrm>
+          <a:prstGeom prst="line">
+            <a:avLst/>
+          </a:prstGeom>
+          <a:ln w="19050">
+            <a:solidFill>
+              <a:srgbClr val="8E6F3E"/>
+            </a:solidFill>
+            <a:tailEnd type="triangle"/>
+          </a:ln>
+        </p:spPr>
+        <p:style>
+          <a:lnRef idx="2">
+            <a:schemeClr val="accent1"/>
+          </a:lnRef>
+          <a:fillRef idx="0">
+            <a:schemeClr val="accent1"/>
+          </a:fillRef>
+          <a:effectRef idx="1">
+            <a:schemeClr val="accent1"/>
+          </a:effectRef>
+          <a:fontRef idx="minor">
+            <a:schemeClr val="tx1"/>
+          </a:fontRef>
+        </p:style>
+      </p:cxnSp>
+      <p:sp>
+        <p:nvSpPr>
+          <p:cNvPr id="906" name="Block"/>
+          <p:cNvSpPr/>
+          <p:nvPr/>
+        </p:nvSpPr>
+        <p:spPr>
+          <a:xfrm>
+            <a:off x="2743200" y="3703320"/>
+            <a:ext cx="3657600" cy="548640"/>
+          </a:xfrm>
+          <a:prstGeom prst="rect">
+            <a:avLst/>
+          </a:prstGeom>
+          <a:solidFill>
+            <a:srgbClr val="8E6F3E"/>
+          </a:solidFill>
+          <a:ln>
+            <a:noFill/>
+          </a:ln>
+          <a:effectLst/>
+        </p:spPr>
+        <p:style>
+          <a:lnRef idx="1">
+            <a:schemeClr val="accent1"/>
+          </a:lnRef>
+          <a:fillRef idx="3">
+            <a:schemeClr val="accent1"/>
+          </a:fillRef>
+          <a:effectRef idx="2">
+            <a:schemeClr val="accent1"/>
+          </a:effectRef>
+          <a:fontRef idx="minor">
+            <a:schemeClr val="lt1"/>
+          </a:fontRef>
+        </p:style>
+        <p:txBody>
+          <a:bodyPr rtlCol="0" anchor="ctr" wrap="square" lIns="27432" rIns="27432" tIns="22860" bIns="22860"/>
+          <a:lstStyle/>
+          <a:p>
+            <a:pPr algn="ctr"/>
+            <a:r>
+              <a:rPr sz="2000" b="1" i="0">
+                <a:solidFill>
+                  <a:srgbClr val="FFFFFF"/>
+                </a:solidFill>
+              </a:rPr>
+              <a:t>INDEPENDENT VALIDATION</a:t>
+            </a:r>
+          </a:p>
+        </p:txBody>
+      </p:sp>
+      <p:cxnSp>
+        <p:nvCxnSpPr>
+          <p:cNvPr id="907" name="Connector 906"/>
+          <p:cNvCxnSpPr/>
+          <p:nvPr/>
+        </p:nvCxnSpPr>
+        <p:spPr>
+          <a:xfrm>
+            <a:off x="4572000" y="4251959"/>
+            <a:ext cx="0" cy="320041"/>
+          </a:xfrm>
+          <a:prstGeom prst="line">
+            <a:avLst/>
+          </a:prstGeom>
+          <a:ln w="19050">
+            <a:solidFill>
+              <a:srgbClr val="8E6F3E"/>
+            </a:solidFill>
+            <a:tailEnd type="triangle"/>
+          </a:ln>
+        </p:spPr>
+        <p:style>
+          <a:lnRef idx="2">
+            <a:schemeClr val="accent1"/>
+          </a:lnRef>
+          <a:fillRef idx="0">
+            <a:schemeClr val="accent1"/>
+          </a:fillRef>
+          <a:effectRef idx="1">
+            <a:schemeClr val="accent1"/>
+          </a:effectRef>
+          <a:fontRef idx="minor">
+            <a:schemeClr val="tx1"/>
+          </a:fontRef>
+        </p:style>
+      </p:cxnSp>
+      <p:sp>
+        <p:nvSpPr>
+          <p:cNvPr id="908" name="Block"/>
+          <p:cNvSpPr/>
+          <p:nvPr/>
+        </p:nvSpPr>
+        <p:spPr>
+          <a:xfrm>
+            <a:off x="2743200" y="4572000"/>
+            <a:ext cx="3657600" cy="548640"/>
+          </a:xfrm>
+          <a:prstGeom prst="rect">
+            <a:avLst/>
+          </a:prstGeom>
+          <a:solidFill>
+            <a:srgbClr val="8E6F3E"/>
+          </a:solidFill>
+          <a:ln>
+            <a:noFill/>
+          </a:ln>
+          <a:effectLst/>
+        </p:spPr>
+        <p:style>
+          <a:lnRef idx="1">
+            <a:schemeClr val="accent1"/>
+          </a:lnRef>
+          <a:fillRef idx="3">
+            <a:schemeClr val="accent1"/>
+          </a:fillRef>
+          <a:effectRef idx="2">
+            <a:schemeClr val="accent1"/>
+          </a:effectRef>
+          <a:fontRef idx="minor">
+            <a:schemeClr val="lt1"/>
+          </a:fontRef>
+        </p:style>
+        <p:txBody>
+          <a:bodyPr rtlCol="0" anchor="ctr" wrap="square" lIns="27432" rIns="27432" tIns="22860" bIns="22860"/>
+          <a:lstStyle/>
+          <a:p>
+            <a:pPr algn="ctr"/>
+            <a:r>
+              <a:rPr sz="2000" b="1" i="0">
+                <a:solidFill>
+                  <a:srgbClr val="FFFFFF"/>
+                </a:solidFill>
+              </a:rPr>
+              <a:t>RELEASE GATE</a:t>
+            </a:r>
+          </a:p>
+        </p:txBody>
+      </p:sp>
+      <p:sp>
+        <p:nvSpPr>
+          <p:cNvPr id="909" name="FooterBand"/>
+          <p:cNvSpPr/>
+          <p:nvPr/>
+        </p:nvSpPr>
+        <p:spPr>
+          <a:xfrm>
+            <a:off x="274320" y="5852159"/>
+            <a:ext cx="8595360" cy="566928"/>
+          </a:xfrm>
+          <a:prstGeom prst="rect">
+            <a:avLst/>
+          </a:prstGeom>
+          <a:solidFill>
+            <a:srgbClr val="8E6F3E"/>
+          </a:solidFill>
+          <a:ln>
+            <a:noFill/>
+          </a:ln>
+          <a:effectLst/>
+        </p:spPr>
+        <p:style>
+          <a:lnRef idx="1">
+            <a:schemeClr val="accent1"/>
+          </a:lnRef>
+          <a:fillRef idx="3">
+            <a:schemeClr val="accent1"/>
+          </a:fillRef>
+          <a:effectRef idx="2">
+            <a:schemeClr val="accent1"/>
+          </a:effectRef>
+          <a:fontRef idx="minor">
+            <a:schemeClr val="lt1"/>
+          </a:fontRef>
+        </p:style>
+        <p:txBody>
+          <a:bodyPr rtlCol="0" anchor="ctr" wrap="square" lIns="27432" rIns="27432" tIns="22860" bIns="22860"/>
+          <a:lstStyle/>
+          <a:p>
+            <a:pPr algn="ctr"/>
+            <a:r>
+              <a:rPr sz="2000" b="1" i="0">
+                <a:solidFill>
+                  <a:srgbClr val="FFFFFF"/>
+                </a:solidFill>
+              </a:rPr>
+              <a:t>Which judgments should never have remained discretionary?</a:t>
+            </a:r>
+          </a:p>
+        </p:txBody>
+      </p:sp>
+    </p:spTree>
+  </p:cSld>
+  <p:clrMapOvr>
+    <a:masterClrMapping/>
+  </p:clrMapOvr>
+</p:sld>
+</file>
+
+<file path=ppt/slides/slide35.xml><?xml version="1.0" encoding="utf-8"?>
+<p:sld xmlns:a="http://schemas.openxmlformats.org/drawingml/2006/main" xmlns:p="http://schemas.openxmlformats.org/presentationml/2006/main" xmlns:r="http://schemas.openxmlformats.org/officeDocument/2006/relationships">
+  <p:cSld>
+    <p:spTree>
+      <p:nvGrpSpPr>
+        <p:cNvPr id="1" name=""/>
+        <p:cNvGrpSpPr/>
+        <p:nvPr/>
+      </p:nvGrpSpPr>
+      <p:grpSpPr/>
+      <p:sp>
+        <p:nvSpPr>
+          <p:cNvPr id="3" name="Title 2"/>
+          <p:cNvSpPr>
+            <a:spLocks noGrp="1"/>
+          </p:cNvSpPr>
+          <p:nvPr>
+            <p:ph type="title"/>
+          </p:nvPr>
+        </p:nvSpPr>
+        <p:spPr/>
+        <p:txBody>
+          <a:bodyPr/>
+          <a:lstStyle/>
+          <a:p>
+            <a:r>
+              <a:rPr sz="2400" b="0" i="0">
+                <a:solidFill>
+                  <a:srgbClr val="000000"/>
+                </a:solidFill>
+              </a:rPr>
+              <a:t>Active, then passive alignment</a:t>
+            </a:r>
+          </a:p>
+        </p:txBody>
+      </p:sp>
+      <p:sp>
+        <p:nvSpPr>
+          <p:cNvPr id="900" name="Slide Number Placeholder 900"/>
+          <p:cNvSpPr>
+            <a:spLocks noGrp="1"/>
+          </p:cNvSpPr>
+          <p:nvPr>
+            <p:ph type="sldNum" sz="quarter" idx="4"/>
+          </p:nvPr>
+        </p:nvSpPr>
+        <p:spPr/>
+        <p:txBody>
+          <a:bodyPr/>
+          <a:lstStyle/>
+          <a:p>
+            <a:fld id="{649F5B17-D92E-42C9-9606-E4DCBD101C76}" type="slidenum">
+              <a:rPr lang="en-US" smtClean="0"/>
+              <a:t>35</a:t>
+            </a:fld>
+            <a:endParaRPr lang="en-US"/>
+          </a:p>
+        </p:txBody>
+      </p:sp>
+      <p:sp>
+        <p:nvSpPr>
+          <p:cNvPr id="901" name="Card"/>
+          <p:cNvSpPr/>
+          <p:nvPr/>
+        </p:nvSpPr>
+        <p:spPr>
+          <a:xfrm>
+            <a:off x="411480" y="2011680"/>
+            <a:ext cx="1874519" cy="1645920"/>
+          </a:xfrm>
+          <a:prstGeom prst="rect">
+            <a:avLst/>
+          </a:prstGeom>
+          <a:solidFill>
+            <a:srgbClr val="F5F1E8"/>
+          </a:solidFill>
+          <a:ln w="12700">
+            <a:solidFill>
+              <a:srgbClr val="C9B991"/>
+            </a:solidFill>
+          </a:ln>
+          <a:effectLst/>
+        </p:spPr>
+        <p:style>
+          <a:lnRef idx="1">
+            <a:schemeClr val="accent1"/>
+          </a:lnRef>
+          <a:fillRef idx="3">
+            <a:schemeClr val="accent1"/>
+          </a:fillRef>
+          <a:effectRef idx="2">
+            <a:schemeClr val="accent1"/>
+          </a:effectRef>
+          <a:fontRef idx="minor">
+            <a:schemeClr val="lt1"/>
+          </a:fontRef>
+        </p:style>
+        <p:txBody>
+          <a:bodyPr rtlCol="0" anchor="ctr" wrap="square" lIns="27432" rIns="27432" tIns="22860" bIns="22860"/>
+          <a:lstStyle/>
+          <a:p>
+            <a:pPr algn="ctr"/>
+            <a:r>
+              <a:rPr sz="2000" b="0" i="0">
+                <a:solidFill>
+                  <a:srgbClr val="5C4826"/>
+                </a:solidFill>
+              </a:rPr>
+              <a:t>Failure reveals a missing or incorrect obligation</a:t>
+            </a:r>
+          </a:p>
+        </p:txBody>
+      </p:sp>
+      <p:cxnSp>
+        <p:nvCxnSpPr>
+          <p:cNvPr id="902" name="Connector 901"/>
+          <p:cNvCxnSpPr/>
+          <p:nvPr/>
+        </p:nvCxnSpPr>
+        <p:spPr>
+          <a:xfrm>
+            <a:off x="2286000" y="2834640"/>
+            <a:ext cx="301752" cy="0"/>
+          </a:xfrm>
+          <a:prstGeom prst="line">
+            <a:avLst/>
+          </a:prstGeom>
+          <a:ln w="19050">
+            <a:solidFill>
+              <a:srgbClr val="8E6F3E"/>
+            </a:solidFill>
+            <a:tailEnd type="triangle"/>
+          </a:ln>
+        </p:spPr>
+        <p:style>
+          <a:lnRef idx="2">
+            <a:schemeClr val="accent1"/>
+          </a:lnRef>
+          <a:fillRef idx="0">
+            <a:schemeClr val="accent1"/>
+          </a:fillRef>
+          <a:effectRef idx="1">
+            <a:schemeClr val="accent1"/>
+          </a:effectRef>
+          <a:fontRef idx="minor">
+            <a:schemeClr val="tx1"/>
+          </a:fontRef>
+        </p:style>
+      </p:cxnSp>
+      <p:sp>
+        <p:nvSpPr>
+          <p:cNvPr id="903" name="Card"/>
+          <p:cNvSpPr/>
+          <p:nvPr/>
+        </p:nvSpPr>
+        <p:spPr>
+          <a:xfrm>
+            <a:off x="2587752" y="2011680"/>
+            <a:ext cx="1874519" cy="1645920"/>
+          </a:xfrm>
+          <a:prstGeom prst="rect">
+            <a:avLst/>
+          </a:prstGeom>
+          <a:solidFill>
+            <a:srgbClr val="F5F1E8"/>
+          </a:solidFill>
+          <a:ln w="12700">
+            <a:solidFill>
+              <a:srgbClr val="C9B991"/>
+            </a:solidFill>
+          </a:ln>
+          <a:effectLst/>
+        </p:spPr>
+        <p:style>
+          <a:lnRef idx="1">
+            <a:schemeClr val="accent1"/>
+          </a:lnRef>
+          <a:fillRef idx="3">
+            <a:schemeClr val="accent1"/>
+          </a:fillRef>
+          <a:effectRef idx="2">
+            <a:schemeClr val="accent1"/>
+          </a:effectRef>
+          <a:fontRef idx="minor">
+            <a:schemeClr val="lt1"/>
+          </a:fontRef>
+        </p:style>
+        <p:txBody>
+          <a:bodyPr rtlCol="0" anchor="ctr" wrap="square" lIns="27432" rIns="27432" tIns="22860" bIns="22860"/>
+          <a:lstStyle/>
+          <a:p>
+            <a:pPr algn="ctr"/>
+            <a:r>
+              <a:rPr sz="2000" b="0" i="0">
+                <a:solidFill>
+                  <a:srgbClr val="5C4826"/>
+                </a:solidFill>
+              </a:rPr>
+              <a:t>Represent the lesson</a:t>
+            </a:r>
+          </a:p>
+        </p:txBody>
+      </p:sp>
+      <p:cxnSp>
+        <p:nvCxnSpPr>
+          <p:cNvPr id="904" name="Connector 903"/>
+          <p:cNvCxnSpPr/>
+          <p:nvPr/>
+        </p:nvCxnSpPr>
+        <p:spPr>
+          <a:xfrm>
+            <a:off x="4462272" y="2834640"/>
+            <a:ext cx="301752" cy="0"/>
+          </a:xfrm>
+          <a:prstGeom prst="line">
+            <a:avLst/>
+          </a:prstGeom>
+          <a:ln w="19050">
+            <a:solidFill>
+              <a:srgbClr val="8E6F3E"/>
+            </a:solidFill>
+            <a:tailEnd type="triangle"/>
+          </a:ln>
+        </p:spPr>
+        <p:style>
+          <a:lnRef idx="2">
+            <a:schemeClr val="accent1"/>
+          </a:lnRef>
+          <a:fillRef idx="0">
+            <a:schemeClr val="accent1"/>
+          </a:fillRef>
+          <a:effectRef idx="1">
+            <a:schemeClr val="accent1"/>
+          </a:effectRef>
+          <a:fontRef idx="minor">
+            <a:schemeClr val="tx1"/>
+          </a:fontRef>
+        </p:style>
+      </p:cxnSp>
+      <p:sp>
+        <p:nvSpPr>
+          <p:cNvPr id="905" name="Card"/>
+          <p:cNvSpPr/>
+          <p:nvPr/>
+        </p:nvSpPr>
+        <p:spPr>
+          <a:xfrm>
+            <a:off x="4764024" y="2011680"/>
+            <a:ext cx="1874519" cy="1645920"/>
+          </a:xfrm>
+          <a:prstGeom prst="rect">
+            <a:avLst/>
+          </a:prstGeom>
+          <a:solidFill>
+            <a:srgbClr val="F5F1E8"/>
+          </a:solidFill>
+          <a:ln w="12700">
+            <a:solidFill>
+              <a:srgbClr val="C9B991"/>
+            </a:solidFill>
+          </a:ln>
+          <a:effectLst/>
+        </p:spPr>
+        <p:style>
+          <a:lnRef idx="1">
+            <a:schemeClr val="accent1"/>
+          </a:lnRef>
+          <a:fillRef idx="3">
+            <a:schemeClr val="accent1"/>
+          </a:fillRef>
+          <a:effectRef idx="2">
+            <a:schemeClr val="accent1"/>
+          </a:effectRef>
+          <a:fontRef idx="minor">
+            <a:schemeClr val="lt1"/>
+          </a:fontRef>
+        </p:style>
+        <p:txBody>
+          <a:bodyPr rtlCol="0" anchor="ctr" wrap="square" lIns="27432" rIns="27432" tIns="22860" bIns="22860"/>
+          <a:lstStyle/>
+          <a:p>
+            <a:pPr algn="ctr"/>
+            <a:r>
+              <a:rPr sz="2000" b="0" i="0">
+                <a:solidFill>
+                  <a:srgbClr val="5C4826"/>
+                </a:solidFill>
+              </a:rPr>
+              <a:t>Actively align the existing realization</a:t>
+            </a:r>
+          </a:p>
+        </p:txBody>
+      </p:sp>
+      <p:cxnSp>
+        <p:nvCxnSpPr>
+          <p:cNvPr id="906" name="Connector 905"/>
+          <p:cNvCxnSpPr/>
+          <p:nvPr/>
+        </p:nvCxnSpPr>
+        <p:spPr>
+          <a:xfrm>
+            <a:off x="6638544" y="2834640"/>
+            <a:ext cx="301752" cy="0"/>
+          </a:xfrm>
+          <a:prstGeom prst="line">
+            <a:avLst/>
+          </a:prstGeom>
+          <a:ln w="19050">
+            <a:solidFill>
+              <a:srgbClr val="8E6F3E"/>
+            </a:solidFill>
+            <a:tailEnd type="triangle"/>
+          </a:ln>
+        </p:spPr>
+        <p:style>
+          <a:lnRef idx="2">
+            <a:schemeClr val="accent1"/>
+          </a:lnRef>
+          <a:fillRef idx="0">
+            <a:schemeClr val="accent1"/>
+          </a:fillRef>
+          <a:effectRef idx="1">
+            <a:schemeClr val="accent1"/>
+          </a:effectRef>
+          <a:fontRef idx="minor">
+            <a:schemeClr val="tx1"/>
+          </a:fontRef>
+        </p:style>
+      </p:cxnSp>
+      <p:sp>
+        <p:nvSpPr>
+          <p:cNvPr id="907" name="Card"/>
+          <p:cNvSpPr/>
+          <p:nvPr/>
+        </p:nvSpPr>
+        <p:spPr>
+          <a:xfrm>
+            <a:off x="6940296" y="2011680"/>
+            <a:ext cx="1874519" cy="1645920"/>
+          </a:xfrm>
+          <a:prstGeom prst="rect">
+            <a:avLst/>
+          </a:prstGeom>
+          <a:solidFill>
+            <a:srgbClr val="F5F1E8"/>
+          </a:solidFill>
+          <a:ln w="12700">
+            <a:solidFill>
+              <a:srgbClr val="C9B991"/>
+            </a:solidFill>
+          </a:ln>
+          <a:effectLst/>
+        </p:spPr>
+        <p:style>
+          <a:lnRef idx="1">
+            <a:schemeClr val="accent1"/>
+          </a:lnRef>
+          <a:fillRef idx="3">
+            <a:schemeClr val="accent1"/>
+          </a:fillRef>
+          <a:effectRef idx="2">
+            <a:schemeClr val="accent1"/>
+          </a:effectRef>
+          <a:fontRef idx="minor">
+            <a:schemeClr val="lt1"/>
+          </a:fontRef>
+        </p:style>
+        <p:txBody>
+          <a:bodyPr rtlCol="0" anchor="ctr" wrap="square" lIns="27432" rIns="27432" tIns="22860" bIns="22860"/>
+          <a:lstStyle/>
+          <a:p>
+            <a:pPr algn="ctr"/>
+            <a:r>
+              <a:rPr sz="2000" b="0" i="0">
+                <a:solidFill>
+                  <a:srgbClr val="5C4826"/>
+                </a:solidFill>
+              </a:rPr>
+              <a:t>Passively align subsequent changes</a:t>
+            </a:r>
+          </a:p>
+        </p:txBody>
+      </p:sp>
+      <p:sp>
+        <p:nvSpPr>
+          <p:cNvPr id="908" name="Label"/>
+          <p:cNvSpPr txBox="1"/>
+          <p:nvPr/>
+        </p:nvSpPr>
+        <p:spPr>
+          <a:xfrm>
+            <a:off x="548640" y="4206240"/>
+            <a:ext cx="8046720" cy="457200"/>
+          </a:xfrm>
+          <a:prstGeom prst="rect">
+            <a:avLst/>
+          </a:prstGeom>
+          <a:noFill/>
+        </p:spPr>
+        <p:txBody>
+          <a:bodyPr wrap="square" anchor="t" lIns="27432" rIns="27432" tIns="22860" bIns="22860">
+            <a:spAutoFit/>
+          </a:bodyPr>
+          <a:lstStyle/>
+          <a:p>
+            <a:pPr algn="ctr"/>
+            <a:r>
+              <a:rPr sz="2200" b="0" i="0">
+                <a:solidFill>
+                  <a:srgbClr val="5C4826"/>
+                </a:solidFill>
+              </a:rPr>
+              <a:t>That is the lifecycle.</a:t>
+            </a:r>
+          </a:p>
+        </p:txBody>
+      </p:sp>
+    </p:spTree>
+  </p:cSld>
+  <p:clrMapOvr>
+    <a:masterClrMapping/>
+  </p:clrMapOvr>
+</p:sld>
+</file>
+
+<file path=ppt/slides/slide36.xml><?xml version="1.0" encoding="utf-8"?>
+<p:sld xmlns:a="http://schemas.openxmlformats.org/drawingml/2006/main" xmlns:p="http://schemas.openxmlformats.org/presentationml/2006/main" xmlns:r="http://schemas.openxmlformats.org/officeDocument/2006/relationships">
+  <p:cSld>
+    <p:spTree>
+      <p:nvGrpSpPr>
+        <p:cNvPr id="1" name=""/>
+        <p:cNvGrpSpPr/>
+        <p:nvPr/>
+      </p:nvGrpSpPr>
+      <p:grpSpPr/>
+      <p:sp>
+        <p:nvSpPr>
+          <p:cNvPr id="3" name="Title 2"/>
+          <p:cNvSpPr>
+            <a:spLocks noGrp="1"/>
+          </p:cNvSpPr>
+          <p:nvPr>
+            <p:ph type="title"/>
+          </p:nvPr>
+        </p:nvSpPr>
+        <p:spPr/>
+        <p:txBody>
+          <a:bodyPr/>
+          <a:lstStyle/>
+          <a:p>
+            <a:r>
+              <a:rPr sz="2400" b="0" i="0">
+                <a:solidFill>
+                  <a:srgbClr val="000000"/>
+                </a:solidFill>
+              </a:rPr>
+              <a:t>Learning can change three things</a:t>
+            </a:r>
+          </a:p>
+        </p:txBody>
+      </p:sp>
+      <p:sp>
+        <p:nvSpPr>
+          <p:cNvPr id="900" name="Slide Number Placeholder 900"/>
+          <p:cNvSpPr>
+            <a:spLocks noGrp="1"/>
+          </p:cNvSpPr>
+          <p:nvPr>
+            <p:ph type="sldNum" sz="quarter" idx="4"/>
+          </p:nvPr>
+        </p:nvSpPr>
+        <p:spPr/>
+        <p:txBody>
+          <a:bodyPr/>
+          <a:lstStyle/>
+          <a:p>
+            <a:fld id="{ECC62C95-06B7-478B-9E6C-BA793986094F}" type="slidenum">
+              <a:rPr lang="en-US" smtClean="0"/>
+              <a:t>36</a:t>
+            </a:fld>
+            <a:endParaRPr lang="en-US"/>
+          </a:p>
+        </p:txBody>
+      </p:sp>
+      <p:sp>
+        <p:nvSpPr>
+          <p:cNvPr id="901" name="Card"/>
+          <p:cNvSpPr/>
+          <p:nvPr/>
+        </p:nvSpPr>
+        <p:spPr>
+          <a:xfrm>
+            <a:off x="548640" y="2011680"/>
+            <a:ext cx="2651760" cy="2011680"/>
+          </a:xfrm>
+          <a:prstGeom prst="rect">
+            <a:avLst/>
+          </a:prstGeom>
+          <a:solidFill>
+            <a:srgbClr val="F5F1E8"/>
+          </a:solidFill>
+          <a:ln w="12700">
+            <a:solidFill>
+              <a:srgbClr val="C9B991"/>
+            </a:solidFill>
+          </a:ln>
+          <a:effectLst/>
+        </p:spPr>
+        <p:style>
+          <a:lnRef idx="1">
+            <a:schemeClr val="accent1"/>
+          </a:lnRef>
+          <a:fillRef idx="3">
+            <a:schemeClr val="accent1"/>
+          </a:fillRef>
+          <a:effectRef idx="2">
+            <a:schemeClr val="accent1"/>
+          </a:effectRef>
+          <a:fontRef idx="minor">
+            <a:schemeClr val="lt1"/>
+          </a:fontRef>
+        </p:style>
+        <p:txBody>
+          <a:bodyPr rtlCol="0" anchor="ctr" wrap="square" lIns="27432" rIns="27432" tIns="22860" bIns="22860"/>
+          <a:lstStyle/>
+          <a:p>
+            <a:pPr algn="ctr"/>
+            <a:r>
+              <a:rPr sz="2800" b="1" i="0">
+                <a:solidFill>
+                  <a:srgbClr val="5C4826"/>
+                </a:solidFill>
+              </a:rPr>
+              <a:t>SYSTEM</a:t>
+            </a:r>
+          </a:p>
+        </p:txBody>
+      </p:sp>
+      <p:sp>
+        <p:nvSpPr>
+          <p:cNvPr id="902" name="Card"/>
+          <p:cNvSpPr/>
+          <p:nvPr/>
+        </p:nvSpPr>
+        <p:spPr>
+          <a:xfrm>
+            <a:off x="3383280" y="2011680"/>
+            <a:ext cx="2651760" cy="2011680"/>
+          </a:xfrm>
+          <a:prstGeom prst="rect">
+            <a:avLst/>
+          </a:prstGeom>
+          <a:solidFill>
+            <a:srgbClr val="F5F1E8"/>
+          </a:solidFill>
+          <a:ln w="12700">
+            <a:solidFill>
+              <a:srgbClr val="C9B991"/>
+            </a:solidFill>
+          </a:ln>
+          <a:effectLst/>
+        </p:spPr>
+        <p:style>
+          <a:lnRef idx="1">
+            <a:schemeClr val="accent1"/>
+          </a:lnRef>
+          <a:fillRef idx="3">
+            <a:schemeClr val="accent1"/>
+          </a:fillRef>
+          <a:effectRef idx="2">
+            <a:schemeClr val="accent1"/>
+          </a:effectRef>
+          <a:fontRef idx="minor">
+            <a:schemeClr val="lt1"/>
+          </a:fontRef>
+        </p:style>
+        <p:txBody>
+          <a:bodyPr rtlCol="0" anchor="ctr" wrap="square" lIns="27432" rIns="27432" tIns="22860" bIns="22860"/>
+          <a:lstStyle/>
+          <a:p>
+            <a:pPr algn="ctr"/>
+            <a:r>
+              <a:rPr sz="2800" b="1" i="0">
+                <a:solidFill>
+                  <a:srgbClr val="5C4826"/>
+                </a:solidFill>
+              </a:rPr>
+              <a:t>TEAM</a:t>
+            </a:r>
+          </a:p>
+        </p:txBody>
+      </p:sp>
+      <p:sp>
+        <p:nvSpPr>
+          <p:cNvPr id="903" name="Card"/>
+          <p:cNvSpPr/>
+          <p:nvPr/>
+        </p:nvSpPr>
+        <p:spPr>
+          <a:xfrm>
+            <a:off x="6217920" y="2011680"/>
+            <a:ext cx="2651760" cy="2011680"/>
+          </a:xfrm>
+          <a:prstGeom prst="rect">
+            <a:avLst/>
+          </a:prstGeom>
+          <a:solidFill>
+            <a:srgbClr val="F5F1E8"/>
+          </a:solidFill>
+          <a:ln w="12700">
+            <a:solidFill>
+              <a:srgbClr val="C9B991"/>
+            </a:solidFill>
+          </a:ln>
+          <a:effectLst/>
+        </p:spPr>
+        <p:style>
+          <a:lnRef idx="1">
+            <a:schemeClr val="accent1"/>
+          </a:lnRef>
+          <a:fillRef idx="3">
+            <a:schemeClr val="accent1"/>
+          </a:fillRef>
+          <a:effectRef idx="2">
+            <a:schemeClr val="accent1"/>
+          </a:effectRef>
+          <a:fontRef idx="minor">
+            <a:schemeClr val="lt1"/>
+          </a:fontRef>
+        </p:style>
+        <p:txBody>
+          <a:bodyPr rtlCol="0" anchor="ctr" wrap="square" lIns="27432" rIns="27432" tIns="22860" bIns="22860"/>
+          <a:lstStyle/>
+          <a:p>
+            <a:pPr algn="ctr"/>
+            <a:r>
+              <a:rPr sz="2800" b="1" i="0">
+                <a:solidFill>
+                  <a:srgbClr val="5C4826"/>
+                </a:solidFill>
+              </a:rPr>
+              <a:t>ENGINEER</a:t>
+            </a:r>
+          </a:p>
+        </p:txBody>
+      </p:sp>
+    </p:spTree>
+  </p:cSld>
+  <p:clrMapOvr>
+    <a:masterClrMapping/>
+  </p:clrMapOvr>
+</p:sld>
+</file>
+
+<file path=ppt/slides/slide37.xml><?xml version="1.0" encoding="utf-8"?>
+<p:sld xmlns:a="http://schemas.openxmlformats.org/drawingml/2006/main" xmlns:p="http://schemas.openxmlformats.org/presentationml/2006/main" xmlns:r="http://schemas.openxmlformats.org/officeDocument/2006/relationships">
+  <p:cSld>
+    <p:spTree>
+      <p:nvGrpSpPr>
+        <p:cNvPr id="1" name=""/>
+        <p:cNvGrpSpPr/>
+        <p:nvPr/>
+      </p:nvGrpSpPr>
+      <p:grpSpPr/>
+      <p:sp>
+        <p:nvSpPr>
+          <p:cNvPr id="3" name="Title 2"/>
+          <p:cNvSpPr>
+            <a:spLocks noGrp="1"/>
+          </p:cNvSpPr>
+          <p:nvPr>
+            <p:ph type="title"/>
+          </p:nvPr>
+        </p:nvSpPr>
+        <p:spPr/>
+        <p:txBody>
+          <a:bodyPr/>
+          <a:lstStyle/>
+          <a:p>
+            <a:r>
+              <a:rPr sz="2400" b="0" i="0">
+                <a:solidFill>
+                  <a:srgbClr val="000000"/>
+                </a:solidFill>
+              </a:rPr>
+              <a:t>Schön: the reflective practitioner</a:t>
+            </a:r>
+          </a:p>
+        </p:txBody>
+      </p:sp>
+      <p:sp>
+        <p:nvSpPr>
+          <p:cNvPr id="900" name="Slide Number Placeholder 900"/>
+          <p:cNvSpPr>
+            <a:spLocks noGrp="1"/>
+          </p:cNvSpPr>
+          <p:nvPr>
+            <p:ph type="sldNum" sz="quarter" idx="4"/>
+          </p:nvPr>
+        </p:nvSpPr>
+        <p:spPr/>
+        <p:txBody>
+          <a:bodyPr/>
+          <a:lstStyle/>
+          <a:p>
+            <a:fld id="{39B9D2FE-B078-4487-9F5F-2EEF4DFC66C2}" type="slidenum">
+              <a:rPr lang="en-US" smtClean="0"/>
+              <a:t>37</a:t>
+            </a:fld>
+            <a:endParaRPr lang="en-US"/>
+          </a:p>
+        </p:txBody>
+      </p:sp>
+      <p:sp>
+        <p:nvSpPr>
+          <p:cNvPr id="901" name="Card"/>
+          <p:cNvSpPr/>
+          <p:nvPr/>
+        </p:nvSpPr>
+        <p:spPr>
+          <a:xfrm>
+            <a:off x="283464" y="2377440"/>
+            <a:ext cx="1554480" cy="822960"/>
+          </a:xfrm>
+          <a:prstGeom prst="rect">
+            <a:avLst/>
+          </a:prstGeom>
+          <a:solidFill>
+            <a:srgbClr val="F5F1E8"/>
+          </a:solidFill>
+          <a:ln w="12700">
+            <a:solidFill>
+              <a:srgbClr val="C9B991"/>
+            </a:solidFill>
+          </a:ln>
+          <a:effectLst/>
+        </p:spPr>
+        <p:style>
+          <a:lnRef idx="1">
+            <a:schemeClr val="accent1"/>
+          </a:lnRef>
+          <a:fillRef idx="3">
+            <a:schemeClr val="accent1"/>
+          </a:fillRef>
+          <a:effectRef idx="2">
+            <a:schemeClr val="accent1"/>
+          </a:effectRef>
+          <a:fontRef idx="minor">
+            <a:schemeClr val="lt1"/>
+          </a:fontRef>
+        </p:style>
+        <p:txBody>
+          <a:bodyPr rtlCol="0" anchor="ctr" wrap="square" lIns="9144" rIns="9144" tIns="22860" bIns="22860"/>
+          <a:lstStyle/>
+          <a:p>
+            <a:pPr algn="ctr"/>
+            <a:r>
+              <a:rPr sz="2000" b="1" i="0">
+                <a:solidFill>
+                  <a:srgbClr val="5C4826"/>
+                </a:solidFill>
+              </a:rPr>
+              <a:t>Decision</a:t>
+            </a:r>
+          </a:p>
+        </p:txBody>
+      </p:sp>
+      <p:cxnSp>
+        <p:nvCxnSpPr>
+          <p:cNvPr id="902" name="Connector 901"/>
+          <p:cNvCxnSpPr/>
+          <p:nvPr/>
+        </p:nvCxnSpPr>
+        <p:spPr>
+          <a:xfrm>
+            <a:off x="1837943" y="2788920"/>
+            <a:ext cx="201169" cy="0"/>
+          </a:xfrm>
+          <a:prstGeom prst="line">
+            <a:avLst/>
+          </a:prstGeom>
+          <a:ln w="19050">
+            <a:solidFill>
+              <a:srgbClr val="8E6F3E"/>
+            </a:solidFill>
+            <a:tailEnd type="triangle"/>
+          </a:ln>
+        </p:spPr>
+        <p:style>
+          <a:lnRef idx="2">
+            <a:schemeClr val="accent1"/>
+          </a:lnRef>
+          <a:fillRef idx="0">
+            <a:schemeClr val="accent1"/>
+          </a:fillRef>
+          <a:effectRef idx="1">
+            <a:schemeClr val="accent1"/>
+          </a:effectRef>
+          <a:fontRef idx="minor">
+            <a:schemeClr val="tx1"/>
+          </a:fontRef>
+        </p:style>
+      </p:cxnSp>
+      <p:sp>
+        <p:nvSpPr>
+          <p:cNvPr id="903" name="Card"/>
+          <p:cNvSpPr/>
+          <p:nvPr/>
+        </p:nvSpPr>
+        <p:spPr>
+          <a:xfrm>
+            <a:off x="2039112" y="2377440"/>
+            <a:ext cx="1554480" cy="822960"/>
+          </a:xfrm>
+          <a:prstGeom prst="rect">
+            <a:avLst/>
+          </a:prstGeom>
+          <a:solidFill>
+            <a:srgbClr val="F5F1E8"/>
+          </a:solidFill>
+          <a:ln w="12700">
+            <a:solidFill>
+              <a:srgbClr val="C9B991"/>
+            </a:solidFill>
+          </a:ln>
+          <a:effectLst/>
+        </p:spPr>
+        <p:style>
+          <a:lnRef idx="1">
+            <a:schemeClr val="accent1"/>
+          </a:lnRef>
+          <a:fillRef idx="3">
+            <a:schemeClr val="accent1"/>
+          </a:fillRef>
+          <a:effectRef idx="2">
+            <a:schemeClr val="accent1"/>
+          </a:effectRef>
+          <a:fontRef idx="minor">
+            <a:schemeClr val="lt1"/>
+          </a:fontRef>
+        </p:style>
+        <p:txBody>
+          <a:bodyPr rtlCol="0" anchor="ctr" wrap="square" lIns="9144" rIns="9144" tIns="22860" bIns="22860"/>
+          <a:lstStyle/>
+          <a:p>
+            <a:pPr algn="ctr"/>
+            <a:r>
+              <a:rPr sz="2000" b="1" i="0">
+                <a:solidFill>
+                  <a:srgbClr val="5C4826"/>
+                </a:solidFill>
+              </a:rPr>
+              <a:t>Consequence</a:t>
+            </a:r>
+          </a:p>
+        </p:txBody>
+      </p:sp>
+      <p:cxnSp>
+        <p:nvCxnSpPr>
+          <p:cNvPr id="904" name="Connector 903"/>
+          <p:cNvCxnSpPr/>
+          <p:nvPr/>
+        </p:nvCxnSpPr>
+        <p:spPr>
+          <a:xfrm>
+            <a:off x="3593591" y="2788920"/>
+            <a:ext cx="201168" cy="0"/>
+          </a:xfrm>
+          <a:prstGeom prst="line">
+            <a:avLst/>
+          </a:prstGeom>
+          <a:ln w="19050">
+            <a:solidFill>
+              <a:srgbClr val="8E6F3E"/>
+            </a:solidFill>
+            <a:tailEnd type="triangle"/>
+          </a:ln>
+        </p:spPr>
+        <p:style>
+          <a:lnRef idx="2">
+            <a:schemeClr val="accent1"/>
+          </a:lnRef>
+          <a:fillRef idx="0">
+            <a:schemeClr val="accent1"/>
+          </a:fillRef>
+          <a:effectRef idx="1">
+            <a:schemeClr val="accent1"/>
+          </a:effectRef>
+          <a:fontRef idx="minor">
+            <a:schemeClr val="tx1"/>
+          </a:fontRef>
+        </p:style>
+      </p:cxnSp>
+      <p:sp>
+        <p:nvSpPr>
+          <p:cNvPr id="905" name="Card"/>
+          <p:cNvSpPr/>
+          <p:nvPr/>
+        </p:nvSpPr>
+        <p:spPr>
+          <a:xfrm>
+            <a:off x="3794760" y="2377440"/>
+            <a:ext cx="1554480" cy="822960"/>
+          </a:xfrm>
+          <a:prstGeom prst="rect">
+            <a:avLst/>
+          </a:prstGeom>
+          <a:solidFill>
+            <a:srgbClr val="F5F1E8"/>
+          </a:solidFill>
+          <a:ln w="12700">
+            <a:solidFill>
+              <a:srgbClr val="C9B991"/>
+            </a:solidFill>
+          </a:ln>
+          <a:effectLst/>
+        </p:spPr>
+        <p:style>
+          <a:lnRef idx="1">
+            <a:schemeClr val="accent1"/>
+          </a:lnRef>
+          <a:fillRef idx="3">
+            <a:schemeClr val="accent1"/>
+          </a:fillRef>
+          <a:effectRef idx="2">
+            <a:schemeClr val="accent1"/>
+          </a:effectRef>
+          <a:fontRef idx="minor">
+            <a:schemeClr val="lt1"/>
+          </a:fontRef>
+        </p:style>
+        <p:txBody>
+          <a:bodyPr rtlCol="0" anchor="ctr" wrap="square" lIns="9144" rIns="9144" tIns="22860" bIns="22860"/>
+          <a:lstStyle/>
+          <a:p>
+            <a:pPr algn="ctr"/>
+            <a:r>
+              <a:rPr sz="2000" b="1" i="0">
+                <a:solidFill>
+                  <a:srgbClr val="5C4826"/>
+                </a:solidFill>
+              </a:rPr>
+              <a:t>Reflection</a:t>
+            </a:r>
+          </a:p>
+        </p:txBody>
+      </p:sp>
+      <p:cxnSp>
+        <p:nvCxnSpPr>
+          <p:cNvPr id="906" name="Connector 905"/>
+          <p:cNvCxnSpPr/>
+          <p:nvPr/>
+        </p:nvCxnSpPr>
+        <p:spPr>
+          <a:xfrm>
+            <a:off x="5349240" y="2788920"/>
+            <a:ext cx="201168" cy="0"/>
+          </a:xfrm>
+          <a:prstGeom prst="line">
+            <a:avLst/>
+          </a:prstGeom>
+          <a:ln w="19050">
+            <a:solidFill>
+              <a:srgbClr val="8E6F3E"/>
+            </a:solidFill>
+            <a:tailEnd type="triangle"/>
+          </a:ln>
+        </p:spPr>
+        <p:style>
+          <a:lnRef idx="2">
+            <a:schemeClr val="accent1"/>
+          </a:lnRef>
+          <a:fillRef idx="0">
+            <a:schemeClr val="accent1"/>
+          </a:fillRef>
+          <a:effectRef idx="1">
+            <a:schemeClr val="accent1"/>
+          </a:effectRef>
+          <a:fontRef idx="minor">
+            <a:schemeClr val="tx1"/>
+          </a:fontRef>
+        </p:style>
+      </p:cxnSp>
+      <p:sp>
+        <p:nvSpPr>
+          <p:cNvPr id="907" name="Card"/>
+          <p:cNvSpPr/>
+          <p:nvPr/>
+        </p:nvSpPr>
+        <p:spPr>
+          <a:xfrm>
+            <a:off x="5550408" y="2377440"/>
+            <a:ext cx="1554480" cy="822960"/>
+          </a:xfrm>
+          <a:prstGeom prst="rect">
+            <a:avLst/>
+          </a:prstGeom>
+          <a:solidFill>
+            <a:srgbClr val="F5F1E8"/>
+          </a:solidFill>
+          <a:ln w="12700">
+            <a:solidFill>
+              <a:srgbClr val="C9B991"/>
+            </a:solidFill>
+          </a:ln>
+          <a:effectLst/>
+        </p:spPr>
+        <p:style>
+          <a:lnRef idx="1">
+            <a:schemeClr val="accent1"/>
+          </a:lnRef>
+          <a:fillRef idx="3">
+            <a:schemeClr val="accent1"/>
+          </a:fillRef>
+          <a:effectRef idx="2">
+            <a:schemeClr val="accent1"/>
+          </a:effectRef>
+          <a:fontRef idx="minor">
+            <a:schemeClr val="lt1"/>
+          </a:fontRef>
+        </p:style>
+        <p:txBody>
+          <a:bodyPr rtlCol="0" anchor="ctr" wrap="square" lIns="9144" rIns="9144" tIns="22860" bIns="22860"/>
+          <a:lstStyle/>
+          <a:p>
+            <a:pPr algn="ctr"/>
+            <a:r>
+              <a:rPr sz="2000" b="1" i="0">
+                <a:solidFill>
+                  <a:srgbClr val="5C4826"/>
+                </a:solidFill>
+              </a:rPr>
+              <a:t>Repertoire</a:t>
+            </a:r>
+          </a:p>
+        </p:txBody>
+      </p:sp>
+      <p:cxnSp>
+        <p:nvCxnSpPr>
+          <p:cNvPr id="908" name="Connector 907"/>
+          <p:cNvCxnSpPr/>
+          <p:nvPr/>
+        </p:nvCxnSpPr>
+        <p:spPr>
+          <a:xfrm>
+            <a:off x="7104888" y="2788920"/>
+            <a:ext cx="201168" cy="0"/>
+          </a:xfrm>
+          <a:prstGeom prst="line">
+            <a:avLst/>
+          </a:prstGeom>
+          <a:ln w="19050">
+            <a:solidFill>
+              <a:srgbClr val="8E6F3E"/>
+            </a:solidFill>
+            <a:tailEnd type="triangle"/>
+          </a:ln>
+        </p:spPr>
+        <p:style>
+          <a:lnRef idx="2">
+            <a:schemeClr val="accent1"/>
+          </a:lnRef>
+          <a:fillRef idx="0">
+            <a:schemeClr val="accent1"/>
+          </a:fillRef>
+          <a:effectRef idx="1">
+            <a:schemeClr val="accent1"/>
+          </a:effectRef>
+          <a:fontRef idx="minor">
+            <a:schemeClr val="tx1"/>
+          </a:fontRef>
+        </p:style>
+      </p:cxnSp>
+      <p:sp>
+        <p:nvSpPr>
+          <p:cNvPr id="909" name="Card"/>
+          <p:cNvSpPr/>
+          <p:nvPr/>
+        </p:nvSpPr>
+        <p:spPr>
+          <a:xfrm>
+            <a:off x="7306056" y="2377440"/>
+            <a:ext cx="1554480" cy="822960"/>
+          </a:xfrm>
+          <a:prstGeom prst="rect">
+            <a:avLst/>
+          </a:prstGeom>
+          <a:solidFill>
+            <a:srgbClr val="F5F1E8"/>
+          </a:solidFill>
+          <a:ln w="12700">
+            <a:solidFill>
+              <a:srgbClr val="C9B991"/>
+            </a:solidFill>
+          </a:ln>
+          <a:effectLst/>
+        </p:spPr>
+        <p:style>
+          <a:lnRef idx="1">
+            <a:schemeClr val="accent1"/>
+          </a:lnRef>
+          <a:fillRef idx="3">
+            <a:schemeClr val="accent1"/>
+          </a:fillRef>
+          <a:effectRef idx="2">
+            <a:schemeClr val="accent1"/>
+          </a:effectRef>
+          <a:fontRef idx="minor">
+            <a:schemeClr val="lt1"/>
+          </a:fontRef>
+        </p:style>
+        <p:txBody>
+          <a:bodyPr rtlCol="0" anchor="ctr" wrap="square" lIns="9144" rIns="9144" tIns="22860" bIns="22860"/>
+          <a:lstStyle/>
+          <a:p>
+            <a:pPr algn="ctr"/>
+            <a:r>
+              <a:rPr sz="2000" b="1" i="0">
+                <a:solidFill>
+                  <a:srgbClr val="5C4826"/>
+                </a:solidFill>
+              </a:rPr>
+              <a:t>Future recognition</a:t>
+            </a:r>
+          </a:p>
+        </p:txBody>
+      </p:sp>
+      <p:sp>
+        <p:nvSpPr>
+          <p:cNvPr id="910" name="Label"/>
+          <p:cNvSpPr txBox="1"/>
+          <p:nvPr/>
+        </p:nvSpPr>
+        <p:spPr>
+          <a:xfrm>
+            <a:off x="548640" y="3840480"/>
+            <a:ext cx="8046720" cy="731520"/>
+          </a:xfrm>
+          <a:prstGeom prst="rect">
+            <a:avLst/>
+          </a:prstGeom>
+          <a:noFill/>
+        </p:spPr>
+        <p:txBody>
+          <a:bodyPr wrap="square" anchor="t" lIns="27432" rIns="27432" tIns="22860" bIns="22860">
+            <a:spAutoFit/>
+          </a:bodyPr>
+          <a:lstStyle/>
+          <a:p>
+            <a:pPr algn="ctr"/>
+            <a:r>
+              <a:rPr sz="2200" b="0" i="0">
+                <a:solidFill>
+                  <a:srgbClr val="5C4826"/>
+                </a:solidFill>
+              </a:rPr>
+              <a:t>Human judgment still matters: not every lesson can or should be mechanized.</a:t>
+            </a:r>
+          </a:p>
+        </p:txBody>
+      </p:sp>
+    </p:spTree>
+  </p:cSld>
+  <p:clrMapOvr>
+    <a:masterClrMapping/>
+  </p:clrMapOvr>
+</p:sld>
+</file>
+
+<file path=ppt/slides/slide38.xml><?xml version="1.0" encoding="utf-8"?>
+<p:sld xmlns:a="http://schemas.openxmlformats.org/drawingml/2006/main" xmlns:p="http://schemas.openxmlformats.org/presentationml/2006/main" xmlns:r="http://schemas.openxmlformats.org/officeDocument/2006/relationships">
+  <p:cSld>
+    <p:spTree>
+      <p:nvGrpSpPr>
+        <p:cNvPr id="1" name=""/>
+        <p:cNvGrpSpPr/>
+        <p:nvPr/>
+      </p:nvGrpSpPr>
+      <p:grpSpPr/>
+      <p:sp>
+        <p:nvSpPr>
+          <p:cNvPr id="3" name="Title 2"/>
+          <p:cNvSpPr>
+            <a:spLocks noGrp="1"/>
+          </p:cNvSpPr>
+          <p:nvPr>
+            <p:ph type="title"/>
+          </p:nvPr>
+        </p:nvSpPr>
+        <p:spPr/>
+        <p:txBody>
+          <a:bodyPr/>
+          <a:lstStyle/>
+          <a:p>
+            <a:r>
+              <a:rPr sz="2400" b="0" i="0">
+                <a:solidFill>
+                  <a:srgbClr val="000000"/>
+                </a:solidFill>
+              </a:rPr>
+              <a:t>Failure is an expensive observation</a:t>
+            </a:r>
+          </a:p>
+        </p:txBody>
+      </p:sp>
+      <p:sp>
+        <p:nvSpPr>
+          <p:cNvPr id="900" name="Slide Number Placeholder 900"/>
+          <p:cNvSpPr>
+            <a:spLocks noGrp="1"/>
+          </p:cNvSpPr>
+          <p:nvPr>
+            <p:ph type="sldNum" sz="quarter" idx="4"/>
+          </p:nvPr>
+        </p:nvSpPr>
+        <p:spPr/>
+        <p:txBody>
+          <a:bodyPr/>
+          <a:lstStyle/>
+          <a:p>
+            <a:fld id="{CB5F44A2-D062-441C-AD58-E2D5787D8459}" type="slidenum">
+              <a:rPr lang="en-US" smtClean="0"/>
+              <a:t>38</a:t>
+            </a:fld>
+            <a:endParaRPr lang="en-US"/>
+          </a:p>
+        </p:txBody>
+      </p:sp>
+      <p:sp>
+        <p:nvSpPr>
+          <p:cNvPr id="901" name="VerbalLine"/>
+          <p:cNvSpPr txBox="1"/>
+          <p:nvPr/>
+        </p:nvSpPr>
+        <p:spPr>
+          <a:xfrm>
+            <a:off x="274320" y="786384"/>
+            <a:ext cx="8595360" cy="822960"/>
+          </a:xfrm>
+          <a:prstGeom prst="rect">
+            <a:avLst/>
+          </a:prstGeom>
+          <a:noFill/>
+        </p:spPr>
+        <p:txBody>
+          <a:bodyPr wrap="square" anchor="ctr" lIns="27432" rIns="27432" tIns="22860" bIns="22860">
+            <a:spAutoFit/>
+          </a:bodyPr>
+          <a:lstStyle/>
+          <a:p>
+            <a:pPr algn="ctr"/>
+            <a:r>
+              <a:rPr sz="2000" b="0" i="1">
+                <a:solidFill>
+                  <a:srgbClr val="5C4826"/>
+                </a:solidFill>
+              </a:rPr>
+              <a:t>Modeling decides what distinctions matter. Failure reveals when we were wrong. Governance conversion decides which newly discovered distinctions future engineering should inherit.</a:t>
+            </a:r>
+          </a:p>
+        </p:txBody>
+      </p:sp>
+      <p:sp>
+        <p:nvSpPr>
+          <p:cNvPr id="902" name="N-model"/>
+          <p:cNvSpPr/>
+          <p:nvPr/>
+        </p:nvSpPr>
+        <p:spPr>
+          <a:xfrm>
+            <a:off x="457200" y="1627632"/>
+            <a:ext cx="1554480" cy="475488"/>
+          </a:xfrm>
+          <a:prstGeom prst="rect">
+            <a:avLst/>
+          </a:prstGeom>
+          <a:solidFill>
+            <a:srgbClr val="8E6F3E"/>
+          </a:solidFill>
+          <a:ln>
+            <a:noFill/>
+          </a:ln>
+          <a:effectLst/>
+        </p:spPr>
+        <p:style>
+          <a:lnRef idx="1">
+            <a:schemeClr val="accent1"/>
+          </a:lnRef>
+          <a:fillRef idx="3">
+            <a:schemeClr val="accent1"/>
+          </a:fillRef>
+          <a:effectRef idx="2">
+            <a:schemeClr val="accent1"/>
+          </a:effectRef>
+          <a:fontRef idx="minor">
+            <a:schemeClr val="lt1"/>
+          </a:fontRef>
+        </p:style>
+        <p:txBody>
+          <a:bodyPr rtlCol="0" anchor="ctr" wrap="square" lIns="27432" rIns="27432" tIns="22860" bIns="22860"/>
+          <a:lstStyle/>
+          <a:p>
+            <a:pPr algn="ctr"/>
+            <a:r>
+              <a:rPr sz="2000" b="1" i="0">
+                <a:solidFill>
+                  <a:srgbClr val="FFFFFF"/>
+                </a:solidFill>
+              </a:rPr>
+              <a:t>MODEL</a:t>
+            </a:r>
+          </a:p>
+        </p:txBody>
+      </p:sp>
+      <p:cxnSp>
+        <p:nvCxnSpPr>
+          <p:cNvPr id="903" name="Connector 902"/>
+          <p:cNvCxnSpPr/>
+          <p:nvPr/>
+        </p:nvCxnSpPr>
+        <p:spPr>
+          <a:xfrm>
+            <a:off x="2011680" y="1865376"/>
+            <a:ext cx="685800" cy="0"/>
+          </a:xfrm>
+          <a:prstGeom prst="line">
+            <a:avLst/>
+          </a:prstGeom>
+          <a:ln w="19050">
+            <a:solidFill>
+              <a:srgbClr val="8E6F3E"/>
+            </a:solidFill>
+            <a:tailEnd type="triangle"/>
+          </a:ln>
+        </p:spPr>
+        <p:style>
+          <a:lnRef idx="2">
+            <a:schemeClr val="accent1"/>
+          </a:lnRef>
+          <a:fillRef idx="0">
+            <a:schemeClr val="accent1"/>
+          </a:fillRef>
+          <a:effectRef idx="1">
+            <a:schemeClr val="accent1"/>
+          </a:effectRef>
+          <a:fontRef idx="minor">
+            <a:schemeClr val="tx1"/>
+          </a:fontRef>
+        </p:style>
+      </p:cxnSp>
+      <p:sp>
+        <p:nvSpPr>
+          <p:cNvPr id="904" name="N-realization"/>
+          <p:cNvSpPr/>
+          <p:nvPr/>
+        </p:nvSpPr>
+        <p:spPr>
+          <a:xfrm>
+            <a:off x="2697480" y="1627632"/>
+            <a:ext cx="1737360" cy="475488"/>
+          </a:xfrm>
+          <a:prstGeom prst="rect">
+            <a:avLst/>
+          </a:prstGeom>
+          <a:solidFill>
+            <a:srgbClr val="8E6F3E"/>
+          </a:solidFill>
+          <a:ln>
+            <a:noFill/>
+          </a:ln>
+          <a:effectLst/>
+        </p:spPr>
+        <p:style>
+          <a:lnRef idx="1">
+            <a:schemeClr val="accent1"/>
+          </a:lnRef>
+          <a:fillRef idx="3">
+            <a:schemeClr val="accent1"/>
+          </a:fillRef>
+          <a:effectRef idx="2">
+            <a:schemeClr val="accent1"/>
+          </a:effectRef>
+          <a:fontRef idx="minor">
+            <a:schemeClr val="lt1"/>
+          </a:fontRef>
+        </p:style>
+        <p:txBody>
+          <a:bodyPr rtlCol="0" anchor="ctr" wrap="square" lIns="27432" rIns="27432" tIns="22860" bIns="22860"/>
+          <a:lstStyle/>
+          <a:p>
+            <a:pPr algn="ctr"/>
+            <a:r>
+              <a:rPr sz="2000" b="1" i="0">
+                <a:solidFill>
+                  <a:srgbClr val="FFFFFF"/>
+                </a:solidFill>
+              </a:rPr>
+              <a:t>REALIZATION</a:t>
+            </a:r>
+          </a:p>
+        </p:txBody>
+      </p:sp>
+      <p:cxnSp>
+        <p:nvCxnSpPr>
+          <p:cNvPr id="905" name="Connector 904"/>
+          <p:cNvCxnSpPr/>
+          <p:nvPr/>
+        </p:nvCxnSpPr>
+        <p:spPr>
+          <a:xfrm>
+            <a:off x="4434840" y="1865376"/>
+            <a:ext cx="685800" cy="0"/>
+          </a:xfrm>
+          <a:prstGeom prst="line">
+            <a:avLst/>
+          </a:prstGeom>
+          <a:ln w="19050">
+            <a:solidFill>
+              <a:srgbClr val="8E6F3E"/>
+            </a:solidFill>
+            <a:tailEnd type="triangle"/>
+          </a:ln>
+        </p:spPr>
+        <p:style>
+          <a:lnRef idx="2">
+            <a:schemeClr val="accent1"/>
+          </a:lnRef>
+          <a:fillRef idx="0">
+            <a:schemeClr val="accent1"/>
+          </a:fillRef>
+          <a:effectRef idx="1">
+            <a:schemeClr val="accent1"/>
+          </a:effectRef>
+          <a:fontRef idx="minor">
+            <a:schemeClr val="tx1"/>
+          </a:fontRef>
+        </p:style>
+      </p:cxnSp>
+      <p:sp>
+        <p:nvSpPr>
+          <p:cNvPr id="906" name="N-reality"/>
+          <p:cNvSpPr/>
+          <p:nvPr/>
+        </p:nvSpPr>
+        <p:spPr>
+          <a:xfrm>
+            <a:off x="5120640" y="1627632"/>
+            <a:ext cx="1554480" cy="475488"/>
+          </a:xfrm>
+          <a:prstGeom prst="rect">
+            <a:avLst/>
+          </a:prstGeom>
+          <a:solidFill>
+            <a:srgbClr val="8E6F3E"/>
+          </a:solidFill>
+          <a:ln>
+            <a:noFill/>
+          </a:ln>
+          <a:effectLst/>
+        </p:spPr>
+        <p:style>
+          <a:lnRef idx="1">
+            <a:schemeClr val="accent1"/>
+          </a:lnRef>
+          <a:fillRef idx="3">
+            <a:schemeClr val="accent1"/>
+          </a:fillRef>
+          <a:effectRef idx="2">
+            <a:schemeClr val="accent1"/>
+          </a:effectRef>
+          <a:fontRef idx="minor">
+            <a:schemeClr val="lt1"/>
+          </a:fontRef>
+        </p:style>
+        <p:txBody>
+          <a:bodyPr rtlCol="0" anchor="ctr" wrap="square" lIns="27432" rIns="27432" tIns="22860" bIns="22860"/>
+          <a:lstStyle/>
+          <a:p>
+            <a:pPr algn="ctr"/>
+            <a:r>
+              <a:rPr sz="2000" b="1" i="0">
+                <a:solidFill>
+                  <a:srgbClr val="FFFFFF"/>
+                </a:solidFill>
+              </a:rPr>
+              <a:t>REALITY</a:t>
+            </a:r>
+          </a:p>
+        </p:txBody>
+      </p:sp>
+      <p:cxnSp>
+        <p:nvCxnSpPr>
+          <p:cNvPr id="907" name="Connector 906"/>
+          <p:cNvCxnSpPr/>
+          <p:nvPr/>
+        </p:nvCxnSpPr>
+        <p:spPr>
+          <a:xfrm>
+            <a:off x="5897880" y="2103120"/>
+            <a:ext cx="0" cy="594360"/>
+          </a:xfrm>
+          <a:prstGeom prst="line">
+            <a:avLst/>
+          </a:prstGeom>
+          <a:ln w="19050">
+            <a:solidFill>
+              <a:srgbClr val="8E6F3E"/>
+            </a:solidFill>
+            <a:tailEnd type="triangle"/>
+          </a:ln>
+        </p:spPr>
+        <p:style>
+          <a:lnRef idx="2">
+            <a:schemeClr val="accent1"/>
+          </a:lnRef>
+          <a:fillRef idx="0">
+            <a:schemeClr val="accent1"/>
+          </a:fillRef>
+          <a:effectRef idx="1">
+            <a:schemeClr val="accent1"/>
+          </a:effectRef>
+          <a:fontRef idx="minor">
+            <a:schemeClr val="tx1"/>
+          </a:fontRef>
+        </p:style>
+      </p:cxnSp>
+      <p:sp>
+        <p:nvSpPr>
+          <p:cNvPr id="908" name="L-missing"/>
+          <p:cNvSpPr txBox="1"/>
+          <p:nvPr/>
+        </p:nvSpPr>
+        <p:spPr>
+          <a:xfrm>
+            <a:off x="6784848" y="2103120"/>
+            <a:ext cx="2057400" cy="731520"/>
+          </a:xfrm>
+          <a:prstGeom prst="rect">
+            <a:avLst/>
+          </a:prstGeom>
+          <a:noFill/>
+        </p:spPr>
+        <p:txBody>
+          <a:bodyPr wrap="square" anchor="t" lIns="27432" rIns="27432" tIns="22860" bIns="22860">
+            <a:spAutoFit/>
+          </a:bodyPr>
+          <a:lstStyle/>
+          <a:p>
+            <a:pPr algn="l"/>
+            <a:r>
+              <a:rPr sz="2000" b="0" i="0">
+                <a:solidFill>
+                  <a:srgbClr val="555960"/>
+                </a:solidFill>
+              </a:rPr>
+              <a:t>failure reveals a missing distinction</a:t>
+            </a:r>
+          </a:p>
+        </p:txBody>
+      </p:sp>
+      <p:sp>
+        <p:nvSpPr>
+          <p:cNvPr id="909" name="N-evidence"/>
+          <p:cNvSpPr/>
+          <p:nvPr/>
+        </p:nvSpPr>
+        <p:spPr>
+          <a:xfrm>
+            <a:off x="5120640" y="2697480"/>
+            <a:ext cx="1554480" cy="475488"/>
+          </a:xfrm>
+          <a:prstGeom prst="rect">
+            <a:avLst/>
+          </a:prstGeom>
+          <a:solidFill>
+            <a:srgbClr val="8E6F3E"/>
+          </a:solidFill>
+          <a:ln>
+            <a:noFill/>
+          </a:ln>
+          <a:effectLst/>
+        </p:spPr>
+        <p:style>
+          <a:lnRef idx="1">
+            <a:schemeClr val="accent1"/>
+          </a:lnRef>
+          <a:fillRef idx="3">
+            <a:schemeClr val="accent1"/>
+          </a:fillRef>
+          <a:effectRef idx="2">
+            <a:schemeClr val="accent1"/>
+          </a:effectRef>
+          <a:fontRef idx="minor">
+            <a:schemeClr val="lt1"/>
+          </a:fontRef>
+        </p:style>
+        <p:txBody>
+          <a:bodyPr rtlCol="0" anchor="ctr" wrap="square" lIns="27432" rIns="27432" tIns="22860" bIns="22860"/>
+          <a:lstStyle/>
+          <a:p>
+            <a:pPr algn="ctr"/>
+            <a:r>
+              <a:rPr sz="2000" b="1" i="0">
+                <a:solidFill>
+                  <a:srgbClr val="FFFFFF"/>
+                </a:solidFill>
+              </a:rPr>
+              <a:t>EVIDENCE</a:t>
+            </a:r>
+          </a:p>
+        </p:txBody>
+      </p:sp>
+      <p:cxnSp>
+        <p:nvCxnSpPr>
+          <p:cNvPr id="910" name="Connector 909"/>
+          <p:cNvCxnSpPr/>
+          <p:nvPr/>
+        </p:nvCxnSpPr>
+        <p:spPr>
+          <a:xfrm flipH="1">
+            <a:off x="4297680" y="2935224"/>
+            <a:ext cx="822960" cy="0"/>
+          </a:xfrm>
+          <a:prstGeom prst="line">
+            <a:avLst/>
+          </a:prstGeom>
+          <a:ln w="19050">
+            <a:solidFill>
+              <a:srgbClr val="8E6F3E"/>
+            </a:solidFill>
+            <a:tailEnd type="triangle"/>
+          </a:ln>
+        </p:spPr>
+        <p:style>
+          <a:lnRef idx="2">
+            <a:schemeClr val="accent1"/>
+          </a:lnRef>
+          <a:fillRef idx="0">
+            <a:schemeClr val="accent1"/>
+          </a:fillRef>
+          <a:effectRef idx="1">
+            <a:schemeClr val="accent1"/>
+          </a:effectRef>
+          <a:fontRef idx="minor">
+            <a:schemeClr val="tx1"/>
+          </a:fontRef>
+        </p:style>
+      </p:cxnSp>
+      <p:sp>
+        <p:nvSpPr>
+          <p:cNvPr id="911" name="L-judge"/>
+          <p:cNvSpPr txBox="1"/>
+          <p:nvPr/>
+        </p:nvSpPr>
+        <p:spPr>
+          <a:xfrm>
+            <a:off x="3154680" y="2304288"/>
+            <a:ext cx="2103120" cy="347472"/>
+          </a:xfrm>
+          <a:prstGeom prst="rect">
+            <a:avLst/>
+          </a:prstGeom>
+          <a:noFill/>
+        </p:spPr>
+        <p:txBody>
+          <a:bodyPr wrap="square" anchor="t" lIns="27432" rIns="27432" tIns="22860" bIns="22860">
+            <a:spAutoFit/>
+          </a:bodyPr>
+          <a:lstStyle/>
+          <a:p>
+            <a:pPr algn="ctr"/>
+            <a:r>
+              <a:rPr sz="2000" b="0" i="0">
+                <a:solidFill>
+                  <a:srgbClr val="555960"/>
+                </a:solidFill>
+              </a:rPr>
+              <a:t>interpret / judge</a:t>
+            </a:r>
+          </a:p>
+        </p:txBody>
+      </p:sp>
+      <p:sp>
+        <p:nvSpPr>
+          <p:cNvPr id="912" name="N-judgment"/>
+          <p:cNvSpPr/>
+          <p:nvPr/>
+        </p:nvSpPr>
+        <p:spPr>
+          <a:xfrm>
+            <a:off x="2697480" y="2697480"/>
+            <a:ext cx="1600200" cy="475488"/>
+          </a:xfrm>
+          <a:prstGeom prst="rect">
+            <a:avLst/>
+          </a:prstGeom>
+          <a:solidFill>
+            <a:srgbClr val="8E6F3E"/>
+          </a:solidFill>
+          <a:ln>
+            <a:noFill/>
+          </a:ln>
+          <a:effectLst/>
+        </p:spPr>
+        <p:style>
+          <a:lnRef idx="1">
+            <a:schemeClr val="accent1"/>
+          </a:lnRef>
+          <a:fillRef idx="3">
+            <a:schemeClr val="accent1"/>
+          </a:fillRef>
+          <a:effectRef idx="2">
+            <a:schemeClr val="accent1"/>
+          </a:effectRef>
+          <a:fontRef idx="minor">
+            <a:schemeClr val="lt1"/>
+          </a:fontRef>
+        </p:style>
+        <p:txBody>
+          <a:bodyPr rtlCol="0" anchor="ctr" wrap="square" lIns="27432" rIns="27432" tIns="22860" bIns="22860"/>
+          <a:lstStyle/>
+          <a:p>
+            <a:pPr algn="ctr"/>
+            <a:r>
+              <a:rPr sz="2000" b="1" i="0">
+                <a:solidFill>
+                  <a:srgbClr val="FFFFFF"/>
+                </a:solidFill>
+              </a:rPr>
+              <a:t>JUDGMENT</a:t>
+            </a:r>
+          </a:p>
+        </p:txBody>
+      </p:sp>
+      <p:cxnSp>
+        <p:nvCxnSpPr>
+          <p:cNvPr id="913" name="Connector 912"/>
+          <p:cNvCxnSpPr/>
+          <p:nvPr/>
+        </p:nvCxnSpPr>
+        <p:spPr>
+          <a:xfrm flipH="1">
+            <a:off x="1783080" y="3172968"/>
+            <a:ext cx="1234440" cy="438912"/>
+          </a:xfrm>
+          <a:prstGeom prst="line">
+            <a:avLst/>
+          </a:prstGeom>
+          <a:ln w="19050">
+            <a:solidFill>
+              <a:srgbClr val="8E6F3E"/>
+            </a:solidFill>
+            <a:tailEnd type="triangle"/>
+          </a:ln>
+        </p:spPr>
+        <p:style>
+          <a:lnRef idx="2">
+            <a:schemeClr val="accent1"/>
+          </a:lnRef>
+          <a:fillRef idx="0">
+            <a:schemeClr val="accent1"/>
+          </a:fillRef>
+          <a:effectRef idx="1">
+            <a:schemeClr val="accent1"/>
+          </a:effectRef>
+          <a:fontRef idx="minor">
+            <a:schemeClr val="tx1"/>
+          </a:fontRef>
+        </p:style>
+      </p:cxnSp>
+      <p:cxnSp>
+        <p:nvCxnSpPr>
+          <p:cNvPr id="914" name="Connector 913"/>
+          <p:cNvCxnSpPr/>
+          <p:nvPr/>
+        </p:nvCxnSpPr>
+        <p:spPr>
+          <a:xfrm>
+            <a:off x="4023360" y="3172968"/>
+            <a:ext cx="1828800" cy="438912"/>
+          </a:xfrm>
+          <a:prstGeom prst="line">
+            <a:avLst/>
+          </a:prstGeom>
+          <a:ln w="19050">
+            <a:solidFill>
+              <a:srgbClr val="8E6F3E"/>
+            </a:solidFill>
+            <a:tailEnd type="triangle"/>
+          </a:ln>
+        </p:spPr>
+        <p:style>
+          <a:lnRef idx="2">
+            <a:schemeClr val="accent1"/>
+          </a:lnRef>
+          <a:fillRef idx="0">
+            <a:schemeClr val="accent1"/>
+          </a:fillRef>
+          <a:effectRef idx="1">
+            <a:schemeClr val="accent1"/>
+          </a:effectRef>
+          <a:fontRef idx="minor">
+            <a:schemeClr val="tx1"/>
+          </a:fontRef>
+        </p:style>
+      </p:cxnSp>
+      <p:sp>
+        <p:nvSpPr>
+          <p:cNvPr id="915" name="N-nostructure"/>
+          <p:cNvSpPr/>
+          <p:nvPr/>
+        </p:nvSpPr>
+        <p:spPr>
+          <a:xfrm>
+            <a:off x="365760" y="3611880"/>
+            <a:ext cx="2468880" cy="777240"/>
+          </a:xfrm>
+          <a:prstGeom prst="rect">
+            <a:avLst/>
+          </a:prstGeom>
+          <a:solidFill>
+            <a:srgbClr val="F5F1E8"/>
+          </a:solidFill>
+          <a:ln w="12700">
+            <a:solidFill>
+              <a:srgbClr val="C9B991"/>
+            </a:solidFill>
+          </a:ln>
+          <a:effectLst/>
+        </p:spPr>
+        <p:style>
+          <a:lnRef idx="1">
+            <a:schemeClr val="accent1"/>
+          </a:lnRef>
+          <a:fillRef idx="3">
+            <a:schemeClr val="accent1"/>
+          </a:fillRef>
+          <a:effectRef idx="2">
+            <a:schemeClr val="accent1"/>
+          </a:effectRef>
+          <a:fontRef idx="minor">
+            <a:schemeClr val="lt1"/>
+          </a:fontRef>
+        </p:style>
+        <p:txBody>
+          <a:bodyPr rtlCol="0" anchor="ctr" wrap="square" lIns="27432" rIns="27432" tIns="22860" bIns="22860"/>
+          <a:lstStyle/>
+          <a:p>
+            <a:pPr algn="ctr"/>
+            <a:r>
+              <a:rPr sz="2000" b="0" i="1">
+                <a:solidFill>
+                  <a:srgbClr val="5C4826"/>
+                </a:solidFill>
+              </a:rPr>
+              <a:t>lesson does not warrant structure</a:t>
+            </a:r>
+          </a:p>
+        </p:txBody>
+      </p:sp>
+      <p:sp>
+        <p:nvSpPr>
+          <p:cNvPr id="916" name="N-govconv"/>
+          <p:cNvSpPr/>
+          <p:nvPr/>
+        </p:nvSpPr>
+        <p:spPr>
+          <a:xfrm>
+            <a:off x="3840480" y="3611880"/>
+            <a:ext cx="4754880" cy="1143000"/>
+          </a:xfrm>
+          <a:prstGeom prst="rect">
+            <a:avLst/>
+          </a:prstGeom>
+          <a:solidFill>
+            <a:srgbClr val="8E6F3E"/>
+          </a:solidFill>
+          <a:ln>
+            <a:noFill/>
+          </a:ln>
+          <a:effectLst/>
+        </p:spPr>
+        <p:style>
+          <a:lnRef idx="1">
+            <a:schemeClr val="accent1"/>
+          </a:lnRef>
+          <a:fillRef idx="3">
+            <a:schemeClr val="accent1"/>
+          </a:fillRef>
+          <a:effectRef idx="2">
+            <a:schemeClr val="accent1"/>
+          </a:effectRef>
+          <a:fontRef idx="minor">
+            <a:schemeClr val="lt1"/>
+          </a:fontRef>
+        </p:style>
+        <p:txBody>
+          <a:bodyPr rtlCol="0" anchor="ctr" wrap="square" lIns="27432" rIns="27432" tIns="22860" bIns="22860"/>
+          <a:lstStyle/>
+          <a:p>
+            <a:pPr algn="ctr"/>
+            <a:r>
+              <a:rPr sz="2000" b="0" i="1">
+                <a:solidFill>
+                  <a:srgbClr val="FFFFFF"/>
+                </a:solidFill>
+              </a:rPr>
+              <a:t>consequential, recurring, representable</a:t>
+            </a:r>
+          </a:p>
+          <a:p>
+            <a:pPr algn="ctr">
+              <a:spcBef>
+                <a:spcPts val="400"/>
+              </a:spcBef>
+            </a:pPr>
+            <a:r>
+              <a:rPr sz="2000" b="1" i="0">
+                <a:solidFill>
+                  <a:srgbClr val="FFFFFF"/>
+                </a:solidFill>
+              </a:rPr>
+              <a:t>GOVERNANCE CONVERSION</a:t>
+            </a:r>
+          </a:p>
+          <a:p>
+            <a:pPr algn="ctr">
+              <a:spcBef>
+                <a:spcPts val="400"/>
+              </a:spcBef>
+            </a:pPr>
+            <a:r>
+              <a:rPr sz="2000" b="0" i="0">
+                <a:solidFill>
+                  <a:srgbClr val="FFFFFF"/>
+                </a:solidFill>
+              </a:rPr>
+              <a:t>model · validation · constraint · control</a:t>
+            </a:r>
+          </a:p>
+        </p:txBody>
+      </p:sp>
+      <p:cxnSp>
+        <p:nvCxnSpPr>
+          <p:cNvPr id="917" name="Connector 916"/>
+          <p:cNvCxnSpPr/>
+          <p:nvPr/>
+        </p:nvCxnSpPr>
+        <p:spPr>
+          <a:xfrm>
+            <a:off x="1600200" y="4389120"/>
+            <a:ext cx="1234440" cy="731520"/>
+          </a:xfrm>
+          <a:prstGeom prst="line">
+            <a:avLst/>
+          </a:prstGeom>
+          <a:ln w="19050">
+            <a:solidFill>
+              <a:srgbClr val="8E6F3E"/>
+            </a:solidFill>
+            <a:tailEnd type="triangle"/>
+          </a:ln>
+        </p:spPr>
+        <p:style>
+          <a:lnRef idx="2">
+            <a:schemeClr val="accent1"/>
+          </a:lnRef>
+          <a:fillRef idx="0">
+            <a:schemeClr val="accent1"/>
+          </a:fillRef>
+          <a:effectRef idx="1">
+            <a:schemeClr val="accent1"/>
+          </a:effectRef>
+          <a:fontRef idx="minor">
+            <a:schemeClr val="tx1"/>
+          </a:fontRef>
+        </p:style>
+      </p:cxnSp>
+      <p:cxnSp>
+        <p:nvCxnSpPr>
+          <p:cNvPr id="918" name="Connector 917"/>
+          <p:cNvCxnSpPr/>
+          <p:nvPr/>
+        </p:nvCxnSpPr>
+        <p:spPr>
+          <a:xfrm flipH="1">
+            <a:off x="4160520" y="4754880"/>
+            <a:ext cx="2057400" cy="365760"/>
+          </a:xfrm>
+          <a:prstGeom prst="line">
+            <a:avLst/>
+          </a:prstGeom>
+          <a:ln w="19050">
+            <a:solidFill>
+              <a:srgbClr val="8E6F3E"/>
+            </a:solidFill>
+            <a:tailEnd type="triangle"/>
+          </a:ln>
+        </p:spPr>
+        <p:style>
+          <a:lnRef idx="2">
+            <a:schemeClr val="accent1"/>
+          </a:lnRef>
+          <a:fillRef idx="0">
+            <a:schemeClr val="accent1"/>
+          </a:fillRef>
+          <a:effectRef idx="1">
+            <a:schemeClr val="accent1"/>
+          </a:effectRef>
+          <a:fontRef idx="minor">
+            <a:schemeClr val="tx1"/>
+          </a:fontRef>
+        </p:style>
+      </p:cxnSp>
+      <p:sp>
+        <p:nvSpPr>
+          <p:cNvPr id="919" name="N-modelprime"/>
+          <p:cNvSpPr/>
+          <p:nvPr/>
+        </p:nvSpPr>
+        <p:spPr>
+          <a:xfrm>
+            <a:off x="2697480" y="5120640"/>
+            <a:ext cx="1600200" cy="502920"/>
+          </a:xfrm>
+          <a:prstGeom prst="rect">
+            <a:avLst/>
+          </a:prstGeom>
+          <a:solidFill>
+            <a:srgbClr val="8E6F3E"/>
+          </a:solidFill>
+          <a:ln>
+            <a:noFill/>
+          </a:ln>
+          <a:effectLst/>
+        </p:spPr>
+        <p:style>
+          <a:lnRef idx="1">
+            <a:schemeClr val="accent1"/>
+          </a:lnRef>
+          <a:fillRef idx="3">
+            <a:schemeClr val="accent1"/>
+          </a:fillRef>
+          <a:effectRef idx="2">
+            <a:schemeClr val="accent1"/>
+          </a:effectRef>
+          <a:fontRef idx="minor">
+            <a:schemeClr val="lt1"/>
+          </a:fontRef>
+        </p:style>
+        <p:txBody>
+          <a:bodyPr rtlCol="0" anchor="ctr" wrap="square" lIns="27432" rIns="27432" tIns="22860" bIns="22860"/>
+          <a:lstStyle/>
+          <a:p>
+            <a:pPr algn="ctr"/>
+            <a:r>
+              <a:rPr sz="2000" b="1" i="0">
+                <a:solidFill>
+                  <a:srgbClr val="FFFFFF"/>
+                </a:solidFill>
+              </a:rPr>
+              <a:t>MODEL′</a:t>
+            </a:r>
+          </a:p>
+        </p:txBody>
+      </p:sp>
+      <p:cxnSp>
+        <p:nvCxnSpPr>
+          <p:cNvPr id="920" name="Connector 919"/>
+          <p:cNvCxnSpPr/>
+          <p:nvPr/>
+        </p:nvCxnSpPr>
+        <p:spPr>
+          <a:xfrm>
+            <a:off x="4297680" y="5376672"/>
+            <a:ext cx="731520" cy="0"/>
+          </a:xfrm>
+          <a:prstGeom prst="line">
+            <a:avLst/>
+          </a:prstGeom>
+          <a:ln w="19050">
+            <a:solidFill>
+              <a:srgbClr val="8E6F3E"/>
+            </a:solidFill>
+            <a:tailEnd type="triangle"/>
+          </a:ln>
+        </p:spPr>
+        <p:style>
+          <a:lnRef idx="2">
+            <a:schemeClr val="accent1"/>
+          </a:lnRef>
+          <a:fillRef idx="0">
+            <a:schemeClr val="accent1"/>
+          </a:fillRef>
+          <a:effectRef idx="1">
+            <a:schemeClr val="accent1"/>
+          </a:effectRef>
+          <a:fontRef idx="minor">
+            <a:schemeClr val="tx1"/>
+          </a:fontRef>
+        </p:style>
+      </p:cxnSp>
+      <p:sp>
+        <p:nvSpPr>
+          <p:cNvPr id="921" name="L-loop"/>
+          <p:cNvSpPr txBox="1"/>
+          <p:nvPr/>
+        </p:nvSpPr>
+        <p:spPr>
+          <a:xfrm>
+            <a:off x="5120640" y="5193792"/>
+            <a:ext cx="3383280" cy="365760"/>
+          </a:xfrm>
+          <a:prstGeom prst="rect">
+            <a:avLst/>
+          </a:prstGeom>
+          <a:noFill/>
+        </p:spPr>
+        <p:txBody>
+          <a:bodyPr wrap="square" anchor="t" lIns="27432" rIns="27432" tIns="22860" bIns="22860">
+            <a:spAutoFit/>
+          </a:bodyPr>
+          <a:lstStyle/>
+          <a:p>
+            <a:pPr algn="l"/>
+            <a:r>
+              <a:rPr sz="2000" b="0" i="1">
+                <a:solidFill>
+                  <a:srgbClr val="555960"/>
+                </a:solidFill>
+              </a:rPr>
+              <a:t>the loop continues …</a:t>
+            </a:r>
+          </a:p>
+        </p:txBody>
+      </p:sp>
+      <p:sp>
+        <p:nvSpPr>
+          <p:cNvPr id="922" name="FooterBand"/>
+          <p:cNvSpPr/>
+          <p:nvPr/>
+        </p:nvSpPr>
+        <p:spPr>
+          <a:xfrm>
+            <a:off x="274320" y="5852159"/>
+            <a:ext cx="8595360" cy="566928"/>
+          </a:xfrm>
+          <a:prstGeom prst="rect">
+            <a:avLst/>
+          </a:prstGeom>
+          <a:solidFill>
+            <a:srgbClr val="8E6F3E"/>
+          </a:solidFill>
+          <a:ln>
+            <a:noFill/>
+          </a:ln>
+          <a:effectLst/>
+        </p:spPr>
+        <p:style>
+          <a:lnRef idx="1">
+            <a:schemeClr val="accent1"/>
+          </a:lnRef>
+          <a:fillRef idx="3">
+            <a:schemeClr val="accent1"/>
+          </a:fillRef>
+          <a:effectRef idx="2">
+            <a:schemeClr val="accent1"/>
+          </a:effectRef>
+          <a:fontRef idx="minor">
+            <a:schemeClr val="lt1"/>
+          </a:fontRef>
+        </p:style>
+        <p:txBody>
+          <a:bodyPr rtlCol="0" anchor="ctr" wrap="square" lIns="27432" rIns="27432" tIns="22860" bIns="22860"/>
+          <a:lstStyle/>
+          <a:p>
+            <a:pPr algn="ctr"/>
+            <a:r>
+              <a:rPr sz="2000" b="1" i="0">
+                <a:solidFill>
+                  <a:srgbClr val="FFFFFF"/>
+                </a:solidFill>
+              </a:rPr>
+              <a:t>Failure is inevitable. Recurring failure is not.</a:t>
             </a:r>
           </a:p>
         </p:txBody>
@@ -15273,7 +20033,7 @@
           <a:bodyPr/>
           <a:lstStyle/>
           <a:p>
-            <a:fld id="{D44BFD92-1E0B-4552-BB0B-00445F63C69F}" type="slidenum">
+            <a:fld id="{00393831-13B8-4D2E-92B4-CA000F66A112}" type="slidenum">
               <a:rPr lang="en-US" smtClean="0"/>
               <a:t>4</a:t>
             </a:fld>
@@ -16016,7 +20776,7 @@
           <a:bodyPr/>
           <a:lstStyle/>
           <a:p>
-            <a:fld id="{5BD00870-ADF9-47D6-916D-934E0EF8B0BA}" type="slidenum">
+            <a:fld id="{49A14B3B-9B77-43F2-8B18-8EDBEC27936C}" type="slidenum">
               <a:rPr lang="en-US" smtClean="0"/>
               <a:t>5</a:t>
             </a:fld>
@@ -16363,7 +21123,7 @@
           <a:bodyPr/>
           <a:lstStyle/>
           <a:p>
-            <a:fld id="{5C856D03-0CC0-4BEC-9A8A-1592C147E6CF}" type="slidenum">
+            <a:fld id="{18B79205-D12A-40D3-8F8D-9C5E87B1B06B}" type="slidenum">
               <a:rPr lang="en-US" smtClean="0"/>
               <a:t>6</a:t>
             </a:fld>
@@ -16606,7 +21366,7 @@
           <a:bodyPr/>
           <a:lstStyle/>
           <a:p>
-            <a:fld id="{C3C0D9BD-F16C-4A6B-B8A6-E34B73CA1E6B}" type="slidenum">
+            <a:fld id="{69344503-8987-48F2-81C4-B15A70530D60}" type="slidenum">
               <a:rPr lang="en-US" smtClean="0"/>
               <a:t>7</a:t>
             </a:fld>
@@ -16858,7 +21618,7 @@
           <a:bodyPr/>
           <a:lstStyle/>
           <a:p>
-            <a:fld id="{0CF085B0-2B05-4F12-8120-0507C03E97A6}" type="slidenum">
+            <a:fld id="{34DDAC39-E592-4BC0-8D18-7414C01DF0F9}" type="slidenum">
               <a:rPr lang="en-US" smtClean="0"/>
               <a:t>8</a:t>
             </a:fld>
@@ -17652,7 +22412,7 @@
           <a:bodyPr/>
           <a:lstStyle/>
           <a:p>
-            <a:fld id="{B2D3FE27-ED08-4892-B7C9-416508D1890C}" type="slidenum">
+            <a:fld id="{8CF8A65D-8523-4C39-BD83-5C787F1FA9B3}" type="slidenum">
               <a:rPr lang="en-US" smtClean="0"/>
               <a:t>9</a:t>
             </a:fld>

--- a/course/lectures/act-2-delegation-and-control/04-failure-aware-engineering/2-4-Failure-Aware-Engineering.pptx
+++ b/course/lectures/act-2-delegation-and-control/04-failure-aware-engineering/2-4-Failure-Aware-Engineering.pptx
@@ -803,12 +803,12 @@
           </a:p>
           <a:p>
             <a:r>
-              <a:t>- Put student answers on screen, verbatim, as they come.</a:t>
-            </a:r>
-          </a:p>
-          <a:p>
-            <a:r>
-              <a:t>- Keep the list visible; the next slides test candidate causal models against it.</a:t>
+              <a:t>- The LAST open-ended Volkswagen diagnosis. Put student answers on screen, verbatim, as they come.</a:t>
+            </a:r>
+          </a:p>
+          <a:p>
+            <a:r>
+              <a:t>- Do not classify the answers yet - just collect. Keep the list visible through the four causal-model slides if the room setup allows; each model will claim some of the answers.</a:t>
             </a:r>
           </a:p>
         </p:txBody>
@@ -878,12 +878,22 @@
           <a:lstStyle/>
           <a:p>
             <a:r>
-              <a:t>TIMING: 1-2 minutes</a:t>
+              <a:t>TIMING: 1 minute - keep this fast (30-45 seconds of talk).</a:t>
+            </a:r>
+          </a:p>
+          <a:p>
+            <a:r>
+              <a:t>- The narrowest causal boundary: an individual acted, the action produced the outcome.</a:t>
             </a:r>
           </a:p>
           <a:p>
             <a:r>
               <a:t>- Test it against the story: objections, escalation, authorization, delegation to IAV, year-after-year certification. One individual does not account for that.</a:t>
+            </a:r>
+          </a:p>
+          <a:p>
+            <a:r>
+              <a:t>- "Narrow" is not "useless": there can be several interventions at this level, but they all address the individual.</a:t>
             </a:r>
           </a:p>
         </p:txBody>
@@ -953,7 +963,7 @@
           <a:lstStyle/>
           <a:p>
             <a:r>
-              <a:t>TIMING: 1-2 minutes</a:t>
+              <a:t>TIMING: 1 minute - keep this fast (30-45 seconds of talk).</a:t>
             </a:r>
           </a:p>
           <a:p>
@@ -963,7 +973,7 @@
           </a:p>
           <a:p>
             <a:r>
-              <a:t>- Test it against the story: which defenses existed, and where were the holes? The intervention unit becomes the defenses, not the individual.</a:t>
+              <a:t>- The causal boundary widens: not just the act, but the state of every defense it passed through. Test against the story: which defenses existed, and where were the holes?</a:t>
             </a:r>
           </a:p>
         </p:txBody>
@@ -1033,17 +1043,17 @@
           <a:lstStyle/>
           <a:p>
             <a:r>
-              <a:t>TIMING: 1-2 minutes</a:t>
-            </a:r>
-          </a:p>
-          <a:p>
-            <a:r>
-              <a:t>- The causal story moves up a level: the conditions that shaped behavior, not the behavior alone.</a:t>
-            </a:r>
-          </a:p>
-          <a:p>
-            <a:r>
-              <a:t>- Test it against the story: what conditions sustained the same result model year after model year?</a:t>
+              <a:t>TIMING: 1 minute - keep this fast (30-45 seconds of talk).</a:t>
+            </a:r>
+          </a:p>
+          <a:p>
+            <a:r>
+              <a:t>- The causal story moves up a level: conditions -&gt; behavior -&gt; outcome.</a:t>
+            </a:r>
+          </a:p>
+          <a:p>
+            <a:r>
+              <a:t>- Test against the story: what conditions (authority, incentives, schedule, ownership) sustained the same result model year after model year?</a:t>
             </a:r>
           </a:p>
         </p:txBody>
@@ -1118,12 +1128,12 @@
           </a:p>
           <a:p>
             <a:r>
-              <a:t>- [Author: the old slide-12 STAMP narration lands here.]</a:t>
-            </a:r>
-          </a:p>
-          <a:p>
-            <a:r>
-              <a:t>- A systems-theoretic account: include every level of control and feedback, from regulators down to the operating process.</a:t>
+              <a:t>- A systems-theoretic account: constraints flow down, feedback flows up, from regulators through the organization and engineering to the operating process.</a:t>
+            </a:r>
+          </a:p>
+          <a:p>
+            <a:r>
+              <a:t>- Present it seriously - it is a modeling discipline, not a punchline. The cost arrives on the next slide: breadth demands evidence and authority.</a:t>
             </a:r>
           </a:p>
         </p:txBody>
@@ -1198,12 +1208,12 @@
           </a:p>
           <a:p>
             <a:r>
-              <a:t>- Each model includes more of the causal story than the last.</a:t>
-            </a:r>
-          </a:p>
-          <a:p>
-            <a:r>
-              <a:t>- But a more complete account is not automatically a more usable one: as the account widens, more of it lies outside what any one engineer or team can change.</a:t>
+              <a:t>- The axis is causal boundary, not completeness: each model REPRESENTS more structure than the last; none is automatically better.</a:t>
+            </a:r>
+          </a:p>
+          <a:p>
+            <a:r>
+              <a:t>- Broader models expose more relationships - and demand more evidence and more authority to act on what they expose.</a:t>
             </a:r>
           </a:p>
         </p:txBody>
@@ -1278,12 +1288,17 @@
           </a:p>
           <a:p>
             <a:r>
-              <a:t>- Now the line has concrete meaning rather than being abstract modeling doctrine.</a:t>
-            </a:r>
-          </a:p>
-          <a:p>
-            <a:r>
-              <a:t>- Connect back to the student answers from the opening slide of this section: each answer was implicitly one of these models.</a:t>
+              <a:t>- The locus of control is the criterion, not the goal: model far enough to reach the decisions that can change the outcome.</a:t>
+            </a:r>
+          </a:p>
+          <a:p>
+            <a:r>
+              <a:t>- QUALIFICATION (carry this verbally): a relevant cause can lie outside your authority. Do not erase it - escalate it, compensate for it, or identify it as the reason a local fix is insufficient.</a:t>
+            </a:r>
+          </a:p>
+          <a:p>
+            <a:r>
+              <a:t>- Connect back to the student answers from the opening of this section: each answer was implicitly one of these models.</a:t>
             </a:r>
           </a:p>
         </p:txBody>
@@ -8855,14 +8870,154 @@
       </p:sp>
       <p:sp>
         <p:nvSpPr>
-          <p:cNvPr id="901" name="Card"/>
+          <p:cNvPr id="904" name="FooterBand"/>
           <p:cNvSpPr/>
           <p:nvPr/>
         </p:nvSpPr>
         <p:spPr>
           <a:xfrm>
-            <a:off x="548640" y="1463040"/>
-            <a:ext cx="3749039" cy="2377440"/>
+            <a:off x="274320" y="5852159"/>
+            <a:ext cx="8595360" cy="566928"/>
+          </a:xfrm>
+          <a:prstGeom prst="rect">
+            <a:avLst/>
+          </a:prstGeom>
+          <a:solidFill>
+            <a:srgbClr val="8E6F3E"/>
+          </a:solidFill>
+          <a:ln>
+            <a:noFill/>
+          </a:ln>
+          <a:effectLst/>
+        </p:spPr>
+        <p:style>
+          <a:lnRef idx="1">
+            <a:schemeClr val="accent1"/>
+          </a:lnRef>
+          <a:fillRef idx="3">
+            <a:schemeClr val="accent1"/>
+          </a:fillRef>
+          <a:effectRef idx="2">
+            <a:schemeClr val="accent1"/>
+          </a:effectRef>
+          <a:fontRef idx="minor">
+            <a:schemeClr val="lt1"/>
+          </a:fontRef>
+        </p:style>
+        <p:txBody>
+          <a:bodyPr rtlCol="0" anchor="ctr" wrap="square" lIns="27432" rIns="27432" tIns="22860" bIns="22860"/>
+          <a:lstStyle/>
+          <a:p>
+            <a:pPr algn="ctr"/>
+            <a:r>
+              <a:rPr sz="2000" b="1" i="0">
+                <a:solidFill>
+                  <a:srgbClr val="FFFFFF"/>
+                </a:solidFill>
+              </a:rPr>
+              <a:t>Useful, but narrow.</a:t>
+            </a:r>
+          </a:p>
+        </p:txBody>
+      </p:sp>
+      <p:sp>
+        <p:nvSpPr>
+          <p:cNvPr id="910" name="Block"/>
+          <p:cNvSpPr/>
+          <p:nvPr/>
+        </p:nvSpPr>
+        <p:spPr>
+          <a:xfrm>
+            <a:off x="822960" y="2103120"/>
+            <a:ext cx="2194560" cy="731520"/>
+          </a:xfrm>
+          <a:prstGeom prst="rect">
+            <a:avLst/>
+          </a:prstGeom>
+          <a:solidFill>
+            <a:srgbClr val="8E6F3E"/>
+          </a:solidFill>
+          <a:ln>
+            <a:noFill/>
+          </a:ln>
+          <a:effectLst/>
+        </p:spPr>
+        <p:style>
+          <a:lnRef idx="1">
+            <a:schemeClr val="accent1"/>
+          </a:lnRef>
+          <a:fillRef idx="3">
+            <a:schemeClr val="accent1"/>
+          </a:fillRef>
+          <a:effectRef idx="2">
+            <a:schemeClr val="accent1"/>
+          </a:effectRef>
+          <a:fontRef idx="minor">
+            <a:schemeClr val="lt1"/>
+          </a:fontRef>
+        </p:style>
+        <p:txBody>
+          <a:bodyPr rtlCol="0" anchor="ctr" wrap="square" lIns="27432" rIns="27432" tIns="22860" bIns="22860"/>
+          <a:lstStyle/>
+          <a:p>
+            <a:pPr algn="ctr"/>
+            <a:r>
+              <a:rPr sz="2000" b="1" i="0">
+                <a:solidFill>
+                  <a:srgbClr val="FFFFFF"/>
+                </a:solidFill>
+              </a:rPr>
+              <a:t>INDIVIDUAL</a:t>
+            </a:r>
+          </a:p>
+        </p:txBody>
+      </p:sp>
+      <p:cxnSp>
+        <p:nvCxnSpPr>
+          <p:cNvPr id="911" name="Connector 911"/>
+          <p:cNvCxnSpPr/>
+          <p:nvPr/>
+        </p:nvCxnSpPr>
+        <p:spPr>
+          <a:xfrm>
+            <a:off x="3017520" y="2468880"/>
+            <a:ext cx="548640" cy="0"/>
+          </a:xfrm>
+          <a:prstGeom prst="line">
+            <a:avLst/>
+          </a:prstGeom>
+          <a:ln w="28575">
+            <a:solidFill>
+              <a:srgbClr val="8E6F3E"/>
+            </a:solidFill>
+            <a:tailEnd type="triangle"/>
+          </a:ln>
+        </p:spPr>
+        <p:style>
+          <a:lnRef idx="2">
+            <a:schemeClr val="accent1"/>
+          </a:lnRef>
+          <a:fillRef idx="0">
+            <a:schemeClr val="accent1"/>
+          </a:fillRef>
+          <a:effectRef idx="1">
+            <a:schemeClr val="accent1"/>
+          </a:effectRef>
+          <a:fontRef idx="minor">
+            <a:schemeClr val="tx1"/>
+          </a:fontRef>
+        </p:style>
+      </p:cxnSp>
+      <p:sp>
+        <p:nvSpPr>
+          <p:cNvPr id="912" name="Card"/>
+          <p:cNvSpPr/>
+          <p:nvPr/>
+        </p:nvSpPr>
+        <p:spPr>
+          <a:xfrm>
+            <a:off x="3566160" y="2103120"/>
+            <a:ext cx="2011680" cy="731520"/>
           </a:xfrm>
           <a:prstGeom prst="rect">
             <a:avLst/>
@@ -8902,35 +9057,20 @@
                   <a:srgbClr val="5C4826"/>
                 </a:solidFill>
               </a:rPr>
-              <a:t>CAUSAL MODEL</a:t>
-            </a:r>
-          </a:p>
-          <a:p>
-            <a:pPr algn="ctr">
-              <a:spcBef>
-                <a:spcPts val="1200"/>
-              </a:spcBef>
-            </a:pPr>
-            <a:r>
-              <a:rPr sz="2000" b="0" i="0">
-                <a:solidFill>
-                  <a:srgbClr val="555960"/>
-                </a:solidFill>
-              </a:rPr>
-              <a:t>An individual erred.</a:t>
+              <a:t>action</a:t>
             </a:r>
           </a:p>
         </p:txBody>
       </p:sp>
       <p:cxnSp>
         <p:nvCxnSpPr>
-          <p:cNvPr id="902" name="Connector 901"/>
+          <p:cNvPr id="913" name="Connector 913"/>
           <p:cNvCxnSpPr/>
           <p:nvPr/>
         </p:nvCxnSpPr>
         <p:spPr>
           <a:xfrm>
-            <a:off x="4389120" y="2651760"/>
+            <a:off x="5577840" y="2468880"/>
             <a:ext cx="548640" cy="0"/>
           </a:xfrm>
           <a:prstGeom prst="line">
@@ -8960,23 +9100,25 @@
       </p:cxnSp>
       <p:sp>
         <p:nvSpPr>
-          <p:cNvPr id="903" name="Block"/>
+          <p:cNvPr id="914" name="Card"/>
           <p:cNvSpPr/>
           <p:nvPr/>
         </p:nvSpPr>
         <p:spPr>
           <a:xfrm>
-            <a:off x="5029200" y="1463040"/>
-            <a:ext cx="3566160" cy="2377440"/>
+            <a:off x="6126480" y="2103120"/>
+            <a:ext cx="2011680" cy="731520"/>
           </a:xfrm>
           <a:prstGeom prst="rect">
             <a:avLst/>
           </a:prstGeom>
           <a:solidFill>
-            <a:srgbClr val="8E6F3E"/>
+            <a:srgbClr val="F5F1E8"/>
           </a:solidFill>
-          <a:ln>
-            <a:noFill/>
+          <a:ln w="12700">
+            <a:solidFill>
+              <a:srgbClr val="C9B991"/>
+            </a:solidFill>
           </a:ln>
           <a:effectLst/>
         </p:spPr>
@@ -9002,73 +9144,68 @@
             <a:r>
               <a:rPr sz="2000" b="1" i="0">
                 <a:solidFill>
-                  <a:srgbClr val="FFFFFF"/>
-                </a:solidFill>
-              </a:rPr>
-              <a:t>ONE INTERVENTION</a:t>
-            </a:r>
-          </a:p>
+                  <a:srgbClr val="5C4826"/>
+                </a:solidFill>
+              </a:rPr>
+              <a:t>outcome</a:t>
+            </a:r>
+          </a:p>
+        </p:txBody>
+      </p:sp>
+      <p:sp>
+        <p:nvSpPr>
+          <p:cNvPr id="915" name="Label"/>
+          <p:cNvSpPr txBox="1"/>
+          <p:nvPr/>
+        </p:nvSpPr>
+        <p:spPr>
+          <a:xfrm>
+            <a:off x="548640" y="3474720"/>
+            <a:ext cx="8046720" cy="457200"/>
+          </a:xfrm>
+          <a:prstGeom prst="rect">
+            <a:avLst/>
+          </a:prstGeom>
+          <a:noFill/>
+        </p:spPr>
+        <p:txBody>
+          <a:bodyPr wrap="square" anchor="t" lIns="27432" rIns="27432" tIns="22860" bIns="22860">
+            <a:spAutoFit/>
+          </a:bodyPr>
+          <a:lstStyle/>
           <a:p>
             <a:pPr algn="ctr"/>
             <a:r>
+              <a:rPr sz="2000" b="1" i="0">
+                <a:solidFill>
+                  <a:srgbClr val="5C4826"/>
+                </a:solidFill>
+              </a:rPr>
+              <a:t>Model: </a:t>
+            </a:r>
+            <a:r>
               <a:rPr sz="2000" b="0" i="0">
                 <a:solidFill>
-                  <a:srgbClr val="FFFFFF"/>
-                </a:solidFill>
-              </a:rPr>
-              <a:t>change the individual</a:t>
-            </a:r>
-          </a:p>
-        </p:txBody>
-      </p:sp>
-      <p:sp>
-        <p:nvSpPr>
-          <p:cNvPr id="904" name="FooterBand"/>
-          <p:cNvSpPr/>
-          <p:nvPr/>
-        </p:nvSpPr>
-        <p:spPr>
-          <a:xfrm>
-            <a:off x="274320" y="5852159"/>
-            <a:ext cx="8595360" cy="566928"/>
-          </a:xfrm>
-          <a:prstGeom prst="rect">
-            <a:avLst/>
-          </a:prstGeom>
-          <a:solidFill>
-            <a:srgbClr val="8E6F3E"/>
-          </a:solidFill>
-          <a:ln>
-            <a:noFill/>
-          </a:ln>
-          <a:effectLst/>
-        </p:spPr>
-        <p:style>
-          <a:lnRef idx="1">
-            <a:schemeClr val="accent1"/>
-          </a:lnRef>
-          <a:fillRef idx="3">
-            <a:schemeClr val="accent1"/>
-          </a:fillRef>
-          <a:effectRef idx="2">
-            <a:schemeClr val="accent1"/>
-          </a:effectRef>
-          <a:fontRef idx="minor">
-            <a:schemeClr val="lt1"/>
-          </a:fontRef>
-        </p:style>
-        <p:txBody>
-          <a:bodyPr rtlCol="0" anchor="ctr" wrap="square" lIns="27432" rIns="27432" tIns="22860" bIns="22860"/>
-          <a:lstStyle/>
-          <a:p>
-            <a:pPr algn="ctr"/>
+                  <a:srgbClr val="555960"/>
+                </a:solidFill>
+              </a:rPr>
+              <a:t>an individual erred.   </a:t>
+            </a:r>
             <a:r>
               <a:rPr sz="2000" b="1" i="0">
                 <a:solidFill>
-                  <a:srgbClr val="FFFFFF"/>
-                </a:solidFill>
-              </a:rPr>
-              <a:t>Useful, but gives one intervention.</a:t>
+                  <a:srgbClr val="5C4826"/>
+                </a:solidFill>
+              </a:rPr>
+              <a:t>Intervention: </a:t>
+            </a:r>
+            <a:r>
+              <a:rPr sz="2000" b="0" i="0">
+                <a:solidFill>
+                  <a:srgbClr val="555960"/>
+                </a:solidFill>
+              </a:rPr>
+              <a:t>change the individual.</a:t>
             </a:r>
           </a:p>
         </p:txBody>
@@ -10069,7 +10206,143 @@
                   <a:srgbClr val="5C4826"/>
                 </a:solidFill>
               </a:rPr>
-              <a:t>Now defenses and their holes matter.</a:t>
+              <a:t>Now the condition of the defenses matters.</a:t>
+            </a:r>
+          </a:p>
+        </p:txBody>
+      </p:sp>
+      <p:sp>
+        <p:nvSpPr>
+          <p:cNvPr id="930" name="Label"/>
+          <p:cNvSpPr txBox="1"/>
+          <p:nvPr/>
+        </p:nvSpPr>
+        <p:spPr>
+          <a:xfrm>
+            <a:off x="1234440" y="896112"/>
+            <a:ext cx="1463040" cy="320040"/>
+          </a:xfrm>
+          <a:prstGeom prst="rect">
+            <a:avLst/>
+          </a:prstGeom>
+          <a:noFill/>
+        </p:spPr>
+        <p:txBody>
+          <a:bodyPr wrap="square" anchor="t" lIns="27432" rIns="27432" tIns="22860" bIns="22860">
+            <a:spAutoFit/>
+          </a:bodyPr>
+          <a:lstStyle/>
+          <a:p>
+            <a:pPr algn="ctr"/>
+            <a:r>
+              <a:rPr sz="2000" b="1" i="0">
+                <a:solidFill>
+                  <a:srgbClr val="8E6F3E"/>
+                </a:solidFill>
+              </a:rPr>
+              <a:t>DEFENSE</a:t>
+            </a:r>
+          </a:p>
+        </p:txBody>
+      </p:sp>
+      <p:sp>
+        <p:nvSpPr>
+          <p:cNvPr id="931" name="Label"/>
+          <p:cNvSpPr txBox="1"/>
+          <p:nvPr/>
+        </p:nvSpPr>
+        <p:spPr>
+          <a:xfrm>
+            <a:off x="2880360" y="896112"/>
+            <a:ext cx="1463040" cy="320040"/>
+          </a:xfrm>
+          <a:prstGeom prst="rect">
+            <a:avLst/>
+          </a:prstGeom>
+          <a:noFill/>
+        </p:spPr>
+        <p:txBody>
+          <a:bodyPr wrap="square" anchor="t" lIns="27432" rIns="27432" tIns="22860" bIns="22860">
+            <a:spAutoFit/>
+          </a:bodyPr>
+          <a:lstStyle/>
+          <a:p>
+            <a:pPr algn="ctr"/>
+            <a:r>
+              <a:rPr sz="2000" b="1" i="0">
+                <a:solidFill>
+                  <a:srgbClr val="8E6F3E"/>
+                </a:solidFill>
+              </a:rPr>
+              <a:t>DEFENSE</a:t>
+            </a:r>
+          </a:p>
+        </p:txBody>
+      </p:sp>
+      <p:sp>
+        <p:nvSpPr>
+          <p:cNvPr id="932" name="Label"/>
+          <p:cNvSpPr txBox="1"/>
+          <p:nvPr/>
+        </p:nvSpPr>
+        <p:spPr>
+          <a:xfrm>
+            <a:off x="4526280" y="896112"/>
+            <a:ext cx="1463040" cy="320040"/>
+          </a:xfrm>
+          <a:prstGeom prst="rect">
+            <a:avLst/>
+          </a:prstGeom>
+          <a:noFill/>
+        </p:spPr>
+        <p:txBody>
+          <a:bodyPr wrap="square" anchor="t" lIns="27432" rIns="27432" tIns="22860" bIns="22860">
+            <a:spAutoFit/>
+          </a:bodyPr>
+          <a:lstStyle/>
+          <a:p>
+            <a:pPr algn="ctr"/>
+            <a:r>
+              <a:rPr sz="2000" b="1" i="0">
+                <a:solidFill>
+                  <a:srgbClr val="8E6F3E"/>
+                </a:solidFill>
+              </a:rPr>
+              <a:t>DEFENSE</a:t>
+            </a:r>
+          </a:p>
+        </p:txBody>
+      </p:sp>
+      <p:sp>
+        <p:nvSpPr>
+          <p:cNvPr id="933" name="Label"/>
+          <p:cNvSpPr txBox="1"/>
+          <p:nvPr/>
+        </p:nvSpPr>
+        <p:spPr>
+          <a:xfrm>
+            <a:off x="6172200" y="896112"/>
+            <a:ext cx="1463040" cy="320040"/>
+          </a:xfrm>
+          <a:prstGeom prst="rect">
+            <a:avLst/>
+          </a:prstGeom>
+          <a:noFill/>
+        </p:spPr>
+        <p:txBody>
+          <a:bodyPr wrap="square" anchor="t" lIns="27432" rIns="27432" tIns="22860" bIns="22860">
+            <a:spAutoFit/>
+          </a:bodyPr>
+          <a:lstStyle/>
+          <a:p>
+            <a:pPr algn="ctr"/>
+            <a:r>
+              <a:rPr sz="2000" b="1" i="0">
+                <a:solidFill>
+                  <a:srgbClr val="8E6F3E"/>
+                </a:solidFill>
+              </a:rPr>
+              <a:t>DEFENSE</a:t>
             </a:r>
           </a:p>
         </p:txBody>
@@ -10381,7 +10654,7 @@
         </p:nvSpPr>
         <p:spPr>
           <a:xfrm>
-            <a:off x="548640" y="3840480"/>
+            <a:off x="548640" y="4160520"/>
             <a:ext cx="8046720" cy="457200"/>
           </a:xfrm>
           <a:prstGeom prst="rect">
@@ -10402,7 +10675,41 @@
                   <a:srgbClr val="5C4826"/>
                 </a:solidFill>
               </a:rPr>
-              <a:t>Now conditions shaping behavior matter.</a:t>
+              <a:t>Now the conditions shaping behavior matter.</a:t>
+            </a:r>
+          </a:p>
+        </p:txBody>
+      </p:sp>
+      <p:sp>
+        <p:nvSpPr>
+          <p:cNvPr id="920" name="Label"/>
+          <p:cNvSpPr txBox="1"/>
+          <p:nvPr/>
+        </p:nvSpPr>
+        <p:spPr>
+          <a:xfrm>
+            <a:off x="274320" y="3200400"/>
+            <a:ext cx="3017520" cy="365760"/>
+          </a:xfrm>
+          <a:prstGeom prst="rect">
+            <a:avLst/>
+          </a:prstGeom>
+          <a:noFill/>
+        </p:spPr>
+        <p:txBody>
+          <a:bodyPr wrap="square" anchor="t" lIns="27432" rIns="27432" tIns="22860" bIns="22860">
+            <a:spAutoFit/>
+          </a:bodyPr>
+          <a:lstStyle/>
+          <a:p>
+            <a:pPr algn="ctr"/>
+            <a:r>
+              <a:rPr sz="2000" b="0" i="0">
+                <a:solidFill>
+                  <a:srgbClr val="555960"/>
+                </a:solidFill>
+              </a:rPr>
+              <a:t>authority · incentives · schedule · ownership</a:t>
             </a:r>
           </a:p>
         </p:txBody>
@@ -10446,7 +10753,7 @@
                   <a:srgbClr val="000000"/>
                 </a:solidFill>
               </a:rPr>
-              <a:t>STAMP: Fine, include everything</a:t>
+              <a:t>STAMP: Model the control structure</a:t>
             </a:r>
           </a:p>
         </p:txBody>
@@ -10995,7 +11302,7 @@
                   <a:srgbClr val="5C4826"/>
                 </a:solidFill>
               </a:rPr>
-              <a:t>Model the entire control structure — every level, every loop.</a:t>
+              <a:t>Now control and feedback across the system matter.</a:t>
             </a:r>
           </a:p>
         </p:txBody>
@@ -11039,7 +11346,7 @@
                   <a:srgbClr val="000000"/>
                 </a:solidFill>
               </a:rPr>
-              <a:t>More complete can become less actionable</a:t>
+              <a:t>A broader model is not automatically a better model</a:t>
             </a:r>
           </a:p>
         </p:txBody>
@@ -11291,7 +11598,7 @@
         </p:nvCxnSpPr>
         <p:spPr>
           <a:xfrm>
-            <a:off x="548640" y="3383280"/>
+            <a:off x="548640" y="4114800"/>
             <a:ext cx="8001000" cy="0"/>
           </a:xfrm>
           <a:prstGeom prst="line">
@@ -11321,14 +11628,14 @@
       </p:cxnSp>
       <p:sp>
         <p:nvSpPr>
-          <p:cNvPr id="906" name="Label"/>
+          <p:cNvPr id="920" name="Label"/>
           <p:cNvSpPr txBox="1"/>
           <p:nvPr/>
         </p:nvSpPr>
         <p:spPr>
           <a:xfrm>
-            <a:off x="548640" y="3520440"/>
-            <a:ext cx="8046720" cy="411480"/>
+            <a:off x="457200" y="2971800"/>
+            <a:ext cx="2011680" cy="548640"/>
           </a:xfrm>
           <a:prstGeom prst="rect">
             <a:avLst/>
@@ -11343,12 +11650,261 @@
           <a:p>
             <a:pPr algn="ctr"/>
             <a:r>
+              <a:rPr sz="2000" b="0" i="0">
+                <a:solidFill>
+                  <a:srgbClr val="555960"/>
+                </a:solidFill>
+              </a:rPr>
+              <a:t>the individual act</a:t>
+            </a:r>
+          </a:p>
+        </p:txBody>
+      </p:sp>
+      <p:sp>
+        <p:nvSpPr>
+          <p:cNvPr id="921" name="Label"/>
+          <p:cNvSpPr txBox="1"/>
+          <p:nvPr/>
+        </p:nvSpPr>
+        <p:spPr>
+          <a:xfrm>
+            <a:off x="2532888" y="2971800"/>
+            <a:ext cx="2011680" cy="548640"/>
+          </a:xfrm>
+          <a:prstGeom prst="rect">
+            <a:avLst/>
+          </a:prstGeom>
+          <a:noFill/>
+        </p:spPr>
+        <p:txBody>
+          <a:bodyPr wrap="square" anchor="t" lIns="27432" rIns="27432" tIns="22860" bIns="22860">
+            <a:spAutoFit/>
+          </a:bodyPr>
+          <a:lstStyle/>
+          <a:p>
+            <a:pPr algn="ctr"/>
+            <a:r>
+              <a:rPr sz="2000" b="0" i="0">
+                <a:solidFill>
+                  <a:srgbClr val="555960"/>
+                </a:solidFill>
+              </a:rPr>
+              <a:t>the state of the defenses</a:t>
+            </a:r>
+          </a:p>
+        </p:txBody>
+      </p:sp>
+      <p:sp>
+        <p:nvSpPr>
+          <p:cNvPr id="922" name="Label"/>
+          <p:cNvSpPr txBox="1"/>
+          <p:nvPr/>
+        </p:nvSpPr>
+        <p:spPr>
+          <a:xfrm>
+            <a:off x="4608576" y="2971800"/>
+            <a:ext cx="2011680" cy="548640"/>
+          </a:xfrm>
+          <a:prstGeom prst="rect">
+            <a:avLst/>
+          </a:prstGeom>
+          <a:noFill/>
+        </p:spPr>
+        <p:txBody>
+          <a:bodyPr wrap="square" anchor="t" lIns="27432" rIns="27432" tIns="22860" bIns="22860">
+            <a:spAutoFit/>
+          </a:bodyPr>
+          <a:lstStyle/>
+          <a:p>
+            <a:pPr algn="ctr"/>
+            <a:r>
+              <a:rPr sz="2000" b="0" i="0">
+                <a:solidFill>
+                  <a:srgbClr val="555960"/>
+                </a:solidFill>
+              </a:rPr>
+              <a:t>the shaping conditions</a:t>
+            </a:r>
+          </a:p>
+        </p:txBody>
+      </p:sp>
+      <p:sp>
+        <p:nvSpPr>
+          <p:cNvPr id="923" name="Label"/>
+          <p:cNvSpPr txBox="1"/>
+          <p:nvPr/>
+        </p:nvSpPr>
+        <p:spPr>
+          <a:xfrm>
+            <a:off x="6684264" y="2971800"/>
+            <a:ext cx="2011680" cy="548640"/>
+          </a:xfrm>
+          <a:prstGeom prst="rect">
+            <a:avLst/>
+          </a:prstGeom>
+          <a:noFill/>
+        </p:spPr>
+        <p:txBody>
+          <a:bodyPr wrap="square" anchor="t" lIns="27432" rIns="27432" tIns="22860" bIns="22860">
+            <a:spAutoFit/>
+          </a:bodyPr>
+          <a:lstStyle/>
+          <a:p>
+            <a:pPr algn="ctr"/>
+            <a:r>
+              <a:rPr sz="2000" b="0" i="0">
+                <a:solidFill>
+                  <a:srgbClr val="555960"/>
+                </a:solidFill>
+              </a:rPr>
+              <a:t>control and feedback loops</a:t>
+            </a:r>
+          </a:p>
+        </p:txBody>
+      </p:sp>
+      <p:sp>
+        <p:nvSpPr>
+          <p:cNvPr id="924" name="Label"/>
+          <p:cNvSpPr txBox="1"/>
+          <p:nvPr/>
+        </p:nvSpPr>
+        <p:spPr>
+          <a:xfrm>
+            <a:off x="548640" y="3749040"/>
+            <a:ext cx="3474720" cy="320040"/>
+          </a:xfrm>
+          <a:prstGeom prst="rect">
+            <a:avLst/>
+          </a:prstGeom>
+          <a:noFill/>
+        </p:spPr>
+        <p:txBody>
+          <a:bodyPr wrap="square" anchor="t" lIns="27432" rIns="27432" tIns="22860" bIns="22860">
+            <a:spAutoFit/>
+          </a:bodyPr>
+          <a:lstStyle/>
+          <a:p>
+            <a:pPr algn="l"/>
+            <a:r>
+              <a:rPr sz="2000" b="0" i="0">
+                <a:solidFill>
+                  <a:srgbClr val="555960"/>
+                </a:solidFill>
+              </a:rPr>
+              <a:t>NARROWER CAUSAL BOUNDARY</a:t>
+            </a:r>
+          </a:p>
+        </p:txBody>
+      </p:sp>
+      <p:sp>
+        <p:nvSpPr>
+          <p:cNvPr id="925" name="Label"/>
+          <p:cNvSpPr txBox="1"/>
+          <p:nvPr/>
+        </p:nvSpPr>
+        <p:spPr>
+          <a:xfrm>
+            <a:off x="6949440" y="3749040"/>
+            <a:ext cx="1600200" cy="320040"/>
+          </a:xfrm>
+          <a:prstGeom prst="rect">
+            <a:avLst/>
+          </a:prstGeom>
+          <a:noFill/>
+        </p:spPr>
+        <p:txBody>
+          <a:bodyPr wrap="square" anchor="t" lIns="27432" rIns="27432" tIns="22860" bIns="22860">
+            <a:spAutoFit/>
+          </a:bodyPr>
+          <a:lstStyle/>
+          <a:p>
+            <a:pPr algn="r"/>
+            <a:r>
+              <a:rPr sz="2000" b="0" i="0">
+                <a:solidFill>
+                  <a:srgbClr val="555960"/>
+                </a:solidFill>
+              </a:rPr>
+              <a:t>BROADER</a:t>
+            </a:r>
+          </a:p>
+        </p:txBody>
+      </p:sp>
+      <p:sp>
+        <p:nvSpPr>
+          <p:cNvPr id="926" name="Label"/>
+          <p:cNvSpPr txBox="1"/>
+          <p:nvPr/>
+        </p:nvSpPr>
+        <p:spPr>
+          <a:xfrm>
+            <a:off x="548640" y="4315968"/>
+            <a:ext cx="8046720" cy="365760"/>
+          </a:xfrm>
+          <a:prstGeom prst="rect">
+            <a:avLst/>
+          </a:prstGeom>
+          <a:noFill/>
+        </p:spPr>
+        <p:txBody>
+          <a:bodyPr wrap="square" anchor="t" lIns="27432" rIns="27432" tIns="22860" bIns="22860">
+            <a:spAutoFit/>
+          </a:bodyPr>
+          <a:lstStyle/>
+          <a:p>
+            <a:pPr algn="ctr"/>
+            <a:r>
               <a:rPr sz="2000" b="1" i="0">
                 <a:solidFill>
                   <a:srgbClr val="8E6F3E"/>
                 </a:solidFill>
               </a:rPr>
-              <a:t>more complete →</a:t>
+              <a:t>more structure represented</a:t>
+            </a:r>
+          </a:p>
+        </p:txBody>
+      </p:sp>
+      <p:sp>
+        <p:nvSpPr>
+          <p:cNvPr id="927" name="Label"/>
+          <p:cNvSpPr txBox="1"/>
+          <p:nvPr/>
+        </p:nvSpPr>
+        <p:spPr>
+          <a:xfrm>
+            <a:off x="822960" y="4892040"/>
+            <a:ext cx="7498080" cy="822960"/>
+          </a:xfrm>
+          <a:prstGeom prst="rect">
+            <a:avLst/>
+          </a:prstGeom>
+          <a:noFill/>
+        </p:spPr>
+        <p:txBody>
+          <a:bodyPr wrap="square" anchor="t" lIns="27432" rIns="27432" tIns="22860" bIns="22860">
+            <a:spAutoFit/>
+          </a:bodyPr>
+          <a:lstStyle/>
+          <a:p>
+            <a:pPr algn="ctr"/>
+            <a:r>
+              <a:rPr sz="2000" b="0" i="0">
+                <a:solidFill>
+                  <a:srgbClr val="5C4826"/>
+                </a:solidFill>
+              </a:rPr>
+              <a:t>Broader models expose more relationships.</a:t>
+            </a:r>
+          </a:p>
+          <a:p>
+            <a:pPr algn="ctr"/>
+            <a:r>
+              <a:rPr sz="2000" b="0" i="0">
+                <a:solidFill>
+                  <a:srgbClr val="5C4826"/>
+                </a:solidFill>
+              </a:rPr>
+              <a:t>They also demand more evidence and more authority to act.</a:t>
             </a:r>
           </a:p>
         </p:txBody>
@@ -11392,7 +11948,7 @@
                   <a:srgbClr val="000000"/>
                 </a:solidFill>
               </a:rPr>
-              <a:t>Match the causal model to the locus of control</a:t>
+              <a:t>Match causal breadth to the decision</a:t>
             </a:r>
           </a:p>
         </p:txBody>
@@ -11723,7 +12279,7 @@
                   <a:srgbClr val="FFFFFF"/>
                 </a:solidFill>
               </a:rPr>
-              <a:t>Choose the model whose levers you actually hold.</a:t>
+              <a:t>Model far enough to reach the decisions that can change the outcome.</a:t>
             </a:r>
           </a:p>
         </p:txBody>

--- a/course/lectures/act-2-delegation-and-control/04-failure-aware-engineering/2-4-Failure-Aware-Engineering.pptx
+++ b/course/lectures/act-2-delegation-and-control/04-failure-aware-engineering/2-4-Failure-Aware-Engineering.pptx
@@ -2034,12 +2034,12 @@
           </a:p>
           <a:p>
             <a:r>
-              <a:t>- Straight out of Engineering Knowledge (Act I): an observation becomes knowledge only through analysis.</a:t>
-            </a:r>
-          </a:p>
-          <a:p>
-            <a:r>
-              <a:t>- The 2012 hardware-failure slide is the counter-example to hold up: evidence was produced, analysis happened, and the lesson served the wrong obligation.</a:t>
+              <a:t>- The chain is OBSERVATION -&gt; EVIDENCE -&gt; INTERPRETATION -&gt; LESSON. Calling the observation itself "failure" would beg the question students are meant to reason about in the Instagram case: whether and where an engineering failure occurred.</a:t>
+            </a:r>
+          </a:p>
+          <a:p>
+            <a:r>
+              <a:t>- Straight out of Engineering Knowledge (Act I): an observation becomes knowledge only through analysis. The 2012 Volkswagen hardware-failure slide is the counter-example to hold up: evidence was produced, interpretation happened, and the lesson served the wrong obligation.</a:t>
             </a:r>
           </a:p>
         </p:txBody>
@@ -2114,7 +2114,12 @@
           </a:p>
           <a:p>
             <a:r>
-              <a:t>- One failure licenses several candidate lessons of increasing breadth; the evidence supports only some of them.</a:t>
+              <a:t>- Support thins as the claim broadens: narrow / broader / sweeping.</a:t>
+            </a:r>
+          </a:p>
+          <a:p>
+            <a:r>
+              <a:t>- THE CASE (carry verbally): an observation that some users report a harmful experience does not by itself establish that Instagram causes that outcome for all teenage users, nor that a particular feature causes it, nor that a proposed intervention will improve it. Each wider claim needs more evidence than the observation provides.</a:t>
             </a:r>
           </a:p>
           <a:p>
@@ -2194,12 +2199,12 @@
           </a:p>
           <a:p>
             <a:r>
-              <a:t>- Regression test vs generalized lesson: both are legitimate; they preserve different things.</a:t>
-            </a:r>
-          </a:p>
-          <a:p>
-            <a:r>
-              <a:t>- ASK what each one catches next time, and what each one misses.</a:t>
+              <a:t>- Regression test vs generalized model or control: both legitimate; they preserve different things. ASK what each catches next time, and what each misses.</a:t>
+            </a:r>
+          </a:p>
+          <a:p>
+            <a:r>
+              <a:t>- For a socio-technical outcome like the Instagram case, "regression test" is metaphorically less direct - and that is itself interesting: some lessons cannot be encoded as an ordinary software test. Sets up SYSTEM / TEAM / ENGINEER.</a:t>
             </a:r>
           </a:p>
         </p:txBody>
@@ -2279,6 +2284,11 @@
           </a:p>
           <a:p>
             <a:r>
+              <a:t>- The reflective account is exactly what prevents "Facebook had research, therefore Facebook knew X" from collapsing evidence, interpretation, and organizational decision into one thing.</a:t>
+            </a:r>
+          </a:p>
+          <a:p>
+            <a:r>
               <a:t>- Postmortems that stop at the causal account leave the second kind of learning on the table.</a:t>
             </a:r>
           </a:p>
@@ -2439,12 +2449,12 @@
           </a:p>
           <a:p>
             <a:r>
-              <a:t>- From Engineering Knowledge: consequential knowledge can migrate into requirements, specifications, architecture, mechanisms/models, validation, or continuing checks/controls when future work should inherit the lesson.</a:t>
-            </a:r>
-          </a:p>
-          <a:p>
-            <a:r>
-              <a:t>- ASK for one lesson from the course project and where it should live.</a:t>
+              <a:t>- From Engineering Knowledge: consequential knowledge migrates into requirements, specifications, architecture, models, validation, or controls when future work should inherit the lesson.</a:t>
+            </a:r>
+          </a:p>
+          <a:p>
+            <a:r>
+              <a:t>- ASK students to nominate one plausible lesson from the Instagram case and say where it should live. Different interpretations of the evidence produce different answers - which is the point.</a:t>
             </a:r>
           </a:p>
         </p:txBody>
@@ -2754,12 +2764,12 @@
           </a:p>
           <a:p>
             <a:r>
-              <a:t>- A much better final Volkswagen discussion than "who was unethical?"</a:t>
-            </a:r>
-          </a:p>
-          <a:p>
-            <a:r>
-              <a:t>- The footer question is the discussion; give it time.</a:t>
+              <a:t>- The callback: Volkswagen has been absent for roughly ten slides; returning to it here is the payoff. A much better final discussion than "who was unethical?"</a:t>
+            </a:r>
+          </a:p>
+          <a:p>
+            <a:r>
+              <a:t>- The footer question is the discussion; give it time. "Everything we've learned" now includes causal breadth, diagnosis across decisions, what evidence supports, and where lessons live.</a:t>
             </a:r>
           </a:p>
         </p:txBody>
@@ -16725,14 +16735,48 @@
       </p:sp>
       <p:sp>
         <p:nvSpPr>
-          <p:cNvPr id="901" name="Block"/>
+          <p:cNvPr id="908" name="Label"/>
+          <p:cNvSpPr txBox="1"/>
+          <p:nvPr/>
+        </p:nvSpPr>
+        <p:spPr>
+          <a:xfrm>
+            <a:off x="548640" y="4297680"/>
+            <a:ext cx="8046720" cy="548640"/>
+          </a:xfrm>
+          <a:prstGeom prst="rect">
+            <a:avLst/>
+          </a:prstGeom>
+          <a:noFill/>
+        </p:spPr>
+        <p:txBody>
+          <a:bodyPr wrap="square" anchor="t" lIns="27432" rIns="27432" tIns="22860" bIns="22860">
+            <a:spAutoFit/>
+          </a:bodyPr>
+          <a:lstStyle/>
+          <a:p>
+            <a:pPr algn="ctr"/>
+            <a:r>
+              <a:rPr sz="2200" b="0" i="0">
+                <a:solidFill>
+                  <a:srgbClr val="5C4826"/>
+                </a:solidFill>
+              </a:rPr>
+              <a:t>Evidence does not choose its own interpretation.</a:t>
+            </a:r>
+          </a:p>
+        </p:txBody>
+      </p:sp>
+      <p:sp>
+        <p:nvSpPr>
+          <p:cNvPr id="920" name="Block"/>
           <p:cNvSpPr/>
           <p:nvPr/>
         </p:nvSpPr>
         <p:spPr>
           <a:xfrm>
-            <a:off x="548640" y="2468880"/>
-            <a:ext cx="1783080" cy="640080"/>
+            <a:off x="411480" y="2468880"/>
+            <a:ext cx="1874520" cy="640080"/>
           </a:xfrm>
           <a:prstGeom prst="rect">
             <a:avLst/>
@@ -16770,21 +16814,177 @@
                   <a:srgbClr val="FFFFFF"/>
                 </a:solidFill>
               </a:rPr>
-              <a:t>FAILURE</a:t>
+              <a:t>OBSERVATION</a:t>
+            </a:r>
+          </a:p>
+        </p:txBody>
+      </p:sp>
+      <p:sp>
+        <p:nvSpPr>
+          <p:cNvPr id="921" name="Block"/>
+          <p:cNvSpPr/>
+          <p:nvPr/>
+        </p:nvSpPr>
+        <p:spPr>
+          <a:xfrm>
+            <a:off x="2697480" y="2468880"/>
+            <a:ext cx="1554480" cy="640080"/>
+          </a:xfrm>
+          <a:prstGeom prst="rect">
+            <a:avLst/>
+          </a:prstGeom>
+          <a:solidFill>
+            <a:srgbClr val="8E6F3E"/>
+          </a:solidFill>
+          <a:ln>
+            <a:noFill/>
+          </a:ln>
+          <a:effectLst/>
+        </p:spPr>
+        <p:style>
+          <a:lnRef idx="1">
+            <a:schemeClr val="accent1"/>
+          </a:lnRef>
+          <a:fillRef idx="3">
+            <a:schemeClr val="accent1"/>
+          </a:fillRef>
+          <a:effectRef idx="2">
+            <a:schemeClr val="accent1"/>
+          </a:effectRef>
+          <a:fontRef idx="minor">
+            <a:schemeClr val="lt1"/>
+          </a:fontRef>
+        </p:style>
+        <p:txBody>
+          <a:bodyPr rtlCol="0" anchor="ctr" wrap="square" lIns="27432" rIns="27432" tIns="22860" bIns="22860"/>
+          <a:lstStyle/>
+          <a:p>
+            <a:pPr algn="ctr"/>
+            <a:r>
+              <a:rPr sz="2000" b="1" i="0">
+                <a:solidFill>
+                  <a:srgbClr val="FFFFFF"/>
+                </a:solidFill>
+              </a:rPr>
+              <a:t>EVIDENCE</a:t>
+            </a:r>
+          </a:p>
+        </p:txBody>
+      </p:sp>
+      <p:sp>
+        <p:nvSpPr>
+          <p:cNvPr id="922" name="Block"/>
+          <p:cNvSpPr/>
+          <p:nvPr/>
+        </p:nvSpPr>
+        <p:spPr>
+          <a:xfrm>
+            <a:off x="4663440" y="2468880"/>
+            <a:ext cx="2148840" cy="640080"/>
+          </a:xfrm>
+          <a:prstGeom prst="rect">
+            <a:avLst/>
+          </a:prstGeom>
+          <a:solidFill>
+            <a:srgbClr val="8E6F3E"/>
+          </a:solidFill>
+          <a:ln>
+            <a:noFill/>
+          </a:ln>
+          <a:effectLst/>
+        </p:spPr>
+        <p:style>
+          <a:lnRef idx="1">
+            <a:schemeClr val="accent1"/>
+          </a:lnRef>
+          <a:fillRef idx="3">
+            <a:schemeClr val="accent1"/>
+          </a:fillRef>
+          <a:effectRef idx="2">
+            <a:schemeClr val="accent1"/>
+          </a:effectRef>
+          <a:fontRef idx="minor">
+            <a:schemeClr val="lt1"/>
+          </a:fontRef>
+        </p:style>
+        <p:txBody>
+          <a:bodyPr rtlCol="0" anchor="ctr" wrap="square" lIns="27432" rIns="27432" tIns="22860" bIns="22860"/>
+          <a:lstStyle/>
+          <a:p>
+            <a:pPr algn="ctr"/>
+            <a:r>
+              <a:rPr sz="2000" b="1" i="0">
+                <a:solidFill>
+                  <a:srgbClr val="FFFFFF"/>
+                </a:solidFill>
+              </a:rPr>
+              <a:t>INTERPRETATION</a:t>
+            </a:r>
+          </a:p>
+        </p:txBody>
+      </p:sp>
+      <p:sp>
+        <p:nvSpPr>
+          <p:cNvPr id="923" name="Block"/>
+          <p:cNvSpPr/>
+          <p:nvPr/>
+        </p:nvSpPr>
+        <p:spPr>
+          <a:xfrm>
+            <a:off x="7223760" y="2468880"/>
+            <a:ext cx="1325880" cy="640080"/>
+          </a:xfrm>
+          <a:prstGeom prst="rect">
+            <a:avLst/>
+          </a:prstGeom>
+          <a:solidFill>
+            <a:srgbClr val="8E6F3E"/>
+          </a:solidFill>
+          <a:ln>
+            <a:noFill/>
+          </a:ln>
+          <a:effectLst/>
+        </p:spPr>
+        <p:style>
+          <a:lnRef idx="1">
+            <a:schemeClr val="accent1"/>
+          </a:lnRef>
+          <a:fillRef idx="3">
+            <a:schemeClr val="accent1"/>
+          </a:fillRef>
+          <a:effectRef idx="2">
+            <a:schemeClr val="accent1"/>
+          </a:effectRef>
+          <a:fontRef idx="minor">
+            <a:schemeClr val="lt1"/>
+          </a:fontRef>
+        </p:style>
+        <p:txBody>
+          <a:bodyPr rtlCol="0" anchor="ctr" wrap="square" lIns="27432" rIns="27432" tIns="22860" bIns="22860"/>
+          <a:lstStyle/>
+          <a:p>
+            <a:pPr algn="ctr"/>
+            <a:r>
+              <a:rPr sz="2000" b="1" i="0">
+                <a:solidFill>
+                  <a:srgbClr val="FFFFFF"/>
+                </a:solidFill>
+              </a:rPr>
+              <a:t>LESSON</a:t>
             </a:r>
           </a:p>
         </p:txBody>
       </p:sp>
       <p:cxnSp>
         <p:nvCxnSpPr>
-          <p:cNvPr id="902" name="Connector 901"/>
+          <p:cNvPr id="924" name="Connector 924"/>
           <p:cNvCxnSpPr/>
           <p:nvPr/>
         </p:nvCxnSpPr>
         <p:spPr>
           <a:xfrm>
-            <a:off x="2331720" y="2788920"/>
-            <a:ext cx="320040" cy="0"/>
+            <a:off x="2286000" y="2788920"/>
+            <a:ext cx="411480" cy="0"/>
           </a:xfrm>
           <a:prstGeom prst="line">
             <a:avLst/>
@@ -16811,68 +17011,16 @@
           </a:fontRef>
         </p:style>
       </p:cxnSp>
-      <p:sp>
-        <p:nvSpPr>
-          <p:cNvPr id="903" name="Block"/>
-          <p:cNvSpPr/>
-          <p:nvPr/>
-        </p:nvSpPr>
-        <p:spPr>
-          <a:xfrm>
-            <a:off x="2651760" y="2468880"/>
-            <a:ext cx="1783080" cy="640080"/>
-          </a:xfrm>
-          <a:prstGeom prst="rect">
-            <a:avLst/>
-          </a:prstGeom>
-          <a:solidFill>
-            <a:srgbClr val="8E6F3E"/>
-          </a:solidFill>
-          <a:ln>
-            <a:noFill/>
-          </a:ln>
-          <a:effectLst/>
-        </p:spPr>
-        <p:style>
-          <a:lnRef idx="1">
-            <a:schemeClr val="accent1"/>
-          </a:lnRef>
-          <a:fillRef idx="3">
-            <a:schemeClr val="accent1"/>
-          </a:fillRef>
-          <a:effectRef idx="2">
-            <a:schemeClr val="accent1"/>
-          </a:effectRef>
-          <a:fontRef idx="minor">
-            <a:schemeClr val="lt1"/>
-          </a:fontRef>
-        </p:style>
-        <p:txBody>
-          <a:bodyPr rtlCol="0" anchor="ctr" wrap="square" lIns="27432" rIns="27432" tIns="22860" bIns="22860"/>
-          <a:lstStyle/>
-          <a:p>
-            <a:pPr algn="ctr"/>
-            <a:r>
-              <a:rPr sz="2000" b="1" i="0">
-                <a:solidFill>
-                  <a:srgbClr val="FFFFFF"/>
-                </a:solidFill>
-              </a:rPr>
-              <a:t>EVIDENCE</a:t>
-            </a:r>
-          </a:p>
-        </p:txBody>
-      </p:sp>
       <p:cxnSp>
         <p:nvCxnSpPr>
-          <p:cNvPr id="904" name="Connector 903"/>
+          <p:cNvPr id="925" name="Connector 925"/>
           <p:cNvCxnSpPr/>
           <p:nvPr/>
         </p:nvCxnSpPr>
         <p:spPr>
           <a:xfrm>
-            <a:off x="4434840" y="2788920"/>
-            <a:ext cx="320039" cy="0"/>
+            <a:off x="4251960" y="2788920"/>
+            <a:ext cx="411480" cy="0"/>
           </a:xfrm>
           <a:prstGeom prst="line">
             <a:avLst/>
@@ -16899,68 +17047,16 @@
           </a:fontRef>
         </p:style>
       </p:cxnSp>
-      <p:sp>
-        <p:nvSpPr>
-          <p:cNvPr id="905" name="Block"/>
-          <p:cNvSpPr/>
-          <p:nvPr/>
-        </p:nvSpPr>
-        <p:spPr>
-          <a:xfrm>
-            <a:off x="4754879" y="2468880"/>
-            <a:ext cx="1783080" cy="640080"/>
-          </a:xfrm>
-          <a:prstGeom prst="rect">
-            <a:avLst/>
-          </a:prstGeom>
-          <a:solidFill>
-            <a:srgbClr val="8E6F3E"/>
-          </a:solidFill>
-          <a:ln>
-            <a:noFill/>
-          </a:ln>
-          <a:effectLst/>
-        </p:spPr>
-        <p:style>
-          <a:lnRef idx="1">
-            <a:schemeClr val="accent1"/>
-          </a:lnRef>
-          <a:fillRef idx="3">
-            <a:schemeClr val="accent1"/>
-          </a:fillRef>
-          <a:effectRef idx="2">
-            <a:schemeClr val="accent1"/>
-          </a:effectRef>
-          <a:fontRef idx="minor">
-            <a:schemeClr val="lt1"/>
-          </a:fontRef>
-        </p:style>
-        <p:txBody>
-          <a:bodyPr rtlCol="0" anchor="ctr" wrap="square" lIns="27432" rIns="27432" tIns="22860" bIns="22860"/>
-          <a:lstStyle/>
-          <a:p>
-            <a:pPr algn="ctr"/>
-            <a:r>
-              <a:rPr sz="2000" b="1" i="0">
-                <a:solidFill>
-                  <a:srgbClr val="FFFFFF"/>
-                </a:solidFill>
-              </a:rPr>
-              <a:t>ANALYSIS</a:t>
-            </a:r>
-          </a:p>
-        </p:txBody>
-      </p:sp>
       <p:cxnSp>
         <p:nvCxnSpPr>
-          <p:cNvPr id="906" name="Connector 905"/>
+          <p:cNvPr id="926" name="Connector 926"/>
           <p:cNvCxnSpPr/>
           <p:nvPr/>
         </p:nvCxnSpPr>
         <p:spPr>
           <a:xfrm>
-            <a:off x="6537959" y="2788920"/>
-            <a:ext cx="320040" cy="0"/>
+            <a:off x="6812280" y="2788920"/>
+            <a:ext cx="411480" cy="0"/>
           </a:xfrm>
           <a:prstGeom prst="line">
             <a:avLst/>
@@ -16989,66 +17085,14 @@
       </p:cxnSp>
       <p:sp>
         <p:nvSpPr>
-          <p:cNvPr id="907" name="Block"/>
-          <p:cNvSpPr/>
-          <p:nvPr/>
-        </p:nvSpPr>
-        <p:spPr>
-          <a:xfrm>
-            <a:off x="6857999" y="2468880"/>
-            <a:ext cx="1783080" cy="640080"/>
-          </a:xfrm>
-          <a:prstGeom prst="rect">
-            <a:avLst/>
-          </a:prstGeom>
-          <a:solidFill>
-            <a:srgbClr val="8E6F3E"/>
-          </a:solidFill>
-          <a:ln>
-            <a:noFill/>
-          </a:ln>
-          <a:effectLst/>
-        </p:spPr>
-        <p:style>
-          <a:lnRef idx="1">
-            <a:schemeClr val="accent1"/>
-          </a:lnRef>
-          <a:fillRef idx="3">
-            <a:schemeClr val="accent1"/>
-          </a:fillRef>
-          <a:effectRef idx="2">
-            <a:schemeClr val="accent1"/>
-          </a:effectRef>
-          <a:fontRef idx="minor">
-            <a:schemeClr val="lt1"/>
-          </a:fontRef>
-        </p:style>
-        <p:txBody>
-          <a:bodyPr rtlCol="0" anchor="ctr" wrap="square" lIns="27432" rIns="27432" tIns="22860" bIns="22860"/>
-          <a:lstStyle/>
-          <a:p>
-            <a:pPr algn="ctr"/>
-            <a:r>
-              <a:rPr sz="2000" b="1" i="0">
-                <a:solidFill>
-                  <a:srgbClr val="FFFFFF"/>
-                </a:solidFill>
-              </a:rPr>
-              <a:t>LESSON</a:t>
-            </a:r>
-          </a:p>
-        </p:txBody>
-      </p:sp>
-      <p:sp>
-        <p:nvSpPr>
-          <p:cNvPr id="908" name="Label"/>
+          <p:cNvPr id="927" name="Label"/>
           <p:cNvSpPr txBox="1"/>
           <p:nvPr/>
         </p:nvSpPr>
         <p:spPr>
           <a:xfrm>
-            <a:off x="548640" y="3657600"/>
-            <a:ext cx="8046720" cy="548640"/>
+            <a:off x="1600200" y="3246120"/>
+            <a:ext cx="1828800" cy="548640"/>
           </a:xfrm>
           <a:prstGeom prst="rect">
             <a:avLst/>
@@ -17063,12 +17107,80 @@
           <a:p>
             <a:pPr algn="ctr"/>
             <a:r>
-              <a:rPr sz="2200" b="0" i="0">
-                <a:solidFill>
-                  <a:srgbClr val="5C4826"/>
-                </a:solidFill>
-              </a:rPr>
-              <a:t>Failure produces evidence. Analyze it into a lesson.</a:t>
+              <a:rPr sz="2000" b="0" i="0">
+                <a:solidFill>
+                  <a:srgbClr val="555960"/>
+                </a:solidFill>
+              </a:rPr>
+              <a:t>what happened?</a:t>
+            </a:r>
+          </a:p>
+        </p:txBody>
+      </p:sp>
+      <p:sp>
+        <p:nvSpPr>
+          <p:cNvPr id="928" name="Label"/>
+          <p:cNvSpPr txBox="1"/>
+          <p:nvPr/>
+        </p:nvSpPr>
+        <p:spPr>
+          <a:xfrm>
+            <a:off x="3547872" y="3246120"/>
+            <a:ext cx="1828800" cy="548640"/>
+          </a:xfrm>
+          <a:prstGeom prst="rect">
+            <a:avLst/>
+          </a:prstGeom>
+          <a:noFill/>
+        </p:spPr>
+        <p:txBody>
+          <a:bodyPr wrap="square" anchor="t" lIns="27432" rIns="27432" tIns="22860" bIns="22860">
+            <a:spAutoFit/>
+          </a:bodyPr>
+          <a:lstStyle/>
+          <a:p>
+            <a:pPr algn="ctr"/>
+            <a:r>
+              <a:rPr sz="2000" b="0" i="0">
+                <a:solidFill>
+                  <a:srgbClr val="555960"/>
+                </a:solidFill>
+              </a:rPr>
+              <a:t>what does it support?</a:t>
+            </a:r>
+          </a:p>
+        </p:txBody>
+      </p:sp>
+      <p:sp>
+        <p:nvSpPr>
+          <p:cNvPr id="929" name="Label"/>
+          <p:cNvSpPr txBox="1"/>
+          <p:nvPr/>
+        </p:nvSpPr>
+        <p:spPr>
+          <a:xfrm>
+            <a:off x="6108192" y="3246120"/>
+            <a:ext cx="1828800" cy="548640"/>
+          </a:xfrm>
+          <a:prstGeom prst="rect">
+            <a:avLst/>
+          </a:prstGeom>
+          <a:noFill/>
+        </p:spPr>
+        <p:txBody>
+          <a:bodyPr wrap="square" anchor="t" lIns="27432" rIns="27432" tIns="22860" bIns="22860">
+            <a:spAutoFit/>
+          </a:bodyPr>
+          <a:lstStyle/>
+          <a:p>
+            <a:pPr algn="ctr"/>
+            <a:r>
+              <a:rPr sz="2000" b="0" i="0">
+                <a:solidFill>
+                  <a:srgbClr val="555960"/>
+                </a:solidFill>
+              </a:rPr>
+              <a:t>what should change?</a:t>
             </a:r>
           </a:p>
         </p:txBody>
@@ -17331,7 +17443,7 @@
                   <a:srgbClr val="5C4826"/>
                 </a:solidFill>
               </a:rPr>
-              <a:t>The same observation; support thins as the claim widens.</a:t>
+              <a:t>Generalization is itself an engineering claim.</a:t>
             </a:r>
           </a:p>
         </p:txBody>
@@ -17972,7 +18084,7 @@
           <a:p>
             <a:pPr algn="ctr">
               <a:spcBef>
-                <a:spcPts val="1400"/>
+                <a:spcPts val="1200"/>
               </a:spcBef>
             </a:pPr>
             <a:r>
@@ -17987,7 +18099,7 @@
           <a:p>
             <a:pPr algn="ctr">
               <a:spcBef>
-                <a:spcPts val="800"/>
+                <a:spcPts val="1200"/>
               </a:spcBef>
             </a:pPr>
             <a:r>
@@ -17996,7 +18108,7 @@
                   <a:srgbClr val="555960"/>
                 </a:solidFill>
               </a:rPr>
-              <a:t>pins this exact case so it can never silently recur</a:t>
+              <a:t>pins this exact case - it cannot silently recur</a:t>
             </a:r>
           </a:p>
         </p:txBody>
@@ -18056,7 +18168,7 @@
           <a:p>
             <a:pPr algn="ctr">
               <a:spcBef>
-                <a:spcPts val="1400"/>
+                <a:spcPts val="1200"/>
               </a:spcBef>
             </a:pPr>
             <a:r>
@@ -18065,13 +18177,13 @@
                   <a:srgbClr val="8E6F3E"/>
                 </a:solidFill>
               </a:rPr>
-              <a:t>Generalized lesson</a:t>
+              <a:t>Generalized model or control</a:t>
             </a:r>
           </a:p>
           <a:p>
             <a:pPr algn="ctr">
               <a:spcBef>
-                <a:spcPts val="800"/>
+                <a:spcPts val="1200"/>
               </a:spcBef>
             </a:pPr>
             <a:r>
@@ -18080,7 +18192,7 @@
                   <a:srgbClr val="555960"/>
                 </a:solidFill>
               </a:rPr>
-              <a:t>covers the class of cases the example revealed</a:t>
+              <a:t>covers the class of cases - the class becomes recognizable</a:t>
             </a:r>
           </a:p>
         </p:txBody>
@@ -20658,7 +20770,7 @@
                   <a:srgbClr val="FFFFFF"/>
                 </a:solidFill>
               </a:rPr>
-              <a:t>Which judgments should never have remained discretionary?</a:t>
+              <a:t>Given everything we’ve learned, which judgments should never have remained discretionary?</a:t>
             </a:r>
           </a:p>
         </p:txBody>

--- a/course/lectures/act-2-delegation-and-control/04-failure-aware-engineering/2-4-Failure-Aware-Engineering.pptx
+++ b/course/lectures/act-2-delegation-and-control/04-failure-aware-engineering/2-4-Failure-Aware-Engineering.pptx
@@ -14,7 +14,6 @@
     <p:sldId id="294" r:id="rId45"/>
     <p:sldId id="259" r:id="rId10"/>
     <p:sldId id="260" r:id="rId11"/>
-    <p:sldId id="261" r:id="rId12"/>
     <p:sldId id="262" r:id="rId13"/>
     <p:sldId id="263" r:id="rId14"/>
     <p:sldId id="264" r:id="rId15"/>
@@ -3444,97 +3443,22 @@
           <a:lstStyle/>
           <a:p>
             <a:r>
-              <a:t>TIMING: 2 minutes</a:t>
-            </a:r>
-          </a:p>
-          <a:p>
-            <a:r>
-              <a:t>- The point: the ordinary speak-up control ACTUALLY FIRED. Objection was raised and escalated; the November 2006 decision was to continue, with the instruction recorded in substance as "not to get caught."</a:t>
-            </a:r>
-          </a:p>
-          <a:p>
-            <a:r>
-              <a:t>- Not an ethics seminar - the engineering question is what happened AFTER the human control fired.</a:t>
-            </a:r>
-          </a:p>
-        </p:txBody>
-      </p:sp>
-      <p:sp>
-        <p:nvSpPr>
-          <p:cNvPr id="4" name="Slide Number Placeholder 3"/>
-          <p:cNvSpPr>
-            <a:spLocks noGrp="1"/>
-          </p:cNvSpPr>
-          <p:nvPr>
-            <p:ph type="sldNum" idx="5" sz="quarter"/>
-          </p:nvPr>
-        </p:nvSpPr>
-        <p:spPr/>
-      </p:sp>
-    </p:spTree>
-  </p:cSld>
-  <p:clrMapOvr>
-    <a:masterClrMapping/>
-  </p:clrMapOvr>
-</p:notes>
-</file>
-
-<file path=ppt/notesSlides/notesSlide6.xml><?xml version="1.0" encoding="utf-8"?>
-<p:notes xmlns:a="http://schemas.openxmlformats.org/drawingml/2006/main" xmlns:p="http://schemas.openxmlformats.org/presentationml/2006/main" xmlns:r="http://schemas.openxmlformats.org/officeDocument/2006/relationships">
-  <p:cSld>
-    <p:spTree>
-      <p:nvGrpSpPr>
-        <p:cNvPr id="1" name=""/>
-        <p:cNvGrpSpPr/>
-        <p:nvPr/>
-      </p:nvGrpSpPr>
-      <p:grpSpPr>
-        <a:xfrm>
-          <a:off x="0" y="0"/>
-          <a:ext cx="0" cy="0"/>
-          <a:chOff x="0" y="0"/>
-          <a:chExt cx="0" cy="0"/>
-        </a:xfrm>
-      </p:grpSpPr>
-      <p:sp>
-        <p:nvSpPr>
-          <p:cNvPr id="2" name="Slide Image Placeholder 1"/>
-          <p:cNvSpPr>
-            <a:spLocks noGrp="1"/>
-          </p:cNvSpPr>
-          <p:nvPr>
-            <p:ph type="sldImg" idx="2"/>
-          </p:nvPr>
-        </p:nvSpPr>
-        <p:spPr/>
-      </p:sp>
-      <p:sp>
-        <p:nvSpPr>
-          <p:cNvPr id="3" name="Notes Placeholder 2"/>
-          <p:cNvSpPr>
-            <a:spLocks noGrp="1"/>
-          </p:cNvSpPr>
-          <p:nvPr>
-            <p:ph type="body" idx="3" sz="quarter"/>
-          </p:nvPr>
-        </p:nvSpPr>
-        <p:spPr/>
-        <p:txBody>
-          <a:bodyPr/>
-          <a:lstStyle/>
-          <a:p>
-            <a:r>
-              <a:t>TIMING: 2 minutes</a:t>
-            </a:r>
-          </a:p>
-          <a:p>
-            <a:r>
-              <a:t>- Two facts: NOT A ROGUE PATCH (calibration / integration / certification / maintenance -&gt; sustained engineering), and the work was DELEGATED too (Volkswagen -&gt; IAV -&gt; continued engineering).</a:t>
-            </a:r>
-          </a:p>
-          <a:p>
-            <a:r>
-              <a:t>- The scale question is a seed, not the headline: "one unethical programmer" becomes an increasingly implausible causal model. Do not let it dominate.</a:t>
+              <a:t>TIMING: 2-3 minutes</a:t>
+            </a:r>
+          </a:p>
+          <a:p>
+            <a:r>
+              <a:t>- The point: the ordinary speak-up control ACTUALLY FIRED - objection raised, supported, escalated - and the November 2006 decision was to continue, recorded in substance as "not to get caught."</a:t>
+            </a:r>
+          </a:p>
+          <a:p>
+            <a:r>
+              <a:t>- And the engineering system kept producing: not a rogue patch (calibration / integration / certification / maintenance -&gt; sustained engineering), and the work was delegated too (Volkswagen -&gt; IAV -&gt; continued engineering).</a:t>
+            </a:r>
+          </a:p>
+          <a:p>
+            <a:r>
+              <a:t>- Not an ethics seminar - the engineering question is what happened AFTER the human control fired. The scale question seeds the causal-model section; "one unethical programmer" becomes an increasingly implausible causal model. Do not let it dominate.</a:t>
             </a:r>
           </a:p>
         </p:txBody>
@@ -7500,7 +7424,7 @@
           <a:p>
             <a:fld id="{8CF8A65D-8523-4C39-BD83-5C787F1FA9B3}" type="slidenum">
               <a:rPr lang="en-US" smtClean="0"/>
-              <a:t>10</a:t>
+              <a:t>9</a:t>
             </a:fld>
             <a:endParaRPr lang="en-US"/>
           </a:p>
@@ -8155,7 +8079,7 @@
           <a:p>
             <a:fld id="{1CC19601-3229-4026-8A65-27C733DA7C77}" type="slidenum">
               <a:rPr lang="en-US" smtClean="0"/>
-              <a:t>11</a:t>
+              <a:t>10</a:t>
             </a:fld>
             <a:endParaRPr lang="en-US"/>
           </a:p>
@@ -8665,7 +8589,7 @@
           <a:p>
             <a:fld id="{3B223778-6764-4D81-904E-8786918EE0A1}" type="slidenum">
               <a:rPr lang="en-US" smtClean="0"/>
-              <a:t>12</a:t>
+              <a:t>11</a:t>
             </a:fld>
             <a:endParaRPr lang="en-US"/>
           </a:p>
@@ -8852,7 +8776,7 @@
           <a:p>
             <a:fld id="{00F42B8D-282B-4541-BC87-223291F13518}" type="slidenum">
               <a:rPr lang="en-US" smtClean="0"/>
-              <a:t>13</a:t>
+              <a:t>12</a:t>
             </a:fld>
             <a:endParaRPr lang="en-US"/>
           </a:p>
@@ -8988,7 +8912,7 @@
           <a:p>
             <a:fld id="{8D34505B-00B1-4572-8080-1F84ADF8E747}" type="slidenum">
               <a:rPr lang="en-US" smtClean="0"/>
-              <a:t>14</a:t>
+              <a:t>13</a:t>
             </a:fld>
             <a:endParaRPr lang="en-US"/>
           </a:p>
@@ -9397,7 +9321,7 @@
           <a:p>
             <a:fld id="{E3DB674E-A080-44A8-A874-38AE3C84A5E2}" type="slidenum">
               <a:rPr lang="en-US" smtClean="0"/>
-              <a:t>15</a:t>
+              <a:t>14</a:t>
             </a:fld>
             <a:endParaRPr lang="en-US"/>
           </a:p>
@@ -10534,7 +10458,7 @@
           <a:p>
             <a:fld id="{914DCAD9-F068-4234-801B-B81BE39514E5}" type="slidenum">
               <a:rPr lang="en-US" smtClean="0"/>
-              <a:t>16</a:t>
+              <a:t>15</a:t>
             </a:fld>
             <a:endParaRPr lang="en-US"/>
           </a:p>
@@ -10901,7 +10825,7 @@
           <a:p>
             <a:fld id="{21CAE056-AEB1-4FA5-BA70-2608DF341BC7}" type="slidenum">
               <a:rPr lang="en-US" smtClean="0"/>
-              <a:t>17</a:t>
+              <a:t>16</a:t>
             </a:fld>
             <a:endParaRPr lang="en-US"/>
           </a:p>
@@ -11494,7 +11418,7 @@
           <a:p>
             <a:fld id="{A5E8DDF8-F0A4-457E-8C49-34448B87F78F}" type="slidenum">
               <a:rPr lang="en-US" smtClean="0"/>
-              <a:t>18</a:t>
+              <a:t>17</a:t>
             </a:fld>
             <a:endParaRPr lang="en-US"/>
           </a:p>
@@ -12096,7 +12020,7 @@
           <a:p>
             <a:fld id="{A2504DDB-3E3B-4B22-928E-39EF9EC13EA2}" type="slidenum">
               <a:rPr lang="en-US" smtClean="0"/>
-              <a:t>19</a:t>
+              <a:t>18</a:t>
             </a:fld>
             <a:endParaRPr lang="en-US"/>
           </a:p>
@@ -13018,7 +12942,7 @@
           <a:p>
             <a:fld id="{D6607EED-2C17-4005-9FF9-5E7D14817CFB}" type="slidenum">
               <a:rPr lang="en-US" smtClean="0"/>
-              <a:t>20</a:t>
+              <a:t>19</a:t>
             </a:fld>
             <a:endParaRPr lang="en-US"/>
           </a:p>
@@ -13205,7 +13129,7 @@
           <a:p>
             <a:fld id="{CB54B3D1-5BA3-40A8-8017-74A0DF3C7182}" type="slidenum">
               <a:rPr lang="en-US" smtClean="0"/>
-              <a:t>21</a:t>
+              <a:t>20</a:t>
             </a:fld>
             <a:endParaRPr lang="en-US"/>
           </a:p>
@@ -13720,7 +13644,7 @@
           <a:p>
             <a:fld id="{CB54B3D1-5BA3-40A8-8017-74A0DF3C7182}" type="slidenum">
               <a:rPr lang="en-US" smtClean="0"/>
-              <a:t>22</a:t>
+              <a:t>21</a:t>
             </a:fld>
             <a:endParaRPr lang="en-US"/>
           </a:p>
@@ -14493,7 +14417,7 @@
           <a:p>
             <a:fld id="{3DC31DEB-C161-48EB-8EC4-D4D18487B0EB}" type="slidenum">
               <a:rPr lang="en-US" smtClean="0"/>
-              <a:t>23</a:t>
+              <a:t>22</a:t>
             </a:fld>
             <a:endParaRPr lang="en-US"/>
           </a:p>
@@ -15117,7 +15041,7 @@
           <a:p>
             <a:fld id="{BBD7B01D-2451-459F-B1A1-0BB2DA8CD569}" type="slidenum">
               <a:rPr lang="en-US" smtClean="0"/>
-              <a:t>24</a:t>
+              <a:t>23</a:t>
             </a:fld>
             <a:endParaRPr lang="en-US"/>
           </a:p>
@@ -15624,7 +15548,7 @@
           <a:p>
             <a:fld id="{B27BF211-A452-4B62-B65D-7ABF1FF8B2F5}" type="slidenum">
               <a:rPr lang="en-US" smtClean="0"/>
-              <a:t>25</a:t>
+              <a:t>24</a:t>
             </a:fld>
             <a:endParaRPr lang="en-US"/>
           </a:p>
@@ -16399,7 +16323,7 @@
           <a:p>
             <a:fld id="{6DD32251-42D1-4E05-B955-B2D4D97C7069}" type="slidenum">
               <a:rPr lang="en-US" smtClean="0"/>
-              <a:t>26</a:t>
+              <a:t>25</a:t>
             </a:fld>
             <a:endParaRPr lang="en-US"/>
           </a:p>
@@ -16540,7 +16464,7 @@
           <a:p>
             <a:fld id="{5CEC7D30-3F3A-40A5-AB25-FC380CDCDC59}" type="slidenum">
               <a:rPr lang="en-US" smtClean="0"/>
-              <a:t>27</a:t>
+              <a:t>26</a:t>
             </a:fld>
             <a:endParaRPr lang="en-US"/>
           </a:p>
@@ -16727,7 +16651,7 @@
           <a:p>
             <a:fld id="{9D5CC310-9C8D-49B0-9A1E-6DB1095504DF}" type="slidenum">
               <a:rPr lang="en-US" smtClean="0"/>
-              <a:t>28</a:t>
+              <a:t>27</a:t>
             </a:fld>
             <a:endParaRPr lang="en-US"/>
           </a:p>
@@ -17246,7 +17170,7 @@
           <a:p>
             <a:fld id="{5853B7DD-E055-4162-94C7-77FA73E23512}" type="slidenum">
               <a:rPr lang="en-US" smtClean="0"/>
-              <a:t>29</a:t>
+              <a:t>28</a:t>
             </a:fld>
             <a:endParaRPr lang="en-US"/>
           </a:p>
@@ -18023,7 +17947,7 @@
           <a:p>
             <a:fld id="{6A1DACA4-9A95-4C77-B245-2C307F8CACFD}" type="slidenum">
               <a:rPr lang="en-US" smtClean="0"/>
-              <a:t>30</a:t>
+              <a:t>29</a:t>
             </a:fld>
             <a:endParaRPr lang="en-US"/>
           </a:p>
@@ -18258,7 +18182,7 @@
           <a:p>
             <a:fld id="{F164AA00-212F-409D-8EDE-8F6B572B597D}" type="slidenum">
               <a:rPr lang="en-US" smtClean="0"/>
-              <a:t>31</a:t>
+              <a:t>30</a:t>
             </a:fld>
             <a:endParaRPr lang="en-US"/>
           </a:p>
@@ -18497,7 +18421,7 @@
           <a:p>
             <a:fld id="{AFA6771E-93A8-4AA7-A54D-D336B382D315}" type="slidenum">
               <a:rPr lang="en-US" smtClean="0"/>
-              <a:t>32</a:t>
+              <a:t>31</a:t>
             </a:fld>
             <a:endParaRPr lang="en-US"/>
           </a:p>
@@ -18946,7 +18870,7 @@
           <a:p>
             <a:fld id="{7288240E-6A77-4EF8-962D-68D6FAD0FBF7}" type="slidenum">
               <a:rPr lang="en-US" smtClean="0"/>
-              <a:t>33</a:t>
+              <a:t>32</a:t>
             </a:fld>
             <a:endParaRPr lang="en-US"/>
           </a:p>
@@ -19133,7 +19057,7 @@
           <a:p>
             <a:fld id="{B1FABF6A-C69A-47A3-8221-3F34D9E54C93}" type="slidenum">
               <a:rPr lang="en-US" smtClean="0"/>
-              <a:t>34</a:t>
+              <a:t>33</a:t>
             </a:fld>
             <a:endParaRPr lang="en-US"/>
           </a:p>
@@ -19676,7 +19600,7 @@
           <a:p>
             <a:fld id="{54DE72B0-FFEB-4C83-B4BD-F25961BEDFCA}" type="slidenum">
               <a:rPr lang="en-US" smtClean="0"/>
-              <a:t>35</a:t>
+              <a:t>34</a:t>
             </a:fld>
             <a:endParaRPr lang="en-US"/>
           </a:p>
@@ -20359,7 +20283,7 @@
           <a:p>
             <a:fld id="{9ABD6463-1069-4796-B206-4858CF08A11C}" type="slidenum">
               <a:rPr lang="en-US" smtClean="0"/>
-              <a:t>36</a:t>
+              <a:t>35</a:t>
             </a:fld>
             <a:endParaRPr lang="en-US"/>
           </a:p>
@@ -20836,7 +20760,7 @@
           <a:p>
             <a:fld id="{649F5B17-D92E-42C9-9606-E4DCBD101C76}" type="slidenum">
               <a:rPr lang="en-US" smtClean="0"/>
-              <a:t>37</a:t>
+              <a:t>36</a:t>
             </a:fld>
             <a:endParaRPr lang="en-US"/>
           </a:p>
@@ -21261,7 +21185,7 @@
           <a:p>
             <a:fld id="{ECC62C95-06B7-478B-9E6C-BA793986094F}" type="slidenum">
               <a:rPr lang="en-US" smtClean="0"/>
-              <a:t>38</a:t>
+              <a:t>37</a:t>
             </a:fld>
             <a:endParaRPr lang="en-US"/>
           </a:p>
@@ -21490,7 +21414,7 @@
           <a:p>
             <a:fld id="{39B9D2FE-B078-4487-9F5F-2EEF4DFC66C2}" type="slidenum">
               <a:rPr lang="en-US" smtClean="0"/>
-              <a:t>39</a:t>
+              <a:t>38</a:t>
             </a:fld>
             <a:endParaRPr lang="en-US"/>
           </a:p>
@@ -22609,7 +22533,7 @@
           <a:p>
             <a:fld id="{CB5F44A2-D062-441C-AD58-E2D5787D8459}" type="slidenum">
               <a:rPr lang="en-US" smtClean="0"/>
-              <a:t>40</a:t>
+              <a:t>39</a:t>
             </a:fld>
             <a:endParaRPr lang="en-US"/>
           </a:p>
@@ -24427,7 +24351,7 @@
                   <a:srgbClr val="000000"/>
                 </a:solidFill>
               </a:rPr>
-              <a:t>Engineers objected and escalated</a:t>
+              <a:t>Engineers objected — and kept engineering it</a:t>
             </a:r>
           </a:p>
         </p:txBody>
@@ -24463,8 +24387,8 @@
         </p:nvSpPr>
         <p:spPr>
           <a:xfrm>
-            <a:off x="411480" y="1051560"/>
-            <a:ext cx="8321040" cy="914400"/>
+            <a:off x="411480" y="1005840"/>
+            <a:ext cx="8321040" cy="960120"/>
           </a:xfrm>
           <a:prstGeom prst="rect">
             <a:avLst/>
@@ -24494,7 +24418,7 @@
           </a:fontRef>
         </p:style>
         <p:txBody>
-          <a:bodyPr rtlCol="0" anchor="t" wrap="square" lIns="27432" rIns="27432" tIns="22860" bIns="22860"/>
+          <a:bodyPr rtlCol="0" anchor="ctr" wrap="square" lIns="27432" rIns="27432" tIns="22860" bIns="22860"/>
           <a:lstStyle/>
           <a:p>
             <a:pPr algn="l"/>
@@ -24526,7 +24450,7 @@
         <p:spPr>
           <a:xfrm>
             <a:off x="411480" y="2148840"/>
-            <a:ext cx="8321040" cy="914400"/>
+            <a:ext cx="8321040" cy="1188720"/>
           </a:xfrm>
           <a:prstGeom prst="rect">
             <a:avLst/>
@@ -24556,7 +24480,7 @@
           </a:fontRef>
         </p:style>
         <p:txBody>
-          <a:bodyPr rtlCol="0" anchor="t" wrap="square" lIns="27432" rIns="27432" tIns="22860" bIns="22860"/>
+          <a:bodyPr rtlCol="0" anchor="ctr" wrap="square" lIns="27432" rIns="27432" tIns="22860" bIns="22860"/>
           <a:lstStyle/>
           <a:p>
             <a:pPr algn="l"/>
@@ -24574,7 +24498,15 @@
                   <a:srgbClr val="555960"/>
                 </a:solidFill>
               </a:rPr>
-              <a:t>The relevant supervisor was briefed on its purpose and design, and decided production should continue.</a:t>
+              <a:t>The supervisor, briefed on its purpose and design, decided production should continue; the plea agreement records the instruction, in substance, as </a:t>
+            </a:r>
+            <a:r>
+              <a:rPr sz="2000" b="1" i="0">
+                <a:solidFill>
+                  <a:srgbClr val="9A3F12"/>
+                </a:solidFill>
+              </a:rPr>
+              <a:t>“not to get caught.”</a:t>
             </a:r>
           </a:p>
         </p:txBody>
@@ -24587,8 +24519,8 @@
         </p:nvSpPr>
         <p:spPr>
           <a:xfrm>
-            <a:off x="411480" y="3246120"/>
-            <a:ext cx="8321040" cy="914400"/>
+            <a:off x="411480" y="3520440"/>
+            <a:ext cx="8321040" cy="960120"/>
           </a:xfrm>
           <a:prstGeom prst="rect">
             <a:avLst/>
@@ -24618,7 +24550,7 @@
           </a:fontRef>
         </p:style>
         <p:txBody>
-          <a:bodyPr rtlCol="0" anchor="t" wrap="square" lIns="27432" rIns="27432" tIns="22860" bIns="22860"/>
+          <a:bodyPr rtlCol="0" anchor="ctr" wrap="square" lIns="27432" rIns="27432" tIns="22860" bIns="22860"/>
           <a:lstStyle/>
           <a:p>
             <a:pPr algn="l"/>
@@ -24628,7 +24560,7 @@
                   <a:srgbClr val="5C4826"/>
                 </a:solidFill>
               </a:rPr>
-              <a:t>The plea agreement </a:t>
+              <a:t>And the engineering continued. </a:t>
             </a:r>
             <a:r>
               <a:rPr sz="2000" b="0" i="0">
@@ -24636,15 +24568,7 @@
                   <a:srgbClr val="555960"/>
                 </a:solidFill>
               </a:rPr>
-              <a:t>records the instruction, in substance, as </a:t>
-            </a:r>
-            <a:r>
-              <a:rPr sz="2000" b="1" i="0">
-                <a:solidFill>
-                  <a:srgbClr val="9A3F12"/>
-                </a:solidFill>
-              </a:rPr>
-              <a:t>“not to get caught.”</a:t>
+              <a:t>Not a rogue patch: calibration, integration, certification, maintenance — and delegated too (Volkswagen → IAV).</a:t>
             </a:r>
           </a:p>
         </p:txBody>
@@ -24657,8 +24581,8 @@
         </p:nvSpPr>
         <p:spPr>
           <a:xfrm>
-            <a:off x="411480" y="4572000"/>
-            <a:ext cx="8321040" cy="731520"/>
+            <a:off x="411480" y="4709160"/>
+            <a:ext cx="8321040" cy="502920"/>
           </a:xfrm>
           <a:prstGeom prst="rect">
             <a:avLst/>
@@ -24673,12 +24597,12 @@
           <a:p>
             <a:pPr algn="ctr"/>
             <a:r>
-              <a:rPr sz="2200" b="0" i="1">
+              <a:rPr sz="2000" b="1" i="0">
                 <a:solidFill>
                   <a:srgbClr val="8E6F3E"/>
                 </a:solidFill>
               </a:rPr>
-              <a:t>Was raising the concern the end of those engineers’ professional responsibility?</a:t>
+              <a:t>How many people does it take to sustain this in hundreds of thousands of U.S. vehicles?</a:t>
             </a:r>
           </a:p>
         </p:txBody>
@@ -24691,7 +24615,7 @@
         </p:nvSpPr>
         <p:spPr>
           <a:xfrm>
-            <a:off x="274320" y="5852159"/>
+            <a:off x="274320" y="5852160"/>
             <a:ext cx="8595360" cy="566928"/>
           </a:xfrm>
           <a:prstGeom prst="rect">
@@ -24731,231 +24655,6 @@
                 </a:solidFill>
               </a:rPr>
               <a:t>Was escalation enough?</a:t>
-            </a:r>
-          </a:p>
-        </p:txBody>
-      </p:sp>
-    </p:spTree>
-  </p:cSld>
-  <p:clrMapOvr>
-    <a:masterClrMapping/>
-  </p:clrMapOvr>
-</p:sld>
-</file>
-
-<file path=ppt/slides/slide7.xml><?xml version="1.0" encoding="utf-8"?>
-<p:sld xmlns:a="http://schemas.openxmlformats.org/drawingml/2006/main" xmlns:p="http://schemas.openxmlformats.org/presentationml/2006/main" xmlns:r="http://schemas.openxmlformats.org/officeDocument/2006/relationships">
-  <p:cSld>
-    <p:spTree>
-      <p:nvGrpSpPr>
-        <p:cNvPr id="1" name=""/>
-        <p:cNvGrpSpPr/>
-        <p:nvPr/>
-      </p:nvGrpSpPr>
-      <p:grpSpPr/>
-      <p:sp>
-        <p:nvSpPr>
-          <p:cNvPr id="3" name="Title 2"/>
-          <p:cNvSpPr>
-            <a:spLocks noGrp="1"/>
-          </p:cNvSpPr>
-          <p:nvPr>
-            <p:ph type="title"/>
-          </p:nvPr>
-        </p:nvSpPr>
-        <p:spPr/>
-        <p:txBody>
-          <a:bodyPr/>
-          <a:lstStyle/>
-          <a:p>
-            <a:r>
-              <a:rPr sz="2400" b="0" i="0">
-                <a:solidFill>
-                  <a:srgbClr val="000000"/>
-                </a:solidFill>
-              </a:rPr>
-              <a:t>And yet engineers kept engineering it</a:t>
-            </a:r>
-          </a:p>
-        </p:txBody>
-      </p:sp>
-      <p:sp>
-        <p:nvSpPr>
-          <p:cNvPr id="900" name="Slide Number Placeholder 900"/>
-          <p:cNvSpPr>
-            <a:spLocks noGrp="1"/>
-          </p:cNvSpPr>
-          <p:nvPr>
-            <p:ph type="sldNum" sz="quarter" idx="4"/>
-          </p:nvPr>
-        </p:nvSpPr>
-        <p:spPr/>
-        <p:txBody>
-          <a:bodyPr/>
-          <a:lstStyle/>
-          <a:p>
-            <a:fld id="{18B79205-D12A-40D3-8F8D-9C5E87B1B06B}" type="slidenum">
-              <a:rPr lang="en-US" smtClean="0"/>
-              <a:t>7</a:t>
-            </a:fld>
-            <a:endParaRPr lang="en-US"/>
-          </a:p>
-        </p:txBody>
-      </p:sp>
-      <p:sp>
-        <p:nvSpPr>
-          <p:cNvPr id="901" name="Card"/>
-          <p:cNvSpPr/>
-          <p:nvPr/>
-        </p:nvSpPr>
-        <p:spPr>
-          <a:xfrm>
-            <a:off x="411480" y="1143000"/>
-            <a:ext cx="8321040" cy="1325880"/>
-          </a:xfrm>
-          <a:prstGeom prst="rect">
-            <a:avLst/>
-          </a:prstGeom>
-          <a:solidFill>
-            <a:srgbClr val="F5F1E8"/>
-          </a:solidFill>
-          <a:ln w="12700">
-            <a:solidFill>
-              <a:srgbClr val="C9B991"/>
-            </a:solidFill>
-          </a:ln>
-          <a:effectLst/>
-        </p:spPr>
-        <p:style>
-          <a:lnRef idx="1">
-            <a:schemeClr val="accent1"/>
-          </a:lnRef>
-          <a:fillRef idx="3">
-            <a:schemeClr val="accent1"/>
-          </a:fillRef>
-          <a:effectRef idx="2">
-            <a:schemeClr val="accent1"/>
-          </a:effectRef>
-          <a:fontRef idx="minor">
-            <a:schemeClr val="lt1"/>
-          </a:fontRef>
-        </p:style>
-        <p:txBody>
-          <a:bodyPr rtlCol="0" anchor="t" wrap="square" lIns="27432" rIns="27432" tIns="22860" bIns="22860"/>
-          <a:lstStyle/>
-          <a:p>
-            <a:pPr algn="l"/>
-            <a:r>
-              <a:rPr sz="2000" b="1" i="0">
-                <a:solidFill>
-                  <a:srgbClr val="5C4826"/>
-                </a:solidFill>
-              </a:rPr>
-              <a:t>Not a rogue patch. </a:t>
-            </a:r>
-            <a:r>
-              <a:rPr sz="2000" b="0" i="0">
-                <a:solidFill>
-                  <a:srgbClr val="555960"/>
-                </a:solidFill>
-              </a:rPr>
-              <a:t>The defeat device required calibration, integration, certification work, and continued maintenance - sustained engineering.</a:t>
-            </a:r>
-          </a:p>
-        </p:txBody>
-      </p:sp>
-      <p:sp>
-        <p:nvSpPr>
-          <p:cNvPr id="902" name="Card"/>
-          <p:cNvSpPr/>
-          <p:nvPr/>
-        </p:nvSpPr>
-        <p:spPr>
-          <a:xfrm>
-            <a:off x="411480" y="2743200"/>
-            <a:ext cx="8321040" cy="1325880"/>
-          </a:xfrm>
-          <a:prstGeom prst="rect">
-            <a:avLst/>
-          </a:prstGeom>
-          <a:solidFill>
-            <a:srgbClr val="F5F1E8"/>
-          </a:solidFill>
-          <a:ln w="12700">
-            <a:solidFill>
-              <a:srgbClr val="C9B991"/>
-            </a:solidFill>
-          </a:ln>
-          <a:effectLst/>
-        </p:spPr>
-        <p:style>
-          <a:lnRef idx="1">
-            <a:schemeClr val="accent1"/>
-          </a:lnRef>
-          <a:fillRef idx="3">
-            <a:schemeClr val="accent1"/>
-          </a:fillRef>
-          <a:effectRef idx="2">
-            <a:schemeClr val="accent1"/>
-          </a:effectRef>
-          <a:fontRef idx="minor">
-            <a:schemeClr val="lt1"/>
-          </a:fontRef>
-        </p:style>
-        <p:txBody>
-          <a:bodyPr rtlCol="0" anchor="t" wrap="square" lIns="27432" rIns="27432" tIns="22860" bIns="22860"/>
-          <a:lstStyle/>
-          <a:p>
-            <a:pPr algn="l"/>
-            <a:r>
-              <a:rPr sz="2000" b="1" i="0">
-                <a:solidFill>
-                  <a:srgbClr val="5C4826"/>
-                </a:solidFill>
-              </a:rPr>
-              <a:t>Delegated, too. </a:t>
-            </a:r>
-            <a:r>
-              <a:rPr sz="2000" b="0" i="0">
-                <a:solidFill>
-                  <a:srgbClr val="555960"/>
-                </a:solidFill>
-              </a:rPr>
-              <a:t>Volkswagen delegated software-development and exhaust-after-treatment work to IAV, where the test-recognition work continued under a manager who knew its purpose.</a:t>
-            </a:r>
-          </a:p>
-        </p:txBody>
-      </p:sp>
-      <p:sp>
-        <p:nvSpPr>
-          <p:cNvPr id="910" name="Label"/>
-          <p:cNvSpPr txBox="1"/>
-          <p:nvPr/>
-        </p:nvSpPr>
-        <p:spPr>
-          <a:xfrm>
-            <a:off x="411480" y="4480560"/>
-            <a:ext cx="8321040" cy="548640"/>
-          </a:xfrm>
-          <a:prstGeom prst="rect">
-            <a:avLst/>
-          </a:prstGeom>
-          <a:noFill/>
-        </p:spPr>
-        <p:txBody>
-          <a:bodyPr wrap="square" anchor="t" lIns="27432" rIns="27432" tIns="22860" bIns="22860">
-            <a:spAutoFit/>
-          </a:bodyPr>
-          <a:lstStyle/>
-          <a:p>
-            <a:pPr algn="ctr"/>
-            <a:r>
-              <a:rPr sz="2000" b="1" i="0">
-                <a:solidFill>
-                  <a:srgbClr val="8E6F3E"/>
-                </a:solidFill>
-              </a:rPr>
-              <a:t>How many people does it take to sustain this in hundreds of thousands of U.S. vehicles?</a:t>
             </a:r>
           </a:p>
         </p:txBody>
@@ -25021,7 +24720,7 @@
           <a:p>
             <a:fld id="{69344503-8987-48F2-81C4-B15A70530D60}" type="slidenum">
               <a:rPr lang="en-US" smtClean="0"/>
-              <a:t>8</a:t>
+              <a:t>7</a:t>
             </a:fld>
             <a:endParaRPr lang="en-US"/>
           </a:p>
@@ -25439,7 +25138,7 @@
           <a:p>
             <a:fld id="{34DDAC39-E592-4BC0-8D18-7414C01DF0F9}" type="slidenum">
               <a:rPr lang="en-US" smtClean="0"/>
-              <a:t>9</a:t>
+              <a:t>8</a:t>
             </a:fld>
             <a:endParaRPr lang="en-US"/>
           </a:p>

--- a/course/lectures/act-2-delegation-and-control/04-failure-aware-engineering/2-4-Failure-Aware-Engineering.pptx
+++ b/course/lectures/act-2-delegation-and-control/04-failure-aware-engineering/2-4-Failure-Aware-Engineering.pptx
@@ -1133,6 +1133,11 @@
           </a:p>
           <a:p>
             <a:r>
+              <a:t>- The control structure crosses company boundaries: Bosch supplies the engine-control capability into the engineering process, and Volkswagen delegated engineering work to IAV. A STAMP model drawn inside one organization's walls misses the control relationships that crossed them - and in this case, that is where much of the action was.</a:t>
+            </a:r>
+          </a:p>
+          <a:p>
+            <a:r>
               <a:t>- Present it seriously - it is a modeling discipline, not a punchline. The cost arrives on the next slide: breadth demands evidence and authority.</a:t>
             </a:r>
           </a:p>
@@ -2764,6 +2769,11 @@
           <a:p>
             <a:r>
               <a:t>- The callback: Volkswagen has been absent for roughly ten slides; returning to it here is the payoff. A much better final discussion than "who was unethical?"</a:t>
+            </a:r>
+          </a:p>
+          <a:p>
+            <a:r>
+              <a:t>- Supplier obligations, one more time: the counterfactual also changes what it means for a capability to cross an organizational boundary. If the compliance obligation lives in the engineering environment - model, independent validation, release gate - then a supplied capability (Bosch -&gt; Volkswagen) meets the obligation on arrival, instead of depending on what individuals at either company remembered, or chose, to enforce. The slide-4 question - who is responsible for how a supplied capability is used? - gets a structural answer: the environment that integrates it carries the obligation.</a:t>
             </a:r>
           </a:p>
           <a:p>
@@ -10273,6 +10283,110 @@
           </a:p>
         </p:txBody>
       </p:sp>
+      <p:sp>
+        <p:nvSpPr>
+          <p:cNvPr id="901" name="Block"/>
+          <p:cNvSpPr/>
+          <p:nvPr/>
+        </p:nvSpPr>
+        <p:spPr>
+          <a:xfrm>
+            <a:off x="6629400" y="3200400"/>
+            <a:ext cx="2011680" cy="640080"/>
+          </a:xfrm>
+          <a:prstGeom prst="rect">
+            <a:avLst/>
+          </a:prstGeom>
+          <a:solidFill>
+            <a:srgbClr val="8E6F3E"/>
+          </a:solidFill>
+          <a:ln>
+            <a:noFill/>
+          </a:ln>
+          <a:effectLst/>
+        </p:spPr>
+        <p:style>
+          <a:lnRef idx="1">
+            <a:schemeClr val="accent1"/>
+          </a:lnRef>
+          <a:fillRef idx="3">
+            <a:schemeClr val="accent1"/>
+          </a:fillRef>
+          <a:effectRef idx="2">
+            <a:schemeClr val="accent1"/>
+          </a:effectRef>
+          <a:fontRef idx="minor">
+            <a:schemeClr val="lt1"/>
+          </a:fontRef>
+        </p:style>
+        <p:txBody>
+          <a:bodyPr rtlCol="0" anchor="ctr" wrap="square" lIns="27432" rIns="27432" tIns="22860" bIns="22860"/>
+          <a:lstStyle/>
+          <a:p>
+            <a:pPr algn="ctr"/>
+            <a:r>
+              <a:rPr sz="2000" b="1" i="0">
+                <a:solidFill>
+                  <a:srgbClr val="FFFFFF"/>
+                </a:solidFill>
+              </a:rPr>
+              <a:t>IAV</a:t>
+            </a:r>
+          </a:p>
+        </p:txBody>
+      </p:sp>
+      <p:sp>
+        <p:nvSpPr>
+          <p:cNvPr id="901" name="Block"/>
+          <p:cNvSpPr/>
+          <p:nvPr/>
+        </p:nvSpPr>
+        <p:spPr>
+          <a:xfrm>
+            <a:off x="502920" y="3200400"/>
+            <a:ext cx="2011680" cy="640080"/>
+          </a:xfrm>
+          <a:prstGeom prst="rect">
+            <a:avLst/>
+          </a:prstGeom>
+          <a:solidFill>
+            <a:srgbClr val="8E6F3E"/>
+          </a:solidFill>
+          <a:ln>
+            <a:noFill/>
+          </a:ln>
+          <a:effectLst/>
+        </p:spPr>
+        <p:style>
+          <a:lnRef idx="1">
+            <a:schemeClr val="accent1"/>
+          </a:lnRef>
+          <a:fillRef idx="3">
+            <a:schemeClr val="accent1"/>
+          </a:fillRef>
+          <a:effectRef idx="2">
+            <a:schemeClr val="accent1"/>
+          </a:effectRef>
+          <a:fontRef idx="minor">
+            <a:schemeClr val="lt1"/>
+          </a:fontRef>
+        </p:style>
+        <p:txBody>
+          <a:bodyPr rtlCol="0" anchor="ctr" wrap="square" lIns="27432" rIns="27432" tIns="22860" bIns="22860"/>
+          <a:lstStyle/>
+          <a:p>
+            <a:pPr algn="ctr"/>
+            <a:r>
+              <a:rPr sz="2000" b="1" i="0">
+                <a:solidFill>
+                  <a:srgbClr val="FFFFFF"/>
+                </a:solidFill>
+              </a:rPr>
+              <a:t>BOSCH</a:t>
+            </a:r>
+          </a:p>
+        </p:txBody>
+      </p:sp>
       <p:cxnSp>
         <p:nvCxnSpPr>
           <p:cNvPr id="902" name="Connector 901"/>
@@ -10283,6 +10397,78 @@
           <a:xfrm>
             <a:off x="4023360" y="1828800"/>
             <a:ext cx="0" cy="365760"/>
+          </a:xfrm>
+          <a:prstGeom prst="line">
+            <a:avLst/>
+          </a:prstGeom>
+          <a:ln w="19050">
+            <a:solidFill>
+              <a:srgbClr val="8E6F3E"/>
+            </a:solidFill>
+            <a:tailEnd type="triangle"/>
+          </a:ln>
+        </p:spPr>
+        <p:style>
+          <a:lnRef idx="2">
+            <a:schemeClr val="accent1"/>
+          </a:lnRef>
+          <a:fillRef idx="0">
+            <a:schemeClr val="accent1"/>
+          </a:fillRef>
+          <a:effectRef idx="1">
+            <a:schemeClr val="accent1"/>
+          </a:effectRef>
+          <a:fontRef idx="minor">
+            <a:schemeClr val="tx1"/>
+          </a:fontRef>
+        </p:style>
+      </p:cxnSp>
+      <p:cxnSp>
+        <p:nvCxnSpPr>
+          <p:cNvPr id="902" name="Connector 901"/>
+          <p:cNvCxnSpPr/>
+          <p:nvPr/>
+        </p:nvCxnSpPr>
+        <p:spPr>
+          <a:xfrm>
+            <a:off x="6217920" y="3520440"/>
+            <a:ext cx="411480" cy="0"/>
+          </a:xfrm>
+          <a:prstGeom prst="line">
+            <a:avLst/>
+          </a:prstGeom>
+          <a:ln w="19050">
+            <a:solidFill>
+              <a:srgbClr val="8E6F3E"/>
+            </a:solidFill>
+            <a:tailEnd type="triangle"/>
+          </a:ln>
+        </p:spPr>
+        <p:style>
+          <a:lnRef idx="2">
+            <a:schemeClr val="accent1"/>
+          </a:lnRef>
+          <a:fillRef idx="0">
+            <a:schemeClr val="accent1"/>
+          </a:fillRef>
+          <a:effectRef idx="1">
+            <a:schemeClr val="accent1"/>
+          </a:effectRef>
+          <a:fontRef idx="minor">
+            <a:schemeClr val="tx1"/>
+          </a:fontRef>
+        </p:style>
+      </p:cxnSp>
+      <p:cxnSp>
+        <p:nvCxnSpPr>
+          <p:cNvPr id="902" name="Connector 901"/>
+          <p:cNvCxnSpPr/>
+          <p:nvPr/>
+        </p:nvCxnSpPr>
+        <p:spPr>
+          <a:xfrm>
+            <a:off x="2514600" y="3520440"/>
+            <a:ext cx="411480" cy="0"/>
           </a:xfrm>
           <a:prstGeom prst="line">
             <a:avLst/>

--- a/course/lectures/act-2-delegation-and-control/04-failure-aware-engineering/2-4-Failure-Aware-Engineering.pptx
+++ b/course/lectures/act-2-delegation-and-control/04-failure-aware-engineering/2-4-Failure-Aware-Engineering.pptx
@@ -10,6 +10,7 @@
   <p:sldIdLst>
     <p:sldId id="256" r:id="rId2"/>
     <p:sldId id="296" r:id="rId3"/>
+    <p:sldId id="299" r:id="rId38"/>
     <p:sldId id="257" r:id="rId4"/>
     <p:sldId id="258" r:id="rId5"/>
     <p:sldId id="294" r:id="rId6"/>
@@ -26,6 +27,7 @@
     <p:sldId id="272" r:id="rId19"/>
     <p:sldId id="273" r:id="rId20"/>
     <p:sldId id="274" r:id="rId21"/>
+    <p:sldId id="300" r:id="rId35"/>
     <p:sldId id="295" r:id="rId22"/>
     <p:sldId id="276" r:id="rId24"/>
     <p:sldId id="275" r:id="rId23"/>
@@ -33,6 +35,7 @@
     <p:sldId id="282" r:id="rId30"/>
     <p:sldId id="284" r:id="rId32"/>
     <p:sldId id="283" r:id="rId31"/>
+    <p:sldId id="301" r:id="rId29"/>
     <p:sldId id="285" r:id="rId33"/>
     <p:sldId id="286" r:id="rId34"/>
     <p:sldId id="297" r:id="rId40"/>
@@ -1770,6 +1773,176 @@
 </p:notes>
 </file>
 
+<file path=ppt/notesSlides/notesSlide24.xml><?xml version="1.0" encoding="utf-8"?>
+<p:notes xmlns:a="http://schemas.openxmlformats.org/drawingml/2006/main" xmlns:p="http://schemas.openxmlformats.org/presentationml/2006/main" xmlns:r="http://schemas.openxmlformats.org/officeDocument/2006/relationships">
+  <p:cSld>
+    <p:spTree>
+      <p:nvGrpSpPr>
+        <p:cNvPr id="1" name=""/>
+        <p:cNvGrpSpPr/>
+        <p:nvPr/>
+      </p:nvGrpSpPr>
+      <p:grpSpPr>
+        <a:xfrm>
+          <a:off x="0" y="0"/>
+          <a:ext cx="0" cy="0"/>
+          <a:chOff x="0" y="0"/>
+          <a:chExt cx="0" cy="0"/>
+        </a:xfrm>
+      </p:grpSpPr>
+      <p:sp>
+        <p:nvSpPr>
+          <p:cNvPr id="2" name="Slide Image Placeholder 1"/>
+          <p:cNvSpPr>
+            <a:spLocks noGrp="1"/>
+          </p:cNvSpPr>
+          <p:nvPr>
+            <p:ph type="sldImg" idx="2"/>
+          </p:nvPr>
+        </p:nvSpPr>
+        <p:spPr/>
+      </p:sp>
+      <p:sp>
+        <p:nvSpPr>
+          <p:cNvPr id="3" name="Notes Placeholder 2"/>
+          <p:cNvSpPr>
+            <a:spLocks noGrp="1"/>
+          </p:cNvSpPr>
+          <p:nvPr>
+            <p:ph type="body" idx="3" sz="quarter"/>
+          </p:nvPr>
+        </p:nvSpPr>
+        <p:spPr/>
+        <p:txBody>
+          <a:bodyPr/>
+          <a:lstStyle/>
+          <a:p>
+            <a:r>
+              <a:t>TIMING: 45 seconds. Let them READ it.</a:t>
+            </a:r>
+          </a:p>
+          <a:p>
+            <a:r>
+              <a:t>- Dieselgate is a deception case. This one is NOT, and students will try to make it one. The system may have been operating exactly as designed.</a:t>
+            </a:r>
+          </a:p>
+          <a:p>
+            <a:r>
+              <a:t>- Be careful with the causal claim: the research was correlational and did not establish that the product caused the reported harms. Overstating it turns an engineering question into a morality verdict and loses the lesson.</a:t>
+            </a:r>
+          </a:p>
+          <a:p>
+            <a:r>
+              <a:t>- The engineering question is the last sentence: how should an organization interpret consequential evidence about a system working as designed?</a:t>
+            </a:r>
+          </a:p>
+        </p:txBody>
+      </p:sp>
+      <p:sp>
+        <p:nvSpPr>
+          <p:cNvPr id="4" name="Slide Number Placeholder 3"/>
+          <p:cNvSpPr>
+            <a:spLocks noGrp="1"/>
+          </p:cNvSpPr>
+          <p:nvPr>
+            <p:ph type="sldNum" idx="5" sz="quarter"/>
+          </p:nvPr>
+        </p:nvSpPr>
+        <p:spPr/>
+      </p:sp>
+    </p:spTree>
+  </p:cSld>
+  <p:clrMapOvr>
+    <a:masterClrMapping/>
+  </p:clrMapOvr>
+</p:notes>
+</file>
+
+<file path=ppt/notesSlides/notesSlide25.xml><?xml version="1.0" encoding="utf-8"?>
+<p:notes xmlns:a="http://schemas.openxmlformats.org/drawingml/2006/main" xmlns:p="http://schemas.openxmlformats.org/presentationml/2006/main" xmlns:r="http://schemas.openxmlformats.org/officeDocument/2006/relationships">
+  <p:cSld>
+    <p:spTree>
+      <p:nvGrpSpPr>
+        <p:cNvPr id="1" name=""/>
+        <p:cNvGrpSpPr/>
+        <p:nvPr/>
+      </p:nvGrpSpPr>
+      <p:grpSpPr>
+        <a:xfrm>
+          <a:off x="0" y="0"/>
+          <a:ext cx="0" cy="0"/>
+          <a:chOff x="0" y="0"/>
+          <a:chExt cx="0" cy="0"/>
+        </a:xfrm>
+      </p:grpSpPr>
+      <p:sp>
+        <p:nvSpPr>
+          <p:cNvPr id="2" name="Slide Image Placeholder 1"/>
+          <p:cNvSpPr>
+            <a:spLocks noGrp="1"/>
+          </p:cNvSpPr>
+          <p:nvPr>
+            <p:ph type="sldImg" idx="2"/>
+          </p:nvPr>
+        </p:nvSpPr>
+        <p:spPr/>
+      </p:sp>
+      <p:sp>
+        <p:nvSpPr>
+          <p:cNvPr id="3" name="Notes Placeholder 2"/>
+          <p:cNvSpPr>
+            <a:spLocks noGrp="1"/>
+          </p:cNvSpPr>
+          <p:nvPr>
+            <p:ph type="body" idx="3" sz="quarter"/>
+          </p:nvPr>
+        </p:nvSpPr>
+        <p:spPr/>
+        <p:txBody>
+          <a:bodyPr/>
+          <a:lstStyle/>
+          <a:p>
+            <a:r>
+              <a:t>TIMING: 45 seconds. Let them READ it — do not narrate it.</a:t>
+            </a:r>
+          </a:p>
+          <a:p>
+            <a:r>
+              <a:t>- Purpose: students meet the regulatory change on the next slide without knowing what story they are entering. This establishes the situation and the observed outcome.</a:t>
+            </a:r>
+          </a:p>
+          <a:p>
+            <a:r>
+              <a:t>- It deliberately does NOT explain WHY it happened. That is the whole point of the next eight slides and of the four theories after them.</a:t>
+            </a:r>
+          </a:p>
+          <a:p>
+            <a:r>
+              <a:t>- If asked 'who is to blame' here, defer it. The lecture's argument is that the answer depends on which causal theory you adopt.</a:t>
+            </a:r>
+          </a:p>
+        </p:txBody>
+      </p:sp>
+      <p:sp>
+        <p:nvSpPr>
+          <p:cNvPr id="4" name="Slide Number Placeholder 3"/>
+          <p:cNvSpPr>
+            <a:spLocks noGrp="1"/>
+          </p:cNvSpPr>
+          <p:nvPr>
+            <p:ph type="sldNum" idx="5" sz="quarter"/>
+          </p:nvPr>
+        </p:nvSpPr>
+        <p:spPr/>
+      </p:sp>
+    </p:spTree>
+  </p:cSld>
+  <p:clrMapOvr>
+    <a:masterClrMapping/>
+  </p:clrMapOvr>
+</p:notes>
+</file>
+
 <file path=ppt/notesSlides/notesSlide26.xml><?xml version="1.0" encoding="utf-8"?>
 <p:notes xmlns:a="http://schemas.openxmlformats.org/drawingml/2006/main" xmlns:p="http://schemas.openxmlformats.org/presentationml/2006/main" xmlns:r="http://schemas.openxmlformats.org/officeDocument/2006/relationships">
   <p:cSld>
@@ -1831,6 +2004,12 @@
           <a:p>
             <a:r>
               <a:t>- Both benefit from controls that do not depend entirely on the recipient's memory or judgment. That is the tie back to Delegation (what context must the recipient receive?) and Alignment (what mechanism preserves the obligation?).</a:t>
+            </a:r>
+          </a:p>
+          <a:p/>
+          <a:p>
+            <a:r>
+              <a:t>KEEP EXPLICIT (established in Alignment): a validator and a gate are NOT interchangeable. A validator determines whether an obligation is satisfied; a gate controls whether work may proceed given that verdict. A validator with no gate reports; a gate with no validator blocks on nothing.</a:t>
             </a:r>
           </a:p>
         </p:txBody>
@@ -2003,6 +2182,12 @@
               <a:t>- The four things the environment must supply are the four roles from Alignment: the authoritative invariant (model), its applicability to THIS work, a way to evaluate the proposed change (validator), and a mechanism that refuses admission when it is violated (gate).</a:t>
             </a:r>
           </a:p>
+          <a:p/>
+          <a:p>
+            <a:r>
+              <a:t>KEEP EXPLICIT (established in Alignment): a validator and a gate are NOT interchangeable. A validator determines whether an obligation is satisfied; a gate controls whether work may proceed given that verdict. A validator with no gate reports; a gate with no validator blocks on nothing.</a:t>
+            </a:r>
+          </a:p>
         </p:txBody>
       </p:sp>
       <p:sp>
@@ -2070,7 +2255,7 @@
           <a:lstStyle/>
           <a:p>
             <a:r>
-              <a:t>TIMING: 3 minutes. THE WORKED EXAMPLE STARTS HERE and runs to the end of the lecture.</a:t>
+              <a:t>TIMING: 3 minutes. THE WORKED EXAMPLE STARTS HERE and runs to the close.</a:t>
             </a:r>
           </a:p>
           <a:p>
@@ -2080,17 +2265,22 @@
           </a:p>
           <a:p>
             <a:r>
-              <a:t>- Walk the three candidate lessons. The first restates the observation. The third is a sweeping claim the evidence cannot carry.</a:t>
-            </a:r>
-          </a:p>
-          <a:p>
-            <a:r>
-              <a:t>- The middle one is the engineering judgment: it generalizes the MECHANISM (mutation after lease expiry) rather than the surface symptom. That is the skill — ask what causal mechanism can recur, not whether the sentence sounds appropriately cautious.</a:t>
-            </a:r>
-          </a:p>
-          <a:p>
-            <a:r>
-              <a:t>- Students routinely pick the third because it sounds responsible. Name that.</a:t>
+              <a:t>- Row 1 restates the observation — true, and it generalizes to nothing.</a:t>
+            </a:r>
+          </a:p>
+          <a:p>
+            <a:r>
+              <a:t>- Row 2 is the engineering judgment. Note precisely what it does NOT say: an expired lease does not by itself cause duplicate processing. The mechanism is a STALE WORKER acting after another worker has acquired ownership. That is the thing an obligation can prevent, and it is exactly what the lease-generation invariant on the next slides enforces.</a:t>
+            </a:r>
+          </a:p>
+          <a:p>
+            <a:r>
+              <a:t>- Row 3 is a sweeping claim the evidence cannot carry. Students reach for it because it sounds responsible — name that when it happens.</a:t>
+            </a:r>
+          </a:p>
+          <a:p>
+            <a:r>
+              <a:t>- The skill is asking which causal MECHANISM can recur, not whether a sentence sounds appropriately cautious.</a:t>
             </a:r>
           </a:p>
         </p:txBody>
@@ -2531,6 +2721,106 @@
 </p:notes>
 </file>
 
+<file path=ppt/notesSlides/notesSlide34.xml><?xml version="1.0" encoding="utf-8"?>
+<p:notes xmlns:a="http://schemas.openxmlformats.org/drawingml/2006/main" xmlns:p="http://schemas.openxmlformats.org/presentationml/2006/main" xmlns:r="http://schemas.openxmlformats.org/officeDocument/2006/relationships">
+  <p:cSld>
+    <p:spTree>
+      <p:nvGrpSpPr>
+        <p:cNvPr id="1" name=""/>
+        <p:cNvGrpSpPr/>
+        <p:nvPr/>
+      </p:nvGrpSpPr>
+      <p:grpSpPr>
+        <a:xfrm>
+          <a:off x="0" y="0"/>
+          <a:ext cx="0" cy="0"/>
+          <a:chOff x="0" y="0"/>
+          <a:chExt cx="0" cy="0"/>
+        </a:xfrm>
+      </p:grpSpPr>
+      <p:sp>
+        <p:nvSpPr>
+          <p:cNvPr id="2" name="Slide Image Placeholder 1"/>
+          <p:cNvSpPr>
+            <a:spLocks noGrp="1"/>
+          </p:cNvSpPr>
+          <p:nvPr>
+            <p:ph type="sldImg" idx="2"/>
+          </p:nvPr>
+        </p:nvSpPr>
+        <p:spPr/>
+      </p:sp>
+      <p:sp>
+        <p:nvSpPr>
+          <p:cNvPr id="3" name="Notes Placeholder 2"/>
+          <p:cNvSpPr>
+            <a:spLocks noGrp="1"/>
+          </p:cNvSpPr>
+          <p:nvPr>
+            <p:ph type="body" idx="3" sz="quarter"/>
+          </p:nvPr>
+        </p:nvSpPr>
+        <p:spPr/>
+        <p:txBody>
+          <a:bodyPr/>
+          <a:lstStyle/>
+          <a:p>
+            <a:r>
+              <a:t>TIMING: 3-4 minutes. THE CENTRAL ENGINEERING JUDGMENT of the section.</a:t>
+            </a:r>
+          </a:p>
+          <a:p>
+            <a:r>
+              <a:t>- The move students miss: a causal account explains how a failure occurred. It does NOT determine which future failures should be prevented, or how.</a:t>
+            </a:r>
+          </a:p>
+          <a:p>
+            <a:r>
+              <a:t>- Two different modes of reasoning. DIAGNOSIS works BACKWARD from an observed consequence to the conditions that produced it. CORRECTIVE DESIGN works FORWARD from candidate interventions to the consequences they would produce. The second is not determined by the first — that mental transition is the hard part, and it is ordinary engineering again, with new evidence.</a:t>
+            </a:r>
+          </a:p>
+          <a:p>
+            <a:r>
+              <a:t>- Walk the four rows. Row 1 may be too narrow: the same mechanism stays available elsewhere. Row 4 may be broader than necessary and constrains unrelated work. Row 3 targets the mechanism the evidence actually supports.</a:t>
+            </a:r>
+          </a:p>
+          <a:p>
+            <a:r>
+              <a:t>- Other alternatives worth raising if the room is engaged: terminate stale workers, serialize ownership transitions, or combine mechanisms. Each excludes a different class, carries different cost, and may introduce new failure modes.</a:t>
+            </a:r>
+          </a:p>
+          <a:p>
+            <a:r>
+              <a:t>- This is the same judgment they met in SPECIFICATION: which distinctions among possible behaviors must be constrained, and which may remain free? Failure analysis does not end at a cause; it reopens specification and design.</a:t>
+            </a:r>
+          </a:p>
+          <a:p>
+            <a:r>
+              <a:t>- CAREFUL with 'always prevent the class'. Some failures reveal acceptable residual uncertainty, and prevention can cost more than the consequences justify. The general principle: use failure evidence to reconsider what future behavior should be PERMITTED, PREVENTED, DETECTED, or TOLERATED. The engineer chooses not only how broadly to intervene, but what KIND of intervention is warranted.</a:t>
+            </a:r>
+          </a:p>
+        </p:txBody>
+      </p:sp>
+      <p:sp>
+        <p:nvSpPr>
+          <p:cNvPr id="4" name="Slide Number Placeholder 3"/>
+          <p:cNvSpPr>
+            <a:spLocks noGrp="1"/>
+          </p:cNvSpPr>
+          <p:nvPr>
+            <p:ph type="sldNum" idx="5" sz="quarter"/>
+          </p:nvPr>
+        </p:nvSpPr>
+        <p:spPr/>
+      </p:sp>
+    </p:spTree>
+  </p:cSld>
+  <p:clrMapOvr>
+    <a:masterClrMapping/>
+  </p:clrMapOvr>
+</p:notes>
+</file>
+
 <file path=ppt/notesSlides/notesSlide35.xml><?xml version="1.0" encoding="utf-8"?>
 <p:notes xmlns:a="http://schemas.openxmlformats.org/drawingml/2006/main" xmlns:r="http://schemas.openxmlformats.org/officeDocument/2006/relationships" xmlns:p="http://schemas.openxmlformats.org/presentationml/2006/main">
   <p:cSld>
@@ -2592,6 +2882,12 @@
           <a:p>
             <a:r>
               <a:t>- Run the worker incident through it: the invariant existed in a postmortem (obligation yes, representation weak), nothing evaluated it, nothing enforced it.</a:t>
+            </a:r>
+          </a:p>
+          <a:p/>
+          <a:p>
+            <a:r>
+              <a:t>KEEP EXPLICIT (established in Alignment): a validator and a gate are NOT interchangeable. A validator determines whether an obligation is satisfied; a gate controls whether work may proceed given that verdict. A validator with no gate reports; a gate with no validator blocks on nothing.</a:t>
             </a:r>
           </a:p>
         </p:txBody>
@@ -13115,7 +13411,7 @@
         </p:nvSpPr>
         <p:spPr>
           <a:xfrm>
-            <a:off x="731520" y="3712464"/>
+            <a:off x="731520" y="3822192"/>
             <a:ext cx="2926080" cy="566928"/>
           </a:xfrm>
           <a:prstGeom prst="rect">
@@ -13203,7 +13499,7 @@
         </p:nvSpPr>
         <p:spPr>
           <a:xfrm>
-            <a:off x="731520" y="4553712"/>
+            <a:off x="731520" y="4663440"/>
             <a:ext cx="2926080" cy="566928"/>
           </a:xfrm>
           <a:prstGeom prst="rect">
@@ -13405,7 +13701,7 @@
         </p:nvSpPr>
         <p:spPr>
           <a:xfrm>
-            <a:off x="3840480" y="3712464"/>
+            <a:off x="3840480" y="3822192"/>
             <a:ext cx="4754880" cy="566928"/>
           </a:xfrm>
           <a:prstGeom prst="rect">
@@ -13455,7 +13751,7 @@
         </p:nvSpPr>
         <p:spPr>
           <a:xfrm>
-            <a:off x="3840480" y="4553712"/>
+            <a:off x="3840480" y="4663440"/>
             <a:ext cx="4754880" cy="566928"/>
           </a:xfrm>
           <a:prstGeom prst="rect">
@@ -13545,6 +13841,110 @@
                 </a:solidFill>
               </a:rPr>
               <a:t>A failure analysis must examine both the system’s behavior and the engineering decisions that permitted it.</a:t>
+            </a:r>
+          </a:p>
+        </p:txBody>
+      </p:sp>
+      <p:sp>
+        <p:nvSpPr>
+          <p:cNvPr id="930" name="GroupLabel"/>
+          <p:cNvSpPr/>
+          <p:nvPr/>
+        </p:nvSpPr>
+        <p:spPr>
+          <a:xfrm>
+            <a:off x="731520" y="914400"/>
+            <a:ext cx="7863840" cy="237744"/>
+          </a:xfrm>
+          <a:prstGeom prst="rect">
+            <a:avLst/>
+          </a:prstGeom>
+          <a:solidFill>
+            <a:srgbClr val="8E6F3E"/>
+          </a:solidFill>
+          <a:ln>
+            <a:noFill/>
+          </a:ln>
+          <a:effectLst/>
+        </p:spPr>
+        <p:style>
+          <a:lnRef idx="1">
+            <a:schemeClr val="accent1"/>
+          </a:lnRef>
+          <a:fillRef idx="3">
+            <a:schemeClr val="accent1"/>
+          </a:fillRef>
+          <a:effectRef idx="2">
+            <a:schemeClr val="accent1"/>
+          </a:effectRef>
+          <a:fontRef idx="minor">
+            <a:schemeClr val="lt1"/>
+          </a:fontRef>
+        </p:style>
+        <p:txBody>
+          <a:bodyPr wrap="none" lIns="27432" tIns="22860" rIns="27432" bIns="22860" rtlCol="0" anchor="ctr"/>
+          <a:lstStyle/>
+          <a:p>
+            <a:pPr algn="ctr"/>
+            <a:r>
+              <a:rPr sz="2000" b="1" i="0">
+                <a:solidFill>
+                  <a:srgbClr val="FFFFFF"/>
+                </a:solidFill>
+              </a:rPr>
+              <a:t>WHAT FAILED?</a:t>
+            </a:r>
+          </a:p>
+        </p:txBody>
+      </p:sp>
+      <p:sp>
+        <p:nvSpPr>
+          <p:cNvPr id="930" name="GroupLabel"/>
+          <p:cNvSpPr/>
+          <p:nvPr/>
+        </p:nvSpPr>
+        <p:spPr>
+          <a:xfrm>
+            <a:off x="731520" y="3438144"/>
+            <a:ext cx="7863840" cy="237744"/>
+          </a:xfrm>
+          <a:prstGeom prst="rect">
+            <a:avLst/>
+          </a:prstGeom>
+          <a:solidFill>
+            <a:srgbClr val="8E6F3E"/>
+          </a:solidFill>
+          <a:ln>
+            <a:noFill/>
+          </a:ln>
+          <a:effectLst/>
+        </p:spPr>
+        <p:style>
+          <a:lnRef idx="1">
+            <a:schemeClr val="accent1"/>
+          </a:lnRef>
+          <a:fillRef idx="3">
+            <a:schemeClr val="accent1"/>
+          </a:fillRef>
+          <a:effectRef idx="2">
+            <a:schemeClr val="accent1"/>
+          </a:effectRef>
+          <a:fontRef idx="minor">
+            <a:schemeClr val="lt1"/>
+          </a:fontRef>
+        </p:style>
+        <p:txBody>
+          <a:bodyPr wrap="none" lIns="27432" tIns="22860" rIns="27432" bIns="22860" rtlCol="0" anchor="ctr"/>
+          <a:lstStyle/>
+          <a:p>
+            <a:pPr algn="ctr"/>
+            <a:r>
+              <a:rPr sz="2000" b="1" i="0">
+                <a:solidFill>
+                  <a:srgbClr val="FFFFFF"/>
+                </a:solidFill>
+              </a:rPr>
+              <a:t>WHY DIDN’T WE KNOW?</a:t>
             </a:r>
           </a:p>
         </p:txBody>
@@ -13880,7 +14280,7 @@
                   <a:srgbClr val="5C4826"/>
                 </a:solidFill>
               </a:rPr>
-              <a:t>A timeout let two workers both believe they owned the same job, in this execution</a:t>
+              <a:t>OBSERVED</a:t>
             </a:r>
           </a:p>
           <a:p>
@@ -13891,7 +14291,7 @@
                   <a:srgbClr val="5C4826"/>
                 </a:solidFill>
               </a:rPr>
-              <a:t>Directly supported</a:t>
+              <a:t>Two workers believed they owned the same job after a timeout.</a:t>
             </a:r>
           </a:p>
         </p:txBody>
@@ -13945,7 +14345,7 @@
                   <a:srgbClr val="5C4826"/>
                 </a:solidFill>
               </a:rPr>
-              <a:t>Any job mutation after a lease expires can double-process</a:t>
+              <a:t>GENERALIZED MECHANISM</a:t>
             </a:r>
           </a:p>
           <a:p>
@@ -13956,7 +14356,7 @@
                   <a:srgbClr val="5C4826"/>
                 </a:solidFill>
               </a:rPr>
-              <a:t>Plausible — it generalizes the MECHANISM</a:t>
+              <a:t>A stale worker may modify a job after another worker has acquired its lease.</a:t>
             </a:r>
           </a:p>
         </p:txBody>
@@ -14010,7 +14410,7 @@
                   <a:srgbClr val="5C4826"/>
                 </a:solidFill>
               </a:rPr>
-              <a:t>Every asynchronous operation must be idempotent</a:t>
+              <a:t>UNSUPPORTED GENERALIZATION</a:t>
             </a:r>
           </a:p>
           <a:p>
@@ -14021,7 +14421,7 @@
                   <a:srgbClr val="5C4826"/>
                 </a:solidFill>
               </a:rPr>
-              <a:t>Unsupported generalization</a:t>
+              <a:t>Every asynchronous operation must be idempotent.</a:t>
             </a:r>
           </a:p>
         </p:txBody>
@@ -15008,7 +15408,7 @@
                   <a:srgbClr val="FFFFFF"/>
                 </a:solidFill>
               </a:rPr>
-              <a:t>A lesson reaches the next decision only if the environment presents it there.</a:t>
+              <a:t>Durable engineering knowledge must be available when future decisions depend on it.</a:t>
             </a:r>
           </a:p>
         </p:txBody>
@@ -15244,8 +15644,8 @@
 </p:sld>
 </file>
 
-<file path=ppt/slides/slide29.xml><?xml version="1.0" encoding="utf-8"?>
-<p:sld xmlns:a="http://schemas.openxmlformats.org/drawingml/2006/main" xmlns:r="http://schemas.openxmlformats.org/officeDocument/2006/relationships" xmlns:p="http://schemas.openxmlformats.org/presentationml/2006/main">
+<file path=ppt/slides/slide28.xml><?xml version="1.0" encoding="utf-8"?>
+<p:sld xmlns:a="http://schemas.openxmlformats.org/drawingml/2006/main" xmlns:p="http://schemas.openxmlformats.org/presentationml/2006/main" xmlns:r="http://schemas.openxmlformats.org/officeDocument/2006/relationships">
   <p:cSld>
     <p:spTree>
       <p:nvGrpSpPr>
@@ -15253,14 +15653,7 @@
         <p:cNvGrpSpPr/>
         <p:nvPr/>
       </p:nvGrpSpPr>
-      <p:grpSpPr>
-        <a:xfrm>
-          <a:off x="0" y="0"/>
-          <a:ext cx="0" cy="0"/>
-          <a:chOff x="0" y="0"/>
-          <a:chExt cx="0" cy="0"/>
-        </a:xfrm>
-      </p:grpSpPr>
+      <p:grpSpPr/>
       <p:sp>
         <p:nvSpPr>
           <p:cNvPr id="3" name="Title 2"/>
@@ -15289,7 +15682,7 @@
                   <a:srgbClr val="000000"/>
                 </a:solidFill>
               </a:rPr>
-              <a:t>Convert the lesson into engineering structure</a:t>
+              <a:t>How will the next engineer know?</a:t>
             </a:r>
           </a:p>
         </p:txBody>
@@ -15364,7 +15757,7 @@
                   <a:srgbClr val="FFFFFF"/>
                 </a:solidFill>
               </a:rPr>
-              <a:t>FAILURE OR SURPRISE</a:t>
+              <a:t>A NEW ENGINEER</a:t>
             </a:r>
           </a:p>
         </p:txBody>
@@ -15454,7 +15847,7 @@
                   <a:srgbClr val="5C4826"/>
                 </a:solidFill>
               </a:rPr>
-              <a:t>What was missing?</a:t>
+              <a:t>asked to change the worker’s recovery behavior</a:t>
             </a:r>
           </a:p>
         </p:txBody>
@@ -15542,7 +15935,7 @@
                   <a:srgbClr val="FFFFFF"/>
                 </a:solidFill>
               </a:rPr>
-              <a:t>FIVE DIAGNOSES</a:t>
+              <a:t>THE LEASE INVARIANT</a:t>
             </a:r>
           </a:p>
         </p:txBody>
@@ -15632,7 +16025,7 @@
                   <a:srgbClr val="5C4826"/>
                 </a:solidFill>
               </a:rPr>
-              <a:t>Each points to a different intervention</a:t>
+              <a:t>How would they know it exists?</a:t>
             </a:r>
           </a:p>
         </p:txBody>
@@ -15681,8 +16074,8 @@
         </p:nvSpPr>
         <p:spPr>
           <a:xfrm>
-            <a:off x="228600" y="4434840"/>
-            <a:ext cx="1554480" cy="640080"/>
+            <a:off x="731520" y="4389120"/>
+            <a:ext cx="1737360" cy="594360"/>
           </a:xfrm>
           <a:prstGeom prst="rect">
             <a:avLst/>
@@ -15720,7 +16113,7 @@
                   <a:srgbClr val="FFFFFF"/>
                 </a:solidFill>
               </a:rPr>
-              <a:t>OBLIGATION</a:t>
+              <a:t>MODEL</a:t>
             </a:r>
           </a:p>
         </p:txBody>
@@ -15733,8 +16126,8 @@
         </p:nvSpPr>
         <p:spPr>
           <a:xfrm>
-            <a:off x="2011680" y="4434840"/>
-            <a:ext cx="1554480" cy="640080"/>
+            <a:off x="2743200" y="4389120"/>
+            <a:ext cx="1737360" cy="594360"/>
           </a:xfrm>
           <a:prstGeom prst="rect">
             <a:avLst/>
@@ -15772,7 +16165,7 @@
                   <a:srgbClr val="FFFFFF"/>
                 </a:solidFill>
               </a:rPr>
-              <a:t>REPRESENTATION</a:t>
+              <a:t>APPLICABILITY</a:t>
             </a:r>
           </a:p>
         </p:txBody>
@@ -15785,8 +16178,8 @@
         </p:nvSpPr>
         <p:spPr>
           <a:xfrm>
-            <a:off x="3794760" y="4434840"/>
-            <a:ext cx="1554480" cy="640080"/>
+            <a:off x="4754880" y="4389120"/>
+            <a:ext cx="1737360" cy="594360"/>
           </a:xfrm>
           <a:prstGeom prst="rect">
             <a:avLst/>
@@ -15824,7 +16217,7 @@
                   <a:srgbClr val="FFFFFF"/>
                 </a:solidFill>
               </a:rPr>
-              <a:t>EVIDENCE</a:t>
+              <a:t>VALIDATOR</a:t>
             </a:r>
           </a:p>
         </p:txBody>
@@ -15837,8 +16230,8 @@
         </p:nvSpPr>
         <p:spPr>
           <a:xfrm>
-            <a:off x="5577840" y="4434840"/>
-            <a:ext cx="1554480" cy="640080"/>
+            <a:off x="6766560" y="4389120"/>
+            <a:ext cx="1737360" cy="594360"/>
           </a:xfrm>
           <a:prstGeom prst="rect">
             <a:avLst/>
@@ -15876,7 +16269,7 @@
                   <a:srgbClr val="FFFFFF"/>
                 </a:solidFill>
               </a:rPr>
-              <a:t>EVALUATION</a:t>
+              <a:t>GATE</a:t>
             </a:r>
           </a:p>
         </p:txBody>
@@ -15926,7 +16319,7 @@
                   <a:schemeClr val="bg1"/>
                 </a:solidFill>
               </a:rPr>
-              <a:t>A failure is not a request for another gate. Diagnose what was missing, then encode it.</a:t>
+              <a:t>A worker may modify a job only while holding its current lease generation.</a:t>
             </a:r>
             <a:endParaRPr sz="2800" b="1" i="0" dirty="0">
               <a:solidFill>
@@ -15936,16 +16329,90 @@
           </a:p>
         </p:txBody>
       </p:sp>
-      <p:sp>
-        <p:nvSpPr>
-          <p:cNvPr id="909" name="Block"/>
+    </p:spTree>
+  </p:cSld>
+  <p:clrMapOvr>
+    <a:masterClrMapping/>
+  </p:clrMapOvr>
+</p:sld>
+</file>
+
+<file path=ppt/slides/slide29.xml><?xml version="1.0" encoding="utf-8"?>
+<p:sld xmlns:a="http://schemas.openxmlformats.org/drawingml/2006/main" xmlns:p="http://schemas.openxmlformats.org/presentationml/2006/main" xmlns:r="http://schemas.openxmlformats.org/officeDocument/2006/relationships">
+  <p:cSld>
+    <p:spTree>
+      <p:nvGrpSpPr>
+        <p:cNvPr id="1" name=""/>
+        <p:cNvGrpSpPr/>
+        <p:nvPr/>
+      </p:nvGrpSpPr>
+      <p:grpSpPr/>
+      <p:sp>
+        <p:nvSpPr>
+          <p:cNvPr id="3" name="Title 2"/>
+          <p:cNvSpPr>
+            <a:spLocks noGrp="1"/>
+          </p:cNvSpPr>
+          <p:nvPr>
+            <p:ph type="title"/>
+          </p:nvPr>
+        </p:nvSpPr>
+        <p:spPr>
+          <a:xfrm>
+            <a:off x="277148" y="118428"/>
+            <a:ext cx="9145148" cy="638175"/>
+          </a:xfrm>
+        </p:spPr>
+        <p:txBody>
+          <a:bodyPr>
+            <a:normAutofit fontScale="90000"/>
+          </a:bodyPr>
+          <a:lstStyle/>
+          <a:p>
+            <a:r>
+              <a:rPr lang="en-US" sz="2400" b="0" i="0" dirty="0">
+                <a:solidFill>
+                  <a:srgbClr val="000000"/>
+                </a:solidFill>
+              </a:rPr>
+              <a:t>How will the agent know?</a:t>
+            </a:r>
+          </a:p>
+        </p:txBody>
+      </p:sp>
+      <p:sp>
+        <p:nvSpPr>
+          <p:cNvPr id="900" name="Slide Number Placeholder 900"/>
+          <p:cNvSpPr>
+            <a:spLocks noGrp="1"/>
+          </p:cNvSpPr>
+          <p:nvPr>
+            <p:ph type="sldNum" sz="quarter" idx="4"/>
+          </p:nvPr>
+        </p:nvSpPr>
+        <p:spPr/>
+        <p:txBody>
+          <a:bodyPr/>
+          <a:lstStyle/>
+          <a:p>
+            <a:fld id="{54DE72B0-FFEB-4C83-B4BD-F25961BEDFCA}" type="slidenum">
+              <a:rPr lang="en-US" smtClean="0"/>
+              <a:t>35</a:t>
+            </a:fld>
+            <a:endParaRPr lang="en-US"/>
+          </a:p>
+        </p:txBody>
+      </p:sp>
+      <p:sp>
+        <p:nvSpPr>
+          <p:cNvPr id="901" name="Block"/>
           <p:cNvSpPr/>
           <p:nvPr/>
         </p:nvSpPr>
         <p:spPr>
           <a:xfrm>
-            <a:off x="7360920" y="4434840"/>
-            <a:ext cx="1554480" cy="640080"/>
+            <a:off x="2606040" y="1097280"/>
+            <a:ext cx="3931920" cy="548640"/>
           </a:xfrm>
           <a:prstGeom prst="rect">
             <a:avLst/>
@@ -15983,8 +16450,575 @@
                   <a:srgbClr val="FFFFFF"/>
                 </a:solidFill>
               </a:rPr>
-              <a:t>ENFORCEMENT</a:t>
-            </a:r>
+              <a:t>THE SAME CHANGE</a:t>
+            </a:r>
+          </a:p>
+        </p:txBody>
+      </p:sp>
+      <p:cxnSp>
+        <p:nvCxnSpPr>
+          <p:cNvPr id="902" name="Connector 901"/>
+          <p:cNvCxnSpPr/>
+          <p:nvPr/>
+        </p:nvCxnSpPr>
+        <p:spPr>
+          <a:xfrm>
+            <a:off x="4572000" y="1645919"/>
+            <a:ext cx="0" cy="274321"/>
+          </a:xfrm>
+          <a:prstGeom prst="line">
+            <a:avLst/>
+          </a:prstGeom>
+          <a:ln w="19050">
+            <a:solidFill>
+              <a:srgbClr val="8E6F3E"/>
+            </a:solidFill>
+            <a:tailEnd type="triangle"/>
+          </a:ln>
+        </p:spPr>
+        <p:style>
+          <a:lnRef idx="2">
+            <a:schemeClr val="accent1"/>
+          </a:lnRef>
+          <a:fillRef idx="0">
+            <a:schemeClr val="accent1"/>
+          </a:fillRef>
+          <a:effectRef idx="1">
+            <a:schemeClr val="accent1"/>
+          </a:effectRef>
+          <a:fontRef idx="minor">
+            <a:schemeClr val="tx1"/>
+          </a:fontRef>
+        </p:style>
+      </p:cxnSp>
+      <p:sp>
+        <p:nvSpPr>
+          <p:cNvPr id="903" name="Card"/>
+          <p:cNvSpPr/>
+          <p:nvPr/>
+        </p:nvSpPr>
+        <p:spPr>
+          <a:xfrm>
+            <a:off x="2606040" y="1920240"/>
+            <a:ext cx="3931920" cy="548640"/>
+          </a:xfrm>
+          <a:prstGeom prst="rect">
+            <a:avLst/>
+          </a:prstGeom>
+          <a:solidFill>
+            <a:srgbClr val="F5F1E8"/>
+          </a:solidFill>
+          <a:ln w="12700">
+            <a:solidFill>
+              <a:srgbClr val="C9B991"/>
+            </a:solidFill>
+          </a:ln>
+          <a:effectLst/>
+        </p:spPr>
+        <p:style>
+          <a:lnRef idx="1">
+            <a:schemeClr val="accent1"/>
+          </a:lnRef>
+          <a:fillRef idx="3">
+            <a:schemeClr val="accent1"/>
+          </a:fillRef>
+          <a:effectRef idx="2">
+            <a:schemeClr val="accent1"/>
+          </a:effectRef>
+          <a:fontRef idx="minor">
+            <a:schemeClr val="lt1"/>
+          </a:fontRef>
+        </p:style>
+        <p:txBody>
+          <a:bodyPr wrap="square" lIns="27432" tIns="22860" rIns="27432" bIns="22860" rtlCol="0" anchor="ctr"/>
+          <a:lstStyle/>
+          <a:p>
+            <a:pPr algn="ctr"/>
+            <a:r>
+              <a:rPr sz="2000" b="0" i="1">
+                <a:solidFill>
+                  <a:srgbClr val="5C4826"/>
+                </a:solidFill>
+              </a:rPr>
+              <a:t>an agent is asked to optimize the queue</a:t>
+            </a:r>
+          </a:p>
+        </p:txBody>
+      </p:sp>
+      <p:cxnSp>
+        <p:nvCxnSpPr>
+          <p:cNvPr id="904" name="Connector 903"/>
+          <p:cNvCxnSpPr/>
+          <p:nvPr/>
+        </p:nvCxnSpPr>
+        <p:spPr>
+          <a:xfrm>
+            <a:off x="4572000" y="2468880"/>
+            <a:ext cx="0" cy="274320"/>
+          </a:xfrm>
+          <a:prstGeom prst="line">
+            <a:avLst/>
+          </a:prstGeom>
+          <a:ln w="19050">
+            <a:solidFill>
+              <a:srgbClr val="8E6F3E"/>
+            </a:solidFill>
+            <a:tailEnd type="triangle"/>
+          </a:ln>
+        </p:spPr>
+        <p:style>
+          <a:lnRef idx="2">
+            <a:schemeClr val="accent1"/>
+          </a:lnRef>
+          <a:fillRef idx="0">
+            <a:schemeClr val="accent1"/>
+          </a:fillRef>
+          <a:effectRef idx="1">
+            <a:schemeClr val="accent1"/>
+          </a:effectRef>
+          <a:fontRef idx="minor">
+            <a:schemeClr val="tx1"/>
+          </a:fontRef>
+        </p:style>
+      </p:cxnSp>
+      <p:sp>
+        <p:nvSpPr>
+          <p:cNvPr id="905" name="Block"/>
+          <p:cNvSpPr/>
+          <p:nvPr/>
+        </p:nvSpPr>
+        <p:spPr>
+          <a:xfrm>
+            <a:off x="2606040" y="2743200"/>
+            <a:ext cx="3931920" cy="548640"/>
+          </a:xfrm>
+          <a:prstGeom prst="rect">
+            <a:avLst/>
+          </a:prstGeom>
+          <a:solidFill>
+            <a:srgbClr val="8E6F3E"/>
+          </a:solidFill>
+          <a:ln>
+            <a:noFill/>
+          </a:ln>
+          <a:effectLst/>
+        </p:spPr>
+        <p:style>
+          <a:lnRef idx="1">
+            <a:schemeClr val="accent1"/>
+          </a:lnRef>
+          <a:fillRef idx="3">
+            <a:schemeClr val="accent1"/>
+          </a:fillRef>
+          <a:effectRef idx="2">
+            <a:schemeClr val="accent1"/>
+          </a:effectRef>
+          <a:fontRef idx="minor">
+            <a:schemeClr val="lt1"/>
+          </a:fontRef>
+        </p:style>
+        <p:txBody>
+          <a:bodyPr wrap="square" lIns="27432" tIns="22860" rIns="27432" bIns="22860" rtlCol="0" anchor="ctr"/>
+          <a:lstStyle/>
+          <a:p>
+            <a:pPr algn="ctr"/>
+            <a:r>
+              <a:rPr sz="2000" b="1" i="0">
+                <a:solidFill>
+                  <a:srgbClr val="FFFFFF"/>
+                </a:solidFill>
+              </a:rPr>
+              <a:t>THE SAME INVARIANT</a:t>
+            </a:r>
+          </a:p>
+        </p:txBody>
+      </p:sp>
+      <p:cxnSp>
+        <p:nvCxnSpPr>
+          <p:cNvPr id="906" name="Connector 905"/>
+          <p:cNvCxnSpPr/>
+          <p:nvPr/>
+        </p:nvCxnSpPr>
+        <p:spPr>
+          <a:xfrm>
+            <a:off x="4572000" y="3291840"/>
+            <a:ext cx="0" cy="274320"/>
+          </a:xfrm>
+          <a:prstGeom prst="line">
+            <a:avLst/>
+          </a:prstGeom>
+          <a:ln w="19050">
+            <a:solidFill>
+              <a:srgbClr val="8E6F3E"/>
+            </a:solidFill>
+            <a:tailEnd type="triangle"/>
+          </a:ln>
+        </p:spPr>
+        <p:style>
+          <a:lnRef idx="2">
+            <a:schemeClr val="accent1"/>
+          </a:lnRef>
+          <a:fillRef idx="0">
+            <a:schemeClr val="accent1"/>
+          </a:fillRef>
+          <a:effectRef idx="1">
+            <a:schemeClr val="accent1"/>
+          </a:effectRef>
+          <a:fontRef idx="minor">
+            <a:schemeClr val="tx1"/>
+          </a:fontRef>
+        </p:style>
+      </p:cxnSp>
+      <p:sp>
+        <p:nvSpPr>
+          <p:cNvPr id="907" name="Card"/>
+          <p:cNvSpPr/>
+          <p:nvPr/>
+        </p:nvSpPr>
+        <p:spPr>
+          <a:xfrm>
+            <a:off x="2606040" y="3566160"/>
+            <a:ext cx="3931920" cy="548640"/>
+          </a:xfrm>
+          <a:prstGeom prst="rect">
+            <a:avLst/>
+          </a:prstGeom>
+          <a:solidFill>
+            <a:srgbClr val="F5F1E8"/>
+          </a:solidFill>
+          <a:ln w="12700">
+            <a:solidFill>
+              <a:srgbClr val="C9B991"/>
+            </a:solidFill>
+          </a:ln>
+          <a:effectLst/>
+        </p:spPr>
+        <p:style>
+          <a:lnRef idx="1">
+            <a:schemeClr val="accent1"/>
+          </a:lnRef>
+          <a:fillRef idx="3">
+            <a:schemeClr val="accent1"/>
+          </a:fillRef>
+          <a:effectRef idx="2">
+            <a:schemeClr val="accent1"/>
+          </a:effectRef>
+          <a:fontRef idx="minor">
+            <a:schemeClr val="lt1"/>
+          </a:fontRef>
+        </p:style>
+        <p:txBody>
+          <a:bodyPr wrap="square" lIns="27432" tIns="22860" rIns="27432" bIns="22860" rtlCol="0" anchor="ctr"/>
+          <a:lstStyle/>
+          <a:p>
+            <a:pPr algn="ctr"/>
+            <a:r>
+              <a:rPr sz="2000" b="0" i="1">
+                <a:solidFill>
+                  <a:srgbClr val="5C4826"/>
+                </a:solidFill>
+              </a:rPr>
+              <a:t>Supplied during the task, or merely hoped for?</a:t>
+            </a:r>
+          </a:p>
+        </p:txBody>
+      </p:sp>
+      <p:cxnSp>
+        <p:nvCxnSpPr>
+          <p:cNvPr id="908" name="Connector 907"/>
+          <p:cNvCxnSpPr/>
+          <p:nvPr/>
+        </p:nvCxnSpPr>
+        <p:spPr>
+          <a:xfrm>
+            <a:off x="4572000" y="4114800"/>
+            <a:ext cx="0" cy="274320"/>
+          </a:xfrm>
+          <a:prstGeom prst="line">
+            <a:avLst/>
+          </a:prstGeom>
+          <a:ln w="19050">
+            <a:solidFill>
+              <a:srgbClr val="8E6F3E"/>
+            </a:solidFill>
+            <a:tailEnd type="triangle"/>
+          </a:ln>
+        </p:spPr>
+        <p:style>
+          <a:lnRef idx="2">
+            <a:schemeClr val="accent1"/>
+          </a:lnRef>
+          <a:fillRef idx="0">
+            <a:schemeClr val="accent1"/>
+          </a:fillRef>
+          <a:effectRef idx="1">
+            <a:schemeClr val="accent1"/>
+          </a:effectRef>
+          <a:fontRef idx="minor">
+            <a:schemeClr val="tx1"/>
+          </a:fontRef>
+        </p:style>
+      </p:cxnSp>
+      <p:sp>
+        <p:nvSpPr>
+          <p:cNvPr id="909" name="Block"/>
+          <p:cNvSpPr/>
+          <p:nvPr/>
+        </p:nvSpPr>
+        <p:spPr>
+          <a:xfrm>
+            <a:off x="731520" y="4389120"/>
+            <a:ext cx="1737360" cy="594360"/>
+          </a:xfrm>
+          <a:prstGeom prst="rect">
+            <a:avLst/>
+          </a:prstGeom>
+          <a:solidFill>
+            <a:srgbClr val="8E6F3E"/>
+          </a:solidFill>
+          <a:ln>
+            <a:noFill/>
+          </a:ln>
+          <a:effectLst/>
+        </p:spPr>
+        <p:style>
+          <a:lnRef idx="1">
+            <a:schemeClr val="accent1"/>
+          </a:lnRef>
+          <a:fillRef idx="3">
+            <a:schemeClr val="accent1"/>
+          </a:fillRef>
+          <a:effectRef idx="2">
+            <a:schemeClr val="accent1"/>
+          </a:effectRef>
+          <a:fontRef idx="minor">
+            <a:schemeClr val="lt1"/>
+          </a:fontRef>
+        </p:style>
+        <p:txBody>
+          <a:bodyPr wrap="square" lIns="27432" tIns="22860" rIns="27432" bIns="22860" rtlCol="0" anchor="ctr"/>
+          <a:lstStyle/>
+          <a:p>
+            <a:pPr algn="ctr"/>
+            <a:r>
+              <a:rPr sz="2000" b="1" i="0">
+                <a:solidFill>
+                  <a:srgbClr val="FFFFFF"/>
+                </a:solidFill>
+              </a:rPr>
+              <a:t>MODEL</a:t>
+            </a:r>
+          </a:p>
+        </p:txBody>
+      </p:sp>
+      <p:sp>
+        <p:nvSpPr>
+          <p:cNvPr id="910" name="Block"/>
+          <p:cNvSpPr/>
+          <p:nvPr/>
+        </p:nvSpPr>
+        <p:spPr>
+          <a:xfrm>
+            <a:off x="2743200" y="4389120"/>
+            <a:ext cx="1737360" cy="594360"/>
+          </a:xfrm>
+          <a:prstGeom prst="rect">
+            <a:avLst/>
+          </a:prstGeom>
+          <a:solidFill>
+            <a:srgbClr val="8E6F3E"/>
+          </a:solidFill>
+          <a:ln>
+            <a:noFill/>
+          </a:ln>
+          <a:effectLst/>
+        </p:spPr>
+        <p:style>
+          <a:lnRef idx="1">
+            <a:schemeClr val="accent1"/>
+          </a:lnRef>
+          <a:fillRef idx="3">
+            <a:schemeClr val="accent1"/>
+          </a:fillRef>
+          <a:effectRef idx="2">
+            <a:schemeClr val="accent1"/>
+          </a:effectRef>
+          <a:fontRef idx="minor">
+            <a:schemeClr val="lt1"/>
+          </a:fontRef>
+        </p:style>
+        <p:txBody>
+          <a:bodyPr wrap="square" lIns="27432" tIns="22860" rIns="27432" bIns="22860" rtlCol="0" anchor="ctr"/>
+          <a:lstStyle/>
+          <a:p>
+            <a:pPr algn="ctr"/>
+            <a:r>
+              <a:rPr sz="2000" b="1" i="0">
+                <a:solidFill>
+                  <a:srgbClr val="FFFFFF"/>
+                </a:solidFill>
+              </a:rPr>
+              <a:t>APPLICABILITY</a:t>
+            </a:r>
+          </a:p>
+        </p:txBody>
+      </p:sp>
+      <p:sp>
+        <p:nvSpPr>
+          <p:cNvPr id="911" name="Block"/>
+          <p:cNvSpPr/>
+          <p:nvPr/>
+        </p:nvSpPr>
+        <p:spPr>
+          <a:xfrm>
+            <a:off x="4754880" y="4389120"/>
+            <a:ext cx="1737360" cy="594360"/>
+          </a:xfrm>
+          <a:prstGeom prst="rect">
+            <a:avLst/>
+          </a:prstGeom>
+          <a:solidFill>
+            <a:srgbClr val="8E6F3E"/>
+          </a:solidFill>
+          <a:ln>
+            <a:noFill/>
+          </a:ln>
+          <a:effectLst/>
+        </p:spPr>
+        <p:style>
+          <a:lnRef idx="1">
+            <a:schemeClr val="accent1"/>
+          </a:lnRef>
+          <a:fillRef idx="3">
+            <a:schemeClr val="accent1"/>
+          </a:fillRef>
+          <a:effectRef idx="2">
+            <a:schemeClr val="accent1"/>
+          </a:effectRef>
+          <a:fontRef idx="minor">
+            <a:schemeClr val="lt1"/>
+          </a:fontRef>
+        </p:style>
+        <p:txBody>
+          <a:bodyPr wrap="square" lIns="27432" tIns="22860" rIns="27432" bIns="22860" rtlCol="0" anchor="ctr"/>
+          <a:lstStyle/>
+          <a:p>
+            <a:pPr algn="ctr"/>
+            <a:r>
+              <a:rPr sz="2000" b="1" i="0">
+                <a:solidFill>
+                  <a:srgbClr val="FFFFFF"/>
+                </a:solidFill>
+              </a:rPr>
+              <a:t>VALIDATOR</a:t>
+            </a:r>
+          </a:p>
+        </p:txBody>
+      </p:sp>
+      <p:sp>
+        <p:nvSpPr>
+          <p:cNvPr id="912" name="Block"/>
+          <p:cNvSpPr/>
+          <p:nvPr/>
+        </p:nvSpPr>
+        <p:spPr>
+          <a:xfrm>
+            <a:off x="6766560" y="4389120"/>
+            <a:ext cx="1737360" cy="594360"/>
+          </a:xfrm>
+          <a:prstGeom prst="rect">
+            <a:avLst/>
+          </a:prstGeom>
+          <a:solidFill>
+            <a:srgbClr val="8E6F3E"/>
+          </a:solidFill>
+          <a:ln>
+            <a:noFill/>
+          </a:ln>
+          <a:effectLst/>
+        </p:spPr>
+        <p:style>
+          <a:lnRef idx="1">
+            <a:schemeClr val="accent1"/>
+          </a:lnRef>
+          <a:fillRef idx="3">
+            <a:schemeClr val="accent1"/>
+          </a:fillRef>
+          <a:effectRef idx="2">
+            <a:schemeClr val="accent1"/>
+          </a:effectRef>
+          <a:fontRef idx="minor">
+            <a:schemeClr val="lt1"/>
+          </a:fontRef>
+        </p:style>
+        <p:txBody>
+          <a:bodyPr wrap="square" lIns="27432" tIns="22860" rIns="27432" bIns="22860" rtlCol="0" anchor="ctr"/>
+          <a:lstStyle/>
+          <a:p>
+            <a:pPr algn="ctr"/>
+            <a:r>
+              <a:rPr sz="2000" b="1" i="0">
+                <a:solidFill>
+                  <a:srgbClr val="FFFFFF"/>
+                </a:solidFill>
+              </a:rPr>
+              <a:t>GATE</a:t>
+            </a:r>
+          </a:p>
+        </p:txBody>
+      </p:sp>
+      <p:sp>
+        <p:nvSpPr>
+          <p:cNvPr id="913" name="FooterBand"/>
+          <p:cNvSpPr/>
+          <p:nvPr/>
+        </p:nvSpPr>
+        <p:spPr>
+          <a:xfrm>
+            <a:off x="274320" y="5817933"/>
+            <a:ext cx="8595360" cy="566928"/>
+          </a:xfrm>
+          <a:prstGeom prst="rect">
+            <a:avLst/>
+          </a:prstGeom>
+          <a:noFill/>
+          <a:ln>
+            <a:noFill/>
+          </a:ln>
+          <a:effectLst/>
+        </p:spPr>
+        <p:style>
+          <a:lnRef idx="1">
+            <a:schemeClr val="accent1"/>
+          </a:lnRef>
+          <a:fillRef idx="3">
+            <a:schemeClr val="accent1"/>
+          </a:fillRef>
+          <a:effectRef idx="2">
+            <a:schemeClr val="accent1"/>
+          </a:effectRef>
+          <a:fontRef idx="minor">
+            <a:schemeClr val="lt1"/>
+          </a:fontRef>
+        </p:style>
+        <p:txBody>
+          <a:bodyPr wrap="square" lIns="27432" tIns="22860" rIns="27432" bIns="22860" rtlCol="0" anchor="ctr"/>
+          <a:lstStyle/>
+          <a:p>
+            <a:pPr algn="ctr"/>
+            <a:r>
+              <a:rPr lang="en-US" sz="2800" b="1" i="0" dirty="0">
+                <a:solidFill>
+                  <a:schemeClr val="bg1"/>
+                </a:solidFill>
+              </a:rPr>
+              <a:t>The obligation cannot depend on the recipient remembering an instruction.</a:t>
+            </a:r>
+            <a:endParaRPr sz="2800" b="1" i="0" dirty="0">
+              <a:solidFill>
+                <a:schemeClr val="bg1"/>
+              </a:solidFill>
+            </a:endParaRPr>
           </a:p>
         </p:txBody>
       </p:sp>
@@ -16547,1392 +17581,6 @@
 </file>
 
 <file path=ppt/slides/slide30.xml><?xml version="1.0" encoding="utf-8"?>
-<p:sld xmlns:a="http://schemas.openxmlformats.org/drawingml/2006/main" xmlns:p="http://schemas.openxmlformats.org/presentationml/2006/main" xmlns:r="http://schemas.openxmlformats.org/officeDocument/2006/relationships">
-  <p:cSld>
-    <p:spTree>
-      <p:nvGrpSpPr>
-        <p:cNvPr id="1" name=""/>
-        <p:cNvGrpSpPr/>
-        <p:nvPr/>
-      </p:nvGrpSpPr>
-      <p:grpSpPr/>
-      <p:sp>
-        <p:nvSpPr>
-          <p:cNvPr id="3" name="Title 2"/>
-          <p:cNvSpPr>
-            <a:spLocks noGrp="1"/>
-          </p:cNvSpPr>
-          <p:nvPr>
-            <p:ph type="title"/>
-          </p:nvPr>
-        </p:nvSpPr>
-        <p:spPr>
-          <a:xfrm>
-            <a:off x="277148" y="118428"/>
-            <a:ext cx="9145148" cy="638175"/>
-          </a:xfrm>
-        </p:spPr>
-        <p:txBody>
-          <a:bodyPr>
-            <a:normAutofit fontScale="90000"/>
-          </a:bodyPr>
-          <a:lstStyle/>
-          <a:p>
-            <a:r>
-              <a:rPr lang="en-US" sz="2400" b="0" i="0" dirty="0">
-                <a:solidFill>
-                  <a:srgbClr val="000000"/>
-                </a:solidFill>
-              </a:rPr>
-              <a:t>How will the next engineer know?</a:t>
-            </a:r>
-          </a:p>
-        </p:txBody>
-      </p:sp>
-      <p:sp>
-        <p:nvSpPr>
-          <p:cNvPr id="900" name="Slide Number Placeholder 900"/>
-          <p:cNvSpPr>
-            <a:spLocks noGrp="1"/>
-          </p:cNvSpPr>
-          <p:nvPr>
-            <p:ph type="sldNum" sz="quarter" idx="4"/>
-          </p:nvPr>
-        </p:nvSpPr>
-        <p:spPr/>
-        <p:txBody>
-          <a:bodyPr/>
-          <a:lstStyle/>
-          <a:p>
-            <a:fld id="{54DE72B0-FFEB-4C83-B4BD-F25961BEDFCA}" type="slidenum">
-              <a:rPr lang="en-US" smtClean="0"/>
-              <a:t>35</a:t>
-            </a:fld>
-            <a:endParaRPr lang="en-US"/>
-          </a:p>
-        </p:txBody>
-      </p:sp>
-      <p:sp>
-        <p:nvSpPr>
-          <p:cNvPr id="901" name="Block"/>
-          <p:cNvSpPr/>
-          <p:nvPr/>
-        </p:nvSpPr>
-        <p:spPr>
-          <a:xfrm>
-            <a:off x="2606040" y="1097280"/>
-            <a:ext cx="3931920" cy="548640"/>
-          </a:xfrm>
-          <a:prstGeom prst="rect">
-            <a:avLst/>
-          </a:prstGeom>
-          <a:solidFill>
-            <a:srgbClr val="8E6F3E"/>
-          </a:solidFill>
-          <a:ln>
-            <a:noFill/>
-          </a:ln>
-          <a:effectLst/>
-        </p:spPr>
-        <p:style>
-          <a:lnRef idx="1">
-            <a:schemeClr val="accent1"/>
-          </a:lnRef>
-          <a:fillRef idx="3">
-            <a:schemeClr val="accent1"/>
-          </a:fillRef>
-          <a:effectRef idx="2">
-            <a:schemeClr val="accent1"/>
-          </a:effectRef>
-          <a:fontRef idx="minor">
-            <a:schemeClr val="lt1"/>
-          </a:fontRef>
-        </p:style>
-        <p:txBody>
-          <a:bodyPr wrap="square" lIns="27432" tIns="22860" rIns="27432" bIns="22860" rtlCol="0" anchor="ctr"/>
-          <a:lstStyle/>
-          <a:p>
-            <a:pPr algn="ctr"/>
-            <a:r>
-              <a:rPr sz="2000" b="1" i="0">
-                <a:solidFill>
-                  <a:srgbClr val="FFFFFF"/>
-                </a:solidFill>
-              </a:rPr>
-              <a:t>A NEW ENGINEER</a:t>
-            </a:r>
-          </a:p>
-        </p:txBody>
-      </p:sp>
-      <p:cxnSp>
-        <p:nvCxnSpPr>
-          <p:cNvPr id="902" name="Connector 901"/>
-          <p:cNvCxnSpPr/>
-          <p:nvPr/>
-        </p:nvCxnSpPr>
-        <p:spPr>
-          <a:xfrm>
-            <a:off x="4572000" y="1645919"/>
-            <a:ext cx="0" cy="274321"/>
-          </a:xfrm>
-          <a:prstGeom prst="line">
-            <a:avLst/>
-          </a:prstGeom>
-          <a:ln w="19050">
-            <a:solidFill>
-              <a:srgbClr val="8E6F3E"/>
-            </a:solidFill>
-            <a:tailEnd type="triangle"/>
-          </a:ln>
-        </p:spPr>
-        <p:style>
-          <a:lnRef idx="2">
-            <a:schemeClr val="accent1"/>
-          </a:lnRef>
-          <a:fillRef idx="0">
-            <a:schemeClr val="accent1"/>
-          </a:fillRef>
-          <a:effectRef idx="1">
-            <a:schemeClr val="accent1"/>
-          </a:effectRef>
-          <a:fontRef idx="minor">
-            <a:schemeClr val="tx1"/>
-          </a:fontRef>
-        </p:style>
-      </p:cxnSp>
-      <p:sp>
-        <p:nvSpPr>
-          <p:cNvPr id="903" name="Card"/>
-          <p:cNvSpPr/>
-          <p:nvPr/>
-        </p:nvSpPr>
-        <p:spPr>
-          <a:xfrm>
-            <a:off x="2606040" y="1920240"/>
-            <a:ext cx="3931920" cy="548640"/>
-          </a:xfrm>
-          <a:prstGeom prst="rect">
-            <a:avLst/>
-          </a:prstGeom>
-          <a:solidFill>
-            <a:srgbClr val="F5F1E8"/>
-          </a:solidFill>
-          <a:ln w="12700">
-            <a:solidFill>
-              <a:srgbClr val="C9B991"/>
-            </a:solidFill>
-          </a:ln>
-          <a:effectLst/>
-        </p:spPr>
-        <p:style>
-          <a:lnRef idx="1">
-            <a:schemeClr val="accent1"/>
-          </a:lnRef>
-          <a:fillRef idx="3">
-            <a:schemeClr val="accent1"/>
-          </a:fillRef>
-          <a:effectRef idx="2">
-            <a:schemeClr val="accent1"/>
-          </a:effectRef>
-          <a:fontRef idx="minor">
-            <a:schemeClr val="lt1"/>
-          </a:fontRef>
-        </p:style>
-        <p:txBody>
-          <a:bodyPr wrap="square" lIns="27432" tIns="22860" rIns="27432" bIns="22860" rtlCol="0" anchor="ctr"/>
-          <a:lstStyle/>
-          <a:p>
-            <a:pPr algn="ctr"/>
-            <a:r>
-              <a:rPr sz="2000" b="0" i="1">
-                <a:solidFill>
-                  <a:srgbClr val="5C4826"/>
-                </a:solidFill>
-              </a:rPr>
-              <a:t>asked to change the worker’s recovery behavior</a:t>
-            </a:r>
-          </a:p>
-        </p:txBody>
-      </p:sp>
-      <p:cxnSp>
-        <p:nvCxnSpPr>
-          <p:cNvPr id="904" name="Connector 903"/>
-          <p:cNvCxnSpPr/>
-          <p:nvPr/>
-        </p:nvCxnSpPr>
-        <p:spPr>
-          <a:xfrm>
-            <a:off x="4572000" y="2468880"/>
-            <a:ext cx="0" cy="274320"/>
-          </a:xfrm>
-          <a:prstGeom prst="line">
-            <a:avLst/>
-          </a:prstGeom>
-          <a:ln w="19050">
-            <a:solidFill>
-              <a:srgbClr val="8E6F3E"/>
-            </a:solidFill>
-            <a:tailEnd type="triangle"/>
-          </a:ln>
-        </p:spPr>
-        <p:style>
-          <a:lnRef idx="2">
-            <a:schemeClr val="accent1"/>
-          </a:lnRef>
-          <a:fillRef idx="0">
-            <a:schemeClr val="accent1"/>
-          </a:fillRef>
-          <a:effectRef idx="1">
-            <a:schemeClr val="accent1"/>
-          </a:effectRef>
-          <a:fontRef idx="minor">
-            <a:schemeClr val="tx1"/>
-          </a:fontRef>
-        </p:style>
-      </p:cxnSp>
-      <p:sp>
-        <p:nvSpPr>
-          <p:cNvPr id="905" name="Block"/>
-          <p:cNvSpPr/>
-          <p:nvPr/>
-        </p:nvSpPr>
-        <p:spPr>
-          <a:xfrm>
-            <a:off x="2606040" y="2743200"/>
-            <a:ext cx="3931920" cy="548640"/>
-          </a:xfrm>
-          <a:prstGeom prst="rect">
-            <a:avLst/>
-          </a:prstGeom>
-          <a:solidFill>
-            <a:srgbClr val="8E6F3E"/>
-          </a:solidFill>
-          <a:ln>
-            <a:noFill/>
-          </a:ln>
-          <a:effectLst/>
-        </p:spPr>
-        <p:style>
-          <a:lnRef idx="1">
-            <a:schemeClr val="accent1"/>
-          </a:lnRef>
-          <a:fillRef idx="3">
-            <a:schemeClr val="accent1"/>
-          </a:fillRef>
-          <a:effectRef idx="2">
-            <a:schemeClr val="accent1"/>
-          </a:effectRef>
-          <a:fontRef idx="minor">
-            <a:schemeClr val="lt1"/>
-          </a:fontRef>
-        </p:style>
-        <p:txBody>
-          <a:bodyPr wrap="square" lIns="27432" tIns="22860" rIns="27432" bIns="22860" rtlCol="0" anchor="ctr"/>
-          <a:lstStyle/>
-          <a:p>
-            <a:pPr algn="ctr"/>
-            <a:r>
-              <a:rPr sz="2000" b="1" i="0">
-                <a:solidFill>
-                  <a:srgbClr val="FFFFFF"/>
-                </a:solidFill>
-              </a:rPr>
-              <a:t>THE LEASE INVARIANT</a:t>
-            </a:r>
-          </a:p>
-        </p:txBody>
-      </p:sp>
-      <p:cxnSp>
-        <p:nvCxnSpPr>
-          <p:cNvPr id="906" name="Connector 905"/>
-          <p:cNvCxnSpPr/>
-          <p:nvPr/>
-        </p:nvCxnSpPr>
-        <p:spPr>
-          <a:xfrm>
-            <a:off x="4572000" y="3291840"/>
-            <a:ext cx="0" cy="274320"/>
-          </a:xfrm>
-          <a:prstGeom prst="line">
-            <a:avLst/>
-          </a:prstGeom>
-          <a:ln w="19050">
-            <a:solidFill>
-              <a:srgbClr val="8E6F3E"/>
-            </a:solidFill>
-            <a:tailEnd type="triangle"/>
-          </a:ln>
-        </p:spPr>
-        <p:style>
-          <a:lnRef idx="2">
-            <a:schemeClr val="accent1"/>
-          </a:lnRef>
-          <a:fillRef idx="0">
-            <a:schemeClr val="accent1"/>
-          </a:fillRef>
-          <a:effectRef idx="1">
-            <a:schemeClr val="accent1"/>
-          </a:effectRef>
-          <a:fontRef idx="minor">
-            <a:schemeClr val="tx1"/>
-          </a:fontRef>
-        </p:style>
-      </p:cxnSp>
-      <p:sp>
-        <p:nvSpPr>
-          <p:cNvPr id="907" name="Card"/>
-          <p:cNvSpPr/>
-          <p:nvPr/>
-        </p:nvSpPr>
-        <p:spPr>
-          <a:xfrm>
-            <a:off x="2606040" y="3566160"/>
-            <a:ext cx="3931920" cy="548640"/>
-          </a:xfrm>
-          <a:prstGeom prst="rect">
-            <a:avLst/>
-          </a:prstGeom>
-          <a:solidFill>
-            <a:srgbClr val="F5F1E8"/>
-          </a:solidFill>
-          <a:ln w="12700">
-            <a:solidFill>
-              <a:srgbClr val="C9B991"/>
-            </a:solidFill>
-          </a:ln>
-          <a:effectLst/>
-        </p:spPr>
-        <p:style>
-          <a:lnRef idx="1">
-            <a:schemeClr val="accent1"/>
-          </a:lnRef>
-          <a:fillRef idx="3">
-            <a:schemeClr val="accent1"/>
-          </a:fillRef>
-          <a:effectRef idx="2">
-            <a:schemeClr val="accent1"/>
-          </a:effectRef>
-          <a:fontRef idx="minor">
-            <a:schemeClr val="lt1"/>
-          </a:fontRef>
-        </p:style>
-        <p:txBody>
-          <a:bodyPr wrap="square" lIns="27432" tIns="22860" rIns="27432" bIns="22860" rtlCol="0" anchor="ctr"/>
-          <a:lstStyle/>
-          <a:p>
-            <a:pPr algn="ctr"/>
-            <a:r>
-              <a:rPr sz="2000" b="0" i="1">
-                <a:solidFill>
-                  <a:srgbClr val="5C4826"/>
-                </a:solidFill>
-              </a:rPr>
-              <a:t>How would they know it exists?</a:t>
-            </a:r>
-          </a:p>
-        </p:txBody>
-      </p:sp>
-      <p:cxnSp>
-        <p:nvCxnSpPr>
-          <p:cNvPr id="908" name="Connector 907"/>
-          <p:cNvCxnSpPr/>
-          <p:nvPr/>
-        </p:nvCxnSpPr>
-        <p:spPr>
-          <a:xfrm>
-            <a:off x="4572000" y="4114800"/>
-            <a:ext cx="0" cy="274320"/>
-          </a:xfrm>
-          <a:prstGeom prst="line">
-            <a:avLst/>
-          </a:prstGeom>
-          <a:ln w="19050">
-            <a:solidFill>
-              <a:srgbClr val="8E6F3E"/>
-            </a:solidFill>
-            <a:tailEnd type="triangle"/>
-          </a:ln>
-        </p:spPr>
-        <p:style>
-          <a:lnRef idx="2">
-            <a:schemeClr val="accent1"/>
-          </a:lnRef>
-          <a:fillRef idx="0">
-            <a:schemeClr val="accent1"/>
-          </a:fillRef>
-          <a:effectRef idx="1">
-            <a:schemeClr val="accent1"/>
-          </a:effectRef>
-          <a:fontRef idx="minor">
-            <a:schemeClr val="tx1"/>
-          </a:fontRef>
-        </p:style>
-      </p:cxnSp>
-      <p:sp>
-        <p:nvSpPr>
-          <p:cNvPr id="909" name="Block"/>
-          <p:cNvSpPr/>
-          <p:nvPr/>
-        </p:nvSpPr>
-        <p:spPr>
-          <a:xfrm>
-            <a:off x="731520" y="4389120"/>
-            <a:ext cx="1737360" cy="594360"/>
-          </a:xfrm>
-          <a:prstGeom prst="rect">
-            <a:avLst/>
-          </a:prstGeom>
-          <a:solidFill>
-            <a:srgbClr val="8E6F3E"/>
-          </a:solidFill>
-          <a:ln>
-            <a:noFill/>
-          </a:ln>
-          <a:effectLst/>
-        </p:spPr>
-        <p:style>
-          <a:lnRef idx="1">
-            <a:schemeClr val="accent1"/>
-          </a:lnRef>
-          <a:fillRef idx="3">
-            <a:schemeClr val="accent1"/>
-          </a:fillRef>
-          <a:effectRef idx="2">
-            <a:schemeClr val="accent1"/>
-          </a:effectRef>
-          <a:fontRef idx="minor">
-            <a:schemeClr val="lt1"/>
-          </a:fontRef>
-        </p:style>
-        <p:txBody>
-          <a:bodyPr wrap="square" lIns="27432" tIns="22860" rIns="27432" bIns="22860" rtlCol="0" anchor="ctr"/>
-          <a:lstStyle/>
-          <a:p>
-            <a:pPr algn="ctr"/>
-            <a:r>
-              <a:rPr sz="2000" b="1" i="0">
-                <a:solidFill>
-                  <a:srgbClr val="FFFFFF"/>
-                </a:solidFill>
-              </a:rPr>
-              <a:t>MODEL</a:t>
-            </a:r>
-          </a:p>
-        </p:txBody>
-      </p:sp>
-      <p:sp>
-        <p:nvSpPr>
-          <p:cNvPr id="910" name="Block"/>
-          <p:cNvSpPr/>
-          <p:nvPr/>
-        </p:nvSpPr>
-        <p:spPr>
-          <a:xfrm>
-            <a:off x="2743200" y="4389120"/>
-            <a:ext cx="1737360" cy="594360"/>
-          </a:xfrm>
-          <a:prstGeom prst="rect">
-            <a:avLst/>
-          </a:prstGeom>
-          <a:solidFill>
-            <a:srgbClr val="8E6F3E"/>
-          </a:solidFill>
-          <a:ln>
-            <a:noFill/>
-          </a:ln>
-          <a:effectLst/>
-        </p:spPr>
-        <p:style>
-          <a:lnRef idx="1">
-            <a:schemeClr val="accent1"/>
-          </a:lnRef>
-          <a:fillRef idx="3">
-            <a:schemeClr val="accent1"/>
-          </a:fillRef>
-          <a:effectRef idx="2">
-            <a:schemeClr val="accent1"/>
-          </a:effectRef>
-          <a:fontRef idx="minor">
-            <a:schemeClr val="lt1"/>
-          </a:fontRef>
-        </p:style>
-        <p:txBody>
-          <a:bodyPr wrap="square" lIns="27432" tIns="22860" rIns="27432" bIns="22860" rtlCol="0" anchor="ctr"/>
-          <a:lstStyle/>
-          <a:p>
-            <a:pPr algn="ctr"/>
-            <a:r>
-              <a:rPr sz="2000" b="1" i="0">
-                <a:solidFill>
-                  <a:srgbClr val="FFFFFF"/>
-                </a:solidFill>
-              </a:rPr>
-              <a:t>APPLICABILITY</a:t>
-            </a:r>
-          </a:p>
-        </p:txBody>
-      </p:sp>
-      <p:sp>
-        <p:nvSpPr>
-          <p:cNvPr id="911" name="Block"/>
-          <p:cNvSpPr/>
-          <p:nvPr/>
-        </p:nvSpPr>
-        <p:spPr>
-          <a:xfrm>
-            <a:off x="4754880" y="4389120"/>
-            <a:ext cx="1737360" cy="594360"/>
-          </a:xfrm>
-          <a:prstGeom prst="rect">
-            <a:avLst/>
-          </a:prstGeom>
-          <a:solidFill>
-            <a:srgbClr val="8E6F3E"/>
-          </a:solidFill>
-          <a:ln>
-            <a:noFill/>
-          </a:ln>
-          <a:effectLst/>
-        </p:spPr>
-        <p:style>
-          <a:lnRef idx="1">
-            <a:schemeClr val="accent1"/>
-          </a:lnRef>
-          <a:fillRef idx="3">
-            <a:schemeClr val="accent1"/>
-          </a:fillRef>
-          <a:effectRef idx="2">
-            <a:schemeClr val="accent1"/>
-          </a:effectRef>
-          <a:fontRef idx="minor">
-            <a:schemeClr val="lt1"/>
-          </a:fontRef>
-        </p:style>
-        <p:txBody>
-          <a:bodyPr wrap="square" lIns="27432" tIns="22860" rIns="27432" bIns="22860" rtlCol="0" anchor="ctr"/>
-          <a:lstStyle/>
-          <a:p>
-            <a:pPr algn="ctr"/>
-            <a:r>
-              <a:rPr sz="2000" b="1" i="0">
-                <a:solidFill>
-                  <a:srgbClr val="FFFFFF"/>
-                </a:solidFill>
-              </a:rPr>
-              <a:t>VALIDATOR</a:t>
-            </a:r>
-          </a:p>
-        </p:txBody>
-      </p:sp>
-      <p:sp>
-        <p:nvSpPr>
-          <p:cNvPr id="912" name="Block"/>
-          <p:cNvSpPr/>
-          <p:nvPr/>
-        </p:nvSpPr>
-        <p:spPr>
-          <a:xfrm>
-            <a:off x="6766560" y="4389120"/>
-            <a:ext cx="1737360" cy="594360"/>
-          </a:xfrm>
-          <a:prstGeom prst="rect">
-            <a:avLst/>
-          </a:prstGeom>
-          <a:solidFill>
-            <a:srgbClr val="8E6F3E"/>
-          </a:solidFill>
-          <a:ln>
-            <a:noFill/>
-          </a:ln>
-          <a:effectLst/>
-        </p:spPr>
-        <p:style>
-          <a:lnRef idx="1">
-            <a:schemeClr val="accent1"/>
-          </a:lnRef>
-          <a:fillRef idx="3">
-            <a:schemeClr val="accent1"/>
-          </a:fillRef>
-          <a:effectRef idx="2">
-            <a:schemeClr val="accent1"/>
-          </a:effectRef>
-          <a:fontRef idx="minor">
-            <a:schemeClr val="lt1"/>
-          </a:fontRef>
-        </p:style>
-        <p:txBody>
-          <a:bodyPr wrap="square" lIns="27432" tIns="22860" rIns="27432" bIns="22860" rtlCol="0" anchor="ctr"/>
-          <a:lstStyle/>
-          <a:p>
-            <a:pPr algn="ctr"/>
-            <a:r>
-              <a:rPr sz="2000" b="1" i="0">
-                <a:solidFill>
-                  <a:srgbClr val="FFFFFF"/>
-                </a:solidFill>
-              </a:rPr>
-              <a:t>GATE</a:t>
-            </a:r>
-          </a:p>
-        </p:txBody>
-      </p:sp>
-      <p:sp>
-        <p:nvSpPr>
-          <p:cNvPr id="913" name="FooterBand"/>
-          <p:cNvSpPr/>
-          <p:nvPr/>
-        </p:nvSpPr>
-        <p:spPr>
-          <a:xfrm>
-            <a:off x="274320" y="5817933"/>
-            <a:ext cx="8595360" cy="566928"/>
-          </a:xfrm>
-          <a:prstGeom prst="rect">
-            <a:avLst/>
-          </a:prstGeom>
-          <a:noFill/>
-          <a:ln>
-            <a:noFill/>
-          </a:ln>
-          <a:effectLst/>
-        </p:spPr>
-        <p:style>
-          <a:lnRef idx="1">
-            <a:schemeClr val="accent1"/>
-          </a:lnRef>
-          <a:fillRef idx="3">
-            <a:schemeClr val="accent1"/>
-          </a:fillRef>
-          <a:effectRef idx="2">
-            <a:schemeClr val="accent1"/>
-          </a:effectRef>
-          <a:fontRef idx="minor">
-            <a:schemeClr val="lt1"/>
-          </a:fontRef>
-        </p:style>
-        <p:txBody>
-          <a:bodyPr wrap="square" lIns="27432" tIns="22860" rIns="27432" bIns="22860" rtlCol="0" anchor="ctr"/>
-          <a:lstStyle/>
-          <a:p>
-            <a:pPr algn="ctr"/>
-            <a:r>
-              <a:rPr lang="en-US" sz="2800" b="1" i="0" dirty="0">
-                <a:solidFill>
-                  <a:schemeClr val="bg1"/>
-                </a:solidFill>
-              </a:rPr>
-              <a:t>A worker may modify a job only while holding its current lease generation.</a:t>
-            </a:r>
-            <a:endParaRPr sz="2800" b="1" i="0" dirty="0">
-              <a:solidFill>
-                <a:schemeClr val="bg1"/>
-              </a:solidFill>
-            </a:endParaRPr>
-          </a:p>
-        </p:txBody>
-      </p:sp>
-    </p:spTree>
-  </p:cSld>
-  <p:clrMapOvr>
-    <a:masterClrMapping/>
-  </p:clrMapOvr>
-</p:sld>
-</file>
-
-<file path=ppt/slides/slide31.xml><?xml version="1.0" encoding="utf-8"?>
-<p:sld xmlns:a="http://schemas.openxmlformats.org/drawingml/2006/main" xmlns:p="http://schemas.openxmlformats.org/presentationml/2006/main" xmlns:r="http://schemas.openxmlformats.org/officeDocument/2006/relationships">
-  <p:cSld>
-    <p:spTree>
-      <p:nvGrpSpPr>
-        <p:cNvPr id="1" name=""/>
-        <p:cNvGrpSpPr/>
-        <p:nvPr/>
-      </p:nvGrpSpPr>
-      <p:grpSpPr/>
-      <p:sp>
-        <p:nvSpPr>
-          <p:cNvPr id="3" name="Title 2"/>
-          <p:cNvSpPr>
-            <a:spLocks noGrp="1"/>
-          </p:cNvSpPr>
-          <p:nvPr>
-            <p:ph type="title"/>
-          </p:nvPr>
-        </p:nvSpPr>
-        <p:spPr>
-          <a:xfrm>
-            <a:off x="277148" y="118428"/>
-            <a:ext cx="9145148" cy="638175"/>
-          </a:xfrm>
-        </p:spPr>
-        <p:txBody>
-          <a:bodyPr>
-            <a:normAutofit fontScale="90000"/>
-          </a:bodyPr>
-          <a:lstStyle/>
-          <a:p>
-            <a:r>
-              <a:rPr lang="en-US" sz="2400" b="0" i="0" dirty="0">
-                <a:solidFill>
-                  <a:srgbClr val="000000"/>
-                </a:solidFill>
-              </a:rPr>
-              <a:t>How will the agent know?</a:t>
-            </a:r>
-          </a:p>
-        </p:txBody>
-      </p:sp>
-      <p:sp>
-        <p:nvSpPr>
-          <p:cNvPr id="900" name="Slide Number Placeholder 900"/>
-          <p:cNvSpPr>
-            <a:spLocks noGrp="1"/>
-          </p:cNvSpPr>
-          <p:nvPr>
-            <p:ph type="sldNum" sz="quarter" idx="4"/>
-          </p:nvPr>
-        </p:nvSpPr>
-        <p:spPr/>
-        <p:txBody>
-          <a:bodyPr/>
-          <a:lstStyle/>
-          <a:p>
-            <a:fld id="{54DE72B0-FFEB-4C83-B4BD-F25961BEDFCA}" type="slidenum">
-              <a:rPr lang="en-US" smtClean="0"/>
-              <a:t>35</a:t>
-            </a:fld>
-            <a:endParaRPr lang="en-US"/>
-          </a:p>
-        </p:txBody>
-      </p:sp>
-      <p:sp>
-        <p:nvSpPr>
-          <p:cNvPr id="901" name="Block"/>
-          <p:cNvSpPr/>
-          <p:nvPr/>
-        </p:nvSpPr>
-        <p:spPr>
-          <a:xfrm>
-            <a:off x="2606040" y="1097280"/>
-            <a:ext cx="3931920" cy="548640"/>
-          </a:xfrm>
-          <a:prstGeom prst="rect">
-            <a:avLst/>
-          </a:prstGeom>
-          <a:solidFill>
-            <a:srgbClr val="8E6F3E"/>
-          </a:solidFill>
-          <a:ln>
-            <a:noFill/>
-          </a:ln>
-          <a:effectLst/>
-        </p:spPr>
-        <p:style>
-          <a:lnRef idx="1">
-            <a:schemeClr val="accent1"/>
-          </a:lnRef>
-          <a:fillRef idx="3">
-            <a:schemeClr val="accent1"/>
-          </a:fillRef>
-          <a:effectRef idx="2">
-            <a:schemeClr val="accent1"/>
-          </a:effectRef>
-          <a:fontRef idx="minor">
-            <a:schemeClr val="lt1"/>
-          </a:fontRef>
-        </p:style>
-        <p:txBody>
-          <a:bodyPr wrap="square" lIns="27432" tIns="22860" rIns="27432" bIns="22860" rtlCol="0" anchor="ctr"/>
-          <a:lstStyle/>
-          <a:p>
-            <a:pPr algn="ctr"/>
-            <a:r>
-              <a:rPr sz="2000" b="1" i="0">
-                <a:solidFill>
-                  <a:srgbClr val="FFFFFF"/>
-                </a:solidFill>
-              </a:rPr>
-              <a:t>THE SAME CHANGE</a:t>
-            </a:r>
-          </a:p>
-        </p:txBody>
-      </p:sp>
-      <p:cxnSp>
-        <p:nvCxnSpPr>
-          <p:cNvPr id="902" name="Connector 901"/>
-          <p:cNvCxnSpPr/>
-          <p:nvPr/>
-        </p:nvCxnSpPr>
-        <p:spPr>
-          <a:xfrm>
-            <a:off x="4572000" y="1645919"/>
-            <a:ext cx="0" cy="274321"/>
-          </a:xfrm>
-          <a:prstGeom prst="line">
-            <a:avLst/>
-          </a:prstGeom>
-          <a:ln w="19050">
-            <a:solidFill>
-              <a:srgbClr val="8E6F3E"/>
-            </a:solidFill>
-            <a:tailEnd type="triangle"/>
-          </a:ln>
-        </p:spPr>
-        <p:style>
-          <a:lnRef idx="2">
-            <a:schemeClr val="accent1"/>
-          </a:lnRef>
-          <a:fillRef idx="0">
-            <a:schemeClr val="accent1"/>
-          </a:fillRef>
-          <a:effectRef idx="1">
-            <a:schemeClr val="accent1"/>
-          </a:effectRef>
-          <a:fontRef idx="minor">
-            <a:schemeClr val="tx1"/>
-          </a:fontRef>
-        </p:style>
-      </p:cxnSp>
-      <p:sp>
-        <p:nvSpPr>
-          <p:cNvPr id="903" name="Card"/>
-          <p:cNvSpPr/>
-          <p:nvPr/>
-        </p:nvSpPr>
-        <p:spPr>
-          <a:xfrm>
-            <a:off x="2606040" y="1920240"/>
-            <a:ext cx="3931920" cy="548640"/>
-          </a:xfrm>
-          <a:prstGeom prst="rect">
-            <a:avLst/>
-          </a:prstGeom>
-          <a:solidFill>
-            <a:srgbClr val="F5F1E8"/>
-          </a:solidFill>
-          <a:ln w="12700">
-            <a:solidFill>
-              <a:srgbClr val="C9B991"/>
-            </a:solidFill>
-          </a:ln>
-          <a:effectLst/>
-        </p:spPr>
-        <p:style>
-          <a:lnRef idx="1">
-            <a:schemeClr val="accent1"/>
-          </a:lnRef>
-          <a:fillRef idx="3">
-            <a:schemeClr val="accent1"/>
-          </a:fillRef>
-          <a:effectRef idx="2">
-            <a:schemeClr val="accent1"/>
-          </a:effectRef>
-          <a:fontRef idx="minor">
-            <a:schemeClr val="lt1"/>
-          </a:fontRef>
-        </p:style>
-        <p:txBody>
-          <a:bodyPr wrap="square" lIns="27432" tIns="22860" rIns="27432" bIns="22860" rtlCol="0" anchor="ctr"/>
-          <a:lstStyle/>
-          <a:p>
-            <a:pPr algn="ctr"/>
-            <a:r>
-              <a:rPr sz="2000" b="0" i="1">
-                <a:solidFill>
-                  <a:srgbClr val="5C4826"/>
-                </a:solidFill>
-              </a:rPr>
-              <a:t>an agent is asked to optimize the queue</a:t>
-            </a:r>
-          </a:p>
-        </p:txBody>
-      </p:sp>
-      <p:cxnSp>
-        <p:nvCxnSpPr>
-          <p:cNvPr id="904" name="Connector 903"/>
-          <p:cNvCxnSpPr/>
-          <p:nvPr/>
-        </p:nvCxnSpPr>
-        <p:spPr>
-          <a:xfrm>
-            <a:off x="4572000" y="2468880"/>
-            <a:ext cx="0" cy="274320"/>
-          </a:xfrm>
-          <a:prstGeom prst="line">
-            <a:avLst/>
-          </a:prstGeom>
-          <a:ln w="19050">
-            <a:solidFill>
-              <a:srgbClr val="8E6F3E"/>
-            </a:solidFill>
-            <a:tailEnd type="triangle"/>
-          </a:ln>
-        </p:spPr>
-        <p:style>
-          <a:lnRef idx="2">
-            <a:schemeClr val="accent1"/>
-          </a:lnRef>
-          <a:fillRef idx="0">
-            <a:schemeClr val="accent1"/>
-          </a:fillRef>
-          <a:effectRef idx="1">
-            <a:schemeClr val="accent1"/>
-          </a:effectRef>
-          <a:fontRef idx="minor">
-            <a:schemeClr val="tx1"/>
-          </a:fontRef>
-        </p:style>
-      </p:cxnSp>
-      <p:sp>
-        <p:nvSpPr>
-          <p:cNvPr id="905" name="Block"/>
-          <p:cNvSpPr/>
-          <p:nvPr/>
-        </p:nvSpPr>
-        <p:spPr>
-          <a:xfrm>
-            <a:off x="2606040" y="2743200"/>
-            <a:ext cx="3931920" cy="548640"/>
-          </a:xfrm>
-          <a:prstGeom prst="rect">
-            <a:avLst/>
-          </a:prstGeom>
-          <a:solidFill>
-            <a:srgbClr val="8E6F3E"/>
-          </a:solidFill>
-          <a:ln>
-            <a:noFill/>
-          </a:ln>
-          <a:effectLst/>
-        </p:spPr>
-        <p:style>
-          <a:lnRef idx="1">
-            <a:schemeClr val="accent1"/>
-          </a:lnRef>
-          <a:fillRef idx="3">
-            <a:schemeClr val="accent1"/>
-          </a:fillRef>
-          <a:effectRef idx="2">
-            <a:schemeClr val="accent1"/>
-          </a:effectRef>
-          <a:fontRef idx="minor">
-            <a:schemeClr val="lt1"/>
-          </a:fontRef>
-        </p:style>
-        <p:txBody>
-          <a:bodyPr wrap="square" lIns="27432" tIns="22860" rIns="27432" bIns="22860" rtlCol="0" anchor="ctr"/>
-          <a:lstStyle/>
-          <a:p>
-            <a:pPr algn="ctr"/>
-            <a:r>
-              <a:rPr sz="2000" b="1" i="0">
-                <a:solidFill>
-                  <a:srgbClr val="FFFFFF"/>
-                </a:solidFill>
-              </a:rPr>
-              <a:t>THE SAME INVARIANT</a:t>
-            </a:r>
-          </a:p>
-        </p:txBody>
-      </p:sp>
-      <p:cxnSp>
-        <p:nvCxnSpPr>
-          <p:cNvPr id="906" name="Connector 905"/>
-          <p:cNvCxnSpPr/>
-          <p:nvPr/>
-        </p:nvCxnSpPr>
-        <p:spPr>
-          <a:xfrm>
-            <a:off x="4572000" y="3291840"/>
-            <a:ext cx="0" cy="274320"/>
-          </a:xfrm>
-          <a:prstGeom prst="line">
-            <a:avLst/>
-          </a:prstGeom>
-          <a:ln w="19050">
-            <a:solidFill>
-              <a:srgbClr val="8E6F3E"/>
-            </a:solidFill>
-            <a:tailEnd type="triangle"/>
-          </a:ln>
-        </p:spPr>
-        <p:style>
-          <a:lnRef idx="2">
-            <a:schemeClr val="accent1"/>
-          </a:lnRef>
-          <a:fillRef idx="0">
-            <a:schemeClr val="accent1"/>
-          </a:fillRef>
-          <a:effectRef idx="1">
-            <a:schemeClr val="accent1"/>
-          </a:effectRef>
-          <a:fontRef idx="minor">
-            <a:schemeClr val="tx1"/>
-          </a:fontRef>
-        </p:style>
-      </p:cxnSp>
-      <p:sp>
-        <p:nvSpPr>
-          <p:cNvPr id="907" name="Card"/>
-          <p:cNvSpPr/>
-          <p:nvPr/>
-        </p:nvSpPr>
-        <p:spPr>
-          <a:xfrm>
-            <a:off x="2606040" y="3566160"/>
-            <a:ext cx="3931920" cy="548640"/>
-          </a:xfrm>
-          <a:prstGeom prst="rect">
-            <a:avLst/>
-          </a:prstGeom>
-          <a:solidFill>
-            <a:srgbClr val="F5F1E8"/>
-          </a:solidFill>
-          <a:ln w="12700">
-            <a:solidFill>
-              <a:srgbClr val="C9B991"/>
-            </a:solidFill>
-          </a:ln>
-          <a:effectLst/>
-        </p:spPr>
-        <p:style>
-          <a:lnRef idx="1">
-            <a:schemeClr val="accent1"/>
-          </a:lnRef>
-          <a:fillRef idx="3">
-            <a:schemeClr val="accent1"/>
-          </a:fillRef>
-          <a:effectRef idx="2">
-            <a:schemeClr val="accent1"/>
-          </a:effectRef>
-          <a:fontRef idx="minor">
-            <a:schemeClr val="lt1"/>
-          </a:fontRef>
-        </p:style>
-        <p:txBody>
-          <a:bodyPr wrap="square" lIns="27432" tIns="22860" rIns="27432" bIns="22860" rtlCol="0" anchor="ctr"/>
-          <a:lstStyle/>
-          <a:p>
-            <a:pPr algn="ctr"/>
-            <a:r>
-              <a:rPr sz="2000" b="0" i="1">
-                <a:solidFill>
-                  <a:srgbClr val="5C4826"/>
-                </a:solidFill>
-              </a:rPr>
-              <a:t>Supplied during the task, or merely hoped for?</a:t>
-            </a:r>
-          </a:p>
-        </p:txBody>
-      </p:sp>
-      <p:cxnSp>
-        <p:nvCxnSpPr>
-          <p:cNvPr id="908" name="Connector 907"/>
-          <p:cNvCxnSpPr/>
-          <p:nvPr/>
-        </p:nvCxnSpPr>
-        <p:spPr>
-          <a:xfrm>
-            <a:off x="4572000" y="4114800"/>
-            <a:ext cx="0" cy="274320"/>
-          </a:xfrm>
-          <a:prstGeom prst="line">
-            <a:avLst/>
-          </a:prstGeom>
-          <a:ln w="19050">
-            <a:solidFill>
-              <a:srgbClr val="8E6F3E"/>
-            </a:solidFill>
-            <a:tailEnd type="triangle"/>
-          </a:ln>
-        </p:spPr>
-        <p:style>
-          <a:lnRef idx="2">
-            <a:schemeClr val="accent1"/>
-          </a:lnRef>
-          <a:fillRef idx="0">
-            <a:schemeClr val="accent1"/>
-          </a:fillRef>
-          <a:effectRef idx="1">
-            <a:schemeClr val="accent1"/>
-          </a:effectRef>
-          <a:fontRef idx="minor">
-            <a:schemeClr val="tx1"/>
-          </a:fontRef>
-        </p:style>
-      </p:cxnSp>
-      <p:sp>
-        <p:nvSpPr>
-          <p:cNvPr id="909" name="Block"/>
-          <p:cNvSpPr/>
-          <p:nvPr/>
-        </p:nvSpPr>
-        <p:spPr>
-          <a:xfrm>
-            <a:off x="731520" y="4389120"/>
-            <a:ext cx="1737360" cy="594360"/>
-          </a:xfrm>
-          <a:prstGeom prst="rect">
-            <a:avLst/>
-          </a:prstGeom>
-          <a:solidFill>
-            <a:srgbClr val="8E6F3E"/>
-          </a:solidFill>
-          <a:ln>
-            <a:noFill/>
-          </a:ln>
-          <a:effectLst/>
-        </p:spPr>
-        <p:style>
-          <a:lnRef idx="1">
-            <a:schemeClr val="accent1"/>
-          </a:lnRef>
-          <a:fillRef idx="3">
-            <a:schemeClr val="accent1"/>
-          </a:fillRef>
-          <a:effectRef idx="2">
-            <a:schemeClr val="accent1"/>
-          </a:effectRef>
-          <a:fontRef idx="minor">
-            <a:schemeClr val="lt1"/>
-          </a:fontRef>
-        </p:style>
-        <p:txBody>
-          <a:bodyPr wrap="square" lIns="27432" tIns="22860" rIns="27432" bIns="22860" rtlCol="0" anchor="ctr"/>
-          <a:lstStyle/>
-          <a:p>
-            <a:pPr algn="ctr"/>
-            <a:r>
-              <a:rPr sz="2000" b="1" i="0">
-                <a:solidFill>
-                  <a:srgbClr val="FFFFFF"/>
-                </a:solidFill>
-              </a:rPr>
-              <a:t>MODEL</a:t>
-            </a:r>
-          </a:p>
-        </p:txBody>
-      </p:sp>
-      <p:sp>
-        <p:nvSpPr>
-          <p:cNvPr id="910" name="Block"/>
-          <p:cNvSpPr/>
-          <p:nvPr/>
-        </p:nvSpPr>
-        <p:spPr>
-          <a:xfrm>
-            <a:off x="2743200" y="4389120"/>
-            <a:ext cx="1737360" cy="594360"/>
-          </a:xfrm>
-          <a:prstGeom prst="rect">
-            <a:avLst/>
-          </a:prstGeom>
-          <a:solidFill>
-            <a:srgbClr val="8E6F3E"/>
-          </a:solidFill>
-          <a:ln>
-            <a:noFill/>
-          </a:ln>
-          <a:effectLst/>
-        </p:spPr>
-        <p:style>
-          <a:lnRef idx="1">
-            <a:schemeClr val="accent1"/>
-          </a:lnRef>
-          <a:fillRef idx="3">
-            <a:schemeClr val="accent1"/>
-          </a:fillRef>
-          <a:effectRef idx="2">
-            <a:schemeClr val="accent1"/>
-          </a:effectRef>
-          <a:fontRef idx="minor">
-            <a:schemeClr val="lt1"/>
-          </a:fontRef>
-        </p:style>
-        <p:txBody>
-          <a:bodyPr wrap="square" lIns="27432" tIns="22860" rIns="27432" bIns="22860" rtlCol="0" anchor="ctr"/>
-          <a:lstStyle/>
-          <a:p>
-            <a:pPr algn="ctr"/>
-            <a:r>
-              <a:rPr sz="2000" b="1" i="0">
-                <a:solidFill>
-                  <a:srgbClr val="FFFFFF"/>
-                </a:solidFill>
-              </a:rPr>
-              <a:t>APPLICABILITY</a:t>
-            </a:r>
-          </a:p>
-        </p:txBody>
-      </p:sp>
-      <p:sp>
-        <p:nvSpPr>
-          <p:cNvPr id="911" name="Block"/>
-          <p:cNvSpPr/>
-          <p:nvPr/>
-        </p:nvSpPr>
-        <p:spPr>
-          <a:xfrm>
-            <a:off x="4754880" y="4389120"/>
-            <a:ext cx="1737360" cy="594360"/>
-          </a:xfrm>
-          <a:prstGeom prst="rect">
-            <a:avLst/>
-          </a:prstGeom>
-          <a:solidFill>
-            <a:srgbClr val="8E6F3E"/>
-          </a:solidFill>
-          <a:ln>
-            <a:noFill/>
-          </a:ln>
-          <a:effectLst/>
-        </p:spPr>
-        <p:style>
-          <a:lnRef idx="1">
-            <a:schemeClr val="accent1"/>
-          </a:lnRef>
-          <a:fillRef idx="3">
-            <a:schemeClr val="accent1"/>
-          </a:fillRef>
-          <a:effectRef idx="2">
-            <a:schemeClr val="accent1"/>
-          </a:effectRef>
-          <a:fontRef idx="minor">
-            <a:schemeClr val="lt1"/>
-          </a:fontRef>
-        </p:style>
-        <p:txBody>
-          <a:bodyPr wrap="square" lIns="27432" tIns="22860" rIns="27432" bIns="22860" rtlCol="0" anchor="ctr"/>
-          <a:lstStyle/>
-          <a:p>
-            <a:pPr algn="ctr"/>
-            <a:r>
-              <a:rPr sz="2000" b="1" i="0">
-                <a:solidFill>
-                  <a:srgbClr val="FFFFFF"/>
-                </a:solidFill>
-              </a:rPr>
-              <a:t>VALIDATOR</a:t>
-            </a:r>
-          </a:p>
-        </p:txBody>
-      </p:sp>
-      <p:sp>
-        <p:nvSpPr>
-          <p:cNvPr id="912" name="Block"/>
-          <p:cNvSpPr/>
-          <p:nvPr/>
-        </p:nvSpPr>
-        <p:spPr>
-          <a:xfrm>
-            <a:off x="6766560" y="4389120"/>
-            <a:ext cx="1737360" cy="594360"/>
-          </a:xfrm>
-          <a:prstGeom prst="rect">
-            <a:avLst/>
-          </a:prstGeom>
-          <a:solidFill>
-            <a:srgbClr val="8E6F3E"/>
-          </a:solidFill>
-          <a:ln>
-            <a:noFill/>
-          </a:ln>
-          <a:effectLst/>
-        </p:spPr>
-        <p:style>
-          <a:lnRef idx="1">
-            <a:schemeClr val="accent1"/>
-          </a:lnRef>
-          <a:fillRef idx="3">
-            <a:schemeClr val="accent1"/>
-          </a:fillRef>
-          <a:effectRef idx="2">
-            <a:schemeClr val="accent1"/>
-          </a:effectRef>
-          <a:fontRef idx="minor">
-            <a:schemeClr val="lt1"/>
-          </a:fontRef>
-        </p:style>
-        <p:txBody>
-          <a:bodyPr wrap="square" lIns="27432" tIns="22860" rIns="27432" bIns="22860" rtlCol="0" anchor="ctr"/>
-          <a:lstStyle/>
-          <a:p>
-            <a:pPr algn="ctr"/>
-            <a:r>
-              <a:rPr sz="2000" b="1" i="0">
-                <a:solidFill>
-                  <a:srgbClr val="FFFFFF"/>
-                </a:solidFill>
-              </a:rPr>
-              <a:t>GATE</a:t>
-            </a:r>
-          </a:p>
-        </p:txBody>
-      </p:sp>
-      <p:sp>
-        <p:nvSpPr>
-          <p:cNvPr id="913" name="FooterBand"/>
-          <p:cNvSpPr/>
-          <p:nvPr/>
-        </p:nvSpPr>
-        <p:spPr>
-          <a:xfrm>
-            <a:off x="274320" y="5817933"/>
-            <a:ext cx="8595360" cy="566928"/>
-          </a:xfrm>
-          <a:prstGeom prst="rect">
-            <a:avLst/>
-          </a:prstGeom>
-          <a:noFill/>
-          <a:ln>
-            <a:noFill/>
-          </a:ln>
-          <a:effectLst/>
-        </p:spPr>
-        <p:style>
-          <a:lnRef idx="1">
-            <a:schemeClr val="accent1"/>
-          </a:lnRef>
-          <a:fillRef idx="3">
-            <a:schemeClr val="accent1"/>
-          </a:fillRef>
-          <a:effectRef idx="2">
-            <a:schemeClr val="accent1"/>
-          </a:effectRef>
-          <a:fontRef idx="minor">
-            <a:schemeClr val="lt1"/>
-          </a:fontRef>
-        </p:style>
-        <p:txBody>
-          <a:bodyPr wrap="square" lIns="27432" tIns="22860" rIns="27432" bIns="22860" rtlCol="0" anchor="ctr"/>
-          <a:lstStyle/>
-          <a:p>
-            <a:pPr algn="ctr"/>
-            <a:r>
-              <a:rPr lang="en-US" sz="2800" b="1" i="0" dirty="0">
-                <a:solidFill>
-                  <a:schemeClr val="bg1"/>
-                </a:solidFill>
-              </a:rPr>
-              <a:t>The obligation cannot depend on the recipient remembering an instruction.</a:t>
-            </a:r>
-            <a:endParaRPr sz="2800" b="1" i="0" dirty="0">
-              <a:solidFill>
-                <a:schemeClr val="bg1"/>
-              </a:solidFill>
-            </a:endParaRPr>
-          </a:p>
-        </p:txBody>
-      </p:sp>
-    </p:spTree>
-  </p:cSld>
-  <p:clrMapOvr>
-    <a:masterClrMapping/>
-  </p:clrMapOvr>
-</p:sld>
-</file>
-
-<file path=ppt/slides/slide32.xml><?xml version="1.0" encoding="utf-8"?>
 <p:sld xmlns:a="http://schemas.openxmlformats.org/drawingml/2006/main" xmlns:r="http://schemas.openxmlformats.org/officeDocument/2006/relationships" xmlns:p="http://schemas.openxmlformats.org/presentationml/2006/main">
   <p:cSld>
     <p:spTree>
@@ -17959,7 +17607,12 @@
             <p:ph type="title"/>
           </p:nvPr>
         </p:nvSpPr>
-        <p:spPr/>
+        <p:spPr>
+          <a:xfrm>
+            <a:off x="277148" y="118428"/>
+            <a:ext cx="9145148" cy="638175"/>
+          </a:xfrm>
+        </p:spPr>
         <p:txBody>
           <a:bodyPr>
             <a:normAutofit fontScale="90000"/>
@@ -17967,12 +17620,12 @@
           <a:lstStyle/>
           <a:p>
             <a:r>
-              <a:rPr sz="2400" b="0" i="0">
+              <a:rPr lang="en-US" sz="2400" b="0" i="0" dirty="0">
                 <a:solidFill>
                   <a:srgbClr val="000000"/>
                 </a:solidFill>
               </a:rPr>
-              <a:t>Volkswagen, one last time</a:t>
+              <a:t>Convert the lesson into engineering structure</a:t>
             </a:r>
           </a:p>
         </p:txBody>
@@ -17992,6 +17645,722 @@
           <a:bodyPr/>
           <a:lstStyle/>
           <a:p>
+            <a:fld id="{54DE72B0-FFEB-4C83-B4BD-F25961BEDFCA}" type="slidenum">
+              <a:rPr lang="en-US" smtClean="0"/>
+              <a:t>35</a:t>
+            </a:fld>
+            <a:endParaRPr lang="en-US"/>
+          </a:p>
+        </p:txBody>
+      </p:sp>
+      <p:sp>
+        <p:nvSpPr>
+          <p:cNvPr id="903" name="Card"/>
+          <p:cNvSpPr/>
+          <p:nvPr/>
+        </p:nvSpPr>
+        <p:spPr>
+          <a:xfrm>
+            <a:off x="3840480" y="1325880"/>
+            <a:ext cx="4754880" cy="566928"/>
+          </a:xfrm>
+          <a:prstGeom prst="rect">
+            <a:avLst/>
+          </a:prstGeom>
+          <a:solidFill>
+            <a:srgbClr val="F5F1E8"/>
+          </a:solidFill>
+          <a:ln w="12700">
+            <a:solidFill>
+              <a:srgbClr val="C9B991"/>
+            </a:solidFill>
+          </a:ln>
+          <a:effectLst/>
+        </p:spPr>
+        <p:style>
+          <a:lnRef idx="1">
+            <a:schemeClr val="accent1"/>
+          </a:lnRef>
+          <a:fillRef idx="3">
+            <a:schemeClr val="accent1"/>
+          </a:fillRef>
+          <a:effectRef idx="2">
+            <a:schemeClr val="accent1"/>
+          </a:effectRef>
+          <a:fontRef idx="minor">
+            <a:schemeClr val="lt1"/>
+          </a:fontRef>
+        </p:style>
+        <p:txBody>
+          <a:bodyPr wrap="square" lIns="27432" tIns="22860" rIns="27432" bIns="22860" rtlCol="0" anchor="ctr"/>
+          <a:lstStyle/>
+          <a:p>
+            <a:pPr algn="ctr"/>
+            <a:r>
+              <a:rPr sz="2000" b="0" i="1">
+                <a:solidFill>
+                  <a:srgbClr val="5C4826"/>
+                </a:solidFill>
+              </a:rPr>
+              <a:t>State the invariant</a:t>
+            </a:r>
+          </a:p>
+        </p:txBody>
+      </p:sp>
+      <p:sp>
+        <p:nvSpPr>
+          <p:cNvPr id="907" name="Card"/>
+          <p:cNvSpPr/>
+          <p:nvPr/>
+        </p:nvSpPr>
+        <p:spPr>
+          <a:xfrm>
+            <a:off x="3840480" y="2167128"/>
+            <a:ext cx="4754880" cy="566928"/>
+          </a:xfrm>
+          <a:prstGeom prst="rect">
+            <a:avLst/>
+          </a:prstGeom>
+          <a:solidFill>
+            <a:srgbClr val="F5F1E8"/>
+          </a:solidFill>
+          <a:ln w="12700">
+            <a:solidFill>
+              <a:srgbClr val="C9B991"/>
+            </a:solidFill>
+          </a:ln>
+          <a:effectLst/>
+        </p:spPr>
+        <p:style>
+          <a:lnRef idx="1">
+            <a:schemeClr val="accent1"/>
+          </a:lnRef>
+          <a:fillRef idx="3">
+            <a:schemeClr val="accent1"/>
+          </a:fillRef>
+          <a:effectRef idx="2">
+            <a:schemeClr val="accent1"/>
+          </a:effectRef>
+          <a:fontRef idx="minor">
+            <a:schemeClr val="lt1"/>
+          </a:fontRef>
+        </p:style>
+        <p:txBody>
+          <a:bodyPr wrap="square" lIns="27432" tIns="22860" rIns="27432" bIns="22860" rtlCol="0" anchor="ctr"/>
+          <a:lstStyle/>
+          <a:p>
+            <a:pPr algn="ctr"/>
+            <a:r>
+              <a:rPr sz="2000" b="0" i="1">
+                <a:solidFill>
+                  <a:srgbClr val="5C4826"/>
+                </a:solidFill>
+              </a:rPr>
+              <a:t>Build or revise the model</a:t>
+            </a:r>
+          </a:p>
+        </p:txBody>
+      </p:sp>
+      <p:sp>
+        <p:nvSpPr>
+          <p:cNvPr id="909" name="Block"/>
+          <p:cNvSpPr/>
+          <p:nvPr/>
+        </p:nvSpPr>
+        <p:spPr>
+          <a:xfrm>
+            <a:off x="731520" y="1325880"/>
+            <a:ext cx="2926080" cy="566928"/>
+          </a:xfrm>
+          <a:prstGeom prst="rect">
+            <a:avLst/>
+          </a:prstGeom>
+          <a:solidFill>
+            <a:srgbClr val="8E6F3E"/>
+          </a:solidFill>
+          <a:ln>
+            <a:noFill/>
+          </a:ln>
+          <a:effectLst/>
+        </p:spPr>
+        <p:style>
+          <a:lnRef idx="1">
+            <a:schemeClr val="accent1"/>
+          </a:lnRef>
+          <a:fillRef idx="3">
+            <a:schemeClr val="accent1"/>
+          </a:fillRef>
+          <a:effectRef idx="2">
+            <a:schemeClr val="accent1"/>
+          </a:effectRef>
+          <a:fontRef idx="minor">
+            <a:schemeClr val="lt1"/>
+          </a:fontRef>
+        </p:style>
+        <p:txBody>
+          <a:bodyPr wrap="square" lIns="27432" tIns="22860" rIns="27432" bIns="22860" rtlCol="0" anchor="ctr"/>
+          <a:lstStyle/>
+          <a:p>
+            <a:pPr algn="ctr"/>
+            <a:r>
+              <a:rPr sz="2000" b="1" i="0">
+                <a:solidFill>
+                  <a:srgbClr val="FFFFFF"/>
+                </a:solidFill>
+              </a:rPr>
+              <a:t>OBLIGATION</a:t>
+            </a:r>
+          </a:p>
+        </p:txBody>
+      </p:sp>
+      <p:sp>
+        <p:nvSpPr>
+          <p:cNvPr id="910" name="Block"/>
+          <p:cNvSpPr/>
+          <p:nvPr/>
+        </p:nvSpPr>
+        <p:spPr>
+          <a:xfrm>
+            <a:off x="731520" y="2167128"/>
+            <a:ext cx="2926080" cy="566928"/>
+          </a:xfrm>
+          <a:prstGeom prst="rect">
+            <a:avLst/>
+          </a:prstGeom>
+          <a:solidFill>
+            <a:srgbClr val="8E6F3E"/>
+          </a:solidFill>
+          <a:ln>
+            <a:noFill/>
+          </a:ln>
+          <a:effectLst/>
+        </p:spPr>
+        <p:style>
+          <a:lnRef idx="1">
+            <a:schemeClr val="accent1"/>
+          </a:lnRef>
+          <a:fillRef idx="3">
+            <a:schemeClr val="accent1"/>
+          </a:fillRef>
+          <a:effectRef idx="2">
+            <a:schemeClr val="accent1"/>
+          </a:effectRef>
+          <a:fontRef idx="minor">
+            <a:schemeClr val="lt1"/>
+          </a:fontRef>
+        </p:style>
+        <p:txBody>
+          <a:bodyPr wrap="square" lIns="27432" tIns="22860" rIns="27432" bIns="22860" rtlCol="0" anchor="ctr"/>
+          <a:lstStyle/>
+          <a:p>
+            <a:pPr algn="ctr"/>
+            <a:r>
+              <a:rPr sz="2000" b="1" i="0">
+                <a:solidFill>
+                  <a:srgbClr val="FFFFFF"/>
+                </a:solidFill>
+              </a:rPr>
+              <a:t>REPRESENTATION</a:t>
+            </a:r>
+          </a:p>
+        </p:txBody>
+      </p:sp>
+      <p:sp>
+        <p:nvSpPr>
+          <p:cNvPr id="911" name="Block"/>
+          <p:cNvSpPr/>
+          <p:nvPr/>
+        </p:nvSpPr>
+        <p:spPr>
+          <a:xfrm>
+            <a:off x="731520" y="3008376"/>
+            <a:ext cx="2926080" cy="566928"/>
+          </a:xfrm>
+          <a:prstGeom prst="rect">
+            <a:avLst/>
+          </a:prstGeom>
+          <a:solidFill>
+            <a:srgbClr val="8E6F3E"/>
+          </a:solidFill>
+          <a:ln>
+            <a:noFill/>
+          </a:ln>
+          <a:effectLst/>
+        </p:spPr>
+        <p:style>
+          <a:lnRef idx="1">
+            <a:schemeClr val="accent1"/>
+          </a:lnRef>
+          <a:fillRef idx="3">
+            <a:schemeClr val="accent1"/>
+          </a:fillRef>
+          <a:effectRef idx="2">
+            <a:schemeClr val="accent1"/>
+          </a:effectRef>
+          <a:fontRef idx="minor">
+            <a:schemeClr val="lt1"/>
+          </a:fontRef>
+        </p:style>
+        <p:txBody>
+          <a:bodyPr wrap="square" lIns="27432" tIns="22860" rIns="27432" bIns="22860" rtlCol="0" anchor="ctr"/>
+          <a:lstStyle/>
+          <a:p>
+            <a:pPr algn="ctr"/>
+            <a:r>
+              <a:rPr sz="2000" b="1" i="0">
+                <a:solidFill>
+                  <a:srgbClr val="FFFFFF"/>
+                </a:solidFill>
+              </a:rPr>
+              <a:t>EVIDENCE</a:t>
+            </a:r>
+          </a:p>
+        </p:txBody>
+      </p:sp>
+      <p:sp>
+        <p:nvSpPr>
+          <p:cNvPr id="912" name="Block"/>
+          <p:cNvSpPr/>
+          <p:nvPr/>
+        </p:nvSpPr>
+        <p:spPr>
+          <a:xfrm>
+            <a:off x="731520" y="3849624"/>
+            <a:ext cx="2926080" cy="566928"/>
+          </a:xfrm>
+          <a:prstGeom prst="rect">
+            <a:avLst/>
+          </a:prstGeom>
+          <a:solidFill>
+            <a:srgbClr val="8E6F3E"/>
+          </a:solidFill>
+          <a:ln>
+            <a:noFill/>
+          </a:ln>
+          <a:effectLst/>
+        </p:spPr>
+        <p:style>
+          <a:lnRef idx="1">
+            <a:schemeClr val="accent1"/>
+          </a:lnRef>
+          <a:fillRef idx="3">
+            <a:schemeClr val="accent1"/>
+          </a:fillRef>
+          <a:effectRef idx="2">
+            <a:schemeClr val="accent1"/>
+          </a:effectRef>
+          <a:fontRef idx="minor">
+            <a:schemeClr val="lt1"/>
+          </a:fontRef>
+        </p:style>
+        <p:txBody>
+          <a:bodyPr wrap="square" lIns="27432" tIns="22860" rIns="27432" bIns="22860" rtlCol="0" anchor="ctr"/>
+          <a:lstStyle/>
+          <a:p>
+            <a:pPr algn="ctr"/>
+            <a:r>
+              <a:rPr sz="2000" b="1" i="0">
+                <a:solidFill>
+                  <a:srgbClr val="FFFFFF"/>
+                </a:solidFill>
+              </a:rPr>
+              <a:t>EVALUATION</a:t>
+            </a:r>
+          </a:p>
+        </p:txBody>
+      </p:sp>
+      <p:sp>
+        <p:nvSpPr>
+          <p:cNvPr id="913" name="FooterBand"/>
+          <p:cNvSpPr/>
+          <p:nvPr/>
+        </p:nvSpPr>
+        <p:spPr>
+          <a:xfrm>
+            <a:off x="274320" y="5817933"/>
+            <a:ext cx="8595360" cy="566928"/>
+          </a:xfrm>
+          <a:prstGeom prst="rect">
+            <a:avLst/>
+          </a:prstGeom>
+          <a:noFill/>
+          <a:ln>
+            <a:noFill/>
+          </a:ln>
+          <a:effectLst/>
+        </p:spPr>
+        <p:style>
+          <a:lnRef idx="1">
+            <a:schemeClr val="accent1"/>
+          </a:lnRef>
+          <a:fillRef idx="3">
+            <a:schemeClr val="accent1"/>
+          </a:fillRef>
+          <a:effectRef idx="2">
+            <a:schemeClr val="accent1"/>
+          </a:effectRef>
+          <a:fontRef idx="minor">
+            <a:schemeClr val="lt1"/>
+          </a:fontRef>
+        </p:style>
+        <p:txBody>
+          <a:bodyPr wrap="square" lIns="27432" tIns="22860" rIns="27432" bIns="22860" rtlCol="0" anchor="ctr"/>
+          <a:lstStyle/>
+          <a:p>
+            <a:pPr algn="ctr"/>
+            <a:r>
+              <a:rPr lang="en-US" sz="2800" b="1" i="0" dirty="0">
+                <a:solidFill>
+                  <a:schemeClr val="bg1"/>
+                </a:solidFill>
+              </a:rPr>
+              <a:t>A failure is not a request for another gate. Diagnose what was missing, then encode it.</a:t>
+            </a:r>
+            <a:endParaRPr sz="2800" b="1" i="0" dirty="0">
+              <a:solidFill>
+                <a:schemeClr val="bg1"/>
+              </a:solidFill>
+            </a:endParaRPr>
+          </a:p>
+        </p:txBody>
+      </p:sp>
+      <p:sp>
+        <p:nvSpPr>
+          <p:cNvPr id="909" name="Block"/>
+          <p:cNvSpPr/>
+          <p:nvPr/>
+        </p:nvSpPr>
+        <p:spPr>
+          <a:xfrm>
+            <a:off x="731520" y="4690872"/>
+            <a:ext cx="2926080" cy="566928"/>
+          </a:xfrm>
+          <a:prstGeom prst="rect">
+            <a:avLst/>
+          </a:prstGeom>
+          <a:solidFill>
+            <a:srgbClr val="8E6F3E"/>
+          </a:solidFill>
+          <a:ln>
+            <a:noFill/>
+          </a:ln>
+          <a:effectLst/>
+        </p:spPr>
+        <p:style>
+          <a:lnRef idx="1">
+            <a:schemeClr val="accent1"/>
+          </a:lnRef>
+          <a:fillRef idx="3">
+            <a:schemeClr val="accent1"/>
+          </a:fillRef>
+          <a:effectRef idx="2">
+            <a:schemeClr val="accent1"/>
+          </a:effectRef>
+          <a:fontRef idx="minor">
+            <a:schemeClr val="lt1"/>
+          </a:fontRef>
+        </p:style>
+        <p:txBody>
+          <a:bodyPr wrap="square" lIns="27432" tIns="22860" rIns="27432" bIns="22860" rtlCol="0" anchor="ctr"/>
+          <a:lstStyle/>
+          <a:p>
+            <a:pPr algn="ctr"/>
+            <a:r>
+              <a:rPr sz="2000" b="1" i="0">
+                <a:solidFill>
+                  <a:srgbClr val="FFFFFF"/>
+                </a:solidFill>
+              </a:rPr>
+              <a:t>ENFORCEMENT</a:t>
+            </a:r>
+          </a:p>
+        </p:txBody>
+      </p:sp>
+      <p:sp>
+        <p:nvSpPr>
+          <p:cNvPr id="903" name="Card"/>
+          <p:cNvSpPr/>
+          <p:nvPr/>
+        </p:nvSpPr>
+        <p:spPr>
+          <a:xfrm>
+            <a:off x="3840480" y="3008376"/>
+            <a:ext cx="4754880" cy="566928"/>
+          </a:xfrm>
+          <a:prstGeom prst="rect">
+            <a:avLst/>
+          </a:prstGeom>
+          <a:solidFill>
+            <a:srgbClr val="F5F1E8"/>
+          </a:solidFill>
+          <a:ln w="12700">
+            <a:solidFill>
+              <a:srgbClr val="C9B991"/>
+            </a:solidFill>
+          </a:ln>
+          <a:effectLst/>
+        </p:spPr>
+        <p:style>
+          <a:lnRef idx="1">
+            <a:schemeClr val="accent1"/>
+          </a:lnRef>
+          <a:fillRef idx="3">
+            <a:schemeClr val="accent1"/>
+          </a:fillRef>
+          <a:effectRef idx="2">
+            <a:schemeClr val="accent1"/>
+          </a:effectRef>
+          <a:fontRef idx="minor">
+            <a:schemeClr val="lt1"/>
+          </a:fontRef>
+        </p:style>
+        <p:txBody>
+          <a:bodyPr wrap="square" lIns="27432" tIns="22860" rIns="27432" bIns="22860" rtlCol="0" anchor="ctr"/>
+          <a:lstStyle/>
+          <a:p>
+            <a:pPr algn="ctr"/>
+            <a:r>
+              <a:rPr sz="2000" b="0" i="1">
+                <a:solidFill>
+                  <a:srgbClr val="5C4826"/>
+                </a:solidFill>
+              </a:rPr>
+              <a:t>Add a sensor</a:t>
+            </a:r>
+          </a:p>
+        </p:txBody>
+      </p:sp>
+      <p:sp>
+        <p:nvSpPr>
+          <p:cNvPr id="903" name="Card"/>
+          <p:cNvSpPr/>
+          <p:nvPr/>
+        </p:nvSpPr>
+        <p:spPr>
+          <a:xfrm>
+            <a:off x="3840480" y="3849624"/>
+            <a:ext cx="4754880" cy="566928"/>
+          </a:xfrm>
+          <a:prstGeom prst="rect">
+            <a:avLst/>
+          </a:prstGeom>
+          <a:solidFill>
+            <a:srgbClr val="F5F1E8"/>
+          </a:solidFill>
+          <a:ln w="12700">
+            <a:solidFill>
+              <a:srgbClr val="C9B991"/>
+            </a:solidFill>
+          </a:ln>
+          <a:effectLst/>
+        </p:spPr>
+        <p:style>
+          <a:lnRef idx="1">
+            <a:schemeClr val="accent1"/>
+          </a:lnRef>
+          <a:fillRef idx="3">
+            <a:schemeClr val="accent1"/>
+          </a:fillRef>
+          <a:effectRef idx="2">
+            <a:schemeClr val="accent1"/>
+          </a:effectRef>
+          <a:fontRef idx="minor">
+            <a:schemeClr val="lt1"/>
+          </a:fontRef>
+        </p:style>
+        <p:txBody>
+          <a:bodyPr wrap="square" lIns="27432" tIns="22860" rIns="27432" bIns="22860" rtlCol="0" anchor="ctr"/>
+          <a:lstStyle/>
+          <a:p>
+            <a:pPr algn="ctr"/>
+            <a:r>
+              <a:rPr sz="2000" b="0" i="1">
+                <a:solidFill>
+                  <a:srgbClr val="5C4826"/>
+                </a:solidFill>
+              </a:rPr>
+              <a:t>Add a validator</a:t>
+            </a:r>
+          </a:p>
+        </p:txBody>
+      </p:sp>
+      <p:sp>
+        <p:nvSpPr>
+          <p:cNvPr id="903" name="Card"/>
+          <p:cNvSpPr/>
+          <p:nvPr/>
+        </p:nvSpPr>
+        <p:spPr>
+          <a:xfrm>
+            <a:off x="3840480" y="4690872"/>
+            <a:ext cx="4754880" cy="566928"/>
+          </a:xfrm>
+          <a:prstGeom prst="rect">
+            <a:avLst/>
+          </a:prstGeom>
+          <a:solidFill>
+            <a:srgbClr val="F5F1E8"/>
+          </a:solidFill>
+          <a:ln w="12700">
+            <a:solidFill>
+              <a:srgbClr val="C9B991"/>
+            </a:solidFill>
+          </a:ln>
+          <a:effectLst/>
+        </p:spPr>
+        <p:style>
+          <a:lnRef idx="1">
+            <a:schemeClr val="accent1"/>
+          </a:lnRef>
+          <a:fillRef idx="3">
+            <a:schemeClr val="accent1"/>
+          </a:fillRef>
+          <a:effectRef idx="2">
+            <a:schemeClr val="accent1"/>
+          </a:effectRef>
+          <a:fontRef idx="minor">
+            <a:schemeClr val="lt1"/>
+          </a:fontRef>
+        </p:style>
+        <p:txBody>
+          <a:bodyPr wrap="square" lIns="27432" tIns="22860" rIns="27432" bIns="22860" rtlCol="0" anchor="ctr"/>
+          <a:lstStyle/>
+          <a:p>
+            <a:pPr algn="ctr"/>
+            <a:r>
+              <a:rPr sz="2000" b="0" i="1">
+                <a:solidFill>
+                  <a:srgbClr val="5C4826"/>
+                </a:solidFill>
+              </a:rPr>
+              <a:t>Add a constraint or gate</a:t>
+            </a:r>
+          </a:p>
+        </p:txBody>
+      </p:sp>
+      <p:sp>
+        <p:nvSpPr>
+          <p:cNvPr id="913" name="GroupLabel"/>
+          <p:cNvSpPr/>
+          <p:nvPr/>
+        </p:nvSpPr>
+        <p:spPr>
+          <a:xfrm>
+            <a:off x="731520" y="1042415"/>
+            <a:ext cx="7863840" cy="237744"/>
+          </a:xfrm>
+          <a:prstGeom prst="rect">
+            <a:avLst/>
+          </a:prstGeom>
+          <a:noFill/>
+          <a:ln>
+            <a:noFill/>
+          </a:ln>
+          <a:effectLst/>
+        </p:spPr>
+        <p:style>
+          <a:lnRef idx="1">
+            <a:schemeClr val="accent1"/>
+          </a:lnRef>
+          <a:fillRef idx="3">
+            <a:schemeClr val="accent1"/>
+          </a:fillRef>
+          <a:effectRef idx="2">
+            <a:schemeClr val="accent1"/>
+          </a:effectRef>
+          <a:fontRef idx="minor">
+            <a:schemeClr val="lt1"/>
+          </a:fontRef>
+        </p:style>
+        <p:txBody>
+          <a:bodyPr wrap="none" lIns="27432" tIns="22860" rIns="27432" bIns="22860" rtlCol="0" anchor="ctr"/>
+          <a:lstStyle/>
+          <a:p>
+            <a:pPr algn="ctr"/>
+            <a:r>
+              <a:rPr lang="en-US" sz="2800" b="1" i="0" dirty="0">
+                <a:solidFill>
+                  <a:schemeClr val="bg1"/>
+                </a:solidFill>
+              </a:rPr>
+              <a:t>WHAT WAS MISSING?        →        ENCODE IT AS</a:t>
+            </a:r>
+            <a:endParaRPr sz="2800" b="1" i="0" dirty="0">
+              <a:solidFill>
+                <a:schemeClr val="bg1"/>
+              </a:solidFill>
+            </a:endParaRPr>
+          </a:p>
+        </p:txBody>
+      </p:sp>
+    </p:spTree>
+  </p:cSld>
+  <p:clrMapOvr>
+    <a:masterClrMapping/>
+  </p:clrMapOvr>
+</p:sld>
+</file>
+
+<file path=ppt/slides/slide31.xml><?xml version="1.0" encoding="utf-8"?>
+<p:sld xmlns:a="http://schemas.openxmlformats.org/drawingml/2006/main" xmlns:r="http://schemas.openxmlformats.org/officeDocument/2006/relationships" xmlns:p="http://schemas.openxmlformats.org/presentationml/2006/main">
+  <p:cSld>
+    <p:spTree>
+      <p:nvGrpSpPr>
+        <p:cNvPr id="1" name=""/>
+        <p:cNvGrpSpPr/>
+        <p:nvPr/>
+      </p:nvGrpSpPr>
+      <p:grpSpPr>
+        <a:xfrm>
+          <a:off x="0" y="0"/>
+          <a:ext cx="0" cy="0"/>
+          <a:chOff x="0" y="0"/>
+          <a:chExt cx="0" cy="0"/>
+        </a:xfrm>
+      </p:grpSpPr>
+      <p:sp>
+        <p:nvSpPr>
+          <p:cNvPr id="3" name="Title 2"/>
+          <p:cNvSpPr>
+            <a:spLocks noGrp="1"/>
+          </p:cNvSpPr>
+          <p:nvPr>
+            <p:ph type="title"/>
+          </p:nvPr>
+        </p:nvSpPr>
+        <p:spPr/>
+        <p:txBody>
+          <a:bodyPr>
+            <a:normAutofit fontScale="90000"/>
+          </a:bodyPr>
+          <a:lstStyle/>
+          <a:p>
+            <a:r>
+              <a:rPr sz="2400" b="0" i="0">
+                <a:solidFill>
+                  <a:srgbClr val="000000"/>
+                </a:solidFill>
+              </a:rPr>
+              <a:t>Volkswagen, one last time</a:t>
+            </a:r>
+          </a:p>
+        </p:txBody>
+      </p:sp>
+      <p:sp>
+        <p:nvSpPr>
+          <p:cNvPr id="900" name="Slide Number Placeholder 900"/>
+          <p:cNvSpPr>
+            <a:spLocks noGrp="1"/>
+          </p:cNvSpPr>
+          <p:nvPr>
+            <p:ph type="sldNum" sz="quarter" idx="4"/>
+          </p:nvPr>
+        </p:nvSpPr>
+        <p:spPr/>
+        <p:txBody>
+          <a:bodyPr/>
+          <a:lstStyle/>
+          <a:p>
             <a:fld id="{9ABD6463-1069-4796-B206-4858CF08A11C}" type="slidenum">
               <a:rPr lang="en-US" smtClean="0"/>
               <a:t>36</a:t>
@@ -18354,58 +18723,6 @@
                 </a:solidFill>
               </a:rPr>
               <a:t>RELEASE GATE</a:t>
-            </a:r>
-          </a:p>
-        </p:txBody>
-      </p:sp>
-      <p:sp>
-        <p:nvSpPr>
-          <p:cNvPr id="909" name="FooterBand"/>
-          <p:cNvSpPr/>
-          <p:nvPr/>
-        </p:nvSpPr>
-        <p:spPr>
-          <a:xfrm>
-            <a:off x="274320" y="5440680"/>
-            <a:ext cx="8595360" cy="566928"/>
-          </a:xfrm>
-          <a:prstGeom prst="rect">
-            <a:avLst/>
-          </a:prstGeom>
-          <a:solidFill>
-            <a:srgbClr val="8E6F3E"/>
-          </a:solidFill>
-          <a:ln>
-            <a:noFill/>
-          </a:ln>
-          <a:effectLst/>
-        </p:spPr>
-        <p:style>
-          <a:lnRef idx="1">
-            <a:schemeClr val="accent1"/>
-          </a:lnRef>
-          <a:fillRef idx="3">
-            <a:schemeClr val="accent1"/>
-          </a:fillRef>
-          <a:effectRef idx="2">
-            <a:schemeClr val="accent1"/>
-          </a:effectRef>
-          <a:fontRef idx="minor">
-            <a:schemeClr val="lt1"/>
-          </a:fontRef>
-        </p:style>
-        <p:txBody>
-          <a:bodyPr wrap="square" lIns="27432" tIns="22860" rIns="27432" bIns="22860" rtlCol="0" anchor="ctr"/>
-          <a:lstStyle/>
-          <a:p>
-            <a:pPr algn="ctr"/>
-            <a:r>
-              <a:rPr lang="en-US" sz="2000" b="1" i="0" dirty="0">
-                <a:solidFill>
-                  <a:srgbClr val="FFFFFF"/>
-                </a:solidFill>
-              </a:rPr>
-              <a:t>Controls can constrain engineering work. They cannot guarantee compliance when the organization controlling them intends to circumvent them.</a:t>
             </a:r>
           </a:p>
         </p:txBody>
@@ -18424,7 +18741,7 @@
         </p:nvSpPr>
         <p:spPr>
           <a:xfrm>
-            <a:off x="274320" y="5898515"/>
+            <a:off x="274320" y="5897880"/>
             <a:ext cx="8595360" cy="566928"/>
           </a:xfrm>
           <a:prstGeom prst="rect">
@@ -18464,6 +18781,1042 @@
               <a:t>Recurring failure should leave structure behind.</a:t>
             </a:r>
             <a:endParaRPr sz="2000" b="1" i="1" dirty="0">
+              <a:solidFill>
+                <a:schemeClr val="bg1"/>
+              </a:solidFill>
+            </a:endParaRPr>
+          </a:p>
+        </p:txBody>
+      </p:sp>
+      <p:sp>
+        <p:nvSpPr>
+          <p:cNvPr id="901" name="Qualification"/>
+          <p:cNvSpPr txBox="1"/>
+          <p:nvPr/>
+        </p:nvSpPr>
+        <p:spPr>
+          <a:xfrm>
+            <a:off x="411480" y="5193792"/>
+            <a:ext cx="8321040" cy="566928"/>
+          </a:xfrm>
+          <a:prstGeom prst="rect">
+            <a:avLst/>
+          </a:prstGeom>
+          <a:noFill/>
+        </p:spPr>
+        <p:txBody>
+          <a:bodyPr wrap="square" lIns="27432" tIns="22860" rIns="27432" bIns="22860" anchor="t">
+            <a:spAutoFit/>
+          </a:bodyPr>
+          <a:lstStyle/>
+          <a:p>
+            <a:pPr algn="l"/>
+            <a:r>
+              <a:rPr sz="2000" b="1" i="0">
+                <a:solidFill>
+                  <a:srgbClr val="5C4826"/>
+                </a:solidFill>
+              </a:rPr>
+              <a:t>Controls can constrain engineering work. They cannot guarantee compliance when the organization controlling them intends to circumvent them.</a:t>
+            </a:r>
+          </a:p>
+        </p:txBody>
+      </p:sp>
+    </p:spTree>
+  </p:cSld>
+  <p:clrMapOvr>
+    <a:masterClrMapping/>
+  </p:clrMapOvr>
+</p:sld>
+</file>
+
+<file path=ppt/slides/slide32.xml><?xml version="1.0" encoding="utf-8"?>
+<p:sld xmlns:a="http://schemas.openxmlformats.org/drawingml/2006/main" xmlns:p="http://schemas.openxmlformats.org/presentationml/2006/main" xmlns:r="http://schemas.openxmlformats.org/officeDocument/2006/relationships">
+  <p:cSld>
+    <p:spTree>
+      <p:nvGrpSpPr>
+        <p:cNvPr id="1" name=""/>
+        <p:cNvGrpSpPr/>
+        <p:nvPr/>
+      </p:nvGrpSpPr>
+      <p:grpSpPr/>
+      <p:sp>
+        <p:nvSpPr>
+          <p:cNvPr id="3" name="Title 2"/>
+          <p:cNvSpPr>
+            <a:spLocks noGrp="1"/>
+          </p:cNvSpPr>
+          <p:nvPr>
+            <p:ph type="title"/>
+          </p:nvPr>
+        </p:nvSpPr>
+        <p:spPr/>
+        <p:txBody>
+          <a:bodyPr>
+            <a:normAutofit fontScale="90000"/>
+          </a:bodyPr>
+          <a:lstStyle/>
+          <a:p>
+            <a:r>
+              <a:rPr sz="2400" b="0" i="0">
+                <a:solidFill>
+                  <a:srgbClr val="000000"/>
+                </a:solidFill>
+              </a:rPr>
+              <a:t>Dieselgate: read this first</a:t>
+            </a:r>
+          </a:p>
+        </p:txBody>
+      </p:sp>
+      <p:sp>
+        <p:nvSpPr>
+          <p:cNvPr id="900" name="Slide Number Placeholder 900"/>
+          <p:cNvSpPr>
+            <a:spLocks noGrp="1"/>
+          </p:cNvSpPr>
+          <p:nvPr>
+            <p:ph type="sldNum" sz="quarter" idx="4"/>
+          </p:nvPr>
+        </p:nvSpPr>
+        <p:spPr/>
+        <p:txBody>
+          <a:bodyPr/>
+          <a:lstStyle/>
+          <a:p>
+            <a:fld id="{9ABD6463-1069-4796-B206-4858CF08A11C}" type="slidenum">
+              <a:rPr lang="en-US" smtClean="0"/>
+              <a:t>36</a:t>
+            </a:fld>
+            <a:endParaRPr lang="en-US"/>
+          </a:p>
+        </p:txBody>
+      </p:sp>
+      <p:sp>
+        <p:nvSpPr>
+          <p:cNvPr id="901" name="Lead"/>
+          <p:cNvSpPr txBox="1"/>
+          <p:nvPr/>
+        </p:nvSpPr>
+        <p:spPr>
+          <a:xfrm>
+            <a:off x="548640" y="1298448"/>
+            <a:ext cx="8046720" cy="4480560"/>
+          </a:xfrm>
+          <a:prstGeom prst="rect">
+            <a:avLst/>
+          </a:prstGeom>
+          <a:noFill/>
+        </p:spPr>
+        <p:txBody>
+          <a:bodyPr wrap="square" lIns="27432" tIns="22860" rIns="27432" bIns="22860" anchor="t">
+            <a:spAutoFit/>
+          </a:bodyPr>
+          <a:lstStyle/>
+          <a:p>
+            <a:pPr algn="l"/>
+            <a:r>
+              <a:rPr sz="2000" b="1" i="0">
+                <a:solidFill>
+                  <a:srgbClr val="5C4826"/>
+                </a:solidFill>
+              </a:rPr>
+              <a:t>Volkswagen wanted to sell diesel cars in the United States. Diesel engines offered attractive fuel economy and performance, but U.S. regulations imposed increasingly strict limits on nitrogen oxide (NOx) emissions.</a:t>
+            </a:r>
+          </a:p>
+          <a:p>
+            <a:pPr algn="l"/>
+            <a:r>
+              <a:rPr sz="2000" b="1" i="0">
+                <a:solidFill>
+                  <a:srgbClr val="5C4826"/>
+                </a:solidFill>
+              </a:rPr>
+              <a:t>In the mid-2000s, Volkswagen engineers struggled to produce engines that simultaneously met emissions limits, performance expectations, and commercial objectives.</a:t>
+            </a:r>
+          </a:p>
+          <a:p>
+            <a:pPr algn="l"/>
+            <a:r>
+              <a:rPr sz="2000" b="1" i="0">
+                <a:solidFill>
+                  <a:srgbClr val="5C4826"/>
+                </a:solidFill>
+              </a:rPr>
+              <a:t>Volkswagen ultimately sold vehicles containing software that recognized regulatory emissions tests and changed engine behavior during testing. The cars could pass laboratory tests while producing substantially higher emissions during ordinary driving.</a:t>
+            </a:r>
+          </a:p>
+          <a:p>
+            <a:pPr algn="l"/>
+            <a:r>
+              <a:rPr sz="2000" b="1" i="0">
+                <a:solidFill>
+                  <a:srgbClr val="5C4826"/>
+                </a:solidFill>
+              </a:rPr>
+              <a:t>The deception continued for years, involved multiple organizations, and was eventually exposed through independent testing.</a:t>
+            </a:r>
+          </a:p>
+        </p:txBody>
+      </p:sp>
+      <p:sp>
+        <p:nvSpPr>
+          <p:cNvPr id="2" name="GroupLabel">
+            <a:extLst>
+              <a:ext uri="{FF2B5EF4-FFF2-40B4-BE49-F238E27FC236}">
+                <a16:creationId xmlns:a16="http://schemas.microsoft.com/office/drawing/2014/main" id="{A01D4652-4B3B-10DE-B286-362A6003B509}"/>
+              </a:ext>
+            </a:extLst>
+          </p:cNvPr>
+          <p:cNvSpPr/>
+          <p:nvPr/>
+        </p:nvSpPr>
+        <p:spPr>
+          <a:xfrm>
+            <a:off x="548640" y="896112"/>
+            <a:ext cx="8046720" cy="237744"/>
+          </a:xfrm>
+          <a:prstGeom prst="rect">
+            <a:avLst/>
+          </a:prstGeom>
+          <a:noFill/>
+          <a:ln>
+            <a:noFill/>
+          </a:ln>
+          <a:effectLst/>
+        </p:spPr>
+        <p:style>
+          <a:lnRef idx="1">
+            <a:schemeClr val="accent1"/>
+          </a:lnRef>
+          <a:fillRef idx="3">
+            <a:schemeClr val="accent1"/>
+          </a:fillRef>
+          <a:effectRef idx="2">
+            <a:schemeClr val="accent1"/>
+          </a:effectRef>
+          <a:fontRef idx="minor">
+            <a:schemeClr val="lt1"/>
+          </a:fontRef>
+        </p:style>
+        <p:txBody>
+          <a:bodyPr wrap="none" lIns="27432" tIns="22860" rIns="27432" bIns="22860" rtlCol="0" anchor="ctr"/>
+          <a:lstStyle/>
+          <a:p>
+            <a:pPr algn="ctr"/>
+            <a:r>
+              <a:rPr lang="en-US" sz="2000" b="1" i="1" dirty="0">
+                <a:solidFill>
+                  <a:schemeClr val="bg1"/>
+                </a:solidFill>
+              </a:rPr>
+              <a:t>READ THIS FIRST</a:t>
+            </a:r>
+            <a:endParaRPr sz="2000" b="1" i="1" dirty="0">
+              <a:solidFill>
+                <a:schemeClr val="bg1"/>
+              </a:solidFill>
+            </a:endParaRPr>
+          </a:p>
+        </p:txBody>
+      </p:sp>
+    </p:spTree>
+  </p:cSld>
+  <p:clrMapOvr>
+    <a:masterClrMapping/>
+  </p:clrMapOvr>
+</p:sld>
+</file>
+
+<file path=ppt/slides/slide33.xml><?xml version="1.0" encoding="utf-8"?>
+<p:sld xmlns:a="http://schemas.openxmlformats.org/drawingml/2006/main" xmlns:p="http://schemas.openxmlformats.org/presentationml/2006/main" xmlns:r="http://schemas.openxmlformats.org/officeDocument/2006/relationships">
+  <p:cSld>
+    <p:spTree>
+      <p:nvGrpSpPr>
+        <p:cNvPr id="1" name=""/>
+        <p:cNvGrpSpPr/>
+        <p:nvPr/>
+      </p:nvGrpSpPr>
+      <p:grpSpPr/>
+      <p:sp>
+        <p:nvSpPr>
+          <p:cNvPr id="3" name="Title 2"/>
+          <p:cNvSpPr>
+            <a:spLocks noGrp="1"/>
+          </p:cNvSpPr>
+          <p:nvPr>
+            <p:ph type="title"/>
+          </p:nvPr>
+        </p:nvSpPr>
+        <p:spPr/>
+        <p:txBody>
+          <a:bodyPr>
+            <a:normAutofit fontScale="90000"/>
+          </a:bodyPr>
+          <a:lstStyle/>
+          <a:p>
+            <a:r>
+              <a:rPr sz="2400" b="0" i="0">
+                <a:solidFill>
+                  <a:srgbClr val="000000"/>
+                </a:solidFill>
+              </a:rPr>
+              <a:t>Instagram: read this first</a:t>
+            </a:r>
+          </a:p>
+        </p:txBody>
+      </p:sp>
+      <p:sp>
+        <p:nvSpPr>
+          <p:cNvPr id="900" name="Slide Number Placeholder 900"/>
+          <p:cNvSpPr>
+            <a:spLocks noGrp="1"/>
+          </p:cNvSpPr>
+          <p:nvPr>
+            <p:ph type="sldNum" sz="quarter" idx="4"/>
+          </p:nvPr>
+        </p:nvSpPr>
+        <p:spPr/>
+        <p:txBody>
+          <a:bodyPr/>
+          <a:lstStyle/>
+          <a:p>
+            <a:fld id="{9ABD6463-1069-4796-B206-4858CF08A11C}" type="slidenum">
+              <a:rPr lang="en-US" smtClean="0"/>
+              <a:t>36</a:t>
+            </a:fld>
+            <a:endParaRPr lang="en-US"/>
+          </a:p>
+        </p:txBody>
+      </p:sp>
+      <p:sp>
+        <p:nvSpPr>
+          <p:cNvPr id="901" name="Lead"/>
+          <p:cNvSpPr txBox="1"/>
+          <p:nvPr/>
+        </p:nvSpPr>
+        <p:spPr>
+          <a:xfrm>
+            <a:off x="548640" y="1298448"/>
+            <a:ext cx="8046720" cy="4480560"/>
+          </a:xfrm>
+          <a:prstGeom prst="rect">
+            <a:avLst/>
+          </a:prstGeom>
+          <a:noFill/>
+        </p:spPr>
+        <p:txBody>
+          <a:bodyPr wrap="square" lIns="27432" tIns="22860" rIns="27432" bIns="22860" anchor="t">
+            <a:spAutoFit/>
+          </a:bodyPr>
+          <a:lstStyle/>
+          <a:p>
+            <a:pPr algn="l"/>
+            <a:r>
+              <a:rPr sz="2000" b="1" i="0">
+                <a:solidFill>
+                  <a:srgbClr val="5C4826"/>
+                </a:solidFill>
+              </a:rPr>
+              <a:t>Instagram is a social-media platform whose recommendation and engagement mechanisms influence what users see and how they interact.</a:t>
+            </a:r>
+          </a:p>
+          <a:p>
+            <a:pPr algn="l"/>
+            <a:r>
+              <a:rPr sz="2000" b="1" i="0">
+                <a:solidFill>
+                  <a:srgbClr val="5C4826"/>
+                </a:solidFill>
+              </a:rPr>
+              <a:t>Internal research examined how Instagram use related to teenage users’ well-being, including body-image concerns. Some participants reported that using Instagram made particular experiences worse.</a:t>
+            </a:r>
+          </a:p>
+          <a:p>
+            <a:pPr algn="l"/>
+            <a:r>
+              <a:rPr sz="2000" b="1" i="0">
+                <a:solidFill>
+                  <a:srgbClr val="5C4826"/>
+                </a:solidFill>
+              </a:rPr>
+              <a:t>These findings raised questions about whether the platform’s design and product objectives adequately accounted for harmful outcomes, and how evidence about those outcomes should inform engineering and management decisions.</a:t>
+            </a:r>
+          </a:p>
+          <a:p>
+            <a:pPr algn="l"/>
+            <a:r>
+              <a:rPr sz="2000" b="1" i="0">
+                <a:solidFill>
+                  <a:srgbClr val="5C4826"/>
+                </a:solidFill>
+              </a:rPr>
+              <a:t>The research did not establish that Instagram caused all the reported harms. The engineering question is how an organization should interpret consequential evidence about a system that may be operating as designed.</a:t>
+            </a:r>
+          </a:p>
+        </p:txBody>
+      </p:sp>
+      <p:sp>
+        <p:nvSpPr>
+          <p:cNvPr id="2" name="GroupLabel">
+            <a:extLst>
+              <a:ext uri="{FF2B5EF4-FFF2-40B4-BE49-F238E27FC236}">
+                <a16:creationId xmlns:a16="http://schemas.microsoft.com/office/drawing/2014/main" id="{A01D4652-4B3B-10DE-B286-362A6003B509}"/>
+              </a:ext>
+            </a:extLst>
+          </p:cNvPr>
+          <p:cNvSpPr/>
+          <p:nvPr/>
+        </p:nvSpPr>
+        <p:spPr>
+          <a:xfrm>
+            <a:off x="548640" y="896112"/>
+            <a:ext cx="8046720" cy="237744"/>
+          </a:xfrm>
+          <a:prstGeom prst="rect">
+            <a:avLst/>
+          </a:prstGeom>
+          <a:noFill/>
+          <a:ln>
+            <a:noFill/>
+          </a:ln>
+          <a:effectLst/>
+        </p:spPr>
+        <p:style>
+          <a:lnRef idx="1">
+            <a:schemeClr val="accent1"/>
+          </a:lnRef>
+          <a:fillRef idx="3">
+            <a:schemeClr val="accent1"/>
+          </a:fillRef>
+          <a:effectRef idx="2">
+            <a:schemeClr val="accent1"/>
+          </a:effectRef>
+          <a:fontRef idx="minor">
+            <a:schemeClr val="lt1"/>
+          </a:fontRef>
+        </p:style>
+        <p:txBody>
+          <a:bodyPr wrap="none" lIns="27432" tIns="22860" rIns="27432" bIns="22860" rtlCol="0" anchor="ctr"/>
+          <a:lstStyle/>
+          <a:p>
+            <a:pPr algn="ctr"/>
+            <a:r>
+              <a:rPr lang="en-US" sz="2000" b="1" i="1" dirty="0">
+                <a:solidFill>
+                  <a:schemeClr val="bg1"/>
+                </a:solidFill>
+              </a:rPr>
+              <a:t>READ THIS FIRST</a:t>
+            </a:r>
+            <a:endParaRPr sz="2000" b="1" i="1" dirty="0">
+              <a:solidFill>
+                <a:schemeClr val="bg1"/>
+              </a:solidFill>
+            </a:endParaRPr>
+          </a:p>
+        </p:txBody>
+      </p:sp>
+    </p:spTree>
+  </p:cSld>
+  <p:clrMapOvr>
+    <a:masterClrMapping/>
+  </p:clrMapOvr>
+</p:sld>
+</file>
+
+<file path=ppt/slides/slide34.xml><?xml version="1.0" encoding="utf-8"?>
+<p:sld xmlns:a="http://schemas.openxmlformats.org/drawingml/2006/main" xmlns:p="http://schemas.openxmlformats.org/presentationml/2006/main" xmlns:r="http://schemas.openxmlformats.org/officeDocument/2006/relationships">
+  <p:cSld>
+    <p:spTree>
+      <p:nvGrpSpPr>
+        <p:cNvPr id="1" name=""/>
+        <p:cNvGrpSpPr/>
+        <p:nvPr/>
+      </p:nvGrpSpPr>
+      <p:grpSpPr/>
+      <p:sp>
+        <p:nvSpPr>
+          <p:cNvPr id="3" name="Title 2"/>
+          <p:cNvSpPr>
+            <a:spLocks noGrp="1"/>
+          </p:cNvSpPr>
+          <p:nvPr>
+            <p:ph type="title"/>
+          </p:nvPr>
+        </p:nvSpPr>
+        <p:spPr>
+          <a:xfrm>
+            <a:off x="277148" y="118428"/>
+            <a:ext cx="9145148" cy="638175"/>
+          </a:xfrm>
+        </p:spPr>
+        <p:txBody>
+          <a:bodyPr>
+            <a:normAutofit fontScale="90000"/>
+          </a:bodyPr>
+          <a:lstStyle/>
+          <a:p>
+            <a:r>
+              <a:rPr lang="en-US" sz="2400" b="0" i="0" dirty="0">
+                <a:solidFill>
+                  <a:srgbClr val="000000"/>
+                </a:solidFill>
+              </a:rPr>
+              <a:t>Diagnosis reopens the design space</a:t>
+            </a:r>
+          </a:p>
+        </p:txBody>
+      </p:sp>
+      <p:sp>
+        <p:nvSpPr>
+          <p:cNvPr id="900" name="Slide Number Placeholder 900"/>
+          <p:cNvSpPr>
+            <a:spLocks noGrp="1"/>
+          </p:cNvSpPr>
+          <p:nvPr>
+            <p:ph type="sldNum" sz="quarter" idx="4"/>
+          </p:nvPr>
+        </p:nvSpPr>
+        <p:spPr/>
+        <p:txBody>
+          <a:bodyPr/>
+          <a:lstStyle/>
+          <a:p>
+            <a:fld id="{54DE72B0-FFEB-4C83-B4BD-F25961BEDFCA}" type="slidenum">
+              <a:rPr lang="en-US" smtClean="0"/>
+              <a:t>35</a:t>
+            </a:fld>
+            <a:endParaRPr lang="en-US"/>
+          </a:p>
+        </p:txBody>
+      </p:sp>
+      <p:sp>
+        <p:nvSpPr>
+          <p:cNvPr id="903" name="Card"/>
+          <p:cNvSpPr/>
+          <p:nvPr/>
+        </p:nvSpPr>
+        <p:spPr>
+          <a:xfrm>
+            <a:off x="4023360" y="1463040"/>
+            <a:ext cx="4572000" cy="640080"/>
+          </a:xfrm>
+          <a:prstGeom prst="rect">
+            <a:avLst/>
+          </a:prstGeom>
+          <a:solidFill>
+            <a:srgbClr val="F5F1E8"/>
+          </a:solidFill>
+          <a:ln w="12700">
+            <a:solidFill>
+              <a:srgbClr val="C9B991"/>
+            </a:solidFill>
+          </a:ln>
+          <a:effectLst/>
+        </p:spPr>
+        <p:style>
+          <a:lnRef idx="1">
+            <a:schemeClr val="accent1"/>
+          </a:lnRef>
+          <a:fillRef idx="3">
+            <a:schemeClr val="accent1"/>
+          </a:fillRef>
+          <a:effectRef idx="2">
+            <a:schemeClr val="accent1"/>
+          </a:effectRef>
+          <a:fontRef idx="minor">
+            <a:schemeClr val="lt1"/>
+          </a:fontRef>
+        </p:style>
+        <p:txBody>
+          <a:bodyPr wrap="square" lIns="27432" tIns="22860" rIns="27432" bIns="22860" rtlCol="0" anchor="ctr"/>
+          <a:lstStyle/>
+          <a:p>
+            <a:pPr algn="ctr"/>
+            <a:r>
+              <a:rPr sz="2000" b="0" i="1">
+                <a:solidFill>
+                  <a:srgbClr val="5C4826"/>
+                </a:solidFill>
+              </a:rPr>
+              <a:t>that particular timeout failure</a:t>
+            </a:r>
+          </a:p>
+        </p:txBody>
+      </p:sp>
+      <p:sp>
+        <p:nvSpPr>
+          <p:cNvPr id="907" name="Card"/>
+          <p:cNvSpPr/>
+          <p:nvPr/>
+        </p:nvSpPr>
+        <p:spPr>
+          <a:xfrm>
+            <a:off x="4023360" y="2423160"/>
+            <a:ext cx="4572000" cy="640080"/>
+          </a:xfrm>
+          <a:prstGeom prst="rect">
+            <a:avLst/>
+          </a:prstGeom>
+          <a:solidFill>
+            <a:srgbClr val="F5F1E8"/>
+          </a:solidFill>
+          <a:ln w="12700">
+            <a:solidFill>
+              <a:srgbClr val="C9B991"/>
+            </a:solidFill>
+          </a:ln>
+          <a:effectLst/>
+        </p:spPr>
+        <p:style>
+          <a:lnRef idx="1">
+            <a:schemeClr val="accent1"/>
+          </a:lnRef>
+          <a:fillRef idx="3">
+            <a:schemeClr val="accent1"/>
+          </a:fillRef>
+          <a:effectRef idx="2">
+            <a:schemeClr val="accent1"/>
+          </a:effectRef>
+          <a:fontRef idx="minor">
+            <a:schemeClr val="lt1"/>
+          </a:fontRef>
+        </p:style>
+        <p:txBody>
+          <a:bodyPr wrap="square" lIns="27432" tIns="22860" rIns="27432" bIns="22860" rtlCol="0" anchor="ctr"/>
+          <a:lstStyle/>
+          <a:p>
+            <a:pPr algn="ctr"/>
+            <a:r>
+              <a:rPr sz="2000" b="0" i="1">
+                <a:solidFill>
+                  <a:srgbClr val="5C4826"/>
+                </a:solidFill>
+              </a:rPr>
+              <a:t>reintroduction of that execution pattern</a:t>
+            </a:r>
+          </a:p>
+        </p:txBody>
+      </p:sp>
+      <p:sp>
+        <p:nvSpPr>
+          <p:cNvPr id="909" name="Block"/>
+          <p:cNvSpPr/>
+          <p:nvPr/>
+        </p:nvSpPr>
+        <p:spPr>
+          <a:xfrm>
+            <a:off x="548640" y="1463040"/>
+            <a:ext cx="3291840" cy="640080"/>
+          </a:xfrm>
+          <a:prstGeom prst="rect">
+            <a:avLst/>
+          </a:prstGeom>
+          <a:solidFill>
+            <a:srgbClr val="8E6F3E"/>
+          </a:solidFill>
+          <a:ln>
+            <a:noFill/>
+          </a:ln>
+          <a:effectLst/>
+        </p:spPr>
+        <p:style>
+          <a:lnRef idx="1">
+            <a:schemeClr val="accent1"/>
+          </a:lnRef>
+          <a:fillRef idx="3">
+            <a:schemeClr val="accent1"/>
+          </a:fillRef>
+          <a:effectRef idx="2">
+            <a:schemeClr val="accent1"/>
+          </a:effectRef>
+          <a:fontRef idx="minor">
+            <a:schemeClr val="lt1"/>
+          </a:fontRef>
+        </p:style>
+        <p:txBody>
+          <a:bodyPr wrap="square" lIns="27432" tIns="22860" rIns="27432" bIns="22860" rtlCol="0" anchor="ctr"/>
+          <a:lstStyle/>
+          <a:p>
+            <a:pPr algn="ctr"/>
+            <a:r>
+              <a:rPr sz="2000" b="1" i="0">
+                <a:solidFill>
+                  <a:srgbClr val="FFFFFF"/>
+                </a:solidFill>
+              </a:rPr>
+              <a:t>Fix the observed timeout handling</a:t>
+            </a:r>
+          </a:p>
+        </p:txBody>
+      </p:sp>
+      <p:sp>
+        <p:nvSpPr>
+          <p:cNvPr id="910" name="Block"/>
+          <p:cNvSpPr/>
+          <p:nvPr/>
+        </p:nvSpPr>
+        <p:spPr>
+          <a:xfrm>
+            <a:off x="548640" y="2423160"/>
+            <a:ext cx="3291840" cy="640080"/>
+          </a:xfrm>
+          <a:prstGeom prst="rect">
+            <a:avLst/>
+          </a:prstGeom>
+          <a:solidFill>
+            <a:srgbClr val="8E6F3E"/>
+          </a:solidFill>
+          <a:ln>
+            <a:noFill/>
+          </a:ln>
+          <a:effectLst/>
+        </p:spPr>
+        <p:style>
+          <a:lnRef idx="1">
+            <a:schemeClr val="accent1"/>
+          </a:lnRef>
+          <a:fillRef idx="3">
+            <a:schemeClr val="accent1"/>
+          </a:fillRef>
+          <a:effectRef idx="2">
+            <a:schemeClr val="accent1"/>
+          </a:effectRef>
+          <a:fontRef idx="minor">
+            <a:schemeClr val="lt1"/>
+          </a:fontRef>
+        </p:style>
+        <p:txBody>
+          <a:bodyPr wrap="square" lIns="27432" tIns="22860" rIns="27432" bIns="22860" rtlCol="0" anchor="ctr"/>
+          <a:lstStyle/>
+          <a:p>
+            <a:pPr algn="ctr"/>
+            <a:r>
+              <a:rPr sz="2000" b="1" i="0">
+                <a:solidFill>
+                  <a:srgbClr val="FFFFFF"/>
+                </a:solidFill>
+              </a:rPr>
+              <a:t>Regression-test the interleaving</a:t>
+            </a:r>
+          </a:p>
+        </p:txBody>
+      </p:sp>
+      <p:sp>
+        <p:nvSpPr>
+          <p:cNvPr id="911" name="Block"/>
+          <p:cNvSpPr/>
+          <p:nvPr/>
+        </p:nvSpPr>
+        <p:spPr>
+          <a:xfrm>
+            <a:off x="548640" y="3383280"/>
+            <a:ext cx="3291840" cy="640080"/>
+          </a:xfrm>
+          <a:prstGeom prst="rect">
+            <a:avLst/>
+          </a:prstGeom>
+          <a:solidFill>
+            <a:srgbClr val="8E6F3E"/>
+          </a:solidFill>
+          <a:ln>
+            <a:noFill/>
+          </a:ln>
+          <a:effectLst/>
+        </p:spPr>
+        <p:style>
+          <a:lnRef idx="1">
+            <a:schemeClr val="accent1"/>
+          </a:lnRef>
+          <a:fillRef idx="3">
+            <a:schemeClr val="accent1"/>
+          </a:fillRef>
+          <a:effectRef idx="2">
+            <a:schemeClr val="accent1"/>
+          </a:effectRef>
+          <a:fontRef idx="minor">
+            <a:schemeClr val="lt1"/>
+          </a:fontRef>
+        </p:style>
+        <p:txBody>
+          <a:bodyPr wrap="square" lIns="27432" tIns="22860" rIns="27432" bIns="22860" rtlCol="0" anchor="ctr"/>
+          <a:lstStyle/>
+          <a:p>
+            <a:pPr algn="ctr"/>
+            <a:r>
+              <a:rPr sz="2000" b="1" i="0">
+                <a:solidFill>
+                  <a:srgbClr val="FFFFFF"/>
+                </a:solidFill>
+              </a:rPr>
+              <a:t>Require a current lease generation</a:t>
+            </a:r>
+          </a:p>
+        </p:txBody>
+      </p:sp>
+      <p:sp>
+        <p:nvSpPr>
+          <p:cNvPr id="912" name="Block"/>
+          <p:cNvSpPr/>
+          <p:nvPr/>
+        </p:nvSpPr>
+        <p:spPr>
+          <a:xfrm>
+            <a:off x="548640" y="4343400"/>
+            <a:ext cx="3291840" cy="640080"/>
+          </a:xfrm>
+          <a:prstGeom prst="rect">
+            <a:avLst/>
+          </a:prstGeom>
+          <a:solidFill>
+            <a:srgbClr val="8E6F3E"/>
+          </a:solidFill>
+          <a:ln>
+            <a:noFill/>
+          </a:ln>
+          <a:effectLst/>
+        </p:spPr>
+        <p:style>
+          <a:lnRef idx="1">
+            <a:schemeClr val="accent1"/>
+          </a:lnRef>
+          <a:fillRef idx="3">
+            <a:schemeClr val="accent1"/>
+          </a:fillRef>
+          <a:effectRef idx="2">
+            <a:schemeClr val="accent1"/>
+          </a:effectRef>
+          <a:fontRef idx="minor">
+            <a:schemeClr val="lt1"/>
+          </a:fontRef>
+        </p:style>
+        <p:txBody>
+          <a:bodyPr wrap="square" lIns="27432" tIns="22860" rIns="27432" bIns="22860" rtlCol="0" anchor="ctr"/>
+          <a:lstStyle/>
+          <a:p>
+            <a:pPr algn="ctr"/>
+            <a:r>
+              <a:rPr sz="2000" b="1" i="0">
+                <a:solidFill>
+                  <a:srgbClr val="FFFFFF"/>
+                </a:solidFill>
+              </a:rPr>
+              <a:t>Make all job processing idempotent</a:t>
+            </a:r>
+          </a:p>
+        </p:txBody>
+      </p:sp>
+      <p:sp>
+        <p:nvSpPr>
+          <p:cNvPr id="913" name="FooterBand"/>
+          <p:cNvSpPr/>
+          <p:nvPr/>
+        </p:nvSpPr>
+        <p:spPr>
+          <a:xfrm>
+            <a:off x="274320" y="5817933"/>
+            <a:ext cx="8595360" cy="566928"/>
+          </a:xfrm>
+          <a:prstGeom prst="rect">
+            <a:avLst/>
+          </a:prstGeom>
+          <a:noFill/>
+          <a:ln>
+            <a:noFill/>
+          </a:ln>
+          <a:effectLst/>
+        </p:spPr>
+        <p:style>
+          <a:lnRef idx="1">
+            <a:schemeClr val="accent1"/>
+          </a:lnRef>
+          <a:fillRef idx="3">
+            <a:schemeClr val="accent1"/>
+          </a:fillRef>
+          <a:effectRef idx="2">
+            <a:schemeClr val="accent1"/>
+          </a:effectRef>
+          <a:fontRef idx="minor">
+            <a:schemeClr val="lt1"/>
+          </a:fontRef>
+        </p:style>
+        <p:txBody>
+          <a:bodyPr wrap="square" lIns="27432" tIns="22860" rIns="27432" bIns="22860" rtlCol="0" anchor="ctr"/>
+          <a:lstStyle/>
+          <a:p>
+            <a:pPr algn="ctr"/>
+            <a:r>
+              <a:rPr lang="en-US" sz="2800" b="1" i="0" dirty="0">
+                <a:solidFill>
+                  <a:schemeClr val="bg1"/>
+                </a:solidFill>
+              </a:rPr>
+              <a:t>Which intervention excludes the consequential failure class at an acceptable cost?</a:t>
+            </a:r>
+            <a:endParaRPr sz="2800" b="1" i="0" dirty="0">
+              <a:solidFill>
+                <a:schemeClr val="bg1"/>
+              </a:solidFill>
+            </a:endParaRPr>
+          </a:p>
+        </p:txBody>
+      </p:sp>
+      <p:sp>
+        <p:nvSpPr>
+          <p:cNvPr id="903" name="Card"/>
+          <p:cNvSpPr/>
+          <p:nvPr/>
+        </p:nvSpPr>
+        <p:spPr>
+          <a:xfrm>
+            <a:off x="4023360" y="3383280"/>
+            <a:ext cx="4572000" cy="640080"/>
+          </a:xfrm>
+          <a:prstGeom prst="rect">
+            <a:avLst/>
+          </a:prstGeom>
+          <a:solidFill>
+            <a:srgbClr val="F5F1E8"/>
+          </a:solidFill>
+          <a:ln w="12700">
+            <a:solidFill>
+              <a:srgbClr val="C9B991"/>
+            </a:solidFill>
+          </a:ln>
+          <a:effectLst/>
+        </p:spPr>
+        <p:style>
+          <a:lnRef idx="1">
+            <a:schemeClr val="accent1"/>
+          </a:lnRef>
+          <a:fillRef idx="3">
+            <a:schemeClr val="accent1"/>
+          </a:fillRef>
+          <a:effectRef idx="2">
+            <a:schemeClr val="accent1"/>
+          </a:effectRef>
+          <a:fontRef idx="minor">
+            <a:schemeClr val="lt1"/>
+          </a:fontRef>
+        </p:style>
+        <p:txBody>
+          <a:bodyPr wrap="square" lIns="27432" tIns="22860" rIns="27432" bIns="22860" rtlCol="0" anchor="ctr"/>
+          <a:lstStyle/>
+          <a:p>
+            <a:pPr algn="ctr"/>
+            <a:r>
+              <a:rPr sz="2000" b="0" i="1">
+                <a:solidFill>
+                  <a:srgbClr val="5C4826"/>
+                </a:solidFill>
+              </a:rPr>
+              <a:t>stale-owner mutations across timing and recovery paths</a:t>
+            </a:r>
+          </a:p>
+        </p:txBody>
+      </p:sp>
+      <p:sp>
+        <p:nvSpPr>
+          <p:cNvPr id="903" name="Card"/>
+          <p:cNvSpPr/>
+          <p:nvPr/>
+        </p:nvSpPr>
+        <p:spPr>
+          <a:xfrm>
+            <a:off x="4023360" y="4343400"/>
+            <a:ext cx="4572000" cy="640080"/>
+          </a:xfrm>
+          <a:prstGeom prst="rect">
+            <a:avLst/>
+          </a:prstGeom>
+          <a:solidFill>
+            <a:srgbClr val="F5F1E8"/>
+          </a:solidFill>
+          <a:ln w="12700">
+            <a:solidFill>
+              <a:srgbClr val="C9B991"/>
+            </a:solidFill>
+          </a:ln>
+          <a:effectLst/>
+        </p:spPr>
+        <p:style>
+          <a:lnRef idx="1">
+            <a:schemeClr val="accent1"/>
+          </a:lnRef>
+          <a:fillRef idx="3">
+            <a:schemeClr val="accent1"/>
+          </a:fillRef>
+          <a:effectRef idx="2">
+            <a:schemeClr val="accent1"/>
+          </a:effectRef>
+          <a:fontRef idx="minor">
+            <a:schemeClr val="lt1"/>
+          </a:fontRef>
+        </p:style>
+        <p:txBody>
+          <a:bodyPr wrap="square" lIns="27432" tIns="22860" rIns="27432" bIns="22860" rtlCol="0" anchor="ctr"/>
+          <a:lstStyle/>
+          <a:p>
+            <a:pPr algn="ctr"/>
+            <a:r>
+              <a:rPr sz="2000" b="0" i="1">
+                <a:solidFill>
+                  <a:srgbClr val="5C4826"/>
+                </a:solidFill>
+              </a:rPr>
+              <a:t>some duplicate effects, including unrelated ones</a:t>
+            </a:r>
+          </a:p>
+        </p:txBody>
+      </p:sp>
+      <p:sp>
+        <p:nvSpPr>
+          <p:cNvPr id="913" name="GroupLabel"/>
+          <p:cNvSpPr/>
+          <p:nvPr/>
+        </p:nvSpPr>
+        <p:spPr>
+          <a:xfrm>
+            <a:off x="731520" y="1042415"/>
+            <a:ext cx="7863840" cy="237744"/>
+          </a:xfrm>
+          <a:prstGeom prst="rect">
+            <a:avLst/>
+          </a:prstGeom>
+          <a:noFill/>
+          <a:ln>
+            <a:noFill/>
+          </a:ln>
+          <a:effectLst/>
+        </p:spPr>
+        <p:style>
+          <a:lnRef idx="1">
+            <a:schemeClr val="accent1"/>
+          </a:lnRef>
+          <a:fillRef idx="3">
+            <a:schemeClr val="accent1"/>
+          </a:fillRef>
+          <a:effectRef idx="2">
+            <a:schemeClr val="accent1"/>
+          </a:effectRef>
+          <a:fontRef idx="minor">
+            <a:schemeClr val="lt1"/>
+          </a:fontRef>
+        </p:style>
+        <p:txBody>
+          <a:bodyPr wrap="none" lIns="27432" tIns="22860" rIns="27432" bIns="22860" rtlCol="0" anchor="ctr"/>
+          <a:lstStyle/>
+          <a:p>
+            <a:pPr algn="ctr"/>
+            <a:r>
+              <a:rPr lang="en-US" sz="2800" b="1" i="0" dirty="0">
+                <a:solidFill>
+                  <a:schemeClr val="bg1"/>
+                </a:solidFill>
+              </a:rPr>
+              <a:t>CANDIDATE INTERVENTION        →        CLASS OF FAILURES IT EXCLUDES</a:t>
+            </a:r>
+            <a:endParaRPr sz="2800" b="1" i="0" dirty="0">
               <a:solidFill>
                 <a:schemeClr val="bg1"/>
               </a:solidFill>

--- a/course/lectures/act-2-delegation-and-control/04-failure-aware-engineering/2-4-Failure-Aware-Engineering.pptx
+++ b/course/lectures/act-2-delegation-and-control/04-failure-aware-engineering/2-4-Failure-Aware-Engineering.pptx
@@ -16315,7 +16315,7 @@
           <a:p>
             <a:pPr algn="ctr"/>
             <a:r>
-              <a:rPr lang="en-US" sz="2800" b="1" i="0" dirty="0">
+              <a:rPr lang="en-US" sz="2000" b="1" i="0" dirty="0">
                 <a:solidFill>
                   <a:schemeClr val="bg1"/>
                 </a:solidFill>
@@ -16440,14 +16440,14 @@
       </p:sp>
       <p:sp>
         <p:nvSpPr>
-          <p:cNvPr id="913" name="GroupLabel"/>
+          <p:cNvPr id="913" name="ColumnHeading"/>
           <p:cNvSpPr/>
           <p:nvPr/>
         </p:nvSpPr>
         <p:spPr>
           <a:xfrm>
-            <a:off x="731520" y="1042415"/>
-            <a:ext cx="7863840" cy="237744"/>
+            <a:off x="548640" y="1042415"/>
+            <a:ext cx="3291840" cy="274320"/>
           </a:xfrm>
           <a:prstGeom prst="rect">
             <a:avLst/>
@@ -16473,17 +16473,72 @@
           </a:fontRef>
         </p:style>
         <p:txBody>
-          <a:bodyPr wrap="none" lIns="27432" tIns="22860" rIns="27432" bIns="22860" rtlCol="0" anchor="ctr"/>
+          <a:bodyPr wrap="square" lIns="27432" tIns="22860" rIns="27432" bIns="22860" rtlCol="0" anchor="ctr"/>
           <a:lstStyle/>
           <a:p>
             <a:pPr algn="ctr"/>
             <a:r>
-              <a:rPr lang="en-US" sz="2800" b="1" i="0" dirty="0">
+              <a:rPr lang="en-US" sz="1400" b="1" i="0" dirty="0">
                 <a:solidFill>
                   <a:schemeClr val="bg1"/>
                 </a:solidFill>
               </a:rPr>
-              <a:t>CANDIDATE INTERVENTION        →        FAILURE CLASS IT ADDRESSES</a:t>
+              <a:t>CANDIDATE INTERVENTION</a:t>
+            </a:r>
+            <a:endParaRPr sz="2800" b="1" i="0" dirty="0">
+              <a:solidFill>
+                <a:schemeClr val="bg1"/>
+              </a:solidFill>
+            </a:endParaRPr>
+          </a:p>
+        </p:txBody>
+      </p:sp>
+      <p:sp>
+        <p:nvSpPr>
+          <p:cNvPr id="913" name="ColumnHeading"/>
+          <p:cNvSpPr/>
+          <p:nvPr/>
+        </p:nvSpPr>
+        <p:spPr>
+          <a:xfrm>
+            <a:off x="4023360" y="1042415"/>
+            <a:ext cx="4572000" cy="274320"/>
+          </a:xfrm>
+          <a:prstGeom prst="rect">
+            <a:avLst/>
+          </a:prstGeom>
+          <a:noFill/>
+          <a:ln>
+            <a:noFill/>
+          </a:ln>
+          <a:effectLst/>
+        </p:spPr>
+        <p:style>
+          <a:lnRef idx="1">
+            <a:schemeClr val="accent1"/>
+          </a:lnRef>
+          <a:fillRef idx="3">
+            <a:schemeClr val="accent1"/>
+          </a:fillRef>
+          <a:effectRef idx="2">
+            <a:schemeClr val="accent1"/>
+          </a:effectRef>
+          <a:fontRef idx="minor">
+            <a:schemeClr val="lt1"/>
+          </a:fontRef>
+        </p:style>
+        <p:txBody>
+          <a:bodyPr wrap="square" lIns="27432" tIns="22860" rIns="27432" bIns="22860" rtlCol="0" anchor="ctr"/>
+          <a:lstStyle/>
+          <a:p>
+            <a:pPr algn="ctr"/>
+            <a:r>
+              <a:rPr lang="en-US" sz="1400" b="1" i="0" dirty="0">
+                <a:solidFill>
+                  <a:schemeClr val="bg1"/>
+                </a:solidFill>
+              </a:rPr>
+              <a:t>FAILURE CLASS ADDRESSED</a:t>
             </a:r>
             <a:endParaRPr sz="2800" b="1" i="0" dirty="0">
               <a:solidFill>
@@ -18998,7 +19053,7 @@
           <a:p>
             <a:pPr algn="ctr"/>
             <a:r>
-              <a:rPr lang="en-US" sz="2800" b="1" i="0" dirty="0">
+              <a:rPr lang="en-US" sz="2000" b="1" i="0" dirty="0">
                 <a:solidFill>
                   <a:schemeClr val="bg1"/>
                 </a:solidFill>
@@ -19229,14 +19284,14 @@
       </p:sp>
       <p:sp>
         <p:nvSpPr>
-          <p:cNvPr id="913" name="GroupLabel"/>
+          <p:cNvPr id="913" name="ColumnHeading"/>
           <p:cNvSpPr/>
           <p:nvPr/>
         </p:nvSpPr>
         <p:spPr>
           <a:xfrm>
             <a:off x="731520" y="1042415"/>
-            <a:ext cx="7863840" cy="237744"/>
+            <a:ext cx="2926080" cy="274320"/>
           </a:xfrm>
           <a:prstGeom prst="rect">
             <a:avLst/>
@@ -19262,17 +19317,72 @@
           </a:fontRef>
         </p:style>
         <p:txBody>
-          <a:bodyPr wrap="none" lIns="27432" tIns="22860" rIns="27432" bIns="22860" rtlCol="0" anchor="ctr"/>
+          <a:bodyPr wrap="square" lIns="27432" tIns="22860" rIns="27432" bIns="22860" rtlCol="0" anchor="ctr"/>
           <a:lstStyle/>
           <a:p>
             <a:pPr algn="ctr"/>
             <a:r>
-              <a:rPr lang="en-US" sz="2800" b="1" i="0" dirty="0">
+              <a:rPr lang="en-US" sz="1400" b="1" i="0" dirty="0">
                 <a:solidFill>
                   <a:schemeClr val="bg1"/>
                 </a:solidFill>
               </a:rPr>
-              <a:t>WHAT WAS MISSING?        →        ENCODE IT AS</a:t>
+              <a:t>WHAT WAS MISSING?</a:t>
+            </a:r>
+            <a:endParaRPr sz="2800" b="1" i="0" dirty="0">
+              <a:solidFill>
+                <a:schemeClr val="bg1"/>
+              </a:solidFill>
+            </a:endParaRPr>
+          </a:p>
+        </p:txBody>
+      </p:sp>
+      <p:sp>
+        <p:nvSpPr>
+          <p:cNvPr id="913" name="ColumnHeading"/>
+          <p:cNvSpPr/>
+          <p:nvPr/>
+        </p:nvSpPr>
+        <p:spPr>
+          <a:xfrm>
+            <a:off x="3840480" y="1042415"/>
+            <a:ext cx="4754880" cy="274320"/>
+          </a:xfrm>
+          <a:prstGeom prst="rect">
+            <a:avLst/>
+          </a:prstGeom>
+          <a:noFill/>
+          <a:ln>
+            <a:noFill/>
+          </a:ln>
+          <a:effectLst/>
+        </p:spPr>
+        <p:style>
+          <a:lnRef idx="1">
+            <a:schemeClr val="accent1"/>
+          </a:lnRef>
+          <a:fillRef idx="3">
+            <a:schemeClr val="accent1"/>
+          </a:fillRef>
+          <a:effectRef idx="2">
+            <a:schemeClr val="accent1"/>
+          </a:effectRef>
+          <a:fontRef idx="minor">
+            <a:schemeClr val="lt1"/>
+          </a:fontRef>
+        </p:style>
+        <p:txBody>
+          <a:bodyPr wrap="square" lIns="27432" tIns="22860" rIns="27432" bIns="22860" rtlCol="0" anchor="ctr"/>
+          <a:lstStyle/>
+          <a:p>
+            <a:pPr algn="ctr"/>
+            <a:r>
+              <a:rPr lang="en-US" sz="1400" b="1" i="0" dirty="0">
+                <a:solidFill>
+                  <a:schemeClr val="bg1"/>
+                </a:solidFill>
+              </a:rPr>
+              <a:t>ENCODE IT AS</a:t>
             </a:r>
             <a:endParaRPr sz="2800" b="1" i="0" dirty="0">
               <a:solidFill>
@@ -19730,8 +19840,8 @@
         </p:nvSpPr>
         <p:spPr>
           <a:xfrm>
-            <a:off x="274320" y="5897880"/>
-            <a:ext cx="8595360" cy="566928"/>
+            <a:off x="274320" y="5943600"/>
+            <a:ext cx="8595360" cy="658368"/>
           </a:xfrm>
           <a:prstGeom prst="rect">
             <a:avLst/>
@@ -19762,7 +19872,7 @@
           <a:p>
             <a:pPr algn="ctr"/>
             <a:r>
-              <a:rPr lang="en-US" sz="2000" b="1" i="1" dirty="0">
+              <a:rPr lang="en-US" sz="2800" b="1" i="1" dirty="0">
                 <a:solidFill>
                   <a:schemeClr val="bg1"/>
                 </a:solidFill>
@@ -19785,7 +19895,7 @@
         </p:nvSpPr>
         <p:spPr>
           <a:xfrm>
-            <a:off x="411480" y="5193792"/>
+            <a:off x="411480" y="5029200"/>
             <a:ext cx="8321040" cy="566928"/>
           </a:xfrm>
           <a:prstGeom prst="rect">

--- a/course/lectures/act-2-delegation-and-control/04-failure-aware-engineering/2-4-Failure-Aware-Engineering.pptx
+++ b/course/lectures/act-2-delegation-and-control/04-failure-aware-engineering/2-4-Failure-Aware-Engineering.pptx
@@ -5,43 +5,43 @@
     <p:sldMasterId id="2147483708" r:id="rId1"/>
   </p:sldMasterIdLst>
   <p:notesMasterIdLst>
-    <p:notesMasterId r:id="rId42"/>
+    <p:notesMasterId r:id="rId36"/>
   </p:notesMasterIdLst>
   <p:sldIdLst>
     <p:sldId id="256" r:id="rId2"/>
     <p:sldId id="296" r:id="rId3"/>
-    <p:sldId id="299" r:id="rId38"/>
-    <p:sldId id="257" r:id="rId4"/>
-    <p:sldId id="258" r:id="rId5"/>
-    <p:sldId id="294" r:id="rId6"/>
-    <p:sldId id="259" r:id="rId7"/>
-    <p:sldId id="260" r:id="rId8"/>
+    <p:sldId id="299" r:id="rId4"/>
+    <p:sldId id="257" r:id="rId5"/>
+    <p:sldId id="258" r:id="rId6"/>
+    <p:sldId id="294" r:id="rId7"/>
+    <p:sldId id="259" r:id="rId8"/>
+    <p:sldId id="260" r:id="rId9"/>
     <p:sldId id="263" r:id="rId10"/>
     <p:sldId id="264" r:id="rId11"/>
     <p:sldId id="265" r:id="rId12"/>
     <p:sldId id="266" r:id="rId13"/>
-    <p:sldId id="268" r:id="rId15"/>
-    <p:sldId id="269" r:id="rId16"/>
-    <p:sldId id="270" r:id="rId17"/>
-    <p:sldId id="271" r:id="rId18"/>
-    <p:sldId id="272" r:id="rId19"/>
-    <p:sldId id="273" r:id="rId20"/>
-    <p:sldId id="274" r:id="rId21"/>
-    <p:sldId id="300" r:id="rId35"/>
+    <p:sldId id="268" r:id="rId14"/>
+    <p:sldId id="269" r:id="rId15"/>
+    <p:sldId id="270" r:id="rId16"/>
+    <p:sldId id="271" r:id="rId17"/>
+    <p:sldId id="272" r:id="rId18"/>
+    <p:sldId id="273" r:id="rId19"/>
+    <p:sldId id="274" r:id="rId20"/>
+    <p:sldId id="300" r:id="rId21"/>
     <p:sldId id="295" r:id="rId22"/>
-    <p:sldId id="276" r:id="rId24"/>
-    <p:sldId id="275" r:id="rId23"/>
-    <p:sldId id="280" r:id="rId28"/>
-    <p:sldId id="282" r:id="rId30"/>
-    <p:sldId id="284" r:id="rId32"/>
-    <p:sldId id="283" r:id="rId31"/>
+    <p:sldId id="276" r:id="rId23"/>
+    <p:sldId id="275" r:id="rId24"/>
+    <p:sldId id="280" r:id="rId25"/>
+    <p:sldId id="282" r:id="rId26"/>
+    <p:sldId id="284" r:id="rId27"/>
+    <p:sldId id="283" r:id="rId28"/>
     <p:sldId id="301" r:id="rId29"/>
-    <p:sldId id="285" r:id="rId33"/>
-    <p:sldId id="286" r:id="rId34"/>
-    <p:sldId id="297" r:id="rId40"/>
-    <p:sldId id="298" r:id="rId39"/>
-    <p:sldId id="288" r:id="rId36"/>
-    <p:sldId id="289" r:id="rId37"/>
+    <p:sldId id="285" r:id="rId30"/>
+    <p:sldId id="286" r:id="rId31"/>
+    <p:sldId id="297" r:id="rId32"/>
+    <p:sldId id="298" r:id="rId33"/>
+    <p:sldId id="288" r:id="rId34"/>
+    <p:sldId id="289" r:id="rId35"/>
   </p:sldIdLst>
   <p:sldSz cx="9144000" cy="6858000" type="screen4x3"/>
   <p:notesSz cx="6858000" cy="9144000"/>
@@ -232,7 +232,7 @@
           </a:lstStyle>
           <a:p>
             <a:fld id="{27E8B4C4-0720-F64E-9EEE-9472CF165DC6}" type="datetimeFigureOut">
-              <a:t>10/8/26</a:t>
+              <a:t>10/15/26</a:t>
             </a:fld>
             <a:endParaRPr lang="en-US"/>
           </a:p>
@@ -811,10 +811,97 @@
               <a:t>- Four causal models follow; each will be tested against the story.</a:t>
             </a:r>
           </a:p>
-          <a:p/>
+          <a:p>
+            <a:endParaRPr/>
+          </a:p>
           <a:p>
             <a:r>
               <a:t>COLLECT LIVE HERE (folded in from its own slide): ask the room what caused the Volkswagen failure and capture answers on the board before advancing. The four theories that follow are the frames their answers will fall into.</a:t>
+            </a:r>
+          </a:p>
+        </p:txBody>
+      </p:sp>
+      <p:sp>
+        <p:nvSpPr>
+          <p:cNvPr id="4" name="Slide Number Placeholder 3"/>
+          <p:cNvSpPr>
+            <a:spLocks noGrp="1"/>
+          </p:cNvSpPr>
+          <p:nvPr>
+            <p:ph type="sldNum" sz="quarter" idx="5"/>
+          </p:nvPr>
+        </p:nvSpPr>
+        <p:spPr/>
+      </p:sp>
+    </p:spTree>
+  </p:cSld>
+  <p:clrMapOvr>
+    <a:masterClrMapping/>
+  </p:clrMapOvr>
+</p:notes>
+</file>
+
+<file path=ppt/notesSlides/notesSlide13.xml><?xml version="1.0" encoding="utf-8"?>
+<p:notes xmlns:a="http://schemas.openxmlformats.org/drawingml/2006/main" xmlns:r="http://schemas.openxmlformats.org/officeDocument/2006/relationships" xmlns:p="http://schemas.openxmlformats.org/presentationml/2006/main">
+  <p:cSld>
+    <p:spTree>
+      <p:nvGrpSpPr>
+        <p:cNvPr id="1" name=""/>
+        <p:cNvGrpSpPr/>
+        <p:nvPr/>
+      </p:nvGrpSpPr>
+      <p:grpSpPr>
+        <a:xfrm>
+          <a:off x="0" y="0"/>
+          <a:ext cx="0" cy="0"/>
+          <a:chOff x="0" y="0"/>
+          <a:chExt cx="0" cy="0"/>
+        </a:xfrm>
+      </p:grpSpPr>
+      <p:sp>
+        <p:nvSpPr>
+          <p:cNvPr id="2" name="Slide Image Placeholder 1"/>
+          <p:cNvSpPr>
+            <a:spLocks noGrp="1" noRot="1" noChangeAspect="1"/>
+          </p:cNvSpPr>
+          <p:nvPr>
+            <p:ph type="sldImg" idx="2"/>
+          </p:nvPr>
+        </p:nvSpPr>
+        <p:spPr/>
+      </p:sp>
+      <p:sp>
+        <p:nvSpPr>
+          <p:cNvPr id="3" name="Notes Placeholder 2"/>
+          <p:cNvSpPr>
+            <a:spLocks noGrp="1"/>
+          </p:cNvSpPr>
+          <p:nvPr>
+            <p:ph type="body" sz="quarter" idx="3"/>
+          </p:nvPr>
+        </p:nvSpPr>
+        <p:spPr/>
+        <p:txBody>
+          <a:bodyPr/>
+          <a:lstStyle/>
+          <a:p>
+            <a:r>
+              <a:t>TIMING: 1 minute - keep this fast (30-45 seconds of talk).</a:t>
+            </a:r>
+          </a:p>
+          <a:p>
+            <a:r>
+              <a:t>- The narrowest causal boundary: an individual acted, the action produced the outcome.</a:t>
+            </a:r>
+          </a:p>
+          <a:p>
+            <a:r>
+              <a:t>- Test it against the story: objections, escalation, authorization, delegation to IAV, year-after-year certification. One individual does not account for that.</a:t>
+            </a:r>
+          </a:p>
+          <a:p>
+            <a:r>
+              <a:t>- "Narrow" is not "useless": there can be several interventions at this level, but they all address the individual.</a:t>
             </a:r>
           </a:p>
         </p:txBody>
@@ -889,17 +976,12 @@
           </a:p>
           <a:p>
             <a:r>
-              <a:t>- The narrowest causal boundary: an individual acted, the action produced the outcome.</a:t>
-            </a:r>
-          </a:p>
-          <a:p>
-            <a:r>
-              <a:t>- Test it against the story: objections, escalation, authorization, delegation to IAV, year-after-year certification. One individual does not account for that.</a:t>
-            </a:r>
-          </a:p>
-          <a:p>
-            <a:r>
-              <a:t>- "Narrow" is not "useless": there can be several interventions at this level, but they all address the individual.</a:t>
+              <a:t>- Layered defenses, each imperfect; the accident traverses aligned holes.</a:t>
+            </a:r>
+          </a:p>
+          <a:p>
+            <a:r>
+              <a:t>- The causal boundary widens: not just the act, but the state of every defense it passed through. Test against the story: which defenses existed, and where were the holes?</a:t>
             </a:r>
           </a:p>
         </p:txBody>
@@ -974,12 +1056,12 @@
           </a:p>
           <a:p>
             <a:r>
-              <a:t>- Layered defenses, each imperfect; the accident traverses aligned holes.</a:t>
-            </a:r>
-          </a:p>
-          <a:p>
-            <a:r>
-              <a:t>- The causal boundary widens: not just the act, but the state of every defense it passed through. Test against the story: which defenses existed, and where were the holes?</a:t>
+              <a:t>- The causal story moves up a level: conditions -&gt; behavior -&gt; outcome.</a:t>
+            </a:r>
+          </a:p>
+          <a:p>
+            <a:r>
+              <a:t>- Test against the story: what conditions (authority, incentives, schedule, ownership) sustained the same result model year after model year?</a:t>
             </a:r>
           </a:p>
         </p:txBody>
@@ -1049,17 +1131,22 @@
           <a:lstStyle/>
           <a:p>
             <a:r>
-              <a:t>TIMING: 1 minute - keep this fast (30-45 seconds of talk).</a:t>
-            </a:r>
-          </a:p>
-          <a:p>
-            <a:r>
-              <a:t>- The causal story moves up a level: conditions -&gt; behavior -&gt; outcome.</a:t>
-            </a:r>
-          </a:p>
-          <a:p>
-            <a:r>
-              <a:t>- Test against the story: what conditions (authority, incentives, schedule, ownership) sustained the same result model year after model year?</a:t>
+              <a:t>TIMING: 2 minutes</a:t>
+            </a:r>
+          </a:p>
+          <a:p>
+            <a:r>
+              <a:t>- A systems-theoretic account: constraints flow down, feedback flows up, from regulators through the organization and engineering to the operating process.</a:t>
+            </a:r>
+          </a:p>
+          <a:p>
+            <a:r>
+              <a:t>- The control structure crosses company boundaries: Bosch supplies the engine-control capability into the engineering process, and Volkswagen delegated engineering work to IAV. A STAMP model drawn inside one organization's walls misses the control relationships that crossed them - and in this case, that is where much of the action was.</a:t>
+            </a:r>
+          </a:p>
+          <a:p>
+            <a:r>
+              <a:t>- Present it seriously - it is a modeling discipline, not a punchline. The cost arrives on the next slide: breadth demands evidence and authority.</a:t>
             </a:r>
           </a:p>
         </p:txBody>
@@ -1129,22 +1216,17 @@
           <a:lstStyle/>
           <a:p>
             <a:r>
-              <a:t>TIMING: 2 minutes</a:t>
-            </a:r>
-          </a:p>
-          <a:p>
-            <a:r>
-              <a:t>- A systems-theoretic account: constraints flow down, feedback flows up, from regulators through the organization and engineering to the operating process.</a:t>
-            </a:r>
-          </a:p>
-          <a:p>
-            <a:r>
-              <a:t>- The control structure crosses company boundaries: Bosch supplies the engine-control capability into the engineering process, and Volkswagen delegated engineering work to IAV. A STAMP model drawn inside one organization's walls misses the control relationships that crossed them - and in this case, that is where much of the action was.</a:t>
-            </a:r>
-          </a:p>
-          <a:p>
-            <a:r>
-              <a:t>- Present it seriously - it is a modeling discipline, not a punchline. The cost arrives on the next slide: breadth demands evidence and authority.</a:t>
+              <a:t>TIMING: 1-2 minutes</a:t>
+            </a:r>
+          </a:p>
+          <a:p>
+            <a:r>
+              <a:t>- The axis is causal boundary, not completeness: each model REPRESENTS more structure than the last; none is automatically better.</a:t>
+            </a:r>
+          </a:p>
+          <a:p>
+            <a:r>
+              <a:t>- Broader models expose more relationships - and demand more evidence and more authority to act on what they expose.</a:t>
             </a:r>
           </a:p>
         </p:txBody>
@@ -1214,17 +1296,22 @@
           <a:lstStyle/>
           <a:p>
             <a:r>
-              <a:t>TIMING: 1-2 minutes</a:t>
-            </a:r>
-          </a:p>
-          <a:p>
-            <a:r>
-              <a:t>- The axis is causal boundary, not completeness: each model REPRESENTS more structure than the last; none is automatically better.</a:t>
-            </a:r>
-          </a:p>
-          <a:p>
-            <a:r>
-              <a:t>- Broader models expose more relationships - and demand more evidence and more authority to act on what they expose.</a:t>
+              <a:t>TIMING: 2 minutes</a:t>
+            </a:r>
+          </a:p>
+          <a:p>
+            <a:r>
+              <a:t>- The locus of control is the criterion, not the goal: model far enough to reach the decisions that can change the outcome.</a:t>
+            </a:r>
+          </a:p>
+          <a:p>
+            <a:r>
+              <a:t>- QUALIFICATION (carry this verbally): a relevant cause can lie outside your authority. Do not erase it - escalate it, compensate for it, or identify it as the reason a local fix is insufficient.</a:t>
+            </a:r>
+          </a:p>
+          <a:p>
+            <a:r>
+              <a:t>- Connect back to the student answers from the opening of this section: each answer was implicitly one of these models.</a:t>
             </a:r>
           </a:p>
         </p:txBody>
@@ -1294,22 +1381,12 @@
           <a:lstStyle/>
           <a:p>
             <a:r>
-              <a:t>TIMING: 2 minutes</a:t>
-            </a:r>
-          </a:p>
-          <a:p>
-            <a:r>
-              <a:t>- The locus of control is the criterion, not the goal: model far enough to reach the decisions that can change the outcome.</a:t>
-            </a:r>
-          </a:p>
-          <a:p>
-            <a:r>
-              <a:t>- QUALIFICATION (carry this verbally): a relevant cause can lie outside your authority. Do not erase it - escalate it, compensate for it, or identify it as the reason a local fix is insufficient.</a:t>
-            </a:r>
-          </a:p>
-          <a:p>
-            <a:r>
-              <a:t>- Connect back to the student answers from the opening of this section: each answer was implicitly one of these models.</a:t>
+              <a:t>TIMING: &lt;1 minute</a:t>
+            </a:r>
+          </a:p>
+          <a:p>
+            <a:r>
+              <a:t>- The second half converges on governance conversion; diagnosis comes first.</a:t>
             </a:r>
           </a:p>
         </p:txBody>
@@ -1476,12 +1553,22 @@
           <a:lstStyle/>
           <a:p>
             <a:r>
-              <a:t>TIMING: &lt;1 minute</a:t>
-            </a:r>
-          </a:p>
-          <a:p>
-            <a:r>
-              <a:t>- The second half converges on governance conversion; diagnosis comes first.</a:t>
+              <a:t>TIMING: 45 seconds. Let them READ it.</a:t>
+            </a:r>
+          </a:p>
+          <a:p>
+            <a:r>
+              <a:t>- Dieselgate is a deception case. This one is NOT, and students will try to make it one. The system may have been operating exactly as designed.</a:t>
+            </a:r>
+          </a:p>
+          <a:p>
+            <a:r>
+              <a:t>- Be careful with the causal claim: the research was correlational and did not establish that the product caused the reported harms. Overstating it turns an engineering question into a morality verdict and loses the lesson.</a:t>
+            </a:r>
+          </a:p>
+          <a:p>
+            <a:r>
+              <a:t>- The engineering question is the last sentence: how should an organization interpret consequential evidence about a system working as designed?</a:t>
             </a:r>
           </a:p>
         </p:txBody>
@@ -1574,7 +1661,9 @@
               <a:t>- PAUSE on the footer question. This case is intentionally harder than Volkswagen.</a:t>
             </a:r>
           </a:p>
-          <a:p/>
+          <a:p>
+            <a:endParaRPr/>
+          </a:p>
           <a:p>
             <a:r>
               <a:t>WHAT THE RESEARCH ACTUALLY REPORTED (students will not know the controversy): Instagram's own internal research, later reported publicly, examined relationships between Instagram use and teen well-being. Among teenagers who reported body-image concerns, a substantial share associated those feelings with Instagram use; smaller but non-trivial shares linked the product to more serious harms. The findings were correlational and did not establish that the product caused the harm. What makes it an ENGINEERING case is the combination: the company had measured a consequential outcome, the system was behaving as designed, and the question was whether the objectives the system optimized were the right ones. Be careful not to overstate the causal claim — the exercise is about which failure model you would apply and what evidence you would still need.</a:t>
@@ -1647,28 +1736,17 @@
           <a:lstStyle/>
           <a:p>
             <a:r>
-              <a:t>TIMING: 2-3 minutes</a:t>
-            </a:r>
-          </a:p>
-          <a:p>
-            <a:r>
-              <a:t>- Second and last use of the exact question "What failed?" - now against a fresh case the students have not already diagnosed.</a:t>
-            </a:r>
-          </a:p>
-          <a:p>
-            <a:r>
-              <a:t>- BUILD (apply by hand in PowerPoint; the build tool cannot author animations): reveal BOTTOM-UP, one level + its question at a time: IMPLEMENTATION -&gt; DESIGN -&gt; ARCHITECTURE -&gt; SPECIFICATION -&gt; REQUIREMENTS. Do not show all five questions at once; this static composite is the final state.</a:t>
-            </a:r>
-          </a:p>
-          <a:p>
-            <a:r>
-              <a:t>- These are hypotheses for students to investigate, not established findings about Facebook's engineering process. Keep every level a question.</a:t>
-            </a:r>
-          </a:p>
-          <a:p/>
-          <a:p>
-            <a:r>
-              <a:t>RESIDUAL UNCERTAINTY (carry verbally): Every validation accepts residual uncertainty. An adverse outcome may occur within that uncertainty without making the earlier judgment unreasonable.</a:t>
+              <a:t>TIMING: 1-2 minutes</a:t>
+            </a:r>
+          </a:p>
+          <a:p>
+            <a:r>
+              <a:t>- A single outcome rarely maps to a single decision; the diagnosis may implicate several at once.</a:t>
+            </a:r>
+          </a:p>
+          <a:p>
+            <a:r>
+              <a:t>- The case is visible AS QUESTIONS, not accusations. Do NOT assert that engagement optimization caused harm - no source supports that specific causal statement. Each question is a direction a diagnosis could take.</a:t>
             </a:r>
           </a:p>
         </p:txBody>
@@ -1738,17 +1816,30 @@
           <a:lstStyle/>
           <a:p>
             <a:r>
-              <a:t>TIMING: 1-2 minutes</a:t>
-            </a:r>
-          </a:p>
-          <a:p>
-            <a:r>
-              <a:t>- A single outcome rarely maps to a single decision; the diagnosis may implicate several at once.</a:t>
-            </a:r>
-          </a:p>
-          <a:p>
-            <a:r>
-              <a:t>- The case is visible AS QUESTIONS, not accusations. Do NOT assert that engagement optimization caused harm - no source supports that specific causal statement. Each question is a direction a diagnosis could take.</a:t>
+              <a:t>TIMING: 2-3 minutes</a:t>
+            </a:r>
+          </a:p>
+          <a:p>
+            <a:r>
+              <a:t>- Second and last use of the exact question "What failed?" - now against a fresh case the students have not already diagnosed.</a:t>
+            </a:r>
+          </a:p>
+          <a:p>
+            <a:r>
+              <a:t>- BUILD (apply by hand in PowerPoint; the build tool cannot author animations): reveal BOTTOM-UP, one level + its question at a time: IMPLEMENTATION -&gt; DESIGN -&gt; ARCHITECTURE -&gt; SPECIFICATION -&gt; REQUIREMENTS. Do not show all five questions at once; this static composite is the final state.</a:t>
+            </a:r>
+          </a:p>
+          <a:p>
+            <a:r>
+              <a:t>- These are hypotheses for students to investigate, not established findings about Facebook's engineering process. Keep every level a question.</a:t>
+            </a:r>
+          </a:p>
+          <a:p>
+            <a:endParaRPr/>
+          </a:p>
+          <a:p>
+            <a:r>
+              <a:t>RESIDUAL UNCERTAINTY (carry verbally): Every validation accepts residual uncertainty. An adverse outcome may occur within that uncertainty without making the earlier judgment unreasonable.</a:t>
             </a:r>
           </a:p>
         </p:txBody>
@@ -1774,7 +1865,7 @@
 </file>
 
 <file path=ppt/notesSlides/notesSlide24.xml><?xml version="1.0" encoding="utf-8"?>
-<p:notes xmlns:a="http://schemas.openxmlformats.org/drawingml/2006/main" xmlns:p="http://schemas.openxmlformats.org/presentationml/2006/main" xmlns:r="http://schemas.openxmlformats.org/officeDocument/2006/relationships">
+<p:notes xmlns:a="http://schemas.openxmlformats.org/drawingml/2006/main" xmlns:r="http://schemas.openxmlformats.org/officeDocument/2006/relationships" xmlns:p="http://schemas.openxmlformats.org/presentationml/2006/main">
   <p:cSld>
     <p:spTree>
       <p:nvGrpSpPr>
@@ -1794,7 +1885,7 @@
         <p:nvSpPr>
           <p:cNvPr id="2" name="Slide Image Placeholder 1"/>
           <p:cNvSpPr>
-            <a:spLocks noGrp="1"/>
+            <a:spLocks noGrp="1" noRot="1" noChangeAspect="1"/>
           </p:cNvSpPr>
           <p:nvPr>
             <p:ph type="sldImg" idx="2"/>
@@ -1809,7 +1900,7 @@
             <a:spLocks noGrp="1"/>
           </p:cNvSpPr>
           <p:nvPr>
-            <p:ph type="body" idx="3" sz="quarter"/>
+            <p:ph type="body" sz="quarter" idx="3"/>
           </p:nvPr>
         </p:nvSpPr>
         <p:spPr/>
@@ -1818,22 +1909,12 @@
           <a:lstStyle/>
           <a:p>
             <a:r>
-              <a:t>TIMING: 45 seconds. Let them READ it.</a:t>
-            </a:r>
-          </a:p>
-          <a:p>
-            <a:r>
-              <a:t>- Dieselgate is a deception case. This one is NOT, and students will try to make it one. The system may have been operating exactly as designed.</a:t>
-            </a:r>
-          </a:p>
-          <a:p>
-            <a:r>
-              <a:t>- Be careful with the causal claim: the research was correlational and did not establish that the product caused the reported harms. Overstating it turns an engineering question into a morality verdict and loses the lesson.</a:t>
-            </a:r>
-          </a:p>
-          <a:p>
-            <a:r>
-              <a:t>- The engineering question is the last sentence: how should an organization interpret consequential evidence about a system working as designed?</a:t>
+              <a:t>TIMING: &lt;1 minute</a:t>
+            </a:r>
+          </a:p>
+          <a:p>
+            <a:r>
+              <a:t>- From diagnosis to knowledge: the failure is evidence; it must be analyzed into a lesson before it can be reused.</a:t>
             </a:r>
           </a:p>
         </p:txBody>
@@ -1845,7 +1926,7 @@
             <a:spLocks noGrp="1"/>
           </p:cNvSpPr>
           <p:nvPr>
-            <p:ph type="sldNum" idx="5" sz="quarter"/>
+            <p:ph type="sldNum" sz="quarter" idx="5"/>
           </p:nvPr>
         </p:nvSpPr>
         <p:spPr/>
@@ -1859,7 +1940,7 @@
 </file>
 
 <file path=ppt/notesSlides/notesSlide25.xml><?xml version="1.0" encoding="utf-8"?>
-<p:notes xmlns:a="http://schemas.openxmlformats.org/drawingml/2006/main" xmlns:p="http://schemas.openxmlformats.org/presentationml/2006/main" xmlns:r="http://schemas.openxmlformats.org/officeDocument/2006/relationships">
+<p:notes xmlns:a="http://schemas.openxmlformats.org/drawingml/2006/main" xmlns:r="http://schemas.openxmlformats.org/officeDocument/2006/relationships" xmlns:p="http://schemas.openxmlformats.org/presentationml/2006/main">
   <p:cSld>
     <p:spTree>
       <p:nvGrpSpPr>
@@ -1879,7 +1960,7 @@
         <p:nvSpPr>
           <p:cNvPr id="2" name="Slide Image Placeholder 1"/>
           <p:cNvSpPr>
-            <a:spLocks noGrp="1"/>
+            <a:spLocks noGrp="1" noRot="1" noChangeAspect="1"/>
           </p:cNvSpPr>
           <p:nvPr>
             <p:ph type="sldImg" idx="2"/>
@@ -1894,7 +1975,7 @@
             <a:spLocks noGrp="1"/>
           </p:cNvSpPr>
           <p:nvPr>
-            <p:ph type="body" idx="3" sz="quarter"/>
+            <p:ph type="body" sz="quarter" idx="3"/>
           </p:nvPr>
         </p:nvSpPr>
         <p:spPr/>
@@ -1903,22 +1984,32 @@
           <a:lstStyle/>
           <a:p>
             <a:r>
-              <a:t>TIMING: 45 seconds. Let them READ it — do not narrate it.</a:t>
-            </a:r>
-          </a:p>
-          <a:p>
-            <a:r>
-              <a:t>- Purpose: students meet the regulatory change on the next slide without knowing what story they are entering. This establishes the situation and the observed outcome.</a:t>
-            </a:r>
-          </a:p>
-          <a:p>
-            <a:r>
-              <a:t>- It deliberately does NOT explain WHY it happened. That is the whole point of the next eight slides and of the four theories after them.</a:t>
-            </a:r>
-          </a:p>
-          <a:p>
-            <a:r>
-              <a:t>- If asked 'who is to blame' here, defer it. The lecture's argument is that the answer depends on which causal theory you adopt.</a:t>
+              <a:t>TIMING: 3 minutes. THE WORKED EXAMPLE STARTS HERE and runs to the close.</a:t>
+            </a:r>
+          </a:p>
+          <a:p>
+            <a:r>
+              <a:t>- The incident: a lease timeout let two background workers both believe they owned the same job, so the job was processed twice.</a:t>
+            </a:r>
+          </a:p>
+          <a:p>
+            <a:r>
+              <a:t>- Row 1 restates the observation — true, and it generalizes to nothing.</a:t>
+            </a:r>
+          </a:p>
+          <a:p>
+            <a:r>
+              <a:t>- Row 2 is the engineering judgment. Note precisely what it does NOT say: an expired lease does not by itself cause duplicate processing. The mechanism is a STALE WORKER acting after another worker has acquired ownership. That is the thing an obligation can prevent, and it is exactly what the lease-generation invariant on the next slides enforces.</a:t>
+            </a:r>
+          </a:p>
+          <a:p>
+            <a:r>
+              <a:t>- Row 3 is a sweeping claim the evidence cannot carry. Students reach for it because it sounds responsible — name that when it happens.</a:t>
+            </a:r>
+          </a:p>
+          <a:p>
+            <a:r>
+              <a:t>- The skill is asking which causal MECHANISM can recur, not whether a sentence sounds appropriately cautious.</a:t>
             </a:r>
           </a:p>
         </p:txBody>
@@ -1930,7 +2021,7 @@
             <a:spLocks noGrp="1"/>
           </p:cNvSpPr>
           <p:nvPr>
-            <p:ph type="sldNum" idx="5" sz="quarter"/>
+            <p:ph type="sldNum" sz="quarter" idx="5"/>
           </p:nvPr>
         </p:nvSpPr>
         <p:spPr/>
@@ -1944,7 +2035,7 @@
 </file>
 
 <file path=ppt/notesSlides/notesSlide26.xml><?xml version="1.0" encoding="utf-8"?>
-<p:notes xmlns:a="http://schemas.openxmlformats.org/drawingml/2006/main" xmlns:p="http://schemas.openxmlformats.org/presentationml/2006/main" xmlns:r="http://schemas.openxmlformats.org/officeDocument/2006/relationships">
+<p:notes xmlns:a="http://schemas.openxmlformats.org/drawingml/2006/main" xmlns:r="http://schemas.openxmlformats.org/officeDocument/2006/relationships" xmlns:p="http://schemas.openxmlformats.org/presentationml/2006/main">
   <p:cSld>
     <p:spTree>
       <p:nvGrpSpPr>
@@ -1964,7 +2055,7 @@
         <p:nvSpPr>
           <p:cNvPr id="2" name="Slide Image Placeholder 1"/>
           <p:cNvSpPr>
-            <a:spLocks noGrp="1"/>
+            <a:spLocks noGrp="1" noRot="1" noChangeAspect="1"/>
           </p:cNvSpPr>
           <p:nvPr>
             <p:ph type="sldImg" idx="2"/>
@@ -1979,7 +2070,7 @@
             <a:spLocks noGrp="1"/>
           </p:cNvSpPr>
           <p:nvPr>
-            <p:ph type="body" idx="3" sz="quarter"/>
+            <p:ph type="body" sz="quarter" idx="3"/>
           </p:nvPr>
         </p:nvSpPr>
         <p:spPr/>
@@ -1988,28 +2079,30 @@
           <a:lstStyle/>
           <a:p>
             <a:r>
-              <a:t>TIMING: 2 minutes.</a:t>
-            </a:r>
-          </a:p>
-          <a:p>
-            <a:r>
-              <a:t>- Same engineering obligation, different recipient. The agent receives the relevant model and constraint as part of its task context; a check evaluates the resulting change; a gate can refuse admission.</a:t>
-            </a:r>
-          </a:p>
-          <a:p>
-            <a:r>
-              <a:t>- The distinction between the human and the agent is useful rather than rhetorical. A new engineer may acquire the knowledge through mentorship, review, documentation and experience. An agent requires the relevant context to be supplied or retrieved DURING its work.</a:t>
-            </a:r>
-          </a:p>
-          <a:p>
-            <a:r>
-              <a:t>- Both benefit from controls that do not depend entirely on the recipient's memory or judgment. That is the tie back to Delegation (what context must the recipient receive?) and Alignment (what mechanism preserves the obligation?).</a:t>
-            </a:r>
-          </a:p>
-          <a:p/>
-          <a:p>
-            <a:r>
-              <a:t>KEEP EXPLICIT (established in Alignment): a validator and a gate are NOT interchangeable. A validator determines whether an obligation is satisfied; a gate controls whether work may proceed given that verdict. A validator with no gate reports; a gate with no validator blocks on nothing.</a:t>
+              <a:t>TIMING: 1-2 minutes</a:t>
+            </a:r>
+          </a:p>
+          <a:p>
+            <a:r>
+              <a:t>- The causal account changes the system; the reflective account changes the engineer.</a:t>
+            </a:r>
+          </a:p>
+          <a:p>
+            <a:r>
+              <a:t>- The reflective account is exactly what prevents "Facebook had research, therefore Facebook knew X" from collapsing evidence, interpretation, and organizational decision into one thing.</a:t>
+            </a:r>
+          </a:p>
+          <a:p>
+            <a:r>
+              <a:t>- Postmortems that stop at the causal account leave the second kind of learning on the table.</a:t>
+            </a:r>
+          </a:p>
+          <a:p>
+            <a:endParaRPr/>
+          </a:p>
+          <a:p>
+            <a:r>
+              <a:t>A postmortem carries BOTH accounts: the causal account (what sequence of events and conditions produced the failure) and the reflective account (what we believed, and how we came to believe it). Step 3 is the reflective half.</a:t>
             </a:r>
           </a:p>
         </p:txBody>
@@ -2021,7 +2114,7 @@
             <a:spLocks noGrp="1"/>
           </p:cNvSpPr>
           <p:nvPr>
-            <p:ph type="sldNum" idx="5" sz="quarter"/>
+            <p:ph type="sldNum" sz="quarter" idx="5"/>
           </p:nvPr>
         </p:nvSpPr>
         <p:spPr/>
@@ -2079,12 +2172,17 @@
           <a:lstStyle/>
           <a:p>
             <a:r>
-              <a:t>TIMING: &lt;1 minute</a:t>
-            </a:r>
-          </a:p>
-          <a:p>
-            <a:r>
-              <a:t>- From diagnosis to knowledge: the failure is evidence; it must be analyzed into a lesson before it can be reused.</a:t>
+              <a:t>TIMING: 2 minutes</a:t>
+            </a:r>
+          </a:p>
+          <a:p>
+            <a:r>
+              <a:t>- Regression test vs generalized model or control: both legitimate; they preserve different things. ASK what each catches next time, and what each misses.</a:t>
+            </a:r>
+          </a:p>
+          <a:p>
+            <a:r>
+              <a:t>- For a socio-technical outcome like the Instagram case, "regression test" is metaphorically less direct - and that is itself interesting: some lessons cannot be encoded as an ordinary software test. Sets up SYSTEM / TEAM / ENGINEER.</a:t>
             </a:r>
           </a:p>
         </p:txBody>
@@ -2110,7 +2208,7 @@
 </file>
 
 <file path=ppt/notesSlides/notesSlide28.xml><?xml version="1.0" encoding="utf-8"?>
-<p:notes xmlns:a="http://schemas.openxmlformats.org/drawingml/2006/main" xmlns:p="http://schemas.openxmlformats.org/presentationml/2006/main" xmlns:r="http://schemas.openxmlformats.org/officeDocument/2006/relationships">
+<p:notes xmlns:a="http://schemas.openxmlformats.org/drawingml/2006/main" xmlns:r="http://schemas.openxmlformats.org/officeDocument/2006/relationships" xmlns:p="http://schemas.openxmlformats.org/presentationml/2006/main">
   <p:cSld>
     <p:spTree>
       <p:nvGrpSpPr>
@@ -2130,7 +2228,7 @@
         <p:nvSpPr>
           <p:cNvPr id="2" name="Slide Image Placeholder 1"/>
           <p:cNvSpPr>
-            <a:spLocks noGrp="1"/>
+            <a:spLocks noGrp="1" noRot="1" noChangeAspect="1"/>
           </p:cNvSpPr>
           <p:nvPr>
             <p:ph type="sldImg" idx="2"/>
@@ -2145,7 +2243,7 @@
             <a:spLocks noGrp="1"/>
           </p:cNvSpPr>
           <p:nvPr>
-            <p:ph type="body" idx="3" sz="quarter"/>
+            <p:ph type="body" sz="quarter" idx="3"/>
           </p:nvPr>
         </p:nvSpPr>
         <p:spPr/>
@@ -2154,38 +2252,37 @@
           <a:lstStyle/>
           <a:p>
             <a:r>
-              <a:t>TIMING: 2-3 minutes. THE CENTERPIECE.</a:t>
-            </a:r>
-          </a:p>
-          <a:p>
-            <a:r>
-              <a:t>- Setup: a team diagnosed two workers both believing they owned the same job, and established an invariant: a worker may modify a job only while holding its current lease generation.</a:t>
-            </a:r>
-          </a:p>
-          <a:p>
-            <a:r>
-              <a:t>- The original engineers understand it. They may even have documented it. Six months later a new engineer is asked to change recovery behavior.</a:t>
-            </a:r>
-          </a:p>
-          <a:p>
-            <a:r>
-              <a:t>- ASK THE ROOM: how does that engineer learn the invariant exists?</a:t>
-            </a:r>
-          </a:p>
-          <a:p>
-            <a:r>
-              <a:t>- Deriving the lesson and DELIVERING it are different engineering problems. Preserving a lesson is not the same as ensuring future work uses it: a requirement can exist without being consulted, a model can be accurate but undiscoverable, a validator can exist without being executed, a gate can run without checking the relevant property.</a:t>
-            </a:r>
-          </a:p>
-          <a:p>
-            <a:r>
-              <a:t>- The four things the environment must supply are the four roles from Alignment: the authoritative invariant (model), its applicability to THIS work, a way to evaluate the proposed change (validator), and a mechanism that refuses admission when it is violated (gate).</a:t>
-            </a:r>
-          </a:p>
-          <a:p/>
-          <a:p>
-            <a:r>
-              <a:t>KEEP EXPLICIT (established in Alignment): a validator and a gate are NOT interchangeable. A validator determines whether an obligation is satisfied; a gate controls whether work may proceed given that verdict. A validator with no gate reports; a gate with no validator blocks on nothing.</a:t>
+              <a:t>TIMING: 3-4 minutes. THE CENTRAL ENGINEERING JUDGMENT of the section.</a:t>
+            </a:r>
+          </a:p>
+          <a:p>
+            <a:r>
+              <a:t>- The move students miss: a causal account explains how a failure occurred. It does NOT determine which future failures should be prevented, or how.</a:t>
+            </a:r>
+          </a:p>
+          <a:p>
+            <a:r>
+              <a:t>- Two different modes of reasoning. DIAGNOSIS works BACKWARD from an observed consequence to the conditions that produced it. CORRECTIVE DESIGN works FORWARD from candidate interventions to the consequences they would produce. The second is not determined by the first — that mental transition is the hard part, and it is ordinary engineering again, with new evidence.</a:t>
+            </a:r>
+          </a:p>
+          <a:p>
+            <a:r>
+              <a:t>- Walk the four rows. Row 1 may be too narrow: the same mechanism stays available elsewhere. Row 4 may be broader than necessary and constrains unrelated work. Row 3 targets the mechanism the evidence actually supports.</a:t>
+            </a:r>
+          </a:p>
+          <a:p>
+            <a:r>
+              <a:t>- Other alternatives worth raising if the room is engaged: terminate stale workers, serialize ownership transitions, or combine mechanisms. Each excludes a different class, carries different cost, and may introduce new failure modes.</a:t>
+            </a:r>
+          </a:p>
+          <a:p>
+            <a:r>
+              <a:t>- This is the same judgment they met in SPECIFICATION: which distinctions among possible behaviors must be constrained, and which may remain free? Failure analysis does not end at a cause; it reopens specification and design.</a:t>
+            </a:r>
+          </a:p>
+          <a:p>
+            <a:r>
+              <a:t>- CAREFUL with 'always prevent the class'. Some failures reveal acceptable residual uncertainty, and prevention can cost more than the consequences justify. The general principle: use failure evidence to reconsider what future behavior should be PERMITTED, PREVENTED, DETECTED, or TOLERATED. The engineer chooses not only how broadly to intervene, but what KIND of intervention is warranted.</a:t>
             </a:r>
           </a:p>
         </p:txBody>
@@ -2197,7 +2294,7 @@
             <a:spLocks noGrp="1"/>
           </p:cNvSpPr>
           <p:nvPr>
-            <p:ph type="sldNum" idx="5" sz="quarter"/>
+            <p:ph type="sldNum" sz="quarter" idx="5"/>
           </p:nvPr>
         </p:nvSpPr>
         <p:spPr/>
@@ -2255,32 +2352,17 @@
           <a:lstStyle/>
           <a:p>
             <a:r>
-              <a:t>TIMING: 3 minutes. THE WORKED EXAMPLE STARTS HERE and runs to the close.</a:t>
-            </a:r>
-          </a:p>
-          <a:p>
-            <a:r>
-              <a:t>- The incident: a lease timeout let two background workers both believe they owned the same job, so the job was processed twice.</a:t>
-            </a:r>
-          </a:p>
-          <a:p>
-            <a:r>
-              <a:t>- Row 1 restates the observation — true, and it generalizes to nothing.</a:t>
-            </a:r>
-          </a:p>
-          <a:p>
-            <a:r>
-              <a:t>- Row 2 is the engineering judgment. Note precisely what it does NOT say: an expired lease does not by itself cause duplicate processing. The mechanism is a STALE WORKER acting after another worker has acquired ownership. That is the thing an obligation can prevent, and it is exactly what the lease-generation invariant on the next slides enforces.</a:t>
-            </a:r>
-          </a:p>
-          <a:p>
-            <a:r>
-              <a:t>- Row 3 is a sweeping claim the evidence cannot carry. Students reach for it because it sounds responsible — name that when it happens.</a:t>
-            </a:r>
-          </a:p>
-          <a:p>
-            <a:r>
-              <a:t>- The skill is asking which causal MECHANISM can recur, not whether a sentence sounds appropriately cautious.</a:t>
+              <a:t>TIMING: 2 minutes</a:t>
+            </a:r>
+          </a:p>
+          <a:p>
+            <a:r>
+              <a:t>- From Engineering Knowledge: consequential knowledge migrates into requirements, specifications, architecture, models, validation, or controls when future work should inherit the lesson.</a:t>
+            </a:r>
+          </a:p>
+          <a:p>
+            <a:r>
+              <a:t>- ASK students to nominate one plausible lesson from the Instagram case and say where it should live. Different interpretations of the evidence produce different answers - which is the point.</a:t>
             </a:r>
           </a:p>
         </p:txBody>
@@ -2350,27 +2432,22 @@
           <a:lstStyle/>
           <a:p>
             <a:r>
-              <a:t>TIMING: 2 minutes</a:t>
-            </a:r>
-          </a:p>
-          <a:p>
-            <a:r>
-              <a:t>- Nothing has failed yet. The environment changed: an external obligation now changes what counts as an acceptable realization. Volkswagen and the product ambition come first; the regulation is an event in their story.</a:t>
-            </a:r>
-          </a:p>
-          <a:p>
-            <a:r>
-              <a:t>- Quietly recalls Requirements without enumerating Act I.</a:t>
-            </a:r>
-          </a:p>
-          <a:p>
-            <a:r>
-              <a:t>- CAVEAT (sourcing): EPA warns that direct Tier 1/Tier 2 comparisons are complicated by averaging and other program features; 0.07 g/mi was the Tier 2 bin to which the affected Jetta diesels were certified.</a:t>
-            </a:r>
-          </a:p>
-          <a:p>
-            <a:r>
-              <a:t>- ASK the footer question. Expected recall from Act I: requirements, specification, architecture, design, validation.</a:t>
+              <a:t>TIMING: 45 seconds. Let them READ it — do not narrate it.</a:t>
+            </a:r>
+          </a:p>
+          <a:p>
+            <a:r>
+              <a:t>- Purpose: students meet the regulatory change on the next slide without knowing what story they are entering. This establishes the situation and the observed outcome.</a:t>
+            </a:r>
+          </a:p>
+          <a:p>
+            <a:r>
+              <a:t>- It deliberately does NOT explain WHY it happened. That is the whole point of the next eight slides and of the four theories after them.</a:t>
+            </a:r>
+          </a:p>
+          <a:p>
+            <a:r>
+              <a:t>- If asked 'who is to blame' here, defer it. The lecture's argument is that the answer depends on which causal theory you adopt.</a:t>
             </a:r>
           </a:p>
         </p:txBody>
@@ -2440,17 +2517,12 @@
           <a:lstStyle/>
           <a:p>
             <a:r>
-              <a:t>TIMING: 2 minutes</a:t>
-            </a:r>
-          </a:p>
-          <a:p>
-            <a:r>
-              <a:t>- Regression test vs generalized model or control: both legitimate; they preserve different things. ASK what each catches next time, and what each misses.</a:t>
-            </a:r>
-          </a:p>
-          <a:p>
-            <a:r>
-              <a:t>- For a socio-technical outcome like the Instagram case, "regression test" is metaphorically less direct - and that is itself interesting: some lessons cannot be encoded as an ordinary software test. Sets up SYSTEM / TEAM / ENGINEER.</a:t>
+              <a:t>TIMING: &lt;1 minute</a:t>
+            </a:r>
+          </a:p>
+          <a:p>
+            <a:r>
+              <a:t>- The climax of the unit: from lessons engineers remember to structure the environment enforces.</a:t>
             </a:r>
           </a:p>
         </p:txBody>
@@ -2520,28 +2592,40 @@
           <a:lstStyle/>
           <a:p>
             <a:r>
-              <a:t>TIMING: 1-2 minutes</a:t>
-            </a:r>
-          </a:p>
-          <a:p>
-            <a:r>
-              <a:t>- The causal account changes the system; the reflective account changes the engineer.</a:t>
-            </a:r>
-          </a:p>
-          <a:p>
-            <a:r>
-              <a:t>- The reflective account is exactly what prevents "Facebook had research, therefore Facebook knew X" from collapsing evidence, interpretation, and organizational decision into one thing.</a:t>
-            </a:r>
-          </a:p>
-          <a:p>
-            <a:r>
-              <a:t>- Postmortems that stop at the causal account leave the second kind of learning on the table.</a:t>
-            </a:r>
-          </a:p>
-          <a:p/>
-          <a:p>
-            <a:r>
-              <a:t>A postmortem carries BOTH accounts: the causal account (what sequence of events and conditions produced the failure) and the reflective account (what we believed, and how we came to believe it). Step 3 is the reflective half.</a:t>
+              <a:t>TIMING: 2-3 minutes. THE CENTERPIECE.</a:t>
+            </a:r>
+          </a:p>
+          <a:p>
+            <a:r>
+              <a:t>- Setup: a team diagnosed two workers both believing they owned the same job, and established an invariant: a worker may modify a job only while holding its current lease generation.</a:t>
+            </a:r>
+          </a:p>
+          <a:p>
+            <a:r>
+              <a:t>- The original engineers understand it. They may even have documented it. Six months later a new engineer is asked to change recovery behavior.</a:t>
+            </a:r>
+          </a:p>
+          <a:p>
+            <a:r>
+              <a:t>- ASK THE ROOM: how does that engineer learn the invariant exists?</a:t>
+            </a:r>
+          </a:p>
+          <a:p>
+            <a:r>
+              <a:t>- Deriving the lesson and DELIVERING it are different engineering problems. Preserving a lesson is not the same as ensuring future work uses it: a requirement can exist without being consulted, a model can be accurate but undiscoverable, a validator can exist without being executed, a gate can run without checking the relevant property.</a:t>
+            </a:r>
+          </a:p>
+          <a:p>
+            <a:r>
+              <a:t>- The four things the environment must supply are the four roles from Alignment: the authoritative invariant (model), its applicability to THIS work, a way to evaluate the proposed change (validator), and a mechanism that refuses admission when it is violated (gate).</a:t>
+            </a:r>
+          </a:p>
+          <a:p>
+            <a:endParaRPr/>
+          </a:p>
+          <a:p>
+            <a:r>
+              <a:t>KEEP EXPLICIT (established in Alignment): a validator and a gate are NOT interchangeable. A validator determines whether an obligation is satisfied; a gate controls whether work may proceed given that verdict. A validator with no gate reports; a gate with no validator blocks on nothing.</a:t>
             </a:r>
           </a:p>
         </p:txBody>
@@ -2611,17 +2695,30 @@
           <a:lstStyle/>
           <a:p>
             <a:r>
-              <a:t>TIMING: 2 minutes</a:t>
-            </a:r>
-          </a:p>
-          <a:p>
-            <a:r>
-              <a:t>- From Engineering Knowledge: consequential knowledge migrates into requirements, specifications, architecture, models, validation, or controls when future work should inherit the lesson.</a:t>
-            </a:r>
-          </a:p>
-          <a:p>
-            <a:r>
-              <a:t>- ASK students to nominate one plausible lesson from the Instagram case and say where it should live. Different interpretations of the evidence produce different answers - which is the point.</a:t>
+              <a:t>TIMING: 2 minutes.</a:t>
+            </a:r>
+          </a:p>
+          <a:p>
+            <a:r>
+              <a:t>- Same engineering obligation, different recipient. The agent receives the relevant model and constraint as part of its task context; a check evaluates the resulting change; a gate can refuse admission.</a:t>
+            </a:r>
+          </a:p>
+          <a:p>
+            <a:r>
+              <a:t>- The distinction between the human and the agent is useful rather than rhetorical. A new engineer may acquire the knowledge through mentorship, review, documentation and experience. An agent requires the relevant context to be supplied or retrieved DURING its work.</a:t>
+            </a:r>
+          </a:p>
+          <a:p>
+            <a:r>
+              <a:t>- Both benefit from controls that do not depend entirely on the recipient's memory or judgment. That is the tie back to Delegation (what context must the recipient receive?) and Alignment (what mechanism preserves the obligation?).</a:t>
+            </a:r>
+          </a:p>
+          <a:p>
+            <a:endParaRPr/>
+          </a:p>
+          <a:p>
+            <a:r>
+              <a:t>KEEP EXPLICIT (established in Alignment): a validator and a gate are NOT interchangeable. A validator determines whether an obligation is satisfied; a gate controls whether work may proceed given that verdict. A validator with no gate reports; a gate with no validator blocks on nothing.</a:t>
             </a:r>
           </a:p>
         </p:txBody>
@@ -2691,12 +2788,30 @@
           <a:lstStyle/>
           <a:p>
             <a:r>
-              <a:t>TIMING: &lt;1 minute</a:t>
-            </a:r>
-          </a:p>
-          <a:p>
-            <a:r>
-              <a:t>- The climax of the unit: from lessons engineers remember to structure the environment enforces.</a:t>
+              <a:t>TIMING: 2-3 minutes.</a:t>
+            </a:r>
+          </a:p>
+          <a:p>
+            <a:r>
+              <a:t>- Five diagnostic axes, each with its own intervention: was the OBLIGATION missing (nobody committed to the property)? was its REPRESENTATION inadequate (stated only in prose)? was EVIDENCE unavailable (nothing measured it)? was EVALUATION inadequate (measured, but never checked)? was ENFORCEMENT missing (checked, but nothing refused the change)?</a:t>
+            </a:r>
+          </a:p>
+          <a:p>
+            <a:r>
+              <a:t>- The figure's own caution: a failure is NOT a request for another gate. Diagnose what was missing first — adding a gate when the real gap was representation leaves the class open.</a:t>
+            </a:r>
+          </a:p>
+          <a:p>
+            <a:r>
+              <a:t>- Run the worker incident through it: the invariant existed in a postmortem (obligation yes, representation weak), nothing evaluated it, nothing enforced it.</a:t>
+            </a:r>
+          </a:p>
+          <a:p>
+            <a:endParaRPr/>
+          </a:p>
+          <a:p>
+            <a:r>
+              <a:t>KEEP EXPLICIT (established in Alignment): a validator and a gate are NOT interchangeable. A validator determines whether an obligation is satisfied; a gate controls whether work may proceed given that verdict. A validator with no gate reports; a gate with no validator blocks on nothing.</a:t>
             </a:r>
           </a:p>
         </p:txBody>
@@ -2722,197 +2837,6 @@
 </file>
 
 <file path=ppt/notesSlides/notesSlide34.xml><?xml version="1.0" encoding="utf-8"?>
-<p:notes xmlns:a="http://schemas.openxmlformats.org/drawingml/2006/main" xmlns:p="http://schemas.openxmlformats.org/presentationml/2006/main" xmlns:r="http://schemas.openxmlformats.org/officeDocument/2006/relationships">
-  <p:cSld>
-    <p:spTree>
-      <p:nvGrpSpPr>
-        <p:cNvPr id="1" name=""/>
-        <p:cNvGrpSpPr/>
-        <p:nvPr/>
-      </p:nvGrpSpPr>
-      <p:grpSpPr>
-        <a:xfrm>
-          <a:off x="0" y="0"/>
-          <a:ext cx="0" cy="0"/>
-          <a:chOff x="0" y="0"/>
-          <a:chExt cx="0" cy="0"/>
-        </a:xfrm>
-      </p:grpSpPr>
-      <p:sp>
-        <p:nvSpPr>
-          <p:cNvPr id="2" name="Slide Image Placeholder 1"/>
-          <p:cNvSpPr>
-            <a:spLocks noGrp="1"/>
-          </p:cNvSpPr>
-          <p:nvPr>
-            <p:ph type="sldImg" idx="2"/>
-          </p:nvPr>
-        </p:nvSpPr>
-        <p:spPr/>
-      </p:sp>
-      <p:sp>
-        <p:nvSpPr>
-          <p:cNvPr id="3" name="Notes Placeholder 2"/>
-          <p:cNvSpPr>
-            <a:spLocks noGrp="1"/>
-          </p:cNvSpPr>
-          <p:nvPr>
-            <p:ph type="body" idx="3" sz="quarter"/>
-          </p:nvPr>
-        </p:nvSpPr>
-        <p:spPr/>
-        <p:txBody>
-          <a:bodyPr/>
-          <a:lstStyle/>
-          <a:p>
-            <a:r>
-              <a:t>TIMING: 3-4 minutes. THE CENTRAL ENGINEERING JUDGMENT of the section.</a:t>
-            </a:r>
-          </a:p>
-          <a:p>
-            <a:r>
-              <a:t>- The move students miss: a causal account explains how a failure occurred. It does NOT determine which future failures should be prevented, or how.</a:t>
-            </a:r>
-          </a:p>
-          <a:p>
-            <a:r>
-              <a:t>- Two different modes of reasoning. DIAGNOSIS works BACKWARD from an observed consequence to the conditions that produced it. CORRECTIVE DESIGN works FORWARD from candidate interventions to the consequences they would produce. The second is not determined by the first — that mental transition is the hard part, and it is ordinary engineering again, with new evidence.</a:t>
-            </a:r>
-          </a:p>
-          <a:p>
-            <a:r>
-              <a:t>- Walk the four rows. Row 1 may be too narrow: the same mechanism stays available elsewhere. Row 4 may be broader than necessary and constrains unrelated work. Row 3 targets the mechanism the evidence actually supports.</a:t>
-            </a:r>
-          </a:p>
-          <a:p>
-            <a:r>
-              <a:t>- Other alternatives worth raising if the room is engaged: terminate stale workers, serialize ownership transitions, or combine mechanisms. Each excludes a different class, carries different cost, and may introduce new failure modes.</a:t>
-            </a:r>
-          </a:p>
-          <a:p>
-            <a:r>
-              <a:t>- This is the same judgment they met in SPECIFICATION: which distinctions among possible behaviors must be constrained, and which may remain free? Failure analysis does not end at a cause; it reopens specification and design.</a:t>
-            </a:r>
-          </a:p>
-          <a:p>
-            <a:r>
-              <a:t>- CAREFUL with 'always prevent the class'. Some failures reveal acceptable residual uncertainty, and prevention can cost more than the consequences justify. The general principle: use failure evidence to reconsider what future behavior should be PERMITTED, PREVENTED, DETECTED, or TOLERATED. The engineer chooses not only how broadly to intervene, but what KIND of intervention is warranted.</a:t>
-            </a:r>
-          </a:p>
-        </p:txBody>
-      </p:sp>
-      <p:sp>
-        <p:nvSpPr>
-          <p:cNvPr id="4" name="Slide Number Placeholder 3"/>
-          <p:cNvSpPr>
-            <a:spLocks noGrp="1"/>
-          </p:cNvSpPr>
-          <p:nvPr>
-            <p:ph type="sldNum" idx="5" sz="quarter"/>
-          </p:nvPr>
-        </p:nvSpPr>
-        <p:spPr/>
-      </p:sp>
-    </p:spTree>
-  </p:cSld>
-  <p:clrMapOvr>
-    <a:masterClrMapping/>
-  </p:clrMapOvr>
-</p:notes>
-</file>
-
-<file path=ppt/notesSlides/notesSlide35.xml><?xml version="1.0" encoding="utf-8"?>
-<p:notes xmlns:a="http://schemas.openxmlformats.org/drawingml/2006/main" xmlns:r="http://schemas.openxmlformats.org/officeDocument/2006/relationships" xmlns:p="http://schemas.openxmlformats.org/presentationml/2006/main">
-  <p:cSld>
-    <p:spTree>
-      <p:nvGrpSpPr>
-        <p:cNvPr id="1" name=""/>
-        <p:cNvGrpSpPr/>
-        <p:nvPr/>
-      </p:nvGrpSpPr>
-      <p:grpSpPr>
-        <a:xfrm>
-          <a:off x="0" y="0"/>
-          <a:ext cx="0" cy="0"/>
-          <a:chOff x="0" y="0"/>
-          <a:chExt cx="0" cy="0"/>
-        </a:xfrm>
-      </p:grpSpPr>
-      <p:sp>
-        <p:nvSpPr>
-          <p:cNvPr id="2" name="Slide Image Placeholder 1"/>
-          <p:cNvSpPr>
-            <a:spLocks noGrp="1" noRot="1" noChangeAspect="1"/>
-          </p:cNvSpPr>
-          <p:nvPr>
-            <p:ph type="sldImg" idx="2"/>
-          </p:nvPr>
-        </p:nvSpPr>
-        <p:spPr/>
-      </p:sp>
-      <p:sp>
-        <p:nvSpPr>
-          <p:cNvPr id="3" name="Notes Placeholder 2"/>
-          <p:cNvSpPr>
-            <a:spLocks noGrp="1"/>
-          </p:cNvSpPr>
-          <p:nvPr>
-            <p:ph type="body" sz="quarter" idx="3"/>
-          </p:nvPr>
-        </p:nvSpPr>
-        <p:spPr/>
-        <p:txBody>
-          <a:bodyPr/>
-          <a:lstStyle/>
-          <a:p>
-            <a:r>
-              <a:t>TIMING: 2-3 minutes.</a:t>
-            </a:r>
-          </a:p>
-          <a:p>
-            <a:r>
-              <a:t>- Five diagnostic axes, each with its own intervention: was the OBLIGATION missing (nobody committed to the property)? was its REPRESENTATION inadequate (stated only in prose)? was EVIDENCE unavailable (nothing measured it)? was EVALUATION inadequate (measured, but never checked)? was ENFORCEMENT missing (checked, but nothing refused the change)?</a:t>
-            </a:r>
-          </a:p>
-          <a:p>
-            <a:r>
-              <a:t>- The figure's own caution: a failure is NOT a request for another gate. Diagnose what was missing first — adding a gate when the real gap was representation leaves the class open.</a:t>
-            </a:r>
-          </a:p>
-          <a:p>
-            <a:r>
-              <a:t>- Run the worker incident through it: the invariant existed in a postmortem (obligation yes, representation weak), nothing evaluated it, nothing enforced it.</a:t>
-            </a:r>
-          </a:p>
-          <a:p/>
-          <a:p>
-            <a:r>
-              <a:t>KEEP EXPLICIT (established in Alignment): a validator and a gate are NOT interchangeable. A validator determines whether an obligation is satisfied; a gate controls whether work may proceed given that verdict. A validator with no gate reports; a gate with no validator blocks on nothing.</a:t>
-            </a:r>
-          </a:p>
-        </p:txBody>
-      </p:sp>
-      <p:sp>
-        <p:nvSpPr>
-          <p:cNvPr id="4" name="Slide Number Placeholder 3"/>
-          <p:cNvSpPr>
-            <a:spLocks noGrp="1"/>
-          </p:cNvSpPr>
-          <p:nvPr>
-            <p:ph type="sldNum" sz="quarter" idx="5"/>
-          </p:nvPr>
-        </p:nvSpPr>
-        <p:spPr/>
-      </p:sp>
-    </p:spTree>
-  </p:cSld>
-  <p:clrMapOvr>
-    <a:masterClrMapping/>
-  </p:clrMapOvr>
-</p:notes>
-</file>
-
-<file path=ppt/notesSlides/notesSlide36.xml><?xml version="1.0" encoding="utf-8"?>
 <p:notes xmlns:a="http://schemas.openxmlformats.org/drawingml/2006/main" xmlns:r="http://schemas.openxmlformats.org/officeDocument/2006/relationships" xmlns:p="http://schemas.openxmlformats.org/presentationml/2006/main">
   <p:cSld>
     <p:spTree>
@@ -3047,17 +2971,22 @@
           </a:p>
           <a:p>
             <a:r>
-              <a:t>- The triangle: clean diesel = emissions + performance + customer demand, and no satisfactory point satisfying all three was found.</a:t>
-            </a:r>
-          </a:p>
-          <a:p>
-            <a:r>
-              <a:t>- ASK the footer question. Expected answers: renegotiate requirements, change architecture or design, change product attributes, abandon the market.</a:t>
-            </a:r>
-          </a:p>
-          <a:p>
-            <a:r>
-              <a:t>- The inability to satisfy current requirements IS itself engineering evidence. Pause here.</a:t>
+              <a:t>- Nothing has failed yet. The environment changed: an external obligation now changes what counts as an acceptable realization. Volkswagen and the product ambition come first; the regulation is an event in their story.</a:t>
+            </a:r>
+          </a:p>
+          <a:p>
+            <a:r>
+              <a:t>- Quietly recalls Requirements without enumerating Act I.</a:t>
+            </a:r>
+          </a:p>
+          <a:p>
+            <a:r>
+              <a:t>- CAVEAT (sourcing): EPA warns that direct Tier 1/Tier 2 comparisons are complicated by averaging and other program features; 0.07 g/mi was the Tier 2 bin to which the affected Jetta diesels were certified.</a:t>
+            </a:r>
+          </a:p>
+          <a:p>
+            <a:r>
+              <a:t>- ASK the footer question. Expected recall from Act I: requirements, specification, architecture, design, validation.</a:t>
             </a:r>
           </a:p>
         </p:txBody>
@@ -3127,32 +3056,22 @@
           <a:lstStyle/>
           <a:p>
             <a:r>
-              <a:t>TIMING: 2-3 minutes</a:t>
-            </a:r>
-          </a:p>
-          <a:p>
-            <a:r>
-              <a:t>- Bosch supplied the engine-control units and engine-management technology used in VW vehicles; such software legitimately controls fuel injection, engine behaviour and emissions systems. The Bosch settlement confirms its role as supplier of the emissions software in the affected VW vehicles.</a:t>
-            </a:r>
-          </a:p>
-          <a:p>
-            <a:r>
-              <a:t>- VW's implementation used recognition of emissions-test conditions to select different operating behaviour. The supplier/integrator boundary is the structure to point at: responsibilities do not disappear when software crosses an organizational boundary.</a:t>
-            </a:r>
-          </a:p>
-          <a:p>
-            <a:r>
-              <a:t>- Do NOT present Bosch as simply an innocent supplier. California's attorney general reported that Bosch supplied hardware, software, programming and calibration services despite allegedly knowing, or having reason to know, about the violations. Bosch entered a $25 million California settlement, and the consumer class settlement was $327.5 million. Tell the class plainly: these settlements are not equivalent to a criminal finding of guilt.</a:t>
-            </a:r>
-          </a:p>
-          <a:p>
-            <a:r>
-              <a:t>- History of the mechanism, for narration (the opening is already long; keep it off the slide): the U.S. government's complaint describes an earlier Audi acoustic function, associated with engine-noise reduction, that distinguished operating conditions; VW engineers subsequently borrowed from it. The concept's history runs Audi -&gt; VW -&gt; Bosch -&gt; IAV, so do not attribute sole authorship of the test-recognition concept to Bosch. A mechanism originally associated with one engineering objective was reused for a different objective with radically different consequences - which connects back to requirements, specification and design.</a:t>
-            </a:r>
-          </a:p>
-          <a:p>
-            <a:r>
-              <a:t>- Do not spend five minutes on the supplier relationship. The capability/use distinction is what the next slide exploits.</a:t>
+              <a:t>TIMING: 2 minutes</a:t>
+            </a:r>
+          </a:p>
+          <a:p>
+            <a:r>
+              <a:t>- The triangle: clean diesel = emissions + performance + customer demand, and no satisfactory point satisfying all three was found.</a:t>
+            </a:r>
+          </a:p>
+          <a:p>
+            <a:r>
+              <a:t>- ASK the footer question. Expected answers: renegotiate requirements, change architecture or design, change product attributes, abandon the market.</a:t>
+            </a:r>
+          </a:p>
+          <a:p>
+            <a:r>
+              <a:t>- The inability to satisfy current requirements IS itself engineering evidence. Pause here.</a:t>
             </a:r>
           </a:p>
         </p:txBody>
@@ -3222,27 +3141,54 @@
           <a:lstStyle/>
           <a:p>
             <a:r>
-              <a:t>TIMING: 2 minutes</a:t>
-            </a:r>
-          </a:p>
-          <a:p>
-            <a:r>
-              <a:t>- After the capability slide, the move is visible: the problematic artifact is not test detection but the POLICY attached to the distinction. The outline marks that: the branch, not the recognizer, is the defeat device.</a:t>
-            </a:r>
-          </a:p>
-          <a:p>
-            <a:r>
-              <a:t>- The software layer is now attributed across organizations: Bosch supplied the engine-management technology, Volkswagen adapted the test-recognition concept into its defeat-device implementation, and IAV contributed to development. Do not assign exclusive authorship of the complete defeat-device implementation to any single company - the evidence establishes contributions across organizational boundaries.</a:t>
-            </a:r>
-          </a:p>
-          <a:p>
-            <a:r>
-              <a:t>- ASK verbally: What failed? Let them say ethics, engineer, management, software, requirements, regulation. Do not resolve it - the question returns once more, on a different case. The on-slide question is now the responsibility question, since Bosch has been introduced on the previous slide.</a:t>
-            </a:r>
-          </a:p>
-          <a:p>
-            <a:r>
-              <a:t>- Sourcing: DOJ materials describe emissions up to 40 times the applicable standard outside test mode; keep the figure in narration if asked.</a:t>
+              <a:rPr dirty="0"/>
+              <a:t>TIMING: 2-3 minutes</a:t>
+            </a:r>
+          </a:p>
+          <a:p>
+            <a:r>
+              <a:rPr dirty="0"/>
+              <a:t>- Bosch supplied the engine-control units and engine-management technology used in VW vehicles; such software legitimately controls fuel injection, engine </a:t>
+            </a:r>
+            <a:r>
+              <a:rPr dirty="0" err="1"/>
+              <a:t>behaviour</a:t>
+            </a:r>
+            <a:r>
+              <a:rPr dirty="0"/>
+              <a:t> and emissions systems. The Bosch settlement confirms its role as supplier of the emissions software in the affected VW vehicles.</a:t>
+            </a:r>
+          </a:p>
+          <a:p>
+            <a:r>
+              <a:rPr dirty="0"/>
+              <a:t>- VW's implementation used recognition of emissions-test conditions to select different operating </a:t>
+            </a:r>
+            <a:r>
+              <a:rPr dirty="0" err="1"/>
+              <a:t>behaviour</a:t>
+            </a:r>
+            <a:r>
+              <a:rPr dirty="0"/>
+              <a:t>. The supplier/integrator boundary is the structure to point at: responsibilities do not disappear when software crosses an organizational boundary.</a:t>
+            </a:r>
+          </a:p>
+          <a:p>
+            <a:r>
+              <a:rPr dirty="0"/>
+              <a:t>- Do NOT present Bosch as simply an innocent supplier. California's attorney general reported that Bosch supplied hardware, software, programming and calibration services despite allegedly knowing, or having reason to know, about the violations. Bosch entered a $25 million California settlement, and the consumer class settlement was $327.5 million. Tell the class plainly: these settlements are not equivalent to a criminal finding of guilt.</a:t>
+            </a:r>
+          </a:p>
+          <a:p>
+            <a:r>
+              <a:rPr dirty="0"/>
+              <a:t>- History of the mechanism, for narration (the opening is already long; keep it off the slide): the U.S. government's complaint describes an earlier Audi acoustic function, associated with engine-noise reduction, that distinguished operating conditions; VW engineers subsequently borrowed from it. The concept's history runs Audi -&gt; VW -&gt; Bosch -&gt; IAV, so do not attribute sole authorship of the test-recognition concept to Bosch. A mechanism originally associated with one engineering objective was reused for a different objective with radically different consequences - which connects back to requirements, specification and design.</a:t>
+            </a:r>
+          </a:p>
+          <a:p>
+            <a:r>
+              <a:rPr dirty="0"/>
+              <a:t>- Do not spend five minutes on the supplier relationship. The capability/use distinction is what the next slide exploits.</a:t>
             </a:r>
           </a:p>
         </p:txBody>
@@ -3312,6 +3258,96 @@
           <a:lstStyle/>
           <a:p>
             <a:r>
+              <a:t>TIMING: 2 minutes</a:t>
+            </a:r>
+          </a:p>
+          <a:p>
+            <a:r>
+              <a:t>- After the capability slide, the move is visible: the problematic artifact is not test detection but the POLICY attached to the distinction. The outline marks that: the branch, not the recognizer, is the defeat device.</a:t>
+            </a:r>
+          </a:p>
+          <a:p>
+            <a:r>
+              <a:t>- The software layer is now attributed across organizations: Bosch supplied the engine-management technology, Volkswagen adapted the test-recognition concept into its defeat-device implementation, and IAV contributed to development. Do not assign exclusive authorship of the complete defeat-device implementation to any single company - the evidence establishes contributions across organizational boundaries.</a:t>
+            </a:r>
+          </a:p>
+          <a:p>
+            <a:r>
+              <a:t>- ASK verbally: What failed? Let them say ethics, engineer, management, software, requirements, regulation. Do not resolve it - the question returns once more, on a different case. The on-slide question is now the responsibility question, since Bosch has been introduced on the previous slide.</a:t>
+            </a:r>
+          </a:p>
+          <a:p>
+            <a:r>
+              <a:t>- Sourcing: DOJ materials describe emissions up to 40 times the applicable standard outside test mode; keep the figure in narration if asked.</a:t>
+            </a:r>
+          </a:p>
+        </p:txBody>
+      </p:sp>
+      <p:sp>
+        <p:nvSpPr>
+          <p:cNvPr id="4" name="Slide Number Placeholder 3"/>
+          <p:cNvSpPr>
+            <a:spLocks noGrp="1"/>
+          </p:cNvSpPr>
+          <p:nvPr>
+            <p:ph type="sldNum" sz="quarter" idx="5"/>
+          </p:nvPr>
+        </p:nvSpPr>
+        <p:spPr/>
+      </p:sp>
+    </p:spTree>
+  </p:cSld>
+  <p:clrMapOvr>
+    <a:masterClrMapping/>
+  </p:clrMapOvr>
+</p:notes>
+</file>
+
+<file path=ppt/notesSlides/notesSlide8.xml><?xml version="1.0" encoding="utf-8"?>
+<p:notes xmlns:a="http://schemas.openxmlformats.org/drawingml/2006/main" xmlns:r="http://schemas.openxmlformats.org/officeDocument/2006/relationships" xmlns:p="http://schemas.openxmlformats.org/presentationml/2006/main">
+  <p:cSld>
+    <p:spTree>
+      <p:nvGrpSpPr>
+        <p:cNvPr id="1" name=""/>
+        <p:cNvGrpSpPr/>
+        <p:nvPr/>
+      </p:nvGrpSpPr>
+      <p:grpSpPr>
+        <a:xfrm>
+          <a:off x="0" y="0"/>
+          <a:ext cx="0" cy="0"/>
+          <a:chOff x="0" y="0"/>
+          <a:chExt cx="0" cy="0"/>
+        </a:xfrm>
+      </p:grpSpPr>
+      <p:sp>
+        <p:nvSpPr>
+          <p:cNvPr id="2" name="Slide Image Placeholder 1"/>
+          <p:cNvSpPr>
+            <a:spLocks noGrp="1" noRot="1" noChangeAspect="1"/>
+          </p:cNvSpPr>
+          <p:nvPr>
+            <p:ph type="sldImg" idx="2"/>
+          </p:nvPr>
+        </p:nvSpPr>
+        <p:spPr/>
+      </p:sp>
+      <p:sp>
+        <p:nvSpPr>
+          <p:cNvPr id="3" name="Notes Placeholder 2"/>
+          <p:cNvSpPr>
+            <a:spLocks noGrp="1"/>
+          </p:cNvSpPr>
+          <p:nvPr>
+            <p:ph type="body" sz="quarter" idx="3"/>
+          </p:nvPr>
+        </p:nvSpPr>
+        <p:spPr/>
+        <p:txBody>
+          <a:bodyPr/>
+          <a:lstStyle/>
+          <a:p>
+            <a:r>
               <a:t>TIMING: 2-3 minutes</a:t>
             </a:r>
           </a:p>
@@ -3355,7 +3391,9 @@
               <a:t>- Not an ethics seminar - the engineering question is what happened AFTER the human control fired. The scale question seeds the causal-model section; "one unethical programmer" becomes an increasingly implausible causal model. Do not let it dominate.</a:t>
             </a:r>
           </a:p>
-          <a:p/>
+          <a:p>
+            <a:endParaRPr/>
+          </a:p>
           <a:p>
             <a:r>
               <a:t>OCTOBER 2007 MEETING (folded in from its own slide): DOJ: the supervisor authorized the project despite knowing that only the defeat device would allow the vehicles to pass the U.S. tests.</a:t>
@@ -7228,7 +7266,7 @@
           <a:p>
             <a:pPr algn="ctr"/>
             <a:r>
-              <a:rPr sz="2000" b="1" i="0">
+              <a:rPr sz="2000" b="1" i="0" dirty="0">
                 <a:solidFill>
                   <a:srgbClr val="FFFFFF"/>
                 </a:solidFill>
@@ -7243,7 +7281,7 @@
               </a:spcBef>
             </a:pPr>
             <a:r>
-              <a:rPr sz="2000" b="1" i="0">
+              <a:rPr sz="2000" b="1" i="0" dirty="0">
                 <a:solidFill>
                   <a:srgbClr val="FFFFFF"/>
                 </a:solidFill>
@@ -7571,7 +7609,7 @@
           <a:p>
             <a:pPr algn="ctr"/>
             <a:r>
-              <a:rPr sz="2000" b="1" i="0">
+              <a:rPr sz="2000" b="1" i="0" dirty="0">
                 <a:solidFill>
                   <a:srgbClr val="FFFFFF"/>
                 </a:solidFill>
@@ -7759,13 +7797,26 @@
           <a:p>
             <a:pPr algn="l"/>
             <a:r>
-              <a:rPr sz="2000" b="0" i="0">
+              <a:rPr sz="2000" b="1" i="0" dirty="0">
                 <a:solidFill>
                   <a:srgbClr val="555960"/>
                 </a:solidFill>
               </a:rPr>
               <a:t>improve the defeat device</a:t>
             </a:r>
+            <a:r>
+              <a:rPr lang="en-US" sz="2000" b="1" dirty="0">
+                <a:solidFill>
+                  <a:srgbClr val="555960"/>
+                </a:solidFill>
+              </a:rPr>
+              <a:t> !</a:t>
+            </a:r>
+            <a:endParaRPr sz="2000" b="1" i="0" dirty="0">
+              <a:solidFill>
+                <a:srgbClr val="555960"/>
+              </a:solidFill>
+            </a:endParaRPr>
           </a:p>
         </p:txBody>
       </p:sp>
@@ -7774,6 +7825,461 @@
   <p:clrMapOvr>
     <a:masterClrMapping/>
   </p:clrMapOvr>
+  <p:timing>
+    <p:tnLst>
+      <p:par>
+        <p:cTn id="1" dur="indefinite" restart="never" nodeType="tmRoot">
+          <p:childTnLst>
+            <p:seq concurrent="1" nextAc="seek">
+              <p:cTn id="2" dur="indefinite" nodeType="mainSeq">
+                <p:childTnLst>
+                  <p:par>
+                    <p:cTn id="3" fill="hold">
+                      <p:stCondLst>
+                        <p:cond delay="indefinite"/>
+                      </p:stCondLst>
+                      <p:childTnLst>
+                        <p:par>
+                          <p:cTn id="4" fill="hold">
+                            <p:stCondLst>
+                              <p:cond delay="0"/>
+                            </p:stCondLst>
+                            <p:childTnLst>
+                              <p:par>
+                                <p:cTn id="5" presetID="1" presetClass="entr" presetSubtype="0" fill="hold" grpId="0" nodeType="clickEffect">
+                                  <p:stCondLst>
+                                    <p:cond delay="0"/>
+                                  </p:stCondLst>
+                                  <p:childTnLst>
+                                    <p:set>
+                                      <p:cBhvr>
+                                        <p:cTn id="6" dur="1" fill="hold">
+                                          <p:stCondLst>
+                                            <p:cond delay="0"/>
+                                          </p:stCondLst>
+                                        </p:cTn>
+                                        <p:tgtEl>
+                                          <p:spTgt spid="920"/>
+                                        </p:tgtEl>
+                                        <p:attrNameLst>
+                                          <p:attrName>style.visibility</p:attrName>
+                                        </p:attrNameLst>
+                                      </p:cBhvr>
+                                      <p:to>
+                                        <p:strVal val="visible"/>
+                                      </p:to>
+                                    </p:set>
+                                  </p:childTnLst>
+                                </p:cTn>
+                              </p:par>
+                              <p:par>
+                                <p:cTn id="7" presetID="1" presetClass="entr" presetSubtype="0" fill="hold" grpId="0" nodeType="withEffect">
+                                  <p:stCondLst>
+                                    <p:cond delay="0"/>
+                                  </p:stCondLst>
+                                  <p:childTnLst>
+                                    <p:set>
+                                      <p:cBhvr>
+                                        <p:cTn id="8" dur="1" fill="hold">
+                                          <p:stCondLst>
+                                            <p:cond delay="0"/>
+                                          </p:stCondLst>
+                                        </p:cTn>
+                                        <p:tgtEl>
+                                          <p:spTgt spid="921"/>
+                                        </p:tgtEl>
+                                        <p:attrNameLst>
+                                          <p:attrName>style.visibility</p:attrName>
+                                        </p:attrNameLst>
+                                      </p:cBhvr>
+                                      <p:to>
+                                        <p:strVal val="visible"/>
+                                      </p:to>
+                                    </p:set>
+                                  </p:childTnLst>
+                                </p:cTn>
+                              </p:par>
+                            </p:childTnLst>
+                          </p:cTn>
+                        </p:par>
+                      </p:childTnLst>
+                    </p:cTn>
+                  </p:par>
+                  <p:par>
+                    <p:cTn id="9" fill="hold">
+                      <p:stCondLst>
+                        <p:cond delay="indefinite"/>
+                      </p:stCondLst>
+                      <p:childTnLst>
+                        <p:par>
+                          <p:cTn id="10" fill="hold">
+                            <p:stCondLst>
+                              <p:cond delay="0"/>
+                            </p:stCondLst>
+                            <p:childTnLst>
+                              <p:par>
+                                <p:cTn id="11" presetID="1" presetClass="entr" presetSubtype="0" fill="hold" nodeType="clickEffect">
+                                  <p:stCondLst>
+                                    <p:cond delay="0"/>
+                                  </p:stCondLst>
+                                  <p:childTnLst>
+                                    <p:set>
+                                      <p:cBhvr>
+                                        <p:cTn id="12" dur="1" fill="hold">
+                                          <p:stCondLst>
+                                            <p:cond delay="0"/>
+                                          </p:stCondLst>
+                                        </p:cTn>
+                                        <p:tgtEl>
+                                          <p:spTgt spid="922"/>
+                                        </p:tgtEl>
+                                        <p:attrNameLst>
+                                          <p:attrName>style.visibility</p:attrName>
+                                        </p:attrNameLst>
+                                      </p:cBhvr>
+                                      <p:to>
+                                        <p:strVal val="visible"/>
+                                      </p:to>
+                                    </p:set>
+                                  </p:childTnLst>
+                                </p:cTn>
+                              </p:par>
+                              <p:par>
+                                <p:cTn id="13" presetID="1" presetClass="entr" presetSubtype="0" fill="hold" grpId="0" nodeType="withEffect">
+                                  <p:stCondLst>
+                                    <p:cond delay="0"/>
+                                  </p:stCondLst>
+                                  <p:childTnLst>
+                                    <p:set>
+                                      <p:cBhvr>
+                                        <p:cTn id="14" dur="1" fill="hold">
+                                          <p:stCondLst>
+                                            <p:cond delay="0"/>
+                                          </p:stCondLst>
+                                        </p:cTn>
+                                        <p:tgtEl>
+                                          <p:spTgt spid="923"/>
+                                        </p:tgtEl>
+                                        <p:attrNameLst>
+                                          <p:attrName>style.visibility</p:attrName>
+                                        </p:attrNameLst>
+                                      </p:cBhvr>
+                                      <p:to>
+                                        <p:strVal val="visible"/>
+                                      </p:to>
+                                    </p:set>
+                                  </p:childTnLst>
+                                </p:cTn>
+                              </p:par>
+                              <p:par>
+                                <p:cTn id="15" presetID="1" presetClass="entr" presetSubtype="0" fill="hold" grpId="0" nodeType="withEffect">
+                                  <p:stCondLst>
+                                    <p:cond delay="0"/>
+                                  </p:stCondLst>
+                                  <p:childTnLst>
+                                    <p:set>
+                                      <p:cBhvr>
+                                        <p:cTn id="16" dur="1" fill="hold">
+                                          <p:stCondLst>
+                                            <p:cond delay="0"/>
+                                          </p:stCondLst>
+                                        </p:cTn>
+                                        <p:tgtEl>
+                                          <p:spTgt spid="924"/>
+                                        </p:tgtEl>
+                                        <p:attrNameLst>
+                                          <p:attrName>style.visibility</p:attrName>
+                                        </p:attrNameLst>
+                                      </p:cBhvr>
+                                      <p:to>
+                                        <p:strVal val="visible"/>
+                                      </p:to>
+                                    </p:set>
+                                  </p:childTnLst>
+                                </p:cTn>
+                              </p:par>
+                            </p:childTnLst>
+                          </p:cTn>
+                        </p:par>
+                      </p:childTnLst>
+                    </p:cTn>
+                  </p:par>
+                  <p:par>
+                    <p:cTn id="17" fill="hold">
+                      <p:stCondLst>
+                        <p:cond delay="indefinite"/>
+                      </p:stCondLst>
+                      <p:childTnLst>
+                        <p:par>
+                          <p:cTn id="18" fill="hold">
+                            <p:stCondLst>
+                              <p:cond delay="0"/>
+                            </p:stCondLst>
+                            <p:childTnLst>
+                              <p:par>
+                                <p:cTn id="19" presetID="1" presetClass="entr" presetSubtype="0" fill="hold" nodeType="clickEffect">
+                                  <p:stCondLst>
+                                    <p:cond delay="0"/>
+                                  </p:stCondLst>
+                                  <p:childTnLst>
+                                    <p:set>
+                                      <p:cBhvr>
+                                        <p:cTn id="20" dur="1" fill="hold">
+                                          <p:stCondLst>
+                                            <p:cond delay="0"/>
+                                          </p:stCondLst>
+                                        </p:cTn>
+                                        <p:tgtEl>
+                                          <p:spTgt spid="925"/>
+                                        </p:tgtEl>
+                                        <p:attrNameLst>
+                                          <p:attrName>style.visibility</p:attrName>
+                                        </p:attrNameLst>
+                                      </p:cBhvr>
+                                      <p:to>
+                                        <p:strVal val="visible"/>
+                                      </p:to>
+                                    </p:set>
+                                  </p:childTnLst>
+                                </p:cTn>
+                              </p:par>
+                              <p:par>
+                                <p:cTn id="21" presetID="1" presetClass="entr" presetSubtype="0" fill="hold" grpId="0" nodeType="withEffect">
+                                  <p:stCondLst>
+                                    <p:cond delay="0"/>
+                                  </p:stCondLst>
+                                  <p:childTnLst>
+                                    <p:set>
+                                      <p:cBhvr>
+                                        <p:cTn id="22" dur="1" fill="hold">
+                                          <p:stCondLst>
+                                            <p:cond delay="0"/>
+                                          </p:stCondLst>
+                                        </p:cTn>
+                                        <p:tgtEl>
+                                          <p:spTgt spid="926"/>
+                                        </p:tgtEl>
+                                        <p:attrNameLst>
+                                          <p:attrName>style.visibility</p:attrName>
+                                        </p:attrNameLst>
+                                      </p:cBhvr>
+                                      <p:to>
+                                        <p:strVal val="visible"/>
+                                      </p:to>
+                                    </p:set>
+                                  </p:childTnLst>
+                                </p:cTn>
+                              </p:par>
+                              <p:par>
+                                <p:cTn id="23" presetID="1" presetClass="entr" presetSubtype="0" fill="hold" grpId="0" nodeType="withEffect">
+                                  <p:stCondLst>
+                                    <p:cond delay="0"/>
+                                  </p:stCondLst>
+                                  <p:childTnLst>
+                                    <p:set>
+                                      <p:cBhvr>
+                                        <p:cTn id="24" dur="1" fill="hold">
+                                          <p:stCondLst>
+                                            <p:cond delay="0"/>
+                                          </p:stCondLst>
+                                        </p:cTn>
+                                        <p:tgtEl>
+                                          <p:spTgt spid="927"/>
+                                        </p:tgtEl>
+                                        <p:attrNameLst>
+                                          <p:attrName>style.visibility</p:attrName>
+                                        </p:attrNameLst>
+                                      </p:cBhvr>
+                                      <p:to>
+                                        <p:strVal val="visible"/>
+                                      </p:to>
+                                    </p:set>
+                                  </p:childTnLst>
+                                </p:cTn>
+                              </p:par>
+                            </p:childTnLst>
+                          </p:cTn>
+                        </p:par>
+                      </p:childTnLst>
+                    </p:cTn>
+                  </p:par>
+                  <p:par>
+                    <p:cTn id="25" fill="hold">
+                      <p:stCondLst>
+                        <p:cond delay="indefinite"/>
+                      </p:stCondLst>
+                      <p:childTnLst>
+                        <p:par>
+                          <p:cTn id="26" fill="hold">
+                            <p:stCondLst>
+                              <p:cond delay="0"/>
+                            </p:stCondLst>
+                            <p:childTnLst>
+                              <p:par>
+                                <p:cTn id="27" presetID="1" presetClass="entr" presetSubtype="0" fill="hold" nodeType="clickEffect">
+                                  <p:stCondLst>
+                                    <p:cond delay="0"/>
+                                  </p:stCondLst>
+                                  <p:childTnLst>
+                                    <p:set>
+                                      <p:cBhvr>
+                                        <p:cTn id="28" dur="1" fill="hold">
+                                          <p:stCondLst>
+                                            <p:cond delay="0"/>
+                                          </p:stCondLst>
+                                        </p:cTn>
+                                        <p:tgtEl>
+                                          <p:spTgt spid="928"/>
+                                        </p:tgtEl>
+                                        <p:attrNameLst>
+                                          <p:attrName>style.visibility</p:attrName>
+                                        </p:attrNameLst>
+                                      </p:cBhvr>
+                                      <p:to>
+                                        <p:strVal val="visible"/>
+                                      </p:to>
+                                    </p:set>
+                                  </p:childTnLst>
+                                </p:cTn>
+                              </p:par>
+                              <p:par>
+                                <p:cTn id="29" presetID="1" presetClass="entr" presetSubtype="0" fill="hold" grpId="0" nodeType="withEffect">
+                                  <p:stCondLst>
+                                    <p:cond delay="0"/>
+                                  </p:stCondLst>
+                                  <p:childTnLst>
+                                    <p:set>
+                                      <p:cBhvr>
+                                        <p:cTn id="30" dur="1" fill="hold">
+                                          <p:stCondLst>
+                                            <p:cond delay="0"/>
+                                          </p:stCondLst>
+                                        </p:cTn>
+                                        <p:tgtEl>
+                                          <p:spTgt spid="929"/>
+                                        </p:tgtEl>
+                                        <p:attrNameLst>
+                                          <p:attrName>style.visibility</p:attrName>
+                                        </p:attrNameLst>
+                                      </p:cBhvr>
+                                      <p:to>
+                                        <p:strVal val="visible"/>
+                                      </p:to>
+                                    </p:set>
+                                  </p:childTnLst>
+                                </p:cTn>
+                              </p:par>
+                              <p:par>
+                                <p:cTn id="31" presetID="1" presetClass="entr" presetSubtype="0" fill="hold" grpId="0" nodeType="withEffect">
+                                  <p:stCondLst>
+                                    <p:cond delay="0"/>
+                                  </p:stCondLst>
+                                  <p:childTnLst>
+                                    <p:set>
+                                      <p:cBhvr>
+                                        <p:cTn id="32" dur="1" fill="hold">
+                                          <p:stCondLst>
+                                            <p:cond delay="0"/>
+                                          </p:stCondLst>
+                                        </p:cTn>
+                                        <p:tgtEl>
+                                          <p:spTgt spid="930"/>
+                                        </p:tgtEl>
+                                        <p:attrNameLst>
+                                          <p:attrName>style.visibility</p:attrName>
+                                        </p:attrNameLst>
+                                      </p:cBhvr>
+                                      <p:to>
+                                        <p:strVal val="visible"/>
+                                      </p:to>
+                                    </p:set>
+                                  </p:childTnLst>
+                                </p:cTn>
+                              </p:par>
+                            </p:childTnLst>
+                          </p:cTn>
+                        </p:par>
+                      </p:childTnLst>
+                    </p:cTn>
+                  </p:par>
+                  <p:par>
+                    <p:cTn id="33" fill="hold">
+                      <p:stCondLst>
+                        <p:cond delay="indefinite"/>
+                      </p:stCondLst>
+                      <p:childTnLst>
+                        <p:par>
+                          <p:cTn id="34" fill="hold">
+                            <p:stCondLst>
+                              <p:cond delay="0"/>
+                            </p:stCondLst>
+                            <p:childTnLst>
+                              <p:par>
+                                <p:cTn id="35" presetID="1" presetClass="entr" presetSubtype="0" fill="hold" grpId="0" nodeType="clickEffect">
+                                  <p:stCondLst>
+                                    <p:cond delay="0"/>
+                                  </p:stCondLst>
+                                  <p:childTnLst>
+                                    <p:set>
+                                      <p:cBhvr>
+                                        <p:cTn id="36" dur="1" fill="hold">
+                                          <p:stCondLst>
+                                            <p:cond delay="0"/>
+                                          </p:stCondLst>
+                                        </p:cTn>
+                                        <p:tgtEl>
+                                          <p:spTgt spid="909"/>
+                                        </p:tgtEl>
+                                        <p:attrNameLst>
+                                          <p:attrName>style.visibility</p:attrName>
+                                        </p:attrNameLst>
+                                      </p:cBhvr>
+                                      <p:to>
+                                        <p:strVal val="visible"/>
+                                      </p:to>
+                                    </p:set>
+                                  </p:childTnLst>
+                                </p:cTn>
+                              </p:par>
+                            </p:childTnLst>
+                          </p:cTn>
+                        </p:par>
+                      </p:childTnLst>
+                    </p:cTn>
+                  </p:par>
+                </p:childTnLst>
+              </p:cTn>
+              <p:prevCondLst>
+                <p:cond evt="onPrev" delay="0">
+                  <p:tgtEl>
+                    <p:sldTgt/>
+                  </p:tgtEl>
+                </p:cond>
+              </p:prevCondLst>
+              <p:nextCondLst>
+                <p:cond evt="onNext" delay="0">
+                  <p:tgtEl>
+                    <p:sldTgt/>
+                  </p:tgtEl>
+                </p:cond>
+              </p:nextCondLst>
+            </p:seq>
+          </p:childTnLst>
+        </p:cTn>
+      </p:par>
+    </p:tnLst>
+    <p:bldLst>
+      <p:bldP spid="909" grpId="0" animBg="1"/>
+      <p:bldP spid="920" grpId="0" animBg="1"/>
+      <p:bldP spid="921" grpId="0"/>
+      <p:bldP spid="923" grpId="0" animBg="1"/>
+      <p:bldP spid="924" grpId="0"/>
+      <p:bldP spid="926" grpId="0" animBg="1"/>
+      <p:bldP spid="927" grpId="0"/>
+      <p:bldP spid="929" grpId="0" animBg="1"/>
+      <p:bldP spid="930" grpId="0"/>
+    </p:bldLst>
+  </p:timing>
 </p:sld>
 </file>
 
@@ -7858,8 +8364,8 @@
         </p:nvSpPr>
         <p:spPr>
           <a:xfrm>
-            <a:off x="274320" y="5513831"/>
-            <a:ext cx="8595360" cy="905256"/>
+            <a:off x="274320" y="5779007"/>
+            <a:ext cx="8595360" cy="640080"/>
           </a:xfrm>
           <a:prstGeom prst="rect">
             <a:avLst/>
@@ -8241,8 +8747,8 @@
         </p:nvSpPr>
         <p:spPr>
           <a:xfrm>
-            <a:off x="411480" y="2926080"/>
-            <a:ext cx="8321040" cy="914400"/>
+            <a:off x="1413908" y="2862072"/>
+            <a:ext cx="5950424" cy="914400"/>
           </a:xfrm>
           <a:prstGeom prst="rect">
             <a:avLst/>
@@ -8277,12 +8783,28 @@
           <a:p>
             <a:pPr algn="ctr"/>
             <a:r>
-              <a:rPr sz="2000" b="0" i="0">
+              <a:rPr sz="2000" b="0" i="0" dirty="0">
                 <a:solidFill>
                   <a:srgbClr val="555960"/>
                 </a:solidFill>
               </a:rPr>
-              <a:t>Criminal prosecutions. A $2.8B U.S. criminal penalty. Further settlements and consequences.</a:t>
+              <a:t>Criminal prosecutions. A $2.8B U.S. criminal penalty. </a:t>
+            </a:r>
+            <a:endParaRPr lang="en-US" sz="2000" b="0" i="0" dirty="0">
+              <a:solidFill>
+                <a:srgbClr val="555960"/>
+              </a:solidFill>
+            </a:endParaRPr>
+          </a:p>
+          <a:p>
+            <a:pPr algn="ctr"/>
+            <a:r>
+              <a:rPr sz="2000" b="0" i="0" dirty="0">
+                <a:solidFill>
+                  <a:srgbClr val="555960"/>
+                </a:solidFill>
+              </a:rPr>
+              <a:t>Further settlements and consequences.</a:t>
             </a:r>
           </a:p>
         </p:txBody>
@@ -8292,6 +8814,84 @@
   <p:clrMapOvr>
     <a:masterClrMapping/>
   </p:clrMapOvr>
+  <p:timing>
+    <p:tnLst>
+      <p:par>
+        <p:cTn id="1" dur="indefinite" restart="never" nodeType="tmRoot">
+          <p:childTnLst>
+            <p:seq concurrent="1" nextAc="seek">
+              <p:cTn id="2" dur="indefinite" nodeType="mainSeq">
+                <p:childTnLst>
+                  <p:par>
+                    <p:cTn id="3" fill="hold">
+                      <p:stCondLst>
+                        <p:cond delay="indefinite"/>
+                      </p:stCondLst>
+                      <p:childTnLst>
+                        <p:par>
+                          <p:cTn id="4" fill="hold">
+                            <p:stCondLst>
+                              <p:cond delay="0"/>
+                            </p:stCondLst>
+                            <p:childTnLst>
+                              <p:par>
+                                <p:cTn id="5" presetID="1" presetClass="entr" presetSubtype="0" fill="hold" grpId="0" nodeType="clickEffect">
+                                  <p:stCondLst>
+                                    <p:cond delay="0"/>
+                                  </p:stCondLst>
+                                  <p:childTnLst>
+                                    <p:set>
+                                      <p:cBhvr>
+                                        <p:cTn id="6" dur="1" fill="hold">
+                                          <p:stCondLst>
+                                            <p:cond delay="0"/>
+                                          </p:stCondLst>
+                                        </p:cTn>
+                                        <p:tgtEl>
+                                          <p:spTgt spid="909"/>
+                                        </p:tgtEl>
+                                        <p:attrNameLst>
+                                          <p:attrName>style.visibility</p:attrName>
+                                        </p:attrNameLst>
+                                      </p:cBhvr>
+                                      <p:to>
+                                        <p:strVal val="visible"/>
+                                      </p:to>
+                                    </p:set>
+                                  </p:childTnLst>
+                                </p:cTn>
+                              </p:par>
+                            </p:childTnLst>
+                          </p:cTn>
+                        </p:par>
+                      </p:childTnLst>
+                    </p:cTn>
+                  </p:par>
+                </p:childTnLst>
+              </p:cTn>
+              <p:prevCondLst>
+                <p:cond evt="onPrev" delay="0">
+                  <p:tgtEl>
+                    <p:sldTgt/>
+                  </p:tgtEl>
+                </p:cond>
+              </p:prevCondLst>
+              <p:nextCondLst>
+                <p:cond evt="onNext" delay="0">
+                  <p:tgtEl>
+                    <p:sldTgt/>
+                  </p:tgtEl>
+                </p:cond>
+              </p:nextCondLst>
+            </p:seq>
+          </p:childTnLst>
+        </p:cTn>
+      </p:par>
+    </p:tnLst>
+    <p:bldLst>
+      <p:bldP spid="909" grpId="0" animBg="1"/>
+    </p:bldLst>
+  </p:timing>
 </p:sld>
 </file>
 
@@ -8563,7 +9163,7 @@
           <a:p>
             <a:fld id="{8D34505B-00B1-4572-8080-1F84ADF8E747}" type="slidenum">
               <a:rPr lang="en-US" smtClean="0"/>
-              <a:t>14</a:t>
+              <a:t>13</a:t>
             </a:fld>
             <a:endParaRPr lang="en-US"/>
           </a:p>
@@ -8611,12 +9211,28 @@
           <a:p>
             <a:pPr algn="ctr"/>
             <a:r>
-              <a:rPr sz="2000" b="1" i="0">
+              <a:rPr sz="2000" b="1" i="0" dirty="0">
                 <a:solidFill>
                   <a:srgbClr val="FFFFFF"/>
                 </a:solidFill>
               </a:rPr>
-              <a:t>Useful, but narrow.</a:t>
+              <a:t>Useful</a:t>
+            </a:r>
+            <a:r>
+              <a:rPr lang="en-US" sz="2000" b="1" dirty="0">
+                <a:solidFill>
+                  <a:srgbClr val="FFFFFF"/>
+                </a:solidFill>
+              </a:rPr>
+              <a:t> </a:t>
+            </a:r>
+            <a:r>
+              <a:rPr sz="2000" b="1" i="0" dirty="0">
+                <a:solidFill>
+                  <a:srgbClr val="FFFFFF"/>
+                </a:solidFill>
+              </a:rPr>
+              <a:t>but narrow.</a:t>
             </a:r>
           </a:p>
         </p:txBody>
@@ -8981,7 +9597,7 @@
           <a:p>
             <a:fld id="{E3DB674E-A080-44A8-A874-38AE3C84A5E2}" type="slidenum">
               <a:rPr lang="en-US" smtClean="0"/>
-              <a:t>15</a:t>
+              <a:t>14</a:t>
             </a:fld>
             <a:endParaRPr lang="en-US"/>
           </a:p>
@@ -10015,7 +10631,7 @@
           <a:p>
             <a:fld id="{914DCAD9-F068-4234-801B-B81BE39514E5}" type="slidenum">
               <a:rPr lang="en-US" smtClean="0"/>
-              <a:t>16</a:t>
+              <a:t>15</a:t>
             </a:fld>
             <a:endParaRPr lang="en-US"/>
           </a:p>
@@ -10391,7 +11007,7 @@
           <a:p>
             <a:fld id="{21CAE056-AEB1-4FA5-BA70-2608DF341BC7}" type="slidenum">
               <a:rPr lang="en-US" smtClean="0"/>
-              <a:t>17</a:t>
+              <a:t>16</a:t>
             </a:fld>
             <a:endParaRPr lang="en-US"/>
           </a:p>
@@ -11169,7 +11785,7 @@
           <a:p>
             <a:fld id="{A5E8DDF8-F0A4-457E-8C49-34448B87F78F}" type="slidenum">
               <a:rPr lang="en-US" smtClean="0"/>
-              <a:t>18</a:t>
+              <a:t>17</a:t>
             </a:fld>
             <a:endParaRPr lang="en-US"/>
           </a:p>
@@ -11183,7 +11799,7 @@
         </p:nvSpPr>
         <p:spPr>
           <a:xfrm>
-            <a:off x="548640" y="2103120"/>
+            <a:off x="448056" y="1143000"/>
             <a:ext cx="1828800" cy="822960"/>
           </a:xfrm>
           <a:prstGeom prst="rect">
@@ -11237,7 +11853,7 @@
         </p:nvSpPr>
         <p:spPr>
           <a:xfrm>
-            <a:off x="2624328" y="2103120"/>
+            <a:off x="2523744" y="1143000"/>
             <a:ext cx="1828800" cy="822960"/>
           </a:xfrm>
           <a:prstGeom prst="rect">
@@ -11291,7 +11907,7 @@
         </p:nvSpPr>
         <p:spPr>
           <a:xfrm>
-            <a:off x="4700016" y="2103120"/>
+            <a:off x="4599432" y="1143000"/>
             <a:ext cx="1828800" cy="822960"/>
           </a:xfrm>
           <a:prstGeom prst="rect">
@@ -11345,7 +11961,7 @@
         </p:nvSpPr>
         <p:spPr>
           <a:xfrm>
-            <a:off x="6775704" y="2103120"/>
+            <a:off x="6675120" y="1143000"/>
             <a:ext cx="1828800" cy="822960"/>
           </a:xfrm>
           <a:prstGeom prst="rect">
@@ -11399,7 +12015,7 @@
         </p:nvCxnSpPr>
         <p:spPr>
           <a:xfrm>
-            <a:off x="548640" y="4114800"/>
+            <a:off x="448056" y="3318637"/>
             <a:ext cx="8001000" cy="0"/>
           </a:xfrm>
           <a:prstGeom prst="line">
@@ -11409,6 +12025,7 @@
             <a:solidFill>
               <a:srgbClr val="8E6F3E"/>
             </a:solidFill>
+            <a:headEnd type="triangle"/>
             <a:tailEnd type="triangle"/>
           </a:ln>
         </p:spPr>
@@ -11435,7 +12052,7 @@
         </p:nvSpPr>
         <p:spPr>
           <a:xfrm>
-            <a:off x="457200" y="2971800"/>
+            <a:off x="356616" y="2011680"/>
             <a:ext cx="2011680" cy="548640"/>
           </a:xfrm>
           <a:prstGeom prst="rect">
@@ -11469,7 +12086,7 @@
         </p:nvSpPr>
         <p:spPr>
           <a:xfrm>
-            <a:off x="2532888" y="2971800"/>
+            <a:off x="2432304" y="2011680"/>
             <a:ext cx="2011680" cy="548640"/>
           </a:xfrm>
           <a:prstGeom prst="rect">
@@ -11503,7 +12120,7 @@
         </p:nvSpPr>
         <p:spPr>
           <a:xfrm>
-            <a:off x="4608576" y="2971800"/>
+            <a:off x="4507992" y="2011680"/>
             <a:ext cx="2011680" cy="548640"/>
           </a:xfrm>
           <a:prstGeom prst="rect">
@@ -11537,7 +12154,7 @@
         </p:nvSpPr>
         <p:spPr>
           <a:xfrm>
-            <a:off x="6684264" y="2971800"/>
+            <a:off x="6583680" y="2011680"/>
             <a:ext cx="2011680" cy="548640"/>
           </a:xfrm>
           <a:prstGeom prst="rect">
@@ -11571,8 +12188,8 @@
         </p:nvSpPr>
         <p:spPr>
           <a:xfrm>
-            <a:off x="548640" y="3749040"/>
-            <a:ext cx="3474720" cy="320040"/>
+            <a:off x="448056" y="2890848"/>
+            <a:ext cx="1719072" cy="353943"/>
           </a:xfrm>
           <a:prstGeom prst="rect">
             <a:avLst/>
@@ -11587,13 +12204,18 @@
           <a:p>
             <a:pPr algn="l"/>
             <a:r>
-              <a:rPr sz="2000" b="0" i="0">
+              <a:rPr lang="en-US" sz="2000" b="0" i="0" dirty="0">
                 <a:solidFill>
                   <a:srgbClr val="555960"/>
                 </a:solidFill>
               </a:rPr>
-              <a:t>NARROWER CAUSAL BOUNDARY</a:t>
-            </a:r>
+              <a:t>Narrower</a:t>
+            </a:r>
+            <a:endParaRPr sz="2000" b="0" i="0" dirty="0">
+              <a:solidFill>
+                <a:srgbClr val="555960"/>
+              </a:solidFill>
+            </a:endParaRPr>
           </a:p>
         </p:txBody>
       </p:sp>
@@ -11605,8 +12227,8 @@
         </p:nvSpPr>
         <p:spPr>
           <a:xfrm>
-            <a:off x="6949440" y="3749040"/>
-            <a:ext cx="1600200" cy="320040"/>
+            <a:off x="6848856" y="2890848"/>
+            <a:ext cx="1600200" cy="353943"/>
           </a:xfrm>
           <a:prstGeom prst="rect">
             <a:avLst/>
@@ -11621,26 +12243,31 @@
           <a:p>
             <a:pPr algn="r"/>
             <a:r>
-              <a:rPr sz="2000" b="0" i="0">
+              <a:rPr lang="en-US" sz="2000" b="0" i="0" dirty="0">
                 <a:solidFill>
                   <a:srgbClr val="555960"/>
                 </a:solidFill>
               </a:rPr>
-              <a:t>BROADER</a:t>
-            </a:r>
-          </a:p>
-        </p:txBody>
-      </p:sp>
-      <p:sp>
-        <p:nvSpPr>
-          <p:cNvPr id="926" name="Label"/>
+              <a:t>Broader</a:t>
+            </a:r>
+            <a:endParaRPr sz="2000" b="0" i="0" dirty="0">
+              <a:solidFill>
+                <a:srgbClr val="555960"/>
+              </a:solidFill>
+            </a:endParaRPr>
+          </a:p>
+        </p:txBody>
+      </p:sp>
+      <p:sp>
+        <p:nvSpPr>
+          <p:cNvPr id="927" name="Label"/>
           <p:cNvSpPr txBox="1"/>
           <p:nvPr/>
         </p:nvSpPr>
         <p:spPr>
           <a:xfrm>
-            <a:off x="548640" y="4315968"/>
-            <a:ext cx="8046720" cy="365760"/>
+            <a:off x="850392" y="4228590"/>
+            <a:ext cx="7498080" cy="822960"/>
           </a:xfrm>
           <a:prstGeom prst="rect">
             <a:avLst/>
@@ -11655,26 +12282,43 @@
           <a:p>
             <a:pPr algn="ctr"/>
             <a:r>
-              <a:rPr sz="2000" b="1" i="0">
-                <a:solidFill>
-                  <a:srgbClr val="8E6F3E"/>
-                </a:solidFill>
-              </a:rPr>
-              <a:t>more structure represented</a:t>
-            </a:r>
-          </a:p>
-        </p:txBody>
-      </p:sp>
-      <p:sp>
-        <p:nvSpPr>
-          <p:cNvPr id="927" name="Label"/>
+              <a:rPr sz="2000" b="0" i="0" dirty="0">
+                <a:solidFill>
+                  <a:srgbClr val="5C4826"/>
+                </a:solidFill>
+              </a:rPr>
+              <a:t>Broader models expose more relationships.</a:t>
+            </a:r>
+          </a:p>
+          <a:p>
+            <a:pPr algn="ctr"/>
+            <a:r>
+              <a:rPr sz="2000" b="0" i="0" dirty="0">
+                <a:solidFill>
+                  <a:srgbClr val="5C4826"/>
+                </a:solidFill>
+              </a:rPr>
+              <a:t>They also demand more evidence and more authority to act.</a:t>
+            </a:r>
+          </a:p>
+        </p:txBody>
+      </p:sp>
+      <p:sp>
+        <p:nvSpPr>
+          <p:cNvPr id="2" name="Label">
+            <a:extLst>
+              <a:ext uri="{FF2B5EF4-FFF2-40B4-BE49-F238E27FC236}">
+                <a16:creationId xmlns:a16="http://schemas.microsoft.com/office/drawing/2014/main" id="{7DD433C0-05A4-A8DB-8A40-F75777F417F1}"/>
+              </a:ext>
+            </a:extLst>
+          </p:cNvPr>
           <p:cNvSpPr txBox="1"/>
           <p:nvPr/>
         </p:nvSpPr>
         <p:spPr>
           <a:xfrm>
-            <a:off x="822960" y="4892040"/>
-            <a:ext cx="7498080" cy="822960"/>
+            <a:off x="3502152" y="2890848"/>
+            <a:ext cx="2011680" cy="353943"/>
           </a:xfrm>
           <a:prstGeom prst="rect">
             <a:avLst/>
@@ -11689,24 +12333,170 @@
           <a:p>
             <a:pPr algn="ctr"/>
             <a:r>
-              <a:rPr sz="2000" b="0" i="0">
-                <a:solidFill>
-                  <a:srgbClr val="5C4826"/>
-                </a:solidFill>
-              </a:rPr>
-              <a:t>Broader models expose more relationships.</a:t>
-            </a:r>
-          </a:p>
+              <a:rPr lang="en-US" sz="2000" dirty="0">
+                <a:solidFill>
+                  <a:srgbClr val="555960"/>
+                </a:solidFill>
+              </a:rPr>
+              <a:t>c</a:t>
+            </a:r>
+            <a:r>
+              <a:rPr lang="en-US" sz="2000" b="0" i="0" dirty="0">
+                <a:solidFill>
+                  <a:srgbClr val="555960"/>
+                </a:solidFill>
+              </a:rPr>
+              <a:t>ausal boundary</a:t>
+            </a:r>
+            <a:endParaRPr sz="2000" b="0" i="0" dirty="0">
+              <a:solidFill>
+                <a:srgbClr val="555960"/>
+              </a:solidFill>
+            </a:endParaRPr>
+          </a:p>
+        </p:txBody>
+      </p:sp>
+      <p:sp>
+        <p:nvSpPr>
+          <p:cNvPr id="4" name="Label">
+            <a:extLst>
+              <a:ext uri="{FF2B5EF4-FFF2-40B4-BE49-F238E27FC236}">
+                <a16:creationId xmlns:a16="http://schemas.microsoft.com/office/drawing/2014/main" id="{B231F455-4223-016C-1DEE-28C4A7911CF2}"/>
+              </a:ext>
+            </a:extLst>
+          </p:cNvPr>
+          <p:cNvSpPr txBox="1"/>
+          <p:nvPr/>
+        </p:nvSpPr>
+        <p:spPr>
+          <a:xfrm>
+            <a:off x="3765758" y="3346766"/>
+            <a:ext cx="1356451" cy="353943"/>
+          </a:xfrm>
+          <a:prstGeom prst="rect">
+            <a:avLst/>
+          </a:prstGeom>
+          <a:noFill/>
+        </p:spPr>
+        <p:txBody>
+          <a:bodyPr wrap="square" lIns="27432" tIns="22860" rIns="27432" bIns="22860" anchor="t">
+            <a:spAutoFit/>
+          </a:bodyPr>
+          <a:lstStyle>
+            <a:defPPr>
+              <a:defRPr lang="en-US"/>
+            </a:defPPr>
+            <a:lvl1pPr>
+              <a:defRPr sz="2000" b="1" i="0">
+                <a:solidFill>
+                  <a:srgbClr val="8E6F3E"/>
+                </a:solidFill>
+              </a:defRPr>
+            </a:lvl1pPr>
+          </a:lstStyle>
           <a:p>
             <a:pPr algn="ctr"/>
             <a:r>
-              <a:rPr sz="2000" b="0" i="0">
-                <a:solidFill>
-                  <a:srgbClr val="5C4826"/>
-                </a:solidFill>
-              </a:rPr>
-              <a:t>They also demand more evidence and more authority to act.</a:t>
-            </a:r>
+              <a:rPr lang="en-US" dirty="0"/>
+              <a:t>structure</a:t>
+            </a:r>
+            <a:endParaRPr dirty="0"/>
+          </a:p>
+        </p:txBody>
+      </p:sp>
+      <p:sp>
+        <p:nvSpPr>
+          <p:cNvPr id="5" name="Label">
+            <a:extLst>
+              <a:ext uri="{FF2B5EF4-FFF2-40B4-BE49-F238E27FC236}">
+                <a16:creationId xmlns:a16="http://schemas.microsoft.com/office/drawing/2014/main" id="{94BA9F04-CC4F-849B-204C-8A7344D44B31}"/>
+              </a:ext>
+            </a:extLst>
+          </p:cNvPr>
+          <p:cNvSpPr txBox="1"/>
+          <p:nvPr/>
+        </p:nvSpPr>
+        <p:spPr>
+          <a:xfrm>
+            <a:off x="448056" y="3345434"/>
+            <a:ext cx="1719072" cy="353943"/>
+          </a:xfrm>
+          <a:prstGeom prst="rect">
+            <a:avLst/>
+          </a:prstGeom>
+          <a:noFill/>
+        </p:spPr>
+        <p:txBody>
+          <a:bodyPr wrap="square" lIns="27432" tIns="22860" rIns="27432" bIns="22860" anchor="t">
+            <a:spAutoFit/>
+          </a:bodyPr>
+          <a:lstStyle>
+            <a:defPPr>
+              <a:defRPr lang="en-US"/>
+            </a:defPPr>
+            <a:lvl1pPr algn="ctr">
+              <a:defRPr sz="2000" b="1" i="0">
+                <a:solidFill>
+                  <a:srgbClr val="8E6F3E"/>
+                </a:solidFill>
+              </a:defRPr>
+            </a:lvl1pPr>
+          </a:lstStyle>
+          <a:p>
+            <a:pPr algn="l"/>
+            <a:r>
+              <a:rPr lang="en-US" dirty="0"/>
+              <a:t>Less</a:t>
+            </a:r>
+            <a:endParaRPr dirty="0"/>
+          </a:p>
+        </p:txBody>
+      </p:sp>
+      <p:sp>
+        <p:nvSpPr>
+          <p:cNvPr id="9" name="Label">
+            <a:extLst>
+              <a:ext uri="{FF2B5EF4-FFF2-40B4-BE49-F238E27FC236}">
+                <a16:creationId xmlns:a16="http://schemas.microsoft.com/office/drawing/2014/main" id="{F6AC6458-DE8B-0560-62E1-E5D306C95CB2}"/>
+              </a:ext>
+            </a:extLst>
+          </p:cNvPr>
+          <p:cNvSpPr txBox="1"/>
+          <p:nvPr/>
+        </p:nvSpPr>
+        <p:spPr>
+          <a:xfrm>
+            <a:off x="6848856" y="3345434"/>
+            <a:ext cx="1600200" cy="353943"/>
+          </a:xfrm>
+          <a:prstGeom prst="rect">
+            <a:avLst/>
+          </a:prstGeom>
+          <a:noFill/>
+        </p:spPr>
+        <p:txBody>
+          <a:bodyPr wrap="square" lIns="27432" tIns="22860" rIns="27432" bIns="22860" anchor="t">
+            <a:spAutoFit/>
+          </a:bodyPr>
+          <a:lstStyle>
+            <a:defPPr>
+              <a:defRPr lang="en-US"/>
+            </a:defPPr>
+            <a:lvl1pPr>
+              <a:defRPr sz="2000" b="1" i="0">
+                <a:solidFill>
+                  <a:srgbClr val="8E6F3E"/>
+                </a:solidFill>
+              </a:defRPr>
+            </a:lvl1pPr>
+          </a:lstStyle>
+          <a:p>
+            <a:pPr algn="r"/>
+            <a:r>
+              <a:rPr lang="en-US" dirty="0"/>
+              <a:t>More</a:t>
+            </a:r>
+            <a:endParaRPr dirty="0"/>
           </a:p>
         </p:txBody>
       </p:sp>
@@ -11780,7 +12570,7 @@
           <a:p>
             <a:fld id="{A2504DDB-3E3B-4B22-928E-39EF9EC13EA2}" type="slidenum">
               <a:rPr lang="en-US" smtClean="0"/>
-              <a:t>19</a:t>
+              <a:t>18</a:t>
             </a:fld>
             <a:endParaRPr lang="en-US"/>
           </a:p>
@@ -12238,7 +13028,7 @@
           <a:p>
             <a:fld id="{D6607EED-2C17-4005-9FF9-5E7D14817CFB}" type="slidenum">
               <a:rPr lang="en-US" smtClean="0"/>
-              <a:t>20</a:t>
+              <a:t>19</a:t>
             </a:fld>
             <a:endParaRPr lang="en-US"/>
           </a:p>
@@ -12623,7 +13413,7 @@
 </file>
 
 <file path=ppt/slides/slide20.xml><?xml version="1.0" encoding="utf-8"?>
-<p:sld xmlns:a="http://schemas.openxmlformats.org/drawingml/2006/main" xmlns:p="http://schemas.openxmlformats.org/presentationml/2006/main" xmlns:r="http://schemas.openxmlformats.org/officeDocument/2006/relationships">
+<p:sld xmlns:a="http://schemas.openxmlformats.org/drawingml/2006/main" xmlns:r="http://schemas.openxmlformats.org/officeDocument/2006/relationships" xmlns:p="http://schemas.openxmlformats.org/presentationml/2006/main">
   <p:cSld>
     <p:spTree>
       <p:nvGrpSpPr>
@@ -12631,7 +13421,14 @@
         <p:cNvGrpSpPr/>
         <p:nvPr/>
       </p:nvGrpSpPr>
-      <p:grpSpPr/>
+      <p:grpSpPr>
+        <a:xfrm>
+          <a:off x="0" y="0"/>
+          <a:ext cx="0" cy="0"/>
+          <a:chOff x="0" y="0"/>
+          <a:chExt cx="0" cy="0"/>
+        </a:xfrm>
+      </p:grpSpPr>
       <p:sp>
         <p:nvSpPr>
           <p:cNvPr id="3" name="Title 2"/>
@@ -12677,7 +13474,7 @@
           <a:p>
             <a:fld id="{9ABD6463-1069-4796-B206-4858CF08A11C}" type="slidenum">
               <a:rPr lang="en-US" smtClean="0"/>
-              <a:t>36</a:t>
+              <a:t>20</a:t>
             </a:fld>
             <a:endParaRPr lang="en-US"/>
           </a:p>
@@ -13344,7 +14141,7 @@
           <a:p>
             <a:fld id="{3DC31DEB-C161-48EB-8EC4-D4D18487B0EB}" type="slidenum">
               <a:rPr lang="en-US" smtClean="0"/>
-              <a:t>23</a:t>
+              <a:t>22</a:t>
             </a:fld>
             <a:endParaRPr lang="en-US"/>
           </a:p>
@@ -13808,7 +14605,7 @@
       </p:cxnSp>
       <p:sp>
         <p:nvSpPr>
-          <p:cNvPr id="930" name="FooterBand"/>
+          <p:cNvPr id="2" name="FooterBand"/>
           <p:cNvSpPr/>
           <p:nvPr/>
         </p:nvSpPr>
@@ -13928,7 +14725,7 @@
           <a:p>
             <a:fld id="{CB54B3D1-5BA3-40A8-8017-74A0DF3C7182}" type="slidenum">
               <a:rPr lang="en-US" smtClean="0"/>
-              <a:t>22</a:t>
+              <a:t>23</a:t>
             </a:fld>
             <a:endParaRPr lang="en-US"/>
           </a:p>
@@ -14642,7 +15439,7 @@
       </p:sp>
       <p:sp>
         <p:nvSpPr>
-          <p:cNvPr id="930" name="GroupLabel"/>
+          <p:cNvPr id="2" name="GroupLabel"/>
           <p:cNvSpPr/>
           <p:nvPr/>
         </p:nvSpPr>
@@ -14694,7 +15491,7 @@
       </p:sp>
       <p:sp>
         <p:nvSpPr>
-          <p:cNvPr id="930" name="GroupLabel"/>
+          <p:cNvPr id="4" name="GroupLabel"/>
           <p:cNvSpPr/>
           <p:nvPr/>
         </p:nvSpPr>
@@ -14818,7 +15615,7 @@
           <a:p>
             <a:fld id="{5CEC7D30-3F3A-40A5-AB25-FC380CDCDC59}" type="slidenum">
               <a:rPr lang="en-US" smtClean="0"/>
-              <a:t>27</a:t>
+              <a:t>24</a:t>
             </a:fld>
             <a:endParaRPr lang="en-US"/>
           </a:p>
@@ -15020,7 +15817,7 @@
           <a:p>
             <a:fld id="{5853B7DD-E055-4162-94C7-77FA73E23512}" type="slidenum">
               <a:rPr lang="en-US" smtClean="0"/>
-              <a:t>29</a:t>
+              <a:t>25</a:t>
             </a:fld>
             <a:endParaRPr lang="en-US"/>
           </a:p>
@@ -15325,7 +16122,7 @@
           <a:p>
             <a:fld id="{F164AA00-212F-409D-8EDE-8F6B572B597D}" type="slidenum">
               <a:rPr lang="en-US" smtClean="0"/>
-              <a:t>31</a:t>
+              <a:t>26</a:t>
             </a:fld>
             <a:endParaRPr lang="en-US"/>
           </a:p>
@@ -15505,7 +16302,7 @@
       </p:sp>
       <p:sp>
         <p:nvSpPr>
-          <p:cNvPr id="901" name="Card"/>
+          <p:cNvPr id="2" name="Card"/>
           <p:cNvSpPr/>
           <p:nvPr/>
         </p:nvSpPr>
@@ -15574,7 +16371,7 @@
       </p:sp>
       <p:sp>
         <p:nvSpPr>
-          <p:cNvPr id="901" name="Card"/>
+          <p:cNvPr id="4" name="Card"/>
           <p:cNvSpPr/>
           <p:nvPr/>
         </p:nvSpPr>
@@ -15711,7 +16508,7 @@
           <a:p>
             <a:fld id="{6A1DACA4-9A95-4C77-B245-2C307F8CACFD}" type="slidenum">
               <a:rPr lang="en-US" smtClean="0"/>
-              <a:t>30</a:t>
+              <a:t>27</a:t>
             </a:fld>
             <a:endParaRPr lang="en-US"/>
           </a:p>
@@ -15894,7 +16691,7 @@
 </file>
 
 <file path=ppt/slides/slide28.xml><?xml version="1.0" encoding="utf-8"?>
-<p:sld xmlns:a="http://schemas.openxmlformats.org/drawingml/2006/main" xmlns:p="http://schemas.openxmlformats.org/presentationml/2006/main" xmlns:r="http://schemas.openxmlformats.org/officeDocument/2006/relationships">
+<p:sld xmlns:a="http://schemas.openxmlformats.org/drawingml/2006/main" xmlns:r="http://schemas.openxmlformats.org/officeDocument/2006/relationships" xmlns:p="http://schemas.openxmlformats.org/presentationml/2006/main">
   <p:cSld>
     <p:spTree>
       <p:nvGrpSpPr>
@@ -15902,7 +16699,14 @@
         <p:cNvGrpSpPr/>
         <p:nvPr/>
       </p:nvGrpSpPr>
-      <p:grpSpPr/>
+      <p:grpSpPr>
+        <a:xfrm>
+          <a:off x="0" y="0"/>
+          <a:ext cx="0" cy="0"/>
+          <a:chOff x="0" y="0"/>
+          <a:chExt cx="0" cy="0"/>
+        </a:xfrm>
+      </p:grpSpPr>
       <p:sp>
         <p:nvSpPr>
           <p:cNvPr id="3" name="Title 2"/>
@@ -15953,7 +16757,7 @@
           <a:p>
             <a:fld id="{54DE72B0-FFEB-4C83-B4BD-F25961BEDFCA}" type="slidenum">
               <a:rPr lang="en-US" smtClean="0"/>
-              <a:t>35</a:t>
+              <a:t>28</a:t>
             </a:fld>
             <a:endParaRPr lang="en-US"/>
           </a:p>
@@ -16332,7 +17136,7 @@
       </p:sp>
       <p:sp>
         <p:nvSpPr>
-          <p:cNvPr id="903" name="Card"/>
+          <p:cNvPr id="2" name="Card"/>
           <p:cNvSpPr/>
           <p:nvPr/>
         </p:nvSpPr>
@@ -16386,7 +17190,7 @@
       </p:sp>
       <p:sp>
         <p:nvSpPr>
-          <p:cNvPr id="903" name="Card"/>
+          <p:cNvPr id="4" name="Card"/>
           <p:cNvSpPr/>
           <p:nvPr/>
         </p:nvSpPr>
@@ -16440,7 +17244,7 @@
       </p:sp>
       <p:sp>
         <p:nvSpPr>
-          <p:cNvPr id="913" name="ColumnHeading"/>
+          <p:cNvPr id="5" name="ColumnHeading"/>
           <p:cNvSpPr/>
           <p:nvPr/>
         </p:nvSpPr>
@@ -16495,7 +17299,7 @@
       </p:sp>
       <p:sp>
         <p:nvSpPr>
-          <p:cNvPr id="913" name="ColumnHeading"/>
+          <p:cNvPr id="6" name="ColumnHeading"/>
           <p:cNvSpPr/>
           <p:nvPr/>
         </p:nvSpPr>
@@ -16618,7 +17422,7 @@
           <a:p>
             <a:fld id="{AFA6771E-93A8-4AA7-A54D-D336B382D315}" type="slidenum">
               <a:rPr lang="en-US" smtClean="0"/>
-              <a:t>32</a:t>
+              <a:t>29</a:t>
             </a:fld>
             <a:endParaRPr lang="en-US"/>
           </a:p>
@@ -16880,7 +17684,7 @@
 </file>
 
 <file path=ppt/slides/slide3.xml><?xml version="1.0" encoding="utf-8"?>
-<p:sld xmlns:a="http://schemas.openxmlformats.org/drawingml/2006/main" xmlns:p="http://schemas.openxmlformats.org/presentationml/2006/main" xmlns:r="http://schemas.openxmlformats.org/officeDocument/2006/relationships">
+<p:sld xmlns:a="http://schemas.openxmlformats.org/drawingml/2006/main" xmlns:r="http://schemas.openxmlformats.org/officeDocument/2006/relationships" xmlns:p="http://schemas.openxmlformats.org/presentationml/2006/main">
   <p:cSld>
     <p:spTree>
       <p:nvGrpSpPr>
@@ -16888,7 +17692,14 @@
         <p:cNvGrpSpPr/>
         <p:nvPr/>
       </p:nvGrpSpPr>
-      <p:grpSpPr/>
+      <p:grpSpPr>
+        <a:xfrm>
+          <a:off x="0" y="0"/>
+          <a:ext cx="0" cy="0"/>
+          <a:chOff x="0" y="0"/>
+          <a:chExt cx="0" cy="0"/>
+        </a:xfrm>
+      </p:grpSpPr>
       <p:sp>
         <p:nvSpPr>
           <p:cNvPr id="3" name="Title 2"/>
@@ -16934,7 +17745,7 @@
           <a:p>
             <a:fld id="{9ABD6463-1069-4796-B206-4858CF08A11C}" type="slidenum">
               <a:rPr lang="en-US" smtClean="0"/>
-              <a:t>36</a:t>
+              <a:t>3</a:t>
             </a:fld>
             <a:endParaRPr lang="en-US"/>
           </a:p>
@@ -16948,8 +17759,8 @@
         </p:nvSpPr>
         <p:spPr>
           <a:xfrm>
-            <a:off x="548640" y="1051560"/>
-            <a:ext cx="8046720" cy="4727448"/>
+            <a:off x="138574" y="784096"/>
+            <a:ext cx="8866852" cy="5955476"/>
           </a:xfrm>
           <a:prstGeom prst="rect">
             <a:avLst/>
@@ -16964,40 +17775,79 @@
           <a:p>
             <a:pPr algn="l"/>
             <a:r>
-              <a:rPr sz="2000" b="1" i="0">
+              <a:rPr sz="2400" b="1" i="0" dirty="0">
                 <a:solidFill>
                   <a:srgbClr val="5C4826"/>
                 </a:solidFill>
               </a:rPr>
               <a:t>Volkswagen wanted to sell diesel cars in the United States. Diesel engines offered attractive fuel economy and performance, but U.S. regulations imposed increasingly strict limits on nitrogen oxide (NOx) emissions.</a:t>
             </a:r>
+            <a:endParaRPr lang="en-US" sz="2400" b="1" i="0" dirty="0">
+              <a:solidFill>
+                <a:srgbClr val="5C4826"/>
+              </a:solidFill>
+            </a:endParaRPr>
           </a:p>
           <a:p>
             <a:pPr algn="l"/>
-            <a:r>
-              <a:rPr sz="2000" b="1" i="0">
+            <a:endParaRPr sz="2400" b="1" i="0" dirty="0">
+              <a:solidFill>
+                <a:srgbClr val="5C4826"/>
+              </a:solidFill>
+            </a:endParaRPr>
+          </a:p>
+          <a:p>
+            <a:pPr algn="l"/>
+            <a:r>
+              <a:rPr sz="2400" b="1" i="0" dirty="0">
                 <a:solidFill>
                   <a:srgbClr val="5C4826"/>
                 </a:solidFill>
               </a:rPr>
               <a:t>In the mid-2000s, Volkswagen engineers struggled to produce engines that simultaneously met emissions limits, performance expectations, and commercial objectives.</a:t>
             </a:r>
+            <a:endParaRPr lang="en-US" sz="2400" b="1" i="0" dirty="0">
+              <a:solidFill>
+                <a:srgbClr val="5C4826"/>
+              </a:solidFill>
+            </a:endParaRPr>
           </a:p>
           <a:p>
             <a:pPr algn="l"/>
-            <a:r>
-              <a:rPr sz="2000" b="1" i="0">
+            <a:endParaRPr sz="2400" b="1" i="0" dirty="0">
+              <a:solidFill>
+                <a:srgbClr val="5C4826"/>
+              </a:solidFill>
+            </a:endParaRPr>
+          </a:p>
+          <a:p>
+            <a:pPr algn="l"/>
+            <a:r>
+              <a:rPr sz="2400" b="1" i="0" dirty="0">
                 <a:solidFill>
                   <a:srgbClr val="5C4826"/>
                 </a:solidFill>
               </a:rPr>
               <a:t>Volkswagen ultimately sold vehicles containing software that recognized regulatory emissions tests and changed engine behavior during testing. The cars could pass laboratory tests while producing substantially higher emissions during ordinary driving.</a:t>
             </a:r>
+            <a:endParaRPr lang="en-US" sz="2400" b="1" dirty="0">
+              <a:solidFill>
+                <a:srgbClr val="5C4826"/>
+              </a:solidFill>
+            </a:endParaRPr>
           </a:p>
           <a:p>
             <a:pPr algn="l"/>
-            <a:r>
-              <a:rPr sz="2000" b="1" i="0">
+            <a:endParaRPr sz="2400" b="1" i="0" dirty="0">
+              <a:solidFill>
+                <a:srgbClr val="5C4826"/>
+              </a:solidFill>
+            </a:endParaRPr>
+          </a:p>
+          <a:p>
+            <a:pPr algn="l"/>
+            <a:r>
+              <a:rPr sz="2400" b="1" i="0" dirty="0">
                 <a:solidFill>
                   <a:srgbClr val="5C4826"/>
                 </a:solidFill>
@@ -17098,7 +17948,7 @@
           <a:p>
             <a:fld id="{7288240E-6A77-4EF8-962D-68D6FAD0FBF7}" type="slidenum">
               <a:rPr lang="en-US" smtClean="0"/>
-              <a:t>33</a:t>
+              <a:t>30</a:t>
             </a:fld>
             <a:endParaRPr lang="en-US"/>
           </a:p>
@@ -17239,7 +18089,7 @@
 </file>
 
 <file path=ppt/slides/slide31.xml><?xml version="1.0" encoding="utf-8"?>
-<p:sld xmlns:a="http://schemas.openxmlformats.org/drawingml/2006/main" xmlns:p="http://schemas.openxmlformats.org/presentationml/2006/main" xmlns:r="http://schemas.openxmlformats.org/officeDocument/2006/relationships">
+<p:sld xmlns:a="http://schemas.openxmlformats.org/drawingml/2006/main" xmlns:r="http://schemas.openxmlformats.org/officeDocument/2006/relationships" xmlns:p="http://schemas.openxmlformats.org/presentationml/2006/main">
   <p:cSld>
     <p:spTree>
       <p:nvGrpSpPr>
@@ -17247,7 +18097,14 @@
         <p:cNvGrpSpPr/>
         <p:nvPr/>
       </p:nvGrpSpPr>
-      <p:grpSpPr/>
+      <p:grpSpPr>
+        <a:xfrm>
+          <a:off x="0" y="0"/>
+          <a:ext cx="0" cy="0"/>
+          <a:chOff x="0" y="0"/>
+          <a:chExt cx="0" cy="0"/>
+        </a:xfrm>
+      </p:grpSpPr>
       <p:sp>
         <p:nvSpPr>
           <p:cNvPr id="3" name="Title 2"/>
@@ -17298,7 +18155,7 @@
           <a:p>
             <a:fld id="{54DE72B0-FFEB-4C83-B4BD-F25961BEDFCA}" type="slidenum">
               <a:rPr lang="en-US" smtClean="0"/>
-              <a:t>35</a:t>
+              <a:t>31</a:t>
             </a:fld>
             <a:endParaRPr lang="en-US"/>
           </a:p>
@@ -17932,7 +18789,7 @@
 </file>
 
 <file path=ppt/slides/slide32.xml><?xml version="1.0" encoding="utf-8"?>
-<p:sld xmlns:a="http://schemas.openxmlformats.org/drawingml/2006/main" xmlns:p="http://schemas.openxmlformats.org/presentationml/2006/main" xmlns:r="http://schemas.openxmlformats.org/officeDocument/2006/relationships">
+<p:sld xmlns:a="http://schemas.openxmlformats.org/drawingml/2006/main" xmlns:r="http://schemas.openxmlformats.org/officeDocument/2006/relationships" xmlns:p="http://schemas.openxmlformats.org/presentationml/2006/main">
   <p:cSld>
     <p:spTree>
       <p:nvGrpSpPr>
@@ -17940,7 +18797,14 @@
         <p:cNvGrpSpPr/>
         <p:nvPr/>
       </p:nvGrpSpPr>
-      <p:grpSpPr/>
+      <p:grpSpPr>
+        <a:xfrm>
+          <a:off x="0" y="0"/>
+          <a:ext cx="0" cy="0"/>
+          <a:chOff x="0" y="0"/>
+          <a:chExt cx="0" cy="0"/>
+        </a:xfrm>
+      </p:grpSpPr>
       <p:sp>
         <p:nvSpPr>
           <p:cNvPr id="3" name="Title 2"/>
@@ -17991,7 +18855,7 @@
           <a:p>
             <a:fld id="{54DE72B0-FFEB-4C83-B4BD-F25961BEDFCA}" type="slidenum">
               <a:rPr lang="en-US" smtClean="0"/>
-              <a:t>35</a:t>
+              <a:t>32</a:t>
             </a:fld>
             <a:endParaRPr lang="en-US"/>
           </a:p>
@@ -18691,7 +19555,7 @@
           <a:p>
             <a:fld id="{54DE72B0-FFEB-4C83-B4BD-F25961BEDFCA}" type="slidenum">
               <a:rPr lang="en-US" smtClean="0"/>
-              <a:t>35</a:t>
+              <a:t>33</a:t>
             </a:fld>
             <a:endParaRPr lang="en-US"/>
           </a:p>
@@ -19070,7 +19934,7 @@
       </p:sp>
       <p:sp>
         <p:nvSpPr>
-          <p:cNvPr id="909" name="Block"/>
+          <p:cNvPr id="2" name="Block"/>
           <p:cNvSpPr/>
           <p:nvPr/>
         </p:nvSpPr>
@@ -19122,7 +19986,7 @@
       </p:sp>
       <p:sp>
         <p:nvSpPr>
-          <p:cNvPr id="903" name="Card"/>
+          <p:cNvPr id="4" name="Card"/>
           <p:cNvSpPr/>
           <p:nvPr/>
         </p:nvSpPr>
@@ -19176,7 +20040,7 @@
       </p:sp>
       <p:sp>
         <p:nvSpPr>
-          <p:cNvPr id="903" name="Card"/>
+          <p:cNvPr id="5" name="Card"/>
           <p:cNvSpPr/>
           <p:nvPr/>
         </p:nvSpPr>
@@ -19230,7 +20094,7 @@
       </p:sp>
       <p:sp>
         <p:nvSpPr>
-          <p:cNvPr id="903" name="Card"/>
+          <p:cNvPr id="6" name="Card"/>
           <p:cNvSpPr/>
           <p:nvPr/>
         </p:nvSpPr>
@@ -19284,7 +20148,7 @@
       </p:sp>
       <p:sp>
         <p:nvSpPr>
-          <p:cNvPr id="913" name="ColumnHeading"/>
+          <p:cNvPr id="7" name="ColumnHeading"/>
           <p:cNvSpPr/>
           <p:nvPr/>
         </p:nvSpPr>
@@ -19339,7 +20203,7 @@
       </p:sp>
       <p:sp>
         <p:nvSpPr>
-          <p:cNvPr id="913" name="ColumnHeading"/>
+          <p:cNvPr id="8" name="ColumnHeading"/>
           <p:cNvSpPr/>
           <p:nvPr/>
         </p:nvSpPr>
@@ -19462,7 +20326,7 @@
           <a:p>
             <a:fld id="{9ABD6463-1069-4796-B206-4858CF08A11C}" type="slidenum">
               <a:rPr lang="en-US" smtClean="0"/>
-              <a:t>36</a:t>
+              <a:t>34</a:t>
             </a:fld>
             <a:endParaRPr lang="en-US"/>
           </a:p>
@@ -19889,7 +20753,7 @@
       </p:sp>
       <p:sp>
         <p:nvSpPr>
-          <p:cNvPr id="901" name="Qualification"/>
+          <p:cNvPr id="4" name="Qualification"/>
           <p:cNvSpPr txBox="1"/>
           <p:nvPr/>
         </p:nvSpPr>
@@ -19991,7 +20855,7 @@
           <a:p>
             <a:fld id="{5A78CA05-E47A-4617-B951-D407706858B7}" type="slidenum">
               <a:rPr lang="en-US" smtClean="0"/>
-              <a:t>3</a:t>
+              <a:t>4</a:t>
             </a:fld>
             <a:endParaRPr lang="en-US"/>
           </a:p>
@@ -20283,7 +21147,7 @@
           <a:p>
             <a:pPr algn="ctr"/>
             <a:r>
-              <a:rPr sz="2000" b="1" i="0">
+              <a:rPr sz="2000" b="1" i="0" dirty="0">
                 <a:solidFill>
                   <a:srgbClr val="FFFFFF"/>
                 </a:solidFill>
@@ -20476,6 +21340,84 @@
   <p:clrMapOvr>
     <a:masterClrMapping/>
   </p:clrMapOvr>
+  <p:timing>
+    <p:tnLst>
+      <p:par>
+        <p:cTn id="1" dur="indefinite" restart="never" nodeType="tmRoot">
+          <p:childTnLst>
+            <p:seq concurrent="1" nextAc="seek">
+              <p:cTn id="2" dur="indefinite" nodeType="mainSeq">
+                <p:childTnLst>
+                  <p:par>
+                    <p:cTn id="3" fill="hold">
+                      <p:stCondLst>
+                        <p:cond delay="indefinite"/>
+                      </p:stCondLst>
+                      <p:childTnLst>
+                        <p:par>
+                          <p:cTn id="4" fill="hold">
+                            <p:stCondLst>
+                              <p:cond delay="0"/>
+                            </p:stCondLst>
+                            <p:childTnLst>
+                              <p:par>
+                                <p:cTn id="5" presetID="1" presetClass="entr" presetSubtype="0" fill="hold" grpId="0" nodeType="clickEffect">
+                                  <p:stCondLst>
+                                    <p:cond delay="0"/>
+                                  </p:stCondLst>
+                                  <p:childTnLst>
+                                    <p:set>
+                                      <p:cBhvr>
+                                        <p:cTn id="6" dur="1" fill="hold">
+                                          <p:stCondLst>
+                                            <p:cond delay="0"/>
+                                          </p:stCondLst>
+                                        </p:cTn>
+                                        <p:tgtEl>
+                                          <p:spTgt spid="906"/>
+                                        </p:tgtEl>
+                                        <p:attrNameLst>
+                                          <p:attrName>style.visibility</p:attrName>
+                                        </p:attrNameLst>
+                                      </p:cBhvr>
+                                      <p:to>
+                                        <p:strVal val="visible"/>
+                                      </p:to>
+                                    </p:set>
+                                  </p:childTnLst>
+                                </p:cTn>
+                              </p:par>
+                            </p:childTnLst>
+                          </p:cTn>
+                        </p:par>
+                      </p:childTnLst>
+                    </p:cTn>
+                  </p:par>
+                </p:childTnLst>
+              </p:cTn>
+              <p:prevCondLst>
+                <p:cond evt="onPrev" delay="0">
+                  <p:tgtEl>
+                    <p:sldTgt/>
+                  </p:tgtEl>
+                </p:cond>
+              </p:prevCondLst>
+              <p:nextCondLst>
+                <p:cond evt="onNext" delay="0">
+                  <p:tgtEl>
+                    <p:sldTgt/>
+                  </p:tgtEl>
+                </p:cond>
+              </p:nextCondLst>
+            </p:seq>
+          </p:childTnLst>
+        </p:cTn>
+      </p:par>
+    </p:tnLst>
+    <p:bldLst>
+      <p:bldP spid="906" grpId="0" animBg="1"/>
+    </p:bldLst>
+  </p:timing>
 </p:sld>
 </file>
 
@@ -20541,7 +21483,7 @@
           <a:p>
             <a:fld id="{6A358935-6B48-4518-B358-4C99ECF38DBC}" type="slidenum">
               <a:rPr lang="en-US" smtClean="0"/>
-              <a:t>4</a:t>
+              <a:t>5</a:t>
             </a:fld>
             <a:endParaRPr lang="en-US"/>
           </a:p>
@@ -20769,8 +21711,8 @@
         </p:nvSpPr>
         <p:spPr>
           <a:xfrm>
-            <a:off x="548640" y="4343400"/>
-            <a:ext cx="8046720" cy="868680"/>
+            <a:off x="822960" y="4334024"/>
+            <a:ext cx="8046720" cy="969496"/>
           </a:xfrm>
           <a:prstGeom prst="rect">
             <a:avLst/>
@@ -20785,7 +21727,7 @@
           <a:p>
             <a:pPr algn="l"/>
             <a:r>
-              <a:rPr sz="2000" b="1" i="0">
+              <a:rPr sz="2000" b="1" i="0" dirty="0">
                 <a:solidFill>
                   <a:srgbClr val="5C4826"/>
                 </a:solidFill>
@@ -20793,12 +21735,20 @@
               <a:t>DOJ: </a:t>
             </a:r>
             <a:r>
-              <a:rPr sz="2000" b="0" i="0">
+              <a:rPr lang="en-US" sz="2000" b="0" i="0" dirty="0">
                 <a:solidFill>
                   <a:srgbClr val="555960"/>
                 </a:solidFill>
               </a:rPr>
-              <a:t>engineers concluded they could not produce the desired engine that both met the stricter U.S. NOx standard and attracted sufficient U.S. customer demand.</a:t>
+              <a:t>VW e</a:t>
+            </a:r>
+            <a:r>
+              <a:rPr sz="2000" b="0" i="0" dirty="0">
+                <a:solidFill>
+                  <a:srgbClr val="555960"/>
+                </a:solidFill>
+              </a:rPr>
+              <a:t>ngineers concluded they could not produce the desired engine that both met the stricter U.S. NOx standard and attracted sufficient U.S. customer demand.</a:t>
             </a:r>
           </a:p>
         </p:txBody>
@@ -20999,6 +21949,84 @@
   <p:clrMapOvr>
     <a:masterClrMapping/>
   </p:clrMapOvr>
+  <p:timing>
+    <p:tnLst>
+      <p:par>
+        <p:cTn id="1" dur="indefinite" restart="never" nodeType="tmRoot">
+          <p:childTnLst>
+            <p:seq concurrent="1" nextAc="seek">
+              <p:cTn id="2" dur="indefinite" nodeType="mainSeq">
+                <p:childTnLst>
+                  <p:par>
+                    <p:cTn id="3" fill="hold">
+                      <p:stCondLst>
+                        <p:cond delay="indefinite"/>
+                      </p:stCondLst>
+                      <p:childTnLst>
+                        <p:par>
+                          <p:cTn id="4" fill="hold">
+                            <p:stCondLst>
+                              <p:cond delay="0"/>
+                            </p:stCondLst>
+                            <p:childTnLst>
+                              <p:par>
+                                <p:cTn id="5" presetID="1" presetClass="entr" presetSubtype="0" fill="hold" grpId="0" nodeType="clickEffect">
+                                  <p:stCondLst>
+                                    <p:cond delay="0"/>
+                                  </p:stCondLst>
+                                  <p:childTnLst>
+                                    <p:set>
+                                      <p:cBhvr>
+                                        <p:cTn id="6" dur="1" fill="hold">
+                                          <p:stCondLst>
+                                            <p:cond delay="0"/>
+                                          </p:stCondLst>
+                                        </p:cTn>
+                                        <p:tgtEl>
+                                          <p:spTgt spid="909"/>
+                                        </p:tgtEl>
+                                        <p:attrNameLst>
+                                          <p:attrName>style.visibility</p:attrName>
+                                        </p:attrNameLst>
+                                      </p:cBhvr>
+                                      <p:to>
+                                        <p:strVal val="visible"/>
+                                      </p:to>
+                                    </p:set>
+                                  </p:childTnLst>
+                                </p:cTn>
+                              </p:par>
+                            </p:childTnLst>
+                          </p:cTn>
+                        </p:par>
+                      </p:childTnLst>
+                    </p:cTn>
+                  </p:par>
+                </p:childTnLst>
+              </p:cTn>
+              <p:prevCondLst>
+                <p:cond evt="onPrev" delay="0">
+                  <p:tgtEl>
+                    <p:sldTgt/>
+                  </p:tgtEl>
+                </p:cond>
+              </p:prevCondLst>
+              <p:nextCondLst>
+                <p:cond evt="onNext" delay="0">
+                  <p:tgtEl>
+                    <p:sldTgt/>
+                  </p:tgtEl>
+                </p:cond>
+              </p:nextCondLst>
+            </p:seq>
+          </p:childTnLst>
+        </p:cTn>
+      </p:par>
+    </p:tnLst>
+    <p:bldLst>
+      <p:bldP spid="909" grpId="0" animBg="1"/>
+    </p:bldLst>
+  </p:timing>
 </p:sld>
 </file>
 
@@ -21067,7 +22095,7 @@
           <a:p>
             <a:fld id="{6A358935-6B48-4518-B358-4C99ECF38DBC}" type="slidenum">
               <a:rPr lang="en-US" smtClean="0"/>
-              <a:t>5</a:t>
+              <a:t>6</a:t>
             </a:fld>
             <a:endParaRPr lang="en-US"/>
           </a:p>
@@ -21672,7 +22700,7 @@
         <p:spPr>
           <a:xfrm>
             <a:off x="411480" y="868680"/>
-            <a:ext cx="2240280" cy="1463040"/>
+            <a:ext cx="2103117" cy="1277273"/>
           </a:xfrm>
           <a:prstGeom prst="rect">
             <a:avLst/>
@@ -21687,7 +22715,7 @@
           <a:p>
             <a:pPr algn="l"/>
             <a:r>
-              <a:rPr sz="2000" b="0" i="1">
+              <a:rPr sz="2000" b="0" i="1" dirty="0">
                 <a:solidFill>
                   <a:srgbClr val="5C4826"/>
                 </a:solidFill>
@@ -21754,6 +22782,84 @@
   <p:clrMapOvr>
     <a:masterClrMapping/>
   </p:clrMapOvr>
+  <p:timing>
+    <p:tnLst>
+      <p:par>
+        <p:cTn id="1" dur="indefinite" restart="never" nodeType="tmRoot">
+          <p:childTnLst>
+            <p:seq concurrent="1" nextAc="seek">
+              <p:cTn id="2" dur="indefinite" nodeType="mainSeq">
+                <p:childTnLst>
+                  <p:par>
+                    <p:cTn id="3" fill="hold">
+                      <p:stCondLst>
+                        <p:cond delay="indefinite"/>
+                      </p:stCondLst>
+                      <p:childTnLst>
+                        <p:par>
+                          <p:cTn id="4" fill="hold">
+                            <p:stCondLst>
+                              <p:cond delay="0"/>
+                            </p:stCondLst>
+                            <p:childTnLst>
+                              <p:par>
+                                <p:cTn id="5" presetID="1" presetClass="entr" presetSubtype="0" fill="hold" grpId="0" nodeType="clickEffect">
+                                  <p:stCondLst>
+                                    <p:cond delay="0"/>
+                                  </p:stCondLst>
+                                  <p:childTnLst>
+                                    <p:set>
+                                      <p:cBhvr>
+                                        <p:cTn id="6" dur="1" fill="hold">
+                                          <p:stCondLst>
+                                            <p:cond delay="0"/>
+                                          </p:stCondLst>
+                                        </p:cTn>
+                                        <p:tgtEl>
+                                          <p:spTgt spid="912"/>
+                                        </p:tgtEl>
+                                        <p:attrNameLst>
+                                          <p:attrName>style.visibility</p:attrName>
+                                        </p:attrNameLst>
+                                      </p:cBhvr>
+                                      <p:to>
+                                        <p:strVal val="visible"/>
+                                      </p:to>
+                                    </p:set>
+                                  </p:childTnLst>
+                                </p:cTn>
+                              </p:par>
+                            </p:childTnLst>
+                          </p:cTn>
+                        </p:par>
+                      </p:childTnLst>
+                    </p:cTn>
+                  </p:par>
+                </p:childTnLst>
+              </p:cTn>
+              <p:prevCondLst>
+                <p:cond evt="onPrev" delay="0">
+                  <p:tgtEl>
+                    <p:sldTgt/>
+                  </p:tgtEl>
+                </p:cond>
+              </p:prevCondLst>
+              <p:nextCondLst>
+                <p:cond evt="onNext" delay="0">
+                  <p:tgtEl>
+                    <p:sldTgt/>
+                  </p:tgtEl>
+                </p:cond>
+              </p:nextCondLst>
+            </p:seq>
+          </p:childTnLst>
+        </p:cTn>
+      </p:par>
+    </p:tnLst>
+    <p:bldLst>
+      <p:bldP spid="912" grpId="0" animBg="1"/>
+    </p:bldLst>
+  </p:timing>
 </p:sld>
 </file>
 
@@ -21824,7 +22930,7 @@
           <a:p>
             <a:fld id="{00393831-13B8-4D2E-92B4-CA000F66A112}" type="slidenum">
               <a:rPr lang="en-US" smtClean="0"/>
-              <a:t>6</a:t>
+              <a:t>7</a:t>
             </a:fld>
             <a:endParaRPr lang="en-US"/>
           </a:p>
@@ -22431,7 +23537,7 @@
           <a:p>
             <a:pPr algn="l"/>
             <a:r>
-              <a:rPr sz="2000" b="1" i="0">
+              <a:rPr sz="2000" b="1" i="0" dirty="0">
                 <a:solidFill>
                   <a:srgbClr val="5C4826"/>
                 </a:solidFill>
@@ -22439,7 +23545,7 @@
               <a:t>EPA: </a:t>
             </a:r>
             <a:r>
-              <a:rPr sz="2000" b="0" i="0">
+              <a:rPr sz="2000" b="0" i="0" dirty="0">
                 <a:solidFill>
                   <a:srgbClr val="555960"/>
                 </a:solidFill>
@@ -22447,7 +23553,7 @@
               <a:t>affected vehicles contained software designed to evade federal emissions tests. </a:t>
             </a:r>
             <a:r>
-              <a:rPr sz="2000" b="1" i="0">
+              <a:rPr sz="2000" b="1" i="0" dirty="0">
                 <a:solidFill>
                   <a:srgbClr val="5C4826"/>
                 </a:solidFill>
@@ -22455,7 +23561,7 @@
               <a:t>DOJ </a:t>
             </a:r>
             <a:r>
-              <a:rPr sz="2000" b="0" i="0">
+              <a:rPr sz="2000" b="0" i="0" dirty="0">
                 <a:solidFill>
                   <a:srgbClr val="555960"/>
                 </a:solidFill>
@@ -22587,6 +23693,130 @@
   <p:clrMapOvr>
     <a:masterClrMapping/>
   </p:clrMapOvr>
+  <p:timing>
+    <p:tnLst>
+      <p:par>
+        <p:cTn id="1" dur="indefinite" restart="never" nodeType="tmRoot">
+          <p:childTnLst>
+            <p:seq concurrent="1" nextAc="seek">
+              <p:cTn id="2" dur="indefinite" nodeType="mainSeq">
+                <p:childTnLst>
+                  <p:par>
+                    <p:cTn id="3" fill="hold">
+                      <p:stCondLst>
+                        <p:cond delay="indefinite"/>
+                      </p:stCondLst>
+                      <p:childTnLst>
+                        <p:par>
+                          <p:cTn id="4" fill="hold">
+                            <p:stCondLst>
+                              <p:cond delay="0"/>
+                            </p:stCondLst>
+                            <p:childTnLst>
+                              <p:par>
+                                <p:cTn id="5" presetID="1" presetClass="entr" presetSubtype="0" fill="hold" grpId="0" nodeType="clickEffect">
+                                  <p:stCondLst>
+                                    <p:cond delay="0"/>
+                                  </p:stCondLst>
+                                  <p:childTnLst>
+                                    <p:set>
+                                      <p:cBhvr>
+                                        <p:cTn id="6" dur="1" fill="hold">
+                                          <p:stCondLst>
+                                            <p:cond delay="0"/>
+                                          </p:stCondLst>
+                                        </p:cTn>
+                                        <p:tgtEl>
+                                          <p:spTgt spid="914"/>
+                                        </p:tgtEl>
+                                        <p:attrNameLst>
+                                          <p:attrName>style.visibility</p:attrName>
+                                        </p:attrNameLst>
+                                      </p:cBhvr>
+                                      <p:to>
+                                        <p:strVal val="visible"/>
+                                      </p:to>
+                                    </p:set>
+                                  </p:childTnLst>
+                                </p:cTn>
+                              </p:par>
+                            </p:childTnLst>
+                          </p:cTn>
+                        </p:par>
+                      </p:childTnLst>
+                    </p:cTn>
+                  </p:par>
+                  <p:par>
+                    <p:cTn id="7" fill="hold">
+                      <p:stCondLst>
+                        <p:cond delay="indefinite"/>
+                      </p:stCondLst>
+                      <p:childTnLst>
+                        <p:par>
+                          <p:cTn id="8" fill="hold">
+                            <p:stCondLst>
+                              <p:cond delay="0"/>
+                            </p:stCondLst>
+                            <p:childTnLst>
+                              <p:par>
+                                <p:cTn id="9" presetID="1" presetClass="entr" presetSubtype="0" fill="hold" grpId="0" nodeType="clickEffect">
+                                  <p:stCondLst>
+                                    <p:cond delay="0"/>
+                                  </p:stCondLst>
+                                  <p:childTnLst>
+                                    <p:set>
+                                      <p:cBhvr>
+                                        <p:cTn id="10" dur="1" fill="hold">
+                                          <p:stCondLst>
+                                            <p:cond delay="0"/>
+                                          </p:stCondLst>
+                                        </p:cTn>
+                                        <p:tgtEl>
+                                          <p:spTgt spid="915"/>
+                                        </p:tgtEl>
+                                        <p:attrNameLst>
+                                          <p:attrName>style.visibility</p:attrName>
+                                        </p:attrNameLst>
+                                      </p:cBhvr>
+                                      <p:to>
+                                        <p:strVal val="visible"/>
+                                      </p:to>
+                                    </p:set>
+                                  </p:childTnLst>
+                                </p:cTn>
+                              </p:par>
+                            </p:childTnLst>
+                          </p:cTn>
+                        </p:par>
+                      </p:childTnLst>
+                    </p:cTn>
+                  </p:par>
+                </p:childTnLst>
+              </p:cTn>
+              <p:prevCondLst>
+                <p:cond evt="onPrev" delay="0">
+                  <p:tgtEl>
+                    <p:sldTgt/>
+                  </p:tgtEl>
+                </p:cond>
+              </p:prevCondLst>
+              <p:nextCondLst>
+                <p:cond evt="onNext" delay="0">
+                  <p:tgtEl>
+                    <p:sldTgt/>
+                  </p:tgtEl>
+                </p:cond>
+              </p:nextCondLst>
+            </p:seq>
+          </p:childTnLst>
+        </p:cTn>
+      </p:par>
+    </p:tnLst>
+    <p:bldLst>
+      <p:bldP spid="914" grpId="0"/>
+      <p:bldP spid="915" grpId="0" animBg="1"/>
+    </p:bldLst>
+  </p:timing>
 </p:sld>
 </file>
 
@@ -22652,7 +23882,7 @@
           <a:p>
             <a:fld id="{49A14B3B-9B77-43F2-8B18-8EDBEC27936C}" type="slidenum">
               <a:rPr lang="en-US" smtClean="0"/>
-              <a:t>7</a:t>
+              <a:t>8</a:t>
             </a:fld>
             <a:endParaRPr lang="en-US"/>
           </a:p>
@@ -22764,7 +23994,7 @@
           <a:p>
             <a:pPr algn="l"/>
             <a:r>
-              <a:rPr sz="2000" b="1" i="0">
+              <a:rPr sz="2000" b="1" i="0" dirty="0">
                 <a:solidFill>
                   <a:srgbClr val="5C4826"/>
                 </a:solidFill>
@@ -22772,7 +24002,7 @@
               <a:t>November 2006. </a:t>
             </a:r>
             <a:r>
-              <a:rPr sz="2000" b="0" i="0">
+              <a:rPr sz="2000" b="0" i="0" dirty="0">
                 <a:solidFill>
                   <a:srgbClr val="555960"/>
                 </a:solidFill>
@@ -22780,7 +24010,7 @@
               <a:t>The supervisor, briefed on its purpose and design, decided production should continue; the plea agreement records the instruction, in substance, as </a:t>
             </a:r>
             <a:r>
-              <a:rPr sz="2000" b="1" i="0">
+              <a:rPr sz="2000" b="1" i="0" dirty="0">
                 <a:solidFill>
                   <a:srgbClr val="9A3F12"/>
                 </a:solidFill>
@@ -22799,7 +24029,7 @@
         <p:spPr>
           <a:xfrm>
             <a:off x="411480" y="3520440"/>
-            <a:ext cx="8321040" cy="960120"/>
+            <a:ext cx="8321040" cy="1122364"/>
           </a:xfrm>
           <a:prstGeom prst="rect">
             <a:avLst/>
@@ -22834,12 +24064,20 @@
           <a:p>
             <a:pPr algn="l"/>
             <a:r>
-              <a:rPr sz="2000" b="1" i="0">
+              <a:rPr sz="2000" b="1" i="0" dirty="0">
                 <a:solidFill>
                   <a:srgbClr val="5C4826"/>
                 </a:solidFill>
               </a:rPr>
-              <a:t>Reconsidered, and continued. October 2007: technical problems and internal disagreement were raised, and the supervisor authorized proceeding. Not a rogue patch — calibration, integration, certification, maintenance, and delegated work.</a:t>
+              <a:t>October 2007</a:t>
+            </a:r>
+            <a:r>
+              <a:rPr sz="2000" i="0" dirty="0">
+                <a:solidFill>
+                  <a:srgbClr val="5C4826"/>
+                </a:solidFill>
+              </a:rPr>
+              <a:t>: technical problems and internal disagreement were raised, and the supervisor authorized proceeding. Not a rogue patch — calibration, integration, certification, maintenance, and delegated work.</a:t>
             </a:r>
           </a:p>
         </p:txBody>
@@ -22852,8 +24090,8 @@
         </p:nvSpPr>
         <p:spPr>
           <a:xfrm>
-            <a:off x="411480" y="4709160"/>
-            <a:ext cx="8321040" cy="502920"/>
+            <a:off x="411480" y="4888053"/>
+            <a:ext cx="8321040" cy="661720"/>
           </a:xfrm>
           <a:prstGeom prst="rect">
             <a:avLst/>
@@ -22868,12 +24106,28 @@
           <a:p>
             <a:pPr algn="ctr"/>
             <a:r>
-              <a:rPr sz="2000" b="1" i="0">
+              <a:rPr sz="2000" b="1" i="0" dirty="0">
                 <a:solidFill>
                   <a:srgbClr val="8E6F3E"/>
                 </a:solidFill>
               </a:rPr>
-              <a:t>How many people does it take to sustain this in hundreds of thousands of U.S. vehicles?</a:t>
+              <a:t>How many people does it take to sustain this </a:t>
+            </a:r>
+            <a:endParaRPr lang="en-US" sz="2000" b="1" i="0" dirty="0">
+              <a:solidFill>
+                <a:srgbClr val="8E6F3E"/>
+              </a:solidFill>
+            </a:endParaRPr>
+          </a:p>
+          <a:p>
+            <a:pPr algn="ctr"/>
+            <a:r>
+              <a:rPr sz="2000" b="1" i="0" dirty="0">
+                <a:solidFill>
+                  <a:srgbClr val="8E6F3E"/>
+                </a:solidFill>
+              </a:rPr>
+              <a:t>in hundreds of thousands of U.S. vehicles?</a:t>
             </a:r>
           </a:p>
         </p:txBody>
@@ -22935,6 +24189,222 @@
   <p:clrMapOvr>
     <a:masterClrMapping/>
   </p:clrMapOvr>
+  <p:timing>
+    <p:tnLst>
+      <p:par>
+        <p:cTn id="1" dur="indefinite" restart="never" nodeType="tmRoot">
+          <p:childTnLst>
+            <p:seq concurrent="1" nextAc="seek">
+              <p:cTn id="2" dur="indefinite" nodeType="mainSeq">
+                <p:childTnLst>
+                  <p:par>
+                    <p:cTn id="3" fill="hold">
+                      <p:stCondLst>
+                        <p:cond delay="indefinite"/>
+                      </p:stCondLst>
+                      <p:childTnLst>
+                        <p:par>
+                          <p:cTn id="4" fill="hold">
+                            <p:stCondLst>
+                              <p:cond delay="0"/>
+                            </p:stCondLst>
+                            <p:childTnLst>
+                              <p:par>
+                                <p:cTn id="5" presetID="1" presetClass="entr" presetSubtype="0" fill="hold" grpId="0" nodeType="clickEffect">
+                                  <p:stCondLst>
+                                    <p:cond delay="0"/>
+                                  </p:stCondLst>
+                                  <p:childTnLst>
+                                    <p:set>
+                                      <p:cBhvr>
+                                        <p:cTn id="6" dur="1" fill="hold">
+                                          <p:stCondLst>
+                                            <p:cond delay="0"/>
+                                          </p:stCondLst>
+                                        </p:cTn>
+                                        <p:tgtEl>
+                                          <p:spTgt spid="902"/>
+                                        </p:tgtEl>
+                                        <p:attrNameLst>
+                                          <p:attrName>style.visibility</p:attrName>
+                                        </p:attrNameLst>
+                                      </p:cBhvr>
+                                      <p:to>
+                                        <p:strVal val="visible"/>
+                                      </p:to>
+                                    </p:set>
+                                  </p:childTnLst>
+                                </p:cTn>
+                              </p:par>
+                            </p:childTnLst>
+                          </p:cTn>
+                        </p:par>
+                      </p:childTnLst>
+                    </p:cTn>
+                  </p:par>
+                  <p:par>
+                    <p:cTn id="7" fill="hold">
+                      <p:stCondLst>
+                        <p:cond delay="indefinite"/>
+                      </p:stCondLst>
+                      <p:childTnLst>
+                        <p:par>
+                          <p:cTn id="8" fill="hold">
+                            <p:stCondLst>
+                              <p:cond delay="0"/>
+                            </p:stCondLst>
+                            <p:childTnLst>
+                              <p:par>
+                                <p:cTn id="9" presetID="1" presetClass="entr" presetSubtype="0" fill="hold" grpId="0" nodeType="clickEffect">
+                                  <p:stCondLst>
+                                    <p:cond delay="0"/>
+                                  </p:stCondLst>
+                                  <p:childTnLst>
+                                    <p:set>
+                                      <p:cBhvr>
+                                        <p:cTn id="10" dur="1" fill="hold">
+                                          <p:stCondLst>
+                                            <p:cond delay="0"/>
+                                          </p:stCondLst>
+                                        </p:cTn>
+                                        <p:tgtEl>
+                                          <p:spTgt spid="903"/>
+                                        </p:tgtEl>
+                                        <p:attrNameLst>
+                                          <p:attrName>style.visibility</p:attrName>
+                                        </p:attrNameLst>
+                                      </p:cBhvr>
+                                      <p:to>
+                                        <p:strVal val="visible"/>
+                                      </p:to>
+                                    </p:set>
+                                  </p:childTnLst>
+                                </p:cTn>
+                              </p:par>
+                            </p:childTnLst>
+                          </p:cTn>
+                        </p:par>
+                      </p:childTnLst>
+                    </p:cTn>
+                  </p:par>
+                  <p:par>
+                    <p:cTn id="11" fill="hold">
+                      <p:stCondLst>
+                        <p:cond delay="indefinite"/>
+                      </p:stCondLst>
+                      <p:childTnLst>
+                        <p:par>
+                          <p:cTn id="12" fill="hold">
+                            <p:stCondLst>
+                              <p:cond delay="0"/>
+                            </p:stCondLst>
+                            <p:childTnLst>
+                              <p:par>
+                                <p:cTn id="13" presetID="1" presetClass="entr" presetSubtype="0" fill="hold" grpId="0" nodeType="clickEffect">
+                                  <p:stCondLst>
+                                    <p:cond delay="0"/>
+                                  </p:stCondLst>
+                                  <p:childTnLst>
+                                    <p:set>
+                                      <p:cBhvr>
+                                        <p:cTn id="14" dur="1" fill="hold">
+                                          <p:stCondLst>
+                                            <p:cond delay="0"/>
+                                          </p:stCondLst>
+                                        </p:cTn>
+                                        <p:tgtEl>
+                                          <p:spTgt spid="904"/>
+                                        </p:tgtEl>
+                                        <p:attrNameLst>
+                                          <p:attrName>style.visibility</p:attrName>
+                                        </p:attrNameLst>
+                                      </p:cBhvr>
+                                      <p:to>
+                                        <p:strVal val="visible"/>
+                                      </p:to>
+                                    </p:set>
+                                  </p:childTnLst>
+                                </p:cTn>
+                              </p:par>
+                            </p:childTnLst>
+                          </p:cTn>
+                        </p:par>
+                      </p:childTnLst>
+                    </p:cTn>
+                  </p:par>
+                  <p:par>
+                    <p:cTn id="15" fill="hold">
+                      <p:stCondLst>
+                        <p:cond delay="indefinite"/>
+                      </p:stCondLst>
+                      <p:childTnLst>
+                        <p:par>
+                          <p:cTn id="16" fill="hold">
+                            <p:stCondLst>
+                              <p:cond delay="0"/>
+                            </p:stCondLst>
+                            <p:childTnLst>
+                              <p:par>
+                                <p:cTn id="17" presetID="1" presetClass="entr" presetSubtype="0" fill="hold" grpId="0" nodeType="clickEffect">
+                                  <p:stCondLst>
+                                    <p:cond delay="0"/>
+                                  </p:stCondLst>
+                                  <p:childTnLst>
+                                    <p:set>
+                                      <p:cBhvr>
+                                        <p:cTn id="18" dur="1" fill="hold">
+                                          <p:stCondLst>
+                                            <p:cond delay="0"/>
+                                          </p:stCondLst>
+                                        </p:cTn>
+                                        <p:tgtEl>
+                                          <p:spTgt spid="905"/>
+                                        </p:tgtEl>
+                                        <p:attrNameLst>
+                                          <p:attrName>style.visibility</p:attrName>
+                                        </p:attrNameLst>
+                                      </p:cBhvr>
+                                      <p:to>
+                                        <p:strVal val="visible"/>
+                                      </p:to>
+                                    </p:set>
+                                  </p:childTnLst>
+                                </p:cTn>
+                              </p:par>
+                            </p:childTnLst>
+                          </p:cTn>
+                        </p:par>
+                      </p:childTnLst>
+                    </p:cTn>
+                  </p:par>
+                </p:childTnLst>
+              </p:cTn>
+              <p:prevCondLst>
+                <p:cond evt="onPrev" delay="0">
+                  <p:tgtEl>
+                    <p:sldTgt/>
+                  </p:tgtEl>
+                </p:cond>
+              </p:prevCondLst>
+              <p:nextCondLst>
+                <p:cond evt="onNext" delay="0">
+                  <p:tgtEl>
+                    <p:sldTgt/>
+                  </p:tgtEl>
+                </p:cond>
+              </p:nextCondLst>
+            </p:seq>
+          </p:childTnLst>
+        </p:cTn>
+      </p:par>
+    </p:tnLst>
+    <p:bldLst>
+      <p:bldP spid="902" grpId="0" animBg="1"/>
+      <p:bldP spid="903" grpId="0" animBg="1"/>
+      <p:bldP spid="904" grpId="0"/>
+      <p:bldP spid="905" grpId="0" animBg="1"/>
+    </p:bldLst>
+  </p:timing>
 </p:sld>
 </file>
 
@@ -23721,8 +25191,8 @@
         </p:nvSpPr>
         <p:spPr>
           <a:xfrm>
-            <a:off x="411480" y="3246120"/>
-            <a:ext cx="8321040" cy="1463040"/>
+            <a:off x="1780350" y="3276556"/>
+            <a:ext cx="5308979" cy="1585049"/>
           </a:xfrm>
           <a:prstGeom prst="rect">
             <a:avLst/>
@@ -23735,22 +25205,46 @@
           </a:bodyPr>
           <a:lstStyle/>
           <a:p>
-            <a:pPr algn="l"/>
-            <a:r>
-              <a:rPr sz="2000" b="1" i="0">
+            <a:pPr algn="ctr"/>
+            <a:r>
+              <a:rPr sz="2000" b="1" i="0" dirty="0">
                 <a:solidFill>
                   <a:srgbClr val="5C4826"/>
                 </a:solidFill>
               </a:rPr>
               <a:t>The certification was not a one-time failure. </a:t>
             </a:r>
-            <a:r>
-              <a:rPr sz="2000" b="0" i="0">
+            <a:endParaRPr lang="en-US" sz="2000" b="1" i="0" dirty="0">
+              <a:solidFill>
+                <a:srgbClr val="5C4826"/>
+              </a:solidFill>
+            </a:endParaRPr>
+          </a:p>
+          <a:p>
+            <a:pPr algn="ctr"/>
+            <a:endParaRPr lang="en-US" sz="2000" b="1" i="0" dirty="0">
+              <a:solidFill>
+                <a:srgbClr val="5C4826"/>
+              </a:solidFill>
+            </a:endParaRPr>
+          </a:p>
+          <a:p>
+            <a:pPr algn="ctr"/>
+            <a:r>
+              <a:rPr sz="2000" b="1" i="0" dirty="0">
                 <a:solidFill>
                   <a:srgbClr val="555960"/>
                 </a:solidFill>
               </a:rPr>
-              <a:t>DOJ: false certifications continued model year after model year, with employees meeting EPA/CARB and concealing the defeat device.</a:t>
+              <a:t>DOJ</a:t>
+            </a:r>
+            <a:r>
+              <a:rPr sz="2000" b="0" i="0" dirty="0">
+                <a:solidFill>
+                  <a:srgbClr val="555960"/>
+                </a:solidFill>
+              </a:rPr>
+              <a:t>: false certifications continued model year after model year, with employees meeting EPA/CARB and concealing the defeat device.</a:t>
             </a:r>
           </a:p>
         </p:txBody>
@@ -23763,8 +25257,8 @@
         </p:nvSpPr>
         <p:spPr>
           <a:xfrm>
-            <a:off x="274320" y="5513831"/>
-            <a:ext cx="8595360" cy="905256"/>
+            <a:off x="274320" y="5786651"/>
+            <a:ext cx="8595360" cy="632436"/>
           </a:xfrm>
           <a:prstGeom prst="rect">
             <a:avLst/>
@@ -23797,7 +25291,7 @@
           <a:p>
             <a:pPr algn="ctr"/>
             <a:r>
-              <a:rPr sz="2000" b="1" i="0">
+              <a:rPr sz="2000" b="1" i="0" dirty="0">
                 <a:solidFill>
                   <a:srgbClr val="FFFFFF"/>
                 </a:solidFill>
@@ -23812,6 +25306,84 @@
   <p:clrMapOvr>
     <a:masterClrMapping/>
   </p:clrMapOvr>
+  <p:timing>
+    <p:tnLst>
+      <p:par>
+        <p:cTn id="1" dur="indefinite" restart="never" nodeType="tmRoot">
+          <p:childTnLst>
+            <p:seq concurrent="1" nextAc="seek">
+              <p:cTn id="2" dur="indefinite" nodeType="mainSeq">
+                <p:childTnLst>
+                  <p:par>
+                    <p:cTn id="3" fill="hold">
+                      <p:stCondLst>
+                        <p:cond delay="indefinite"/>
+                      </p:stCondLst>
+                      <p:childTnLst>
+                        <p:par>
+                          <p:cTn id="4" fill="hold">
+                            <p:stCondLst>
+                              <p:cond delay="0"/>
+                            </p:stCondLst>
+                            <p:childTnLst>
+                              <p:par>
+                                <p:cTn id="5" presetID="1" presetClass="entr" presetSubtype="0" fill="hold" grpId="0" nodeType="clickEffect">
+                                  <p:stCondLst>
+                                    <p:cond delay="0"/>
+                                  </p:stCondLst>
+                                  <p:childTnLst>
+                                    <p:set>
+                                      <p:cBhvr>
+                                        <p:cTn id="6" dur="1" fill="hold">
+                                          <p:stCondLst>
+                                            <p:cond delay="0"/>
+                                          </p:stCondLst>
+                                        </p:cTn>
+                                        <p:tgtEl>
+                                          <p:spTgt spid="903"/>
+                                        </p:tgtEl>
+                                        <p:attrNameLst>
+                                          <p:attrName>style.visibility</p:attrName>
+                                        </p:attrNameLst>
+                                      </p:cBhvr>
+                                      <p:to>
+                                        <p:strVal val="visible"/>
+                                      </p:to>
+                                    </p:set>
+                                  </p:childTnLst>
+                                </p:cTn>
+                              </p:par>
+                            </p:childTnLst>
+                          </p:cTn>
+                        </p:par>
+                      </p:childTnLst>
+                    </p:cTn>
+                  </p:par>
+                </p:childTnLst>
+              </p:cTn>
+              <p:prevCondLst>
+                <p:cond evt="onPrev" delay="0">
+                  <p:tgtEl>
+                    <p:sldTgt/>
+                  </p:tgtEl>
+                </p:cond>
+              </p:prevCondLst>
+              <p:nextCondLst>
+                <p:cond evt="onNext" delay="0">
+                  <p:tgtEl>
+                    <p:sldTgt/>
+                  </p:tgtEl>
+                </p:cond>
+              </p:nextCondLst>
+            </p:seq>
+          </p:childTnLst>
+        </p:cTn>
+      </p:par>
+    </p:tnLst>
+    <p:bldLst>
+      <p:bldP spid="903" grpId="0" animBg="1"/>
+    </p:bldLst>
+  </p:timing>
 </p:sld>
 </file>
 

--- a/course/lectures/act-2-delegation-and-control/04-failure-aware-engineering/2-4-Failure-Aware-Engineering.pptx
+++ b/course/lectures/act-2-delegation-and-control/04-failure-aware-engineering/2-4-Failure-Aware-Engineering.pptx
@@ -1427,6 +1427,16 @@
               <a:t>SOURCES: CrowdStrike RCA, 6 Aug 2024, for every number on this slide.</a:t>
             </a:r>
           </a:p>
+          <a:p>
+            <a:r>
+              <a:t>PACING (author): do not over-dwell on the technical mechanism — students need the INTERFACE MISMATCH, not the full Falcon content-processing architecture. Keep the walk-through under two minutes of the five.</a:t>
+            </a:r>
+          </a:p>
+          <a:p>
+            <a:r>
+              <a:t>TERMINOLOGY (stays in notes, off the slide): the Template Type defines the 21 fields; Template Instances are the content built against it; the Content Validator checked instances against the Template Type's 21 fields; the Content Interpreter consumed the integration code's 20-entry input array and, directed by the first non-wildcard 21st matching criterion, attempted the [20] access.</a:t>
+            </a:r>
+          </a:p>
         </p:txBody>
       </p:sp>
       <p:sp>
@@ -1537,6 +1547,11 @@
               <a:t>SOURCES: CrowdStrike RCA, 6 Aug 2024 (the bounds-check mitigation, backported to Windows sensor 7.11 and later).</a:t>
             </a:r>
           </a:p>
+          <a:p>
+            <a:r>
+              <a:t>CORRECTION FOLDED IN: the first node reads 'incompatible content + interpreter', not 'defective content'. This was not a malformed file breaking an otherwise-correct interpreter — it was incompatible assumptions across the template definition, the integration code, the validator, and the interpreter. 'Repair the defect' therefore means repairing the incompatibility, not one content artifact; a content-only fix would leave the same mismatch armed for the next instance.</a:t>
+            </a:r>
+          </a:p>
         </p:txBody>
       </p:sp>
       <p:sp>
@@ -1604,7 +1619,7 @@
           <a:lstStyle/>
           <a:p>
             <a:r>
-              <a:t>TIMING: 4 minutes. MAKE THEM COMMIT BEFORE THEY KNOW MORE.</a:t>
+              <a:t>TIMING: 4 minutes — PROTECT 3 of them for the discussion (author pacing note). MAKE THEM COMMIT BEFORE THEY KNOW MORE.</a:t>
             </a:r>
           </a:p>
           <a:p>
@@ -2499,12 +2514,22 @@
           </a:p>
           <a:p>
             <a:r>
-              <a:t>ENGINEERING POINT: a controller can make an unsafe decision because its process model is inaccurate, its feedback is inadequate, or its available control actions are insufficient — all three without anyone being negligent. For this release, the process model said 'the Content Validator passed it, so it is safe'; that model was wrong about what the validator actually checked (21 fields against the 20 supplied — RCA finding 4).</a:t>
-            </a:r>
-          </a:p>
-          <a:p>
-            <a:r>
-              <a:t>CARE: this is a SIMPLIFIED INSTRUCTIONAL control structure. Do not claim every depicted feedback path existed or operated during the incident, and do not invent telemetry, approvals, or rollout stages the RCA does not document. What the RCA does document: no staged rollout for Template Instances, and a remediation commitment to canary deployment rings with rollback and customer control over Rapid Response Content deployment (CrowdStrike RCA, 6 Aug 2024).</a:t>
+              <a:t>ENGINEERING POINT: a controller can make an unsafe decision because its process model is inaccurate, its feedback is inadequate, or its available control actions are insufficient — all three without anyone being negligent.</a:t>
+            </a:r>
+          </a:p>
+          <a:p>
+            <a:r>
+              <a:t>DOCUMENTED (CrowdStrike RCA, 6 Aug 2024): the Content Validator validated Template Instances against the Template Type's 21 fields while the integration code supplied 20 (finding 4); Template Instances deployed to all endpoints with no staged rollout (finding 6); committed mitigations include canary deployment rings with rollback and customer control over Rapid Response Content deployment.</a:t>
+            </a:r>
+          </a:p>
+          <a:p>
+            <a:r>
+              <a:t>INTERPRETATION (ours, not the RCA's): the release organization's effective process model amounted to 'the Content Validator passed it, so it is safe to distribute' — and that model was wrong about what the validator actually checked. The RCA documents the validator defect; reading it as a controller's inaccurate process model is our STAMP-framed interpretation.</a:t>
+            </a:r>
+          </a:p>
+          <a:p>
+            <a:r>
+              <a:t>PROPOSED (instructional): the control structure drawn here is simplified. Do not claim every depicted feedback path existed or operated during the incident, and do not invent telemetry, approvals, or rollout stages the RCA does not document.</a:t>
             </a:r>
           </a:p>
           <a:p>
@@ -2599,12 +2624,17 @@
           </a:p>
           <a:p>
             <a:r>
-              <a:t>QUALIFICATION: this constraint is a CANDIDATE requirement for critical-service operators, not a documented universal obligation that existed before the outage.</a:t>
-            </a:r>
-          </a:p>
-          <a:p>
-            <a:r>
-              <a:t>FACTUAL BACKGROUND: CrowdStrike controls its software and content distribution. Customer organizations control aspects of deployment, continuity arrangements, and recovery. OS vendors control platform architecture. The responsibilities overlap but are not interchangeable: an enterprise cannot repair CrowdStrike's content-processing implementation; CrowdStrike cannot determine a hospital's continuity architecture.</a:t>
+              <a:t>DOCUMENTED: CrowdStrike controls its software and content distribution, and committed to giving customers control over Rapid Response Content deployment (RCA, 6 Aug 2024); affected organizations performed recovery across sectors (Microsoft, 20 Jul 2024). What any specific enterprise could or could not control is NOT documented in these sources.</a:t>
+            </a:r>
+          </a:p>
+          <a:p>
+            <a:r>
+              <a:t>INTERPRETATION (ours): the division of control drawn here — vendor release controls versus enterprise deployment and continuity controls — is a responsibility-allocation argument, not a finding of the postmortem. An enterprise cannot repair CrowdStrike's content-processing implementation; CrowdStrike cannot determine a hospital's continuity architecture.</a:t>
+            </a:r>
+          </a:p>
+          <a:p>
+            <a:r>
+              <a:t>PROPOSED (candidate requirement): the safety constraint itself. It is a candidate obligation for critical-service operators, not a documented universal obligation that existed before the outage.</a:t>
             </a:r>
           </a:p>
           <a:p>
@@ -2694,12 +2724,17 @@
           </a:p>
           <a:p>
             <a:r>
-              <a:t>ENGINEERING POINT: common-cause failure — multiple components or organizations fail together because they share a dependency, condition, or mechanism. Redundancy provides limited protection when the redundant elements share the same vulnerability: a thousand machines running the same privileged component are not a thousand independent defenses against that component's failure.</a:t>
-            </a:r>
-          </a:p>
-          <a:p>
-            <a:r>
-              <a:t>FACTUAL SAFEGUARDS: the outage establishes widespread correlated EXPOSURE to CrowdStrike's software. It does NOT establish that every affected organization relied exclusively on CrowdStrike for endpoint security. Keep vendor concentration, shared software dependencies, and absence of redundancy distinct — related but different properties. Scale stays qualified: ~8.5M devices, under 1% of Windows machines (Microsoft, 20 Jul 2024).</a:t>
+              <a:t>ENGINEERING POINT: common-cause failure — multiple components or organizations fail together because they share a dependency, condition, or mechanism. The caption states the principle exactly: replication does not provide independence when replicas share the same failure mode. A thousand machines running the same privileged component are not a thousand independent defenses against that component's failure. That is an engineering principle, NOT a claim about any particular organization's redundancy architecture.</a:t>
+            </a:r>
+          </a:p>
+          <a:p>
+            <a:r>
+              <a:t>DOCUMENTED: ~8.5 million Windows devices affected — under 1% of all Windows machines (Microsoft, 20 Jul 2024); one defective content update was the shared trigger (CrowdStrike RCA, 6 Aug 2024).</a:t>
+            </a:r>
+          </a:p>
+          <a:p>
+            <a:r>
+              <a:t>INTERPRETATION (ours): the simultaneous multi-sector disruption is explained by correlated exposure to a shared privileged dependency. The incident does NOT establish that affected organizations had redundancy, that redundancy failed, or that any organization relied exclusively on CrowdStrike for endpoint security. Keep vendor concentration, shared software dependencies, and absence of redundancy distinct — related but different properties.</a:t>
             </a:r>
           </a:p>
           <a:p>
@@ -2709,7 +2744,7 @@
           </a:p>
           <a:p>
             <a:r>
-              <a:t>EXPECTED ANSWERS: students name redundant SERVERS. Push to the sharper question: the issue is not how many machines an organization runs, but how independently its essential functions can continue when a shared dependency fails.</a:t>
+              <a:t>EXPECTED ANSWERS: students name redundant SERVERS. Push to the sharper question: not how many machines an organization runs, but how independently its essential functions can continue when a shared dependency fails.</a:t>
             </a:r>
           </a:p>
           <a:p>
@@ -2784,7 +2819,7 @@
           <a:lstStyle/>
           <a:p>
             <a:r>
-              <a:t>TIMING: 4 minutes. THE MAIN RISK SLIDE — do not let it become an argument for mandatory vendor diversity.</a:t>
+              <a:t>TIMING: 4 minutes — PROTECT the discussion: 'what independence should critical services actually require?' deserves the time (author pacing note). THE MAIN RISK SLIDE — do not let it become an argument for mandatory vendor diversity.</a:t>
             </a:r>
           </a:p>
           <a:p>
@@ -2794,12 +2829,17 @@
           </a:p>
           <a:p>
             <a:r>
-              <a:t>WHY VENDOR DIVERSITY IS NOT THE ANSWER KEY: two products may share an operating system, a cloud service, a configuration mechanism, or an administrative control plane — diversity of vendor names does not establish independence of failure modes. Conversely, an organization can obtain real resilience without a second endpoint product.</a:t>
-            </a:r>
-          </a:p>
-          <a:p>
-            <a:r>
-              <a:t>EPISTEMIC LADDER (keep it visible): OBSERVED — one vendor update produced widespread correlated failures. INFERRED — shared privileged dependencies created a common-cause vulnerability. PROPOSED — critical infrastructure might require more independence. UNRESOLVED — whether mandatory diversity would have helped, and whether its benefits justify its costs.</a:t>
+              <a:t>DOCUMENTED: one vendor update produced widespread correlated failures (CrowdStrike RCA, 6 Aug 2024; Microsoft, 20 Jul 2024).</a:t>
+            </a:r>
+          </a:p>
+          <a:p>
+            <a:r>
+              <a:t>INTERPRETATION (ours): shared privileged dependencies created a common-cause vulnerability across organizations.</a:t>
+            </a:r>
+          </a:p>
+          <a:p>
+            <a:r>
+              <a:t>PROPOSED — and explicitly UNRESOLVED: critical infrastructure might require more independence; whether mandatory vendor diversity would have prevented this incident, and whether its benefits justify its costs, is unresolved. Two products may share an operating system, a cloud service, a configuration mechanism, or an administrative control plane — diversity of vendor names does not establish independence of failure modes. Conversely, an organization can obtain real resilience without a second endpoint product.</a:t>
             </a:r>
           </a:p>
           <a:p>
@@ -2884,12 +2924,22 @@
           </a:p>
           <a:p>
             <a:r>
-              <a:t>ENGINEERING POINT: controllers exist above the vendor, and the causal account may extend beyond the authority of the engineer conducting the investigation. A vendor can repair its software and release controls. A critical-service operator can change procurement, deployment, and continuity requirements. A sector authority may be able to impose resilience obligations across organizations — where its legal mandate permits. A cause outside your authority still belongs in the account; the response is to identify the responsible controller and ESCALATE the proposed intervention, not to omit the cause.</a:t>
-            </a:r>
-          </a:p>
-          <a:p>
-            <a:r>
-              <a:t>CARE: the diagram is conceptual. Do not imply every sector has a regulator empowered to mandate the proposed controls, and do not slide from 'a failure analysis reveals a systemic risk' to 'regulation is necessary' — necessity, effectiveness, and proportionality are further engineering and policy judgments requiring evidence.</a:t>
+              <a:t>ENGINEERING POINT: controllers exist above the vendor, and each level pairs a control action with the feedback it needs — read the diagram as control AND feedback, not as a hierarchy of rank. STAMP without feedback is just an org chart. A cause outside your authority still belongs in the account; the response is to identify the responsible controller and ESCALATE the proposed intervention, not to omit the cause.</a:t>
+            </a:r>
+          </a:p>
+          <a:p>
+            <a:r>
+              <a:t>DOCUMENTED vs HYPOTHETICAL (the dashed edge): enterprise deployment and recovery controls, and operators' continuity policies, are ordinary existing arrangements of the kind the incident exercised. A sector authority imposing resilience requirements for endpoint-security failure is a HYPOTHETICAL addition to the control structure — drawn dashed. Not every sector has a regulator empowered to mandate such controls, and no source in this lecture documents one that did so for this incident.</a:t>
+            </a:r>
+          </a:p>
+          <a:p>
+            <a:r>
+              <a:t>INTERPRETATION (ours): reading the outage as evidence of a systemic risk that some controller should manage is our interpretation of the documented exposure, not a finding of the RCA.</a:t>
+            </a:r>
+          </a:p>
+          <a:p>
+            <a:r>
+              <a:t>PROPOSED: any specific obligation at any level of this diagram. A failure analysis may reveal a systemic risk without establishing that regulation is necessary, effective, or proportionate — those are further engineering and policy judgments requiring evidence.</a:t>
             </a:r>
           </a:p>
           <a:p>
@@ -2899,7 +2949,7 @@
           </a:p>
           <a:p>
             <a:r>
-              <a:t>EXPECTED ANSWERS: 'the government should require it.' Push back with the epistemic ladder from the last slide: proposed is not validated. Also surface the reverse misconception — 'if it's outside our authority it's out of scope.' Escalation is an engineering act.</a:t>
+              <a:t>EXPECTED ANSWERS: 'the government should require it.' Push back with the epistemic ladder: proposed is not validated. Also surface the reverse misconception — 'if it's outside our authority it's out of scope.' Escalation is an engineering act.</a:t>
             </a:r>
           </a:p>
           <a:p>
@@ -12557,7 +12607,7 @@
                   <a:srgbClr val="5C4826"/>
                 </a:solidFill>
               </a:rPr>
-              <a:t>Redundancy did not help — every replica shared the same dependency.</a:t>
+              <a:t>Replication does not provide independence when replicas share the same failure mode.</a:t>
             </a:r>
           </a:p>
         </p:txBody>
@@ -13575,6 +13625,7 @@
             <a:solidFill>
               <a:srgbClr val="8E6F3E"/>
             </a:solidFill>
+            <a:prstDash val="dash"/>
             <a:tailEnd type="triangle"/>
           </a:ln>
         </p:spPr>
@@ -13937,8 +13988,8 @@
         </p:nvSpPr>
         <p:spPr>
           <a:xfrm>
-            <a:off x="640080" y="2377440"/>
-            <a:ext cx="2103120" cy="731520"/>
+            <a:off x="502920" y="1737360"/>
+            <a:ext cx="2331720" cy="594360"/>
           </a:xfrm>
           <a:prstGeom prst="rect">
             <a:avLst/>
@@ -13953,23 +14004,23 @@
           <a:p>
             <a:pPr algn="r"/>
             <a:r>
-              <a:rPr sz="2000" b="0" i="0">
+              <a:rPr sz="1200" b="0" i="0">
                 <a:solidFill>
                   <a:srgbClr val="555960"/>
                 </a:solidFill>
               </a:rPr>
-              <a:t>requirements,</a:t>
+              <a:t>resilience requirements ↓</a:t>
             </a:r>
           </a:p>
           <a:p>
             <a:pPr algn="r"/>
             <a:r>
-              <a:rPr sz="2000" b="0" i="0">
+              <a:rPr sz="1200" b="0" i="0">
                 <a:solidFill>
                   <a:srgbClr val="555960"/>
                 </a:solidFill>
               </a:rPr>
-              <a:t>policies ↓</a:t>
+              <a:t>(hypothetical)</a:t>
             </a:r>
           </a:p>
         </p:txBody>
@@ -13982,8 +14033,8 @@
         </p:nvSpPr>
         <p:spPr>
           <a:xfrm>
-            <a:off x="6400800" y="2377440"/>
-            <a:ext cx="2194560" cy="731520"/>
+            <a:off x="6309360" y="1783080"/>
+            <a:ext cx="2651760" cy="365760"/>
           </a:xfrm>
           <a:prstGeom prst="rect">
             <a:avLst/>
@@ -13998,23 +14049,12 @@
           <a:p>
             <a:pPr algn="l"/>
             <a:r>
-              <a:rPr sz="2000" b="0" i="0">
+              <a:rPr sz="1200" b="0" i="0">
                 <a:solidFill>
                   <a:srgbClr val="555960"/>
                 </a:solidFill>
               </a:rPr>
-              <a:t>↑ reports, evidence,</a:t>
-            </a:r>
-          </a:p>
-          <a:p>
-            <a:pPr algn="l"/>
-            <a:r>
-              <a:rPr sz="2000" b="0" i="0">
-                <a:solidFill>
-                  <a:srgbClr val="555960"/>
-                </a:solidFill>
-              </a:rPr>
-              <a:t>operational feedback</a:t>
+              <a:t>↑ incident reports, evidence</a:t>
             </a:r>
           </a:p>
         </p:txBody>
@@ -14027,8 +14067,8 @@
         </p:nvSpPr>
         <p:spPr>
           <a:xfrm>
-            <a:off x="548640" y="5440680"/>
-            <a:ext cx="8046720" cy="347472"/>
+            <a:off x="548640" y="5212080"/>
+            <a:ext cx="8046720" cy="594360"/>
           </a:xfrm>
           <a:prstGeom prst="rect">
             <a:avLst/>
@@ -14043,12 +14083,23 @@
           <a:p>
             <a:pPr algn="ctr"/>
             <a:r>
-              <a:rPr sz="1400" b="0" i="0">
+              <a:rPr sz="1300" b="0" i="0">
                 <a:solidFill>
                   <a:srgbClr val="5C4826"/>
                 </a:solidFill>
               </a:rPr>
               <a:t>Not every sector has a regulator empowered to mandate these controls.</a:t>
+            </a:r>
+          </a:p>
+          <a:p>
+            <a:pPr algn="ctr"/>
+            <a:r>
+              <a:rPr sz="1300" b="0" i="0">
+                <a:solidFill>
+                  <a:srgbClr val="5C4826"/>
+                </a:solidFill>
+              </a:rPr>
+              <a:t>Dashed control = hypothetical addition to the structure, not a documented arrangement.</a:t>
             </a:r>
           </a:p>
         </p:txBody>
@@ -14101,6 +14152,142 @@
                 </a:solidFill>
               </a:rPr>
               <a:t>Which controller has the authority to enforce independence?</a:t>
+            </a:r>
+          </a:p>
+        </p:txBody>
+      </p:sp>
+      <p:sp>
+        <p:nvSpPr>
+          <p:cNvPr id="1001" name="Label"/>
+          <p:cNvSpPr txBox="1"/>
+          <p:nvPr/>
+        </p:nvSpPr>
+        <p:spPr>
+          <a:xfrm>
+            <a:off x="502920" y="2743200"/>
+            <a:ext cx="2331720" cy="548640"/>
+          </a:xfrm>
+          <a:prstGeom prst="rect">
+            <a:avLst/>
+          </a:prstGeom>
+          <a:noFill/>
+        </p:spPr>
+        <p:txBody>
+          <a:bodyPr wrap="square" lIns="27432" tIns="22860" rIns="27432" bIns="22860" anchor="t">
+            <a:spAutoFit/>
+          </a:bodyPr>
+          <a:lstStyle/>
+          <a:p>
+            <a:pPr algn="l"/>
+            <a:r>
+              <a:rPr sz="1200" b="0" i="0">
+                <a:solidFill>
+                  <a:srgbClr val="555960"/>
+                </a:solidFill>
+              </a:rPr>
+              <a:t>continuity policies ↓</a:t>
+            </a:r>
+          </a:p>
+        </p:txBody>
+      </p:sp>
+      <p:sp>
+        <p:nvSpPr>
+          <p:cNvPr id="1002" name="Label"/>
+          <p:cNvSpPr txBox="1"/>
+          <p:nvPr/>
+        </p:nvSpPr>
+        <p:spPr>
+          <a:xfrm>
+            <a:off x="502920" y="3675887"/>
+            <a:ext cx="2331720" cy="548640"/>
+          </a:xfrm>
+          <a:prstGeom prst="rect">
+            <a:avLst/>
+          </a:prstGeom>
+          <a:noFill/>
+        </p:spPr>
+        <p:txBody>
+          <a:bodyPr wrap="square" lIns="27432" tIns="22860" rIns="27432" bIns="22860" anchor="t">
+            <a:spAutoFit/>
+          </a:bodyPr>
+          <a:lstStyle/>
+          <a:p>
+            <a:pPr algn="l"/>
+            <a:r>
+              <a:rPr sz="1200" b="0" i="0">
+                <a:solidFill>
+                  <a:srgbClr val="555960"/>
+                </a:solidFill>
+              </a:rPr>
+              <a:t>deployment + recovery controls ↓</a:t>
+            </a:r>
+          </a:p>
+        </p:txBody>
+      </p:sp>
+      <p:sp>
+        <p:nvSpPr>
+          <p:cNvPr id="1003" name="Label"/>
+          <p:cNvSpPr txBox="1"/>
+          <p:nvPr/>
+        </p:nvSpPr>
+        <p:spPr>
+          <a:xfrm>
+            <a:off x="6309360" y="2788920"/>
+            <a:ext cx="2651760" cy="548640"/>
+          </a:xfrm>
+          <a:prstGeom prst="rect">
+            <a:avLst/>
+          </a:prstGeom>
+          <a:noFill/>
+        </p:spPr>
+        <p:txBody>
+          <a:bodyPr wrap="square" lIns="27432" tIns="22860" rIns="27432" bIns="22860" anchor="t">
+            <a:spAutoFit/>
+          </a:bodyPr>
+          <a:lstStyle/>
+          <a:p>
+            <a:pPr algn="l"/>
+            <a:r>
+              <a:rPr sz="1200" b="0" i="0">
+                <a:solidFill>
+                  <a:srgbClr val="555960"/>
+                </a:solidFill>
+              </a:rPr>
+              <a:t>↑ service availability</a:t>
+            </a:r>
+          </a:p>
+        </p:txBody>
+      </p:sp>
+      <p:sp>
+        <p:nvSpPr>
+          <p:cNvPr id="1004" name="Label"/>
+          <p:cNvSpPr txBox="1"/>
+          <p:nvPr/>
+        </p:nvSpPr>
+        <p:spPr>
+          <a:xfrm>
+            <a:off x="6309360" y="3721608"/>
+            <a:ext cx="2651760" cy="548640"/>
+          </a:xfrm>
+          <a:prstGeom prst="rect">
+            <a:avLst/>
+          </a:prstGeom>
+          <a:noFill/>
+        </p:spPr>
+        <p:txBody>
+          <a:bodyPr wrap="square" lIns="27432" tIns="22860" rIns="27432" bIns="22860" anchor="t">
+            <a:spAutoFit/>
+          </a:bodyPr>
+          <a:lstStyle/>
+          <a:p>
+            <a:pPr algn="l"/>
+            <a:r>
+              <a:rPr sz="1200" b="0" i="0">
+                <a:solidFill>
+                  <a:srgbClr val="555960"/>
+                </a:solidFill>
+              </a:rPr>
+              <a:t>↑ operational evidence, telemetry</a:t>
             </a:r>
           </a:p>
         </p:txBody>
@@ -15239,7 +15426,7 @@
                   <a:srgbClr val="5C4826"/>
                 </a:solidFill>
               </a:rPr>
-              <a:t>Broader explanations require more evidence and more authority to act on.</a:t>
+              <a:t>Broader explanations require more evidence and may require greater authority to act.</a:t>
             </a:r>
           </a:p>
           <a:p>
@@ -16072,7 +16259,7 @@
                   <a:srgbClr val="5C4826"/>
                 </a:solidFill>
               </a:rPr>
-              <a:t>consequence</a:t>
+              <a:t>CONSEQUENCE</a:t>
             </a:r>
             <a:endParaRPr sz="2000" b="0" i="1" dirty="0">
               <a:solidFill>
@@ -16255,7 +16442,7 @@
                   <a:srgbClr val="5C4826"/>
                 </a:solidFill>
               </a:rPr>
-              <a:t>repertoire</a:t>
+              <a:t>REPERTOIRE</a:t>
             </a:r>
           </a:p>
         </p:txBody>
@@ -19312,6 +19499,212 @@
           </a:p>
         </p:txBody>
       </p:sp>
+      <p:sp>
+        <p:nvSpPr>
+          <p:cNvPr id="915" name="Label"/>
+          <p:cNvSpPr txBox="1"/>
+          <p:nvPr/>
+        </p:nvSpPr>
+        <p:spPr>
+          <a:xfrm>
+            <a:off x="548640" y="4599432"/>
+            <a:ext cx="2560320" cy="274320"/>
+          </a:xfrm>
+          <a:prstGeom prst="rect">
+            <a:avLst/>
+          </a:prstGeom>
+          <a:noFill/>
+        </p:spPr>
+        <p:txBody>
+          <a:bodyPr wrap="square" lIns="27432" tIns="22860" rIns="27432" bIns="22860" anchor="t">
+            <a:spAutoFit/>
+          </a:bodyPr>
+          <a:lstStyle/>
+          <a:p>
+            <a:pPr algn="ctr"/>
+            <a:r>
+              <a:rPr sz="1200" b="1" i="0">
+                <a:solidFill>
+                  <a:srgbClr val="5C4826"/>
+                </a:solidFill>
+              </a:rPr>
+              <a:t>‘x=x’  →  23 steps</a:t>
+            </a:r>
+          </a:p>
+        </p:txBody>
+      </p:sp>
+      <p:sp>
+        <p:nvSpPr>
+          <p:cNvPr id="910" name="Block"/>
+          <p:cNvSpPr/>
+          <p:nvPr/>
+        </p:nvSpPr>
+        <p:spPr>
+          <a:xfrm>
+            <a:off x="3291840" y="4626864"/>
+            <a:ext cx="237744" cy="182880"/>
+          </a:xfrm>
+          <a:prstGeom prst="rect">
+            <a:avLst/>
+          </a:prstGeom>
+          <a:solidFill>
+            <a:srgbClr val="8E6F3E"/>
+          </a:solidFill>
+          <a:ln>
+            <a:noFill/>
+          </a:ln>
+          <a:effectLst/>
+        </p:spPr>
+        <p:style>
+          <a:lnRef idx="1">
+            <a:schemeClr val="accent1"/>
+          </a:lnRef>
+          <a:fillRef idx="3">
+            <a:schemeClr val="accent1"/>
+          </a:fillRef>
+          <a:effectRef idx="2">
+            <a:schemeClr val="accent1"/>
+          </a:effectRef>
+          <a:fontRef idx="minor">
+            <a:schemeClr val="lt1"/>
+          </a:fontRef>
+        </p:style>
+        <p:txBody>
+          <a:bodyPr wrap="square" lIns="27432" tIns="22860" rIns="27432" bIns="22860" rtlCol="0" anchor="ctr"/>
+          <a:lstStyle/>
+          <a:p>
+            <a:pPr algn="ctr"/>
+            <a:r>
+              <a:rPr sz="1200" b="1" i="0">
+                <a:solidFill>
+                  <a:srgbClr val="FFFFFF"/>
+                </a:solidFill>
+              </a:rPr>
+              <a:t/>
+            </a:r>
+          </a:p>
+        </p:txBody>
+      </p:sp>
+      <p:sp>
+        <p:nvSpPr>
+          <p:cNvPr id="1000" name="Label"/>
+          <p:cNvSpPr txBox="1"/>
+          <p:nvPr/>
+        </p:nvSpPr>
+        <p:spPr>
+          <a:xfrm>
+            <a:off x="548640" y="4919472"/>
+            <a:ext cx="2560320" cy="274320"/>
+          </a:xfrm>
+          <a:prstGeom prst="rect">
+            <a:avLst/>
+          </a:prstGeom>
+          <a:noFill/>
+        </p:spPr>
+        <p:txBody>
+          <a:bodyPr wrap="square" lIns="27432" tIns="22860" rIns="27432" bIns="22860" anchor="t">
+            <a:spAutoFit/>
+          </a:bodyPr>
+          <a:lstStyle/>
+          <a:p>
+            <a:pPr algn="ctr"/>
+            <a:r>
+              <a:rPr sz="1200" b="1" i="0">
+                <a:solidFill>
+                  <a:srgbClr val="5C4826"/>
+                </a:solidFill>
+              </a:rPr>
+              <a:t>‘x=’ + twenty ‘x’s  →  555 steps</a:t>
+            </a:r>
+          </a:p>
+        </p:txBody>
+      </p:sp>
+      <p:sp>
+        <p:nvSpPr>
+          <p:cNvPr id="1001" name="Block"/>
+          <p:cNvSpPr/>
+          <p:nvPr/>
+        </p:nvSpPr>
+        <p:spPr>
+          <a:xfrm>
+            <a:off x="3291840" y="4946904"/>
+            <a:ext cx="5486400" cy="182880"/>
+          </a:xfrm>
+          <a:prstGeom prst="rect">
+            <a:avLst/>
+          </a:prstGeom>
+          <a:solidFill>
+            <a:srgbClr val="B3261E"/>
+          </a:solidFill>
+          <a:ln>
+            <a:noFill/>
+          </a:ln>
+          <a:effectLst/>
+        </p:spPr>
+        <p:style>
+          <a:lnRef idx="1">
+            <a:schemeClr val="accent1"/>
+          </a:lnRef>
+          <a:fillRef idx="3">
+            <a:schemeClr val="accent1"/>
+          </a:fillRef>
+          <a:effectRef idx="2">
+            <a:schemeClr val="accent1"/>
+          </a:effectRef>
+          <a:fontRef idx="minor">
+            <a:schemeClr val="lt1"/>
+          </a:fontRef>
+        </p:style>
+        <p:txBody>
+          <a:bodyPr wrap="square" lIns="27432" tIns="22860" rIns="27432" bIns="22860" rtlCol="0" anchor="ctr"/>
+          <a:lstStyle/>
+          <a:p>
+            <a:pPr algn="ctr"/>
+            <a:r>
+              <a:rPr sz="1200" b="1" i="0">
+                <a:solidFill>
+                  <a:srgbClr val="FFFFFF"/>
+                </a:solidFill>
+              </a:rPr>
+              <a:t/>
+            </a:r>
+          </a:p>
+        </p:txBody>
+      </p:sp>
+      <p:sp>
+        <p:nvSpPr>
+          <p:cNvPr id="1002" name="Label"/>
+          <p:cNvSpPr txBox="1"/>
+          <p:nvPr/>
+        </p:nvSpPr>
+        <p:spPr>
+          <a:xfrm>
+            <a:off x="3291840" y="5193792"/>
+            <a:ext cx="5120640" cy="256032"/>
+          </a:xfrm>
+          <a:prstGeom prst="rect">
+            <a:avLst/>
+          </a:prstGeom>
+          <a:noFill/>
+        </p:spPr>
+        <p:txBody>
+          <a:bodyPr wrap="square" lIns="27432" tIns="22860" rIns="27432" bIns="22860" anchor="t">
+            <a:spAutoFit/>
+          </a:bodyPr>
+          <a:lstStyle/>
+          <a:p>
+            <a:pPr algn="ctr"/>
+            <a:r>
+              <a:rPr sz="1000" b="1" i="0">
+                <a:solidFill>
+                  <a:srgbClr val="5C4826"/>
+                </a:solidFill>
+              </a:rPr>
+              <a:t>the same rule — the input grew from 3 to 22 characters</a:t>
+            </a:r>
+          </a:p>
+        </p:txBody>
+      </p:sp>
     </p:spTree>
   </p:cSld>
   <p:clrMapOvr>
@@ -20218,8 +20611,8 @@
         </p:nvSpPr>
         <p:spPr>
           <a:xfrm>
-            <a:off x="1188720" y="4160520"/>
-            <a:ext cx="2560320" cy="777240"/>
+            <a:off x="1005840" y="4160520"/>
+            <a:ext cx="2926080" cy="777240"/>
           </a:xfrm>
           <a:prstGeom prst="rect">
             <a:avLst/>
@@ -20252,7 +20645,7 @@
           <a:p>
             <a:pPr algn="ctr"/>
             <a:r>
-              <a:rPr sz="2000" b="1" i="0">
+              <a:rPr sz="1300" b="1" i="0">
                 <a:solidFill>
                   <a:srgbClr val="FFFFFF"/>
                 </a:solidFill>
@@ -20281,8 +20674,8 @@
         </p:nvSpPr>
         <p:spPr>
           <a:xfrm>
-            <a:off x="5394960" y="4160520"/>
-            <a:ext cx="2560320" cy="777240"/>
+            <a:off x="5212080" y="4160520"/>
+            <a:ext cx="2926080" cy="777240"/>
           </a:xfrm>
           <a:prstGeom prst="rect">
             <a:avLst/>
@@ -20315,7 +20708,7 @@
           <a:p>
             <a:pPr algn="ctr"/>
             <a:r>
-              <a:rPr sz="2000" b="1" i="0">
+              <a:rPr sz="1300" b="1" i="0">
                 <a:solidFill>
                   <a:srgbClr val="FFFFFF"/>
                 </a:solidFill>
@@ -20344,8 +20737,8 @@
         </p:nvSpPr>
         <p:spPr>
           <a:xfrm>
-            <a:off x="1188720" y="5303520"/>
-            <a:ext cx="2560320" cy="502920"/>
+            <a:off x="1005840" y="5303520"/>
+            <a:ext cx="2926080" cy="502920"/>
           </a:xfrm>
           <a:prstGeom prst="rect">
             <a:avLst/>
@@ -20403,8 +20796,8 @@
         </p:nvSpPr>
         <p:spPr>
           <a:xfrm>
-            <a:off x="5394960" y="5303520"/>
-            <a:ext cx="2560320" cy="502920"/>
+            <a:off x="5212080" y="5303520"/>
+            <a:ext cx="2926080" cy="502920"/>
           </a:xfrm>
           <a:prstGeom prst="rect">
             <a:avLst/>
@@ -21175,14 +21568,14 @@
       </p:sp>
       <p:sp>
         <p:nvSpPr>
-          <p:cNvPr id="920" name="Block"/>
+          <p:cNvPr id="910" name="Block"/>
           <p:cNvSpPr/>
           <p:nvPr/>
         </p:nvSpPr>
         <p:spPr>
           <a:xfrm>
-            <a:off x="548640" y="1143000"/>
-            <a:ext cx="2560320" cy="566928"/>
+            <a:off x="2743200" y="1005840"/>
+            <a:ext cx="3657600" cy="502920"/>
           </a:xfrm>
           <a:prstGeom prst="rect">
             <a:avLst/>
@@ -21220,28 +21613,32 @@
                   <a:srgbClr val="FFFFFF"/>
                 </a:solidFill>
               </a:rPr>
-              <a:t>TEMPLATE TYPE</a:t>
-            </a:r>
-          </a:p>
-        </p:txBody>
-      </p:sp>
-      <p:sp>
-        <p:nvSpPr>
-          <p:cNvPr id="921" name="RowCaption"/>
+              <a:t>TEMPLATE DEFINITION: 21 FIELDS</a:t>
+            </a:r>
+          </a:p>
+        </p:txBody>
+      </p:sp>
+      <p:sp>
+        <p:nvSpPr>
+          <p:cNvPr id="912" name="Card"/>
           <p:cNvSpPr/>
           <p:nvPr/>
         </p:nvSpPr>
         <p:spPr>
           <a:xfrm>
-            <a:off x="3383280" y="1143000"/>
-            <a:ext cx="5212080" cy="566928"/>
-          </a:xfrm>
-          <a:prstGeom prst="rect">
-            <a:avLst/>
-          </a:prstGeom>
-          <a:noFill/>
-          <a:ln>
-            <a:noFill/>
+            <a:off x="822960" y="1965960"/>
+            <a:ext cx="3291840" cy="502920"/>
+          </a:xfrm>
+          <a:prstGeom prst="rect">
+            <a:avLst/>
+          </a:prstGeom>
+          <a:solidFill>
+            <a:srgbClr val="F5F1E8"/>
+          </a:solidFill>
+          <a:ln w="12700">
+            <a:solidFill>
+              <a:srgbClr val="C9B991"/>
+            </a:solidFill>
           </a:ln>
           <a:effectLst/>
         </p:spPr>
@@ -21263,33 +21660,87 @@
           <a:bodyPr wrap="square" lIns="27432" tIns="22860" rIns="27432" bIns="22860" rtlCol="0" anchor="ctr"/>
           <a:lstStyle/>
           <a:p>
-            <a:pPr algn="l"/>
-            <a:r>
-              <a:rPr sz="2000" b="0" i="0">
-                <a:solidFill>
-                  <a:srgbClr val="555960"/>
-                </a:solidFill>
-              </a:rPr>
-              <a:t>defined 21 input parameter fields</a:t>
+            <a:pPr algn="ctr"/>
+            <a:r>
+              <a:rPr sz="2000" b="1" i="0">
+                <a:solidFill>
+                  <a:srgbClr val="5C4826"/>
+                </a:solidFill>
+              </a:rPr>
+              <a:t>content expects 21 inputs</a:t>
+            </a:r>
+          </a:p>
+        </p:txBody>
+      </p:sp>
+      <p:sp>
+        <p:nvSpPr>
+          <p:cNvPr id="1000" name="Card"/>
+          <p:cNvSpPr/>
+          <p:nvPr/>
+        </p:nvSpPr>
+        <p:spPr>
+          <a:xfrm>
+            <a:off x="5029200" y="1965960"/>
+            <a:ext cx="3291840" cy="502920"/>
+          </a:xfrm>
+          <a:prstGeom prst="rect">
+            <a:avLst/>
+          </a:prstGeom>
+          <a:solidFill>
+            <a:srgbClr val="F5F1E8"/>
+          </a:solidFill>
+          <a:ln w="12700">
+            <a:solidFill>
+              <a:srgbClr val="C9B991"/>
+            </a:solidFill>
+          </a:ln>
+          <a:effectLst/>
+        </p:spPr>
+        <p:style>
+          <a:lnRef idx="1">
+            <a:schemeClr val="accent1"/>
+          </a:lnRef>
+          <a:fillRef idx="3">
+            <a:schemeClr val="accent1"/>
+          </a:fillRef>
+          <a:effectRef idx="2">
+            <a:schemeClr val="accent1"/>
+          </a:effectRef>
+          <a:fontRef idx="minor">
+            <a:schemeClr val="lt1"/>
+          </a:fontRef>
+        </p:style>
+        <p:txBody>
+          <a:bodyPr wrap="square" lIns="27432" tIns="22860" rIns="27432" bIns="22860" rtlCol="0" anchor="ctr"/>
+          <a:lstStyle/>
+          <a:p>
+            <a:pPr algn="ctr"/>
+            <a:r>
+              <a:rPr sz="2000" b="1" i="0">
+                <a:solidFill>
+                  <a:srgbClr val="5C4826"/>
+                </a:solidFill>
+              </a:rPr>
+              <a:t>integration code supplies 20</a:t>
             </a:r>
           </a:p>
         </p:txBody>
       </p:sp>
       <p:cxnSp>
         <p:nvCxnSpPr>
-          <p:cNvPr id="922" name="Connector 922"/>
+          <p:cNvPr id="911" name="Connector 911"/>
           <p:cNvCxnSpPr/>
           <p:nvPr/>
         </p:nvCxnSpPr>
         <p:spPr>
-          <a:xfrm>
-            <a:off x="1828800" y="1709928"/>
-            <a:ext cx="0" cy="393192"/>
+          <a:xfrm flipH="1">
+            <a:off x="2468880" y="1508760"/>
+            <a:ext cx="1554480" cy="457200"/>
           </a:xfrm>
           <a:prstGeom prst="line">
             <a:avLst/>
           </a:prstGeom>
-          <a:ln w="19050">
+          <a:ln w="28575">
             <a:solidFill>
               <a:srgbClr val="8E6F3E"/>
             </a:solidFill>
@@ -21311,16 +21762,52 @@
           </a:fontRef>
         </p:style>
       </p:cxnSp>
-      <p:sp>
-        <p:nvSpPr>
-          <p:cNvPr id="923" name="Block"/>
+      <p:cxnSp>
+        <p:nvCxnSpPr>
+          <p:cNvPr id="1001" name="Connector 911"/>
+          <p:cNvCxnSpPr/>
+          <p:nvPr/>
+        </p:nvCxnSpPr>
+        <p:spPr>
+          <a:xfrm>
+            <a:off x="5120640" y="1508760"/>
+            <a:ext cx="1554480" cy="457200"/>
+          </a:xfrm>
+          <a:prstGeom prst="line">
+            <a:avLst/>
+          </a:prstGeom>
+          <a:ln w="28575">
+            <a:solidFill>
+              <a:srgbClr val="8E6F3E"/>
+            </a:solidFill>
+            <a:tailEnd type="triangle"/>
+          </a:ln>
+        </p:spPr>
+        <p:style>
+          <a:lnRef idx="2">
+            <a:schemeClr val="accent1"/>
+          </a:lnRef>
+          <a:fillRef idx="0">
+            <a:schemeClr val="accent1"/>
+          </a:fillRef>
+          <a:effectRef idx="1">
+            <a:schemeClr val="accent1"/>
+          </a:effectRef>
+          <a:fontRef idx="minor">
+            <a:schemeClr val="tx1"/>
+          </a:fontRef>
+        </p:style>
+      </p:cxnSp>
+      <p:sp>
+        <p:nvSpPr>
+          <p:cNvPr id="1002" name="Block"/>
           <p:cNvSpPr/>
           <p:nvPr/>
         </p:nvSpPr>
         <p:spPr>
           <a:xfrm>
-            <a:off x="548640" y="2103120"/>
-            <a:ext cx="2560320" cy="566928"/>
+            <a:off x="3108960" y="2971800"/>
+            <a:ext cx="2926080" cy="502920"/>
           </a:xfrm>
           <a:prstGeom prst="rect">
             <a:avLst/>
@@ -21358,76 +21845,26 @@
                   <a:srgbClr val="FFFFFF"/>
                 </a:solidFill>
               </a:rPr>
-              <a:t>INTEGRATION CODE</a:t>
-            </a:r>
-          </a:p>
-        </p:txBody>
-      </p:sp>
-      <p:sp>
-        <p:nvSpPr>
-          <p:cNvPr id="924" name="RowCaption"/>
-          <p:cNvSpPr/>
-          <p:nvPr/>
-        </p:nvSpPr>
-        <p:spPr>
-          <a:xfrm>
-            <a:off x="3383280" y="2103120"/>
-            <a:ext cx="5212080" cy="566928"/>
-          </a:xfrm>
-          <a:prstGeom prst="rect">
-            <a:avLst/>
-          </a:prstGeom>
-          <a:noFill/>
-          <a:ln>
-            <a:noFill/>
-          </a:ln>
-          <a:effectLst/>
-        </p:spPr>
-        <p:style>
-          <a:lnRef idx="1">
-            <a:schemeClr val="accent1"/>
-          </a:lnRef>
-          <a:fillRef idx="3">
-            <a:schemeClr val="accent1"/>
-          </a:fillRef>
-          <a:effectRef idx="2">
-            <a:schemeClr val="accent1"/>
-          </a:effectRef>
-          <a:fontRef idx="minor">
-            <a:schemeClr val="lt1"/>
-          </a:fontRef>
-        </p:style>
-        <p:txBody>
-          <a:bodyPr wrap="square" lIns="27432" tIns="22860" rIns="27432" bIns="22860" rtlCol="0" anchor="ctr"/>
-          <a:lstStyle/>
-          <a:p>
-            <a:pPr algn="l"/>
-            <a:r>
-              <a:rPr sz="2000" b="0" i="0">
-                <a:solidFill>
-                  <a:srgbClr val="555960"/>
-                </a:solidFill>
-              </a:rPr>
-              <a:t>supplied only 20 input values to match against</a:t>
+              <a:t>INPUT ARRAY [0 … 19]</a:t>
             </a:r>
           </a:p>
         </p:txBody>
       </p:sp>
       <p:cxnSp>
         <p:nvCxnSpPr>
-          <p:cNvPr id="925" name="Connector 925"/>
+          <p:cNvPr id="1003" name="Connector 911"/>
           <p:cNvCxnSpPr/>
           <p:nvPr/>
         </p:nvCxnSpPr>
         <p:spPr>
           <a:xfrm>
-            <a:off x="1828800" y="2670048"/>
-            <a:ext cx="0" cy="393192"/>
+            <a:off x="2468880" y="2468880"/>
+            <a:ext cx="1371600" cy="502919"/>
           </a:xfrm>
           <a:prstGeom prst="line">
             <a:avLst/>
           </a:prstGeom>
-          <a:ln w="19050">
+          <a:ln w="28575">
             <a:solidFill>
               <a:srgbClr val="8E6F3E"/>
             </a:solidFill>
@@ -21449,123 +21886,21 @@
           </a:fontRef>
         </p:style>
       </p:cxnSp>
-      <p:sp>
-        <p:nvSpPr>
-          <p:cNvPr id="926" name="Block"/>
-          <p:cNvSpPr/>
-          <p:nvPr/>
-        </p:nvSpPr>
-        <p:spPr>
-          <a:xfrm>
-            <a:off x="548640" y="3063240"/>
-            <a:ext cx="2560320" cy="566928"/>
-          </a:xfrm>
-          <a:prstGeom prst="rect">
-            <a:avLst/>
-          </a:prstGeom>
-          <a:solidFill>
-            <a:srgbClr val="8E6F3E"/>
-          </a:solidFill>
-          <a:ln>
-            <a:noFill/>
-          </a:ln>
-          <a:effectLst/>
-        </p:spPr>
-        <p:style>
-          <a:lnRef idx="1">
-            <a:schemeClr val="accent1"/>
-          </a:lnRef>
-          <a:fillRef idx="3">
-            <a:schemeClr val="accent1"/>
-          </a:fillRef>
-          <a:effectRef idx="2">
-            <a:schemeClr val="accent1"/>
-          </a:effectRef>
-          <a:fontRef idx="minor">
-            <a:schemeClr val="lt1"/>
-          </a:fontRef>
-        </p:style>
-        <p:txBody>
-          <a:bodyPr wrap="square" lIns="27432" tIns="22860" rIns="27432" bIns="22860" rtlCol="0" anchor="ctr"/>
-          <a:lstStyle/>
-          <a:p>
-            <a:pPr algn="ctr"/>
-            <a:r>
-              <a:rPr sz="2000" b="1" i="0" dirty="0">
-                <a:solidFill>
-                  <a:srgbClr val="FFFFFF"/>
-                </a:solidFill>
-              </a:rPr>
-              <a:t>CONTENT VALIDATOR</a:t>
-            </a:r>
-          </a:p>
-        </p:txBody>
-      </p:sp>
-      <p:sp>
-        <p:nvSpPr>
-          <p:cNvPr id="927" name="RowCaption"/>
-          <p:cNvSpPr/>
-          <p:nvPr/>
-        </p:nvSpPr>
-        <p:spPr>
-          <a:xfrm>
-            <a:off x="3383280" y="3063240"/>
-            <a:ext cx="5212080" cy="566928"/>
-          </a:xfrm>
-          <a:prstGeom prst="rect">
-            <a:avLst/>
-          </a:prstGeom>
-          <a:noFill/>
-          <a:ln>
-            <a:noFill/>
-          </a:ln>
-          <a:effectLst/>
-        </p:spPr>
-        <p:style>
-          <a:lnRef idx="1">
-            <a:schemeClr val="accent1"/>
-          </a:lnRef>
-          <a:fillRef idx="3">
-            <a:schemeClr val="accent1"/>
-          </a:fillRef>
-          <a:effectRef idx="2">
-            <a:schemeClr val="accent1"/>
-          </a:effectRef>
-          <a:fontRef idx="minor">
-            <a:schemeClr val="lt1"/>
-          </a:fontRef>
-        </p:style>
-        <p:txBody>
-          <a:bodyPr wrap="square" lIns="27432" tIns="22860" rIns="27432" bIns="22860" rtlCol="0" anchor="ctr"/>
-          <a:lstStyle/>
-          <a:p>
-            <a:pPr algn="l"/>
-            <a:r>
-              <a:rPr sz="2000" b="0" i="0">
-                <a:solidFill>
-                  <a:srgbClr val="555960"/>
-                </a:solidFill>
-              </a:rPr>
-              <a:t>accepted instances that expected 21 inputs</a:t>
-            </a:r>
-          </a:p>
-        </p:txBody>
-      </p:sp>
       <p:cxnSp>
         <p:nvCxnSpPr>
-          <p:cNvPr id="928" name="Connector 928"/>
+          <p:cNvPr id="1004" name="Connector 911"/>
           <p:cNvCxnSpPr/>
           <p:nvPr/>
         </p:nvCxnSpPr>
         <p:spPr>
-          <a:xfrm>
-            <a:off x="1828800" y="3630168"/>
-            <a:ext cx="0" cy="393192"/>
+          <a:xfrm flipH="1">
+            <a:off x="5303520" y="2468880"/>
+            <a:ext cx="1371600" cy="502919"/>
           </a:xfrm>
           <a:prstGeom prst="line">
             <a:avLst/>
           </a:prstGeom>
-          <a:ln w="19050">
+          <a:ln w="28575">
             <a:solidFill>
               <a:srgbClr val="8E6F3E"/>
             </a:solidFill>
@@ -21589,23 +21924,25 @@
       </p:cxnSp>
       <p:sp>
         <p:nvSpPr>
-          <p:cNvPr id="929" name="Block"/>
+          <p:cNvPr id="1005" name="Card"/>
           <p:cNvSpPr/>
           <p:nvPr/>
         </p:nvSpPr>
         <p:spPr>
           <a:xfrm>
-            <a:off x="548640" y="4023360"/>
-            <a:ext cx="2560320" cy="566928"/>
+            <a:off x="2926080" y="3931920"/>
+            <a:ext cx="3291840" cy="502920"/>
           </a:xfrm>
           <a:prstGeom prst="rect">
             <a:avLst/>
           </a:prstGeom>
           <a:solidFill>
-            <a:srgbClr val="9A3F12"/>
+            <a:srgbClr val="F5F1E8"/>
           </a:solidFill>
-          <a:ln>
-            <a:noFill/>
+          <a:ln w="12700">
+            <a:solidFill>
+              <a:srgbClr val="C9B991"/>
+            </a:solidFill>
           </a:ln>
           <a:effectLst/>
         </p:spPr>
@@ -21631,69 +21968,140 @@
             <a:r>
               <a:rPr sz="2000" b="1" i="0">
                 <a:solidFill>
+                  <a:srgbClr val="5C4826"/>
+                </a:solidFill>
+              </a:rPr>
+              <a:t>interpreter attempts access [20]</a:t>
+            </a:r>
+          </a:p>
+        </p:txBody>
+      </p:sp>
+      <p:cxnSp>
+        <p:nvCxnSpPr>
+          <p:cNvPr id="1006" name="Connector 911"/>
+          <p:cNvCxnSpPr/>
+          <p:nvPr/>
+        </p:nvCxnSpPr>
+        <p:spPr>
+          <a:xfrm>
+            <a:off x="4572000" y="3474720"/>
+            <a:ext cx="0" cy="457200"/>
+          </a:xfrm>
+          <a:prstGeom prst="line">
+            <a:avLst/>
+          </a:prstGeom>
+          <a:ln w="28575">
+            <a:solidFill>
+              <a:srgbClr val="8E6F3E"/>
+            </a:solidFill>
+            <a:tailEnd type="triangle"/>
+          </a:ln>
+        </p:spPr>
+        <p:style>
+          <a:lnRef idx="2">
+            <a:schemeClr val="accent1"/>
+          </a:lnRef>
+          <a:fillRef idx="0">
+            <a:schemeClr val="accent1"/>
+          </a:fillRef>
+          <a:effectRef idx="1">
+            <a:schemeClr val="accent1"/>
+          </a:effectRef>
+          <a:fontRef idx="minor">
+            <a:schemeClr val="tx1"/>
+          </a:fontRef>
+        </p:style>
+      </p:cxnSp>
+      <p:sp>
+        <p:nvSpPr>
+          <p:cNvPr id="1007" name="Block"/>
+          <p:cNvSpPr/>
+          <p:nvPr/>
+        </p:nvSpPr>
+        <p:spPr>
+          <a:xfrm>
+            <a:off x="3200400" y="4846320"/>
+            <a:ext cx="2743200" cy="502920"/>
+          </a:xfrm>
+          <a:prstGeom prst="rect">
+            <a:avLst/>
+          </a:prstGeom>
+          <a:solidFill>
+            <a:srgbClr val="8E6F3E"/>
+          </a:solidFill>
+          <a:ln w="25400">
+            <a:solidFill>
+              <a:srgbClr val="B3261E"/>
+            </a:solidFill>
+          </a:ln>
+          <a:effectLst/>
+        </p:spPr>
+        <p:style>
+          <a:lnRef idx="1">
+            <a:schemeClr val="accent1"/>
+          </a:lnRef>
+          <a:fillRef idx="3">
+            <a:schemeClr val="accent1"/>
+          </a:fillRef>
+          <a:effectRef idx="2">
+            <a:schemeClr val="accent1"/>
+          </a:effectRef>
+          <a:fontRef idx="minor">
+            <a:schemeClr val="lt1"/>
+          </a:fontRef>
+        </p:style>
+        <p:txBody>
+          <a:bodyPr wrap="square" lIns="27432" tIns="22860" rIns="27432" bIns="22860" rtlCol="0" anchor="ctr"/>
+          <a:lstStyle/>
+          <a:p>
+            <a:pPr algn="ctr"/>
+            <a:r>
+              <a:rPr sz="2000" b="1" i="0">
+                <a:solidFill>
                   <a:srgbClr val="FFFFFF"/>
                 </a:solidFill>
               </a:rPr>
-              <a:t>CONTENT INTERPRETER</a:t>
-            </a:r>
-          </a:p>
-        </p:txBody>
-      </p:sp>
-      <p:sp>
-        <p:nvSpPr>
-          <p:cNvPr id="930" name="RowCaption"/>
-          <p:cNvSpPr/>
-          <p:nvPr/>
-        </p:nvSpPr>
-        <p:spPr>
-          <a:xfrm>
-            <a:off x="3383280" y="4023360"/>
-            <a:ext cx="5212080" cy="566928"/>
-          </a:xfrm>
-          <a:prstGeom prst="rect">
-            <a:avLst/>
-          </a:prstGeom>
-          <a:noFill/>
-          <a:ln>
-            <a:noFill/>
-          </a:ln>
-          <a:effectLst/>
-        </p:spPr>
-        <p:style>
-          <a:lnRef idx="1">
-            <a:schemeClr val="accent1"/>
-          </a:lnRef>
-          <a:fillRef idx="3">
-            <a:schemeClr val="accent1"/>
-          </a:fillRef>
-          <a:effectRef idx="2">
-            <a:schemeClr val="accent1"/>
-          </a:effectRef>
-          <a:fontRef idx="minor">
-            <a:schemeClr val="lt1"/>
-          </a:fontRef>
-        </p:style>
-        <p:txBody>
-          <a:bodyPr wrap="square" lIns="27432" tIns="22860" rIns="27432" bIns="22860" rtlCol="0" anchor="ctr"/>
-          <a:lstStyle/>
-          <a:p>
-            <a:pPr algn="l"/>
-            <a:r>
-              <a:rPr sz="2000" b="1" i="0" dirty="0">
-                <a:solidFill>
-                  <a:srgbClr val="555960"/>
-                </a:solidFill>
-              </a:rPr>
-              <a:t>expected 20 — and read the 21st entry</a:t>
-            </a:r>
-            <a:endParaRPr sz="2000" b="1" i="0" dirty="0">
-              <a:solidFill>
-                <a:srgbClr val="555960"/>
-              </a:solidFill>
-            </a:endParaRPr>
-          </a:p>
-        </p:txBody>
-      </p:sp>
+              <a:t>OUT-OF-BOUNDS READ</a:t>
+            </a:r>
+          </a:p>
+        </p:txBody>
+      </p:sp>
+      <p:cxnSp>
+        <p:nvCxnSpPr>
+          <p:cNvPr id="1008" name="Connector 911"/>
+          <p:cNvCxnSpPr/>
+          <p:nvPr/>
+        </p:nvCxnSpPr>
+        <p:spPr>
+          <a:xfrm>
+            <a:off x="4572000" y="4434840"/>
+            <a:ext cx="0" cy="411480"/>
+          </a:xfrm>
+          <a:prstGeom prst="line">
+            <a:avLst/>
+          </a:prstGeom>
+          <a:ln w="28575">
+            <a:solidFill>
+              <a:srgbClr val="8E6F3E"/>
+            </a:solidFill>
+            <a:tailEnd type="triangle"/>
+          </a:ln>
+        </p:spPr>
+        <p:style>
+          <a:lnRef idx="2">
+            <a:schemeClr val="accent1"/>
+          </a:lnRef>
+          <a:fillRef idx="0">
+            <a:schemeClr val="accent1"/>
+          </a:fillRef>
+          <a:effectRef idx="1">
+            <a:schemeClr val="accent1"/>
+          </a:effectRef>
+          <a:fontRef idx="minor">
+            <a:schemeClr val="tx1"/>
+          </a:fontRef>
+        </p:style>
+      </p:cxnSp>
     </p:spTree>
   </p:cSld>
   <p:clrMapOvr>
@@ -21857,12 +22265,23 @@
           <a:p>
             <a:pPr algn="ctr"/>
             <a:r>
-              <a:rPr sz="2000" b="1" i="0">
+              <a:rPr sz="1200" b="1" i="0">
                 <a:solidFill>
                   <a:srgbClr val="FFFFFF"/>
                 </a:solidFill>
               </a:rPr>
-              <a:t>DEFECTIVE CONTENT</a:t>
+              <a:t>INCOMPATIBLE</a:t>
+            </a:r>
+          </a:p>
+          <a:p>
+            <a:pPr algn="ctr"/>
+            <a:r>
+              <a:rPr sz="1000" b="1" i="0">
+                <a:solidFill>
+                  <a:srgbClr val="FFFFFF"/>
+                </a:solidFill>
+              </a:rPr>
+              <a:t>CONTENT + INTERPRETER</a:t>
             </a:r>
           </a:p>
         </p:txBody>
@@ -21952,7 +22371,7 @@
                   <a:srgbClr val="5C4826"/>
                 </a:solidFill>
               </a:rPr>
-              <a:t>unsafe processing</a:t>
+              <a:t>unsafe access</a:t>
             </a:r>
           </a:p>
         </p:txBody>
@@ -22076,7 +22495,7 @@
                   <a:srgbClr val="5C4826"/>
                 </a:solidFill>
               </a:rPr>
-              <a:t>Model: a component behaved outside its contract.   Intervention: repair the component.</a:t>
+              <a:t>Model: a chain of events traced to a defect.   Intervention: repair the incompatibility.</a:t>
             </a:r>
           </a:p>
         </p:txBody>
@@ -22152,66 +22571,14 @@
       </p:sp>
       <p:sp>
         <p:nvSpPr>
-          <p:cNvPr id="901" name="Block"/>
-          <p:cNvSpPr/>
-          <p:nvPr/>
-        </p:nvSpPr>
-        <p:spPr>
-          <a:xfrm>
-            <a:off x="640080" y="2743200"/>
-            <a:ext cx="2377440" cy="822960"/>
-          </a:xfrm>
-          <a:prstGeom prst="rect">
-            <a:avLst/>
-          </a:prstGeom>
-          <a:solidFill>
-            <a:srgbClr val="9A3F12"/>
-          </a:solidFill>
-          <a:ln>
-            <a:noFill/>
-          </a:ln>
-          <a:effectLst/>
-        </p:spPr>
-        <p:style>
-          <a:lnRef idx="1">
-            <a:schemeClr val="accent1"/>
-          </a:lnRef>
-          <a:fillRef idx="3">
-            <a:schemeClr val="accent1"/>
-          </a:fillRef>
-          <a:effectRef idx="2">
-            <a:schemeClr val="accent1"/>
-          </a:effectRef>
-          <a:fontRef idx="minor">
-            <a:schemeClr val="lt1"/>
-          </a:fontRef>
-        </p:style>
-        <p:txBody>
-          <a:bodyPr wrap="square" lIns="27432" tIns="22860" rIns="27432" bIns="22860" rtlCol="0" anchor="ctr"/>
-          <a:lstStyle/>
-          <a:p>
-            <a:pPr algn="ctr"/>
-            <a:r>
-              <a:rPr sz="2200" b="1" i="0">
-                <a:solidFill>
-                  <a:srgbClr val="FFFFFF"/>
-                </a:solidFill>
-              </a:rPr>
-              <a:t>WHAT WOULD YOU CHANGE?</a:t>
-            </a:r>
-          </a:p>
-        </p:txBody>
-      </p:sp>
-      <p:sp>
-        <p:nvSpPr>
           <p:cNvPr id="902" name="Card"/>
           <p:cNvSpPr/>
           <p:nvPr/>
         </p:nvSpPr>
         <p:spPr>
           <a:xfrm>
-            <a:off x="4876800" y="960120"/>
-            <a:ext cx="3764280" cy="914400"/>
+            <a:off x="1371600" y="1188720"/>
+            <a:ext cx="6400800" cy="1051560"/>
           </a:xfrm>
           <a:prstGeom prst="rect">
             <a:avLst/>
@@ -22280,8 +22647,8 @@
         </p:nvSpPr>
         <p:spPr>
           <a:xfrm>
-            <a:off x="4876800" y="2078037"/>
-            <a:ext cx="3764280" cy="914400"/>
+            <a:off x="1371600" y="2606040"/>
+            <a:ext cx="6400800" cy="1051560"/>
           </a:xfrm>
           <a:prstGeom prst="rect">
             <a:avLst/>
@@ -22350,8 +22717,8 @@
         </p:nvSpPr>
         <p:spPr>
           <a:xfrm>
-            <a:off x="4876800" y="3201670"/>
-            <a:ext cx="3764280" cy="914400"/>
+            <a:off x="1371600" y="4023360"/>
+            <a:ext cx="6400800" cy="1051560"/>
           </a:xfrm>
           <a:prstGeom prst="rect">
             <a:avLst/>
@@ -22407,123 +22774,6 @@
           </a:p>
         </p:txBody>
       </p:sp>
-      <p:cxnSp>
-        <p:nvCxnSpPr>
-          <p:cNvPr id="930" name="Connector 930"/>
-          <p:cNvCxnSpPr>
-            <a:cxnSpLocks/>
-            <a:endCxn id="902" idx="1"/>
-          </p:cNvCxnSpPr>
-          <p:nvPr/>
-        </p:nvCxnSpPr>
-        <p:spPr>
-          <a:xfrm flipV="1">
-            <a:off x="3017520" y="1417320"/>
-            <a:ext cx="1859280" cy="1737360"/>
-          </a:xfrm>
-          <a:prstGeom prst="line">
-            <a:avLst/>
-          </a:prstGeom>
-          <a:ln w="19050">
-            <a:solidFill>
-              <a:srgbClr val="8E6F3E"/>
-            </a:solidFill>
-            <a:tailEnd type="triangle"/>
-          </a:ln>
-        </p:spPr>
-        <p:style>
-          <a:lnRef idx="2">
-            <a:schemeClr val="accent1"/>
-          </a:lnRef>
-          <a:fillRef idx="0">
-            <a:schemeClr val="accent1"/>
-          </a:fillRef>
-          <a:effectRef idx="1">
-            <a:schemeClr val="accent1"/>
-          </a:effectRef>
-          <a:fontRef idx="minor">
-            <a:schemeClr val="tx1"/>
-          </a:fontRef>
-        </p:style>
-      </p:cxnSp>
-      <p:cxnSp>
-        <p:nvCxnSpPr>
-          <p:cNvPr id="931" name="Connector 931"/>
-          <p:cNvCxnSpPr>
-            <a:cxnSpLocks/>
-            <a:endCxn id="904" idx="1"/>
-          </p:cNvCxnSpPr>
-          <p:nvPr/>
-        </p:nvCxnSpPr>
-        <p:spPr>
-          <a:xfrm flipV="1">
-            <a:off x="3017520" y="2535237"/>
-            <a:ext cx="1859280" cy="619443"/>
-          </a:xfrm>
-          <a:prstGeom prst="line">
-            <a:avLst/>
-          </a:prstGeom>
-          <a:ln w="19050">
-            <a:solidFill>
-              <a:srgbClr val="8E6F3E"/>
-            </a:solidFill>
-            <a:tailEnd type="triangle"/>
-          </a:ln>
-        </p:spPr>
-        <p:style>
-          <a:lnRef idx="2">
-            <a:schemeClr val="accent1"/>
-          </a:lnRef>
-          <a:fillRef idx="0">
-            <a:schemeClr val="accent1"/>
-          </a:fillRef>
-          <a:effectRef idx="1">
-            <a:schemeClr val="accent1"/>
-          </a:effectRef>
-          <a:fontRef idx="minor">
-            <a:schemeClr val="tx1"/>
-          </a:fontRef>
-        </p:style>
-      </p:cxnSp>
-      <p:cxnSp>
-        <p:nvCxnSpPr>
-          <p:cNvPr id="932" name="Connector 932"/>
-          <p:cNvCxnSpPr>
-            <a:cxnSpLocks/>
-            <a:endCxn id="906" idx="1"/>
-          </p:cNvCxnSpPr>
-          <p:nvPr/>
-        </p:nvCxnSpPr>
-        <p:spPr>
-          <a:xfrm>
-            <a:off x="3017520" y="3154680"/>
-            <a:ext cx="1859280" cy="504190"/>
-          </a:xfrm>
-          <a:prstGeom prst="line">
-            <a:avLst/>
-          </a:prstGeom>
-          <a:ln w="19050">
-            <a:solidFill>
-              <a:srgbClr val="8E6F3E"/>
-            </a:solidFill>
-            <a:tailEnd type="triangle"/>
-          </a:ln>
-        </p:spPr>
-        <p:style>
-          <a:lnRef idx="2">
-            <a:schemeClr val="accent1"/>
-          </a:lnRef>
-          <a:fillRef idx="0">
-            <a:schemeClr val="accent1"/>
-          </a:fillRef>
-          <a:effectRef idx="1">
-            <a:schemeClr val="accent1"/>
-          </a:effectRef>
-          <a:fontRef idx="minor">
-            <a:schemeClr val="tx1"/>
-          </a:fontRef>
-        </p:style>
-      </p:cxnSp>
       <p:sp>
         <p:nvSpPr>
           <p:cNvPr id="2" name="FooterBand"/>
@@ -23080,8 +23330,8 @@
         </p:nvSpPr>
         <p:spPr>
           <a:xfrm>
-            <a:off x="3840480" y="1188720"/>
-            <a:ext cx="4754880" cy="566928"/>
+            <a:off x="4343400" y="1188720"/>
+            <a:ext cx="4526280" cy="566928"/>
           </a:xfrm>
           <a:prstGeom prst="rect">
             <a:avLst/>
@@ -23130,8 +23380,8 @@
         </p:nvSpPr>
         <p:spPr>
           <a:xfrm>
-            <a:off x="3840480" y="2029968"/>
-            <a:ext cx="4754880" cy="566928"/>
+            <a:off x="4343400" y="2029968"/>
+            <a:ext cx="4526280" cy="566928"/>
           </a:xfrm>
           <a:prstGeom prst="rect">
             <a:avLst/>
@@ -23180,8 +23430,8 @@
         </p:nvSpPr>
         <p:spPr>
           <a:xfrm>
-            <a:off x="3840480" y="2871216"/>
-            <a:ext cx="4754880" cy="566928"/>
+            <a:off x="4343400" y="2871216"/>
+            <a:ext cx="4526280" cy="566928"/>
           </a:xfrm>
           <a:prstGeom prst="rect">
             <a:avLst/>
@@ -23230,8 +23480,8 @@
         </p:nvSpPr>
         <p:spPr>
           <a:xfrm>
-            <a:off x="3840480" y="4169664"/>
-            <a:ext cx="4754880" cy="566928"/>
+            <a:off x="4343400" y="4169664"/>
+            <a:ext cx="4526280" cy="566928"/>
           </a:xfrm>
           <a:prstGeom prst="rect">
             <a:avLst/>
@@ -23280,8 +23530,8 @@
         </p:nvSpPr>
         <p:spPr>
           <a:xfrm>
-            <a:off x="3840480" y="5010912"/>
-            <a:ext cx="4754880" cy="566928"/>
+            <a:off x="4343400" y="5010912"/>
+            <a:ext cx="4526280" cy="566928"/>
           </a:xfrm>
           <a:prstGeom prst="rect">
             <a:avLst/>
@@ -23494,6 +23744,186 @@
           </a:p>
         </p:txBody>
       </p:sp>
+      <p:cxnSp>
+        <p:nvCxnSpPr>
+          <p:cNvPr id="911" name="Connector 911"/>
+          <p:cNvCxnSpPr/>
+          <p:nvPr/>
+        </p:nvCxnSpPr>
+        <p:spPr>
+          <a:xfrm>
+            <a:off x="3657600" y="1472184"/>
+            <a:ext cx="685800" cy="0"/>
+          </a:xfrm>
+          <a:prstGeom prst="line">
+            <a:avLst/>
+          </a:prstGeom>
+          <a:ln w="28575">
+            <a:solidFill>
+              <a:srgbClr val="8E6F3E"/>
+            </a:solidFill>
+            <a:tailEnd type="triangle"/>
+          </a:ln>
+        </p:spPr>
+        <p:style>
+          <a:lnRef idx="2">
+            <a:schemeClr val="accent1"/>
+          </a:lnRef>
+          <a:fillRef idx="0">
+            <a:schemeClr val="accent1"/>
+          </a:fillRef>
+          <a:effectRef idx="1">
+            <a:schemeClr val="accent1"/>
+          </a:effectRef>
+          <a:fontRef idx="minor">
+            <a:schemeClr val="tx1"/>
+          </a:fontRef>
+        </p:style>
+      </p:cxnSp>
+      <p:cxnSp>
+        <p:nvCxnSpPr>
+          <p:cNvPr id="911" name="Connector 911"/>
+          <p:cNvCxnSpPr/>
+          <p:nvPr/>
+        </p:nvCxnSpPr>
+        <p:spPr>
+          <a:xfrm>
+            <a:off x="3657600" y="2313432"/>
+            <a:ext cx="685800" cy="0"/>
+          </a:xfrm>
+          <a:prstGeom prst="line">
+            <a:avLst/>
+          </a:prstGeom>
+          <a:ln w="28575">
+            <a:solidFill>
+              <a:srgbClr val="8E6F3E"/>
+            </a:solidFill>
+            <a:tailEnd type="triangle"/>
+          </a:ln>
+        </p:spPr>
+        <p:style>
+          <a:lnRef idx="2">
+            <a:schemeClr val="accent1"/>
+          </a:lnRef>
+          <a:fillRef idx="0">
+            <a:schemeClr val="accent1"/>
+          </a:fillRef>
+          <a:effectRef idx="1">
+            <a:schemeClr val="accent1"/>
+          </a:effectRef>
+          <a:fontRef idx="minor">
+            <a:schemeClr val="tx1"/>
+          </a:fontRef>
+        </p:style>
+      </p:cxnSp>
+      <p:cxnSp>
+        <p:nvCxnSpPr>
+          <p:cNvPr id="911" name="Connector 911"/>
+          <p:cNvCxnSpPr/>
+          <p:nvPr/>
+        </p:nvCxnSpPr>
+        <p:spPr>
+          <a:xfrm>
+            <a:off x="3657600" y="3154680"/>
+            <a:ext cx="685800" cy="0"/>
+          </a:xfrm>
+          <a:prstGeom prst="line">
+            <a:avLst/>
+          </a:prstGeom>
+          <a:ln w="28575">
+            <a:solidFill>
+              <a:srgbClr val="8E6F3E"/>
+            </a:solidFill>
+            <a:tailEnd type="triangle"/>
+          </a:ln>
+        </p:spPr>
+        <p:style>
+          <a:lnRef idx="2">
+            <a:schemeClr val="accent1"/>
+          </a:lnRef>
+          <a:fillRef idx="0">
+            <a:schemeClr val="accent1"/>
+          </a:fillRef>
+          <a:effectRef idx="1">
+            <a:schemeClr val="accent1"/>
+          </a:effectRef>
+          <a:fontRef idx="minor">
+            <a:schemeClr val="tx1"/>
+          </a:fontRef>
+        </p:style>
+      </p:cxnSp>
+      <p:cxnSp>
+        <p:nvCxnSpPr>
+          <p:cNvPr id="911" name="Connector 911"/>
+          <p:cNvCxnSpPr/>
+          <p:nvPr/>
+        </p:nvCxnSpPr>
+        <p:spPr>
+          <a:xfrm>
+            <a:off x="3657600" y="4453127"/>
+            <a:ext cx="685800" cy="0"/>
+          </a:xfrm>
+          <a:prstGeom prst="line">
+            <a:avLst/>
+          </a:prstGeom>
+          <a:ln w="28575">
+            <a:solidFill>
+              <a:srgbClr val="8E6F3E"/>
+            </a:solidFill>
+            <a:tailEnd type="triangle"/>
+          </a:ln>
+        </p:spPr>
+        <p:style>
+          <a:lnRef idx="2">
+            <a:schemeClr val="accent1"/>
+          </a:lnRef>
+          <a:fillRef idx="0">
+            <a:schemeClr val="accent1"/>
+          </a:fillRef>
+          <a:effectRef idx="1">
+            <a:schemeClr val="accent1"/>
+          </a:effectRef>
+          <a:fontRef idx="minor">
+            <a:schemeClr val="tx1"/>
+          </a:fontRef>
+        </p:style>
+      </p:cxnSp>
+      <p:cxnSp>
+        <p:nvCxnSpPr>
+          <p:cNvPr id="911" name="Connector 911"/>
+          <p:cNvCxnSpPr/>
+          <p:nvPr/>
+        </p:nvCxnSpPr>
+        <p:spPr>
+          <a:xfrm>
+            <a:off x="3657600" y="5294376"/>
+            <a:ext cx="685800" cy="0"/>
+          </a:xfrm>
+          <a:prstGeom prst="line">
+            <a:avLst/>
+          </a:prstGeom>
+          <a:ln w="28575">
+            <a:solidFill>
+              <a:srgbClr val="8E6F3E"/>
+            </a:solidFill>
+            <a:tailEnd type="triangle"/>
+          </a:ln>
+        </p:spPr>
+        <p:style>
+          <a:lnRef idx="2">
+            <a:schemeClr val="accent1"/>
+          </a:lnRef>
+          <a:fillRef idx="0">
+            <a:schemeClr val="accent1"/>
+          </a:fillRef>
+          <a:effectRef idx="1">
+            <a:schemeClr val="accent1"/>
+          </a:effectRef>
+          <a:fontRef idx="minor">
+            <a:schemeClr val="tx1"/>
+          </a:fontRef>
+        </p:style>
+      </p:cxnSp>
     </p:spTree>
   </p:cSld>
   <p:clrMapOvr>
@@ -24689,7 +25119,7 @@
                   <a:srgbClr val="FFFFFF"/>
                 </a:solidFill>
               </a:rPr>
-              <a:t>Two defenses were missing. One ran — and checked the wrong property.</a:t>
+              <a:t>Two defenses missing · one coverage gap · one ran against the wrong contract</a:t>
             </a:r>
           </a:p>
           <a:p>

--- a/course/lectures/act-2-delegation-and-control/04-failure-aware-engineering/2-4-Failure-Aware-Engineering.pptx
+++ b/course/lectures/act-2-delegation-and-control/04-failure-aware-engineering/2-4-Failure-Aware-Engineering.pptx
@@ -1089,7 +1089,7 @@
           <a:lstStyle/>
           <a:p>
             <a:r>
-              <a:t>TIMING: 2 minutes.</a:t>
+              <a:t>TIMING: 1 minutes.</a:t>
             </a:r>
           </a:p>
           <a:p>
@@ -1115,6 +1115,16 @@
           <a:p>
             <a:r>
               <a:t>TRANSITION: start with consequences, not mechanism. July 19, 2024.</a:t>
+            </a:r>
+          </a:p>
+          <a:p>
+            <a:r>
+              <a:t>FRAME IT AS ENGINEERING, NOT ACCIDENT ANALYSIS (author): this unit is Failure-Aware ENGINEERING. The destination is not that students can explain failures with three frameworks; it is that an organization becomes better at preventing, detecting, containing, and recovering from failure because of what it learned — and that the learning can change exactly two things: the engineer's judgment, through reflection, and the engineering environment, through models, constraints, validation mechanisms, and controls. Say this up front; the three models are instruments toward it, not the point.</a:t>
+            </a:r>
+          </a:p>
+          <a:p>
+            <a:r>
+              <a:t>BUDGET: the TIMING lines across the deck now sum to 75 minutes, with the slide-6 commitment discussion and the slide-27 transfer exercise protected.</a:t>
             </a:r>
           </a:p>
         </p:txBody>
@@ -1184,7 +1194,7 @@
           <a:lstStyle/>
           <a:p>
             <a:r>
-              <a:t>TIMING: 3 minutes. START WITH CONSEQUENCES, NOT CAUSE.</a:t>
+              <a:t>TIMING: 2 minutes. START WITH CONSEQUENCES, NOT CAUSE.</a:t>
             </a:r>
           </a:p>
           <a:p>
@@ -1289,37 +1299,37 @@
           <a:lstStyle/>
           <a:p>
             <a:r>
-              <a:t>TIMING: 3 minutes.</a:t>
-            </a:r>
-          </a:p>
-          <a:p>
-            <a:r>
-              <a:t>ENGINEERING POINT: the update was CONTENT, not code — and content travelled a faster, less-gated path than a sensor release. Hold that fact; it is the hinge of the whole lecture and it returns in the Cloudflare exercise.</a:t>
-            </a:r>
-          </a:p>
-          <a:p>
-            <a:r>
-              <a:t>BACKGROUND: the defect arrived in Channel File 291, a Rapid Response Content update interpreted by the sensor's Content Interpreter. Rapid Response Content could be updated independently of ordinary sensor-code releases (RCA, 6 Aug 2024).</a:t>
-            </a:r>
-          </a:p>
-          <a:p>
-            <a:r>
-              <a:t>ASK: why should security content be able to crash the operating system at all?</a:t>
-            </a:r>
-          </a:p>
-          <a:p>
-            <a:r>
-              <a:t>EXPECTED ANSWERS: students reach for 'it runs in the kernel'. True and incomplete — privilege explains the BLAST RADIUS, not the defect. Do not resolve the architecture question yet; it is slide 14's job.</a:t>
-            </a:r>
-          </a:p>
-          <a:p>
-            <a:r>
-              <a:t>TRANSITION: next, exactly what went wrong when the content was read.</a:t>
-            </a:r>
-          </a:p>
-          <a:p>
-            <a:r>
-              <a:t>SOURCES: CrowdStrike RCA, 6 Aug 2024. Do not yet disclose the validation weaknesses — Movement 2 earns them.</a:t>
+              <a:t>TIMING: 3 minutes. ESTABLISH THE SYSTEM BEFORE ANALYZING IT.</a:t>
+            </a:r>
+          </a:p>
+          <a:p>
+            <a:r>
+              <a:t>ENGINEERING POINT: a student should never have to infer what a component does while being asked to analyze why it failed. So first the parts, in order: CrowdStrike is a security vendor; its Falcon sensor runs on each Windows endpoint with privileged system access (it must see what the operating system sees); the sensor interprets Rapid Response Content — detection content describing what to look for — which is distributed separately from sensor-software releases. THEN the event: on July 19, one content update was defective, the sensor crashed processing it, and because the sensor runs with privileged access, the sensor's crash became the operating system's crash.</a:t>
+            </a:r>
+          </a:p>
+          <a:p>
+            <a:r>
+              <a:t>DOCUMENTED (CrowdStrike RCA, 6 Aug 2024): the defective artifact was a Rapid Response Content update, not an ordinary Windows OS update; Rapid Response Content could be updated independently of sensor-code releases — a faster release path. HOLD that faster-path observation for Movement 2 (slide 7) unless a student raises it; here it is premature.</a:t>
+            </a:r>
+          </a:p>
+          <a:p>
+            <a:r>
+              <a:t>ASK (the footer): why can security content crash an operating system?</a:t>
+            </a:r>
+          </a:p>
+          <a:p>
+            <a:r>
+              <a:t>EXPECTED ANSWERS: 'it's code' — sharpen: it is DATA interpreted by privileged code, and data consumed by privileged code can change its behavior. Misconception: students assume the update was a program; the content/interpreter split is the load-bearing distinction for the whole lecture.</a:t>
+            </a:r>
+          </a:p>
+          <a:p>
+            <a:r>
+              <a:t>TRANSITION: what exactly did the content and its interpreter disagree about? Numbers next.</a:t>
+            </a:r>
+          </a:p>
+          <a:p>
+            <a:r>
+              <a:t>SOURCES: CrowdStrike RCA, 6 Aug 2024.</a:t>
             </a:r>
           </a:p>
         </p:txBody>
@@ -1389,7 +1399,7 @@
           <a:lstStyle/>
           <a:p>
             <a:r>
-              <a:t>TIMING: 5 minutes. THE TECHNICAL CORE.</a:t>
+              <a:t>TIMING: 4 minutes. THE TECHNICAL CORE.</a:t>
             </a:r>
           </a:p>
           <a:p>
@@ -1435,6 +1445,11 @@
           <a:p>
             <a:r>
               <a:t>TERMINOLOGY (stays in notes, off the slide): the Template Type defines the 21 fields; Template Instances are the content built against it; the Content Validator checked instances against the Template Type's 21 fields; the Content Interpreter consumed the integration code's 20-entry input array and, directed by the first non-wildcard 21st matching criterion, attempted the [20] access.</a:t>
+            </a:r>
+          </a:p>
+          <a:p>
+            <a:r>
+              <a:t>EXPOSITION ORDER (author): read the bridge sentence FIRST, verbatim — templates are the interface between detection content and the interpreter; each template specifies the input fields the interpreter expects. Only then walk the diagram; it is now intelligible without inference. Keep the concrete indices [0 … 19] and [20] — they are what makes the failure technically understandable.</a:t>
             </a:r>
           </a:p>
         </p:txBody>
@@ -1504,7 +1519,7 @@
           <a:lstStyle/>
           <a:p>
             <a:r>
-              <a:t>TIMING: 3 minutes. FIRST OF THREE CAUSAL BOUNDARIES.</a:t>
+              <a:t>TIMING: 2 minutes. FIRST OF THREE CAUSAL BOUNDARIES.</a:t>
             </a:r>
           </a:p>
           <a:p>
@@ -1752,6 +1767,11 @@
               <a:t>TRANSITION: several defenses in sequence, and the defect passed every one. There is a classic model for exactly this shape.</a:t>
             </a:r>
           </a:p>
+          <a:p>
+            <a:r>
+              <a:t>WILDCARD, SPELLED OUT (author): a wildcard matching criterion means 'accept any value here'. When the matching criterion for field 21 is a wildcard, the Content Interpreter never needs to READ field 21 to decide the match — so the missing 21st array entry was never touched, and every wildcard test passed honestly. The mismatch was real the whole time; the tests simply never exercised the read that exposes it. That is what makes it a latent condition rather than a flaky test.</a:t>
+            </a:r>
+          </a:p>
         </p:txBody>
       </p:sp>
       <p:sp>
@@ -1819,7 +1839,7 @@
           <a:lstStyle/>
           <a:p>
             <a:r>
-              <a:t>TIMING: 3 minutes. SECOND CAUSAL BOUNDARY.</a:t>
+              <a:t>TIMING: 2 minutes. SECOND CAUSAL BOUNDARY.</a:t>
             </a:r>
           </a:p>
           <a:p>
@@ -1850,6 +1870,11 @@
           <a:p>
             <a:r>
               <a:t>TRANSITION: the model predicts aligned weaknesses. The postmortem tells us what the weaknesses actually were.</a:t>
+            </a:r>
+          </a:p>
+          <a:p>
+            <a:r>
+              <a:t>NAMING + THE DISTINCTIVE CLAIM (author): say the model's NAME — this is Reason's Swiss cheese model — and state its distinctive claim precisely: every defensive layer can contain weaknesses, and a failure escapes only when weaknesses in successive layers ALIGN. The red path through the red-rimmed holes is the alignment; the other holes are weaknesses that this particular trajectory did not exercise. Without the alignment idea a student leaves with defense-in-depth but not Reason's contribution: defenses fail TOGETHER, as a configuration, not merely one at a time.</a:t>
             </a:r>
           </a:p>
         </p:txBody>
@@ -2014,7 +2039,7 @@
           <a:lstStyle/>
           <a:p>
             <a:r>
-              <a:t>TIMING: 3 minutes.</a:t>
+              <a:t>TIMING: 2 minutes.</a:t>
             </a:r>
           </a:p>
           <a:p>
@@ -2045,6 +2070,11 @@
           <a:p>
             <a:r>
               <a:t>TRANSITION: each intervention leaves a different uncertainty behind. What exactly does each piece of evidence establish?</a:t>
+            </a:r>
+          </a:p>
+          <a:p>
+            <a:r>
+              <a:t>TIMELINE (author): give the four a shared timeline — defect → release → propagation → disruption — and read each intervention against the stage it addresses (now tagged on each block): PREVENT acts at the defect, DETECT before release, CONTAIN during propagation, RECOVER after disruption. That turns the taxonomy into an analytical tool: for any proposed intervention, ask which stage it acts on and what has already happened by then.</a:t>
             </a:r>
           </a:p>
         </p:txBody>
@@ -2114,7 +2144,7 @@
           <a:lstStyle/>
           <a:p>
             <a:r>
-              <a:t>TIMING: 3 minutes. RECONNECTS TO THE VALIDATION UNIT.</a:t>
+              <a:t>TIMING: 2 minutes. RECONNECTS TO THE VALIDATION UNIT.</a:t>
             </a:r>
           </a:p>
           <a:p>
@@ -2214,7 +2244,7 @@
           <a:lstStyle/>
           <a:p>
             <a:r>
-              <a:t>TIMING: 2 minutes. TRANSITION SLIDE — closes Movement 2, opens the system question.</a:t>
+              <a:t>TIMING: 1 minutes. TRANSITION SLIDE — closes Movement 2, opens the system question.</a:t>
             </a:r>
           </a:p>
           <a:p>
@@ -2342,6 +2372,11 @@
               <a:t>TRANSITION: to reason about the larger boundaries we need a model built for systems — one whose vocabulary is control, not components.</a:t>
             </a:r>
           </a:p>
+          <a:p>
+            <a:r>
+              <a:t>STAGING (no animation is authored in this deck — run the reveal verbally): present the boundaries SEQUENTIALLY, never all four at once. Step 1 — cover or ignore the outer boundaries; point at ① content + interpreter and ask 'what caused the crash?'. Step 2 — widen to ② CrowdStrike's engineering system: 'why did the update escape?'. Step 3 — widen to ③ deployment, endpoints, services: 'why did organizations become unavailable?'. Step 4 — widen to ④ the shared-dependency ecosystem: 'why could one failure disrupt many sectors?'. Read each legend line only when its boundary is introduced. The slide is the end-state the staging arrives at.</a:t>
+            </a:r>
+          </a:p>
         </p:txBody>
       </p:sp>
       <p:sp>
@@ -2409,7 +2444,7 @@
           <a:lstStyle/>
           <a:p>
             <a:r>
-              <a:t>TIMING: 4 minutes. THIRD CAUSAL BOUNDARY — introduce the model accurately.</a:t>
+              <a:t>TIMING: 3 minutes. THIRD CAUSAL BOUNDARY — introduce the model accurately.</a:t>
             </a:r>
           </a:p>
           <a:p>
@@ -2440,6 +2475,11 @@
           <a:p>
             <a:r>
               <a:t>TRANSITION: apply it. What did CrowdStrike's update control structure look like on July 19?</a:t>
+            </a:r>
+          </a:p>
+          <a:p>
+            <a:r>
+              <a:t>EXPOSITION ORDER (author): lead with the CONCRETE example at the top of the slide — release manager, test results, wrong picture — and only then introduce the four terms by mapping them onto it: the manager is the CONTROLLER, the authorization is a CONTROL ACTION, the test results are FEEDBACK, the manager's picture of the system is the PROCESS MODEL. The abstraction arrives after the student has an instance of it. Slide 15 then applies the full structure to CrowdStrike — do not merge or reorder the two.</a:t>
             </a:r>
           </a:p>
         </p:txBody>
@@ -2509,7 +2549,7 @@
           <a:lstStyle/>
           <a:p>
             <a:r>
-              <a:t>TIMING: 3 minutes.</a:t>
+              <a:t>TIMING: 2 minutes.</a:t>
             </a:r>
           </a:p>
           <a:p>
@@ -2919,7 +2959,7 @@
           <a:lstStyle/>
           <a:p>
             <a:r>
-              <a:t>TIMING: 3 minutes.</a:t>
+              <a:t>TIMING: 2 minutes.</a:t>
             </a:r>
           </a:p>
           <a:p>
@@ -2955,6 +2995,11 @@
           <a:p>
             <a:r>
               <a:t>TRANSITION: three models, three boundaries, three intervention scopes. Put them side by side.</a:t>
+            </a:r>
+          </a:p>
+          <a:p>
+            <a:r>
+              <a:t>NOT A HIERARCHY (author): the stack can misread as an org chart. The corrective sentence is now on the slide — each controller requires BOTH authority to act AND evidence about the consequences. A regulator with authority but no operational evidence cannot control well; an operator rich in evidence may lack the authority to impose a sector-wide requirement. Control needs the pair, at every level.</a:t>
             </a:r>
           </a:p>
         </p:txBody>
@@ -3024,27 +3069,32 @@
           <a:lstStyle/>
           <a:p>
             <a:r>
-              <a:t>TIMING: 3 minutes. THE SYNTHESIS SLIDE — closes Movement 3.</a:t>
-            </a:r>
-          </a:p>
-          <a:p>
-            <a:r>
-              <a:t>ENGINEERING POINT: three models, three causal boundaries, three intervention scopes, encountered in the order the INVESTIGATION needed them. Component-level analysis asked 'what failed?' and let us repair the defect. Swiss cheese asked 'why did it escape?' and let us improve the defenses. STAMP asked 'why was the impact so broad?' and let us reason about controls, dependencies, and responsibilities — including controllers outside the vendor.</a:t>
-            </a:r>
-          </a:p>
-          <a:p>
-            <a:r>
-              <a:t>CARE: this is a progression of investigative SCOPE, not a ranking of theoretical sophistication, and not a ladder every analysis must climb. A local defect may justify a local correction; a defective release process may require stronger defenses; a systemic common-cause vulnerability may require architectural or institutional change. Do not suggest STAMP is the correct model for every failure. Swiss cheese and STAMP can each be applied at several scales — the boundary is the analyst's choice, not the theory's.</a:t>
-            </a:r>
-          </a:p>
-          <a:p>
-            <a:r>
-              <a:t>ASK: broader models expose more — what do they COST? (More evidence to support the account; more authority to act on it.)</a:t>
-            </a:r>
-          </a:p>
-          <a:p>
-            <a:r>
-              <a:t>EXPECTED ANSWERS AND MISCONCEPTION: students reflexively crown the broadest model. The analyst's obligation is a boundary SUFFICIENT for the decision at hand.</a:t>
+              <a:t>TIMING: 3 minutes. THE SYNTHESIS SLIDE — closes Movement 3. (Backbone slide: models enable different interventions.)</a:t>
+            </a:r>
+          </a:p>
+          <a:p>
+            <a:r>
+              <a:t>ENGINEERING POINT — TWO DIMENSIONS, NOT ONE: the three models differ in their EXPLANATORY MECHANISM (what kind of account they construct: a causal chain; a configuration of defenses; a control structure enforcing constraints) and, SEPARATELY, in the SYSTEM BOUNDARY they are applied to. This lecture applied them at progressively broader boundaries because the investigation's questions widened — but that was our choice of boundary, not a property of the models.</a:t>
+            </a:r>
+          </a:p>
+          <a:p>
+            <a:r>
+              <a:t>THE CONFLATION TO PREVENT: STAMP is NOT simply a more comprehensive Swiss cheese. STAMP can be applied to a narrow technical system (a single controller and its process); Swiss cheese can be applied across organizational boundaries (defenses spanning vendor and customer). The model answers its question; the boundary is chosen to fit the decision.</a:t>
+            </a:r>
+          </a:p>
+          <a:p>
+            <a:r>
+              <a:t>WALK THE TABLE: component-level — what mechanism produced the failure? — repair the defective mechanism. Swiss cheese — why did defenses fail to prevent it? — strengthen or diversify defenses. STAMP — which safety constraints were inadequately controlled? — change control actions, feedback, or authority.</a:t>
+            </a:r>
+          </a:p>
+          <a:p>
+            <a:r>
+              <a:t>ASK: broader explanations expose more — what do they COST? (More evidence to support the account; often more authority to act on it.)</a:t>
+            </a:r>
+          </a:p>
+          <a:p>
+            <a:r>
+              <a:t>EXPECTED ANSWERS AND MISCONCEPTION: students reflexively crown the broadest model. Keep the standing caution: broader is not automatically better; choose the boundary sufficient for the decision.</a:t>
             </a:r>
           </a:p>
           <a:p>
@@ -3119,7 +3169,7 @@
           <a:lstStyle/>
           <a:p>
             <a:r>
-              <a:t>TIMING: 3 minutes. OPENS MOVEMENT 4 — what should change?</a:t>
+              <a:t>TIMING: 2 minutes. OPENS MOVEMENT 4 — what should change?</a:t>
             </a:r>
           </a:p>
           <a:p>
@@ -3145,6 +3195,11 @@
           <a:p>
             <a:r>
               <a:t>TRANSITION: suppose the lesson is sound. Where does it go? Two destinations — the engineer, and the engineering environment. First the engineer.</a:t>
+            </a:r>
+          </a:p>
+          <a:p>
+            <a:r>
+              <a:t>BRIDGE (author): the jump from comparing causal models to reading postmortems needs its connective sentence, now on the slide — once engineers have an explanation, they must determine what the evidence justifies changing. A postmortem is the document where that determination is argued.</a:t>
             </a:r>
           </a:p>
         </p:txBody>
@@ -3214,7 +3269,7 @@
           <a:lstStyle/>
           <a:p>
             <a:r>
-              <a:t>TIMING: 3 minutes. PRESERVED FROM THE ORIGINAL LECTURE — Schön's contribution.</a:t>
+              <a:t>TIMING: 2 minutes. PRESERVED FROM THE ORIGINAL LECTURE — Schön's contribution.</a:t>
             </a:r>
           </a:p>
           <a:p>
@@ -3250,6 +3305,11 @@
           <a:p>
             <a:r>
               <a:t>TRANSITION: reflection lives in a person. People leave, and agents arrive without the organization's history. Where does the lesson live then?</a:t>
+            </a:r>
+          </a:p>
+          <a:p>
+            <a:r>
+              <a:t>EXPOSITION ORDER (author): read the intro sentence first, then walk the chain. The distinction to land before the diagram: experience accumulates by itself; expertise does not. Reflection is the deliberate comparison of expectation with outcome — that comparison, not the hours, is what feeds the repertoire.</a:t>
             </a:r>
           </a:p>
         </p:txBody>
@@ -3319,7 +3379,7 @@
           <a:lstStyle/>
           <a:p>
             <a:r>
-              <a:t>TIMING: 4 minutes. GOVERNANCE CONVERSION — the lesson changes the ENVIRONMENT.</a:t>
+              <a:t>TIMING: 3 minutes. GOVERNANCE CONVERSION — the lesson changes the ENVIRONMENT.</a:t>
             </a:r>
           </a:p>
           <a:p>
@@ -3350,6 +3410,11 @@
           <a:p>
             <a:r>
               <a:t>TRANSITION: encoding is not the end of the decision. Different lessons land at different ALTITUDES — and need different authorities.</a:t>
+            </a:r>
+          </a:p>
+          <a:p>
+            <a:r>
+              <a:t>SEQUENCE, NOT TAXONOMY (author): walk the five rows as CONNECTED DECISIONS, each depending on the previous — what obligation was violated? → how should it be REPRESENTED so it can be reasoned about? → what EVIDENCE establishes compliance with it? → how is that evidence EVALUATED? → what ENFORCES that an unacceptable change cannot proceed? The arrows down the left column carry the dependency. Map each to the unit where students met it (the bottom line): obligations in Requirements, representation in Modeling, evidence and evaluation in Validation, enforcement in Alignment. The diagnosis question is where the CHAIN first broke, and the encoding belongs at that link.</a:t>
             </a:r>
           </a:p>
         </p:txBody>
@@ -3419,7 +3484,7 @@
           <a:lstStyle/>
           <a:p>
             <a:r>
-              <a:t>TIMING: 3 minutes. THE LOCAL AND SYSTEMIC ANALYSES MEET.</a:t>
+              <a:t>TIMING: 2 minutes. THE LOCAL AND SYSTEMIC ANALYSES MEET.</a:t>
             </a:r>
           </a:p>
           <a:p>
@@ -3514,7 +3579,7 @@
           <a:lstStyle/>
           <a:p>
             <a:r>
-              <a:t>TIMING: 3 minutes. CLOSES THE CROWDSTRIKE INVESTIGATION.</a:t>
+              <a:t>TIMING: 2 minutes. CLOSES THE CROWDSTRIKE INVESTIGATION.</a:t>
             </a:r>
           </a:p>
           <a:p>
@@ -3609,32 +3674,37 @@
           <a:lstStyle/>
           <a:p>
             <a:r>
-              <a:t>TIMING: 2 minutes — a transfer exercise, not a second full case study.</a:t>
-            </a:r>
-          </a:p>
-          <a:p>
-            <a:r>
-              <a:t>ENGINEERING POINT: lead with the deep structure, because it is what makes this an APPLICATION of the method rather than a second war story. In both incidents, content or configuration shipped through a faster, less-gated path than code; and in both, a validator ran and passed while checking the wrong property — arity against the wrong contract at CrowdStrike, runtime instead of CPU at Cloudflare.</a:t>
-            </a:r>
-          </a:p>
-          <a:p>
-            <a:r>
-              <a:t>FACTS (Cloudflare post-mortem, 'Details of the Cloudflare outage on July 2, 2019'): a WAF Managed Rule targeting XSS deployed globally at 13:42 UTC; the sub-pattern .*(?:.*=.*) caused catastrophic backtracking (their worked numbers: 'x=x' 23 steps; 'x=' + twenty x's 555 steps); PCRE 'has no mechanism to protect against a runaway expression'; impact 27 minutes — identified 14:00, killed globally 14:07, traffic normal 14:09, WAF re-enabled 14:52. Software releases went DOG → PIG → Canary; the WAF SOP allowed a non-emergency rule to go global without staged rollout, and a CPU-usage protection had been accidentally removed weeks earlier.</a:t>
-            </a:r>
-          </a:p>
-          <a:p>
-            <a:r>
-              <a:t>CARE: regex matching cost depends on expression, algorithm, AND input — do not imply all engines behave this way (re2 and Rust's engine carry runtime guarantees). Do not conflate with Cloudflare's November 2025 outage — different mechanism.</a:t>
-            </a:r>
-          </a:p>
-          <a:p>
-            <a:r>
-              <a:t>ASK: before advancing — what in this story have you already seen this lecture?</a:t>
-            </a:r>
-          </a:p>
-          <a:p>
-            <a:r>
-              <a:t>TRANSITION: your turn. Diagnose it with the three models.</a:t>
+              <a:t>TIMING: 3 minutes — a transfer exercise, not a second full case study.</a:t>
+            </a:r>
+          </a:p>
+          <a:p>
+            <a:r>
+              <a:t>EXPOSITION ORDER (author): establish the system first. Cloudflare operates an edge network a large share of web traffic passes through; a Web Application Firewall (WAF) inspects that traffic for attacks; WAF rules describe attack patterns, often as regular expressions. THEN the failure — and explain the MECHANISM before the measurements: some regular expressions require disproportionately more matching work as the input grows, because a backtracking engine re-tries overlapping ways to match. The 23-vs-555 bars at the bottom ILLUSTRATE that mechanism; they do not replace the explanation.</a:t>
+            </a:r>
+          </a:p>
+          <a:p>
+            <a:r>
+              <a:t>FACTS (Cloudflare post-mortem, 'Details of the Cloudflare outage on July 2, 2019'): a WAF Managed Rule targeting XSS deployed globally at 13:42 UTC — in seconds, with no staged rollout, while software releases went DOG → PIG → Canary; the sub-pattern .*(?:.*=.*) caused catastrophic backtracking (their worked numbers: 'x=x' took 23 steps; 'x=' plus twenty 'x's took 555); PCRE 'has no mechanism to protect against a runaway expression'; WAF identified 14:00, killed globally 14:07, traffic normal 14:09, re-enabled 14:52 — 27 minutes of impact. A CPU protection had been accidentally removed weeks earlier.</a:t>
+            </a:r>
+          </a:p>
+          <a:p>
+            <a:r>
+              <a:t>DEEP STRUCTURE (lead with it at the footer): in both incidents, content or configuration shipped through a faster, less-gated path than code; and in both, a validator ran and passed while checking the wrong property — arity against the wrong contract at CrowdStrike, runtime instead of CPU at Cloudflare.</a:t>
+            </a:r>
+          </a:p>
+          <a:p>
+            <a:r>
+              <a:t>CARE: regex matching cost depends on expression, engine, AND input — do not imply all engines behave this way (re2 and Rust's engine carry runtime guarantees). Do not conflate with Cloudflare's November 2025 outage — different mechanism.</a:t>
+            </a:r>
+          </a:p>
+          <a:p>
+            <a:r>
+              <a:t>ASK: what in this story have you already seen this lecture?</a:t>
+            </a:r>
+          </a:p>
+          <a:p>
+            <a:r>
+              <a:t>TRANSITION: your turn — diagnose it with the three models.</a:t>
             </a:r>
           </a:p>
         </p:txBody>
@@ -3794,7 +3864,7 @@
           <a:lstStyle/>
           <a:p>
             <a:r>
-              <a:t>TIMING: 3 minutes. CLOSES THE UNIT AND ACT II. No new framework on this slide.</a:t>
+              <a:t>TIMING: 2 minutes. CLOSES THE UNIT AND ACT II. No new framework on this slide.</a:t>
             </a:r>
           </a:p>
           <a:p>
@@ -7692,6 +7762,17 @@
               <a:t>PREVENT</a:t>
             </a:r>
           </a:p>
+          <a:p>
+            <a:pPr algn="ctr"/>
+            <a:r>
+              <a:rPr sz="900" b="1" i="0">
+                <a:solidFill>
+                  <a:srgbClr val="FFFFFF"/>
+                </a:solidFill>
+              </a:rPr>
+              <a:t>acts at the defect</a:t>
+            </a:r>
+          </a:p>
         </p:txBody>
       </p:sp>
       <p:sp>
@@ -7830,6 +7911,17 @@
               <a:t>DETECT</a:t>
             </a:r>
           </a:p>
+          <a:p>
+            <a:pPr algn="ctr"/>
+            <a:r>
+              <a:rPr sz="900" b="1" i="0">
+                <a:solidFill>
+                  <a:srgbClr val="FFFFFF"/>
+                </a:solidFill>
+              </a:rPr>
+              <a:t>acts before release</a:t>
+            </a:r>
+          </a:p>
         </p:txBody>
       </p:sp>
       <p:sp>
@@ -7968,6 +8060,17 @@
               <a:t>CONTAIN</a:t>
             </a:r>
           </a:p>
+          <a:p>
+            <a:pPr algn="ctr"/>
+            <a:r>
+              <a:rPr sz="900" b="1" i="0" dirty="0">
+                <a:solidFill>
+                  <a:srgbClr val="FFFFFF"/>
+                </a:solidFill>
+              </a:rPr>
+              <a:t>acts during propagation</a:t>
+            </a:r>
+          </a:p>
         </p:txBody>
       </p:sp>
       <p:sp>
@@ -8104,6 +8207,17 @@
                 </a:solidFill>
               </a:rPr>
               <a:t>RECOVER</a:t>
+            </a:r>
+          </a:p>
+          <a:p>
+            <a:pPr algn="ctr"/>
+            <a:r>
+              <a:rPr sz="900" b="1" i="0">
+                <a:solidFill>
+                  <a:srgbClr val="FFFFFF"/>
+                </a:solidFill>
+              </a:rPr>
+              <a:t>acts after disruption</a:t>
             </a:r>
           </a:p>
         </p:txBody>
@@ -10421,7 +10535,7 @@
         </p:nvSpPr>
         <p:spPr>
           <a:xfrm>
-            <a:off x="2743200" y="1554480"/>
+            <a:off x="2743200" y="1920240"/>
             <a:ext cx="3657600" cy="914400"/>
           </a:xfrm>
           <a:prstGeom prst="rect">
@@ -10484,8 +10598,8 @@
         </p:nvCxnSpPr>
         <p:spPr>
           <a:xfrm>
-            <a:off x="3931920" y="2468880"/>
-            <a:ext cx="0" cy="1097279"/>
+            <a:off x="3931920" y="2834640"/>
+            <a:ext cx="0" cy="1005840"/>
           </a:xfrm>
           <a:prstGeom prst="line">
             <a:avLst/>
@@ -10520,8 +10634,8 @@
         </p:nvCxnSpPr>
         <p:spPr>
           <a:xfrm flipV="1">
-            <a:off x="5212080" y="2468880"/>
-            <a:ext cx="0" cy="1097279"/>
+            <a:off x="5212080" y="2834640"/>
+            <a:ext cx="0" cy="1005840"/>
           </a:xfrm>
           <a:prstGeom prst="line">
             <a:avLst/>
@@ -10556,7 +10670,7 @@
         </p:nvSpPr>
         <p:spPr>
           <a:xfrm>
-            <a:off x="2743200" y="3566160"/>
+            <a:off x="2743200" y="3840480"/>
             <a:ext cx="3657600" cy="731520"/>
           </a:xfrm>
           <a:prstGeom prst="rect">
@@ -10608,7 +10722,7 @@
         </p:nvSpPr>
         <p:spPr>
           <a:xfrm>
-            <a:off x="1097280" y="2788920"/>
+            <a:off x="1097280" y="3063240"/>
             <a:ext cx="2377440" cy="411480"/>
           </a:xfrm>
           <a:prstGeom prst="rect">
@@ -10642,7 +10756,7 @@
         </p:nvSpPr>
         <p:spPr>
           <a:xfrm>
-            <a:off x="6492240" y="2788920"/>
+            <a:off x="6492240" y="3063240"/>
             <a:ext cx="2103120" cy="411480"/>
           </a:xfrm>
           <a:prstGeom prst="rect">
@@ -10761,6 +10875,62 @@
                 </a:solidFill>
               </a:rPr>
               <a:t>What must the controller know and control?</a:t>
+            </a:r>
+          </a:p>
+        </p:txBody>
+      </p:sp>
+      <p:sp>
+        <p:nvSpPr>
+          <p:cNvPr id="915" name="Label"/>
+          <p:cNvSpPr txBox="1"/>
+          <p:nvPr/>
+        </p:nvSpPr>
+        <p:spPr>
+          <a:xfrm>
+            <a:off x="548640" y="868680"/>
+            <a:ext cx="8046720" cy="868680"/>
+          </a:xfrm>
+          <a:prstGeom prst="rect">
+            <a:avLst/>
+          </a:prstGeom>
+          <a:noFill/>
+        </p:spPr>
+        <p:txBody>
+          <a:bodyPr wrap="square" lIns="27432" tIns="22860" rIns="27432" bIns="22860" anchor="t">
+            <a:spAutoFit/>
+          </a:bodyPr>
+          <a:lstStyle/>
+          <a:p>
+            <a:pPr algn="ctr"/>
+            <a:r>
+              <a:rPr sz="1300" b="1" i="1">
+                <a:solidFill>
+                  <a:srgbClr val="5C4826"/>
+                </a:solidFill>
+              </a:rPr>
+              <a:t>A release manager authorizes an update (a control action) based on test results (feedback).</a:t>
+            </a:r>
+          </a:p>
+          <a:p>
+            <a:pPr algn="ctr"/>
+            <a:r>
+              <a:rPr sz="1300" b="1" i="1">
+                <a:solidFill>
+                  <a:srgbClr val="5C4826"/>
+                </a:solidFill>
+              </a:rPr>
+              <a:t>If the tests do not represent actual endpoint behavior, the manager’s picture of the</a:t>
+            </a:r>
+          </a:p>
+          <a:p>
+            <a:pPr algn="ctr"/>
+            <a:r>
+              <a:rPr sz="1300" b="1" i="1">
+                <a:solidFill>
+                  <a:srgbClr val="5C4826"/>
+                </a:solidFill>
+              </a:rPr>
+              <a:t>system (the process model) is wrong — and a well-intended decision is unsafe.</a:t>
             </a:r>
           </a:p>
         </p:txBody>
@@ -14067,8 +14237,8 @@
         </p:nvSpPr>
         <p:spPr>
           <a:xfrm>
-            <a:off x="548640" y="5212080"/>
-            <a:ext cx="8046720" cy="594360"/>
+            <a:off x="548640" y="5074920"/>
+            <a:ext cx="8046720" cy="777240"/>
           </a:xfrm>
           <a:prstGeom prst="rect">
             <a:avLst/>
@@ -14083,18 +14253,29 @@
           <a:p>
             <a:pPr algn="ctr"/>
             <a:r>
-              <a:rPr sz="1300" b="0" i="0">
+              <a:rPr sz="1200" b="1" i="0">
                 <a:solidFill>
                   <a:srgbClr val="5C4826"/>
                 </a:solidFill>
               </a:rPr>
+              <a:t>Each controller requires both authority to act and evidence about the consequences.</a:t>
+            </a:r>
+          </a:p>
+          <a:p>
+            <a:pPr algn="ctr"/>
+            <a:r>
+              <a:rPr sz="1200" b="0" i="0">
+                <a:solidFill>
+                  <a:srgbClr val="5C4826"/>
+                </a:solidFill>
+              </a:rPr>
               <a:t>Not every sector has a regulator empowered to mandate these controls.</a:t>
             </a:r>
           </a:p>
           <a:p>
             <a:pPr algn="ctr"/>
             <a:r>
-              <a:rPr sz="1300" b="0" i="0">
+              <a:rPr sz="1200" b="0" i="0">
                 <a:solidFill>
                   <a:srgbClr val="5C4826"/>
                 </a:solidFill>
@@ -15180,43 +15361,6 @@
           </a:p>
         </p:txBody>
       </p:sp>
-      <p:cxnSp>
-        <p:nvCxnSpPr>
-          <p:cNvPr id="905" name="Connector 904"/>
-          <p:cNvCxnSpPr/>
-          <p:nvPr/>
-        </p:nvCxnSpPr>
-        <p:spPr>
-          <a:xfrm>
-            <a:off x="448056" y="4069080"/>
-            <a:ext cx="8001000" cy="0"/>
-          </a:xfrm>
-          <a:prstGeom prst="line">
-            <a:avLst/>
-          </a:prstGeom>
-          <a:ln w="28575">
-            <a:solidFill>
-              <a:srgbClr val="8E6F3E"/>
-            </a:solidFill>
-            <a:headEnd type="triangle"/>
-            <a:tailEnd type="triangle"/>
-          </a:ln>
-        </p:spPr>
-        <p:style>
-          <a:lnRef idx="2">
-            <a:schemeClr val="accent1"/>
-          </a:lnRef>
-          <a:fillRef idx="0">
-            <a:schemeClr val="accent1"/>
-          </a:fillRef>
-          <a:effectRef idx="1">
-            <a:schemeClr val="accent1"/>
-          </a:effectRef>
-          <a:fontRef idx="minor">
-            <a:schemeClr val="tx1"/>
-          </a:fontRef>
-        </p:style>
-      </p:cxnSp>
       <p:sp>
         <p:nvSpPr>
           <p:cNvPr id="920" name="Label"/>
@@ -15226,7 +15370,7 @@
         <p:spPr>
           <a:xfrm>
             <a:off x="640080" y="2057400"/>
-            <a:ext cx="2011680" cy="457200"/>
+            <a:ext cx="2011680" cy="868680"/>
           </a:xfrm>
           <a:prstGeom prst="rect">
             <a:avLst/>
@@ -15241,12 +15385,12 @@
           <a:p>
             <a:pPr algn="ctr"/>
             <a:r>
-              <a:rPr sz="2000" b="0" i="0">
+              <a:rPr sz="1200" b="0" i="0">
                 <a:solidFill>
                   <a:srgbClr val="555960"/>
                 </a:solidFill>
               </a:rPr>
-              <a:t>What failed?</a:t>
+              <a:t>What mechanism produced the failure?</a:t>
             </a:r>
           </a:p>
         </p:txBody>
@@ -15260,7 +15404,7 @@
         <p:spPr>
           <a:xfrm>
             <a:off x="3566160" y="2057400"/>
-            <a:ext cx="2011680" cy="457200"/>
+            <a:ext cx="2011680" cy="868680"/>
           </a:xfrm>
           <a:prstGeom prst="rect">
             <a:avLst/>
@@ -15275,12 +15419,12 @@
           <a:p>
             <a:pPr algn="ctr"/>
             <a:r>
-              <a:rPr sz="2000" b="0" i="0">
+              <a:rPr sz="1200" b="0" i="0">
                 <a:solidFill>
                   <a:srgbClr val="555960"/>
                 </a:solidFill>
               </a:rPr>
-              <a:t>Why did it escape?</a:t>
+              <a:t>Why did defenses fail to prevent it?</a:t>
             </a:r>
           </a:p>
         </p:txBody>
@@ -15294,7 +15438,7 @@
         <p:spPr>
           <a:xfrm>
             <a:off x="6492240" y="2057400"/>
-            <a:ext cx="2011680" cy="457200"/>
+            <a:ext cx="2011680" cy="868680"/>
           </a:xfrm>
           <a:prstGeom prst="rect">
             <a:avLst/>
@@ -15309,26 +15453,26 @@
           <a:p>
             <a:pPr algn="ctr"/>
             <a:r>
-              <a:rPr sz="2000" b="0" i="0">
+              <a:rPr sz="1200" b="0" i="0">
                 <a:solidFill>
                   <a:srgbClr val="555960"/>
                 </a:solidFill>
               </a:rPr>
-              <a:t>Why so broad an impact?</a:t>
-            </a:r>
-          </a:p>
-        </p:txBody>
-      </p:sp>
-      <p:sp>
-        <p:nvSpPr>
-          <p:cNvPr id="924" name="Label"/>
+              <a:t>Which safety constraints were inadequately controlled?</a:t>
+            </a:r>
+          </a:p>
+        </p:txBody>
+      </p:sp>
+      <p:sp>
+        <p:nvSpPr>
+          <p:cNvPr id="927" name="Label"/>
           <p:cNvSpPr txBox="1"/>
           <p:nvPr/>
         </p:nvSpPr>
         <p:spPr>
           <a:xfrm>
-            <a:off x="448056" y="3657600"/>
-            <a:ext cx="1719072" cy="353943"/>
+            <a:off x="640080" y="4160520"/>
+            <a:ext cx="7863840" cy="1188720"/>
           </a:xfrm>
           <a:prstGeom prst="rect">
             <a:avLst/>
@@ -15341,33 +15485,50 @@
           </a:bodyPr>
           <a:lstStyle/>
           <a:p>
-            <a:pPr algn="l"/>
-            <a:r>
-              <a:rPr lang="en-US" sz="2000" b="0" i="0" dirty="0">
-                <a:solidFill>
-                  <a:srgbClr val="555960"/>
-                </a:solidFill>
-              </a:rPr>
-              <a:t>Narrower</a:t>
-            </a:r>
-            <a:endParaRPr sz="2000" b="0" i="0" dirty="0">
-              <a:solidFill>
-                <a:srgbClr val="555960"/>
-              </a:solidFill>
-            </a:endParaRPr>
-          </a:p>
-        </p:txBody>
-      </p:sp>
-      <p:sp>
-        <p:nvSpPr>
-          <p:cNvPr id="925" name="Label"/>
+            <a:pPr algn="ctr"/>
+            <a:r>
+              <a:rPr sz="1400" b="0" i="0" dirty="0">
+                <a:solidFill>
+                  <a:srgbClr val="5C4826"/>
+                </a:solidFill>
+              </a:rPr>
+              <a:t>Any of the three can be applied at different system boundaries — this lecture chose progressively broader ones.</a:t>
+            </a:r>
+          </a:p>
+          <a:p>
+            <a:pPr algn="ctr"/>
+            <a:r>
+              <a:rPr sz="1400" b="0" i="0" dirty="0">
+                <a:solidFill>
+                  <a:srgbClr val="5C4826"/>
+                </a:solidFill>
+              </a:rPr>
+              <a:t>Broader explanations require more evidence and may require greater authority to act.</a:t>
+            </a:r>
+          </a:p>
+          <a:p>
+            <a:pPr algn="ctr"/>
+            <a:r>
+              <a:rPr sz="1400" b="0" i="0" dirty="0">
+                <a:solidFill>
+                  <a:srgbClr val="5C4826"/>
+                </a:solidFill>
+              </a:rPr>
+              <a:t>Choose the model for its question, and the boundary sufficient for the decision.</a:t>
+            </a:r>
+          </a:p>
+        </p:txBody>
+      </p:sp>
+      <p:sp>
+        <p:nvSpPr>
+          <p:cNvPr id="1000" name="Label"/>
           <p:cNvSpPr txBox="1"/>
           <p:nvPr/>
         </p:nvSpPr>
         <p:spPr>
           <a:xfrm>
-            <a:off x="6848856" y="3657600"/>
-            <a:ext cx="1600200" cy="353943"/>
+            <a:off x="640080" y="3063240"/>
+            <a:ext cx="2011680" cy="731520"/>
           </a:xfrm>
           <a:prstGeom prst="rect">
             <a:avLst/>
@@ -15380,33 +15541,28 @@
           </a:bodyPr>
           <a:lstStyle/>
           <a:p>
-            <a:pPr algn="r"/>
-            <a:r>
-              <a:rPr lang="en-US" sz="2000" b="0" i="0" dirty="0">
+            <a:pPr algn="ctr"/>
+            <a:r>
+              <a:rPr sz="1200" b="0" i="0">
                 <a:solidFill>
                   <a:srgbClr val="555960"/>
                 </a:solidFill>
               </a:rPr>
-              <a:t>Broader</a:t>
-            </a:r>
-            <a:endParaRPr sz="2000" b="0" i="0" dirty="0">
-              <a:solidFill>
-                <a:srgbClr val="555960"/>
-              </a:solidFill>
-            </a:endParaRPr>
-          </a:p>
-        </p:txBody>
-      </p:sp>
-      <p:sp>
-        <p:nvSpPr>
-          <p:cNvPr id="927" name="Label"/>
+              <a:t>repair the defective mechanism</a:t>
+            </a:r>
+          </a:p>
+        </p:txBody>
+      </p:sp>
+      <p:sp>
+        <p:nvSpPr>
+          <p:cNvPr id="1001" name="Label"/>
           <p:cNvSpPr txBox="1"/>
           <p:nvPr/>
         </p:nvSpPr>
         <p:spPr>
           <a:xfrm>
-            <a:off x="850392" y="4526280"/>
-            <a:ext cx="7498079" cy="822960"/>
+            <a:off x="3566160" y="3063240"/>
+            <a:ext cx="2011680" cy="731520"/>
           </a:xfrm>
           <a:prstGeom prst="rect">
             <a:avLst/>
@@ -15421,43 +15577,26 @@
           <a:p>
             <a:pPr algn="ctr"/>
             <a:r>
-              <a:rPr sz="1500" b="0" i="0" dirty="0">
-                <a:solidFill>
-                  <a:srgbClr val="5C4826"/>
-                </a:solidFill>
-              </a:rPr>
-              <a:t>Broader explanations require more evidence and may require greater authority to act.</a:t>
-            </a:r>
-          </a:p>
-          <a:p>
-            <a:pPr algn="ctr"/>
-            <a:r>
-              <a:rPr sz="1500" b="0" i="0" dirty="0">
-                <a:solidFill>
-                  <a:srgbClr val="5C4826"/>
-                </a:solidFill>
-              </a:rPr>
-              <a:t>Choose the boundary sufficient for the decision — broader is not automatically better.</a:t>
-            </a:r>
-          </a:p>
-        </p:txBody>
-      </p:sp>
-      <p:sp>
-        <p:nvSpPr>
-          <p:cNvPr id="2" name="Label">
-            <a:extLst>
-              <a:ext uri="{FF2B5EF4-FFF2-40B4-BE49-F238E27FC236}">
-                <a16:creationId xmlns:a16="http://schemas.microsoft.com/office/drawing/2014/main" id="{7DD433C0-05A4-A8DB-8A40-F75777F417F1}"/>
-              </a:ext>
-            </a:extLst>
-          </p:cNvPr>
+              <a:rPr sz="1200" b="0" i="0">
+                <a:solidFill>
+                  <a:srgbClr val="555960"/>
+                </a:solidFill>
+              </a:rPr>
+              <a:t>strengthen or diversify defenses</a:t>
+            </a:r>
+          </a:p>
+        </p:txBody>
+      </p:sp>
+      <p:sp>
+        <p:nvSpPr>
+          <p:cNvPr id="1002" name="Label"/>
           <p:cNvSpPr txBox="1"/>
           <p:nvPr/>
         </p:nvSpPr>
         <p:spPr>
           <a:xfrm>
-            <a:off x="3502152" y="3657600"/>
-            <a:ext cx="2011680" cy="353943"/>
+            <a:off x="6492240" y="3063240"/>
+            <a:ext cx="2011680" cy="731520"/>
           </a:xfrm>
           <a:prstGeom prst="rect">
             <a:avLst/>
@@ -15472,127 +15611,12 @@
           <a:p>
             <a:pPr algn="ctr"/>
             <a:r>
-              <a:rPr lang="en-US" sz="2000" dirty="0">
+              <a:rPr sz="1200" b="0" i="0">
                 <a:solidFill>
                   <a:srgbClr val="555960"/>
                 </a:solidFill>
               </a:rPr>
-              <a:t>c</a:t>
-            </a:r>
-            <a:r>
-              <a:rPr lang="en-US" sz="2000" b="0" i="0" dirty="0">
-                <a:solidFill>
-                  <a:srgbClr val="555960"/>
-                </a:solidFill>
-              </a:rPr>
-              <a:t>ausal boundary</a:t>
-            </a:r>
-            <a:endParaRPr sz="2000" b="0" i="0" dirty="0">
-              <a:solidFill>
-                <a:srgbClr val="555960"/>
-              </a:solidFill>
-            </a:endParaRPr>
-          </a:p>
-        </p:txBody>
-      </p:sp>
-      <p:sp>
-        <p:nvSpPr>
-          <p:cNvPr id="1000" name="Label"/>
-          <p:cNvSpPr txBox="1"/>
-          <p:nvPr/>
-        </p:nvSpPr>
-        <p:spPr>
-          <a:xfrm>
-            <a:off x="640080" y="2697480"/>
-            <a:ext cx="2011680" cy="548640"/>
-          </a:xfrm>
-          <a:prstGeom prst="rect">
-            <a:avLst/>
-          </a:prstGeom>
-          <a:noFill/>
-        </p:spPr>
-        <p:txBody>
-          <a:bodyPr wrap="square" lIns="27432" tIns="22860" rIns="27432" bIns="22860" anchor="t">
-            <a:spAutoFit/>
-          </a:bodyPr>
-          <a:lstStyle/>
-          <a:p>
-            <a:pPr algn="ctr"/>
-            <a:r>
-              <a:rPr sz="1300" b="0" i="0">
-                <a:solidFill>
-                  <a:srgbClr val="555960"/>
-                </a:solidFill>
-              </a:rPr>
-              <a:t>repair the defect</a:t>
-            </a:r>
-          </a:p>
-        </p:txBody>
-      </p:sp>
-      <p:sp>
-        <p:nvSpPr>
-          <p:cNvPr id="1001" name="Label"/>
-          <p:cNvSpPr txBox="1"/>
-          <p:nvPr/>
-        </p:nvSpPr>
-        <p:spPr>
-          <a:xfrm>
-            <a:off x="3566160" y="2697480"/>
-            <a:ext cx="2011680" cy="548640"/>
-          </a:xfrm>
-          <a:prstGeom prst="rect">
-            <a:avLst/>
-          </a:prstGeom>
-          <a:noFill/>
-        </p:spPr>
-        <p:txBody>
-          <a:bodyPr wrap="square" lIns="27432" tIns="22860" rIns="27432" bIns="22860" anchor="t">
-            <a:spAutoFit/>
-          </a:bodyPr>
-          <a:lstStyle/>
-          <a:p>
-            <a:pPr algn="ctr"/>
-            <a:r>
-              <a:rPr sz="1300" b="0" i="0">
-                <a:solidFill>
-                  <a:srgbClr val="555960"/>
-                </a:solidFill>
-              </a:rPr>
-              <a:t>improve the defenses</a:t>
-            </a:r>
-          </a:p>
-        </p:txBody>
-      </p:sp>
-      <p:sp>
-        <p:nvSpPr>
-          <p:cNvPr id="1002" name="Label"/>
-          <p:cNvSpPr txBox="1"/>
-          <p:nvPr/>
-        </p:nvSpPr>
-        <p:spPr>
-          <a:xfrm>
-            <a:off x="6492240" y="2697480"/>
-            <a:ext cx="2011680" cy="548640"/>
-          </a:xfrm>
-          <a:prstGeom prst="rect">
-            <a:avLst/>
-          </a:prstGeom>
-          <a:noFill/>
-        </p:spPr>
-        <p:txBody>
-          <a:bodyPr wrap="square" lIns="27432" tIns="22860" rIns="27432" bIns="22860" anchor="t">
-            <a:spAutoFit/>
-          </a:bodyPr>
-          <a:lstStyle/>
-          <a:p>
-            <a:pPr algn="ctr"/>
-            <a:r>
-              <a:rPr sz="1300" b="0" i="0">
-                <a:solidFill>
-                  <a:srgbClr val="555960"/>
-                </a:solidFill>
-              </a:rPr>
-              <a:t>change controls and responsibilities</a:t>
+              <a:t>change control actions, feedback, or authority</a:t>
             </a:r>
           </a:p>
         </p:txBody>
@@ -16048,6 +16072,40 @@
           </a:p>
         </p:txBody>
       </p:sp>
+      <p:sp>
+        <p:nvSpPr>
+          <p:cNvPr id="915" name="Label"/>
+          <p:cNvSpPr txBox="1"/>
+          <p:nvPr/>
+        </p:nvSpPr>
+        <p:spPr>
+          <a:xfrm>
+            <a:off x="548640" y="914400"/>
+            <a:ext cx="8046720" cy="365760"/>
+          </a:xfrm>
+          <a:prstGeom prst="rect">
+            <a:avLst/>
+          </a:prstGeom>
+          <a:noFill/>
+        </p:spPr>
+        <p:txBody>
+          <a:bodyPr wrap="square" lIns="27432" tIns="22860" rIns="27432" bIns="22860" anchor="t">
+            <a:spAutoFit/>
+          </a:bodyPr>
+          <a:lstStyle/>
+          <a:p>
+            <a:pPr algn="ctr"/>
+            <a:r>
+              <a:rPr sz="1300" b="1" i="1">
+                <a:solidFill>
+                  <a:srgbClr val="5C4826"/>
+                </a:solidFill>
+              </a:rPr>
+              <a:t>We can now explain the failure three ways. The next decision: what does the evidence justify CHANGING?</a:t>
+            </a:r>
+          </a:p>
+        </p:txBody>
+      </p:sp>
     </p:spTree>
   </p:cSld>
   <p:clrMapOvr>
@@ -16130,7 +16188,7 @@
         </p:nvSpPr>
         <p:spPr>
           <a:xfrm>
-            <a:off x="2606040" y="1097280"/>
+            <a:off x="2606040" y="1481328"/>
             <a:ext cx="3931920" cy="548640"/>
           </a:xfrm>
           <a:prstGeom prst="rect">
@@ -16182,8 +16240,8 @@
         </p:nvCxnSpPr>
         <p:spPr>
           <a:xfrm>
-            <a:off x="4572000" y="1645919"/>
-            <a:ext cx="0" cy="274321"/>
+            <a:off x="4572000" y="2029968"/>
+            <a:ext cx="0" cy="201168"/>
           </a:xfrm>
           <a:prstGeom prst="line">
             <a:avLst/>
@@ -16218,7 +16276,7 @@
         </p:nvSpPr>
         <p:spPr>
           <a:xfrm>
-            <a:off x="2606040" y="1920240"/>
+            <a:off x="2606040" y="2231136"/>
             <a:ext cx="3931920" cy="548640"/>
           </a:xfrm>
           <a:prstGeom prst="rect">
@@ -16277,8 +16335,8 @@
         </p:nvCxnSpPr>
         <p:spPr>
           <a:xfrm>
-            <a:off x="4572000" y="2468880"/>
-            <a:ext cx="0" cy="274320"/>
+            <a:off x="4572000" y="2779776"/>
+            <a:ext cx="0" cy="201168"/>
           </a:xfrm>
           <a:prstGeom prst="line">
             <a:avLst/>
@@ -16313,7 +16371,7 @@
         </p:nvSpPr>
         <p:spPr>
           <a:xfrm>
-            <a:off x="2606040" y="2743200"/>
+            <a:off x="2606040" y="2980944"/>
             <a:ext cx="3931920" cy="548640"/>
           </a:xfrm>
           <a:prstGeom prst="rect">
@@ -16365,8 +16423,8 @@
         </p:nvCxnSpPr>
         <p:spPr>
           <a:xfrm>
-            <a:off x="4572000" y="3291840"/>
-            <a:ext cx="0" cy="274320"/>
+            <a:off x="4572000" y="3529584"/>
+            <a:ext cx="0" cy="201168"/>
           </a:xfrm>
           <a:prstGeom prst="line">
             <a:avLst/>
@@ -16401,7 +16459,7 @@
         </p:nvSpPr>
         <p:spPr>
           <a:xfrm>
-            <a:off x="2606040" y="3566160"/>
+            <a:off x="2606040" y="3730752"/>
             <a:ext cx="3931920" cy="548640"/>
           </a:xfrm>
           <a:prstGeom prst="rect">
@@ -16455,7 +16513,7 @@
         </p:nvSpPr>
         <p:spPr>
           <a:xfrm>
-            <a:off x="2606040" y="4389120"/>
+            <a:off x="2606040" y="4480560"/>
             <a:ext cx="3931920" cy="548640"/>
           </a:xfrm>
           <a:prstGeom prst="rect">
@@ -16507,8 +16565,8 @@
         </p:nvCxnSpPr>
         <p:spPr>
           <a:xfrm>
-            <a:off x="4572000" y="4114800"/>
-            <a:ext cx="0" cy="274319"/>
+            <a:off x="4572000" y="4279392"/>
+            <a:ext cx="0" cy="201167"/>
           </a:xfrm>
           <a:prstGeom prst="line">
             <a:avLst/>
@@ -16543,7 +16601,7 @@
         </p:nvSpPr>
         <p:spPr>
           <a:xfrm>
-            <a:off x="548640" y="5193792"/>
+            <a:off x="548640" y="5120640"/>
             <a:ext cx="8046720" cy="594360"/>
           </a:xfrm>
           <a:prstGeom prst="rect">
@@ -16559,7 +16617,7 @@
           <a:p>
             <a:pPr algn="ctr"/>
             <a:r>
-              <a:rPr sz="1400" b="1" i="0">
+              <a:rPr sz="1300" b="1" i="0">
                 <a:solidFill>
                   <a:srgbClr val="5C4826"/>
                 </a:solidFill>
@@ -16570,7 +16628,7 @@
           <a:p>
             <a:pPr algn="ctr"/>
             <a:r>
-              <a:rPr sz="1400" b="1" i="0">
+              <a:rPr sz="1300" b="1" i="0">
                 <a:solidFill>
                   <a:srgbClr val="5C4826"/>
                 </a:solidFill>
@@ -16628,6 +16686,51 @@
                 </a:solidFill>
               </a:rPr>
               <a:t>What will an experienced engineer notice next time?</a:t>
+            </a:r>
+          </a:p>
+        </p:txBody>
+      </p:sp>
+      <p:sp>
+        <p:nvSpPr>
+          <p:cNvPr id="1002" name="Label"/>
+          <p:cNvSpPr txBox="1"/>
+          <p:nvPr/>
+        </p:nvSpPr>
+        <p:spPr>
+          <a:xfrm>
+            <a:off x="548640" y="868680"/>
+            <a:ext cx="8046720" cy="566928"/>
+          </a:xfrm>
+          <a:prstGeom prst="rect">
+            <a:avLst/>
+          </a:prstGeom>
+          <a:noFill/>
+        </p:spPr>
+        <p:txBody>
+          <a:bodyPr wrap="square" lIns="27432" tIns="22860" rIns="27432" bIns="22860" anchor="t">
+            <a:spAutoFit/>
+          </a:bodyPr>
+          <a:lstStyle/>
+          <a:p>
+            <a:pPr algn="ctr"/>
+            <a:r>
+              <a:rPr sz="1300" b="1" i="1">
+                <a:solidFill>
+                  <a:srgbClr val="5C4826"/>
+                </a:solidFill>
+              </a:rPr>
+              <a:t>Engineers develop expertise by examining the consequences of their decisions and</a:t>
+            </a:r>
+          </a:p>
+          <a:p>
+            <a:pPr algn="ctr"/>
+            <a:r>
+              <a:rPr sz="1300" b="1" i="1">
+                <a:solidFill>
+                  <a:srgbClr val="5C4826"/>
+                </a:solidFill>
+              </a:rPr>
+              <a:t>incorporating what they learn into future judgment — reflection, not mere accumulation of experience.</a:t>
             </a:r>
           </a:p>
         </p:txBody>
@@ -17415,6 +17518,184 @@
           </a:p>
         </p:txBody>
       </p:sp>
+      <p:cxnSp>
+        <p:nvCxnSpPr>
+          <p:cNvPr id="1000" name="Connector 911"/>
+          <p:cNvCxnSpPr/>
+          <p:nvPr/>
+        </p:nvCxnSpPr>
+        <p:spPr>
+          <a:xfrm>
+            <a:off x="2194560" y="1892807"/>
+            <a:ext cx="0" cy="274320"/>
+          </a:xfrm>
+          <a:prstGeom prst="line">
+            <a:avLst/>
+          </a:prstGeom>
+          <a:ln w="28575">
+            <a:solidFill>
+              <a:srgbClr val="8E6F3E"/>
+            </a:solidFill>
+            <a:tailEnd type="triangle"/>
+          </a:ln>
+        </p:spPr>
+        <p:style>
+          <a:lnRef idx="2">
+            <a:schemeClr val="accent1"/>
+          </a:lnRef>
+          <a:fillRef idx="0">
+            <a:schemeClr val="accent1"/>
+          </a:fillRef>
+          <a:effectRef idx="1">
+            <a:schemeClr val="accent1"/>
+          </a:effectRef>
+          <a:fontRef idx="minor">
+            <a:schemeClr val="tx1"/>
+          </a:fontRef>
+        </p:style>
+      </p:cxnSp>
+      <p:cxnSp>
+        <p:nvCxnSpPr>
+          <p:cNvPr id="1001" name="Connector 911"/>
+          <p:cNvCxnSpPr/>
+          <p:nvPr/>
+        </p:nvCxnSpPr>
+        <p:spPr>
+          <a:xfrm>
+            <a:off x="2194560" y="2734056"/>
+            <a:ext cx="0" cy="274319"/>
+          </a:xfrm>
+          <a:prstGeom prst="line">
+            <a:avLst/>
+          </a:prstGeom>
+          <a:ln w="28575">
+            <a:solidFill>
+              <a:srgbClr val="8E6F3E"/>
+            </a:solidFill>
+            <a:tailEnd type="triangle"/>
+          </a:ln>
+        </p:spPr>
+        <p:style>
+          <a:lnRef idx="2">
+            <a:schemeClr val="accent1"/>
+          </a:lnRef>
+          <a:fillRef idx="0">
+            <a:schemeClr val="accent1"/>
+          </a:fillRef>
+          <a:effectRef idx="1">
+            <a:schemeClr val="accent1"/>
+          </a:effectRef>
+          <a:fontRef idx="minor">
+            <a:schemeClr val="tx1"/>
+          </a:fontRef>
+        </p:style>
+      </p:cxnSp>
+      <p:cxnSp>
+        <p:nvCxnSpPr>
+          <p:cNvPr id="1002" name="Connector 911"/>
+          <p:cNvCxnSpPr/>
+          <p:nvPr/>
+        </p:nvCxnSpPr>
+        <p:spPr>
+          <a:xfrm>
+            <a:off x="2194560" y="3575304"/>
+            <a:ext cx="0" cy="274319"/>
+          </a:xfrm>
+          <a:prstGeom prst="line">
+            <a:avLst/>
+          </a:prstGeom>
+          <a:ln w="28575">
+            <a:solidFill>
+              <a:srgbClr val="8E6F3E"/>
+            </a:solidFill>
+            <a:tailEnd type="triangle"/>
+          </a:ln>
+        </p:spPr>
+        <p:style>
+          <a:lnRef idx="2">
+            <a:schemeClr val="accent1"/>
+          </a:lnRef>
+          <a:fillRef idx="0">
+            <a:schemeClr val="accent1"/>
+          </a:fillRef>
+          <a:effectRef idx="1">
+            <a:schemeClr val="accent1"/>
+          </a:effectRef>
+          <a:fontRef idx="minor">
+            <a:schemeClr val="tx1"/>
+          </a:fontRef>
+        </p:style>
+      </p:cxnSp>
+      <p:cxnSp>
+        <p:nvCxnSpPr>
+          <p:cNvPr id="1003" name="Connector 911"/>
+          <p:cNvCxnSpPr/>
+          <p:nvPr/>
+        </p:nvCxnSpPr>
+        <p:spPr>
+          <a:xfrm>
+            <a:off x="2194560" y="4416552"/>
+            <a:ext cx="0" cy="274319"/>
+          </a:xfrm>
+          <a:prstGeom prst="line">
+            <a:avLst/>
+          </a:prstGeom>
+          <a:ln w="28575">
+            <a:solidFill>
+              <a:srgbClr val="8E6F3E"/>
+            </a:solidFill>
+            <a:tailEnd type="triangle"/>
+          </a:ln>
+        </p:spPr>
+        <p:style>
+          <a:lnRef idx="2">
+            <a:schemeClr val="accent1"/>
+          </a:lnRef>
+          <a:fillRef idx="0">
+            <a:schemeClr val="accent1"/>
+          </a:fillRef>
+          <a:effectRef idx="1">
+            <a:schemeClr val="accent1"/>
+          </a:effectRef>
+          <a:fontRef idx="minor">
+            <a:schemeClr val="tx1"/>
+          </a:fontRef>
+        </p:style>
+      </p:cxnSp>
+      <p:sp>
+        <p:nvSpPr>
+          <p:cNvPr id="915" name="Label"/>
+          <p:cNvSpPr txBox="1"/>
+          <p:nvPr/>
+        </p:nvSpPr>
+        <p:spPr>
+          <a:xfrm>
+            <a:off x="548640" y="5422392"/>
+            <a:ext cx="8046720" cy="292608"/>
+          </a:xfrm>
+          <a:prstGeom prst="rect">
+            <a:avLst/>
+          </a:prstGeom>
+          <a:noFill/>
+        </p:spPr>
+        <p:txBody>
+          <a:bodyPr wrap="square" lIns="27432" tIns="22860" rIns="27432" bIns="22860" anchor="t">
+            <a:spAutoFit/>
+          </a:bodyPr>
+          <a:lstStyle/>
+          <a:p>
+            <a:pPr algn="ctr"/>
+            <a:r>
+              <a:rPr sz="1100" b="1" i="0">
+                <a:solidFill>
+                  <a:srgbClr val="5C4826"/>
+                </a:solidFill>
+              </a:rPr>
+              <a:t>obligation → Requirements · representation → Modeling · evidence + evaluation → Validation · enforcement → Alignment</a:t>
+            </a:r>
+          </a:p>
+        </p:txBody>
+      </p:sp>
     </p:spTree>
   </p:cSld>
   <p:clrMapOvr>
@@ -19020,12 +19301,12 @@
           <a:p>
             <a:pPr algn="ctr"/>
             <a:r>
-              <a:rPr sz="2000" b="1" i="0">
+              <a:rPr sz="1200" b="1" i="0">
                 <a:solidFill>
                   <a:srgbClr val="FFFFFF"/>
                 </a:solidFill>
               </a:rPr>
-              <a:t>A NEW WAF RULE</a:t>
+              <a:t>CLOUDFLARE</a:t>
             </a:r>
           </a:p>
         </p:txBody>
@@ -19075,7 +19356,7 @@
                   <a:srgbClr val="555960"/>
                 </a:solidFill>
               </a:rPr>
-              <a:t>deployed globally at 13:42 UTC — in seconds, with no staged rollout</a:t>
+              <a:t>operates a global edge network; its WAF inspects customers’ web traffic for attacks</a:t>
             </a:r>
           </a:p>
         </p:txBody>
@@ -19158,12 +19439,12 @@
           <a:p>
             <a:pPr algn="ctr"/>
             <a:r>
-              <a:rPr sz="2000" b="1" i="0">
+              <a:rPr sz="1200" b="1" i="0">
                 <a:solidFill>
                   <a:srgbClr val="FFFFFF"/>
                 </a:solidFill>
               </a:rPr>
-              <a:t>THE REGEX</a:t>
+              <a:t>WAF MANAGED RULES</a:t>
             </a:r>
           </a:p>
         </p:txBody>
@@ -19213,7 +19494,7 @@
                   <a:srgbClr val="555960"/>
                 </a:solidFill>
               </a:rPr>
-              <a:t>.*(?:.*=.*)  —  ‘x=x’ took 23 steps; ‘x=’ plus twenty ‘x’s took 555</a:t>
+              <a:t>attack-detection patterns — often regular expressions — running on every edge server</a:t>
             </a:r>
           </a:p>
         </p:txBody>
@@ -19296,12 +19577,12 @@
           <a:p>
             <a:pPr algn="ctr"/>
             <a:r>
-              <a:rPr sz="2000" b="1" i="0" dirty="0">
+              <a:rPr sz="1200" b="1" i="0" dirty="0">
                 <a:solidFill>
                   <a:srgbClr val="FFFFFF"/>
                 </a:solidFill>
               </a:rPr>
-              <a:t>CPU EXHAUSTION</a:t>
+              <a:t>THE DEFECTIVE RULE</a:t>
             </a:r>
           </a:p>
         </p:txBody>
@@ -19351,7 +19632,7 @@
                   <a:srgbClr val="555960"/>
                 </a:solidFill>
               </a:rPr>
-              <a:t>PCRE has no mechanism to protect against a runaway expression</a:t>
+              <a:t>.*(?:.*=.*) — matching work grows explosively with input length (backtracking)</a:t>
             </a:r>
           </a:p>
         </p:txBody>
@@ -19434,7 +19715,7 @@
           <a:p>
             <a:pPr algn="ctr"/>
             <a:r>
-              <a:rPr sz="2000" b="1" i="0">
+              <a:rPr sz="1200" b="1" i="0">
                 <a:solidFill>
                   <a:srgbClr val="FFFFFF"/>
                 </a:solidFill>
@@ -19489,7 +19770,7 @@
                   <a:srgbClr val="555960"/>
                 </a:solidFill>
               </a:rPr>
-              <a:t>WAF killed globally at 14:07; traffic normal by 14:09</a:t>
+              <a:t>CPU exhaustion from 13:42 UTC; rule killed globally 14:07; traffic normal 14:09</a:t>
             </a:r>
             <a:endParaRPr sz="2000" b="1" i="0" dirty="0">
               <a:solidFill>
@@ -21172,8 +21453,8 @@
         </p:nvSpPr>
         <p:spPr>
           <a:xfrm>
-            <a:off x="822960" y="2103120"/>
-            <a:ext cx="2194560" cy="731520"/>
+            <a:off x="822960" y="4297680"/>
+            <a:ext cx="2194560" cy="640080"/>
           </a:xfrm>
           <a:prstGeom prst="rect">
             <a:avLst/>
@@ -21211,7 +21492,7 @@
                   <a:srgbClr val="FFFFFF"/>
                 </a:solidFill>
               </a:rPr>
-              <a:t>RAPID RESPONSE CONTENT</a:t>
+              <a:t>DEFECTIVE CONTENT</a:t>
             </a:r>
           </a:p>
         </p:txBody>
@@ -21224,7 +21505,7 @@
         </p:nvCxnSpPr>
         <p:spPr>
           <a:xfrm>
-            <a:off x="3017520" y="2468880"/>
+            <a:off x="3017520" y="4617720"/>
             <a:ext cx="548640" cy="0"/>
           </a:xfrm>
           <a:prstGeom prst="line">
@@ -21260,8 +21541,8 @@
         </p:nvSpPr>
         <p:spPr>
           <a:xfrm>
-            <a:off x="3566160" y="2103120"/>
-            <a:ext cx="2011680" cy="731520"/>
+            <a:off x="3566160" y="4297680"/>
+            <a:ext cx="2011680" cy="640080"/>
           </a:xfrm>
           <a:prstGeom prst="rect">
             <a:avLst/>
@@ -21301,7 +21582,7 @@
                   <a:srgbClr val="5C4826"/>
                 </a:solidFill>
               </a:rPr>
-              <a:t>Falcon sensor</a:t>
+              <a:t>sensor crash</a:t>
             </a:r>
           </a:p>
         </p:txBody>
@@ -21314,7 +21595,7 @@
         </p:nvCxnSpPr>
         <p:spPr>
           <a:xfrm>
-            <a:off x="5577840" y="2468880"/>
+            <a:off x="5577840" y="4617720"/>
             <a:ext cx="548640" cy="0"/>
           </a:xfrm>
           <a:prstGeom prst="line">
@@ -21350,8 +21631,8 @@
         </p:nvSpPr>
         <p:spPr>
           <a:xfrm>
-            <a:off x="6126480" y="2103120"/>
-            <a:ext cx="2011680" cy="731520"/>
+            <a:off x="6126480" y="4297680"/>
+            <a:ext cx="2011680" cy="640080"/>
           </a:xfrm>
           <a:prstGeom prst="rect">
             <a:avLst/>
@@ -21404,8 +21685,8 @@
         </p:nvSpPr>
         <p:spPr>
           <a:xfrm>
-            <a:off x="548640" y="3474720"/>
-            <a:ext cx="8046720" cy="457200"/>
+            <a:off x="548640" y="3886200"/>
+            <a:ext cx="8046720" cy="320040"/>
           </a:xfrm>
           <a:prstGeom prst="rect">
             <a:avLst/>
@@ -21420,16 +21701,394 @@
           <a:p>
             <a:pPr algn="ctr"/>
             <a:r>
-              <a:rPr sz="2000" b="1" i="0">
+              <a:rPr sz="1200" b="1" i="0">
                 <a:solidFill>
                   <a:srgbClr val="5C4826"/>
                 </a:solidFill>
               </a:rPr>
-              <a:t>Rapid Response Content shipped on a faster path than sensor-code releases.</a:t>
-            </a:r>
-          </a:p>
-        </p:txBody>
-      </p:sp>
+              <a:t>JULY 19, 2024: ONE RAPID RESPONSE CONTENT UPDATE WAS DEFECTIVE</a:t>
+            </a:r>
+          </a:p>
+        </p:txBody>
+      </p:sp>
+      <p:sp>
+        <p:nvSpPr>
+          <p:cNvPr id="920" name="Block"/>
+          <p:cNvSpPr/>
+          <p:nvPr/>
+        </p:nvSpPr>
+        <p:spPr>
+          <a:xfrm>
+            <a:off x="548640" y="1097280"/>
+            <a:ext cx="2560320" cy="566928"/>
+          </a:xfrm>
+          <a:prstGeom prst="rect">
+            <a:avLst/>
+          </a:prstGeom>
+          <a:solidFill>
+            <a:srgbClr val="8E6F3E"/>
+          </a:solidFill>
+          <a:ln>
+            <a:noFill/>
+          </a:ln>
+          <a:effectLst/>
+        </p:spPr>
+        <p:style>
+          <a:lnRef idx="1">
+            <a:schemeClr val="accent1"/>
+          </a:lnRef>
+          <a:fillRef idx="3">
+            <a:schemeClr val="accent1"/>
+          </a:fillRef>
+          <a:effectRef idx="2">
+            <a:schemeClr val="accent1"/>
+          </a:effectRef>
+          <a:fontRef idx="minor">
+            <a:schemeClr val="lt1"/>
+          </a:fontRef>
+        </p:style>
+        <p:txBody>
+          <a:bodyPr wrap="square" lIns="27432" tIns="22860" rIns="27432" bIns="22860" rtlCol="0" anchor="ctr"/>
+          <a:lstStyle/>
+          <a:p>
+            <a:pPr algn="ctr"/>
+            <a:r>
+              <a:rPr sz="1200" b="1" i="0">
+                <a:solidFill>
+                  <a:srgbClr val="FFFFFF"/>
+                </a:solidFill>
+              </a:rPr>
+              <a:t>CROWDSTRIKE</a:t>
+            </a:r>
+          </a:p>
+        </p:txBody>
+      </p:sp>
+      <p:sp>
+        <p:nvSpPr>
+          <p:cNvPr id="921" name="RowCaption"/>
+          <p:cNvSpPr/>
+          <p:nvPr/>
+        </p:nvSpPr>
+        <p:spPr>
+          <a:xfrm>
+            <a:off x="3383280" y="1097280"/>
+            <a:ext cx="5212080" cy="566928"/>
+          </a:xfrm>
+          <a:prstGeom prst="rect">
+            <a:avLst/>
+          </a:prstGeom>
+          <a:noFill/>
+          <a:ln>
+            <a:noFill/>
+          </a:ln>
+          <a:effectLst/>
+        </p:spPr>
+        <p:style>
+          <a:lnRef idx="1">
+            <a:schemeClr val="accent1"/>
+          </a:lnRef>
+          <a:fillRef idx="3">
+            <a:schemeClr val="accent1"/>
+          </a:fillRef>
+          <a:effectRef idx="2">
+            <a:schemeClr val="accent1"/>
+          </a:effectRef>
+          <a:fontRef idx="minor">
+            <a:schemeClr val="lt1"/>
+          </a:fontRef>
+        </p:style>
+        <p:txBody>
+          <a:bodyPr wrap="square" lIns="27432" tIns="22860" rIns="27432" bIns="22860" rtlCol="0" anchor="ctr"/>
+          <a:lstStyle/>
+          <a:p>
+            <a:pPr algn="l"/>
+            <a:r>
+              <a:rPr sz="2000" b="0" i="0">
+                <a:solidFill>
+                  <a:srgbClr val="555960"/>
+                </a:solidFill>
+              </a:rPr>
+              <a:t>a security vendor; organizations install its Falcon product to protect their computers</a:t>
+            </a:r>
+          </a:p>
+        </p:txBody>
+      </p:sp>
+      <p:sp>
+        <p:nvSpPr>
+          <p:cNvPr id="1000" name="Block"/>
+          <p:cNvSpPr/>
+          <p:nvPr/>
+        </p:nvSpPr>
+        <p:spPr>
+          <a:xfrm>
+            <a:off x="548640" y="2011680"/>
+            <a:ext cx="2560320" cy="566928"/>
+          </a:xfrm>
+          <a:prstGeom prst="rect">
+            <a:avLst/>
+          </a:prstGeom>
+          <a:solidFill>
+            <a:srgbClr val="8E6F3E"/>
+          </a:solidFill>
+          <a:ln>
+            <a:noFill/>
+          </a:ln>
+          <a:effectLst/>
+        </p:spPr>
+        <p:style>
+          <a:lnRef idx="1">
+            <a:schemeClr val="accent1"/>
+          </a:lnRef>
+          <a:fillRef idx="3">
+            <a:schemeClr val="accent1"/>
+          </a:fillRef>
+          <a:effectRef idx="2">
+            <a:schemeClr val="accent1"/>
+          </a:effectRef>
+          <a:fontRef idx="minor">
+            <a:schemeClr val="lt1"/>
+          </a:fontRef>
+        </p:style>
+        <p:txBody>
+          <a:bodyPr wrap="square" lIns="27432" tIns="22860" rIns="27432" bIns="22860" rtlCol="0" anchor="ctr"/>
+          <a:lstStyle/>
+          <a:p>
+            <a:pPr algn="ctr"/>
+            <a:r>
+              <a:rPr sz="1200" b="1" i="0">
+                <a:solidFill>
+                  <a:srgbClr val="FFFFFF"/>
+                </a:solidFill>
+              </a:rPr>
+              <a:t>FALCON SENSOR</a:t>
+            </a:r>
+          </a:p>
+        </p:txBody>
+      </p:sp>
+      <p:sp>
+        <p:nvSpPr>
+          <p:cNvPr id="1001" name="RowCaption"/>
+          <p:cNvSpPr/>
+          <p:nvPr/>
+        </p:nvSpPr>
+        <p:spPr>
+          <a:xfrm>
+            <a:off x="3383280" y="2011680"/>
+            <a:ext cx="5212080" cy="566928"/>
+          </a:xfrm>
+          <a:prstGeom prst="rect">
+            <a:avLst/>
+          </a:prstGeom>
+          <a:noFill/>
+          <a:ln>
+            <a:noFill/>
+          </a:ln>
+          <a:effectLst/>
+        </p:spPr>
+        <p:style>
+          <a:lnRef idx="1">
+            <a:schemeClr val="accent1"/>
+          </a:lnRef>
+          <a:fillRef idx="3">
+            <a:schemeClr val="accent1"/>
+          </a:fillRef>
+          <a:effectRef idx="2">
+            <a:schemeClr val="accent1"/>
+          </a:effectRef>
+          <a:fontRef idx="minor">
+            <a:schemeClr val="lt1"/>
+          </a:fontRef>
+        </p:style>
+        <p:txBody>
+          <a:bodyPr wrap="square" lIns="27432" tIns="22860" rIns="27432" bIns="22860" rtlCol="0" anchor="ctr"/>
+          <a:lstStyle/>
+          <a:p>
+            <a:pPr algn="l"/>
+            <a:r>
+              <a:rPr sz="2000" b="0" i="0">
+                <a:solidFill>
+                  <a:srgbClr val="555960"/>
+                </a:solidFill>
+              </a:rPr>
+              <a:t>software running on each Windows endpoint, with privileged (deep) system access</a:t>
+            </a:r>
+          </a:p>
+        </p:txBody>
+      </p:sp>
+      <p:sp>
+        <p:nvSpPr>
+          <p:cNvPr id="1002" name="Block"/>
+          <p:cNvSpPr/>
+          <p:nvPr/>
+        </p:nvSpPr>
+        <p:spPr>
+          <a:xfrm>
+            <a:off x="548640" y="2926080"/>
+            <a:ext cx="2560320" cy="566928"/>
+          </a:xfrm>
+          <a:prstGeom prst="rect">
+            <a:avLst/>
+          </a:prstGeom>
+          <a:solidFill>
+            <a:srgbClr val="8E6F3E"/>
+          </a:solidFill>
+          <a:ln>
+            <a:noFill/>
+          </a:ln>
+          <a:effectLst/>
+        </p:spPr>
+        <p:style>
+          <a:lnRef idx="1">
+            <a:schemeClr val="accent1"/>
+          </a:lnRef>
+          <a:fillRef idx="3">
+            <a:schemeClr val="accent1"/>
+          </a:fillRef>
+          <a:effectRef idx="2">
+            <a:schemeClr val="accent1"/>
+          </a:effectRef>
+          <a:fontRef idx="minor">
+            <a:schemeClr val="lt1"/>
+          </a:fontRef>
+        </p:style>
+        <p:txBody>
+          <a:bodyPr wrap="square" lIns="27432" tIns="22860" rIns="27432" bIns="22860" rtlCol="0" anchor="ctr"/>
+          <a:lstStyle/>
+          <a:p>
+            <a:pPr algn="ctr"/>
+            <a:r>
+              <a:rPr sz="1200" b="1" i="0">
+                <a:solidFill>
+                  <a:srgbClr val="FFFFFF"/>
+                </a:solidFill>
+              </a:rPr>
+              <a:t>RAPID RESPONSE CONTENT</a:t>
+            </a:r>
+          </a:p>
+        </p:txBody>
+      </p:sp>
+      <p:sp>
+        <p:nvSpPr>
+          <p:cNvPr id="1003" name="RowCaption"/>
+          <p:cNvSpPr/>
+          <p:nvPr/>
+        </p:nvSpPr>
+        <p:spPr>
+          <a:xfrm>
+            <a:off x="3383280" y="2926080"/>
+            <a:ext cx="5212080" cy="566928"/>
+          </a:xfrm>
+          <a:prstGeom prst="rect">
+            <a:avLst/>
+          </a:prstGeom>
+          <a:noFill/>
+          <a:ln>
+            <a:noFill/>
+          </a:ln>
+          <a:effectLst/>
+        </p:spPr>
+        <p:style>
+          <a:lnRef idx="1">
+            <a:schemeClr val="accent1"/>
+          </a:lnRef>
+          <a:fillRef idx="3">
+            <a:schemeClr val="accent1"/>
+          </a:fillRef>
+          <a:effectRef idx="2">
+            <a:schemeClr val="accent1"/>
+          </a:effectRef>
+          <a:fontRef idx="minor">
+            <a:schemeClr val="lt1"/>
+          </a:fontRef>
+        </p:style>
+        <p:txBody>
+          <a:bodyPr wrap="square" lIns="27432" tIns="22860" rIns="27432" bIns="22860" rtlCol="0" anchor="ctr"/>
+          <a:lstStyle/>
+          <a:p>
+            <a:pPr algn="l"/>
+            <a:r>
+              <a:rPr sz="2000" b="0" i="0">
+                <a:solidFill>
+                  <a:srgbClr val="555960"/>
+                </a:solidFill>
+              </a:rPr>
+              <a:t>detection content the sensor interprets — distributed separately from sensor software</a:t>
+            </a:r>
+          </a:p>
+        </p:txBody>
+      </p:sp>
+      <p:cxnSp>
+        <p:nvCxnSpPr>
+          <p:cNvPr id="922" name="Connector 922"/>
+          <p:cNvCxnSpPr/>
+          <p:nvPr/>
+        </p:nvCxnSpPr>
+        <p:spPr>
+          <a:xfrm>
+            <a:off x="1828800" y="1664208"/>
+            <a:ext cx="0" cy="347472"/>
+          </a:xfrm>
+          <a:prstGeom prst="line">
+            <a:avLst/>
+          </a:prstGeom>
+          <a:ln w="19050">
+            <a:solidFill>
+              <a:srgbClr val="8E6F3E"/>
+            </a:solidFill>
+            <a:tailEnd type="triangle"/>
+          </a:ln>
+        </p:spPr>
+        <p:style>
+          <a:lnRef idx="2">
+            <a:schemeClr val="accent1"/>
+          </a:lnRef>
+          <a:fillRef idx="0">
+            <a:schemeClr val="accent1"/>
+          </a:fillRef>
+          <a:effectRef idx="1">
+            <a:schemeClr val="accent1"/>
+          </a:effectRef>
+          <a:fontRef idx="minor">
+            <a:schemeClr val="tx1"/>
+          </a:fontRef>
+        </p:style>
+      </p:cxnSp>
+      <p:cxnSp>
+        <p:nvCxnSpPr>
+          <p:cNvPr id="1004" name="Connector 922"/>
+          <p:cNvCxnSpPr/>
+          <p:nvPr/>
+        </p:nvCxnSpPr>
+        <p:spPr>
+          <a:xfrm>
+            <a:off x="1828800" y="2578608"/>
+            <a:ext cx="0" cy="347472"/>
+          </a:xfrm>
+          <a:prstGeom prst="line">
+            <a:avLst/>
+          </a:prstGeom>
+          <a:ln w="19050">
+            <a:solidFill>
+              <a:srgbClr val="8E6F3E"/>
+            </a:solidFill>
+            <a:tailEnd type="triangle"/>
+          </a:ln>
+        </p:spPr>
+        <p:style>
+          <a:lnRef idx="2">
+            <a:schemeClr val="accent1"/>
+          </a:lnRef>
+          <a:fillRef idx="0">
+            <a:schemeClr val="accent1"/>
+          </a:fillRef>
+          <a:effectRef idx="1">
+            <a:schemeClr val="accent1"/>
+          </a:effectRef>
+          <a:fontRef idx="minor">
+            <a:schemeClr val="tx1"/>
+          </a:fontRef>
+        </p:style>
+      </p:cxnSp>
     </p:spTree>
   </p:cSld>
   <p:clrMapOvr>
@@ -21568,13 +22227,58 @@
       </p:sp>
       <p:sp>
         <p:nvSpPr>
+          <p:cNvPr id="915" name="Label"/>
+          <p:cNvSpPr txBox="1"/>
+          <p:nvPr/>
+        </p:nvSpPr>
+        <p:spPr>
+          <a:xfrm>
+            <a:off x="548640" y="868680"/>
+            <a:ext cx="8046720" cy="566928"/>
+          </a:xfrm>
+          <a:prstGeom prst="rect">
+            <a:avLst/>
+          </a:prstGeom>
+          <a:noFill/>
+        </p:spPr>
+        <p:txBody>
+          <a:bodyPr wrap="square" lIns="27432" tIns="22860" rIns="27432" bIns="22860" anchor="t">
+            <a:spAutoFit/>
+          </a:bodyPr>
+          <a:lstStyle/>
+          <a:p>
+            <a:pPr algn="ctr"/>
+            <a:r>
+              <a:rPr sz="1300" b="1" i="1">
+                <a:solidFill>
+                  <a:srgbClr val="5C4826"/>
+                </a:solidFill>
+              </a:rPr>
+              <a:t>The sensor interprets detection content using predefined templates.</a:t>
+            </a:r>
+          </a:p>
+          <a:p>
+            <a:pPr algn="ctr"/>
+            <a:r>
+              <a:rPr sz="1300" b="1" i="1">
+                <a:solidFill>
+                  <a:srgbClr val="5C4826"/>
+                </a:solidFill>
+              </a:rPr>
+              <a:t>Each template specifies the input fields the interpreter expects.</a:t>
+            </a:r>
+          </a:p>
+        </p:txBody>
+      </p:sp>
+      <p:sp>
+        <p:nvSpPr>
           <p:cNvPr id="910" name="Block"/>
           <p:cNvSpPr/>
           <p:nvPr/>
         </p:nvSpPr>
         <p:spPr>
           <a:xfrm>
-            <a:off x="2743200" y="1005840"/>
+            <a:off x="2743200" y="1600200"/>
             <a:ext cx="3657600" cy="502920"/>
           </a:xfrm>
           <a:prstGeom prst="rect">
@@ -21608,7 +22312,7 @@
           <a:p>
             <a:pPr algn="ctr"/>
             <a:r>
-              <a:rPr sz="2000" b="1" i="0">
+              <a:rPr sz="1200" b="1" i="0">
                 <a:solidFill>
                   <a:srgbClr val="FFFFFF"/>
                 </a:solidFill>
@@ -21626,7 +22330,7 @@
         </p:nvSpPr>
         <p:spPr>
           <a:xfrm>
-            <a:off x="822960" y="1965960"/>
+            <a:off x="822960" y="2423160"/>
             <a:ext cx="3291840" cy="502920"/>
           </a:xfrm>
           <a:prstGeom prst="rect">
@@ -21680,7 +22384,7 @@
         </p:nvSpPr>
         <p:spPr>
           <a:xfrm>
-            <a:off x="5029200" y="1965960"/>
+            <a:off x="5029200" y="2423160"/>
             <a:ext cx="3291840" cy="502920"/>
           </a:xfrm>
           <a:prstGeom prst="rect">
@@ -21734,8 +22438,8 @@
         </p:nvCxnSpPr>
         <p:spPr>
           <a:xfrm flipH="1">
-            <a:off x="2468880" y="1508760"/>
-            <a:ext cx="1554480" cy="457200"/>
+            <a:off x="2468880" y="2103120"/>
+            <a:ext cx="1554480" cy="320040"/>
           </a:xfrm>
           <a:prstGeom prst="line">
             <a:avLst/>
@@ -21770,8 +22474,8 @@
         </p:nvCxnSpPr>
         <p:spPr>
           <a:xfrm>
-            <a:off x="5120640" y="1508760"/>
-            <a:ext cx="1554480" cy="457200"/>
+            <a:off x="5120640" y="2103120"/>
+            <a:ext cx="1554480" cy="320040"/>
           </a:xfrm>
           <a:prstGeom prst="line">
             <a:avLst/>
@@ -21806,7 +22510,7 @@
         </p:nvSpPr>
         <p:spPr>
           <a:xfrm>
-            <a:off x="3108960" y="2971800"/>
+            <a:off x="3108960" y="3291840"/>
             <a:ext cx="2926080" cy="502920"/>
           </a:xfrm>
           <a:prstGeom prst="rect">
@@ -21840,7 +22544,7 @@
           <a:p>
             <a:pPr algn="ctr"/>
             <a:r>
-              <a:rPr sz="2000" b="1" i="0">
+              <a:rPr sz="1200" b="1" i="0">
                 <a:solidFill>
                   <a:srgbClr val="FFFFFF"/>
                 </a:solidFill>
@@ -21858,8 +22562,8 @@
         </p:nvCxnSpPr>
         <p:spPr>
           <a:xfrm>
-            <a:off x="2468880" y="2468880"/>
-            <a:ext cx="1371600" cy="502919"/>
+            <a:off x="2468880" y="2926080"/>
+            <a:ext cx="1371600" cy="365759"/>
           </a:xfrm>
           <a:prstGeom prst="line">
             <a:avLst/>
@@ -21894,8 +22598,8 @@
         </p:nvCxnSpPr>
         <p:spPr>
           <a:xfrm flipH="1">
-            <a:off x="5303520" y="2468880"/>
-            <a:ext cx="1371600" cy="502919"/>
+            <a:off x="5303520" y="2926080"/>
+            <a:ext cx="1371600" cy="365759"/>
           </a:xfrm>
           <a:prstGeom prst="line">
             <a:avLst/>
@@ -21930,7 +22634,7 @@
         </p:nvSpPr>
         <p:spPr>
           <a:xfrm>
-            <a:off x="2926080" y="3931920"/>
+            <a:off x="2926080" y="4114800"/>
             <a:ext cx="3291840" cy="502920"/>
           </a:xfrm>
           <a:prstGeom prst="rect">
@@ -21984,8 +22688,8 @@
         </p:nvCxnSpPr>
         <p:spPr>
           <a:xfrm>
-            <a:off x="4572000" y="3474720"/>
-            <a:ext cx="0" cy="457200"/>
+            <a:off x="4572000" y="3794760"/>
+            <a:ext cx="0" cy="320039"/>
           </a:xfrm>
           <a:prstGeom prst="line">
             <a:avLst/>
@@ -22020,7 +22724,7 @@
         </p:nvSpPr>
         <p:spPr>
           <a:xfrm>
-            <a:off x="3200400" y="4846320"/>
+            <a:off x="3200400" y="4892040"/>
             <a:ext cx="2743200" cy="502920"/>
           </a:xfrm>
           <a:prstGeom prst="rect">
@@ -22056,7 +22760,7 @@
           <a:p>
             <a:pPr algn="ctr"/>
             <a:r>
-              <a:rPr sz="2000" b="1" i="0">
+              <a:rPr sz="1200" b="1" i="0">
                 <a:solidFill>
                   <a:srgbClr val="FFFFFF"/>
                 </a:solidFill>
@@ -22074,8 +22778,8 @@
         </p:nvCxnSpPr>
         <p:spPr>
           <a:xfrm>
-            <a:off x="4572000" y="4434840"/>
-            <a:ext cx="0" cy="411480"/>
+            <a:off x="4572000" y="4617720"/>
+            <a:ext cx="0" cy="274319"/>
           </a:xfrm>
           <a:prstGeom prst="line">
             <a:avLst/>
@@ -23417,7 +24121,7 @@
                   <a:srgbClr val="555960"/>
                 </a:solidFill>
               </a:rPr>
-              <a:t>passed — every test matched the 21st field with a wildcard</a:t>
+              <a:t>passed — every test used a wildcard (‘match anything’) for field 21, so field 21 was never read</a:t>
             </a:r>
           </a:p>
         </p:txBody>
@@ -23965,7 +24669,7 @@
                   <a:srgbClr val="000000"/>
                 </a:solidFill>
               </a:rPr>
-              <a:t>Explanation 2: Defenses can fail together</a:t>
+              <a:t>Explanation 2: The Swiss cheese model</a:t>
             </a:r>
           </a:p>
         </p:txBody>
@@ -24104,9 +24808,9 @@
           <a:solidFill>
             <a:srgbClr val="FFFFFF"/>
           </a:solidFill>
-          <a:ln w="12700">
+          <a:ln w="22225">
             <a:solidFill>
-              <a:srgbClr val="C9B991"/>
+              <a:srgbClr val="B3261E"/>
             </a:solidFill>
           </a:ln>
           <a:effectLst/>
@@ -24292,9 +24996,9 @@
           <a:solidFill>
             <a:srgbClr val="FFFFFF"/>
           </a:solidFill>
-          <a:ln w="12700">
+          <a:ln w="22225">
             <a:solidFill>
-              <a:srgbClr val="C9B991"/>
+              <a:srgbClr val="B3261E"/>
             </a:solidFill>
           </a:ln>
           <a:effectLst/>
@@ -24480,9 +25184,9 @@
           <a:solidFill>
             <a:srgbClr val="FFFFFF"/>
           </a:solidFill>
-          <a:ln w="12700">
+          <a:ln w="22225">
             <a:solidFill>
-              <a:srgbClr val="C9B991"/>
+              <a:srgbClr val="B3261E"/>
             </a:solidFill>
           </a:ln>
           <a:effectLst/>
@@ -24668,9 +25372,9 @@
           <a:solidFill>
             <a:srgbClr val="FFFFFF"/>
           </a:solidFill>
-          <a:ln w="12700">
+          <a:ln w="22225">
             <a:solidFill>
-              <a:srgbClr val="C9B991"/>
+              <a:srgbClr val="B3261E"/>
             </a:solidFill>
           </a:ln>
           <a:effectLst/>
@@ -24761,7 +25465,7 @@
           </a:prstGeom>
           <a:ln w="31750">
             <a:solidFill>
-              <a:srgbClr val="9A3F12"/>
+              <a:srgbClr val="B3261E"/>
             </a:solidFill>
             <a:tailEnd type="triangle"/>
           </a:ln>
@@ -24789,8 +25493,8 @@
         </p:nvSpPr>
         <p:spPr>
           <a:xfrm>
-            <a:off x="548640" y="5212080"/>
-            <a:ext cx="8046720" cy="457200"/>
+            <a:off x="548640" y="5074920"/>
+            <a:ext cx="8046720" cy="640080"/>
           </a:xfrm>
           <a:prstGeom prst="rect">
             <a:avLst/>
@@ -24805,12 +25509,23 @@
           <a:p>
             <a:pPr algn="ctr"/>
             <a:r>
-              <a:rPr sz="2200" b="0" i="0">
+              <a:rPr sz="1400" b="0" i="0">
                 <a:solidFill>
                   <a:srgbClr val="5C4826"/>
                 </a:solidFill>
               </a:rPr>
-              <a:t>In this view, the condition of the defenses matters.</a:t>
+              <a:t>Reason’s claim: every defensive layer can contain weaknesses —</a:t>
+            </a:r>
+          </a:p>
+          <a:p>
+            <a:pPr algn="ctr"/>
+            <a:r>
+              <a:rPr sz="1400" b="0" i="0">
+                <a:solidFill>
+                  <a:srgbClr val="5C4826"/>
+                </a:solidFill>
+              </a:rPr>
+              <a:t>a failure escapes only when the weaknesses ALIGN.</a:t>
             </a:r>
           </a:p>
         </p:txBody>

--- a/course/lectures/act-2-delegation-and-control/04-failure-aware-engineering/2-4-Failure-Aware-Engineering.pptx
+++ b/course/lectures/act-2-delegation-and-control/04-failure-aware-engineering/2-4-Failure-Aware-Engineering.pptx
@@ -33,6 +33,8 @@
     <p:sldId id="325" r:id="rId63"/>
     <p:sldId id="326" r:id="rId64"/>
     <p:sldId id="327" r:id="rId65"/>
+    <p:sldId id="331" r:id="rId35"/>
+    <p:sldId id="332" r:id="rId34"/>
     <p:sldId id="328" r:id="rId66"/>
     <p:sldId id="329" r:id="rId67"/>
     <p:sldId id="330" r:id="rId68"/>
@@ -1124,7 +1126,7 @@
           </a:p>
           <a:p>
             <a:r>
-              <a:t>BUDGET: the TIMING lines across the deck now sum to 75 minutes, with the slide-6 commitment discussion and the slide-27 transfer exercise protected.</a:t>
+              <a:t>BUDGET: the TIMING lines across the deck now sum to 75 minutes, with the slide-6 commitment discussion, the slide-27 FMEA transfer exercise, and the slide-29 diagnosis exercise protected.</a:t>
             </a:r>
           </a:p>
         </p:txBody>
@@ -1137,6 +1139,211 @@
           </p:cNvSpPr>
           <p:nvPr>
             <p:ph type="sldNum" sz="quarter" idx="5"/>
+          </p:nvPr>
+        </p:nvSpPr>
+        <p:spPr/>
+      </p:sp>
+    </p:spTree>
+  </p:cSld>
+  <p:clrMapOvr>
+    <a:masterClrMapping/>
+  </p:clrMapOvr>
+</p:notes>
+</file>
+
+<file path=ppt/notesSlides/notesSlide29.xml><?xml version="1.0" encoding="utf-8"?>
+<p:notes xmlns:a="http://schemas.openxmlformats.org/drawingml/2006/main" xmlns:p="http://schemas.openxmlformats.org/presentationml/2006/main" xmlns:r="http://schemas.openxmlformats.org/officeDocument/2006/relationships">
+  <p:cSld>
+    <p:spTree>
+      <p:nvGrpSpPr>
+        <p:cNvPr id="1" name=""/>
+        <p:cNvGrpSpPr/>
+        <p:nvPr/>
+      </p:nvGrpSpPr>
+      <p:grpSpPr>
+        <a:xfrm>
+          <a:off x="0" y="0"/>
+          <a:ext cx="0" cy="0"/>
+          <a:chOff x="0" y="0"/>
+          <a:chExt cx="0" cy="0"/>
+        </a:xfrm>
+      </p:grpSpPr>
+      <p:sp>
+        <p:nvSpPr>
+          <p:cNvPr id="2" name="Slide Image Placeholder 1"/>
+          <p:cNvSpPr>
+            <a:spLocks noGrp="1"/>
+          </p:cNvSpPr>
+          <p:nvPr>
+            <p:ph type="sldImg" idx="2"/>
+          </p:nvPr>
+        </p:nvSpPr>
+        <p:spPr/>
+      </p:sp>
+      <p:sp>
+        <p:nvSpPr>
+          <p:cNvPr id="3" name="Notes Placeholder 2"/>
+          <p:cNvSpPr>
+            <a:spLocks noGrp="1"/>
+          </p:cNvSpPr>
+          <p:nvPr>
+            <p:ph type="body" idx="3" sz="quarter"/>
+          </p:nvPr>
+        </p:nvSpPr>
+        <p:spPr/>
+        <p:txBody>
+          <a:bodyPr/>
+          <a:lstStyle/>
+          <a:p>
+            <a:r>
+              <a:t>TIMING: 3 minutes. NEW METHOD — prospective, not explanatory.</a:t>
+            </a:r>
+          </a:p>
+          <a:p>
+            <a:r>
+              <a:t>ENGINEERING POINT: the three models EXPLAIN a failure that has happened. FMEA — Failure Mode and Effects Analysis (IEC 60812:2018) — is not a fourth explanation: it is a structured method for SEARCHING for potential failures and deciding what deserves attention, before anything fails. Nor is it component-only — by scope it can examine functions, interfaces, operational processes, or organizational activities. Do not teach 'FMEA = components, STAMP = systems.'</a:t>
+            </a:r>
+          </a:p>
+          <a:p>
+            <a:r>
+              <a:t>THE WORKED TABLE: each row: a FUNCTION of the system we know thoroughly, a failure mode, its effect, a candidate control — all met on slides 21–25.</a:t>
+            </a:r>
+          </a:p>
+          <a:p>
+            <a:r>
+              <a:t>CARE — the staged-rollout row (cross-reference slide 25): HAVING a staged-rollout mechanism is not the same as having one that reliably detects and contains the failure mode; a rollout that advances without meaningful health checks offers little protection.</a:t>
+            </a:r>
+          </a:p>
+          <a:p>
+            <a:r>
+              <a:t>RATINGS (notes only): classical FMEA multiplies severity, occurrence, and detection into a Risk Priority Number — but multiplying ordinal ratings does not make an RPN of 120 twice the risk of 60; the AIAG &amp; VDA FMEA Handbook (1st ed., 2019) replaces RPN with Action Priority. Occurrence stays '?' deliberately: the method's value is exposing uncertainty, not manufacturing numerical certainty.</a:t>
+            </a:r>
+          </a:p>
+          <a:p>
+            <a:r>
+              <a:t>ASK (the footer): which of these failure modes could occur in another security product? Expected: the validate / distribute / maintain rows do not depend on the content-interpreter defect at all.</a:t>
+            </a:r>
+          </a:p>
+          <a:p>
+            <a:r>
+              <a:t>INSTRUCTOR REFERENCES (no student reading assigned): IEC 60812:2018; AIAG &amp; VDA FMEA Handbook, 1st ed., 2019.</a:t>
+            </a:r>
+          </a:p>
+          <a:p>
+            <a:r>
+              <a:t>TRANSITION: if those rows transfer, the method should work on a system we know nothing about. Next: exactly that.</a:t>
+            </a:r>
+          </a:p>
+        </p:txBody>
+      </p:sp>
+      <p:sp>
+        <p:nvSpPr>
+          <p:cNvPr id="4" name="Slide Number Placeholder 3"/>
+          <p:cNvSpPr>
+            <a:spLocks noGrp="1"/>
+          </p:cNvSpPr>
+          <p:nvPr>
+            <p:ph type="sldNum" idx="5" sz="quarter"/>
+          </p:nvPr>
+        </p:nvSpPr>
+        <p:spPr/>
+      </p:sp>
+    </p:spTree>
+  </p:cSld>
+  <p:clrMapOvr>
+    <a:masterClrMapping/>
+  </p:clrMapOvr>
+</p:notes>
+</file>
+
+<file path=ppt/notesSlides/notesSlide30.xml><?xml version="1.0" encoding="utf-8"?>
+<p:notes xmlns:a="http://schemas.openxmlformats.org/drawingml/2006/main" xmlns:p="http://schemas.openxmlformats.org/presentationml/2006/main" xmlns:r="http://schemas.openxmlformats.org/officeDocument/2006/relationships">
+  <p:cSld>
+    <p:spTree>
+      <p:nvGrpSpPr>
+        <p:cNvPr id="1" name=""/>
+        <p:cNvGrpSpPr/>
+        <p:nvPr/>
+      </p:nvGrpSpPr>
+      <p:grpSpPr>
+        <a:xfrm>
+          <a:off x="0" y="0"/>
+          <a:ext cx="0" cy="0"/>
+          <a:chOff x="0" y="0"/>
+          <a:chExt cx="0" cy="0"/>
+        </a:xfrm>
+      </p:grpSpPr>
+      <p:sp>
+        <p:nvSpPr>
+          <p:cNvPr id="2" name="Slide Image Placeholder 1"/>
+          <p:cNvSpPr>
+            <a:spLocks noGrp="1"/>
+          </p:cNvSpPr>
+          <p:nvPr>
+            <p:ph type="sldImg" idx="2"/>
+          </p:nvPr>
+        </p:nvSpPr>
+        <p:spPr/>
+      </p:sp>
+      <p:sp>
+        <p:nvSpPr>
+          <p:cNvPr id="3" name="Notes Placeholder 2"/>
+          <p:cNvSpPr>
+            <a:spLocks noGrp="1"/>
+          </p:cNvSpPr>
+          <p:nvPr>
+            <p:ph type="body" idx="3" sz="quarter"/>
+          </p:nvPr>
+        </p:nvSpPr>
+        <p:spPr/>
+        <p:txBody>
+          <a:bodyPr/>
+          <a:lstStyle/>
+          <a:p>
+            <a:r>
+              <a:t>TIMING: 3 minutes — present the architecture in under one minute; PROTECT 2–3 minutes for the worksheet discussion (author pacing note).</a:t>
+            </a:r>
+          </a:p>
+          <a:p>
+            <a:r>
+              <a:t>ENGINEERING POINT: transfer of the METHOD, not recall of an incident. Students get only the architecture — four facts — and must search it for failure modes under genuinely incomplete information, the condition engineers actually work in. DO NOT reveal what happened in 2019; if a student already knows the incident, ask them to hold it.</a:t>
+            </a:r>
+          </a:p>
+          <a:p>
+            <a:r>
+              <a:t>FACTUAL BACKGROUND (architecture only; source: Cloudflare post-mortem, 'Details of the Cloudflare outage on July 2, 2019'): Cloudflare operates a Web Application Firewall that inspects incoming web requests; engineers can deploy new detection rules without releasing new software; some rules use regular expressions; rule changes can propagate globally within seconds.</a:t>
+            </a:r>
+          </a:p>
+          <a:p>
+            <a:r>
+              <a:t>RUN IT: pairs, at least one failure mode per function row; leave occurrence '?' and ask which modes warrant a control anyway.</a:t>
+            </a:r>
+          </a:p>
+          <a:p>
+            <a:r>
+              <a:t>EXPECTED ANSWERS — all legitimate WITHOUT knowing the incident: a rule that consumes excessive CPU or memory; a rule that false-positives and blocks legitimate traffic; a malformed rule that breaks evaluation; a defective rule reaching every server before anyone can detect or halt it. Students do NOT need to anticipate catastrophic regex backtracking: the general failure mode is the method's product; the precise defect is hindsight's.</a:t>
+            </a:r>
+          </a:p>
+          <a:p>
+            <a:r>
+              <a:t>MISCONCEPTION: a guessing game about 'the real outage.' Grade on search discipline, not prophecy.</a:t>
+            </a:r>
+          </a:p>
+          <a:p>
+            <a:r>
+              <a:t>TRANSITION: let's see what actually happened — and compare it against your table.</a:t>
+            </a:r>
+          </a:p>
+        </p:txBody>
+      </p:sp>
+      <p:sp>
+        <p:nvSpPr>
+          <p:cNvPr id="4" name="Slide Number Placeholder 3"/>
+          <p:cNvSpPr>
+            <a:spLocks noGrp="1"/>
+          </p:cNvSpPr>
+          <p:nvPr>
+            <p:ph type="sldNum" idx="5" sz="quarter"/>
           </p:nvPr>
         </p:nvSpPr>
         <p:spPr/>
@@ -3169,7 +3376,7 @@
           <a:lstStyle/>
           <a:p>
             <a:r>
-              <a:t>TIMING: 2 minutes. OPENS MOVEMENT 4 — what should change?</a:t>
+              <a:t>TIMING: 1 minutes. OPENS MOVEMENT 4 — what should change? DELIVER EFFICIENTLY (author pacing note): present the ladder and pose the footer question rhetorically — this movement's active-learning weight now lives in the FMEA exercise (slide 27) and the diagnosis exercise (slide 29).</a:t>
             </a:r>
           </a:p>
           <a:p>
@@ -3269,7 +3476,7 @@
           <a:lstStyle/>
           <a:p>
             <a:r>
-              <a:t>TIMING: 2 minutes. PRESERVED FROM THE ORIGINAL LECTURE — Schön's contribution.</a:t>
+              <a:t>TIMING: 1 minutes. PRESERVED FROM THE ORIGINAL LECTURE — Schön's contribution. Deliver as exposition; fold the footer question into the transition rather than opening a discussion.</a:t>
             </a:r>
           </a:p>
           <a:p>
@@ -3379,7 +3586,7 @@
           <a:lstStyle/>
           <a:p>
             <a:r>
-              <a:t>TIMING: 3 minutes. GOVERNANCE CONVERSION — the lesson changes the ENVIRONMENT.</a:t>
+              <a:t>TIMING: 1 minutes. GOVERNANCE CONVERSION — the lesson changes the ENVIRONMENT.</a:t>
             </a:r>
           </a:p>
           <a:p>
@@ -3394,7 +3601,7 @@
           </a:p>
           <a:p>
             <a:r>
-              <a:t>ANIMATION-IN-SPEECH: cover the right column; ask students to propose the artifact for each left-hand diagnosis before revealing.</a:t>
+              <a:t>PACING (author): the cover-the-right-column reveal is CUT for time — walk the rows directly and state the slide-9 contrast yourself; the FMEA exercise two slides ahead carries this movement's active learning.</a:t>
             </a:r>
           </a:p>
           <a:p>
@@ -3484,7 +3691,7 @@
           <a:lstStyle/>
           <a:p>
             <a:r>
-              <a:t>TIMING: 2 minutes. THE LOCAL AND SYSTEMIC ANALYSES MEET.</a:t>
+              <a:t>TIMING: 1 minutes. THE LOCAL AND SYSTEMIC ANALYSES MEET. Pose the footer question, take ONE answer, state the recognition yourself.</a:t>
             </a:r>
           </a:p>
           <a:p>
@@ -3579,7 +3786,7 @@
           <a:lstStyle/>
           <a:p>
             <a:r>
-              <a:t>TIMING: 2 minutes. CLOSES THE CROWDSTRIKE INVESTIGATION.</a:t>
+              <a:t>TIMING: 1 minutes. CLOSES THE CROWDSTRIKE INVESTIGATION. Walk the rows briskly — the next slide re-invokes this slide's lesson (a control's existence is not evidence of its effectiveness) inside the FMEA's staged-rollout row.</a:t>
             </a:r>
           </a:p>
           <a:p>
@@ -3604,7 +3811,7 @@
           </a:p>
           <a:p>
             <a:r>
-              <a:t>TRANSITION: we built a method on one incident. If the method is real, it should transfer. New incident, five years earlier, different company.</a:t>
+              <a:t>TRANSITION: everything so far reasons BACKWARD from a failure that already happened. Can the discipline run FORWARD — before any failure occurs? Next: a structured method for searching for failures in advance, tried first on the incident we now know thoroughly.</a:t>
             </a:r>
           </a:p>
         </p:txBody>
@@ -3674,32 +3881,37 @@
           <a:lstStyle/>
           <a:p>
             <a:r>
-              <a:t>TIMING: 3 minutes — a transfer exercise, not a second full case study.</a:t>
-            </a:r>
-          </a:p>
-          <a:p>
-            <a:r>
-              <a:t>EXPOSITION ORDER (author): establish the system first. Cloudflare operates an edge network a large share of web traffic passes through; a Web Application Firewall (WAF) inspects that traffic for attacks; WAF rules describe attack patterns, often as regular expressions. THEN the failure — and explain the MECHANISM before the measurements: some regular expressions require disproportionately more matching work as the input grows, because a backtracking engine re-tries overlapping ways to match. The 23-vs-555 bars at the bottom ILLUSTRATE that mechanism; they do not replace the explanation.</a:t>
-            </a:r>
-          </a:p>
-          <a:p>
-            <a:r>
-              <a:t>FACTS (Cloudflare post-mortem, 'Details of the Cloudflare outage on July 2, 2019'): a WAF Managed Rule targeting XSS deployed globally at 13:42 UTC — in seconds, with no staged rollout, while software releases went DOG → PIG → Canary; the sub-pattern .*(?:.*=.*) caused catastrophic backtracking (their worked numbers: 'x=x' took 23 steps; 'x=' plus twenty 'x's took 555); PCRE 'has no mechanism to protect against a runaway expression'; WAF identified 14:00, killed globally 14:07, traffic normal 14:09, re-enabled 14:52 — 27 minutes of impact. A CPU protection had been accidentally removed weeks earlier.</a:t>
-            </a:r>
-          </a:p>
-          <a:p>
-            <a:r>
-              <a:t>DEEP STRUCTURE (lead with it at the footer): in both incidents, content or configuration shipped through a faster, less-gated path than code; and in both, a validator ran and passed while checking the wrong property — arity against the wrong contract at CrowdStrike, runtime instead of CPU at Cloudflare.</a:t>
+              <a:t>TIMING: 3 minutes — the reveal. Grade the class's FMEA predictions against the incident.</a:t>
+            </a:r>
+          </a:p>
+          <a:p>
+            <a:r>
+              <a:t>ENGINEERING POINT: compare prediction with reality, and name the gap honestly. Most groups will have proposed a resource-exhaustion or bad-rule failure mode, a service-disruption effect, and controls such as pre-deployment resource limits or a staged rollout — without knowing anything about 2019. Nobody should be expected to have named catastrophic regex backtracking: FMEA surfaces the GENERAL failure mode; it does not predict the specific defect. In hindsight every failure looks foreseeable; in practice engineers work under incomplete information.</a:t>
+            </a:r>
+          </a:p>
+          <a:p>
+            <a:r>
+              <a:t>EXPOSITION ORDER (author): the class met only the architecture on the previous slide, so establish the rest of the system briefly, then the failure — MECHANISM before measurements: some regular expressions require disproportionately more matching work as the input grows, because a backtracking engine re-tries overlapping ways to match. The 23-vs-555 bars at the bottom ILLUSTRATE that mechanism; they do not replace the explanation.</a:t>
+            </a:r>
+          </a:p>
+          <a:p>
+            <a:r>
+              <a:t>FACTS (Cloudflare post-mortem, 'Details of the Cloudflare outage on July 2, 2019'): a WAF Managed Rule targeting XSS deployed globally at 13:42 UTC — in seconds, with no staged rollout, while software releases went DOG → PIG → Canary; the sub-pattern .*(?:.*=.*) caused catastrophic backtracking (their worked numbers: 'x=x' took 23 steps; 'x=' plus twenty 'x's took 555); PCRE 'has no mechanism to protect against a runaway expression'; WAF identified 14:00, killed globally 14:07, traffic normal 14:09, re-enabled 14:52 — 27 minutes of impact. A CPU-usage protection had been accidentally removed weeks earlier.</a:t>
+            </a:r>
+          </a:p>
+          <a:p>
+            <a:r>
+              <a:t>ASK (the footer's first line): which failure modes did we anticipate — and which did we miss? Typically anticipated: a defective rule, global distribution, nothing to halt it. Typically missed: the removed CPU protection, and a test suite that measured runtime rather than CPU — defenses that existed and failed, which the diagnosis exercise next can surface.</a:t>
+            </a:r>
+          </a:p>
+          <a:p>
+            <a:r>
+              <a:t>DEEP STRUCTURE (the footer's second line — let students state it before you do): in both incidents, a security configuration update is distributed globally without adequate opportunities to detect and contain defective updates; and in both, a validator ran and passed while checking the wrong property — arity against the wrong contract at CrowdStrike, runtime instead of CPU at Cloudflare. An engineer could identify that characteristic prospectively in either system — which is what the previous two slides had students do.</a:t>
             </a:r>
           </a:p>
           <a:p>
             <a:r>
               <a:t>CARE: regex matching cost depends on expression, engine, AND input — do not imply all engines behave this way (re2 and Rust's engine carry runtime guarantees). Do not conflate with Cloudflare's November 2025 outage — different mechanism.</a:t>
-            </a:r>
-          </a:p>
-          <a:p>
-            <a:r>
-              <a:t>ASK: what in this story have you already seen this lecture?</a:t>
             </a:r>
           </a:p>
           <a:p>
@@ -3790,6 +4002,11 @@
           <a:p>
             <a:r>
               <a:t>GRADING STANCE: do not reward choosing the broadest model. Reward an intervention justified by the model and the evidence, addressing a consequential failure class at acceptable cost.</a:t>
+            </a:r>
+          </a:p>
+          <a:p>
+            <a:r>
+              <a:t>CLOSING QUESTION (the footer's last line): how should this incident change the FMEA for future WAF releases? Expected: new failure-mode rows (a rule whose matching cost explodes on ordinary input); a detection column that measures CPU, not wall-clock runtime; controls promoted from candidate to required — staged rollout for rules, a regex engine with runtime guarantees, a restored and protected CPU limit. The durable point: an FMEA is a living document — each incident updates the search. That is how failure changes FUTURE engineering, which is the closing slide's claim.</a:t>
             </a:r>
           </a:p>
           <a:p>
@@ -19164,7 +19381,7 @@
                   <a:srgbClr val="000000"/>
                 </a:solidFill>
               </a:rPr>
-              <a:t>July 2, 2019: Cloudflare’s WAF outage</a:t>
+              <a:t>What actually happened? July 2, 2019</a:t>
             </a:r>
           </a:p>
         </p:txBody>
@@ -19239,7 +19456,7 @@
                   <a:srgbClr val="FFFFFF"/>
                 </a:solidFill>
               </a:rPr>
-              <a:t>How could one regular expression disrupt a global service?</a:t>
+              <a:t>Which failure modes did we anticipate — and which did we miss?</a:t>
             </a:r>
           </a:p>
           <a:p>
@@ -20395,7 +20612,7 @@
                   <a:schemeClr val="bg1"/>
                 </a:solidFill>
               </a:rPr>
-              <a:t>decide where the lesson should live.</a:t>
+              <a:t>decide where the lesson should live. What evidence would establish that it works?</a:t>
             </a:r>
           </a:p>
           <a:p>
@@ -20406,7 +20623,7 @@
                   <a:schemeClr val="bg1"/>
                 </a:solidFill>
               </a:rPr>
-              <a:t>What evidence would establish that your intervention works?</a:t>
+              <a:t>How should this incident change the FMEA for future WAF releases?</a:t>
             </a:r>
           </a:p>
         </p:txBody>
@@ -21332,6 +21549,1305 @@
 </p:sld>
 </file>
 
+<file path=ppt/slides/slide29.xml><?xml version="1.0" encoding="utf-8"?>
+<p:sld xmlns:a="http://schemas.openxmlformats.org/drawingml/2006/main" xmlns:p="http://schemas.openxmlformats.org/presentationml/2006/main" xmlns:r="http://schemas.openxmlformats.org/officeDocument/2006/relationships">
+  <p:cSld>
+    <p:spTree>
+      <p:nvGrpSpPr>
+        <p:cNvPr id="1" name=""/>
+        <p:cNvGrpSpPr/>
+        <p:nvPr/>
+      </p:nvGrpSpPr>
+      <p:grpSpPr/>
+      <p:sp>
+        <p:nvSpPr>
+          <p:cNvPr id="3" name="Title 2"/>
+          <p:cNvSpPr>
+            <a:spLocks noGrp="1"/>
+          </p:cNvSpPr>
+          <p:nvPr>
+            <p:ph type="title"/>
+          </p:nvPr>
+        </p:nvSpPr>
+        <p:spPr>
+          <a:xfrm>
+            <a:off x="277148" y="118428"/>
+            <a:ext cx="9145148" cy="638175"/>
+          </a:xfrm>
+        </p:spPr>
+        <p:txBody>
+          <a:bodyPr>
+            <a:normAutofit fontScale="90000"/>
+          </a:bodyPr>
+          <a:lstStyle/>
+          <a:p>
+            <a:r>
+              <a:rPr lang="en-US" sz="2400" i="1" dirty="0">
+                <a:solidFill>
+                  <a:srgbClr val="000000"/>
+                </a:solidFill>
+              </a:rPr>
+              <a:t>Could we have anticipated this failure?</a:t>
+            </a:r>
+          </a:p>
+        </p:txBody>
+      </p:sp>
+      <p:sp>
+        <p:nvSpPr>
+          <p:cNvPr id="900" name="Slide Number Placeholder 900"/>
+          <p:cNvSpPr>
+            <a:spLocks noGrp="1"/>
+          </p:cNvSpPr>
+          <p:nvPr>
+            <p:ph type="sldNum" sz="quarter" idx="4"/>
+          </p:nvPr>
+        </p:nvSpPr>
+        <p:spPr/>
+        <p:txBody>
+          <a:bodyPr/>
+          <a:lstStyle/>
+          <a:p>
+            <a:fld id="{54DE72B0-FFEB-4C83-B4BD-F25961BEDFCA}" type="slidenum">
+              <a:rPr lang="en-US" smtClean="0"/>
+              <a:t>29</a:t>
+            </a:fld>
+            <a:endParaRPr lang="en-US"/>
+          </a:p>
+        </p:txBody>
+      </p:sp>
+      <p:sp>
+        <p:nvSpPr>
+          <p:cNvPr id="903" name="Card"/>
+          <p:cNvSpPr/>
+          <p:nvPr/>
+        </p:nvSpPr>
+        <p:spPr>
+          <a:xfrm>
+            <a:off x="2103120" y="1920240"/>
+            <a:ext cx="2194560" cy="713232"/>
+          </a:xfrm>
+          <a:prstGeom prst="rect">
+            <a:avLst/>
+          </a:prstGeom>
+          <a:solidFill>
+            <a:srgbClr val="F5F1E8"/>
+          </a:solidFill>
+          <a:ln w="12700">
+            <a:solidFill>
+              <a:srgbClr val="C9B991"/>
+            </a:solidFill>
+          </a:ln>
+          <a:effectLst/>
+        </p:spPr>
+        <p:style>
+          <a:lnRef idx="1">
+            <a:schemeClr val="accent1"/>
+          </a:lnRef>
+          <a:fillRef idx="3">
+            <a:schemeClr val="accent1"/>
+          </a:fillRef>
+          <a:effectRef idx="2">
+            <a:schemeClr val="accent1"/>
+          </a:effectRef>
+          <a:fontRef idx="minor">
+            <a:schemeClr val="lt1"/>
+          </a:fontRef>
+        </p:style>
+        <p:txBody>
+          <a:bodyPr wrap="square" lIns="27432" tIns="22860" rIns="27432" bIns="22860" rtlCol="0" anchor="ctr"/>
+          <a:lstStyle/>
+          <a:p>
+            <a:pPr algn="ctr"/>
+            <a:r>
+              <a:rPr sz="1100" b="0" i="1" dirty="0">
+                <a:solidFill>
+                  <a:srgbClr val="5C4826"/>
+                </a:solidFill>
+              </a:rPr>
+              <a:t>invalid content causes unsafe execution</a:t>
+            </a:r>
+          </a:p>
+        </p:txBody>
+      </p:sp>
+      <p:sp>
+        <p:nvSpPr>
+          <p:cNvPr id="907" name="Card"/>
+          <p:cNvSpPr/>
+          <p:nvPr/>
+        </p:nvSpPr>
+        <p:spPr>
+          <a:xfrm>
+            <a:off x="2103120" y="2697480"/>
+            <a:ext cx="2194560" cy="713232"/>
+          </a:xfrm>
+          <a:prstGeom prst="rect">
+            <a:avLst/>
+          </a:prstGeom>
+          <a:solidFill>
+            <a:srgbClr val="F5F1E8"/>
+          </a:solidFill>
+          <a:ln w="12700">
+            <a:solidFill>
+              <a:srgbClr val="C9B991"/>
+            </a:solidFill>
+          </a:ln>
+          <a:effectLst/>
+        </p:spPr>
+        <p:style>
+          <a:lnRef idx="1">
+            <a:schemeClr val="accent1"/>
+          </a:lnRef>
+          <a:fillRef idx="3">
+            <a:schemeClr val="accent1"/>
+          </a:fillRef>
+          <a:effectRef idx="2">
+            <a:schemeClr val="accent1"/>
+          </a:effectRef>
+          <a:fontRef idx="minor">
+            <a:schemeClr val="lt1"/>
+          </a:fontRef>
+        </p:style>
+        <p:txBody>
+          <a:bodyPr wrap="square" lIns="27432" tIns="22860" rIns="27432" bIns="22860" rtlCol="0" anchor="ctr"/>
+          <a:lstStyle/>
+          <a:p>
+            <a:pPr algn="ctr"/>
+            <a:r>
+              <a:rPr sz="1100" b="0" i="1">
+                <a:solidFill>
+                  <a:srgbClr val="5C4826"/>
+                </a:solidFill>
+              </a:rPr>
+              <a:t>a defect escapes testing</a:t>
+            </a:r>
+          </a:p>
+        </p:txBody>
+      </p:sp>
+      <p:sp>
+        <p:nvSpPr>
+          <p:cNvPr id="909" name="Block"/>
+          <p:cNvSpPr/>
+          <p:nvPr/>
+        </p:nvSpPr>
+        <p:spPr>
+          <a:xfrm>
+            <a:off x="365760" y="1920240"/>
+            <a:ext cx="1645920" cy="713232"/>
+          </a:xfrm>
+          <a:prstGeom prst="rect">
+            <a:avLst/>
+          </a:prstGeom>
+          <a:solidFill>
+            <a:srgbClr val="8E6F3E"/>
+          </a:solidFill>
+          <a:ln>
+            <a:noFill/>
+          </a:ln>
+          <a:effectLst/>
+        </p:spPr>
+        <p:style>
+          <a:lnRef idx="1">
+            <a:schemeClr val="accent1"/>
+          </a:lnRef>
+          <a:fillRef idx="3">
+            <a:schemeClr val="accent1"/>
+          </a:fillRef>
+          <a:effectRef idx="2">
+            <a:schemeClr val="accent1"/>
+          </a:effectRef>
+          <a:fontRef idx="minor">
+            <a:schemeClr val="lt1"/>
+          </a:fontRef>
+        </p:style>
+        <p:txBody>
+          <a:bodyPr wrap="square" lIns="27432" tIns="22860" rIns="27432" bIns="22860" rtlCol="0" anchor="ctr"/>
+          <a:lstStyle/>
+          <a:p>
+            <a:pPr algn="ctr"/>
+            <a:r>
+              <a:rPr sz="1200" b="1" i="0" dirty="0">
+                <a:solidFill>
+                  <a:srgbClr val="FFFFFF"/>
+                </a:solidFill>
+              </a:rPr>
+              <a:t>Interpret security content</a:t>
+            </a:r>
+            <a:endParaRPr lang="en-US" sz="2000" b="1" i="0" dirty="0">
+              <a:solidFill>
+                <a:srgbClr val="FFFFFF"/>
+              </a:solidFill>
+            </a:endParaRPr>
+          </a:p>
+        </p:txBody>
+      </p:sp>
+      <p:sp>
+        <p:nvSpPr>
+          <p:cNvPr id="910" name="Block"/>
+          <p:cNvSpPr/>
+          <p:nvPr/>
+        </p:nvSpPr>
+        <p:spPr>
+          <a:xfrm>
+            <a:off x="365760" y="2697480"/>
+            <a:ext cx="1645920" cy="713232"/>
+          </a:xfrm>
+          <a:prstGeom prst="rect">
+            <a:avLst/>
+          </a:prstGeom>
+          <a:solidFill>
+            <a:srgbClr val="8E6F3E"/>
+          </a:solidFill>
+          <a:ln>
+            <a:noFill/>
+          </a:ln>
+          <a:effectLst/>
+        </p:spPr>
+        <p:style>
+          <a:lnRef idx="1">
+            <a:schemeClr val="accent1"/>
+          </a:lnRef>
+          <a:fillRef idx="3">
+            <a:schemeClr val="accent1"/>
+          </a:fillRef>
+          <a:effectRef idx="2">
+            <a:schemeClr val="accent1"/>
+          </a:effectRef>
+          <a:fontRef idx="minor">
+            <a:schemeClr val="lt1"/>
+          </a:fontRef>
+        </p:style>
+        <p:txBody>
+          <a:bodyPr wrap="square" lIns="27432" tIns="22860" rIns="27432" bIns="22860" rtlCol="0" anchor="ctr"/>
+          <a:lstStyle/>
+          <a:p>
+            <a:pPr algn="ctr"/>
+            <a:r>
+              <a:rPr sz="1200" b="1" i="0" dirty="0">
+                <a:solidFill>
+                  <a:srgbClr val="FFFFFF"/>
+                </a:solidFill>
+              </a:rPr>
+              <a:t>Validate content</a:t>
+            </a:r>
+            <a:endParaRPr lang="en-US" sz="2000" b="1" i="0" dirty="0">
+              <a:solidFill>
+                <a:srgbClr val="FFFFFF"/>
+              </a:solidFill>
+            </a:endParaRPr>
+          </a:p>
+        </p:txBody>
+      </p:sp>
+      <p:sp>
+        <p:nvSpPr>
+          <p:cNvPr id="911" name="Block"/>
+          <p:cNvSpPr/>
+          <p:nvPr/>
+        </p:nvSpPr>
+        <p:spPr>
+          <a:xfrm>
+            <a:off x="365760" y="3474720"/>
+            <a:ext cx="1645920" cy="713232"/>
+          </a:xfrm>
+          <a:prstGeom prst="rect">
+            <a:avLst/>
+          </a:prstGeom>
+          <a:solidFill>
+            <a:srgbClr val="8E6F3E"/>
+          </a:solidFill>
+          <a:ln>
+            <a:noFill/>
+          </a:ln>
+          <a:effectLst/>
+        </p:spPr>
+        <p:style>
+          <a:lnRef idx="1">
+            <a:schemeClr val="accent1"/>
+          </a:lnRef>
+          <a:fillRef idx="3">
+            <a:schemeClr val="accent1"/>
+          </a:fillRef>
+          <a:effectRef idx="2">
+            <a:schemeClr val="accent1"/>
+          </a:effectRef>
+          <a:fontRef idx="minor">
+            <a:schemeClr val="lt1"/>
+          </a:fontRef>
+        </p:style>
+        <p:txBody>
+          <a:bodyPr wrap="square" lIns="27432" tIns="22860" rIns="27432" bIns="22860" rtlCol="0" anchor="ctr"/>
+          <a:lstStyle/>
+          <a:p>
+            <a:pPr algn="ctr"/>
+            <a:r>
+              <a:rPr sz="1200" b="1" i="0" dirty="0">
+                <a:solidFill>
+                  <a:srgbClr val="FFFFFF"/>
+                </a:solidFill>
+              </a:rPr>
+              <a:t>Distribute content</a:t>
+            </a:r>
+            <a:endParaRPr sz="2000" b="1" i="0" dirty="0">
+              <a:solidFill>
+                <a:srgbClr val="FFFFFF"/>
+              </a:solidFill>
+            </a:endParaRPr>
+          </a:p>
+        </p:txBody>
+      </p:sp>
+      <p:sp>
+        <p:nvSpPr>
+          <p:cNvPr id="912" name="Block"/>
+          <p:cNvSpPr/>
+          <p:nvPr/>
+        </p:nvSpPr>
+        <p:spPr>
+          <a:xfrm>
+            <a:off x="365760" y="4251960"/>
+            <a:ext cx="1645920" cy="713232"/>
+          </a:xfrm>
+          <a:prstGeom prst="rect">
+            <a:avLst/>
+          </a:prstGeom>
+          <a:solidFill>
+            <a:srgbClr val="8E6F3E"/>
+          </a:solidFill>
+          <a:ln>
+            <a:noFill/>
+          </a:ln>
+          <a:effectLst/>
+        </p:spPr>
+        <p:style>
+          <a:lnRef idx="1">
+            <a:schemeClr val="accent1"/>
+          </a:lnRef>
+          <a:fillRef idx="3">
+            <a:schemeClr val="accent1"/>
+          </a:fillRef>
+          <a:effectRef idx="2">
+            <a:schemeClr val="accent1"/>
+          </a:effectRef>
+          <a:fontRef idx="minor">
+            <a:schemeClr val="lt1"/>
+          </a:fontRef>
+        </p:style>
+        <p:txBody>
+          <a:bodyPr wrap="square" lIns="27432" tIns="22860" rIns="27432" bIns="22860" rtlCol="0" anchor="ctr"/>
+          <a:lstStyle/>
+          <a:p>
+            <a:pPr algn="ctr"/>
+            <a:r>
+              <a:rPr sz="1200" b="1" i="0" dirty="0">
+                <a:solidFill>
+                  <a:srgbClr val="FFFFFF"/>
+                </a:solidFill>
+              </a:rPr>
+              <a:t>Maintain service</a:t>
+            </a:r>
+          </a:p>
+        </p:txBody>
+      </p:sp>
+      <p:sp>
+        <p:nvSpPr>
+          <p:cNvPr id="913" name="FooterBand"/>
+          <p:cNvSpPr/>
+          <p:nvPr/>
+        </p:nvSpPr>
+        <p:spPr>
+          <a:xfrm>
+            <a:off x="274320" y="5852160"/>
+            <a:ext cx="8595360" cy="566928"/>
+          </a:xfrm>
+          <a:prstGeom prst="rect">
+            <a:avLst/>
+          </a:prstGeom>
+          <a:noFill/>
+          <a:ln>
+            <a:noFill/>
+          </a:ln>
+          <a:effectLst/>
+        </p:spPr>
+        <p:style>
+          <a:lnRef idx="1">
+            <a:schemeClr val="accent1"/>
+          </a:lnRef>
+          <a:fillRef idx="3">
+            <a:schemeClr val="accent1"/>
+          </a:fillRef>
+          <a:effectRef idx="2">
+            <a:schemeClr val="accent1"/>
+          </a:effectRef>
+          <a:fontRef idx="minor">
+            <a:schemeClr val="lt1"/>
+          </a:fontRef>
+        </p:style>
+        <p:txBody>
+          <a:bodyPr wrap="square" lIns="27432" tIns="22860" rIns="27432" bIns="22860" rtlCol="0" anchor="ctr"/>
+          <a:lstStyle/>
+          <a:p>
+            <a:pPr algn="ctr"/>
+            <a:r>
+              <a:rPr lang="en-US" sz="2000" b="1" i="0" dirty="0">
+                <a:solidFill>
+                  <a:schemeClr val="bg1"/>
+                </a:solidFill>
+              </a:rPr>
+              <a:t>Which of these failure modes could occur in another security product?</a:t>
+            </a:r>
+          </a:p>
+        </p:txBody>
+      </p:sp>
+      <p:sp>
+        <p:nvSpPr>
+          <p:cNvPr id="2" name="Card"/>
+          <p:cNvSpPr/>
+          <p:nvPr/>
+        </p:nvSpPr>
+        <p:spPr>
+          <a:xfrm>
+            <a:off x="2103120" y="3474720"/>
+            <a:ext cx="2194560" cy="713232"/>
+          </a:xfrm>
+          <a:prstGeom prst="rect">
+            <a:avLst/>
+          </a:prstGeom>
+          <a:solidFill>
+            <a:srgbClr val="F5F1E8"/>
+          </a:solidFill>
+          <a:ln w="12700">
+            <a:solidFill>
+              <a:srgbClr val="C9B991"/>
+            </a:solidFill>
+          </a:ln>
+          <a:effectLst/>
+        </p:spPr>
+        <p:style>
+          <a:lnRef idx="1">
+            <a:schemeClr val="accent1"/>
+          </a:lnRef>
+          <a:fillRef idx="3">
+            <a:schemeClr val="accent1"/>
+          </a:fillRef>
+          <a:effectRef idx="2">
+            <a:schemeClr val="accent1"/>
+          </a:effectRef>
+          <a:fontRef idx="minor">
+            <a:schemeClr val="lt1"/>
+          </a:fontRef>
+        </p:style>
+        <p:txBody>
+          <a:bodyPr wrap="square" lIns="27432" tIns="22860" rIns="27432" bIns="22860" rtlCol="0" anchor="ctr"/>
+          <a:lstStyle/>
+          <a:p>
+            <a:pPr algn="ctr"/>
+            <a:r>
+              <a:rPr lang="en-US" sz="1100" b="0" i="1" dirty="0">
+                <a:solidFill>
+                  <a:srgbClr val="5C4826"/>
+                </a:solidFill>
+              </a:rPr>
+              <a:t>a defective update reaches all endpoints</a:t>
+            </a:r>
+          </a:p>
+        </p:txBody>
+      </p:sp>
+      <p:sp>
+        <p:nvSpPr>
+          <p:cNvPr id="4" name="Card"/>
+          <p:cNvSpPr/>
+          <p:nvPr/>
+        </p:nvSpPr>
+        <p:spPr>
+          <a:xfrm>
+            <a:off x="2103120" y="4251960"/>
+            <a:ext cx="2194560" cy="713232"/>
+          </a:xfrm>
+          <a:prstGeom prst="rect">
+            <a:avLst/>
+          </a:prstGeom>
+          <a:solidFill>
+            <a:srgbClr val="F5F1E8"/>
+          </a:solidFill>
+          <a:ln w="12700">
+            <a:solidFill>
+              <a:srgbClr val="C9B991"/>
+            </a:solidFill>
+          </a:ln>
+          <a:effectLst/>
+        </p:spPr>
+        <p:style>
+          <a:lnRef idx="1">
+            <a:schemeClr val="accent1"/>
+          </a:lnRef>
+          <a:fillRef idx="3">
+            <a:schemeClr val="accent1"/>
+          </a:fillRef>
+          <a:effectRef idx="2">
+            <a:schemeClr val="accent1"/>
+          </a:effectRef>
+          <a:fontRef idx="minor">
+            <a:schemeClr val="lt1"/>
+          </a:fontRef>
+        </p:style>
+        <p:txBody>
+          <a:bodyPr wrap="square" lIns="27432" tIns="22860" rIns="27432" bIns="22860" rtlCol="0" anchor="ctr"/>
+          <a:lstStyle/>
+          <a:p>
+            <a:pPr algn="ctr"/>
+            <a:r>
+              <a:rPr lang="en-US" sz="1100" b="0" i="1" dirty="0">
+                <a:solidFill>
+                  <a:srgbClr val="5C4826"/>
+                </a:solidFill>
+              </a:rPr>
+              <a:t>endpoint failure disables critical services</a:t>
+            </a:r>
+            <a:endParaRPr sz="2000" b="0" i="1" dirty="0">
+              <a:solidFill>
+                <a:srgbClr val="5C4826"/>
+              </a:solidFill>
+            </a:endParaRPr>
+          </a:p>
+        </p:txBody>
+      </p:sp>
+      <p:sp>
+        <p:nvSpPr>
+          <p:cNvPr id="5" name="ColumnHeading"/>
+          <p:cNvSpPr/>
+          <p:nvPr/>
+        </p:nvSpPr>
+        <p:spPr>
+          <a:xfrm>
+            <a:off x="365760" y="1572768"/>
+            <a:ext cx="1645920" cy="274320"/>
+          </a:xfrm>
+          <a:prstGeom prst="rect">
+            <a:avLst/>
+          </a:prstGeom>
+          <a:noFill/>
+          <a:ln>
+            <a:noFill/>
+          </a:ln>
+          <a:effectLst/>
+        </p:spPr>
+        <p:style>
+          <a:lnRef idx="1">
+            <a:schemeClr val="accent1"/>
+          </a:lnRef>
+          <a:fillRef idx="3">
+            <a:schemeClr val="accent1"/>
+          </a:fillRef>
+          <a:effectRef idx="2">
+            <a:schemeClr val="accent1"/>
+          </a:effectRef>
+          <a:fontRef idx="minor">
+            <a:schemeClr val="lt1"/>
+          </a:fontRef>
+        </p:style>
+        <p:txBody>
+          <a:bodyPr wrap="square" lIns="27432" tIns="22860" rIns="27432" bIns="22860" rtlCol="0" anchor="ctr"/>
+          <a:lstStyle/>
+          <a:p>
+            <a:pPr algn="ctr"/>
+            <a:r>
+              <a:rPr lang="en-US" sz="1200" b="1" i="0" dirty="0">
+                <a:solidFill>
+                  <a:schemeClr val="bg1"/>
+                </a:solidFill>
+              </a:rPr>
+              <a:t>FUNCTION</a:t>
+            </a:r>
+            <a:endParaRPr sz="2800" b="1" i="0" dirty="0">
+              <a:solidFill>
+                <a:schemeClr val="bg1"/>
+              </a:solidFill>
+            </a:endParaRPr>
+          </a:p>
+        </p:txBody>
+      </p:sp>
+      <p:sp>
+        <p:nvSpPr>
+          <p:cNvPr id="6" name="ColumnHeading"/>
+          <p:cNvSpPr/>
+          <p:nvPr/>
+        </p:nvSpPr>
+        <p:spPr>
+          <a:xfrm>
+            <a:off x="2103120" y="1572768"/>
+            <a:ext cx="2194560" cy="274320"/>
+          </a:xfrm>
+          <a:prstGeom prst="rect">
+            <a:avLst/>
+          </a:prstGeom>
+          <a:noFill/>
+          <a:ln>
+            <a:noFill/>
+          </a:ln>
+          <a:effectLst/>
+        </p:spPr>
+        <p:style>
+          <a:lnRef idx="1">
+            <a:schemeClr val="accent1"/>
+          </a:lnRef>
+          <a:fillRef idx="3">
+            <a:schemeClr val="accent1"/>
+          </a:fillRef>
+          <a:effectRef idx="2">
+            <a:schemeClr val="accent1"/>
+          </a:effectRef>
+          <a:fontRef idx="minor">
+            <a:schemeClr val="lt1"/>
+          </a:fontRef>
+        </p:style>
+        <p:txBody>
+          <a:bodyPr wrap="square" lIns="27432" tIns="22860" rIns="27432" bIns="22860" rtlCol="0" anchor="ctr"/>
+          <a:lstStyle/>
+          <a:p>
+            <a:pPr algn="ctr"/>
+            <a:r>
+              <a:rPr lang="en-US" sz="1200" b="1" i="0" dirty="0">
+                <a:solidFill>
+                  <a:schemeClr val="bg1"/>
+                </a:solidFill>
+              </a:rPr>
+              <a:t>FAILURE MODE</a:t>
+            </a:r>
+            <a:endParaRPr sz="2800" b="1" i="0" dirty="0">
+              <a:solidFill>
+                <a:schemeClr val="bg1"/>
+              </a:solidFill>
+            </a:endParaRPr>
+          </a:p>
+        </p:txBody>
+      </p:sp>
+      <p:sp>
+        <p:nvSpPr>
+          <p:cNvPr id="915" name="Label"/>
+          <p:cNvSpPr txBox="1"/>
+          <p:nvPr/>
+        </p:nvSpPr>
+        <p:spPr>
+          <a:xfrm>
+            <a:off x="548640" y="841248"/>
+            <a:ext cx="8046720" cy="566928"/>
+          </a:xfrm>
+          <a:prstGeom prst="rect">
+            <a:avLst/>
+          </a:prstGeom>
+          <a:noFill/>
+        </p:spPr>
+        <p:txBody>
+          <a:bodyPr wrap="square" lIns="27432" tIns="22860" rIns="27432" bIns="22860" anchor="t">
+            <a:spAutoFit/>
+          </a:bodyPr>
+          <a:lstStyle/>
+          <a:p>
+            <a:pPr algn="ctr"/>
+            <a:r>
+              <a:rPr sz="1200" b="1" i="1">
+                <a:solidFill>
+                  <a:srgbClr val="5C4826"/>
+                </a:solidFill>
+              </a:rPr>
+              <a:t>The three models explain a failure that has happened. FMEA — Failure Mode and Effects Analysis —</a:t>
+            </a:r>
+          </a:p>
+          <a:p>
+            <a:pPr algn="ctr"/>
+            <a:r>
+              <a:rPr sz="1200" b="1" i="1">
+                <a:solidFill>
+                  <a:srgbClr val="5C4826"/>
+                </a:solidFill>
+              </a:rPr>
+              <a:t>searches for failures that have not happened yet: function by function, what could fail, with what effect, held by which control?</a:t>
+            </a:r>
+          </a:p>
+        </p:txBody>
+      </p:sp>
+      <p:sp>
+        <p:nvSpPr>
+          <p:cNvPr id="1000" name="ColumnHeading"/>
+          <p:cNvSpPr/>
+          <p:nvPr/>
+        </p:nvSpPr>
+        <p:spPr>
+          <a:xfrm>
+            <a:off x="4389120" y="1572768"/>
+            <a:ext cx="1828800" cy="274320"/>
+          </a:xfrm>
+          <a:prstGeom prst="rect">
+            <a:avLst/>
+          </a:prstGeom>
+          <a:noFill/>
+          <a:ln>
+            <a:noFill/>
+          </a:ln>
+          <a:effectLst/>
+        </p:spPr>
+        <p:style>
+          <a:lnRef idx="1">
+            <a:schemeClr val="accent1"/>
+          </a:lnRef>
+          <a:fillRef idx="3">
+            <a:schemeClr val="accent1"/>
+          </a:fillRef>
+          <a:effectRef idx="2">
+            <a:schemeClr val="accent1"/>
+          </a:effectRef>
+          <a:fontRef idx="minor">
+            <a:schemeClr val="lt1"/>
+          </a:fontRef>
+        </p:style>
+        <p:txBody>
+          <a:bodyPr wrap="square" lIns="27432" tIns="22860" rIns="27432" bIns="22860" rtlCol="0" anchor="ctr"/>
+          <a:lstStyle/>
+          <a:p>
+            <a:pPr algn="ctr"/>
+            <a:r>
+              <a:rPr lang="en-US" sz="1200" b="1" i="0" dirty="0">
+                <a:solidFill>
+                  <a:schemeClr val="bg1"/>
+                </a:solidFill>
+              </a:rPr>
+              <a:t>EFFECT</a:t>
+            </a:r>
+            <a:endParaRPr sz="2800" b="1" i="0" dirty="0">
+              <a:solidFill>
+                <a:schemeClr val="bg1"/>
+              </a:solidFill>
+            </a:endParaRPr>
+          </a:p>
+        </p:txBody>
+      </p:sp>
+      <p:sp>
+        <p:nvSpPr>
+          <p:cNvPr id="1001" name="ColumnHeading"/>
+          <p:cNvSpPr/>
+          <p:nvPr/>
+        </p:nvSpPr>
+        <p:spPr>
+          <a:xfrm>
+            <a:off x="6309360" y="1572768"/>
+            <a:ext cx="2286000" cy="274320"/>
+          </a:xfrm>
+          <a:prstGeom prst="rect">
+            <a:avLst/>
+          </a:prstGeom>
+          <a:noFill/>
+          <a:ln>
+            <a:noFill/>
+          </a:ln>
+          <a:effectLst/>
+        </p:spPr>
+        <p:style>
+          <a:lnRef idx="1">
+            <a:schemeClr val="accent1"/>
+          </a:lnRef>
+          <a:fillRef idx="3">
+            <a:schemeClr val="accent1"/>
+          </a:fillRef>
+          <a:effectRef idx="2">
+            <a:schemeClr val="accent1"/>
+          </a:effectRef>
+          <a:fontRef idx="minor">
+            <a:schemeClr val="lt1"/>
+          </a:fontRef>
+        </p:style>
+        <p:txBody>
+          <a:bodyPr wrap="square" lIns="27432" tIns="22860" rIns="27432" bIns="22860" rtlCol="0" anchor="ctr"/>
+          <a:lstStyle/>
+          <a:p>
+            <a:pPr algn="ctr"/>
+            <a:r>
+              <a:rPr lang="en-US" sz="1200" b="1" i="0" dirty="0">
+                <a:solidFill>
+                  <a:schemeClr val="bg1"/>
+                </a:solidFill>
+              </a:rPr>
+              <a:t>CANDIDATE CONTROL</a:t>
+            </a:r>
+            <a:endParaRPr sz="2800" b="1" i="0" dirty="0">
+              <a:solidFill>
+                <a:schemeClr val="bg1"/>
+              </a:solidFill>
+            </a:endParaRPr>
+          </a:p>
+        </p:txBody>
+      </p:sp>
+      <p:sp>
+        <p:nvSpPr>
+          <p:cNvPr id="1002" name="Card"/>
+          <p:cNvSpPr/>
+          <p:nvPr/>
+        </p:nvSpPr>
+        <p:spPr>
+          <a:xfrm>
+            <a:off x="4389120" y="1920240"/>
+            <a:ext cx="1828800" cy="713232"/>
+          </a:xfrm>
+          <a:prstGeom prst="rect">
+            <a:avLst/>
+          </a:prstGeom>
+          <a:solidFill>
+            <a:srgbClr val="F5F1E8"/>
+          </a:solidFill>
+          <a:ln w="12700">
+            <a:solidFill>
+              <a:srgbClr val="C9B991"/>
+            </a:solidFill>
+          </a:ln>
+          <a:effectLst/>
+        </p:spPr>
+        <p:style>
+          <a:lnRef idx="1">
+            <a:schemeClr val="accent1"/>
+          </a:lnRef>
+          <a:fillRef idx="3">
+            <a:schemeClr val="accent1"/>
+          </a:fillRef>
+          <a:effectRef idx="2">
+            <a:schemeClr val="accent1"/>
+          </a:effectRef>
+          <a:fontRef idx="minor">
+            <a:schemeClr val="lt1"/>
+          </a:fontRef>
+        </p:style>
+        <p:txBody>
+          <a:bodyPr wrap="square" lIns="27432" tIns="22860" rIns="27432" bIns="22860" rtlCol="0" anchor="ctr"/>
+          <a:lstStyle/>
+          <a:p>
+            <a:pPr algn="ctr"/>
+            <a:r>
+              <a:rPr sz="1100" b="0" i="1" dirty="0">
+                <a:solidFill>
+                  <a:srgbClr val="5C4826"/>
+                </a:solidFill>
+              </a:rPr>
+              <a:t>endpoint failure</a:t>
+            </a:r>
+          </a:p>
+        </p:txBody>
+      </p:sp>
+      <p:sp>
+        <p:nvSpPr>
+          <p:cNvPr id="1003" name="Card"/>
+          <p:cNvSpPr/>
+          <p:nvPr/>
+        </p:nvSpPr>
+        <p:spPr>
+          <a:xfrm>
+            <a:off x="6309360" y="1920240"/>
+            <a:ext cx="2286000" cy="713232"/>
+          </a:xfrm>
+          <a:prstGeom prst="rect">
+            <a:avLst/>
+          </a:prstGeom>
+          <a:solidFill>
+            <a:srgbClr val="F5F1E8"/>
+          </a:solidFill>
+          <a:ln w="12700">
+            <a:solidFill>
+              <a:srgbClr val="C9B991"/>
+            </a:solidFill>
+          </a:ln>
+          <a:effectLst/>
+        </p:spPr>
+        <p:style>
+          <a:lnRef idx="1">
+            <a:schemeClr val="accent1"/>
+          </a:lnRef>
+          <a:fillRef idx="3">
+            <a:schemeClr val="accent1"/>
+          </a:fillRef>
+          <a:effectRef idx="2">
+            <a:schemeClr val="accent1"/>
+          </a:effectRef>
+          <a:fontRef idx="minor">
+            <a:schemeClr val="lt1"/>
+          </a:fontRef>
+        </p:style>
+        <p:txBody>
+          <a:bodyPr wrap="square" lIns="27432" tIns="22860" rIns="27432" bIns="22860" rtlCol="0" anchor="ctr"/>
+          <a:lstStyle/>
+          <a:p>
+            <a:pPr algn="ctr"/>
+            <a:r>
+              <a:rPr sz="1100" b="0" i="1" dirty="0">
+                <a:solidFill>
+                  <a:srgbClr val="5C4826"/>
+                </a:solidFill>
+              </a:rPr>
+              <a:t>contract validation</a:t>
+            </a:r>
+          </a:p>
+        </p:txBody>
+      </p:sp>
+      <p:sp>
+        <p:nvSpPr>
+          <p:cNvPr id="1004" name="Card"/>
+          <p:cNvSpPr/>
+          <p:nvPr/>
+        </p:nvSpPr>
+        <p:spPr>
+          <a:xfrm>
+            <a:off x="4389120" y="2697480"/>
+            <a:ext cx="1828800" cy="713232"/>
+          </a:xfrm>
+          <a:prstGeom prst="rect">
+            <a:avLst/>
+          </a:prstGeom>
+          <a:solidFill>
+            <a:srgbClr val="F5F1E8"/>
+          </a:solidFill>
+          <a:ln w="12700">
+            <a:solidFill>
+              <a:srgbClr val="C9B991"/>
+            </a:solidFill>
+          </a:ln>
+          <a:effectLst/>
+        </p:spPr>
+        <p:style>
+          <a:lnRef idx="1">
+            <a:schemeClr val="accent1"/>
+          </a:lnRef>
+          <a:fillRef idx="3">
+            <a:schemeClr val="accent1"/>
+          </a:fillRef>
+          <a:effectRef idx="2">
+            <a:schemeClr val="accent1"/>
+          </a:effectRef>
+          <a:fontRef idx="minor">
+            <a:schemeClr val="lt1"/>
+          </a:fontRef>
+        </p:style>
+        <p:txBody>
+          <a:bodyPr wrap="square" lIns="27432" tIns="22860" rIns="27432" bIns="22860" rtlCol="0" anchor="ctr"/>
+          <a:lstStyle/>
+          <a:p>
+            <a:pPr algn="ctr"/>
+            <a:r>
+              <a:rPr sz="1100" b="0" i="1" dirty="0">
+                <a:solidFill>
+                  <a:srgbClr val="5C4826"/>
+                </a:solidFill>
+              </a:rPr>
+              <a:t>defective update released</a:t>
+            </a:r>
+          </a:p>
+        </p:txBody>
+      </p:sp>
+      <p:sp>
+        <p:nvSpPr>
+          <p:cNvPr id="1005" name="Card"/>
+          <p:cNvSpPr/>
+          <p:nvPr/>
+        </p:nvSpPr>
+        <p:spPr>
+          <a:xfrm>
+            <a:off x="6309360" y="2697480"/>
+            <a:ext cx="2286000" cy="713232"/>
+          </a:xfrm>
+          <a:prstGeom prst="rect">
+            <a:avLst/>
+          </a:prstGeom>
+          <a:solidFill>
+            <a:srgbClr val="F5F1E8"/>
+          </a:solidFill>
+          <a:ln w="12700">
+            <a:solidFill>
+              <a:srgbClr val="C9B991"/>
+            </a:solidFill>
+          </a:ln>
+          <a:effectLst/>
+        </p:spPr>
+        <p:style>
+          <a:lnRef idx="1">
+            <a:schemeClr val="accent1"/>
+          </a:lnRef>
+          <a:fillRef idx="3">
+            <a:schemeClr val="accent1"/>
+          </a:fillRef>
+          <a:effectRef idx="2">
+            <a:schemeClr val="accent1"/>
+          </a:effectRef>
+          <a:fontRef idx="minor">
+            <a:schemeClr val="lt1"/>
+          </a:fontRef>
+        </p:style>
+        <p:txBody>
+          <a:bodyPr wrap="square" lIns="27432" tIns="22860" rIns="27432" bIns="22860" rtlCol="0" anchor="ctr"/>
+          <a:lstStyle/>
+          <a:p>
+            <a:pPr algn="ctr"/>
+            <a:r>
+              <a:rPr sz="1100" b="0" i="1" dirty="0">
+                <a:solidFill>
+                  <a:srgbClr val="5C4826"/>
+                </a:solidFill>
+              </a:rPr>
+              <a:t>independent compatibility tests</a:t>
+            </a:r>
+          </a:p>
+        </p:txBody>
+      </p:sp>
+      <p:sp>
+        <p:nvSpPr>
+          <p:cNvPr id="1006" name="Card"/>
+          <p:cNvSpPr/>
+          <p:nvPr/>
+        </p:nvSpPr>
+        <p:spPr>
+          <a:xfrm>
+            <a:off x="4389120" y="3474720"/>
+            <a:ext cx="1828800" cy="713232"/>
+          </a:xfrm>
+          <a:prstGeom prst="rect">
+            <a:avLst/>
+          </a:prstGeom>
+          <a:solidFill>
+            <a:srgbClr val="F5F1E8"/>
+          </a:solidFill>
+          <a:ln w="12700">
+            <a:solidFill>
+              <a:srgbClr val="C9B991"/>
+            </a:solidFill>
+          </a:ln>
+          <a:effectLst/>
+        </p:spPr>
+        <p:style>
+          <a:lnRef idx="1">
+            <a:schemeClr val="accent1"/>
+          </a:lnRef>
+          <a:fillRef idx="3">
+            <a:schemeClr val="accent1"/>
+          </a:fillRef>
+          <a:effectRef idx="2">
+            <a:schemeClr val="accent1"/>
+          </a:effectRef>
+          <a:fontRef idx="minor">
+            <a:schemeClr val="lt1"/>
+          </a:fontRef>
+        </p:style>
+        <p:txBody>
+          <a:bodyPr wrap="square" lIns="27432" tIns="22860" rIns="27432" bIns="22860" rtlCol="0" anchor="ctr"/>
+          <a:lstStyle/>
+          <a:p>
+            <a:pPr algn="ctr"/>
+            <a:r>
+              <a:rPr sz="1100" b="0" i="1" dirty="0">
+                <a:solidFill>
+                  <a:srgbClr val="5C4826"/>
+                </a:solidFill>
+              </a:rPr>
+              <a:t>widespread outage</a:t>
+            </a:r>
+          </a:p>
+        </p:txBody>
+      </p:sp>
+      <p:sp>
+        <p:nvSpPr>
+          <p:cNvPr id="1007" name="Card"/>
+          <p:cNvSpPr/>
+          <p:nvPr/>
+        </p:nvSpPr>
+        <p:spPr>
+          <a:xfrm>
+            <a:off x="6309360" y="3474720"/>
+            <a:ext cx="2286000" cy="713232"/>
+          </a:xfrm>
+          <a:prstGeom prst="rect">
+            <a:avLst/>
+          </a:prstGeom>
+          <a:solidFill>
+            <a:srgbClr val="F5F1E8"/>
+          </a:solidFill>
+          <a:ln w="12700">
+            <a:solidFill>
+              <a:srgbClr val="C9B991"/>
+            </a:solidFill>
+          </a:ln>
+          <a:effectLst/>
+        </p:spPr>
+        <p:style>
+          <a:lnRef idx="1">
+            <a:schemeClr val="accent1"/>
+          </a:lnRef>
+          <a:fillRef idx="3">
+            <a:schemeClr val="accent1"/>
+          </a:fillRef>
+          <a:effectRef idx="2">
+            <a:schemeClr val="accent1"/>
+          </a:effectRef>
+          <a:fontRef idx="minor">
+            <a:schemeClr val="lt1"/>
+          </a:fontRef>
+        </p:style>
+        <p:txBody>
+          <a:bodyPr wrap="square" lIns="27432" tIns="22860" rIns="27432" bIns="22860" rtlCol="0" anchor="ctr"/>
+          <a:lstStyle/>
+          <a:p>
+            <a:pPr algn="ctr"/>
+            <a:r>
+              <a:rPr sz="1100" b="0" i="1" dirty="0">
+                <a:solidFill>
+                  <a:srgbClr val="5C4826"/>
+                </a:solidFill>
+              </a:rPr>
+              <a:t>staged rollout + demonstrated halt</a:t>
+            </a:r>
+          </a:p>
+        </p:txBody>
+      </p:sp>
+      <p:sp>
+        <p:nvSpPr>
+          <p:cNvPr id="1008" name="Card"/>
+          <p:cNvSpPr/>
+          <p:nvPr/>
+        </p:nvSpPr>
+        <p:spPr>
+          <a:xfrm>
+            <a:off x="4389120" y="4251960"/>
+            <a:ext cx="1828800" cy="713232"/>
+          </a:xfrm>
+          <a:prstGeom prst="rect">
+            <a:avLst/>
+          </a:prstGeom>
+          <a:solidFill>
+            <a:srgbClr val="F5F1E8"/>
+          </a:solidFill>
+          <a:ln w="12700">
+            <a:solidFill>
+              <a:srgbClr val="C9B991"/>
+            </a:solidFill>
+          </a:ln>
+          <a:effectLst/>
+        </p:spPr>
+        <p:style>
+          <a:lnRef idx="1">
+            <a:schemeClr val="accent1"/>
+          </a:lnRef>
+          <a:fillRef idx="3">
+            <a:schemeClr val="accent1"/>
+          </a:fillRef>
+          <a:effectRef idx="2">
+            <a:schemeClr val="accent1"/>
+          </a:effectRef>
+          <a:fontRef idx="minor">
+            <a:schemeClr val="lt1"/>
+          </a:fontRef>
+        </p:style>
+        <p:txBody>
+          <a:bodyPr wrap="square" lIns="27432" tIns="22860" rIns="27432" bIns="22860" rtlCol="0" anchor="ctr"/>
+          <a:lstStyle/>
+          <a:p>
+            <a:pPr algn="ctr"/>
+            <a:r>
+              <a:rPr sz="1100" b="0" i="1" dirty="0">
+                <a:solidFill>
+                  <a:srgbClr val="5C4826"/>
+                </a:solidFill>
+              </a:rPr>
+              <a:t>service disruption</a:t>
+            </a:r>
+          </a:p>
+        </p:txBody>
+      </p:sp>
+      <p:sp>
+        <p:nvSpPr>
+          <p:cNvPr id="1009" name="Card"/>
+          <p:cNvSpPr/>
+          <p:nvPr/>
+        </p:nvSpPr>
+        <p:spPr>
+          <a:xfrm>
+            <a:off x="6309360" y="4251960"/>
+            <a:ext cx="2286000" cy="713232"/>
+          </a:xfrm>
+          <a:prstGeom prst="rect">
+            <a:avLst/>
+          </a:prstGeom>
+          <a:solidFill>
+            <a:srgbClr val="F5F1E8"/>
+          </a:solidFill>
+          <a:ln w="12700">
+            <a:solidFill>
+              <a:srgbClr val="C9B991"/>
+            </a:solidFill>
+          </a:ln>
+          <a:effectLst/>
+        </p:spPr>
+        <p:style>
+          <a:lnRef idx="1">
+            <a:schemeClr val="accent1"/>
+          </a:lnRef>
+          <a:fillRef idx="3">
+            <a:schemeClr val="accent1"/>
+          </a:fillRef>
+          <a:effectRef idx="2">
+            <a:schemeClr val="accent1"/>
+          </a:effectRef>
+          <a:fontRef idx="minor">
+            <a:schemeClr val="lt1"/>
+          </a:fontRef>
+        </p:style>
+        <p:txBody>
+          <a:bodyPr wrap="square" lIns="27432" tIns="22860" rIns="27432" bIns="22860" rtlCol="0" anchor="ctr"/>
+          <a:lstStyle/>
+          <a:p>
+            <a:pPr algn="ctr"/>
+            <a:r>
+              <a:rPr sz="1100" b="0" i="1" dirty="0">
+                <a:solidFill>
+                  <a:srgbClr val="5C4826"/>
+                </a:solidFill>
+              </a:rPr>
+              <a:t>independent service paths</a:t>
+            </a:r>
+          </a:p>
+        </p:txBody>
+      </p:sp>
+      <p:sp>
+        <p:nvSpPr>
+          <p:cNvPr id="1010" name="Label"/>
+          <p:cNvSpPr txBox="1"/>
+          <p:nvPr/>
+        </p:nvSpPr>
+        <p:spPr>
+          <a:xfrm>
+            <a:off x="548640" y="5102352"/>
+            <a:ext cx="8046720" cy="365760"/>
+          </a:xfrm>
+          <a:prstGeom prst="rect">
+            <a:avLst/>
+          </a:prstGeom>
+          <a:noFill/>
+        </p:spPr>
+        <p:txBody>
+          <a:bodyPr wrap="square" lIns="27432" tIns="22860" rIns="27432" bIns="22860" anchor="t">
+            <a:spAutoFit/>
+          </a:bodyPr>
+          <a:lstStyle/>
+          <a:p>
+            <a:pPr algn="ctr"/>
+            <a:r>
+              <a:rPr sz="1200" b="1" i="1">
+                <a:solidFill>
+                  <a:srgbClr val="5C4826"/>
+                </a:solidFill>
+              </a:rPr>
+              <a:t>How often will each mode occur? Occurrence stays ‘?’ — which modes warrant action even when their probabilities are unknown?</a:t>
+            </a:r>
+          </a:p>
+        </p:txBody>
+      </p:sp>
+    </p:spTree>
+  </p:cSld>
+  <p:clrMapOvr>
+    <a:masterClrMapping/>
+  </p:clrMapOvr>
+</p:sld>
+</file>
+
 <file path=ppt/slides/slide3.xml><?xml version="1.0" encoding="utf-8"?>
 <p:sld xmlns:a="http://schemas.openxmlformats.org/drawingml/2006/main" xmlns:p="http://schemas.openxmlformats.org/presentationml/2006/main" xmlns:r="http://schemas.openxmlformats.org/officeDocument/2006/relationships">
   <p:cSld>
@@ -22089,6 +23605,1310 @@
           </a:fontRef>
         </p:style>
       </p:cxnSp>
+    </p:spTree>
+  </p:cSld>
+  <p:clrMapOvr>
+    <a:masterClrMapping/>
+  </p:clrMapOvr>
+</p:sld>
+</file>
+
+<file path=ppt/slides/slide30.xml><?xml version="1.0" encoding="utf-8"?>
+<p:sld xmlns:a="http://schemas.openxmlformats.org/drawingml/2006/main" xmlns:p="http://schemas.openxmlformats.org/presentationml/2006/main" xmlns:r="http://schemas.openxmlformats.org/officeDocument/2006/relationships">
+  <p:cSld>
+    <p:spTree>
+      <p:nvGrpSpPr>
+        <p:cNvPr id="1" name=""/>
+        <p:cNvGrpSpPr/>
+        <p:nvPr/>
+      </p:nvGrpSpPr>
+      <p:grpSpPr/>
+      <p:sp>
+        <p:nvSpPr>
+          <p:cNvPr id="3" name="Title 2"/>
+          <p:cNvSpPr>
+            <a:spLocks noGrp="1"/>
+          </p:cNvSpPr>
+          <p:nvPr>
+            <p:ph type="title"/>
+          </p:nvPr>
+        </p:nvSpPr>
+        <p:spPr/>
+        <p:txBody>
+          <a:bodyPr>
+            <a:normAutofit fontScale="90000"/>
+          </a:bodyPr>
+          <a:lstStyle/>
+          <a:p>
+            <a:r>
+              <a:rPr sz="2400" b="0" i="0">
+                <a:solidFill>
+                  <a:srgbClr val="000000"/>
+                </a:solidFill>
+              </a:rPr>
+              <a:t>Apply FMEA to an unfamiliar system</a:t>
+            </a:r>
+          </a:p>
+        </p:txBody>
+      </p:sp>
+      <p:sp>
+        <p:nvSpPr>
+          <p:cNvPr id="900" name="Slide Number Placeholder 900"/>
+          <p:cNvSpPr>
+            <a:spLocks noGrp="1"/>
+          </p:cNvSpPr>
+          <p:nvPr>
+            <p:ph type="sldNum" sz="quarter" idx="4"/>
+          </p:nvPr>
+        </p:nvSpPr>
+        <p:spPr/>
+        <p:txBody>
+          <a:bodyPr/>
+          <a:lstStyle/>
+          <a:p>
+            <a:fld id="{8CF8A65D-8523-4C39-BD83-5C787F1FA9B3}" type="slidenum">
+              <a:rPr lang="en-US" smtClean="0"/>
+              <a:t>10</a:t>
+            </a:fld>
+            <a:endParaRPr lang="en-US"/>
+          </a:p>
+        </p:txBody>
+      </p:sp>
+      <p:sp>
+        <p:nvSpPr>
+          <p:cNvPr id="909" name="FooterBand"/>
+          <p:cNvSpPr/>
+          <p:nvPr/>
+        </p:nvSpPr>
+        <p:spPr>
+          <a:xfrm>
+            <a:off x="274320" y="5513831"/>
+            <a:ext cx="8595360" cy="905256"/>
+          </a:xfrm>
+          <a:prstGeom prst="rect">
+            <a:avLst/>
+          </a:prstGeom>
+          <a:solidFill>
+            <a:srgbClr val="8E6F3E"/>
+          </a:solidFill>
+          <a:ln>
+            <a:noFill/>
+          </a:ln>
+          <a:effectLst/>
+        </p:spPr>
+        <p:style>
+          <a:lnRef idx="1">
+            <a:schemeClr val="accent1"/>
+          </a:lnRef>
+          <a:fillRef idx="3">
+            <a:schemeClr val="accent1"/>
+          </a:fillRef>
+          <a:effectRef idx="2">
+            <a:schemeClr val="accent1"/>
+          </a:effectRef>
+          <a:fontRef idx="minor">
+            <a:schemeClr val="lt1"/>
+          </a:fontRef>
+        </p:style>
+        <p:txBody>
+          <a:bodyPr wrap="square" lIns="27432" tIns="22860" rIns="27432" bIns="22860" rtlCol="0" anchor="ctr"/>
+          <a:lstStyle/>
+          <a:p>
+            <a:pPr algn="ctr"/>
+            <a:r>
+              <a:rPr sz="2000" b="1" i="0" dirty="0">
+                <a:solidFill>
+                  <a:srgbClr val="FFFFFF"/>
+                </a:solidFill>
+              </a:rPr>
+              <a:t>YOUR TASK (2–3 minutes, with a partner): at least one failure mode per function.</a:t>
+            </a:r>
+          </a:p>
+          <a:p>
+            <a:pPr algn="ctr">
+              <a:spcBef>
+                <a:spcPts val="300"/>
+              </a:spcBef>
+            </a:pPr>
+            <a:r>
+              <a:rPr sz="2000" b="1" i="0" dirty="0">
+                <a:solidFill>
+                  <a:srgbClr val="FFFFFF"/>
+                </a:solidFill>
+              </a:rPr>
+              <a:t>Leave likelihood as ‘?’ — decide which modes warrant a control anyway.</a:t>
+            </a:r>
+          </a:p>
+        </p:txBody>
+      </p:sp>
+      <p:sp>
+        <p:nvSpPr>
+          <p:cNvPr id="920" name="Block"/>
+          <p:cNvSpPr/>
+          <p:nvPr/>
+        </p:nvSpPr>
+        <p:spPr>
+          <a:xfrm>
+            <a:off x="548640" y="1005840"/>
+            <a:ext cx="2560320" cy="566928"/>
+          </a:xfrm>
+          <a:prstGeom prst="rect">
+            <a:avLst/>
+          </a:prstGeom>
+          <a:solidFill>
+            <a:srgbClr val="8E6F3E"/>
+          </a:solidFill>
+          <a:ln>
+            <a:noFill/>
+          </a:ln>
+          <a:effectLst/>
+        </p:spPr>
+        <p:style>
+          <a:lnRef idx="1">
+            <a:schemeClr val="accent1"/>
+          </a:lnRef>
+          <a:fillRef idx="3">
+            <a:schemeClr val="accent1"/>
+          </a:fillRef>
+          <a:effectRef idx="2">
+            <a:schemeClr val="accent1"/>
+          </a:effectRef>
+          <a:fontRef idx="minor">
+            <a:schemeClr val="lt1"/>
+          </a:fontRef>
+        </p:style>
+        <p:txBody>
+          <a:bodyPr wrap="square" lIns="27432" tIns="22860" rIns="27432" bIns="22860" rtlCol="0" anchor="ctr"/>
+          <a:lstStyle/>
+          <a:p>
+            <a:pPr algn="ctr"/>
+            <a:r>
+              <a:rPr sz="1200" b="1" i="0">
+                <a:solidFill>
+                  <a:srgbClr val="FFFFFF"/>
+                </a:solidFill>
+              </a:rPr>
+              <a:t>CLOUDFLARE</a:t>
+            </a:r>
+          </a:p>
+        </p:txBody>
+      </p:sp>
+      <p:sp>
+        <p:nvSpPr>
+          <p:cNvPr id="921" name="RowCaption"/>
+          <p:cNvSpPr/>
+          <p:nvPr/>
+        </p:nvSpPr>
+        <p:spPr>
+          <a:xfrm>
+            <a:off x="3383280" y="1005840"/>
+            <a:ext cx="5212080" cy="566928"/>
+          </a:xfrm>
+          <a:prstGeom prst="rect">
+            <a:avLst/>
+          </a:prstGeom>
+          <a:noFill/>
+          <a:ln>
+            <a:noFill/>
+          </a:ln>
+          <a:effectLst/>
+        </p:spPr>
+        <p:style>
+          <a:lnRef idx="1">
+            <a:schemeClr val="accent1"/>
+          </a:lnRef>
+          <a:fillRef idx="3">
+            <a:schemeClr val="accent1"/>
+          </a:fillRef>
+          <a:effectRef idx="2">
+            <a:schemeClr val="accent1"/>
+          </a:effectRef>
+          <a:fontRef idx="minor">
+            <a:schemeClr val="lt1"/>
+          </a:fontRef>
+        </p:style>
+        <p:txBody>
+          <a:bodyPr wrap="square" lIns="27432" tIns="22860" rIns="27432" bIns="22860" rtlCol="0" anchor="ctr"/>
+          <a:lstStyle/>
+          <a:p>
+            <a:pPr algn="l"/>
+            <a:r>
+              <a:rPr sz="1600" b="0" i="0">
+                <a:solidFill>
+                  <a:srgbClr val="555960"/>
+                </a:solidFill>
+              </a:rPr>
+              <a:t>operates a Web Application Firewall (WAF): it inspects incoming web requests for attacks</a:t>
+            </a:r>
+          </a:p>
+        </p:txBody>
+      </p:sp>
+      <p:sp>
+        <p:nvSpPr>
+          <p:cNvPr id="923" name="Block"/>
+          <p:cNvSpPr/>
+          <p:nvPr/>
+        </p:nvSpPr>
+        <p:spPr>
+          <a:xfrm>
+            <a:off x="548640" y="1664208"/>
+            <a:ext cx="2560320" cy="566928"/>
+          </a:xfrm>
+          <a:prstGeom prst="rect">
+            <a:avLst/>
+          </a:prstGeom>
+          <a:solidFill>
+            <a:srgbClr val="8E6F3E"/>
+          </a:solidFill>
+          <a:ln>
+            <a:noFill/>
+          </a:ln>
+          <a:effectLst/>
+        </p:spPr>
+        <p:style>
+          <a:lnRef idx="1">
+            <a:schemeClr val="accent1"/>
+          </a:lnRef>
+          <a:fillRef idx="3">
+            <a:schemeClr val="accent1"/>
+          </a:fillRef>
+          <a:effectRef idx="2">
+            <a:schemeClr val="accent1"/>
+          </a:effectRef>
+          <a:fontRef idx="minor">
+            <a:schemeClr val="lt1"/>
+          </a:fontRef>
+        </p:style>
+        <p:txBody>
+          <a:bodyPr wrap="square" lIns="27432" tIns="22860" rIns="27432" bIns="22860" rtlCol="0" anchor="ctr"/>
+          <a:lstStyle/>
+          <a:p>
+            <a:pPr algn="ctr"/>
+            <a:r>
+              <a:rPr sz="1200" b="1" i="0">
+                <a:solidFill>
+                  <a:srgbClr val="FFFFFF"/>
+                </a:solidFill>
+              </a:rPr>
+              <a:t>RULE CHANGES</a:t>
+            </a:r>
+          </a:p>
+        </p:txBody>
+      </p:sp>
+      <p:sp>
+        <p:nvSpPr>
+          <p:cNvPr id="924" name="RowCaption"/>
+          <p:cNvSpPr/>
+          <p:nvPr/>
+        </p:nvSpPr>
+        <p:spPr>
+          <a:xfrm>
+            <a:off x="3383280" y="1664208"/>
+            <a:ext cx="5212080" cy="566928"/>
+          </a:xfrm>
+          <a:prstGeom prst="rect">
+            <a:avLst/>
+          </a:prstGeom>
+          <a:noFill/>
+          <a:ln>
+            <a:noFill/>
+          </a:ln>
+          <a:effectLst/>
+        </p:spPr>
+        <p:style>
+          <a:lnRef idx="1">
+            <a:schemeClr val="accent1"/>
+          </a:lnRef>
+          <a:fillRef idx="3">
+            <a:schemeClr val="accent1"/>
+          </a:fillRef>
+          <a:effectRef idx="2">
+            <a:schemeClr val="accent1"/>
+          </a:effectRef>
+          <a:fontRef idx="minor">
+            <a:schemeClr val="lt1"/>
+          </a:fontRef>
+        </p:style>
+        <p:txBody>
+          <a:bodyPr wrap="square" lIns="27432" tIns="22860" rIns="27432" bIns="22860" rtlCol="0" anchor="ctr"/>
+          <a:lstStyle/>
+          <a:p>
+            <a:pPr algn="l"/>
+            <a:r>
+              <a:rPr sz="1600" b="0" i="0">
+                <a:solidFill>
+                  <a:srgbClr val="555960"/>
+                </a:solidFill>
+              </a:rPr>
+              <a:t>new detection rules deploy without a software release — and propagate globally within seconds</a:t>
+            </a:r>
+          </a:p>
+        </p:txBody>
+      </p:sp>
+      <p:sp>
+        <p:nvSpPr>
+          <p:cNvPr id="926" name="Block"/>
+          <p:cNvSpPr/>
+          <p:nvPr/>
+        </p:nvSpPr>
+        <p:spPr>
+          <a:xfrm>
+            <a:off x="548640" y="2322576"/>
+            <a:ext cx="2560320" cy="566928"/>
+          </a:xfrm>
+          <a:prstGeom prst="rect">
+            <a:avLst/>
+          </a:prstGeom>
+          <a:solidFill>
+            <a:srgbClr val="8E6F3E"/>
+          </a:solidFill>
+          <a:ln>
+            <a:noFill/>
+          </a:ln>
+          <a:effectLst/>
+        </p:spPr>
+        <p:style>
+          <a:lnRef idx="1">
+            <a:schemeClr val="accent1"/>
+          </a:lnRef>
+          <a:fillRef idx="3">
+            <a:schemeClr val="accent1"/>
+          </a:fillRef>
+          <a:effectRef idx="2">
+            <a:schemeClr val="accent1"/>
+          </a:effectRef>
+          <a:fontRef idx="minor">
+            <a:schemeClr val="lt1"/>
+          </a:fontRef>
+        </p:style>
+        <p:txBody>
+          <a:bodyPr wrap="square" lIns="27432" tIns="22860" rIns="27432" bIns="22860" rtlCol="0" anchor="ctr"/>
+          <a:lstStyle/>
+          <a:p>
+            <a:pPr algn="ctr"/>
+            <a:r>
+              <a:rPr sz="1200" b="1" i="0" dirty="0">
+                <a:solidFill>
+                  <a:srgbClr val="FFFFFF"/>
+                </a:solidFill>
+              </a:rPr>
+              <a:t>RULE FORM</a:t>
+            </a:r>
+          </a:p>
+        </p:txBody>
+      </p:sp>
+      <p:sp>
+        <p:nvSpPr>
+          <p:cNvPr id="927" name="RowCaption"/>
+          <p:cNvSpPr/>
+          <p:nvPr/>
+        </p:nvSpPr>
+        <p:spPr>
+          <a:xfrm>
+            <a:off x="3383280" y="2322576"/>
+            <a:ext cx="5212080" cy="566928"/>
+          </a:xfrm>
+          <a:prstGeom prst="rect">
+            <a:avLst/>
+          </a:prstGeom>
+          <a:noFill/>
+          <a:ln>
+            <a:noFill/>
+          </a:ln>
+          <a:effectLst/>
+        </p:spPr>
+        <p:style>
+          <a:lnRef idx="1">
+            <a:schemeClr val="accent1"/>
+          </a:lnRef>
+          <a:fillRef idx="3">
+            <a:schemeClr val="accent1"/>
+          </a:fillRef>
+          <a:effectRef idx="2">
+            <a:schemeClr val="accent1"/>
+          </a:effectRef>
+          <a:fontRef idx="minor">
+            <a:schemeClr val="lt1"/>
+          </a:fontRef>
+        </p:style>
+        <p:txBody>
+          <a:bodyPr wrap="square" lIns="27432" tIns="22860" rIns="27432" bIns="22860" rtlCol="0" anchor="ctr"/>
+          <a:lstStyle/>
+          <a:p>
+            <a:pPr algn="l"/>
+            <a:r>
+              <a:rPr sz="1600" b="0" i="0">
+                <a:solidFill>
+                  <a:srgbClr val="555960"/>
+                </a:solidFill>
+              </a:rPr>
+              <a:t>some detection rules are written as regular expressions</a:t>
+            </a:r>
+          </a:p>
+        </p:txBody>
+      </p:sp>
+      <p:sp>
+        <p:nvSpPr>
+          <p:cNvPr id="5" name="ColumnHeading"/>
+          <p:cNvSpPr/>
+          <p:nvPr/>
+        </p:nvSpPr>
+        <p:spPr>
+          <a:xfrm>
+            <a:off x="365760" y="3072384"/>
+            <a:ext cx="1645920" cy="256032"/>
+          </a:xfrm>
+          <a:prstGeom prst="rect">
+            <a:avLst/>
+          </a:prstGeom>
+          <a:noFill/>
+          <a:ln>
+            <a:noFill/>
+          </a:ln>
+          <a:effectLst/>
+        </p:spPr>
+        <p:style>
+          <a:lnRef idx="1">
+            <a:schemeClr val="accent1"/>
+          </a:lnRef>
+          <a:fillRef idx="3">
+            <a:schemeClr val="accent1"/>
+          </a:fillRef>
+          <a:effectRef idx="2">
+            <a:schemeClr val="accent1"/>
+          </a:effectRef>
+          <a:fontRef idx="minor">
+            <a:schemeClr val="lt1"/>
+          </a:fontRef>
+        </p:style>
+        <p:txBody>
+          <a:bodyPr wrap="square" lIns="27432" tIns="22860" rIns="27432" bIns="22860" rtlCol="0" anchor="ctr"/>
+          <a:lstStyle/>
+          <a:p>
+            <a:pPr algn="ctr"/>
+            <a:r>
+              <a:rPr lang="en-US" sz="1200" b="1" i="0" dirty="0">
+                <a:solidFill>
+                  <a:schemeClr val="bg1"/>
+                </a:solidFill>
+              </a:rPr>
+              <a:t>FUNCTION</a:t>
+            </a:r>
+            <a:endParaRPr sz="2800" b="1" i="0" dirty="0">
+              <a:solidFill>
+                <a:schemeClr val="bg1"/>
+              </a:solidFill>
+            </a:endParaRPr>
+          </a:p>
+        </p:txBody>
+      </p:sp>
+      <p:sp>
+        <p:nvSpPr>
+          <p:cNvPr id="1000" name="ColumnHeading"/>
+          <p:cNvSpPr/>
+          <p:nvPr/>
+        </p:nvSpPr>
+        <p:spPr>
+          <a:xfrm>
+            <a:off x="2103120" y="3072384"/>
+            <a:ext cx="2194560" cy="256032"/>
+          </a:xfrm>
+          <a:prstGeom prst="rect">
+            <a:avLst/>
+          </a:prstGeom>
+          <a:noFill/>
+          <a:ln>
+            <a:noFill/>
+          </a:ln>
+          <a:effectLst/>
+        </p:spPr>
+        <p:style>
+          <a:lnRef idx="1">
+            <a:schemeClr val="accent1"/>
+          </a:lnRef>
+          <a:fillRef idx="3">
+            <a:schemeClr val="accent1"/>
+          </a:fillRef>
+          <a:effectRef idx="2">
+            <a:schemeClr val="accent1"/>
+          </a:effectRef>
+          <a:fontRef idx="minor">
+            <a:schemeClr val="lt1"/>
+          </a:fontRef>
+        </p:style>
+        <p:txBody>
+          <a:bodyPr wrap="square" lIns="27432" tIns="22860" rIns="27432" bIns="22860" rtlCol="0" anchor="ctr"/>
+          <a:lstStyle/>
+          <a:p>
+            <a:pPr algn="ctr"/>
+            <a:r>
+              <a:rPr lang="en-US" sz="1200" b="1" i="0" dirty="0">
+                <a:solidFill>
+                  <a:schemeClr val="bg1"/>
+                </a:solidFill>
+              </a:rPr>
+              <a:t>POSSIBLE FAILURE MODE</a:t>
+            </a:r>
+            <a:endParaRPr sz="2800" b="1" i="0" dirty="0">
+              <a:solidFill>
+                <a:schemeClr val="bg1"/>
+              </a:solidFill>
+            </a:endParaRPr>
+          </a:p>
+        </p:txBody>
+      </p:sp>
+      <p:sp>
+        <p:nvSpPr>
+          <p:cNvPr id="1001" name="ColumnHeading"/>
+          <p:cNvSpPr/>
+          <p:nvPr/>
+        </p:nvSpPr>
+        <p:spPr>
+          <a:xfrm>
+            <a:off x="4389120" y="3072384"/>
+            <a:ext cx="2011680" cy="256032"/>
+          </a:xfrm>
+          <a:prstGeom prst="rect">
+            <a:avLst/>
+          </a:prstGeom>
+          <a:noFill/>
+          <a:ln>
+            <a:noFill/>
+          </a:ln>
+          <a:effectLst/>
+        </p:spPr>
+        <p:style>
+          <a:lnRef idx="1">
+            <a:schemeClr val="accent1"/>
+          </a:lnRef>
+          <a:fillRef idx="3">
+            <a:schemeClr val="accent1"/>
+          </a:fillRef>
+          <a:effectRef idx="2">
+            <a:schemeClr val="accent1"/>
+          </a:effectRef>
+          <a:fontRef idx="minor">
+            <a:schemeClr val="lt1"/>
+          </a:fontRef>
+        </p:style>
+        <p:txBody>
+          <a:bodyPr wrap="square" lIns="27432" tIns="22860" rIns="27432" bIns="22860" rtlCol="0" anchor="ctr"/>
+          <a:lstStyle/>
+          <a:p>
+            <a:pPr algn="ctr"/>
+            <a:r>
+              <a:rPr lang="en-US" sz="1200" b="1" i="0" dirty="0">
+                <a:solidFill>
+                  <a:schemeClr val="bg1"/>
+                </a:solidFill>
+              </a:rPr>
+              <a:t>POTENTIAL EFFECT</a:t>
+            </a:r>
+            <a:endParaRPr sz="2800" b="1" i="0" dirty="0">
+              <a:solidFill>
+                <a:schemeClr val="bg1"/>
+              </a:solidFill>
+            </a:endParaRPr>
+          </a:p>
+        </p:txBody>
+      </p:sp>
+      <p:sp>
+        <p:nvSpPr>
+          <p:cNvPr id="1002" name="ColumnHeading"/>
+          <p:cNvSpPr/>
+          <p:nvPr/>
+        </p:nvSpPr>
+        <p:spPr>
+          <a:xfrm>
+            <a:off x="6492240" y="3072384"/>
+            <a:ext cx="2103120" cy="256032"/>
+          </a:xfrm>
+          <a:prstGeom prst="rect">
+            <a:avLst/>
+          </a:prstGeom>
+          <a:noFill/>
+          <a:ln>
+            <a:noFill/>
+          </a:ln>
+          <a:effectLst/>
+        </p:spPr>
+        <p:style>
+          <a:lnRef idx="1">
+            <a:schemeClr val="accent1"/>
+          </a:lnRef>
+          <a:fillRef idx="3">
+            <a:schemeClr val="accent1"/>
+          </a:fillRef>
+          <a:effectRef idx="2">
+            <a:schemeClr val="accent1"/>
+          </a:effectRef>
+          <a:fontRef idx="minor">
+            <a:schemeClr val="lt1"/>
+          </a:fontRef>
+        </p:style>
+        <p:txBody>
+          <a:bodyPr wrap="square" lIns="27432" tIns="22860" rIns="27432" bIns="22860" rtlCol="0" anchor="ctr"/>
+          <a:lstStyle/>
+          <a:p>
+            <a:pPr algn="ctr"/>
+            <a:r>
+              <a:rPr lang="en-US" sz="1200" b="1" i="0" dirty="0">
+                <a:solidFill>
+                  <a:schemeClr val="bg1"/>
+                </a:solidFill>
+              </a:rPr>
+              <a:t>PROPOSED CONTROL</a:t>
+            </a:r>
+            <a:endParaRPr sz="2800" b="1" i="0" dirty="0">
+              <a:solidFill>
+                <a:schemeClr val="bg1"/>
+              </a:solidFill>
+            </a:endParaRPr>
+          </a:p>
+        </p:txBody>
+      </p:sp>
+      <p:sp>
+        <p:nvSpPr>
+          <p:cNvPr id="1003" name="Block"/>
+          <p:cNvSpPr/>
+          <p:nvPr/>
+        </p:nvSpPr>
+        <p:spPr>
+          <a:xfrm>
+            <a:off x="365760" y="3401568"/>
+            <a:ext cx="1645920" cy="603504"/>
+          </a:xfrm>
+          <a:prstGeom prst="rect">
+            <a:avLst/>
+          </a:prstGeom>
+          <a:solidFill>
+            <a:srgbClr val="8E6F3E"/>
+          </a:solidFill>
+          <a:ln>
+            <a:noFill/>
+          </a:ln>
+          <a:effectLst/>
+        </p:spPr>
+        <p:style>
+          <a:lnRef idx="1">
+            <a:schemeClr val="accent1"/>
+          </a:lnRef>
+          <a:fillRef idx="3">
+            <a:schemeClr val="accent1"/>
+          </a:fillRef>
+          <a:effectRef idx="2">
+            <a:schemeClr val="accent1"/>
+          </a:effectRef>
+          <a:fontRef idx="minor">
+            <a:schemeClr val="lt1"/>
+          </a:fontRef>
+        </p:style>
+        <p:txBody>
+          <a:bodyPr wrap="square" lIns="27432" tIns="22860" rIns="27432" bIns="22860" rtlCol="0" anchor="ctr"/>
+          <a:lstStyle/>
+          <a:p>
+            <a:pPr algn="ctr"/>
+            <a:r>
+              <a:rPr sz="1200" b="1" i="0">
+                <a:solidFill>
+                  <a:srgbClr val="FFFFFF"/>
+                </a:solidFill>
+              </a:rPr>
+              <a:t>Evaluate WAF rule</a:t>
+            </a:r>
+          </a:p>
+        </p:txBody>
+      </p:sp>
+      <p:sp>
+        <p:nvSpPr>
+          <p:cNvPr id="1004" name="Block"/>
+          <p:cNvSpPr/>
+          <p:nvPr/>
+        </p:nvSpPr>
+        <p:spPr>
+          <a:xfrm>
+            <a:off x="365760" y="4059936"/>
+            <a:ext cx="1645920" cy="603504"/>
+          </a:xfrm>
+          <a:prstGeom prst="rect">
+            <a:avLst/>
+          </a:prstGeom>
+          <a:solidFill>
+            <a:srgbClr val="8E6F3E"/>
+          </a:solidFill>
+          <a:ln>
+            <a:noFill/>
+          </a:ln>
+          <a:effectLst/>
+        </p:spPr>
+        <p:style>
+          <a:lnRef idx="1">
+            <a:schemeClr val="accent1"/>
+          </a:lnRef>
+          <a:fillRef idx="3">
+            <a:schemeClr val="accent1"/>
+          </a:fillRef>
+          <a:effectRef idx="2">
+            <a:schemeClr val="accent1"/>
+          </a:effectRef>
+          <a:fontRef idx="minor">
+            <a:schemeClr val="lt1"/>
+          </a:fontRef>
+        </p:style>
+        <p:txBody>
+          <a:bodyPr wrap="square" lIns="27432" tIns="22860" rIns="27432" bIns="22860" rtlCol="0" anchor="ctr"/>
+          <a:lstStyle/>
+          <a:p>
+            <a:pPr algn="ctr"/>
+            <a:r>
+              <a:rPr sz="1200" b="1" i="0">
+                <a:solidFill>
+                  <a:srgbClr val="FFFFFF"/>
+                </a:solidFill>
+              </a:rPr>
+              <a:t>Validate new rule</a:t>
+            </a:r>
+          </a:p>
+        </p:txBody>
+      </p:sp>
+      <p:sp>
+        <p:nvSpPr>
+          <p:cNvPr id="1005" name="Block"/>
+          <p:cNvSpPr/>
+          <p:nvPr/>
+        </p:nvSpPr>
+        <p:spPr>
+          <a:xfrm>
+            <a:off x="365760" y="4718304"/>
+            <a:ext cx="1645920" cy="603504"/>
+          </a:xfrm>
+          <a:prstGeom prst="rect">
+            <a:avLst/>
+          </a:prstGeom>
+          <a:solidFill>
+            <a:srgbClr val="8E6F3E"/>
+          </a:solidFill>
+          <a:ln>
+            <a:noFill/>
+          </a:ln>
+          <a:effectLst/>
+        </p:spPr>
+        <p:style>
+          <a:lnRef idx="1">
+            <a:schemeClr val="accent1"/>
+          </a:lnRef>
+          <a:fillRef idx="3">
+            <a:schemeClr val="accent1"/>
+          </a:fillRef>
+          <a:effectRef idx="2">
+            <a:schemeClr val="accent1"/>
+          </a:effectRef>
+          <a:fontRef idx="minor">
+            <a:schemeClr val="lt1"/>
+          </a:fontRef>
+        </p:style>
+        <p:txBody>
+          <a:bodyPr wrap="square" lIns="27432" tIns="22860" rIns="27432" bIns="22860" rtlCol="0" anchor="ctr"/>
+          <a:lstStyle/>
+          <a:p>
+            <a:pPr algn="ctr"/>
+            <a:r>
+              <a:rPr sz="1200" b="1" i="0">
+                <a:solidFill>
+                  <a:srgbClr val="FFFFFF"/>
+                </a:solidFill>
+              </a:rPr>
+              <a:t>Distribute rule</a:t>
+            </a:r>
+          </a:p>
+        </p:txBody>
+      </p:sp>
+      <p:sp>
+        <p:nvSpPr>
+          <p:cNvPr id="903" name="Card"/>
+          <p:cNvSpPr/>
+          <p:nvPr/>
+        </p:nvSpPr>
+        <p:spPr>
+          <a:xfrm>
+            <a:off x="2103120" y="3401568"/>
+            <a:ext cx="2194560" cy="603504"/>
+          </a:xfrm>
+          <a:prstGeom prst="rect">
+            <a:avLst/>
+          </a:prstGeom>
+          <a:solidFill>
+            <a:srgbClr val="F5F1E8"/>
+          </a:solidFill>
+          <a:ln w="12700">
+            <a:solidFill>
+              <a:srgbClr val="C9B991"/>
+            </a:solidFill>
+          </a:ln>
+          <a:effectLst/>
+        </p:spPr>
+        <p:style>
+          <a:lnRef idx="1">
+            <a:schemeClr val="accent1"/>
+          </a:lnRef>
+          <a:fillRef idx="3">
+            <a:schemeClr val="accent1"/>
+          </a:fillRef>
+          <a:effectRef idx="2">
+            <a:schemeClr val="accent1"/>
+          </a:effectRef>
+          <a:fontRef idx="minor">
+            <a:schemeClr val="lt1"/>
+          </a:fontRef>
+        </p:style>
+        <p:txBody>
+          <a:bodyPr wrap="square" lIns="27432" tIns="22860" rIns="27432" bIns="22860" rtlCol="0" anchor="ctr"/>
+          <a:lstStyle/>
+          <a:p>
+            <a:pPr algn="ctr"/>
+            <a:r>
+              <a:rPr sz="2000" b="0" i="1" dirty="0">
+                <a:solidFill>
+                  <a:srgbClr val="5C4826"/>
+                </a:solidFill>
+              </a:rPr>
+              <a:t/>
+            </a:r>
+          </a:p>
+        </p:txBody>
+      </p:sp>
+      <p:sp>
+        <p:nvSpPr>
+          <p:cNvPr id="1006" name="Card"/>
+          <p:cNvSpPr/>
+          <p:nvPr/>
+        </p:nvSpPr>
+        <p:spPr>
+          <a:xfrm>
+            <a:off x="4389120" y="3401568"/>
+            <a:ext cx="2011680" cy="603504"/>
+          </a:xfrm>
+          <a:prstGeom prst="rect">
+            <a:avLst/>
+          </a:prstGeom>
+          <a:solidFill>
+            <a:srgbClr val="F5F1E8"/>
+          </a:solidFill>
+          <a:ln w="12700">
+            <a:solidFill>
+              <a:srgbClr val="C9B991"/>
+            </a:solidFill>
+          </a:ln>
+          <a:effectLst/>
+        </p:spPr>
+        <p:style>
+          <a:lnRef idx="1">
+            <a:schemeClr val="accent1"/>
+          </a:lnRef>
+          <a:fillRef idx="3">
+            <a:schemeClr val="accent1"/>
+          </a:fillRef>
+          <a:effectRef idx="2">
+            <a:schemeClr val="accent1"/>
+          </a:effectRef>
+          <a:fontRef idx="minor">
+            <a:schemeClr val="lt1"/>
+          </a:fontRef>
+        </p:style>
+        <p:txBody>
+          <a:bodyPr wrap="square" lIns="27432" tIns="22860" rIns="27432" bIns="22860" rtlCol="0" anchor="ctr"/>
+          <a:lstStyle/>
+          <a:p>
+            <a:pPr algn="ctr"/>
+            <a:r>
+              <a:rPr sz="2000" b="0" i="1" dirty="0">
+                <a:solidFill>
+                  <a:srgbClr val="5C4826"/>
+                </a:solidFill>
+              </a:rPr>
+              <a:t/>
+            </a:r>
+          </a:p>
+        </p:txBody>
+      </p:sp>
+      <p:sp>
+        <p:nvSpPr>
+          <p:cNvPr id="1007" name="Card"/>
+          <p:cNvSpPr/>
+          <p:nvPr/>
+        </p:nvSpPr>
+        <p:spPr>
+          <a:xfrm>
+            <a:off x="6492240" y="3401568"/>
+            <a:ext cx="2103120" cy="603504"/>
+          </a:xfrm>
+          <a:prstGeom prst="rect">
+            <a:avLst/>
+          </a:prstGeom>
+          <a:solidFill>
+            <a:srgbClr val="F5F1E8"/>
+          </a:solidFill>
+          <a:ln w="12700">
+            <a:solidFill>
+              <a:srgbClr val="C9B991"/>
+            </a:solidFill>
+          </a:ln>
+          <a:effectLst/>
+        </p:spPr>
+        <p:style>
+          <a:lnRef idx="1">
+            <a:schemeClr val="accent1"/>
+          </a:lnRef>
+          <a:fillRef idx="3">
+            <a:schemeClr val="accent1"/>
+          </a:fillRef>
+          <a:effectRef idx="2">
+            <a:schemeClr val="accent1"/>
+          </a:effectRef>
+          <a:fontRef idx="minor">
+            <a:schemeClr val="lt1"/>
+          </a:fontRef>
+        </p:style>
+        <p:txBody>
+          <a:bodyPr wrap="square" lIns="27432" tIns="22860" rIns="27432" bIns="22860" rtlCol="0" anchor="ctr"/>
+          <a:lstStyle/>
+          <a:p>
+            <a:pPr algn="ctr"/>
+            <a:r>
+              <a:rPr sz="2000" b="0" i="1" dirty="0">
+                <a:solidFill>
+                  <a:srgbClr val="5C4826"/>
+                </a:solidFill>
+              </a:rPr>
+              <a:t/>
+            </a:r>
+          </a:p>
+        </p:txBody>
+      </p:sp>
+      <p:sp>
+        <p:nvSpPr>
+          <p:cNvPr id="1008" name="Card"/>
+          <p:cNvSpPr/>
+          <p:nvPr/>
+        </p:nvSpPr>
+        <p:spPr>
+          <a:xfrm>
+            <a:off x="2103120" y="4059936"/>
+            <a:ext cx="2194560" cy="603504"/>
+          </a:xfrm>
+          <a:prstGeom prst="rect">
+            <a:avLst/>
+          </a:prstGeom>
+          <a:solidFill>
+            <a:srgbClr val="F5F1E8"/>
+          </a:solidFill>
+          <a:ln w="12700">
+            <a:solidFill>
+              <a:srgbClr val="C9B991"/>
+            </a:solidFill>
+          </a:ln>
+          <a:effectLst/>
+        </p:spPr>
+        <p:style>
+          <a:lnRef idx="1">
+            <a:schemeClr val="accent1"/>
+          </a:lnRef>
+          <a:fillRef idx="3">
+            <a:schemeClr val="accent1"/>
+          </a:fillRef>
+          <a:effectRef idx="2">
+            <a:schemeClr val="accent1"/>
+          </a:effectRef>
+          <a:fontRef idx="minor">
+            <a:schemeClr val="lt1"/>
+          </a:fontRef>
+        </p:style>
+        <p:txBody>
+          <a:bodyPr wrap="square" lIns="27432" tIns="22860" rIns="27432" bIns="22860" rtlCol="0" anchor="ctr"/>
+          <a:lstStyle/>
+          <a:p>
+            <a:pPr algn="ctr"/>
+            <a:r>
+              <a:rPr sz="2000" b="0" i="1" dirty="0">
+                <a:solidFill>
+                  <a:srgbClr val="5C4826"/>
+                </a:solidFill>
+              </a:rPr>
+              <a:t/>
+            </a:r>
+          </a:p>
+        </p:txBody>
+      </p:sp>
+      <p:sp>
+        <p:nvSpPr>
+          <p:cNvPr id="1009" name="Card"/>
+          <p:cNvSpPr/>
+          <p:nvPr/>
+        </p:nvSpPr>
+        <p:spPr>
+          <a:xfrm>
+            <a:off x="4389120" y="4059936"/>
+            <a:ext cx="2011680" cy="603504"/>
+          </a:xfrm>
+          <a:prstGeom prst="rect">
+            <a:avLst/>
+          </a:prstGeom>
+          <a:solidFill>
+            <a:srgbClr val="F5F1E8"/>
+          </a:solidFill>
+          <a:ln w="12700">
+            <a:solidFill>
+              <a:srgbClr val="C9B991"/>
+            </a:solidFill>
+          </a:ln>
+          <a:effectLst/>
+        </p:spPr>
+        <p:style>
+          <a:lnRef idx="1">
+            <a:schemeClr val="accent1"/>
+          </a:lnRef>
+          <a:fillRef idx="3">
+            <a:schemeClr val="accent1"/>
+          </a:fillRef>
+          <a:effectRef idx="2">
+            <a:schemeClr val="accent1"/>
+          </a:effectRef>
+          <a:fontRef idx="minor">
+            <a:schemeClr val="lt1"/>
+          </a:fontRef>
+        </p:style>
+        <p:txBody>
+          <a:bodyPr wrap="square" lIns="27432" tIns="22860" rIns="27432" bIns="22860" rtlCol="0" anchor="ctr"/>
+          <a:lstStyle/>
+          <a:p>
+            <a:pPr algn="ctr"/>
+            <a:r>
+              <a:rPr sz="2000" b="0" i="1" dirty="0">
+                <a:solidFill>
+                  <a:srgbClr val="5C4826"/>
+                </a:solidFill>
+              </a:rPr>
+              <a:t/>
+            </a:r>
+          </a:p>
+        </p:txBody>
+      </p:sp>
+      <p:sp>
+        <p:nvSpPr>
+          <p:cNvPr id="1010" name="Card"/>
+          <p:cNvSpPr/>
+          <p:nvPr/>
+        </p:nvSpPr>
+        <p:spPr>
+          <a:xfrm>
+            <a:off x="6492240" y="4059936"/>
+            <a:ext cx="2103120" cy="603504"/>
+          </a:xfrm>
+          <a:prstGeom prst="rect">
+            <a:avLst/>
+          </a:prstGeom>
+          <a:solidFill>
+            <a:srgbClr val="F5F1E8"/>
+          </a:solidFill>
+          <a:ln w="12700">
+            <a:solidFill>
+              <a:srgbClr val="C9B991"/>
+            </a:solidFill>
+          </a:ln>
+          <a:effectLst/>
+        </p:spPr>
+        <p:style>
+          <a:lnRef idx="1">
+            <a:schemeClr val="accent1"/>
+          </a:lnRef>
+          <a:fillRef idx="3">
+            <a:schemeClr val="accent1"/>
+          </a:fillRef>
+          <a:effectRef idx="2">
+            <a:schemeClr val="accent1"/>
+          </a:effectRef>
+          <a:fontRef idx="minor">
+            <a:schemeClr val="lt1"/>
+          </a:fontRef>
+        </p:style>
+        <p:txBody>
+          <a:bodyPr wrap="square" lIns="27432" tIns="22860" rIns="27432" bIns="22860" rtlCol="0" anchor="ctr"/>
+          <a:lstStyle/>
+          <a:p>
+            <a:pPr algn="ctr"/>
+            <a:r>
+              <a:rPr sz="2000" b="0" i="1" dirty="0">
+                <a:solidFill>
+                  <a:srgbClr val="5C4826"/>
+                </a:solidFill>
+              </a:rPr>
+              <a:t/>
+            </a:r>
+          </a:p>
+        </p:txBody>
+      </p:sp>
+      <p:sp>
+        <p:nvSpPr>
+          <p:cNvPr id="1011" name="Card"/>
+          <p:cNvSpPr/>
+          <p:nvPr/>
+        </p:nvSpPr>
+        <p:spPr>
+          <a:xfrm>
+            <a:off x="2103120" y="4718304"/>
+            <a:ext cx="2194560" cy="603504"/>
+          </a:xfrm>
+          <a:prstGeom prst="rect">
+            <a:avLst/>
+          </a:prstGeom>
+          <a:solidFill>
+            <a:srgbClr val="F5F1E8"/>
+          </a:solidFill>
+          <a:ln w="12700">
+            <a:solidFill>
+              <a:srgbClr val="C9B991"/>
+            </a:solidFill>
+          </a:ln>
+          <a:effectLst/>
+        </p:spPr>
+        <p:style>
+          <a:lnRef idx="1">
+            <a:schemeClr val="accent1"/>
+          </a:lnRef>
+          <a:fillRef idx="3">
+            <a:schemeClr val="accent1"/>
+          </a:fillRef>
+          <a:effectRef idx="2">
+            <a:schemeClr val="accent1"/>
+          </a:effectRef>
+          <a:fontRef idx="minor">
+            <a:schemeClr val="lt1"/>
+          </a:fontRef>
+        </p:style>
+        <p:txBody>
+          <a:bodyPr wrap="square" lIns="27432" tIns="22860" rIns="27432" bIns="22860" rtlCol="0" anchor="ctr"/>
+          <a:lstStyle/>
+          <a:p>
+            <a:pPr algn="ctr"/>
+            <a:r>
+              <a:rPr sz="2000" b="0" i="1" dirty="0">
+                <a:solidFill>
+                  <a:srgbClr val="5C4826"/>
+                </a:solidFill>
+              </a:rPr>
+              <a:t/>
+            </a:r>
+          </a:p>
+        </p:txBody>
+      </p:sp>
+      <p:sp>
+        <p:nvSpPr>
+          <p:cNvPr id="1012" name="Card"/>
+          <p:cNvSpPr/>
+          <p:nvPr/>
+        </p:nvSpPr>
+        <p:spPr>
+          <a:xfrm>
+            <a:off x="4389120" y="4718304"/>
+            <a:ext cx="2011680" cy="603504"/>
+          </a:xfrm>
+          <a:prstGeom prst="rect">
+            <a:avLst/>
+          </a:prstGeom>
+          <a:solidFill>
+            <a:srgbClr val="F5F1E8"/>
+          </a:solidFill>
+          <a:ln w="12700">
+            <a:solidFill>
+              <a:srgbClr val="C9B991"/>
+            </a:solidFill>
+          </a:ln>
+          <a:effectLst/>
+        </p:spPr>
+        <p:style>
+          <a:lnRef idx="1">
+            <a:schemeClr val="accent1"/>
+          </a:lnRef>
+          <a:fillRef idx="3">
+            <a:schemeClr val="accent1"/>
+          </a:fillRef>
+          <a:effectRef idx="2">
+            <a:schemeClr val="accent1"/>
+          </a:effectRef>
+          <a:fontRef idx="minor">
+            <a:schemeClr val="lt1"/>
+          </a:fontRef>
+        </p:style>
+        <p:txBody>
+          <a:bodyPr wrap="square" lIns="27432" tIns="22860" rIns="27432" bIns="22860" rtlCol="0" anchor="ctr"/>
+          <a:lstStyle/>
+          <a:p>
+            <a:pPr algn="ctr"/>
+            <a:r>
+              <a:rPr sz="2000" b="0" i="1" dirty="0">
+                <a:solidFill>
+                  <a:srgbClr val="5C4826"/>
+                </a:solidFill>
+              </a:rPr>
+              <a:t/>
+            </a:r>
+          </a:p>
+        </p:txBody>
+      </p:sp>
+      <p:sp>
+        <p:nvSpPr>
+          <p:cNvPr id="1013" name="Card"/>
+          <p:cNvSpPr/>
+          <p:nvPr/>
+        </p:nvSpPr>
+        <p:spPr>
+          <a:xfrm>
+            <a:off x="6492240" y="4718304"/>
+            <a:ext cx="2103120" cy="603504"/>
+          </a:xfrm>
+          <a:prstGeom prst="rect">
+            <a:avLst/>
+          </a:prstGeom>
+          <a:solidFill>
+            <a:srgbClr val="F5F1E8"/>
+          </a:solidFill>
+          <a:ln w="12700">
+            <a:solidFill>
+              <a:srgbClr val="C9B991"/>
+            </a:solidFill>
+          </a:ln>
+          <a:effectLst/>
+        </p:spPr>
+        <p:style>
+          <a:lnRef idx="1">
+            <a:schemeClr val="accent1"/>
+          </a:lnRef>
+          <a:fillRef idx="3">
+            <a:schemeClr val="accent1"/>
+          </a:fillRef>
+          <a:effectRef idx="2">
+            <a:schemeClr val="accent1"/>
+          </a:effectRef>
+          <a:fontRef idx="minor">
+            <a:schemeClr val="lt1"/>
+          </a:fontRef>
+        </p:style>
+        <p:txBody>
+          <a:bodyPr wrap="square" lIns="27432" tIns="22860" rIns="27432" bIns="22860" rtlCol="0" anchor="ctr"/>
+          <a:lstStyle/>
+          <a:p>
+            <a:pPr algn="ctr"/>
+            <a:r>
+              <a:rPr sz="2000" b="0" i="1" dirty="0">
+                <a:solidFill>
+                  <a:srgbClr val="5C4826"/>
+                </a:solidFill>
+              </a:rPr>
+              <a:t/>
+            </a:r>
+          </a:p>
+        </p:txBody>
+      </p:sp>
     </p:spTree>
   </p:cSld>
   <p:clrMapOvr>

--- a/course/lectures/act-2-delegation-and-control/04-failure-aware-engineering/2-4-Failure-Aware-Engineering.pptx
+++ b/course/lectures/act-2-delegation-and-control/04-failure-aware-engineering/2-4-Failure-Aware-Engineering.pptx
@@ -1206,6 +1206,11 @@
           </a:p>
           <a:p>
             <a:r>
+              <a:t>BUILD (ANIMATION-IN-SPEECH — no authored animation; run the reveal as staged speech): Step 1 — read the lead and the four-step PROCEDURE at the top, before any row: identify a plausible failure mode; determine its consequences; identify existing or proposed controls; decide whether the remaining risk warrants action. This is the method slide 27 asks students to run unaided. Step 2 — only then walk the worked table one row at a time, naming which procedure step each column instantiates (failure mode -&gt; step 1, effect -&gt; step 2, candidate control -&gt; step 3). Step 3 — close on the occurrence line at the bottom: deciding which modes warrant action under unknown probabilities IS step 4.</a:t>
+            </a:r>
+          </a:p>
+          <a:p>
+            <a:r>
               <a:t>THE WORKED TABLE: each row: a FUNCTION of the system we know thoroughly, a failure mode, its effect, a candidate control — all met on slides 21–25.</a:t>
             </a:r>
           </a:p>
@@ -1217,6 +1222,11 @@
           <a:p>
             <a:r>
               <a:t>RATINGS (notes only): classical FMEA multiplies severity, occurrence, and detection into a Risk Priority Number — but multiplying ordinal ratings does not make an RPN of 120 twice the risk of 60; the AIAG &amp; VDA FMEA Handbook (1st ed., 2019) replaces RPN with Action Priority. Occurrence stays '?' deliberately: the method's value is exposing uncertainty, not manufacturing numerical certainty.</a:t>
+            </a:r>
+          </a:p>
+          <a:p>
+            <a:r>
+              <a:t>SIMPLIFICATION (say it to the class): a full FMEA also assesses severity, occurrence, and detectability to prioritize action. We are using a simplified version because we lack reliable estimates.</a:t>
             </a:r>
           </a:p>
           <a:p>
@@ -1726,7 +1736,7 @@
           <a:lstStyle/>
           <a:p>
             <a:r>
-              <a:t>TIMING: 2 minutes. FIRST OF THREE CAUSAL BOUNDARIES.</a:t>
+              <a:t>TIMING: 1 minutes. FIRST OF THREE CAUSAL BOUNDARIES. DELIVER EFFICIENTLY (author reallocation 261015): reduce exposition — state the boundary, the model, and the intervention, then move; slide 6's 4-minute commitment discussion is protected and untouched.</a:t>
             </a:r>
           </a:p>
           <a:p>
@@ -2084,6 +2094,11 @@
               <a:t>NAMING + THE DISTINCTIVE CLAIM (author): say the model's NAME — this is Reason's Swiss cheese model — and state its distinctive claim precisely: every defensive layer can contain weaknesses, and a failure escapes only when weaknesses in successive layers ALIGN. The red path through the red-rimmed holes is the alignment; the other holes are weaknesses that this particular trajectory did not exercise. Without the alignment idea a student leaves with defense-in-depth but not Reason's contribution: defenses fail TOGETHER, as a configuration, not merely one at a time.</a:t>
             </a:r>
           </a:p>
+          <a:p>
+            <a:r>
+              <a:t>QUALIFICATION (author, notes only — the slide wording stays): 'a failure escapes only when the weaknesses ALIGN' is a simplification. The intended meaning is that weaknesses align across the defenses RELEVANT TO A PARTICULAR FAILURE TRAJECTORY — not that every conceivable defense in the organization must fail. Carry the qualification verbally if a student presses on it.</a:t>
+            </a:r>
+          </a:p>
         </p:txBody>
       </p:sp>
       <p:sp>
@@ -2151,7 +2166,7 @@
           <a:lstStyle/>
           <a:p>
             <a:r>
-              <a:t>TIMING: 3 minutes. THE EVIDENCE REPLACES THE SCHEMATIC.</a:t>
+              <a:t>TIMING: 2 minutes. THE EVIDENCE REPLACES THE SCHEMATIC. DELIVER EFFICIENTLY (author reallocation 261015): slide 7 already introduced the evidence — walk the four rows and the absent/failed distinction without re-deriving each finding.</a:t>
             </a:r>
           </a:p>
           <a:p>
@@ -2966,7 +2981,7 @@
           <a:lstStyle/>
           <a:p>
             <a:r>
-              <a:t>TIMING: 3 minutes. THE CENTRAL CONCEPTUAL PAYOFF OF MOVEMENT 3.</a:t>
+              <a:t>TIMING: 2 minutes. THE CENTRAL CONCEPTUAL PAYOFF OF MOVEMENT 3. PACING (author reallocation 261015): state the common-cause principle once and do not re-derive it — slide 18 carries the architectural discussion and keeps its protected 4 minutes.</a:t>
             </a:r>
           </a:p>
           <a:p>
@@ -3516,7 +3531,7 @@
           </a:p>
           <a:p>
             <a:r>
-              <a:t>EXPOSITION ORDER (author): read the intro sentence first, then walk the chain. The distinction to land before the diagram: experience accumulates by itself; expertise does not. Reflection is the deliberate comparison of expectation with outcome — that comparison, not the hours, is what feeds the repertoire.</a:t>
+              <a:t>EXPOSITION ORDER (author, revised 261015): walk the chain, then land the distinction with the Schön line beneath the diagram — experience accumulates by itself; expertise does not. Reflection is the deliberate comparison of expectation with outcome, and that comparison, not the hours, feeds the repertoire. (The duplicate opening sentence above the diagram was removed: one statement of the point, stated once.)</a:t>
             </a:r>
           </a:p>
         </p:txBody>
@@ -3586,7 +3601,7 @@
           <a:lstStyle/>
           <a:p>
             <a:r>
-              <a:t>TIMING: 1 minutes. GOVERNANCE CONVERSION — the lesson changes the ENVIRONMENT.</a:t>
+              <a:t>TIMING: 2 minutes. GOVERNANCE CONVERSION — the lesson changes the ENVIRONMENT. (Reallocated +1 minute, author revision 261015: this slide introduces five diagnostic categories and maps them to four earlier course units — do not rush the walk.)</a:t>
             </a:r>
           </a:p>
           <a:p>
@@ -3596,12 +3611,12 @@
           </a:p>
           <a:p>
             <a:r>
-              <a:t>FACTUAL CARE: do NOT claim CrowdStrike lacked all five. Some controls existed and proved inadequate — the Content Validator RAN (against the wrong contract, RCA finding 4). The right-hand column is a proposed engineering response, not a description of CrowdStrike's actual remediation.</a:t>
-            </a:r>
-          </a:p>
-          <a:p>
-            <a:r>
-              <a:t>PACING (author): the cover-the-right-column reveal is CUT for time — walk the rows directly and state the slide-9 contrast yourself; the FMEA exercise two slides ahead carries this movement's active learning.</a:t>
+              <a:t>FACTUAL CARE: do NOT claim CrowdStrike lacked all five. Some controls existed and proved inadequate — the Content Validator RAN (against the wrong contract, RCA finding 4). A control that was ABSENT and one that ran against the WRONG OBLIGATION call for different responses: build the missing control versus re-point the existing one. The right-hand column is a proposed engineering response, not a description of CrowdStrike's actual remediation.</a:t>
+            </a:r>
+          </a:p>
+          <a:p>
+            <a:r>
+              <a:t>PACING (author): the cover-the-right-column reveal stays CUT — the FMEA exercise two slides ahead carries this movement's active learning. Spend the restored second minute on the five-row walk and the unit mapping, and state the slide-9 contrast yourself.</a:t>
             </a:r>
           </a:p>
           <a:p>
@@ -3611,7 +3626,7 @@
           </a:p>
           <a:p>
             <a:r>
-              <a:t>EXPECTED ANSWERS AND MISCONCEPTION: 'add more gates.' The footer is the rule: a failure is not a request for another gate — diagnose what was missing, THEN encode it.</a:t>
+              <a:t>EXPECTED ANSWERS AND MISCONCEPTION: 'add more gates.' The footer is the rule: a failure is not a request for another gate — absent and inadequate controls call for different responses. Diagnose which category the chain broke at, then encode it; the on-slide line says it: not every failure requires all five.</a:t>
             </a:r>
           </a:p>
           <a:p>
@@ -3691,7 +3706,7 @@
           <a:lstStyle/>
           <a:p>
             <a:r>
-              <a:t>TIMING: 1 minutes. THE LOCAL AND SYSTEMIC ANALYSES MEET. Pose the footer question, take ONE answer, state the recognition yourself.</a:t>
+              <a:t>TIMING: 2 minutes. THE LOCAL AND SYSTEMIC ANALYSES MEET. Pose the footer question and take one or two answers before stating the recognition yourself — students must reason about organizational authority, which needs a beat (author reallocation 261015).</a:t>
             </a:r>
           </a:p>
           <a:p>
@@ -3786,7 +3801,7 @@
           <a:lstStyle/>
           <a:p>
             <a:r>
-              <a:t>TIMING: 1 minutes. CLOSES THE CROWDSTRIKE INVESTIGATION. Walk the rows briskly — the next slide re-invokes this slide's lesson (a control's existence is not evidence of its effectiveness) inside the FMEA's staged-rollout row.</a:t>
+              <a:t>TIMING: 2 minutes. CLOSES THE CROWDSTRIKE INVESTIGATION. Walk the rows with enough time for students to weigh what each evidence row establishes (author reallocation 261015) — the next slide re-invokes this slide's lesson (a control's existence is not evidence of its effectiveness) inside the FMEA's staged-rollout row.</a:t>
             </a:r>
           </a:p>
           <a:p>
@@ -3896,6 +3911,16 @@
           </a:p>
           <a:p>
             <a:r>
+              <a:t>TRIGGER AND AMPLIFIER (now labelled on the slide): the pathological regex is the TRIGGER — it exhausts CPU; global deployment without staged containment is the AMPLIFIER — it set the blast radius. Both are needed to explain the incident's scale, and the pairing is the CrowdStrike parallel: there the content defect was the trigger and unstaged Rapid Response Content distribution the amplifier.</a:t>
+            </a:r>
+          </a:p>
+          <a:p>
+            <a:r>
+              <a:t>WHAT THE STEP COUNTS MEASURE (author): the counts are the number of candidate matching paths the engine explores before it can conclude — the work of backtracking — not merely a reflection of a longer input. And present 23-vs-555 as an ILLUSTRATION of the phenomenon, not a proof of exponential complexity: two measurements cannot establish an asymptotic growth rate.</a:t>
+            </a:r>
+          </a:p>
+          <a:p>
+            <a:r>
               <a:t>FACTS (Cloudflare post-mortem, 'Details of the Cloudflare outage on July 2, 2019'): a WAF Managed Rule targeting XSS deployed globally at 13:42 UTC — in seconds, with no staged rollout, while software releases went DOG → PIG → Canary; the sub-pattern .*(?:.*=.*) caused catastrophic backtracking (their worked numbers: 'x=x' took 23 steps; 'x=' plus twenty 'x's took 555); PCRE 'has no mechanism to protect against a runaway expression'; WAF identified 14:00, killed globally 14:07, traffic normal 14:09, re-enabled 14:52 — 27 minutes of impact. A CPU-usage protection had been accidentally removed weeks earlier.</a:t>
             </a:r>
           </a:p>
@@ -3992,6 +4017,11 @@
           <a:p>
             <a:r>
               <a:t>ENGINEERING POINT: students apply the models WITHOUT being led. Each group picks ONE model, proposes an intervention the incident's evidence supports, and answers: what the model preserves, what mechanism it explains, what intervention follows, what evidence would support it, who has authority to implement it.</a:t>
+            </a:r>
+          </a:p>
+          <a:p>
+            <a:r>
+              <a:t>VISIBLE TASK (author revision 261015): 'Choose ONE model' is now in the on-slide instructions — groups attempt one full analysis in the five minutes, not three shallow ones.</a:t>
             </a:r>
           </a:p>
           <a:p>
@@ -16907,51 +16937,6 @@
           </a:p>
         </p:txBody>
       </p:sp>
-      <p:sp>
-        <p:nvSpPr>
-          <p:cNvPr id="1002" name="Label"/>
-          <p:cNvSpPr txBox="1"/>
-          <p:nvPr/>
-        </p:nvSpPr>
-        <p:spPr>
-          <a:xfrm>
-            <a:off x="548640" y="868680"/>
-            <a:ext cx="8046720" cy="566928"/>
-          </a:xfrm>
-          <a:prstGeom prst="rect">
-            <a:avLst/>
-          </a:prstGeom>
-          <a:noFill/>
-        </p:spPr>
-        <p:txBody>
-          <a:bodyPr wrap="square" lIns="27432" tIns="22860" rIns="27432" bIns="22860" anchor="t">
-            <a:spAutoFit/>
-          </a:bodyPr>
-          <a:lstStyle/>
-          <a:p>
-            <a:pPr algn="ctr"/>
-            <a:r>
-              <a:rPr sz="1300" b="1" i="1">
-                <a:solidFill>
-                  <a:srgbClr val="5C4826"/>
-                </a:solidFill>
-              </a:rPr>
-              <a:t>Engineers develop expertise by examining the consequences of their decisions and</a:t>
-            </a:r>
-          </a:p>
-          <a:p>
-            <a:pPr algn="ctr"/>
-            <a:r>
-              <a:rPr sz="1300" b="1" i="1">
-                <a:solidFill>
-                  <a:srgbClr val="5C4826"/>
-                </a:solidFill>
-              </a:rPr>
-              <a:t>incorporating what they learn into future judgment — reflection, not mere accumulation of experience.</a:t>
-            </a:r>
-          </a:p>
-        </p:txBody>
-      </p:sp>
     </p:spTree>
   </p:cSld>
   <p:clrMapOvr>
@@ -17088,7 +17073,7 @@
         </p:nvSpPr>
         <p:spPr>
           <a:xfrm>
-            <a:off x="3840480" y="2167128"/>
+            <a:off x="3840480" y="2075688"/>
             <a:ext cx="4754880" cy="566928"/>
           </a:xfrm>
           <a:prstGeom prst="rect">
@@ -17194,7 +17179,7 @@
         </p:nvSpPr>
         <p:spPr>
           <a:xfrm>
-            <a:off x="731520" y="2167128"/>
+            <a:off x="731520" y="2075688"/>
             <a:ext cx="2926080" cy="566928"/>
           </a:xfrm>
           <a:prstGeom prst="rect">
@@ -17246,7 +17231,7 @@
         </p:nvSpPr>
         <p:spPr>
           <a:xfrm>
-            <a:off x="731520" y="3008376"/>
+            <a:off x="731520" y="2825496"/>
             <a:ext cx="2926080" cy="566928"/>
           </a:xfrm>
           <a:prstGeom prst="rect">
@@ -17298,7 +17283,7 @@
         </p:nvSpPr>
         <p:spPr>
           <a:xfrm>
-            <a:off x="731520" y="3849624"/>
+            <a:off x="731520" y="3575304"/>
             <a:ext cx="2926080" cy="566928"/>
           </a:xfrm>
           <a:prstGeom prst="rect">
@@ -17350,7 +17335,7 @@
         </p:nvSpPr>
         <p:spPr>
           <a:xfrm>
-            <a:off x="731520" y="4690872"/>
+            <a:off x="731520" y="4325112"/>
             <a:ext cx="2926080" cy="566928"/>
           </a:xfrm>
           <a:prstGeom prst="rect">
@@ -17402,7 +17387,7 @@
         </p:nvSpPr>
         <p:spPr>
           <a:xfrm>
-            <a:off x="3840480" y="3008376"/>
+            <a:off x="3840480" y="2825496"/>
             <a:ext cx="4754880" cy="566928"/>
           </a:xfrm>
           <a:prstGeom prst="rect">
@@ -17456,7 +17441,7 @@
         </p:nvSpPr>
         <p:spPr>
           <a:xfrm>
-            <a:off x="3840480" y="3849624"/>
+            <a:off x="3840480" y="3575304"/>
             <a:ext cx="4754880" cy="566928"/>
           </a:xfrm>
           <a:prstGeom prst="rect">
@@ -17510,7 +17495,7 @@
         </p:nvSpPr>
         <p:spPr>
           <a:xfrm>
-            <a:off x="3840480" y="4690872"/>
+            <a:off x="3840480" y="4325112"/>
             <a:ext cx="4754880" cy="566928"/>
           </a:xfrm>
           <a:prstGeom prst="rect">
@@ -17601,7 +17586,7 @@
                   <a:schemeClr val="bg1"/>
                 </a:solidFill>
               </a:rPr>
-              <a:t>WHAT WAS MISSING?</a:t>
+              <a:t>WHAT MIGHT WE CHANGE?</a:t>
             </a:r>
             <a:endParaRPr sz="2800" b="1" i="0" dirty="0">
               <a:solidFill>
@@ -17719,7 +17704,7 @@
                   <a:srgbClr val="FFFFFF"/>
                 </a:solidFill>
               </a:rPr>
-              <a:t>A failure is not a request for another gate. </a:t>
+              <a:t>A failure is not a request for another gate.</a:t>
             </a:r>
           </a:p>
           <a:p>
@@ -17730,7 +17715,7 @@
                   <a:srgbClr val="FFFFFF"/>
                 </a:solidFill>
               </a:rPr>
-              <a:t>Diagnose what was missing, then encode it.</a:t>
+              <a:t>Absent and inadequate controls call for different responses.</a:t>
             </a:r>
           </a:p>
         </p:txBody>
@@ -17744,7 +17729,7 @@
         <p:spPr>
           <a:xfrm>
             <a:off x="2194560" y="1892807"/>
-            <a:ext cx="0" cy="274320"/>
+            <a:ext cx="0" cy="182880"/>
           </a:xfrm>
           <a:prstGeom prst="line">
             <a:avLst/>
@@ -17779,8 +17764,8 @@
         </p:nvCxnSpPr>
         <p:spPr>
           <a:xfrm>
-            <a:off x="2194560" y="2734056"/>
-            <a:ext cx="0" cy="274319"/>
+            <a:off x="2194560" y="2642616"/>
+            <a:ext cx="0" cy="182880"/>
           </a:xfrm>
           <a:prstGeom prst="line">
             <a:avLst/>
@@ -17815,8 +17800,8 @@
         </p:nvCxnSpPr>
         <p:spPr>
           <a:xfrm>
-            <a:off x="2194560" y="3575304"/>
-            <a:ext cx="0" cy="274319"/>
+            <a:off x="2194560" y="3392424"/>
+            <a:ext cx="0" cy="182880"/>
           </a:xfrm>
           <a:prstGeom prst="line">
             <a:avLst/>
@@ -17851,8 +17836,8 @@
         </p:nvCxnSpPr>
         <p:spPr>
           <a:xfrm>
-            <a:off x="2194560" y="4416552"/>
-            <a:ext cx="0" cy="274319"/>
+            <a:off x="2194560" y="4142232"/>
+            <a:ext cx="0" cy="182880"/>
           </a:xfrm>
           <a:prstGeom prst="line">
             <a:avLst/>
@@ -17909,6 +17894,51 @@
                 </a:solidFill>
               </a:rPr>
               <a:t>obligation → Requirements · representation → Modeling · evidence + evaluation → Validation · enforcement → Alignment</a:t>
+            </a:r>
+          </a:p>
+        </p:txBody>
+      </p:sp>
+      <p:sp>
+        <p:nvSpPr>
+          <p:cNvPr id="1004" name="Label"/>
+          <p:cNvSpPr txBox="1"/>
+          <p:nvPr/>
+        </p:nvSpPr>
+        <p:spPr>
+          <a:xfrm>
+            <a:off x="548640" y="4974336"/>
+            <a:ext cx="8046720" cy="384048"/>
+          </a:xfrm>
+          <a:prstGeom prst="rect">
+            <a:avLst/>
+          </a:prstGeom>
+          <a:noFill/>
+        </p:spPr>
+        <p:txBody>
+          <a:bodyPr wrap="square" lIns="27432" tIns="22860" rIns="27432" bIns="22860" anchor="t">
+            <a:spAutoFit/>
+          </a:bodyPr>
+          <a:lstStyle/>
+          <a:p>
+            <a:pPr algn="ctr"/>
+            <a:r>
+              <a:rPr sz="1200" b="1" i="0">
+                <a:solidFill>
+                  <a:srgbClr val="5C4826"/>
+                </a:solidFill>
+              </a:rPr>
+              <a:t>Diagnose the missing obligation, representation, evidence, evaluation, or enforcement.</a:t>
+            </a:r>
+          </a:p>
+          <a:p>
+            <a:pPr algn="ctr"/>
+            <a:r>
+              <a:rPr sz="1200" b="1" i="0">
+                <a:solidFill>
+                  <a:srgbClr val="5C4826"/>
+                </a:solidFill>
+              </a:rPr>
+              <a:t>Not every failure requires all five.</a:t>
             </a:r>
           </a:p>
         </p:txBody>
@@ -19368,7 +19398,12 @@
             <p:ph type="title"/>
           </p:nvPr>
         </p:nvSpPr>
-        <p:spPr/>
+        <p:spPr>
+          <a:xfrm>
+            <a:off x="277148" y="118428"/>
+            <a:ext cx="9145148" cy="638175"/>
+          </a:xfrm>
+        </p:spPr>
         <p:txBody>
           <a:bodyPr>
             <a:normAutofit fontScale="90000"/>
@@ -19376,12 +19411,12 @@
           <a:lstStyle/>
           <a:p>
             <a:r>
-              <a:rPr sz="2400" b="0" i="0">
+              <a:rPr lang="en-US" sz="2400" i="1" dirty="0">
                 <a:solidFill>
                   <a:srgbClr val="000000"/>
                 </a:solidFill>
               </a:rPr>
-              <a:t>What actually happened? July 2, 2019</a:t>
+              <a:t>Could we have anticipated this failure?</a:t>
             </a:r>
           </a:p>
         </p:txBody>
@@ -19401,9 +19436,9 @@
           <a:bodyPr/>
           <a:lstStyle/>
           <a:p>
-            <a:fld id="{8CF8A65D-8523-4C39-BD83-5C787F1FA9B3}" type="slidenum">
+            <a:fld id="{54DE72B0-FFEB-4C83-B4BD-F25961BEDFCA}" type="slidenum">
               <a:rPr lang="en-US" smtClean="0"/>
-              <a:t>10</a:t>
+              <a:t>29</a:t>
             </a:fld>
             <a:endParaRPr lang="en-US"/>
           </a:p>
@@ -19411,14 +19446,122 @@
       </p:sp>
       <p:sp>
         <p:nvSpPr>
-          <p:cNvPr id="909" name="FooterBand"/>
+          <p:cNvPr id="903" name="Card"/>
           <p:cNvSpPr/>
           <p:nvPr/>
         </p:nvSpPr>
         <p:spPr>
           <a:xfrm>
-            <a:off x="274320" y="5513831"/>
-            <a:ext cx="8595360" cy="905256"/>
+            <a:off x="2103120" y="2231136"/>
+            <a:ext cx="2194560" cy="713232"/>
+          </a:xfrm>
+          <a:prstGeom prst="rect">
+            <a:avLst/>
+          </a:prstGeom>
+          <a:solidFill>
+            <a:srgbClr val="F5F1E8"/>
+          </a:solidFill>
+          <a:ln w="12700">
+            <a:solidFill>
+              <a:srgbClr val="C9B991"/>
+            </a:solidFill>
+          </a:ln>
+          <a:effectLst/>
+        </p:spPr>
+        <p:style>
+          <a:lnRef idx="1">
+            <a:schemeClr val="accent1"/>
+          </a:lnRef>
+          <a:fillRef idx="3">
+            <a:schemeClr val="accent1"/>
+          </a:fillRef>
+          <a:effectRef idx="2">
+            <a:schemeClr val="accent1"/>
+          </a:effectRef>
+          <a:fontRef idx="minor">
+            <a:schemeClr val="lt1"/>
+          </a:fontRef>
+        </p:style>
+        <p:txBody>
+          <a:bodyPr wrap="square" lIns="27432" tIns="22860" rIns="27432" bIns="22860" rtlCol="0" anchor="ctr"/>
+          <a:lstStyle/>
+          <a:p>
+            <a:pPr algn="ctr"/>
+            <a:r>
+              <a:rPr sz="1100" b="0" i="1" dirty="0">
+                <a:solidFill>
+                  <a:srgbClr val="5C4826"/>
+                </a:solidFill>
+              </a:rPr>
+              <a:t>invalid content causes unsafe execution</a:t>
+            </a:r>
+          </a:p>
+        </p:txBody>
+      </p:sp>
+      <p:sp>
+        <p:nvSpPr>
+          <p:cNvPr id="907" name="Card"/>
+          <p:cNvSpPr/>
+          <p:nvPr/>
+        </p:nvSpPr>
+        <p:spPr>
+          <a:xfrm>
+            <a:off x="2103120" y="3008376"/>
+            <a:ext cx="2194560" cy="713232"/>
+          </a:xfrm>
+          <a:prstGeom prst="rect">
+            <a:avLst/>
+          </a:prstGeom>
+          <a:solidFill>
+            <a:srgbClr val="F5F1E8"/>
+          </a:solidFill>
+          <a:ln w="12700">
+            <a:solidFill>
+              <a:srgbClr val="C9B991"/>
+            </a:solidFill>
+          </a:ln>
+          <a:effectLst/>
+        </p:spPr>
+        <p:style>
+          <a:lnRef idx="1">
+            <a:schemeClr val="accent1"/>
+          </a:lnRef>
+          <a:fillRef idx="3">
+            <a:schemeClr val="accent1"/>
+          </a:fillRef>
+          <a:effectRef idx="2">
+            <a:schemeClr val="accent1"/>
+          </a:effectRef>
+          <a:fontRef idx="minor">
+            <a:schemeClr val="lt1"/>
+          </a:fontRef>
+        </p:style>
+        <p:txBody>
+          <a:bodyPr wrap="square" lIns="27432" tIns="22860" rIns="27432" bIns="22860" rtlCol="0" anchor="ctr"/>
+          <a:lstStyle/>
+          <a:p>
+            <a:pPr algn="ctr"/>
+            <a:r>
+              <a:rPr sz="1100" b="0" i="1">
+                <a:solidFill>
+                  <a:srgbClr val="5C4826"/>
+                </a:solidFill>
+              </a:rPr>
+              <a:t>a defect escapes testing</a:t>
+            </a:r>
+          </a:p>
+        </p:txBody>
+      </p:sp>
+      <p:sp>
+        <p:nvSpPr>
+          <p:cNvPr id="909" name="Block"/>
+          <p:cNvSpPr/>
+          <p:nvPr/>
+        </p:nvSpPr>
+        <p:spPr>
+          <a:xfrm>
+            <a:off x="365760" y="2231136"/>
+            <a:ext cx="1645920" cy="713232"/>
           </a:xfrm>
           <a:prstGeom prst="rect">
             <a:avLst/>
@@ -19451,41 +19594,31 @@
           <a:p>
             <a:pPr algn="ctr"/>
             <a:r>
-              <a:rPr sz="2000" b="1" i="0" dirty="0">
+              <a:rPr sz="1200" b="1" i="0" dirty="0">
                 <a:solidFill>
                   <a:srgbClr val="FFFFFF"/>
                 </a:solidFill>
               </a:rPr>
-              <a:t>Which failure modes did we anticipate — and which did we miss?</a:t>
-            </a:r>
-          </a:p>
-          <a:p>
-            <a:pPr algn="ctr">
-              <a:spcBef>
-                <a:spcPts val="300"/>
-              </a:spcBef>
-            </a:pPr>
-            <a:r>
-              <a:rPr sz="2000" b="1" i="0" dirty="0">
-                <a:solidFill>
-                  <a:srgbClr val="FFFFFF"/>
-                </a:solidFill>
-              </a:rPr>
-              <a:t>Configuration shipped through a faster, less-gated path than code — again.</a:t>
-            </a:r>
-          </a:p>
-        </p:txBody>
-      </p:sp>
-      <p:sp>
-        <p:nvSpPr>
-          <p:cNvPr id="920" name="Block"/>
+              <a:t>Interpret security content</a:t>
+            </a:r>
+            <a:endParaRPr lang="en-US" sz="2000" b="1" i="0" dirty="0">
+              <a:solidFill>
+                <a:srgbClr val="FFFFFF"/>
+              </a:solidFill>
+            </a:endParaRPr>
+          </a:p>
+        </p:txBody>
+      </p:sp>
+      <p:sp>
+        <p:nvSpPr>
+          <p:cNvPr id="910" name="Block"/>
           <p:cNvSpPr/>
           <p:nvPr/>
         </p:nvSpPr>
         <p:spPr>
           <a:xfrm>
-            <a:off x="548640" y="1143000"/>
-            <a:ext cx="2560320" cy="566928"/>
+            <a:off x="365760" y="3008376"/>
+            <a:ext cx="1645920" cy="713232"/>
           </a:xfrm>
           <a:prstGeom prst="rect">
             <a:avLst/>
@@ -19518,112 +19651,31 @@
           <a:p>
             <a:pPr algn="ctr"/>
             <a:r>
-              <a:rPr sz="1200" b="1" i="0">
+              <a:rPr sz="1200" b="1" i="0" dirty="0">
                 <a:solidFill>
                   <a:srgbClr val="FFFFFF"/>
                 </a:solidFill>
               </a:rPr>
-              <a:t>CLOUDFLARE</a:t>
-            </a:r>
-          </a:p>
-        </p:txBody>
-      </p:sp>
-      <p:sp>
-        <p:nvSpPr>
-          <p:cNvPr id="921" name="RowCaption"/>
+              <a:t>Validate content</a:t>
+            </a:r>
+            <a:endParaRPr lang="en-US" sz="2000" b="1" i="0" dirty="0">
+              <a:solidFill>
+                <a:srgbClr val="FFFFFF"/>
+              </a:solidFill>
+            </a:endParaRPr>
+          </a:p>
+        </p:txBody>
+      </p:sp>
+      <p:sp>
+        <p:nvSpPr>
+          <p:cNvPr id="911" name="Block"/>
           <p:cNvSpPr/>
           <p:nvPr/>
         </p:nvSpPr>
         <p:spPr>
           <a:xfrm>
-            <a:off x="3383280" y="1143000"/>
-            <a:ext cx="5212080" cy="566928"/>
-          </a:xfrm>
-          <a:prstGeom prst="rect">
-            <a:avLst/>
-          </a:prstGeom>
-          <a:noFill/>
-          <a:ln>
-            <a:noFill/>
-          </a:ln>
-          <a:effectLst/>
-        </p:spPr>
-        <p:style>
-          <a:lnRef idx="1">
-            <a:schemeClr val="accent1"/>
-          </a:lnRef>
-          <a:fillRef idx="3">
-            <a:schemeClr val="accent1"/>
-          </a:fillRef>
-          <a:effectRef idx="2">
-            <a:schemeClr val="accent1"/>
-          </a:effectRef>
-          <a:fontRef idx="minor">
-            <a:schemeClr val="lt1"/>
-          </a:fontRef>
-        </p:style>
-        <p:txBody>
-          <a:bodyPr wrap="square" lIns="27432" tIns="22860" rIns="27432" bIns="22860" rtlCol="0" anchor="ctr"/>
-          <a:lstStyle/>
-          <a:p>
-            <a:pPr algn="l"/>
-            <a:r>
-              <a:rPr sz="2000" b="0" i="0">
-                <a:solidFill>
-                  <a:srgbClr val="555960"/>
-                </a:solidFill>
-              </a:rPr>
-              <a:t>operates a global edge network; its WAF inspects customers’ web traffic for attacks</a:t>
-            </a:r>
-          </a:p>
-        </p:txBody>
-      </p:sp>
-      <p:cxnSp>
-        <p:nvCxnSpPr>
-          <p:cNvPr id="922" name="Connector 922"/>
-          <p:cNvCxnSpPr/>
-          <p:nvPr/>
-        </p:nvCxnSpPr>
-        <p:spPr>
-          <a:xfrm>
-            <a:off x="1828800" y="1709928"/>
-            <a:ext cx="0" cy="393192"/>
-          </a:xfrm>
-          <a:prstGeom prst="line">
-            <a:avLst/>
-          </a:prstGeom>
-          <a:ln w="19050">
-            <a:solidFill>
-              <a:srgbClr val="8E6F3E"/>
-            </a:solidFill>
-            <a:tailEnd type="triangle"/>
-          </a:ln>
-        </p:spPr>
-        <p:style>
-          <a:lnRef idx="2">
-            <a:schemeClr val="accent1"/>
-          </a:lnRef>
-          <a:fillRef idx="0">
-            <a:schemeClr val="accent1"/>
-          </a:fillRef>
-          <a:effectRef idx="1">
-            <a:schemeClr val="accent1"/>
-          </a:effectRef>
-          <a:fontRef idx="minor">
-            <a:schemeClr val="tx1"/>
-          </a:fontRef>
-        </p:style>
-      </p:cxnSp>
-      <p:sp>
-        <p:nvSpPr>
-          <p:cNvPr id="923" name="Block"/>
-          <p:cNvSpPr/>
-          <p:nvPr/>
-        </p:nvSpPr>
-        <p:spPr>
-          <a:xfrm>
-            <a:off x="548640" y="2103120"/>
-            <a:ext cx="2560320" cy="566928"/>
+            <a:off x="365760" y="3785615"/>
+            <a:ext cx="1645920" cy="713232"/>
           </a:xfrm>
           <a:prstGeom prst="rect">
             <a:avLst/>
@@ -19656,112 +19708,31 @@
           <a:p>
             <a:pPr algn="ctr"/>
             <a:r>
-              <a:rPr sz="1200" b="1" i="0">
+              <a:rPr sz="1200" b="1" i="0" dirty="0">
                 <a:solidFill>
                   <a:srgbClr val="FFFFFF"/>
                 </a:solidFill>
               </a:rPr>
-              <a:t>WAF MANAGED RULES</a:t>
-            </a:r>
-          </a:p>
-        </p:txBody>
-      </p:sp>
-      <p:sp>
-        <p:nvSpPr>
-          <p:cNvPr id="924" name="RowCaption"/>
+              <a:t>Distribute content</a:t>
+            </a:r>
+            <a:endParaRPr sz="2000" b="1" i="0" dirty="0">
+              <a:solidFill>
+                <a:srgbClr val="FFFFFF"/>
+              </a:solidFill>
+            </a:endParaRPr>
+          </a:p>
+        </p:txBody>
+      </p:sp>
+      <p:sp>
+        <p:nvSpPr>
+          <p:cNvPr id="912" name="Block"/>
           <p:cNvSpPr/>
           <p:nvPr/>
         </p:nvSpPr>
         <p:spPr>
           <a:xfrm>
-            <a:off x="3383280" y="2103120"/>
-            <a:ext cx="5212080" cy="566928"/>
-          </a:xfrm>
-          <a:prstGeom prst="rect">
-            <a:avLst/>
-          </a:prstGeom>
-          <a:noFill/>
-          <a:ln>
-            <a:noFill/>
-          </a:ln>
-          <a:effectLst/>
-        </p:spPr>
-        <p:style>
-          <a:lnRef idx="1">
-            <a:schemeClr val="accent1"/>
-          </a:lnRef>
-          <a:fillRef idx="3">
-            <a:schemeClr val="accent1"/>
-          </a:fillRef>
-          <a:effectRef idx="2">
-            <a:schemeClr val="accent1"/>
-          </a:effectRef>
-          <a:fontRef idx="minor">
-            <a:schemeClr val="lt1"/>
-          </a:fontRef>
-        </p:style>
-        <p:txBody>
-          <a:bodyPr wrap="square" lIns="27432" tIns="22860" rIns="27432" bIns="22860" rtlCol="0" anchor="ctr"/>
-          <a:lstStyle/>
-          <a:p>
-            <a:pPr algn="l"/>
-            <a:r>
-              <a:rPr sz="2000" b="0" i="0">
-                <a:solidFill>
-                  <a:srgbClr val="555960"/>
-                </a:solidFill>
-              </a:rPr>
-              <a:t>attack-detection patterns — often regular expressions — running on every edge server</a:t>
-            </a:r>
-          </a:p>
-        </p:txBody>
-      </p:sp>
-      <p:cxnSp>
-        <p:nvCxnSpPr>
-          <p:cNvPr id="925" name="Connector 925"/>
-          <p:cNvCxnSpPr/>
-          <p:nvPr/>
-        </p:nvCxnSpPr>
-        <p:spPr>
-          <a:xfrm>
-            <a:off x="1828800" y="2670048"/>
-            <a:ext cx="0" cy="393192"/>
-          </a:xfrm>
-          <a:prstGeom prst="line">
-            <a:avLst/>
-          </a:prstGeom>
-          <a:ln w="19050">
-            <a:solidFill>
-              <a:srgbClr val="8E6F3E"/>
-            </a:solidFill>
-            <a:tailEnd type="triangle"/>
-          </a:ln>
-        </p:spPr>
-        <p:style>
-          <a:lnRef idx="2">
-            <a:schemeClr val="accent1"/>
-          </a:lnRef>
-          <a:fillRef idx="0">
-            <a:schemeClr val="accent1"/>
-          </a:fillRef>
-          <a:effectRef idx="1">
-            <a:schemeClr val="accent1"/>
-          </a:effectRef>
-          <a:fontRef idx="minor">
-            <a:schemeClr val="tx1"/>
-          </a:fontRef>
-        </p:style>
-      </p:cxnSp>
-      <p:sp>
-        <p:nvSpPr>
-          <p:cNvPr id="926" name="Block"/>
-          <p:cNvSpPr/>
-          <p:nvPr/>
-        </p:nvSpPr>
-        <p:spPr>
-          <a:xfrm>
-            <a:off x="548640" y="3063240"/>
-            <a:ext cx="2560320" cy="566928"/>
+            <a:off x="365760" y="4562856"/>
+            <a:ext cx="1645920" cy="713232"/>
           </a:xfrm>
           <a:prstGeom prst="rect">
             <a:avLst/>
@@ -19799,21 +19770,21 @@
                   <a:srgbClr val="FFFFFF"/>
                 </a:solidFill>
               </a:rPr>
-              <a:t>THE DEFECTIVE RULE</a:t>
-            </a:r>
-          </a:p>
-        </p:txBody>
-      </p:sp>
-      <p:sp>
-        <p:nvSpPr>
-          <p:cNvPr id="927" name="RowCaption"/>
+              <a:t>Maintain service</a:t>
+            </a:r>
+          </a:p>
+        </p:txBody>
+      </p:sp>
+      <p:sp>
+        <p:nvSpPr>
+          <p:cNvPr id="913" name="FooterBand"/>
           <p:cNvSpPr/>
           <p:nvPr/>
         </p:nvSpPr>
         <p:spPr>
           <a:xfrm>
-            <a:off x="3383280" y="3063240"/>
-            <a:ext cx="5212080" cy="566928"/>
+            <a:off x="274320" y="5852160"/>
+            <a:ext cx="8595360" cy="566928"/>
           </a:xfrm>
           <a:prstGeom prst="rect">
             <a:avLst/>
@@ -19842,73 +19813,93 @@
           <a:bodyPr wrap="square" lIns="27432" tIns="22860" rIns="27432" bIns="22860" rtlCol="0" anchor="ctr"/>
           <a:lstStyle/>
           <a:p>
-            <a:pPr algn="l"/>
-            <a:r>
-              <a:rPr sz="2000" b="0" i="0">
-                <a:solidFill>
-                  <a:srgbClr val="555960"/>
-                </a:solidFill>
-              </a:rPr>
-              <a:t>.*(?:.*=.*) — matching work grows explosively with input length (backtracking)</a:t>
-            </a:r>
-          </a:p>
-        </p:txBody>
-      </p:sp>
-      <p:cxnSp>
-        <p:nvCxnSpPr>
-          <p:cNvPr id="928" name="Connector 928"/>
-          <p:cNvCxnSpPr/>
-          <p:nvPr/>
-        </p:nvCxnSpPr>
-        <p:spPr>
-          <a:xfrm>
-            <a:off x="1828800" y="3630168"/>
-            <a:ext cx="0" cy="393192"/>
-          </a:xfrm>
-          <a:prstGeom prst="line">
-            <a:avLst/>
-          </a:prstGeom>
-          <a:ln w="19050">
+            <a:pPr algn="ctr"/>
+            <a:r>
+              <a:rPr lang="en-US" sz="2000" b="1" i="0" dirty="0">
+                <a:solidFill>
+                  <a:schemeClr val="bg1"/>
+                </a:solidFill>
+              </a:rPr>
+              <a:t>Which of these failure modes could occur in another security product?</a:t>
+            </a:r>
+          </a:p>
+        </p:txBody>
+      </p:sp>
+      <p:sp>
+        <p:nvSpPr>
+          <p:cNvPr id="2" name="Card"/>
+          <p:cNvSpPr/>
+          <p:nvPr/>
+        </p:nvSpPr>
+        <p:spPr>
+          <a:xfrm>
+            <a:off x="2103120" y="3785615"/>
+            <a:ext cx="2194560" cy="713232"/>
+          </a:xfrm>
+          <a:prstGeom prst="rect">
+            <a:avLst/>
+          </a:prstGeom>
+          <a:solidFill>
+            <a:srgbClr val="F5F1E8"/>
+          </a:solidFill>
+          <a:ln w="12700">
             <a:solidFill>
-              <a:srgbClr val="8E6F3E"/>
+              <a:srgbClr val="C9B991"/>
             </a:solidFill>
-            <a:tailEnd type="triangle"/>
-          </a:ln>
-        </p:spPr>
-        <p:style>
-          <a:lnRef idx="2">
-            <a:schemeClr val="accent1"/>
-          </a:lnRef>
-          <a:fillRef idx="0">
-            <a:schemeClr val="accent1"/>
-          </a:fillRef>
-          <a:effectRef idx="1">
-            <a:schemeClr val="accent1"/>
-          </a:effectRef>
-          <a:fontRef idx="minor">
-            <a:schemeClr val="tx1"/>
-          </a:fontRef>
-        </p:style>
-      </p:cxnSp>
-      <p:sp>
-        <p:nvSpPr>
-          <p:cNvPr id="929" name="Block"/>
+          </a:ln>
+          <a:effectLst/>
+        </p:spPr>
+        <p:style>
+          <a:lnRef idx="1">
+            <a:schemeClr val="accent1"/>
+          </a:lnRef>
+          <a:fillRef idx="3">
+            <a:schemeClr val="accent1"/>
+          </a:fillRef>
+          <a:effectRef idx="2">
+            <a:schemeClr val="accent1"/>
+          </a:effectRef>
+          <a:fontRef idx="minor">
+            <a:schemeClr val="lt1"/>
+          </a:fontRef>
+        </p:style>
+        <p:txBody>
+          <a:bodyPr wrap="square" lIns="27432" tIns="22860" rIns="27432" bIns="22860" rtlCol="0" anchor="ctr"/>
+          <a:lstStyle/>
+          <a:p>
+            <a:pPr algn="ctr"/>
+            <a:r>
+              <a:rPr lang="en-US" sz="1100" b="0" i="1" dirty="0">
+                <a:solidFill>
+                  <a:srgbClr val="5C4826"/>
+                </a:solidFill>
+              </a:rPr>
+              <a:t>a defective update reaches all endpoints</a:t>
+            </a:r>
+          </a:p>
+        </p:txBody>
+      </p:sp>
+      <p:sp>
+        <p:nvSpPr>
+          <p:cNvPr id="4" name="Card"/>
           <p:cNvSpPr/>
           <p:nvPr/>
         </p:nvSpPr>
         <p:spPr>
           <a:xfrm>
-            <a:off x="548640" y="4023360"/>
-            <a:ext cx="2560320" cy="566928"/>
+            <a:off x="2103120" y="4562856"/>
+            <a:ext cx="2194560" cy="713232"/>
           </a:xfrm>
           <a:prstGeom prst="rect">
             <a:avLst/>
           </a:prstGeom>
           <a:solidFill>
-            <a:srgbClr val="9A3F12"/>
+            <a:srgbClr val="F5F1E8"/>
           </a:solidFill>
-          <a:ln>
-            <a:noFill/>
+          <a:ln w="12700">
+            <a:solidFill>
+              <a:srgbClr val="C9B991"/>
+            </a:solidFill>
           </a:ln>
           <a:effectLst/>
         </p:spPr>
@@ -19932,26 +19923,31 @@
           <a:p>
             <a:pPr algn="ctr"/>
             <a:r>
-              <a:rPr sz="1200" b="1" i="0">
-                <a:solidFill>
-                  <a:srgbClr val="FFFFFF"/>
-                </a:solidFill>
-              </a:rPr>
-              <a:t>27 MINUTES</a:t>
-            </a:r>
-          </a:p>
-        </p:txBody>
-      </p:sp>
-      <p:sp>
-        <p:nvSpPr>
-          <p:cNvPr id="930" name="RowCaption"/>
+              <a:rPr lang="en-US" sz="1100" b="0" i="1" dirty="0">
+                <a:solidFill>
+                  <a:srgbClr val="5C4826"/>
+                </a:solidFill>
+              </a:rPr>
+              <a:t>endpoint failure disables critical services</a:t>
+            </a:r>
+            <a:endParaRPr sz="2000" b="0" i="1" dirty="0">
+              <a:solidFill>
+                <a:srgbClr val="5C4826"/>
+              </a:solidFill>
+            </a:endParaRPr>
+          </a:p>
+        </p:txBody>
+      </p:sp>
+      <p:sp>
+        <p:nvSpPr>
+          <p:cNvPr id="5" name="ColumnHeading"/>
           <p:cNvSpPr/>
           <p:nvPr/>
         </p:nvSpPr>
         <p:spPr>
           <a:xfrm>
-            <a:off x="3383280" y="4023360"/>
-            <a:ext cx="5212080" cy="566928"/>
+            <a:off x="365760" y="1883664"/>
+            <a:ext cx="1645920" cy="274320"/>
           </a:xfrm>
           <a:prstGeom prst="rect">
             <a:avLst/>
@@ -19980,18 +19976,18 @@
           <a:bodyPr wrap="square" lIns="27432" tIns="22860" rIns="27432" bIns="22860" rtlCol="0" anchor="ctr"/>
           <a:lstStyle/>
           <a:p>
-            <a:pPr algn="l"/>
-            <a:r>
-              <a:rPr sz="2000" b="1" i="0" dirty="0">
-                <a:solidFill>
-                  <a:srgbClr val="555960"/>
-                </a:solidFill>
-              </a:rPr>
-              <a:t>CPU exhaustion from 13:42 UTC; rule killed globally 14:07; traffic normal 14:09</a:t>
-            </a:r>
-            <a:endParaRPr sz="2000" b="1" i="0" dirty="0">
+            <a:pPr algn="ctr"/>
+            <a:r>
+              <a:rPr lang="en-US" sz="1200" b="1" i="0" dirty="0">
+                <a:solidFill>
+                  <a:schemeClr val="bg1"/>
+                </a:solidFill>
+              </a:rPr>
+              <a:t>FUNCTION</a:t>
+            </a:r>
+            <a:endParaRPr sz="2800" b="1" i="0" dirty="0">
               <a:solidFill>
-                <a:srgbClr val="555960"/>
+                <a:schemeClr val="bg1"/>
               </a:solidFill>
             </a:endParaRPr>
           </a:p>
@@ -19999,14 +19995,69 @@
       </p:sp>
       <p:sp>
         <p:nvSpPr>
+          <p:cNvPr id="6" name="ColumnHeading"/>
+          <p:cNvSpPr/>
+          <p:nvPr/>
+        </p:nvSpPr>
+        <p:spPr>
+          <a:xfrm>
+            <a:off x="2103120" y="1883664"/>
+            <a:ext cx="2194560" cy="274320"/>
+          </a:xfrm>
+          <a:prstGeom prst="rect">
+            <a:avLst/>
+          </a:prstGeom>
+          <a:noFill/>
+          <a:ln>
+            <a:noFill/>
+          </a:ln>
+          <a:effectLst/>
+        </p:spPr>
+        <p:style>
+          <a:lnRef idx="1">
+            <a:schemeClr val="accent1"/>
+          </a:lnRef>
+          <a:fillRef idx="3">
+            <a:schemeClr val="accent1"/>
+          </a:fillRef>
+          <a:effectRef idx="2">
+            <a:schemeClr val="accent1"/>
+          </a:effectRef>
+          <a:fontRef idx="minor">
+            <a:schemeClr val="lt1"/>
+          </a:fontRef>
+        </p:style>
+        <p:txBody>
+          <a:bodyPr wrap="square" lIns="27432" tIns="22860" rIns="27432" bIns="22860" rtlCol="0" anchor="ctr"/>
+          <a:lstStyle/>
+          <a:p>
+            <a:pPr algn="ctr"/>
+            <a:r>
+              <a:rPr lang="en-US" sz="1200" b="1" i="0" dirty="0">
+                <a:solidFill>
+                  <a:schemeClr val="bg1"/>
+                </a:solidFill>
+              </a:rPr>
+              <a:t>FAILURE MODE</a:t>
+            </a:r>
+            <a:endParaRPr sz="2800" b="1" i="0" dirty="0">
+              <a:solidFill>
+                <a:schemeClr val="bg1"/>
+              </a:solidFill>
+            </a:endParaRPr>
+          </a:p>
+        </p:txBody>
+      </p:sp>
+      <p:sp>
+        <p:nvSpPr>
           <p:cNvPr id="915" name="Label"/>
           <p:cNvSpPr txBox="1"/>
           <p:nvPr/>
         </p:nvSpPr>
         <p:spPr>
           <a:xfrm>
-            <a:off x="548640" y="4599432"/>
-            <a:ext cx="2560320" cy="274320"/>
+            <a:off x="548640" y="841248"/>
+            <a:ext cx="8046720" cy="566928"/>
           </a:xfrm>
           <a:prstGeom prst="rect">
             <a:avLst/>
@@ -20021,33 +20072,42 @@
           <a:p>
             <a:pPr algn="ctr"/>
             <a:r>
-              <a:rPr sz="1200" b="1" i="0">
+              <a:rPr sz="1200" b="1" i="1">
                 <a:solidFill>
                   <a:srgbClr val="5C4826"/>
                 </a:solidFill>
               </a:rPr>
-              <a:t>‘x=x’  →  23 steps</a:t>
-            </a:r>
-          </a:p>
-        </p:txBody>
-      </p:sp>
-      <p:sp>
-        <p:nvSpPr>
-          <p:cNvPr id="910" name="Block"/>
+              <a:t>The three models explain a failure that has happened. FMEA — Failure Mode and Effects Analysis —</a:t>
+            </a:r>
+          </a:p>
+          <a:p>
+            <a:pPr algn="ctr"/>
+            <a:r>
+              <a:rPr sz="1200" b="1" i="1">
+                <a:solidFill>
+                  <a:srgbClr val="5C4826"/>
+                </a:solidFill>
+              </a:rPr>
+              <a:t>searches for failures that have not happened yet. The procedure:</a:t>
+            </a:r>
+          </a:p>
+        </p:txBody>
+      </p:sp>
+      <p:sp>
+        <p:nvSpPr>
+          <p:cNvPr id="1000" name="ColumnHeading"/>
           <p:cNvSpPr/>
           <p:nvPr/>
         </p:nvSpPr>
         <p:spPr>
           <a:xfrm>
-            <a:off x="3291840" y="4626864"/>
-            <a:ext cx="237744" cy="182880"/>
-          </a:xfrm>
-          <a:prstGeom prst="rect">
-            <a:avLst/>
-          </a:prstGeom>
-          <a:solidFill>
-            <a:srgbClr val="8E6F3E"/>
-          </a:solidFill>
+            <a:off x="4389120" y="1883664"/>
+            <a:ext cx="1828800" cy="274320"/>
+          </a:xfrm>
+          <a:prstGeom prst="rect">
+            <a:avLst/>
+          </a:prstGeom>
+          <a:noFill/>
           <a:ln>
             <a:noFill/>
           </a:ln>
@@ -20073,26 +20133,518 @@
           <a:p>
             <a:pPr algn="ctr"/>
             <a:r>
-              <a:rPr sz="1200" b="1" i="0">
-                <a:solidFill>
-                  <a:srgbClr val="FFFFFF"/>
-                </a:solidFill>
-              </a:rPr>
-              <a:t/>
-            </a:r>
-          </a:p>
-        </p:txBody>
-      </p:sp>
-      <p:sp>
-        <p:nvSpPr>
-          <p:cNvPr id="1000" name="Label"/>
+              <a:rPr lang="en-US" sz="1200" b="1" i="0" dirty="0">
+                <a:solidFill>
+                  <a:schemeClr val="bg1"/>
+                </a:solidFill>
+              </a:rPr>
+              <a:t>EFFECT</a:t>
+            </a:r>
+            <a:endParaRPr sz="2800" b="1" i="0" dirty="0">
+              <a:solidFill>
+                <a:schemeClr val="bg1"/>
+              </a:solidFill>
+            </a:endParaRPr>
+          </a:p>
+        </p:txBody>
+      </p:sp>
+      <p:sp>
+        <p:nvSpPr>
+          <p:cNvPr id="1001" name="ColumnHeading"/>
+          <p:cNvSpPr/>
+          <p:nvPr/>
+        </p:nvSpPr>
+        <p:spPr>
+          <a:xfrm>
+            <a:off x="6309360" y="1883664"/>
+            <a:ext cx="2286000" cy="274320"/>
+          </a:xfrm>
+          <a:prstGeom prst="rect">
+            <a:avLst/>
+          </a:prstGeom>
+          <a:noFill/>
+          <a:ln>
+            <a:noFill/>
+          </a:ln>
+          <a:effectLst/>
+        </p:spPr>
+        <p:style>
+          <a:lnRef idx="1">
+            <a:schemeClr val="accent1"/>
+          </a:lnRef>
+          <a:fillRef idx="3">
+            <a:schemeClr val="accent1"/>
+          </a:fillRef>
+          <a:effectRef idx="2">
+            <a:schemeClr val="accent1"/>
+          </a:effectRef>
+          <a:fontRef idx="minor">
+            <a:schemeClr val="lt1"/>
+          </a:fontRef>
+        </p:style>
+        <p:txBody>
+          <a:bodyPr wrap="square" lIns="27432" tIns="22860" rIns="27432" bIns="22860" rtlCol="0" anchor="ctr"/>
+          <a:lstStyle/>
+          <a:p>
+            <a:pPr algn="ctr"/>
+            <a:r>
+              <a:rPr lang="en-US" sz="1200" b="1" i="0" dirty="0">
+                <a:solidFill>
+                  <a:schemeClr val="bg1"/>
+                </a:solidFill>
+              </a:rPr>
+              <a:t>CANDIDATE CONTROL</a:t>
+            </a:r>
+            <a:endParaRPr sz="2800" b="1" i="0" dirty="0">
+              <a:solidFill>
+                <a:schemeClr val="bg1"/>
+              </a:solidFill>
+            </a:endParaRPr>
+          </a:p>
+        </p:txBody>
+      </p:sp>
+      <p:sp>
+        <p:nvSpPr>
+          <p:cNvPr id="1002" name="Card"/>
+          <p:cNvSpPr/>
+          <p:nvPr/>
+        </p:nvSpPr>
+        <p:spPr>
+          <a:xfrm>
+            <a:off x="4389120" y="2231136"/>
+            <a:ext cx="1828800" cy="713232"/>
+          </a:xfrm>
+          <a:prstGeom prst="rect">
+            <a:avLst/>
+          </a:prstGeom>
+          <a:solidFill>
+            <a:srgbClr val="F5F1E8"/>
+          </a:solidFill>
+          <a:ln w="12700">
+            <a:solidFill>
+              <a:srgbClr val="C9B991"/>
+            </a:solidFill>
+          </a:ln>
+          <a:effectLst/>
+        </p:spPr>
+        <p:style>
+          <a:lnRef idx="1">
+            <a:schemeClr val="accent1"/>
+          </a:lnRef>
+          <a:fillRef idx="3">
+            <a:schemeClr val="accent1"/>
+          </a:fillRef>
+          <a:effectRef idx="2">
+            <a:schemeClr val="accent1"/>
+          </a:effectRef>
+          <a:fontRef idx="minor">
+            <a:schemeClr val="lt1"/>
+          </a:fontRef>
+        </p:style>
+        <p:txBody>
+          <a:bodyPr wrap="square" lIns="27432" tIns="22860" rIns="27432" bIns="22860" rtlCol="0" anchor="ctr"/>
+          <a:lstStyle/>
+          <a:p>
+            <a:pPr algn="ctr"/>
+            <a:r>
+              <a:rPr sz="1100" b="0" i="1" dirty="0">
+                <a:solidFill>
+                  <a:srgbClr val="5C4826"/>
+                </a:solidFill>
+              </a:rPr>
+              <a:t>endpoint failure</a:t>
+            </a:r>
+          </a:p>
+        </p:txBody>
+      </p:sp>
+      <p:sp>
+        <p:nvSpPr>
+          <p:cNvPr id="1003" name="Card"/>
+          <p:cNvSpPr/>
+          <p:nvPr/>
+        </p:nvSpPr>
+        <p:spPr>
+          <a:xfrm>
+            <a:off x="6309360" y="2231136"/>
+            <a:ext cx="2286000" cy="713232"/>
+          </a:xfrm>
+          <a:prstGeom prst="rect">
+            <a:avLst/>
+          </a:prstGeom>
+          <a:solidFill>
+            <a:srgbClr val="F5F1E8"/>
+          </a:solidFill>
+          <a:ln w="12700">
+            <a:solidFill>
+              <a:srgbClr val="C9B991"/>
+            </a:solidFill>
+          </a:ln>
+          <a:effectLst/>
+        </p:spPr>
+        <p:style>
+          <a:lnRef idx="1">
+            <a:schemeClr val="accent1"/>
+          </a:lnRef>
+          <a:fillRef idx="3">
+            <a:schemeClr val="accent1"/>
+          </a:fillRef>
+          <a:effectRef idx="2">
+            <a:schemeClr val="accent1"/>
+          </a:effectRef>
+          <a:fontRef idx="minor">
+            <a:schemeClr val="lt1"/>
+          </a:fontRef>
+        </p:style>
+        <p:txBody>
+          <a:bodyPr wrap="square" lIns="27432" tIns="22860" rIns="27432" bIns="22860" rtlCol="0" anchor="ctr"/>
+          <a:lstStyle/>
+          <a:p>
+            <a:pPr algn="ctr"/>
+            <a:r>
+              <a:rPr sz="1100" b="0" i="1" dirty="0">
+                <a:solidFill>
+                  <a:srgbClr val="5C4826"/>
+                </a:solidFill>
+              </a:rPr>
+              <a:t>contract validation</a:t>
+            </a:r>
+          </a:p>
+        </p:txBody>
+      </p:sp>
+      <p:sp>
+        <p:nvSpPr>
+          <p:cNvPr id="1004" name="Card"/>
+          <p:cNvSpPr/>
+          <p:nvPr/>
+        </p:nvSpPr>
+        <p:spPr>
+          <a:xfrm>
+            <a:off x="4389120" y="3008376"/>
+            <a:ext cx="1828800" cy="713232"/>
+          </a:xfrm>
+          <a:prstGeom prst="rect">
+            <a:avLst/>
+          </a:prstGeom>
+          <a:solidFill>
+            <a:srgbClr val="F5F1E8"/>
+          </a:solidFill>
+          <a:ln w="12700">
+            <a:solidFill>
+              <a:srgbClr val="C9B991"/>
+            </a:solidFill>
+          </a:ln>
+          <a:effectLst/>
+        </p:spPr>
+        <p:style>
+          <a:lnRef idx="1">
+            <a:schemeClr val="accent1"/>
+          </a:lnRef>
+          <a:fillRef idx="3">
+            <a:schemeClr val="accent1"/>
+          </a:fillRef>
+          <a:effectRef idx="2">
+            <a:schemeClr val="accent1"/>
+          </a:effectRef>
+          <a:fontRef idx="minor">
+            <a:schemeClr val="lt1"/>
+          </a:fontRef>
+        </p:style>
+        <p:txBody>
+          <a:bodyPr wrap="square" lIns="27432" tIns="22860" rIns="27432" bIns="22860" rtlCol="0" anchor="ctr"/>
+          <a:lstStyle/>
+          <a:p>
+            <a:pPr algn="ctr"/>
+            <a:r>
+              <a:rPr sz="1100" b="0" i="1" dirty="0">
+                <a:solidFill>
+                  <a:srgbClr val="5C4826"/>
+                </a:solidFill>
+              </a:rPr>
+              <a:t>defective update released</a:t>
+            </a:r>
+          </a:p>
+        </p:txBody>
+      </p:sp>
+      <p:sp>
+        <p:nvSpPr>
+          <p:cNvPr id="1005" name="Card"/>
+          <p:cNvSpPr/>
+          <p:nvPr/>
+        </p:nvSpPr>
+        <p:spPr>
+          <a:xfrm>
+            <a:off x="6309360" y="3008376"/>
+            <a:ext cx="2286000" cy="713232"/>
+          </a:xfrm>
+          <a:prstGeom prst="rect">
+            <a:avLst/>
+          </a:prstGeom>
+          <a:solidFill>
+            <a:srgbClr val="F5F1E8"/>
+          </a:solidFill>
+          <a:ln w="12700">
+            <a:solidFill>
+              <a:srgbClr val="C9B991"/>
+            </a:solidFill>
+          </a:ln>
+          <a:effectLst/>
+        </p:spPr>
+        <p:style>
+          <a:lnRef idx="1">
+            <a:schemeClr val="accent1"/>
+          </a:lnRef>
+          <a:fillRef idx="3">
+            <a:schemeClr val="accent1"/>
+          </a:fillRef>
+          <a:effectRef idx="2">
+            <a:schemeClr val="accent1"/>
+          </a:effectRef>
+          <a:fontRef idx="minor">
+            <a:schemeClr val="lt1"/>
+          </a:fontRef>
+        </p:style>
+        <p:txBody>
+          <a:bodyPr wrap="square" lIns="27432" tIns="22860" rIns="27432" bIns="22860" rtlCol="0" anchor="ctr"/>
+          <a:lstStyle/>
+          <a:p>
+            <a:pPr algn="ctr"/>
+            <a:r>
+              <a:rPr sz="1100" b="0" i="1" dirty="0">
+                <a:solidFill>
+                  <a:srgbClr val="5C4826"/>
+                </a:solidFill>
+              </a:rPr>
+              <a:t>independent compatibility tests</a:t>
+            </a:r>
+          </a:p>
+        </p:txBody>
+      </p:sp>
+      <p:sp>
+        <p:nvSpPr>
+          <p:cNvPr id="1006" name="Card"/>
+          <p:cNvSpPr/>
+          <p:nvPr/>
+        </p:nvSpPr>
+        <p:spPr>
+          <a:xfrm>
+            <a:off x="4389120" y="3785615"/>
+            <a:ext cx="1828800" cy="713232"/>
+          </a:xfrm>
+          <a:prstGeom prst="rect">
+            <a:avLst/>
+          </a:prstGeom>
+          <a:solidFill>
+            <a:srgbClr val="F5F1E8"/>
+          </a:solidFill>
+          <a:ln w="12700">
+            <a:solidFill>
+              <a:srgbClr val="C9B991"/>
+            </a:solidFill>
+          </a:ln>
+          <a:effectLst/>
+        </p:spPr>
+        <p:style>
+          <a:lnRef idx="1">
+            <a:schemeClr val="accent1"/>
+          </a:lnRef>
+          <a:fillRef idx="3">
+            <a:schemeClr val="accent1"/>
+          </a:fillRef>
+          <a:effectRef idx="2">
+            <a:schemeClr val="accent1"/>
+          </a:effectRef>
+          <a:fontRef idx="minor">
+            <a:schemeClr val="lt1"/>
+          </a:fontRef>
+        </p:style>
+        <p:txBody>
+          <a:bodyPr wrap="square" lIns="27432" tIns="22860" rIns="27432" bIns="22860" rtlCol="0" anchor="ctr"/>
+          <a:lstStyle/>
+          <a:p>
+            <a:pPr algn="ctr"/>
+            <a:r>
+              <a:rPr sz="1100" b="0" i="1" dirty="0">
+                <a:solidFill>
+                  <a:srgbClr val="5C4826"/>
+                </a:solidFill>
+              </a:rPr>
+              <a:t>widespread outage</a:t>
+            </a:r>
+          </a:p>
+        </p:txBody>
+      </p:sp>
+      <p:sp>
+        <p:nvSpPr>
+          <p:cNvPr id="1007" name="Card"/>
+          <p:cNvSpPr/>
+          <p:nvPr/>
+        </p:nvSpPr>
+        <p:spPr>
+          <a:xfrm>
+            <a:off x="6309360" y="3785615"/>
+            <a:ext cx="2286000" cy="713232"/>
+          </a:xfrm>
+          <a:prstGeom prst="rect">
+            <a:avLst/>
+          </a:prstGeom>
+          <a:solidFill>
+            <a:srgbClr val="F5F1E8"/>
+          </a:solidFill>
+          <a:ln w="12700">
+            <a:solidFill>
+              <a:srgbClr val="C9B991"/>
+            </a:solidFill>
+          </a:ln>
+          <a:effectLst/>
+        </p:spPr>
+        <p:style>
+          <a:lnRef idx="1">
+            <a:schemeClr val="accent1"/>
+          </a:lnRef>
+          <a:fillRef idx="3">
+            <a:schemeClr val="accent1"/>
+          </a:fillRef>
+          <a:effectRef idx="2">
+            <a:schemeClr val="accent1"/>
+          </a:effectRef>
+          <a:fontRef idx="minor">
+            <a:schemeClr val="lt1"/>
+          </a:fontRef>
+        </p:style>
+        <p:txBody>
+          <a:bodyPr wrap="square" lIns="27432" tIns="22860" rIns="27432" bIns="22860" rtlCol="0" anchor="ctr"/>
+          <a:lstStyle/>
+          <a:p>
+            <a:pPr algn="ctr"/>
+            <a:r>
+              <a:rPr sz="1100" b="0" i="1" dirty="0">
+                <a:solidFill>
+                  <a:srgbClr val="5C4826"/>
+                </a:solidFill>
+              </a:rPr>
+              <a:t>staged rollout + demonstrated halt</a:t>
+            </a:r>
+          </a:p>
+        </p:txBody>
+      </p:sp>
+      <p:sp>
+        <p:nvSpPr>
+          <p:cNvPr id="1008" name="Card"/>
+          <p:cNvSpPr/>
+          <p:nvPr/>
+        </p:nvSpPr>
+        <p:spPr>
+          <a:xfrm>
+            <a:off x="4389120" y="4562856"/>
+            <a:ext cx="1828800" cy="713232"/>
+          </a:xfrm>
+          <a:prstGeom prst="rect">
+            <a:avLst/>
+          </a:prstGeom>
+          <a:solidFill>
+            <a:srgbClr val="F5F1E8"/>
+          </a:solidFill>
+          <a:ln w="12700">
+            <a:solidFill>
+              <a:srgbClr val="C9B991"/>
+            </a:solidFill>
+          </a:ln>
+          <a:effectLst/>
+        </p:spPr>
+        <p:style>
+          <a:lnRef idx="1">
+            <a:schemeClr val="accent1"/>
+          </a:lnRef>
+          <a:fillRef idx="3">
+            <a:schemeClr val="accent1"/>
+          </a:fillRef>
+          <a:effectRef idx="2">
+            <a:schemeClr val="accent1"/>
+          </a:effectRef>
+          <a:fontRef idx="minor">
+            <a:schemeClr val="lt1"/>
+          </a:fontRef>
+        </p:style>
+        <p:txBody>
+          <a:bodyPr wrap="square" lIns="27432" tIns="22860" rIns="27432" bIns="22860" rtlCol="0" anchor="ctr"/>
+          <a:lstStyle/>
+          <a:p>
+            <a:pPr algn="ctr"/>
+            <a:r>
+              <a:rPr sz="1100" b="0" i="1" dirty="0">
+                <a:solidFill>
+                  <a:srgbClr val="5C4826"/>
+                </a:solidFill>
+              </a:rPr>
+              <a:t>service disruption</a:t>
+            </a:r>
+          </a:p>
+        </p:txBody>
+      </p:sp>
+      <p:sp>
+        <p:nvSpPr>
+          <p:cNvPr id="1009" name="Card"/>
+          <p:cNvSpPr/>
+          <p:nvPr/>
+        </p:nvSpPr>
+        <p:spPr>
+          <a:xfrm>
+            <a:off x="6309360" y="4562856"/>
+            <a:ext cx="2286000" cy="713232"/>
+          </a:xfrm>
+          <a:prstGeom prst="rect">
+            <a:avLst/>
+          </a:prstGeom>
+          <a:solidFill>
+            <a:srgbClr val="F5F1E8"/>
+          </a:solidFill>
+          <a:ln w="12700">
+            <a:solidFill>
+              <a:srgbClr val="C9B991"/>
+            </a:solidFill>
+          </a:ln>
+          <a:effectLst/>
+        </p:spPr>
+        <p:style>
+          <a:lnRef idx="1">
+            <a:schemeClr val="accent1"/>
+          </a:lnRef>
+          <a:fillRef idx="3">
+            <a:schemeClr val="accent1"/>
+          </a:fillRef>
+          <a:effectRef idx="2">
+            <a:schemeClr val="accent1"/>
+          </a:effectRef>
+          <a:fontRef idx="minor">
+            <a:schemeClr val="lt1"/>
+          </a:fontRef>
+        </p:style>
+        <p:txBody>
+          <a:bodyPr wrap="square" lIns="27432" tIns="22860" rIns="27432" bIns="22860" rtlCol="0" anchor="ctr"/>
+          <a:lstStyle/>
+          <a:p>
+            <a:pPr algn="ctr"/>
+            <a:r>
+              <a:rPr sz="1100" b="0" i="1" dirty="0">
+                <a:solidFill>
+                  <a:srgbClr val="5C4826"/>
+                </a:solidFill>
+              </a:rPr>
+              <a:t>independent service paths</a:t>
+            </a:r>
+          </a:p>
+        </p:txBody>
+      </p:sp>
+      <p:sp>
+        <p:nvSpPr>
+          <p:cNvPr id="1010" name="Label"/>
           <p:cNvSpPr txBox="1"/>
           <p:nvPr/>
         </p:nvSpPr>
         <p:spPr>
           <a:xfrm>
-            <a:off x="548640" y="4919472"/>
-            <a:ext cx="2560320" cy="274320"/>
+            <a:off x="548640" y="5358384"/>
+            <a:ext cx="8046720" cy="365760"/>
           </a:xfrm>
           <a:prstGeom prst="rect">
             <a:avLst/>
@@ -20107,78 +20659,26 @@
           <a:p>
             <a:pPr algn="ctr"/>
             <a:r>
-              <a:rPr sz="1200" b="1" i="0">
+              <a:rPr sz="1200" b="1" i="1">
                 <a:solidFill>
                   <a:srgbClr val="5C4826"/>
                 </a:solidFill>
               </a:rPr>
-              <a:t>‘x=’ + twenty ‘x’s  →  555 steps</a:t>
-            </a:r>
-          </a:p>
-        </p:txBody>
-      </p:sp>
-      <p:sp>
-        <p:nvSpPr>
-          <p:cNvPr id="1001" name="Block"/>
-          <p:cNvSpPr/>
-          <p:nvPr/>
-        </p:nvSpPr>
-        <p:spPr>
-          <a:xfrm>
-            <a:off x="3291840" y="4946904"/>
-            <a:ext cx="5486400" cy="182880"/>
-          </a:xfrm>
-          <a:prstGeom prst="rect">
-            <a:avLst/>
-          </a:prstGeom>
-          <a:solidFill>
-            <a:srgbClr val="B3261E"/>
-          </a:solidFill>
-          <a:ln>
-            <a:noFill/>
-          </a:ln>
-          <a:effectLst/>
-        </p:spPr>
-        <p:style>
-          <a:lnRef idx="1">
-            <a:schemeClr val="accent1"/>
-          </a:lnRef>
-          <a:fillRef idx="3">
-            <a:schemeClr val="accent1"/>
-          </a:fillRef>
-          <a:effectRef idx="2">
-            <a:schemeClr val="accent1"/>
-          </a:effectRef>
-          <a:fontRef idx="minor">
-            <a:schemeClr val="lt1"/>
-          </a:fontRef>
-        </p:style>
-        <p:txBody>
-          <a:bodyPr wrap="square" lIns="27432" tIns="22860" rIns="27432" bIns="22860" rtlCol="0" anchor="ctr"/>
-          <a:lstStyle/>
-          <a:p>
-            <a:pPr algn="ctr"/>
-            <a:r>
-              <a:rPr sz="1200" b="1" i="0">
-                <a:solidFill>
-                  <a:srgbClr val="FFFFFF"/>
-                </a:solidFill>
-              </a:rPr>
-              <a:t/>
-            </a:r>
-          </a:p>
-        </p:txBody>
-      </p:sp>
-      <p:sp>
-        <p:nvSpPr>
-          <p:cNvPr id="1002" name="Label"/>
+              <a:t>How often will each mode occur? Occurrence stays ‘?’ — which modes warrant action even when their probabilities are unknown?</a:t>
+            </a:r>
+          </a:p>
+        </p:txBody>
+      </p:sp>
+      <p:sp>
+        <p:nvSpPr>
+          <p:cNvPr id="1011" name="Label"/>
           <p:cNvSpPr txBox="1"/>
           <p:nvPr/>
         </p:nvSpPr>
         <p:spPr>
           <a:xfrm>
-            <a:off x="3291840" y="5193792"/>
-            <a:ext cx="5120640" cy="256032"/>
+            <a:off x="548640" y="1389888"/>
+            <a:ext cx="3931920" cy="219456"/>
           </a:xfrm>
           <a:prstGeom prst="rect">
             <a:avLst/>
@@ -20186,19 +20686,121 @@
           <a:noFill/>
         </p:spPr>
         <p:txBody>
-          <a:bodyPr wrap="square" lIns="27432" tIns="22860" rIns="27432" bIns="22860" anchor="t">
+          <a:bodyPr wrap="none" lIns="27432" tIns="22860" rIns="27432" bIns="22860" anchor="t">
             <a:spAutoFit/>
           </a:bodyPr>
           <a:lstStyle/>
           <a:p>
-            <a:pPr algn="ctr"/>
-            <a:r>
-              <a:rPr sz="1000" b="1" i="0">
+            <a:pPr algn="l"/>
+            <a:r>
+              <a:rPr sz="1200" b="1" i="1">
                 <a:solidFill>
                   <a:srgbClr val="5C4826"/>
                 </a:solidFill>
               </a:rPr>
-              <a:t>the same rule — the input grew from 3 to 22 characters</a:t>
+              <a:t>1  Identify a plausible failure mode</a:t>
+            </a:r>
+          </a:p>
+        </p:txBody>
+      </p:sp>
+      <p:sp>
+        <p:nvSpPr>
+          <p:cNvPr id="1012" name="Label"/>
+          <p:cNvSpPr txBox="1"/>
+          <p:nvPr/>
+        </p:nvSpPr>
+        <p:spPr>
+          <a:xfrm>
+            <a:off x="4526280" y="1389888"/>
+            <a:ext cx="3931920" cy="219456"/>
+          </a:xfrm>
+          <a:prstGeom prst="rect">
+            <a:avLst/>
+          </a:prstGeom>
+          <a:noFill/>
+        </p:spPr>
+        <p:txBody>
+          <a:bodyPr wrap="none" lIns="27432" tIns="22860" rIns="27432" bIns="22860" anchor="t">
+            <a:spAutoFit/>
+          </a:bodyPr>
+          <a:lstStyle/>
+          <a:p>
+            <a:pPr algn="l"/>
+            <a:r>
+              <a:rPr sz="1200" b="1" i="1">
+                <a:solidFill>
+                  <a:srgbClr val="5C4826"/>
+                </a:solidFill>
+              </a:rPr>
+              <a:t>2  Determine its consequences</a:t>
+            </a:r>
+          </a:p>
+        </p:txBody>
+      </p:sp>
+      <p:sp>
+        <p:nvSpPr>
+          <p:cNvPr id="1013" name="Label"/>
+          <p:cNvSpPr txBox="1"/>
+          <p:nvPr/>
+        </p:nvSpPr>
+        <p:spPr>
+          <a:xfrm>
+            <a:off x="548640" y="1627632"/>
+            <a:ext cx="3931920" cy="219456"/>
+          </a:xfrm>
+          <a:prstGeom prst="rect">
+            <a:avLst/>
+          </a:prstGeom>
+          <a:noFill/>
+        </p:spPr>
+        <p:txBody>
+          <a:bodyPr wrap="none" lIns="27432" tIns="22860" rIns="27432" bIns="22860" anchor="t">
+            <a:spAutoFit/>
+          </a:bodyPr>
+          <a:lstStyle/>
+          <a:p>
+            <a:pPr algn="l"/>
+            <a:r>
+              <a:rPr sz="1200" b="1" i="1">
+                <a:solidFill>
+                  <a:srgbClr val="5C4826"/>
+                </a:solidFill>
+              </a:rPr>
+              <a:t>3  Identify existing or proposed controls</a:t>
+            </a:r>
+          </a:p>
+        </p:txBody>
+      </p:sp>
+      <p:sp>
+        <p:nvSpPr>
+          <p:cNvPr id="1014" name="Label"/>
+          <p:cNvSpPr txBox="1"/>
+          <p:nvPr/>
+        </p:nvSpPr>
+        <p:spPr>
+          <a:xfrm>
+            <a:off x="4526280" y="1627632"/>
+            <a:ext cx="3931920" cy="219456"/>
+          </a:xfrm>
+          <a:prstGeom prst="rect">
+            <a:avLst/>
+          </a:prstGeom>
+          <a:noFill/>
+        </p:spPr>
+        <p:txBody>
+          <a:bodyPr wrap="none" lIns="27432" tIns="22860" rIns="27432" bIns="22860" anchor="t">
+            <a:spAutoFit/>
+          </a:bodyPr>
+          <a:lstStyle/>
+          <a:p>
+            <a:pPr algn="l"/>
+            <a:r>
+              <a:rPr sz="1200" b="1" i="1">
+                <a:solidFill>
+                  <a:srgbClr val="5C4826"/>
+                </a:solidFill>
+              </a:rPr>
+              <a:t>4  Decide whether the remaining risk warrants action</a:t>
             </a:r>
           </a:p>
         </p:txBody>
@@ -20231,12 +20833,7 @@
             <p:ph type="title"/>
           </p:nvPr>
         </p:nvSpPr>
-        <p:spPr>
-          <a:xfrm>
-            <a:off x="277148" y="118428"/>
-            <a:ext cx="9145148" cy="638175"/>
-          </a:xfrm>
-        </p:spPr>
+        <p:spPr/>
         <p:txBody>
           <a:bodyPr>
             <a:normAutofit fontScale="90000"/>
@@ -20244,12 +20841,12 @@
           <a:lstStyle/>
           <a:p>
             <a:r>
-              <a:rPr lang="en-US" sz="2400" i="1" dirty="0">
+              <a:rPr sz="2400" b="0" i="0">
                 <a:solidFill>
                   <a:srgbClr val="000000"/>
                 </a:solidFill>
               </a:rPr>
-              <a:t>Diagnose the Cloudflare outage</a:t>
+              <a:t>Apply FMEA to an unfamiliar system</a:t>
             </a:r>
           </a:p>
         </p:txBody>
@@ -20269,9 +20866,9 @@
           <a:bodyPr/>
           <a:lstStyle/>
           <a:p>
-            <a:fld id="{54DE72B0-FFEB-4C83-B4BD-F25961BEDFCA}" type="slidenum">
+            <a:fld id="{8CF8A65D-8523-4C39-BD83-5C787F1FA9B3}" type="slidenum">
               <a:rPr lang="en-US" smtClean="0"/>
-              <a:t>29</a:t>
+              <a:t>10</a:t>
             </a:fld>
             <a:endParaRPr lang="en-US"/>
           </a:p>
@@ -20279,14 +20876,763 @@
       </p:sp>
       <p:sp>
         <p:nvSpPr>
+          <p:cNvPr id="909" name="FooterBand"/>
+          <p:cNvSpPr/>
+          <p:nvPr/>
+        </p:nvSpPr>
+        <p:spPr>
+          <a:xfrm>
+            <a:off x="274320" y="5513831"/>
+            <a:ext cx="8595360" cy="905256"/>
+          </a:xfrm>
+          <a:prstGeom prst="rect">
+            <a:avLst/>
+          </a:prstGeom>
+          <a:solidFill>
+            <a:srgbClr val="8E6F3E"/>
+          </a:solidFill>
+          <a:ln>
+            <a:noFill/>
+          </a:ln>
+          <a:effectLst/>
+        </p:spPr>
+        <p:style>
+          <a:lnRef idx="1">
+            <a:schemeClr val="accent1"/>
+          </a:lnRef>
+          <a:fillRef idx="3">
+            <a:schemeClr val="accent1"/>
+          </a:fillRef>
+          <a:effectRef idx="2">
+            <a:schemeClr val="accent1"/>
+          </a:effectRef>
+          <a:fontRef idx="minor">
+            <a:schemeClr val="lt1"/>
+          </a:fontRef>
+        </p:style>
+        <p:txBody>
+          <a:bodyPr wrap="square" lIns="27432" tIns="22860" rIns="27432" bIns="22860" rtlCol="0" anchor="ctr"/>
+          <a:lstStyle/>
+          <a:p>
+            <a:pPr algn="ctr"/>
+            <a:r>
+              <a:rPr sz="2000" b="1" i="0" dirty="0">
+                <a:solidFill>
+                  <a:srgbClr val="FFFFFF"/>
+                </a:solidFill>
+              </a:rPr>
+              <a:t>YOUR TASK (2–3 minutes, with a partner): at least one failure mode per function.</a:t>
+            </a:r>
+          </a:p>
+          <a:p>
+            <a:pPr algn="ctr">
+              <a:spcBef>
+                <a:spcPts val="300"/>
+              </a:spcBef>
+            </a:pPr>
+            <a:r>
+              <a:rPr sz="2000" b="1" i="0" dirty="0">
+                <a:solidFill>
+                  <a:srgbClr val="FFFFFF"/>
+                </a:solidFill>
+              </a:rPr>
+              <a:t>Leave likelihood as ‘?’ — decide which modes warrant a control anyway.</a:t>
+            </a:r>
+          </a:p>
+        </p:txBody>
+      </p:sp>
+      <p:sp>
+        <p:nvSpPr>
+          <p:cNvPr id="920" name="Block"/>
+          <p:cNvSpPr/>
+          <p:nvPr/>
+        </p:nvSpPr>
+        <p:spPr>
+          <a:xfrm>
+            <a:off x="548640" y="1005840"/>
+            <a:ext cx="2560320" cy="566928"/>
+          </a:xfrm>
+          <a:prstGeom prst="rect">
+            <a:avLst/>
+          </a:prstGeom>
+          <a:solidFill>
+            <a:srgbClr val="8E6F3E"/>
+          </a:solidFill>
+          <a:ln>
+            <a:noFill/>
+          </a:ln>
+          <a:effectLst/>
+        </p:spPr>
+        <p:style>
+          <a:lnRef idx="1">
+            <a:schemeClr val="accent1"/>
+          </a:lnRef>
+          <a:fillRef idx="3">
+            <a:schemeClr val="accent1"/>
+          </a:fillRef>
+          <a:effectRef idx="2">
+            <a:schemeClr val="accent1"/>
+          </a:effectRef>
+          <a:fontRef idx="minor">
+            <a:schemeClr val="lt1"/>
+          </a:fontRef>
+        </p:style>
+        <p:txBody>
+          <a:bodyPr wrap="square" lIns="27432" tIns="22860" rIns="27432" bIns="22860" rtlCol="0" anchor="ctr"/>
+          <a:lstStyle/>
+          <a:p>
+            <a:pPr algn="ctr"/>
+            <a:r>
+              <a:rPr sz="1200" b="1" i="0">
+                <a:solidFill>
+                  <a:srgbClr val="FFFFFF"/>
+                </a:solidFill>
+              </a:rPr>
+              <a:t>CLOUDFLARE</a:t>
+            </a:r>
+          </a:p>
+        </p:txBody>
+      </p:sp>
+      <p:sp>
+        <p:nvSpPr>
+          <p:cNvPr id="921" name="RowCaption"/>
+          <p:cNvSpPr/>
+          <p:nvPr/>
+        </p:nvSpPr>
+        <p:spPr>
+          <a:xfrm>
+            <a:off x="3383280" y="1005840"/>
+            <a:ext cx="5212080" cy="566928"/>
+          </a:xfrm>
+          <a:prstGeom prst="rect">
+            <a:avLst/>
+          </a:prstGeom>
+          <a:noFill/>
+          <a:ln>
+            <a:noFill/>
+          </a:ln>
+          <a:effectLst/>
+        </p:spPr>
+        <p:style>
+          <a:lnRef idx="1">
+            <a:schemeClr val="accent1"/>
+          </a:lnRef>
+          <a:fillRef idx="3">
+            <a:schemeClr val="accent1"/>
+          </a:fillRef>
+          <a:effectRef idx="2">
+            <a:schemeClr val="accent1"/>
+          </a:effectRef>
+          <a:fontRef idx="minor">
+            <a:schemeClr val="lt1"/>
+          </a:fontRef>
+        </p:style>
+        <p:txBody>
+          <a:bodyPr wrap="square" lIns="27432" tIns="22860" rIns="27432" bIns="22860" rtlCol="0" anchor="ctr"/>
+          <a:lstStyle/>
+          <a:p>
+            <a:pPr algn="l"/>
+            <a:r>
+              <a:rPr sz="1600" b="0" i="0">
+                <a:solidFill>
+                  <a:srgbClr val="555960"/>
+                </a:solidFill>
+              </a:rPr>
+              <a:t>operates a Web Application Firewall (WAF): it inspects incoming web requests for attacks</a:t>
+            </a:r>
+          </a:p>
+        </p:txBody>
+      </p:sp>
+      <p:sp>
+        <p:nvSpPr>
+          <p:cNvPr id="923" name="Block"/>
+          <p:cNvSpPr/>
+          <p:nvPr/>
+        </p:nvSpPr>
+        <p:spPr>
+          <a:xfrm>
+            <a:off x="548640" y="1664208"/>
+            <a:ext cx="2560320" cy="566928"/>
+          </a:xfrm>
+          <a:prstGeom prst="rect">
+            <a:avLst/>
+          </a:prstGeom>
+          <a:solidFill>
+            <a:srgbClr val="8E6F3E"/>
+          </a:solidFill>
+          <a:ln>
+            <a:noFill/>
+          </a:ln>
+          <a:effectLst/>
+        </p:spPr>
+        <p:style>
+          <a:lnRef idx="1">
+            <a:schemeClr val="accent1"/>
+          </a:lnRef>
+          <a:fillRef idx="3">
+            <a:schemeClr val="accent1"/>
+          </a:fillRef>
+          <a:effectRef idx="2">
+            <a:schemeClr val="accent1"/>
+          </a:effectRef>
+          <a:fontRef idx="minor">
+            <a:schemeClr val="lt1"/>
+          </a:fontRef>
+        </p:style>
+        <p:txBody>
+          <a:bodyPr wrap="square" lIns="27432" tIns="22860" rIns="27432" bIns="22860" rtlCol="0" anchor="ctr"/>
+          <a:lstStyle/>
+          <a:p>
+            <a:pPr algn="ctr"/>
+            <a:r>
+              <a:rPr sz="1200" b="1" i="0">
+                <a:solidFill>
+                  <a:srgbClr val="FFFFFF"/>
+                </a:solidFill>
+              </a:rPr>
+              <a:t>RULE CHANGES</a:t>
+            </a:r>
+          </a:p>
+        </p:txBody>
+      </p:sp>
+      <p:sp>
+        <p:nvSpPr>
+          <p:cNvPr id="924" name="RowCaption"/>
+          <p:cNvSpPr/>
+          <p:nvPr/>
+        </p:nvSpPr>
+        <p:spPr>
+          <a:xfrm>
+            <a:off x="3383280" y="1664208"/>
+            <a:ext cx="5212080" cy="566928"/>
+          </a:xfrm>
+          <a:prstGeom prst="rect">
+            <a:avLst/>
+          </a:prstGeom>
+          <a:noFill/>
+          <a:ln>
+            <a:noFill/>
+          </a:ln>
+          <a:effectLst/>
+        </p:spPr>
+        <p:style>
+          <a:lnRef idx="1">
+            <a:schemeClr val="accent1"/>
+          </a:lnRef>
+          <a:fillRef idx="3">
+            <a:schemeClr val="accent1"/>
+          </a:fillRef>
+          <a:effectRef idx="2">
+            <a:schemeClr val="accent1"/>
+          </a:effectRef>
+          <a:fontRef idx="minor">
+            <a:schemeClr val="lt1"/>
+          </a:fontRef>
+        </p:style>
+        <p:txBody>
+          <a:bodyPr wrap="square" lIns="27432" tIns="22860" rIns="27432" bIns="22860" rtlCol="0" anchor="ctr"/>
+          <a:lstStyle/>
+          <a:p>
+            <a:pPr algn="l"/>
+            <a:r>
+              <a:rPr sz="1600" b="0" i="0">
+                <a:solidFill>
+                  <a:srgbClr val="555960"/>
+                </a:solidFill>
+              </a:rPr>
+              <a:t>new detection rules deploy without a software release — and propagate globally within seconds</a:t>
+            </a:r>
+          </a:p>
+        </p:txBody>
+      </p:sp>
+      <p:sp>
+        <p:nvSpPr>
+          <p:cNvPr id="926" name="Block"/>
+          <p:cNvSpPr/>
+          <p:nvPr/>
+        </p:nvSpPr>
+        <p:spPr>
+          <a:xfrm>
+            <a:off x="548640" y="2322576"/>
+            <a:ext cx="2560320" cy="566928"/>
+          </a:xfrm>
+          <a:prstGeom prst="rect">
+            <a:avLst/>
+          </a:prstGeom>
+          <a:solidFill>
+            <a:srgbClr val="8E6F3E"/>
+          </a:solidFill>
+          <a:ln>
+            <a:noFill/>
+          </a:ln>
+          <a:effectLst/>
+        </p:spPr>
+        <p:style>
+          <a:lnRef idx="1">
+            <a:schemeClr val="accent1"/>
+          </a:lnRef>
+          <a:fillRef idx="3">
+            <a:schemeClr val="accent1"/>
+          </a:fillRef>
+          <a:effectRef idx="2">
+            <a:schemeClr val="accent1"/>
+          </a:effectRef>
+          <a:fontRef idx="minor">
+            <a:schemeClr val="lt1"/>
+          </a:fontRef>
+        </p:style>
+        <p:txBody>
+          <a:bodyPr wrap="square" lIns="27432" tIns="22860" rIns="27432" bIns="22860" rtlCol="0" anchor="ctr"/>
+          <a:lstStyle/>
+          <a:p>
+            <a:pPr algn="ctr"/>
+            <a:r>
+              <a:rPr sz="1200" b="1" i="0" dirty="0">
+                <a:solidFill>
+                  <a:srgbClr val="FFFFFF"/>
+                </a:solidFill>
+              </a:rPr>
+              <a:t>RULE FORM</a:t>
+            </a:r>
+          </a:p>
+        </p:txBody>
+      </p:sp>
+      <p:sp>
+        <p:nvSpPr>
+          <p:cNvPr id="927" name="RowCaption"/>
+          <p:cNvSpPr/>
+          <p:nvPr/>
+        </p:nvSpPr>
+        <p:spPr>
+          <a:xfrm>
+            <a:off x="3383280" y="2322576"/>
+            <a:ext cx="5212080" cy="566928"/>
+          </a:xfrm>
+          <a:prstGeom prst="rect">
+            <a:avLst/>
+          </a:prstGeom>
+          <a:noFill/>
+          <a:ln>
+            <a:noFill/>
+          </a:ln>
+          <a:effectLst/>
+        </p:spPr>
+        <p:style>
+          <a:lnRef idx="1">
+            <a:schemeClr val="accent1"/>
+          </a:lnRef>
+          <a:fillRef idx="3">
+            <a:schemeClr val="accent1"/>
+          </a:fillRef>
+          <a:effectRef idx="2">
+            <a:schemeClr val="accent1"/>
+          </a:effectRef>
+          <a:fontRef idx="minor">
+            <a:schemeClr val="lt1"/>
+          </a:fontRef>
+        </p:style>
+        <p:txBody>
+          <a:bodyPr wrap="square" lIns="27432" tIns="22860" rIns="27432" bIns="22860" rtlCol="0" anchor="ctr"/>
+          <a:lstStyle/>
+          <a:p>
+            <a:pPr algn="l"/>
+            <a:r>
+              <a:rPr sz="1600" b="0" i="0">
+                <a:solidFill>
+                  <a:srgbClr val="555960"/>
+                </a:solidFill>
+              </a:rPr>
+              <a:t>some detection rules are written as regular expressions</a:t>
+            </a:r>
+          </a:p>
+        </p:txBody>
+      </p:sp>
+      <p:sp>
+        <p:nvSpPr>
+          <p:cNvPr id="5" name="ColumnHeading"/>
+          <p:cNvSpPr/>
+          <p:nvPr/>
+        </p:nvSpPr>
+        <p:spPr>
+          <a:xfrm>
+            <a:off x="365760" y="3072384"/>
+            <a:ext cx="1645920" cy="256032"/>
+          </a:xfrm>
+          <a:prstGeom prst="rect">
+            <a:avLst/>
+          </a:prstGeom>
+          <a:noFill/>
+          <a:ln>
+            <a:noFill/>
+          </a:ln>
+          <a:effectLst/>
+        </p:spPr>
+        <p:style>
+          <a:lnRef idx="1">
+            <a:schemeClr val="accent1"/>
+          </a:lnRef>
+          <a:fillRef idx="3">
+            <a:schemeClr val="accent1"/>
+          </a:fillRef>
+          <a:effectRef idx="2">
+            <a:schemeClr val="accent1"/>
+          </a:effectRef>
+          <a:fontRef idx="minor">
+            <a:schemeClr val="lt1"/>
+          </a:fontRef>
+        </p:style>
+        <p:txBody>
+          <a:bodyPr wrap="square" lIns="27432" tIns="22860" rIns="27432" bIns="22860" rtlCol="0" anchor="ctr"/>
+          <a:lstStyle/>
+          <a:p>
+            <a:pPr algn="ctr"/>
+            <a:r>
+              <a:rPr lang="en-US" sz="1200" b="1" i="0" dirty="0">
+                <a:solidFill>
+                  <a:schemeClr val="bg1"/>
+                </a:solidFill>
+              </a:rPr>
+              <a:t>FUNCTION</a:t>
+            </a:r>
+            <a:endParaRPr sz="2800" b="1" i="0" dirty="0">
+              <a:solidFill>
+                <a:schemeClr val="bg1"/>
+              </a:solidFill>
+            </a:endParaRPr>
+          </a:p>
+        </p:txBody>
+      </p:sp>
+      <p:sp>
+        <p:nvSpPr>
+          <p:cNvPr id="1000" name="ColumnHeading"/>
+          <p:cNvSpPr/>
+          <p:nvPr/>
+        </p:nvSpPr>
+        <p:spPr>
+          <a:xfrm>
+            <a:off x="2103120" y="3072384"/>
+            <a:ext cx="2194560" cy="256032"/>
+          </a:xfrm>
+          <a:prstGeom prst="rect">
+            <a:avLst/>
+          </a:prstGeom>
+          <a:noFill/>
+          <a:ln>
+            <a:noFill/>
+          </a:ln>
+          <a:effectLst/>
+        </p:spPr>
+        <p:style>
+          <a:lnRef idx="1">
+            <a:schemeClr val="accent1"/>
+          </a:lnRef>
+          <a:fillRef idx="3">
+            <a:schemeClr val="accent1"/>
+          </a:fillRef>
+          <a:effectRef idx="2">
+            <a:schemeClr val="accent1"/>
+          </a:effectRef>
+          <a:fontRef idx="minor">
+            <a:schemeClr val="lt1"/>
+          </a:fontRef>
+        </p:style>
+        <p:txBody>
+          <a:bodyPr wrap="square" lIns="27432" tIns="22860" rIns="27432" bIns="22860" rtlCol="0" anchor="ctr"/>
+          <a:lstStyle/>
+          <a:p>
+            <a:pPr algn="ctr"/>
+            <a:r>
+              <a:rPr lang="en-US" sz="1200" b="1" i="0" dirty="0">
+                <a:solidFill>
+                  <a:schemeClr val="bg1"/>
+                </a:solidFill>
+              </a:rPr>
+              <a:t>POSSIBLE FAILURE MODE</a:t>
+            </a:r>
+            <a:endParaRPr sz="2800" b="1" i="0" dirty="0">
+              <a:solidFill>
+                <a:schemeClr val="bg1"/>
+              </a:solidFill>
+            </a:endParaRPr>
+          </a:p>
+        </p:txBody>
+      </p:sp>
+      <p:sp>
+        <p:nvSpPr>
+          <p:cNvPr id="1001" name="ColumnHeading"/>
+          <p:cNvSpPr/>
+          <p:nvPr/>
+        </p:nvSpPr>
+        <p:spPr>
+          <a:xfrm>
+            <a:off x="4389120" y="3072384"/>
+            <a:ext cx="2011680" cy="256032"/>
+          </a:xfrm>
+          <a:prstGeom prst="rect">
+            <a:avLst/>
+          </a:prstGeom>
+          <a:noFill/>
+          <a:ln>
+            <a:noFill/>
+          </a:ln>
+          <a:effectLst/>
+        </p:spPr>
+        <p:style>
+          <a:lnRef idx="1">
+            <a:schemeClr val="accent1"/>
+          </a:lnRef>
+          <a:fillRef idx="3">
+            <a:schemeClr val="accent1"/>
+          </a:fillRef>
+          <a:effectRef idx="2">
+            <a:schemeClr val="accent1"/>
+          </a:effectRef>
+          <a:fontRef idx="minor">
+            <a:schemeClr val="lt1"/>
+          </a:fontRef>
+        </p:style>
+        <p:txBody>
+          <a:bodyPr wrap="square" lIns="27432" tIns="22860" rIns="27432" bIns="22860" rtlCol="0" anchor="ctr"/>
+          <a:lstStyle/>
+          <a:p>
+            <a:pPr algn="ctr"/>
+            <a:r>
+              <a:rPr lang="en-US" sz="1200" b="1" i="0" dirty="0">
+                <a:solidFill>
+                  <a:schemeClr val="bg1"/>
+                </a:solidFill>
+              </a:rPr>
+              <a:t>POTENTIAL EFFECT</a:t>
+            </a:r>
+            <a:endParaRPr sz="2800" b="1" i="0" dirty="0">
+              <a:solidFill>
+                <a:schemeClr val="bg1"/>
+              </a:solidFill>
+            </a:endParaRPr>
+          </a:p>
+        </p:txBody>
+      </p:sp>
+      <p:sp>
+        <p:nvSpPr>
+          <p:cNvPr id="1002" name="ColumnHeading"/>
+          <p:cNvSpPr/>
+          <p:nvPr/>
+        </p:nvSpPr>
+        <p:spPr>
+          <a:xfrm>
+            <a:off x="6492240" y="3072384"/>
+            <a:ext cx="2103120" cy="256032"/>
+          </a:xfrm>
+          <a:prstGeom prst="rect">
+            <a:avLst/>
+          </a:prstGeom>
+          <a:noFill/>
+          <a:ln>
+            <a:noFill/>
+          </a:ln>
+          <a:effectLst/>
+        </p:spPr>
+        <p:style>
+          <a:lnRef idx="1">
+            <a:schemeClr val="accent1"/>
+          </a:lnRef>
+          <a:fillRef idx="3">
+            <a:schemeClr val="accent1"/>
+          </a:fillRef>
+          <a:effectRef idx="2">
+            <a:schemeClr val="accent1"/>
+          </a:effectRef>
+          <a:fontRef idx="minor">
+            <a:schemeClr val="lt1"/>
+          </a:fontRef>
+        </p:style>
+        <p:txBody>
+          <a:bodyPr wrap="square" lIns="27432" tIns="22860" rIns="27432" bIns="22860" rtlCol="0" anchor="ctr"/>
+          <a:lstStyle/>
+          <a:p>
+            <a:pPr algn="ctr"/>
+            <a:r>
+              <a:rPr lang="en-US" sz="1200" b="1" i="0" dirty="0">
+                <a:solidFill>
+                  <a:schemeClr val="bg1"/>
+                </a:solidFill>
+              </a:rPr>
+              <a:t>PROPOSED CONTROL</a:t>
+            </a:r>
+            <a:endParaRPr sz="2800" b="1" i="0" dirty="0">
+              <a:solidFill>
+                <a:schemeClr val="bg1"/>
+              </a:solidFill>
+            </a:endParaRPr>
+          </a:p>
+        </p:txBody>
+      </p:sp>
+      <p:sp>
+        <p:nvSpPr>
+          <p:cNvPr id="1003" name="Block"/>
+          <p:cNvSpPr/>
+          <p:nvPr/>
+        </p:nvSpPr>
+        <p:spPr>
+          <a:xfrm>
+            <a:off x="365760" y="3401568"/>
+            <a:ext cx="1645920" cy="603504"/>
+          </a:xfrm>
+          <a:prstGeom prst="rect">
+            <a:avLst/>
+          </a:prstGeom>
+          <a:solidFill>
+            <a:srgbClr val="8E6F3E"/>
+          </a:solidFill>
+          <a:ln>
+            <a:noFill/>
+          </a:ln>
+          <a:effectLst/>
+        </p:spPr>
+        <p:style>
+          <a:lnRef idx="1">
+            <a:schemeClr val="accent1"/>
+          </a:lnRef>
+          <a:fillRef idx="3">
+            <a:schemeClr val="accent1"/>
+          </a:fillRef>
+          <a:effectRef idx="2">
+            <a:schemeClr val="accent1"/>
+          </a:effectRef>
+          <a:fontRef idx="minor">
+            <a:schemeClr val="lt1"/>
+          </a:fontRef>
+        </p:style>
+        <p:txBody>
+          <a:bodyPr wrap="square" lIns="27432" tIns="22860" rIns="27432" bIns="22860" rtlCol="0" anchor="ctr"/>
+          <a:lstStyle/>
+          <a:p>
+            <a:pPr algn="ctr"/>
+            <a:r>
+              <a:rPr sz="1200" b="1" i="0">
+                <a:solidFill>
+                  <a:srgbClr val="FFFFFF"/>
+                </a:solidFill>
+              </a:rPr>
+              <a:t>Evaluate WAF rule</a:t>
+            </a:r>
+          </a:p>
+        </p:txBody>
+      </p:sp>
+      <p:sp>
+        <p:nvSpPr>
+          <p:cNvPr id="1004" name="Block"/>
+          <p:cNvSpPr/>
+          <p:nvPr/>
+        </p:nvSpPr>
+        <p:spPr>
+          <a:xfrm>
+            <a:off x="365760" y="4059936"/>
+            <a:ext cx="1645920" cy="603504"/>
+          </a:xfrm>
+          <a:prstGeom prst="rect">
+            <a:avLst/>
+          </a:prstGeom>
+          <a:solidFill>
+            <a:srgbClr val="8E6F3E"/>
+          </a:solidFill>
+          <a:ln>
+            <a:noFill/>
+          </a:ln>
+          <a:effectLst/>
+        </p:spPr>
+        <p:style>
+          <a:lnRef idx="1">
+            <a:schemeClr val="accent1"/>
+          </a:lnRef>
+          <a:fillRef idx="3">
+            <a:schemeClr val="accent1"/>
+          </a:fillRef>
+          <a:effectRef idx="2">
+            <a:schemeClr val="accent1"/>
+          </a:effectRef>
+          <a:fontRef idx="minor">
+            <a:schemeClr val="lt1"/>
+          </a:fontRef>
+        </p:style>
+        <p:txBody>
+          <a:bodyPr wrap="square" lIns="27432" tIns="22860" rIns="27432" bIns="22860" rtlCol="0" anchor="ctr"/>
+          <a:lstStyle/>
+          <a:p>
+            <a:pPr algn="ctr"/>
+            <a:r>
+              <a:rPr sz="1200" b="1" i="0">
+                <a:solidFill>
+                  <a:srgbClr val="FFFFFF"/>
+                </a:solidFill>
+              </a:rPr>
+              <a:t>Validate new rule</a:t>
+            </a:r>
+          </a:p>
+        </p:txBody>
+      </p:sp>
+      <p:sp>
+        <p:nvSpPr>
+          <p:cNvPr id="1005" name="Block"/>
+          <p:cNvSpPr/>
+          <p:nvPr/>
+        </p:nvSpPr>
+        <p:spPr>
+          <a:xfrm>
+            <a:off x="365760" y="4718304"/>
+            <a:ext cx="1645920" cy="603504"/>
+          </a:xfrm>
+          <a:prstGeom prst="rect">
+            <a:avLst/>
+          </a:prstGeom>
+          <a:solidFill>
+            <a:srgbClr val="8E6F3E"/>
+          </a:solidFill>
+          <a:ln>
+            <a:noFill/>
+          </a:ln>
+          <a:effectLst/>
+        </p:spPr>
+        <p:style>
+          <a:lnRef idx="1">
+            <a:schemeClr val="accent1"/>
+          </a:lnRef>
+          <a:fillRef idx="3">
+            <a:schemeClr val="accent1"/>
+          </a:fillRef>
+          <a:effectRef idx="2">
+            <a:schemeClr val="accent1"/>
+          </a:effectRef>
+          <a:fontRef idx="minor">
+            <a:schemeClr val="lt1"/>
+          </a:fontRef>
+        </p:style>
+        <p:txBody>
+          <a:bodyPr wrap="square" lIns="27432" tIns="22860" rIns="27432" bIns="22860" rtlCol="0" anchor="ctr"/>
+          <a:lstStyle/>
+          <a:p>
+            <a:pPr algn="ctr"/>
+            <a:r>
+              <a:rPr sz="1200" b="1" i="0">
+                <a:solidFill>
+                  <a:srgbClr val="FFFFFF"/>
+                </a:solidFill>
+              </a:rPr>
+              <a:t>Distribute rule</a:t>
+            </a:r>
+          </a:p>
+        </p:txBody>
+      </p:sp>
+      <p:sp>
+        <p:nvSpPr>
           <p:cNvPr id="903" name="Card"/>
           <p:cNvSpPr/>
           <p:nvPr/>
         </p:nvSpPr>
         <p:spPr>
           <a:xfrm>
-            <a:off x="4023360" y="1463040"/>
-            <a:ext cx="4572000" cy="640080"/>
+            <a:off x="2103120" y="3401568"/>
+            <a:ext cx="2194560" cy="603504"/>
           </a:xfrm>
           <a:prstGeom prst="rect">
             <a:avLst/>
@@ -20326,21 +21672,21 @@
                   <a:srgbClr val="5C4826"/>
                 </a:solidFill>
               </a:rPr>
-              <a:t>what failed locally?</a:t>
-            </a:r>
-          </a:p>
-        </p:txBody>
-      </p:sp>
-      <p:sp>
-        <p:nvSpPr>
-          <p:cNvPr id="907" name="Card"/>
+              <a:t/>
+            </a:r>
+          </a:p>
+        </p:txBody>
+      </p:sp>
+      <p:sp>
+        <p:nvSpPr>
+          <p:cNvPr id="1006" name="Card"/>
           <p:cNvSpPr/>
           <p:nvPr/>
         </p:nvSpPr>
         <p:spPr>
           <a:xfrm>
-            <a:off x="4023360" y="2423160"/>
-            <a:ext cx="4572000" cy="640080"/>
+            <a:off x="4389120" y="3401568"/>
+            <a:ext cx="2011680" cy="603504"/>
           </a:xfrm>
           <a:prstGeom prst="rect">
             <a:avLst/>
@@ -20375,269 +21721,26 @@
           <a:p>
             <a:pPr algn="ctr"/>
             <a:r>
-              <a:rPr sz="2000" b="0" i="1">
+              <a:rPr sz="2000" b="0" i="1" dirty="0">
                 <a:solidFill>
                   <a:srgbClr val="5C4826"/>
                 </a:solidFill>
               </a:rPr>
-              <a:t>why did the defect escape?</a:t>
-            </a:r>
-          </a:p>
-        </p:txBody>
-      </p:sp>
-      <p:sp>
-        <p:nvSpPr>
-          <p:cNvPr id="909" name="Block"/>
+              <a:t/>
+            </a:r>
+          </a:p>
+        </p:txBody>
+      </p:sp>
+      <p:sp>
+        <p:nvSpPr>
+          <p:cNvPr id="1007" name="Card"/>
           <p:cNvSpPr/>
           <p:nvPr/>
         </p:nvSpPr>
         <p:spPr>
           <a:xfrm>
-            <a:off x="548640" y="1463040"/>
-            <a:ext cx="3291840" cy="640080"/>
-          </a:xfrm>
-          <a:prstGeom prst="rect">
-            <a:avLst/>
-          </a:prstGeom>
-          <a:solidFill>
-            <a:srgbClr val="8E6F3E"/>
-          </a:solidFill>
-          <a:ln>
-            <a:noFill/>
-          </a:ln>
-          <a:effectLst/>
-        </p:spPr>
-        <p:style>
-          <a:lnRef idx="1">
-            <a:schemeClr val="accent1"/>
-          </a:lnRef>
-          <a:fillRef idx="3">
-            <a:schemeClr val="accent1"/>
-          </a:fillRef>
-          <a:effectRef idx="2">
-            <a:schemeClr val="accent1"/>
-          </a:effectRef>
-          <a:fontRef idx="minor">
-            <a:schemeClr val="lt1"/>
-          </a:fontRef>
-        </p:style>
-        <p:txBody>
-          <a:bodyPr wrap="square" lIns="27432" tIns="22860" rIns="27432" bIns="22860" rtlCol="0" anchor="ctr"/>
-          <a:lstStyle/>
-          <a:p>
-            <a:pPr algn="ctr"/>
-            <a:r>
-              <a:rPr sz="2000" b="1" i="0" dirty="0">
-                <a:solidFill>
-                  <a:srgbClr val="FFFFFF"/>
-                </a:solidFill>
-              </a:rPr>
-              <a:t>COMPONENT-LEVEL</a:t>
-            </a:r>
-            <a:endParaRPr lang="en-US" sz="2000" b="1" i="0" dirty="0">
-              <a:solidFill>
-                <a:srgbClr val="FFFFFF"/>
-              </a:solidFill>
-            </a:endParaRPr>
-          </a:p>
-        </p:txBody>
-      </p:sp>
-      <p:sp>
-        <p:nvSpPr>
-          <p:cNvPr id="910" name="Block"/>
-          <p:cNvSpPr/>
-          <p:nvPr/>
-        </p:nvSpPr>
-        <p:spPr>
-          <a:xfrm>
-            <a:off x="548640" y="2423160"/>
-            <a:ext cx="3291840" cy="640080"/>
-          </a:xfrm>
-          <a:prstGeom prst="rect">
-            <a:avLst/>
-          </a:prstGeom>
-          <a:solidFill>
-            <a:srgbClr val="8E6F3E"/>
-          </a:solidFill>
-          <a:ln>
-            <a:noFill/>
-          </a:ln>
-          <a:effectLst/>
-        </p:spPr>
-        <p:style>
-          <a:lnRef idx="1">
-            <a:schemeClr val="accent1"/>
-          </a:lnRef>
-          <a:fillRef idx="3">
-            <a:schemeClr val="accent1"/>
-          </a:fillRef>
-          <a:effectRef idx="2">
-            <a:schemeClr val="accent1"/>
-          </a:effectRef>
-          <a:fontRef idx="minor">
-            <a:schemeClr val="lt1"/>
-          </a:fontRef>
-        </p:style>
-        <p:txBody>
-          <a:bodyPr wrap="square" lIns="27432" tIns="22860" rIns="27432" bIns="22860" rtlCol="0" anchor="ctr"/>
-          <a:lstStyle/>
-          <a:p>
-            <a:pPr algn="ctr"/>
-            <a:r>
-              <a:rPr sz="2000" b="1" i="0" dirty="0">
-                <a:solidFill>
-                  <a:srgbClr val="FFFFFF"/>
-                </a:solidFill>
-              </a:rPr>
-              <a:t>SWISS CHEESE</a:t>
-            </a:r>
-            <a:endParaRPr lang="en-US" sz="2000" b="1" i="0" dirty="0">
-              <a:solidFill>
-                <a:srgbClr val="FFFFFF"/>
-              </a:solidFill>
-            </a:endParaRPr>
-          </a:p>
-        </p:txBody>
-      </p:sp>
-      <p:sp>
-        <p:nvSpPr>
-          <p:cNvPr id="911" name="Block"/>
-          <p:cNvSpPr/>
-          <p:nvPr/>
-        </p:nvSpPr>
-        <p:spPr>
-          <a:xfrm>
-            <a:off x="548640" y="3383280"/>
-            <a:ext cx="3291840" cy="640080"/>
-          </a:xfrm>
-          <a:prstGeom prst="rect">
-            <a:avLst/>
-          </a:prstGeom>
-          <a:solidFill>
-            <a:srgbClr val="8E6F3E"/>
-          </a:solidFill>
-          <a:ln>
-            <a:noFill/>
-          </a:ln>
-          <a:effectLst/>
-        </p:spPr>
-        <p:style>
-          <a:lnRef idx="1">
-            <a:schemeClr val="accent1"/>
-          </a:lnRef>
-          <a:fillRef idx="3">
-            <a:schemeClr val="accent1"/>
-          </a:fillRef>
-          <a:effectRef idx="2">
-            <a:schemeClr val="accent1"/>
-          </a:effectRef>
-          <a:fontRef idx="minor">
-            <a:schemeClr val="lt1"/>
-          </a:fontRef>
-        </p:style>
-        <p:txBody>
-          <a:bodyPr wrap="square" lIns="27432" tIns="22860" rIns="27432" bIns="22860" rtlCol="0" anchor="ctr"/>
-          <a:lstStyle/>
-          <a:p>
-            <a:pPr algn="ctr"/>
-            <a:r>
-              <a:rPr sz="2000" b="1" i="0" dirty="0">
-                <a:solidFill>
-                  <a:srgbClr val="FFFFFF"/>
-                </a:solidFill>
-              </a:rPr>
-              <a:t>STAMP</a:t>
-            </a:r>
-            <a:endParaRPr sz="2000" b="1" i="0" dirty="0">
-              <a:solidFill>
-                <a:srgbClr val="FFFFFF"/>
-              </a:solidFill>
-            </a:endParaRPr>
-          </a:p>
-        </p:txBody>
-      </p:sp>
-      <p:sp>
-        <p:nvSpPr>
-          <p:cNvPr id="913" name="FooterBand"/>
-          <p:cNvSpPr/>
-          <p:nvPr/>
-        </p:nvSpPr>
-        <p:spPr>
-          <a:xfrm>
-            <a:off x="274320" y="5128591"/>
-            <a:ext cx="8595360" cy="1592884"/>
-          </a:xfrm>
-          <a:prstGeom prst="rect">
-            <a:avLst/>
-          </a:prstGeom>
-          <a:noFill/>
-          <a:ln>
-            <a:noFill/>
-          </a:ln>
-          <a:effectLst/>
-        </p:spPr>
-        <p:style>
-          <a:lnRef idx="1">
-            <a:schemeClr val="accent1"/>
-          </a:lnRef>
-          <a:fillRef idx="3">
-            <a:schemeClr val="accent1"/>
-          </a:fillRef>
-          <a:effectRef idx="2">
-            <a:schemeClr val="accent1"/>
-          </a:effectRef>
-          <a:fontRef idx="minor">
-            <a:schemeClr val="lt1"/>
-          </a:fontRef>
-        </p:style>
-        <p:txBody>
-          <a:bodyPr wrap="square" lIns="27432" tIns="22860" rIns="27432" bIns="22860" rtlCol="0" anchor="ctr"/>
-          <a:lstStyle/>
-          <a:p>
-            <a:pPr algn="ctr"/>
-            <a:r>
-              <a:rPr lang="en-US" sz="2000" b="1" i="0" dirty="0">
-                <a:solidFill>
-                  <a:schemeClr val="bg1"/>
-                </a:solidFill>
-              </a:rPr>
-              <a:t>YOUR TASK — choose an intervention · name the failure class it addresses ·</a:t>
-            </a:r>
-          </a:p>
-          <a:p>
-            <a:pPr algn="ctr"/>
-            <a:r>
-              <a:rPr lang="en-US" sz="2000" b="1" i="0" dirty="0">
-                <a:solidFill>
-                  <a:schemeClr val="bg1"/>
-                </a:solidFill>
-              </a:rPr>
-              <a:t>decide where the lesson should live. What evidence would establish that it works?</a:t>
-            </a:r>
-          </a:p>
-          <a:p>
-            <a:pPr algn="ctr"/>
-            <a:r>
-              <a:rPr lang="en-US" sz="2000" b="1" i="0" dirty="0">
-                <a:solidFill>
-                  <a:schemeClr val="bg1"/>
-                </a:solidFill>
-              </a:rPr>
-              <a:t>How should this incident change the FMEA for future WAF releases?</a:t>
-            </a:r>
-          </a:p>
-        </p:txBody>
-      </p:sp>
-      <p:sp>
-        <p:nvSpPr>
-          <p:cNvPr id="2" name="Card"/>
-          <p:cNvSpPr/>
-          <p:nvPr/>
-        </p:nvSpPr>
-        <p:spPr>
-          <a:xfrm>
-            <a:off x="4023360" y="3383280"/>
-            <a:ext cx="4572000" cy="640080"/>
+            <a:off x="6492240" y="3401568"/>
+            <a:ext cx="2103120" cy="603504"/>
           </a:xfrm>
           <a:prstGeom prst="rect">
             <a:avLst/>
@@ -20672,33 +21775,37 @@
           <a:p>
             <a:pPr algn="ctr"/>
             <a:r>
-              <a:rPr lang="en-US" sz="2000" b="0" i="1" dirty="0">
+              <a:rPr sz="2000" b="0" i="1" dirty="0">
                 <a:solidFill>
                   <a:srgbClr val="5C4826"/>
                 </a:solidFill>
               </a:rPr>
-              <a:t>what controls and feedback permitted the consequences?</a:t>
-            </a:r>
-          </a:p>
-        </p:txBody>
-      </p:sp>
-      <p:sp>
-        <p:nvSpPr>
-          <p:cNvPr id="5" name="ColumnHeading"/>
+              <a:t/>
+            </a:r>
+          </a:p>
+        </p:txBody>
+      </p:sp>
+      <p:sp>
+        <p:nvSpPr>
+          <p:cNvPr id="1008" name="Card"/>
           <p:cNvSpPr/>
           <p:nvPr/>
         </p:nvSpPr>
         <p:spPr>
           <a:xfrm>
-            <a:off x="548640" y="1042415"/>
-            <a:ext cx="3291840" cy="274320"/>
-          </a:xfrm>
-          <a:prstGeom prst="rect">
-            <a:avLst/>
-          </a:prstGeom>
-          <a:noFill/>
-          <a:ln>
-            <a:noFill/>
+            <a:off x="2103120" y="4059936"/>
+            <a:ext cx="2194560" cy="603504"/>
+          </a:xfrm>
+          <a:prstGeom prst="rect">
+            <a:avLst/>
+          </a:prstGeom>
+          <a:solidFill>
+            <a:srgbClr val="F5F1E8"/>
+          </a:solidFill>
+          <a:ln w="12700">
+            <a:solidFill>
+              <a:srgbClr val="C9B991"/>
+            </a:solidFill>
           </a:ln>
           <a:effectLst/>
         </p:spPr>
@@ -20722,38 +21829,37 @@
           <a:p>
             <a:pPr algn="ctr"/>
             <a:r>
-              <a:rPr lang="en-US" sz="1400" b="1" i="0" dirty="0">
-                <a:solidFill>
-                  <a:schemeClr val="bg1"/>
-                </a:solidFill>
-              </a:rPr>
-              <a:t>MODEL</a:t>
-            </a:r>
-            <a:endParaRPr sz="2800" b="1" i="0" dirty="0">
-              <a:solidFill>
-                <a:schemeClr val="bg1"/>
-              </a:solidFill>
-            </a:endParaRPr>
-          </a:p>
-        </p:txBody>
-      </p:sp>
-      <p:sp>
-        <p:nvSpPr>
-          <p:cNvPr id="6" name="ColumnHeading"/>
+              <a:rPr sz="2000" b="0" i="1" dirty="0">
+                <a:solidFill>
+                  <a:srgbClr val="5C4826"/>
+                </a:solidFill>
+              </a:rPr>
+              <a:t/>
+            </a:r>
+          </a:p>
+        </p:txBody>
+      </p:sp>
+      <p:sp>
+        <p:nvSpPr>
+          <p:cNvPr id="1009" name="Card"/>
           <p:cNvSpPr/>
           <p:nvPr/>
         </p:nvSpPr>
         <p:spPr>
           <a:xfrm>
-            <a:off x="4023360" y="1042415"/>
-            <a:ext cx="4572000" cy="274320"/>
-          </a:xfrm>
-          <a:prstGeom prst="rect">
-            <a:avLst/>
-          </a:prstGeom>
-          <a:noFill/>
-          <a:ln>
-            <a:noFill/>
+            <a:off x="4389120" y="4059936"/>
+            <a:ext cx="2011680" cy="603504"/>
+          </a:xfrm>
+          <a:prstGeom prst="rect">
+            <a:avLst/>
+          </a:prstGeom>
+          <a:solidFill>
+            <a:srgbClr val="F5F1E8"/>
+          </a:solidFill>
+          <a:ln w="12700">
+            <a:solidFill>
+              <a:srgbClr val="C9B991"/>
+            </a:solidFill>
           </a:ln>
           <a:effectLst/>
         </p:spPr>
@@ -20777,18 +21883,229 @@
           <a:p>
             <a:pPr algn="ctr"/>
             <a:r>
-              <a:rPr lang="en-US" sz="1400" b="1" i="0" dirty="0">
-                <a:solidFill>
-                  <a:schemeClr val="bg1"/>
-                </a:solidFill>
-              </a:rPr>
-              <a:t>ITS QUESTION</a:t>
-            </a:r>
-            <a:endParaRPr sz="2800" b="1" i="0" dirty="0">
-              <a:solidFill>
-                <a:schemeClr val="bg1"/>
-              </a:solidFill>
-            </a:endParaRPr>
+              <a:rPr sz="2000" b="0" i="1" dirty="0">
+                <a:solidFill>
+                  <a:srgbClr val="5C4826"/>
+                </a:solidFill>
+              </a:rPr>
+              <a:t/>
+            </a:r>
+          </a:p>
+        </p:txBody>
+      </p:sp>
+      <p:sp>
+        <p:nvSpPr>
+          <p:cNvPr id="1010" name="Card"/>
+          <p:cNvSpPr/>
+          <p:nvPr/>
+        </p:nvSpPr>
+        <p:spPr>
+          <a:xfrm>
+            <a:off x="6492240" y="4059936"/>
+            <a:ext cx="2103120" cy="603504"/>
+          </a:xfrm>
+          <a:prstGeom prst="rect">
+            <a:avLst/>
+          </a:prstGeom>
+          <a:solidFill>
+            <a:srgbClr val="F5F1E8"/>
+          </a:solidFill>
+          <a:ln w="12700">
+            <a:solidFill>
+              <a:srgbClr val="C9B991"/>
+            </a:solidFill>
+          </a:ln>
+          <a:effectLst/>
+        </p:spPr>
+        <p:style>
+          <a:lnRef idx="1">
+            <a:schemeClr val="accent1"/>
+          </a:lnRef>
+          <a:fillRef idx="3">
+            <a:schemeClr val="accent1"/>
+          </a:fillRef>
+          <a:effectRef idx="2">
+            <a:schemeClr val="accent1"/>
+          </a:effectRef>
+          <a:fontRef idx="minor">
+            <a:schemeClr val="lt1"/>
+          </a:fontRef>
+        </p:style>
+        <p:txBody>
+          <a:bodyPr wrap="square" lIns="27432" tIns="22860" rIns="27432" bIns="22860" rtlCol="0" anchor="ctr"/>
+          <a:lstStyle/>
+          <a:p>
+            <a:pPr algn="ctr"/>
+            <a:r>
+              <a:rPr sz="2000" b="0" i="1" dirty="0">
+                <a:solidFill>
+                  <a:srgbClr val="5C4826"/>
+                </a:solidFill>
+              </a:rPr>
+              <a:t/>
+            </a:r>
+          </a:p>
+        </p:txBody>
+      </p:sp>
+      <p:sp>
+        <p:nvSpPr>
+          <p:cNvPr id="1011" name="Card"/>
+          <p:cNvSpPr/>
+          <p:nvPr/>
+        </p:nvSpPr>
+        <p:spPr>
+          <a:xfrm>
+            <a:off x="2103120" y="4718304"/>
+            <a:ext cx="2194560" cy="603504"/>
+          </a:xfrm>
+          <a:prstGeom prst="rect">
+            <a:avLst/>
+          </a:prstGeom>
+          <a:solidFill>
+            <a:srgbClr val="F5F1E8"/>
+          </a:solidFill>
+          <a:ln w="12700">
+            <a:solidFill>
+              <a:srgbClr val="C9B991"/>
+            </a:solidFill>
+          </a:ln>
+          <a:effectLst/>
+        </p:spPr>
+        <p:style>
+          <a:lnRef idx="1">
+            <a:schemeClr val="accent1"/>
+          </a:lnRef>
+          <a:fillRef idx="3">
+            <a:schemeClr val="accent1"/>
+          </a:fillRef>
+          <a:effectRef idx="2">
+            <a:schemeClr val="accent1"/>
+          </a:effectRef>
+          <a:fontRef idx="minor">
+            <a:schemeClr val="lt1"/>
+          </a:fontRef>
+        </p:style>
+        <p:txBody>
+          <a:bodyPr wrap="square" lIns="27432" tIns="22860" rIns="27432" bIns="22860" rtlCol="0" anchor="ctr"/>
+          <a:lstStyle/>
+          <a:p>
+            <a:pPr algn="ctr"/>
+            <a:r>
+              <a:rPr sz="2000" b="0" i="1" dirty="0">
+                <a:solidFill>
+                  <a:srgbClr val="5C4826"/>
+                </a:solidFill>
+              </a:rPr>
+              <a:t/>
+            </a:r>
+          </a:p>
+        </p:txBody>
+      </p:sp>
+      <p:sp>
+        <p:nvSpPr>
+          <p:cNvPr id="1012" name="Card"/>
+          <p:cNvSpPr/>
+          <p:nvPr/>
+        </p:nvSpPr>
+        <p:spPr>
+          <a:xfrm>
+            <a:off x="4389120" y="4718304"/>
+            <a:ext cx="2011680" cy="603504"/>
+          </a:xfrm>
+          <a:prstGeom prst="rect">
+            <a:avLst/>
+          </a:prstGeom>
+          <a:solidFill>
+            <a:srgbClr val="F5F1E8"/>
+          </a:solidFill>
+          <a:ln w="12700">
+            <a:solidFill>
+              <a:srgbClr val="C9B991"/>
+            </a:solidFill>
+          </a:ln>
+          <a:effectLst/>
+        </p:spPr>
+        <p:style>
+          <a:lnRef idx="1">
+            <a:schemeClr val="accent1"/>
+          </a:lnRef>
+          <a:fillRef idx="3">
+            <a:schemeClr val="accent1"/>
+          </a:fillRef>
+          <a:effectRef idx="2">
+            <a:schemeClr val="accent1"/>
+          </a:effectRef>
+          <a:fontRef idx="minor">
+            <a:schemeClr val="lt1"/>
+          </a:fontRef>
+        </p:style>
+        <p:txBody>
+          <a:bodyPr wrap="square" lIns="27432" tIns="22860" rIns="27432" bIns="22860" rtlCol="0" anchor="ctr"/>
+          <a:lstStyle/>
+          <a:p>
+            <a:pPr algn="ctr"/>
+            <a:r>
+              <a:rPr sz="2000" b="0" i="1" dirty="0">
+                <a:solidFill>
+                  <a:srgbClr val="5C4826"/>
+                </a:solidFill>
+              </a:rPr>
+              <a:t/>
+            </a:r>
+          </a:p>
+        </p:txBody>
+      </p:sp>
+      <p:sp>
+        <p:nvSpPr>
+          <p:cNvPr id="1013" name="Card"/>
+          <p:cNvSpPr/>
+          <p:nvPr/>
+        </p:nvSpPr>
+        <p:spPr>
+          <a:xfrm>
+            <a:off x="6492240" y="4718304"/>
+            <a:ext cx="2103120" cy="603504"/>
+          </a:xfrm>
+          <a:prstGeom prst="rect">
+            <a:avLst/>
+          </a:prstGeom>
+          <a:solidFill>
+            <a:srgbClr val="F5F1E8"/>
+          </a:solidFill>
+          <a:ln w="12700">
+            <a:solidFill>
+              <a:srgbClr val="C9B991"/>
+            </a:solidFill>
+          </a:ln>
+          <a:effectLst/>
+        </p:spPr>
+        <p:style>
+          <a:lnRef idx="1">
+            <a:schemeClr val="accent1"/>
+          </a:lnRef>
+          <a:fillRef idx="3">
+            <a:schemeClr val="accent1"/>
+          </a:fillRef>
+          <a:effectRef idx="2">
+            <a:schemeClr val="accent1"/>
+          </a:effectRef>
+          <a:fontRef idx="minor">
+            <a:schemeClr val="lt1"/>
+          </a:fontRef>
+        </p:style>
+        <p:txBody>
+          <a:bodyPr wrap="square" lIns="27432" tIns="22860" rIns="27432" bIns="22860" rtlCol="0" anchor="ctr"/>
+          <a:lstStyle/>
+          <a:p>
+            <a:pPr algn="ctr"/>
+            <a:r>
+              <a:rPr sz="2000" b="0" i="1" dirty="0">
+                <a:solidFill>
+                  <a:srgbClr val="5C4826"/>
+                </a:solidFill>
+              </a:rPr>
+              <a:t/>
+            </a:r>
           </a:p>
         </p:txBody>
       </p:sp>
@@ -20820,12 +22137,7 @@
             <p:ph type="title"/>
           </p:nvPr>
         </p:nvSpPr>
-        <p:spPr>
-          <a:xfrm>
-            <a:off x="277148" y="118428"/>
-            <a:ext cx="9145148" cy="638175"/>
-          </a:xfrm>
-        </p:spPr>
+        <p:spPr/>
         <p:txBody>
           <a:bodyPr>
             <a:normAutofit fontScale="90000"/>
@@ -20833,12 +22145,12 @@
           <a:lstStyle/>
           <a:p>
             <a:r>
-              <a:rPr lang="en-US" sz="2400" b="0" i="0" dirty="0">
+              <a:rPr sz="2400" b="0" i="0">
                 <a:solidFill>
                   <a:srgbClr val="000000"/>
                 </a:solidFill>
               </a:rPr>
-              <a:t>Failure should change future engineering</a:t>
+              <a:t>What actually happened? July 2, 2019</a:t>
             </a:r>
           </a:p>
         </p:txBody>
@@ -20858,9 +22170,9 @@
           <a:bodyPr/>
           <a:lstStyle/>
           <a:p>
-            <a:fld id="{54DE72B0-FFEB-4C83-B4BD-F25961BEDFCA}" type="slidenum">
+            <a:fld id="{8CF8A65D-8523-4C39-BD83-5C787F1FA9B3}" type="slidenum">
               <a:rPr lang="en-US" smtClean="0"/>
-              <a:t>32</a:t>
+              <a:t>10</a:t>
             </a:fld>
             <a:endParaRPr lang="en-US"/>
           </a:p>
@@ -20868,14 +22180,14 @@
       </p:sp>
       <p:sp>
         <p:nvSpPr>
-          <p:cNvPr id="901" name="Block"/>
+          <p:cNvPr id="909" name="FooterBand"/>
           <p:cNvSpPr/>
           <p:nvPr/>
         </p:nvSpPr>
         <p:spPr>
           <a:xfrm>
-            <a:off x="2606040" y="1097280"/>
-            <a:ext cx="3931920" cy="548640"/>
+            <a:off x="274320" y="5513831"/>
+            <a:ext cx="8595360" cy="905256"/>
           </a:xfrm>
           <a:prstGeom prst="rect">
             <a:avLst/>
@@ -20908,26 +22220,143 @@
           <a:p>
             <a:pPr algn="ctr"/>
             <a:r>
-              <a:rPr sz="2000" b="1" i="0">
+              <a:rPr sz="2000" b="1" i="0" dirty="0">
                 <a:solidFill>
                   <a:srgbClr val="FFFFFF"/>
                 </a:solidFill>
               </a:rPr>
-              <a:t>OBSERVE</a:t>
+              <a:t>Which failure modes did we anticipate — and which did we miss?</a:t>
+            </a:r>
+          </a:p>
+          <a:p>
+            <a:pPr algn="ctr">
+              <a:spcBef>
+                <a:spcPts val="300"/>
+              </a:spcBef>
+            </a:pPr>
+            <a:r>
+              <a:rPr sz="2000" b="1" i="0" dirty="0">
+                <a:solidFill>
+                  <a:srgbClr val="FFFFFF"/>
+                </a:solidFill>
+              </a:rPr>
+              <a:t>Configuration shipped through a faster, less-gated path than code — again.</a:t>
+            </a:r>
+          </a:p>
+        </p:txBody>
+      </p:sp>
+      <p:sp>
+        <p:nvSpPr>
+          <p:cNvPr id="920" name="Block"/>
+          <p:cNvSpPr/>
+          <p:nvPr/>
+        </p:nvSpPr>
+        <p:spPr>
+          <a:xfrm>
+            <a:off x="548640" y="1143000"/>
+            <a:ext cx="2560320" cy="566928"/>
+          </a:xfrm>
+          <a:prstGeom prst="rect">
+            <a:avLst/>
+          </a:prstGeom>
+          <a:solidFill>
+            <a:srgbClr val="8E6F3E"/>
+          </a:solidFill>
+          <a:ln>
+            <a:noFill/>
+          </a:ln>
+          <a:effectLst/>
+        </p:spPr>
+        <p:style>
+          <a:lnRef idx="1">
+            <a:schemeClr val="accent1"/>
+          </a:lnRef>
+          <a:fillRef idx="3">
+            <a:schemeClr val="accent1"/>
+          </a:fillRef>
+          <a:effectRef idx="2">
+            <a:schemeClr val="accent1"/>
+          </a:effectRef>
+          <a:fontRef idx="minor">
+            <a:schemeClr val="lt1"/>
+          </a:fontRef>
+        </p:style>
+        <p:txBody>
+          <a:bodyPr wrap="square" lIns="27432" tIns="22860" rIns="27432" bIns="22860" rtlCol="0" anchor="ctr"/>
+          <a:lstStyle/>
+          <a:p>
+            <a:pPr algn="ctr"/>
+            <a:r>
+              <a:rPr sz="1200" b="1" i="0">
+                <a:solidFill>
+                  <a:srgbClr val="FFFFFF"/>
+                </a:solidFill>
+              </a:rPr>
+              <a:t>CLOUDFLARE</a:t>
+            </a:r>
+          </a:p>
+        </p:txBody>
+      </p:sp>
+      <p:sp>
+        <p:nvSpPr>
+          <p:cNvPr id="921" name="RowCaption"/>
+          <p:cNvSpPr/>
+          <p:nvPr/>
+        </p:nvSpPr>
+        <p:spPr>
+          <a:xfrm>
+            <a:off x="3383280" y="1143000"/>
+            <a:ext cx="5212080" cy="566928"/>
+          </a:xfrm>
+          <a:prstGeom prst="rect">
+            <a:avLst/>
+          </a:prstGeom>
+          <a:noFill/>
+          <a:ln>
+            <a:noFill/>
+          </a:ln>
+          <a:effectLst/>
+        </p:spPr>
+        <p:style>
+          <a:lnRef idx="1">
+            <a:schemeClr val="accent1"/>
+          </a:lnRef>
+          <a:fillRef idx="3">
+            <a:schemeClr val="accent1"/>
+          </a:fillRef>
+          <a:effectRef idx="2">
+            <a:schemeClr val="accent1"/>
+          </a:effectRef>
+          <a:fontRef idx="minor">
+            <a:schemeClr val="lt1"/>
+          </a:fontRef>
+        </p:style>
+        <p:txBody>
+          <a:bodyPr wrap="square" lIns="27432" tIns="22860" rIns="27432" bIns="22860" rtlCol="0" anchor="ctr"/>
+          <a:lstStyle/>
+          <a:p>
+            <a:pPr algn="l"/>
+            <a:r>
+              <a:rPr sz="2000" b="0" i="0">
+                <a:solidFill>
+                  <a:srgbClr val="555960"/>
+                </a:solidFill>
+              </a:rPr>
+              <a:t>operates a global edge network; its WAF inspects customers’ web traffic for attacks</a:t>
             </a:r>
           </a:p>
         </p:txBody>
       </p:sp>
       <p:cxnSp>
         <p:nvCxnSpPr>
-          <p:cNvPr id="902" name="Connector 901"/>
+          <p:cNvPr id="922" name="Connector 922"/>
           <p:cNvCxnSpPr/>
           <p:nvPr/>
         </p:nvCxnSpPr>
         <p:spPr>
           <a:xfrm>
-            <a:off x="4572000" y="1645919"/>
-            <a:ext cx="0" cy="274321"/>
+            <a:off x="1828800" y="1709928"/>
+            <a:ext cx="0" cy="393192"/>
           </a:xfrm>
           <a:prstGeom prst="line">
             <a:avLst/>
@@ -20956,25 +22385,23 @@
       </p:cxnSp>
       <p:sp>
         <p:nvSpPr>
-          <p:cNvPr id="903" name="Card"/>
+          <p:cNvPr id="923" name="Block"/>
           <p:cNvSpPr/>
           <p:nvPr/>
         </p:nvSpPr>
         <p:spPr>
           <a:xfrm>
-            <a:off x="2606040" y="1920240"/>
-            <a:ext cx="3931920" cy="548640"/>
+            <a:off x="548640" y="2103120"/>
+            <a:ext cx="2560320" cy="566928"/>
           </a:xfrm>
           <a:prstGeom prst="rect">
             <a:avLst/>
           </a:prstGeom>
           <a:solidFill>
-            <a:srgbClr val="F5F1E8"/>
+            <a:srgbClr val="8E6F3E"/>
           </a:solidFill>
-          <a:ln w="12700">
-            <a:solidFill>
-              <a:srgbClr val="C9B991"/>
-            </a:solidFill>
+          <a:ln>
+            <a:noFill/>
           </a:ln>
           <a:effectLst/>
         </p:spPr>
@@ -20998,31 +22425,76 @@
           <a:p>
             <a:pPr algn="ctr"/>
             <a:r>
-              <a:rPr sz="2000" b="0" i="1" dirty="0">
-                <a:solidFill>
-                  <a:srgbClr val="5C4826"/>
-                </a:solidFill>
-              </a:rPr>
-              <a:t>explain — a causal account the evidence supports</a:t>
-            </a:r>
-            <a:endParaRPr sz="2000" b="0" i="1" dirty="0">
-              <a:solidFill>
-                <a:srgbClr val="5C4826"/>
-              </a:solidFill>
-            </a:endParaRPr>
+              <a:rPr sz="1200" b="1" i="0">
+                <a:solidFill>
+                  <a:srgbClr val="FFFFFF"/>
+                </a:solidFill>
+              </a:rPr>
+              <a:t>WAF MANAGED RULES</a:t>
+            </a:r>
+          </a:p>
+        </p:txBody>
+      </p:sp>
+      <p:sp>
+        <p:nvSpPr>
+          <p:cNvPr id="924" name="RowCaption"/>
+          <p:cNvSpPr/>
+          <p:nvPr/>
+        </p:nvSpPr>
+        <p:spPr>
+          <a:xfrm>
+            <a:off x="3383280" y="2103120"/>
+            <a:ext cx="5212080" cy="566928"/>
+          </a:xfrm>
+          <a:prstGeom prst="rect">
+            <a:avLst/>
+          </a:prstGeom>
+          <a:noFill/>
+          <a:ln>
+            <a:noFill/>
+          </a:ln>
+          <a:effectLst/>
+        </p:spPr>
+        <p:style>
+          <a:lnRef idx="1">
+            <a:schemeClr val="accent1"/>
+          </a:lnRef>
+          <a:fillRef idx="3">
+            <a:schemeClr val="accent1"/>
+          </a:fillRef>
+          <a:effectRef idx="2">
+            <a:schemeClr val="accent1"/>
+          </a:effectRef>
+          <a:fontRef idx="minor">
+            <a:schemeClr val="lt1"/>
+          </a:fontRef>
+        </p:style>
+        <p:txBody>
+          <a:bodyPr wrap="square" lIns="27432" tIns="22860" rIns="27432" bIns="22860" rtlCol="0" anchor="ctr"/>
+          <a:lstStyle/>
+          <a:p>
+            <a:pPr algn="l"/>
+            <a:r>
+              <a:rPr sz="2000" b="0" i="0">
+                <a:solidFill>
+                  <a:srgbClr val="555960"/>
+                </a:solidFill>
+              </a:rPr>
+              <a:t>attack-detection patterns — often regular expressions — running on every edge server</a:t>
+            </a:r>
           </a:p>
         </p:txBody>
       </p:sp>
       <p:cxnSp>
         <p:nvCxnSpPr>
-          <p:cNvPr id="904" name="Connector 903"/>
+          <p:cNvPr id="925" name="Connector 925"/>
           <p:cNvCxnSpPr/>
           <p:nvPr/>
         </p:nvCxnSpPr>
         <p:spPr>
           <a:xfrm>
-            <a:off x="4572000" y="2468880"/>
-            <a:ext cx="0" cy="274320"/>
+            <a:off x="1828800" y="2670048"/>
+            <a:ext cx="0" cy="393192"/>
           </a:xfrm>
           <a:prstGeom prst="line">
             <a:avLst/>
@@ -21051,14 +22523,14 @@
       </p:cxnSp>
       <p:sp>
         <p:nvSpPr>
-          <p:cNvPr id="905" name="Block"/>
+          <p:cNvPr id="926" name="Block"/>
           <p:cNvSpPr/>
           <p:nvPr/>
         </p:nvSpPr>
         <p:spPr>
           <a:xfrm>
-            <a:off x="2606040" y="2743200"/>
-            <a:ext cx="3931920" cy="548640"/>
+            <a:off x="548640" y="3063240"/>
+            <a:ext cx="2560320" cy="566928"/>
           </a:xfrm>
           <a:prstGeom prst="rect">
             <a:avLst/>
@@ -21091,26 +22563,253 @@
           <a:p>
             <a:pPr algn="ctr"/>
             <a:r>
+              <a:rPr sz="1200" b="1" i="0" dirty="0">
+                <a:solidFill>
+                  <a:srgbClr val="FFFFFF"/>
+                </a:solidFill>
+              </a:rPr>
+              <a:t>THE DEFECTIVE RULE</a:t>
+            </a:r>
+          </a:p>
+        </p:txBody>
+      </p:sp>
+      <p:sp>
+        <p:nvSpPr>
+          <p:cNvPr id="927" name="RowCaption"/>
+          <p:cNvSpPr/>
+          <p:nvPr/>
+        </p:nvSpPr>
+        <p:spPr>
+          <a:xfrm>
+            <a:off x="3383280" y="3063240"/>
+            <a:ext cx="5212080" cy="566928"/>
+          </a:xfrm>
+          <a:prstGeom prst="rect">
+            <a:avLst/>
+          </a:prstGeom>
+          <a:noFill/>
+          <a:ln>
+            <a:noFill/>
+          </a:ln>
+          <a:effectLst/>
+        </p:spPr>
+        <p:style>
+          <a:lnRef idx="1">
+            <a:schemeClr val="accent1"/>
+          </a:lnRef>
+          <a:fillRef idx="3">
+            <a:schemeClr val="accent1"/>
+          </a:fillRef>
+          <a:effectRef idx="2">
+            <a:schemeClr val="accent1"/>
+          </a:effectRef>
+          <a:fontRef idx="minor">
+            <a:schemeClr val="lt1"/>
+          </a:fontRef>
+        </p:style>
+        <p:txBody>
+          <a:bodyPr wrap="square" lIns="27432" tIns="22860" rIns="27432" bIns="22860" rtlCol="0" anchor="ctr"/>
+          <a:lstStyle/>
+          <a:p>
+            <a:pPr algn="l"/>
+            <a:r>
+              <a:rPr sz="2000" b="0" i="0">
+                <a:solidFill>
+                  <a:srgbClr val="555960"/>
+                </a:solidFill>
+              </a:rPr>
+              <a:t>.*(?:.*=.*) — matching work grows explosively with input length (backtracking)</a:t>
+            </a:r>
+          </a:p>
+        </p:txBody>
+      </p:sp>
+      <p:cxnSp>
+        <p:nvCxnSpPr>
+          <p:cNvPr id="928" name="Connector 928"/>
+          <p:cNvCxnSpPr/>
+          <p:nvPr/>
+        </p:nvCxnSpPr>
+        <p:spPr>
+          <a:xfrm>
+            <a:off x="1828800" y="3630168"/>
+            <a:ext cx="0" cy="393192"/>
+          </a:xfrm>
+          <a:prstGeom prst="line">
+            <a:avLst/>
+          </a:prstGeom>
+          <a:ln w="19050">
+            <a:solidFill>
+              <a:srgbClr val="8E6F3E"/>
+            </a:solidFill>
+            <a:tailEnd type="triangle"/>
+          </a:ln>
+        </p:spPr>
+        <p:style>
+          <a:lnRef idx="2">
+            <a:schemeClr val="accent1"/>
+          </a:lnRef>
+          <a:fillRef idx="0">
+            <a:schemeClr val="accent1"/>
+          </a:fillRef>
+          <a:effectRef idx="1">
+            <a:schemeClr val="accent1"/>
+          </a:effectRef>
+          <a:fontRef idx="minor">
+            <a:schemeClr val="tx1"/>
+          </a:fontRef>
+        </p:style>
+      </p:cxnSp>
+      <p:sp>
+        <p:nvSpPr>
+          <p:cNvPr id="929" name="Block"/>
+          <p:cNvSpPr/>
+          <p:nvPr/>
+        </p:nvSpPr>
+        <p:spPr>
+          <a:xfrm>
+            <a:off x="548640" y="4023360"/>
+            <a:ext cx="2560320" cy="566928"/>
+          </a:xfrm>
+          <a:prstGeom prst="rect">
+            <a:avLst/>
+          </a:prstGeom>
+          <a:solidFill>
+            <a:srgbClr val="9A3F12"/>
+          </a:solidFill>
+          <a:ln>
+            <a:noFill/>
+          </a:ln>
+          <a:effectLst/>
+        </p:spPr>
+        <p:style>
+          <a:lnRef idx="1">
+            <a:schemeClr val="accent1"/>
+          </a:lnRef>
+          <a:fillRef idx="3">
+            <a:schemeClr val="accent1"/>
+          </a:fillRef>
+          <a:effectRef idx="2">
+            <a:schemeClr val="accent1"/>
+          </a:effectRef>
+          <a:fontRef idx="minor">
+            <a:schemeClr val="lt1"/>
+          </a:fontRef>
+        </p:style>
+        <p:txBody>
+          <a:bodyPr wrap="square" lIns="27432" tIns="22860" rIns="27432" bIns="22860" rtlCol="0" anchor="ctr"/>
+          <a:lstStyle/>
+          <a:p>
+            <a:pPr algn="ctr"/>
+            <a:r>
+              <a:rPr sz="1200" b="1" i="0">
+                <a:solidFill>
+                  <a:srgbClr val="FFFFFF"/>
+                </a:solidFill>
+              </a:rPr>
+              <a:t>27 MINUTES</a:t>
+            </a:r>
+          </a:p>
+        </p:txBody>
+      </p:sp>
+      <p:sp>
+        <p:nvSpPr>
+          <p:cNvPr id="930" name="RowCaption"/>
+          <p:cNvSpPr/>
+          <p:nvPr/>
+        </p:nvSpPr>
+        <p:spPr>
+          <a:xfrm>
+            <a:off x="3383280" y="4023360"/>
+            <a:ext cx="5212080" cy="566928"/>
+          </a:xfrm>
+          <a:prstGeom prst="rect">
+            <a:avLst/>
+          </a:prstGeom>
+          <a:noFill/>
+          <a:ln>
+            <a:noFill/>
+          </a:ln>
+          <a:effectLst/>
+        </p:spPr>
+        <p:style>
+          <a:lnRef idx="1">
+            <a:schemeClr val="accent1"/>
+          </a:lnRef>
+          <a:fillRef idx="3">
+            <a:schemeClr val="accent1"/>
+          </a:fillRef>
+          <a:effectRef idx="2">
+            <a:schemeClr val="accent1"/>
+          </a:effectRef>
+          <a:fontRef idx="minor">
+            <a:schemeClr val="lt1"/>
+          </a:fontRef>
+        </p:style>
+        <p:txBody>
+          <a:bodyPr wrap="square" lIns="27432" tIns="22860" rIns="27432" bIns="22860" rtlCol="0" anchor="ctr"/>
+          <a:lstStyle/>
+          <a:p>
+            <a:pPr algn="l"/>
+            <a:r>
               <a:rPr sz="2000" b="1" i="0" dirty="0">
                 <a:solidFill>
-                  <a:srgbClr val="FFFFFF"/>
-                </a:solidFill>
-              </a:rPr>
-              <a:t>LEARN</a:t>
-            </a:r>
-          </a:p>
-        </p:txBody>
-      </p:sp>
-      <p:sp>
-        <p:nvSpPr>
-          <p:cNvPr id="909" name="Block"/>
+                  <a:srgbClr val="555960"/>
+                </a:solidFill>
+              </a:rPr>
+              <a:t>CPU exhaustion from 13:42 UTC; rule killed globally 14:07; traffic normal 14:09</a:t>
+            </a:r>
+            <a:endParaRPr sz="2000" b="1" i="0" dirty="0">
+              <a:solidFill>
+                <a:srgbClr val="555960"/>
+              </a:solidFill>
+            </a:endParaRPr>
+          </a:p>
+        </p:txBody>
+      </p:sp>
+      <p:sp>
+        <p:nvSpPr>
+          <p:cNvPr id="915" name="Label"/>
+          <p:cNvSpPr txBox="1"/>
+          <p:nvPr/>
+        </p:nvSpPr>
+        <p:spPr>
+          <a:xfrm>
+            <a:off x="548640" y="4599432"/>
+            <a:ext cx="2560320" cy="274320"/>
+          </a:xfrm>
+          <a:prstGeom prst="rect">
+            <a:avLst/>
+          </a:prstGeom>
+          <a:noFill/>
+        </p:spPr>
+        <p:txBody>
+          <a:bodyPr wrap="square" lIns="27432" tIns="22860" rIns="27432" bIns="22860" anchor="t">
+            <a:spAutoFit/>
+          </a:bodyPr>
+          <a:lstStyle/>
+          <a:p>
+            <a:pPr algn="ctr"/>
+            <a:r>
+              <a:rPr sz="1200" b="1" i="0">
+                <a:solidFill>
+                  <a:srgbClr val="5C4826"/>
+                </a:solidFill>
+              </a:rPr>
+              <a:t>‘x=x’  →  23 steps</a:t>
+            </a:r>
+          </a:p>
+        </p:txBody>
+      </p:sp>
+      <p:sp>
+        <p:nvSpPr>
+          <p:cNvPr id="910" name="Block"/>
           <p:cNvSpPr/>
           <p:nvPr/>
         </p:nvSpPr>
         <p:spPr>
           <a:xfrm>
-            <a:off x="1005840" y="4160520"/>
-            <a:ext cx="2926080" cy="777240"/>
+            <a:off x="3291840" y="4626864"/>
+            <a:ext cx="237744" cy="182880"/>
           </a:xfrm>
           <a:prstGeom prst="rect">
             <a:avLst/>
@@ -21143,43 +22842,66 @@
           <a:p>
             <a:pPr algn="ctr"/>
             <a:r>
-              <a:rPr sz="1300" b="1" i="0">
+              <a:rPr sz="1200" b="1" i="0">
                 <a:solidFill>
                   <a:srgbClr val="FFFFFF"/>
                 </a:solidFill>
               </a:rPr>
-              <a:t>REFLECTION</a:t>
-            </a:r>
-          </a:p>
-          <a:p>
-            <a:pPr algn="ctr"/>
-            <a:r>
-              <a:rPr sz="1100" b="1" i="0">
-                <a:solidFill>
-                  <a:srgbClr val="FFFFFF"/>
-                </a:solidFill>
-              </a:rPr>
-              <a:t>changes the engineer</a:t>
-            </a:r>
-          </a:p>
-        </p:txBody>
-      </p:sp>
-      <p:sp>
-        <p:nvSpPr>
-          <p:cNvPr id="910" name="Block"/>
+              <a:t/>
+            </a:r>
+          </a:p>
+        </p:txBody>
+      </p:sp>
+      <p:sp>
+        <p:nvSpPr>
+          <p:cNvPr id="1000" name="Label"/>
+          <p:cNvSpPr txBox="1"/>
+          <p:nvPr/>
+        </p:nvSpPr>
+        <p:spPr>
+          <a:xfrm>
+            <a:off x="548640" y="4919472"/>
+            <a:ext cx="2560320" cy="274320"/>
+          </a:xfrm>
+          <a:prstGeom prst="rect">
+            <a:avLst/>
+          </a:prstGeom>
+          <a:noFill/>
+        </p:spPr>
+        <p:txBody>
+          <a:bodyPr wrap="square" lIns="27432" tIns="22860" rIns="27432" bIns="22860" anchor="t">
+            <a:spAutoFit/>
+          </a:bodyPr>
+          <a:lstStyle/>
+          <a:p>
+            <a:pPr algn="ctr"/>
+            <a:r>
+              <a:rPr sz="1200" b="1" i="0">
+                <a:solidFill>
+                  <a:srgbClr val="5C4826"/>
+                </a:solidFill>
+              </a:rPr>
+              <a:t>‘x=’ + twenty ‘x’s  →  555 steps</a:t>
+            </a:r>
+          </a:p>
+        </p:txBody>
+      </p:sp>
+      <p:sp>
+        <p:nvSpPr>
+          <p:cNvPr id="1001" name="Block"/>
           <p:cNvSpPr/>
           <p:nvPr/>
         </p:nvSpPr>
         <p:spPr>
           <a:xfrm>
-            <a:off x="5212080" y="4160520"/>
-            <a:ext cx="2926080" cy="777240"/>
+            <a:off x="3291840" y="4946904"/>
+            <a:ext cx="5486400" cy="182880"/>
           </a:xfrm>
           <a:prstGeom prst="rect">
             <a:avLst/>
           </a:prstGeom>
           <a:solidFill>
-            <a:srgbClr val="8E6F3E"/>
+            <a:srgbClr val="B3261E"/>
           </a:solidFill>
           <a:ln>
             <a:noFill/>
@@ -21206,337 +22928,114 @@
           <a:p>
             <a:pPr algn="ctr"/>
             <a:r>
-              <a:rPr sz="1300" b="1" i="0">
+              <a:rPr sz="1200" b="1" i="0">
                 <a:solidFill>
                   <a:srgbClr val="FFFFFF"/>
                 </a:solidFill>
               </a:rPr>
-              <a:t>ENGINEERING STRUCTURE</a:t>
-            </a:r>
-          </a:p>
-          <a:p>
-            <a:pPr algn="ctr"/>
-            <a:r>
-              <a:rPr sz="1100" b="1" i="0">
-                <a:solidFill>
-                  <a:srgbClr val="FFFFFF"/>
-                </a:solidFill>
-              </a:rPr>
-              <a:t>changes the environment</a:t>
-            </a:r>
-          </a:p>
-        </p:txBody>
-      </p:sp>
-      <p:sp>
-        <p:nvSpPr>
-          <p:cNvPr id="1000" name="Card"/>
-          <p:cNvSpPr/>
-          <p:nvPr/>
-        </p:nvSpPr>
-        <p:spPr>
-          <a:xfrm>
-            <a:off x="1005840" y="5303520"/>
-            <a:ext cx="2926080" cy="502920"/>
-          </a:xfrm>
-          <a:prstGeom prst="rect">
-            <a:avLst/>
-          </a:prstGeom>
-          <a:solidFill>
-            <a:srgbClr val="F5F1E8"/>
-          </a:solidFill>
-          <a:ln w="12700">
-            <a:solidFill>
-              <a:srgbClr val="C9B991"/>
-            </a:solidFill>
-          </a:ln>
-          <a:effectLst/>
-        </p:spPr>
-        <p:style>
-          <a:lnRef idx="1">
-            <a:schemeClr val="accent1"/>
-          </a:lnRef>
-          <a:fillRef idx="3">
-            <a:schemeClr val="accent1"/>
-          </a:fillRef>
-          <a:effectRef idx="2">
-            <a:schemeClr val="accent1"/>
-          </a:effectRef>
-          <a:fontRef idx="minor">
-            <a:schemeClr val="lt1"/>
-          </a:fontRef>
-        </p:style>
-        <p:txBody>
-          <a:bodyPr wrap="square" lIns="27432" tIns="22860" rIns="27432" bIns="22860" rtlCol="0" anchor="ctr"/>
-          <a:lstStyle/>
-          <a:p>
-            <a:pPr algn="ctr"/>
-            <a:r>
-              <a:rPr sz="2000" b="0" i="1" dirty="0">
+              <a:t/>
+            </a:r>
+          </a:p>
+        </p:txBody>
+      </p:sp>
+      <p:sp>
+        <p:nvSpPr>
+          <p:cNvPr id="1002" name="Label"/>
+          <p:cNvSpPr txBox="1"/>
+          <p:nvPr/>
+        </p:nvSpPr>
+        <p:spPr>
+          <a:xfrm>
+            <a:off x="3291840" y="5193792"/>
+            <a:ext cx="5120640" cy="256032"/>
+          </a:xfrm>
+          <a:prstGeom prst="rect">
+            <a:avLst/>
+          </a:prstGeom>
+          <a:noFill/>
+        </p:spPr>
+        <p:txBody>
+          <a:bodyPr wrap="square" lIns="27432" tIns="22860" rIns="27432" bIns="22860" anchor="t">
+            <a:spAutoFit/>
+          </a:bodyPr>
+          <a:lstStyle/>
+          <a:p>
+            <a:pPr algn="ctr"/>
+            <a:r>
+              <a:rPr sz="1000" b="1" i="0">
                 <a:solidFill>
                   <a:srgbClr val="5C4826"/>
                 </a:solidFill>
               </a:rPr>
-              <a:t>future judgment</a:t>
-            </a:r>
-            <a:endParaRPr sz="2000" b="0" i="1" dirty="0">
-              <a:solidFill>
-                <a:srgbClr val="5C4826"/>
-              </a:solidFill>
-            </a:endParaRPr>
-          </a:p>
-        </p:txBody>
-      </p:sp>
-      <p:sp>
-        <p:nvSpPr>
-          <p:cNvPr id="1001" name="Card"/>
-          <p:cNvSpPr/>
-          <p:nvPr/>
-        </p:nvSpPr>
-        <p:spPr>
-          <a:xfrm>
-            <a:off x="5212080" y="5303520"/>
-            <a:ext cx="2926080" cy="502920"/>
-          </a:xfrm>
-          <a:prstGeom prst="rect">
-            <a:avLst/>
-          </a:prstGeom>
-          <a:solidFill>
-            <a:srgbClr val="F5F1E8"/>
-          </a:solidFill>
-          <a:ln w="12700">
-            <a:solidFill>
-              <a:srgbClr val="C9B991"/>
-            </a:solidFill>
-          </a:ln>
-          <a:effectLst/>
-        </p:spPr>
-        <p:style>
-          <a:lnRef idx="1">
-            <a:schemeClr val="accent1"/>
-          </a:lnRef>
-          <a:fillRef idx="3">
-            <a:schemeClr val="accent1"/>
-          </a:fillRef>
-          <a:effectRef idx="2">
-            <a:schemeClr val="accent1"/>
-          </a:effectRef>
-          <a:fontRef idx="minor">
-            <a:schemeClr val="lt1"/>
-          </a:fontRef>
-        </p:style>
-        <p:txBody>
-          <a:bodyPr wrap="square" lIns="27432" tIns="22860" rIns="27432" bIns="22860" rtlCol="0" anchor="ctr"/>
-          <a:lstStyle/>
-          <a:p>
-            <a:pPr algn="ctr"/>
-            <a:r>
-              <a:rPr sz="2000" b="0" i="1" dirty="0">
+              <a:t>the same rule — the input grew from 3 to 22 characters</a:t>
+            </a:r>
+          </a:p>
+        </p:txBody>
+      </p:sp>
+      <p:sp>
+        <p:nvSpPr>
+          <p:cNvPr id="1003" name="Label"/>
+          <p:cNvSpPr txBox="1"/>
+          <p:nvPr/>
+        </p:nvSpPr>
+        <p:spPr>
+          <a:xfrm>
+            <a:off x="3383280" y="2706624"/>
+            <a:ext cx="5212080" cy="237744"/>
+          </a:xfrm>
+          <a:prstGeom prst="rect">
+            <a:avLst/>
+          </a:prstGeom>
+          <a:noFill/>
+        </p:spPr>
+        <p:txBody>
+          <a:bodyPr wrap="square" lIns="27432" tIns="22860" rIns="27432" bIns="22860" anchor="t">
+            <a:spAutoFit/>
+          </a:bodyPr>
+          <a:lstStyle/>
+          <a:p>
+            <a:pPr algn="ctr"/>
+            <a:r>
+              <a:rPr sz="1200" b="1" i="0">
                 <a:solidFill>
                   <a:srgbClr val="5C4826"/>
                 </a:solidFill>
               </a:rPr>
-              <a:t>future constraints</a:t>
-            </a:r>
-            <a:endParaRPr sz="2000" b="0" i="1" dirty="0">
-              <a:solidFill>
-                <a:srgbClr val="5C4826"/>
-              </a:solidFill>
-            </a:endParaRPr>
-          </a:p>
-        </p:txBody>
-      </p:sp>
-      <p:cxnSp>
-        <p:nvCxnSpPr>
-          <p:cNvPr id="911" name="Connector 911"/>
-          <p:cNvCxnSpPr/>
-          <p:nvPr/>
-        </p:nvCxnSpPr>
-        <p:spPr>
-          <a:xfrm flipH="1">
-            <a:off x="2468880" y="3291840"/>
-            <a:ext cx="2103120" cy="868679"/>
-          </a:xfrm>
-          <a:prstGeom prst="line">
-            <a:avLst/>
-          </a:prstGeom>
-          <a:ln w="28575">
-            <a:solidFill>
-              <a:srgbClr val="8E6F3E"/>
-            </a:solidFill>
-            <a:tailEnd type="triangle"/>
-          </a:ln>
-        </p:spPr>
-        <p:style>
-          <a:lnRef idx="2">
-            <a:schemeClr val="accent1"/>
-          </a:lnRef>
-          <a:fillRef idx="0">
-            <a:schemeClr val="accent1"/>
-          </a:fillRef>
-          <a:effectRef idx="1">
-            <a:schemeClr val="accent1"/>
-          </a:effectRef>
-          <a:fontRef idx="minor">
-            <a:schemeClr val="tx1"/>
-          </a:fontRef>
-        </p:style>
-      </p:cxnSp>
-      <p:cxnSp>
-        <p:nvCxnSpPr>
-          <p:cNvPr id="1002" name="Connector 911"/>
-          <p:cNvCxnSpPr/>
-          <p:nvPr/>
-        </p:nvCxnSpPr>
-        <p:spPr>
-          <a:xfrm>
-            <a:off x="4572000" y="3291840"/>
-            <a:ext cx="2103120" cy="868679"/>
-          </a:xfrm>
-          <a:prstGeom prst="line">
-            <a:avLst/>
-          </a:prstGeom>
-          <a:ln w="28575">
-            <a:solidFill>
-              <a:srgbClr val="8E6F3E"/>
-            </a:solidFill>
-            <a:tailEnd type="triangle"/>
-          </a:ln>
-        </p:spPr>
-        <p:style>
-          <a:lnRef idx="2">
-            <a:schemeClr val="accent1"/>
-          </a:lnRef>
-          <a:fillRef idx="0">
-            <a:schemeClr val="accent1"/>
-          </a:fillRef>
-          <a:effectRef idx="1">
-            <a:schemeClr val="accent1"/>
-          </a:effectRef>
-          <a:fontRef idx="minor">
-            <a:schemeClr val="tx1"/>
-          </a:fontRef>
-        </p:style>
-      </p:cxnSp>
-      <p:cxnSp>
-        <p:nvCxnSpPr>
-          <p:cNvPr id="1003" name="Connector 911"/>
-          <p:cNvCxnSpPr/>
-          <p:nvPr/>
-        </p:nvCxnSpPr>
-        <p:spPr>
-          <a:xfrm>
-            <a:off x="2468880" y="4937760"/>
-            <a:ext cx="0" cy="365759"/>
-          </a:xfrm>
-          <a:prstGeom prst="line">
-            <a:avLst/>
-          </a:prstGeom>
-          <a:ln w="28575">
-            <a:solidFill>
-              <a:srgbClr val="8E6F3E"/>
-            </a:solidFill>
-            <a:tailEnd type="triangle"/>
-          </a:ln>
-        </p:spPr>
-        <p:style>
-          <a:lnRef idx="2">
-            <a:schemeClr val="accent1"/>
-          </a:lnRef>
-          <a:fillRef idx="0">
-            <a:schemeClr val="accent1"/>
-          </a:fillRef>
-          <a:effectRef idx="1">
-            <a:schemeClr val="accent1"/>
-          </a:effectRef>
-          <a:fontRef idx="minor">
-            <a:schemeClr val="tx1"/>
-          </a:fontRef>
-        </p:style>
-      </p:cxnSp>
-      <p:cxnSp>
-        <p:nvCxnSpPr>
-          <p:cNvPr id="1004" name="Connector 911"/>
-          <p:cNvCxnSpPr/>
-          <p:nvPr/>
-        </p:nvCxnSpPr>
-        <p:spPr>
-          <a:xfrm>
-            <a:off x="6675120" y="4937760"/>
-            <a:ext cx="0" cy="365759"/>
-          </a:xfrm>
-          <a:prstGeom prst="line">
-            <a:avLst/>
-          </a:prstGeom>
-          <a:ln w="28575">
-            <a:solidFill>
-              <a:srgbClr val="8E6F3E"/>
-            </a:solidFill>
-            <a:tailEnd type="triangle"/>
-          </a:ln>
-        </p:spPr>
-        <p:style>
-          <a:lnRef idx="2">
-            <a:schemeClr val="accent1"/>
-          </a:lnRef>
-          <a:fillRef idx="0">
-            <a:schemeClr val="accent1"/>
-          </a:fillRef>
-          <a:effectRef idx="1">
-            <a:schemeClr val="accent1"/>
-          </a:effectRef>
-          <a:fontRef idx="minor">
-            <a:schemeClr val="tx1"/>
-          </a:fontRef>
-        </p:style>
-      </p:cxnSp>
-      <p:sp>
-        <p:nvSpPr>
-          <p:cNvPr id="1005" name="FooterBand"/>
-          <p:cNvSpPr/>
-          <p:nvPr/>
-        </p:nvSpPr>
-        <p:spPr>
-          <a:xfrm>
-            <a:off x="274320" y="5852159"/>
-            <a:ext cx="8595360" cy="566928"/>
-          </a:xfrm>
-          <a:prstGeom prst="rect">
-            <a:avLst/>
-          </a:prstGeom>
-          <a:solidFill>
-            <a:srgbClr val="8E6F3E"/>
-          </a:solidFill>
-          <a:ln>
-            <a:noFill/>
-          </a:ln>
-          <a:effectLst/>
-        </p:spPr>
-        <p:style>
-          <a:lnRef idx="1">
-            <a:schemeClr val="accent1"/>
-          </a:lnRef>
-          <a:fillRef idx="3">
-            <a:schemeClr val="accent1"/>
-          </a:fillRef>
-          <a:effectRef idx="2">
-            <a:schemeClr val="accent1"/>
-          </a:effectRef>
-          <a:fontRef idx="minor">
-            <a:schemeClr val="lt1"/>
-          </a:fontRef>
-        </p:style>
-        <p:txBody>
-          <a:bodyPr wrap="square" lIns="27432" tIns="22860" rIns="27432" bIns="22860" rtlCol="0" anchor="ctr"/>
-          <a:lstStyle/>
-          <a:p>
-            <a:pPr algn="ctr"/>
-            <a:r>
-              <a:rPr sz="2000" b="1" i="0" dirty="0">
-                <a:solidFill>
-                  <a:srgbClr val="FFFFFF"/>
-                </a:solidFill>
-              </a:rPr>
-              <a:t>What will be different when the next engineer or agent acts?</a:t>
+              <a:t>AMPLIFIER — deployed globally in seconds, with no staged rollout</a:t>
+            </a:r>
+          </a:p>
+        </p:txBody>
+      </p:sp>
+      <p:sp>
+        <p:nvSpPr>
+          <p:cNvPr id="1004" name="Label"/>
+          <p:cNvSpPr txBox="1"/>
+          <p:nvPr/>
+        </p:nvSpPr>
+        <p:spPr>
+          <a:xfrm>
+            <a:off x="3383280" y="3666744"/>
+            <a:ext cx="5212080" cy="237744"/>
+          </a:xfrm>
+          <a:prstGeom prst="rect">
+            <a:avLst/>
+          </a:prstGeom>
+          <a:noFill/>
+        </p:spPr>
+        <p:txBody>
+          <a:bodyPr wrap="square" lIns="27432" tIns="22860" rIns="27432" bIns="22860" anchor="t">
+            <a:spAutoFit/>
+          </a:bodyPr>
+          <a:lstStyle/>
+          <a:p>
+            <a:pPr algn="ctr"/>
+            <a:r>
+              <a:rPr sz="1200" b="1" i="0">
+                <a:solidFill>
+                  <a:srgbClr val="5C4826"/>
+                </a:solidFill>
+              </a:rPr>
+              <a:t>TRIGGER — a pathological regex exhausts CPU resources</a:t>
             </a:r>
           </a:p>
         </p:txBody>
@@ -21587,7 +23086,7 @@
                   <a:srgbClr val="000000"/>
                 </a:solidFill>
               </a:rPr>
-              <a:t>Could we have anticipated this failure?</a:t>
+              <a:t>Diagnose the Cloudflare outage</a:t>
             </a:r>
           </a:p>
         </p:txBody>
@@ -21623,8 +23122,8 @@
         </p:nvSpPr>
         <p:spPr>
           <a:xfrm>
-            <a:off x="2103120" y="1920240"/>
-            <a:ext cx="2194560" cy="713232"/>
+            <a:off x="4023360" y="1463040"/>
+            <a:ext cx="4572000" cy="640080"/>
           </a:xfrm>
           <a:prstGeom prst="rect">
             <a:avLst/>
@@ -21659,12 +23158,12 @@
           <a:p>
             <a:pPr algn="ctr"/>
             <a:r>
-              <a:rPr sz="1100" b="0" i="1" dirty="0">
+              <a:rPr sz="2000" b="0" i="1" dirty="0">
                 <a:solidFill>
                   <a:srgbClr val="5C4826"/>
                 </a:solidFill>
               </a:rPr>
-              <a:t>invalid content causes unsafe execution</a:t>
+              <a:t>what failed locally?</a:t>
             </a:r>
           </a:p>
         </p:txBody>
@@ -21677,8 +23176,8 @@
         </p:nvSpPr>
         <p:spPr>
           <a:xfrm>
-            <a:off x="2103120" y="2697480"/>
-            <a:ext cx="2194560" cy="713232"/>
+            <a:off x="4023360" y="2423160"/>
+            <a:ext cx="4572000" cy="640080"/>
           </a:xfrm>
           <a:prstGeom prst="rect">
             <a:avLst/>
@@ -21713,12 +23212,12 @@
           <a:p>
             <a:pPr algn="ctr"/>
             <a:r>
-              <a:rPr sz="1100" b="0" i="1">
+              <a:rPr sz="2000" b="0" i="1">
                 <a:solidFill>
                   <a:srgbClr val="5C4826"/>
                 </a:solidFill>
               </a:rPr>
-              <a:t>a defect escapes testing</a:t>
+              <a:t>why did the defect escape?</a:t>
             </a:r>
           </a:p>
         </p:txBody>
@@ -21731,8 +23230,8 @@
         </p:nvSpPr>
         <p:spPr>
           <a:xfrm>
-            <a:off x="365760" y="1920240"/>
-            <a:ext cx="1645920" cy="713232"/>
+            <a:off x="548640" y="1463040"/>
+            <a:ext cx="3291840" cy="640080"/>
           </a:xfrm>
           <a:prstGeom prst="rect">
             <a:avLst/>
@@ -21765,12 +23264,12 @@
           <a:p>
             <a:pPr algn="ctr"/>
             <a:r>
-              <a:rPr sz="1200" b="1" i="0" dirty="0">
+              <a:rPr sz="2000" b="1" i="0" dirty="0">
                 <a:solidFill>
                   <a:srgbClr val="FFFFFF"/>
                 </a:solidFill>
               </a:rPr>
-              <a:t>Interpret security content</a:t>
+              <a:t>COMPONENT-LEVEL</a:t>
             </a:r>
             <a:endParaRPr lang="en-US" sz="2000" b="1" i="0" dirty="0">
               <a:solidFill>
@@ -21788,8 +23287,8 @@
         </p:nvSpPr>
         <p:spPr>
           <a:xfrm>
-            <a:off x="365760" y="2697480"/>
-            <a:ext cx="1645920" cy="713232"/>
+            <a:off x="548640" y="2423160"/>
+            <a:ext cx="3291840" cy="640080"/>
           </a:xfrm>
           <a:prstGeom prst="rect">
             <a:avLst/>
@@ -21822,12 +23321,12 @@
           <a:p>
             <a:pPr algn="ctr"/>
             <a:r>
-              <a:rPr sz="1200" b="1" i="0" dirty="0">
+              <a:rPr sz="2000" b="1" i="0" dirty="0">
                 <a:solidFill>
                   <a:srgbClr val="FFFFFF"/>
                 </a:solidFill>
               </a:rPr>
-              <a:t>Validate content</a:t>
+              <a:t>SWISS CHEESE</a:t>
             </a:r>
             <a:endParaRPr lang="en-US" sz="2000" b="1" i="0" dirty="0">
               <a:solidFill>
@@ -21845,8 +23344,8 @@
         </p:nvSpPr>
         <p:spPr>
           <a:xfrm>
-            <a:off x="365760" y="3474720"/>
-            <a:ext cx="1645920" cy="713232"/>
+            <a:off x="548640" y="3383280"/>
+            <a:ext cx="3291840" cy="640080"/>
           </a:xfrm>
           <a:prstGeom prst="rect">
             <a:avLst/>
@@ -21879,12 +23378,12 @@
           <a:p>
             <a:pPr algn="ctr"/>
             <a:r>
-              <a:rPr sz="1200" b="1" i="0" dirty="0">
+              <a:rPr sz="2000" b="1" i="0" dirty="0">
                 <a:solidFill>
                   <a:srgbClr val="FFFFFF"/>
                 </a:solidFill>
               </a:rPr>
-              <a:t>Distribute content</a:t>
+              <a:t>STAMP</a:t>
             </a:r>
             <a:endParaRPr sz="2000" b="1" i="0" dirty="0">
               <a:solidFill>
@@ -21896,66 +23395,14 @@
       </p:sp>
       <p:sp>
         <p:nvSpPr>
-          <p:cNvPr id="912" name="Block"/>
-          <p:cNvSpPr/>
-          <p:nvPr/>
-        </p:nvSpPr>
-        <p:spPr>
-          <a:xfrm>
-            <a:off x="365760" y="4251960"/>
-            <a:ext cx="1645920" cy="713232"/>
-          </a:xfrm>
-          <a:prstGeom prst="rect">
-            <a:avLst/>
-          </a:prstGeom>
-          <a:solidFill>
-            <a:srgbClr val="8E6F3E"/>
-          </a:solidFill>
-          <a:ln>
-            <a:noFill/>
-          </a:ln>
-          <a:effectLst/>
-        </p:spPr>
-        <p:style>
-          <a:lnRef idx="1">
-            <a:schemeClr val="accent1"/>
-          </a:lnRef>
-          <a:fillRef idx="3">
-            <a:schemeClr val="accent1"/>
-          </a:fillRef>
-          <a:effectRef idx="2">
-            <a:schemeClr val="accent1"/>
-          </a:effectRef>
-          <a:fontRef idx="minor">
-            <a:schemeClr val="lt1"/>
-          </a:fontRef>
-        </p:style>
-        <p:txBody>
-          <a:bodyPr wrap="square" lIns="27432" tIns="22860" rIns="27432" bIns="22860" rtlCol="0" anchor="ctr"/>
-          <a:lstStyle/>
-          <a:p>
-            <a:pPr algn="ctr"/>
-            <a:r>
-              <a:rPr sz="1200" b="1" i="0" dirty="0">
-                <a:solidFill>
-                  <a:srgbClr val="FFFFFF"/>
-                </a:solidFill>
-              </a:rPr>
-              <a:t>Maintain service</a:t>
-            </a:r>
-          </a:p>
-        </p:txBody>
-      </p:sp>
-      <p:sp>
-        <p:nvSpPr>
           <p:cNvPr id="913" name="FooterBand"/>
           <p:cNvSpPr/>
           <p:nvPr/>
         </p:nvSpPr>
         <p:spPr>
           <a:xfrm>
-            <a:off x="274320" y="5852160"/>
-            <a:ext cx="8595360" cy="566928"/>
+            <a:off x="274320" y="5128591"/>
+            <a:ext cx="8595360" cy="1592884"/>
           </a:xfrm>
           <a:prstGeom prst="rect">
             <a:avLst/>
@@ -21991,7 +23438,29 @@
                   <a:schemeClr val="bg1"/>
                 </a:solidFill>
               </a:rPr>
-              <a:t>Which of these failure modes could occur in another security product?</a:t>
+              <a:t>YOUR TASK — choose ONE model. Explain the failure, propose an intervention,</a:t>
+            </a:r>
+          </a:p>
+          <a:p>
+            <a:pPr algn="ctr"/>
+            <a:r>
+              <a:rPr lang="en-US" sz="2000" b="1" i="0" dirty="0">
+                <a:solidFill>
+                  <a:schemeClr val="bg1"/>
+                </a:solidFill>
+              </a:rPr>
+              <a:t>identify who can implement it, and specify evidence that it works.</a:t>
+            </a:r>
+          </a:p>
+          <a:p>
+            <a:pPr algn="ctr"/>
+            <a:r>
+              <a:rPr lang="en-US" sz="2000" b="1" i="0" dirty="0">
+                <a:solidFill>
+                  <a:schemeClr val="bg1"/>
+                </a:solidFill>
+              </a:rPr>
+              <a:t>How should this incident change the FMEA for future WAF releases?</a:t>
             </a:r>
           </a:p>
         </p:txBody>
@@ -22004,8 +23473,8 @@
         </p:nvSpPr>
         <p:spPr>
           <a:xfrm>
-            <a:off x="2103120" y="3474720"/>
-            <a:ext cx="2194560" cy="713232"/>
+            <a:off x="4023360" y="3383280"/>
+            <a:ext cx="4572000" cy="640080"/>
           </a:xfrm>
           <a:prstGeom prst="rect">
             <a:avLst/>
@@ -22040,72 +23509,13 @@
           <a:p>
             <a:pPr algn="ctr"/>
             <a:r>
-              <a:rPr lang="en-US" sz="1100" b="0" i="1" dirty="0">
+              <a:rPr lang="en-US" sz="2000" b="0" i="1" dirty="0">
                 <a:solidFill>
                   <a:srgbClr val="5C4826"/>
                 </a:solidFill>
               </a:rPr>
-              <a:t>a defective update reaches all endpoints</a:t>
-            </a:r>
-          </a:p>
-        </p:txBody>
-      </p:sp>
-      <p:sp>
-        <p:nvSpPr>
-          <p:cNvPr id="4" name="Card"/>
-          <p:cNvSpPr/>
-          <p:nvPr/>
-        </p:nvSpPr>
-        <p:spPr>
-          <a:xfrm>
-            <a:off x="2103120" y="4251960"/>
-            <a:ext cx="2194560" cy="713232"/>
-          </a:xfrm>
-          <a:prstGeom prst="rect">
-            <a:avLst/>
-          </a:prstGeom>
-          <a:solidFill>
-            <a:srgbClr val="F5F1E8"/>
-          </a:solidFill>
-          <a:ln w="12700">
-            <a:solidFill>
-              <a:srgbClr val="C9B991"/>
-            </a:solidFill>
-          </a:ln>
-          <a:effectLst/>
-        </p:spPr>
-        <p:style>
-          <a:lnRef idx="1">
-            <a:schemeClr val="accent1"/>
-          </a:lnRef>
-          <a:fillRef idx="3">
-            <a:schemeClr val="accent1"/>
-          </a:fillRef>
-          <a:effectRef idx="2">
-            <a:schemeClr val="accent1"/>
-          </a:effectRef>
-          <a:fontRef idx="minor">
-            <a:schemeClr val="lt1"/>
-          </a:fontRef>
-        </p:style>
-        <p:txBody>
-          <a:bodyPr wrap="square" lIns="27432" tIns="22860" rIns="27432" bIns="22860" rtlCol="0" anchor="ctr"/>
-          <a:lstStyle/>
-          <a:p>
-            <a:pPr algn="ctr"/>
-            <a:r>
-              <a:rPr lang="en-US" sz="1100" b="0" i="1" dirty="0">
-                <a:solidFill>
-                  <a:srgbClr val="5C4826"/>
-                </a:solidFill>
-              </a:rPr>
-              <a:t>endpoint failure disables critical services</a:t>
-            </a:r>
-            <a:endParaRPr sz="2000" b="0" i="1" dirty="0">
-              <a:solidFill>
-                <a:srgbClr val="5C4826"/>
-              </a:solidFill>
-            </a:endParaRPr>
+              <a:t>what controls and feedback permitted the consequences?</a:t>
+            </a:r>
           </a:p>
         </p:txBody>
       </p:sp>
@@ -22117,8 +23527,8 @@
         </p:nvSpPr>
         <p:spPr>
           <a:xfrm>
-            <a:off x="365760" y="1572768"/>
-            <a:ext cx="1645920" cy="274320"/>
+            <a:off x="548640" y="1042415"/>
+            <a:ext cx="3291840" cy="274320"/>
           </a:xfrm>
           <a:prstGeom prst="rect">
             <a:avLst/>
@@ -22149,12 +23559,12 @@
           <a:p>
             <a:pPr algn="ctr"/>
             <a:r>
-              <a:rPr lang="en-US" sz="1200" b="1" i="0" dirty="0">
+              <a:rPr lang="en-US" sz="1400" b="1" i="0" dirty="0">
                 <a:solidFill>
                   <a:schemeClr val="bg1"/>
                 </a:solidFill>
               </a:rPr>
-              <a:t>FUNCTION</a:t>
+              <a:t>MODEL</a:t>
             </a:r>
             <a:endParaRPr sz="2800" b="1" i="0" dirty="0">
               <a:solidFill>
@@ -22172,8 +23582,8 @@
         </p:nvSpPr>
         <p:spPr>
           <a:xfrm>
-            <a:off x="2103120" y="1572768"/>
-            <a:ext cx="2194560" cy="274320"/>
+            <a:off x="4023360" y="1042415"/>
+            <a:ext cx="4572000" cy="274320"/>
           </a:xfrm>
           <a:prstGeom prst="rect">
             <a:avLst/>
@@ -22204,639 +23614,18 @@
           <a:p>
             <a:pPr algn="ctr"/>
             <a:r>
-              <a:rPr lang="en-US" sz="1200" b="1" i="0" dirty="0">
+              <a:rPr lang="en-US" sz="1400" b="1" i="0" dirty="0">
                 <a:solidFill>
                   <a:schemeClr val="bg1"/>
                 </a:solidFill>
               </a:rPr>
-              <a:t>FAILURE MODE</a:t>
+              <a:t>ITS QUESTION</a:t>
             </a:r>
             <a:endParaRPr sz="2800" b="1" i="0" dirty="0">
               <a:solidFill>
                 <a:schemeClr val="bg1"/>
               </a:solidFill>
             </a:endParaRPr>
-          </a:p>
-        </p:txBody>
-      </p:sp>
-      <p:sp>
-        <p:nvSpPr>
-          <p:cNvPr id="915" name="Label"/>
-          <p:cNvSpPr txBox="1"/>
-          <p:nvPr/>
-        </p:nvSpPr>
-        <p:spPr>
-          <a:xfrm>
-            <a:off x="548640" y="841248"/>
-            <a:ext cx="8046720" cy="566928"/>
-          </a:xfrm>
-          <a:prstGeom prst="rect">
-            <a:avLst/>
-          </a:prstGeom>
-          <a:noFill/>
-        </p:spPr>
-        <p:txBody>
-          <a:bodyPr wrap="square" lIns="27432" tIns="22860" rIns="27432" bIns="22860" anchor="t">
-            <a:spAutoFit/>
-          </a:bodyPr>
-          <a:lstStyle/>
-          <a:p>
-            <a:pPr algn="ctr"/>
-            <a:r>
-              <a:rPr sz="1200" b="1" i="1">
-                <a:solidFill>
-                  <a:srgbClr val="5C4826"/>
-                </a:solidFill>
-              </a:rPr>
-              <a:t>The three models explain a failure that has happened. FMEA — Failure Mode and Effects Analysis —</a:t>
-            </a:r>
-          </a:p>
-          <a:p>
-            <a:pPr algn="ctr"/>
-            <a:r>
-              <a:rPr sz="1200" b="1" i="1">
-                <a:solidFill>
-                  <a:srgbClr val="5C4826"/>
-                </a:solidFill>
-              </a:rPr>
-              <a:t>searches for failures that have not happened yet: function by function, what could fail, with what effect, held by which control?</a:t>
-            </a:r>
-          </a:p>
-        </p:txBody>
-      </p:sp>
-      <p:sp>
-        <p:nvSpPr>
-          <p:cNvPr id="1000" name="ColumnHeading"/>
-          <p:cNvSpPr/>
-          <p:nvPr/>
-        </p:nvSpPr>
-        <p:spPr>
-          <a:xfrm>
-            <a:off x="4389120" y="1572768"/>
-            <a:ext cx="1828800" cy="274320"/>
-          </a:xfrm>
-          <a:prstGeom prst="rect">
-            <a:avLst/>
-          </a:prstGeom>
-          <a:noFill/>
-          <a:ln>
-            <a:noFill/>
-          </a:ln>
-          <a:effectLst/>
-        </p:spPr>
-        <p:style>
-          <a:lnRef idx="1">
-            <a:schemeClr val="accent1"/>
-          </a:lnRef>
-          <a:fillRef idx="3">
-            <a:schemeClr val="accent1"/>
-          </a:fillRef>
-          <a:effectRef idx="2">
-            <a:schemeClr val="accent1"/>
-          </a:effectRef>
-          <a:fontRef idx="minor">
-            <a:schemeClr val="lt1"/>
-          </a:fontRef>
-        </p:style>
-        <p:txBody>
-          <a:bodyPr wrap="square" lIns="27432" tIns="22860" rIns="27432" bIns="22860" rtlCol="0" anchor="ctr"/>
-          <a:lstStyle/>
-          <a:p>
-            <a:pPr algn="ctr"/>
-            <a:r>
-              <a:rPr lang="en-US" sz="1200" b="1" i="0" dirty="0">
-                <a:solidFill>
-                  <a:schemeClr val="bg1"/>
-                </a:solidFill>
-              </a:rPr>
-              <a:t>EFFECT</a:t>
-            </a:r>
-            <a:endParaRPr sz="2800" b="1" i="0" dirty="0">
-              <a:solidFill>
-                <a:schemeClr val="bg1"/>
-              </a:solidFill>
-            </a:endParaRPr>
-          </a:p>
-        </p:txBody>
-      </p:sp>
-      <p:sp>
-        <p:nvSpPr>
-          <p:cNvPr id="1001" name="ColumnHeading"/>
-          <p:cNvSpPr/>
-          <p:nvPr/>
-        </p:nvSpPr>
-        <p:spPr>
-          <a:xfrm>
-            <a:off x="6309360" y="1572768"/>
-            <a:ext cx="2286000" cy="274320"/>
-          </a:xfrm>
-          <a:prstGeom prst="rect">
-            <a:avLst/>
-          </a:prstGeom>
-          <a:noFill/>
-          <a:ln>
-            <a:noFill/>
-          </a:ln>
-          <a:effectLst/>
-        </p:spPr>
-        <p:style>
-          <a:lnRef idx="1">
-            <a:schemeClr val="accent1"/>
-          </a:lnRef>
-          <a:fillRef idx="3">
-            <a:schemeClr val="accent1"/>
-          </a:fillRef>
-          <a:effectRef idx="2">
-            <a:schemeClr val="accent1"/>
-          </a:effectRef>
-          <a:fontRef idx="minor">
-            <a:schemeClr val="lt1"/>
-          </a:fontRef>
-        </p:style>
-        <p:txBody>
-          <a:bodyPr wrap="square" lIns="27432" tIns="22860" rIns="27432" bIns="22860" rtlCol="0" anchor="ctr"/>
-          <a:lstStyle/>
-          <a:p>
-            <a:pPr algn="ctr"/>
-            <a:r>
-              <a:rPr lang="en-US" sz="1200" b="1" i="0" dirty="0">
-                <a:solidFill>
-                  <a:schemeClr val="bg1"/>
-                </a:solidFill>
-              </a:rPr>
-              <a:t>CANDIDATE CONTROL</a:t>
-            </a:r>
-            <a:endParaRPr sz="2800" b="1" i="0" dirty="0">
-              <a:solidFill>
-                <a:schemeClr val="bg1"/>
-              </a:solidFill>
-            </a:endParaRPr>
-          </a:p>
-        </p:txBody>
-      </p:sp>
-      <p:sp>
-        <p:nvSpPr>
-          <p:cNvPr id="1002" name="Card"/>
-          <p:cNvSpPr/>
-          <p:nvPr/>
-        </p:nvSpPr>
-        <p:spPr>
-          <a:xfrm>
-            <a:off x="4389120" y="1920240"/>
-            <a:ext cx="1828800" cy="713232"/>
-          </a:xfrm>
-          <a:prstGeom prst="rect">
-            <a:avLst/>
-          </a:prstGeom>
-          <a:solidFill>
-            <a:srgbClr val="F5F1E8"/>
-          </a:solidFill>
-          <a:ln w="12700">
-            <a:solidFill>
-              <a:srgbClr val="C9B991"/>
-            </a:solidFill>
-          </a:ln>
-          <a:effectLst/>
-        </p:spPr>
-        <p:style>
-          <a:lnRef idx="1">
-            <a:schemeClr val="accent1"/>
-          </a:lnRef>
-          <a:fillRef idx="3">
-            <a:schemeClr val="accent1"/>
-          </a:fillRef>
-          <a:effectRef idx="2">
-            <a:schemeClr val="accent1"/>
-          </a:effectRef>
-          <a:fontRef idx="minor">
-            <a:schemeClr val="lt1"/>
-          </a:fontRef>
-        </p:style>
-        <p:txBody>
-          <a:bodyPr wrap="square" lIns="27432" tIns="22860" rIns="27432" bIns="22860" rtlCol="0" anchor="ctr"/>
-          <a:lstStyle/>
-          <a:p>
-            <a:pPr algn="ctr"/>
-            <a:r>
-              <a:rPr sz="1100" b="0" i="1" dirty="0">
-                <a:solidFill>
-                  <a:srgbClr val="5C4826"/>
-                </a:solidFill>
-              </a:rPr>
-              <a:t>endpoint failure</a:t>
-            </a:r>
-          </a:p>
-        </p:txBody>
-      </p:sp>
-      <p:sp>
-        <p:nvSpPr>
-          <p:cNvPr id="1003" name="Card"/>
-          <p:cNvSpPr/>
-          <p:nvPr/>
-        </p:nvSpPr>
-        <p:spPr>
-          <a:xfrm>
-            <a:off x="6309360" y="1920240"/>
-            <a:ext cx="2286000" cy="713232"/>
-          </a:xfrm>
-          <a:prstGeom prst="rect">
-            <a:avLst/>
-          </a:prstGeom>
-          <a:solidFill>
-            <a:srgbClr val="F5F1E8"/>
-          </a:solidFill>
-          <a:ln w="12700">
-            <a:solidFill>
-              <a:srgbClr val="C9B991"/>
-            </a:solidFill>
-          </a:ln>
-          <a:effectLst/>
-        </p:spPr>
-        <p:style>
-          <a:lnRef idx="1">
-            <a:schemeClr val="accent1"/>
-          </a:lnRef>
-          <a:fillRef idx="3">
-            <a:schemeClr val="accent1"/>
-          </a:fillRef>
-          <a:effectRef idx="2">
-            <a:schemeClr val="accent1"/>
-          </a:effectRef>
-          <a:fontRef idx="minor">
-            <a:schemeClr val="lt1"/>
-          </a:fontRef>
-        </p:style>
-        <p:txBody>
-          <a:bodyPr wrap="square" lIns="27432" tIns="22860" rIns="27432" bIns="22860" rtlCol="0" anchor="ctr"/>
-          <a:lstStyle/>
-          <a:p>
-            <a:pPr algn="ctr"/>
-            <a:r>
-              <a:rPr sz="1100" b="0" i="1" dirty="0">
-                <a:solidFill>
-                  <a:srgbClr val="5C4826"/>
-                </a:solidFill>
-              </a:rPr>
-              <a:t>contract validation</a:t>
-            </a:r>
-          </a:p>
-        </p:txBody>
-      </p:sp>
-      <p:sp>
-        <p:nvSpPr>
-          <p:cNvPr id="1004" name="Card"/>
-          <p:cNvSpPr/>
-          <p:nvPr/>
-        </p:nvSpPr>
-        <p:spPr>
-          <a:xfrm>
-            <a:off x="4389120" y="2697480"/>
-            <a:ext cx="1828800" cy="713232"/>
-          </a:xfrm>
-          <a:prstGeom prst="rect">
-            <a:avLst/>
-          </a:prstGeom>
-          <a:solidFill>
-            <a:srgbClr val="F5F1E8"/>
-          </a:solidFill>
-          <a:ln w="12700">
-            <a:solidFill>
-              <a:srgbClr val="C9B991"/>
-            </a:solidFill>
-          </a:ln>
-          <a:effectLst/>
-        </p:spPr>
-        <p:style>
-          <a:lnRef idx="1">
-            <a:schemeClr val="accent1"/>
-          </a:lnRef>
-          <a:fillRef idx="3">
-            <a:schemeClr val="accent1"/>
-          </a:fillRef>
-          <a:effectRef idx="2">
-            <a:schemeClr val="accent1"/>
-          </a:effectRef>
-          <a:fontRef idx="minor">
-            <a:schemeClr val="lt1"/>
-          </a:fontRef>
-        </p:style>
-        <p:txBody>
-          <a:bodyPr wrap="square" lIns="27432" tIns="22860" rIns="27432" bIns="22860" rtlCol="0" anchor="ctr"/>
-          <a:lstStyle/>
-          <a:p>
-            <a:pPr algn="ctr"/>
-            <a:r>
-              <a:rPr sz="1100" b="0" i="1" dirty="0">
-                <a:solidFill>
-                  <a:srgbClr val="5C4826"/>
-                </a:solidFill>
-              </a:rPr>
-              <a:t>defective update released</a:t>
-            </a:r>
-          </a:p>
-        </p:txBody>
-      </p:sp>
-      <p:sp>
-        <p:nvSpPr>
-          <p:cNvPr id="1005" name="Card"/>
-          <p:cNvSpPr/>
-          <p:nvPr/>
-        </p:nvSpPr>
-        <p:spPr>
-          <a:xfrm>
-            <a:off x="6309360" y="2697480"/>
-            <a:ext cx="2286000" cy="713232"/>
-          </a:xfrm>
-          <a:prstGeom prst="rect">
-            <a:avLst/>
-          </a:prstGeom>
-          <a:solidFill>
-            <a:srgbClr val="F5F1E8"/>
-          </a:solidFill>
-          <a:ln w="12700">
-            <a:solidFill>
-              <a:srgbClr val="C9B991"/>
-            </a:solidFill>
-          </a:ln>
-          <a:effectLst/>
-        </p:spPr>
-        <p:style>
-          <a:lnRef idx="1">
-            <a:schemeClr val="accent1"/>
-          </a:lnRef>
-          <a:fillRef idx="3">
-            <a:schemeClr val="accent1"/>
-          </a:fillRef>
-          <a:effectRef idx="2">
-            <a:schemeClr val="accent1"/>
-          </a:effectRef>
-          <a:fontRef idx="minor">
-            <a:schemeClr val="lt1"/>
-          </a:fontRef>
-        </p:style>
-        <p:txBody>
-          <a:bodyPr wrap="square" lIns="27432" tIns="22860" rIns="27432" bIns="22860" rtlCol="0" anchor="ctr"/>
-          <a:lstStyle/>
-          <a:p>
-            <a:pPr algn="ctr"/>
-            <a:r>
-              <a:rPr sz="1100" b="0" i="1" dirty="0">
-                <a:solidFill>
-                  <a:srgbClr val="5C4826"/>
-                </a:solidFill>
-              </a:rPr>
-              <a:t>independent compatibility tests</a:t>
-            </a:r>
-          </a:p>
-        </p:txBody>
-      </p:sp>
-      <p:sp>
-        <p:nvSpPr>
-          <p:cNvPr id="1006" name="Card"/>
-          <p:cNvSpPr/>
-          <p:nvPr/>
-        </p:nvSpPr>
-        <p:spPr>
-          <a:xfrm>
-            <a:off x="4389120" y="3474720"/>
-            <a:ext cx="1828800" cy="713232"/>
-          </a:xfrm>
-          <a:prstGeom prst="rect">
-            <a:avLst/>
-          </a:prstGeom>
-          <a:solidFill>
-            <a:srgbClr val="F5F1E8"/>
-          </a:solidFill>
-          <a:ln w="12700">
-            <a:solidFill>
-              <a:srgbClr val="C9B991"/>
-            </a:solidFill>
-          </a:ln>
-          <a:effectLst/>
-        </p:spPr>
-        <p:style>
-          <a:lnRef idx="1">
-            <a:schemeClr val="accent1"/>
-          </a:lnRef>
-          <a:fillRef idx="3">
-            <a:schemeClr val="accent1"/>
-          </a:fillRef>
-          <a:effectRef idx="2">
-            <a:schemeClr val="accent1"/>
-          </a:effectRef>
-          <a:fontRef idx="minor">
-            <a:schemeClr val="lt1"/>
-          </a:fontRef>
-        </p:style>
-        <p:txBody>
-          <a:bodyPr wrap="square" lIns="27432" tIns="22860" rIns="27432" bIns="22860" rtlCol="0" anchor="ctr"/>
-          <a:lstStyle/>
-          <a:p>
-            <a:pPr algn="ctr"/>
-            <a:r>
-              <a:rPr sz="1100" b="0" i="1" dirty="0">
-                <a:solidFill>
-                  <a:srgbClr val="5C4826"/>
-                </a:solidFill>
-              </a:rPr>
-              <a:t>widespread outage</a:t>
-            </a:r>
-          </a:p>
-        </p:txBody>
-      </p:sp>
-      <p:sp>
-        <p:nvSpPr>
-          <p:cNvPr id="1007" name="Card"/>
-          <p:cNvSpPr/>
-          <p:nvPr/>
-        </p:nvSpPr>
-        <p:spPr>
-          <a:xfrm>
-            <a:off x="6309360" y="3474720"/>
-            <a:ext cx="2286000" cy="713232"/>
-          </a:xfrm>
-          <a:prstGeom prst="rect">
-            <a:avLst/>
-          </a:prstGeom>
-          <a:solidFill>
-            <a:srgbClr val="F5F1E8"/>
-          </a:solidFill>
-          <a:ln w="12700">
-            <a:solidFill>
-              <a:srgbClr val="C9B991"/>
-            </a:solidFill>
-          </a:ln>
-          <a:effectLst/>
-        </p:spPr>
-        <p:style>
-          <a:lnRef idx="1">
-            <a:schemeClr val="accent1"/>
-          </a:lnRef>
-          <a:fillRef idx="3">
-            <a:schemeClr val="accent1"/>
-          </a:fillRef>
-          <a:effectRef idx="2">
-            <a:schemeClr val="accent1"/>
-          </a:effectRef>
-          <a:fontRef idx="minor">
-            <a:schemeClr val="lt1"/>
-          </a:fontRef>
-        </p:style>
-        <p:txBody>
-          <a:bodyPr wrap="square" lIns="27432" tIns="22860" rIns="27432" bIns="22860" rtlCol="0" anchor="ctr"/>
-          <a:lstStyle/>
-          <a:p>
-            <a:pPr algn="ctr"/>
-            <a:r>
-              <a:rPr sz="1100" b="0" i="1" dirty="0">
-                <a:solidFill>
-                  <a:srgbClr val="5C4826"/>
-                </a:solidFill>
-              </a:rPr>
-              <a:t>staged rollout + demonstrated halt</a:t>
-            </a:r>
-          </a:p>
-        </p:txBody>
-      </p:sp>
-      <p:sp>
-        <p:nvSpPr>
-          <p:cNvPr id="1008" name="Card"/>
-          <p:cNvSpPr/>
-          <p:nvPr/>
-        </p:nvSpPr>
-        <p:spPr>
-          <a:xfrm>
-            <a:off x="4389120" y="4251960"/>
-            <a:ext cx="1828800" cy="713232"/>
-          </a:xfrm>
-          <a:prstGeom prst="rect">
-            <a:avLst/>
-          </a:prstGeom>
-          <a:solidFill>
-            <a:srgbClr val="F5F1E8"/>
-          </a:solidFill>
-          <a:ln w="12700">
-            <a:solidFill>
-              <a:srgbClr val="C9B991"/>
-            </a:solidFill>
-          </a:ln>
-          <a:effectLst/>
-        </p:spPr>
-        <p:style>
-          <a:lnRef idx="1">
-            <a:schemeClr val="accent1"/>
-          </a:lnRef>
-          <a:fillRef idx="3">
-            <a:schemeClr val="accent1"/>
-          </a:fillRef>
-          <a:effectRef idx="2">
-            <a:schemeClr val="accent1"/>
-          </a:effectRef>
-          <a:fontRef idx="minor">
-            <a:schemeClr val="lt1"/>
-          </a:fontRef>
-        </p:style>
-        <p:txBody>
-          <a:bodyPr wrap="square" lIns="27432" tIns="22860" rIns="27432" bIns="22860" rtlCol="0" anchor="ctr"/>
-          <a:lstStyle/>
-          <a:p>
-            <a:pPr algn="ctr"/>
-            <a:r>
-              <a:rPr sz="1100" b="0" i="1" dirty="0">
-                <a:solidFill>
-                  <a:srgbClr val="5C4826"/>
-                </a:solidFill>
-              </a:rPr>
-              <a:t>service disruption</a:t>
-            </a:r>
-          </a:p>
-        </p:txBody>
-      </p:sp>
-      <p:sp>
-        <p:nvSpPr>
-          <p:cNvPr id="1009" name="Card"/>
-          <p:cNvSpPr/>
-          <p:nvPr/>
-        </p:nvSpPr>
-        <p:spPr>
-          <a:xfrm>
-            <a:off x="6309360" y="4251960"/>
-            <a:ext cx="2286000" cy="713232"/>
-          </a:xfrm>
-          <a:prstGeom prst="rect">
-            <a:avLst/>
-          </a:prstGeom>
-          <a:solidFill>
-            <a:srgbClr val="F5F1E8"/>
-          </a:solidFill>
-          <a:ln w="12700">
-            <a:solidFill>
-              <a:srgbClr val="C9B991"/>
-            </a:solidFill>
-          </a:ln>
-          <a:effectLst/>
-        </p:spPr>
-        <p:style>
-          <a:lnRef idx="1">
-            <a:schemeClr val="accent1"/>
-          </a:lnRef>
-          <a:fillRef idx="3">
-            <a:schemeClr val="accent1"/>
-          </a:fillRef>
-          <a:effectRef idx="2">
-            <a:schemeClr val="accent1"/>
-          </a:effectRef>
-          <a:fontRef idx="minor">
-            <a:schemeClr val="lt1"/>
-          </a:fontRef>
-        </p:style>
-        <p:txBody>
-          <a:bodyPr wrap="square" lIns="27432" tIns="22860" rIns="27432" bIns="22860" rtlCol="0" anchor="ctr"/>
-          <a:lstStyle/>
-          <a:p>
-            <a:pPr algn="ctr"/>
-            <a:r>
-              <a:rPr sz="1100" b="0" i="1" dirty="0">
-                <a:solidFill>
-                  <a:srgbClr val="5C4826"/>
-                </a:solidFill>
-              </a:rPr>
-              <a:t>independent service paths</a:t>
-            </a:r>
-          </a:p>
-        </p:txBody>
-      </p:sp>
-      <p:sp>
-        <p:nvSpPr>
-          <p:cNvPr id="1010" name="Label"/>
-          <p:cNvSpPr txBox="1"/>
-          <p:nvPr/>
-        </p:nvSpPr>
-        <p:spPr>
-          <a:xfrm>
-            <a:off x="548640" y="5102352"/>
-            <a:ext cx="8046720" cy="365760"/>
-          </a:xfrm>
-          <a:prstGeom prst="rect">
-            <a:avLst/>
-          </a:prstGeom>
-          <a:noFill/>
-        </p:spPr>
-        <p:txBody>
-          <a:bodyPr wrap="square" lIns="27432" tIns="22860" rIns="27432" bIns="22860" anchor="t">
-            <a:spAutoFit/>
-          </a:bodyPr>
-          <a:lstStyle/>
-          <a:p>
-            <a:pPr algn="ctr"/>
-            <a:r>
-              <a:rPr sz="1200" b="1" i="1">
-                <a:solidFill>
-                  <a:srgbClr val="5C4826"/>
-                </a:solidFill>
-              </a:rPr>
-              <a:t>How often will each mode occur? Occurrence stays ‘?’ — which modes warrant action even when their probabilities are unknown?</a:t>
-            </a:r>
           </a:p>
         </p:txBody>
       </p:sp>
@@ -23633,7 +24422,12 @@
             <p:ph type="title"/>
           </p:nvPr>
         </p:nvSpPr>
-        <p:spPr/>
+        <p:spPr>
+          <a:xfrm>
+            <a:off x="277148" y="118428"/>
+            <a:ext cx="9145148" cy="638175"/>
+          </a:xfrm>
+        </p:spPr>
         <p:txBody>
           <a:bodyPr>
             <a:normAutofit fontScale="90000"/>
@@ -23641,12 +24435,12 @@
           <a:lstStyle/>
           <a:p>
             <a:r>
-              <a:rPr sz="2400" b="0" i="0">
+              <a:rPr lang="en-US" sz="2400" b="0" i="0" dirty="0">
                 <a:solidFill>
                   <a:srgbClr val="000000"/>
                 </a:solidFill>
               </a:rPr>
-              <a:t>Apply FMEA to an unfamiliar system</a:t>
+              <a:t>Failure should change future engineering</a:t>
             </a:r>
           </a:p>
         </p:txBody>
@@ -23666,9 +24460,9 @@
           <a:bodyPr/>
           <a:lstStyle/>
           <a:p>
-            <a:fld id="{8CF8A65D-8523-4C39-BD83-5C787F1FA9B3}" type="slidenum">
+            <a:fld id="{54DE72B0-FFEB-4C83-B4BD-F25961BEDFCA}" type="slidenum">
               <a:rPr lang="en-US" smtClean="0"/>
-              <a:t>10</a:t>
+              <a:t>32</a:t>
             </a:fld>
             <a:endParaRPr lang="en-US"/>
           </a:p>
@@ -23676,14 +24470,14 @@
       </p:sp>
       <p:sp>
         <p:nvSpPr>
-          <p:cNvPr id="909" name="FooterBand"/>
+          <p:cNvPr id="901" name="Block"/>
           <p:cNvSpPr/>
           <p:nvPr/>
         </p:nvSpPr>
         <p:spPr>
           <a:xfrm>
-            <a:off x="274320" y="5513831"/>
-            <a:ext cx="8595360" cy="905256"/>
+            <a:off x="2606040" y="1097280"/>
+            <a:ext cx="3931920" cy="548640"/>
           </a:xfrm>
           <a:prstGeom prst="rect">
             <a:avLst/>
@@ -23716,713 +24510,52 @@
           <a:p>
             <a:pPr algn="ctr"/>
             <a:r>
-              <a:rPr sz="2000" b="1" i="0" dirty="0">
+              <a:rPr sz="2000" b="1" i="0">
                 <a:solidFill>
                   <a:srgbClr val="FFFFFF"/>
                 </a:solidFill>
               </a:rPr>
-              <a:t>YOUR TASK (2–3 minutes, with a partner): at least one failure mode per function.</a:t>
-            </a:r>
-          </a:p>
-          <a:p>
-            <a:pPr algn="ctr">
-              <a:spcBef>
-                <a:spcPts val="300"/>
-              </a:spcBef>
-            </a:pPr>
-            <a:r>
-              <a:rPr sz="2000" b="1" i="0" dirty="0">
-                <a:solidFill>
-                  <a:srgbClr val="FFFFFF"/>
-                </a:solidFill>
-              </a:rPr>
-              <a:t>Leave likelihood as ‘?’ — decide which modes warrant a control anyway.</a:t>
-            </a:r>
-          </a:p>
-        </p:txBody>
-      </p:sp>
-      <p:sp>
-        <p:nvSpPr>
-          <p:cNvPr id="920" name="Block"/>
-          <p:cNvSpPr/>
-          <p:nvPr/>
-        </p:nvSpPr>
-        <p:spPr>
-          <a:xfrm>
-            <a:off x="548640" y="1005840"/>
-            <a:ext cx="2560320" cy="566928"/>
-          </a:xfrm>
-          <a:prstGeom prst="rect">
-            <a:avLst/>
-          </a:prstGeom>
-          <a:solidFill>
-            <a:srgbClr val="8E6F3E"/>
-          </a:solidFill>
-          <a:ln>
-            <a:noFill/>
-          </a:ln>
-          <a:effectLst/>
-        </p:spPr>
-        <p:style>
-          <a:lnRef idx="1">
-            <a:schemeClr val="accent1"/>
-          </a:lnRef>
-          <a:fillRef idx="3">
-            <a:schemeClr val="accent1"/>
-          </a:fillRef>
-          <a:effectRef idx="2">
-            <a:schemeClr val="accent1"/>
-          </a:effectRef>
-          <a:fontRef idx="minor">
-            <a:schemeClr val="lt1"/>
-          </a:fontRef>
-        </p:style>
-        <p:txBody>
-          <a:bodyPr wrap="square" lIns="27432" tIns="22860" rIns="27432" bIns="22860" rtlCol="0" anchor="ctr"/>
-          <a:lstStyle/>
-          <a:p>
-            <a:pPr algn="ctr"/>
-            <a:r>
-              <a:rPr sz="1200" b="1" i="0">
-                <a:solidFill>
-                  <a:srgbClr val="FFFFFF"/>
-                </a:solidFill>
-              </a:rPr>
-              <a:t>CLOUDFLARE</a:t>
-            </a:r>
-          </a:p>
-        </p:txBody>
-      </p:sp>
-      <p:sp>
-        <p:nvSpPr>
-          <p:cNvPr id="921" name="RowCaption"/>
-          <p:cNvSpPr/>
-          <p:nvPr/>
-        </p:nvSpPr>
-        <p:spPr>
-          <a:xfrm>
-            <a:off x="3383280" y="1005840"/>
-            <a:ext cx="5212080" cy="566928"/>
-          </a:xfrm>
-          <a:prstGeom prst="rect">
-            <a:avLst/>
-          </a:prstGeom>
-          <a:noFill/>
-          <a:ln>
-            <a:noFill/>
-          </a:ln>
-          <a:effectLst/>
-        </p:spPr>
-        <p:style>
-          <a:lnRef idx="1">
-            <a:schemeClr val="accent1"/>
-          </a:lnRef>
-          <a:fillRef idx="3">
-            <a:schemeClr val="accent1"/>
-          </a:fillRef>
-          <a:effectRef idx="2">
-            <a:schemeClr val="accent1"/>
-          </a:effectRef>
-          <a:fontRef idx="minor">
-            <a:schemeClr val="lt1"/>
-          </a:fontRef>
-        </p:style>
-        <p:txBody>
-          <a:bodyPr wrap="square" lIns="27432" tIns="22860" rIns="27432" bIns="22860" rtlCol="0" anchor="ctr"/>
-          <a:lstStyle/>
-          <a:p>
-            <a:pPr algn="l"/>
-            <a:r>
-              <a:rPr sz="1600" b="0" i="0">
-                <a:solidFill>
-                  <a:srgbClr val="555960"/>
-                </a:solidFill>
-              </a:rPr>
-              <a:t>operates a Web Application Firewall (WAF): it inspects incoming web requests for attacks</a:t>
-            </a:r>
-          </a:p>
-        </p:txBody>
-      </p:sp>
-      <p:sp>
-        <p:nvSpPr>
-          <p:cNvPr id="923" name="Block"/>
-          <p:cNvSpPr/>
-          <p:nvPr/>
-        </p:nvSpPr>
-        <p:spPr>
-          <a:xfrm>
-            <a:off x="548640" y="1664208"/>
-            <a:ext cx="2560320" cy="566928"/>
-          </a:xfrm>
-          <a:prstGeom prst="rect">
-            <a:avLst/>
-          </a:prstGeom>
-          <a:solidFill>
-            <a:srgbClr val="8E6F3E"/>
-          </a:solidFill>
-          <a:ln>
-            <a:noFill/>
-          </a:ln>
-          <a:effectLst/>
-        </p:spPr>
-        <p:style>
-          <a:lnRef idx="1">
-            <a:schemeClr val="accent1"/>
-          </a:lnRef>
-          <a:fillRef idx="3">
-            <a:schemeClr val="accent1"/>
-          </a:fillRef>
-          <a:effectRef idx="2">
-            <a:schemeClr val="accent1"/>
-          </a:effectRef>
-          <a:fontRef idx="minor">
-            <a:schemeClr val="lt1"/>
-          </a:fontRef>
-        </p:style>
-        <p:txBody>
-          <a:bodyPr wrap="square" lIns="27432" tIns="22860" rIns="27432" bIns="22860" rtlCol="0" anchor="ctr"/>
-          <a:lstStyle/>
-          <a:p>
-            <a:pPr algn="ctr"/>
-            <a:r>
-              <a:rPr sz="1200" b="1" i="0">
-                <a:solidFill>
-                  <a:srgbClr val="FFFFFF"/>
-                </a:solidFill>
-              </a:rPr>
-              <a:t>RULE CHANGES</a:t>
-            </a:r>
-          </a:p>
-        </p:txBody>
-      </p:sp>
-      <p:sp>
-        <p:nvSpPr>
-          <p:cNvPr id="924" name="RowCaption"/>
-          <p:cNvSpPr/>
-          <p:nvPr/>
-        </p:nvSpPr>
-        <p:spPr>
-          <a:xfrm>
-            <a:off x="3383280" y="1664208"/>
-            <a:ext cx="5212080" cy="566928"/>
-          </a:xfrm>
-          <a:prstGeom prst="rect">
-            <a:avLst/>
-          </a:prstGeom>
-          <a:noFill/>
-          <a:ln>
-            <a:noFill/>
-          </a:ln>
-          <a:effectLst/>
-        </p:spPr>
-        <p:style>
-          <a:lnRef idx="1">
-            <a:schemeClr val="accent1"/>
-          </a:lnRef>
-          <a:fillRef idx="3">
-            <a:schemeClr val="accent1"/>
-          </a:fillRef>
-          <a:effectRef idx="2">
-            <a:schemeClr val="accent1"/>
-          </a:effectRef>
-          <a:fontRef idx="minor">
-            <a:schemeClr val="lt1"/>
-          </a:fontRef>
-        </p:style>
-        <p:txBody>
-          <a:bodyPr wrap="square" lIns="27432" tIns="22860" rIns="27432" bIns="22860" rtlCol="0" anchor="ctr"/>
-          <a:lstStyle/>
-          <a:p>
-            <a:pPr algn="l"/>
-            <a:r>
-              <a:rPr sz="1600" b="0" i="0">
-                <a:solidFill>
-                  <a:srgbClr val="555960"/>
-                </a:solidFill>
-              </a:rPr>
-              <a:t>new detection rules deploy without a software release — and propagate globally within seconds</a:t>
-            </a:r>
-          </a:p>
-        </p:txBody>
-      </p:sp>
-      <p:sp>
-        <p:nvSpPr>
-          <p:cNvPr id="926" name="Block"/>
-          <p:cNvSpPr/>
-          <p:nvPr/>
-        </p:nvSpPr>
-        <p:spPr>
-          <a:xfrm>
-            <a:off x="548640" y="2322576"/>
-            <a:ext cx="2560320" cy="566928"/>
-          </a:xfrm>
-          <a:prstGeom prst="rect">
-            <a:avLst/>
-          </a:prstGeom>
-          <a:solidFill>
-            <a:srgbClr val="8E6F3E"/>
-          </a:solidFill>
-          <a:ln>
-            <a:noFill/>
-          </a:ln>
-          <a:effectLst/>
-        </p:spPr>
-        <p:style>
-          <a:lnRef idx="1">
-            <a:schemeClr val="accent1"/>
-          </a:lnRef>
-          <a:fillRef idx="3">
-            <a:schemeClr val="accent1"/>
-          </a:fillRef>
-          <a:effectRef idx="2">
-            <a:schemeClr val="accent1"/>
-          </a:effectRef>
-          <a:fontRef idx="minor">
-            <a:schemeClr val="lt1"/>
-          </a:fontRef>
-        </p:style>
-        <p:txBody>
-          <a:bodyPr wrap="square" lIns="27432" tIns="22860" rIns="27432" bIns="22860" rtlCol="0" anchor="ctr"/>
-          <a:lstStyle/>
-          <a:p>
-            <a:pPr algn="ctr"/>
-            <a:r>
-              <a:rPr sz="1200" b="1" i="0" dirty="0">
-                <a:solidFill>
-                  <a:srgbClr val="FFFFFF"/>
-                </a:solidFill>
-              </a:rPr>
-              <a:t>RULE FORM</a:t>
-            </a:r>
-          </a:p>
-        </p:txBody>
-      </p:sp>
-      <p:sp>
-        <p:nvSpPr>
-          <p:cNvPr id="927" name="RowCaption"/>
-          <p:cNvSpPr/>
-          <p:nvPr/>
-        </p:nvSpPr>
-        <p:spPr>
-          <a:xfrm>
-            <a:off x="3383280" y="2322576"/>
-            <a:ext cx="5212080" cy="566928"/>
-          </a:xfrm>
-          <a:prstGeom prst="rect">
-            <a:avLst/>
-          </a:prstGeom>
-          <a:noFill/>
-          <a:ln>
-            <a:noFill/>
-          </a:ln>
-          <a:effectLst/>
-        </p:spPr>
-        <p:style>
-          <a:lnRef idx="1">
-            <a:schemeClr val="accent1"/>
-          </a:lnRef>
-          <a:fillRef idx="3">
-            <a:schemeClr val="accent1"/>
-          </a:fillRef>
-          <a:effectRef idx="2">
-            <a:schemeClr val="accent1"/>
-          </a:effectRef>
-          <a:fontRef idx="minor">
-            <a:schemeClr val="lt1"/>
-          </a:fontRef>
-        </p:style>
-        <p:txBody>
-          <a:bodyPr wrap="square" lIns="27432" tIns="22860" rIns="27432" bIns="22860" rtlCol="0" anchor="ctr"/>
-          <a:lstStyle/>
-          <a:p>
-            <a:pPr algn="l"/>
-            <a:r>
-              <a:rPr sz="1600" b="0" i="0">
-                <a:solidFill>
-                  <a:srgbClr val="555960"/>
-                </a:solidFill>
-              </a:rPr>
-              <a:t>some detection rules are written as regular expressions</a:t>
-            </a:r>
-          </a:p>
-        </p:txBody>
-      </p:sp>
-      <p:sp>
-        <p:nvSpPr>
-          <p:cNvPr id="5" name="ColumnHeading"/>
-          <p:cNvSpPr/>
-          <p:nvPr/>
-        </p:nvSpPr>
-        <p:spPr>
-          <a:xfrm>
-            <a:off x="365760" y="3072384"/>
-            <a:ext cx="1645920" cy="256032"/>
-          </a:xfrm>
-          <a:prstGeom prst="rect">
-            <a:avLst/>
-          </a:prstGeom>
-          <a:noFill/>
-          <a:ln>
-            <a:noFill/>
-          </a:ln>
-          <a:effectLst/>
-        </p:spPr>
-        <p:style>
-          <a:lnRef idx="1">
-            <a:schemeClr val="accent1"/>
-          </a:lnRef>
-          <a:fillRef idx="3">
-            <a:schemeClr val="accent1"/>
-          </a:fillRef>
-          <a:effectRef idx="2">
-            <a:schemeClr val="accent1"/>
-          </a:effectRef>
-          <a:fontRef idx="minor">
-            <a:schemeClr val="lt1"/>
-          </a:fontRef>
-        </p:style>
-        <p:txBody>
-          <a:bodyPr wrap="square" lIns="27432" tIns="22860" rIns="27432" bIns="22860" rtlCol="0" anchor="ctr"/>
-          <a:lstStyle/>
-          <a:p>
-            <a:pPr algn="ctr"/>
-            <a:r>
-              <a:rPr lang="en-US" sz="1200" b="1" i="0" dirty="0">
-                <a:solidFill>
-                  <a:schemeClr val="bg1"/>
-                </a:solidFill>
-              </a:rPr>
-              <a:t>FUNCTION</a:t>
-            </a:r>
-            <a:endParaRPr sz="2800" b="1" i="0" dirty="0">
-              <a:solidFill>
-                <a:schemeClr val="bg1"/>
-              </a:solidFill>
-            </a:endParaRPr>
-          </a:p>
-        </p:txBody>
-      </p:sp>
-      <p:sp>
-        <p:nvSpPr>
-          <p:cNvPr id="1000" name="ColumnHeading"/>
-          <p:cNvSpPr/>
-          <p:nvPr/>
-        </p:nvSpPr>
-        <p:spPr>
-          <a:xfrm>
-            <a:off x="2103120" y="3072384"/>
-            <a:ext cx="2194560" cy="256032"/>
-          </a:xfrm>
-          <a:prstGeom prst="rect">
-            <a:avLst/>
-          </a:prstGeom>
-          <a:noFill/>
-          <a:ln>
-            <a:noFill/>
-          </a:ln>
-          <a:effectLst/>
-        </p:spPr>
-        <p:style>
-          <a:lnRef idx="1">
-            <a:schemeClr val="accent1"/>
-          </a:lnRef>
-          <a:fillRef idx="3">
-            <a:schemeClr val="accent1"/>
-          </a:fillRef>
-          <a:effectRef idx="2">
-            <a:schemeClr val="accent1"/>
-          </a:effectRef>
-          <a:fontRef idx="minor">
-            <a:schemeClr val="lt1"/>
-          </a:fontRef>
-        </p:style>
-        <p:txBody>
-          <a:bodyPr wrap="square" lIns="27432" tIns="22860" rIns="27432" bIns="22860" rtlCol="0" anchor="ctr"/>
-          <a:lstStyle/>
-          <a:p>
-            <a:pPr algn="ctr"/>
-            <a:r>
-              <a:rPr lang="en-US" sz="1200" b="1" i="0" dirty="0">
-                <a:solidFill>
-                  <a:schemeClr val="bg1"/>
-                </a:solidFill>
-              </a:rPr>
-              <a:t>POSSIBLE FAILURE MODE</a:t>
-            </a:r>
-            <a:endParaRPr sz="2800" b="1" i="0" dirty="0">
-              <a:solidFill>
-                <a:schemeClr val="bg1"/>
-              </a:solidFill>
-            </a:endParaRPr>
-          </a:p>
-        </p:txBody>
-      </p:sp>
-      <p:sp>
-        <p:nvSpPr>
-          <p:cNvPr id="1001" name="ColumnHeading"/>
-          <p:cNvSpPr/>
-          <p:nvPr/>
-        </p:nvSpPr>
-        <p:spPr>
-          <a:xfrm>
-            <a:off x="4389120" y="3072384"/>
-            <a:ext cx="2011680" cy="256032"/>
-          </a:xfrm>
-          <a:prstGeom prst="rect">
-            <a:avLst/>
-          </a:prstGeom>
-          <a:noFill/>
-          <a:ln>
-            <a:noFill/>
-          </a:ln>
-          <a:effectLst/>
-        </p:spPr>
-        <p:style>
-          <a:lnRef idx="1">
-            <a:schemeClr val="accent1"/>
-          </a:lnRef>
-          <a:fillRef idx="3">
-            <a:schemeClr val="accent1"/>
-          </a:fillRef>
-          <a:effectRef idx="2">
-            <a:schemeClr val="accent1"/>
-          </a:effectRef>
-          <a:fontRef idx="minor">
-            <a:schemeClr val="lt1"/>
-          </a:fontRef>
-        </p:style>
-        <p:txBody>
-          <a:bodyPr wrap="square" lIns="27432" tIns="22860" rIns="27432" bIns="22860" rtlCol="0" anchor="ctr"/>
-          <a:lstStyle/>
-          <a:p>
-            <a:pPr algn="ctr"/>
-            <a:r>
-              <a:rPr lang="en-US" sz="1200" b="1" i="0" dirty="0">
-                <a:solidFill>
-                  <a:schemeClr val="bg1"/>
-                </a:solidFill>
-              </a:rPr>
-              <a:t>POTENTIAL EFFECT</a:t>
-            </a:r>
-            <a:endParaRPr sz="2800" b="1" i="0" dirty="0">
-              <a:solidFill>
-                <a:schemeClr val="bg1"/>
-              </a:solidFill>
-            </a:endParaRPr>
-          </a:p>
-        </p:txBody>
-      </p:sp>
-      <p:sp>
-        <p:nvSpPr>
-          <p:cNvPr id="1002" name="ColumnHeading"/>
-          <p:cNvSpPr/>
-          <p:nvPr/>
-        </p:nvSpPr>
-        <p:spPr>
-          <a:xfrm>
-            <a:off x="6492240" y="3072384"/>
-            <a:ext cx="2103120" cy="256032"/>
-          </a:xfrm>
-          <a:prstGeom prst="rect">
-            <a:avLst/>
-          </a:prstGeom>
-          <a:noFill/>
-          <a:ln>
-            <a:noFill/>
-          </a:ln>
-          <a:effectLst/>
-        </p:spPr>
-        <p:style>
-          <a:lnRef idx="1">
-            <a:schemeClr val="accent1"/>
-          </a:lnRef>
-          <a:fillRef idx="3">
-            <a:schemeClr val="accent1"/>
-          </a:fillRef>
-          <a:effectRef idx="2">
-            <a:schemeClr val="accent1"/>
-          </a:effectRef>
-          <a:fontRef idx="minor">
-            <a:schemeClr val="lt1"/>
-          </a:fontRef>
-        </p:style>
-        <p:txBody>
-          <a:bodyPr wrap="square" lIns="27432" tIns="22860" rIns="27432" bIns="22860" rtlCol="0" anchor="ctr"/>
-          <a:lstStyle/>
-          <a:p>
-            <a:pPr algn="ctr"/>
-            <a:r>
-              <a:rPr lang="en-US" sz="1200" b="1" i="0" dirty="0">
-                <a:solidFill>
-                  <a:schemeClr val="bg1"/>
-                </a:solidFill>
-              </a:rPr>
-              <a:t>PROPOSED CONTROL</a:t>
-            </a:r>
-            <a:endParaRPr sz="2800" b="1" i="0" dirty="0">
-              <a:solidFill>
-                <a:schemeClr val="bg1"/>
-              </a:solidFill>
-            </a:endParaRPr>
-          </a:p>
-        </p:txBody>
-      </p:sp>
-      <p:sp>
-        <p:nvSpPr>
-          <p:cNvPr id="1003" name="Block"/>
-          <p:cNvSpPr/>
-          <p:nvPr/>
-        </p:nvSpPr>
-        <p:spPr>
-          <a:xfrm>
-            <a:off x="365760" y="3401568"/>
-            <a:ext cx="1645920" cy="603504"/>
-          </a:xfrm>
-          <a:prstGeom prst="rect">
-            <a:avLst/>
-          </a:prstGeom>
-          <a:solidFill>
-            <a:srgbClr val="8E6F3E"/>
-          </a:solidFill>
-          <a:ln>
-            <a:noFill/>
-          </a:ln>
-          <a:effectLst/>
-        </p:spPr>
-        <p:style>
-          <a:lnRef idx="1">
-            <a:schemeClr val="accent1"/>
-          </a:lnRef>
-          <a:fillRef idx="3">
-            <a:schemeClr val="accent1"/>
-          </a:fillRef>
-          <a:effectRef idx="2">
-            <a:schemeClr val="accent1"/>
-          </a:effectRef>
-          <a:fontRef idx="minor">
-            <a:schemeClr val="lt1"/>
-          </a:fontRef>
-        </p:style>
-        <p:txBody>
-          <a:bodyPr wrap="square" lIns="27432" tIns="22860" rIns="27432" bIns="22860" rtlCol="0" anchor="ctr"/>
-          <a:lstStyle/>
-          <a:p>
-            <a:pPr algn="ctr"/>
-            <a:r>
-              <a:rPr sz="1200" b="1" i="0">
-                <a:solidFill>
-                  <a:srgbClr val="FFFFFF"/>
-                </a:solidFill>
-              </a:rPr>
-              <a:t>Evaluate WAF rule</a:t>
-            </a:r>
-          </a:p>
-        </p:txBody>
-      </p:sp>
-      <p:sp>
-        <p:nvSpPr>
-          <p:cNvPr id="1004" name="Block"/>
-          <p:cNvSpPr/>
-          <p:nvPr/>
-        </p:nvSpPr>
-        <p:spPr>
-          <a:xfrm>
-            <a:off x="365760" y="4059936"/>
-            <a:ext cx="1645920" cy="603504"/>
-          </a:xfrm>
-          <a:prstGeom prst="rect">
-            <a:avLst/>
-          </a:prstGeom>
-          <a:solidFill>
-            <a:srgbClr val="8E6F3E"/>
-          </a:solidFill>
-          <a:ln>
-            <a:noFill/>
-          </a:ln>
-          <a:effectLst/>
-        </p:spPr>
-        <p:style>
-          <a:lnRef idx="1">
-            <a:schemeClr val="accent1"/>
-          </a:lnRef>
-          <a:fillRef idx="3">
-            <a:schemeClr val="accent1"/>
-          </a:fillRef>
-          <a:effectRef idx="2">
-            <a:schemeClr val="accent1"/>
-          </a:effectRef>
-          <a:fontRef idx="minor">
-            <a:schemeClr val="lt1"/>
-          </a:fontRef>
-        </p:style>
-        <p:txBody>
-          <a:bodyPr wrap="square" lIns="27432" tIns="22860" rIns="27432" bIns="22860" rtlCol="0" anchor="ctr"/>
-          <a:lstStyle/>
-          <a:p>
-            <a:pPr algn="ctr"/>
-            <a:r>
-              <a:rPr sz="1200" b="1" i="0">
-                <a:solidFill>
-                  <a:srgbClr val="FFFFFF"/>
-                </a:solidFill>
-              </a:rPr>
-              <a:t>Validate new rule</a:t>
-            </a:r>
-          </a:p>
-        </p:txBody>
-      </p:sp>
-      <p:sp>
-        <p:nvSpPr>
-          <p:cNvPr id="1005" name="Block"/>
-          <p:cNvSpPr/>
-          <p:nvPr/>
-        </p:nvSpPr>
-        <p:spPr>
-          <a:xfrm>
-            <a:off x="365760" y="4718304"/>
-            <a:ext cx="1645920" cy="603504"/>
-          </a:xfrm>
-          <a:prstGeom prst="rect">
-            <a:avLst/>
-          </a:prstGeom>
-          <a:solidFill>
-            <a:srgbClr val="8E6F3E"/>
-          </a:solidFill>
-          <a:ln>
-            <a:noFill/>
-          </a:ln>
-          <a:effectLst/>
-        </p:spPr>
-        <p:style>
-          <a:lnRef idx="1">
-            <a:schemeClr val="accent1"/>
-          </a:lnRef>
-          <a:fillRef idx="3">
-            <a:schemeClr val="accent1"/>
-          </a:fillRef>
-          <a:effectRef idx="2">
-            <a:schemeClr val="accent1"/>
-          </a:effectRef>
-          <a:fontRef idx="minor">
-            <a:schemeClr val="lt1"/>
-          </a:fontRef>
-        </p:style>
-        <p:txBody>
-          <a:bodyPr wrap="square" lIns="27432" tIns="22860" rIns="27432" bIns="22860" rtlCol="0" anchor="ctr"/>
-          <a:lstStyle/>
-          <a:p>
-            <a:pPr algn="ctr"/>
-            <a:r>
-              <a:rPr sz="1200" b="1" i="0">
-                <a:solidFill>
-                  <a:srgbClr val="FFFFFF"/>
-                </a:solidFill>
-              </a:rPr>
-              <a:t>Distribute rule</a:t>
-            </a:r>
-          </a:p>
-        </p:txBody>
-      </p:sp>
+              <a:t>OBSERVE</a:t>
+            </a:r>
+          </a:p>
+        </p:txBody>
+      </p:sp>
+      <p:cxnSp>
+        <p:nvCxnSpPr>
+          <p:cNvPr id="902" name="Connector 901"/>
+          <p:cNvCxnSpPr/>
+          <p:nvPr/>
+        </p:nvCxnSpPr>
+        <p:spPr>
+          <a:xfrm>
+            <a:off x="4572000" y="1645919"/>
+            <a:ext cx="0" cy="274321"/>
+          </a:xfrm>
+          <a:prstGeom prst="line">
+            <a:avLst/>
+          </a:prstGeom>
+          <a:ln w="19050">
+            <a:solidFill>
+              <a:srgbClr val="8E6F3E"/>
+            </a:solidFill>
+            <a:tailEnd type="triangle"/>
+          </a:ln>
+        </p:spPr>
+        <p:style>
+          <a:lnRef idx="2">
+            <a:schemeClr val="accent1"/>
+          </a:lnRef>
+          <a:fillRef idx="0">
+            <a:schemeClr val="accent1"/>
+          </a:fillRef>
+          <a:effectRef idx="1">
+            <a:schemeClr val="accent1"/>
+          </a:effectRef>
+          <a:fontRef idx="minor">
+            <a:schemeClr val="tx1"/>
+          </a:fontRef>
+        </p:style>
+      </p:cxnSp>
       <p:sp>
         <p:nvSpPr>
           <p:cNvPr id="903" name="Card"/>
@@ -24431,8 +24564,8 @@
         </p:nvSpPr>
         <p:spPr>
           <a:xfrm>
-            <a:off x="2103120" y="3401568"/>
-            <a:ext cx="2194560" cy="603504"/>
+            <a:off x="2606040" y="1920240"/>
+            <a:ext cx="3931920" cy="548640"/>
           </a:xfrm>
           <a:prstGeom prst="rect">
             <a:avLst/>
@@ -24472,21 +24605,240 @@
                   <a:srgbClr val="5C4826"/>
                 </a:solidFill>
               </a:rPr>
-              <a:t/>
-            </a:r>
-          </a:p>
-        </p:txBody>
-      </p:sp>
-      <p:sp>
-        <p:nvSpPr>
-          <p:cNvPr id="1006" name="Card"/>
+              <a:t>explain — a causal account the evidence supports</a:t>
+            </a:r>
+            <a:endParaRPr sz="2000" b="0" i="1" dirty="0">
+              <a:solidFill>
+                <a:srgbClr val="5C4826"/>
+              </a:solidFill>
+            </a:endParaRPr>
+          </a:p>
+        </p:txBody>
+      </p:sp>
+      <p:cxnSp>
+        <p:nvCxnSpPr>
+          <p:cNvPr id="904" name="Connector 903"/>
+          <p:cNvCxnSpPr/>
+          <p:nvPr/>
+        </p:nvCxnSpPr>
+        <p:spPr>
+          <a:xfrm>
+            <a:off x="4572000" y="2468880"/>
+            <a:ext cx="0" cy="274320"/>
+          </a:xfrm>
+          <a:prstGeom prst="line">
+            <a:avLst/>
+          </a:prstGeom>
+          <a:ln w="19050">
+            <a:solidFill>
+              <a:srgbClr val="8E6F3E"/>
+            </a:solidFill>
+            <a:tailEnd type="triangle"/>
+          </a:ln>
+        </p:spPr>
+        <p:style>
+          <a:lnRef idx="2">
+            <a:schemeClr val="accent1"/>
+          </a:lnRef>
+          <a:fillRef idx="0">
+            <a:schemeClr val="accent1"/>
+          </a:fillRef>
+          <a:effectRef idx="1">
+            <a:schemeClr val="accent1"/>
+          </a:effectRef>
+          <a:fontRef idx="minor">
+            <a:schemeClr val="tx1"/>
+          </a:fontRef>
+        </p:style>
+      </p:cxnSp>
+      <p:sp>
+        <p:nvSpPr>
+          <p:cNvPr id="905" name="Block"/>
           <p:cNvSpPr/>
           <p:nvPr/>
         </p:nvSpPr>
         <p:spPr>
           <a:xfrm>
-            <a:off x="4389120" y="3401568"/>
-            <a:ext cx="2011680" cy="603504"/>
+            <a:off x="2606040" y="2743200"/>
+            <a:ext cx="3931920" cy="548640"/>
+          </a:xfrm>
+          <a:prstGeom prst="rect">
+            <a:avLst/>
+          </a:prstGeom>
+          <a:solidFill>
+            <a:srgbClr val="8E6F3E"/>
+          </a:solidFill>
+          <a:ln>
+            <a:noFill/>
+          </a:ln>
+          <a:effectLst/>
+        </p:spPr>
+        <p:style>
+          <a:lnRef idx="1">
+            <a:schemeClr val="accent1"/>
+          </a:lnRef>
+          <a:fillRef idx="3">
+            <a:schemeClr val="accent1"/>
+          </a:fillRef>
+          <a:effectRef idx="2">
+            <a:schemeClr val="accent1"/>
+          </a:effectRef>
+          <a:fontRef idx="minor">
+            <a:schemeClr val="lt1"/>
+          </a:fontRef>
+        </p:style>
+        <p:txBody>
+          <a:bodyPr wrap="square" lIns="27432" tIns="22860" rIns="27432" bIns="22860" rtlCol="0" anchor="ctr"/>
+          <a:lstStyle/>
+          <a:p>
+            <a:pPr algn="ctr"/>
+            <a:r>
+              <a:rPr sz="2000" b="1" i="0" dirty="0">
+                <a:solidFill>
+                  <a:srgbClr val="FFFFFF"/>
+                </a:solidFill>
+              </a:rPr>
+              <a:t>LEARN</a:t>
+            </a:r>
+          </a:p>
+        </p:txBody>
+      </p:sp>
+      <p:sp>
+        <p:nvSpPr>
+          <p:cNvPr id="909" name="Block"/>
+          <p:cNvSpPr/>
+          <p:nvPr/>
+        </p:nvSpPr>
+        <p:spPr>
+          <a:xfrm>
+            <a:off x="1005840" y="4160520"/>
+            <a:ext cx="2926080" cy="777240"/>
+          </a:xfrm>
+          <a:prstGeom prst="rect">
+            <a:avLst/>
+          </a:prstGeom>
+          <a:solidFill>
+            <a:srgbClr val="8E6F3E"/>
+          </a:solidFill>
+          <a:ln>
+            <a:noFill/>
+          </a:ln>
+          <a:effectLst/>
+        </p:spPr>
+        <p:style>
+          <a:lnRef idx="1">
+            <a:schemeClr val="accent1"/>
+          </a:lnRef>
+          <a:fillRef idx="3">
+            <a:schemeClr val="accent1"/>
+          </a:fillRef>
+          <a:effectRef idx="2">
+            <a:schemeClr val="accent1"/>
+          </a:effectRef>
+          <a:fontRef idx="minor">
+            <a:schemeClr val="lt1"/>
+          </a:fontRef>
+        </p:style>
+        <p:txBody>
+          <a:bodyPr wrap="square" lIns="27432" tIns="22860" rIns="27432" bIns="22860" rtlCol="0" anchor="ctr"/>
+          <a:lstStyle/>
+          <a:p>
+            <a:pPr algn="ctr"/>
+            <a:r>
+              <a:rPr sz="1300" b="1" i="0">
+                <a:solidFill>
+                  <a:srgbClr val="FFFFFF"/>
+                </a:solidFill>
+              </a:rPr>
+              <a:t>REFLECTION</a:t>
+            </a:r>
+          </a:p>
+          <a:p>
+            <a:pPr algn="ctr"/>
+            <a:r>
+              <a:rPr sz="1100" b="1" i="0">
+                <a:solidFill>
+                  <a:srgbClr val="FFFFFF"/>
+                </a:solidFill>
+              </a:rPr>
+              <a:t>changes the engineer</a:t>
+            </a:r>
+          </a:p>
+        </p:txBody>
+      </p:sp>
+      <p:sp>
+        <p:nvSpPr>
+          <p:cNvPr id="910" name="Block"/>
+          <p:cNvSpPr/>
+          <p:nvPr/>
+        </p:nvSpPr>
+        <p:spPr>
+          <a:xfrm>
+            <a:off x="5212080" y="4160520"/>
+            <a:ext cx="2926080" cy="777240"/>
+          </a:xfrm>
+          <a:prstGeom prst="rect">
+            <a:avLst/>
+          </a:prstGeom>
+          <a:solidFill>
+            <a:srgbClr val="8E6F3E"/>
+          </a:solidFill>
+          <a:ln>
+            <a:noFill/>
+          </a:ln>
+          <a:effectLst/>
+        </p:spPr>
+        <p:style>
+          <a:lnRef idx="1">
+            <a:schemeClr val="accent1"/>
+          </a:lnRef>
+          <a:fillRef idx="3">
+            <a:schemeClr val="accent1"/>
+          </a:fillRef>
+          <a:effectRef idx="2">
+            <a:schemeClr val="accent1"/>
+          </a:effectRef>
+          <a:fontRef idx="minor">
+            <a:schemeClr val="lt1"/>
+          </a:fontRef>
+        </p:style>
+        <p:txBody>
+          <a:bodyPr wrap="square" lIns="27432" tIns="22860" rIns="27432" bIns="22860" rtlCol="0" anchor="ctr"/>
+          <a:lstStyle/>
+          <a:p>
+            <a:pPr algn="ctr"/>
+            <a:r>
+              <a:rPr sz="1300" b="1" i="0">
+                <a:solidFill>
+                  <a:srgbClr val="FFFFFF"/>
+                </a:solidFill>
+              </a:rPr>
+              <a:t>ENGINEERING STRUCTURE</a:t>
+            </a:r>
+          </a:p>
+          <a:p>
+            <a:pPr algn="ctr"/>
+            <a:r>
+              <a:rPr sz="1100" b="1" i="0">
+                <a:solidFill>
+                  <a:srgbClr val="FFFFFF"/>
+                </a:solidFill>
+              </a:rPr>
+              <a:t>changes the environment</a:t>
+            </a:r>
+          </a:p>
+        </p:txBody>
+      </p:sp>
+      <p:sp>
+        <p:nvSpPr>
+          <p:cNvPr id="1000" name="Card"/>
+          <p:cNvSpPr/>
+          <p:nvPr/>
+        </p:nvSpPr>
+        <p:spPr>
+          <a:xfrm>
+            <a:off x="1005840" y="5303520"/>
+            <a:ext cx="2926080" cy="502920"/>
           </a:xfrm>
           <a:prstGeom prst="rect">
             <a:avLst/>
@@ -24526,21 +24878,26 @@
                   <a:srgbClr val="5C4826"/>
                 </a:solidFill>
               </a:rPr>
-              <a:t/>
-            </a:r>
-          </a:p>
-        </p:txBody>
-      </p:sp>
-      <p:sp>
-        <p:nvSpPr>
-          <p:cNvPr id="1007" name="Card"/>
+              <a:t>future judgment</a:t>
+            </a:r>
+            <a:endParaRPr sz="2000" b="0" i="1" dirty="0">
+              <a:solidFill>
+                <a:srgbClr val="5C4826"/>
+              </a:solidFill>
+            </a:endParaRPr>
+          </a:p>
+        </p:txBody>
+      </p:sp>
+      <p:sp>
+        <p:nvSpPr>
+          <p:cNvPr id="1001" name="Card"/>
           <p:cNvSpPr/>
           <p:nvPr/>
         </p:nvSpPr>
         <p:spPr>
           <a:xfrm>
-            <a:off x="6492240" y="3401568"/>
-            <a:ext cx="2103120" cy="603504"/>
+            <a:off x="5212080" y="5303520"/>
+            <a:ext cx="2926080" cy="502920"/>
           </a:xfrm>
           <a:prstGeom prst="rect">
             <a:avLst/>
@@ -24580,32 +24937,179 @@
                   <a:srgbClr val="5C4826"/>
                 </a:solidFill>
               </a:rPr>
-              <a:t/>
-            </a:r>
-          </a:p>
-        </p:txBody>
-      </p:sp>
-      <p:sp>
-        <p:nvSpPr>
-          <p:cNvPr id="1008" name="Card"/>
+              <a:t>future constraints</a:t>
+            </a:r>
+            <a:endParaRPr sz="2000" b="0" i="1" dirty="0">
+              <a:solidFill>
+                <a:srgbClr val="5C4826"/>
+              </a:solidFill>
+            </a:endParaRPr>
+          </a:p>
+        </p:txBody>
+      </p:sp>
+      <p:cxnSp>
+        <p:nvCxnSpPr>
+          <p:cNvPr id="911" name="Connector 911"/>
+          <p:cNvCxnSpPr/>
+          <p:nvPr/>
+        </p:nvCxnSpPr>
+        <p:spPr>
+          <a:xfrm flipH="1">
+            <a:off x="2468880" y="3291840"/>
+            <a:ext cx="2103120" cy="868679"/>
+          </a:xfrm>
+          <a:prstGeom prst="line">
+            <a:avLst/>
+          </a:prstGeom>
+          <a:ln w="28575">
+            <a:solidFill>
+              <a:srgbClr val="8E6F3E"/>
+            </a:solidFill>
+            <a:tailEnd type="triangle"/>
+          </a:ln>
+        </p:spPr>
+        <p:style>
+          <a:lnRef idx="2">
+            <a:schemeClr val="accent1"/>
+          </a:lnRef>
+          <a:fillRef idx="0">
+            <a:schemeClr val="accent1"/>
+          </a:fillRef>
+          <a:effectRef idx="1">
+            <a:schemeClr val="accent1"/>
+          </a:effectRef>
+          <a:fontRef idx="minor">
+            <a:schemeClr val="tx1"/>
+          </a:fontRef>
+        </p:style>
+      </p:cxnSp>
+      <p:cxnSp>
+        <p:nvCxnSpPr>
+          <p:cNvPr id="1002" name="Connector 911"/>
+          <p:cNvCxnSpPr/>
+          <p:nvPr/>
+        </p:nvCxnSpPr>
+        <p:spPr>
+          <a:xfrm>
+            <a:off x="4572000" y="3291840"/>
+            <a:ext cx="2103120" cy="868679"/>
+          </a:xfrm>
+          <a:prstGeom prst="line">
+            <a:avLst/>
+          </a:prstGeom>
+          <a:ln w="28575">
+            <a:solidFill>
+              <a:srgbClr val="8E6F3E"/>
+            </a:solidFill>
+            <a:tailEnd type="triangle"/>
+          </a:ln>
+        </p:spPr>
+        <p:style>
+          <a:lnRef idx="2">
+            <a:schemeClr val="accent1"/>
+          </a:lnRef>
+          <a:fillRef idx="0">
+            <a:schemeClr val="accent1"/>
+          </a:fillRef>
+          <a:effectRef idx="1">
+            <a:schemeClr val="accent1"/>
+          </a:effectRef>
+          <a:fontRef idx="minor">
+            <a:schemeClr val="tx1"/>
+          </a:fontRef>
+        </p:style>
+      </p:cxnSp>
+      <p:cxnSp>
+        <p:nvCxnSpPr>
+          <p:cNvPr id="1003" name="Connector 911"/>
+          <p:cNvCxnSpPr/>
+          <p:nvPr/>
+        </p:nvCxnSpPr>
+        <p:spPr>
+          <a:xfrm>
+            <a:off x="2468880" y="4937760"/>
+            <a:ext cx="0" cy="365759"/>
+          </a:xfrm>
+          <a:prstGeom prst="line">
+            <a:avLst/>
+          </a:prstGeom>
+          <a:ln w="28575">
+            <a:solidFill>
+              <a:srgbClr val="8E6F3E"/>
+            </a:solidFill>
+            <a:tailEnd type="triangle"/>
+          </a:ln>
+        </p:spPr>
+        <p:style>
+          <a:lnRef idx="2">
+            <a:schemeClr val="accent1"/>
+          </a:lnRef>
+          <a:fillRef idx="0">
+            <a:schemeClr val="accent1"/>
+          </a:fillRef>
+          <a:effectRef idx="1">
+            <a:schemeClr val="accent1"/>
+          </a:effectRef>
+          <a:fontRef idx="minor">
+            <a:schemeClr val="tx1"/>
+          </a:fontRef>
+        </p:style>
+      </p:cxnSp>
+      <p:cxnSp>
+        <p:nvCxnSpPr>
+          <p:cNvPr id="1004" name="Connector 911"/>
+          <p:cNvCxnSpPr/>
+          <p:nvPr/>
+        </p:nvCxnSpPr>
+        <p:spPr>
+          <a:xfrm>
+            <a:off x="6675120" y="4937760"/>
+            <a:ext cx="0" cy="365759"/>
+          </a:xfrm>
+          <a:prstGeom prst="line">
+            <a:avLst/>
+          </a:prstGeom>
+          <a:ln w="28575">
+            <a:solidFill>
+              <a:srgbClr val="8E6F3E"/>
+            </a:solidFill>
+            <a:tailEnd type="triangle"/>
+          </a:ln>
+        </p:spPr>
+        <p:style>
+          <a:lnRef idx="2">
+            <a:schemeClr val="accent1"/>
+          </a:lnRef>
+          <a:fillRef idx="0">
+            <a:schemeClr val="accent1"/>
+          </a:fillRef>
+          <a:effectRef idx="1">
+            <a:schemeClr val="accent1"/>
+          </a:effectRef>
+          <a:fontRef idx="minor">
+            <a:schemeClr val="tx1"/>
+          </a:fontRef>
+        </p:style>
+      </p:cxnSp>
+      <p:sp>
+        <p:nvSpPr>
+          <p:cNvPr id="1005" name="FooterBand"/>
           <p:cNvSpPr/>
           <p:nvPr/>
         </p:nvSpPr>
         <p:spPr>
           <a:xfrm>
-            <a:off x="2103120" y="4059936"/>
-            <a:ext cx="2194560" cy="603504"/>
+            <a:off x="274320" y="5852159"/>
+            <a:ext cx="8595360" cy="566928"/>
           </a:xfrm>
           <a:prstGeom prst="rect">
             <a:avLst/>
           </a:prstGeom>
           <a:solidFill>
-            <a:srgbClr val="F5F1E8"/>
+            <a:srgbClr val="8E6F3E"/>
           </a:solidFill>
-          <a:ln w="12700">
-            <a:solidFill>
-              <a:srgbClr val="C9B991"/>
-            </a:solidFill>
+          <a:ln>
+            <a:noFill/>
           </a:ln>
           <a:effectLst/>
         </p:spPr>
@@ -24629,282 +25133,12 @@
           <a:p>
             <a:pPr algn="ctr"/>
             <a:r>
-              <a:rPr sz="2000" b="0" i="1" dirty="0">
-                <a:solidFill>
-                  <a:srgbClr val="5C4826"/>
-                </a:solidFill>
-              </a:rPr>
-              <a:t/>
-            </a:r>
-          </a:p>
-        </p:txBody>
-      </p:sp>
-      <p:sp>
-        <p:nvSpPr>
-          <p:cNvPr id="1009" name="Card"/>
-          <p:cNvSpPr/>
-          <p:nvPr/>
-        </p:nvSpPr>
-        <p:spPr>
-          <a:xfrm>
-            <a:off x="4389120" y="4059936"/>
-            <a:ext cx="2011680" cy="603504"/>
-          </a:xfrm>
-          <a:prstGeom prst="rect">
-            <a:avLst/>
-          </a:prstGeom>
-          <a:solidFill>
-            <a:srgbClr val="F5F1E8"/>
-          </a:solidFill>
-          <a:ln w="12700">
-            <a:solidFill>
-              <a:srgbClr val="C9B991"/>
-            </a:solidFill>
-          </a:ln>
-          <a:effectLst/>
-        </p:spPr>
-        <p:style>
-          <a:lnRef idx="1">
-            <a:schemeClr val="accent1"/>
-          </a:lnRef>
-          <a:fillRef idx="3">
-            <a:schemeClr val="accent1"/>
-          </a:fillRef>
-          <a:effectRef idx="2">
-            <a:schemeClr val="accent1"/>
-          </a:effectRef>
-          <a:fontRef idx="minor">
-            <a:schemeClr val="lt1"/>
-          </a:fontRef>
-        </p:style>
-        <p:txBody>
-          <a:bodyPr wrap="square" lIns="27432" tIns="22860" rIns="27432" bIns="22860" rtlCol="0" anchor="ctr"/>
-          <a:lstStyle/>
-          <a:p>
-            <a:pPr algn="ctr"/>
-            <a:r>
-              <a:rPr sz="2000" b="0" i="1" dirty="0">
-                <a:solidFill>
-                  <a:srgbClr val="5C4826"/>
-                </a:solidFill>
-              </a:rPr>
-              <a:t/>
-            </a:r>
-          </a:p>
-        </p:txBody>
-      </p:sp>
-      <p:sp>
-        <p:nvSpPr>
-          <p:cNvPr id="1010" name="Card"/>
-          <p:cNvSpPr/>
-          <p:nvPr/>
-        </p:nvSpPr>
-        <p:spPr>
-          <a:xfrm>
-            <a:off x="6492240" y="4059936"/>
-            <a:ext cx="2103120" cy="603504"/>
-          </a:xfrm>
-          <a:prstGeom prst="rect">
-            <a:avLst/>
-          </a:prstGeom>
-          <a:solidFill>
-            <a:srgbClr val="F5F1E8"/>
-          </a:solidFill>
-          <a:ln w="12700">
-            <a:solidFill>
-              <a:srgbClr val="C9B991"/>
-            </a:solidFill>
-          </a:ln>
-          <a:effectLst/>
-        </p:spPr>
-        <p:style>
-          <a:lnRef idx="1">
-            <a:schemeClr val="accent1"/>
-          </a:lnRef>
-          <a:fillRef idx="3">
-            <a:schemeClr val="accent1"/>
-          </a:fillRef>
-          <a:effectRef idx="2">
-            <a:schemeClr val="accent1"/>
-          </a:effectRef>
-          <a:fontRef idx="minor">
-            <a:schemeClr val="lt1"/>
-          </a:fontRef>
-        </p:style>
-        <p:txBody>
-          <a:bodyPr wrap="square" lIns="27432" tIns="22860" rIns="27432" bIns="22860" rtlCol="0" anchor="ctr"/>
-          <a:lstStyle/>
-          <a:p>
-            <a:pPr algn="ctr"/>
-            <a:r>
-              <a:rPr sz="2000" b="0" i="1" dirty="0">
-                <a:solidFill>
-                  <a:srgbClr val="5C4826"/>
-                </a:solidFill>
-              </a:rPr>
-              <a:t/>
-            </a:r>
-          </a:p>
-        </p:txBody>
-      </p:sp>
-      <p:sp>
-        <p:nvSpPr>
-          <p:cNvPr id="1011" name="Card"/>
-          <p:cNvSpPr/>
-          <p:nvPr/>
-        </p:nvSpPr>
-        <p:spPr>
-          <a:xfrm>
-            <a:off x="2103120" y="4718304"/>
-            <a:ext cx="2194560" cy="603504"/>
-          </a:xfrm>
-          <a:prstGeom prst="rect">
-            <a:avLst/>
-          </a:prstGeom>
-          <a:solidFill>
-            <a:srgbClr val="F5F1E8"/>
-          </a:solidFill>
-          <a:ln w="12700">
-            <a:solidFill>
-              <a:srgbClr val="C9B991"/>
-            </a:solidFill>
-          </a:ln>
-          <a:effectLst/>
-        </p:spPr>
-        <p:style>
-          <a:lnRef idx="1">
-            <a:schemeClr val="accent1"/>
-          </a:lnRef>
-          <a:fillRef idx="3">
-            <a:schemeClr val="accent1"/>
-          </a:fillRef>
-          <a:effectRef idx="2">
-            <a:schemeClr val="accent1"/>
-          </a:effectRef>
-          <a:fontRef idx="minor">
-            <a:schemeClr val="lt1"/>
-          </a:fontRef>
-        </p:style>
-        <p:txBody>
-          <a:bodyPr wrap="square" lIns="27432" tIns="22860" rIns="27432" bIns="22860" rtlCol="0" anchor="ctr"/>
-          <a:lstStyle/>
-          <a:p>
-            <a:pPr algn="ctr"/>
-            <a:r>
-              <a:rPr sz="2000" b="0" i="1" dirty="0">
-                <a:solidFill>
-                  <a:srgbClr val="5C4826"/>
-                </a:solidFill>
-              </a:rPr>
-              <a:t/>
-            </a:r>
-          </a:p>
-        </p:txBody>
-      </p:sp>
-      <p:sp>
-        <p:nvSpPr>
-          <p:cNvPr id="1012" name="Card"/>
-          <p:cNvSpPr/>
-          <p:nvPr/>
-        </p:nvSpPr>
-        <p:spPr>
-          <a:xfrm>
-            <a:off x="4389120" y="4718304"/>
-            <a:ext cx="2011680" cy="603504"/>
-          </a:xfrm>
-          <a:prstGeom prst="rect">
-            <a:avLst/>
-          </a:prstGeom>
-          <a:solidFill>
-            <a:srgbClr val="F5F1E8"/>
-          </a:solidFill>
-          <a:ln w="12700">
-            <a:solidFill>
-              <a:srgbClr val="C9B991"/>
-            </a:solidFill>
-          </a:ln>
-          <a:effectLst/>
-        </p:spPr>
-        <p:style>
-          <a:lnRef idx="1">
-            <a:schemeClr val="accent1"/>
-          </a:lnRef>
-          <a:fillRef idx="3">
-            <a:schemeClr val="accent1"/>
-          </a:fillRef>
-          <a:effectRef idx="2">
-            <a:schemeClr val="accent1"/>
-          </a:effectRef>
-          <a:fontRef idx="minor">
-            <a:schemeClr val="lt1"/>
-          </a:fontRef>
-        </p:style>
-        <p:txBody>
-          <a:bodyPr wrap="square" lIns="27432" tIns="22860" rIns="27432" bIns="22860" rtlCol="0" anchor="ctr"/>
-          <a:lstStyle/>
-          <a:p>
-            <a:pPr algn="ctr"/>
-            <a:r>
-              <a:rPr sz="2000" b="0" i="1" dirty="0">
-                <a:solidFill>
-                  <a:srgbClr val="5C4826"/>
-                </a:solidFill>
-              </a:rPr>
-              <a:t/>
-            </a:r>
-          </a:p>
-        </p:txBody>
-      </p:sp>
-      <p:sp>
-        <p:nvSpPr>
-          <p:cNvPr id="1013" name="Card"/>
-          <p:cNvSpPr/>
-          <p:nvPr/>
-        </p:nvSpPr>
-        <p:spPr>
-          <a:xfrm>
-            <a:off x="6492240" y="4718304"/>
-            <a:ext cx="2103120" cy="603504"/>
-          </a:xfrm>
-          <a:prstGeom prst="rect">
-            <a:avLst/>
-          </a:prstGeom>
-          <a:solidFill>
-            <a:srgbClr val="F5F1E8"/>
-          </a:solidFill>
-          <a:ln w="12700">
-            <a:solidFill>
-              <a:srgbClr val="C9B991"/>
-            </a:solidFill>
-          </a:ln>
-          <a:effectLst/>
-        </p:spPr>
-        <p:style>
-          <a:lnRef idx="1">
-            <a:schemeClr val="accent1"/>
-          </a:lnRef>
-          <a:fillRef idx="3">
-            <a:schemeClr val="accent1"/>
-          </a:fillRef>
-          <a:effectRef idx="2">
-            <a:schemeClr val="accent1"/>
-          </a:effectRef>
-          <a:fontRef idx="minor">
-            <a:schemeClr val="lt1"/>
-          </a:fontRef>
-        </p:style>
-        <p:txBody>
-          <a:bodyPr wrap="square" lIns="27432" tIns="22860" rIns="27432" bIns="22860" rtlCol="0" anchor="ctr"/>
-          <a:lstStyle/>
-          <a:p>
-            <a:pPr algn="ctr"/>
-            <a:r>
-              <a:rPr sz="2000" b="0" i="1" dirty="0">
-                <a:solidFill>
-                  <a:srgbClr val="5C4826"/>
-                </a:solidFill>
-              </a:rPr>
-              <a:t/>
+              <a:rPr sz="2000" b="1" i="0" dirty="0">
+                <a:solidFill>
+                  <a:srgbClr val="FFFFFF"/>
+                </a:solidFill>
+              </a:rPr>
+              <a:t>What will be different when the next engineer or agent acts?</a:t>
             </a:r>
           </a:p>
         </p:txBody>

--- a/course/lectures/act-2-delegation-and-control/04-failure-aware-engineering/2-4-Failure-Aware-Engineering.pptx
+++ b/course/lectures/act-2-delegation-and-control/04-failure-aware-engineering/2-4-Failure-Aware-Engineering.pptx
@@ -1344,6 +1344,12 @@
               <a:t>TRANSITION: let's see what actually happened — and compare it against your table.</a:t>
             </a:r>
           </a:p>
+          <a:p/>
+          <a:p>
+            <a:r>
+              <a:t>CLASSROOM EXECUTION: have students WRITE DOWN their worksheet answers before you advance. Once the next slide reveals the incident, hindsight will quietly rewrite what they believe they anticipated — and the comparison question on 28 depends on having their actual predictions in front of them.</a:t>
+            </a:r>
+          </a:p>
         </p:txBody>
       </p:sp>
       <p:sp>
@@ -3424,6 +3430,12 @@
               <a:t>BRIDGE (author): the jump from comparing causal models to reading postmortems needs its connective sentence, now on the slide — once engineers have an explanation, they must determine what the evidence justifies changing. A postmortem is the document where that determination is argued.</a:t>
             </a:r>
           </a:p>
+          <a:p/>
+          <a:p>
+            <a:r>
+              <a:t>PROGRESSION (say it, do not re-explain slides 10/11/16-19): this slide asks WHAT LESSON THE EVIDENCE JUSTIFIES.</a:t>
+            </a:r>
+          </a:p>
         </p:txBody>
       </p:sp>
       <p:sp>
@@ -3534,6 +3546,12 @@
               <a:t>EXPOSITION ORDER (author, revised 261015): walk the chain, then land the distinction with the Schön line beneath the diagram — experience accumulates by itself; expertise does not. Reflection is the deliberate comparison of expectation with outcome, and that comparison, not the hours, feeds the repertoire. (The duplicate opening sentence above the diagram was removed: one statement of the point, stated once.)</a:t>
             </a:r>
           </a:p>
+          <a:p/>
+          <a:p>
+            <a:r>
+              <a:t>PROGRESSION: 21 asked what lesson the evidence justifies. This slide asks HOW THAT LESSON CHANGES THE ENGINEER.</a:t>
+            </a:r>
+          </a:p>
         </p:txBody>
       </p:sp>
       <p:sp>
@@ -3639,6 +3657,12 @@
               <a:t>SEQUENCE, NOT TAXONOMY (author): walk the five rows as CONNECTED DECISIONS, each depending on the previous — what obligation was violated? → how should it be REPRESENTED so it can be reasoned about? → what EVIDENCE establishes compliance with it? → how is that evidence EVALUATED? → what ENFORCES that an unacceptable change cannot proceed? The arrows down the left column carry the dependency. Map each to the unit where students met it (the bottom line): obligations in Requirements, representation in Modeling, evidence and evaluation in Validation, enforcement in Alignment. The diagnosis question is where the CHAIN first broke, and the encoding belongs at that link.</a:t>
             </a:r>
           </a:p>
+          <a:p/>
+          <a:p>
+            <a:r>
+              <a:t>PROGRESSION: 22 changed the engineer. This slide asks HOW THE LESSON CHANGES THE ENGINEERING ENVIRONMENT.</a:t>
+            </a:r>
+          </a:p>
         </p:txBody>
       </p:sp>
       <p:sp>
@@ -3734,6 +3758,12 @@
               <a:t>TRANSITION: we now have interventions and owners. One question left, and it is the Validation unit's question: how would we know any of this worked?</a:t>
             </a:r>
           </a:p>
+          <a:p/>
+          <a:p>
+            <a:r>
+              <a:t>PROGRESSION: 23 chose the structure. This slide asks WHO CAN ACTUALLY MAKE THAT CHANGE.</a:t>
+            </a:r>
+          </a:p>
         </p:txBody>
       </p:sp>
       <p:sp>
@@ -3827,6 +3857,12 @@
           <a:p>
             <a:r>
               <a:t>TRANSITION: everything so far reasons BACKWARD from a failure that already happened. Can the discipline run FORWARD — before any failure occurs? Next: a structured method for searching for failures in advance, tried first on the incident we now know thoroughly.</a:t>
+            </a:r>
+          </a:p>
+          <a:p/>
+          <a:p>
+            <a:r>
+              <a:t>PROGRESSION: 24 found the authority. This slide asks HOW WE WILL KNOW THE CHANGE WORKED. Do not re-run slide 11's argument — point back to it.</a:t>
             </a:r>
           </a:p>
         </p:txBody>
@@ -11058,7 +11094,7 @@
                   <a:srgbClr val="5C4826"/>
                 </a:solidFill>
               </a:rPr>
-              <a:t>STAMP (Leveson): accidents arise when the control structure fails to enforce safety constraints.</a:t>
+              <a:t>We have expanded the system boundary. Now we need a model that explains</a:t>
             </a:r>
           </a:p>
           <a:p>
@@ -11069,7 +11105,29 @@
                   <a:srgbClr val="5C4826"/>
                 </a:solidFill>
               </a:rPr>
-              <a:t>A controller can be software, an operator, an organization, or a regulator.</a:t>
+              <a:t>how organizations control the behaviour of that system.</a:t>
+            </a:r>
+          </a:p>
+          <a:p>
+            <a:pPr algn="ctr"/>
+            <a:r>
+              <a:rPr sz="1400" b="0" i="0">
+                <a:solidFill>
+                  <a:srgbClr val="5C4826"/>
+                </a:solidFill>
+              </a:rPr>
+              <a:t>STAMP (Leveson): accidents arise when the control structure fails to enforce</a:t>
+            </a:r>
+          </a:p>
+          <a:p>
+            <a:pPr algn="ctr"/>
+            <a:r>
+              <a:rPr sz="1400" b="0" i="0">
+                <a:solidFill>
+                  <a:srgbClr val="5C4826"/>
+                </a:solidFill>
+              </a:rPr>
+              <a:t>safety constraints. A controller can be software, an operator, or an organization.</a:t>
             </a:r>
           </a:p>
         </p:txBody>
@@ -20077,7 +20135,7 @@
                   <a:srgbClr val="5C4826"/>
                 </a:solidFill>
               </a:rPr>
-              <a:t>The three models explain a failure that has happened. FMEA — Failure Mode and Effects Analysis —</a:t>
+              <a:t>We have learned from CrowdStrike. Can we use that knowledge to anticipate</a:t>
             </a:r>
           </a:p>
           <a:p>
@@ -20088,7 +20146,29 @@
                   <a:srgbClr val="5C4826"/>
                 </a:solidFill>
               </a:rPr>
-              <a:t>searches for failures that have not happened yet. The procedure:</a:t>
+              <a:t>failures in another system?</a:t>
+            </a:r>
+          </a:p>
+          <a:p>
+            <a:pPr algn="ctr"/>
+            <a:r>
+              <a:rPr sz="1200" b="1" i="1">
+                <a:solidFill>
+                  <a:srgbClr val="5C4826"/>
+                </a:solidFill>
+              </a:rPr>
+              <a:t>FMEA — Failure Mode and Effects Analysis — searches, function by function,</a:t>
+            </a:r>
+          </a:p>
+          <a:p>
+            <a:pPr algn="ctr"/>
+            <a:r>
+              <a:rPr sz="1200" b="1" i="1">
+                <a:solidFill>
+                  <a:srgbClr val="5C4826"/>
+                </a:solidFill>
+              </a:rPr>
+              <a:t>for failures that have not happened yet.</a:t>
             </a:r>
           </a:p>
         </p:txBody>
@@ -25319,7 +25399,18 @@
                   <a:srgbClr val="5C4826"/>
                 </a:solidFill>
               </a:rPr>
-              <a:t>Each template specifies the input fields the interpreter expects.</a:t>
+              <a:t>Each template specifies the input fields the interpreter expects —</a:t>
+            </a:r>
+          </a:p>
+          <a:p>
+            <a:pPr algn="ctr"/>
+            <a:r>
+              <a:rPr sz="1300" b="1" i="1">
+                <a:solidFill>
+                  <a:srgbClr val="5C4826"/>
+                </a:solidFill>
+              </a:rPr>
+              <a:t>and the sensor's integration code builds the input array it reads.</a:t>
             </a:r>
           </a:p>
         </p:txBody>

--- a/course/lectures/act-2-delegation-and-control/04-failure-aware-engineering/2-4-Failure-Aware-Engineering.pptx
+++ b/course/lectures/act-2-delegation-and-control/04-failure-aware-engineering/2-4-Failure-Aware-Engineering.pptx
@@ -5,39 +5,39 @@
     <p:sldMasterId id="2147483708" r:id="rId1"/>
   </p:sldMasterIdLst>
   <p:notesMasterIdLst>
-    <p:notesMasterId r:id="rId36"/>
+    <p:notesMasterId r:id="rId32"/>
   </p:notesMasterIdLst>
   <p:sldIdLst>
     <p:sldId id="256" r:id="rId2"/>
-    <p:sldId id="304" r:id="rId42"/>
-    <p:sldId id="305" r:id="rId43"/>
-    <p:sldId id="306" r:id="rId44"/>
-    <p:sldId id="307" r:id="rId45"/>
-    <p:sldId id="308" r:id="rId46"/>
-    <p:sldId id="309" r:id="rId47"/>
-    <p:sldId id="310" r:id="rId48"/>
-    <p:sldId id="311" r:id="rId49"/>
-    <p:sldId id="312" r:id="rId50"/>
-    <p:sldId id="313" r:id="rId51"/>
-    <p:sldId id="314" r:id="rId52"/>
-    <p:sldId id="315" r:id="rId53"/>
-    <p:sldId id="316" r:id="rId54"/>
-    <p:sldId id="317" r:id="rId55"/>
-    <p:sldId id="318" r:id="rId56"/>
-    <p:sldId id="319" r:id="rId57"/>
-    <p:sldId id="320" r:id="rId58"/>
-    <p:sldId id="321" r:id="rId59"/>
-    <p:sldId id="322" r:id="rId60"/>
-    <p:sldId id="323" r:id="rId61"/>
-    <p:sldId id="324" r:id="rId62"/>
-    <p:sldId id="325" r:id="rId63"/>
-    <p:sldId id="326" r:id="rId64"/>
-    <p:sldId id="327" r:id="rId65"/>
-    <p:sldId id="331" r:id="rId35"/>
-    <p:sldId id="332" r:id="rId34"/>
-    <p:sldId id="328" r:id="rId66"/>
-    <p:sldId id="329" r:id="rId67"/>
-    <p:sldId id="330" r:id="rId68"/>
+    <p:sldId id="304" r:id="rId3"/>
+    <p:sldId id="305" r:id="rId4"/>
+    <p:sldId id="306" r:id="rId5"/>
+    <p:sldId id="307" r:id="rId6"/>
+    <p:sldId id="308" r:id="rId7"/>
+    <p:sldId id="309" r:id="rId8"/>
+    <p:sldId id="310" r:id="rId9"/>
+    <p:sldId id="311" r:id="rId10"/>
+    <p:sldId id="312" r:id="rId11"/>
+    <p:sldId id="313" r:id="rId12"/>
+    <p:sldId id="314" r:id="rId13"/>
+    <p:sldId id="315" r:id="rId14"/>
+    <p:sldId id="316" r:id="rId15"/>
+    <p:sldId id="317" r:id="rId16"/>
+    <p:sldId id="318" r:id="rId17"/>
+    <p:sldId id="319" r:id="rId18"/>
+    <p:sldId id="320" r:id="rId19"/>
+    <p:sldId id="321" r:id="rId20"/>
+    <p:sldId id="322" r:id="rId21"/>
+    <p:sldId id="323" r:id="rId22"/>
+    <p:sldId id="324" r:id="rId23"/>
+    <p:sldId id="325" r:id="rId24"/>
+    <p:sldId id="326" r:id="rId25"/>
+    <p:sldId id="327" r:id="rId26"/>
+    <p:sldId id="331" r:id="rId27"/>
+    <p:sldId id="332" r:id="rId28"/>
+    <p:sldId id="328" r:id="rId29"/>
+    <p:sldId id="329" r:id="rId30"/>
+    <p:sldId id="330" r:id="rId31"/>
   </p:sldIdLst>
   <p:sldSz cx="9144000" cy="6858000" type="screen4x3"/>
   <p:notesSz cx="6858000" cy="9144000"/>
@@ -780,7 +780,7 @@
           </a:lstStyle>
           <a:p>
             <a:fld id="{27E8B4C4-0720-F64E-9EEE-9472CF165DC6}" type="datetimeFigureOut">
-              <a:t>10/15/26</a:t>
+              <a:t>10/16/26</a:t>
             </a:fld>
             <a:endParaRPr lang="en-US"/>
           </a:p>
@@ -1151,8 +1151,8 @@
 </p:notes>
 </file>
 
-<file path=ppt/notesSlides/notesSlide29.xml><?xml version="1.0" encoding="utf-8"?>
-<p:notes xmlns:a="http://schemas.openxmlformats.org/drawingml/2006/main" xmlns:p="http://schemas.openxmlformats.org/presentationml/2006/main" xmlns:r="http://schemas.openxmlformats.org/officeDocument/2006/relationships">
+<file path=ppt/notesSlides/notesSlide10.xml><?xml version="1.0" encoding="utf-8"?>
+<p:notes xmlns:a="http://schemas.openxmlformats.org/drawingml/2006/main" xmlns:r="http://schemas.openxmlformats.org/officeDocument/2006/relationships" xmlns:p="http://schemas.openxmlformats.org/presentationml/2006/main">
   <p:cSld>
     <p:spTree>
       <p:nvGrpSpPr>
@@ -1172,7 +1172,7 @@
         <p:nvSpPr>
           <p:cNvPr id="2" name="Slide Image Placeholder 1"/>
           <p:cNvSpPr>
-            <a:spLocks noGrp="1"/>
+            <a:spLocks noGrp="1" noRot="1" noChangeAspect="1"/>
           </p:cNvSpPr>
           <p:nvPr>
             <p:ph type="sldImg" idx="2"/>
@@ -1187,7 +1187,7 @@
             <a:spLocks noGrp="1"/>
           </p:cNvSpPr>
           <p:nvPr>
-            <p:ph type="body" idx="3" sz="quarter"/>
+            <p:ph type="body" sz="quarter" idx="3"/>
           </p:nvPr>
         </p:nvSpPr>
         <p:spPr/>
@@ -1196,52 +1196,42 @@
           <a:lstStyle/>
           <a:p>
             <a:r>
-              <a:t>TIMING: 3 minutes. NEW METHOD — prospective, not explanatory.</a:t>
-            </a:r>
-          </a:p>
-          <a:p>
-            <a:r>
-              <a:t>ENGINEERING POINT: the three models EXPLAIN a failure that has happened. FMEA — Failure Mode and Effects Analysis (IEC 60812:2018) — is not a fourth explanation: it is a structured method for SEARCHING for potential failures and deciding what deserves attention, before anything fails. Nor is it component-only — by scope it can examine functions, interfaces, operational processes, or organizational activities. Do not teach 'FMEA = components, STAMP = systems.'</a:t>
-            </a:r>
-          </a:p>
-          <a:p>
-            <a:r>
-              <a:t>BUILD (ANIMATION-IN-SPEECH — no authored animation; run the reveal as staged speech): Step 1 — read the lead and the four-step PROCEDURE at the top, before any row: identify a plausible failure mode; determine its consequences; identify existing or proposed controls; decide whether the remaining risk warrants action. This is the method slide 27 asks students to run unaided. Step 2 — only then walk the worked table one row at a time, naming which procedure step each column instantiates (failure mode -&gt; step 1, effect -&gt; step 2, candidate control -&gt; step 3). Step 3 — close on the occurrence line at the bottom: deciding which modes warrant action under unknown probabilities IS step 4.</a:t>
-            </a:r>
-          </a:p>
-          <a:p>
-            <a:r>
-              <a:t>THE WORKED TABLE: each row: a FUNCTION of the system we know thoroughly, a failure mode, its effect, a candidate control — all met on slides 21–25.</a:t>
-            </a:r>
-          </a:p>
-          <a:p>
-            <a:r>
-              <a:t>CARE — the staged-rollout row (cross-reference slide 25): HAVING a staged-rollout mechanism is not the same as having one that reliably detects and contains the failure mode; a rollout that advances without meaningful health checks offers little protection.</a:t>
-            </a:r>
-          </a:p>
-          <a:p>
-            <a:r>
-              <a:t>RATINGS (notes only): classical FMEA multiplies severity, occurrence, and detection into a Risk Priority Number — but multiplying ordinal ratings does not make an RPN of 120 twice the risk of 60; the AIAG &amp; VDA FMEA Handbook (1st ed., 2019) replaces RPN with Action Priority. Occurrence stays '?' deliberately: the method's value is exposing uncertainty, not manufacturing numerical certainty.</a:t>
-            </a:r>
-          </a:p>
-          <a:p>
-            <a:r>
-              <a:t>SIMPLIFICATION (say it to the class): a full FMEA also assesses severity, occurrence, and detectability to prioritize action. We are using a simplified version because we lack reliable estimates.</a:t>
-            </a:r>
-          </a:p>
-          <a:p>
-            <a:r>
-              <a:t>ASK (the footer): which of these failure modes could occur in another security product? Expected: the validate / distribute / maintain rows do not depend on the content-interpreter defect at all.</a:t>
-            </a:r>
-          </a:p>
-          <a:p>
-            <a:r>
-              <a:t>INSTRUCTOR REFERENCES (no student reading assigned): IEC 60812:2018; AIAG &amp; VDA FMEA Handbook, 1st ed., 2019.</a:t>
-            </a:r>
-          </a:p>
-          <a:p>
-            <a:r>
-              <a:t>TRANSITION: if those rows transfer, the method should work on a system we know nothing about. Next: exactly that.</a:t>
+              <a:t>TIMING: 2 minutes.</a:t>
+            </a:r>
+          </a:p>
+          <a:p>
+            <a:r>
+              <a:t>ENGINEERING POINT: interventions have distinct effects — prevent, detect, contain, recover. They are not interchangeable, and they fail differently. Prevention and detection act on the DEFECT; containment and recovery act on the CONSEQUENCES.</a:t>
+            </a:r>
+          </a:p>
+          <a:p>
+            <a:r>
+              <a:t>FACTUAL BACKGROUND: CrowdStrike's own committed mitigations span all four (RCA, 6 Aug 2024): validate the Template Type field count at compile time and add runtime bounds checks (prevent); widen Template Type test coverage and add Content Validator checks (detect); stage Template Instance deployment through canary rings with rollback, and give customers control over Rapid Response Content deployment (contain); recovery was the manual remediation affected organizations then had to perform.</a:t>
+            </a:r>
+          </a:p>
+          <a:p>
+            <a:r>
+              <a:t>KEY DISTINCTION: containment versus recovery. Staged deployment reduces how much of the fleet is exposed BEFORE anyone knows the update is bad; recovery operates AFTER machines have failed. Students conflate them because both 'limit damage'.</a:t>
+            </a:r>
+          </a:p>
+          <a:p>
+            <a:r>
+              <a:t>ASK: which of these four would have changed THIS incident's outcome the most?</a:t>
+            </a:r>
+          </a:p>
+          <a:p>
+            <a:r>
+              <a:t>EXPECTED ANSWERS: most pick prevent ('just add the bounds check'). Counter: prevention closes this defect; containment bounds the NEXT defect class you haven't imagined yet.</a:t>
+            </a:r>
+          </a:p>
+          <a:p>
+            <a:r>
+              <a:t>TRANSITION: each intervention leaves a different uncertainty behind. What exactly does each piece of evidence establish?</a:t>
+            </a:r>
+          </a:p>
+          <a:p>
+            <a:r>
+              <a:t>TIMELINE (author): give the four a shared timeline — defect → release → propagation → disruption — and read each intervention against the stage it addresses (now tagged on each block): PREVENT acts at the defect, DETECT before release, CONTAIN during propagation, RECOVER after disruption. That turns the taxonomy into an analytical tool: for any proposed intervention, ask which stage it acts on and what has already happened by then.</a:t>
             </a:r>
           </a:p>
         </p:txBody>
@@ -1253,7 +1243,7 @@
             <a:spLocks noGrp="1"/>
           </p:cNvSpPr>
           <p:nvPr>
-            <p:ph type="sldNum" idx="5" sz="quarter"/>
+            <p:ph type="sldNum" sz="quarter" idx="5"/>
           </p:nvPr>
         </p:nvSpPr>
         <p:spPr/>
@@ -1266,8 +1256,8 @@
 </p:notes>
 </file>
 
-<file path=ppt/notesSlides/notesSlide30.xml><?xml version="1.0" encoding="utf-8"?>
-<p:notes xmlns:a="http://schemas.openxmlformats.org/drawingml/2006/main" xmlns:p="http://schemas.openxmlformats.org/presentationml/2006/main" xmlns:r="http://schemas.openxmlformats.org/officeDocument/2006/relationships">
+<file path=ppt/notesSlides/notesSlide11.xml><?xml version="1.0" encoding="utf-8"?>
+<p:notes xmlns:a="http://schemas.openxmlformats.org/drawingml/2006/main" xmlns:r="http://schemas.openxmlformats.org/officeDocument/2006/relationships" xmlns:p="http://schemas.openxmlformats.org/presentationml/2006/main">
   <p:cSld>
     <p:spTree>
       <p:nvGrpSpPr>
@@ -1287,7 +1277,7 @@
         <p:nvSpPr>
           <p:cNvPr id="2" name="Slide Image Placeholder 1"/>
           <p:cNvSpPr>
-            <a:spLocks noGrp="1"/>
+            <a:spLocks noGrp="1" noRot="1" noChangeAspect="1"/>
           </p:cNvSpPr>
           <p:nvPr>
             <p:ph type="sldImg" idx="2"/>
@@ -1302,7 +1292,7 @@
             <a:spLocks noGrp="1"/>
           </p:cNvSpPr>
           <p:nvPr>
-            <p:ph type="body" idx="3" sz="quarter"/>
+            <p:ph type="body" sz="quarter" idx="3"/>
           </p:nvPr>
         </p:nvSpPr>
         <p:spPr/>
@@ -1311,43 +1301,37 @@
           <a:lstStyle/>
           <a:p>
             <a:r>
-              <a:t>TIMING: 3 minutes — present the architecture in under one minute; PROTECT 2–3 minutes for the worksheet discussion (author pacing note).</a:t>
-            </a:r>
-          </a:p>
-          <a:p>
-            <a:r>
-              <a:t>ENGINEERING POINT: transfer of the METHOD, not recall of an incident. Students get only the architecture — four facts — and must search it for failure modes under genuinely incomplete information, the condition engineers actually work in. DO NOT reveal what happened in 2019; if a student already knows the incident, ask them to hold it.</a:t>
-            </a:r>
-          </a:p>
-          <a:p>
-            <a:r>
-              <a:t>FACTUAL BACKGROUND (architecture only; source: Cloudflare post-mortem, 'Details of the Cloudflare outage on July 2, 2019'): Cloudflare operates a Web Application Firewall that inspects incoming web requests; engineers can deploy new detection rules without releasing new software; some rules use regular expressions; rule changes can propagate globally within seconds.</a:t>
-            </a:r>
-          </a:p>
-          <a:p>
-            <a:r>
-              <a:t>RUN IT: pairs, at least one failure mode per function row; leave occurrence '?' and ask which modes warrant a control anyway.</a:t>
-            </a:r>
-          </a:p>
-          <a:p>
-            <a:r>
-              <a:t>EXPECTED ANSWERS — all legitimate WITHOUT knowing the incident: a rule that consumes excessive CPU or memory; a rule that false-positives and blocks legitimate traffic; a malformed rule that breaks evaluation; a defective rule reaching every server before anyone can detect or halt it. Students do NOT need to anticipate catastrophic regex backtracking: the general failure mode is the method's product; the precise defect is hindsight's.</a:t>
-            </a:r>
-          </a:p>
-          <a:p>
-            <a:r>
-              <a:t>MISCONCEPTION: a guessing game about 'the real outage.' Grade on search discipline, not prophecy.</a:t>
-            </a:r>
-          </a:p>
-          <a:p>
-            <a:r>
-              <a:t>TRANSITION: let's see what actually happened — and compare it against your table.</a:t>
-            </a:r>
-          </a:p>
-          <a:p/>
-          <a:p>
-            <a:r>
-              <a:t>CLASSROOM EXECUTION: have students WRITE DOWN their worksheet answers before you advance. Once the next slide reveals the incident, hindsight will quietly rewrite what they believe they anticipated — and the comparison question on 28 depends on having their actual predictions in front of them.</a:t>
+              <a:t>TIMING: 2 minutes. RECONNECTS TO THE VALIDATION UNIT.</a:t>
+            </a:r>
+          </a:p>
+          <a:p>
+            <a:r>
+              <a:t>ENGINEERING POINT: each intervention is backed by evidence that establishes something SPECIFIC, and the gap between what it establishes and what we need is residual uncertainty. A regression test pins the observed failure; a general invariant (the compile-time field-count check, the runtime bounds check) constrains a class; deployment containment accepts that some failures will escape and bounds their reach.</a:t>
+            </a:r>
+          </a:p>
+          <a:p>
+            <a:r>
+              <a:t>FACTUAL GROUNDING: map each row to slide 9's findings. CrowdStrike's added bounds check is a general invariant — it holds for every spec-allowed content instance, not just Channel File 291. Their staged-rollout commitment is containment (CrowdStrike RCA, 6 Aug 2024).</a:t>
+            </a:r>
+          </a:p>
+          <a:p>
+            <a:r>
+              <a:t>CARE: do not teach 'regression tests are weak'. Their adequacy depends on the property and the failure class — for a deterministic parser defect, a regression test is exactly right.</a:t>
+            </a:r>
+          </a:p>
+          <a:p>
+            <a:r>
+              <a:t>ASK: after adding the bounds check, what uncertainty remains?</a:t>
+            </a:r>
+          </a:p>
+          <a:p>
+            <a:r>
+              <a:t>EXPECTED ANSWERS: 'none — it's fixed.' Misconception to correct: the bounds check closes out-of-bounds READS; it says nothing about the next way content and interpreter can disagree, which is why containment still earns its keep.</a:t>
+            </a:r>
+          </a:p>
+          <a:p>
+            <a:r>
+              <a:t>TRANSITION: everything so far explains the crash and the escape. Neither explains why ONE escaped defect disrupted airlines, hospitals, and banks on the same morning.</a:t>
             </a:r>
           </a:p>
         </p:txBody>
@@ -1359,7 +1343,7 @@
             <a:spLocks noGrp="1"/>
           </p:cNvSpPr>
           <p:nvPr>
-            <p:ph type="sldNum" idx="5" sz="quarter"/>
+            <p:ph type="sldNum" sz="quarter" idx="5"/>
           </p:nvPr>
         </p:nvSpPr>
         <p:spPr/>
@@ -1372,8 +1356,8 @@
 </p:notes>
 </file>
 
-<file path=ppt/notesSlides/notesSlide34.xml><?xml version="1.0" encoding="utf-8"?>
-<p:notes xmlns:a="http://schemas.openxmlformats.org/drawingml/2006/main" xmlns:p="http://schemas.openxmlformats.org/presentationml/2006/main" xmlns:r="http://schemas.openxmlformats.org/officeDocument/2006/relationships">
+<file path=ppt/notesSlides/notesSlide12.xml><?xml version="1.0" encoding="utf-8"?>
+<p:notes xmlns:a="http://schemas.openxmlformats.org/drawingml/2006/main" xmlns:r="http://schemas.openxmlformats.org/officeDocument/2006/relationships" xmlns:p="http://schemas.openxmlformats.org/presentationml/2006/main">
   <p:cSld>
     <p:spTree>
       <p:nvGrpSpPr>
@@ -1393,7 +1377,7 @@
         <p:nvSpPr>
           <p:cNvPr id="2" name="Slide Image Placeholder 1"/>
           <p:cNvSpPr>
-            <a:spLocks noGrp="1"/>
+            <a:spLocks noGrp="1" noRot="1" noChangeAspect="1"/>
           </p:cNvSpPr>
           <p:nvPr>
             <p:ph type="sldImg" idx="2"/>
@@ -1408,7 +1392,7 @@
             <a:spLocks noGrp="1"/>
           </p:cNvSpPr>
           <p:nvPr>
-            <p:ph type="body" idx="3" sz="quarter"/>
+            <p:ph type="body" sz="quarter" idx="3"/>
           </p:nvPr>
         </p:nvSpPr>
         <p:spPr/>
@@ -1417,42 +1401,32 @@
           <a:lstStyle/>
           <a:p>
             <a:r>
-              <a:t>TIMING: 2 minutes. START WITH CONSEQUENCES, NOT CAUSE.</a:t>
-            </a:r>
-          </a:p>
-          <a:p>
-            <a:r>
-              <a:t>ENGINEERING POINT: the scale of disruption is not explained by the size of the defect. Students should feel that gap before any mechanism is offered.</a:t>
-            </a:r>
-          </a:p>
-          <a:p>
-            <a:r>
-              <a:t>BACKGROUND: on 19 July 2024 a CrowdStrike Falcon content update caused Windows systems to crash worldwide. Microsoft estimated the update 'affected 8.5 million Windows devices, or less than one percent of all Windows machines' (Microsoft, 20 Jul 2024).</a:t>
-            </a:r>
-          </a:p>
-          <a:p>
-            <a:r>
-              <a:t>ASK: what kind of event could simultaneously affect airlines, hospitals and banks?</a:t>
-            </a:r>
-          </a:p>
-          <a:p>
-            <a:r>
-              <a:t>EXPECTED ANSWERS / MISCONCEPTIONS: students usually propose a cyber-attack, or a Microsoft defect. Both are wrong and both are useful — the answer is a shared dependency, which is the seed of the common-cause argument in Movement 3. Note the 'under 1%' figure explicitly: the lesson is not how MANY devices failed but WHICH ones. A small, non-random slice of machines ran essential services.</a:t>
-            </a:r>
-          </a:p>
-          <a:p>
-            <a:r>
-              <a:t>TRANSITION: so what actually arrived on those machines?</a:t>
-            </a:r>
-          </a:p>
-          <a:p>
-            <a:r>
-              <a:t>SOURCES: Microsoft blog, 20 Jul 2024 (device estimate). Sector impacts are from contemporaneous reporting — keep these qualitative; do not quote cancellation counts you have not checked.</a:t>
-            </a:r>
-          </a:p>
-          <a:p>
-            <a:r>
-              <a:t>SLIDE ASSETS: the brief asks for authentic imagery (a departure board, a BSOD). None is embedded — manufacturing a screenshot is forbidden and no licensed image was available to this build. Drop in real images from credible reporting and shorten the rows if space requires.</a:t>
+              <a:t>TIMING: 1 minutes. TRANSITION SLIDE — closes Movement 2, opens the system question.</a:t>
+            </a:r>
+          </a:p>
+          <a:p>
+            <a:r>
+              <a:t>ENGINEERING POINT: the component model explained the crash; Swiss cheese explained the escape. Neither explains the SHAPE of the impact — organizations with no relationship to each other failing simultaneously. The observation that needs a new model: correlated failure across apparently independent systems.</a:t>
+            </a:r>
+          </a:p>
+          <a:p>
+            <a:r>
+              <a:t>FACTUAL BACKGROUND: Microsoft estimated ~8.5 million Windows devices affected — 'less than one percent of all Windows machines' (Microsoft, 20 Jul 2024). Carry the qualifier: the lesson is not how many devices failed but WHICH ones. A small, non-random slice of machines ran airlines' operations, hospitals' clinical systems, and banks' payment paths. Keep sector impacts qualitative; do not quote cancellation counts.</a:t>
+            </a:r>
+          </a:p>
+          <a:p>
+            <a:r>
+              <a:t>ASK: why did independent organizations fail together?</a:t>
+            </a:r>
+          </a:p>
+          <a:p>
+            <a:r>
+              <a:t>EXPECTED ANSWERS: 'they all used CrowdStrike' — correct, and push one level: what PROPERTY of that shared dependency turned one vendor's defect into a multi-sector outage? (Privileged position + simultaneous global distribution.) Misconception: 'the update was unusually large-scale.' Under one percent of Windows machines — scale is not the explanation; criticality and shared dependency are.</a:t>
+            </a:r>
+          </a:p>
+          <a:p>
+            <a:r>
+              <a:t>TRANSITION: to reason about this we need a model whose subject is the SYSTEM — its controls and dependencies — not the defect. We need to choose a system boundary.</a:t>
             </a:r>
           </a:p>
         </p:txBody>
@@ -1464,7 +1438,7 @@
             <a:spLocks noGrp="1"/>
           </p:cNvSpPr>
           <p:nvPr>
-            <p:ph type="sldNum" idx="5" sz="quarter"/>
+            <p:ph type="sldNum" sz="quarter" idx="5"/>
           </p:nvPr>
         </p:nvSpPr>
         <p:spPr/>
@@ -1477,8 +1451,8 @@
 </p:notes>
 </file>
 
-<file path=ppt/notesSlides/notesSlide35.xml><?xml version="1.0" encoding="utf-8"?>
-<p:notes xmlns:a="http://schemas.openxmlformats.org/drawingml/2006/main" xmlns:p="http://schemas.openxmlformats.org/presentationml/2006/main" xmlns:r="http://schemas.openxmlformats.org/officeDocument/2006/relationships">
+<file path=ppt/notesSlides/notesSlide13.xml><?xml version="1.0" encoding="utf-8"?>
+<p:notes xmlns:a="http://schemas.openxmlformats.org/drawingml/2006/main" xmlns:r="http://schemas.openxmlformats.org/officeDocument/2006/relationships" xmlns:p="http://schemas.openxmlformats.org/presentationml/2006/main">
   <p:cSld>
     <p:spTree>
       <p:nvGrpSpPr>
@@ -1498,7 +1472,7 @@
         <p:nvSpPr>
           <p:cNvPr id="2" name="Slide Image Placeholder 1"/>
           <p:cNvSpPr>
-            <a:spLocks noGrp="1"/>
+            <a:spLocks noGrp="1" noRot="1" noChangeAspect="1"/>
           </p:cNvSpPr>
           <p:nvPr>
             <p:ph type="sldImg" idx="2"/>
@@ -1513,7 +1487,7 @@
             <a:spLocks noGrp="1"/>
           </p:cNvSpPr>
           <p:nvPr>
-            <p:ph type="body" idx="3" sz="quarter"/>
+            <p:ph type="body" sz="quarter" idx="3"/>
           </p:nvPr>
         </p:nvSpPr>
         <p:spPr/>
@@ -1522,37 +1496,42 @@
           <a:lstStyle/>
           <a:p>
             <a:r>
-              <a:t>TIMING: 3 minutes. ESTABLISH THE SYSTEM BEFORE ANALYZING IT.</a:t>
-            </a:r>
-          </a:p>
-          <a:p>
-            <a:r>
-              <a:t>ENGINEERING POINT: a student should never have to infer what a component does while being asked to analyze why it failed. So first the parts, in order: CrowdStrike is a security vendor; its Falcon sensor runs on each Windows endpoint with privileged system access (it must see what the operating system sees); the sensor interprets Rapid Response Content — detection content describing what to look for — which is distributed separately from sensor-software releases. THEN the event: on July 19, one content update was defective, the sensor crashed processing it, and because the sensor runs with privileged access, the sensor's crash became the operating system's crash.</a:t>
-            </a:r>
-          </a:p>
-          <a:p>
-            <a:r>
-              <a:t>DOCUMENTED (CrowdStrike RCA, 6 Aug 2024): the defective artifact was a Rapid Response Content update, not an ordinary Windows OS update; Rapid Response Content could be updated independently of sensor-code releases — a faster release path. HOLD that faster-path observation for Movement 2 (slide 7) unless a student raises it; here it is premature.</a:t>
-            </a:r>
-          </a:p>
-          <a:p>
-            <a:r>
-              <a:t>ASK (the footer): why can security content crash an operating system?</a:t>
-            </a:r>
-          </a:p>
-          <a:p>
-            <a:r>
-              <a:t>EXPECTED ANSWERS: 'it's code' — sharpen: it is DATA interpreted by privileged code, and data consumed by privileged code can change its behavior. Misconception: students assume the update was a program; the content/interpreter split is the load-bearing distinction for the whole lecture.</a:t>
-            </a:r>
-          </a:p>
-          <a:p>
-            <a:r>
-              <a:t>TRANSITION: what exactly did the content and its interpreter disagree about? Numbers next.</a:t>
-            </a:r>
-          </a:p>
-          <a:p>
-            <a:r>
-              <a:t>SOURCES: CrowdStrike RCA, 6 Aug 2024.</a:t>
+              <a:t>TIMING: 3 minutes. OPENS MOVEMENT 3 — why could one failure affect so many?</a:t>
+            </a:r>
+          </a:p>
+          <a:p>
+            <a:r>
+              <a:t>ENGINEERING POINT: the system under investigation changes with the question. Each boundary is an ANALYTICAL choice — a model that preserves the relationships needed to answer one engineering question. Connect explicitly to the Modeling unit: a model preserves the relationships needed to answer an engineering question, and nothing else.</a:t>
+            </a:r>
+          </a:p>
+          <a:p>
+            <a:r>
+              <a:t>CARE: the boundaries are purposeful models, not containment relationships. CrowdStrike's engineering organization is NOT organizationally inside each customer's IT department — that is why CrowdStrike and enterprise IT appear as separate actors on one dependency/control graph, with boundaries drawn AROUND subsets of it.</a:t>
+            </a:r>
+          </a:p>
+          <a:p>
+            <a:r>
+              <a:t>WALK THE BOUNDARIES: ① content + interpreter — what caused the crash? ② CrowdStrike's engineering system — why did the update escape? ③ add enterprise deployment and the services it runs — why did organizations become unavailable? ④ the ecosystem of thousands of organizations holding the same dependency — why could one vendor's failure disrupt multiple sectors?</a:t>
+            </a:r>
+          </a:p>
+          <a:p>
+            <a:r>
+              <a:t>ASK: which boundary contains the intervention we need?</a:t>
+            </a:r>
+          </a:p>
+          <a:p>
+            <a:r>
+              <a:t>EXPECTED ANSWERS: 'the biggest one.' Misconception to correct: the larger boundary also exposes decisions OUTSIDE CrowdStrike's authority — breadth is bought with evidence and authority requirements, so you choose the boundary the decision needs.</a:t>
+            </a:r>
+          </a:p>
+          <a:p>
+            <a:r>
+              <a:t>TRANSITION: to reason about the larger boundaries we need a model built for systems — one whose vocabulary is control, not components.</a:t>
+            </a:r>
+          </a:p>
+          <a:p>
+            <a:r>
+              <a:t>STAGING (no animation is authored in this deck — run the reveal verbally): present the boundaries SEQUENTIALLY, never all four at once. Step 1 — cover or ignore the outer boundaries; point at ① content + interpreter and ask 'what caused the crash?'. Step 2 — widen to ② CrowdStrike's engineering system: 'why did the update escape?'. Step 3 — widen to ③ deployment, endpoints, services: 'why did organizations become unavailable?'. Step 4 — widen to ④ the shared-dependency ecosystem: 'why could one failure disrupt many sectors?'. Read each legend line only when its boundary is introduced. The slide is the end-state the staging arrives at.</a:t>
             </a:r>
           </a:p>
         </p:txBody>
@@ -1564,7 +1543,7 @@
             <a:spLocks noGrp="1"/>
           </p:cNvSpPr>
           <p:nvPr>
-            <p:ph type="sldNum" idx="5" sz="quarter"/>
+            <p:ph type="sldNum" sz="quarter" idx="5"/>
           </p:nvPr>
         </p:nvSpPr>
         <p:spPr/>
@@ -1577,8 +1556,8 @@
 </p:notes>
 </file>
 
-<file path=ppt/notesSlides/notesSlide36.xml><?xml version="1.0" encoding="utf-8"?>
-<p:notes xmlns:a="http://schemas.openxmlformats.org/drawingml/2006/main" xmlns:p="http://schemas.openxmlformats.org/presentationml/2006/main" xmlns:r="http://schemas.openxmlformats.org/officeDocument/2006/relationships">
+<file path=ppt/notesSlides/notesSlide14.xml><?xml version="1.0" encoding="utf-8"?>
+<p:notes xmlns:a="http://schemas.openxmlformats.org/drawingml/2006/main" xmlns:r="http://schemas.openxmlformats.org/officeDocument/2006/relationships" xmlns:p="http://schemas.openxmlformats.org/presentationml/2006/main">
   <p:cSld>
     <p:spTree>
       <p:nvGrpSpPr>
@@ -1598,7 +1577,7 @@
         <p:nvSpPr>
           <p:cNvPr id="2" name="Slide Image Placeholder 1"/>
           <p:cNvSpPr>
-            <a:spLocks noGrp="1"/>
+            <a:spLocks noGrp="1" noRot="1" noChangeAspect="1"/>
           </p:cNvSpPr>
           <p:nvPr>
             <p:ph type="sldImg" idx="2"/>
@@ -1613,7 +1592,7 @@
             <a:spLocks noGrp="1"/>
           </p:cNvSpPr>
           <p:nvPr>
-            <p:ph type="body" idx="3" sz="quarter"/>
+            <p:ph type="body" sz="quarter" idx="3"/>
           </p:nvPr>
         </p:nvSpPr>
         <p:spPr/>
@@ -1622,57 +1601,42 @@
           <a:lstStyle/>
           <a:p>
             <a:r>
-              <a:t>TIMING: 4 minutes. THE TECHNICAL CORE.</a:t>
-            </a:r>
-          </a:p>
-          <a:p>
-            <a:r>
-              <a:t>ENGINEERING POINT: this is a producer/consumer specification mismatch, the exact failure class from the Specification and Design units. A contract about the shape of information crossing an interface was held in two places and they differed.</a:t>
-            </a:r>
-          </a:p>
-          <a:p>
-            <a:r>
-              <a:t>BACKGROUND (RCA, 6 Aug 2024): 'The new IPC Template Type defined 21 input parameter fields, but the integration code that invoked the Content Interpreter supplied only 20 input values.' The mismatch stayed latent because testing and early instances used WILDCARD matching on the 21st input, so field 21 was never actually read. A later instance used a NON-WILDCARD criterion on the 21st input; the Content Interpreter read the 21st entry of a 20-entry array — an out-of-bounds read — and the sensor crashed. The RCA's own summary: 'a runtime array bounds check was missing for Content Interpreter input fields on Channel File 291.'</a:t>
-            </a:r>
-          </a:p>
-          <a:p>
-            <a:r>
-              <a:t>ASK: whose assumption was wrong — the validator's or the interpreter's?</a:t>
-            </a:r>
-          </a:p>
-          <a:p>
-            <a:r>
-              <a:t>EXPECTED ANSWERS / MISCONCEPTIONS: the productive answer is NEITHER, alone. The Content Validator was correct about the Template Type; the Content Interpreter was correct about its own integration code. The defect is the DISAGREEMENT, and no single component's local reasoning was faulty. Students who want to name a guilty component are already doing component-level analysis — which is the next slide, and its limit.</a:t>
-            </a:r>
-          </a:p>
-          <a:p>
-            <a:r>
-              <a:t>ALSO WORTH NAMING: the wildcard masking is a latent condition in Reason's precise sense — a dormant mismatch awaiting a triggering input. Plant it here; collect it in Movement 2.</a:t>
-            </a:r>
-          </a:p>
-          <a:p>
-            <a:r>
-              <a:t>TRANSITION: that is a complete account of how one machine crashed.</a:t>
-            </a:r>
-          </a:p>
-          <a:p>
-            <a:r>
-              <a:t>SOURCES: CrowdStrike RCA, 6 Aug 2024, for every number on this slide.</a:t>
-            </a:r>
-          </a:p>
-          <a:p>
-            <a:r>
-              <a:t>PACING (author): do not over-dwell on the technical mechanism — students need the INTERFACE MISMATCH, not the full Falcon content-processing architecture. Keep the walk-through under two minutes of the five.</a:t>
-            </a:r>
-          </a:p>
-          <a:p>
-            <a:r>
-              <a:t>TERMINOLOGY (stays in notes, off the slide): the Template Type defines the 21 fields; Template Instances are the content built against it; the Content Validator checked instances against the Template Type's 21 fields; the Content Interpreter consumed the integration code's 20-entry input array and, directed by the first non-wildcard 21st matching criterion, attempted the [20] access.</a:t>
-            </a:r>
-          </a:p>
-          <a:p>
-            <a:r>
-              <a:t>EXPOSITION ORDER (author): read the bridge sentence FIRST, verbatim — templates are the interface between detection content and the interpreter; each template specifies the input fields the interpreter expects. Only then walk the diagram; it is now intelligible without inference. Keep the concrete indices [0 … 19] and [20] — they are what makes the failure technically understandable.</a:t>
+              <a:t>TIMING: 3 minutes. THIRD CAUSAL BOUNDARY — introduce the model accurately.</a:t>
+            </a:r>
+          </a:p>
+          <a:p>
+            <a:r>
+              <a:t>ENGINEERING POINT: STAMP models safety as a CONTROL problem, not a component problem. Four elements: a controller issues control actions; a controlled process responds; feedback informs the controller; and the controller decides using a process model of the thing it controls. The system is safe when the control structure enforces its safety constraints.</a:t>
+            </a:r>
+          </a:p>
+          <a:p>
+            <a:r>
+              <a:t>CARE — three accuracy obligations: (1) STAMP is not a broader Swiss cheese, and not merely a big dependency diagram — its vocabulary is constraints, control, feedback, process models. (2) An unsafe outcome does not require a defective component: individually functioning components can interact to violate a system-level constraint. (3) Distinguish STAMP (the accident model) from STPA (the hazard-analysis method built on it) — we are introducing the model, not teaching the procedure.</a:t>
+            </a:r>
+          </a:p>
+          <a:p>
+            <a:r>
+              <a:t>ATTRIBUTION: Nancy Leveson, Engineering a Safer World (2011).</a:t>
+            </a:r>
+          </a:p>
+          <a:p>
+            <a:r>
+              <a:t>ASK: what must the controller know and control? Why can a controller with correct intentions still act unsafely?</a:t>
+            </a:r>
+          </a:p>
+          <a:p>
+            <a:r>
+              <a:t>EXPECTED ANSWERS: steer toward the three failure seats — an inaccurate process model, inadequate feedback, or insufficient control actions. Each is visible in this diagram, and none is a 'defective component.'</a:t>
+            </a:r>
+          </a:p>
+          <a:p>
+            <a:r>
+              <a:t>TRANSITION: apply it. What did CrowdStrike's update control structure look like on July 19?</a:t>
+            </a:r>
+          </a:p>
+          <a:p>
+            <a:r>
+              <a:t>EXPOSITION ORDER (author): lead with the CONCRETE example at the top of the slide — release manager, test results, wrong picture — and only then introduce the four terms by mapping them onto it: the manager is the CONTROLLER, the authorization is a CONTROL ACTION, the test results are FEEDBACK, the manager's picture of the system is the PROCESS MODEL. The abstraction arrives after the student has an instance of it. Slide 15 then applies the full structure to CrowdStrike — do not merge or reorder the two.</a:t>
             </a:r>
           </a:p>
         </p:txBody>
@@ -1684,7 +1648,7 @@
             <a:spLocks noGrp="1"/>
           </p:cNvSpPr>
           <p:nvPr>
-            <p:ph type="sldNum" idx="5" sz="quarter"/>
+            <p:ph type="sldNum" sz="quarter" idx="5"/>
           </p:nvPr>
         </p:nvSpPr>
         <p:spPr/>
@@ -1697,8 +1661,8 @@
 </p:notes>
 </file>
 
-<file path=ppt/notesSlides/notesSlide37.xml><?xml version="1.0" encoding="utf-8"?>
-<p:notes xmlns:a="http://schemas.openxmlformats.org/drawingml/2006/main" xmlns:p="http://schemas.openxmlformats.org/presentationml/2006/main" xmlns:r="http://schemas.openxmlformats.org/officeDocument/2006/relationships">
+<file path=ppt/notesSlides/notesSlide15.xml><?xml version="1.0" encoding="utf-8"?>
+<p:notes xmlns:a="http://schemas.openxmlformats.org/drawingml/2006/main" xmlns:r="http://schemas.openxmlformats.org/officeDocument/2006/relationships" xmlns:p="http://schemas.openxmlformats.org/presentationml/2006/main">
   <p:cSld>
     <p:spTree>
       <p:nvGrpSpPr>
@@ -1718,7 +1682,7 @@
         <p:nvSpPr>
           <p:cNvPr id="2" name="Slide Image Placeholder 1"/>
           <p:cNvSpPr>
-            <a:spLocks noGrp="1"/>
+            <a:spLocks noGrp="1" noRot="1" noChangeAspect="1"/>
           </p:cNvSpPr>
           <p:nvPr>
             <p:ph type="sldImg" idx="2"/>
@@ -1733,7 +1697,7 @@
             <a:spLocks noGrp="1"/>
           </p:cNvSpPr>
           <p:nvPr>
-            <p:ph type="body" idx="3" sz="quarter"/>
+            <p:ph type="body" sz="quarter" idx="3"/>
           </p:nvPr>
         </p:nvSpPr>
         <p:spPr/>
@@ -1742,52 +1706,42 @@
           <a:lstStyle/>
           <a:p>
             <a:r>
-              <a:t>TIMING: 1 minutes. FIRST OF THREE CAUSAL BOUNDARIES. DELIVER EFFICIENTLY (author reallocation 261015): reduce exposition — state the boundary, the model, and the intervention, then move; slide 6's 4-minute commitment discussion is protected and untouched.</a:t>
-            </a:r>
-          </a:p>
-          <a:p>
-            <a:r>
-              <a:t>ENGINEERING POINT: a component-level account traces a chain of events to a component that behaved outside its contract. It is the narrowest useful boundary, and for many defects it is the RIGHT one.</a:t>
-            </a:r>
-          </a:p>
-          <a:p>
-            <a:r>
-              <a:t>SAY IT PLAINLY: this is 'component-level', not 'human error'. The distinction matters because 'human error' already smuggles in an explanation — that someone blundered. Component-level analysis fixes the BOUNDARY of the account without prejudging why the component failed. Human error remains one possible explanation within it, alongside incorrect assumptions, design defects and implementation errors.</a:t>
-            </a:r>
-          </a:p>
-          <a:p>
-            <a:r>
-              <a:t>DO NOT: suggest any individual was negligent. The RCA identifies no such person, and the lecture's argument does not need one.</a:t>
-            </a:r>
-          </a:p>
-          <a:p>
-            <a:r>
-              <a:t>ATTRIBUTION CARE: do not credit component-level analysis to Reason or Leveson. Leveson discusses chain-of-events and component-failure models largely to explain their limits and motivate systems-theoretic analysis; she does not advocate them.</a:t>
-            </a:r>
-          </a:p>
-          <a:p>
-            <a:r>
-              <a:t>ASK: what caused the component to fail, and what would repair it?</a:t>
-            </a:r>
-          </a:p>
-          <a:p>
-            <a:r>
-              <a:t>EXPECTED ANSWERS: add the bounds check. Correct — and CrowdStrike did exactly that. Then ask whether that would have prevented THIS outage reaching 8.5 million machines. It would have prevented the crash; it would not have prevented a different bad content instance shipping the same way.</a:t>
-            </a:r>
-          </a:p>
-          <a:p>
-            <a:r>
-              <a:t>TRANSITION: we have explained how the endpoint crashed. We have not explained why an update capable of causing that crash reached production.</a:t>
-            </a:r>
-          </a:p>
-          <a:p>
-            <a:r>
-              <a:t>SOURCES: CrowdStrike RCA, 6 Aug 2024 (the bounds-check mitigation, backported to Windows sensor 7.11 and later).</a:t>
-            </a:r>
-          </a:p>
-          <a:p>
-            <a:r>
-              <a:t>CORRECTION FOLDED IN: the first node reads 'incompatible content + interpreter', not 'defective content'. This was not a malformed file breaking an otherwise-correct interpreter — it was incompatible assumptions across the template definition, the integration code, the validator, and the interpreter. 'Repair the defect' therefore means repairing the incompatibility, not one content artifact; a content-only fix would leave the same mismatch armed for the next instance.</a:t>
+              <a:t>TIMING: 2 minutes.</a:t>
+            </a:r>
+          </a:p>
+          <a:p>
+            <a:r>
+              <a:t>ENGINEERING POINT: a controller can make an unsafe decision because its process model is inaccurate, its feedback is inadequate, or its available control actions are insufficient — all three without anyone being negligent.</a:t>
+            </a:r>
+          </a:p>
+          <a:p>
+            <a:r>
+              <a:t>DOCUMENTED (CrowdStrike RCA, 6 Aug 2024): the Content Validator validated Template Instances against the Template Type's 21 fields while the integration code supplied 20 (finding 4); Template Instances deployed to all endpoints with no staged rollout (finding 6); committed mitigations include canary deployment rings with rollback and customer control over Rapid Response Content deployment.</a:t>
+            </a:r>
+          </a:p>
+          <a:p>
+            <a:r>
+              <a:t>INTERPRETATION (ours, not the RCA's): the release organization's effective process model amounted to 'the Content Validator passed it, so it is safe to distribute' — and that model was wrong about what the validator actually checked. The RCA documents the validator defect; reading it as a controller's inaccurate process model is our STAMP-framed interpretation.</a:t>
+            </a:r>
+          </a:p>
+          <a:p>
+            <a:r>
+              <a:t>PROPOSED (instructional): the control structure drawn here is simplified. Do not claim every depicted feedback path existed or operated during the incident, and do not invent telemetry, approvals, or rollout stages the RCA does not document.</a:t>
+            </a:r>
+          </a:p>
+          <a:p>
+            <a:r>
+              <a:t>ASK: what did the release organization need to know before distributing the update?</a:t>
+            </a:r>
+          </a:p>
+          <a:p>
+            <a:r>
+              <a:t>EXPECTED ANSWERS: whether content satisfied the interpreter's assumptions; whether testing exercised the relevant behavior; whether telemetry could reveal danger quickly; whether distribution could be halted before exposure became widespread. Distinguish pre-release validation from operational feedback — both inform control, at different times.</a:t>
+            </a:r>
+          </a:p>
+          <a:p>
+            <a:r>
+              <a:t>TRANSITION: this structure stops at CrowdStrike's boundary. The constraint students actually care about — the hospital stays open — lives outside it.</a:t>
             </a:r>
           </a:p>
         </p:txBody>
@@ -1799,7 +1753,7 @@
             <a:spLocks noGrp="1"/>
           </p:cNvSpPr>
           <p:nvPr>
-            <p:ph type="sldNum" idx="5" sz="quarter"/>
+            <p:ph type="sldNum" sz="quarter" idx="5"/>
           </p:nvPr>
         </p:nvSpPr>
         <p:spPr/>
@@ -1812,8 +1766,8 @@
 </p:notes>
 </file>
 
-<file path=ppt/notesSlides/notesSlide38.xml><?xml version="1.0" encoding="utf-8"?>
-<p:notes xmlns:a="http://schemas.openxmlformats.org/drawingml/2006/main" xmlns:p="http://schemas.openxmlformats.org/presentationml/2006/main" xmlns:r="http://schemas.openxmlformats.org/officeDocument/2006/relationships">
+<file path=ppt/notesSlides/notesSlide16.xml><?xml version="1.0" encoding="utf-8"?>
+<p:notes xmlns:a="http://schemas.openxmlformats.org/drawingml/2006/main" xmlns:r="http://schemas.openxmlformats.org/officeDocument/2006/relationships" xmlns:p="http://schemas.openxmlformats.org/presentationml/2006/main">
   <p:cSld>
     <p:spTree>
       <p:nvGrpSpPr>
@@ -1833,7 +1787,7 @@
         <p:nvSpPr>
           <p:cNvPr id="2" name="Slide Image Placeholder 1"/>
           <p:cNvSpPr>
-            <a:spLocks noGrp="1"/>
+            <a:spLocks noGrp="1" noRot="1" noChangeAspect="1"/>
           </p:cNvSpPr>
           <p:nvPr>
             <p:ph type="sldImg" idx="2"/>
@@ -1848,7 +1802,7 @@
             <a:spLocks noGrp="1"/>
           </p:cNvSpPr>
           <p:nvPr>
-            <p:ph type="body" idx="3" sz="quarter"/>
+            <p:ph type="body" sz="quarter" idx="3"/>
           </p:nvPr>
         </p:nvSpPr>
         <p:spPr/>
@@ -1857,37 +1811,42 @@
           <a:lstStyle/>
           <a:p>
             <a:r>
-              <a:t>TIMING: 4 minutes — PROTECT 3 of them for the discussion (author pacing note). MAKE THEM COMMIT BEFORE THEY KNOW MORE.</a:t>
-            </a:r>
-          </a:p>
-          <a:p>
-            <a:r>
-              <a:t>ENGINEERING POINT: force a choice now, on purpose, with incomplete information. The point is not which option is 'right' — it is that each addresses a different failure class, and the evidence so far cannot distinguish them.</a:t>
-            </a:r>
-          </a:p>
-          <a:p>
-            <a:r>
-              <a:t>ASK: hands for A, B, or C. Then ask each group what failure their choice prevents NEXT time.</a:t>
-            </a:r>
-          </a:p>
-          <a:p>
-            <a:r>
-              <a:t>EXPECTED ANSWERS: A fixes one file. B fixes one code path — and is what the RCA's bounds-check mitigation does. C is the only one that addresses how the content reached production, and it is also the vaguest; press for what specifically would change.</a:t>
-            </a:r>
-          </a:p>
-          <a:p>
-            <a:r>
-              <a:t>THE DISTINCTION TO SURFACE: fixing the observed instance versus preventing the class. Students reliably pick the narrowest fix that explains the observation.</a:t>
-            </a:r>
-          </a:p>
-          <a:p>
-            <a:r>
-              <a:t>TRANSITION (say this verbatim): the defect explains why a machine crashed. It does not explain why the engineering system allowed the update to reach millions of machines.</a:t>
-            </a:r>
-          </a:p>
-          <a:p>
-            <a:r>
-              <a:t>SOURCES: none required; this is a discussion slide.</a:t>
+              <a:t>TIMING: 4 minutes. MANDATORY PIVOT OF THE MOVEMENT — the constraint appears.</a:t>
+            </a:r>
+          </a:p>
+          <a:p>
+            <a:r>
+              <a:t>ENGINEERING POINT: state the system-level safety constraint explicitly: FAILURE OF AN ENDPOINT SECURITY PRODUCT MUST NOT DISABLE ESSENTIAL ORGANIZATIONAL SERVICES. Then ask which controller can enforce it. The answer is not CrowdStrike alone — the constraint cannot be satisfied entirely within the vendor's engineering system, and THAT is where STAMP earns its keep.</a:t>
+            </a:r>
+          </a:p>
+          <a:p>
+            <a:r>
+              <a:t>DOCUMENTED: CrowdStrike controls its software and content distribution, and committed to giving customers control over Rapid Response Content deployment (RCA, 6 Aug 2024); affected organizations performed recovery across sectors (Microsoft, 20 Jul 2024). What any specific enterprise could or could not control is NOT documented in these sources.</a:t>
+            </a:r>
+          </a:p>
+          <a:p>
+            <a:r>
+              <a:t>INTERPRETATION (ours): the division of control drawn here — vendor release controls versus enterprise deployment and continuity controls — is a responsibility-allocation argument, not a finding of the postmortem. An enterprise cannot repair CrowdStrike's content-processing implementation; CrowdStrike cannot determine a hospital's continuity architecture.</a:t>
+            </a:r>
+          </a:p>
+          <a:p>
+            <a:r>
+              <a:t>PROPOSED (candidate requirement): the safety constraint itself. It is a candidate obligation for critical-service operators, not a documented universal obligation that existed before the outage.</a:t>
+            </a:r>
+          </a:p>
+          <a:p>
+            <a:r>
+              <a:t>ASK (2 minutes, pairs): which interventions require action by CrowdStrike, and which require action by its customers?</a:t>
+            </a:r>
+          </a:p>
+          <a:p>
+            <a:r>
+              <a:t>EXPECTED ANSWERS: bounds check / validator fix / staged rollout — vendor; deployment rings they can subscribe to, fallback procedures, continuity architecture — customer. Misconception: 'CrowdStrike should just fix it' — the constraint names a service property no vendor can deliver alone.</a:t>
+            </a:r>
+          </a:p>
+          <a:p>
+            <a:r>
+              <a:t>TRANSITION: why was the exposure so correlated in the first place? Name the failure class.</a:t>
             </a:r>
           </a:p>
         </p:txBody>
@@ -1899,7 +1858,7 @@
             <a:spLocks noGrp="1"/>
           </p:cNvSpPr>
           <p:nvPr>
-            <p:ph type="sldNum" idx="5" sz="quarter"/>
+            <p:ph type="sldNum" sz="quarter" idx="5"/>
           </p:nvPr>
         </p:nvSpPr>
         <p:spPr/>
@@ -1912,8 +1871,8 @@
 </p:notes>
 </file>
 
-<file path=ppt/notesSlides/notesSlide39.xml><?xml version="1.0" encoding="utf-8"?>
-<p:notes xmlns:a="http://schemas.openxmlformats.org/drawingml/2006/main" xmlns:p="http://schemas.openxmlformats.org/presentationml/2006/main" xmlns:r="http://schemas.openxmlformats.org/officeDocument/2006/relationships">
+<file path=ppt/notesSlides/notesSlide17.xml><?xml version="1.0" encoding="utf-8"?>
+<p:notes xmlns:a="http://schemas.openxmlformats.org/drawingml/2006/main" xmlns:r="http://schemas.openxmlformats.org/officeDocument/2006/relationships" xmlns:p="http://schemas.openxmlformats.org/presentationml/2006/main">
   <p:cSld>
     <p:spTree>
       <p:nvGrpSpPr>
@@ -1933,7 +1892,7 @@
         <p:nvSpPr>
           <p:cNvPr id="2" name="Slide Image Placeholder 1"/>
           <p:cNvSpPr>
-            <a:spLocks noGrp="1"/>
+            <a:spLocks noGrp="1" noRot="1" noChangeAspect="1"/>
           </p:cNvSpPr>
           <p:nvPr>
             <p:ph type="sldImg" idx="2"/>
@@ -1948,7 +1907,7 @@
             <a:spLocks noGrp="1"/>
           </p:cNvSpPr>
           <p:nvPr>
-            <p:ph type="body" idx="3" sz="quarter"/>
+            <p:ph type="body" sz="quarter" idx="3"/>
           </p:nvPr>
         </p:nvSpPr>
         <p:spPr/>
@@ -1957,42 +1916,37 @@
           <a:lstStyle/>
           <a:p>
             <a:r>
-              <a:t>TIMING: 3 minutes. OPENS MOVEMENT 2 — why didn't we catch it?</a:t>
-            </a:r>
-          </a:p>
-          <a:p>
-            <a:r>
-              <a:t>ENGINEERING POINT: the release process is itself an engineering system. The defect's path to production ran through named stages, and each stage is a place an intervention could live.</a:t>
-            </a:r>
-          </a:p>
-          <a:p>
-            <a:r>
-              <a:t>FACTS (CrowdStrike RCA, 6 Aug 2024): the new IPC Template Type defined 21 input parameter fields while the integration code that invoked the Content Interpreter supplied only 20. The mismatch 'evaded multiple layers of build validation and testing' — testing and the initial Template Instances used wildcard matching on the 21st input, so field 21 was never read. The Content Validator accepted the instances. Template Instances deployed to all endpoints with no staged rollout. A later instance introduced a non-wildcard matching criterion for the 21st input, and the Content Interpreter read the 21st entry of a 20-entry array.</a:t>
-            </a:r>
-          </a:p>
-          <a:p>
-            <a:r>
-              <a:t>CARE: these stage labels come from the RCA. Do not embellish into a generic CI/CD pipeline, and do not yet say which defenses were ABSENT — that is slide 9's reveal.</a:t>
-            </a:r>
-          </a:p>
-          <a:p>
-            <a:r>
-              <a:t>ASK: which defense should have stopped it?</a:t>
-            </a:r>
-          </a:p>
-          <a:p>
-            <a:r>
-              <a:t>EXPECTED ANSWERS: 'the validator' (most common), 'testing'. Misconception to surface: students assume every named stage existed and merely underperformed. Hold the correction for slide 9.</a:t>
-            </a:r>
-          </a:p>
-          <a:p>
-            <a:r>
-              <a:t>TRANSITION: several defenses in sequence, and the defect passed every one. There is a classic model for exactly this shape.</a:t>
-            </a:r>
-          </a:p>
-          <a:p>
-            <a:r>
-              <a:t>WILDCARD, SPELLED OUT (author): a wildcard matching criterion means 'accept any value here'. When the matching criterion for field 21 is a wildcard, the Content Interpreter never needs to READ field 21 to decide the match — so the missing 21st array entry was never touched, and every wildcard test passed honestly. The mismatch was real the whole time; the tests simply never exercised the read that exposes it. That is what makes it a latent condition rather than a flaky test.</a:t>
+              <a:t>TIMING: 2 minutes. THE CENTRAL CONCEPTUAL PAYOFF OF MOVEMENT 3. PACING (author reallocation 261015): state the common-cause principle once and do not re-derive it — slide 18 carries the architectural discussion and keeps its protected 4 minutes.</a:t>
+            </a:r>
+          </a:p>
+          <a:p>
+            <a:r>
+              <a:t>ENGINEERING POINT: common-cause failure — multiple components or organizations fail together because they share a dependency, condition, or mechanism. The caption states the principle exactly: replication does not provide independence when replicas share the same failure mode. A thousand machines running the same privileged component are not a thousand independent defenses against that component's failure. That is an engineering principle, NOT a claim about any particular organization's redundancy architecture.</a:t>
+            </a:r>
+          </a:p>
+          <a:p>
+            <a:r>
+              <a:t>DOCUMENTED: ~8.5 million Windows devices affected — under 1% of all Windows machines (Microsoft, 20 Jul 2024); one defective content update was the shared trigger (CrowdStrike RCA, 6 Aug 2024).</a:t>
+            </a:r>
+          </a:p>
+          <a:p>
+            <a:r>
+              <a:t>INTERPRETATION (ours): the simultaneous multi-sector disruption is explained by correlated exposure to a shared privileged dependency. The incident does NOT establish that affected organizations had redundancy, that redundancy failed, or that any organization relied exclusively on CrowdStrike for endpoint security. Keep vendor concentration, shared software dependencies, and absence of redundancy distinct — related but different properties.</a:t>
+            </a:r>
+          </a:p>
+          <a:p>
+            <a:r>
+              <a:t>ASK: which apparently independent systems in YOUR life share a failure mode? (Campus auth, cloud regions, package registries, certificate authorities.)</a:t>
+            </a:r>
+          </a:p>
+          <a:p>
+            <a:r>
+              <a:t>EXPECTED ANSWERS: students name redundant SERVERS. Push to the sharper question: not how many machines an organization runs, but how independently its essential functions can continue when a shared dependency fails.</a:t>
+            </a:r>
+          </a:p>
+          <a:p>
+            <a:r>
+              <a:t>TRANSITION: if shared dependency is the vulnerability, is the remedy to require diversity? Careful — compare architectures before prescribing vendors.</a:t>
             </a:r>
           </a:p>
         </p:txBody>
@@ -2004,7 +1958,7 @@
             <a:spLocks noGrp="1"/>
           </p:cNvSpPr>
           <p:nvPr>
-            <p:ph type="sldNum" idx="5" sz="quarter"/>
+            <p:ph type="sldNum" sz="quarter" idx="5"/>
           </p:nvPr>
         </p:nvSpPr>
         <p:spPr/>
@@ -2017,8 +1971,8 @@
 </p:notes>
 </file>
 
-<file path=ppt/notesSlides/notesSlide40.xml><?xml version="1.0" encoding="utf-8"?>
-<p:notes xmlns:a="http://schemas.openxmlformats.org/drawingml/2006/main" xmlns:p="http://schemas.openxmlformats.org/presentationml/2006/main" xmlns:r="http://schemas.openxmlformats.org/officeDocument/2006/relationships">
+<file path=ppt/notesSlides/notesSlide18.xml><?xml version="1.0" encoding="utf-8"?>
+<p:notes xmlns:a="http://schemas.openxmlformats.org/drawingml/2006/main" xmlns:r="http://schemas.openxmlformats.org/officeDocument/2006/relationships" xmlns:p="http://schemas.openxmlformats.org/presentationml/2006/main">
   <p:cSld>
     <p:spTree>
       <p:nvGrpSpPr>
@@ -2038,7 +1992,7 @@
         <p:nvSpPr>
           <p:cNvPr id="2" name="Slide Image Placeholder 1"/>
           <p:cNvSpPr>
-            <a:spLocks noGrp="1"/>
+            <a:spLocks noGrp="1" noRot="1" noChangeAspect="1"/>
           </p:cNvSpPr>
           <p:nvPr>
             <p:ph type="sldImg" idx="2"/>
@@ -2053,7 +2007,7 @@
             <a:spLocks noGrp="1"/>
           </p:cNvSpPr>
           <p:nvPr>
-            <p:ph type="body" idx="3" sz="quarter"/>
+            <p:ph type="body" sz="quarter" idx="3"/>
           </p:nvPr>
         </p:nvSpPr>
         <p:spPr/>
@@ -2062,47 +2016,37 @@
           <a:lstStyle/>
           <a:p>
             <a:r>
-              <a:t>TIMING: 2 minutes. SECOND CAUSAL BOUNDARY.</a:t>
-            </a:r>
-          </a:p>
-          <a:p>
-            <a:r>
-              <a:t>ENGINEERING POINT: Reason's Swiss cheese model — an accident can occur when weaknesses in multiple defenses align. The model changes the engineering question from 'which component failed?' to 'what was the condition of the defenses around it?'. We reach for it NOW because slide 7 just showed a defect passing a whole sequence of defenses; the model earns its entrance from the narrative, not from a definitions section.</a:t>
-            </a:r>
-          </a:p>
-          <a:p>
-            <a:r>
-              <a:t>FACTUAL BACKGROUND: the aligned path is real, not schematic — the RCA documents a parameter-count mismatch that 'evaded multiple layers of build validation and testing' (CrowdStrike RCA, 6 Aug 2024). Each slab here is a defense layer; each hole is a weakness; the horizontal line is the trajectory that found a hole in every layer.</a:t>
-            </a:r>
-          </a:p>
-          <a:p>
-            <a:r>
-              <a:t>ATTRIBUTION: James Reason, Human Error (1990) and Managing the Risks of Organizational Accidents (1997). Latent conditions — the wildcard masking that kept field 21 unread — are Reason's term of art, sitting in the system long before the active failure.</a:t>
-            </a:r>
-          </a:p>
-          <a:p>
-            <a:r>
-              <a:t>ASK: why did the defenses fail to stop the defect?</a:t>
-            </a:r>
-          </a:p>
-          <a:p>
-            <a:r>
-              <a:t>EXPECTED ANSWERS: 'they all had holes'. Push: are a hole in a defense that RAN and a defense that was never BUILT the same kind of weakness? That distinction is the next slide.</a:t>
-            </a:r>
-          </a:p>
-          <a:p>
-            <a:r>
-              <a:t>TRANSITION: the model predicts aligned weaknesses. The postmortem tells us what the weaknesses actually were.</a:t>
-            </a:r>
-          </a:p>
-          <a:p>
-            <a:r>
-              <a:t>NAMING + THE DISTINCTIVE CLAIM (author): say the model's NAME — this is Reason's Swiss cheese model — and state its distinctive claim precisely: every defensive layer can contain weaknesses, and a failure escapes only when weaknesses in successive layers ALIGN. The red path through the red-rimmed holes is the alignment; the other holes are weaknesses that this particular trajectory did not exercise. Without the alignment idea a student leaves with defense-in-depth but not Reason's contribution: defenses fail TOGETHER, as a configuration, not merely one at a time.</a:t>
-            </a:r>
-          </a:p>
-          <a:p>
-            <a:r>
-              <a:t>QUALIFICATION (author, notes only — the slide wording stays): 'a failure escapes only when the weaknesses ALIGN' is a simplification. The intended meaning is that weaknesses align across the defenses RELEVANT TO A PARTICULAR FAILURE TRAJECTORY — not that every conceivable defense in the organization must fail. Carry the qualification verbally if a student presses on it.</a:t>
+              <a:t>TIMING: 4 minutes — PROTECT the discussion: 'what independence should critical services actually require?' deserves the time (author pacing note). THE MAIN RISK SLIDE — do not let it become an argument for mandatory vendor diversity.</a:t>
+            </a:r>
+          </a:p>
+          <a:p>
+            <a:r>
+              <a:t>ENGINEERING POINT: compare ARCHITECTURES, not vendors. The question is whether critical functions possess independent failure paths. Separate three things: the REQUIREMENT (essential services remain available under specified endpoint failures), a candidate ARCHITECTURAL mechanism (independent fallback infrastructure, deployment isolation, delayed update rings), and a candidate PROCUREMENT mechanism (vendor diversity). The latter two are possible ways to satisfy the first — not conclusions that follow from the incident.</a:t>
+            </a:r>
+          </a:p>
+          <a:p>
+            <a:r>
+              <a:t>DOCUMENTED: one vendor update produced widespread correlated failures (CrowdStrike RCA, 6 Aug 2024; Microsoft, 20 Jul 2024).</a:t>
+            </a:r>
+          </a:p>
+          <a:p>
+            <a:r>
+              <a:t>INTERPRETATION (ours): shared privileged dependencies created a common-cause vulnerability across organizations.</a:t>
+            </a:r>
+          </a:p>
+          <a:p>
+            <a:r>
+              <a:t>PROPOSED — and explicitly UNRESOLVED: critical infrastructure might require more independence; whether mandatory vendor diversity would have prevented this incident, and whether its benefits justify its costs, is unresolved. Two products may share an operating system, a cloud service, a configuration mechanism, or an administrative control plane — diversity of vendor names does not establish independence of failure modes. Conversely, an organization can obtain real resilience without a second endpoint product.</a:t>
+            </a:r>
+          </a:p>
+          <a:p>
+            <a:r>
+              <a:t>ASK (class discussion): what property should we require — multiple vendors, or continuity under a specified common-cause failure? Prescribing vendors constrains the solution; specifying the property leaves engineers free to satisfy it. Requirements vs Specification, exactly.</a:t>
+            </a:r>
+          </a:p>
+          <a:p>
+            <a:r>
+              <a:t>TRANSITION: whatever the requirement is — who has the authority to impose it?</a:t>
             </a:r>
           </a:p>
         </p:txBody>
@@ -2114,7 +2058,7 @@
             <a:spLocks noGrp="1"/>
           </p:cNvSpPr>
           <p:nvPr>
-            <p:ph type="sldNum" idx="5" sz="quarter"/>
+            <p:ph type="sldNum" sz="quarter" idx="5"/>
           </p:nvPr>
         </p:nvSpPr>
         <p:spPr/>
@@ -2127,8 +2071,8 @@
 </p:notes>
 </file>
 
-<file path=ppt/notesSlides/notesSlide41.xml><?xml version="1.0" encoding="utf-8"?>
-<p:notes xmlns:a="http://schemas.openxmlformats.org/drawingml/2006/main" xmlns:p="http://schemas.openxmlformats.org/presentationml/2006/main" xmlns:r="http://schemas.openxmlformats.org/officeDocument/2006/relationships">
+<file path=ppt/notesSlides/notesSlide19.xml><?xml version="1.0" encoding="utf-8"?>
+<p:notes xmlns:a="http://schemas.openxmlformats.org/drawingml/2006/main" xmlns:r="http://schemas.openxmlformats.org/officeDocument/2006/relationships" xmlns:p="http://schemas.openxmlformats.org/presentationml/2006/main">
   <p:cSld>
     <p:spTree>
       <p:nvGrpSpPr>
@@ -2148,7 +2092,7 @@
         <p:nvSpPr>
           <p:cNvPr id="2" name="Slide Image Placeholder 1"/>
           <p:cNvSpPr>
-            <a:spLocks noGrp="1"/>
+            <a:spLocks noGrp="1" noRot="1" noChangeAspect="1"/>
           </p:cNvSpPr>
           <p:nvPr>
             <p:ph type="sldImg" idx="2"/>
@@ -2163,7 +2107,7 @@
             <a:spLocks noGrp="1"/>
           </p:cNvSpPr>
           <p:nvPr>
-            <p:ph type="body" idx="3" sz="quarter"/>
+            <p:ph type="body" sz="quarter" idx="3"/>
           </p:nvPr>
         </p:nvSpPr>
         <p:spPr/>
@@ -2172,32 +2116,47 @@
           <a:lstStyle/>
           <a:p>
             <a:r>
-              <a:t>TIMING: 2 minutes. THE EVIDENCE REPLACES THE SCHEMATIC. DELIVER EFFICIENTLY (author reallocation 261015): slide 7 already introduced the evidence — walk the four rows and the absent/failed distinction without re-deriving each finding.</a:t>
-            </a:r>
-          </a:p>
-          <a:p>
-            <a:r>
-              <a:t>ENGINEERING POINT: a defense that was ABSENT is a different finding from a defense that FAILED. The RCA's findings (all quoted or paraphrased from CrowdStrike's RCA, 6 Aug 2024): (1) 'the number of fields in the IPC Template Type was not validated' at sensor compile time — absent; (2) 'a runtime array bounds check was missing for Content Interpreter input fields' — absent; (3) the Content Validator 'contained a logic error' — it ran, but validated against the Template Type's 21 fields rather than the 20 the integration code supplied: the wrong contract; (4) Template Type testing never exercised a non-wildcard matching criterion for field 21 — a coverage gap.</a:t>
-            </a:r>
-          </a:p>
-          <a:p>
-            <a:r>
-              <a:t>WHY THE DISTINCTION MATTERS: 'strengthen the validator' is the wrong fix for a check that never existed, and 'add a check' is the wrong fix for a validator holding the wrong contract. Interventions follow the diagnosis, not the slogan.</a:t>
-            </a:r>
-          </a:p>
-          <a:p>
-            <a:r>
-              <a:t>ASK: for each row — is the fix to repair, to re-point at the right contract, or to build?</a:t>
-            </a:r>
-          </a:p>
-          <a:p>
-            <a:r>
-              <a:t>EXPECTED ANSWERS: students usually say 'fix the validator' for all four. Misconception: treating all four rows as failures of the same kind.</a:t>
-            </a:r>
-          </a:p>
-          <a:p>
-            <a:r>
-              <a:t>TRANSITION: four weaknesses, four candidate interventions — but interventions do different KINDS of work. Let's name those kinds.</a:t>
+              <a:t>TIMING: 2 minutes.</a:t>
+            </a:r>
+          </a:p>
+          <a:p>
+            <a:r>
+              <a:t>ENGINEERING POINT: controllers exist above the vendor, and each level pairs a control action with the feedback it needs — read the diagram as control AND feedback, not as a hierarchy of rank. STAMP without feedback is just an org chart. A cause outside your authority still belongs in the account; the response is to identify the responsible controller and ESCALATE the proposed intervention, not to omit the cause.</a:t>
+            </a:r>
+          </a:p>
+          <a:p>
+            <a:r>
+              <a:t>DOCUMENTED vs HYPOTHETICAL (the dashed edge): enterprise deployment and recovery controls, and operators' continuity policies, are ordinary existing arrangements of the kind the incident exercised. A sector authority imposing resilience requirements for endpoint-security failure is a HYPOTHETICAL addition to the control structure — drawn dashed. Not every sector has a regulator empowered to mandate such controls, and no source in this lecture documents one that did so for this incident.</a:t>
+            </a:r>
+          </a:p>
+          <a:p>
+            <a:r>
+              <a:t>INTERPRETATION (ours): reading the outage as evidence of a systemic risk that some controller should manage is our interpretation of the documented exposure, not a finding of the RCA.</a:t>
+            </a:r>
+          </a:p>
+          <a:p>
+            <a:r>
+              <a:t>PROPOSED: any specific obligation at any level of this diagram. A failure analysis may reveal a systemic risk without establishing that regulation is necessary, effective, or proportionate — those are further engineering and policy judgments requiring evidence.</a:t>
+            </a:r>
+          </a:p>
+          <a:p>
+            <a:r>
+              <a:t>ASK: which controller has the authority to enforce independence — and what feedback would it need to exercise that authority well?</a:t>
+            </a:r>
+          </a:p>
+          <a:p>
+            <a:r>
+              <a:t>EXPECTED ANSWERS: 'the government should require it.' Push back with the epistemic ladder: proposed is not validated. Also surface the reverse misconception — 'if it's outside our authority it's out of scope.' Escalation is an engineering act.</a:t>
+            </a:r>
+          </a:p>
+          <a:p>
+            <a:r>
+              <a:t>TRANSITION: three models, three boundaries, three intervention scopes. Put them side by side.</a:t>
+            </a:r>
+          </a:p>
+          <a:p>
+            <a:r>
+              <a:t>NOT A HIERARCHY (author): the stack can misread as an org chart. The corrective sentence is now on the slide — each controller requires BOTH authority to act AND evidence about the consequences. A regulator with authority but no operational evidence cannot control well; an operator rich in evidence may lack the authority to impose a sector-wide requirement. Control needs the pair, at every level.</a:t>
             </a:r>
           </a:p>
         </p:txBody>
@@ -2209,7 +2168,7 @@
             <a:spLocks noGrp="1"/>
           </p:cNvSpPr>
           <p:nvPr>
-            <p:ph type="sldNum" idx="5" sz="quarter"/>
+            <p:ph type="sldNum" sz="quarter" idx="5"/>
           </p:nvPr>
         </p:nvSpPr>
         <p:spPr/>
@@ -2222,8 +2181,8 @@
 </p:notes>
 </file>
 
-<file path=ppt/notesSlides/notesSlide42.xml><?xml version="1.0" encoding="utf-8"?>
-<p:notes xmlns:a="http://schemas.openxmlformats.org/drawingml/2006/main" xmlns:p="http://schemas.openxmlformats.org/presentationml/2006/main" xmlns:r="http://schemas.openxmlformats.org/officeDocument/2006/relationships">
+<file path=ppt/notesSlides/notesSlide2.xml><?xml version="1.0" encoding="utf-8"?>
+<p:notes xmlns:a="http://schemas.openxmlformats.org/drawingml/2006/main" xmlns:r="http://schemas.openxmlformats.org/officeDocument/2006/relationships" xmlns:p="http://schemas.openxmlformats.org/presentationml/2006/main">
   <p:cSld>
     <p:spTree>
       <p:nvGrpSpPr>
@@ -2243,7 +2202,7 @@
         <p:nvSpPr>
           <p:cNvPr id="2" name="Slide Image Placeholder 1"/>
           <p:cNvSpPr>
-            <a:spLocks noGrp="1"/>
+            <a:spLocks noGrp="1" noRot="1" noChangeAspect="1"/>
           </p:cNvSpPr>
           <p:nvPr>
             <p:ph type="sldImg" idx="2"/>
@@ -2258,7 +2217,7 @@
             <a:spLocks noGrp="1"/>
           </p:cNvSpPr>
           <p:nvPr>
-            <p:ph type="body" idx="3" sz="quarter"/>
+            <p:ph type="body" sz="quarter" idx="3"/>
           </p:nvPr>
         </p:nvSpPr>
         <p:spPr/>
@@ -2267,42 +2226,42 @@
           <a:lstStyle/>
           <a:p>
             <a:r>
-              <a:t>TIMING: 2 minutes.</a:t>
-            </a:r>
-          </a:p>
-          <a:p>
-            <a:r>
-              <a:t>ENGINEERING POINT: interventions have distinct effects — prevent, detect, contain, recover. They are not interchangeable, and they fail differently. Prevention and detection act on the DEFECT; containment and recovery act on the CONSEQUENCES.</a:t>
-            </a:r>
-          </a:p>
-          <a:p>
-            <a:r>
-              <a:t>FACTUAL BACKGROUND: CrowdStrike's own committed mitigations span all four (RCA, 6 Aug 2024): validate the Template Type field count at compile time and add runtime bounds checks (prevent); widen Template Type test coverage and add Content Validator checks (detect); stage Template Instance deployment through canary rings with rollback, and give customers control over Rapid Response Content deployment (contain); recovery was the manual remediation affected organizations then had to perform.</a:t>
-            </a:r>
-          </a:p>
-          <a:p>
-            <a:r>
-              <a:t>KEY DISTINCTION: containment versus recovery. Staged deployment reduces how much of the fleet is exposed BEFORE anyone knows the update is bad; recovery operates AFTER machines have failed. Students conflate them because both 'limit damage'.</a:t>
-            </a:r>
-          </a:p>
-          <a:p>
-            <a:r>
-              <a:t>ASK: which of these four would have changed THIS incident's outcome the most?</a:t>
-            </a:r>
-          </a:p>
-          <a:p>
-            <a:r>
-              <a:t>EXPECTED ANSWERS: most pick prevent ('just add the bounds check'). Counter: prevention closes this defect; containment bounds the NEXT defect class you haven't imagined yet.</a:t>
-            </a:r>
-          </a:p>
-          <a:p>
-            <a:r>
-              <a:t>TRANSITION: each intervention leaves a different uncertainty behind. What exactly does each piece of evidence establish?</a:t>
-            </a:r>
-          </a:p>
-          <a:p>
-            <a:r>
-              <a:t>TIMELINE (author): give the four a shared timeline — defect → release → propagation → disruption — and read each intervention against the stage it addresses (now tagged on each block): PREVENT acts at the defect, DETECT before release, CONTAIN during propagation, RECOVER after disruption. That turns the taxonomy into an analytical tool: for any proposed intervention, ask which stage it acts on and what has already happened by then.</a:t>
+              <a:t>TIMING: 2 minutes. START WITH CONSEQUENCES, NOT CAUSE.</a:t>
+            </a:r>
+          </a:p>
+          <a:p>
+            <a:r>
+              <a:t>ENGINEERING POINT: the scale of disruption is not explained by the size of the defect. Students should feel that gap before any mechanism is offered.</a:t>
+            </a:r>
+          </a:p>
+          <a:p>
+            <a:r>
+              <a:t>BACKGROUND: on 19 July 2024 a CrowdStrike Falcon content update caused Windows systems to crash worldwide. Microsoft estimated the update 'affected 8.5 million Windows devices, or less than one percent of all Windows machines' (Microsoft, 20 Jul 2024).</a:t>
+            </a:r>
+          </a:p>
+          <a:p>
+            <a:r>
+              <a:t>ASK: what kind of event could simultaneously affect airlines, hospitals and banks?</a:t>
+            </a:r>
+          </a:p>
+          <a:p>
+            <a:r>
+              <a:t>EXPECTED ANSWERS / MISCONCEPTIONS: students usually propose a cyber-attack, or a Microsoft defect. Both are wrong and both are useful — the answer is a shared dependency, which is the seed of the common-cause argument in Movement 3. Note the 'under 1%' figure explicitly: the lesson is not how MANY devices failed but WHICH ones. A small, non-random slice of machines ran essential services.</a:t>
+            </a:r>
+          </a:p>
+          <a:p>
+            <a:r>
+              <a:t>TRANSITION: so what actually arrived on those machines?</a:t>
+            </a:r>
+          </a:p>
+          <a:p>
+            <a:r>
+              <a:t>SOURCES: Microsoft blog, 20 Jul 2024 (device estimate). Sector impacts are from contemporaneous reporting — keep these qualitative; do not quote cancellation counts you have not checked.</a:t>
+            </a:r>
+          </a:p>
+          <a:p>
+            <a:r>
+              <a:t>SLIDE ASSETS: the brief asks for authentic imagery (a departure board, a BSOD). None is embedded — manufacturing a screenshot is forbidden and no licensed image was available to this build. Drop in real images from credible reporting and shorten the rows if space requires.</a:t>
             </a:r>
           </a:p>
         </p:txBody>
@@ -2314,7 +2273,7 @@
             <a:spLocks noGrp="1"/>
           </p:cNvSpPr>
           <p:nvPr>
-            <p:ph type="sldNum" idx="5" sz="quarter"/>
+            <p:ph type="sldNum" sz="quarter" idx="5"/>
           </p:nvPr>
         </p:nvSpPr>
         <p:spPr/>
@@ -2327,8 +2286,8 @@
 </p:notes>
 </file>
 
-<file path=ppt/notesSlides/notesSlide43.xml><?xml version="1.0" encoding="utf-8"?>
-<p:notes xmlns:a="http://schemas.openxmlformats.org/drawingml/2006/main" xmlns:p="http://schemas.openxmlformats.org/presentationml/2006/main" xmlns:r="http://schemas.openxmlformats.org/officeDocument/2006/relationships">
+<file path=ppt/notesSlides/notesSlide20.xml><?xml version="1.0" encoding="utf-8"?>
+<p:notes xmlns:a="http://schemas.openxmlformats.org/drawingml/2006/main" xmlns:r="http://schemas.openxmlformats.org/officeDocument/2006/relationships" xmlns:p="http://schemas.openxmlformats.org/presentationml/2006/main">
   <p:cSld>
     <p:spTree>
       <p:nvGrpSpPr>
@@ -2348,7 +2307,7 @@
         <p:nvSpPr>
           <p:cNvPr id="2" name="Slide Image Placeholder 1"/>
           <p:cNvSpPr>
-            <a:spLocks noGrp="1"/>
+            <a:spLocks noGrp="1" noRot="1" noChangeAspect="1"/>
           </p:cNvSpPr>
           <p:nvPr>
             <p:ph type="sldImg" idx="2"/>
@@ -2363,7 +2322,7 @@
             <a:spLocks noGrp="1"/>
           </p:cNvSpPr>
           <p:nvPr>
-            <p:ph type="body" idx="3" sz="quarter"/>
+            <p:ph type="body" sz="quarter" idx="3"/>
           </p:nvPr>
         </p:nvSpPr>
         <p:spPr/>
@@ -2372,37 +2331,37 @@
           <a:lstStyle/>
           <a:p>
             <a:r>
-              <a:t>TIMING: 2 minutes. RECONNECTS TO THE VALIDATION UNIT.</a:t>
-            </a:r>
-          </a:p>
-          <a:p>
-            <a:r>
-              <a:t>ENGINEERING POINT: each intervention is backed by evidence that establishes something SPECIFIC, and the gap between what it establishes and what we need is residual uncertainty. A regression test pins the observed failure; a general invariant (the compile-time field-count check, the runtime bounds check) constrains a class; deployment containment accepts that some failures will escape and bounds their reach.</a:t>
-            </a:r>
-          </a:p>
-          <a:p>
-            <a:r>
-              <a:t>FACTUAL GROUNDING: map each row to slide 9's findings. CrowdStrike's added bounds check is a general invariant — it holds for every spec-allowed content instance, not just Channel File 291. Their staged-rollout commitment is containment (CrowdStrike RCA, 6 Aug 2024).</a:t>
-            </a:r>
-          </a:p>
-          <a:p>
-            <a:r>
-              <a:t>CARE: do not teach 'regression tests are weak'. Their adequacy depends on the property and the failure class — for a deterministic parser defect, a regression test is exactly right.</a:t>
-            </a:r>
-          </a:p>
-          <a:p>
-            <a:r>
-              <a:t>ASK: after adding the bounds check, what uncertainty remains?</a:t>
-            </a:r>
-          </a:p>
-          <a:p>
-            <a:r>
-              <a:t>EXPECTED ANSWERS: 'none — it's fixed.' Misconception to correct: the bounds check closes out-of-bounds READS; it says nothing about the next way content and interpreter can disagree, which is why containment still earns its keep.</a:t>
-            </a:r>
-          </a:p>
-          <a:p>
-            <a:r>
-              <a:t>TRANSITION: everything so far explains the crash and the escape. Neither explains why ONE escaped defect disrupted airlines, hospitals, and banks on the same morning.</a:t>
+              <a:t>TIMING: 3 minutes. THE SYNTHESIS SLIDE — closes Movement 3. (Backbone slide: models enable different interventions.)</a:t>
+            </a:r>
+          </a:p>
+          <a:p>
+            <a:r>
+              <a:t>ENGINEERING POINT — TWO DIMENSIONS, NOT ONE: the three models differ in their EXPLANATORY MECHANISM (what kind of account they construct: a causal chain; a configuration of defenses; a control structure enforcing constraints) and, SEPARATELY, in the SYSTEM BOUNDARY they are applied to. This lecture applied them at progressively broader boundaries because the investigation's questions widened — but that was our choice of boundary, not a property of the models.</a:t>
+            </a:r>
+          </a:p>
+          <a:p>
+            <a:r>
+              <a:t>THE CONFLATION TO PREVENT: STAMP is NOT simply a more comprehensive Swiss cheese. STAMP can be applied to a narrow technical system (a single controller and its process); Swiss cheese can be applied across organizational boundaries (defenses spanning vendor and customer). The model answers its question; the boundary is chosen to fit the decision.</a:t>
+            </a:r>
+          </a:p>
+          <a:p>
+            <a:r>
+              <a:t>WALK THE TABLE: component-level — what mechanism produced the failure? — repair the defective mechanism. Swiss cheese — why did defenses fail to prevent it? — strengthen or diversify defenses. STAMP — which safety constraints were inadequately controlled? — change control actions, feedback, or authority.</a:t>
+            </a:r>
+          </a:p>
+          <a:p>
+            <a:r>
+              <a:t>ASK: broader explanations expose more — what do they COST? (More evidence to support the account; often more authority to act on it.)</a:t>
+            </a:r>
+          </a:p>
+          <a:p>
+            <a:r>
+              <a:t>EXPECTED ANSWERS AND MISCONCEPTION: students reflexively crown the broadest model. Keep the standing caution: broader is not automatically better; choose the boundary sufficient for the decision.</a:t>
+            </a:r>
+          </a:p>
+          <a:p>
+            <a:r>
+              <a:t>TRANSITION: we have candidate interventions at every scope. Which lessons does the evidence actually justify — and how do we keep them?</a:t>
             </a:r>
           </a:p>
         </p:txBody>
@@ -2414,7 +2373,7 @@
             <a:spLocks noGrp="1"/>
           </p:cNvSpPr>
           <p:nvPr>
-            <p:ph type="sldNum" idx="5" sz="quarter"/>
+            <p:ph type="sldNum" sz="quarter" idx="5"/>
           </p:nvPr>
         </p:nvSpPr>
         <p:spPr/>
@@ -2427,8 +2386,8 @@
 </p:notes>
 </file>
 
-<file path=ppt/notesSlides/notesSlide44.xml><?xml version="1.0" encoding="utf-8"?>
-<p:notes xmlns:a="http://schemas.openxmlformats.org/drawingml/2006/main" xmlns:p="http://schemas.openxmlformats.org/presentationml/2006/main" xmlns:r="http://schemas.openxmlformats.org/officeDocument/2006/relationships">
+<file path=ppt/notesSlides/notesSlide21.xml><?xml version="1.0" encoding="utf-8"?>
+<p:notes xmlns:a="http://schemas.openxmlformats.org/drawingml/2006/main" xmlns:r="http://schemas.openxmlformats.org/officeDocument/2006/relationships" xmlns:p="http://schemas.openxmlformats.org/presentationml/2006/main">
   <p:cSld>
     <p:spTree>
       <p:nvGrpSpPr>
@@ -2448,7 +2407,7 @@
         <p:nvSpPr>
           <p:cNvPr id="2" name="Slide Image Placeholder 1"/>
           <p:cNvSpPr>
-            <a:spLocks noGrp="1"/>
+            <a:spLocks noGrp="1" noRot="1" noChangeAspect="1"/>
           </p:cNvSpPr>
           <p:nvPr>
             <p:ph type="sldImg" idx="2"/>
@@ -2463,7 +2422,7 @@
             <a:spLocks noGrp="1"/>
           </p:cNvSpPr>
           <p:nvPr>
-            <p:ph type="body" idx="3" sz="quarter"/>
+            <p:ph type="body" sz="quarter" idx="3"/>
           </p:nvPr>
         </p:nvSpPr>
         <p:spPr/>
@@ -2472,32 +2431,45 @@
           <a:lstStyle/>
           <a:p>
             <a:r>
-              <a:t>TIMING: 1 minutes. TRANSITION SLIDE — closes Movement 2, opens the system question.</a:t>
-            </a:r>
-          </a:p>
-          <a:p>
-            <a:r>
-              <a:t>ENGINEERING POINT: the component model explained the crash; Swiss cheese explained the escape. Neither explains the SHAPE of the impact — organizations with no relationship to each other failing simultaneously. The observation that needs a new model: correlated failure across apparently independent systems.</a:t>
-            </a:r>
-          </a:p>
-          <a:p>
-            <a:r>
-              <a:t>FACTUAL BACKGROUND: Microsoft estimated ~8.5 million Windows devices affected — 'less than one percent of all Windows machines' (Microsoft, 20 Jul 2024). Carry the qualifier: the lesson is not how many devices failed but WHICH ones. A small, non-random slice of machines ran airlines' operations, hospitals' clinical systems, and banks' payment paths. Keep sector impacts qualitative; do not quote cancellation counts.</a:t>
-            </a:r>
-          </a:p>
-          <a:p>
-            <a:r>
-              <a:t>ASK: why did independent organizations fail together?</a:t>
-            </a:r>
-          </a:p>
-          <a:p>
-            <a:r>
-              <a:t>EXPECTED ANSWERS: 'they all used CrowdStrike' — correct, and push one level: what PROPERTY of that shared dependency turned one vendor's defect into a multi-sector outage? (Privileged position + simultaneous global distribution.) Misconception: 'the update was unusually large-scale.' Under one percent of Windows machines — scale is not the explanation; criticality and shared dependency are.</a:t>
-            </a:r>
-          </a:p>
-          <a:p>
-            <a:r>
-              <a:t>TRANSITION: to reason about this we need a model whose subject is the SYSTEM — its controls and dependencies — not the defect. We need to choose a system boundary.</a:t>
+              <a:t>TIMING: 1 minutes. OPENS MOVEMENT 4 — what should change? DELIVER EFFICIENTLY (author pacing note): present the ladder and pose the footer question rhetorically — this movement's active-learning weight now lives in the FMEA exercise (slide 27) and the diagnosis exercise (slide 29).</a:t>
+            </a:r>
+          </a:p>
+          <a:p>
+            <a:r>
+              <a:t>ENGINEERING POINT: a postmortem is not a timeline; it ADVANCES CLAIMS — about what happened, what caused it, what it teaches, and what should change. Each step down this ladder is a judgment that can be wrong, incomplete, or overgeneralized, and each needs its own evidence.</a:t>
+            </a:r>
+          </a:p>
+          <a:p>
+            <a:r>
+              <a:t>FACTUAL BACKGROUND: steps 1 and 2 are documented (CrowdStrike RCA, 6 Aug 2024: the out-of-bounds read of a 21st entry in a 20-entry input array). Steps 3 and 4 are the INSTRUCTOR'S proposed generalization and intervention — label them as such in class. Keeping documented findings separate from proposed lessons is the discipline this slide teaches.</a:t>
+            </a:r>
+          </a:p>
+          <a:p>
+            <a:r>
+              <a:t>ASK: what evidence would support the generalization from ONE malformed update to a broad compatibility invariant? (Evidence that the content/interpreter interface has other mismatches available; evidence that the same release path would ship them.)</a:t>
+            </a:r>
+          </a:p>
+          <a:p>
+            <a:r>
+              <a:t>EXPECTED ANSWERS AND MISCONCEPTION: students treat the lesson as self-evident once the mechanism is known — 'obviously validate content.' Push: WHICH validation, against WHOSE contract? Slide 9 showed a validator that ran and checked the wrong contract; an unjustified lesson can preserve exactly that error.</a:t>
+            </a:r>
+          </a:p>
+          <a:p>
+            <a:r>
+              <a:t>TRANSITION: suppose the lesson is sound. Where does it go? Two destinations — the engineer, and the engineering environment. First the engineer.</a:t>
+            </a:r>
+          </a:p>
+          <a:p>
+            <a:r>
+              <a:t>BRIDGE (author): the jump from comparing causal models to reading postmortems needs its connective sentence, now on the slide — once engineers have an explanation, they must determine what the evidence justifies changing. A postmortem is the document where that determination is argued.</a:t>
+            </a:r>
+          </a:p>
+          <a:p>
+            <a:endParaRPr/>
+          </a:p>
+          <a:p>
+            <a:r>
+              <a:t>PROGRESSION (say it, do not re-explain slides 10/11/16-19): this slide asks WHAT LESSON THE EVIDENCE JUSTIFIES.</a:t>
             </a:r>
           </a:p>
         </p:txBody>
@@ -2509,7 +2481,7 @@
             <a:spLocks noGrp="1"/>
           </p:cNvSpPr>
           <p:nvPr>
-            <p:ph type="sldNum" idx="5" sz="quarter"/>
+            <p:ph type="sldNum" sz="quarter" idx="5"/>
           </p:nvPr>
         </p:nvSpPr>
         <p:spPr/>
@@ -2522,8 +2494,8 @@
 </p:notes>
 </file>
 
-<file path=ppt/notesSlides/notesSlide45.xml><?xml version="1.0" encoding="utf-8"?>
-<p:notes xmlns:a="http://schemas.openxmlformats.org/drawingml/2006/main" xmlns:p="http://schemas.openxmlformats.org/presentationml/2006/main" xmlns:r="http://schemas.openxmlformats.org/officeDocument/2006/relationships">
+<file path=ppt/notesSlides/notesSlide22.xml><?xml version="1.0" encoding="utf-8"?>
+<p:notes xmlns:a="http://schemas.openxmlformats.org/drawingml/2006/main" xmlns:r="http://schemas.openxmlformats.org/officeDocument/2006/relationships" xmlns:p="http://schemas.openxmlformats.org/presentationml/2006/main">
   <p:cSld>
     <p:spTree>
       <p:nvGrpSpPr>
@@ -2543,7 +2515,7 @@
         <p:nvSpPr>
           <p:cNvPr id="2" name="Slide Image Placeholder 1"/>
           <p:cNvSpPr>
-            <a:spLocks noGrp="1"/>
+            <a:spLocks noGrp="1" noRot="1" noChangeAspect="1"/>
           </p:cNvSpPr>
           <p:nvPr>
             <p:ph type="sldImg" idx="2"/>
@@ -2558,7 +2530,7 @@
             <a:spLocks noGrp="1"/>
           </p:cNvSpPr>
           <p:nvPr>
-            <p:ph type="body" idx="3" sz="quarter"/>
+            <p:ph type="body" sz="quarter" idx="3"/>
           </p:nvPr>
         </p:nvSpPr>
         <p:spPr/>
@@ -2567,42 +2539,55 @@
           <a:lstStyle/>
           <a:p>
             <a:r>
-              <a:t>TIMING: 3 minutes. OPENS MOVEMENT 3 — why could one failure affect so many?</a:t>
-            </a:r>
-          </a:p>
-          <a:p>
-            <a:r>
-              <a:t>ENGINEERING POINT: the system under investigation changes with the question. Each boundary is an ANALYTICAL choice — a model that preserves the relationships needed to answer one engineering question. Connect explicitly to the Modeling unit: a model preserves the relationships needed to answer an engineering question, and nothing else.</a:t>
-            </a:r>
-          </a:p>
-          <a:p>
-            <a:r>
-              <a:t>CARE: the boundaries are purposeful models, not containment relationships. CrowdStrike's engineering organization is NOT organizationally inside each customer's IT department — that is why CrowdStrike and enterprise IT appear as separate actors on one dependency/control graph, with boundaries drawn AROUND subsets of it.</a:t>
-            </a:r>
-          </a:p>
-          <a:p>
-            <a:r>
-              <a:t>WALK THE BOUNDARIES: ① content + interpreter — what caused the crash? ② CrowdStrike's engineering system — why did the update escape? ③ add enterprise deployment and the services it runs — why did organizations become unavailable? ④ the ecosystem of thousands of organizations holding the same dependency — why could one vendor's failure disrupt multiple sectors?</a:t>
-            </a:r>
-          </a:p>
-          <a:p>
-            <a:r>
-              <a:t>ASK: which boundary contains the intervention we need?</a:t>
-            </a:r>
-          </a:p>
-          <a:p>
-            <a:r>
-              <a:t>EXPECTED ANSWERS: 'the biggest one.' Misconception to correct: the larger boundary also exposes decisions OUTSIDE CrowdStrike's authority — breadth is bought with evidence and authority requirements, so you choose the boundary the decision needs.</a:t>
-            </a:r>
-          </a:p>
-          <a:p>
-            <a:r>
-              <a:t>TRANSITION: to reason about the larger boundaries we need a model built for systems — one whose vocabulary is control, not components.</a:t>
-            </a:r>
-          </a:p>
-          <a:p>
-            <a:r>
-              <a:t>STAGING (no animation is authored in this deck — run the reveal verbally): present the boundaries SEQUENTIALLY, never all four at once. Step 1 — cover or ignore the outer boundaries; point at ① content + interpreter and ask 'what caused the crash?'. Step 2 — widen to ② CrowdStrike's engineering system: 'why did the update escape?'. Step 3 — widen to ③ deployment, endpoints, services: 'why did organizations become unavailable?'. Step 4 — widen to ④ the shared-dependency ecosystem: 'why could one failure disrupt many sectors?'. Read each legend line only when its boundary is introduced. The slide is the end-state the staging arrives at.</a:t>
+              <a:t>TIMING: 1 minutes. PRESERVED FROM THE ORIGINAL LECTURE — Schön's contribution. Deliver as exposition; fold the footer question into the transition rather than opening a discussion.</a:t>
+            </a:r>
+          </a:p>
+          <a:p>
+            <a:r>
+              <a:t>ENGINEERING POINT: some lessons change the ENGINEER. Donald Schön's reflective practice: decision → consequence → reflection → repertoire → future recognition. Experience does not automatically produce expertise; the engineer must compare what they expected with what occurred and decide what the difference means.</a:t>
+            </a:r>
+          </a:p>
+          <a:p>
+            <a:r>
+              <a:t>FACTUAL BACKGROUND / CROWDSTRIKE INSTANCE: an engineer who has worked through this incident may later recognize that DATA-ONLY updates can change program behavior in consequential ways — and ask whether an apparently harmless configuration or content change is actually interpreted by privileged code. That recognition is broader than remembering the particular field-count mismatch; the repertoire stores the pattern, not the instance.</a:t>
+            </a:r>
+          </a:p>
+          <a:p>
+            <a:r>
+              <a:t>ATTRIBUTION: Schön, The Reflective Practitioner (1983).</a:t>
+            </a:r>
+          </a:p>
+          <a:p>
+            <a:r>
+              <a:t>CARE: do not present reflection as a substitute for mechanical controls — the next two slides are about exactly the lessons that should NOT depend on anyone's memory.</a:t>
+            </a:r>
+          </a:p>
+          <a:p>
+            <a:r>
+              <a:t>ASK: what will an experienced engineer notice next time?</a:t>
+            </a:r>
+          </a:p>
+          <a:p>
+            <a:r>
+              <a:t>EXPECTED ANSWERS: 'check array bounds' (too narrow — that is the instance); 'distrust config changes' (too broad — paralyzing). The calibrated answer: treat content consumed by privileged code as code, with the same skepticism.</a:t>
+            </a:r>
+          </a:p>
+          <a:p>
+            <a:r>
+              <a:t>TRANSITION: reflection lives in a person. People leave, and agents arrive without the organization's history. Where does the lesson live then?</a:t>
+            </a:r>
+          </a:p>
+          <a:p>
+            <a:r>
+              <a:t>EXPOSITION ORDER (author, revised 261015): walk the chain, then land the distinction with the Schön line beneath the diagram — experience accumulates by itself; expertise does not. Reflection is the deliberate comparison of expectation with outcome, and that comparison, not the hours, feeds the repertoire. (The duplicate opening sentence above the diagram was removed: one statement of the point, stated once.)</a:t>
+            </a:r>
+          </a:p>
+          <a:p>
+            <a:endParaRPr/>
+          </a:p>
+          <a:p>
+            <a:r>
+              <a:t>PROGRESSION: 21 asked what lesson the evidence justifies. This slide asks HOW THAT LESSON CHANGES THE ENGINEER.</a:t>
             </a:r>
           </a:p>
         </p:txBody>
@@ -2614,7 +2599,7 @@
             <a:spLocks noGrp="1"/>
           </p:cNvSpPr>
           <p:nvPr>
-            <p:ph type="sldNum" idx="5" sz="quarter"/>
+            <p:ph type="sldNum" sz="quarter" idx="5"/>
           </p:nvPr>
         </p:nvSpPr>
         <p:spPr/>
@@ -2627,8 +2612,8 @@
 </p:notes>
 </file>
 
-<file path=ppt/notesSlides/notesSlide46.xml><?xml version="1.0" encoding="utf-8"?>
-<p:notes xmlns:a="http://schemas.openxmlformats.org/drawingml/2006/main" xmlns:p="http://schemas.openxmlformats.org/presentationml/2006/main" xmlns:r="http://schemas.openxmlformats.org/officeDocument/2006/relationships">
+<file path=ppt/notesSlides/notesSlide23.xml><?xml version="1.0" encoding="utf-8"?>
+<p:notes xmlns:a="http://schemas.openxmlformats.org/drawingml/2006/main" xmlns:r="http://schemas.openxmlformats.org/officeDocument/2006/relationships" xmlns:p="http://schemas.openxmlformats.org/presentationml/2006/main">
   <p:cSld>
     <p:spTree>
       <p:nvGrpSpPr>
@@ -2648,7 +2633,7 @@
         <p:nvSpPr>
           <p:cNvPr id="2" name="Slide Image Placeholder 1"/>
           <p:cNvSpPr>
-            <a:spLocks noGrp="1"/>
+            <a:spLocks noGrp="1" noRot="1" noChangeAspect="1"/>
           </p:cNvSpPr>
           <p:nvPr>
             <p:ph type="sldImg" idx="2"/>
@@ -2663,7 +2648,7 @@
             <a:spLocks noGrp="1"/>
           </p:cNvSpPr>
           <p:nvPr>
-            <p:ph type="body" idx="3" sz="quarter"/>
+            <p:ph type="body" sz="quarter" idx="3"/>
           </p:nvPr>
         </p:nvSpPr>
         <p:spPr/>
@@ -2672,42 +2657,50 @@
           <a:lstStyle/>
           <a:p>
             <a:r>
-              <a:t>TIMING: 3 minutes. THIRD CAUSAL BOUNDARY — introduce the model accurately.</a:t>
-            </a:r>
-          </a:p>
-          <a:p>
-            <a:r>
-              <a:t>ENGINEERING POINT: STAMP models safety as a CONTROL problem, not a component problem. Four elements: a controller issues control actions; a controlled process responds; feedback informs the controller; and the controller decides using a process model of the thing it controls. The system is safe when the control structure enforces its safety constraints.</a:t>
-            </a:r>
-          </a:p>
-          <a:p>
-            <a:r>
-              <a:t>CARE — three accuracy obligations: (1) STAMP is not a broader Swiss cheese, and not merely a big dependency diagram — its vocabulary is constraints, control, feedback, process models. (2) An unsafe outcome does not require a defective component: individually functioning components can interact to violate a system-level constraint. (3) Distinguish STAMP (the accident model) from STPA (the hazard-analysis method built on it) — we are introducing the model, not teaching the procedure.</a:t>
-            </a:r>
-          </a:p>
-          <a:p>
-            <a:r>
-              <a:t>ATTRIBUTION: Nancy Leveson, Engineering a Safer World (2011).</a:t>
-            </a:r>
-          </a:p>
-          <a:p>
-            <a:r>
-              <a:t>ASK: what must the controller know and control? Why can a controller with correct intentions still act unsafely?</a:t>
-            </a:r>
-          </a:p>
-          <a:p>
-            <a:r>
-              <a:t>EXPECTED ANSWERS: steer toward the three failure seats — an inaccurate process model, inadequate feedback, or insufficient control actions. Each is visible in this diagram, and none is a 'defective component.'</a:t>
-            </a:r>
-          </a:p>
-          <a:p>
-            <a:r>
-              <a:t>TRANSITION: apply it. What did CrowdStrike's update control structure look like on July 19?</a:t>
-            </a:r>
-          </a:p>
-          <a:p>
-            <a:r>
-              <a:t>EXPOSITION ORDER (author): lead with the CONCRETE example at the top of the slide — release manager, test results, wrong picture — and only then introduce the four terms by mapping them onto it: the manager is the CONTROLLER, the authorization is a CONTROL ACTION, the test results are FEEDBACK, the manager's picture of the system is the PROCESS MODEL. The abstraction arrives after the student has an instance of it. Slide 15 then applies the full structure to CrowdStrike — do not merge or reorder the two.</a:t>
+              <a:t>TIMING: 2 minutes. GOVERNANCE CONVERSION — the lesson changes the ENVIRONMENT. (Reallocated +1 minute, author revision 261015: this slide introduces five diagnostic categories and maps them to four earlier course units — do not rush the walk.)</a:t>
+            </a:r>
+          </a:p>
+          <a:p>
+            <a:r>
+              <a:t>ENGINEERING POINT: organizations cannot rely on every future contributor remembering every incident — and the problem sharpens when work is delegated to agents, which may have substantial implementation capability and no knowledge of the organization's incident history. The five left-hand categories are DIAGNOSTIC QUESTIONS, not five mandatory steps: a failure may expose an obligation nobody articulated, an obligation known but not represented, missing evidence, evidence evaluated against the wrong criterion, or a correct evaluation that nothing enforced.</a:t>
+            </a:r>
+          </a:p>
+          <a:p>
+            <a:r>
+              <a:t>FACTUAL CARE: do NOT claim CrowdStrike lacked all five. Some controls existed and proved inadequate — the Content Validator RAN (against the wrong contract, RCA finding 4). A control that was ABSENT and one that ran against the WRONG OBLIGATION call for different responses: build the missing control versus re-point the existing one. The right-hand column is a proposed engineering response, not a description of CrowdStrike's actual remediation.</a:t>
+            </a:r>
+          </a:p>
+          <a:p>
+            <a:r>
+              <a:t>PACING (author): the cover-the-right-column reveal stays CUT — the FMEA exercise two slides ahead carries this movement's active learning. Spend the restored second minute on the five-row walk and the unit mapping, and state the slide-9 contrast yourself.</a:t>
+            </a:r>
+          </a:p>
+          <a:p>
+            <a:r>
+              <a:t>ASK: for THIS incident, which diagnosis fits best? (Evaluation: a validator existed and evaluated the wrong contract — plus two absent constraints.)</a:t>
+            </a:r>
+          </a:p>
+          <a:p>
+            <a:r>
+              <a:t>EXPECTED ANSWERS AND MISCONCEPTION: 'add more gates.' The footer is the rule: a failure is not a request for another gate — absent and inadequate controls call for different responses. Diagnose which category the chain broke at, then encode it; the on-slide line says it: not every failure requires all five.</a:t>
+            </a:r>
+          </a:p>
+          <a:p>
+            <a:r>
+              <a:t>TRANSITION: encoding is not the end of the decision. Different lessons land at different ALTITUDES — and need different authorities.</a:t>
+            </a:r>
+          </a:p>
+          <a:p>
+            <a:r>
+              <a:t>SEQUENCE, NOT TAXONOMY (author): walk the five rows as CONNECTED DECISIONS, each depending on the previous — what obligation was violated? → how should it be REPRESENTED so it can be reasoned about? → what EVIDENCE establishes compliance with it? → how is that evidence EVALUATED? → what ENFORCES that an unacceptable change cannot proceed? The arrows down the left column carry the dependency. Map each to the unit where students met it (the bottom line): obligations in Requirements, representation in Modeling, evidence and evaluation in Validation, enforcement in Alignment. The diagnosis question is where the CHAIN first broke, and the encoding belongs at that link.</a:t>
+            </a:r>
+          </a:p>
+          <a:p>
+            <a:endParaRPr/>
+          </a:p>
+          <a:p>
+            <a:r>
+              <a:t>PROGRESSION: 22 changed the engineer. This slide asks HOW THE LESSON CHANGES THE ENGINEERING ENVIRONMENT.</a:t>
             </a:r>
           </a:p>
         </p:txBody>
@@ -2719,7 +2712,7 @@
             <a:spLocks noGrp="1"/>
           </p:cNvSpPr>
           <p:nvPr>
-            <p:ph type="sldNum" idx="5" sz="quarter"/>
+            <p:ph type="sldNum" sz="quarter" idx="5"/>
           </p:nvPr>
         </p:nvSpPr>
         <p:spPr/>
@@ -2732,8 +2725,8 @@
 </p:notes>
 </file>
 
-<file path=ppt/notesSlides/notesSlide47.xml><?xml version="1.0" encoding="utf-8"?>
-<p:notes xmlns:a="http://schemas.openxmlformats.org/drawingml/2006/main" xmlns:p="http://schemas.openxmlformats.org/presentationml/2006/main" xmlns:r="http://schemas.openxmlformats.org/officeDocument/2006/relationships">
+<file path=ppt/notesSlides/notesSlide24.xml><?xml version="1.0" encoding="utf-8"?>
+<p:notes xmlns:a="http://schemas.openxmlformats.org/drawingml/2006/main" xmlns:r="http://schemas.openxmlformats.org/officeDocument/2006/relationships" xmlns:p="http://schemas.openxmlformats.org/presentationml/2006/main">
   <p:cSld>
     <p:spTree>
       <p:nvGrpSpPr>
@@ -2753,7 +2746,7 @@
         <p:nvSpPr>
           <p:cNvPr id="2" name="Slide Image Placeholder 1"/>
           <p:cNvSpPr>
-            <a:spLocks noGrp="1"/>
+            <a:spLocks noGrp="1" noRot="1" noChangeAspect="1"/>
           </p:cNvSpPr>
           <p:nvPr>
             <p:ph type="sldImg" idx="2"/>
@@ -2768,7 +2761,7 @@
             <a:spLocks noGrp="1"/>
           </p:cNvSpPr>
           <p:nvPr>
-            <p:ph type="body" idx="3" sz="quarter"/>
+            <p:ph type="body" sz="quarter" idx="3"/>
           </p:nvPr>
         </p:nvSpPr>
         <p:spPr/>
@@ -2777,42 +2770,40 @@
           <a:lstStyle/>
           <a:p>
             <a:r>
-              <a:t>TIMING: 2 minutes.</a:t>
-            </a:r>
-          </a:p>
-          <a:p>
-            <a:r>
-              <a:t>ENGINEERING POINT: a controller can make an unsafe decision because its process model is inaccurate, its feedback is inadequate, or its available control actions are insufficient — all three without anyone being negligent.</a:t>
-            </a:r>
-          </a:p>
-          <a:p>
-            <a:r>
-              <a:t>DOCUMENTED (CrowdStrike RCA, 6 Aug 2024): the Content Validator validated Template Instances against the Template Type's 21 fields while the integration code supplied 20 (finding 4); Template Instances deployed to all endpoints with no staged rollout (finding 6); committed mitigations include canary deployment rings with rollback and customer control over Rapid Response Content deployment.</a:t>
-            </a:r>
-          </a:p>
-          <a:p>
-            <a:r>
-              <a:t>INTERPRETATION (ours, not the RCA's): the release organization's effective process model amounted to 'the Content Validator passed it, so it is safe to distribute' — and that model was wrong about what the validator actually checked. The RCA documents the validator defect; reading it as a controller's inaccurate process model is our STAMP-framed interpretation.</a:t>
-            </a:r>
-          </a:p>
-          <a:p>
-            <a:r>
-              <a:t>PROPOSED (instructional): the control structure drawn here is simplified. Do not claim every depicted feedback path existed or operated during the incident, and do not invent telemetry, approvals, or rollout stages the RCA does not document.</a:t>
-            </a:r>
-          </a:p>
-          <a:p>
-            <a:r>
-              <a:t>ASK: what did the release organization need to know before distributing the update?</a:t>
-            </a:r>
-          </a:p>
-          <a:p>
-            <a:r>
-              <a:t>EXPECTED ANSWERS: whether content satisfied the interpreter's assumptions; whether testing exercised the relevant behavior; whether telemetry could reveal danger quickly; whether distribution could be halted before exposure became widespread. Distinguish pre-release validation from operational feedback — both inform control, at different times.</a:t>
-            </a:r>
-          </a:p>
-          <a:p>
-            <a:r>
-              <a:t>TRANSITION: this structure stops at CrowdStrike's boundary. The constraint students actually care about — the hospital stays open — lives outside it.</a:t>
+              <a:t>TIMING: 2 minutes. THE LOCAL AND SYSTEMIC ANALYSES MEET. Pose the footer question and take one or two answers before stating the recognition yourself — students must reason about organizational authority, which needs a beat (author reallocation 261015).</a:t>
+            </a:r>
+          </a:p>
+          <a:p>
+            <a:r>
+              <a:t>ENGINEERING POINT: the same incident justifies interventions at several levels, and each lesson's destination follows from the property it preserves and the AUTHORITY required to enforce it. A vendor can improve its contracts, validators, and release controls. An enterprise can invest in isolation, staged deployment where supported, and continuity arrangements. A sector authority may be able to impose resilience obligations across organizations — where its mandate permits (do not imply every sector has one).</a:t>
+            </a:r>
+          </a:p>
+          <a:p>
+            <a:r>
+              <a:t>ASK (the footer question): if a hospital must continue delivering essential services when its endpoint security software fails — whose requirement is that?</a:t>
+            </a:r>
+          </a:p>
+          <a:p>
+            <a:r>
+              <a:t>EXPECTED ANSWERS: 'CrowdStrike's.' The recognition to produce: the hospital or health system bears responsibility for its own service continuity, while vendors, platform providers, and potentially regulators control parts of the environment that continuity depends on. Responsibilities must be allocated across the machine AND its environment — this is the Requirements and Specification units, closed into a loop.</a:t>
+            </a:r>
+          </a:p>
+          <a:p>
+            <a:r>
+              <a:t>MISCONCEPTION: reading the authority column as blame assignment. It is a statement about who CAN act, not who is at fault.</a:t>
+            </a:r>
+          </a:p>
+          <a:p>
+            <a:r>
+              <a:t>TRANSITION: we now have interventions and owners. One question left, and it is the Validation unit's question: how would we know any of this worked?</a:t>
+            </a:r>
+          </a:p>
+          <a:p>
+            <a:endParaRPr/>
+          </a:p>
+          <a:p>
+            <a:r>
+              <a:t>PROGRESSION: 23 chose the structure. This slide asks WHO CAN ACTUALLY MAKE THAT CHANGE.</a:t>
             </a:r>
           </a:p>
         </p:txBody>
@@ -2824,7 +2815,7 @@
             <a:spLocks noGrp="1"/>
           </p:cNvSpPr>
           <p:nvPr>
-            <p:ph type="sldNum" idx="5" sz="quarter"/>
+            <p:ph type="sldNum" sz="quarter" idx="5"/>
           </p:nvPr>
         </p:nvSpPr>
         <p:spPr/>
@@ -2837,8 +2828,8 @@
 </p:notes>
 </file>
 
-<file path=ppt/notesSlides/notesSlide48.xml><?xml version="1.0" encoding="utf-8"?>
-<p:notes xmlns:a="http://schemas.openxmlformats.org/drawingml/2006/main" xmlns:p="http://schemas.openxmlformats.org/presentationml/2006/main" xmlns:r="http://schemas.openxmlformats.org/officeDocument/2006/relationships">
+<file path=ppt/notesSlides/notesSlide25.xml><?xml version="1.0" encoding="utf-8"?>
+<p:notes xmlns:a="http://schemas.openxmlformats.org/drawingml/2006/main" xmlns:r="http://schemas.openxmlformats.org/officeDocument/2006/relationships" xmlns:p="http://schemas.openxmlformats.org/presentationml/2006/main">
   <p:cSld>
     <p:spTree>
       <p:nvGrpSpPr>
@@ -2858,7 +2849,7 @@
         <p:nvSpPr>
           <p:cNvPr id="2" name="Slide Image Placeholder 1"/>
           <p:cNvSpPr>
-            <a:spLocks noGrp="1"/>
+            <a:spLocks noGrp="1" noRot="1" noChangeAspect="1"/>
           </p:cNvSpPr>
           <p:nvPr>
             <p:ph type="sldImg" idx="2"/>
@@ -2873,7 +2864,7 @@
             <a:spLocks noGrp="1"/>
           </p:cNvSpPr>
           <p:nvPr>
-            <p:ph type="body" idx="3" sz="quarter"/>
+            <p:ph type="body" sz="quarter" idx="3"/>
           </p:nvPr>
         </p:nvSpPr>
         <p:spPr/>
@@ -2882,42 +2873,40 @@
           <a:lstStyle/>
           <a:p>
             <a:r>
-              <a:t>TIMING: 4 minutes. MANDATORY PIVOT OF THE MOVEMENT — the constraint appears.</a:t>
-            </a:r>
-          </a:p>
-          <a:p>
-            <a:r>
-              <a:t>ENGINEERING POINT: state the system-level safety constraint explicitly: FAILURE OF AN ENDPOINT SECURITY PRODUCT MUST NOT DISABLE ESSENTIAL ORGANIZATIONAL SERVICES. Then ask which controller can enforce it. The answer is not CrowdStrike alone — the constraint cannot be satisfied entirely within the vendor's engineering system, and THAT is where STAMP earns its keep.</a:t>
-            </a:r>
-          </a:p>
-          <a:p>
-            <a:r>
-              <a:t>DOCUMENTED: CrowdStrike controls its software and content distribution, and committed to giving customers control over Rapid Response Content deployment (RCA, 6 Aug 2024); affected organizations performed recovery across sectors (Microsoft, 20 Jul 2024). What any specific enterprise could or could not control is NOT documented in these sources.</a:t>
-            </a:r>
-          </a:p>
-          <a:p>
-            <a:r>
-              <a:t>INTERPRETATION (ours): the division of control drawn here — vendor release controls versus enterprise deployment and continuity controls — is a responsibility-allocation argument, not a finding of the postmortem. An enterprise cannot repair CrowdStrike's content-processing implementation; CrowdStrike cannot determine a hospital's continuity architecture.</a:t>
-            </a:r>
-          </a:p>
-          <a:p>
-            <a:r>
-              <a:t>PROPOSED (candidate requirement): the safety constraint itself. It is a candidate obligation for critical-service operators, not a documented universal obligation that existed before the outage.</a:t>
-            </a:r>
-          </a:p>
-          <a:p>
-            <a:r>
-              <a:t>ASK (2 minutes, pairs): which interventions require action by CrowdStrike, and which require action by its customers?</a:t>
-            </a:r>
-          </a:p>
-          <a:p>
-            <a:r>
-              <a:t>EXPECTED ANSWERS: bounds check / validator fix / staged rollout — vendor; deployment rings they can subscribe to, fallback procedures, continuity architecture — customer. Misconception: 'CrowdStrike should just fix it' — the constraint names a service property no vendor can deliver alone.</a:t>
-            </a:r>
-          </a:p>
-          <a:p>
-            <a:r>
-              <a:t>TRANSITION: why was the exposure so correlated in the first place? Name the failure class.</a:t>
+              <a:t>TIMING: 2 minutes. CLOSES THE CROWDSTRIKE INVESTIGATION. Walk the rows with enough time for students to weigh what each evidence row establishes (author reallocation 261015) — the next slide re-invokes this slide's lesson (a control's existence is not evidence of its effectiveness) inside the FMEA's staged-rollout row.</a:t>
+            </a:r>
+          </a:p>
+          <a:p>
+            <a:r>
+              <a:t>ENGINEERING POINT: a corrective action is a HYPOTHESIS about how the system will behave differently. Do not equate the existence of a control with evidence of its effectiveness. For each intervention, identify the property it is expected to establish and the evidence that would support it — property, evidence mechanism, judgment: the Validation unit's distinction, applied retrospectively.</a:t>
+            </a:r>
+          </a:p>
+          <a:p>
+            <a:r>
+              <a:t>ROW-BY-ROW CARE (each evidence row matches ITS intervention): a compatibility validator should reject malformed content violating the interpreter's contract — so the evidence is behavior over invalid and boundary input classes, not a demo on valid content. Progressive deployment should limit exposure before detection and permit a stop — so the evidence is rollout limits, detection latency, telemetry, and a DEMONSTRATED ability to halt distribution (a fault-injection exercise may contribute, but it is not the property being established). Continuity arrangements must be EXERCISED under realistic endpoint failures. Independent critical paths need dependency analysis of the actual alternatives — common-cause analysis reveals dependency structure; it does not by itself demonstrate that services will stay available, hence the continuity test.</a:t>
+            </a:r>
+          </a:p>
+          <a:p>
+            <a:r>
+              <a:t>ASK: what uncertainty remains after all four?</a:t>
+            </a:r>
+          </a:p>
+          <a:p>
+            <a:r>
+              <a:t>EXPECTED ANSWERS: 'none.' Correct answer: the next failure class nobody has imagined — which is why containment and recovery stay in the portfolio.</a:t>
+            </a:r>
+          </a:p>
+          <a:p>
+            <a:r>
+              <a:t>TRANSITION: everything so far reasons BACKWARD from a failure that already happened. Can the discipline run FORWARD — before any failure occurs? Next: a structured method for searching for failures in advance, tried first on the incident we now know thoroughly.</a:t>
+            </a:r>
+          </a:p>
+          <a:p>
+            <a:endParaRPr/>
+          </a:p>
+          <a:p>
+            <a:r>
+              <a:t>PROGRESSION: 24 found the authority. This slide asks HOW WE WILL KNOW THE CHANGE WORKED. Do not re-run slide 11's argument — point back to it.</a:t>
             </a:r>
           </a:p>
         </p:txBody>
@@ -2929,7 +2918,7 @@
             <a:spLocks noGrp="1"/>
           </p:cNvSpPr>
           <p:nvPr>
-            <p:ph type="sldNum" idx="5" sz="quarter"/>
+            <p:ph type="sldNum" sz="quarter" idx="5"/>
           </p:nvPr>
         </p:nvSpPr>
         <p:spPr/>
@@ -2942,8 +2931,8 @@
 </p:notes>
 </file>
 
-<file path=ppt/notesSlides/notesSlide49.xml><?xml version="1.0" encoding="utf-8"?>
-<p:notes xmlns:a="http://schemas.openxmlformats.org/drawingml/2006/main" xmlns:p="http://schemas.openxmlformats.org/presentationml/2006/main" xmlns:r="http://schemas.openxmlformats.org/officeDocument/2006/relationships">
+<file path=ppt/notesSlides/notesSlide26.xml><?xml version="1.0" encoding="utf-8"?>
+<p:notes xmlns:a="http://schemas.openxmlformats.org/drawingml/2006/main" xmlns:r="http://schemas.openxmlformats.org/officeDocument/2006/relationships" xmlns:p="http://schemas.openxmlformats.org/presentationml/2006/main">
   <p:cSld>
     <p:spTree>
       <p:nvGrpSpPr>
@@ -2963,7 +2952,7 @@
         <p:nvSpPr>
           <p:cNvPr id="2" name="Slide Image Placeholder 1"/>
           <p:cNvSpPr>
-            <a:spLocks noGrp="1"/>
+            <a:spLocks noGrp="1" noRot="1" noChangeAspect="1"/>
           </p:cNvSpPr>
           <p:nvPr>
             <p:ph type="sldImg" idx="2"/>
@@ -2978,7 +2967,7 @@
             <a:spLocks noGrp="1"/>
           </p:cNvSpPr>
           <p:nvPr>
-            <p:ph type="body" idx="3" sz="quarter"/>
+            <p:ph type="body" sz="quarter" idx="3"/>
           </p:nvPr>
         </p:nvSpPr>
         <p:spPr/>
@@ -2987,37 +2976,52 @@
           <a:lstStyle/>
           <a:p>
             <a:r>
-              <a:t>TIMING: 2 minutes. THE CENTRAL CONCEPTUAL PAYOFF OF MOVEMENT 3. PACING (author reallocation 261015): state the common-cause principle once and do not re-derive it — slide 18 carries the architectural discussion and keeps its protected 4 minutes.</a:t>
-            </a:r>
-          </a:p>
-          <a:p>
-            <a:r>
-              <a:t>ENGINEERING POINT: common-cause failure — multiple components or organizations fail together because they share a dependency, condition, or mechanism. The caption states the principle exactly: replication does not provide independence when replicas share the same failure mode. A thousand machines running the same privileged component are not a thousand independent defenses against that component's failure. That is an engineering principle, NOT a claim about any particular organization's redundancy architecture.</a:t>
-            </a:r>
-          </a:p>
-          <a:p>
-            <a:r>
-              <a:t>DOCUMENTED: ~8.5 million Windows devices affected — under 1% of all Windows machines (Microsoft, 20 Jul 2024); one defective content update was the shared trigger (CrowdStrike RCA, 6 Aug 2024).</a:t>
-            </a:r>
-          </a:p>
-          <a:p>
-            <a:r>
-              <a:t>INTERPRETATION (ours): the simultaneous multi-sector disruption is explained by correlated exposure to a shared privileged dependency. The incident does NOT establish that affected organizations had redundancy, that redundancy failed, or that any organization relied exclusively on CrowdStrike for endpoint security. Keep vendor concentration, shared software dependencies, and absence of redundancy distinct — related but different properties.</a:t>
-            </a:r>
-          </a:p>
-          <a:p>
-            <a:r>
-              <a:t>ASK: which apparently independent systems in YOUR life share a failure mode? (Campus auth, cloud regions, package registries, certificate authorities.)</a:t>
-            </a:r>
-          </a:p>
-          <a:p>
-            <a:r>
-              <a:t>EXPECTED ANSWERS: students name redundant SERVERS. Push to the sharper question: not how many machines an organization runs, but how independently its essential functions can continue when a shared dependency fails.</a:t>
-            </a:r>
-          </a:p>
-          <a:p>
-            <a:r>
-              <a:t>TRANSITION: if shared dependency is the vulnerability, is the remedy to require diversity? Careful — compare architectures before prescribing vendors.</a:t>
+              <a:t>TIMING: 3 minutes. NEW METHOD — prospective, not explanatory.</a:t>
+            </a:r>
+          </a:p>
+          <a:p>
+            <a:r>
+              <a:t>ENGINEERING POINT: the three models EXPLAIN a failure that has happened. FMEA — Failure Mode and Effects Analysis (IEC 60812:2018) — is not a fourth explanation: it is a structured method for SEARCHING for potential failures and deciding what deserves attention, before anything fails. Nor is it component-only — by scope it can examine functions, interfaces, operational processes, or organizational activities. Do not teach 'FMEA = components, STAMP = systems.'</a:t>
+            </a:r>
+          </a:p>
+          <a:p>
+            <a:r>
+              <a:t>BUILD (ANIMATION-IN-SPEECH — no authored animation; run the reveal as staged speech): Step 1 — read the lead and the four-step PROCEDURE at the top, before any row: identify a plausible failure mode; determine its consequences; identify existing or proposed controls; decide whether the remaining risk warrants action. This is the method slide 27 asks students to run unaided. Step 2 — only then walk the worked table one row at a time, naming which procedure step each column instantiates (failure mode -&gt; step 1, effect -&gt; step 2, candidate control -&gt; step 3). Step 3 — close on the occurrence line at the bottom: deciding which modes warrant action under unknown probabilities IS step 4.</a:t>
+            </a:r>
+          </a:p>
+          <a:p>
+            <a:r>
+              <a:t>THE WORKED TABLE: each row: a FUNCTION of the system we know thoroughly, a failure mode, its effect, a candidate control — all met on slides 21–25.</a:t>
+            </a:r>
+          </a:p>
+          <a:p>
+            <a:r>
+              <a:t>CARE — the staged-rollout row (cross-reference slide 25): HAVING a staged-rollout mechanism is not the same as having one that reliably detects and contains the failure mode; a rollout that advances without meaningful health checks offers little protection.</a:t>
+            </a:r>
+          </a:p>
+          <a:p>
+            <a:r>
+              <a:t>RATINGS (notes only): classical FMEA multiplies severity, occurrence, and detection into a Risk Priority Number — but multiplying ordinal ratings does not make an RPN of 120 twice the risk of 60; the AIAG &amp; VDA FMEA Handbook (1st ed., 2019) replaces RPN with Action Priority. Occurrence stays '?' deliberately: the method's value is exposing uncertainty, not manufacturing numerical certainty.</a:t>
+            </a:r>
+          </a:p>
+          <a:p>
+            <a:r>
+              <a:t>SIMPLIFICATION (say it to the class): a full FMEA also assesses severity, occurrence, and detectability to prioritize action. We are using a simplified version because we lack reliable estimates.</a:t>
+            </a:r>
+          </a:p>
+          <a:p>
+            <a:r>
+              <a:t>ASK (the footer): which of these failure modes could occur in another security product? Expected: the validate / distribute / maintain rows do not depend on the content-interpreter defect at all.</a:t>
+            </a:r>
+          </a:p>
+          <a:p>
+            <a:r>
+              <a:t>INSTRUCTOR REFERENCES (no student reading assigned): IEC 60812:2018; AIAG &amp; VDA FMEA Handbook, 1st ed., 2019.</a:t>
+            </a:r>
+          </a:p>
+          <a:p>
+            <a:r>
+              <a:t>TRANSITION: if those rows transfer, the method should work on a system we know nothing about. Next: exactly that.</a:t>
             </a:r>
           </a:p>
         </p:txBody>
@@ -3029,7 +3033,7 @@
             <a:spLocks noGrp="1"/>
           </p:cNvSpPr>
           <p:nvPr>
-            <p:ph type="sldNum" idx="5" sz="quarter"/>
+            <p:ph type="sldNum" sz="quarter" idx="5"/>
           </p:nvPr>
         </p:nvSpPr>
         <p:spPr/>
@@ -3042,8 +3046,8 @@
 </p:notes>
 </file>
 
-<file path=ppt/notesSlides/notesSlide50.xml><?xml version="1.0" encoding="utf-8"?>
-<p:notes xmlns:a="http://schemas.openxmlformats.org/drawingml/2006/main" xmlns:p="http://schemas.openxmlformats.org/presentationml/2006/main" xmlns:r="http://schemas.openxmlformats.org/officeDocument/2006/relationships">
+<file path=ppt/notesSlides/notesSlide27.xml><?xml version="1.0" encoding="utf-8"?>
+<p:notes xmlns:a="http://schemas.openxmlformats.org/drawingml/2006/main" xmlns:r="http://schemas.openxmlformats.org/officeDocument/2006/relationships" xmlns:p="http://schemas.openxmlformats.org/presentationml/2006/main">
   <p:cSld>
     <p:spTree>
       <p:nvGrpSpPr>
@@ -3063,7 +3067,7 @@
         <p:nvSpPr>
           <p:cNvPr id="2" name="Slide Image Placeholder 1"/>
           <p:cNvSpPr>
-            <a:spLocks noGrp="1"/>
+            <a:spLocks noGrp="1" noRot="1" noChangeAspect="1"/>
           </p:cNvSpPr>
           <p:nvPr>
             <p:ph type="sldImg" idx="2"/>
@@ -3078,7 +3082,7 @@
             <a:spLocks noGrp="1"/>
           </p:cNvSpPr>
           <p:nvPr>
-            <p:ph type="body" idx="3" sz="quarter"/>
+            <p:ph type="body" sz="quarter" idx="3"/>
           </p:nvPr>
         </p:nvSpPr>
         <p:spPr/>
@@ -3087,37 +3091,45 @@
           <a:lstStyle/>
           <a:p>
             <a:r>
-              <a:t>TIMING: 4 minutes — PROTECT the discussion: 'what independence should critical services actually require?' deserves the time (author pacing note). THE MAIN RISK SLIDE — do not let it become an argument for mandatory vendor diversity.</a:t>
-            </a:r>
-          </a:p>
-          <a:p>
-            <a:r>
-              <a:t>ENGINEERING POINT: compare ARCHITECTURES, not vendors. The question is whether critical functions possess independent failure paths. Separate three things: the REQUIREMENT (essential services remain available under specified endpoint failures), a candidate ARCHITECTURAL mechanism (independent fallback infrastructure, deployment isolation, delayed update rings), and a candidate PROCUREMENT mechanism (vendor diversity). The latter two are possible ways to satisfy the first — not conclusions that follow from the incident.</a:t>
-            </a:r>
-          </a:p>
-          <a:p>
-            <a:r>
-              <a:t>DOCUMENTED: one vendor update produced widespread correlated failures (CrowdStrike RCA, 6 Aug 2024; Microsoft, 20 Jul 2024).</a:t>
-            </a:r>
-          </a:p>
-          <a:p>
-            <a:r>
-              <a:t>INTERPRETATION (ours): shared privileged dependencies created a common-cause vulnerability across organizations.</a:t>
-            </a:r>
-          </a:p>
-          <a:p>
-            <a:r>
-              <a:t>PROPOSED — and explicitly UNRESOLVED: critical infrastructure might require more independence; whether mandatory vendor diversity would have prevented this incident, and whether its benefits justify its costs, is unresolved. Two products may share an operating system, a cloud service, a configuration mechanism, or an administrative control plane — diversity of vendor names does not establish independence of failure modes. Conversely, an organization can obtain real resilience without a second endpoint product.</a:t>
-            </a:r>
-          </a:p>
-          <a:p>
-            <a:r>
-              <a:t>ASK (class discussion): what property should we require — multiple vendors, or continuity under a specified common-cause failure? Prescribing vendors constrains the solution; specifying the property leaves engineers free to satisfy it. Requirements vs Specification, exactly.</a:t>
-            </a:r>
-          </a:p>
-          <a:p>
-            <a:r>
-              <a:t>TRANSITION: whatever the requirement is — who has the authority to impose it?</a:t>
+              <a:t>TIMING: 3 minutes — present the architecture in under one minute; PROTECT 2–3 minutes for the worksheet discussion (author pacing note).</a:t>
+            </a:r>
+          </a:p>
+          <a:p>
+            <a:r>
+              <a:t>ENGINEERING POINT: transfer of the METHOD, not recall of an incident. Students get only the architecture — four facts — and must search it for failure modes under genuinely incomplete information, the condition engineers actually work in. DO NOT reveal what happened in 2019; if a student already knows the incident, ask them to hold it.</a:t>
+            </a:r>
+          </a:p>
+          <a:p>
+            <a:r>
+              <a:t>FACTUAL BACKGROUND (architecture only; source: Cloudflare post-mortem, 'Details of the Cloudflare outage on July 2, 2019'): Cloudflare operates a Web Application Firewall that inspects incoming web requests; engineers can deploy new detection rules without releasing new software; some rules use regular expressions; rule changes can propagate globally within seconds.</a:t>
+            </a:r>
+          </a:p>
+          <a:p>
+            <a:r>
+              <a:t>RUN IT: pairs, at least one failure mode per function row; leave occurrence '?' and ask which modes warrant a control anyway.</a:t>
+            </a:r>
+          </a:p>
+          <a:p>
+            <a:r>
+              <a:t>EXPECTED ANSWERS — all legitimate WITHOUT knowing the incident: a rule that consumes excessive CPU or memory; a rule that false-positives and blocks legitimate traffic; a malformed rule that breaks evaluation; a defective rule reaching every server before anyone can detect or halt it. Students do NOT need to anticipate catastrophic regex backtracking: the general failure mode is the method's product; the precise defect is hindsight's.</a:t>
+            </a:r>
+          </a:p>
+          <a:p>
+            <a:r>
+              <a:t>MISCONCEPTION: a guessing game about 'the real outage.' Grade on search discipline, not prophecy.</a:t>
+            </a:r>
+          </a:p>
+          <a:p>
+            <a:r>
+              <a:t>TRANSITION: let's see what actually happened — and compare it against your table.</a:t>
+            </a:r>
+          </a:p>
+          <a:p>
+            <a:endParaRPr/>
+          </a:p>
+          <a:p>
+            <a:r>
+              <a:t>CLASSROOM EXECUTION: have students WRITE DOWN their worksheet answers before you advance. Once the next slide reveals the incident, hindsight will quietly rewrite what they believe they anticipated — and the comparison question on 28 depends on having their actual predictions in front of them.</a:t>
             </a:r>
           </a:p>
         </p:txBody>
@@ -3129,7 +3141,7 @@
             <a:spLocks noGrp="1"/>
           </p:cNvSpPr>
           <p:nvPr>
-            <p:ph type="sldNum" idx="5" sz="quarter"/>
+            <p:ph type="sldNum" sz="quarter" idx="5"/>
           </p:nvPr>
         </p:nvSpPr>
         <p:spPr/>
@@ -3142,8 +3154,8 @@
 </p:notes>
 </file>
 
-<file path=ppt/notesSlides/notesSlide51.xml><?xml version="1.0" encoding="utf-8"?>
-<p:notes xmlns:a="http://schemas.openxmlformats.org/drawingml/2006/main" xmlns:p="http://schemas.openxmlformats.org/presentationml/2006/main" xmlns:r="http://schemas.openxmlformats.org/officeDocument/2006/relationships">
+<file path=ppt/notesSlides/notesSlide28.xml><?xml version="1.0" encoding="utf-8"?>
+<p:notes xmlns:a="http://schemas.openxmlformats.org/drawingml/2006/main" xmlns:r="http://schemas.openxmlformats.org/officeDocument/2006/relationships" xmlns:p="http://schemas.openxmlformats.org/presentationml/2006/main">
   <p:cSld>
     <p:spTree>
       <p:nvGrpSpPr>
@@ -3163,7 +3175,7 @@
         <p:nvSpPr>
           <p:cNvPr id="2" name="Slide Image Placeholder 1"/>
           <p:cNvSpPr>
-            <a:spLocks noGrp="1"/>
+            <a:spLocks noGrp="1" noRot="1" noChangeAspect="1"/>
           </p:cNvSpPr>
           <p:nvPr>
             <p:ph type="sldImg" idx="2"/>
@@ -3178,7 +3190,7 @@
             <a:spLocks noGrp="1"/>
           </p:cNvSpPr>
           <p:nvPr>
-            <p:ph type="body" idx="3" sz="quarter"/>
+            <p:ph type="body" sz="quarter" idx="3"/>
           </p:nvPr>
         </p:nvSpPr>
         <p:spPr/>
@@ -3187,47 +3199,52 @@
           <a:lstStyle/>
           <a:p>
             <a:r>
-              <a:t>TIMING: 2 minutes.</a:t>
-            </a:r>
-          </a:p>
-          <a:p>
-            <a:r>
-              <a:t>ENGINEERING POINT: controllers exist above the vendor, and each level pairs a control action with the feedback it needs — read the diagram as control AND feedback, not as a hierarchy of rank. STAMP without feedback is just an org chart. A cause outside your authority still belongs in the account; the response is to identify the responsible controller and ESCALATE the proposed intervention, not to omit the cause.</a:t>
-            </a:r>
-          </a:p>
-          <a:p>
-            <a:r>
-              <a:t>DOCUMENTED vs HYPOTHETICAL (the dashed edge): enterprise deployment and recovery controls, and operators' continuity policies, are ordinary existing arrangements of the kind the incident exercised. A sector authority imposing resilience requirements for endpoint-security failure is a HYPOTHETICAL addition to the control structure — drawn dashed. Not every sector has a regulator empowered to mandate such controls, and no source in this lecture documents one that did so for this incident.</a:t>
-            </a:r>
-          </a:p>
-          <a:p>
-            <a:r>
-              <a:t>INTERPRETATION (ours): reading the outage as evidence of a systemic risk that some controller should manage is our interpretation of the documented exposure, not a finding of the RCA.</a:t>
-            </a:r>
-          </a:p>
-          <a:p>
-            <a:r>
-              <a:t>PROPOSED: any specific obligation at any level of this diagram. A failure analysis may reveal a systemic risk without establishing that regulation is necessary, effective, or proportionate — those are further engineering and policy judgments requiring evidence.</a:t>
-            </a:r>
-          </a:p>
-          <a:p>
-            <a:r>
-              <a:t>ASK: which controller has the authority to enforce independence — and what feedback would it need to exercise that authority well?</a:t>
-            </a:r>
-          </a:p>
-          <a:p>
-            <a:r>
-              <a:t>EXPECTED ANSWERS: 'the government should require it.' Push back with the epistemic ladder: proposed is not validated. Also surface the reverse misconception — 'if it's outside our authority it's out of scope.' Escalation is an engineering act.</a:t>
-            </a:r>
-          </a:p>
-          <a:p>
-            <a:r>
-              <a:t>TRANSITION: three models, three boundaries, three intervention scopes. Put them side by side.</a:t>
-            </a:r>
-          </a:p>
-          <a:p>
-            <a:r>
-              <a:t>NOT A HIERARCHY (author): the stack can misread as an org chart. The corrective sentence is now on the slide — each controller requires BOTH authority to act AND evidence about the consequences. A regulator with authority but no operational evidence cannot control well; an operator rich in evidence may lack the authority to impose a sector-wide requirement. Control needs the pair, at every level.</a:t>
+              <a:t>TIMING: 3 minutes — the reveal. Grade the class's FMEA predictions against the incident.</a:t>
+            </a:r>
+          </a:p>
+          <a:p>
+            <a:r>
+              <a:t>ENGINEERING POINT: compare prediction with reality, and name the gap honestly. Most groups will have proposed a resource-exhaustion or bad-rule failure mode, a service-disruption effect, and controls such as pre-deployment resource limits or a staged rollout — without knowing anything about 2019. Nobody should be expected to have named catastrophic regex backtracking: FMEA surfaces the GENERAL failure mode; it does not predict the specific defect. In hindsight every failure looks foreseeable; in practice engineers work under incomplete information.</a:t>
+            </a:r>
+          </a:p>
+          <a:p>
+            <a:r>
+              <a:t>EXPOSITION ORDER (author): the class met only the architecture on the previous slide, so establish the rest of the system briefly, then the failure — MECHANISM before measurements: some regular expressions require disproportionately more matching work as the input grows, because a backtracking engine re-tries overlapping ways to match. The 23-vs-555 bars at the bottom ILLUSTRATE that mechanism; they do not replace the explanation.</a:t>
+            </a:r>
+          </a:p>
+          <a:p>
+            <a:r>
+              <a:t>TRIGGER AND AMPLIFIER (now labelled on the slide): the pathological regex is the TRIGGER — it exhausts CPU; global deployment without staged containment is the AMPLIFIER — it set the blast radius. Both are needed to explain the incident's scale, and the pairing is the CrowdStrike parallel: there the content defect was the trigger and unstaged Rapid Response Content distribution the amplifier.</a:t>
+            </a:r>
+          </a:p>
+          <a:p>
+            <a:r>
+              <a:t>WHAT THE STEP COUNTS MEASURE (author): the counts are the number of candidate matching paths the engine explores before it can conclude — the work of backtracking — not merely a reflection of a longer input. And present 23-vs-555 as an ILLUSTRATION of the phenomenon, not a proof of exponential complexity: two measurements cannot establish an asymptotic growth rate.</a:t>
+            </a:r>
+          </a:p>
+          <a:p>
+            <a:r>
+              <a:t>FACTS (Cloudflare post-mortem, 'Details of the Cloudflare outage on July 2, 2019'): a WAF Managed Rule targeting XSS deployed globally at 13:42 UTC — in seconds, with no staged rollout, while software releases went DOG → PIG → Canary; the sub-pattern .*(?:.*=.*) caused catastrophic backtracking (their worked numbers: 'x=x' took 23 steps; 'x=' plus twenty 'x's took 555); PCRE 'has no mechanism to protect against a runaway expression'; WAF identified 14:00, killed globally 14:07, traffic normal 14:09, re-enabled 14:52 — 27 minutes of impact. A CPU-usage protection had been accidentally removed weeks earlier.</a:t>
+            </a:r>
+          </a:p>
+          <a:p>
+            <a:r>
+              <a:t>ASK (the footer's first line): which failure modes did we anticipate — and which did we miss? Typically anticipated: a defective rule, global distribution, nothing to halt it. Typically missed: the removed CPU protection, and a test suite that measured runtime rather than CPU — defenses that existed and failed, which the diagnosis exercise next can surface.</a:t>
+            </a:r>
+          </a:p>
+          <a:p>
+            <a:r>
+              <a:t>DEEP STRUCTURE (the footer's second line — let students state it before you do): in both incidents, a security configuration update is distributed globally without adequate opportunities to detect and contain defective updates; and in both, a validator ran and passed while checking the wrong property — arity against the wrong contract at CrowdStrike, runtime instead of CPU at Cloudflare. An engineer could identify that characteristic prospectively in either system — which is what the previous two slides had students do.</a:t>
+            </a:r>
+          </a:p>
+          <a:p>
+            <a:r>
+              <a:t>CARE: regex matching cost depends on expression, engine, AND input — do not imply all engines behave this way (re2 and Rust's engine carry runtime guarantees). Do not conflate with Cloudflare's November 2025 outage — different mechanism.</a:t>
+            </a:r>
+          </a:p>
+          <a:p>
+            <a:r>
+              <a:t>TRANSITION: your turn — diagnose it with the three models.</a:t>
             </a:r>
           </a:p>
         </p:txBody>
@@ -3239,7 +3256,7 @@
             <a:spLocks noGrp="1"/>
           </p:cNvSpPr>
           <p:nvPr>
-            <p:ph type="sldNum" idx="5" sz="quarter"/>
+            <p:ph type="sldNum" sz="quarter" idx="5"/>
           </p:nvPr>
         </p:nvSpPr>
         <p:spPr/>
@@ -3252,8 +3269,8 @@
 </p:notes>
 </file>
 
-<file path=ppt/notesSlides/notesSlide52.xml><?xml version="1.0" encoding="utf-8"?>
-<p:notes xmlns:a="http://schemas.openxmlformats.org/drawingml/2006/main" xmlns:p="http://schemas.openxmlformats.org/presentationml/2006/main" xmlns:r="http://schemas.openxmlformats.org/officeDocument/2006/relationships">
+<file path=ppt/notesSlides/notesSlide29.xml><?xml version="1.0" encoding="utf-8"?>
+<p:notes xmlns:a="http://schemas.openxmlformats.org/drawingml/2006/main" xmlns:r="http://schemas.openxmlformats.org/officeDocument/2006/relationships" xmlns:p="http://schemas.openxmlformats.org/presentationml/2006/main">
   <p:cSld>
     <p:spTree>
       <p:nvGrpSpPr>
@@ -3273,7 +3290,7 @@
         <p:nvSpPr>
           <p:cNvPr id="2" name="Slide Image Placeholder 1"/>
           <p:cNvSpPr>
-            <a:spLocks noGrp="1"/>
+            <a:spLocks noGrp="1" noRot="1" noChangeAspect="1"/>
           </p:cNvSpPr>
           <p:nvPr>
             <p:ph type="sldImg" idx="2"/>
@@ -3288,7 +3305,7 @@
             <a:spLocks noGrp="1"/>
           </p:cNvSpPr>
           <p:nvPr>
-            <p:ph type="body" idx="3" sz="quarter"/>
+            <p:ph type="body" sz="quarter" idx="3"/>
           </p:nvPr>
         </p:nvSpPr>
         <p:spPr/>
@@ -3297,37 +3314,37 @@
           <a:lstStyle/>
           <a:p>
             <a:r>
-              <a:t>TIMING: 3 minutes. THE SYNTHESIS SLIDE — closes Movement 3. (Backbone slide: models enable different interventions.)</a:t>
-            </a:r>
-          </a:p>
-          <a:p>
-            <a:r>
-              <a:t>ENGINEERING POINT — TWO DIMENSIONS, NOT ONE: the three models differ in their EXPLANATORY MECHANISM (what kind of account they construct: a causal chain; a configuration of defenses; a control structure enforcing constraints) and, SEPARATELY, in the SYSTEM BOUNDARY they are applied to. This lecture applied them at progressively broader boundaries because the investigation's questions widened — but that was our choice of boundary, not a property of the models.</a:t>
-            </a:r>
-          </a:p>
-          <a:p>
-            <a:r>
-              <a:t>THE CONFLATION TO PREVENT: STAMP is NOT simply a more comprehensive Swiss cheese. STAMP can be applied to a narrow technical system (a single controller and its process); Swiss cheese can be applied across organizational boundaries (defenses spanning vendor and customer). The model answers its question; the boundary is chosen to fit the decision.</a:t>
-            </a:r>
-          </a:p>
-          <a:p>
-            <a:r>
-              <a:t>WALK THE TABLE: component-level — what mechanism produced the failure? — repair the defective mechanism. Swiss cheese — why did defenses fail to prevent it? — strengthen or diversify defenses. STAMP — which safety constraints were inadequately controlled? — change control actions, feedback, or authority.</a:t>
-            </a:r>
-          </a:p>
-          <a:p>
-            <a:r>
-              <a:t>ASK: broader explanations expose more — what do they COST? (More evidence to support the account; often more authority to act on it.)</a:t>
-            </a:r>
-          </a:p>
-          <a:p>
-            <a:r>
-              <a:t>EXPECTED ANSWERS AND MISCONCEPTION: students reflexively crown the broadest model. Keep the standing caution: broader is not automatically better; choose the boundary sufficient for the decision.</a:t>
-            </a:r>
-          </a:p>
-          <a:p>
-            <a:r>
-              <a:t>TRANSITION: we have candidate interventions at every scope. Which lessons does the evidence actually justify — and how do we keep them?</a:t>
+              <a:t>TIMING: 6 minutes — pairs or small groups (5), then debrief (1). THE EXERCISE.</a:t>
+            </a:r>
+          </a:p>
+          <a:p>
+            <a:r>
+              <a:t>ENGINEERING POINT: students apply the models WITHOUT being led. Each group picks ONE model, proposes an intervention the incident's evidence supports, and answers: what the model preserves, what mechanism it explains, what intervention follows, what evidence would support it, who has authority to implement it.</a:t>
+            </a:r>
+          </a:p>
+          <a:p>
+            <a:r>
+              <a:t>VISIBLE TASK (author revision 261015): 'Choose ONE model' is now in the on-slide instructions — groups attempt one full analysis in the five minutes, not three shallow ones.</a:t>
+            </a:r>
+          </a:p>
+          <a:p>
+            <a:r>
+              <a:t>POSSIBLE ANSWERS (Cloudflare post-mortem, July 2019): COMPONENT-LEVEL — pathological regex under a backtracking engine; reject dangerous complexity, move to an engine with runtime guarantees (Cloudflare's own remediation: re2 or Rust regex), or impose resource bounds. SWISS CHEESE — defenses existed (PR approval, CI/CD, change tickets, SOPs, alerting) and failed in sequence: the test suite measured RUNTIME, not CPU — 'no increase in test suite run time was observed' with the fatal rule; a CPU protection had been accidentally REMOVED weeks earlier; the SOP permitted a non-emergency rule to skip staged rollout. Note the contrast with slide 9: at Cloudflare a defense existed and was removed — a different finding from one never built. STAMP — a constraint like 'a WAF rule update must not consume enough resources to compromise unrelated traffic'; examine rule authors, validation, deployment controllers, monitoring, and what feedback each received.</a:t>
+            </a:r>
+          </a:p>
+          <a:p>
+            <a:r>
+              <a:t>GRADING STANCE: do not reward choosing the broadest model. Reward an intervention justified by the model and the evidence, addressing a consequential failure class at acceptable cost.</a:t>
+            </a:r>
+          </a:p>
+          <a:p>
+            <a:r>
+              <a:t>CLOSING QUESTION (the footer's last line): how should this incident change the FMEA for future WAF releases? Expected: new failure-mode rows (a rule whose matching cost explodes on ordinary input); a detection column that measures CPU, not wall-clock runtime; controls promoted from candidate to required — staged rollout for rules, a regex engine with runtime guarantees, a restored and protected CPU limit. The durable point: an FMEA is a living document — each incident updates the search. That is how failure changes FUTURE engineering, which is the closing slide's claim.</a:t>
+            </a:r>
+          </a:p>
+          <a:p>
+            <a:r>
+              <a:t>TRANSITION: close the unit — and Act II.</a:t>
             </a:r>
           </a:p>
         </p:txBody>
@@ -3339,7 +3356,7 @@
             <a:spLocks noGrp="1"/>
           </p:cNvSpPr>
           <p:nvPr>
-            <p:ph type="sldNum" idx="5" sz="quarter"/>
+            <p:ph type="sldNum" sz="quarter" idx="5"/>
           </p:nvPr>
         </p:nvSpPr>
         <p:spPr/>
@@ -3352,8 +3369,8 @@
 </p:notes>
 </file>
 
-<file path=ppt/notesSlides/notesSlide53.xml><?xml version="1.0" encoding="utf-8"?>
-<p:notes xmlns:a="http://schemas.openxmlformats.org/drawingml/2006/main" xmlns:p="http://schemas.openxmlformats.org/presentationml/2006/main" xmlns:r="http://schemas.openxmlformats.org/officeDocument/2006/relationships">
+<file path=ppt/notesSlides/notesSlide3.xml><?xml version="1.0" encoding="utf-8"?>
+<p:notes xmlns:a="http://schemas.openxmlformats.org/drawingml/2006/main" xmlns:r="http://schemas.openxmlformats.org/officeDocument/2006/relationships" xmlns:p="http://schemas.openxmlformats.org/presentationml/2006/main">
   <p:cSld>
     <p:spTree>
       <p:nvGrpSpPr>
@@ -3373,7 +3390,7 @@
         <p:nvSpPr>
           <p:cNvPr id="2" name="Slide Image Placeholder 1"/>
           <p:cNvSpPr>
-            <a:spLocks noGrp="1"/>
+            <a:spLocks noGrp="1" noRot="1" noChangeAspect="1"/>
           </p:cNvSpPr>
           <p:nvPr>
             <p:ph type="sldImg" idx="2"/>
@@ -3388,7 +3405,7 @@
             <a:spLocks noGrp="1"/>
           </p:cNvSpPr>
           <p:nvPr>
-            <p:ph type="body" idx="3" sz="quarter"/>
+            <p:ph type="body" sz="quarter" idx="3"/>
           </p:nvPr>
         </p:nvSpPr>
         <p:spPr/>
@@ -3397,43 +3414,37 @@
           <a:lstStyle/>
           <a:p>
             <a:r>
-              <a:t>TIMING: 1 minutes. OPENS MOVEMENT 4 — what should change? DELIVER EFFICIENTLY (author pacing note): present the ladder and pose the footer question rhetorically — this movement's active-learning weight now lives in the FMEA exercise (slide 27) and the diagnosis exercise (slide 29).</a:t>
-            </a:r>
-          </a:p>
-          <a:p>
-            <a:r>
-              <a:t>ENGINEERING POINT: a postmortem is not a timeline; it ADVANCES CLAIMS — about what happened, what caused it, what it teaches, and what should change. Each step down this ladder is a judgment that can be wrong, incomplete, or overgeneralized, and each needs its own evidence.</a:t>
-            </a:r>
-          </a:p>
-          <a:p>
-            <a:r>
-              <a:t>FACTUAL BACKGROUND: steps 1 and 2 are documented (CrowdStrike RCA, 6 Aug 2024: the out-of-bounds read of a 21st entry in a 20-entry input array). Steps 3 and 4 are the INSTRUCTOR'S proposed generalization and intervention — label them as such in class. Keeping documented findings separate from proposed lessons is the discipline this slide teaches.</a:t>
-            </a:r>
-          </a:p>
-          <a:p>
-            <a:r>
-              <a:t>ASK: what evidence would support the generalization from ONE malformed update to a broad compatibility invariant? (Evidence that the content/interpreter interface has other mismatches available; evidence that the same release path would ship them.)</a:t>
-            </a:r>
-          </a:p>
-          <a:p>
-            <a:r>
-              <a:t>EXPECTED ANSWERS AND MISCONCEPTION: students treat the lesson as self-evident once the mechanism is known — 'obviously validate content.' Push: WHICH validation, against WHOSE contract? Slide 9 showed a validator that ran and checked the wrong contract; an unjustified lesson can preserve exactly that error.</a:t>
-            </a:r>
-          </a:p>
-          <a:p>
-            <a:r>
-              <a:t>TRANSITION: suppose the lesson is sound. Where does it go? Two destinations — the engineer, and the engineering environment. First the engineer.</a:t>
-            </a:r>
-          </a:p>
-          <a:p>
-            <a:r>
-              <a:t>BRIDGE (author): the jump from comparing causal models to reading postmortems needs its connective sentence, now on the slide — once engineers have an explanation, they must determine what the evidence justifies changing. A postmortem is the document where that determination is argued.</a:t>
-            </a:r>
-          </a:p>
-          <a:p/>
-          <a:p>
-            <a:r>
-              <a:t>PROGRESSION (say it, do not re-explain slides 10/11/16-19): this slide asks WHAT LESSON THE EVIDENCE JUSTIFIES.</a:t>
+              <a:t>TIMING: 3 minutes. ESTABLISH THE SYSTEM BEFORE ANALYZING IT.</a:t>
+            </a:r>
+          </a:p>
+          <a:p>
+            <a:r>
+              <a:t>ENGINEERING POINT: a student should never have to infer what a component does while being asked to analyze why it failed. So first the parts, in order: CrowdStrike is a security vendor; its Falcon sensor runs on each Windows endpoint with privileged system access (it must see what the operating system sees); the sensor interprets Rapid Response Content — detection content describing what to look for — which is distributed separately from sensor-software releases. THEN the event: on July 19, one content update was defective, the sensor crashed processing it, and because the sensor runs with privileged access, the sensor's crash became the operating system's crash.</a:t>
+            </a:r>
+          </a:p>
+          <a:p>
+            <a:r>
+              <a:t>DOCUMENTED (CrowdStrike RCA, 6 Aug 2024): the defective artifact was a Rapid Response Content update, not an ordinary Windows OS update; Rapid Response Content could be updated independently of sensor-code releases — a faster release path. HOLD that faster-path observation for Movement 2 (slide 7) unless a student raises it; here it is premature.</a:t>
+            </a:r>
+          </a:p>
+          <a:p>
+            <a:r>
+              <a:t>ASK (the footer): why can security content crash an operating system?</a:t>
+            </a:r>
+          </a:p>
+          <a:p>
+            <a:r>
+              <a:t>EXPECTED ANSWERS: 'it's code' — sharpen: it is DATA interpreted by privileged code, and data consumed by privileged code can change its behavior. Misconception: students assume the update was a program; the content/interpreter split is the load-bearing distinction for the whole lecture.</a:t>
+            </a:r>
+          </a:p>
+          <a:p>
+            <a:r>
+              <a:t>TRANSITION: what exactly did the content and its interpreter disagree about? Numbers next.</a:t>
+            </a:r>
+          </a:p>
+          <a:p>
+            <a:r>
+              <a:t>SOURCES: CrowdStrike RCA, 6 Aug 2024.</a:t>
             </a:r>
           </a:p>
         </p:txBody>
@@ -3445,7 +3456,7 @@
             <a:spLocks noGrp="1"/>
           </p:cNvSpPr>
           <p:nvPr>
-            <p:ph type="sldNum" idx="5" sz="quarter"/>
+            <p:ph type="sldNum" sz="quarter" idx="5"/>
           </p:nvPr>
         </p:nvSpPr>
         <p:spPr/>
@@ -3458,8 +3469,8 @@
 </p:notes>
 </file>
 
-<file path=ppt/notesSlides/notesSlide54.xml><?xml version="1.0" encoding="utf-8"?>
-<p:notes xmlns:a="http://schemas.openxmlformats.org/drawingml/2006/main" xmlns:p="http://schemas.openxmlformats.org/presentationml/2006/main" xmlns:r="http://schemas.openxmlformats.org/officeDocument/2006/relationships">
+<file path=ppt/notesSlides/notesSlide30.xml><?xml version="1.0" encoding="utf-8"?>
+<p:notes xmlns:a="http://schemas.openxmlformats.org/drawingml/2006/main" xmlns:r="http://schemas.openxmlformats.org/officeDocument/2006/relationships" xmlns:p="http://schemas.openxmlformats.org/presentationml/2006/main">
   <p:cSld>
     <p:spTree>
       <p:nvGrpSpPr>
@@ -3479,7 +3490,7 @@
         <p:nvSpPr>
           <p:cNvPr id="2" name="Slide Image Placeholder 1"/>
           <p:cNvSpPr>
-            <a:spLocks noGrp="1"/>
+            <a:spLocks noGrp="1" noRot="1" noChangeAspect="1"/>
           </p:cNvSpPr>
           <p:nvPr>
             <p:ph type="sldImg" idx="2"/>
@@ -3494,7 +3505,7 @@
             <a:spLocks noGrp="1"/>
           </p:cNvSpPr>
           <p:nvPr>
-            <p:ph type="body" idx="3" sz="quarter"/>
+            <p:ph type="body" sz="quarter" idx="3"/>
           </p:nvPr>
         </p:nvSpPr>
         <p:spPr/>
@@ -3503,53 +3514,37 @@
           <a:lstStyle/>
           <a:p>
             <a:r>
-              <a:t>TIMING: 1 minutes. PRESERVED FROM THE ORIGINAL LECTURE — Schön's contribution. Deliver as exposition; fold the footer question into the transition rather than opening a discussion.</a:t>
-            </a:r>
-          </a:p>
-          <a:p>
-            <a:r>
-              <a:t>ENGINEERING POINT: some lessons change the ENGINEER. Donald Schön's reflective practice: decision → consequence → reflection → repertoire → future recognition. Experience does not automatically produce expertise; the engineer must compare what they expected with what occurred and decide what the difference means.</a:t>
-            </a:r>
-          </a:p>
-          <a:p>
-            <a:r>
-              <a:t>FACTUAL BACKGROUND / CROWDSTRIKE INSTANCE: an engineer who has worked through this incident may later recognize that DATA-ONLY updates can change program behavior in consequential ways — and ask whether an apparently harmless configuration or content change is actually interpreted by privileged code. That recognition is broader than remembering the particular field-count mismatch; the repertoire stores the pattern, not the instance.</a:t>
-            </a:r>
-          </a:p>
-          <a:p>
-            <a:r>
-              <a:t>ATTRIBUTION: Schön, The Reflective Practitioner (1983).</a:t>
-            </a:r>
-          </a:p>
-          <a:p>
-            <a:r>
-              <a:t>CARE: do not present reflection as a substitute for mechanical controls — the next two slides are about exactly the lessons that should NOT depend on anyone's memory.</a:t>
-            </a:r>
-          </a:p>
-          <a:p>
-            <a:r>
-              <a:t>ASK: what will an experienced engineer notice next time?</a:t>
-            </a:r>
-          </a:p>
-          <a:p>
-            <a:r>
-              <a:t>EXPECTED ANSWERS: 'check array bounds' (too narrow — that is the instance); 'distrust config changes' (too broad — paralyzing). The calibrated answer: treat content consumed by privileged code as code, with the same skepticism.</a:t>
-            </a:r>
-          </a:p>
-          <a:p>
-            <a:r>
-              <a:t>TRANSITION: reflection lives in a person. People leave, and agents arrive without the organization's history. Where does the lesson live then?</a:t>
-            </a:r>
-          </a:p>
-          <a:p>
-            <a:r>
-              <a:t>EXPOSITION ORDER (author, revised 261015): walk the chain, then land the distinction with the Schön line beneath the diagram — experience accumulates by itself; expertise does not. Reflection is the deliberate comparison of expectation with outcome, and that comparison, not the hours, feeds the repertoire. (The duplicate opening sentence above the diagram was removed: one statement of the point, stated once.)</a:t>
-            </a:r>
-          </a:p>
-          <a:p/>
-          <a:p>
-            <a:r>
-              <a:t>PROGRESSION: 21 asked what lesson the evidence justifies. This slide asks HOW THAT LESSON CHANGES THE ENGINEER.</a:t>
+              <a:t>TIMING: 2 minutes. CLOSES THE UNIT AND ACT II. No new framework on this slide.</a:t>
+            </a:r>
+          </a:p>
+          <a:p>
+            <a:r>
+              <a:t>ENGINEERING POINT: engineering operates under incomplete knowledge; failures expose discrepancies between what engineers believed and what the system did. A causal explanation determines what lessons the evidence supports. Then two distinct outcomes: REFLECTION changes the engineer — recognition and judgment applied to future situations; ENGINEERING STRUCTURE changes the environment — an invariant, architectural constraint, validator, or release gate preserves the lesson for future work, including work done by agents that never saw the incident. The engineer decides which lessons deserve durable representation and which interventions the evidence justifies.</a:t>
+            </a:r>
+          </a:p>
+          <a:p>
+            <a:r>
+              <a:t>ACT II CLOSE: Delegation determined what work and authority to grant. Modeling made consequential knowledge explicit. Alignment connected obligations to mechanisms that govern work. Failure-aware engineering uses observed consequences to TEST and REVISE those decisions — the loop closes.</a:t>
+            </a:r>
+          </a:p>
+          <a:p>
+            <a:r>
+              <a:t>ASK (the closing question, and leave it standing): what will be different when the next engineer or agent acts?</a:t>
+            </a:r>
+          </a:p>
+          <a:p>
+            <a:r>
+              <a:t>EXPECTED ANSWERS: let several stand without adjudicating — the point is that 'nothing would be different' is the only wrong answer.</a:t>
+            </a:r>
+          </a:p>
+          <a:p>
+            <a:r>
+              <a:t>CARE: do not add a second aphorism beneath the question. End here.</a:t>
+            </a:r>
+          </a:p>
+          <a:p>
+            <a:r>
+              <a:t>TRANSITION: none — this is the end of the unit.</a:t>
             </a:r>
           </a:p>
         </p:txBody>
@@ -3561,7 +3556,7 @@
             <a:spLocks noGrp="1"/>
           </p:cNvSpPr>
           <p:nvPr>
-            <p:ph type="sldNum" idx="5" sz="quarter"/>
+            <p:ph type="sldNum" sz="quarter" idx="5"/>
           </p:nvPr>
         </p:nvSpPr>
         <p:spPr/>
@@ -3574,8 +3569,8 @@
 </p:notes>
 </file>
 
-<file path=ppt/notesSlides/notesSlide55.xml><?xml version="1.0" encoding="utf-8"?>
-<p:notes xmlns:a="http://schemas.openxmlformats.org/drawingml/2006/main" xmlns:p="http://schemas.openxmlformats.org/presentationml/2006/main" xmlns:r="http://schemas.openxmlformats.org/officeDocument/2006/relationships">
+<file path=ppt/notesSlides/notesSlide4.xml><?xml version="1.0" encoding="utf-8"?>
+<p:notes xmlns:a="http://schemas.openxmlformats.org/drawingml/2006/main" xmlns:r="http://schemas.openxmlformats.org/officeDocument/2006/relationships" xmlns:p="http://schemas.openxmlformats.org/presentationml/2006/main">
   <p:cSld>
     <p:spTree>
       <p:nvGrpSpPr>
@@ -3595,7 +3590,7 @@
         <p:nvSpPr>
           <p:cNvPr id="2" name="Slide Image Placeholder 1"/>
           <p:cNvSpPr>
-            <a:spLocks noGrp="1"/>
+            <a:spLocks noGrp="1" noRot="1" noChangeAspect="1"/>
           </p:cNvSpPr>
           <p:nvPr>
             <p:ph type="sldImg" idx="2"/>
@@ -3610,7 +3605,7 @@
             <a:spLocks noGrp="1"/>
           </p:cNvSpPr>
           <p:nvPr>
-            <p:ph type="body" idx="3" sz="quarter"/>
+            <p:ph type="body" sz="quarter" idx="3"/>
           </p:nvPr>
         </p:nvSpPr>
         <p:spPr/>
@@ -3619,48 +3614,57 @@
           <a:lstStyle/>
           <a:p>
             <a:r>
-              <a:t>TIMING: 2 minutes. GOVERNANCE CONVERSION — the lesson changes the ENVIRONMENT. (Reallocated +1 minute, author revision 261015: this slide introduces five diagnostic categories and maps them to four earlier course units — do not rush the walk.)</a:t>
-            </a:r>
-          </a:p>
-          <a:p>
-            <a:r>
-              <a:t>ENGINEERING POINT: organizations cannot rely on every future contributor remembering every incident — and the problem sharpens when work is delegated to agents, which may have substantial implementation capability and no knowledge of the organization's incident history. The five left-hand categories are DIAGNOSTIC QUESTIONS, not five mandatory steps: a failure may expose an obligation nobody articulated, an obligation known but not represented, missing evidence, evidence evaluated against the wrong criterion, or a correct evaluation that nothing enforced.</a:t>
-            </a:r>
-          </a:p>
-          <a:p>
-            <a:r>
-              <a:t>FACTUAL CARE: do NOT claim CrowdStrike lacked all five. Some controls existed and proved inadequate — the Content Validator RAN (against the wrong contract, RCA finding 4). A control that was ABSENT and one that ran against the WRONG OBLIGATION call for different responses: build the missing control versus re-point the existing one. The right-hand column is a proposed engineering response, not a description of CrowdStrike's actual remediation.</a:t>
-            </a:r>
-          </a:p>
-          <a:p>
-            <a:r>
-              <a:t>PACING (author): the cover-the-right-column reveal stays CUT — the FMEA exercise two slides ahead carries this movement's active learning. Spend the restored second minute on the five-row walk and the unit mapping, and state the slide-9 contrast yourself.</a:t>
-            </a:r>
-          </a:p>
-          <a:p>
-            <a:r>
-              <a:t>ASK: for THIS incident, which diagnosis fits best? (Evaluation: a validator existed and evaluated the wrong contract — plus two absent constraints.)</a:t>
-            </a:r>
-          </a:p>
-          <a:p>
-            <a:r>
-              <a:t>EXPECTED ANSWERS AND MISCONCEPTION: 'add more gates.' The footer is the rule: a failure is not a request for another gate — absent and inadequate controls call for different responses. Diagnose which category the chain broke at, then encode it; the on-slide line says it: not every failure requires all five.</a:t>
-            </a:r>
-          </a:p>
-          <a:p>
-            <a:r>
-              <a:t>TRANSITION: encoding is not the end of the decision. Different lessons land at different ALTITUDES — and need different authorities.</a:t>
-            </a:r>
-          </a:p>
-          <a:p>
-            <a:r>
-              <a:t>SEQUENCE, NOT TAXONOMY (author): walk the five rows as CONNECTED DECISIONS, each depending on the previous — what obligation was violated? → how should it be REPRESENTED so it can be reasoned about? → what EVIDENCE establishes compliance with it? → how is that evidence EVALUATED? → what ENFORCES that an unacceptable change cannot proceed? The arrows down the left column carry the dependency. Map each to the unit where students met it (the bottom line): obligations in Requirements, representation in Modeling, evidence and evaluation in Validation, enforcement in Alignment. The diagnosis question is where the CHAIN first broke, and the encoding belongs at that link.</a:t>
-            </a:r>
-          </a:p>
-          <a:p/>
-          <a:p>
-            <a:r>
-              <a:t>PROGRESSION: 22 changed the engineer. This slide asks HOW THE LESSON CHANGES THE ENGINEERING ENVIRONMENT.</a:t>
+              <a:t>TIMING: 4 minutes. THE TECHNICAL CORE.</a:t>
+            </a:r>
+          </a:p>
+          <a:p>
+            <a:r>
+              <a:t>ENGINEERING POINT: this is a producer/consumer specification mismatch, the exact failure class from the Specification and Design units. A contract about the shape of information crossing an interface was held in two places and they differed.</a:t>
+            </a:r>
+          </a:p>
+          <a:p>
+            <a:r>
+              <a:t>BACKGROUND (RCA, 6 Aug 2024): 'The new IPC Template Type defined 21 input parameter fields, but the integration code that invoked the Content Interpreter supplied only 20 input values.' The mismatch stayed latent because testing and early instances used WILDCARD matching on the 21st input, so field 21 was never actually read. A later instance used a NON-WILDCARD criterion on the 21st input; the Content Interpreter read the 21st entry of a 20-entry array — an out-of-bounds read — and the sensor crashed. The RCA's own summary: 'a runtime array bounds check was missing for Content Interpreter input fields on Channel File 291.'</a:t>
+            </a:r>
+          </a:p>
+          <a:p>
+            <a:r>
+              <a:t>ASK: whose assumption was wrong — the validator's or the interpreter's?</a:t>
+            </a:r>
+          </a:p>
+          <a:p>
+            <a:r>
+              <a:t>EXPECTED ANSWERS / MISCONCEPTIONS: the productive answer is NEITHER, alone. The Content Validator was correct about the Template Type; the Content Interpreter was correct about its own integration code. The defect is the DISAGREEMENT, and no single component's local reasoning was faulty. Students who want to name a guilty component are already doing component-level analysis — which is the next slide, and its limit.</a:t>
+            </a:r>
+          </a:p>
+          <a:p>
+            <a:r>
+              <a:t>ALSO WORTH NAMING: the wildcard masking is a latent condition in Reason's precise sense — a dormant mismatch awaiting a triggering input. Plant it here; collect it in Movement 2.</a:t>
+            </a:r>
+          </a:p>
+          <a:p>
+            <a:r>
+              <a:t>TRANSITION: that is a complete account of how one machine crashed.</a:t>
+            </a:r>
+          </a:p>
+          <a:p>
+            <a:r>
+              <a:t>SOURCES: CrowdStrike RCA, 6 Aug 2024, for every number on this slide.</a:t>
+            </a:r>
+          </a:p>
+          <a:p>
+            <a:r>
+              <a:t>PACING (author): do not over-dwell on the technical mechanism — students need the INTERFACE MISMATCH, not the full Falcon content-processing architecture. Keep the walk-through under two minutes of the five.</a:t>
+            </a:r>
+          </a:p>
+          <a:p>
+            <a:r>
+              <a:t>TERMINOLOGY (stays in notes, off the slide): the Template Type defines the 21 fields; Template Instances are the content built against it; the Content Validator checked instances against the Template Type's 21 fields; the Content Interpreter consumed the integration code's 20-entry input array and, directed by the first non-wildcard 21st matching criterion, attempted the [20] access.</a:t>
+            </a:r>
+          </a:p>
+          <a:p>
+            <a:r>
+              <a:t>EXPOSITION ORDER (author): read the bridge sentence FIRST, verbatim — templates are the interface between detection content and the interpreter; each template specifies the input fields the interpreter expects. Only then walk the diagram; it is now intelligible without inference. Keep the concrete indices [0 … 19] and [20] — they are what makes the failure technically understandable.</a:t>
             </a:r>
           </a:p>
         </p:txBody>
@@ -3672,7 +3676,7 @@
             <a:spLocks noGrp="1"/>
           </p:cNvSpPr>
           <p:nvPr>
-            <p:ph type="sldNum" idx="5" sz="quarter"/>
+            <p:ph type="sldNum" sz="quarter" idx="5"/>
           </p:nvPr>
         </p:nvSpPr>
         <p:spPr/>
@@ -3685,8 +3689,8 @@
 </p:notes>
 </file>
 
-<file path=ppt/notesSlides/notesSlide56.xml><?xml version="1.0" encoding="utf-8"?>
-<p:notes xmlns:a="http://schemas.openxmlformats.org/drawingml/2006/main" xmlns:p="http://schemas.openxmlformats.org/presentationml/2006/main" xmlns:r="http://schemas.openxmlformats.org/officeDocument/2006/relationships">
+<file path=ppt/notesSlides/notesSlide5.xml><?xml version="1.0" encoding="utf-8"?>
+<p:notes xmlns:a="http://schemas.openxmlformats.org/drawingml/2006/main" xmlns:r="http://schemas.openxmlformats.org/officeDocument/2006/relationships" xmlns:p="http://schemas.openxmlformats.org/presentationml/2006/main">
   <p:cSld>
     <p:spTree>
       <p:nvGrpSpPr>
@@ -3706,7 +3710,7 @@
         <p:nvSpPr>
           <p:cNvPr id="2" name="Slide Image Placeholder 1"/>
           <p:cNvSpPr>
-            <a:spLocks noGrp="1"/>
+            <a:spLocks noGrp="1" noRot="1" noChangeAspect="1"/>
           </p:cNvSpPr>
           <p:nvPr>
             <p:ph type="sldImg" idx="2"/>
@@ -3721,7 +3725,7 @@
             <a:spLocks noGrp="1"/>
           </p:cNvSpPr>
           <p:nvPr>
-            <p:ph type="body" idx="3" sz="quarter"/>
+            <p:ph type="body" sz="quarter" idx="3"/>
           </p:nvPr>
         </p:nvSpPr>
         <p:spPr/>
@@ -3730,38 +3734,52 @@
           <a:lstStyle/>
           <a:p>
             <a:r>
-              <a:t>TIMING: 2 minutes. THE LOCAL AND SYSTEMIC ANALYSES MEET. Pose the footer question and take one or two answers before stating the recognition yourself — students must reason about organizational authority, which needs a beat (author reallocation 261015).</a:t>
-            </a:r>
-          </a:p>
-          <a:p>
-            <a:r>
-              <a:t>ENGINEERING POINT: the same incident justifies interventions at several levels, and each lesson's destination follows from the property it preserves and the AUTHORITY required to enforce it. A vendor can improve its contracts, validators, and release controls. An enterprise can invest in isolation, staged deployment where supported, and continuity arrangements. A sector authority may be able to impose resilience obligations across organizations — where its mandate permits (do not imply every sector has one).</a:t>
-            </a:r>
-          </a:p>
-          <a:p>
-            <a:r>
-              <a:t>ASK (the footer question): if a hospital must continue delivering essential services when its endpoint security software fails — whose requirement is that?</a:t>
-            </a:r>
-          </a:p>
-          <a:p>
-            <a:r>
-              <a:t>EXPECTED ANSWERS: 'CrowdStrike's.' The recognition to produce: the hospital or health system bears responsibility for its own service continuity, while vendors, platform providers, and potentially regulators control parts of the environment that continuity depends on. Responsibilities must be allocated across the machine AND its environment — this is the Requirements and Specification units, closed into a loop.</a:t>
-            </a:r>
-          </a:p>
-          <a:p>
-            <a:r>
-              <a:t>MISCONCEPTION: reading the authority column as blame assignment. It is a statement about who CAN act, not who is at fault.</a:t>
-            </a:r>
-          </a:p>
-          <a:p>
-            <a:r>
-              <a:t>TRANSITION: we now have interventions and owners. One question left, and it is the Validation unit's question: how would we know any of this worked?</a:t>
-            </a:r>
-          </a:p>
-          <a:p/>
-          <a:p>
-            <a:r>
-              <a:t>PROGRESSION: 23 chose the structure. This slide asks WHO CAN ACTUALLY MAKE THAT CHANGE.</a:t>
+              <a:t>TIMING: 1 minutes. FIRST OF THREE CAUSAL BOUNDARIES. DELIVER EFFICIENTLY (author reallocation 261015): reduce exposition — state the boundary, the model, and the intervention, then move; slide 6's 4-minute commitment discussion is protected and untouched.</a:t>
+            </a:r>
+          </a:p>
+          <a:p>
+            <a:r>
+              <a:t>ENGINEERING POINT: a component-level account traces a chain of events to a component that behaved outside its contract. It is the narrowest useful boundary, and for many defects it is the RIGHT one.</a:t>
+            </a:r>
+          </a:p>
+          <a:p>
+            <a:r>
+              <a:t>SAY IT PLAINLY: this is 'component-level', not 'human error'. The distinction matters because 'human error' already smuggles in an explanation — that someone blundered. Component-level analysis fixes the BOUNDARY of the account without prejudging why the component failed. Human error remains one possible explanation within it, alongside incorrect assumptions, design defects and implementation errors.</a:t>
+            </a:r>
+          </a:p>
+          <a:p>
+            <a:r>
+              <a:t>DO NOT: suggest any individual was negligent. The RCA identifies no such person, and the lecture's argument does not need one.</a:t>
+            </a:r>
+          </a:p>
+          <a:p>
+            <a:r>
+              <a:t>ATTRIBUTION CARE: do not credit component-level analysis to Reason or Leveson. Leveson discusses chain-of-events and component-failure models largely to explain their limits and motivate systems-theoretic analysis; she does not advocate them.</a:t>
+            </a:r>
+          </a:p>
+          <a:p>
+            <a:r>
+              <a:t>ASK: what caused the component to fail, and what would repair it?</a:t>
+            </a:r>
+          </a:p>
+          <a:p>
+            <a:r>
+              <a:t>EXPECTED ANSWERS: add the bounds check. Correct — and CrowdStrike did exactly that. Then ask whether that would have prevented THIS outage reaching 8.5 million machines. It would have prevented the crash; it would not have prevented a different bad content instance shipping the same way.</a:t>
+            </a:r>
+          </a:p>
+          <a:p>
+            <a:r>
+              <a:t>TRANSITION: we have explained how the endpoint crashed. We have not explained why an update capable of causing that crash reached production.</a:t>
+            </a:r>
+          </a:p>
+          <a:p>
+            <a:r>
+              <a:t>SOURCES: CrowdStrike RCA, 6 Aug 2024 (the bounds-check mitigation, backported to Windows sensor 7.11 and later).</a:t>
+            </a:r>
+          </a:p>
+          <a:p>
+            <a:r>
+              <a:t>CORRECTION FOLDED IN: the first node reads 'incompatible content + interpreter', not 'defective content'. This was not a malformed file breaking an otherwise-correct interpreter — it was incompatible assumptions across the template definition, the integration code, the validator, and the interpreter. 'Repair the defect' therefore means repairing the incompatibility, not one content artifact; a content-only fix would leave the same mismatch armed for the next instance.</a:t>
             </a:r>
           </a:p>
         </p:txBody>
@@ -3773,7 +3791,7 @@
             <a:spLocks noGrp="1"/>
           </p:cNvSpPr>
           <p:nvPr>
-            <p:ph type="sldNum" idx="5" sz="quarter"/>
+            <p:ph type="sldNum" sz="quarter" idx="5"/>
           </p:nvPr>
         </p:nvSpPr>
         <p:spPr/>
@@ -3786,8 +3804,8 @@
 </p:notes>
 </file>
 
-<file path=ppt/notesSlides/notesSlide57.xml><?xml version="1.0" encoding="utf-8"?>
-<p:notes xmlns:a="http://schemas.openxmlformats.org/drawingml/2006/main" xmlns:p="http://schemas.openxmlformats.org/presentationml/2006/main" xmlns:r="http://schemas.openxmlformats.org/officeDocument/2006/relationships">
+<file path=ppt/notesSlides/notesSlide6.xml><?xml version="1.0" encoding="utf-8"?>
+<p:notes xmlns:a="http://schemas.openxmlformats.org/drawingml/2006/main" xmlns:r="http://schemas.openxmlformats.org/officeDocument/2006/relationships" xmlns:p="http://schemas.openxmlformats.org/presentationml/2006/main">
   <p:cSld>
     <p:spTree>
       <p:nvGrpSpPr>
@@ -3807,7 +3825,7 @@
         <p:nvSpPr>
           <p:cNvPr id="2" name="Slide Image Placeholder 1"/>
           <p:cNvSpPr>
-            <a:spLocks noGrp="1"/>
+            <a:spLocks noGrp="1" noRot="1" noChangeAspect="1"/>
           </p:cNvSpPr>
           <p:nvPr>
             <p:ph type="sldImg" idx="2"/>
@@ -3822,7 +3840,7 @@
             <a:spLocks noGrp="1"/>
           </p:cNvSpPr>
           <p:nvPr>
-            <p:ph type="body" idx="3" sz="quarter"/>
+            <p:ph type="body" sz="quarter" idx="3"/>
           </p:nvPr>
         </p:nvSpPr>
         <p:spPr/>
@@ -3831,38 +3849,37 @@
           <a:lstStyle/>
           <a:p>
             <a:r>
-              <a:t>TIMING: 2 minutes. CLOSES THE CROWDSTRIKE INVESTIGATION. Walk the rows with enough time for students to weigh what each evidence row establishes (author reallocation 261015) — the next slide re-invokes this slide's lesson (a control's existence is not evidence of its effectiveness) inside the FMEA's staged-rollout row.</a:t>
-            </a:r>
-          </a:p>
-          <a:p>
-            <a:r>
-              <a:t>ENGINEERING POINT: a corrective action is a HYPOTHESIS about how the system will behave differently. Do not equate the existence of a control with evidence of its effectiveness. For each intervention, identify the property it is expected to establish and the evidence that would support it — property, evidence mechanism, judgment: the Validation unit's distinction, applied retrospectively.</a:t>
-            </a:r>
-          </a:p>
-          <a:p>
-            <a:r>
-              <a:t>ROW-BY-ROW CARE (each evidence row matches ITS intervention): a compatibility validator should reject malformed content violating the interpreter's contract — so the evidence is behavior over invalid and boundary input classes, not a demo on valid content. Progressive deployment should limit exposure before detection and permit a stop — so the evidence is rollout limits, detection latency, telemetry, and a DEMONSTRATED ability to halt distribution (a fault-injection exercise may contribute, but it is not the property being established). Continuity arrangements must be EXERCISED under realistic endpoint failures. Independent critical paths need dependency analysis of the actual alternatives — common-cause analysis reveals dependency structure; it does not by itself demonstrate that services will stay available, hence the continuity test.</a:t>
-            </a:r>
-          </a:p>
-          <a:p>
-            <a:r>
-              <a:t>ASK: what uncertainty remains after all four?</a:t>
-            </a:r>
-          </a:p>
-          <a:p>
-            <a:r>
-              <a:t>EXPECTED ANSWERS: 'none.' Correct answer: the next failure class nobody has imagined — which is why containment and recovery stay in the portfolio.</a:t>
-            </a:r>
-          </a:p>
-          <a:p>
-            <a:r>
-              <a:t>TRANSITION: everything so far reasons BACKWARD from a failure that already happened. Can the discipline run FORWARD — before any failure occurs? Next: a structured method for searching for failures in advance, tried first on the incident we now know thoroughly.</a:t>
-            </a:r>
-          </a:p>
-          <a:p/>
-          <a:p>
-            <a:r>
-              <a:t>PROGRESSION: 24 found the authority. This slide asks HOW WE WILL KNOW THE CHANGE WORKED. Do not re-run slide 11's argument — point back to it.</a:t>
+              <a:t>TIMING: 4 minutes — PROTECT 3 of them for the discussion (author pacing note). MAKE THEM COMMIT BEFORE THEY KNOW MORE.</a:t>
+            </a:r>
+          </a:p>
+          <a:p>
+            <a:r>
+              <a:t>ENGINEERING POINT: force a choice now, on purpose, with incomplete information. The point is not which option is 'right' — it is that each addresses a different failure class, and the evidence so far cannot distinguish them.</a:t>
+            </a:r>
+          </a:p>
+          <a:p>
+            <a:r>
+              <a:t>ASK: hands for A, B, or C. Then ask each group what failure their choice prevents NEXT time.</a:t>
+            </a:r>
+          </a:p>
+          <a:p>
+            <a:r>
+              <a:t>EXPECTED ANSWERS: A fixes one file. B fixes one code path — and is what the RCA's bounds-check mitigation does. C is the only one that addresses how the content reached production, and it is also the vaguest; press for what specifically would change.</a:t>
+            </a:r>
+          </a:p>
+          <a:p>
+            <a:r>
+              <a:t>THE DISTINCTION TO SURFACE: fixing the observed instance versus preventing the class. Students reliably pick the narrowest fix that explains the observation.</a:t>
+            </a:r>
+          </a:p>
+          <a:p>
+            <a:r>
+              <a:t>TRANSITION (say this verbatim): the defect explains why a machine crashed. It does not explain why the engineering system allowed the update to reach millions of machines.</a:t>
+            </a:r>
+          </a:p>
+          <a:p>
+            <a:r>
+              <a:t>SOURCES: none required; this is a discussion slide.</a:t>
             </a:r>
           </a:p>
         </p:txBody>
@@ -3874,7 +3891,7 @@
             <a:spLocks noGrp="1"/>
           </p:cNvSpPr>
           <p:nvPr>
-            <p:ph type="sldNum" idx="5" sz="quarter"/>
+            <p:ph type="sldNum" sz="quarter" idx="5"/>
           </p:nvPr>
         </p:nvSpPr>
         <p:spPr/>
@@ -3887,8 +3904,8 @@
 </p:notes>
 </file>
 
-<file path=ppt/notesSlides/notesSlide58.xml><?xml version="1.0" encoding="utf-8"?>
-<p:notes xmlns:a="http://schemas.openxmlformats.org/drawingml/2006/main" xmlns:p="http://schemas.openxmlformats.org/presentationml/2006/main" xmlns:r="http://schemas.openxmlformats.org/officeDocument/2006/relationships">
+<file path=ppt/notesSlides/notesSlide7.xml><?xml version="1.0" encoding="utf-8"?>
+<p:notes xmlns:a="http://schemas.openxmlformats.org/drawingml/2006/main" xmlns:r="http://schemas.openxmlformats.org/officeDocument/2006/relationships" xmlns:p="http://schemas.openxmlformats.org/presentationml/2006/main">
   <p:cSld>
     <p:spTree>
       <p:nvGrpSpPr>
@@ -3908,7 +3925,7 @@
         <p:nvSpPr>
           <p:cNvPr id="2" name="Slide Image Placeholder 1"/>
           <p:cNvSpPr>
-            <a:spLocks noGrp="1"/>
+            <a:spLocks noGrp="1" noRot="1" noChangeAspect="1"/>
           </p:cNvSpPr>
           <p:nvPr>
             <p:ph type="sldImg" idx="2"/>
@@ -3923,7 +3940,7 @@
             <a:spLocks noGrp="1"/>
           </p:cNvSpPr>
           <p:nvPr>
-            <p:ph type="body" idx="3" sz="quarter"/>
+            <p:ph type="body" sz="quarter" idx="3"/>
           </p:nvPr>
         </p:nvSpPr>
         <p:spPr/>
@@ -3932,52 +3949,42 @@
           <a:lstStyle/>
           <a:p>
             <a:r>
-              <a:t>TIMING: 3 minutes — the reveal. Grade the class's FMEA predictions against the incident.</a:t>
-            </a:r>
-          </a:p>
-          <a:p>
-            <a:r>
-              <a:t>ENGINEERING POINT: compare prediction with reality, and name the gap honestly. Most groups will have proposed a resource-exhaustion or bad-rule failure mode, a service-disruption effect, and controls such as pre-deployment resource limits or a staged rollout — without knowing anything about 2019. Nobody should be expected to have named catastrophic regex backtracking: FMEA surfaces the GENERAL failure mode; it does not predict the specific defect. In hindsight every failure looks foreseeable; in practice engineers work under incomplete information.</a:t>
-            </a:r>
-          </a:p>
-          <a:p>
-            <a:r>
-              <a:t>EXPOSITION ORDER (author): the class met only the architecture on the previous slide, so establish the rest of the system briefly, then the failure — MECHANISM before measurements: some regular expressions require disproportionately more matching work as the input grows, because a backtracking engine re-tries overlapping ways to match. The 23-vs-555 bars at the bottom ILLUSTRATE that mechanism; they do not replace the explanation.</a:t>
-            </a:r>
-          </a:p>
-          <a:p>
-            <a:r>
-              <a:t>TRIGGER AND AMPLIFIER (now labelled on the slide): the pathological regex is the TRIGGER — it exhausts CPU; global deployment without staged containment is the AMPLIFIER — it set the blast radius. Both are needed to explain the incident's scale, and the pairing is the CrowdStrike parallel: there the content defect was the trigger and unstaged Rapid Response Content distribution the amplifier.</a:t>
-            </a:r>
-          </a:p>
-          <a:p>
-            <a:r>
-              <a:t>WHAT THE STEP COUNTS MEASURE (author): the counts are the number of candidate matching paths the engine explores before it can conclude — the work of backtracking — not merely a reflection of a longer input. And present 23-vs-555 as an ILLUSTRATION of the phenomenon, not a proof of exponential complexity: two measurements cannot establish an asymptotic growth rate.</a:t>
-            </a:r>
-          </a:p>
-          <a:p>
-            <a:r>
-              <a:t>FACTS (Cloudflare post-mortem, 'Details of the Cloudflare outage on July 2, 2019'): a WAF Managed Rule targeting XSS deployed globally at 13:42 UTC — in seconds, with no staged rollout, while software releases went DOG → PIG → Canary; the sub-pattern .*(?:.*=.*) caused catastrophic backtracking (their worked numbers: 'x=x' took 23 steps; 'x=' plus twenty 'x's took 555); PCRE 'has no mechanism to protect against a runaway expression'; WAF identified 14:00, killed globally 14:07, traffic normal 14:09, re-enabled 14:52 — 27 minutes of impact. A CPU-usage protection had been accidentally removed weeks earlier.</a:t>
-            </a:r>
-          </a:p>
-          <a:p>
-            <a:r>
-              <a:t>ASK (the footer's first line): which failure modes did we anticipate — and which did we miss? Typically anticipated: a defective rule, global distribution, nothing to halt it. Typically missed: the removed CPU protection, and a test suite that measured runtime rather than CPU — defenses that existed and failed, which the diagnosis exercise next can surface.</a:t>
-            </a:r>
-          </a:p>
-          <a:p>
-            <a:r>
-              <a:t>DEEP STRUCTURE (the footer's second line — let students state it before you do): in both incidents, a security configuration update is distributed globally without adequate opportunities to detect and contain defective updates; and in both, a validator ran and passed while checking the wrong property — arity against the wrong contract at CrowdStrike, runtime instead of CPU at Cloudflare. An engineer could identify that characteristic prospectively in either system — which is what the previous two slides had students do.</a:t>
-            </a:r>
-          </a:p>
-          <a:p>
-            <a:r>
-              <a:t>CARE: regex matching cost depends on expression, engine, AND input — do not imply all engines behave this way (re2 and Rust's engine carry runtime guarantees). Do not conflate with Cloudflare's November 2025 outage — different mechanism.</a:t>
-            </a:r>
-          </a:p>
-          <a:p>
-            <a:r>
-              <a:t>TRANSITION: your turn — diagnose it with the three models.</a:t>
+              <a:t>TIMING: 3 minutes. OPENS MOVEMENT 2 — why didn't we catch it?</a:t>
+            </a:r>
+          </a:p>
+          <a:p>
+            <a:r>
+              <a:t>ENGINEERING POINT: the release process is itself an engineering system. The defect's path to production ran through named stages, and each stage is a place an intervention could live.</a:t>
+            </a:r>
+          </a:p>
+          <a:p>
+            <a:r>
+              <a:t>FACTS (CrowdStrike RCA, 6 Aug 2024): the new IPC Template Type defined 21 input parameter fields while the integration code that invoked the Content Interpreter supplied only 20. The mismatch 'evaded multiple layers of build validation and testing' — testing and the initial Template Instances used wildcard matching on the 21st input, so field 21 was never read. The Content Validator accepted the instances. Template Instances deployed to all endpoints with no staged rollout. A later instance introduced a non-wildcard matching criterion for the 21st input, and the Content Interpreter read the 21st entry of a 20-entry array.</a:t>
+            </a:r>
+          </a:p>
+          <a:p>
+            <a:r>
+              <a:t>CARE: these stage labels come from the RCA. Do not embellish into a generic CI/CD pipeline, and do not yet say which defenses were ABSENT — that is slide 9's reveal.</a:t>
+            </a:r>
+          </a:p>
+          <a:p>
+            <a:r>
+              <a:t>ASK: which defense should have stopped it?</a:t>
+            </a:r>
+          </a:p>
+          <a:p>
+            <a:r>
+              <a:t>EXPECTED ANSWERS: 'the validator' (most common), 'testing'. Misconception to surface: students assume every named stage existed and merely underperformed. Hold the correction for slide 9.</a:t>
+            </a:r>
+          </a:p>
+          <a:p>
+            <a:r>
+              <a:t>TRANSITION: several defenses in sequence, and the defect passed every one. There is a classic model for exactly this shape.</a:t>
+            </a:r>
+          </a:p>
+          <a:p>
+            <a:r>
+              <a:t>WILDCARD, SPELLED OUT (author): a wildcard matching criterion means 'accept any value here'. When the matching criterion for field 21 is a wildcard, the Content Interpreter never needs to READ field 21 to decide the match — so the missing 21st array entry was never touched, and every wildcard test passed honestly. The mismatch was real the whole time; the tests simply never exercised the read that exposes it. That is what makes it a latent condition rather than a flaky test.</a:t>
             </a:r>
           </a:p>
         </p:txBody>
@@ -3989,7 +3996,7 @@
             <a:spLocks noGrp="1"/>
           </p:cNvSpPr>
           <p:nvPr>
-            <p:ph type="sldNum" idx="5" sz="quarter"/>
+            <p:ph type="sldNum" sz="quarter" idx="5"/>
           </p:nvPr>
         </p:nvSpPr>
         <p:spPr/>
@@ -4002,8 +4009,8 @@
 </p:notes>
 </file>
 
-<file path=ppt/notesSlides/notesSlide59.xml><?xml version="1.0" encoding="utf-8"?>
-<p:notes xmlns:a="http://schemas.openxmlformats.org/drawingml/2006/main" xmlns:p="http://schemas.openxmlformats.org/presentationml/2006/main" xmlns:r="http://schemas.openxmlformats.org/officeDocument/2006/relationships">
+<file path=ppt/notesSlides/notesSlide8.xml><?xml version="1.0" encoding="utf-8"?>
+<p:notes xmlns:a="http://schemas.openxmlformats.org/drawingml/2006/main" xmlns:r="http://schemas.openxmlformats.org/officeDocument/2006/relationships" xmlns:p="http://schemas.openxmlformats.org/presentationml/2006/main">
   <p:cSld>
     <p:spTree>
       <p:nvGrpSpPr>
@@ -4023,7 +4030,7 @@
         <p:nvSpPr>
           <p:cNvPr id="2" name="Slide Image Placeholder 1"/>
           <p:cNvSpPr>
-            <a:spLocks noGrp="1"/>
+            <a:spLocks noGrp="1" noRot="1" noChangeAspect="1"/>
           </p:cNvSpPr>
           <p:nvPr>
             <p:ph type="sldImg" idx="2"/>
@@ -4038,7 +4045,7 @@
             <a:spLocks noGrp="1"/>
           </p:cNvSpPr>
           <p:nvPr>
-            <p:ph type="body" idx="3" sz="quarter"/>
+            <p:ph type="body" sz="quarter" idx="3"/>
           </p:nvPr>
         </p:nvSpPr>
         <p:spPr/>
@@ -4047,37 +4054,47 @@
           <a:lstStyle/>
           <a:p>
             <a:r>
-              <a:t>TIMING: 6 minutes — pairs or small groups (5), then debrief (1). THE EXERCISE.</a:t>
-            </a:r>
-          </a:p>
-          <a:p>
-            <a:r>
-              <a:t>ENGINEERING POINT: students apply the models WITHOUT being led. Each group picks ONE model, proposes an intervention the incident's evidence supports, and answers: what the model preserves, what mechanism it explains, what intervention follows, what evidence would support it, who has authority to implement it.</a:t>
-            </a:r>
-          </a:p>
-          <a:p>
-            <a:r>
-              <a:t>VISIBLE TASK (author revision 261015): 'Choose ONE model' is now in the on-slide instructions — groups attempt one full analysis in the five minutes, not three shallow ones.</a:t>
-            </a:r>
-          </a:p>
-          <a:p>
-            <a:r>
-              <a:t>POSSIBLE ANSWERS (Cloudflare post-mortem, July 2019): COMPONENT-LEVEL — pathological regex under a backtracking engine; reject dangerous complexity, move to an engine with runtime guarantees (Cloudflare's own remediation: re2 or Rust regex), or impose resource bounds. SWISS CHEESE — defenses existed (PR approval, CI/CD, change tickets, SOPs, alerting) and failed in sequence: the test suite measured RUNTIME, not CPU — 'no increase in test suite run time was observed' with the fatal rule; a CPU protection had been accidentally REMOVED weeks earlier; the SOP permitted a non-emergency rule to skip staged rollout. Note the contrast with slide 9: at Cloudflare a defense existed and was removed — a different finding from one never built. STAMP — a constraint like 'a WAF rule update must not consume enough resources to compromise unrelated traffic'; examine rule authors, validation, deployment controllers, monitoring, and what feedback each received.</a:t>
-            </a:r>
-          </a:p>
-          <a:p>
-            <a:r>
-              <a:t>GRADING STANCE: do not reward choosing the broadest model. Reward an intervention justified by the model and the evidence, addressing a consequential failure class at acceptable cost.</a:t>
-            </a:r>
-          </a:p>
-          <a:p>
-            <a:r>
-              <a:t>CLOSING QUESTION (the footer's last line): how should this incident change the FMEA for future WAF releases? Expected: new failure-mode rows (a rule whose matching cost explodes on ordinary input); a detection column that measures CPU, not wall-clock runtime; controls promoted from candidate to required — staged rollout for rules, a regex engine with runtime guarantees, a restored and protected CPU limit. The durable point: an FMEA is a living document — each incident updates the search. That is how failure changes FUTURE engineering, which is the closing slide's claim.</a:t>
-            </a:r>
-          </a:p>
-          <a:p>
-            <a:r>
-              <a:t>TRANSITION: close the unit — and Act II.</a:t>
+              <a:t>TIMING: 2 minutes. SECOND CAUSAL BOUNDARY.</a:t>
+            </a:r>
+          </a:p>
+          <a:p>
+            <a:r>
+              <a:t>ENGINEERING POINT: Reason's Swiss cheese model — an accident can occur when weaknesses in multiple defenses align. The model changes the engineering question from 'which component failed?' to 'what was the condition of the defenses around it?'. We reach for it NOW because slide 7 just showed a defect passing a whole sequence of defenses; the model earns its entrance from the narrative, not from a definitions section.</a:t>
+            </a:r>
+          </a:p>
+          <a:p>
+            <a:r>
+              <a:t>FACTUAL BACKGROUND: the aligned path is real, not schematic — the RCA documents a parameter-count mismatch that 'evaded multiple layers of build validation and testing' (CrowdStrike RCA, 6 Aug 2024). Each slab here is a defense layer; each hole is a weakness; the horizontal line is the trajectory that found a hole in every layer.</a:t>
+            </a:r>
+          </a:p>
+          <a:p>
+            <a:r>
+              <a:t>ATTRIBUTION: James Reason, Human Error (1990) and Managing the Risks of Organizational Accidents (1997). Latent conditions — the wildcard masking that kept field 21 unread — are Reason's term of art, sitting in the system long before the active failure.</a:t>
+            </a:r>
+          </a:p>
+          <a:p>
+            <a:r>
+              <a:t>ASK: why did the defenses fail to stop the defect?</a:t>
+            </a:r>
+          </a:p>
+          <a:p>
+            <a:r>
+              <a:t>EXPECTED ANSWERS: 'they all had holes'. Push: are a hole in a defense that RAN and a defense that was never BUILT the same kind of weakness? That distinction is the next slide.</a:t>
+            </a:r>
+          </a:p>
+          <a:p>
+            <a:r>
+              <a:t>TRANSITION: the model predicts aligned weaknesses. The postmortem tells us what the weaknesses actually were.</a:t>
+            </a:r>
+          </a:p>
+          <a:p>
+            <a:r>
+              <a:t>NAMING + THE DISTINCTIVE CLAIM (author): say the model's NAME — this is Reason's Swiss cheese model — and state its distinctive claim precisely: every defensive layer can contain weaknesses, and a failure escapes only when weaknesses in successive layers ALIGN. The red path through the red-rimmed holes is the alignment; the other holes are weaknesses that this particular trajectory did not exercise. Without the alignment idea a student leaves with defense-in-depth but not Reason's contribution: defenses fail TOGETHER, as a configuration, not merely one at a time.</a:t>
+            </a:r>
+          </a:p>
+          <a:p>
+            <a:r>
+              <a:t>QUALIFICATION (author, notes only — the slide wording stays): 'a failure escapes only when the weaknesses ALIGN' is a simplification. The intended meaning is that weaknesses align across the defenses RELEVANT TO A PARTICULAR FAILURE TRAJECTORY — not that every conceivable defense in the organization must fail. Carry the qualification verbally if a student presses on it.</a:t>
             </a:r>
           </a:p>
         </p:txBody>
@@ -4089,7 +4106,7 @@
             <a:spLocks noGrp="1"/>
           </p:cNvSpPr>
           <p:nvPr>
-            <p:ph type="sldNum" idx="5" sz="quarter"/>
+            <p:ph type="sldNum" sz="quarter" idx="5"/>
           </p:nvPr>
         </p:nvSpPr>
         <p:spPr/>
@@ -4102,8 +4119,8 @@
 </p:notes>
 </file>
 
-<file path=ppt/notesSlides/notesSlide60.xml><?xml version="1.0" encoding="utf-8"?>
-<p:notes xmlns:a="http://schemas.openxmlformats.org/drawingml/2006/main" xmlns:p="http://schemas.openxmlformats.org/presentationml/2006/main" xmlns:r="http://schemas.openxmlformats.org/officeDocument/2006/relationships">
+<file path=ppt/notesSlides/notesSlide9.xml><?xml version="1.0" encoding="utf-8"?>
+<p:notes xmlns:a="http://schemas.openxmlformats.org/drawingml/2006/main" xmlns:r="http://schemas.openxmlformats.org/officeDocument/2006/relationships" xmlns:p="http://schemas.openxmlformats.org/presentationml/2006/main">
   <p:cSld>
     <p:spTree>
       <p:nvGrpSpPr>
@@ -4123,7 +4140,7 @@
         <p:nvSpPr>
           <p:cNvPr id="2" name="Slide Image Placeholder 1"/>
           <p:cNvSpPr>
-            <a:spLocks noGrp="1"/>
+            <a:spLocks noGrp="1" noRot="1" noChangeAspect="1"/>
           </p:cNvSpPr>
           <p:nvPr>
             <p:ph type="sldImg" idx="2"/>
@@ -4138,7 +4155,7 @@
             <a:spLocks noGrp="1"/>
           </p:cNvSpPr>
           <p:nvPr>
-            <p:ph type="body" idx="3" sz="quarter"/>
+            <p:ph type="body" sz="quarter" idx="3"/>
           </p:nvPr>
         </p:nvSpPr>
         <p:spPr/>
@@ -4147,37 +4164,32 @@
           <a:lstStyle/>
           <a:p>
             <a:r>
-              <a:t>TIMING: 2 minutes. CLOSES THE UNIT AND ACT II. No new framework on this slide.</a:t>
-            </a:r>
-          </a:p>
-          <a:p>
-            <a:r>
-              <a:t>ENGINEERING POINT: engineering operates under incomplete knowledge; failures expose discrepancies between what engineers believed and what the system did. A causal explanation determines what lessons the evidence supports. Then two distinct outcomes: REFLECTION changes the engineer — recognition and judgment applied to future situations; ENGINEERING STRUCTURE changes the environment — an invariant, architectural constraint, validator, or release gate preserves the lesson for future work, including work done by agents that never saw the incident. The engineer decides which lessons deserve durable representation and which interventions the evidence justifies.</a:t>
-            </a:r>
-          </a:p>
-          <a:p>
-            <a:r>
-              <a:t>ACT II CLOSE: Delegation determined what work and authority to grant. Modeling made consequential knowledge explicit. Alignment connected obligations to mechanisms that govern work. Failure-aware engineering uses observed consequences to TEST and REVISE those decisions — the loop closes.</a:t>
-            </a:r>
-          </a:p>
-          <a:p>
-            <a:r>
-              <a:t>ASK (the closing question, and leave it standing): what will be different when the next engineer or agent acts?</a:t>
-            </a:r>
-          </a:p>
-          <a:p>
-            <a:r>
-              <a:t>EXPECTED ANSWERS: let several stand without adjudicating — the point is that 'nothing would be different' is the only wrong answer.</a:t>
-            </a:r>
-          </a:p>
-          <a:p>
-            <a:r>
-              <a:t>CARE: do not add a second aphorism beneath the question. End here.</a:t>
-            </a:r>
-          </a:p>
-          <a:p>
-            <a:r>
-              <a:t>TRANSITION: none — this is the end of the unit.</a:t>
+              <a:t>TIMING: 2 minutes. THE EVIDENCE REPLACES THE SCHEMATIC. DELIVER EFFICIENTLY (author reallocation 261015): slide 7 already introduced the evidence — walk the four rows and the absent/failed distinction without re-deriving each finding.</a:t>
+            </a:r>
+          </a:p>
+          <a:p>
+            <a:r>
+              <a:t>ENGINEERING POINT: a defense that was ABSENT is a different finding from a defense that FAILED. The RCA's findings (all quoted or paraphrased from CrowdStrike's RCA, 6 Aug 2024): (1) 'the number of fields in the IPC Template Type was not validated' at sensor compile time — absent; (2) 'a runtime array bounds check was missing for Content Interpreter input fields' — absent; (3) the Content Validator 'contained a logic error' — it ran, but validated against the Template Type's 21 fields rather than the 20 the integration code supplied: the wrong contract; (4) Template Type testing never exercised a non-wildcard matching criterion for field 21 — a coverage gap.</a:t>
+            </a:r>
+          </a:p>
+          <a:p>
+            <a:r>
+              <a:t>WHY THE DISTINCTION MATTERS: 'strengthen the validator' is the wrong fix for a check that never existed, and 'add a check' is the wrong fix for a validator holding the wrong contract. Interventions follow the diagnosis, not the slogan.</a:t>
+            </a:r>
+          </a:p>
+          <a:p>
+            <a:r>
+              <a:t>ASK: for each row — is the fix to repair, to re-point at the right contract, or to build?</a:t>
+            </a:r>
+          </a:p>
+          <a:p>
+            <a:r>
+              <a:t>EXPECTED ANSWERS: students usually say 'fix the validator' for all four. Misconception: treating all four rows as failures of the same kind.</a:t>
+            </a:r>
+          </a:p>
+          <a:p>
+            <a:r>
+              <a:t>TRANSITION: four weaknesses, four candidate interventions — but interventions do different KINDS of work. Let's name those kinds.</a:t>
             </a:r>
           </a:p>
         </p:txBody>
@@ -4189,7 +4201,7 @@
             <a:spLocks noGrp="1"/>
           </p:cNvSpPr>
           <p:nvPr>
-            <p:ph type="sldNum" idx="5" sz="quarter"/>
+            <p:ph type="sldNum" sz="quarter" idx="5"/>
           </p:nvPr>
         </p:nvSpPr>
         <p:spPr/>
@@ -7868,7 +7880,7 @@
 </file>
 
 <file path=ppt/slides/slide10.xml><?xml version="1.0" encoding="utf-8"?>
-<p:sld xmlns:a="http://schemas.openxmlformats.org/drawingml/2006/main" xmlns:p="http://schemas.openxmlformats.org/presentationml/2006/main" xmlns:r="http://schemas.openxmlformats.org/officeDocument/2006/relationships">
+<p:sld xmlns:a="http://schemas.openxmlformats.org/drawingml/2006/main" xmlns:r="http://schemas.openxmlformats.org/officeDocument/2006/relationships" xmlns:p="http://schemas.openxmlformats.org/presentationml/2006/main">
   <p:cSld>
     <p:spTree>
       <p:nvGrpSpPr>
@@ -7876,7 +7888,14 @@
         <p:cNvGrpSpPr/>
         <p:nvPr/>
       </p:nvGrpSpPr>
-      <p:grpSpPr/>
+      <p:grpSpPr>
+        <a:xfrm>
+          <a:off x="0" y="0"/>
+          <a:ext cx="0" cy="0"/>
+          <a:chOff x="0" y="0"/>
+          <a:chExt cx="0" cy="0"/>
+        </a:xfrm>
+      </p:grpSpPr>
       <p:sp>
         <p:nvSpPr>
           <p:cNvPr id="3" name="Title 2"/>
@@ -8552,11 +8571,6 @@
               </a:rPr>
               <a:t>restore affected machines and services after a failure</a:t>
             </a:r>
-            <a:endParaRPr sz="2000" b="1" i="0" dirty="0">
-              <a:solidFill>
-                <a:srgbClr val="555960"/>
-              </a:solidFill>
-            </a:endParaRPr>
           </a:p>
         </p:txBody>
       </p:sp>
@@ -8569,7 +8583,7 @@
 </file>
 
 <file path=ppt/slides/slide11.xml><?xml version="1.0" encoding="utf-8"?>
-<p:sld xmlns:a="http://schemas.openxmlformats.org/drawingml/2006/main" xmlns:p="http://schemas.openxmlformats.org/presentationml/2006/main" xmlns:r="http://schemas.openxmlformats.org/officeDocument/2006/relationships">
+<p:sld xmlns:a="http://schemas.openxmlformats.org/drawingml/2006/main" xmlns:r="http://schemas.openxmlformats.org/officeDocument/2006/relationships" xmlns:p="http://schemas.openxmlformats.org/presentationml/2006/main">
   <p:cSld>
     <p:spTree>
       <p:nvGrpSpPr>
@@ -8577,7 +8591,14 @@
         <p:cNvGrpSpPr/>
         <p:nvPr/>
       </p:nvGrpSpPr>
-      <p:grpSpPr/>
+      <p:grpSpPr>
+        <a:xfrm>
+          <a:off x="0" y="0"/>
+          <a:ext cx="0" cy="0"/>
+          <a:chOff x="0" y="0"/>
+          <a:chExt cx="0" cy="0"/>
+        </a:xfrm>
+      </p:grpSpPr>
       <p:sp>
         <p:nvSpPr>
           <p:cNvPr id="3" name="Title 2"/>
@@ -8628,7 +8649,7 @@
           <a:p>
             <a:fld id="{54DE72B0-FFEB-4C83-B4BD-F25961BEDFCA}" type="slidenum">
               <a:rPr lang="en-US" smtClean="0"/>
-              <a:t>29</a:t>
+              <a:t>11</a:t>
             </a:fld>
             <a:endParaRPr lang="en-US"/>
           </a:p>
@@ -8905,11 +8926,6 @@
               </a:rPr>
               <a:t>Deployment containment</a:t>
             </a:r>
-            <a:endParaRPr sz="2000" b="1" i="0" dirty="0">
-              <a:solidFill>
-                <a:srgbClr val="FFFFFF"/>
-              </a:solidFill>
-            </a:endParaRPr>
           </a:p>
         </p:txBody>
       </p:sp>
@@ -9158,7 +9174,7 @@
 </file>
 
 <file path=ppt/slides/slide12.xml><?xml version="1.0" encoding="utf-8"?>
-<p:sld xmlns:a="http://schemas.openxmlformats.org/drawingml/2006/main" xmlns:p="http://schemas.openxmlformats.org/presentationml/2006/main" xmlns:r="http://schemas.openxmlformats.org/officeDocument/2006/relationships">
+<p:sld xmlns:a="http://schemas.openxmlformats.org/drawingml/2006/main" xmlns:r="http://schemas.openxmlformats.org/officeDocument/2006/relationships" xmlns:p="http://schemas.openxmlformats.org/presentationml/2006/main">
   <p:cSld>
     <p:spTree>
       <p:nvGrpSpPr>
@@ -9166,7 +9182,14 @@
         <p:cNvGrpSpPr/>
         <p:nvPr/>
       </p:nvGrpSpPr>
-      <p:grpSpPr/>
+      <p:grpSpPr>
+        <a:xfrm>
+          <a:off x="0" y="0"/>
+          <a:ext cx="0" cy="0"/>
+          <a:chOff x="0" y="0"/>
+          <a:chExt cx="0" cy="0"/>
+        </a:xfrm>
+      </p:grpSpPr>
       <p:sp>
         <p:nvSpPr>
           <p:cNvPr id="3" name="Title 2"/>
@@ -9212,7 +9235,7 @@
           <a:p>
             <a:fld id="{3DC31DEB-C161-48EB-8EC4-D4D18487B0EB}" type="slidenum">
               <a:rPr lang="en-US" smtClean="0"/>
-              <a:t>23</a:t>
+              <a:t>12</a:t>
             </a:fld>
             <a:endParaRPr lang="en-US"/>
           </a:p>
@@ -9680,7 +9703,7 @@
 </file>
 
 <file path=ppt/slides/slide13.xml><?xml version="1.0" encoding="utf-8"?>
-<p:sld xmlns:a="http://schemas.openxmlformats.org/drawingml/2006/main" xmlns:p="http://schemas.openxmlformats.org/presentationml/2006/main" xmlns:r="http://schemas.openxmlformats.org/officeDocument/2006/relationships">
+<p:sld xmlns:a="http://schemas.openxmlformats.org/drawingml/2006/main" xmlns:r="http://schemas.openxmlformats.org/officeDocument/2006/relationships" xmlns:p="http://schemas.openxmlformats.org/presentationml/2006/main">
   <p:cSld>
     <p:spTree>
       <p:nvGrpSpPr>
@@ -9688,7 +9711,14 @@
         <p:cNvGrpSpPr/>
         <p:nvPr/>
       </p:nvGrpSpPr>
-      <p:grpSpPr/>
+      <p:grpSpPr>
+        <a:xfrm>
+          <a:off x="0" y="0"/>
+          <a:ext cx="0" cy="0"/>
+          <a:chOff x="0" y="0"/>
+          <a:chExt cx="0" cy="0"/>
+        </a:xfrm>
+      </p:grpSpPr>
       <p:sp>
         <p:nvSpPr>
           <p:cNvPr id="3" name="Title 2"/>
@@ -10334,14 +10364,7 @@
           <a:lstStyle/>
           <a:p>
             <a:pPr algn="ctr"/>
-            <a:r>
-              <a:rPr sz="2000" b="1" i="0">
-                <a:solidFill>
-                  <a:srgbClr val="FFFFFF"/>
-                </a:solidFill>
-              </a:rPr>
-              <a:t/>
-            </a:r>
+            <a:endParaRPr/>
           </a:p>
         </p:txBody>
       </p:sp>
@@ -10421,14 +10444,7 @@
           <a:lstStyle/>
           <a:p>
             <a:pPr algn="ctr"/>
-            <a:r>
-              <a:rPr sz="2000" b="1" i="0">
-                <a:solidFill>
-                  <a:srgbClr val="FFFFFF"/>
-                </a:solidFill>
-              </a:rPr>
-              <a:t/>
-            </a:r>
+            <a:endParaRPr/>
           </a:p>
         </p:txBody>
       </p:sp>
@@ -10508,14 +10524,7 @@
           <a:lstStyle/>
           <a:p>
             <a:pPr algn="ctr"/>
-            <a:r>
-              <a:rPr sz="2000" b="1" i="0">
-                <a:solidFill>
-                  <a:srgbClr val="FFFFFF"/>
-                </a:solidFill>
-              </a:rPr>
-              <a:t/>
-            </a:r>
+            <a:endParaRPr/>
           </a:p>
         </p:txBody>
       </p:sp>
@@ -10595,14 +10604,7 @@
           <a:lstStyle/>
           <a:p>
             <a:pPr algn="ctr"/>
-            <a:r>
-              <a:rPr sz="2000" b="1" i="0">
-                <a:solidFill>
-                  <a:srgbClr val="FFFFFF"/>
-                </a:solidFill>
-              </a:rPr>
-              <a:t/>
-            </a:r>
+            <a:endParaRPr/>
           </a:p>
         </p:txBody>
       </p:sp>
@@ -10750,7 +10752,7 @@
 </file>
 
 <file path=ppt/slides/slide14.xml><?xml version="1.0" encoding="utf-8"?>
-<p:sld xmlns:a="http://schemas.openxmlformats.org/drawingml/2006/main" xmlns:p="http://schemas.openxmlformats.org/presentationml/2006/main" xmlns:r="http://schemas.openxmlformats.org/officeDocument/2006/relationships">
+<p:sld xmlns:a="http://schemas.openxmlformats.org/drawingml/2006/main" xmlns:r="http://schemas.openxmlformats.org/officeDocument/2006/relationships" xmlns:p="http://schemas.openxmlformats.org/presentationml/2006/main">
   <p:cSld>
     <p:spTree>
       <p:nvGrpSpPr>
@@ -10758,7 +10760,14 @@
         <p:cNvGrpSpPr/>
         <p:nvPr/>
       </p:nvGrpSpPr>
-      <p:grpSpPr/>
+      <p:grpSpPr>
+        <a:xfrm>
+          <a:off x="0" y="0"/>
+          <a:ext cx="0" cy="0"/>
+          <a:chOff x="0" y="0"/>
+          <a:chExt cx="0" cy="0"/>
+        </a:xfrm>
+      </p:grpSpPr>
       <p:sp>
         <p:nvSpPr>
           <p:cNvPr id="3" name="Title 2"/>
@@ -10804,7 +10813,7 @@
           <a:p>
             <a:fld id="{21CAE056-AEB1-4FA5-BA70-2608DF341BC7}" type="slidenum">
               <a:rPr lang="en-US" smtClean="0"/>
-              <a:t>16</a:t>
+              <a:t>14</a:t>
             </a:fld>
             <a:endParaRPr lang="en-US"/>
           </a:p>
@@ -11249,7 +11258,7 @@
 </file>
 
 <file path=ppt/slides/slide15.xml><?xml version="1.0" encoding="utf-8"?>
-<p:sld xmlns:a="http://schemas.openxmlformats.org/drawingml/2006/main" xmlns:p="http://schemas.openxmlformats.org/presentationml/2006/main" xmlns:r="http://schemas.openxmlformats.org/officeDocument/2006/relationships">
+<p:sld xmlns:a="http://schemas.openxmlformats.org/drawingml/2006/main" xmlns:r="http://schemas.openxmlformats.org/officeDocument/2006/relationships" xmlns:p="http://schemas.openxmlformats.org/presentationml/2006/main">
   <p:cSld>
     <p:spTree>
       <p:nvGrpSpPr>
@@ -11257,7 +11266,14 @@
         <p:cNvGrpSpPr/>
         <p:nvPr/>
       </p:nvGrpSpPr>
-      <p:grpSpPr/>
+      <p:grpSpPr>
+        <a:xfrm>
+          <a:off x="0" y="0"/>
+          <a:ext cx="0" cy="0"/>
+          <a:chOff x="0" y="0"/>
+          <a:chExt cx="0" cy="0"/>
+        </a:xfrm>
+      </p:grpSpPr>
       <p:sp>
         <p:nvSpPr>
           <p:cNvPr id="3" name="Title 2"/>
@@ -11303,7 +11319,7 @@
           <a:p>
             <a:fld id="{21CAE056-AEB1-4FA5-BA70-2608DF341BC7}" type="slidenum">
               <a:rPr lang="en-US" smtClean="0"/>
-              <a:t>16</a:t>
+              <a:t>15</a:t>
             </a:fld>
             <a:endParaRPr lang="en-US"/>
           </a:p>
@@ -11805,7 +11821,7 @@
 </file>
 
 <file path=ppt/slides/slide16.xml><?xml version="1.0" encoding="utf-8"?>
-<p:sld xmlns:a="http://schemas.openxmlformats.org/drawingml/2006/main" xmlns:p="http://schemas.openxmlformats.org/presentationml/2006/main" xmlns:r="http://schemas.openxmlformats.org/officeDocument/2006/relationships">
+<p:sld xmlns:a="http://schemas.openxmlformats.org/drawingml/2006/main" xmlns:r="http://schemas.openxmlformats.org/officeDocument/2006/relationships" xmlns:p="http://schemas.openxmlformats.org/presentationml/2006/main">
   <p:cSld>
     <p:spTree>
       <p:nvGrpSpPr>
@@ -11813,7 +11829,14 @@
         <p:cNvGrpSpPr/>
         <p:nvPr/>
       </p:nvGrpSpPr>
-      <p:grpSpPr/>
+      <p:grpSpPr>
+        <a:xfrm>
+          <a:off x="0" y="0"/>
+          <a:ext cx="0" cy="0"/>
+          <a:chOff x="0" y="0"/>
+          <a:chExt cx="0" cy="0"/>
+        </a:xfrm>
+      </p:grpSpPr>
       <p:sp>
         <p:nvSpPr>
           <p:cNvPr id="3" name="Title 2"/>
@@ -12480,7 +12503,7 @@
 </file>
 
 <file path=ppt/slides/slide17.xml><?xml version="1.0" encoding="utf-8"?>
-<p:sld xmlns:a="http://schemas.openxmlformats.org/drawingml/2006/main" xmlns:p="http://schemas.openxmlformats.org/presentationml/2006/main" xmlns:r="http://schemas.openxmlformats.org/officeDocument/2006/relationships">
+<p:sld xmlns:a="http://schemas.openxmlformats.org/drawingml/2006/main" xmlns:r="http://schemas.openxmlformats.org/officeDocument/2006/relationships" xmlns:p="http://schemas.openxmlformats.org/presentationml/2006/main">
   <p:cSld>
     <p:spTree>
       <p:nvGrpSpPr>
@@ -12488,7 +12511,14 @@
         <p:cNvGrpSpPr/>
         <p:nvPr/>
       </p:nvGrpSpPr>
-      <p:grpSpPr/>
+      <p:grpSpPr>
+        <a:xfrm>
+          <a:off x="0" y="0"/>
+          <a:ext cx="0" cy="0"/>
+          <a:chOff x="0" y="0"/>
+          <a:chExt cx="0" cy="0"/>
+        </a:xfrm>
+      </p:grpSpPr>
       <p:sp>
         <p:nvSpPr>
           <p:cNvPr id="3" name="Title 2"/>
@@ -12534,7 +12564,7 @@
           <a:p>
             <a:fld id="{8D34505B-00B1-4572-8080-1F84ADF8E747}" type="slidenum">
               <a:rPr lang="en-US" smtClean="0"/>
-              <a:t>13</a:t>
+              <a:t>17</a:t>
             </a:fld>
             <a:endParaRPr lang="en-US"/>
           </a:p>
@@ -13096,7 +13126,7 @@
 </file>
 
 <file path=ppt/slides/slide18.xml><?xml version="1.0" encoding="utf-8"?>
-<p:sld xmlns:a="http://schemas.openxmlformats.org/drawingml/2006/main" xmlns:p="http://schemas.openxmlformats.org/presentationml/2006/main" xmlns:r="http://schemas.openxmlformats.org/officeDocument/2006/relationships">
+<p:sld xmlns:a="http://schemas.openxmlformats.org/drawingml/2006/main" xmlns:r="http://schemas.openxmlformats.org/officeDocument/2006/relationships" xmlns:p="http://schemas.openxmlformats.org/presentationml/2006/main">
   <p:cSld>
     <p:spTree>
       <p:nvGrpSpPr>
@@ -13104,7 +13134,14 @@
         <p:cNvGrpSpPr/>
         <p:nvPr/>
       </p:nvGrpSpPr>
-      <p:grpSpPr/>
+      <p:grpSpPr>
+        <a:xfrm>
+          <a:off x="0" y="0"/>
+          <a:ext cx="0" cy="0"/>
+          <a:chOff x="0" y="0"/>
+          <a:chExt cx="0" cy="0"/>
+        </a:xfrm>
+      </p:grpSpPr>
       <p:sp>
         <p:nvSpPr>
           <p:cNvPr id="3" name="Title 2"/>
@@ -13150,7 +13187,7 @@
           <a:p>
             <a:fld id="{6A1DACA4-9A95-4C77-B245-2C307F8CACFD}" type="slidenum">
               <a:rPr lang="en-US" smtClean="0"/>
-              <a:t>28</a:t>
+              <a:t>18</a:t>
             </a:fld>
             <a:endParaRPr lang="en-US"/>
           </a:p>
@@ -13970,7 +14007,7 @@
 </file>
 
 <file path=ppt/slides/slide19.xml><?xml version="1.0" encoding="utf-8"?>
-<p:sld xmlns:a="http://schemas.openxmlformats.org/drawingml/2006/main" xmlns:p="http://schemas.openxmlformats.org/presentationml/2006/main" xmlns:r="http://schemas.openxmlformats.org/officeDocument/2006/relationships">
+<p:sld xmlns:a="http://schemas.openxmlformats.org/drawingml/2006/main" xmlns:r="http://schemas.openxmlformats.org/officeDocument/2006/relationships" xmlns:p="http://schemas.openxmlformats.org/presentationml/2006/main">
   <p:cSld>
     <p:spTree>
       <p:nvGrpSpPr>
@@ -13978,7 +14015,14 @@
         <p:cNvGrpSpPr/>
         <p:nvPr/>
       </p:nvGrpSpPr>
-      <p:grpSpPr/>
+      <p:grpSpPr>
+        <a:xfrm>
+          <a:off x="0" y="0"/>
+          <a:ext cx="0" cy="0"/>
+          <a:chOff x="0" y="0"/>
+          <a:chExt cx="0" cy="0"/>
+        </a:xfrm>
+      </p:grpSpPr>
       <p:sp>
         <p:nvSpPr>
           <p:cNvPr id="3" name="Title 2"/>
@@ -14024,7 +14068,7 @@
           <a:p>
             <a:fld id="{21CAE056-AEB1-4FA5-BA70-2608DF341BC7}" type="slidenum">
               <a:rPr lang="en-US" smtClean="0"/>
-              <a:t>16</a:t>
+              <a:t>19</a:t>
             </a:fld>
             <a:endParaRPr lang="en-US"/>
           </a:p>
@@ -14787,7 +14831,7 @@
 </file>
 
 <file path=ppt/slides/slide2.xml><?xml version="1.0" encoding="utf-8"?>
-<p:sld xmlns:a="http://schemas.openxmlformats.org/drawingml/2006/main" xmlns:p="http://schemas.openxmlformats.org/presentationml/2006/main" xmlns:r="http://schemas.openxmlformats.org/officeDocument/2006/relationships">
+<p:sld xmlns:a="http://schemas.openxmlformats.org/drawingml/2006/main" xmlns:r="http://schemas.openxmlformats.org/officeDocument/2006/relationships" xmlns:p="http://schemas.openxmlformats.org/presentationml/2006/main">
   <p:cSld>
     <p:spTree>
       <p:nvGrpSpPr>
@@ -14795,7 +14839,14 @@
         <p:cNvGrpSpPr/>
         <p:nvPr/>
       </p:nvGrpSpPr>
-      <p:grpSpPr/>
+      <p:grpSpPr>
+        <a:xfrm>
+          <a:off x="0" y="0"/>
+          <a:ext cx="0" cy="0"/>
+          <a:chOff x="0" y="0"/>
+          <a:chExt cx="0" cy="0"/>
+        </a:xfrm>
+      </p:grpSpPr>
       <p:sp>
         <p:nvSpPr>
           <p:cNvPr id="3" name="Title 2"/>
@@ -14841,7 +14892,7 @@
           <a:p>
             <a:fld id="{8CF8A65D-8523-4C39-BD83-5C787F1FA9B3}" type="slidenum">
               <a:rPr lang="en-US" smtClean="0"/>
-              <a:t>10</a:t>
+              <a:t>2</a:t>
             </a:fld>
             <a:endParaRPr lang="en-US"/>
           </a:p>
@@ -14904,13 +14955,42 @@
               </a:spcBef>
             </a:pPr>
             <a:r>
+              <a:rPr lang="en-US" sz="2000" b="1" i="0" dirty="0">
+                <a:solidFill>
+                  <a:srgbClr val="FFFFFF"/>
+                </a:solidFill>
+              </a:rPr>
+              <a:t>What’s your</a:t>
+            </a:r>
+            <a:r>
+              <a:rPr lang="en-US" sz="2000" b="1" dirty="0">
+                <a:solidFill>
+                  <a:srgbClr val="FFFFFF"/>
+                </a:solidFill>
+              </a:rPr>
+              <a:t> </a:t>
+            </a:r>
+            <a:r>
               <a:rPr sz="2000" b="1" i="0" dirty="0">
                 <a:solidFill>
                   <a:srgbClr val="FFFFFF"/>
                 </a:solidFill>
               </a:rPr>
-              <a:t>Collect hypotheses before revealing the mechanism.</a:t>
-            </a:r>
+              <a:t>hypothes</a:t>
+            </a:r>
+            <a:r>
+              <a:rPr lang="en-US" sz="2000" b="1" i="0" dirty="0">
+                <a:solidFill>
+                  <a:srgbClr val="FFFFFF"/>
+                </a:solidFill>
+              </a:rPr>
+              <a:t>is?</a:t>
+            </a:r>
+            <a:endParaRPr sz="2000" b="1" i="0" dirty="0">
+              <a:solidFill>
+                <a:srgbClr val="FFFFFF"/>
+              </a:solidFill>
+            </a:endParaRPr>
           </a:p>
         </p:txBody>
       </p:sp>
@@ -15427,11 +15507,6 @@
               </a:rPr>
               <a:t>~8.5 million Windows devices — under 1% of all Windows machines</a:t>
             </a:r>
-            <a:endParaRPr sz="2000" b="1" i="0" dirty="0">
-              <a:solidFill>
-                <a:srgbClr val="555960"/>
-              </a:solidFill>
-            </a:endParaRPr>
           </a:p>
         </p:txBody>
       </p:sp>
@@ -15444,7 +15519,7 @@
 </file>
 
 <file path=ppt/slides/slide20.xml><?xml version="1.0" encoding="utf-8"?>
-<p:sld xmlns:a="http://schemas.openxmlformats.org/drawingml/2006/main" xmlns:p="http://schemas.openxmlformats.org/presentationml/2006/main" xmlns:r="http://schemas.openxmlformats.org/officeDocument/2006/relationships">
+<p:sld xmlns:a="http://schemas.openxmlformats.org/drawingml/2006/main" xmlns:r="http://schemas.openxmlformats.org/officeDocument/2006/relationships" xmlns:p="http://schemas.openxmlformats.org/presentationml/2006/main">
   <p:cSld>
     <p:spTree>
       <p:nvGrpSpPr>
@@ -15452,7 +15527,14 @@
         <p:cNvGrpSpPr/>
         <p:nvPr/>
       </p:nvGrpSpPr>
-      <p:grpSpPr/>
+      <p:grpSpPr>
+        <a:xfrm>
+          <a:off x="0" y="0"/>
+          <a:ext cx="0" cy="0"/>
+          <a:chOff x="0" y="0"/>
+          <a:chExt cx="0" cy="0"/>
+        </a:xfrm>
+      </p:grpSpPr>
       <p:sp>
         <p:nvSpPr>
           <p:cNvPr id="3" name="Title 2"/>
@@ -15498,7 +15580,7 @@
           <a:p>
             <a:fld id="{A5E8DDF8-F0A4-457E-8C49-34448B87F78F}" type="slidenum">
               <a:rPr lang="en-US" smtClean="0"/>
-              <a:t>17</a:t>
+              <a:t>20</a:t>
             </a:fld>
             <a:endParaRPr lang="en-US"/>
           </a:p>
@@ -15935,7 +16017,7 @@
 </file>
 
 <file path=ppt/slides/slide21.xml><?xml version="1.0" encoding="utf-8"?>
-<p:sld xmlns:a="http://schemas.openxmlformats.org/drawingml/2006/main" xmlns:p="http://schemas.openxmlformats.org/presentationml/2006/main" xmlns:r="http://schemas.openxmlformats.org/officeDocument/2006/relationships">
+<p:sld xmlns:a="http://schemas.openxmlformats.org/drawingml/2006/main" xmlns:r="http://schemas.openxmlformats.org/officeDocument/2006/relationships" xmlns:p="http://schemas.openxmlformats.org/presentationml/2006/main">
   <p:cSld>
     <p:spTree>
       <p:nvGrpSpPr>
@@ -15943,7 +16025,14 @@
         <p:cNvGrpSpPr/>
         <p:nvPr/>
       </p:nvGrpSpPr>
-      <p:grpSpPr/>
+      <p:grpSpPr>
+        <a:xfrm>
+          <a:off x="0" y="0"/>
+          <a:ext cx="0" cy="0"/>
+          <a:chOff x="0" y="0"/>
+          <a:chExt cx="0" cy="0"/>
+        </a:xfrm>
+      </p:grpSpPr>
       <p:sp>
         <p:nvSpPr>
           <p:cNvPr id="3" name="Title 2"/>
@@ -15989,7 +16078,7 @@
           <a:p>
             <a:fld id="{F164AA00-212F-409D-8EDE-8F6B572B597D}" type="slidenum">
               <a:rPr lang="en-US" smtClean="0"/>
-              <a:t>27</a:t>
+              <a:t>21</a:t>
             </a:fld>
             <a:endParaRPr lang="en-US"/>
           </a:p>
@@ -16420,7 +16509,7 @@
 </file>
 
 <file path=ppt/slides/slide22.xml><?xml version="1.0" encoding="utf-8"?>
-<p:sld xmlns:a="http://schemas.openxmlformats.org/drawingml/2006/main" xmlns:p="http://schemas.openxmlformats.org/presentationml/2006/main" xmlns:r="http://schemas.openxmlformats.org/officeDocument/2006/relationships">
+<p:sld xmlns:a="http://schemas.openxmlformats.org/drawingml/2006/main" xmlns:r="http://schemas.openxmlformats.org/officeDocument/2006/relationships" xmlns:p="http://schemas.openxmlformats.org/presentationml/2006/main">
   <p:cSld>
     <p:spTree>
       <p:nvGrpSpPr>
@@ -16428,7 +16517,14 @@
         <p:cNvGrpSpPr/>
         <p:nvPr/>
       </p:nvGrpSpPr>
-      <p:grpSpPr/>
+      <p:grpSpPr>
+        <a:xfrm>
+          <a:off x="0" y="0"/>
+          <a:ext cx="0" cy="0"/>
+          <a:chOff x="0" y="0"/>
+          <a:chExt cx="0" cy="0"/>
+        </a:xfrm>
+      </p:grpSpPr>
       <p:sp>
         <p:nvSpPr>
           <p:cNvPr id="3" name="Title 2"/>
@@ -16479,7 +16575,7 @@
           <a:p>
             <a:fld id="{54DE72B0-FFEB-4C83-B4BD-F25961BEDFCA}" type="slidenum">
               <a:rPr lang="en-US" smtClean="0"/>
-              <a:t>32</a:t>
+              <a:t>22</a:t>
             </a:fld>
             <a:endParaRPr lang="en-US"/>
           </a:p>
@@ -16624,11 +16720,6 @@
               </a:rPr>
               <a:t>CONSEQUENCE</a:t>
             </a:r>
-            <a:endParaRPr sz="2000" b="0" i="1" dirty="0">
-              <a:solidFill>
-                <a:srgbClr val="5C4826"/>
-              </a:solidFill>
-            </a:endParaRPr>
           </a:p>
         </p:txBody>
       </p:sp>
@@ -17004,7 +17095,7 @@
 </file>
 
 <file path=ppt/slides/slide23.xml><?xml version="1.0" encoding="utf-8"?>
-<p:sld xmlns:a="http://schemas.openxmlformats.org/drawingml/2006/main" xmlns:p="http://schemas.openxmlformats.org/presentationml/2006/main" xmlns:r="http://schemas.openxmlformats.org/officeDocument/2006/relationships">
+<p:sld xmlns:a="http://schemas.openxmlformats.org/drawingml/2006/main" xmlns:r="http://schemas.openxmlformats.org/officeDocument/2006/relationships" xmlns:p="http://schemas.openxmlformats.org/presentationml/2006/main">
   <p:cSld>
     <p:spTree>
       <p:nvGrpSpPr>
@@ -17012,7 +17103,14 @@
         <p:cNvGrpSpPr/>
         <p:nvPr/>
       </p:nvGrpSpPr>
-      <p:grpSpPr/>
+      <p:grpSpPr>
+        <a:xfrm>
+          <a:off x="0" y="0"/>
+          <a:ext cx="0" cy="0"/>
+          <a:chOff x="0" y="0"/>
+          <a:chExt cx="0" cy="0"/>
+        </a:xfrm>
+      </p:grpSpPr>
       <p:sp>
         <p:nvSpPr>
           <p:cNvPr id="3" name="Title 2"/>
@@ -17063,7 +17161,7 @@
           <a:p>
             <a:fld id="{54DE72B0-FFEB-4C83-B4BD-F25961BEDFCA}" type="slidenum">
               <a:rPr lang="en-US" smtClean="0"/>
-              <a:t>33</a:t>
+              <a:t>23</a:t>
             </a:fld>
             <a:endParaRPr lang="en-US"/>
           </a:p>
@@ -18010,7 +18108,7 @@
 </file>
 
 <file path=ppt/slides/slide24.xml><?xml version="1.0" encoding="utf-8"?>
-<p:sld xmlns:a="http://schemas.openxmlformats.org/drawingml/2006/main" xmlns:p="http://schemas.openxmlformats.org/presentationml/2006/main" xmlns:r="http://schemas.openxmlformats.org/officeDocument/2006/relationships">
+<p:sld xmlns:a="http://schemas.openxmlformats.org/drawingml/2006/main" xmlns:r="http://schemas.openxmlformats.org/officeDocument/2006/relationships" xmlns:p="http://schemas.openxmlformats.org/presentationml/2006/main">
   <p:cSld>
     <p:spTree>
       <p:nvGrpSpPr>
@@ -18018,7 +18116,14 @@
         <p:cNvGrpSpPr/>
         <p:nvPr/>
       </p:nvGrpSpPr>
-      <p:grpSpPr/>
+      <p:grpSpPr>
+        <a:xfrm>
+          <a:off x="0" y="0"/>
+          <a:ext cx="0" cy="0"/>
+          <a:chOff x="0" y="0"/>
+          <a:chExt cx="0" cy="0"/>
+        </a:xfrm>
+      </p:grpSpPr>
       <p:sp>
         <p:nvSpPr>
           <p:cNvPr id="3" name="Title 2"/>
@@ -18069,7 +18174,7 @@
           <a:p>
             <a:fld id="{54DE72B0-FFEB-4C83-B4BD-F25961BEDFCA}" type="slidenum">
               <a:rPr lang="en-US" smtClean="0"/>
-              <a:t>29</a:t>
+              <a:t>24</a:t>
             </a:fld>
             <a:endParaRPr lang="en-US"/>
           </a:p>
@@ -18368,11 +18473,6 @@
               </a:rPr>
               <a:t>Critical services must tolerate endpoint failure</a:t>
             </a:r>
-            <a:endParaRPr sz="2000" b="1" i="0" dirty="0">
-              <a:solidFill>
-                <a:srgbClr val="FFFFFF"/>
-              </a:solidFill>
-            </a:endParaRPr>
           </a:p>
         </p:txBody>
       </p:sp>
@@ -18748,7 +18848,7 @@
 </file>
 
 <file path=ppt/slides/slide25.xml><?xml version="1.0" encoding="utf-8"?>
-<p:sld xmlns:a="http://schemas.openxmlformats.org/drawingml/2006/main" xmlns:p="http://schemas.openxmlformats.org/presentationml/2006/main" xmlns:r="http://schemas.openxmlformats.org/officeDocument/2006/relationships">
+<p:sld xmlns:a="http://schemas.openxmlformats.org/drawingml/2006/main" xmlns:r="http://schemas.openxmlformats.org/officeDocument/2006/relationships" xmlns:p="http://schemas.openxmlformats.org/presentationml/2006/main">
   <p:cSld>
     <p:spTree>
       <p:nvGrpSpPr>
@@ -18756,7 +18856,14 @@
         <p:cNvGrpSpPr/>
         <p:nvPr/>
       </p:nvGrpSpPr>
-      <p:grpSpPr/>
+      <p:grpSpPr>
+        <a:xfrm>
+          <a:off x="0" y="0"/>
+          <a:ext cx="0" cy="0"/>
+          <a:chOff x="0" y="0"/>
+          <a:chExt cx="0" cy="0"/>
+        </a:xfrm>
+      </p:grpSpPr>
       <p:sp>
         <p:nvSpPr>
           <p:cNvPr id="3" name="Title 2"/>
@@ -18807,7 +18914,7 @@
           <a:p>
             <a:fld id="{54DE72B0-FFEB-4C83-B4BD-F25961BEDFCA}" type="slidenum">
               <a:rPr lang="en-US" smtClean="0"/>
-              <a:t>29</a:t>
+              <a:t>25</a:t>
             </a:fld>
             <a:endParaRPr lang="en-US"/>
           </a:p>
@@ -19084,11 +19191,6 @@
               </a:rPr>
               <a:t>Endpoint-failure isolation</a:t>
             </a:r>
-            <a:endParaRPr sz="2000" b="1" i="0" dirty="0">
-              <a:solidFill>
-                <a:srgbClr val="FFFFFF"/>
-              </a:solidFill>
-            </a:endParaRPr>
           </a:p>
         </p:txBody>
       </p:sp>
@@ -19437,7 +19539,7 @@
 </file>
 
 <file path=ppt/slides/slide26.xml><?xml version="1.0" encoding="utf-8"?>
-<p:sld xmlns:a="http://schemas.openxmlformats.org/drawingml/2006/main" xmlns:p="http://schemas.openxmlformats.org/presentationml/2006/main" xmlns:r="http://schemas.openxmlformats.org/officeDocument/2006/relationships">
+<p:sld xmlns:a="http://schemas.openxmlformats.org/drawingml/2006/main" xmlns:r="http://schemas.openxmlformats.org/officeDocument/2006/relationships" xmlns:p="http://schemas.openxmlformats.org/presentationml/2006/main">
   <p:cSld>
     <p:spTree>
       <p:nvGrpSpPr>
@@ -19445,7 +19547,14 @@
         <p:cNvGrpSpPr/>
         <p:nvPr/>
       </p:nvGrpSpPr>
-      <p:grpSpPr/>
+      <p:grpSpPr>
+        <a:xfrm>
+          <a:off x="0" y="0"/>
+          <a:ext cx="0" cy="0"/>
+          <a:chOff x="0" y="0"/>
+          <a:chExt cx="0" cy="0"/>
+        </a:xfrm>
+      </p:grpSpPr>
       <p:sp>
         <p:nvSpPr>
           <p:cNvPr id="3" name="Title 2"/>
@@ -19496,7 +19605,7 @@
           <a:p>
             <a:fld id="{54DE72B0-FFEB-4C83-B4BD-F25961BEDFCA}" type="slidenum">
               <a:rPr lang="en-US" smtClean="0"/>
-              <a:t>29</a:t>
+              <a:t>26</a:t>
             </a:fld>
             <a:endParaRPr lang="en-US"/>
           </a:p>
@@ -20894,7 +21003,7 @@
 </file>
 
 <file path=ppt/slides/slide27.xml><?xml version="1.0" encoding="utf-8"?>
-<p:sld xmlns:a="http://schemas.openxmlformats.org/drawingml/2006/main" xmlns:p="http://schemas.openxmlformats.org/presentationml/2006/main" xmlns:r="http://schemas.openxmlformats.org/officeDocument/2006/relationships">
+<p:sld xmlns:a="http://schemas.openxmlformats.org/drawingml/2006/main" xmlns:r="http://schemas.openxmlformats.org/officeDocument/2006/relationships" xmlns:p="http://schemas.openxmlformats.org/presentationml/2006/main">
   <p:cSld>
     <p:spTree>
       <p:nvGrpSpPr>
@@ -20902,7 +21011,14 @@
         <p:cNvGrpSpPr/>
         <p:nvPr/>
       </p:nvGrpSpPr>
-      <p:grpSpPr/>
+      <p:grpSpPr>
+        <a:xfrm>
+          <a:off x="0" y="0"/>
+          <a:ext cx="0" cy="0"/>
+          <a:chOff x="0" y="0"/>
+          <a:chExt cx="0" cy="0"/>
+        </a:xfrm>
+      </p:grpSpPr>
       <p:sp>
         <p:nvSpPr>
           <p:cNvPr id="3" name="Title 2"/>
@@ -20948,7 +21064,7 @@
           <a:p>
             <a:fld id="{8CF8A65D-8523-4C39-BD83-5C787F1FA9B3}" type="slidenum">
               <a:rPr lang="en-US" smtClean="0"/>
-              <a:t>10</a:t>
+              <a:t>27</a:t>
             </a:fld>
             <a:endParaRPr lang="en-US"/>
           </a:p>
@@ -21746,14 +21862,7 @@
           <a:lstStyle/>
           <a:p>
             <a:pPr algn="ctr"/>
-            <a:r>
-              <a:rPr sz="2000" b="0" i="1" dirty="0">
-                <a:solidFill>
-                  <a:srgbClr val="5C4826"/>
-                </a:solidFill>
-              </a:rPr>
-              <a:t/>
-            </a:r>
+            <a:endParaRPr/>
           </a:p>
         </p:txBody>
       </p:sp>
@@ -21800,14 +21909,7 @@
           <a:lstStyle/>
           <a:p>
             <a:pPr algn="ctr"/>
-            <a:r>
-              <a:rPr sz="2000" b="0" i="1" dirty="0">
-                <a:solidFill>
-                  <a:srgbClr val="5C4826"/>
-                </a:solidFill>
-              </a:rPr>
-              <a:t/>
-            </a:r>
+            <a:endParaRPr/>
           </a:p>
         </p:txBody>
       </p:sp>
@@ -21854,14 +21956,7 @@
           <a:lstStyle/>
           <a:p>
             <a:pPr algn="ctr"/>
-            <a:r>
-              <a:rPr sz="2000" b="0" i="1" dirty="0">
-                <a:solidFill>
-                  <a:srgbClr val="5C4826"/>
-                </a:solidFill>
-              </a:rPr>
-              <a:t/>
-            </a:r>
+            <a:endParaRPr/>
           </a:p>
         </p:txBody>
       </p:sp>
@@ -21908,14 +22003,7 @@
           <a:lstStyle/>
           <a:p>
             <a:pPr algn="ctr"/>
-            <a:r>
-              <a:rPr sz="2000" b="0" i="1" dirty="0">
-                <a:solidFill>
-                  <a:srgbClr val="5C4826"/>
-                </a:solidFill>
-              </a:rPr>
-              <a:t/>
-            </a:r>
+            <a:endParaRPr/>
           </a:p>
         </p:txBody>
       </p:sp>
@@ -21962,14 +22050,7 @@
           <a:lstStyle/>
           <a:p>
             <a:pPr algn="ctr"/>
-            <a:r>
-              <a:rPr sz="2000" b="0" i="1" dirty="0">
-                <a:solidFill>
-                  <a:srgbClr val="5C4826"/>
-                </a:solidFill>
-              </a:rPr>
-              <a:t/>
-            </a:r>
+            <a:endParaRPr/>
           </a:p>
         </p:txBody>
       </p:sp>
@@ -22016,14 +22097,7 @@
           <a:lstStyle/>
           <a:p>
             <a:pPr algn="ctr"/>
-            <a:r>
-              <a:rPr sz="2000" b="0" i="1" dirty="0">
-                <a:solidFill>
-                  <a:srgbClr val="5C4826"/>
-                </a:solidFill>
-              </a:rPr>
-              <a:t/>
-            </a:r>
+            <a:endParaRPr/>
           </a:p>
         </p:txBody>
       </p:sp>
@@ -22070,14 +22144,7 @@
           <a:lstStyle/>
           <a:p>
             <a:pPr algn="ctr"/>
-            <a:r>
-              <a:rPr sz="2000" b="0" i="1" dirty="0">
-                <a:solidFill>
-                  <a:srgbClr val="5C4826"/>
-                </a:solidFill>
-              </a:rPr>
-              <a:t/>
-            </a:r>
+            <a:endParaRPr/>
           </a:p>
         </p:txBody>
       </p:sp>
@@ -22124,14 +22191,7 @@
           <a:lstStyle/>
           <a:p>
             <a:pPr algn="ctr"/>
-            <a:r>
-              <a:rPr sz="2000" b="0" i="1" dirty="0">
-                <a:solidFill>
-                  <a:srgbClr val="5C4826"/>
-                </a:solidFill>
-              </a:rPr>
-              <a:t/>
-            </a:r>
+            <a:endParaRPr/>
           </a:p>
         </p:txBody>
       </p:sp>
@@ -22178,14 +22238,7 @@
           <a:lstStyle/>
           <a:p>
             <a:pPr algn="ctr"/>
-            <a:r>
-              <a:rPr sz="2000" b="0" i="1" dirty="0">
-                <a:solidFill>
-                  <a:srgbClr val="5C4826"/>
-                </a:solidFill>
-              </a:rPr>
-              <a:t/>
-            </a:r>
+            <a:endParaRPr/>
           </a:p>
         </p:txBody>
       </p:sp>
@@ -22198,7 +22251,7 @@
 </file>
 
 <file path=ppt/slides/slide28.xml><?xml version="1.0" encoding="utf-8"?>
-<p:sld xmlns:a="http://schemas.openxmlformats.org/drawingml/2006/main" xmlns:p="http://schemas.openxmlformats.org/presentationml/2006/main" xmlns:r="http://schemas.openxmlformats.org/officeDocument/2006/relationships">
+<p:sld xmlns:a="http://schemas.openxmlformats.org/drawingml/2006/main" xmlns:r="http://schemas.openxmlformats.org/officeDocument/2006/relationships" xmlns:p="http://schemas.openxmlformats.org/presentationml/2006/main">
   <p:cSld>
     <p:spTree>
       <p:nvGrpSpPr>
@@ -22206,7 +22259,14 @@
         <p:cNvGrpSpPr/>
         <p:nvPr/>
       </p:nvGrpSpPr>
-      <p:grpSpPr/>
+      <p:grpSpPr>
+        <a:xfrm>
+          <a:off x="0" y="0"/>
+          <a:ext cx="0" cy="0"/>
+          <a:chOff x="0" y="0"/>
+          <a:chExt cx="0" cy="0"/>
+        </a:xfrm>
+      </p:grpSpPr>
       <p:sp>
         <p:nvSpPr>
           <p:cNvPr id="3" name="Title 2"/>
@@ -22252,7 +22312,7 @@
           <a:p>
             <a:fld id="{8CF8A65D-8523-4C39-BD83-5C787F1FA9B3}" type="slidenum">
               <a:rPr lang="en-US" smtClean="0"/>
-              <a:t>10</a:t>
+              <a:t>28</a:t>
             </a:fld>
             <a:endParaRPr lang="en-US"/>
           </a:p>
@@ -22838,11 +22898,6 @@
               </a:rPr>
               <a:t>CPU exhaustion from 13:42 UTC; rule killed globally 14:07; traffic normal 14:09</a:t>
             </a:r>
-            <a:endParaRPr sz="2000" b="1" i="0" dirty="0">
-              <a:solidFill>
-                <a:srgbClr val="555960"/>
-              </a:solidFill>
-            </a:endParaRPr>
           </a:p>
         </p:txBody>
       </p:sp>
@@ -22921,14 +22976,7 @@
           <a:lstStyle/>
           <a:p>
             <a:pPr algn="ctr"/>
-            <a:r>
-              <a:rPr sz="1200" b="1" i="0">
-                <a:solidFill>
-                  <a:srgbClr val="FFFFFF"/>
-                </a:solidFill>
-              </a:rPr>
-              <a:t/>
-            </a:r>
+            <a:endParaRPr/>
           </a:p>
         </p:txBody>
       </p:sp>
@@ -23007,14 +23055,7 @@
           <a:lstStyle/>
           <a:p>
             <a:pPr algn="ctr"/>
-            <a:r>
-              <a:rPr sz="1200" b="1" i="0">
-                <a:solidFill>
-                  <a:srgbClr val="FFFFFF"/>
-                </a:solidFill>
-              </a:rPr>
-              <a:t/>
-            </a:r>
+            <a:endParaRPr/>
           </a:p>
         </p:txBody>
       </p:sp>
@@ -23129,7 +23170,7 @@
 </file>
 
 <file path=ppt/slides/slide29.xml><?xml version="1.0" encoding="utf-8"?>
-<p:sld xmlns:a="http://schemas.openxmlformats.org/drawingml/2006/main" xmlns:p="http://schemas.openxmlformats.org/presentationml/2006/main" xmlns:r="http://schemas.openxmlformats.org/officeDocument/2006/relationships">
+<p:sld xmlns:a="http://schemas.openxmlformats.org/drawingml/2006/main" xmlns:r="http://schemas.openxmlformats.org/officeDocument/2006/relationships" xmlns:p="http://schemas.openxmlformats.org/presentationml/2006/main">
   <p:cSld>
     <p:spTree>
       <p:nvGrpSpPr>
@@ -23137,7 +23178,14 @@
         <p:cNvGrpSpPr/>
         <p:nvPr/>
       </p:nvGrpSpPr>
-      <p:grpSpPr/>
+      <p:grpSpPr>
+        <a:xfrm>
+          <a:off x="0" y="0"/>
+          <a:ext cx="0" cy="0"/>
+          <a:chOff x="0" y="0"/>
+          <a:chExt cx="0" cy="0"/>
+        </a:xfrm>
+      </p:grpSpPr>
       <p:sp>
         <p:nvSpPr>
           <p:cNvPr id="3" name="Title 2"/>
@@ -23465,11 +23513,6 @@
               </a:rPr>
               <a:t>STAMP</a:t>
             </a:r>
-            <a:endParaRPr sz="2000" b="1" i="0" dirty="0">
-              <a:solidFill>
-                <a:srgbClr val="FFFFFF"/>
-              </a:solidFill>
-            </a:endParaRPr>
           </a:p>
         </p:txBody>
       </p:sp>
@@ -23718,7 +23761,7 @@
 </file>
 
 <file path=ppt/slides/slide3.xml><?xml version="1.0" encoding="utf-8"?>
-<p:sld xmlns:a="http://schemas.openxmlformats.org/drawingml/2006/main" xmlns:p="http://schemas.openxmlformats.org/presentationml/2006/main" xmlns:r="http://schemas.openxmlformats.org/officeDocument/2006/relationships">
+<p:sld xmlns:a="http://schemas.openxmlformats.org/drawingml/2006/main" xmlns:r="http://schemas.openxmlformats.org/officeDocument/2006/relationships" xmlns:p="http://schemas.openxmlformats.org/presentationml/2006/main">
   <p:cSld>
     <p:spTree>
       <p:nvGrpSpPr>
@@ -23726,7 +23769,14 @@
         <p:cNvGrpSpPr/>
         <p:nvPr/>
       </p:nvGrpSpPr>
-      <p:grpSpPr/>
+      <p:grpSpPr>
+        <a:xfrm>
+          <a:off x="0" y="0"/>
+          <a:ext cx="0" cy="0"/>
+          <a:chOff x="0" y="0"/>
+          <a:chExt cx="0" cy="0"/>
+        </a:xfrm>
+      </p:grpSpPr>
       <p:sp>
         <p:nvSpPr>
           <p:cNvPr id="3" name="Title 2"/>
@@ -23772,7 +23822,7 @@
           <a:p>
             <a:fld id="{8D34505B-00B1-4572-8080-1F84ADF8E747}" type="slidenum">
               <a:rPr lang="en-US" smtClean="0"/>
-              <a:t>13</a:t>
+              <a:t>3</a:t>
             </a:fld>
             <a:endParaRPr lang="en-US"/>
           </a:p>
@@ -24071,7 +24121,7 @@
         <p:spPr>
           <a:xfrm>
             <a:off x="548640" y="3886200"/>
-            <a:ext cx="8046720" cy="320040"/>
+            <a:ext cx="8046720" cy="323165"/>
           </a:xfrm>
           <a:prstGeom prst="rect">
             <a:avLst/>
@@ -24086,7 +24136,7 @@
           <a:p>
             <a:pPr algn="ctr"/>
             <a:r>
-              <a:rPr sz="1200" b="1" i="0">
+              <a:rPr b="1" i="0" dirty="0">
                 <a:solidFill>
                   <a:srgbClr val="5C4826"/>
                 </a:solidFill>
@@ -24138,7 +24188,7 @@
           <a:p>
             <a:pPr algn="ctr"/>
             <a:r>
-              <a:rPr sz="1200" b="1" i="0">
+              <a:rPr b="1" i="0" dirty="0">
                 <a:solidFill>
                   <a:srgbClr val="FFFFFF"/>
                 </a:solidFill>
@@ -24240,7 +24290,7 @@
           <a:p>
             <a:pPr algn="ctr"/>
             <a:r>
-              <a:rPr sz="1200" b="1" i="0">
+              <a:rPr b="1" i="0" dirty="0">
                 <a:solidFill>
                   <a:srgbClr val="FFFFFF"/>
                 </a:solidFill>
@@ -24342,7 +24392,7 @@
           <a:p>
             <a:pPr algn="ctr"/>
             <a:r>
-              <a:rPr sz="1200" b="1" i="0">
+              <a:rPr b="1" i="0">
                 <a:solidFill>
                   <a:srgbClr val="FFFFFF"/>
                 </a:solidFill>
@@ -24479,11 +24529,227 @@
   <p:clrMapOvr>
     <a:masterClrMapping/>
   </p:clrMapOvr>
+  <p:timing>
+    <p:tnLst>
+      <p:par>
+        <p:cTn id="1" dur="indefinite" restart="never" nodeType="tmRoot">
+          <p:childTnLst>
+            <p:seq concurrent="1" nextAc="seek">
+              <p:cTn id="2" dur="indefinite" nodeType="mainSeq">
+                <p:childTnLst>
+                  <p:par>
+                    <p:cTn id="3" fill="hold">
+                      <p:stCondLst>
+                        <p:cond delay="indefinite"/>
+                      </p:stCondLst>
+                      <p:childTnLst>
+                        <p:par>
+                          <p:cTn id="4" fill="hold">
+                            <p:stCondLst>
+                              <p:cond delay="0"/>
+                            </p:stCondLst>
+                            <p:childTnLst>
+                              <p:par>
+                                <p:cTn id="5" presetID="1" presetClass="entr" presetSubtype="0" fill="hold" grpId="0" nodeType="clickEffect">
+                                  <p:stCondLst>
+                                    <p:cond delay="0"/>
+                                  </p:stCondLst>
+                                  <p:childTnLst>
+                                    <p:set>
+                                      <p:cBhvr>
+                                        <p:cTn id="6" dur="1" fill="hold">
+                                          <p:stCondLst>
+                                            <p:cond delay="0"/>
+                                          </p:stCondLst>
+                                        </p:cTn>
+                                        <p:tgtEl>
+                                          <p:spTgt spid="910"/>
+                                        </p:tgtEl>
+                                        <p:attrNameLst>
+                                          <p:attrName>style.visibility</p:attrName>
+                                        </p:attrNameLst>
+                                      </p:cBhvr>
+                                      <p:to>
+                                        <p:strVal val="visible"/>
+                                      </p:to>
+                                    </p:set>
+                                  </p:childTnLst>
+                                </p:cTn>
+                              </p:par>
+                              <p:par>
+                                <p:cTn id="7" presetID="1" presetClass="entr" presetSubtype="0" fill="hold" nodeType="withEffect">
+                                  <p:stCondLst>
+                                    <p:cond delay="0"/>
+                                  </p:stCondLst>
+                                  <p:childTnLst>
+                                    <p:set>
+                                      <p:cBhvr>
+                                        <p:cTn id="8" dur="1" fill="hold">
+                                          <p:stCondLst>
+                                            <p:cond delay="0"/>
+                                          </p:stCondLst>
+                                        </p:cTn>
+                                        <p:tgtEl>
+                                          <p:spTgt spid="911"/>
+                                        </p:tgtEl>
+                                        <p:attrNameLst>
+                                          <p:attrName>style.visibility</p:attrName>
+                                        </p:attrNameLst>
+                                      </p:cBhvr>
+                                      <p:to>
+                                        <p:strVal val="visible"/>
+                                      </p:to>
+                                    </p:set>
+                                  </p:childTnLst>
+                                </p:cTn>
+                              </p:par>
+                              <p:par>
+                                <p:cTn id="9" presetID="1" presetClass="entr" presetSubtype="0" fill="hold" grpId="0" nodeType="withEffect">
+                                  <p:stCondLst>
+                                    <p:cond delay="0"/>
+                                  </p:stCondLst>
+                                  <p:childTnLst>
+                                    <p:set>
+                                      <p:cBhvr>
+                                        <p:cTn id="10" dur="1" fill="hold">
+                                          <p:stCondLst>
+                                            <p:cond delay="0"/>
+                                          </p:stCondLst>
+                                        </p:cTn>
+                                        <p:tgtEl>
+                                          <p:spTgt spid="912"/>
+                                        </p:tgtEl>
+                                        <p:attrNameLst>
+                                          <p:attrName>style.visibility</p:attrName>
+                                        </p:attrNameLst>
+                                      </p:cBhvr>
+                                      <p:to>
+                                        <p:strVal val="visible"/>
+                                      </p:to>
+                                    </p:set>
+                                  </p:childTnLst>
+                                </p:cTn>
+                              </p:par>
+                              <p:par>
+                                <p:cTn id="11" presetID="1" presetClass="entr" presetSubtype="0" fill="hold" nodeType="withEffect">
+                                  <p:stCondLst>
+                                    <p:cond delay="0"/>
+                                  </p:stCondLst>
+                                  <p:childTnLst>
+                                    <p:set>
+                                      <p:cBhvr>
+                                        <p:cTn id="12" dur="1" fill="hold">
+                                          <p:stCondLst>
+                                            <p:cond delay="0"/>
+                                          </p:stCondLst>
+                                        </p:cTn>
+                                        <p:tgtEl>
+                                          <p:spTgt spid="913"/>
+                                        </p:tgtEl>
+                                        <p:attrNameLst>
+                                          <p:attrName>style.visibility</p:attrName>
+                                        </p:attrNameLst>
+                                      </p:cBhvr>
+                                      <p:to>
+                                        <p:strVal val="visible"/>
+                                      </p:to>
+                                    </p:set>
+                                  </p:childTnLst>
+                                </p:cTn>
+                              </p:par>
+                              <p:par>
+                                <p:cTn id="13" presetID="1" presetClass="entr" presetSubtype="0" fill="hold" grpId="0" nodeType="withEffect">
+                                  <p:stCondLst>
+                                    <p:cond delay="0"/>
+                                  </p:stCondLst>
+                                  <p:childTnLst>
+                                    <p:set>
+                                      <p:cBhvr>
+                                        <p:cTn id="14" dur="1" fill="hold">
+                                          <p:stCondLst>
+                                            <p:cond delay="0"/>
+                                          </p:stCondLst>
+                                        </p:cTn>
+                                        <p:tgtEl>
+                                          <p:spTgt spid="914"/>
+                                        </p:tgtEl>
+                                        <p:attrNameLst>
+                                          <p:attrName>style.visibility</p:attrName>
+                                        </p:attrNameLst>
+                                      </p:cBhvr>
+                                      <p:to>
+                                        <p:strVal val="visible"/>
+                                      </p:to>
+                                    </p:set>
+                                  </p:childTnLst>
+                                </p:cTn>
+                              </p:par>
+                              <p:par>
+                                <p:cTn id="15" presetID="1" presetClass="entr" presetSubtype="0" fill="hold" grpId="0" nodeType="withEffect">
+                                  <p:stCondLst>
+                                    <p:cond delay="0"/>
+                                  </p:stCondLst>
+                                  <p:childTnLst>
+                                    <p:set>
+                                      <p:cBhvr>
+                                        <p:cTn id="16" dur="1" fill="hold">
+                                          <p:stCondLst>
+                                            <p:cond delay="0"/>
+                                          </p:stCondLst>
+                                        </p:cTn>
+                                        <p:tgtEl>
+                                          <p:spTgt spid="915"/>
+                                        </p:tgtEl>
+                                        <p:attrNameLst>
+                                          <p:attrName>style.visibility</p:attrName>
+                                        </p:attrNameLst>
+                                      </p:cBhvr>
+                                      <p:to>
+                                        <p:strVal val="visible"/>
+                                      </p:to>
+                                    </p:set>
+                                  </p:childTnLst>
+                                </p:cTn>
+                              </p:par>
+                            </p:childTnLst>
+                          </p:cTn>
+                        </p:par>
+                      </p:childTnLst>
+                    </p:cTn>
+                  </p:par>
+                </p:childTnLst>
+              </p:cTn>
+              <p:prevCondLst>
+                <p:cond evt="onPrev" delay="0">
+                  <p:tgtEl>
+                    <p:sldTgt/>
+                  </p:tgtEl>
+                </p:cond>
+              </p:prevCondLst>
+              <p:nextCondLst>
+                <p:cond evt="onNext" delay="0">
+                  <p:tgtEl>
+                    <p:sldTgt/>
+                  </p:tgtEl>
+                </p:cond>
+              </p:nextCondLst>
+            </p:seq>
+          </p:childTnLst>
+        </p:cTn>
+      </p:par>
+    </p:tnLst>
+    <p:bldLst>
+      <p:bldP spid="910" grpId="0" animBg="1"/>
+      <p:bldP spid="912" grpId="0" animBg="1"/>
+      <p:bldP spid="914" grpId="0" animBg="1"/>
+      <p:bldP spid="915" grpId="0"/>
+    </p:bldLst>
+  </p:timing>
 </p:sld>
 </file>
 
 <file path=ppt/slides/slide30.xml><?xml version="1.0" encoding="utf-8"?>
-<p:sld xmlns:a="http://schemas.openxmlformats.org/drawingml/2006/main" xmlns:p="http://schemas.openxmlformats.org/presentationml/2006/main" xmlns:r="http://schemas.openxmlformats.org/officeDocument/2006/relationships">
+<p:sld xmlns:a="http://schemas.openxmlformats.org/drawingml/2006/main" xmlns:r="http://schemas.openxmlformats.org/officeDocument/2006/relationships" xmlns:p="http://schemas.openxmlformats.org/presentationml/2006/main">
   <p:cSld>
     <p:spTree>
       <p:nvGrpSpPr>
@@ -24491,7 +24757,14 @@
         <p:cNvGrpSpPr/>
         <p:nvPr/>
       </p:nvGrpSpPr>
-      <p:grpSpPr/>
+      <p:grpSpPr>
+        <a:xfrm>
+          <a:off x="0" y="0"/>
+          <a:ext cx="0" cy="0"/>
+          <a:chOff x="0" y="0"/>
+          <a:chExt cx="0" cy="0"/>
+        </a:xfrm>
+      </p:grpSpPr>
       <p:sp>
         <p:nvSpPr>
           <p:cNvPr id="3" name="Title 2"/>
@@ -24542,7 +24815,7 @@
           <a:p>
             <a:fld id="{54DE72B0-FFEB-4C83-B4BD-F25961BEDFCA}" type="slidenum">
               <a:rPr lang="en-US" smtClean="0"/>
-              <a:t>32</a:t>
+              <a:t>30</a:t>
             </a:fld>
             <a:endParaRPr lang="en-US"/>
           </a:p>
@@ -24687,11 +24960,6 @@
               </a:rPr>
               <a:t>explain — a causal account the evidence supports</a:t>
             </a:r>
-            <a:endParaRPr sz="2000" b="0" i="1" dirty="0">
-              <a:solidFill>
-                <a:srgbClr val="5C4826"/>
-              </a:solidFill>
-            </a:endParaRPr>
           </a:p>
         </p:txBody>
       </p:sp>
@@ -24960,11 +25228,6 @@
               </a:rPr>
               <a:t>future judgment</a:t>
             </a:r>
-            <a:endParaRPr sz="2000" b="0" i="1" dirty="0">
-              <a:solidFill>
-                <a:srgbClr val="5C4826"/>
-              </a:solidFill>
-            </a:endParaRPr>
           </a:p>
         </p:txBody>
       </p:sp>
@@ -25019,11 +25282,6 @@
               </a:rPr>
               <a:t>future constraints</a:t>
             </a:r>
-            <a:endParaRPr sz="2000" b="0" i="1" dirty="0">
-              <a:solidFill>
-                <a:srgbClr val="5C4826"/>
-              </a:solidFill>
-            </a:endParaRPr>
           </a:p>
         </p:txBody>
       </p:sp>
@@ -25232,7 +25490,7 @@
 </file>
 
 <file path=ppt/slides/slide4.xml><?xml version="1.0" encoding="utf-8"?>
-<p:sld xmlns:a="http://schemas.openxmlformats.org/drawingml/2006/main" xmlns:p="http://schemas.openxmlformats.org/presentationml/2006/main" xmlns:r="http://schemas.openxmlformats.org/officeDocument/2006/relationships">
+<p:sld xmlns:a="http://schemas.openxmlformats.org/drawingml/2006/main" xmlns:r="http://schemas.openxmlformats.org/officeDocument/2006/relationships" xmlns:p="http://schemas.openxmlformats.org/presentationml/2006/main">
   <p:cSld>
     <p:spTree>
       <p:nvGrpSpPr>
@@ -25240,7 +25498,14 @@
         <p:cNvGrpSpPr/>
         <p:nvPr/>
       </p:nvGrpSpPr>
-      <p:grpSpPr/>
+      <p:grpSpPr>
+        <a:xfrm>
+          <a:off x="0" y="0"/>
+          <a:ext cx="0" cy="0"/>
+          <a:chOff x="0" y="0"/>
+          <a:chExt cx="0" cy="0"/>
+        </a:xfrm>
+      </p:grpSpPr>
       <p:sp>
         <p:nvSpPr>
           <p:cNvPr id="3" name="Title 2"/>
@@ -25259,7 +25524,15 @@
           <a:lstStyle/>
           <a:p>
             <a:r>
-              <a:rPr sz="2400" b="0" i="0">
+              <a:rPr lang="en-US" sz="2400" b="0" i="0" dirty="0">
+                <a:solidFill>
+                  <a:srgbClr val="000000"/>
+                </a:solidFill>
+              </a:rPr>
+              <a:t>Cause: </a:t>
+            </a:r>
+            <a:r>
+              <a:rPr sz="2400" b="0" i="0" dirty="0">
                 <a:solidFill>
                   <a:srgbClr val="000000"/>
                 </a:solidFill>
@@ -25286,7 +25559,7 @@
           <a:p>
             <a:fld id="{8CF8A65D-8523-4C39-BD83-5C787F1FA9B3}" type="slidenum">
               <a:rPr lang="en-US" smtClean="0"/>
-              <a:t>10</a:t>
+              <a:t>4</a:t>
             </a:fld>
             <a:endParaRPr lang="en-US"/>
           </a:p>
@@ -25294,14 +25567,70 @@
       </p:sp>
       <p:sp>
         <p:nvSpPr>
-          <p:cNvPr id="909" name="FooterBand"/>
+          <p:cNvPr id="915" name="Label"/>
+          <p:cNvSpPr txBox="1"/>
+          <p:nvPr/>
+        </p:nvSpPr>
+        <p:spPr>
+          <a:xfrm>
+            <a:off x="548640" y="868680"/>
+            <a:ext cx="8046720" cy="566928"/>
+          </a:xfrm>
+          <a:prstGeom prst="rect">
+            <a:avLst/>
+          </a:prstGeom>
+          <a:noFill/>
+        </p:spPr>
+        <p:txBody>
+          <a:bodyPr wrap="square" lIns="27432" tIns="22860" rIns="27432" bIns="22860" anchor="t">
+            <a:spAutoFit/>
+          </a:bodyPr>
+          <a:lstStyle/>
+          <a:p>
+            <a:pPr algn="ctr"/>
+            <a:r>
+              <a:rPr sz="1300" b="1" i="1" dirty="0">
+                <a:solidFill>
+                  <a:srgbClr val="5C4826"/>
+                </a:solidFill>
+              </a:rPr>
+              <a:t>The sensor interprets detection content using predefined templates.</a:t>
+            </a:r>
+          </a:p>
+          <a:p>
+            <a:pPr algn="ctr"/>
+            <a:r>
+              <a:rPr sz="1300" b="1" i="1" dirty="0">
+                <a:solidFill>
+                  <a:srgbClr val="5C4826"/>
+                </a:solidFill>
+              </a:rPr>
+              <a:t>Each template specifies the input fields the interpreter expects —</a:t>
+            </a:r>
+          </a:p>
+          <a:p>
+            <a:pPr algn="ctr"/>
+            <a:r>
+              <a:rPr sz="1300" b="1" i="1" dirty="0">
+                <a:solidFill>
+                  <a:srgbClr val="5C4826"/>
+                </a:solidFill>
+              </a:rPr>
+              <a:t>and the sensor's integration code builds the input array it reads.</a:t>
+            </a:r>
+          </a:p>
+        </p:txBody>
+      </p:sp>
+      <p:sp>
+        <p:nvSpPr>
+          <p:cNvPr id="910" name="Block"/>
           <p:cNvSpPr/>
           <p:nvPr/>
         </p:nvSpPr>
         <p:spPr>
           <a:xfrm>
-            <a:off x="274320" y="5513831"/>
-            <a:ext cx="8595360" cy="905256"/>
+            <a:off x="2743200" y="1613452"/>
+            <a:ext cx="3657600" cy="502920"/>
           </a:xfrm>
           <a:prstGeom prst="rect">
             <a:avLst/>
@@ -25334,130 +25663,7 @@
           <a:p>
             <a:pPr algn="ctr"/>
             <a:r>
-              <a:rPr sz="2000" b="1" i="0" dirty="0">
-                <a:solidFill>
-                  <a:srgbClr val="FFFFFF"/>
-                </a:solidFill>
-              </a:rPr>
-              <a:t>Two components of the same product disagreed about an interface.</a:t>
-            </a:r>
-          </a:p>
-          <a:p>
-            <a:pPr algn="ctr">
-              <a:spcBef>
-                <a:spcPts val="300"/>
-              </a:spcBef>
-            </a:pPr>
-            <a:r>
-              <a:rPr sz="2000" b="1" i="0" dirty="0">
-                <a:solidFill>
-                  <a:srgbClr val="FFFFFF"/>
-                </a:solidFill>
-              </a:rPr>
-              <a:t>Which assumption was violated — and whose?</a:t>
-            </a:r>
-          </a:p>
-        </p:txBody>
-      </p:sp>
-      <p:sp>
-        <p:nvSpPr>
-          <p:cNvPr id="915" name="Label"/>
-          <p:cNvSpPr txBox="1"/>
-          <p:nvPr/>
-        </p:nvSpPr>
-        <p:spPr>
-          <a:xfrm>
-            <a:off x="548640" y="868680"/>
-            <a:ext cx="8046720" cy="566928"/>
-          </a:xfrm>
-          <a:prstGeom prst="rect">
-            <a:avLst/>
-          </a:prstGeom>
-          <a:noFill/>
-        </p:spPr>
-        <p:txBody>
-          <a:bodyPr wrap="square" lIns="27432" tIns="22860" rIns="27432" bIns="22860" anchor="t">
-            <a:spAutoFit/>
-          </a:bodyPr>
-          <a:lstStyle/>
-          <a:p>
-            <a:pPr algn="ctr"/>
-            <a:r>
-              <a:rPr sz="1300" b="1" i="1">
-                <a:solidFill>
-                  <a:srgbClr val="5C4826"/>
-                </a:solidFill>
-              </a:rPr>
-              <a:t>The sensor interprets detection content using predefined templates.</a:t>
-            </a:r>
-          </a:p>
-          <a:p>
-            <a:pPr algn="ctr"/>
-            <a:r>
-              <a:rPr sz="1300" b="1" i="1">
-                <a:solidFill>
-                  <a:srgbClr val="5C4826"/>
-                </a:solidFill>
-              </a:rPr>
-              <a:t>Each template specifies the input fields the interpreter expects —</a:t>
-            </a:r>
-          </a:p>
-          <a:p>
-            <a:pPr algn="ctr"/>
-            <a:r>
-              <a:rPr sz="1300" b="1" i="1">
-                <a:solidFill>
-                  <a:srgbClr val="5C4826"/>
-                </a:solidFill>
-              </a:rPr>
-              <a:t>and the sensor's integration code builds the input array it reads.</a:t>
-            </a:r>
-          </a:p>
-        </p:txBody>
-      </p:sp>
-      <p:sp>
-        <p:nvSpPr>
-          <p:cNvPr id="910" name="Block"/>
-          <p:cNvSpPr/>
-          <p:nvPr/>
-        </p:nvSpPr>
-        <p:spPr>
-          <a:xfrm>
-            <a:off x="2743200" y="1600200"/>
-            <a:ext cx="3657600" cy="502920"/>
-          </a:xfrm>
-          <a:prstGeom prst="rect">
-            <a:avLst/>
-          </a:prstGeom>
-          <a:solidFill>
-            <a:srgbClr val="8E6F3E"/>
-          </a:solidFill>
-          <a:ln>
-            <a:noFill/>
-          </a:ln>
-          <a:effectLst/>
-        </p:spPr>
-        <p:style>
-          <a:lnRef idx="1">
-            <a:schemeClr val="accent1"/>
-          </a:lnRef>
-          <a:fillRef idx="3">
-            <a:schemeClr val="accent1"/>
-          </a:fillRef>
-          <a:effectRef idx="2">
-            <a:schemeClr val="accent1"/>
-          </a:effectRef>
-          <a:fontRef idx="minor">
-            <a:schemeClr val="lt1"/>
-          </a:fontRef>
-        </p:style>
-        <p:txBody>
-          <a:bodyPr wrap="square" lIns="27432" tIns="22860" rIns="27432" bIns="22860" rtlCol="0" anchor="ctr"/>
-          <a:lstStyle/>
-          <a:p>
-            <a:pPr algn="ctr"/>
-            <a:r>
-              <a:rPr sz="1200" b="1" i="0">
+              <a:rPr b="1" i="0" dirty="0">
                 <a:solidFill>
                   <a:srgbClr val="FFFFFF"/>
                 </a:solidFill>
@@ -25475,7 +25681,7 @@
         </p:nvSpPr>
         <p:spPr>
           <a:xfrm>
-            <a:off x="822960" y="2423160"/>
+            <a:off x="822960" y="2436412"/>
             <a:ext cx="3291840" cy="502920"/>
           </a:xfrm>
           <a:prstGeom prst="rect">
@@ -25529,7 +25735,7 @@
         </p:nvSpPr>
         <p:spPr>
           <a:xfrm>
-            <a:off x="5029200" y="2423160"/>
+            <a:off x="5029200" y="2436412"/>
             <a:ext cx="3291840" cy="502920"/>
           </a:xfrm>
           <a:prstGeom prst="rect">
@@ -25583,7 +25789,7 @@
         </p:nvCxnSpPr>
         <p:spPr>
           <a:xfrm flipH="1">
-            <a:off x="2468880" y="2103120"/>
+            <a:off x="2468880" y="2116372"/>
             <a:ext cx="1554480" cy="320040"/>
           </a:xfrm>
           <a:prstGeom prst="line">
@@ -25619,7 +25825,7 @@
         </p:nvCxnSpPr>
         <p:spPr>
           <a:xfrm>
-            <a:off x="5120640" y="2103120"/>
+            <a:off x="5120640" y="2116372"/>
             <a:ext cx="1554480" cy="320040"/>
           </a:xfrm>
           <a:prstGeom prst="line">
@@ -25655,7 +25861,7 @@
         </p:nvSpPr>
         <p:spPr>
           <a:xfrm>
-            <a:off x="3108960" y="3291840"/>
+            <a:off x="3108960" y="3305092"/>
             <a:ext cx="2926080" cy="502920"/>
           </a:xfrm>
           <a:prstGeom prst="rect">
@@ -25689,7 +25895,7 @@
           <a:p>
             <a:pPr algn="ctr"/>
             <a:r>
-              <a:rPr sz="1200" b="1" i="0">
+              <a:rPr b="1" i="0" dirty="0">
                 <a:solidFill>
                   <a:srgbClr val="FFFFFF"/>
                 </a:solidFill>
@@ -25707,7 +25913,7 @@
         </p:nvCxnSpPr>
         <p:spPr>
           <a:xfrm>
-            <a:off x="2468880" y="2926080"/>
+            <a:off x="2468880" y="2939332"/>
             <a:ext cx="1371600" cy="365759"/>
           </a:xfrm>
           <a:prstGeom prst="line">
@@ -25743,7 +25949,7 @@
         </p:nvCxnSpPr>
         <p:spPr>
           <a:xfrm flipH="1">
-            <a:off x="5303520" y="2926080"/>
+            <a:off x="5303520" y="2939332"/>
             <a:ext cx="1371600" cy="365759"/>
           </a:xfrm>
           <a:prstGeom prst="line">
@@ -25779,8 +25985,8 @@
         </p:nvSpPr>
         <p:spPr>
           <a:xfrm>
-            <a:off x="2926080" y="4114800"/>
-            <a:ext cx="3291840" cy="502920"/>
+            <a:off x="2743200" y="4128052"/>
+            <a:ext cx="3714750" cy="502920"/>
           </a:xfrm>
           <a:prstGeom prst="rect">
             <a:avLst/>
@@ -25815,7 +26021,7 @@
           <a:p>
             <a:pPr algn="ctr"/>
             <a:r>
-              <a:rPr sz="2000" b="1" i="0">
+              <a:rPr sz="2000" b="1" i="0" dirty="0">
                 <a:solidFill>
                   <a:srgbClr val="5C4826"/>
                 </a:solidFill>
@@ -25833,7 +26039,7 @@
         </p:nvCxnSpPr>
         <p:spPr>
           <a:xfrm>
-            <a:off x="4572000" y="3794760"/>
+            <a:off x="4572000" y="3808012"/>
             <a:ext cx="0" cy="320039"/>
           </a:xfrm>
           <a:prstGeom prst="line">
@@ -25869,7 +26075,7 @@
         </p:nvSpPr>
         <p:spPr>
           <a:xfrm>
-            <a:off x="3200400" y="4892040"/>
+            <a:off x="3200400" y="4905292"/>
             <a:ext cx="2743200" cy="502920"/>
           </a:xfrm>
           <a:prstGeom prst="rect">
@@ -25905,7 +26111,7 @@
           <a:p>
             <a:pPr algn="ctr"/>
             <a:r>
-              <a:rPr sz="1200" b="1" i="0">
+              <a:rPr b="1" i="0" dirty="0">
                 <a:solidFill>
                   <a:srgbClr val="FFFFFF"/>
                 </a:solidFill>
@@ -25923,7 +26129,7 @@
         </p:nvCxnSpPr>
         <p:spPr>
           <a:xfrm>
-            <a:off x="4572000" y="4617720"/>
+            <a:off x="4572000" y="4630972"/>
             <a:ext cx="0" cy="274319"/>
           </a:xfrm>
           <a:prstGeom prst="line">
@@ -25951,6 +26157,90 @@
           </a:fontRef>
         </p:style>
       </p:cxnSp>
+      <p:sp>
+        <p:nvSpPr>
+          <p:cNvPr id="4" name="TextBox 3">
+            <a:extLst>
+              <a:ext uri="{FF2B5EF4-FFF2-40B4-BE49-F238E27FC236}">
+                <a16:creationId xmlns:a16="http://schemas.microsoft.com/office/drawing/2014/main" id="{32442F63-036B-2E2C-DDBD-D7DF83C64748}"/>
+              </a:ext>
+            </a:extLst>
+          </p:cNvPr>
+          <p:cNvSpPr txBox="1"/>
+          <p:nvPr/>
+        </p:nvSpPr>
+        <p:spPr>
+          <a:xfrm>
+            <a:off x="5926454" y="4839974"/>
+            <a:ext cx="640080" cy="769441"/>
+          </a:xfrm>
+          <a:prstGeom prst="rect">
+            <a:avLst/>
+          </a:prstGeom>
+          <a:noFill/>
+        </p:spPr>
+        <p:txBody>
+          <a:bodyPr wrap="square">
+            <a:spAutoFit/>
+          </a:bodyPr>
+          <a:lstStyle/>
+          <a:p>
+            <a:r>
+              <a:rPr lang="en-US" sz="4400" b="0" i="0" u="none" strike="noStrike" dirty="0">
+                <a:solidFill>
+                  <a:schemeClr val="tx1"/>
+                </a:solidFill>
+                <a:effectLst/>
+                <a:latin typeface="+mn-lt"/>
+              </a:rPr>
+              <a:t>💀</a:t>
+            </a:r>
+            <a:endParaRPr lang="en-US" sz="4400" dirty="0"/>
+          </a:p>
+        </p:txBody>
+      </p:sp>
+      <p:sp>
+        <p:nvSpPr>
+          <p:cNvPr id="5" name="TextBox 4">
+            <a:extLst>
+              <a:ext uri="{FF2B5EF4-FFF2-40B4-BE49-F238E27FC236}">
+                <a16:creationId xmlns:a16="http://schemas.microsoft.com/office/drawing/2014/main" id="{99E31B27-C6F6-2757-03D1-3434CDDA30CA}"/>
+              </a:ext>
+            </a:extLst>
+          </p:cNvPr>
+          <p:cNvSpPr txBox="1"/>
+          <p:nvPr/>
+        </p:nvSpPr>
+        <p:spPr>
+          <a:xfrm>
+            <a:off x="2423160" y="4839973"/>
+            <a:ext cx="640080" cy="769441"/>
+          </a:xfrm>
+          <a:prstGeom prst="rect">
+            <a:avLst/>
+          </a:prstGeom>
+          <a:noFill/>
+        </p:spPr>
+        <p:txBody>
+          <a:bodyPr wrap="square">
+            <a:spAutoFit/>
+          </a:bodyPr>
+          <a:lstStyle/>
+          <a:p>
+            <a:r>
+              <a:rPr lang="en-US" sz="4400" b="0" i="0" u="none" strike="noStrike" dirty="0">
+                <a:solidFill>
+                  <a:schemeClr val="tx1"/>
+                </a:solidFill>
+                <a:effectLst/>
+                <a:latin typeface="+mn-lt"/>
+              </a:rPr>
+              <a:t>💀</a:t>
+            </a:r>
+            <a:endParaRPr lang="en-US" sz="4400" dirty="0"/>
+          </a:p>
+        </p:txBody>
+      </p:sp>
     </p:spTree>
   </p:cSld>
   <p:clrMapOvr>
@@ -25960,7 +26250,7 @@
 </file>
 
 <file path=ppt/slides/slide5.xml><?xml version="1.0" encoding="utf-8"?>
-<p:sld xmlns:a="http://schemas.openxmlformats.org/drawingml/2006/main" xmlns:p="http://schemas.openxmlformats.org/presentationml/2006/main" xmlns:r="http://schemas.openxmlformats.org/officeDocument/2006/relationships">
+<p:sld xmlns:a="http://schemas.openxmlformats.org/drawingml/2006/main" xmlns:r="http://schemas.openxmlformats.org/officeDocument/2006/relationships" xmlns:p="http://schemas.openxmlformats.org/presentationml/2006/main">
   <p:cSld>
     <p:spTree>
       <p:nvGrpSpPr>
@@ -25968,7 +26258,14 @@
         <p:cNvGrpSpPr/>
         <p:nvPr/>
       </p:nvGrpSpPr>
-      <p:grpSpPr/>
+      <p:grpSpPr>
+        <a:xfrm>
+          <a:off x="0" y="0"/>
+          <a:ext cx="0" cy="0"/>
+          <a:chOff x="0" y="0"/>
+          <a:chExt cx="0" cy="0"/>
+        </a:xfrm>
+      </p:grpSpPr>
       <p:sp>
         <p:nvSpPr>
           <p:cNvPr id="3" name="Title 2"/>
@@ -26014,7 +26311,7 @@
           <a:p>
             <a:fld id="{8D34505B-00B1-4572-8080-1F84ADF8E747}" type="slidenum">
               <a:rPr lang="en-US" smtClean="0"/>
-              <a:t>13</a:t>
+              <a:t>5</a:t>
             </a:fld>
             <a:endParaRPr lang="en-US"/>
           </a:p>
@@ -26358,7 +26655,7 @@
 </file>
 
 <file path=ppt/slides/slide6.xml><?xml version="1.0" encoding="utf-8"?>
-<p:sld xmlns:a="http://schemas.openxmlformats.org/drawingml/2006/main" xmlns:p="http://schemas.openxmlformats.org/presentationml/2006/main" xmlns:r="http://schemas.openxmlformats.org/officeDocument/2006/relationships">
+<p:sld xmlns:a="http://schemas.openxmlformats.org/drawingml/2006/main" xmlns:r="http://schemas.openxmlformats.org/officeDocument/2006/relationships" xmlns:p="http://schemas.openxmlformats.org/presentationml/2006/main">
   <p:cSld>
     <p:spTree>
       <p:nvGrpSpPr>
@@ -26366,7 +26663,14 @@
         <p:cNvGrpSpPr/>
         <p:nvPr/>
       </p:nvGrpSpPr>
-      <p:grpSpPr/>
+      <p:grpSpPr>
+        <a:xfrm>
+          <a:off x="0" y="0"/>
+          <a:ext cx="0" cy="0"/>
+          <a:chOff x="0" y="0"/>
+          <a:chExt cx="0" cy="0"/>
+        </a:xfrm>
+      </p:grpSpPr>
       <p:sp>
         <p:nvSpPr>
           <p:cNvPr id="3" name="Title 2"/>
@@ -26412,7 +26716,7 @@
           <a:p>
             <a:fld id="{3DC31DEB-C161-48EB-8EC4-D4D18487B0EB}" type="slidenum">
               <a:rPr lang="en-US" smtClean="0"/>
-              <a:t>23</a:t>
+              <a:t>6</a:t>
             </a:fld>
             <a:endParaRPr lang="en-US"/>
           </a:p>
@@ -26700,7 +27004,7 @@
 </file>
 
 <file path=ppt/slides/slide7.xml><?xml version="1.0" encoding="utf-8"?>
-<p:sld xmlns:a="http://schemas.openxmlformats.org/drawingml/2006/main" xmlns:p="http://schemas.openxmlformats.org/presentationml/2006/main" xmlns:r="http://schemas.openxmlformats.org/officeDocument/2006/relationships">
+<p:sld xmlns:a="http://schemas.openxmlformats.org/drawingml/2006/main" xmlns:r="http://schemas.openxmlformats.org/officeDocument/2006/relationships" xmlns:p="http://schemas.openxmlformats.org/presentationml/2006/main">
   <p:cSld>
     <p:spTree>
       <p:nvGrpSpPr>
@@ -26708,7 +27012,14 @@
         <p:cNvGrpSpPr/>
         <p:nvPr/>
       </p:nvGrpSpPr>
-      <p:grpSpPr/>
+      <p:grpSpPr>
+        <a:xfrm>
+          <a:off x="0" y="0"/>
+          <a:ext cx="0" cy="0"/>
+          <a:chOff x="0" y="0"/>
+          <a:chExt cx="0" cy="0"/>
+        </a:xfrm>
+      </p:grpSpPr>
       <p:sp>
         <p:nvSpPr>
           <p:cNvPr id="3" name="Title 2"/>
@@ -26754,7 +27065,7 @@
           <a:p>
             <a:fld id="{CB54B3D1-5BA3-40A8-8017-74A0DF3C7182}" type="slidenum">
               <a:rPr lang="en-US" smtClean="0"/>
-              <a:t>24</a:t>
+              <a:t>7</a:t>
             </a:fld>
             <a:endParaRPr lang="en-US"/>
           </a:p>
@@ -27631,7 +27942,7 @@
       </p:cxnSp>
       <p:cxnSp>
         <p:nvCxnSpPr>
-          <p:cNvPr id="911" name="Connector 911"/>
+          <p:cNvPr id="5" name="Connector 911"/>
           <p:cNvCxnSpPr/>
           <p:nvPr/>
         </p:nvCxnSpPr>
@@ -27667,7 +27978,7 @@
       </p:cxnSp>
       <p:cxnSp>
         <p:nvCxnSpPr>
-          <p:cNvPr id="911" name="Connector 911"/>
+          <p:cNvPr id="6" name="Connector 911"/>
           <p:cNvCxnSpPr/>
           <p:nvPr/>
         </p:nvCxnSpPr>
@@ -27703,7 +28014,7 @@
       </p:cxnSp>
       <p:cxnSp>
         <p:nvCxnSpPr>
-          <p:cNvPr id="911" name="Connector 911"/>
+          <p:cNvPr id="7" name="Connector 911"/>
           <p:cNvCxnSpPr/>
           <p:nvPr/>
         </p:nvCxnSpPr>
@@ -27739,7 +28050,7 @@
       </p:cxnSp>
       <p:cxnSp>
         <p:nvCxnSpPr>
-          <p:cNvPr id="911" name="Connector 911"/>
+          <p:cNvPr id="8" name="Connector 911"/>
           <p:cNvCxnSpPr/>
           <p:nvPr/>
         </p:nvCxnSpPr>
@@ -27782,7 +28093,7 @@
 </file>
 
 <file path=ppt/slides/slide8.xml><?xml version="1.0" encoding="utf-8"?>
-<p:sld xmlns:a="http://schemas.openxmlformats.org/drawingml/2006/main" xmlns:p="http://schemas.openxmlformats.org/presentationml/2006/main" xmlns:r="http://schemas.openxmlformats.org/officeDocument/2006/relationships">
+<p:sld xmlns:a="http://schemas.openxmlformats.org/drawingml/2006/main" xmlns:r="http://schemas.openxmlformats.org/officeDocument/2006/relationships" xmlns:p="http://schemas.openxmlformats.org/presentationml/2006/main">
   <p:cSld>
     <p:spTree>
       <p:nvGrpSpPr>
@@ -27790,7 +28101,14 @@
         <p:cNvGrpSpPr/>
         <p:nvPr/>
       </p:nvGrpSpPr>
-      <p:grpSpPr/>
+      <p:grpSpPr>
+        <a:xfrm>
+          <a:off x="0" y="0"/>
+          <a:ext cx="0" cy="0"/>
+          <a:chOff x="0" y="0"/>
+          <a:chExt cx="0" cy="0"/>
+        </a:xfrm>
+      </p:grpSpPr>
       <p:sp>
         <p:nvSpPr>
           <p:cNvPr id="3" name="Title 2"/>
@@ -27836,7 +28154,7 @@
           <a:p>
             <a:fld id="{E3DB674E-A080-44A8-A874-38AE3C84A5E2}" type="slidenum">
               <a:rPr lang="en-US" smtClean="0"/>
-              <a:t>14</a:t>
+              <a:t>8</a:t>
             </a:fld>
             <a:endParaRPr lang="en-US"/>
           </a:p>
@@ -28872,7 +29190,7 @@
 </file>
 
 <file path=ppt/slides/slide9.xml><?xml version="1.0" encoding="utf-8"?>
-<p:sld xmlns:a="http://schemas.openxmlformats.org/drawingml/2006/main" xmlns:p="http://schemas.openxmlformats.org/presentationml/2006/main" xmlns:r="http://schemas.openxmlformats.org/officeDocument/2006/relationships">
+<p:sld xmlns:a="http://schemas.openxmlformats.org/drawingml/2006/main" xmlns:r="http://schemas.openxmlformats.org/officeDocument/2006/relationships" xmlns:p="http://schemas.openxmlformats.org/presentationml/2006/main">
   <p:cSld>
     <p:spTree>
       <p:nvGrpSpPr>
@@ -28880,7 +29198,14 @@
         <p:cNvGrpSpPr/>
         <p:nvPr/>
       </p:nvGrpSpPr>
-      <p:grpSpPr/>
+      <p:grpSpPr>
+        <a:xfrm>
+          <a:off x="0" y="0"/>
+          <a:ext cx="0" cy="0"/>
+          <a:chOff x="0" y="0"/>
+          <a:chExt cx="0" cy="0"/>
+        </a:xfrm>
+      </p:grpSpPr>
       <p:sp>
         <p:nvSpPr>
           <p:cNvPr id="3" name="Title 2"/>
@@ -28926,7 +29251,7 @@
           <a:p>
             <a:fld id="{8CF8A65D-8523-4C39-BD83-5C787F1FA9B3}" type="slidenum">
               <a:rPr lang="en-US" smtClean="0"/>
-              <a:t>10</a:t>
+              <a:t>9</a:t>
             </a:fld>
             <a:endParaRPr lang="en-US"/>
           </a:p>
@@ -29512,11 +29837,6 @@
               </a:rPr>
               <a:t>GAP — no test used a non-wildcard criterion for field 21</a:t>
             </a:r>
-            <a:endParaRPr sz="2000" b="1" i="0" dirty="0">
-              <a:solidFill>
-                <a:srgbClr val="555960"/>
-              </a:solidFill>
-            </a:endParaRPr>
           </a:p>
         </p:txBody>
       </p:sp>

--- a/course/lectures/act-2-delegation-and-control/04-failure-aware-engineering/2-4-Failure-Aware-Engineering.pptx
+++ b/course/lectures/act-2-delegation-and-control/04-failure-aware-engineering/2-4-Failure-Aware-Engineering.pptx
@@ -3614,7 +3614,7 @@
           <a:lstStyle/>
           <a:p>
             <a:r>
-              <a:t>TIMING: 4 minutes. THE TECHNICAL CORE.</a:t>
+              <a:t>TIMING: 4 minutes. THE TECHNICAL CORE. Walk the flow top-down, then the array panel: 21 declared vs 20 supplied. The wildcard branch is WHY this stayed latent for months — say so, because slide 7 depends on it. Point at the MISSING CHECK box and ask where the incompatibility should have been caught; take two answers, do NOT resolve it — slide 6 makes them commit and slide 7 walks the defenses. Carry the qualification out loud: this is illustrative control flow, not Falcon's source.</a:t>
             </a:r>
           </a:p>
           <a:p>
@@ -25524,20 +25524,8 @@
           <a:lstStyle/>
           <a:p>
             <a:r>
-              <a:rPr lang="en-US" sz="2400" b="0" i="0" dirty="0">
-                <a:solidFill>
-                  <a:srgbClr val="000000"/>
-                </a:solidFill>
-              </a:rPr>
-              <a:t>Cause: </a:t>
-            </a:r>
-            <a:r>
-              <a:rPr sz="2400" b="0" i="0" dirty="0">
-                <a:solidFill>
-                  <a:srgbClr val="000000"/>
-                </a:solidFill>
-              </a:rPr>
-              <a:t>The content and the interpreter disagreed</a:t>
+              <a:rPr sz="2400"/>
+              <a:t>Cause: a missing input causes an out-of-bounds read</a:t>
             </a:r>
           </a:p>
         </p:txBody>
@@ -25574,7 +25562,7 @@
         <p:spPr>
           <a:xfrm>
             <a:off x="548640" y="868680"/>
-            <a:ext cx="8046720" cy="566928"/>
+            <a:ext cx="8046720" cy="457200"/>
           </a:xfrm>
           <a:prstGeom prst="rect">
             <a:avLst/>
@@ -25587,576 +25575,13 @@
           </a:bodyPr>
           <a:lstStyle/>
           <a:p>
-            <a:pPr algn="ctr"/>
-            <a:r>
-              <a:rPr sz="1300" b="1" i="1" dirty="0">
-                <a:solidFill>
-                  <a:srgbClr val="5C4826"/>
-                </a:solidFill>
-              </a:rPr>
-              <a:t>The sensor interprets detection content using predefined templates.</a:t>
-            </a:r>
-          </a:p>
-          <a:p>
-            <a:pPr algn="ctr"/>
-            <a:r>
-              <a:rPr sz="1300" b="1" i="1" dirty="0">
-                <a:solidFill>
-                  <a:srgbClr val="5C4826"/>
-                </a:solidFill>
-              </a:rPr>
-              <a:t>Each template specifies the input fields the interpreter expects —</a:t>
-            </a:r>
-          </a:p>
-          <a:p>
-            <a:pPr algn="ctr"/>
-            <a:r>
-              <a:rPr sz="1300" b="1" i="1" dirty="0">
-                <a:solidFill>
-                  <a:srgbClr val="5C4826"/>
-                </a:solidFill>
-              </a:rPr>
-              <a:t>and the sensor's integration code builds the input array it reads.</a:t>
-            </a:r>
-          </a:p>
-        </p:txBody>
-      </p:sp>
-      <p:sp>
-        <p:nvSpPr>
-          <p:cNvPr id="910" name="Block"/>
-          <p:cNvSpPr/>
-          <p:nvPr/>
-        </p:nvSpPr>
-        <p:spPr>
-          <a:xfrm>
-            <a:off x="2743200" y="1613452"/>
-            <a:ext cx="3657600" cy="502920"/>
-          </a:xfrm>
-          <a:prstGeom prst="rect">
-            <a:avLst/>
-          </a:prstGeom>
-          <a:solidFill>
-            <a:srgbClr val="8E6F3E"/>
-          </a:solidFill>
-          <a:ln>
-            <a:noFill/>
-          </a:ln>
-          <a:effectLst/>
-        </p:spPr>
-        <p:style>
-          <a:lnRef idx="1">
-            <a:schemeClr val="accent1"/>
-          </a:lnRef>
-          <a:fillRef idx="3">
-            <a:schemeClr val="accent1"/>
-          </a:fillRef>
-          <a:effectRef idx="2">
-            <a:schemeClr val="accent1"/>
-          </a:effectRef>
-          <a:fontRef idx="minor">
-            <a:schemeClr val="lt1"/>
-          </a:fontRef>
-        </p:style>
-        <p:txBody>
-          <a:bodyPr wrap="square" lIns="27432" tIns="22860" rIns="27432" bIns="22860" rtlCol="0" anchor="ctr"/>
-          <a:lstStyle/>
-          <a:p>
-            <a:pPr algn="ctr"/>
-            <a:r>
-              <a:rPr b="1" i="0" dirty="0">
-                <a:solidFill>
-                  <a:srgbClr val="FFFFFF"/>
-                </a:solidFill>
-              </a:rPr>
-              <a:t>TEMPLATE DEFINITION: 21 FIELDS</a:t>
-            </a:r>
-          </a:p>
-        </p:txBody>
-      </p:sp>
-      <p:sp>
-        <p:nvSpPr>
-          <p:cNvPr id="912" name="Card"/>
-          <p:cNvSpPr/>
-          <p:nvPr/>
-        </p:nvSpPr>
-        <p:spPr>
-          <a:xfrm>
-            <a:off x="822960" y="2436412"/>
-            <a:ext cx="3291840" cy="502920"/>
-          </a:xfrm>
-          <a:prstGeom prst="rect">
-            <a:avLst/>
-          </a:prstGeom>
-          <a:solidFill>
-            <a:srgbClr val="F5F1E8"/>
-          </a:solidFill>
-          <a:ln w="12700">
-            <a:solidFill>
-              <a:srgbClr val="C9B991"/>
-            </a:solidFill>
-          </a:ln>
-          <a:effectLst/>
-        </p:spPr>
-        <p:style>
-          <a:lnRef idx="1">
-            <a:schemeClr val="accent1"/>
-          </a:lnRef>
-          <a:fillRef idx="3">
-            <a:schemeClr val="accent1"/>
-          </a:fillRef>
-          <a:effectRef idx="2">
-            <a:schemeClr val="accent1"/>
-          </a:effectRef>
-          <a:fontRef idx="minor">
-            <a:schemeClr val="lt1"/>
-          </a:fontRef>
-        </p:style>
-        <p:txBody>
-          <a:bodyPr wrap="square" lIns="27432" tIns="22860" rIns="27432" bIns="22860" rtlCol="0" anchor="ctr"/>
-          <a:lstStyle/>
-          <a:p>
-            <a:pPr algn="ctr"/>
-            <a:r>
-              <a:rPr sz="2000" b="1" i="0">
-                <a:solidFill>
-                  <a:srgbClr val="5C4826"/>
-                </a:solidFill>
-              </a:rPr>
-              <a:t>content expects 21 inputs</a:t>
-            </a:r>
-          </a:p>
-        </p:txBody>
-      </p:sp>
-      <p:sp>
-        <p:nvSpPr>
-          <p:cNvPr id="1000" name="Card"/>
-          <p:cNvSpPr/>
-          <p:nvPr/>
-        </p:nvSpPr>
-        <p:spPr>
-          <a:xfrm>
-            <a:off x="5029200" y="2436412"/>
-            <a:ext cx="3291840" cy="502920"/>
-          </a:xfrm>
-          <a:prstGeom prst="rect">
-            <a:avLst/>
-          </a:prstGeom>
-          <a:solidFill>
-            <a:srgbClr val="F5F1E8"/>
-          </a:solidFill>
-          <a:ln w="12700">
-            <a:solidFill>
-              <a:srgbClr val="C9B991"/>
-            </a:solidFill>
-          </a:ln>
-          <a:effectLst/>
-        </p:spPr>
-        <p:style>
-          <a:lnRef idx="1">
-            <a:schemeClr val="accent1"/>
-          </a:lnRef>
-          <a:fillRef idx="3">
-            <a:schemeClr val="accent1"/>
-          </a:fillRef>
-          <a:effectRef idx="2">
-            <a:schemeClr val="accent1"/>
-          </a:effectRef>
-          <a:fontRef idx="minor">
-            <a:schemeClr val="lt1"/>
-          </a:fontRef>
-        </p:style>
-        <p:txBody>
-          <a:bodyPr wrap="square" lIns="27432" tIns="22860" rIns="27432" bIns="22860" rtlCol="0" anchor="ctr"/>
-          <a:lstStyle/>
-          <a:p>
-            <a:pPr algn="ctr"/>
-            <a:r>
-              <a:rPr sz="2000" b="1" i="0">
-                <a:solidFill>
-                  <a:srgbClr val="5C4826"/>
-                </a:solidFill>
-              </a:rPr>
-              <a:t>integration code supplies 20</a:t>
-            </a:r>
-          </a:p>
-        </p:txBody>
-      </p:sp>
-      <p:cxnSp>
-        <p:nvCxnSpPr>
-          <p:cNvPr id="911" name="Connector 911"/>
-          <p:cNvCxnSpPr/>
-          <p:nvPr/>
-        </p:nvCxnSpPr>
-        <p:spPr>
-          <a:xfrm flipH="1">
-            <a:off x="2468880" y="2116372"/>
-            <a:ext cx="1554480" cy="320040"/>
-          </a:xfrm>
-          <a:prstGeom prst="line">
-            <a:avLst/>
-          </a:prstGeom>
-          <a:ln w="28575">
-            <a:solidFill>
-              <a:srgbClr val="8E6F3E"/>
-            </a:solidFill>
-            <a:tailEnd type="triangle"/>
-          </a:ln>
-        </p:spPr>
-        <p:style>
-          <a:lnRef idx="2">
-            <a:schemeClr val="accent1"/>
-          </a:lnRef>
-          <a:fillRef idx="0">
-            <a:schemeClr val="accent1"/>
-          </a:fillRef>
-          <a:effectRef idx="1">
-            <a:schemeClr val="accent1"/>
-          </a:effectRef>
-          <a:fontRef idx="minor">
-            <a:schemeClr val="tx1"/>
-          </a:fontRef>
-        </p:style>
-      </p:cxnSp>
-      <p:cxnSp>
-        <p:nvCxnSpPr>
-          <p:cNvPr id="1001" name="Connector 911"/>
-          <p:cNvCxnSpPr/>
-          <p:nvPr/>
-        </p:nvCxnSpPr>
-        <p:spPr>
-          <a:xfrm>
-            <a:off x="5120640" y="2116372"/>
-            <a:ext cx="1554480" cy="320040"/>
-          </a:xfrm>
-          <a:prstGeom prst="line">
-            <a:avLst/>
-          </a:prstGeom>
-          <a:ln w="28575">
-            <a:solidFill>
-              <a:srgbClr val="8E6F3E"/>
-            </a:solidFill>
-            <a:tailEnd type="triangle"/>
-          </a:ln>
-        </p:spPr>
-        <p:style>
-          <a:lnRef idx="2">
-            <a:schemeClr val="accent1"/>
-          </a:lnRef>
-          <a:fillRef idx="0">
-            <a:schemeClr val="accent1"/>
-          </a:fillRef>
-          <a:effectRef idx="1">
-            <a:schemeClr val="accent1"/>
-          </a:effectRef>
-          <a:fontRef idx="minor">
-            <a:schemeClr val="tx1"/>
-          </a:fontRef>
-        </p:style>
-      </p:cxnSp>
-      <p:sp>
-        <p:nvSpPr>
-          <p:cNvPr id="1002" name="Block"/>
-          <p:cNvSpPr/>
-          <p:nvPr/>
-        </p:nvSpPr>
-        <p:spPr>
-          <a:xfrm>
-            <a:off x="3108960" y="3305092"/>
-            <a:ext cx="2926080" cy="502920"/>
-          </a:xfrm>
-          <a:prstGeom prst="rect">
-            <a:avLst/>
-          </a:prstGeom>
-          <a:solidFill>
-            <a:srgbClr val="8E6F3E"/>
-          </a:solidFill>
-          <a:ln>
-            <a:noFill/>
-          </a:ln>
-          <a:effectLst/>
-        </p:spPr>
-        <p:style>
-          <a:lnRef idx="1">
-            <a:schemeClr val="accent1"/>
-          </a:lnRef>
-          <a:fillRef idx="3">
-            <a:schemeClr val="accent1"/>
-          </a:fillRef>
-          <a:effectRef idx="2">
-            <a:schemeClr val="accent1"/>
-          </a:effectRef>
-          <a:fontRef idx="minor">
-            <a:schemeClr val="lt1"/>
-          </a:fontRef>
-        </p:style>
-        <p:txBody>
-          <a:bodyPr wrap="square" lIns="27432" tIns="22860" rIns="27432" bIns="22860" rtlCol="0" anchor="ctr"/>
-          <a:lstStyle/>
-          <a:p>
-            <a:pPr algn="ctr"/>
-            <a:r>
-              <a:rPr b="1" i="0" dirty="0">
-                <a:solidFill>
-                  <a:srgbClr val="FFFFFF"/>
-                </a:solidFill>
-              </a:rPr>
-              <a:t>INPUT ARRAY [0 … 19]</a:t>
-            </a:r>
-          </a:p>
-        </p:txBody>
-      </p:sp>
-      <p:cxnSp>
-        <p:nvCxnSpPr>
-          <p:cNvPr id="1003" name="Connector 911"/>
-          <p:cNvCxnSpPr/>
-          <p:nvPr/>
-        </p:nvCxnSpPr>
-        <p:spPr>
-          <a:xfrm>
-            <a:off x="2468880" y="2939332"/>
-            <a:ext cx="1371600" cy="365759"/>
-          </a:xfrm>
-          <a:prstGeom prst="line">
-            <a:avLst/>
-          </a:prstGeom>
-          <a:ln w="28575">
-            <a:solidFill>
-              <a:srgbClr val="8E6F3E"/>
-            </a:solidFill>
-            <a:tailEnd type="triangle"/>
-          </a:ln>
-        </p:spPr>
-        <p:style>
-          <a:lnRef idx="2">
-            <a:schemeClr val="accent1"/>
-          </a:lnRef>
-          <a:fillRef idx="0">
-            <a:schemeClr val="accent1"/>
-          </a:fillRef>
-          <a:effectRef idx="1">
-            <a:schemeClr val="accent1"/>
-          </a:effectRef>
-          <a:fontRef idx="minor">
-            <a:schemeClr val="tx1"/>
-          </a:fontRef>
-        </p:style>
-      </p:cxnSp>
-      <p:cxnSp>
-        <p:nvCxnSpPr>
-          <p:cNvPr id="1004" name="Connector 911"/>
-          <p:cNvCxnSpPr/>
-          <p:nvPr/>
-        </p:nvCxnSpPr>
-        <p:spPr>
-          <a:xfrm flipH="1">
-            <a:off x="5303520" y="2939332"/>
-            <a:ext cx="1371600" cy="365759"/>
-          </a:xfrm>
-          <a:prstGeom prst="line">
-            <a:avLst/>
-          </a:prstGeom>
-          <a:ln w="28575">
-            <a:solidFill>
-              <a:srgbClr val="8E6F3E"/>
-            </a:solidFill>
-            <a:tailEnd type="triangle"/>
-          </a:ln>
-        </p:spPr>
-        <p:style>
-          <a:lnRef idx="2">
-            <a:schemeClr val="accent1"/>
-          </a:lnRef>
-          <a:fillRef idx="0">
-            <a:schemeClr val="accent1"/>
-          </a:fillRef>
-          <a:effectRef idx="1">
-            <a:schemeClr val="accent1"/>
-          </a:effectRef>
-          <a:fontRef idx="minor">
-            <a:schemeClr val="tx1"/>
-          </a:fontRef>
-        </p:style>
-      </p:cxnSp>
-      <p:sp>
-        <p:nvSpPr>
-          <p:cNvPr id="1005" name="Card"/>
-          <p:cNvSpPr/>
-          <p:nvPr/>
-        </p:nvSpPr>
-        <p:spPr>
-          <a:xfrm>
-            <a:off x="2743200" y="4128052"/>
-            <a:ext cx="3714750" cy="502920"/>
-          </a:xfrm>
-          <a:prstGeom prst="rect">
-            <a:avLst/>
-          </a:prstGeom>
-          <a:solidFill>
-            <a:srgbClr val="F5F1E8"/>
-          </a:solidFill>
-          <a:ln w="12700">
-            <a:solidFill>
-              <a:srgbClr val="C9B991"/>
-            </a:solidFill>
-          </a:ln>
-          <a:effectLst/>
-        </p:spPr>
-        <p:style>
-          <a:lnRef idx="1">
-            <a:schemeClr val="accent1"/>
-          </a:lnRef>
-          <a:fillRef idx="3">
-            <a:schemeClr val="accent1"/>
-          </a:fillRef>
-          <a:effectRef idx="2">
-            <a:schemeClr val="accent1"/>
-          </a:effectRef>
-          <a:fontRef idx="minor">
-            <a:schemeClr val="lt1"/>
-          </a:fontRef>
-        </p:style>
-        <p:txBody>
-          <a:bodyPr wrap="square" lIns="27432" tIns="22860" rIns="27432" bIns="22860" rtlCol="0" anchor="ctr"/>
-          <a:lstStyle/>
-          <a:p>
-            <a:pPr algn="ctr"/>
-            <a:r>
-              <a:rPr sz="2000" b="1" i="0" dirty="0">
-                <a:solidFill>
-                  <a:srgbClr val="5C4826"/>
-                </a:solidFill>
-              </a:rPr>
-              <a:t>interpreter attempts access [20]</a:t>
-            </a:r>
-          </a:p>
-        </p:txBody>
-      </p:sp>
-      <p:cxnSp>
-        <p:nvCxnSpPr>
-          <p:cNvPr id="1006" name="Connector 911"/>
-          <p:cNvCxnSpPr/>
-          <p:nvPr/>
-        </p:nvCxnSpPr>
-        <p:spPr>
-          <a:xfrm>
-            <a:off x="4572000" y="3808012"/>
-            <a:ext cx="0" cy="320039"/>
-          </a:xfrm>
-          <a:prstGeom prst="line">
-            <a:avLst/>
-          </a:prstGeom>
-          <a:ln w="28575">
-            <a:solidFill>
-              <a:srgbClr val="8E6F3E"/>
-            </a:solidFill>
-            <a:tailEnd type="triangle"/>
-          </a:ln>
-        </p:spPr>
-        <p:style>
-          <a:lnRef idx="2">
-            <a:schemeClr val="accent1"/>
-          </a:lnRef>
-          <a:fillRef idx="0">
-            <a:schemeClr val="accent1"/>
-          </a:fillRef>
-          <a:effectRef idx="1">
-            <a:schemeClr val="accent1"/>
-          </a:effectRef>
-          <a:fontRef idx="minor">
-            <a:schemeClr val="tx1"/>
-          </a:fontRef>
-        </p:style>
-      </p:cxnSp>
-      <p:sp>
-        <p:nvSpPr>
-          <p:cNvPr id="1007" name="Block"/>
-          <p:cNvSpPr/>
-          <p:nvPr/>
-        </p:nvSpPr>
-        <p:spPr>
-          <a:xfrm>
-            <a:off x="3200400" y="4905292"/>
-            <a:ext cx="2743200" cy="502920"/>
-          </a:xfrm>
-          <a:prstGeom prst="rect">
-            <a:avLst/>
-          </a:prstGeom>
-          <a:solidFill>
-            <a:srgbClr val="8E6F3E"/>
-          </a:solidFill>
-          <a:ln w="25400">
-            <a:solidFill>
-              <a:srgbClr val="B3261E"/>
-            </a:solidFill>
-          </a:ln>
-          <a:effectLst/>
-        </p:spPr>
-        <p:style>
-          <a:lnRef idx="1">
-            <a:schemeClr val="accent1"/>
-          </a:lnRef>
-          <a:fillRef idx="3">
-            <a:schemeClr val="accent1"/>
-          </a:fillRef>
-          <a:effectRef idx="2">
-            <a:schemeClr val="accent1"/>
-          </a:effectRef>
-          <a:fontRef idx="minor">
-            <a:schemeClr val="lt1"/>
-          </a:fontRef>
-        </p:style>
-        <p:txBody>
-          <a:bodyPr wrap="square" lIns="27432" tIns="22860" rIns="27432" bIns="22860" rtlCol="0" anchor="ctr"/>
-          <a:lstStyle/>
-          <a:p>
-            <a:pPr algn="ctr"/>
-            <a:r>
-              <a:rPr b="1" i="0" dirty="0">
-                <a:solidFill>
-                  <a:srgbClr val="FFFFFF"/>
-                </a:solidFill>
-              </a:rPr>
-              <a:t>OUT-OF-BOUNDS READ</a:t>
-            </a:r>
-          </a:p>
-        </p:txBody>
-      </p:sp>
-      <p:cxnSp>
-        <p:nvCxnSpPr>
-          <p:cNvPr id="1008" name="Connector 911"/>
-          <p:cNvCxnSpPr/>
-          <p:nvPr/>
-        </p:nvCxnSpPr>
-        <p:spPr>
-          <a:xfrm>
-            <a:off x="4572000" y="4630972"/>
-            <a:ext cx="0" cy="274319"/>
-          </a:xfrm>
-          <a:prstGeom prst="line">
-            <a:avLst/>
-          </a:prstGeom>
-          <a:ln w="28575">
-            <a:solidFill>
-              <a:srgbClr val="8E6F3E"/>
-            </a:solidFill>
-            <a:tailEnd type="triangle"/>
-          </a:ln>
-        </p:spPr>
-        <p:style>
-          <a:lnRef idx="2">
-            <a:schemeClr val="accent1"/>
-          </a:lnRef>
-          <a:fillRef idx="0">
-            <a:schemeClr val="accent1"/>
-          </a:fillRef>
-          <a:effectRef idx="1">
-            <a:schemeClr val="accent1"/>
-          </a:effectRef>
-          <a:fontRef idx="minor">
-            <a:schemeClr val="tx1"/>
-          </a:fontRef>
-        </p:style>
-      </p:cxnSp>
+            <a:r>
+              <a:rPr sz="1200"/>
+              <a:t>The template declares the fields the interpreter expects; the sensor's integration code builds the array it reads. A field is read only when its matching criterion is not a wildcard.</a:t>
+            </a:r>
+          </a:p>
+        </p:txBody>
+      </p:sp>
       <p:sp>
         <p:nvSpPr>
           <p:cNvPr id="4" name="TextBox 3">
@@ -26171,8 +25596,8 @@
         </p:nvSpPr>
         <p:spPr>
           <a:xfrm>
-            <a:off x="5926454" y="4839974"/>
-            <a:ext cx="640080" cy="769441"/>
+            <a:off x="3584448" y="5138928"/>
+            <a:ext cx="566928" cy="566928"/>
           </a:xfrm>
           <a:prstGeom prst="rect">
             <a:avLst/>
@@ -26186,7 +25611,7 @@
           <a:lstStyle/>
           <a:p>
             <a:r>
-              <a:rPr lang="en-US" sz="4400" b="0" i="0" u="none" strike="noStrike" dirty="0">
+              <a:rPr lang="en-US" sz="2800" b="0" i="0" u="none" strike="noStrike" dirty="0">
                 <a:solidFill>
                   <a:schemeClr val="tx1"/>
                 </a:solidFill>
@@ -26213,8 +25638,8 @@
         </p:nvSpPr>
         <p:spPr>
           <a:xfrm>
-            <a:off x="2423160" y="4839973"/>
-            <a:ext cx="640080" cy="769441"/>
+            <a:off x="566928" y="5138928"/>
+            <a:ext cx="566928" cy="566928"/>
           </a:xfrm>
           <a:prstGeom prst="rect">
             <a:avLst/>
@@ -26228,7 +25653,7 @@
           <a:lstStyle/>
           <a:p>
             <a:r>
-              <a:rPr lang="en-US" sz="4400" b="0" i="0" u="none" strike="noStrike" dirty="0">
+              <a:rPr lang="en-US" sz="2800" b="0" i="0" u="none" strike="noStrike" dirty="0">
                 <a:solidFill>
                   <a:schemeClr val="tx1"/>
                 </a:solidFill>
@@ -26238,6 +25663,910 @@
               <a:t>💀</a:t>
             </a:r>
             <a:endParaRPr lang="en-US" sz="4400" dirty="0"/>
+          </a:p>
+        </p:txBody>
+      </p:sp>
+      <p:sp>
+        <p:nvSpPr>
+          <p:cNvPr id="901" name="Block"/>
+          <p:cNvSpPr/>
+          <p:nvPr/>
+        </p:nvSpPr>
+        <p:spPr>
+          <a:xfrm>
+            <a:off x="502920" y="1371600"/>
+            <a:ext cx="3749039" cy="402336"/>
+          </a:xfrm>
+          <a:prstGeom prst="rect">
+            <a:avLst/>
+          </a:prstGeom>
+          <a:solidFill>
+            <a:srgbClr val="8E6F3E"/>
+          </a:solidFill>
+          <a:ln>
+            <a:noFill/>
+          </a:ln>
+          <a:effectLst/>
+        </p:spPr>
+        <p:style>
+          <a:lnRef idx="1">
+            <a:schemeClr val="accent1"/>
+          </a:lnRef>
+          <a:fillRef idx="3">
+            <a:schemeClr val="accent1"/>
+          </a:fillRef>
+          <a:effectRef idx="2">
+            <a:schemeClr val="accent1"/>
+          </a:effectRef>
+          <a:fontRef idx="minor">
+            <a:schemeClr val="lt1"/>
+          </a:fontRef>
+        </p:style>
+        <p:txBody>
+          <a:bodyPr wrap="square" lIns="27432" tIns="22860" rIns="27432" bIns="22860" rtlCol="0" anchor="ctr"/>
+          <a:lstStyle/>
+          <a:p>
+            <a:r>
+              <a:rPr sz="1300"/>
+              <a:t>TEMPLATE DECLARES 21 FIELDS   [0 … 20]</a:t>
+            </a:r>
+          </a:p>
+        </p:txBody>
+      </p:sp>
+      <p:sp>
+        <p:nvSpPr>
+          <p:cNvPr id="901" name="Block"/>
+          <p:cNvSpPr/>
+          <p:nvPr/>
+        </p:nvSpPr>
+        <p:spPr>
+          <a:xfrm>
+            <a:off x="502920" y="1975104"/>
+            <a:ext cx="3749039" cy="402336"/>
+          </a:xfrm>
+          <a:prstGeom prst="rect">
+            <a:avLst/>
+          </a:prstGeom>
+          <a:solidFill>
+            <a:srgbClr val="8E6F3E"/>
+          </a:solidFill>
+          <a:ln>
+            <a:noFill/>
+          </a:ln>
+          <a:effectLst/>
+        </p:spPr>
+        <p:style>
+          <a:lnRef idx="1">
+            <a:schemeClr val="accent1"/>
+          </a:lnRef>
+          <a:fillRef idx="3">
+            <a:schemeClr val="accent1"/>
+          </a:fillRef>
+          <a:effectRef idx="2">
+            <a:schemeClr val="accent1"/>
+          </a:effectRef>
+          <a:fontRef idx="minor">
+            <a:schemeClr val="lt1"/>
+          </a:fontRef>
+        </p:style>
+        <p:txBody>
+          <a:bodyPr wrap="square" lIns="27432" tIns="22860" rIns="27432" bIns="22860" rtlCol="0" anchor="ctr"/>
+          <a:lstStyle/>
+          <a:p>
+            <a:r>
+              <a:rPr sz="1300"/>
+              <a:t>INTEGRATION CODE SUPPLIES 20 INPUTS   [0 … 19]</a:t>
+            </a:r>
+          </a:p>
+        </p:txBody>
+      </p:sp>
+      <p:sp>
+        <p:nvSpPr>
+          <p:cNvPr id="901" name="Block"/>
+          <p:cNvSpPr/>
+          <p:nvPr/>
+        </p:nvSpPr>
+        <p:spPr>
+          <a:xfrm>
+            <a:off x="502920" y="2578608"/>
+            <a:ext cx="3749039" cy="402336"/>
+          </a:xfrm>
+          <a:prstGeom prst="rect">
+            <a:avLst/>
+          </a:prstGeom>
+          <a:solidFill>
+            <a:srgbClr val="8E6F3E"/>
+          </a:solidFill>
+          <a:ln>
+            <a:noFill/>
+          </a:ln>
+          <a:effectLst/>
+        </p:spPr>
+        <p:style>
+          <a:lnRef idx="1">
+            <a:schemeClr val="accent1"/>
+          </a:lnRef>
+          <a:fillRef idx="3">
+            <a:schemeClr val="accent1"/>
+          </a:fillRef>
+          <a:effectRef idx="2">
+            <a:schemeClr val="accent1"/>
+          </a:effectRef>
+          <a:fontRef idx="minor">
+            <a:schemeClr val="lt1"/>
+          </a:fontRef>
+        </p:style>
+        <p:txBody>
+          <a:bodyPr wrap="square" lIns="27432" tIns="22860" rIns="27432" bIns="22860" rtlCol="0" anchor="ctr"/>
+          <a:lstStyle/>
+          <a:p>
+            <a:r>
+              <a:rPr sz="1300"/>
+              <a:t>FOR EACH FIELD  i</a:t>
+            </a:r>
+          </a:p>
+        </p:txBody>
+      </p:sp>
+      <p:sp>
+        <p:nvSpPr>
+          <p:cNvPr id="920" name="LevelQuestion"/>
+          <p:cNvSpPr/>
+          <p:nvPr/>
+        </p:nvSpPr>
+        <p:spPr>
+          <a:xfrm>
+            <a:off x="502920" y="3182112"/>
+            <a:ext cx="3749039" cy="402336"/>
+          </a:xfrm>
+          <a:prstGeom prst="rect">
+            <a:avLst/>
+          </a:prstGeom>
+          <a:noFill/>
+          <a:ln>
+            <a:noFill/>
+          </a:ln>
+          <a:effectLst/>
+        </p:spPr>
+        <p:style>
+          <a:lnRef idx="1">
+            <a:schemeClr val="accent1"/>
+          </a:lnRef>
+          <a:fillRef idx="3">
+            <a:schemeClr val="accent1"/>
+          </a:fillRef>
+          <a:effectRef idx="2">
+            <a:schemeClr val="accent1"/>
+          </a:effectRef>
+          <a:fontRef idx="minor">
+            <a:schemeClr val="lt1"/>
+          </a:fontRef>
+        </p:style>
+        <p:txBody>
+          <a:bodyPr wrap="square" lIns="27432" tIns="22860" rIns="27432" bIns="22860" rtlCol="0" anchor="ctr"/>
+          <a:lstStyle/>
+          <a:p>
+            <a:r>
+              <a:rPr sz="1300"/>
+              <a:t>is criterion[ i ] a wildcard?</a:t>
+            </a:r>
+          </a:p>
+        </p:txBody>
+      </p:sp>
+      <p:sp>
+        <p:nvSpPr>
+          <p:cNvPr id="912" name="Card"/>
+          <p:cNvSpPr/>
+          <p:nvPr/>
+        </p:nvSpPr>
+        <p:spPr>
+          <a:xfrm>
+            <a:off x="502920" y="3986784"/>
+            <a:ext cx="3749039" cy="402336"/>
+          </a:xfrm>
+          <a:prstGeom prst="rect">
+            <a:avLst/>
+          </a:prstGeom>
+          <a:solidFill>
+            <a:srgbClr val="F5F1E8"/>
+          </a:solidFill>
+          <a:ln w="12700">
+            <a:solidFill>
+              <a:srgbClr val="C9B991"/>
+            </a:solidFill>
+          </a:ln>
+          <a:effectLst/>
+        </p:spPr>
+        <p:style>
+          <a:lnRef idx="1">
+            <a:schemeClr val="accent1"/>
+          </a:lnRef>
+          <a:fillRef idx="3">
+            <a:schemeClr val="accent1"/>
+          </a:fillRef>
+          <a:effectRef idx="2">
+            <a:schemeClr val="accent1"/>
+          </a:effectRef>
+          <a:fontRef idx="minor">
+            <a:schemeClr val="lt1"/>
+          </a:fontRef>
+        </p:style>
+        <p:txBody>
+          <a:bodyPr wrap="square" lIns="27432" tIns="22860" rIns="27432" bIns="22860" rtlCol="0" anchor="ctr"/>
+          <a:lstStyle/>
+          <a:p>
+            <a:r>
+              <a:rPr sz="1300"/>
+              <a:t>no  →  READ inputs[ i ]</a:t>
+            </a:r>
+          </a:p>
+        </p:txBody>
+      </p:sp>
+      <p:sp>
+        <p:nvSpPr>
+          <p:cNvPr id="901" name="Block"/>
+          <p:cNvSpPr/>
+          <p:nvPr/>
+        </p:nvSpPr>
+        <p:spPr>
+          <a:xfrm>
+            <a:off x="914400" y="4590288"/>
+            <a:ext cx="2926080" cy="402336"/>
+          </a:xfrm>
+          <a:prstGeom prst="rect">
+            <a:avLst/>
+          </a:prstGeom>
+          <a:solidFill>
+            <a:srgbClr val="8E6F3E"/>
+          </a:solidFill>
+          <a:ln>
+            <a:noFill/>
+          </a:ln>
+          <a:effectLst/>
+        </p:spPr>
+        <p:style>
+          <a:lnRef idx="1">
+            <a:schemeClr val="accent1"/>
+          </a:lnRef>
+          <a:fillRef idx="3">
+            <a:schemeClr val="accent1"/>
+          </a:fillRef>
+          <a:effectRef idx="2">
+            <a:schemeClr val="accent1"/>
+          </a:effectRef>
+          <a:fontRef idx="minor">
+            <a:schemeClr val="lt1"/>
+          </a:fontRef>
+        </p:style>
+        <p:txBody>
+          <a:bodyPr wrap="square" lIns="27432" tIns="22860" rIns="27432" bIns="22860" rtlCol="0" anchor="ctr"/>
+          <a:lstStyle/>
+          <a:p>
+            <a:r>
+              <a:rPr sz="1300">
+                <a:solidFill>
+                  <a:srgbClr val="C01B1B"/>
+                </a:solidFill>
+              </a:rPr>
+              <a:t>at  i = 20 :  inputs[20] does not exist</a:t>
+            </a:r>
+          </a:p>
+        </p:txBody>
+      </p:sp>
+      <p:sp>
+        <p:nvSpPr>
+          <p:cNvPr id="901" name="Block"/>
+          <p:cNvSpPr/>
+          <p:nvPr/>
+        </p:nvSpPr>
+        <p:spPr>
+          <a:xfrm>
+            <a:off x="1280160" y="5193792"/>
+            <a:ext cx="2194560" cy="438912"/>
+          </a:xfrm>
+          <a:prstGeom prst="rect">
+            <a:avLst/>
+          </a:prstGeom>
+          <a:solidFill>
+            <a:srgbClr val="8E6F3E"/>
+          </a:solidFill>
+          <a:ln>
+            <a:noFill/>
+          </a:ln>
+          <a:effectLst/>
+        </p:spPr>
+        <p:style>
+          <a:lnRef idx="1">
+            <a:schemeClr val="accent1"/>
+          </a:lnRef>
+          <a:fillRef idx="3">
+            <a:schemeClr val="accent1"/>
+          </a:fillRef>
+          <a:effectRef idx="2">
+            <a:schemeClr val="accent1"/>
+          </a:effectRef>
+          <a:fontRef idx="minor">
+            <a:schemeClr val="lt1"/>
+          </a:fontRef>
+        </p:style>
+        <p:txBody>
+          <a:bodyPr wrap="square" lIns="27432" tIns="22860" rIns="27432" bIns="22860" rtlCol="0" anchor="ctr"/>
+          <a:lstStyle/>
+          <a:p>
+            <a:r>
+              <a:rPr sz="1300">
+                <a:solidFill>
+                  <a:srgbClr val="C01B1B"/>
+                </a:solidFill>
+              </a:rPr>
+              <a:t>OUT-OF-BOUNDS READ  →  SENSOR CRASH</a:t>
+            </a:r>
+          </a:p>
+        </p:txBody>
+      </p:sp>
+      <p:cxnSp>
+        <p:nvCxnSpPr>
+          <p:cNvPr id="902" name="Connector 901"/>
+          <p:cNvCxnSpPr/>
+          <p:nvPr/>
+        </p:nvCxnSpPr>
+        <p:spPr>
+          <a:xfrm>
+            <a:off x="2377439" y="1773936"/>
+            <a:ext cx="0" cy="201168"/>
+          </a:xfrm>
+          <a:prstGeom prst="line">
+            <a:avLst/>
+          </a:prstGeom>
+          <a:ln w="19050">
+            <a:solidFill>
+              <a:srgbClr val="8E6F3E"/>
+            </a:solidFill>
+            <a:tailEnd type="triangle"/>
+          </a:ln>
+        </p:spPr>
+        <p:style>
+          <a:lnRef idx="2">
+            <a:schemeClr val="accent1"/>
+          </a:lnRef>
+          <a:fillRef idx="0">
+            <a:schemeClr val="accent1"/>
+          </a:fillRef>
+          <a:effectRef idx="1">
+            <a:schemeClr val="accent1"/>
+          </a:effectRef>
+          <a:fontRef idx="minor">
+            <a:schemeClr val="tx1"/>
+          </a:fontRef>
+        </p:style>
+      </p:cxnSp>
+      <p:cxnSp>
+        <p:nvCxnSpPr>
+          <p:cNvPr id="902" name="Connector 901"/>
+          <p:cNvCxnSpPr/>
+          <p:nvPr/>
+        </p:nvCxnSpPr>
+        <p:spPr>
+          <a:xfrm>
+            <a:off x="2377439" y="2377440"/>
+            <a:ext cx="0" cy="201168"/>
+          </a:xfrm>
+          <a:prstGeom prst="line">
+            <a:avLst/>
+          </a:prstGeom>
+          <a:ln w="19050">
+            <a:solidFill>
+              <a:srgbClr val="8E6F3E"/>
+            </a:solidFill>
+            <a:tailEnd type="triangle"/>
+          </a:ln>
+        </p:spPr>
+        <p:style>
+          <a:lnRef idx="2">
+            <a:schemeClr val="accent1"/>
+          </a:lnRef>
+          <a:fillRef idx="0">
+            <a:schemeClr val="accent1"/>
+          </a:fillRef>
+          <a:effectRef idx="1">
+            <a:schemeClr val="accent1"/>
+          </a:effectRef>
+          <a:fontRef idx="minor">
+            <a:schemeClr val="tx1"/>
+          </a:fontRef>
+        </p:style>
+      </p:cxnSp>
+      <p:cxnSp>
+        <p:nvCxnSpPr>
+          <p:cNvPr id="902" name="Connector 901"/>
+          <p:cNvCxnSpPr/>
+          <p:nvPr/>
+        </p:nvCxnSpPr>
+        <p:spPr>
+          <a:xfrm>
+            <a:off x="2377439" y="2980944"/>
+            <a:ext cx="0" cy="201168"/>
+          </a:xfrm>
+          <a:prstGeom prst="line">
+            <a:avLst/>
+          </a:prstGeom>
+          <a:ln w="19050">
+            <a:solidFill>
+              <a:srgbClr val="8E6F3E"/>
+            </a:solidFill>
+            <a:tailEnd type="triangle"/>
+          </a:ln>
+        </p:spPr>
+        <p:style>
+          <a:lnRef idx="2">
+            <a:schemeClr val="accent1"/>
+          </a:lnRef>
+          <a:fillRef idx="0">
+            <a:schemeClr val="accent1"/>
+          </a:fillRef>
+          <a:effectRef idx="1">
+            <a:schemeClr val="accent1"/>
+          </a:effectRef>
+          <a:fontRef idx="minor">
+            <a:schemeClr val="tx1"/>
+          </a:fontRef>
+        </p:style>
+      </p:cxnSp>
+      <p:cxnSp>
+        <p:nvCxnSpPr>
+          <p:cNvPr id="902" name="Connector 901"/>
+          <p:cNvCxnSpPr/>
+          <p:nvPr/>
+        </p:nvCxnSpPr>
+        <p:spPr>
+          <a:xfrm>
+            <a:off x="2377439" y="3584448"/>
+            <a:ext cx="0" cy="402336"/>
+          </a:xfrm>
+          <a:prstGeom prst="line">
+            <a:avLst/>
+          </a:prstGeom>
+          <a:ln w="19050">
+            <a:solidFill>
+              <a:srgbClr val="8E6F3E"/>
+            </a:solidFill>
+            <a:tailEnd type="triangle"/>
+          </a:ln>
+        </p:spPr>
+        <p:style>
+          <a:lnRef idx="2">
+            <a:schemeClr val="accent1"/>
+          </a:lnRef>
+          <a:fillRef idx="0">
+            <a:schemeClr val="accent1"/>
+          </a:fillRef>
+          <a:effectRef idx="1">
+            <a:schemeClr val="accent1"/>
+          </a:effectRef>
+          <a:fontRef idx="minor">
+            <a:schemeClr val="tx1"/>
+          </a:fontRef>
+        </p:style>
+      </p:cxnSp>
+      <p:cxnSp>
+        <p:nvCxnSpPr>
+          <p:cNvPr id="902" name="Connector 901"/>
+          <p:cNvCxnSpPr/>
+          <p:nvPr/>
+        </p:nvCxnSpPr>
+        <p:spPr>
+          <a:xfrm>
+            <a:off x="2377439" y="4389120"/>
+            <a:ext cx="0" cy="201168"/>
+          </a:xfrm>
+          <a:prstGeom prst="line">
+            <a:avLst/>
+          </a:prstGeom>
+          <a:ln w="19050">
+            <a:solidFill>
+              <a:srgbClr val="8E6F3E"/>
+            </a:solidFill>
+            <a:tailEnd type="triangle"/>
+          </a:ln>
+        </p:spPr>
+        <p:style>
+          <a:lnRef idx="2">
+            <a:schemeClr val="accent1"/>
+          </a:lnRef>
+          <a:fillRef idx="0">
+            <a:schemeClr val="accent1"/>
+          </a:fillRef>
+          <a:effectRef idx="1">
+            <a:schemeClr val="accent1"/>
+          </a:effectRef>
+          <a:fontRef idx="minor">
+            <a:schemeClr val="tx1"/>
+          </a:fontRef>
+        </p:style>
+      </p:cxnSp>
+      <p:cxnSp>
+        <p:nvCxnSpPr>
+          <p:cNvPr id="902" name="Connector 901"/>
+          <p:cNvCxnSpPr/>
+          <p:nvPr/>
+        </p:nvCxnSpPr>
+        <p:spPr>
+          <a:xfrm>
+            <a:off x="2377439" y="4992624"/>
+            <a:ext cx="0" cy="201168"/>
+          </a:xfrm>
+          <a:prstGeom prst="line">
+            <a:avLst/>
+          </a:prstGeom>
+          <a:ln w="19050">
+            <a:solidFill>
+              <a:srgbClr val="8E6F3E"/>
+            </a:solidFill>
+            <a:tailEnd type="triangle"/>
+          </a:ln>
+        </p:spPr>
+        <p:style>
+          <a:lnRef idx="2">
+            <a:schemeClr val="accent1"/>
+          </a:lnRef>
+          <a:fillRef idx="0">
+            <a:schemeClr val="accent1"/>
+          </a:fillRef>
+          <a:effectRef idx="1">
+            <a:schemeClr val="accent1"/>
+          </a:effectRef>
+          <a:fontRef idx="minor">
+            <a:schemeClr val="tx1"/>
+          </a:fontRef>
+        </p:style>
+      </p:cxnSp>
+      <p:sp>
+        <p:nvSpPr>
+          <p:cNvPr id="920" name="LevelQuestion"/>
+          <p:cNvSpPr/>
+          <p:nvPr/>
+        </p:nvSpPr>
+        <p:spPr>
+          <a:xfrm>
+            <a:off x="4526280" y="3182112"/>
+            <a:ext cx="4297680" cy="402336"/>
+          </a:xfrm>
+          <a:prstGeom prst="rect">
+            <a:avLst/>
+          </a:prstGeom>
+          <a:noFill/>
+          <a:ln>
+            <a:noFill/>
+          </a:ln>
+          <a:effectLst/>
+        </p:spPr>
+        <p:style>
+          <a:lnRef idx="1">
+            <a:schemeClr val="accent1"/>
+          </a:lnRef>
+          <a:fillRef idx="3">
+            <a:schemeClr val="accent1"/>
+          </a:fillRef>
+          <a:effectRef idx="2">
+            <a:schemeClr val="accent1"/>
+          </a:effectRef>
+          <a:fontRef idx="minor">
+            <a:schemeClr val="lt1"/>
+          </a:fontRef>
+        </p:style>
+        <p:txBody>
+          <a:bodyPr wrap="square" lIns="27432" tIns="22860" rIns="27432" bIns="22860" rtlCol="0" anchor="ctr"/>
+          <a:lstStyle/>
+          <a:p>
+            <a:r>
+              <a:rPr sz="1200"/>
+              <a:t>yes  →  match anything; field never read</a:t>
+            </a:r>
+          </a:p>
+        </p:txBody>
+      </p:sp>
+      <p:sp>
+        <p:nvSpPr>
+          <p:cNvPr id="912" name="Card"/>
+          <p:cNvSpPr/>
+          <p:nvPr/>
+        </p:nvSpPr>
+        <p:spPr>
+          <a:xfrm>
+            <a:off x="4526280" y="3986784"/>
+            <a:ext cx="4297680" cy="402336"/>
+          </a:xfrm>
+          <a:prstGeom prst="rect">
+            <a:avLst/>
+          </a:prstGeom>
+          <a:solidFill>
+            <a:srgbClr val="F5F1E8"/>
+          </a:solidFill>
+          <a:ln w="12700">
+            <a:solidFill>
+              <a:srgbClr val="C9B991"/>
+            </a:solidFill>
+          </a:ln>
+          <a:effectLst/>
+        </p:spPr>
+        <p:style>
+          <a:lnRef idx="1">
+            <a:schemeClr val="accent1"/>
+          </a:lnRef>
+          <a:fillRef idx="3">
+            <a:schemeClr val="accent1"/>
+          </a:fillRef>
+          <a:effectRef idx="2">
+            <a:schemeClr val="accent1"/>
+          </a:effectRef>
+          <a:fontRef idx="minor">
+            <a:schemeClr val="lt1"/>
+          </a:fontRef>
+        </p:style>
+        <p:txBody>
+          <a:bodyPr wrap="square" lIns="27432" tIns="22860" rIns="27432" bIns="22860" rtlCol="0" anchor="ctr"/>
+          <a:lstStyle/>
+          <a:p>
+            <a:r>
+              <a:rPr sz="1200">
+                <a:solidFill>
+                  <a:srgbClr val="C01B1B"/>
+                </a:solidFill>
+              </a:rPr>
+              <a:t>MISSING CHECK:   i &lt; inputs.length ?</a:t>
+            </a:r>
+          </a:p>
+        </p:txBody>
+      </p:sp>
+      <p:cxnSp>
+        <p:nvCxnSpPr>
+          <p:cNvPr id="911" name="Connector 911"/>
+          <p:cNvCxnSpPr/>
+          <p:nvPr/>
+        </p:nvCxnSpPr>
+        <p:spPr>
+          <a:xfrm>
+            <a:off x="4251959" y="3383280"/>
+            <a:ext cx="274320" cy="0"/>
+          </a:xfrm>
+          <a:prstGeom prst="line">
+            <a:avLst/>
+          </a:prstGeom>
+          <a:ln w="28575">
+            <a:solidFill>
+              <a:srgbClr val="8E6F3E"/>
+            </a:solidFill>
+            <a:tailEnd type="triangle"/>
+          </a:ln>
+        </p:spPr>
+        <p:style>
+          <a:lnRef idx="2">
+            <a:schemeClr val="accent1"/>
+          </a:lnRef>
+          <a:fillRef idx="0">
+            <a:schemeClr val="accent1"/>
+          </a:fillRef>
+          <a:effectRef idx="1">
+            <a:schemeClr val="accent1"/>
+          </a:effectRef>
+          <a:fontRef idx="minor">
+            <a:schemeClr val="tx1"/>
+          </a:fontRef>
+        </p:style>
+      </p:cxnSp>
+      <p:cxnSp>
+        <p:nvCxnSpPr>
+          <p:cNvPr id="911" name="Connector 911"/>
+          <p:cNvCxnSpPr/>
+          <p:nvPr/>
+        </p:nvCxnSpPr>
+        <p:spPr>
+          <a:xfrm>
+            <a:off x="4251959" y="4187952"/>
+            <a:ext cx="274320" cy="0"/>
+          </a:xfrm>
+          <a:prstGeom prst="line">
+            <a:avLst/>
+          </a:prstGeom>
+          <a:ln w="28575">
+            <a:solidFill>
+              <a:srgbClr val="8E6F3E"/>
+            </a:solidFill>
+            <a:tailEnd type="triangle"/>
+          </a:ln>
+        </p:spPr>
+        <p:style>
+          <a:lnRef idx="2">
+            <a:schemeClr val="accent1"/>
+          </a:lnRef>
+          <a:fillRef idx="0">
+            <a:schemeClr val="accent1"/>
+          </a:fillRef>
+          <a:effectRef idx="1">
+            <a:schemeClr val="accent1"/>
+          </a:effectRef>
+          <a:fontRef idx="minor">
+            <a:schemeClr val="tx1"/>
+          </a:fontRef>
+        </p:style>
+      </p:cxnSp>
+      <p:sp>
+        <p:nvSpPr>
+          <p:cNvPr id="915" name="Label"/>
+          <p:cNvSpPr txBox="1"/>
+          <p:nvPr/>
+        </p:nvSpPr>
+        <p:spPr>
+          <a:xfrm>
+            <a:off x="4572000" y="1371600"/>
+            <a:ext cx="2011680" cy="274320"/>
+          </a:xfrm>
+          <a:prstGeom prst="rect">
+            <a:avLst/>
+          </a:prstGeom>
+          <a:noFill/>
+        </p:spPr>
+        <p:txBody>
+          <a:bodyPr wrap="square" lIns="27432" tIns="22860" rIns="27432" bIns="22860" anchor="t">
+            <a:spAutoFit/>
+          </a:bodyPr>
+          <a:lstStyle/>
+          <a:p>
+            <a:r>
+              <a:rPr sz="1100"/>
+              <a:t>TEMPLATE  [0 … 20]</a:t>
+            </a:r>
+          </a:p>
+        </p:txBody>
+      </p:sp>
+      <p:sp>
+        <p:nvSpPr>
+          <p:cNvPr id="915" name="Label"/>
+          <p:cNvSpPr txBox="1"/>
+          <p:nvPr/>
+        </p:nvSpPr>
+        <p:spPr>
+          <a:xfrm>
+            <a:off x="6720840" y="1371600"/>
+            <a:ext cx="2011680" cy="274320"/>
+          </a:xfrm>
+          <a:prstGeom prst="rect">
+            <a:avLst/>
+          </a:prstGeom>
+          <a:noFill/>
+        </p:spPr>
+        <p:txBody>
+          <a:bodyPr wrap="square" lIns="27432" tIns="22860" rIns="27432" bIns="22860" anchor="t">
+            <a:spAutoFit/>
+          </a:bodyPr>
+          <a:lstStyle/>
+          <a:p>
+            <a:r>
+              <a:rPr sz="1100"/>
+              <a:t>INPUTS  [0 … 19]</a:t>
+            </a:r>
+          </a:p>
+        </p:txBody>
+      </p:sp>
+      <p:sp>
+        <p:nvSpPr>
+          <p:cNvPr id="915" name="Label"/>
+          <p:cNvSpPr txBox="1"/>
+          <p:nvPr/>
+        </p:nvSpPr>
+        <p:spPr>
+          <a:xfrm>
+            <a:off x="4572000" y="1700784"/>
+            <a:ext cx="2011680" cy="932688"/>
+          </a:xfrm>
+          <a:prstGeom prst="rect">
+            <a:avLst/>
+          </a:prstGeom>
+          <a:noFill/>
+        </p:spPr>
+        <p:txBody>
+          <a:bodyPr wrap="square" lIns="27432" tIns="22860" rIns="27432" bIns="22860" anchor="t">
+            <a:spAutoFit/>
+          </a:bodyPr>
+          <a:lstStyle/>
+          <a:p>
+            <a:r>
+              <a:rPr sz="1100"/>
+              <a:t>[18]  present</a:t>
+            </a:r>
+          </a:p>
+          <a:p>
+            <a:r>
+              <a:rPr sz="1100"/>
+              <a:t>[19]  present</a:t>
+            </a:r>
+          </a:p>
+          <a:p>
+            <a:r>
+              <a:rPr sz="1100"/>
+              <a:t>[20]  declared</a:t>
+            </a:r>
+          </a:p>
+        </p:txBody>
+      </p:sp>
+      <p:sp>
+        <p:nvSpPr>
+          <p:cNvPr id="915" name="Label"/>
+          <p:cNvSpPr txBox="1"/>
+          <p:nvPr/>
+        </p:nvSpPr>
+        <p:spPr>
+          <a:xfrm>
+            <a:off x="6720840" y="1700784"/>
+            <a:ext cx="2011680" cy="932688"/>
+          </a:xfrm>
+          <a:prstGeom prst="rect">
+            <a:avLst/>
+          </a:prstGeom>
+          <a:noFill/>
+        </p:spPr>
+        <p:txBody>
+          <a:bodyPr wrap="square" lIns="27432" tIns="22860" rIns="27432" bIns="22860" anchor="t">
+            <a:spAutoFit/>
+          </a:bodyPr>
+          <a:lstStyle/>
+          <a:p>
+            <a:r>
+              <a:rPr sz="1100">
+                <a:solidFill>
+                  <a:srgbClr val="C01B1B"/>
+                </a:solidFill>
+              </a:rPr>
+              <a:t>[18]  present</a:t>
+            </a:r>
+          </a:p>
+          <a:p>
+            <a:r>
+              <a:rPr sz="1100">
+                <a:solidFill>
+                  <a:srgbClr val="C01B1B"/>
+                </a:solidFill>
+              </a:rPr>
+              <a:t>[19]  present</a:t>
+            </a:r>
+          </a:p>
+          <a:p>
+            <a:r>
+              <a:rPr sz="1100">
+                <a:solidFill>
+                  <a:srgbClr val="C01B1B"/>
+                </a:solidFill>
+              </a:rPr>
+              <a:t>[20]  —  none  —</a:t>
+            </a:r>
+          </a:p>
+        </p:txBody>
+      </p:sp>
+      <p:sp>
+        <p:nvSpPr>
+          <p:cNvPr id="915" name="Label"/>
+          <p:cNvSpPr txBox="1"/>
+          <p:nvPr/>
+        </p:nvSpPr>
+        <p:spPr>
+          <a:xfrm>
+            <a:off x="502920" y="5797296"/>
+            <a:ext cx="8321040" cy="475488"/>
+          </a:xfrm>
+          <a:prstGeom prst="rect">
+            <a:avLst/>
+          </a:prstGeom>
+          <a:noFill/>
+        </p:spPr>
+        <p:txBody>
+          <a:bodyPr wrap="square" lIns="27432" tIns="22860" rIns="27432" bIns="22860" anchor="t">
+            <a:spAutoFit/>
+          </a:bodyPr>
+          <a:lstStyle/>
+          <a:p>
+            <a:r>
+              <a:rPr sz="1000"/>
+              <a:t>Illustrative control flow, not the Falcon interpreter's source. The RCA establishes the invalid access and the missing bounds check — not that it occurred in precisely this loop.</a:t>
+            </a:r>
           </a:p>
         </p:txBody>
       </p:sp>

--- a/course/lectures/act-2-delegation-and-control/04-failure-aware-engineering/2-4-Failure-Aware-Engineering.pptx
+++ b/course/lectures/act-2-delegation-and-control/04-failure-aware-engineering/2-4-Failure-Aware-Engineering.pptx
@@ -13,7 +13,6 @@
     <p:sldId id="305" r:id="rId4"/>
     <p:sldId id="306" r:id="rId5"/>
     <p:sldId id="307" r:id="rId6"/>
-    <p:sldId id="308" r:id="rId7"/>
     <p:sldId id="309" r:id="rId8"/>
     <p:sldId id="310" r:id="rId9"/>
     <p:sldId id="311" r:id="rId10"/>
@@ -780,7 +779,7 @@
           </a:lstStyle>
           <a:p>
             <a:fld id="{27E8B4C4-0720-F64E-9EEE-9472CF165DC6}" type="datetimeFigureOut">
-              <a:t>10/16/26</a:t>
+              <a:t>10/22/26</a:t>
             </a:fld>
             <a:endParaRPr lang="en-US"/>
           </a:p>
@@ -1126,7 +1125,7 @@
           </a:p>
           <a:p>
             <a:r>
-              <a:t>BUDGET: the TIMING lines across the deck now sum to 75 minutes, with the slide-6 commitment discussion, the slide-27 FMEA transfer exercise, and the slide-29 diagnosis exercise protected.</a:t>
+              <a:t>BUDGET: the TIMING lines across the deck now sum to 71 minutes (was 75; the A/B/C commitment slide and its 4 minutes were deleted 261022, and slide 5 took 2 of them back for the component-model repair), with the slide-6 commitment discussion, the slide-27 FMEA transfer exercise, and the slide-29 diagnosis exercise protected.</a:t>
             </a:r>
           </a:p>
         </p:txBody>
@@ -1311,7 +1310,7 @@
           </a:p>
           <a:p>
             <a:r>
-              <a:t>FACTUAL GROUNDING: map each row to slide 9's findings. CrowdStrike's added bounds check is a general invariant — it holds for every spec-allowed content instance, not just Channel File 291. Their staged-rollout commitment is containment (CrowdStrike RCA, 6 Aug 2024).</a:t>
+              <a:t>FACTUAL GROUNDING: map each row to slide 8's findings. CrowdStrike's added bounds check is a general invariant — it holds for every spec-allowed content instance, not just Channel File 291. Their staged-rollout commitment is containment (CrowdStrike RCA, 6 Aug 2024).</a:t>
             </a:r>
           </a:p>
           <a:p>
@@ -1916,7 +1915,7 @@
           <a:lstStyle/>
           <a:p>
             <a:r>
-              <a:t>TIMING: 2 minutes. THE CENTRAL CONCEPTUAL PAYOFF OF MOVEMENT 3. PACING (author reallocation 261015): state the common-cause principle once and do not re-derive it — slide 18 carries the architectural discussion and keeps its protected 4 minutes.</a:t>
+              <a:t>TIMING: 2 minutes. THE CENTRAL CONCEPTUAL PAYOFF OF MOVEMENT 3. PACING (author reallocation 261015): state the common-cause principle once and do not re-derive it — slide 17 carries the architectural discussion and keeps its protected 4 minutes.</a:t>
             </a:r>
           </a:p>
           <a:p>
@@ -2431,7 +2430,7 @@
           <a:lstStyle/>
           <a:p>
             <a:r>
-              <a:t>TIMING: 1 minutes. OPENS MOVEMENT 4 — what should change? DELIVER EFFICIENTLY (author pacing note): present the ladder and pose the footer question rhetorically — this movement's active-learning weight now lives in the FMEA exercise (slide 27) and the diagnosis exercise (slide 29).</a:t>
+              <a:t>TIMING: 1 minutes. OPENS MOVEMENT 4 — what should change? DELIVER EFFICIENTLY (author pacing note): present the ladder and pose the footer question rhetorically — this movement's active-learning weight now lives in the FMEA exercise (slide 26) and the diagnosis exercise (slide 28).</a:t>
             </a:r>
           </a:p>
           <a:p>
@@ -2464,12 +2463,10 @@
               <a:t>BRIDGE (author): the jump from comparing causal models to reading postmortems needs its connective sentence, now on the slide — once engineers have an explanation, they must determine what the evidence justifies changing. A postmortem is the document where that determination is argued.</a:t>
             </a:r>
           </a:p>
-          <a:p>
-            <a:endParaRPr/>
-          </a:p>
-          <a:p>
-            <a:r>
-              <a:t>PROGRESSION (say it, do not re-explain slides 10/11/16-19): this slide asks WHAT LESSON THE EVIDENCE JUSTIFIES.</a:t>
+          <a:p/>
+          <a:p>
+            <a:r>
+              <a:t>PROGRESSION (say it, do not re-explain slides 9/10/15-18): this slide asks WHAT LESSON THE EVIDENCE JUSTIFIES.</a:t>
             </a:r>
           </a:p>
         </p:txBody>
@@ -2901,12 +2898,10 @@
               <a:t>TRANSITION: everything so far reasons BACKWARD from a failure that already happened. Can the discipline run FORWARD — before any failure occurs? Next: a structured method for searching for failures in advance, tried first on the incident we now know thoroughly.</a:t>
             </a:r>
           </a:p>
-          <a:p>
-            <a:endParaRPr/>
-          </a:p>
-          <a:p>
-            <a:r>
-              <a:t>PROGRESSION: 24 found the authority. This slide asks HOW WE WILL KNOW THE CHANGE WORKED. Do not re-run slide 11's argument — point back to it.</a:t>
+          <a:p/>
+          <a:p>
+            <a:r>
+              <a:t>PROGRESSION: 24 found the authority. This slide asks HOW WE WILL KNOW THE CHANGE WORKED. Do not re-run slide 10's argument — point back to it.</a:t>
             </a:r>
           </a:p>
         </p:txBody>
@@ -2986,17 +2981,17 @@
           </a:p>
           <a:p>
             <a:r>
-              <a:t>BUILD (ANIMATION-IN-SPEECH — no authored animation; run the reveal as staged speech): Step 1 — read the lead and the four-step PROCEDURE at the top, before any row: identify a plausible failure mode; determine its consequences; identify existing or proposed controls; decide whether the remaining risk warrants action. This is the method slide 27 asks students to run unaided. Step 2 — only then walk the worked table one row at a time, naming which procedure step each column instantiates (failure mode -&gt; step 1, effect -&gt; step 2, candidate control -&gt; step 3). Step 3 — close on the occurrence line at the bottom: deciding which modes warrant action under unknown probabilities IS step 4.</a:t>
-            </a:r>
-          </a:p>
-          <a:p>
-            <a:r>
-              <a:t>THE WORKED TABLE: each row: a FUNCTION of the system we know thoroughly, a failure mode, its effect, a candidate control — all met on slides 21–25.</a:t>
-            </a:r>
-          </a:p>
-          <a:p>
-            <a:r>
-              <a:t>CARE — the staged-rollout row (cross-reference slide 25): HAVING a staged-rollout mechanism is not the same as having one that reliably detects and contains the failure mode; a rollout that advances without meaningful health checks offers little protection.</a:t>
+              <a:t>BUILD (ANIMATION-IN-SPEECH — no authored animation; run the reveal as staged speech): Step 1 — read the lead and the four-step PROCEDURE at the top, before any row: identify a plausible failure mode; determine its consequences; identify existing or proposed controls; decide whether the remaining risk warrants action. This is the method slide 26 asks students to run unaided. Step 2 — only then walk the worked table one row at a time, naming which procedure step each column instantiates (failure mode -&gt; step 1, effect -&gt; step 2, candidate control -&gt; step 3). Step 3 — close on the occurrence line at the bottom: deciding which modes warrant action under unknown probabilities IS step 4.</a:t>
+            </a:r>
+          </a:p>
+          <a:p>
+            <a:r>
+              <a:t>THE WORKED TABLE: each row: a FUNCTION of the system we know thoroughly, a failure mode, its effect, a candidate control — all met on slides 20–24.</a:t>
+            </a:r>
+          </a:p>
+          <a:p>
+            <a:r>
+              <a:t>CARE — the staged-rollout row (cross-reference slide 24): HAVING a staged-rollout mechanism is not the same as having one that reliably detects and contains the failure mode; a rollout that advances without meaningful health checks offers little protection.</a:t>
             </a:r>
           </a:p>
           <a:p>
@@ -3329,7 +3324,7 @@
           </a:p>
           <a:p>
             <a:r>
-              <a:t>POSSIBLE ANSWERS (Cloudflare post-mortem, July 2019): COMPONENT-LEVEL — pathological regex under a backtracking engine; reject dangerous complexity, move to an engine with runtime guarantees (Cloudflare's own remediation: re2 or Rust regex), or impose resource bounds. SWISS CHEESE — defenses existed (PR approval, CI/CD, change tickets, SOPs, alerting) and failed in sequence: the test suite measured RUNTIME, not CPU — 'no increase in test suite run time was observed' with the fatal rule; a CPU protection had been accidentally REMOVED weeks earlier; the SOP permitted a non-emergency rule to skip staged rollout. Note the contrast with slide 9: at Cloudflare a defense existed and was removed — a different finding from one never built. STAMP — a constraint like 'a WAF rule update must not consume enough resources to compromise unrelated traffic'; examine rule authors, validation, deployment controllers, monitoring, and what feedback each received.</a:t>
+              <a:t>POSSIBLE ANSWERS (Cloudflare post-mortem, July 2019): COMPONENT-LEVEL — pathological regex under a backtracking engine; reject dangerous complexity, move to an engine with runtime guarantees (Cloudflare's own remediation: re2 or Rust regex), or impose resource bounds. SWISS CHEESE — defenses existed (PR approval, CI/CD, change tickets, SOPs, alerting) and failed in sequence: the test suite measured RUNTIME, not CPU — 'no increase in test suite run time was observed' with the fatal rule; a CPU protection had been accidentally REMOVED weeks earlier; the SOP permitted a non-emergency rule to skip staged rollout. Note the contrast with slide 8: at Cloudflare a defense existed and was removed — a different finding from one never built. STAMP — a constraint like 'a WAF rule update must not consume enough resources to compromise unrelated traffic'; examine rule authors, validation, deployment controllers, monitoring, and what feedback each received.</a:t>
             </a:r>
           </a:p>
           <a:p>
@@ -3424,7 +3419,7 @@
           </a:p>
           <a:p>
             <a:r>
-              <a:t>DOCUMENTED (CrowdStrike RCA, 6 Aug 2024): the defective artifact was a Rapid Response Content update, not an ordinary Windows OS update; Rapid Response Content could be updated independently of sensor-code releases — a faster release path. HOLD that faster-path observation for Movement 2 (slide 7) unless a student raises it; here it is premature.</a:t>
+              <a:t>DOCUMENTED (CrowdStrike RCA, 6 Aug 2024): the defective artifact was a Rapid Response Content update, not an ordinary Windows OS update; Rapid Response Content could be updated independently of sensor-code releases — a faster release path. HOLD that faster-path observation for Movement 2 (slide 6) unless a student raises it; here it is premature.</a:t>
             </a:r>
           </a:p>
           <a:p>
@@ -3614,7 +3609,7 @@
           <a:lstStyle/>
           <a:p>
             <a:r>
-              <a:t>TIMING: 4 minutes. THE TECHNICAL CORE. Walk the flow top-down, then the array panel: 21 declared vs 20 supplied. The wildcard branch is WHY this stayed latent for months — say so, because slide 7 depends on it. Point at the MISSING CHECK box and ask where the incompatibility should have been caught; take two answers, do NOT resolve it — slide 6 makes them commit and slide 7 walks the defenses. Carry the qualification out loud: this is illustrative control flow, not Falcon's source.</a:t>
+              <a:t>TIMING: 4 minutes. THE TECHNICAL CORE. Walk the flow top-down, then the array panel: 21 declared vs 20 supplied. The wildcard branch is WHY this stayed latent for months — say so, because slide 6 depends on it. Point at the MISSING CHECK box and name it as the defect the next slide repairs. Carry the qualification out loud: this is illustrative control flow, not Falcon's source.</a:t>
             </a:r>
           </a:p>
           <a:p>
@@ -3734,7 +3729,7 @@
           <a:lstStyle/>
           <a:p>
             <a:r>
-              <a:t>TIMING: 1 minutes. FIRST OF THREE CAUSAL BOUNDARIES. DELIVER EFFICIENTLY (author reallocation 261015): reduce exposition — state the boundary, the model, and the intervention, then move; slide 6's 4-minute commitment discussion is protected and untouched.</a:t>
+              <a:t>TIMING: 3 minutes. FIRST OF THREE CAUSAL BOUNDARIES. This model is COMPLETE and USEFUL within its scope — present it that way. We are not setting up a misconception for the next model to correct (the A/B/C commitment slide was deleted 261022 for exactly that reason).</a:t>
             </a:r>
           </a:p>
           <a:p>
@@ -3764,122 +3759,17 @@
           </a:p>
           <a:p>
             <a:r>
-              <a:t>EXPECTED ANSWERS: add the bounds check. Correct — and CrowdStrike did exactly that. Then ask whether that would have prevented THIS outage reaching 8.5 million machines. It would have prevented the crash; it would not have prevented a different bad content instance shipping the same way.</a:t>
-            </a:r>
-          </a:p>
-          <a:p>
-            <a:r>
-              <a:t>TRANSITION: we have explained how the endpoint crashed. We have not explained why an update capable of causing that crash reached production.</a:t>
-            </a:r>
-          </a:p>
-          <a:p>
-            <a:r>
-              <a:t>SOURCES: CrowdStrike RCA, 6 Aug 2024 (the bounds-check mitigation, backported to Windows sensor 7.11 and later).</a:t>
-            </a:r>
-          </a:p>
-          <a:p>
-            <a:r>
-              <a:t>CORRECTION FOLDED IN: the first node reads 'incompatible content + interpreter', not 'defective content'. This was not a malformed file breaking an otherwise-correct interpreter — it was incompatible assumptions across the template definition, the integration code, the validator, and the interpreter. 'Repair the defect' therefore means repairing the incompatibility, not one content artifact; a content-only fix would leave the same mismatch armed for the next instance.</a:t>
-            </a:r>
-          </a:p>
-        </p:txBody>
-      </p:sp>
-      <p:sp>
-        <p:nvSpPr>
-          <p:cNvPr id="4" name="Slide Number Placeholder 3"/>
-          <p:cNvSpPr>
-            <a:spLocks noGrp="1"/>
-          </p:cNvSpPr>
-          <p:nvPr>
-            <p:ph type="sldNum" sz="quarter" idx="5"/>
-          </p:nvPr>
-        </p:nvSpPr>
-        <p:spPr/>
-      </p:sp>
-    </p:spTree>
-  </p:cSld>
-  <p:clrMapOvr>
-    <a:masterClrMapping/>
-  </p:clrMapOvr>
-</p:notes>
-</file>
-
-<file path=ppt/notesSlides/notesSlide6.xml><?xml version="1.0" encoding="utf-8"?>
-<p:notes xmlns:a="http://schemas.openxmlformats.org/drawingml/2006/main" xmlns:r="http://schemas.openxmlformats.org/officeDocument/2006/relationships" xmlns:p="http://schemas.openxmlformats.org/presentationml/2006/main">
-  <p:cSld>
-    <p:spTree>
-      <p:nvGrpSpPr>
-        <p:cNvPr id="1" name=""/>
-        <p:cNvGrpSpPr/>
-        <p:nvPr/>
-      </p:nvGrpSpPr>
-      <p:grpSpPr>
-        <a:xfrm>
-          <a:off x="0" y="0"/>
-          <a:ext cx="0" cy="0"/>
-          <a:chOff x="0" y="0"/>
-          <a:chExt cx="0" cy="0"/>
-        </a:xfrm>
-      </p:grpSpPr>
-      <p:sp>
-        <p:nvSpPr>
-          <p:cNvPr id="2" name="Slide Image Placeholder 1"/>
-          <p:cNvSpPr>
-            <a:spLocks noGrp="1" noRot="1" noChangeAspect="1"/>
-          </p:cNvSpPr>
-          <p:nvPr>
-            <p:ph type="sldImg" idx="2"/>
-          </p:nvPr>
-        </p:nvSpPr>
-        <p:spPr/>
-      </p:sp>
-      <p:sp>
-        <p:nvSpPr>
-          <p:cNvPr id="3" name="Notes Placeholder 2"/>
-          <p:cNvSpPr>
-            <a:spLocks noGrp="1"/>
-          </p:cNvSpPr>
-          <p:nvPr>
-            <p:ph type="body" sz="quarter" idx="3"/>
-          </p:nvPr>
-        </p:nvSpPr>
-        <p:spPr/>
-        <p:txBody>
-          <a:bodyPr/>
-          <a:lstStyle/>
-          <a:p>
-            <a:r>
-              <a:t>TIMING: 4 minutes — PROTECT 3 of them for the discussion (author pacing note). MAKE THEM COMMIT BEFORE THEY KNOW MORE.</a:t>
-            </a:r>
-          </a:p>
-          <a:p>
-            <a:r>
-              <a:t>ENGINEERING POINT: force a choice now, on purpose, with incomplete information. The point is not which option is 'right' — it is that each addresses a different failure class, and the evidence so far cannot distinguish them.</a:t>
-            </a:r>
-          </a:p>
-          <a:p>
-            <a:r>
-              <a:t>ASK: hands for A, B, or C. Then ask each group what failure their choice prevents NEXT time.</a:t>
-            </a:r>
-          </a:p>
-          <a:p>
-            <a:r>
-              <a:t>EXPECTED ANSWERS: A fixes one file. B fixes one code path — and is what the RCA's bounds-check mitigation does. C is the only one that addresses how the content reached production, and it is also the vaguest; press for what specifically would change.</a:t>
-            </a:r>
-          </a:p>
-          <a:p>
-            <a:r>
-              <a:t>THE DISTINCTION TO SURFACE: fixing the observed instance versus preventing the class. Students reliably pick the narrowest fix that explains the observation.</a:t>
-            </a:r>
-          </a:p>
-          <a:p>
-            <a:r>
-              <a:t>TRANSITION (say this verbatim): the defect explains why a machine crashed. It does not explain why the engineering system allowed the update to reach millions of machines.</a:t>
-            </a:r>
-          </a:p>
-          <a:p>
-            <a:r>
-              <a:t>SOURCES: none required; this is a discussion slide.</a:t>
+              <a:t>EXPECTED ANSWER: add the bounds check. Correct — and CrowdStrike did exactly that. Say so plainly: the bounds check would have prevented this crash, and a runtime bounds check is one of the six mitigations the RCA commits to. The component-level account has identified a defect and a repair, and it is RIGHT about both.</a:t>
+            </a:r>
+          </a:p>
+          <a:p>
+            <a:r>
+              <a:t>DO NOT ask whether the repair would have prevented the outage reaching 8.5 million machines. That question introduces the Swiss-cheese analysis one slide early and makes the second model look like a correction of this one rather than an answer to a different question.</a:t>
+            </a:r>
+          </a:p>
+          <a:p>
+            <a:r>
+              <a:t>CLOSE WITH THE NEW EVIDENCE, NOT A CHALLENGE: the bounds check would have prevented this crash. But the investigation also found that the incompatible content passed through CrowdStrike's own engineering process and reached millions of machines. How did THAT happen? — that question is the next slide, and it comes from new evidence about the process, not from this model failing.</a:t>
             </a:r>
           </a:p>
         </p:txBody>
@@ -3964,7 +3854,7 @@
           </a:p>
           <a:p>
             <a:r>
-              <a:t>CARE: these stage labels come from the RCA. Do not embellish into a generic CI/CD pipeline, and do not yet say which defenses were ABSENT — that is slide 9's reveal.</a:t>
+              <a:t>CARE: these stage labels come from the RCA. Do not embellish into a generic CI/CD pipeline, and do not yet say which defenses were ABSENT — that is slide 8's reveal.</a:t>
             </a:r>
           </a:p>
           <a:p>
@@ -3974,7 +3864,7 @@
           </a:p>
           <a:p>
             <a:r>
-              <a:t>EXPECTED ANSWERS: 'the validator' (most common), 'testing'. Misconception to surface: students assume every named stage existed and merely underperformed. Hold the correction for slide 9.</a:t>
+              <a:t>EXPECTED ANSWERS: 'the validator' (most common), 'testing'. Misconception to surface: students assume every named stage existed and merely underperformed. Hold the correction for slide 8.</a:t>
             </a:r>
           </a:p>
           <a:p>
@@ -4059,7 +3949,7 @@
           </a:p>
           <a:p>
             <a:r>
-              <a:t>ENGINEERING POINT: Reason's Swiss cheese model — an accident can occur when weaknesses in multiple defenses align. The model changes the engineering question from 'which component failed?' to 'what was the condition of the defenses around it?'. We reach for it NOW because slide 7 just showed a defect passing a whole sequence of defenses; the model earns its entrance from the narrative, not from a definitions section.</a:t>
+              <a:t>ENGINEERING POINT: Reason's Swiss cheese model — an accident can occur when weaknesses in multiple defenses align. The model changes the engineering question from 'which component failed?' to 'what was the condition of the defenses around it?'. We reach for it NOW because slide 6 just showed a defect passing a whole sequence of defenses; the model earns its entrance from the narrative, not from a definitions section.</a:t>
             </a:r>
           </a:p>
           <a:p>
@@ -4164,7 +4054,7 @@
           <a:lstStyle/>
           <a:p>
             <a:r>
-              <a:t>TIMING: 2 minutes. THE EVIDENCE REPLACES THE SCHEMATIC. DELIVER EFFICIENTLY (author reallocation 261015): slide 7 already introduced the evidence — walk the four rows and the absent/failed distinction without re-deriving each finding.</a:t>
+              <a:t>TIMING: 2 minutes. THE EVIDENCE REPLACES THE SCHEMATIC. DELIVER EFFICIENTLY (author reallocation 261015): slide 6 already introduced the evidence — walk the four rows and the absent/failed distinction without re-deriving each finding.</a:t>
             </a:r>
           </a:p>
           <a:p>
@@ -25561,8 +25451,8 @@
         </p:nvSpPr>
         <p:spPr>
           <a:xfrm>
-            <a:off x="548640" y="868680"/>
-            <a:ext cx="8046720" cy="457200"/>
+            <a:off x="457200" y="841248"/>
+            <a:ext cx="8229600" cy="512064"/>
           </a:xfrm>
           <a:prstGeom prst="rect">
             <a:avLst/>
@@ -25576,93 +25466,13 @@
           <a:lstStyle/>
           <a:p>
             <a:r>
-              <a:rPr sz="1200"/>
-              <a:t>The template declares the fields the interpreter expects; the sensor's integration code builds the array it reads. A field is read only when its matching criterion is not a wildcard.</a:t>
-            </a:r>
-          </a:p>
-        </p:txBody>
-      </p:sp>
-      <p:sp>
-        <p:nvSpPr>
-          <p:cNvPr id="4" name="TextBox 3">
-            <a:extLst>
-              <a:ext uri="{FF2B5EF4-FFF2-40B4-BE49-F238E27FC236}">
-                <a16:creationId xmlns:a16="http://schemas.microsoft.com/office/drawing/2014/main" id="{32442F63-036B-2E2C-DDBD-D7DF83C64748}"/>
-              </a:ext>
-            </a:extLst>
-          </p:cNvPr>
-          <p:cNvSpPr txBox="1"/>
-          <p:nvPr/>
-        </p:nvSpPr>
-        <p:spPr>
-          <a:xfrm>
-            <a:off x="3584448" y="5138928"/>
-            <a:ext cx="566928" cy="566928"/>
-          </a:xfrm>
-          <a:prstGeom prst="rect">
-            <a:avLst/>
-          </a:prstGeom>
-          <a:noFill/>
-        </p:spPr>
-        <p:txBody>
-          <a:bodyPr wrap="square">
-            <a:spAutoFit/>
-          </a:bodyPr>
-          <a:lstStyle/>
-          <a:p>
-            <a:r>
-              <a:rPr lang="en-US" sz="2800" b="0" i="0" u="none" strike="noStrike" dirty="0">
-                <a:solidFill>
-                  <a:schemeClr val="tx1"/>
-                </a:solidFill>
-                <a:effectLst/>
-                <a:latin typeface="+mn-lt"/>
-              </a:rPr>
-              <a:t>💀</a:t>
-            </a:r>
-            <a:endParaRPr lang="en-US" sz="4400" dirty="0"/>
-          </a:p>
-        </p:txBody>
-      </p:sp>
-      <p:sp>
-        <p:nvSpPr>
-          <p:cNvPr id="5" name="TextBox 4">
-            <a:extLst>
-              <a:ext uri="{FF2B5EF4-FFF2-40B4-BE49-F238E27FC236}">
-                <a16:creationId xmlns:a16="http://schemas.microsoft.com/office/drawing/2014/main" id="{99E31B27-C6F6-2757-03D1-3434CDDA30CA}"/>
-              </a:ext>
-            </a:extLst>
-          </p:cNvPr>
-          <p:cNvSpPr txBox="1"/>
-          <p:nvPr/>
-        </p:nvSpPr>
-        <p:spPr>
-          <a:xfrm>
-            <a:off x="566928" y="5138928"/>
-            <a:ext cx="566928" cy="566928"/>
-          </a:xfrm>
-          <a:prstGeom prst="rect">
-            <a:avLst/>
-          </a:prstGeom>
-          <a:noFill/>
-        </p:spPr>
-        <p:txBody>
-          <a:bodyPr wrap="square">
-            <a:spAutoFit/>
-          </a:bodyPr>
-          <a:lstStyle/>
-          <a:p>
-            <a:r>
-              <a:rPr lang="en-US" sz="2800" b="0" i="0" u="none" strike="noStrike" dirty="0">
-                <a:solidFill>
-                  <a:schemeClr val="tx1"/>
-                </a:solidFill>
-                <a:effectLst/>
-                <a:latin typeface="+mn-lt"/>
-              </a:rPr>
-              <a:t>💀</a:t>
-            </a:r>
-            <a:endParaRPr lang="en-US" sz="4400" dirty="0"/>
+              <a:rPr sz="2000">
+                <a:solidFill>
+                  <a:srgbClr val="555960"/>
+                </a:solidFill>
+              </a:rPr>
+              <a:t>The template declares the fields the interpreter expects; the integration code builds the array it reads.</a:t>
+            </a:r>
           </a:p>
         </p:txBody>
       </p:sp>
@@ -25674,8 +25484,8 @@
         </p:nvSpPr>
         <p:spPr>
           <a:xfrm>
-            <a:off x="502920" y="1371600"/>
-            <a:ext cx="3749039" cy="402336"/>
+            <a:off x="457200" y="1444752"/>
+            <a:ext cx="8229600" cy="475488"/>
           </a:xfrm>
           <a:prstGeom prst="rect">
             <a:avLst/>
@@ -25707,7 +25517,11 @@
           <a:lstStyle/>
           <a:p>
             <a:r>
-              <a:rPr sz="1300"/>
+              <a:rPr sz="2000">
+                <a:solidFill>
+                  <a:srgbClr val="FFFFFF"/>
+                </a:solidFill>
+              </a:rPr>
               <a:t>TEMPLATE DECLARES 21 FIELDS   [0 … 20]</a:t>
             </a:r>
           </a:p>
@@ -25721,8 +25535,8 @@
         </p:nvSpPr>
         <p:spPr>
           <a:xfrm>
-            <a:off x="502920" y="1975104"/>
-            <a:ext cx="3749039" cy="402336"/>
+            <a:off x="457200" y="2084831"/>
+            <a:ext cx="8229600" cy="475488"/>
           </a:xfrm>
           <a:prstGeom prst="rect">
             <a:avLst/>
@@ -25754,55 +25568,12 @@
           <a:lstStyle/>
           <a:p>
             <a:r>
-              <a:rPr sz="1300"/>
+              <a:rPr sz="2000">
+                <a:solidFill>
+                  <a:srgbClr val="FFFFFF"/>
+                </a:solidFill>
+              </a:rPr>
               <a:t>INTEGRATION CODE SUPPLIES 20 INPUTS   [0 … 19]</a:t>
-            </a:r>
-          </a:p>
-        </p:txBody>
-      </p:sp>
-      <p:sp>
-        <p:nvSpPr>
-          <p:cNvPr id="901" name="Block"/>
-          <p:cNvSpPr/>
-          <p:nvPr/>
-        </p:nvSpPr>
-        <p:spPr>
-          <a:xfrm>
-            <a:off x="502920" y="2578608"/>
-            <a:ext cx="3749039" cy="402336"/>
-          </a:xfrm>
-          <a:prstGeom prst="rect">
-            <a:avLst/>
-          </a:prstGeom>
-          <a:solidFill>
-            <a:srgbClr val="8E6F3E"/>
-          </a:solidFill>
-          <a:ln>
-            <a:noFill/>
-          </a:ln>
-          <a:effectLst/>
-        </p:spPr>
-        <p:style>
-          <a:lnRef idx="1">
-            <a:schemeClr val="accent1"/>
-          </a:lnRef>
-          <a:fillRef idx="3">
-            <a:schemeClr val="accent1"/>
-          </a:fillRef>
-          <a:effectRef idx="2">
-            <a:schemeClr val="accent1"/>
-          </a:effectRef>
-          <a:fontRef idx="minor">
-            <a:schemeClr val="lt1"/>
-          </a:fontRef>
-        </p:style>
-        <p:txBody>
-          <a:bodyPr wrap="square" lIns="27432" tIns="22860" rIns="27432" bIns="22860" rtlCol="0" anchor="ctr"/>
-          <a:lstStyle/>
-          <a:p>
-            <a:r>
-              <a:rPr sz="1300"/>
-              <a:t>FOR EACH FIELD  i</a:t>
             </a:r>
           </a:p>
         </p:txBody>
@@ -25815,8 +25586,8 @@
         </p:nvSpPr>
         <p:spPr>
           <a:xfrm>
-            <a:off x="502920" y="3182112"/>
-            <a:ext cx="3749039" cy="402336"/>
+            <a:off x="457200" y="2724912"/>
+            <a:ext cx="8229600" cy="475488"/>
           </a:xfrm>
           <a:prstGeom prst="rect">
             <a:avLst/>
@@ -25846,8 +25617,12 @@
           <a:lstStyle/>
           <a:p>
             <a:r>
-              <a:rPr sz="1300"/>
-              <a:t>is criterion[ i ] a wildcard?</a:t>
+              <a:rPr sz="2000">
+                <a:solidFill>
+                  <a:srgbClr val="555960"/>
+                </a:solidFill>
+              </a:rPr>
+              <a:t>for each field i — is criterion[ i ] a wildcard?</a:t>
             </a:r>
           </a:p>
         </p:txBody>
@@ -25860,8 +25635,8 @@
         </p:nvSpPr>
         <p:spPr>
           <a:xfrm>
-            <a:off x="502920" y="3986784"/>
-            <a:ext cx="3749039" cy="402336"/>
+            <a:off x="457200" y="3364992"/>
+            <a:ext cx="8229600" cy="475488"/>
           </a:xfrm>
           <a:prstGeom prst="rect">
             <a:avLst/>
@@ -25895,371 +25670,12 @@
           <a:lstStyle/>
           <a:p>
             <a:r>
-              <a:rPr sz="1300"/>
-              <a:t>no  →  READ inputs[ i ]</a:t>
-            </a:r>
-          </a:p>
-        </p:txBody>
-      </p:sp>
-      <p:sp>
-        <p:nvSpPr>
-          <p:cNvPr id="901" name="Block"/>
-          <p:cNvSpPr/>
-          <p:nvPr/>
-        </p:nvSpPr>
-        <p:spPr>
-          <a:xfrm>
-            <a:off x="914400" y="4590288"/>
-            <a:ext cx="2926080" cy="402336"/>
-          </a:xfrm>
-          <a:prstGeom prst="rect">
-            <a:avLst/>
-          </a:prstGeom>
-          <a:solidFill>
-            <a:srgbClr val="8E6F3E"/>
-          </a:solidFill>
-          <a:ln>
-            <a:noFill/>
-          </a:ln>
-          <a:effectLst/>
-        </p:spPr>
-        <p:style>
-          <a:lnRef idx="1">
-            <a:schemeClr val="accent1"/>
-          </a:lnRef>
-          <a:fillRef idx="3">
-            <a:schemeClr val="accent1"/>
-          </a:fillRef>
-          <a:effectRef idx="2">
-            <a:schemeClr val="accent1"/>
-          </a:effectRef>
-          <a:fontRef idx="minor">
-            <a:schemeClr val="lt1"/>
-          </a:fontRef>
-        </p:style>
-        <p:txBody>
-          <a:bodyPr wrap="square" lIns="27432" tIns="22860" rIns="27432" bIns="22860" rtlCol="0" anchor="ctr"/>
-          <a:lstStyle/>
-          <a:p>
-            <a:r>
-              <a:rPr sz="1300">
-                <a:solidFill>
-                  <a:srgbClr val="C01B1B"/>
-                </a:solidFill>
-              </a:rPr>
-              <a:t>at  i = 20 :  inputs[20] does not exist</a:t>
-            </a:r>
-          </a:p>
-        </p:txBody>
-      </p:sp>
-      <p:sp>
-        <p:nvSpPr>
-          <p:cNvPr id="901" name="Block"/>
-          <p:cNvSpPr/>
-          <p:nvPr/>
-        </p:nvSpPr>
-        <p:spPr>
-          <a:xfrm>
-            <a:off x="1280160" y="5193792"/>
-            <a:ext cx="2194560" cy="438912"/>
-          </a:xfrm>
-          <a:prstGeom prst="rect">
-            <a:avLst/>
-          </a:prstGeom>
-          <a:solidFill>
-            <a:srgbClr val="8E6F3E"/>
-          </a:solidFill>
-          <a:ln>
-            <a:noFill/>
-          </a:ln>
-          <a:effectLst/>
-        </p:spPr>
-        <p:style>
-          <a:lnRef idx="1">
-            <a:schemeClr val="accent1"/>
-          </a:lnRef>
-          <a:fillRef idx="3">
-            <a:schemeClr val="accent1"/>
-          </a:fillRef>
-          <a:effectRef idx="2">
-            <a:schemeClr val="accent1"/>
-          </a:effectRef>
-          <a:fontRef idx="minor">
-            <a:schemeClr val="lt1"/>
-          </a:fontRef>
-        </p:style>
-        <p:txBody>
-          <a:bodyPr wrap="square" lIns="27432" tIns="22860" rIns="27432" bIns="22860" rtlCol="0" anchor="ctr"/>
-          <a:lstStyle/>
-          <a:p>
-            <a:r>
-              <a:rPr sz="1300">
-                <a:solidFill>
-                  <a:srgbClr val="C01B1B"/>
-                </a:solidFill>
-              </a:rPr>
-              <a:t>OUT-OF-BOUNDS READ  →  SENSOR CRASH</a:t>
-            </a:r>
-          </a:p>
-        </p:txBody>
-      </p:sp>
-      <p:cxnSp>
-        <p:nvCxnSpPr>
-          <p:cNvPr id="902" name="Connector 901"/>
-          <p:cNvCxnSpPr/>
-          <p:nvPr/>
-        </p:nvCxnSpPr>
-        <p:spPr>
-          <a:xfrm>
-            <a:off x="2377439" y="1773936"/>
-            <a:ext cx="0" cy="201168"/>
-          </a:xfrm>
-          <a:prstGeom prst="line">
-            <a:avLst/>
-          </a:prstGeom>
-          <a:ln w="19050">
-            <a:solidFill>
-              <a:srgbClr val="8E6F3E"/>
-            </a:solidFill>
-            <a:tailEnd type="triangle"/>
-          </a:ln>
-        </p:spPr>
-        <p:style>
-          <a:lnRef idx="2">
-            <a:schemeClr val="accent1"/>
-          </a:lnRef>
-          <a:fillRef idx="0">
-            <a:schemeClr val="accent1"/>
-          </a:fillRef>
-          <a:effectRef idx="1">
-            <a:schemeClr val="accent1"/>
-          </a:effectRef>
-          <a:fontRef idx="minor">
-            <a:schemeClr val="tx1"/>
-          </a:fontRef>
-        </p:style>
-      </p:cxnSp>
-      <p:cxnSp>
-        <p:nvCxnSpPr>
-          <p:cNvPr id="902" name="Connector 901"/>
-          <p:cNvCxnSpPr/>
-          <p:nvPr/>
-        </p:nvCxnSpPr>
-        <p:spPr>
-          <a:xfrm>
-            <a:off x="2377439" y="2377440"/>
-            <a:ext cx="0" cy="201168"/>
-          </a:xfrm>
-          <a:prstGeom prst="line">
-            <a:avLst/>
-          </a:prstGeom>
-          <a:ln w="19050">
-            <a:solidFill>
-              <a:srgbClr val="8E6F3E"/>
-            </a:solidFill>
-            <a:tailEnd type="triangle"/>
-          </a:ln>
-        </p:spPr>
-        <p:style>
-          <a:lnRef idx="2">
-            <a:schemeClr val="accent1"/>
-          </a:lnRef>
-          <a:fillRef idx="0">
-            <a:schemeClr val="accent1"/>
-          </a:fillRef>
-          <a:effectRef idx="1">
-            <a:schemeClr val="accent1"/>
-          </a:effectRef>
-          <a:fontRef idx="minor">
-            <a:schemeClr val="tx1"/>
-          </a:fontRef>
-        </p:style>
-      </p:cxnSp>
-      <p:cxnSp>
-        <p:nvCxnSpPr>
-          <p:cNvPr id="902" name="Connector 901"/>
-          <p:cNvCxnSpPr/>
-          <p:nvPr/>
-        </p:nvCxnSpPr>
-        <p:spPr>
-          <a:xfrm>
-            <a:off x="2377439" y="2980944"/>
-            <a:ext cx="0" cy="201168"/>
-          </a:xfrm>
-          <a:prstGeom prst="line">
-            <a:avLst/>
-          </a:prstGeom>
-          <a:ln w="19050">
-            <a:solidFill>
-              <a:srgbClr val="8E6F3E"/>
-            </a:solidFill>
-            <a:tailEnd type="triangle"/>
-          </a:ln>
-        </p:spPr>
-        <p:style>
-          <a:lnRef idx="2">
-            <a:schemeClr val="accent1"/>
-          </a:lnRef>
-          <a:fillRef idx="0">
-            <a:schemeClr val="accent1"/>
-          </a:fillRef>
-          <a:effectRef idx="1">
-            <a:schemeClr val="accent1"/>
-          </a:effectRef>
-          <a:fontRef idx="minor">
-            <a:schemeClr val="tx1"/>
-          </a:fontRef>
-        </p:style>
-      </p:cxnSp>
-      <p:cxnSp>
-        <p:nvCxnSpPr>
-          <p:cNvPr id="902" name="Connector 901"/>
-          <p:cNvCxnSpPr/>
-          <p:nvPr/>
-        </p:nvCxnSpPr>
-        <p:spPr>
-          <a:xfrm>
-            <a:off x="2377439" y="3584448"/>
-            <a:ext cx="0" cy="402336"/>
-          </a:xfrm>
-          <a:prstGeom prst="line">
-            <a:avLst/>
-          </a:prstGeom>
-          <a:ln w="19050">
-            <a:solidFill>
-              <a:srgbClr val="8E6F3E"/>
-            </a:solidFill>
-            <a:tailEnd type="triangle"/>
-          </a:ln>
-        </p:spPr>
-        <p:style>
-          <a:lnRef idx="2">
-            <a:schemeClr val="accent1"/>
-          </a:lnRef>
-          <a:fillRef idx="0">
-            <a:schemeClr val="accent1"/>
-          </a:fillRef>
-          <a:effectRef idx="1">
-            <a:schemeClr val="accent1"/>
-          </a:effectRef>
-          <a:fontRef idx="minor">
-            <a:schemeClr val="tx1"/>
-          </a:fontRef>
-        </p:style>
-      </p:cxnSp>
-      <p:cxnSp>
-        <p:nvCxnSpPr>
-          <p:cNvPr id="902" name="Connector 901"/>
-          <p:cNvCxnSpPr/>
-          <p:nvPr/>
-        </p:nvCxnSpPr>
-        <p:spPr>
-          <a:xfrm>
-            <a:off x="2377439" y="4389120"/>
-            <a:ext cx="0" cy="201168"/>
-          </a:xfrm>
-          <a:prstGeom prst="line">
-            <a:avLst/>
-          </a:prstGeom>
-          <a:ln w="19050">
-            <a:solidFill>
-              <a:srgbClr val="8E6F3E"/>
-            </a:solidFill>
-            <a:tailEnd type="triangle"/>
-          </a:ln>
-        </p:spPr>
-        <p:style>
-          <a:lnRef idx="2">
-            <a:schemeClr val="accent1"/>
-          </a:lnRef>
-          <a:fillRef idx="0">
-            <a:schemeClr val="accent1"/>
-          </a:fillRef>
-          <a:effectRef idx="1">
-            <a:schemeClr val="accent1"/>
-          </a:effectRef>
-          <a:fontRef idx="minor">
-            <a:schemeClr val="tx1"/>
-          </a:fontRef>
-        </p:style>
-      </p:cxnSp>
-      <p:cxnSp>
-        <p:nvCxnSpPr>
-          <p:cNvPr id="902" name="Connector 901"/>
-          <p:cNvCxnSpPr/>
-          <p:nvPr/>
-        </p:nvCxnSpPr>
-        <p:spPr>
-          <a:xfrm>
-            <a:off x="2377439" y="4992624"/>
-            <a:ext cx="0" cy="201168"/>
-          </a:xfrm>
-          <a:prstGeom prst="line">
-            <a:avLst/>
-          </a:prstGeom>
-          <a:ln w="19050">
-            <a:solidFill>
-              <a:srgbClr val="8E6F3E"/>
-            </a:solidFill>
-            <a:tailEnd type="triangle"/>
-          </a:ln>
-        </p:spPr>
-        <p:style>
-          <a:lnRef idx="2">
-            <a:schemeClr val="accent1"/>
-          </a:lnRef>
-          <a:fillRef idx="0">
-            <a:schemeClr val="accent1"/>
-          </a:fillRef>
-          <a:effectRef idx="1">
-            <a:schemeClr val="accent1"/>
-          </a:effectRef>
-          <a:fontRef idx="minor">
-            <a:schemeClr val="tx1"/>
-          </a:fontRef>
-        </p:style>
-      </p:cxnSp>
-      <p:sp>
-        <p:nvSpPr>
-          <p:cNvPr id="920" name="LevelQuestion"/>
-          <p:cNvSpPr/>
-          <p:nvPr/>
-        </p:nvSpPr>
-        <p:spPr>
-          <a:xfrm>
-            <a:off x="4526280" y="3182112"/>
-            <a:ext cx="4297680" cy="402336"/>
-          </a:xfrm>
-          <a:prstGeom prst="rect">
-            <a:avLst/>
-          </a:prstGeom>
-          <a:noFill/>
-          <a:ln>
-            <a:noFill/>
-          </a:ln>
-          <a:effectLst/>
-        </p:spPr>
-        <p:style>
-          <a:lnRef idx="1">
-            <a:schemeClr val="accent1"/>
-          </a:lnRef>
-          <a:fillRef idx="3">
-            <a:schemeClr val="accent1"/>
-          </a:fillRef>
-          <a:effectRef idx="2">
-            <a:schemeClr val="accent1"/>
-          </a:effectRef>
-          <a:fontRef idx="minor">
-            <a:schemeClr val="lt1"/>
-          </a:fontRef>
-        </p:style>
-        <p:txBody>
-          <a:bodyPr wrap="square" lIns="27432" tIns="22860" rIns="27432" bIns="22860" rtlCol="0" anchor="ctr"/>
-          <a:lstStyle/>
-          <a:p>
-            <a:r>
-              <a:rPr sz="1200"/>
-              <a:t>yes  →  match anything; field never read</a:t>
+              <a:rPr sz="2000">
+                <a:solidFill>
+                  <a:srgbClr val="5C4826"/>
+                </a:solidFill>
+              </a:rPr>
+              <a:t>YES  →  match anything; the field is never read</a:t>
             </a:r>
           </a:p>
         </p:txBody>
@@ -26272,8 +25688,8 @@
         </p:nvSpPr>
         <p:spPr>
           <a:xfrm>
-            <a:off x="4526280" y="3986784"/>
-            <a:ext cx="4297680" cy="402336"/>
+            <a:off x="457200" y="3931920"/>
+            <a:ext cx="8229600" cy="475488"/>
           </a:xfrm>
           <a:prstGeom prst="rect">
             <a:avLst/>
@@ -26307,31 +25723,170 @@
           <a:lstStyle/>
           <a:p>
             <a:r>
-              <a:rPr sz="1200">
+              <a:rPr sz="2000">
+                <a:solidFill>
+                  <a:srgbClr val="5C4826"/>
+                </a:solidFill>
+              </a:rPr>
+              <a:t>NO  →  read inputs[ i ]</a:t>
+            </a:r>
+          </a:p>
+        </p:txBody>
+      </p:sp>
+      <p:sp>
+        <p:nvSpPr>
+          <p:cNvPr id="912" name="Card"/>
+          <p:cNvSpPr/>
+          <p:nvPr/>
+        </p:nvSpPr>
+        <p:spPr>
+          <a:xfrm>
+            <a:off x="457200" y="4572000"/>
+            <a:ext cx="8229600" cy="475488"/>
+          </a:xfrm>
+          <a:prstGeom prst="rect">
+            <a:avLst/>
+          </a:prstGeom>
+          <a:solidFill>
+            <a:srgbClr val="F5F1E8"/>
+          </a:solidFill>
+          <a:ln w="12700">
+            <a:solidFill>
+              <a:srgbClr val="C9B991"/>
+            </a:solidFill>
+          </a:ln>
+          <a:effectLst/>
+        </p:spPr>
+        <p:style>
+          <a:lnRef idx="1">
+            <a:schemeClr val="accent1"/>
+          </a:lnRef>
+          <a:fillRef idx="3">
+            <a:schemeClr val="accent1"/>
+          </a:fillRef>
+          <a:effectRef idx="2">
+            <a:schemeClr val="accent1"/>
+          </a:effectRef>
+          <a:fontRef idx="minor">
+            <a:schemeClr val="lt1"/>
+          </a:fontRef>
+        </p:style>
+        <p:txBody>
+          <a:bodyPr wrap="square" lIns="27432" tIns="22860" rIns="27432" bIns="22860" rtlCol="0" anchor="ctr"/>
+          <a:lstStyle/>
+          <a:p>
+            <a:r>
+              <a:rPr sz="2000">
                 <a:solidFill>
                   <a:srgbClr val="C01B1B"/>
                 </a:solidFill>
               </a:rPr>
+              <a:t>at  i = 20 :  inputs[20] does not exist  →  OUT-OF-BOUNDS READ</a:t>
+            </a:r>
+          </a:p>
+        </p:txBody>
+      </p:sp>
+      <p:sp>
+        <p:nvSpPr>
+          <p:cNvPr id="912" name="Card"/>
+          <p:cNvSpPr/>
+          <p:nvPr/>
+        </p:nvSpPr>
+        <p:spPr>
+          <a:xfrm>
+            <a:off x="457200" y="5138928"/>
+            <a:ext cx="8229600" cy="475488"/>
+          </a:xfrm>
+          <a:prstGeom prst="rect">
+            <a:avLst/>
+          </a:prstGeom>
+          <a:solidFill>
+            <a:srgbClr val="F5F1E8"/>
+          </a:solidFill>
+          <a:ln w="12700">
+            <a:solidFill>
+              <a:srgbClr val="C9B991"/>
+            </a:solidFill>
+          </a:ln>
+          <a:effectLst/>
+        </p:spPr>
+        <p:style>
+          <a:lnRef idx="1">
+            <a:schemeClr val="accent1"/>
+          </a:lnRef>
+          <a:fillRef idx="3">
+            <a:schemeClr val="accent1"/>
+          </a:fillRef>
+          <a:effectRef idx="2">
+            <a:schemeClr val="accent1"/>
+          </a:effectRef>
+          <a:fontRef idx="minor">
+            <a:schemeClr val="lt1"/>
+          </a:fontRef>
+        </p:style>
+        <p:txBody>
+          <a:bodyPr wrap="square" lIns="27432" tIns="22860" rIns="27432" bIns="22860" rtlCol="0" anchor="ctr"/>
+          <a:lstStyle/>
+          <a:p>
+            <a:r>
+              <a:rPr sz="2000">
+                <a:solidFill>
+                  <a:srgbClr val="C01B1B"/>
+                </a:solidFill>
+              </a:rPr>
               <a:t>MISSING CHECK:   i &lt; inputs.length ?</a:t>
+            </a:r>
+          </a:p>
+        </p:txBody>
+      </p:sp>
+      <p:sp>
+        <p:nvSpPr>
+          <p:cNvPr id="915" name="Label"/>
+          <p:cNvSpPr txBox="1"/>
+          <p:nvPr/>
+        </p:nvSpPr>
+        <p:spPr>
+          <a:xfrm>
+            <a:off x="457200" y="5724144"/>
+            <a:ext cx="8229600" cy="548640"/>
+          </a:xfrm>
+          <a:prstGeom prst="rect">
+            <a:avLst/>
+          </a:prstGeom>
+          <a:noFill/>
+        </p:spPr>
+        <p:txBody>
+          <a:bodyPr wrap="square" lIns="27432" tIns="22860" rIns="27432" bIns="22860" anchor="t">
+            <a:spAutoFit/>
+          </a:bodyPr>
+          <a:lstStyle/>
+          <a:p>
+            <a:r>
+              <a:rPr sz="2000">
+                <a:solidFill>
+                  <a:srgbClr val="555960"/>
+                </a:solidFill>
+              </a:rPr>
+              <a:t>Illustrative control flow, not the interpreter's source: the RCA establishes the invalid access and the missing bounds check.</a:t>
             </a:r>
           </a:p>
         </p:txBody>
       </p:sp>
       <p:cxnSp>
         <p:nvCxnSpPr>
-          <p:cNvPr id="911" name="Connector 911"/>
+          <p:cNvPr id="902" name="Connector 901"/>
           <p:cNvCxnSpPr/>
           <p:nvPr/>
         </p:nvCxnSpPr>
         <p:spPr>
           <a:xfrm>
-            <a:off x="4251959" y="3383280"/>
-            <a:ext cx="274320" cy="0"/>
+            <a:off x="4572000" y="1920240"/>
+            <a:ext cx="0" cy="164592"/>
           </a:xfrm>
           <a:prstGeom prst="line">
             <a:avLst/>
           </a:prstGeom>
-          <a:ln w="28575">
+          <a:ln w="19050">
             <a:solidFill>
               <a:srgbClr val="8E6F3E"/>
             </a:solidFill>
@@ -26355,19 +25910,19 @@
       </p:cxnSp>
       <p:cxnSp>
         <p:nvCxnSpPr>
-          <p:cNvPr id="911" name="Connector 911"/>
+          <p:cNvPr id="902" name="Connector 901"/>
           <p:cNvCxnSpPr/>
           <p:nvPr/>
         </p:nvCxnSpPr>
         <p:spPr>
           <a:xfrm>
-            <a:off x="4251959" y="4187952"/>
-            <a:ext cx="274320" cy="0"/>
+            <a:off x="4572000" y="2560320"/>
+            <a:ext cx="0" cy="164592"/>
           </a:xfrm>
           <a:prstGeom prst="line">
             <a:avLst/>
           </a:prstGeom>
-          <a:ln w="28575">
+          <a:ln w="19050">
             <a:solidFill>
               <a:srgbClr val="8E6F3E"/>
             </a:solidFill>
@@ -26389,187 +25944,78 @@
           </a:fontRef>
         </p:style>
       </p:cxnSp>
-      <p:sp>
-        <p:nvSpPr>
-          <p:cNvPr id="915" name="Label"/>
-          <p:cNvSpPr txBox="1"/>
-          <p:nvPr/>
-        </p:nvSpPr>
-        <p:spPr>
-          <a:xfrm>
-            <a:off x="4572000" y="1371600"/>
-            <a:ext cx="2011680" cy="274320"/>
-          </a:xfrm>
-          <a:prstGeom prst="rect">
-            <a:avLst/>
-          </a:prstGeom>
-          <a:noFill/>
-        </p:spPr>
-        <p:txBody>
-          <a:bodyPr wrap="square" lIns="27432" tIns="22860" rIns="27432" bIns="22860" anchor="t">
-            <a:spAutoFit/>
-          </a:bodyPr>
-          <a:lstStyle/>
-          <a:p>
-            <a:r>
-              <a:rPr sz="1100"/>
-              <a:t>TEMPLATE  [0 … 20]</a:t>
-            </a:r>
-          </a:p>
-        </p:txBody>
-      </p:sp>
-      <p:sp>
-        <p:nvSpPr>
-          <p:cNvPr id="915" name="Label"/>
-          <p:cNvSpPr txBox="1"/>
-          <p:nvPr/>
-        </p:nvSpPr>
-        <p:spPr>
-          <a:xfrm>
-            <a:off x="6720840" y="1371600"/>
-            <a:ext cx="2011680" cy="274320"/>
-          </a:xfrm>
-          <a:prstGeom prst="rect">
-            <a:avLst/>
-          </a:prstGeom>
-          <a:noFill/>
-        </p:spPr>
-        <p:txBody>
-          <a:bodyPr wrap="square" lIns="27432" tIns="22860" rIns="27432" bIns="22860" anchor="t">
-            <a:spAutoFit/>
-          </a:bodyPr>
-          <a:lstStyle/>
-          <a:p>
-            <a:r>
-              <a:rPr sz="1100"/>
-              <a:t>INPUTS  [0 … 19]</a:t>
-            </a:r>
-          </a:p>
-        </p:txBody>
-      </p:sp>
-      <p:sp>
-        <p:nvSpPr>
-          <p:cNvPr id="915" name="Label"/>
-          <p:cNvSpPr txBox="1"/>
-          <p:nvPr/>
-        </p:nvSpPr>
-        <p:spPr>
-          <a:xfrm>
-            <a:off x="4572000" y="1700784"/>
-            <a:ext cx="2011680" cy="932688"/>
-          </a:xfrm>
-          <a:prstGeom prst="rect">
-            <a:avLst/>
-          </a:prstGeom>
-          <a:noFill/>
-        </p:spPr>
-        <p:txBody>
-          <a:bodyPr wrap="square" lIns="27432" tIns="22860" rIns="27432" bIns="22860" anchor="t">
-            <a:spAutoFit/>
-          </a:bodyPr>
-          <a:lstStyle/>
-          <a:p>
-            <a:r>
-              <a:rPr sz="1100"/>
-              <a:t>[18]  present</a:t>
-            </a:r>
-          </a:p>
-          <a:p>
-            <a:r>
-              <a:rPr sz="1100"/>
-              <a:t>[19]  present</a:t>
-            </a:r>
-          </a:p>
-          <a:p>
-            <a:r>
-              <a:rPr sz="1100"/>
-              <a:t>[20]  declared</a:t>
-            </a:r>
-          </a:p>
-        </p:txBody>
-      </p:sp>
-      <p:sp>
-        <p:nvSpPr>
-          <p:cNvPr id="915" name="Label"/>
-          <p:cNvSpPr txBox="1"/>
-          <p:nvPr/>
-        </p:nvSpPr>
-        <p:spPr>
-          <a:xfrm>
-            <a:off x="6720840" y="1700784"/>
-            <a:ext cx="2011680" cy="932688"/>
-          </a:xfrm>
-          <a:prstGeom prst="rect">
-            <a:avLst/>
-          </a:prstGeom>
-          <a:noFill/>
-        </p:spPr>
-        <p:txBody>
-          <a:bodyPr wrap="square" lIns="27432" tIns="22860" rIns="27432" bIns="22860" anchor="t">
-            <a:spAutoFit/>
-          </a:bodyPr>
-          <a:lstStyle/>
-          <a:p>
-            <a:r>
-              <a:rPr sz="1100">
-                <a:solidFill>
-                  <a:srgbClr val="C01B1B"/>
-                </a:solidFill>
-              </a:rPr>
-              <a:t>[18]  present</a:t>
-            </a:r>
-          </a:p>
-          <a:p>
-            <a:r>
-              <a:rPr sz="1100">
-                <a:solidFill>
-                  <a:srgbClr val="C01B1B"/>
-                </a:solidFill>
-              </a:rPr>
-              <a:t>[19]  present</a:t>
-            </a:r>
-          </a:p>
-          <a:p>
-            <a:r>
-              <a:rPr sz="1100">
-                <a:solidFill>
-                  <a:srgbClr val="C01B1B"/>
-                </a:solidFill>
-              </a:rPr>
-              <a:t>[20]  —  none  —</a:t>
-            </a:r>
-          </a:p>
-        </p:txBody>
-      </p:sp>
-      <p:sp>
-        <p:nvSpPr>
-          <p:cNvPr id="915" name="Label"/>
-          <p:cNvSpPr txBox="1"/>
-          <p:nvPr/>
-        </p:nvSpPr>
-        <p:spPr>
-          <a:xfrm>
-            <a:off x="502920" y="5797296"/>
-            <a:ext cx="8321040" cy="475488"/>
-          </a:xfrm>
-          <a:prstGeom prst="rect">
-            <a:avLst/>
-          </a:prstGeom>
-          <a:noFill/>
-        </p:spPr>
-        <p:txBody>
-          <a:bodyPr wrap="square" lIns="27432" tIns="22860" rIns="27432" bIns="22860" anchor="t">
-            <a:spAutoFit/>
-          </a:bodyPr>
-          <a:lstStyle/>
-          <a:p>
-            <a:r>
-              <a:rPr sz="1000"/>
-              <a:t>Illustrative control flow, not the Falcon interpreter's source. The RCA establishes the invalid access and the missing bounds check — not that it occurred in precisely this loop.</a:t>
-            </a:r>
-          </a:p>
-        </p:txBody>
-      </p:sp>
+      <p:cxnSp>
+        <p:nvCxnSpPr>
+          <p:cNvPr id="902" name="Connector 901"/>
+          <p:cNvCxnSpPr/>
+          <p:nvPr/>
+        </p:nvCxnSpPr>
+        <p:spPr>
+          <a:xfrm>
+            <a:off x="4572000" y="3200400"/>
+            <a:ext cx="0" cy="164592"/>
+          </a:xfrm>
+          <a:prstGeom prst="line">
+            <a:avLst/>
+          </a:prstGeom>
+          <a:ln w="19050">
+            <a:solidFill>
+              <a:srgbClr val="8E6F3E"/>
+            </a:solidFill>
+            <a:tailEnd type="triangle"/>
+          </a:ln>
+        </p:spPr>
+        <p:style>
+          <a:lnRef idx="2">
+            <a:schemeClr val="accent1"/>
+          </a:lnRef>
+          <a:fillRef idx="0">
+            <a:schemeClr val="accent1"/>
+          </a:fillRef>
+          <a:effectRef idx="1">
+            <a:schemeClr val="accent1"/>
+          </a:effectRef>
+          <a:fontRef idx="minor">
+            <a:schemeClr val="tx1"/>
+          </a:fontRef>
+        </p:style>
+      </p:cxnSp>
+      <p:cxnSp>
+        <p:nvCxnSpPr>
+          <p:cNvPr id="902" name="Connector 901"/>
+          <p:cNvCxnSpPr/>
+          <p:nvPr/>
+        </p:nvCxnSpPr>
+        <p:spPr>
+          <a:xfrm>
+            <a:off x="4572000" y="4407408"/>
+            <a:ext cx="0" cy="164592"/>
+          </a:xfrm>
+          <a:prstGeom prst="line">
+            <a:avLst/>
+          </a:prstGeom>
+          <a:ln w="19050">
+            <a:solidFill>
+              <a:srgbClr val="8E6F3E"/>
+            </a:solidFill>
+            <a:tailEnd type="triangle"/>
+          </a:ln>
+        </p:spPr>
+        <p:style>
+          <a:lnRef idx="2">
+            <a:schemeClr val="accent1"/>
+          </a:lnRef>
+          <a:fillRef idx="0">
+            <a:schemeClr val="accent1"/>
+          </a:fillRef>
+          <a:effectRef idx="1">
+            <a:schemeClr val="accent1"/>
+          </a:effectRef>
+          <a:fontRef idx="minor">
+            <a:schemeClr val="tx1"/>
+          </a:fontRef>
+        </p:style>
+      </p:cxnSp>
     </p:spTree>
   </p:cSld>
   <p:clrMapOvr>
@@ -26700,14 +26146,14 @@
       </p:sp>
       <p:sp>
         <p:nvSpPr>
-          <p:cNvPr id="910" name="Block"/>
+          <p:cNvPr id="901" name="Block"/>
           <p:cNvSpPr/>
           <p:nvPr/>
         </p:nvSpPr>
         <p:spPr>
           <a:xfrm>
-            <a:off x="822960" y="2103120"/>
-            <a:ext cx="2194560" cy="731520"/>
+            <a:off x="640080" y="1371600"/>
+            <a:ext cx="4206240" cy="475488"/>
           </a:xfrm>
           <a:prstGeom prst="rect">
             <a:avLst/>
@@ -26738,65 +26184,17 @@
           <a:bodyPr wrap="square" lIns="27432" tIns="22860" rIns="27432" bIns="22860" rtlCol="0" anchor="ctr"/>
           <a:lstStyle/>
           <a:p>
-            <a:pPr algn="ctr"/>
-            <a:r>
-              <a:rPr sz="1200" b="1" i="0">
+            <a:r>
+              <a:rPr sz="2000">
                 <a:solidFill>
                   <a:srgbClr val="FFFFFF"/>
                 </a:solidFill>
               </a:rPr>
-              <a:t>INCOMPATIBLE</a:t>
-            </a:r>
-          </a:p>
-          <a:p>
-            <a:pPr algn="ctr"/>
-            <a:r>
-              <a:rPr sz="1000" b="1" i="0">
-                <a:solidFill>
-                  <a:srgbClr val="FFFFFF"/>
-                </a:solidFill>
-              </a:rPr>
               <a:t>CONTENT + INTERPRETER</a:t>
             </a:r>
           </a:p>
         </p:txBody>
       </p:sp>
-      <p:cxnSp>
-        <p:nvCxnSpPr>
-          <p:cNvPr id="911" name="Connector 911"/>
-          <p:cNvCxnSpPr/>
-          <p:nvPr/>
-        </p:nvCxnSpPr>
-        <p:spPr>
-          <a:xfrm>
-            <a:off x="3017520" y="2468880"/>
-            <a:ext cx="548640" cy="0"/>
-          </a:xfrm>
-          <a:prstGeom prst="line">
-            <a:avLst/>
-          </a:prstGeom>
-          <a:ln w="28575">
-            <a:solidFill>
-              <a:srgbClr val="8E6F3E"/>
-            </a:solidFill>
-            <a:tailEnd type="triangle"/>
-          </a:ln>
-        </p:spPr>
-        <p:style>
-          <a:lnRef idx="2">
-            <a:schemeClr val="accent1"/>
-          </a:lnRef>
-          <a:fillRef idx="0">
-            <a:schemeClr val="accent1"/>
-          </a:fillRef>
-          <a:effectRef idx="1">
-            <a:schemeClr val="accent1"/>
-          </a:effectRef>
-          <a:fontRef idx="minor">
-            <a:schemeClr val="tx1"/>
-          </a:fontRef>
-        </p:style>
-      </p:cxnSp>
       <p:sp>
         <p:nvSpPr>
           <p:cNvPr id="912" name="Card"/>
@@ -26805,8 +26203,8 @@
         </p:nvSpPr>
         <p:spPr>
           <a:xfrm>
-            <a:off x="3566160" y="2103120"/>
-            <a:ext cx="2011680" cy="731520"/>
+            <a:off x="640080" y="1975104"/>
+            <a:ext cx="4206240" cy="475488"/>
           </a:xfrm>
           <a:prstGeom prst="rect">
             <a:avLst/>
@@ -26839,64 +26237,27 @@
           <a:bodyPr wrap="square" lIns="27432" tIns="22860" rIns="27432" bIns="22860" rtlCol="0" anchor="ctr"/>
           <a:lstStyle/>
           <a:p>
-            <a:pPr algn="ctr"/>
-            <a:r>
-              <a:rPr sz="2000" b="1" i="0">
+            <a:r>
+              <a:rPr sz="2000">
                 <a:solidFill>
                   <a:srgbClr val="5C4826"/>
                 </a:solidFill>
               </a:rPr>
-              <a:t>unsafe access</a:t>
-            </a:r>
-          </a:p>
-        </p:txBody>
-      </p:sp>
-      <p:cxnSp>
-        <p:nvCxnSpPr>
-          <p:cNvPr id="913" name="Connector 913"/>
-          <p:cNvCxnSpPr/>
-          <p:nvPr/>
-        </p:nvCxnSpPr>
-        <p:spPr>
-          <a:xfrm>
-            <a:off x="5577840" y="2468880"/>
-            <a:ext cx="548640" cy="0"/>
-          </a:xfrm>
-          <a:prstGeom prst="line">
-            <a:avLst/>
-          </a:prstGeom>
-          <a:ln w="28575">
-            <a:solidFill>
-              <a:srgbClr val="8E6F3E"/>
-            </a:solidFill>
-            <a:tailEnd type="triangle"/>
-          </a:ln>
-        </p:spPr>
-        <p:style>
-          <a:lnRef idx="2">
-            <a:schemeClr val="accent1"/>
-          </a:lnRef>
-          <a:fillRef idx="0">
-            <a:schemeClr val="accent1"/>
-          </a:fillRef>
-          <a:effectRef idx="1">
-            <a:schemeClr val="accent1"/>
-          </a:effectRef>
-          <a:fontRef idx="minor">
-            <a:schemeClr val="tx1"/>
-          </a:fontRef>
-        </p:style>
-      </p:cxnSp>
-      <p:sp>
-        <p:nvSpPr>
-          <p:cNvPr id="914" name="Card"/>
+              <a:t>inputs[20]</a:t>
+            </a:r>
+          </a:p>
+        </p:txBody>
+      </p:sp>
+      <p:sp>
+        <p:nvSpPr>
+          <p:cNvPr id="912" name="Card"/>
           <p:cNvSpPr/>
           <p:nvPr/>
         </p:nvSpPr>
         <p:spPr>
           <a:xfrm>
-            <a:off x="6126480" y="2103120"/>
-            <a:ext cx="2011680" cy="731520"/>
+            <a:off x="640080" y="2615184"/>
+            <a:ext cx="4206240" cy="475488"/>
           </a:xfrm>
           <a:prstGeom prst="rect">
             <a:avLst/>
@@ -26929,144 +26290,33 @@
           <a:bodyPr wrap="square" lIns="27432" tIns="22860" rIns="27432" bIns="22860" rtlCol="0" anchor="ctr"/>
           <a:lstStyle/>
           <a:p>
-            <a:pPr algn="ctr"/>
-            <a:r>
-              <a:rPr sz="2000" b="1" i="0">
-                <a:solidFill>
-                  <a:srgbClr val="5C4826"/>
-                </a:solidFill>
-              </a:rPr>
-              <a:t>Windows crash</a:t>
-            </a:r>
-          </a:p>
-        </p:txBody>
-      </p:sp>
-      <p:sp>
-        <p:nvSpPr>
-          <p:cNvPr id="915" name="Label"/>
-          <p:cNvSpPr txBox="1"/>
-          <p:nvPr/>
-        </p:nvSpPr>
-        <p:spPr>
-          <a:xfrm>
-            <a:off x="548640" y="3474720"/>
-            <a:ext cx="8046720" cy="457200"/>
-          </a:xfrm>
-          <a:prstGeom prst="rect">
-            <a:avLst/>
-          </a:prstGeom>
-          <a:noFill/>
-        </p:spPr>
-        <p:txBody>
-          <a:bodyPr wrap="square" lIns="27432" tIns="22860" rIns="27432" bIns="22860" anchor="t">
-            <a:spAutoFit/>
-          </a:bodyPr>
-          <a:lstStyle/>
-          <a:p>
-            <a:pPr algn="ctr"/>
-            <a:r>
-              <a:rPr sz="2000" b="1" i="0">
-                <a:solidFill>
-                  <a:srgbClr val="5C4826"/>
-                </a:solidFill>
-              </a:rPr>
-              <a:t>Model: a chain of events traced to a defect.   Intervention: repair the incompatibility.</a:t>
-            </a:r>
-          </a:p>
-        </p:txBody>
-      </p:sp>
-    </p:spTree>
-  </p:cSld>
-  <p:clrMapOvr>
-    <a:masterClrMapping/>
-  </p:clrMapOvr>
-</p:sld>
-</file>
-
-<file path=ppt/slides/slide6.xml><?xml version="1.0" encoding="utf-8"?>
-<p:sld xmlns:a="http://schemas.openxmlformats.org/drawingml/2006/main" xmlns:r="http://schemas.openxmlformats.org/officeDocument/2006/relationships" xmlns:p="http://schemas.openxmlformats.org/presentationml/2006/main">
-  <p:cSld>
-    <p:spTree>
-      <p:nvGrpSpPr>
-        <p:cNvPr id="1" name=""/>
-        <p:cNvGrpSpPr/>
-        <p:nvPr/>
-      </p:nvGrpSpPr>
-      <p:grpSpPr>
-        <a:xfrm>
-          <a:off x="0" y="0"/>
-          <a:ext cx="0" cy="0"/>
-          <a:chOff x="0" y="0"/>
-          <a:chExt cx="0" cy="0"/>
-        </a:xfrm>
-      </p:grpSpPr>
-      <p:sp>
-        <p:nvSpPr>
-          <p:cNvPr id="3" name="Title 2"/>
-          <p:cNvSpPr>
-            <a:spLocks noGrp="1"/>
-          </p:cNvSpPr>
-          <p:nvPr>
-            <p:ph type="title"/>
-          </p:nvPr>
-        </p:nvSpPr>
-        <p:spPr/>
-        <p:txBody>
-          <a:bodyPr>
-            <a:normAutofit fontScale="90000"/>
-          </a:bodyPr>
-          <a:lstStyle/>
-          <a:p>
-            <a:r>
-              <a:rPr sz="2400" b="0" i="0">
-                <a:solidFill>
-                  <a:srgbClr val="000000"/>
-                </a:solidFill>
-              </a:rPr>
-              <a:t>What would you change?</a:t>
-            </a:r>
-          </a:p>
-        </p:txBody>
-      </p:sp>
-      <p:sp>
-        <p:nvSpPr>
-          <p:cNvPr id="900" name="Slide Number Placeholder 900"/>
-          <p:cNvSpPr>
-            <a:spLocks noGrp="1"/>
-          </p:cNvSpPr>
-          <p:nvPr>
-            <p:ph type="sldNum" sz="quarter" idx="4"/>
-          </p:nvPr>
-        </p:nvSpPr>
-        <p:spPr/>
-        <p:txBody>
-          <a:bodyPr/>
-          <a:lstStyle/>
-          <a:p>
-            <a:fld id="{3DC31DEB-C161-48EB-8EC4-D4D18487B0EB}" type="slidenum">
-              <a:rPr lang="en-US" smtClean="0"/>
-              <a:t>6</a:t>
-            </a:fld>
-            <a:endParaRPr lang="en-US"/>
-          </a:p>
-        </p:txBody>
-      </p:sp>
-      <p:sp>
-        <p:nvSpPr>
-          <p:cNvPr id="902" name="Card"/>
+            <a:r>
+              <a:rPr sz="2000">
+                <a:solidFill>
+                  <a:srgbClr val="C01B1B"/>
+                </a:solidFill>
+              </a:rPr>
+              <a:t>UNSAFE ACCESS</a:t>
+            </a:r>
+          </a:p>
+        </p:txBody>
+      </p:sp>
+      <p:sp>
+        <p:nvSpPr>
+          <p:cNvPr id="912" name="Card"/>
           <p:cNvSpPr/>
           <p:nvPr/>
         </p:nvSpPr>
         <p:spPr>
           <a:xfrm>
-            <a:off x="1371600" y="1188720"/>
-            <a:ext cx="6400800" cy="1051560"/>
+            <a:off x="5303520" y="2615184"/>
+            <a:ext cx="3200400" cy="475488"/>
           </a:xfrm>
           <a:prstGeom prst="rect">
             <a:avLst/>
           </a:prstGeom>
           <a:solidFill>
-            <a:srgbClr val="F5F1E8"/>
+            <a:srgbClr val="2E6B3A"/>
           </a:solidFill>
           <a:ln w="12700">
             <a:solidFill>
@@ -27093,237 +26343,188 @@
           <a:bodyPr wrap="square" lIns="27432" tIns="22860" rIns="27432" bIns="22860" rtlCol="0" anchor="ctr"/>
           <a:lstStyle/>
           <a:p>
-            <a:pPr algn="ctr"/>
-            <a:r>
-              <a:rPr sz="2000" b="1" i="0" dirty="0">
+            <a:r>
+              <a:rPr sz="2000">
+                <a:solidFill>
+                  <a:srgbClr val="FFFFFF"/>
+                </a:solidFill>
+              </a:rPr>
+              <a:t>ADD BOUNDS CHECK</a:t>
+            </a:r>
+          </a:p>
+        </p:txBody>
+      </p:sp>
+      <p:sp>
+        <p:nvSpPr>
+          <p:cNvPr id="915" name="Label"/>
+          <p:cNvSpPr txBox="1"/>
+          <p:nvPr/>
+        </p:nvSpPr>
+        <p:spPr>
+          <a:xfrm>
+            <a:off x="5303520" y="3200400"/>
+            <a:ext cx="3200400" cy="475488"/>
+          </a:xfrm>
+          <a:prstGeom prst="rect">
+            <a:avLst/>
+          </a:prstGeom>
+          <a:noFill/>
+        </p:spPr>
+        <p:txBody>
+          <a:bodyPr wrap="square" lIns="27432" tIns="22860" rIns="27432" bIns="22860" anchor="t">
+            <a:spAutoFit/>
+          </a:bodyPr>
+          <a:lstStyle/>
+          <a:p>
+            <a:r>
+              <a:rPr sz="2000">
+                <a:solidFill>
+                  <a:srgbClr val="555960"/>
+                </a:solidFill>
+              </a:rPr>
+              <a:t>the repair stops the access here</a:t>
+            </a:r>
+          </a:p>
+        </p:txBody>
+      </p:sp>
+      <p:sp>
+        <p:nvSpPr>
+          <p:cNvPr id="915" name="Label"/>
+          <p:cNvSpPr txBox="1"/>
+          <p:nvPr/>
+        </p:nvSpPr>
+        <p:spPr>
+          <a:xfrm>
+            <a:off x="457200" y="4023360"/>
+            <a:ext cx="8229600" cy="475488"/>
+          </a:xfrm>
+          <a:prstGeom prst="rect">
+            <a:avLst/>
+          </a:prstGeom>
+          <a:noFill/>
+        </p:spPr>
+        <p:txBody>
+          <a:bodyPr wrap="square" lIns="27432" tIns="22860" rIns="27432" bIns="22860" anchor="t">
+            <a:spAutoFit/>
+          </a:bodyPr>
+          <a:lstStyle/>
+          <a:p>
+            <a:r>
+              <a:rPr sz="2000">
                 <a:solidFill>
                   <a:srgbClr val="5C4826"/>
                 </a:solidFill>
               </a:rPr>
-              <a:t>A</a:t>
-            </a:r>
-          </a:p>
-          <a:p>
-            <a:pPr algn="ctr"/>
-            <a:r>
-              <a:rPr sz="2000" b="0" i="0" dirty="0">
-                <a:solidFill>
-                  <a:srgbClr val="555960"/>
-                </a:solidFill>
-              </a:rPr>
-              <a:t>Fix the defective content</a:t>
-            </a:r>
-            <a:endParaRPr lang="en-US" sz="2000" b="0" i="0" dirty="0">
-              <a:solidFill>
-                <a:srgbClr val="555960"/>
-              </a:solidFill>
-            </a:endParaRPr>
-          </a:p>
-        </p:txBody>
-      </p:sp>
-      <p:sp>
-        <p:nvSpPr>
-          <p:cNvPr id="904" name="Card"/>
-          <p:cNvSpPr/>
-          <p:nvPr/>
-        </p:nvSpPr>
-        <p:spPr>
-          <a:xfrm>
-            <a:off x="1371600" y="2606040"/>
-            <a:ext cx="6400800" cy="1051560"/>
-          </a:xfrm>
-          <a:prstGeom prst="rect">
-            <a:avLst/>
-          </a:prstGeom>
-          <a:solidFill>
-            <a:srgbClr val="F5F1E8"/>
-          </a:solidFill>
-          <a:ln w="12700">
+              <a:t>Model: the crash resulted from a defective component mechanism.</a:t>
+            </a:r>
+          </a:p>
+        </p:txBody>
+      </p:sp>
+      <p:sp>
+        <p:nvSpPr>
+          <p:cNvPr id="915" name="Label"/>
+          <p:cNvSpPr txBox="1"/>
+          <p:nvPr/>
+        </p:nvSpPr>
+        <p:spPr>
+          <a:xfrm>
+            <a:off x="457200" y="4590288"/>
+            <a:ext cx="8229600" cy="475488"/>
+          </a:xfrm>
+          <a:prstGeom prst="rect">
+            <a:avLst/>
+          </a:prstGeom>
+          <a:noFill/>
+        </p:spPr>
+        <p:txBody>
+          <a:bodyPr wrap="square" lIns="27432" tIns="22860" rIns="27432" bIns="22860" anchor="t">
+            <a:spAutoFit/>
+          </a:bodyPr>
+          <a:lstStyle/>
+          <a:p>
+            <a:r>
+              <a:rPr sz="2000">
+                <a:solidFill>
+                  <a:srgbClr val="5C4826"/>
+                </a:solidFill>
+              </a:rPr>
+              <a:t>Intervention: repair the mechanism at the crash site.</a:t>
+            </a:r>
+          </a:p>
+        </p:txBody>
+      </p:sp>
+      <p:cxnSp>
+        <p:nvCxnSpPr>
+          <p:cNvPr id="902" name="Connector 901"/>
+          <p:cNvCxnSpPr/>
+          <p:nvPr/>
+        </p:nvCxnSpPr>
+        <p:spPr>
+          <a:xfrm>
+            <a:off x="2743200" y="2450592"/>
+            <a:ext cx="0" cy="164592"/>
+          </a:xfrm>
+          <a:prstGeom prst="line">
+            <a:avLst/>
+          </a:prstGeom>
+          <a:ln w="19050">
             <a:solidFill>
-              <a:srgbClr val="C9B991"/>
+              <a:srgbClr val="8E6F3E"/>
             </a:solidFill>
-          </a:ln>
-          <a:effectLst/>
-        </p:spPr>
-        <p:style>
-          <a:lnRef idx="1">
-            <a:schemeClr val="accent1"/>
-          </a:lnRef>
-          <a:fillRef idx="3">
-            <a:schemeClr val="accent1"/>
-          </a:fillRef>
-          <a:effectRef idx="2">
-            <a:schemeClr val="accent1"/>
-          </a:effectRef>
-          <a:fontRef idx="minor">
-            <a:schemeClr val="lt1"/>
-          </a:fontRef>
-        </p:style>
-        <p:txBody>
-          <a:bodyPr wrap="square" lIns="27432" tIns="22860" rIns="27432" bIns="22860" rtlCol="0" anchor="ctr"/>
-          <a:lstStyle/>
-          <a:p>
-            <a:pPr algn="ctr"/>
-            <a:r>
-              <a:rPr sz="2000" b="1" i="0" dirty="0">
-                <a:solidFill>
-                  <a:srgbClr val="5C4826"/>
-                </a:solidFill>
-              </a:rPr>
-              <a:t>B</a:t>
-            </a:r>
-          </a:p>
-          <a:p>
-            <a:pPr algn="ctr"/>
-            <a:r>
-              <a:rPr sz="2000" b="0" i="0" dirty="0">
-                <a:solidFill>
-                  <a:srgbClr val="555960"/>
-                </a:solidFill>
-              </a:rPr>
-              <a:t>Repair the content-processing implementation</a:t>
-            </a:r>
-            <a:endParaRPr lang="en-US" sz="2000" b="0" i="0" dirty="0">
-              <a:solidFill>
-                <a:srgbClr val="555960"/>
-              </a:solidFill>
-            </a:endParaRPr>
-          </a:p>
-        </p:txBody>
-      </p:sp>
-      <p:sp>
-        <p:nvSpPr>
-          <p:cNvPr id="906" name="Card"/>
-          <p:cNvSpPr/>
-          <p:nvPr/>
-        </p:nvSpPr>
-        <p:spPr>
-          <a:xfrm>
-            <a:off x="1371600" y="4023360"/>
-            <a:ext cx="6400800" cy="1051560"/>
-          </a:xfrm>
-          <a:prstGeom prst="rect">
-            <a:avLst/>
-          </a:prstGeom>
-          <a:solidFill>
-            <a:srgbClr val="F5F1E8"/>
-          </a:solidFill>
-          <a:ln w="12700">
+            <a:tailEnd type="triangle"/>
+          </a:ln>
+        </p:spPr>
+        <p:style>
+          <a:lnRef idx="2">
+            <a:schemeClr val="accent1"/>
+          </a:lnRef>
+          <a:fillRef idx="0">
+            <a:schemeClr val="accent1"/>
+          </a:fillRef>
+          <a:effectRef idx="1">
+            <a:schemeClr val="accent1"/>
+          </a:effectRef>
+          <a:fontRef idx="minor">
+            <a:schemeClr val="tx1"/>
+          </a:fontRef>
+        </p:style>
+      </p:cxnSp>
+      <p:cxnSp>
+        <p:nvCxnSpPr>
+          <p:cNvPr id="911" name="Connector 911"/>
+          <p:cNvCxnSpPr/>
+          <p:nvPr/>
+        </p:nvCxnSpPr>
+        <p:spPr>
+          <a:xfrm>
+            <a:off x="4846320" y="2852928"/>
+            <a:ext cx="457200" cy="0"/>
+          </a:xfrm>
+          <a:prstGeom prst="line">
+            <a:avLst/>
+          </a:prstGeom>
+          <a:ln w="28575">
             <a:solidFill>
-              <a:srgbClr val="C9B991"/>
+              <a:srgbClr val="8E6F3E"/>
             </a:solidFill>
-          </a:ln>
-          <a:effectLst/>
-        </p:spPr>
-        <p:style>
-          <a:lnRef idx="1">
-            <a:schemeClr val="accent1"/>
-          </a:lnRef>
-          <a:fillRef idx="3">
-            <a:schemeClr val="accent1"/>
-          </a:fillRef>
-          <a:effectRef idx="2">
-            <a:schemeClr val="accent1"/>
-          </a:effectRef>
-          <a:fontRef idx="minor">
-            <a:schemeClr val="lt1"/>
-          </a:fontRef>
-        </p:style>
-        <p:txBody>
-          <a:bodyPr wrap="square" lIns="27432" tIns="22860" rIns="27432" bIns="22860" rtlCol="0" anchor="ctr"/>
-          <a:lstStyle/>
-          <a:p>
-            <a:pPr algn="ctr"/>
-            <a:r>
-              <a:rPr sz="2000" b="1" i="0" dirty="0">
-                <a:solidFill>
-                  <a:srgbClr val="5C4826"/>
-                </a:solidFill>
-              </a:rPr>
-              <a:t>C</a:t>
-            </a:r>
-          </a:p>
-          <a:p>
-            <a:pPr algn="ctr"/>
-            <a:r>
-              <a:rPr sz="2000" b="0" i="0" dirty="0">
-                <a:solidFill>
-                  <a:srgbClr val="555960"/>
-                </a:solidFill>
-              </a:rPr>
-              <a:t>Improve engineering review and testing</a:t>
-            </a:r>
-          </a:p>
-        </p:txBody>
-      </p:sp>
-      <p:sp>
-        <p:nvSpPr>
-          <p:cNvPr id="2" name="FooterBand"/>
-          <p:cNvSpPr/>
-          <p:nvPr/>
-        </p:nvSpPr>
-        <p:spPr>
-          <a:xfrm>
-            <a:off x="274320" y="5596128"/>
-            <a:ext cx="8595360" cy="822960"/>
-          </a:xfrm>
-          <a:prstGeom prst="rect">
-            <a:avLst/>
-          </a:prstGeom>
-          <a:solidFill>
-            <a:srgbClr val="8E6F3E"/>
-          </a:solidFill>
-          <a:ln>
-            <a:noFill/>
-          </a:ln>
-          <a:effectLst/>
-        </p:spPr>
-        <p:style>
-          <a:lnRef idx="1">
-            <a:schemeClr val="accent1"/>
-          </a:lnRef>
-          <a:fillRef idx="3">
-            <a:schemeClr val="accent1"/>
-          </a:fillRef>
-          <a:effectRef idx="2">
-            <a:schemeClr val="accent1"/>
-          </a:effectRef>
-          <a:fontRef idx="minor">
-            <a:schemeClr val="lt1"/>
-          </a:fontRef>
-        </p:style>
-        <p:txBody>
-          <a:bodyPr wrap="square" lIns="27432" tIns="22860" rIns="27432" bIns="22860" rtlCol="0" anchor="ctr"/>
-          <a:lstStyle/>
-          <a:p>
-            <a:pPr algn="ctr"/>
-            <a:r>
-              <a:rPr sz="2000" b="1" i="0" dirty="0">
-                <a:solidFill>
-                  <a:srgbClr val="FFFFFF"/>
-                </a:solidFill>
-              </a:rPr>
-              <a:t>Which of these prevents the next failure of this kind?</a:t>
-            </a:r>
-            <a:endParaRPr lang="en-US" sz="2000" b="1" i="0" dirty="0">
-              <a:solidFill>
-                <a:srgbClr val="FFFFFF"/>
-              </a:solidFill>
-            </a:endParaRPr>
-          </a:p>
-          <a:p>
-            <a:pPr algn="ctr"/>
-            <a:r>
-              <a:rPr sz="2000" b="1" i="0" dirty="0">
-                <a:solidFill>
-                  <a:srgbClr val="FFFFFF"/>
-                </a:solidFill>
-              </a:rPr>
-              <a:t>Fixing the instance is not the same as preventing the class.</a:t>
-            </a:r>
-          </a:p>
-        </p:txBody>
-      </p:sp>
+            <a:tailEnd type="triangle"/>
+          </a:ln>
+        </p:spPr>
+        <p:style>
+          <a:lnRef idx="2">
+            <a:schemeClr val="accent1"/>
+          </a:lnRef>
+          <a:fillRef idx="0">
+            <a:schemeClr val="accent1"/>
+          </a:fillRef>
+          <a:effectRef idx="1">
+            <a:schemeClr val="accent1"/>
+          </a:effectRef>
+          <a:fontRef idx="minor">
+            <a:schemeClr val="tx1"/>
+          </a:fontRef>
+        </p:style>
+      </p:cxnSp>
     </p:spTree>
   </p:cSld>
   <p:clrMapOvr>
@@ -28144,7 +27345,7 @@
             <a:avLst/>
           </a:prstGeom>
           <a:solidFill>
-            <a:srgbClr val="8E6F3E"/>
+            <a:srgbClr val="3E5C6F"/>
           </a:solidFill>
           <a:ln>
             <a:noFill/>
@@ -28166,7 +27367,7 @@
           </a:fontRef>
         </p:style>
         <p:txBody>
-          <a:bodyPr wrap="none" lIns="27432" tIns="22860" rIns="27432" bIns="22860" rtlCol="0" anchor="ctr"/>
+          <a:bodyPr wrap="square" lIns="27432" tIns="22860" rIns="27432" bIns="22860" rtlCol="0" anchor="ctr"/>
           <a:lstStyle/>
           <a:p>
             <a:pPr algn="ctr"/>
@@ -28196,7 +27397,7 @@
             <a:avLst/>
           </a:prstGeom>
           <a:solidFill>
-            <a:srgbClr val="8E6F3E"/>
+            <a:srgbClr val="6F3E5C"/>
           </a:solidFill>
           <a:ln>
             <a:noFill/>
@@ -28218,7 +27419,7 @@
           </a:fontRef>
         </p:style>
         <p:txBody>
-          <a:bodyPr wrap="none" lIns="27432" tIns="22860" rIns="27432" bIns="22860" rtlCol="0" anchor="ctr"/>
+          <a:bodyPr wrap="square" lIns="27432" tIns="22860" rIns="27432" bIns="22860" rtlCol="0" anchor="ctr"/>
           <a:lstStyle/>
           <a:p>
             <a:pPr algn="ctr"/>

--- a/course/lectures/act-2-delegation-and-control/04-failure-aware-engineering/2-4-Failure-Aware-Engineering.pptx
+++ b/course/lectures/act-2-delegation-and-control/04-failure-aware-engineering/2-4-Failure-Aware-Engineering.pptx
@@ -8708,7 +8708,7 @@
             <a:off x="3017520" y="1417320"/>
             <a:ext cx="1859280" cy="1737360"/>
           </a:xfrm>
-          <a:prstGeom prst="line">
+          <a:prstGeom prst="bentConnector3">
             <a:avLst/>
           </a:prstGeom>
           <a:ln w="19050">
@@ -8747,7 +8747,7 @@
             <a:off x="3017520" y="2535237"/>
             <a:ext cx="1859280" cy="619443"/>
           </a:xfrm>
-          <a:prstGeom prst="line">
+          <a:prstGeom prst="bentConnector3">
             <a:avLst/>
           </a:prstGeom>
           <a:ln w="19050">
@@ -8786,7 +8786,7 @@
             <a:off x="3017520" y="3154680"/>
             <a:ext cx="1859280" cy="504190"/>
           </a:xfrm>
-          <a:prstGeom prst="line">
+          <a:prstGeom prst="bentConnector3">
             <a:avLst/>
           </a:prstGeom>
           <a:ln w="19050">
@@ -9338,7 +9338,7 @@
             <a:off x="1828800" y="1874519"/>
             <a:ext cx="274319" cy="640080"/>
           </a:xfrm>
-          <a:prstGeom prst="line">
+          <a:prstGeom prst="bentConnector3">
             <a:avLst/>
           </a:prstGeom>
           <a:ln w="28575">
@@ -9446,7 +9446,7 @@
             <a:off x="6217920" y="1874519"/>
             <a:ext cx="914400" cy="640080"/>
           </a:xfrm>
-          <a:prstGeom prst="line">
+          <a:prstGeom prst="bentConnector3">
             <a:avLst/>
           </a:prstGeom>
           <a:ln w="28575">
@@ -9482,7 +9482,7 @@
             <a:off x="5760720" y="3017520"/>
             <a:ext cx="640080" cy="685800"/>
           </a:xfrm>
-          <a:prstGeom prst="line">
+          <a:prstGeom prst="bentConnector3">
             <a:avLst/>
           </a:prstGeom>
           <a:ln w="28575">
@@ -11147,7 +11147,7 @@
             <a:off x="2377440" y="2194560"/>
             <a:ext cx="731519" cy="822959"/>
           </a:xfrm>
-          <a:prstGeom prst="line">
+          <a:prstGeom prst="bentConnector3">
             <a:avLst/>
           </a:prstGeom>
           <a:ln w="19050">
@@ -11282,7 +11282,7 @@
             <a:off x="5943600" y="2194560"/>
             <a:ext cx="731519" cy="822959"/>
           </a:xfrm>
-          <a:prstGeom prst="line">
+          <a:prstGeom prst="bentConnector3">
             <a:avLst/>
           </a:prstGeom>
           <a:ln w="19050">
@@ -12135,7 +12135,7 @@
             <a:off x="1485900" y="2194560"/>
             <a:ext cx="3086100" cy="2286000"/>
           </a:xfrm>
-          <a:prstGeom prst="line">
+          <a:prstGeom prst="bentConnector3">
             <a:avLst/>
           </a:prstGeom>
           <a:ln w="28575">
@@ -12171,7 +12171,7 @@
             <a:off x="3589020" y="2194560"/>
             <a:ext cx="982980" cy="2286000"/>
           </a:xfrm>
-          <a:prstGeom prst="line">
+          <a:prstGeom prst="bentConnector3">
             <a:avLst/>
           </a:prstGeom>
           <a:ln w="28575">
@@ -12207,7 +12207,7 @@
             <a:off x="4572000" y="2194560"/>
             <a:ext cx="1120139" cy="2286000"/>
           </a:xfrm>
-          <a:prstGeom prst="line">
+          <a:prstGeom prst="bentConnector3">
             <a:avLst/>
           </a:prstGeom>
           <a:ln w="28575">
@@ -12243,7 +12243,7 @@
             <a:off x="4572000" y="2194560"/>
             <a:ext cx="3223260" cy="2286000"/>
           </a:xfrm>
-          <a:prstGeom prst="line">
+          <a:prstGeom prst="bentConnector3">
             <a:avLst/>
           </a:prstGeom>
           <a:ln w="28575">
@@ -12662,7 +12662,7 @@
             <a:off x="1572768" y="2423160"/>
             <a:ext cx="758951" cy="640080"/>
           </a:xfrm>
-          <a:prstGeom prst="line">
+          <a:prstGeom prst="bentConnector3">
             <a:avLst/>
           </a:prstGeom>
           <a:ln w="28575">
@@ -12698,7 +12698,7 @@
             <a:off x="2697480" y="2423160"/>
             <a:ext cx="758951" cy="640080"/>
           </a:xfrm>
-          <a:prstGeom prst="line">
+          <a:prstGeom prst="bentConnector3">
             <a:avLst/>
           </a:prstGeom>
           <a:ln w="28575">
@@ -18804,8 +18804,8 @@
         </p:nvSpPr>
         <p:spPr>
           <a:xfrm>
-            <a:off x="2103120" y="2231136"/>
-            <a:ext cx="2194560" cy="713232"/>
+            <a:off x="2103120" y="2560320"/>
+            <a:ext cx="2194560" cy="585216"/>
           </a:xfrm>
           <a:prstGeom prst="rect">
             <a:avLst/>
@@ -18838,14 +18838,13 @@
           <a:bodyPr wrap="square" lIns="27432" tIns="22860" rIns="27432" bIns="22860" rtlCol="0" anchor="ctr"/>
           <a:lstStyle/>
           <a:p>
-            <a:pPr algn="ctr"/>
-            <a:r>
-              <a:rPr sz="1100" b="0" i="1" dirty="0">
+            <a:r>
+              <a:rPr sz="2000">
                 <a:solidFill>
                   <a:srgbClr val="5C4826"/>
                 </a:solidFill>
               </a:rPr>
-              <a:t>invalid content causes unsafe execution</a:t>
+              <a:t>invalid content runs unsafely</a:t>
             </a:r>
           </a:p>
         </p:txBody>
@@ -18858,8 +18857,8 @@
         </p:nvSpPr>
         <p:spPr>
           <a:xfrm>
-            <a:off x="2103120" y="3008376"/>
-            <a:ext cx="2194560" cy="713232"/>
+            <a:off x="2103120" y="3200400"/>
+            <a:ext cx="2194560" cy="585216"/>
           </a:xfrm>
           <a:prstGeom prst="rect">
             <a:avLst/>
@@ -18892,9 +18891,8 @@
           <a:bodyPr wrap="square" lIns="27432" tIns="22860" rIns="27432" bIns="22860" rtlCol="0" anchor="ctr"/>
           <a:lstStyle/>
           <a:p>
-            <a:pPr algn="ctr"/>
-            <a:r>
-              <a:rPr sz="1100" b="0" i="1">
+            <a:r>
+              <a:rPr sz="2000">
                 <a:solidFill>
                   <a:srgbClr val="5C4826"/>
                 </a:solidFill>
@@ -18912,8 +18910,8 @@
         </p:nvSpPr>
         <p:spPr>
           <a:xfrm>
-            <a:off x="365760" y="2231136"/>
-            <a:ext cx="1645920" cy="713232"/>
+            <a:off x="365760" y="2560320"/>
+            <a:ext cx="1645920" cy="585216"/>
           </a:xfrm>
           <a:prstGeom prst="rect">
             <a:avLst/>
@@ -18944,14 +18942,65 @@
           <a:bodyPr wrap="square" lIns="27432" tIns="22860" rIns="27432" bIns="22860" rtlCol="0" anchor="ctr"/>
           <a:lstStyle/>
           <a:p>
-            <a:pPr algn="ctr"/>
-            <a:r>
-              <a:rPr sz="1200" b="1" i="0" dirty="0">
+            <a:r>
+              <a:rPr sz="2000">
                 <a:solidFill>
                   <a:srgbClr val="FFFFFF"/>
                 </a:solidFill>
               </a:rPr>
-              <a:t>Interpret security content</a:t>
+              <a:t>Interpret content</a:t>
+            </a:r>
+          </a:p>
+        </p:txBody>
+      </p:sp>
+      <p:sp>
+        <p:nvSpPr>
+          <p:cNvPr id="910" name="Block"/>
+          <p:cNvSpPr/>
+          <p:nvPr/>
+        </p:nvSpPr>
+        <p:spPr>
+          <a:xfrm>
+            <a:off x="365760" y="3200400"/>
+            <a:ext cx="1645920" cy="585216"/>
+          </a:xfrm>
+          <a:prstGeom prst="rect">
+            <a:avLst/>
+          </a:prstGeom>
+          <a:solidFill>
+            <a:srgbClr val="8E6F3E"/>
+          </a:solidFill>
+          <a:ln>
+            <a:noFill/>
+          </a:ln>
+          <a:effectLst/>
+        </p:spPr>
+        <p:style>
+          <a:lnRef idx="1">
+            <a:schemeClr val="accent1"/>
+          </a:lnRef>
+          <a:fillRef idx="3">
+            <a:schemeClr val="accent1"/>
+          </a:fillRef>
+          <a:effectRef idx="2">
+            <a:schemeClr val="accent1"/>
+          </a:effectRef>
+          <a:fontRef idx="minor">
+            <a:schemeClr val="lt1"/>
+          </a:fontRef>
+        </p:style>
+        <p:txBody>
+          <a:bodyPr wrap="square" lIns="27432" tIns="22860" rIns="27432" bIns="22860" rtlCol="0" anchor="ctr"/>
+          <a:lstStyle/>
+          <a:p>
+            <a:pPr algn="ctr"/>
+            <a:r>
+              <a:rPr sz="2000" b="1" i="0" dirty="0">
+                <a:solidFill>
+                  <a:srgbClr val="FFFFFF"/>
+                </a:solidFill>
+              </a:rPr>
+              <a:t>Validate content</a:t>
             </a:r>
             <a:endParaRPr lang="en-US" sz="2000" b="1" i="0" dirty="0">
               <a:solidFill>
@@ -18963,14 +19012,14 @@
       </p:sp>
       <p:sp>
         <p:nvSpPr>
-          <p:cNvPr id="910" name="Block"/>
+          <p:cNvPr id="911" name="Block"/>
           <p:cNvSpPr/>
           <p:nvPr/>
         </p:nvSpPr>
         <p:spPr>
           <a:xfrm>
-            <a:off x="365760" y="3008376"/>
-            <a:ext cx="1645920" cy="713232"/>
+            <a:off x="365760" y="3840480"/>
+            <a:ext cx="1645920" cy="585216"/>
           </a:xfrm>
           <a:prstGeom prst="rect">
             <a:avLst/>
@@ -19003,14 +19052,14 @@
           <a:p>
             <a:pPr algn="ctr"/>
             <a:r>
-              <a:rPr sz="1200" b="1" i="0" dirty="0">
+              <a:rPr sz="2000" b="1" i="0" dirty="0">
                 <a:solidFill>
                   <a:srgbClr val="FFFFFF"/>
                 </a:solidFill>
               </a:rPr>
-              <a:t>Validate content</a:t>
-            </a:r>
-            <a:endParaRPr lang="en-US" sz="2000" b="1" i="0" dirty="0">
+              <a:t>Distribute content</a:t>
+            </a:r>
+            <a:endParaRPr sz="2000" b="1" i="0" dirty="0">
               <a:solidFill>
                 <a:srgbClr val="FFFFFF"/>
               </a:solidFill>
@@ -19020,14 +19069,14 @@
       </p:sp>
       <p:sp>
         <p:nvSpPr>
-          <p:cNvPr id="911" name="Block"/>
+          <p:cNvPr id="912" name="Block"/>
           <p:cNvSpPr/>
           <p:nvPr/>
         </p:nvSpPr>
         <p:spPr>
           <a:xfrm>
-            <a:off x="365760" y="3785615"/>
-            <a:ext cx="1645920" cy="713232"/>
+            <a:off x="365760" y="4480560"/>
+            <a:ext cx="1645920" cy="585216"/>
           </a:xfrm>
           <a:prstGeom prst="rect">
             <a:avLst/>
@@ -19060,64 +19109,7 @@
           <a:p>
             <a:pPr algn="ctr"/>
             <a:r>
-              <a:rPr sz="1200" b="1" i="0" dirty="0">
-                <a:solidFill>
-                  <a:srgbClr val="FFFFFF"/>
-                </a:solidFill>
-              </a:rPr>
-              <a:t>Distribute content</a:t>
-            </a:r>
-            <a:endParaRPr sz="2000" b="1" i="0" dirty="0">
-              <a:solidFill>
-                <a:srgbClr val="FFFFFF"/>
-              </a:solidFill>
-            </a:endParaRPr>
-          </a:p>
-        </p:txBody>
-      </p:sp>
-      <p:sp>
-        <p:nvSpPr>
-          <p:cNvPr id="912" name="Block"/>
-          <p:cNvSpPr/>
-          <p:nvPr/>
-        </p:nvSpPr>
-        <p:spPr>
-          <a:xfrm>
-            <a:off x="365760" y="4562856"/>
-            <a:ext cx="1645920" cy="713232"/>
-          </a:xfrm>
-          <a:prstGeom prst="rect">
-            <a:avLst/>
-          </a:prstGeom>
-          <a:solidFill>
-            <a:srgbClr val="8E6F3E"/>
-          </a:solidFill>
-          <a:ln>
-            <a:noFill/>
-          </a:ln>
-          <a:effectLst/>
-        </p:spPr>
-        <p:style>
-          <a:lnRef idx="1">
-            <a:schemeClr val="accent1"/>
-          </a:lnRef>
-          <a:fillRef idx="3">
-            <a:schemeClr val="accent1"/>
-          </a:fillRef>
-          <a:effectRef idx="2">
-            <a:schemeClr val="accent1"/>
-          </a:effectRef>
-          <a:fontRef idx="minor">
-            <a:schemeClr val="lt1"/>
-          </a:fontRef>
-        </p:style>
-        <p:txBody>
-          <a:bodyPr wrap="square" lIns="27432" tIns="22860" rIns="27432" bIns="22860" rtlCol="0" anchor="ctr"/>
-          <a:lstStyle/>
-          <a:p>
-            <a:pPr algn="ctr"/>
-            <a:r>
-              <a:rPr sz="1200" b="1" i="0" dirty="0">
+              <a:rPr sz="2000" b="1" i="0" dirty="0">
                 <a:solidFill>
                   <a:srgbClr val="FFFFFF"/>
                 </a:solidFill>
@@ -19185,8 +19177,8 @@
         </p:nvSpPr>
         <p:spPr>
           <a:xfrm>
-            <a:off x="2103120" y="3785615"/>
-            <a:ext cx="2194560" cy="713232"/>
+            <a:off x="2103120" y="3840480"/>
+            <a:ext cx="2194560" cy="585216"/>
           </a:xfrm>
           <a:prstGeom prst="rect">
             <a:avLst/>
@@ -19219,14 +19211,13 @@
           <a:bodyPr wrap="square" lIns="27432" tIns="22860" rIns="27432" bIns="22860" rtlCol="0" anchor="ctr"/>
           <a:lstStyle/>
           <a:p>
-            <a:pPr algn="ctr"/>
-            <a:r>
-              <a:rPr lang="en-US" sz="1100" b="0" i="1" dirty="0">
+            <a:r>
+              <a:rPr sz="2000">
                 <a:solidFill>
                   <a:srgbClr val="5C4826"/>
                 </a:solidFill>
               </a:rPr>
-              <a:t>a defective update reaches all endpoints</a:t>
+              <a:t>update reaches every endpoint</a:t>
             </a:r>
           </a:p>
         </p:txBody>
@@ -19239,8 +19230,8 @@
         </p:nvSpPr>
         <p:spPr>
           <a:xfrm>
-            <a:off x="2103120" y="4562856"/>
-            <a:ext cx="2194560" cy="713232"/>
+            <a:off x="2103120" y="4480560"/>
+            <a:ext cx="2194560" cy="585216"/>
           </a:xfrm>
           <a:prstGeom prst="rect">
             <a:avLst/>
@@ -19273,20 +19264,14 @@
           <a:bodyPr wrap="square" lIns="27432" tIns="22860" rIns="27432" bIns="22860" rtlCol="0" anchor="ctr"/>
           <a:lstStyle/>
           <a:p>
-            <a:pPr algn="ctr"/>
-            <a:r>
-              <a:rPr lang="en-US" sz="1100" b="0" i="1" dirty="0">
+            <a:r>
+              <a:rPr sz="2000">
                 <a:solidFill>
                   <a:srgbClr val="5C4826"/>
                 </a:solidFill>
               </a:rPr>
-              <a:t>endpoint failure disables critical services</a:t>
-            </a:r>
-            <a:endParaRPr sz="2000" b="0" i="1" dirty="0">
-              <a:solidFill>
-                <a:srgbClr val="5C4826"/>
-              </a:solidFill>
-            </a:endParaRPr>
+              <a:t>endpoint failure stops services</a:t>
+            </a:r>
           </a:p>
         </p:txBody>
       </p:sp>
@@ -19298,8 +19283,8 @@
         </p:nvSpPr>
         <p:spPr>
           <a:xfrm>
-            <a:off x="365760" y="1883664"/>
-            <a:ext cx="1645920" cy="274320"/>
+            <a:off x="365760" y="2176272"/>
+            <a:ext cx="1645920" cy="310896"/>
           </a:xfrm>
           <a:prstGeom prst="rect">
             <a:avLst/>
@@ -19330,7 +19315,7 @@
           <a:p>
             <a:pPr algn="ctr"/>
             <a:r>
-              <a:rPr lang="en-US" sz="1200" b="1" i="0" dirty="0">
+              <a:rPr lang="en-US" sz="2000" b="1" i="0" dirty="0">
                 <a:solidFill>
                   <a:schemeClr val="bg1"/>
                 </a:solidFill>
@@ -19353,8 +19338,8 @@
         </p:nvSpPr>
         <p:spPr>
           <a:xfrm>
-            <a:off x="2103120" y="1883664"/>
-            <a:ext cx="2194560" cy="274320"/>
+            <a:off x="2103120" y="2176272"/>
+            <a:ext cx="2194560" cy="310896"/>
           </a:xfrm>
           <a:prstGeom prst="rect">
             <a:avLst/>
@@ -19385,7 +19370,7 @@
           <a:p>
             <a:pPr algn="ctr"/>
             <a:r>
-              <a:rPr lang="en-US" sz="1200" b="1" i="0" dirty="0">
+              <a:rPr lang="en-US" sz="2000" b="1" i="0" dirty="0">
                 <a:solidFill>
                   <a:schemeClr val="bg1"/>
                 </a:solidFill>
@@ -19408,7 +19393,7 @@
         </p:nvSpPr>
         <p:spPr>
           <a:xfrm>
-            <a:off x="548640" y="841248"/>
+            <a:off x="548640" y="822960"/>
             <a:ext cx="8046720" cy="566928"/>
           </a:xfrm>
           <a:prstGeom prst="rect">
@@ -19422,47 +19407,13 @@
           </a:bodyPr>
           <a:lstStyle/>
           <a:p>
-            <a:pPr algn="ctr"/>
-            <a:r>
-              <a:rPr sz="1200" b="1" i="1">
+            <a:r>
+              <a:rPr sz="2000">
                 <a:solidFill>
                   <a:srgbClr val="5C4826"/>
                 </a:solidFill>
               </a:rPr>
-              <a:t>We have learned from CrowdStrike. Can we use that knowledge to anticipate</a:t>
-            </a:r>
-          </a:p>
-          <a:p>
-            <a:pPr algn="ctr"/>
-            <a:r>
-              <a:rPr sz="1200" b="1" i="1">
-                <a:solidFill>
-                  <a:srgbClr val="5C4826"/>
-                </a:solidFill>
-              </a:rPr>
-              <a:t>failures in another system?</a:t>
-            </a:r>
-          </a:p>
-          <a:p>
-            <a:pPr algn="ctr"/>
-            <a:r>
-              <a:rPr sz="1200" b="1" i="1">
-                <a:solidFill>
-                  <a:srgbClr val="5C4826"/>
-                </a:solidFill>
-              </a:rPr>
-              <a:t>FMEA — Failure Mode and Effects Analysis — searches, function by function,</a:t>
-            </a:r>
-          </a:p>
-          <a:p>
-            <a:pPr algn="ctr"/>
-            <a:r>
-              <a:rPr sz="1200" b="1" i="1">
-                <a:solidFill>
-                  <a:srgbClr val="5C4826"/>
-                </a:solidFill>
-              </a:rPr>
-              <a:t>for failures that have not happened yet.</a:t>
+              <a:t>We have learned from CrowdStrike. Can we use that knowledge to anticipate failures in another system?</a:t>
             </a:r>
           </a:p>
         </p:txBody>
@@ -19475,8 +19426,8 @@
         </p:nvSpPr>
         <p:spPr>
           <a:xfrm>
-            <a:off x="4389120" y="1883664"/>
-            <a:ext cx="1828800" cy="274320"/>
+            <a:off x="4389120" y="2176272"/>
+            <a:ext cx="1828800" cy="310896"/>
           </a:xfrm>
           <a:prstGeom prst="rect">
             <a:avLst/>
@@ -19507,7 +19458,7 @@
           <a:p>
             <a:pPr algn="ctr"/>
             <a:r>
-              <a:rPr lang="en-US" sz="1200" b="1" i="0" dirty="0">
+              <a:rPr lang="en-US" sz="2000" b="1" i="0" dirty="0">
                 <a:solidFill>
                   <a:schemeClr val="bg1"/>
                 </a:solidFill>
@@ -19530,8 +19481,8 @@
         </p:nvSpPr>
         <p:spPr>
           <a:xfrm>
-            <a:off x="6309360" y="1883664"/>
-            <a:ext cx="2286000" cy="274320"/>
+            <a:off x="6309360" y="2176272"/>
+            <a:ext cx="2286000" cy="310896"/>
           </a:xfrm>
           <a:prstGeom prst="rect">
             <a:avLst/>
@@ -19562,7 +19513,7 @@
           <a:p>
             <a:pPr algn="ctr"/>
             <a:r>
-              <a:rPr lang="en-US" sz="1200" b="1" i="0" dirty="0">
+              <a:rPr lang="en-US" sz="2000" b="1" i="0" dirty="0">
                 <a:solidFill>
                   <a:schemeClr val="bg1"/>
                 </a:solidFill>
@@ -19585,8 +19536,8 @@
         </p:nvSpPr>
         <p:spPr>
           <a:xfrm>
-            <a:off x="4389120" y="2231136"/>
-            <a:ext cx="1828800" cy="713232"/>
+            <a:off x="4389120" y="2560320"/>
+            <a:ext cx="1828800" cy="585216"/>
           </a:xfrm>
           <a:prstGeom prst="rect">
             <a:avLst/>
@@ -19621,7 +19572,7 @@
           <a:p>
             <a:pPr algn="ctr"/>
             <a:r>
-              <a:rPr sz="1100" b="0" i="1" dirty="0">
+              <a:rPr sz="2000" b="0" i="1" dirty="0">
                 <a:solidFill>
                   <a:srgbClr val="5C4826"/>
                 </a:solidFill>
@@ -19639,8 +19590,8 @@
         </p:nvSpPr>
         <p:spPr>
           <a:xfrm>
-            <a:off x="6309360" y="2231136"/>
-            <a:ext cx="2286000" cy="713232"/>
+            <a:off x="6309360" y="2560320"/>
+            <a:ext cx="2286000" cy="585216"/>
           </a:xfrm>
           <a:prstGeom prst="rect">
             <a:avLst/>
@@ -19675,7 +19626,7 @@
           <a:p>
             <a:pPr algn="ctr"/>
             <a:r>
-              <a:rPr sz="1100" b="0" i="1" dirty="0">
+              <a:rPr sz="2000" b="0" i="1" dirty="0">
                 <a:solidFill>
                   <a:srgbClr val="5C4826"/>
                 </a:solidFill>
@@ -19693,8 +19644,8 @@
         </p:nvSpPr>
         <p:spPr>
           <a:xfrm>
-            <a:off x="4389120" y="3008376"/>
-            <a:ext cx="1828800" cy="713232"/>
+            <a:off x="4389120" y="3200400"/>
+            <a:ext cx="1828800" cy="585216"/>
           </a:xfrm>
           <a:prstGeom prst="rect">
             <a:avLst/>
@@ -19727,14 +19678,13 @@
           <a:bodyPr wrap="square" lIns="27432" tIns="22860" rIns="27432" bIns="22860" rtlCol="0" anchor="ctr"/>
           <a:lstStyle/>
           <a:p>
-            <a:pPr algn="ctr"/>
-            <a:r>
-              <a:rPr sz="1100" b="0" i="1" dirty="0">
+            <a:r>
+              <a:rPr sz="2000">
                 <a:solidFill>
                   <a:srgbClr val="5C4826"/>
                 </a:solidFill>
               </a:rPr>
-              <a:t>defective update released</a:t>
+              <a:t>defective update ships</a:t>
             </a:r>
           </a:p>
         </p:txBody>
@@ -19747,8 +19697,8 @@
         </p:nvSpPr>
         <p:spPr>
           <a:xfrm>
-            <a:off x="6309360" y="3008376"/>
-            <a:ext cx="2286000" cy="713232"/>
+            <a:off x="6309360" y="3200400"/>
+            <a:ext cx="2286000" cy="585216"/>
           </a:xfrm>
           <a:prstGeom prst="rect">
             <a:avLst/>
@@ -19781,9 +19731,8 @@
           <a:bodyPr wrap="square" lIns="27432" tIns="22860" rIns="27432" bIns="22860" rtlCol="0" anchor="ctr"/>
           <a:lstStyle/>
           <a:p>
-            <a:pPr algn="ctr"/>
-            <a:r>
-              <a:rPr sz="1100" b="0" i="1" dirty="0">
+            <a:r>
+              <a:rPr sz="2000">
                 <a:solidFill>
                   <a:srgbClr val="5C4826"/>
                 </a:solidFill>
@@ -19801,8 +19750,8 @@
         </p:nvSpPr>
         <p:spPr>
           <a:xfrm>
-            <a:off x="4389120" y="3785615"/>
-            <a:ext cx="1828800" cy="713232"/>
+            <a:off x="4389120" y="3840480"/>
+            <a:ext cx="1828800" cy="585216"/>
           </a:xfrm>
           <a:prstGeom prst="rect">
             <a:avLst/>
@@ -19837,7 +19786,7 @@
           <a:p>
             <a:pPr algn="ctr"/>
             <a:r>
-              <a:rPr sz="1100" b="0" i="1" dirty="0">
+              <a:rPr sz="2000" b="0" i="1" dirty="0">
                 <a:solidFill>
                   <a:srgbClr val="5C4826"/>
                 </a:solidFill>
@@ -19855,8 +19804,8 @@
         </p:nvSpPr>
         <p:spPr>
           <a:xfrm>
-            <a:off x="6309360" y="3785615"/>
-            <a:ext cx="2286000" cy="713232"/>
+            <a:off x="6309360" y="3840480"/>
+            <a:ext cx="2286000" cy="585216"/>
           </a:xfrm>
           <a:prstGeom prst="rect">
             <a:avLst/>
@@ -19889,14 +19838,13 @@
           <a:bodyPr wrap="square" lIns="27432" tIns="22860" rIns="27432" bIns="22860" rtlCol="0" anchor="ctr"/>
           <a:lstStyle/>
           <a:p>
-            <a:pPr algn="ctr"/>
-            <a:r>
-              <a:rPr sz="1100" b="0" i="1" dirty="0">
+            <a:r>
+              <a:rPr sz="2000">
                 <a:solidFill>
                   <a:srgbClr val="5C4826"/>
                 </a:solidFill>
               </a:rPr>
-              <a:t>staged rollout + demonstrated halt</a:t>
+              <a:t>staged rollout + proven halt</a:t>
             </a:r>
           </a:p>
         </p:txBody>
@@ -19909,8 +19857,8 @@
         </p:nvSpPr>
         <p:spPr>
           <a:xfrm>
-            <a:off x="4389120" y="4562856"/>
-            <a:ext cx="1828800" cy="713232"/>
+            <a:off x="4389120" y="4480560"/>
+            <a:ext cx="1828800" cy="585216"/>
           </a:xfrm>
           <a:prstGeom prst="rect">
             <a:avLst/>
@@ -19945,7 +19893,7 @@
           <a:p>
             <a:pPr algn="ctr"/>
             <a:r>
-              <a:rPr sz="1100" b="0" i="1" dirty="0">
+              <a:rPr sz="2000" b="0" i="1" dirty="0">
                 <a:solidFill>
                   <a:srgbClr val="5C4826"/>
                 </a:solidFill>
@@ -19963,8 +19911,8 @@
         </p:nvSpPr>
         <p:spPr>
           <a:xfrm>
-            <a:off x="6309360" y="4562856"/>
-            <a:ext cx="2286000" cy="713232"/>
+            <a:off x="6309360" y="4480560"/>
+            <a:ext cx="2286000" cy="585216"/>
           </a:xfrm>
           <a:prstGeom prst="rect">
             <a:avLst/>
@@ -19999,7 +19947,7 @@
           <a:p>
             <a:pPr algn="ctr"/>
             <a:r>
-              <a:rPr sz="1100" b="0" i="1" dirty="0">
+              <a:rPr sz="2000" b="0" i="1" dirty="0">
                 <a:solidFill>
                   <a:srgbClr val="5C4826"/>
                 </a:solidFill>
@@ -20017,8 +19965,8 @@
         </p:nvSpPr>
         <p:spPr>
           <a:xfrm>
-            <a:off x="548640" y="5358384"/>
-            <a:ext cx="8046720" cy="365760"/>
+            <a:off x="548640" y="5138928"/>
+            <a:ext cx="8046720" cy="566928"/>
           </a:xfrm>
           <a:prstGeom prst="rect">
             <a:avLst/>
@@ -20031,14 +19979,13 @@
           </a:bodyPr>
           <a:lstStyle/>
           <a:p>
-            <a:pPr algn="ctr"/>
-            <a:r>
-              <a:rPr sz="1200" b="1" i="1">
+            <a:r>
+              <a:rPr sz="2000">
                 <a:solidFill>
                   <a:srgbClr val="5C4826"/>
                 </a:solidFill>
               </a:rPr>
-              <a:t>How often will each mode occur? Occurrence stays ‘?’ — which modes warrant action even when their probabilities are unknown?</a:t>
+              <a:t>Occurrence stays '?'. Decide which modes warrant a control anyway.</a:t>
             </a:r>
           </a:p>
         </p:txBody>
@@ -20051,8 +19998,8 @@
         </p:nvSpPr>
         <p:spPr>
           <a:xfrm>
-            <a:off x="548640" y="1389888"/>
-            <a:ext cx="3931920" cy="219456"/>
+            <a:off x="548640" y="1463040"/>
+            <a:ext cx="3931920" cy="292608"/>
           </a:xfrm>
           <a:prstGeom prst="rect">
             <a:avLst/>
@@ -20060,19 +20007,18 @@
           <a:noFill/>
         </p:spPr>
         <p:txBody>
-          <a:bodyPr wrap="none" lIns="27432" tIns="22860" rIns="27432" bIns="22860" anchor="t">
+          <a:bodyPr wrap="square" lIns="27432" tIns="22860" rIns="27432" bIns="22860" anchor="t">
             <a:spAutoFit/>
           </a:bodyPr>
           <a:lstStyle/>
           <a:p>
-            <a:pPr algn="l"/>
-            <a:r>
-              <a:rPr sz="1200" b="1" i="1">
+            <a:r>
+              <a:rPr sz="2000">
                 <a:solidFill>
                   <a:srgbClr val="5C4826"/>
                 </a:solidFill>
               </a:rPr>
-              <a:t>1  Identify a plausible failure mode</a:t>
+              <a:t>1  Name a plausible failure mode</a:t>
             </a:r>
           </a:p>
         </p:txBody>
@@ -20085,8 +20031,8 @@
         </p:nvSpPr>
         <p:spPr>
           <a:xfrm>
-            <a:off x="4526280" y="1389888"/>
-            <a:ext cx="3931920" cy="219456"/>
+            <a:off x="4526280" y="1463040"/>
+            <a:ext cx="3931920" cy="292608"/>
           </a:xfrm>
           <a:prstGeom prst="rect">
             <a:avLst/>
@@ -20094,14 +20040,13 @@
           <a:noFill/>
         </p:spPr>
         <p:txBody>
-          <a:bodyPr wrap="none" lIns="27432" tIns="22860" rIns="27432" bIns="22860" anchor="t">
+          <a:bodyPr wrap="square" lIns="27432" tIns="22860" rIns="27432" bIns="22860" anchor="t">
             <a:spAutoFit/>
           </a:bodyPr>
           <a:lstStyle/>
           <a:p>
-            <a:pPr algn="l"/>
-            <a:r>
-              <a:rPr sz="1200" b="1" i="1">
+            <a:r>
+              <a:rPr sz="2000">
                 <a:solidFill>
                   <a:srgbClr val="5C4826"/>
                 </a:solidFill>
@@ -20119,8 +20064,8 @@
         </p:nvSpPr>
         <p:spPr>
           <a:xfrm>
-            <a:off x="548640" y="1627632"/>
-            <a:ext cx="3931920" cy="219456"/>
+            <a:off x="548640" y="1792224"/>
+            <a:ext cx="3931920" cy="292608"/>
           </a:xfrm>
           <a:prstGeom prst="rect">
             <a:avLst/>
@@ -20128,19 +20073,18 @@
           <a:noFill/>
         </p:spPr>
         <p:txBody>
-          <a:bodyPr wrap="none" lIns="27432" tIns="22860" rIns="27432" bIns="22860" anchor="t">
+          <a:bodyPr wrap="square" lIns="27432" tIns="22860" rIns="27432" bIns="22860" anchor="t">
             <a:spAutoFit/>
           </a:bodyPr>
           <a:lstStyle/>
           <a:p>
-            <a:pPr algn="l"/>
-            <a:r>
-              <a:rPr sz="1200" b="1" i="1">
+            <a:r>
+              <a:rPr sz="2000">
                 <a:solidFill>
                   <a:srgbClr val="5C4826"/>
                 </a:solidFill>
               </a:rPr>
-              <a:t>3  Identify existing or proposed controls</a:t>
+              <a:t>3  Name existing controls</a:t>
             </a:r>
           </a:p>
         </p:txBody>
@@ -20153,8 +20097,8 @@
         </p:nvSpPr>
         <p:spPr>
           <a:xfrm>
-            <a:off x="4526280" y="1627632"/>
-            <a:ext cx="3931920" cy="219456"/>
+            <a:off x="4526280" y="1792224"/>
+            <a:ext cx="3931920" cy="292608"/>
           </a:xfrm>
           <a:prstGeom prst="rect">
             <a:avLst/>
@@ -20162,19 +20106,18 @@
           <a:noFill/>
         </p:spPr>
         <p:txBody>
-          <a:bodyPr wrap="none" lIns="27432" tIns="22860" rIns="27432" bIns="22860" anchor="t">
+          <a:bodyPr wrap="square" lIns="27432" tIns="22860" rIns="27432" bIns="22860" anchor="t">
             <a:spAutoFit/>
           </a:bodyPr>
           <a:lstStyle/>
           <a:p>
-            <a:pPr algn="l"/>
-            <a:r>
-              <a:rPr sz="1200" b="1" i="1">
+            <a:r>
+              <a:rPr sz="2000">
                 <a:solidFill>
                   <a:srgbClr val="5C4826"/>
                 </a:solidFill>
               </a:rPr>
-              <a:t>4  Decide whether the remaining risk warrants action</a:t>
+              <a:t>4  Decide if risk warrants action</a:t>
             </a:r>
           </a:p>
         </p:txBody>
@@ -20330,8 +20273,8 @@
         </p:nvSpPr>
         <p:spPr>
           <a:xfrm>
-            <a:off x="548640" y="1005840"/>
-            <a:ext cx="2560320" cy="566928"/>
+            <a:off x="548640" y="969264"/>
+            <a:ext cx="2560320" cy="603504"/>
           </a:xfrm>
           <a:prstGeom prst="rect">
             <a:avLst/>
@@ -20364,7 +20307,7 @@
           <a:p>
             <a:pPr algn="ctr"/>
             <a:r>
-              <a:rPr sz="1200" b="1" i="0">
+              <a:rPr sz="2000" b="1" i="0">
                 <a:solidFill>
                   <a:srgbClr val="FFFFFF"/>
                 </a:solidFill>
@@ -20382,8 +20325,8 @@
         </p:nvSpPr>
         <p:spPr>
           <a:xfrm>
-            <a:off x="3383280" y="1005840"/>
-            <a:ext cx="5212080" cy="566928"/>
+            <a:off x="3383280" y="969264"/>
+            <a:ext cx="5212080" cy="603504"/>
           </a:xfrm>
           <a:prstGeom prst="rect">
             <a:avLst/>
@@ -20412,14 +20355,13 @@
           <a:bodyPr wrap="square" lIns="27432" tIns="22860" rIns="27432" bIns="22860" rtlCol="0" anchor="ctr"/>
           <a:lstStyle/>
           <a:p>
-            <a:pPr algn="l"/>
-            <a:r>
-              <a:rPr sz="1600" b="0" i="0">
+            <a:r>
+              <a:rPr sz="2000">
                 <a:solidFill>
                   <a:srgbClr val="555960"/>
                 </a:solidFill>
               </a:rPr>
-              <a:t>operates a Web Application Firewall (WAF): it inspects incoming web requests for attacks</a:t>
+              <a:t>operates a Web Application Firewall: it inspects web requests for attacks</a:t>
             </a:r>
           </a:p>
         </p:txBody>
@@ -20432,8 +20374,8 @@
         </p:nvSpPr>
         <p:spPr>
           <a:xfrm>
-            <a:off x="548640" y="1664208"/>
-            <a:ext cx="2560320" cy="566928"/>
+            <a:off x="548640" y="1645920"/>
+            <a:ext cx="2560320" cy="603504"/>
           </a:xfrm>
           <a:prstGeom prst="rect">
             <a:avLst/>
@@ -20466,7 +20408,7 @@
           <a:p>
             <a:pPr algn="ctr"/>
             <a:r>
-              <a:rPr sz="1200" b="1" i="0">
+              <a:rPr sz="2000" b="1" i="0">
                 <a:solidFill>
                   <a:srgbClr val="FFFFFF"/>
                 </a:solidFill>
@@ -20484,8 +20426,8 @@
         </p:nvSpPr>
         <p:spPr>
           <a:xfrm>
-            <a:off x="3383280" y="1664208"/>
-            <a:ext cx="5212080" cy="566928"/>
+            <a:off x="3383280" y="1645920"/>
+            <a:ext cx="5212080" cy="603504"/>
           </a:xfrm>
           <a:prstGeom prst="rect">
             <a:avLst/>
@@ -20514,14 +20456,13 @@
           <a:bodyPr wrap="square" lIns="27432" tIns="22860" rIns="27432" bIns="22860" rtlCol="0" anchor="ctr"/>
           <a:lstStyle/>
           <a:p>
-            <a:pPr algn="l"/>
-            <a:r>
-              <a:rPr sz="1600" b="0" i="0">
+            <a:r>
+              <a:rPr sz="2000">
                 <a:solidFill>
                   <a:srgbClr val="555960"/>
                 </a:solidFill>
               </a:rPr>
-              <a:t>new detection rules deploy without a software release — and propagate globally within seconds</a:t>
+              <a:t>new detection rules deploy without a software release, and reach every edge server</a:t>
             </a:r>
           </a:p>
         </p:txBody>
@@ -20535,7 +20476,7 @@
         <p:spPr>
           <a:xfrm>
             <a:off x="548640" y="2322576"/>
-            <a:ext cx="2560320" cy="566928"/>
+            <a:ext cx="2560320" cy="603504"/>
           </a:xfrm>
           <a:prstGeom prst="rect">
             <a:avLst/>
@@ -20568,7 +20509,7 @@
           <a:p>
             <a:pPr algn="ctr"/>
             <a:r>
-              <a:rPr sz="1200" b="1" i="0" dirty="0">
+              <a:rPr sz="2000" b="1" i="0" dirty="0">
                 <a:solidFill>
                   <a:srgbClr val="FFFFFF"/>
                 </a:solidFill>
@@ -20587,7 +20528,7 @@
         <p:spPr>
           <a:xfrm>
             <a:off x="3383280" y="2322576"/>
-            <a:ext cx="5212080" cy="566928"/>
+            <a:ext cx="5212080" cy="603504"/>
           </a:xfrm>
           <a:prstGeom prst="rect">
             <a:avLst/>
@@ -20616,9 +20557,8 @@
           <a:bodyPr wrap="square" lIns="27432" tIns="22860" rIns="27432" bIns="22860" rtlCol="0" anchor="ctr"/>
           <a:lstStyle/>
           <a:p>
-            <a:pPr algn="l"/>
-            <a:r>
-              <a:rPr sz="1600" b="0" i="0">
+            <a:r>
+              <a:rPr sz="2000">
                 <a:solidFill>
                   <a:srgbClr val="555960"/>
                 </a:solidFill>
@@ -20636,8 +20576,8 @@
         </p:nvSpPr>
         <p:spPr>
           <a:xfrm>
-            <a:off x="365760" y="3072384"/>
-            <a:ext cx="1645920" cy="256032"/>
+            <a:off x="365760" y="3035808"/>
+            <a:ext cx="1645920" cy="310896"/>
           </a:xfrm>
           <a:prstGeom prst="rect">
             <a:avLst/>
@@ -20668,7 +20608,7 @@
           <a:p>
             <a:pPr algn="ctr"/>
             <a:r>
-              <a:rPr lang="en-US" sz="1200" b="1" i="0" dirty="0">
+              <a:rPr lang="en-US" sz="2000" b="1" i="0" dirty="0">
                 <a:solidFill>
                   <a:schemeClr val="bg1"/>
                 </a:solidFill>
@@ -20691,8 +20631,8 @@
         </p:nvSpPr>
         <p:spPr>
           <a:xfrm>
-            <a:off x="2103120" y="3072384"/>
-            <a:ext cx="2194560" cy="256032"/>
+            <a:off x="2103120" y="3035808"/>
+            <a:ext cx="2194560" cy="310896"/>
           </a:xfrm>
           <a:prstGeom prst="rect">
             <a:avLst/>
@@ -20723,7 +20663,7 @@
           <a:p>
             <a:pPr algn="ctr"/>
             <a:r>
-              <a:rPr lang="en-US" sz="1200" b="1" i="0" dirty="0">
+              <a:rPr lang="en-US" sz="2000" b="1" i="0" dirty="0">
                 <a:solidFill>
                   <a:schemeClr val="bg1"/>
                 </a:solidFill>
@@ -20746,8 +20686,8 @@
         </p:nvSpPr>
         <p:spPr>
           <a:xfrm>
-            <a:off x="4389120" y="3072384"/>
-            <a:ext cx="2011680" cy="256032"/>
+            <a:off x="4389120" y="3035808"/>
+            <a:ext cx="2011680" cy="310896"/>
           </a:xfrm>
           <a:prstGeom prst="rect">
             <a:avLst/>
@@ -20778,7 +20718,7 @@
           <a:p>
             <a:pPr algn="ctr"/>
             <a:r>
-              <a:rPr lang="en-US" sz="1200" b="1" i="0" dirty="0">
+              <a:rPr lang="en-US" sz="2000" b="1" i="0" dirty="0">
                 <a:solidFill>
                   <a:schemeClr val="bg1"/>
                 </a:solidFill>
@@ -20801,8 +20741,8 @@
         </p:nvSpPr>
         <p:spPr>
           <a:xfrm>
-            <a:off x="6492240" y="3072384"/>
-            <a:ext cx="2103120" cy="256032"/>
+            <a:off x="6492240" y="3035808"/>
+            <a:ext cx="2103120" cy="310896"/>
           </a:xfrm>
           <a:prstGeom prst="rect">
             <a:avLst/>
@@ -20833,7 +20773,7 @@
           <a:p>
             <a:pPr algn="ctr"/>
             <a:r>
-              <a:rPr lang="en-US" sz="1200" b="1" i="0" dirty="0">
+              <a:rPr lang="en-US" sz="2000" b="1" i="0" dirty="0">
                 <a:solidFill>
                   <a:schemeClr val="bg1"/>
                 </a:solidFill>
@@ -20856,7 +20796,7 @@
         </p:nvSpPr>
         <p:spPr>
           <a:xfrm>
-            <a:off x="365760" y="3401568"/>
+            <a:off x="365760" y="3419856"/>
             <a:ext cx="1645920" cy="603504"/>
           </a:xfrm>
           <a:prstGeom prst="rect">
@@ -20890,7 +20830,7 @@
           <a:p>
             <a:pPr algn="ctr"/>
             <a:r>
-              <a:rPr sz="1200" b="1" i="0">
+              <a:rPr sz="2000" b="1" i="0">
                 <a:solidFill>
                   <a:srgbClr val="FFFFFF"/>
                 </a:solidFill>
@@ -20908,7 +20848,7 @@
         </p:nvSpPr>
         <p:spPr>
           <a:xfrm>
-            <a:off x="365760" y="4059936"/>
+            <a:off x="365760" y="4078224"/>
             <a:ext cx="1645920" cy="603504"/>
           </a:xfrm>
           <a:prstGeom prst="rect">
@@ -20942,7 +20882,7 @@
           <a:p>
             <a:pPr algn="ctr"/>
             <a:r>
-              <a:rPr sz="1200" b="1" i="0">
+              <a:rPr sz="2000" b="1" i="0">
                 <a:solidFill>
                   <a:srgbClr val="FFFFFF"/>
                 </a:solidFill>
@@ -20960,7 +20900,7 @@
         </p:nvSpPr>
         <p:spPr>
           <a:xfrm>
-            <a:off x="365760" y="4718304"/>
+            <a:off x="365760" y="4736592"/>
             <a:ext cx="1645920" cy="603504"/>
           </a:xfrm>
           <a:prstGeom prst="rect">
@@ -20994,7 +20934,7 @@
           <a:p>
             <a:pPr algn="ctr"/>
             <a:r>
-              <a:rPr sz="1200" b="1" i="0">
+              <a:rPr sz="2000" b="1" i="0">
                 <a:solidFill>
                   <a:srgbClr val="FFFFFF"/>
                 </a:solidFill>
@@ -21012,7 +20952,7 @@
         </p:nvSpPr>
         <p:spPr>
           <a:xfrm>
-            <a:off x="2103120" y="3401568"/>
+            <a:off x="2103120" y="3419856"/>
             <a:ext cx="2194560" cy="603504"/>
           </a:xfrm>
           <a:prstGeom prst="rect">
@@ -21059,7 +20999,7 @@
         </p:nvSpPr>
         <p:spPr>
           <a:xfrm>
-            <a:off x="4389120" y="3401568"/>
+            <a:off x="4389120" y="3419856"/>
             <a:ext cx="2011680" cy="603504"/>
           </a:xfrm>
           <a:prstGeom prst="rect">
@@ -21106,7 +21046,7 @@
         </p:nvSpPr>
         <p:spPr>
           <a:xfrm>
-            <a:off x="6492240" y="3401568"/>
+            <a:off x="6492240" y="3419856"/>
             <a:ext cx="2103120" cy="603504"/>
           </a:xfrm>
           <a:prstGeom prst="rect">
@@ -21153,7 +21093,7 @@
         </p:nvSpPr>
         <p:spPr>
           <a:xfrm>
-            <a:off x="2103120" y="4059936"/>
+            <a:off x="2103120" y="4078224"/>
             <a:ext cx="2194560" cy="603504"/>
           </a:xfrm>
           <a:prstGeom prst="rect">
@@ -21200,7 +21140,7 @@
         </p:nvSpPr>
         <p:spPr>
           <a:xfrm>
-            <a:off x="4389120" y="4059936"/>
+            <a:off x="4389120" y="4078224"/>
             <a:ext cx="2011680" cy="603504"/>
           </a:xfrm>
           <a:prstGeom prst="rect">
@@ -21247,7 +21187,7 @@
         </p:nvSpPr>
         <p:spPr>
           <a:xfrm>
-            <a:off x="6492240" y="4059936"/>
+            <a:off x="6492240" y="4078224"/>
             <a:ext cx="2103120" cy="603504"/>
           </a:xfrm>
           <a:prstGeom prst="rect">
@@ -21294,7 +21234,7 @@
         </p:nvSpPr>
         <p:spPr>
           <a:xfrm>
-            <a:off x="2103120" y="4718304"/>
+            <a:off x="2103120" y="4736592"/>
             <a:ext cx="2194560" cy="603504"/>
           </a:xfrm>
           <a:prstGeom prst="rect">
@@ -21341,7 +21281,7 @@
         </p:nvSpPr>
         <p:spPr>
           <a:xfrm>
-            <a:off x="4389120" y="4718304"/>
+            <a:off x="4389120" y="4736592"/>
             <a:ext cx="2011680" cy="603504"/>
           </a:xfrm>
           <a:prstGeom prst="rect">
@@ -21388,7 +21328,7 @@
         </p:nvSpPr>
         <p:spPr>
           <a:xfrm>
-            <a:off x="6492240" y="4718304"/>
+            <a:off x="6492240" y="4736592"/>
             <a:ext cx="2103120" cy="603504"/>
           </a:xfrm>
           <a:prstGeom prst="rect">
@@ -23493,7 +23433,7 @@
             <a:off x="2468880" y="3291840"/>
             <a:ext cx="2103120" cy="868679"/>
           </a:xfrm>
-          <a:prstGeom prst="line">
+          <a:prstGeom prst="bentConnector3">
             <a:avLst/>
           </a:prstGeom>
           <a:ln w="28575">
@@ -23529,7 +23469,7 @@
             <a:off x="4572000" y="3291840"/>
             <a:ext cx="2103120" cy="868679"/>
           </a:xfrm>
-          <a:prstGeom prst="line">
+          <a:prstGeom prst="bentConnector3">
             <a:avLst/>
           </a:prstGeom>
           <a:ln w="28575">
